--- a/Fraud in 2026 - Full Results.pptx
+++ b/Fraud in 2026 - Full Results.pptx
@@ -2518,7 +2518,7 @@
           </c:spPr>
           <c:invertIfNegative val="0"/>
           <c:dLbls>
-            <c:numFmt formatCode="0.0&quot;%&quot;" sourceLinked="0"/>
+            <c:numFmt formatCode="0&quot;%&quot;" sourceLinked="0"/>
             <c:txPr>
               <a:bodyPr/>
               <a:lstStyle/>
@@ -2557,10 +2557,10 @@
                     <c:v>Payment innovation (RTP, stablecoins, agentic payments)</c:v>
                   </c:pt>
                   <c:pt idx="3">
-                    <c:v>AML modernization initiatives</c:v>
+                    <c:v>Liability &amp; reimbursement changes</c:v>
                   </c:pt>
                   <c:pt idx="4">
-                    <c:v>Liability &amp; reimbursement changes</c:v>
+                    <c:v>AML modernization initiatives</c:v>
                   </c:pt>
                   <c:pt idx="5">
                     <c:v>Open Banking / consumer-driven initiatives</c:v>
@@ -2576,29 +2576,29 @@
                 <c:formatCode>General</c:formatCode>
                 <c:ptCount val="6"/>
                 <c:pt idx="0">
-                  <c:v>25</c:v>
+                  <c:v>71</c:v>
                 </c:pt>
                 <c:pt idx="1">
-                  <c:v>21.8</c:v>
+                  <c:v>66</c:v>
                 </c:pt>
                 <c:pt idx="2">
-                  <c:v>20.5</c:v>
+                  <c:v>65</c:v>
                 </c:pt>
                 <c:pt idx="3">
-                  <c:v>11.2</c:v>
+                  <c:v>36</c:v>
                 </c:pt>
                 <c:pt idx="4">
-                  <c:v>10.8</c:v>
+                  <c:v>33</c:v>
                 </c:pt>
                 <c:pt idx="5">
-                  <c:v>10.7</c:v>
+                  <c:v>29</c:v>
                 </c:pt>
               </c:numCache>
             </c:numRef>
           </c:val>
         </c:ser>
         <c:dLbls>
-          <c:numFmt formatCode="0.0&quot;%&quot;" sourceLinked="0"/>
+          <c:numFmt formatCode="0&quot;%&quot;" sourceLinked="0"/>
           <c:txPr>
             <a:bodyPr/>
             <a:lstStyle/>
@@ -3123,7 +3123,7 @@
           </c:spPr>
           <c:invertIfNegative val="0"/>
           <c:dLbls>
-            <c:numFmt formatCode="0.0&quot;%&quot;" sourceLinked="0"/>
+            <c:numFmt formatCode="0&quot;%&quot;" sourceLinked="0"/>
             <c:txPr>
               <a:bodyPr/>
               <a:lstStyle/>
@@ -3181,29 +3181,29 @@
                 <c:formatCode>General</c:formatCode>
                 <c:ptCount val="6"/>
                 <c:pt idx="0">
-                  <c:v>25</c:v>
+                  <c:v>70</c:v>
                 </c:pt>
                 <c:pt idx="1">
-                  <c:v>20.8</c:v>
+                  <c:v>64</c:v>
                 </c:pt>
                 <c:pt idx="2">
-                  <c:v>18.7</c:v>
+                  <c:v>53</c:v>
                 </c:pt>
                 <c:pt idx="3">
-                  <c:v>17.3</c:v>
+                  <c:v>52</c:v>
                 </c:pt>
                 <c:pt idx="4">
-                  <c:v>12.8</c:v>
+                  <c:v>43</c:v>
                 </c:pt>
                 <c:pt idx="5">
-                  <c:v>4.3</c:v>
+                  <c:v>15</c:v>
                 </c:pt>
               </c:numCache>
             </c:numRef>
           </c:val>
         </c:ser>
         <c:dLbls>
-          <c:numFmt formatCode="0.0&quot;%&quot;" sourceLinked="0"/>
+          <c:numFmt formatCode="0&quot;%&quot;" sourceLinked="0"/>
           <c:txPr>
             <a:bodyPr/>
             <a:lstStyle/>
@@ -3368,7 +3368,7 @@
           </c:spPr>
           <c:invertIfNegative val="0"/>
           <c:dLbls>
-            <c:numFmt formatCode="0.0&quot;%&quot;" sourceLinked="0"/>
+            <c:numFmt formatCode="0&quot;%&quot;" sourceLinked="0"/>
             <c:txPr>
               <a:bodyPr/>
               <a:lstStyle/>
@@ -3426,29 +3426,29 @@
                 <c:formatCode>General</c:formatCode>
                 <c:ptCount val="6"/>
                 <c:pt idx="0">
-                  <c:v>28</c:v>
+                  <c:v>73</c:v>
                 </c:pt>
                 <c:pt idx="1">
-                  <c:v>24.7</c:v>
+                  <c:v>73</c:v>
                 </c:pt>
                 <c:pt idx="2">
-                  <c:v>17.1</c:v>
+                  <c:v>48</c:v>
                 </c:pt>
                 <c:pt idx="3">
-                  <c:v>14.4</c:v>
+                  <c:v>47</c:v>
                 </c:pt>
                 <c:pt idx="4">
-                  <c:v>10.7</c:v>
+                  <c:v>40</c:v>
                 </c:pt>
                 <c:pt idx="5">
-                  <c:v>3.8</c:v>
+                  <c:v>15</c:v>
                 </c:pt>
               </c:numCache>
             </c:numRef>
           </c:val>
         </c:ser>
         <c:dLbls>
-          <c:numFmt formatCode="0.0&quot;%&quot;" sourceLinked="0"/>
+          <c:numFmt formatCode="0&quot;%&quot;" sourceLinked="0"/>
           <c:txPr>
             <a:bodyPr/>
             <a:lstStyle/>
@@ -3613,7 +3613,7 @@
           </c:spPr>
           <c:invertIfNegative val="0"/>
           <c:dLbls>
-            <c:numFmt formatCode="0.0&quot;%&quot;" sourceLinked="0"/>
+            <c:numFmt formatCode="0&quot;%&quot;" sourceLinked="0"/>
             <c:txPr>
               <a:bodyPr/>
               <a:lstStyle/>
@@ -3671,29 +3671,29 @@
                 <c:formatCode>General</c:formatCode>
                 <c:ptCount val="6"/>
                 <c:pt idx="0">
-                  <c:v>26</c:v>
+                  <c:v>72</c:v>
                 </c:pt>
                 <c:pt idx="1">
-                  <c:v>23.3</c:v>
+                  <c:v>64</c:v>
                 </c:pt>
                 <c:pt idx="2">
-                  <c:v>19.3</c:v>
+                  <c:v>60</c:v>
                 </c:pt>
                 <c:pt idx="3">
-                  <c:v>16</c:v>
+                  <c:v>52</c:v>
                 </c:pt>
                 <c:pt idx="4">
-                  <c:v>9.3</c:v>
+                  <c:v>36</c:v>
                 </c:pt>
                 <c:pt idx="5">
-                  <c:v>6</c:v>
+                  <c:v>16</c:v>
                 </c:pt>
               </c:numCache>
             </c:numRef>
           </c:val>
         </c:ser>
         <c:dLbls>
-          <c:numFmt formatCode="0.0&quot;%&quot;" sourceLinked="0"/>
+          <c:numFmt formatCode="0&quot;%&quot;" sourceLinked="0"/>
           <c:txPr>
             <a:bodyPr/>
             <a:lstStyle/>
@@ -4427,7 +4427,7 @@
           </c:spPr>
           <c:invertIfNegative val="0"/>
           <c:dLbls>
-            <c:numFmt formatCode="0.0&quot;%&quot;" sourceLinked="0"/>
+            <c:numFmt formatCode="0&quot;%&quot;" sourceLinked="0"/>
             <c:txPr>
               <a:bodyPr/>
               <a:lstStyle/>
@@ -4457,10 +4457,10 @@
                 <c:ptCount val="6"/>
                 <c:lvl>
                   <c:pt idx="0">
-                    <c:v>Legal, privacy or regulatory constraints</c:v>
+                    <c:v>Limited data standardization &amp; poor quality</c:v>
                   </c:pt>
                   <c:pt idx="1">
-                    <c:v>Limited data standardization &amp; poor quality</c:v>
+                    <c:v>Legal, privacy or regulatory constraints</c:v>
                   </c:pt>
                   <c:pt idx="2">
                     <c:v>Lack of external industry participation</c:v>
@@ -4485,29 +4485,29 @@
                 <c:formatCode>General</c:formatCode>
                 <c:ptCount val="6"/>
                 <c:pt idx="0">
-                  <c:v>28.7</c:v>
+                  <c:v>77</c:v>
                 </c:pt>
                 <c:pt idx="1">
-                  <c:v>25</c:v>
+                  <c:v>73</c:v>
                 </c:pt>
                 <c:pt idx="2">
-                  <c:v>19.3</c:v>
+                  <c:v>60</c:v>
                 </c:pt>
                 <c:pt idx="3">
-                  <c:v>10.3</c:v>
+                  <c:v>36</c:v>
                 </c:pt>
                 <c:pt idx="4">
-                  <c:v>9</c:v>
+                  <c:v>27</c:v>
                 </c:pt>
                 <c:pt idx="5">
-                  <c:v>7.2</c:v>
+                  <c:v>26</c:v>
                 </c:pt>
               </c:numCache>
             </c:numRef>
           </c:val>
         </c:ser>
         <c:dLbls>
-          <c:numFmt formatCode="0.0&quot;%&quot;" sourceLinked="0"/>
+          <c:numFmt formatCode="0&quot;%&quot;" sourceLinked="0"/>
           <c:txPr>
             <a:bodyPr/>
             <a:lstStyle/>
@@ -8169,7 +8169,7 @@
                 <a:ea typeface="Calibri" pitchFamily="34" charset="-122"/>
                 <a:cs typeface="Calibri" pitchFamily="34" charset="-120"/>
               </a:rPr>
-              <a:t>What's blocking sharing is structural — legal rules and messy data — not unwillingness.</a:t>
+              <a:t>What's blocking sharing is structural — messy, inconsistent data even more than legal rules — not unwillingness.</a:t>
             </a:r>
             <a:endParaRPr lang="en-US" sz="1350" dirty="0"/>
           </a:p>
@@ -8371,7 +8371,7 @@
                 <a:ea typeface="Calibri" pitchFamily="34" charset="-122"/>
                 <a:cs typeface="Calibri" pitchFamily="34" charset="-120"/>
               </a:rPr>
-              <a:t>Ranked top 3, weighted Borda-style (1st=3pts, 2nd=2pts, 3rd=1pt), shown as % of the 600-point pool.  </a:t>
+              <a:t>Ranked top 3 — shown as % of respondents who placed the option anywhere in their top 3 (not mutually exclusive; bars don't sum to 100%).  </a:t>
             </a:r>
             <a:pPr algn="l" indent="0" marL="0">
               <a:lnSpc>
@@ -13601,7 +13601,7 @@
                 <a:ea typeface="Calibri" pitchFamily="34" charset="-122"/>
                 <a:cs typeface="Calibri" pitchFamily="34" charset="-120"/>
               </a:rPr>
-              <a:t>Ranked top 3, weighted Borda-style (1st=3pts, 2nd=2pts, 3rd=1pt), shown as % of the 600-point pool.  </a:t>
+              <a:t>Ranked top 3 — shown as % of respondents who placed the option anywhere in their top 3 (not mutually exclusive; bars don't sum to 100%).  </a:t>
             </a:r>
             <a:pPr algn="l" indent="0" marL="0">
               <a:lnSpc>
@@ -16132,7 +16132,7 @@
                 <a:ea typeface="Calibri" pitchFamily="34" charset="-122"/>
                 <a:cs typeface="Calibri" pitchFamily="34" charset="-120"/>
               </a:rPr>
-              <a:t>Ranked top 3, weighted Borda-style (1st=3pts, 2nd=2pts, 3rd=1pt), shown as % of the 600-point pool.  </a:t>
+              <a:t>Ranked top 3 — shown as % of respondents who placed the option anywhere in their top 3 (not mutually exclusive; bars don't sum to 100%).  </a:t>
             </a:r>
             <a:pPr algn="l" indent="0" marL="0">
               <a:lnSpc>
@@ -16449,7 +16449,7 @@
                 <a:ea typeface="Calibri" pitchFamily="34" charset="-122"/>
                 <a:cs typeface="Calibri" pitchFamily="34" charset="-120"/>
               </a:rPr>
-              <a:t>The overall #1 area masks a real split: Banking's top exposure is onboarding/KYC, but Insurance's is contact center and claims.</a:t>
+              <a:t>The overall #1 area masks a real split: Banking's top exposure is an exact tie between onboarding/KYC and payment/wire, while Insurance's is contact center and claims.</a:t>
             </a:r>
             <a:endParaRPr lang="en-US" sz="1350" dirty="0"/>
           </a:p>
@@ -16531,7 +16531,7 @@
                 <a:ea typeface="Calibri" pitchFamily="34" charset="-122"/>
                 <a:cs typeface="Calibri" pitchFamily="34" charset="-120"/>
               </a:rPr>
-              <a:t>“Which area of your organization has experienced the greatest increase in vulnerability to fraud enabled by deepfakes and other advanced or frontier AI capabilities over the past 12 months? (Banking vs. Insurance, weighted score)”</a:t>
+              <a:t>“Which area of your organization has experienced the greatest increase in vulnerability to fraud enabled by deepfakes and other advanced or frontier AI capabilities over the past 12 months? (Banking vs. Insurance, % selecting in top 3)”</a:t>
             </a:r>
             <a:endParaRPr lang="en-US" sz="1000" dirty="0"/>
           </a:p>
@@ -16744,7 +16744,7 @@
                 <a:ea typeface="Calibri" pitchFamily="34" charset="-122"/>
                 <a:cs typeface="Calibri" pitchFamily="34" charset="-120"/>
               </a:rPr>
-              <a:t>Each panel is sorted independently by its own weighted score. Values are % of that segment's own point pool (Banking = 450 pts, Insurance = 150 pts) — segments are not comparable in absolute points, only in rank order and share of their own pool.</a:t>
+              <a:t>Each panel is sorted independently. Values are % of that segment's respondents who placed the option anywhere in their top 3 (not mutually exclusive). Banking n=75, Insurance n=25 — bases differ, so compare rank order and share within each segment, not raw counts. Banking's top two areas are tied at 73%.</a:t>
             </a:r>
             <a:endParaRPr lang="en-US" sz="900" dirty="0"/>
           </a:p>

--- a/Fraud in 2026 - Full Results.pptx
+++ b/Fraud in 2026 - Full Results.pptx
@@ -29,9 +29,10 @@
     <p:sldId id="277" r:id="rId23"/>
     <p:sldId id="278" r:id="rId24"/>
     <p:sldId id="279" r:id="rId25"/>
+    <p:sldId id="280" r:id="rId26"/>
   </p:sldIdLst>
   <p:notesMasterIdLst>
-    <p:notesMasterId r:id="rId26"/>
+    <p:notesMasterId r:id="rId27"/>
   </p:notesMasterIdLst>
   <p:sldSz cx="12192000" cy="6858000"/>
   <p:notesSz cx="6858000" cy="12192000"/>
@@ -511,6 +512,251 @@
               <c:strCache>
                 <c:ptCount val="1"/>
                 <c:pt idx="0">
+                  <c:v>Government Action With the Greatest Impact on Info Sharing</c:v>
+                </c:pt>
+              </c:strCache>
+            </c:strRef>
+          </c:tx>
+          <c:spPr>
+            <a:solidFill>
+              <a:srgbClr val="86BC25"/>
+            </a:solidFill>
+            <a:effectLst/>
+          </c:spPr>
+          <c:invertIfNegative val="0"/>
+          <c:dLbls>
+            <c:numFmt formatCode="0&quot;%&quot;" sourceLinked="0"/>
+            <c:txPr>
+              <a:bodyPr/>
+              <a:lstStyle/>
+              <a:p>
+                <a:pPr>
+                  <a:defRPr b="0" i="0" strike="noStrike" sz="1000" u="none">
+                    <a:solidFill>
+                      <a:srgbClr val="000000"/>
+                    </a:solidFill>
+                    <a:latin typeface="Arial"/>
+                  </a:defRPr>
+                </a:pPr>
+              </a:p>
+            </c:txPr>
+            <c:showLegendKey val="0"/>
+            <c:showVal val="1"/>
+            <c:showCatName val="0"/>
+            <c:showSerName val="0"/>
+            <c:showPercent val="0"/>
+            <c:showBubbleSize val="0"/>
+            <c:showLeaderLines val="0"/>
+          </c:dLbls>
+          <c:cat>
+            <c:multiLvlStrRef>
+              <c:f>Sheet1!$A$2:$A$7</c:f>
+              <c:multiLvlStrCache>
+                <c:ptCount val="6"/>
+                <c:lvl>
+                  <c:pt idx="0">
+                    <c:v>Centralized fraud info-sharing platform / utility</c:v>
+                  </c:pt>
+                  <c:pt idx="1">
+                    <c:v>Clearer legal &amp; regulatory frameworks</c:v>
+                  </c:pt>
+                  <c:pt idx="2">
+                    <c:v>Common data standards &amp; definitions</c:v>
+                  </c:pt>
+                  <c:pt idx="3">
+                    <c:v>Greater public-private collaboration</c:v>
+                  </c:pt>
+                  <c:pt idx="4">
+                    <c:v>Prioritized industry use cases</c:v>
+                  </c:pt>
+                  <c:pt idx="5">
+                    <c:v>Funding or incentives</c:v>
+                  </c:pt>
+                </c:lvl>
+              </c:multiLvlStrCache>
+            </c:multiLvlStrRef>
+          </c:cat>
+          <c:val>
+            <c:numRef>
+              <c:f>Sheet1!$B$2:$B$7</c:f>
+              <c:numCache>
+                <c:formatCode>General</c:formatCode>
+                <c:ptCount val="6"/>
+                <c:pt idx="0">
+                  <c:v>35</c:v>
+                </c:pt>
+                <c:pt idx="1">
+                  <c:v>26</c:v>
+                </c:pt>
+                <c:pt idx="2">
+                  <c:v>14</c:v>
+                </c:pt>
+                <c:pt idx="3">
+                  <c:v>13</c:v>
+                </c:pt>
+                <c:pt idx="4">
+                  <c:v>9</c:v>
+                </c:pt>
+                <c:pt idx="5">
+                  <c:v>3</c:v>
+                </c:pt>
+              </c:numCache>
+            </c:numRef>
+          </c:val>
+        </c:ser>
+        <c:dLbls>
+          <c:numFmt formatCode="0&quot;%&quot;" sourceLinked="0"/>
+          <c:txPr>
+            <a:bodyPr/>
+            <a:lstStyle/>
+            <a:p>
+              <a:pPr>
+                <a:defRPr b="0" i="0" strike="noStrike" sz="1000" u="none">
+                  <a:solidFill>
+                    <a:srgbClr val="000000"/>
+                  </a:solidFill>
+                  <a:latin typeface="Arial"/>
+                </a:defRPr>
+              </a:pPr>
+            </a:p>
+          </c:txPr>
+          <c:showLegendKey val="0"/>
+          <c:showVal val="1"/>
+          <c:showCatName val="0"/>
+          <c:showSerName val="0"/>
+          <c:showPercent val="0"/>
+          <c:showBubbleSize val="0"/>
+          <c:showLeaderLines val="0"/>
+        </c:dLbls>
+        <c:gapWidth val="40"/>
+        <c:overlap val="0"/>
+        <c:axId val="2094734554"/>
+        <c:axId val="2094734552"/>
+        <c:axId val="2094734556"/>
+      </c:barChart>
+      <c:catAx>
+        <c:axId val="2094734554"/>
+        <c:scaling>
+          <c:orientation val="minMax"/>
+        </c:scaling>
+        <c:delete val="0"/>
+        <c:axPos val="l"/>
+        <c:numFmt formatCode="General" sourceLinked="1"/>
+        <c:majorTickMark val="out"/>
+        <c:minorTickMark val="none"/>
+        <c:tickLblPos val="nextTo"/>
+        <c:spPr>
+          <a:ln w="12700" cap="flat">
+            <a:noFill/>
+            <a:prstDash val="solid"/>
+            <a:round/>
+          </a:ln>
+        </c:spPr>
+        <c:txPr>
+          <a:bodyPr/>
+          <a:lstStyle/>
+          <a:p>
+            <a:pPr>
+              <a:defRPr sz="1000" b="0" i="0" u="none" strike="noStrike">
+                <a:solidFill>
+                  <a:srgbClr val="53565A"/>
+                </a:solidFill>
+                <a:latin typeface="Arial"/>
+              </a:defRPr>
+            </a:pPr>
+            <a:endParaRPr lang="en-US"/>
+          </a:p>
+        </c:txPr>
+        <c:crossAx val="2094734552"/>
+        <c:crosses val="autoZero"/>
+        <c:auto val="1"/>
+        <c:lblAlgn val="ctr"/>
+        <c:noMultiLvlLbl val="1"/>
+      </c:catAx>
+      <c:valAx>
+        <c:axId val="2094734552"/>
+        <c:scaling>
+          <c:orientation val="minMax"/>
+        </c:scaling>
+        <c:delete val="1"/>
+        <c:axPos val="b"/>
+        <c:numFmt formatCode="General" sourceLinked="0"/>
+        <c:majorTickMark val="out"/>
+        <c:minorTickMark val="none"/>
+        <c:tickLblPos val="low"/>
+        <c:spPr>
+          <a:ln w="12700" cap="flat">
+            <a:noFill/>
+            <a:prstDash val="solid"/>
+            <a:round/>
+          </a:ln>
+        </c:spPr>
+        <c:txPr>
+          <a:bodyPr/>
+          <a:lstStyle/>
+          <a:p>
+            <a:pPr>
+              <a:defRPr sz="1200" b="0" i="0" u="none" strike="noStrike">
+                <a:solidFill>
+                  <a:srgbClr val="000000"/>
+                </a:solidFill>
+                <a:latin typeface="Arial"/>
+              </a:defRPr>
+            </a:pPr>
+            <a:endParaRPr lang="en-US"/>
+          </a:p>
+        </c:txPr>
+        <c:crossAx val="2094734554"/>
+        <c:crosses val="autoZero"/>
+        <c:crossBetween val="between"/>
+      </c:valAx>
+      <c:spPr>
+        <a:solidFill>
+          <a:srgbClr val="FFFFFF"/>
+        </a:solidFill>
+        <a:ln>
+          <a:noFill/>
+        </a:ln>
+        <a:effectLst/>
+      </c:spPr>
+    </c:plotArea>
+    <c:plotVisOnly val="1"/>
+    <c:dispBlanksAs val="span"/>
+  </c:chart>
+  <c:spPr>
+    <a:noFill/>
+    <a:ln>
+      <a:noFill/>
+    </a:ln>
+    <a:effectLst/>
+  </c:spPr>
+  <c:externalData r:id="rId1">
+    <c:autoUpdate val="0"/>
+  </c:externalData>
+</c:chartSpace>
+</file>
+
+<file path=ppt/charts/chart11.xml><?xml version="1.0" encoding="utf-8"?>
+<c:chartSpace xmlns:c="http://schemas.openxmlformats.org/drawingml/2006/chart" xmlns:a="http://schemas.openxmlformats.org/drawingml/2006/main" xmlns:r="http://schemas.openxmlformats.org/officeDocument/2006/relationships">
+  <c:date1904 val="0"/>
+  <c:roundedCorners val="1"/>
+  <c:chart>
+    <c:autoTitleDeleted val="1"/>
+    <c:plotArea>
+      <c:layout/>
+      <c:barChart>
+        <c:barDir val="bar"/>
+        <c:grouping val="clustered"/>
+        <c:varyColors val="0"/>
+        <c:ser>
+          <c:idx val="0"/>
+          <c:order val="0"/>
+          <c:tx>
+            <c:strRef>
+              <c:f>Sheet1!$B$1</c:f>
+              <c:strCache>
+                <c:ptCount val="1"/>
+                <c:pt idx="0">
                   <c:v>Banking</c:v>
                 </c:pt>
               </c:strCache>
@@ -735,7 +981,7 @@
 </c:chartSpace>
 </file>
 
-<file path=ppt/charts/chart11.xml><?xml version="1.0" encoding="utf-8"?>
+<file path=ppt/charts/chart12.xml><?xml version="1.0" encoding="utf-8"?>
 <c:chartSpace xmlns:c="http://schemas.openxmlformats.org/drawingml/2006/chart" xmlns:a="http://schemas.openxmlformats.org/drawingml/2006/main" xmlns:r="http://schemas.openxmlformats.org/officeDocument/2006/relationships">
   <c:date1904 val="0"/>
   <c:roundedCorners val="1"/>
@@ -980,7 +1226,7 @@
 </c:chartSpace>
 </file>
 
-<file path=ppt/charts/chart12.xml><?xml version="1.0" encoding="utf-8"?>
+<file path=ppt/charts/chart13.xml><?xml version="1.0" encoding="utf-8"?>
 <c:chartSpace xmlns:c="http://schemas.openxmlformats.org/drawingml/2006/chart" xmlns:a="http://schemas.openxmlformats.org/drawingml/2006/main" xmlns:r="http://schemas.openxmlformats.org/officeDocument/2006/relationships">
   <c:date1904 val="0"/>
   <c:roundedCorners val="1"/>
@@ -1213,7 +1459,7 @@
 </c:chartSpace>
 </file>
 
-<file path=ppt/charts/chart13.xml><?xml version="1.0" encoding="utf-8"?>
+<file path=ppt/charts/chart14.xml><?xml version="1.0" encoding="utf-8"?>
 <c:chartSpace xmlns:c="http://schemas.openxmlformats.org/drawingml/2006/chart" xmlns:a="http://schemas.openxmlformats.org/drawingml/2006/main" xmlns:r="http://schemas.openxmlformats.org/officeDocument/2006/relationships">
   <c:date1904 val="0"/>
   <c:roundedCorners val="1"/>
@@ -1549,7 +1795,7 @@
 </c:chartSpace>
 </file>
 
-<file path=ppt/charts/chart14.xml><?xml version="1.0" encoding="utf-8"?>
+<file path=ppt/charts/chart15.xml><?xml version="1.0" encoding="utf-8"?>
 <c:chartSpace xmlns:c="http://schemas.openxmlformats.org/drawingml/2006/chart" xmlns:a="http://schemas.openxmlformats.org/drawingml/2006/main" xmlns:r="http://schemas.openxmlformats.org/officeDocument/2006/relationships">
   <c:date1904 val="0"/>
   <c:roundedCorners val="1"/>
@@ -1897,7 +2143,7 @@
 </c:chartSpace>
 </file>
 
-<file path=ppt/charts/chart15.xml><?xml version="1.0" encoding="utf-8"?>
+<file path=ppt/charts/chart16.xml><?xml version="1.0" encoding="utf-8"?>
 <c:chartSpace xmlns:c="http://schemas.openxmlformats.org/drawingml/2006/chart" xmlns:a="http://schemas.openxmlformats.org/drawingml/2006/main" xmlns:r="http://schemas.openxmlformats.org/officeDocument/2006/relationships">
   <c:date1904 val="0"/>
   <c:roundedCorners val="1"/>
@@ -2257,7 +2503,7 @@
 </c:chartSpace>
 </file>
 
-<file path=ppt/charts/chart16.xml><?xml version="1.0" encoding="utf-8"?>
+<file path=ppt/charts/chart17.xml><?xml version="1.0" encoding="utf-8"?>
 <c:chartSpace xmlns:c="http://schemas.openxmlformats.org/drawingml/2006/chart" xmlns:a="http://schemas.openxmlformats.org/drawingml/2006/main" xmlns:r="http://schemas.openxmlformats.org/officeDocument/2006/relationships">
   <c:date1904 val="0"/>
   <c:roundedCorners val="1"/>
@@ -2484,7 +2730,7 @@
 </c:chartSpace>
 </file>
 
-<file path=ppt/charts/chart17.xml><?xml version="1.0" encoding="utf-8"?>
+<file path=ppt/charts/chart18.xml><?xml version="1.0" encoding="utf-8"?>
 <c:chartSpace xmlns:c="http://schemas.openxmlformats.org/drawingml/2006/chart" xmlns:a="http://schemas.openxmlformats.org/drawingml/2006/main" xmlns:r="http://schemas.openxmlformats.org/officeDocument/2006/relationships">
   <c:date1904 val="0"/>
   <c:roundedCorners val="1"/>
@@ -4403,6 +4649,849 @@
       <c:layout/>
       <c:barChart>
         <c:barDir val="bar"/>
+        <c:grouping val="stacked"/>
+        <c:varyColors val="0"/>
+        <c:ser>
+          <c:idx val="0"/>
+          <c:order val="0"/>
+          <c:tx>
+            <c:strRef>
+              <c:f>Sheet1!$B$1</c:f>
+              <c:strCache>
+                <c:ptCount val="1"/>
+                <c:pt idx="0">
+                  <c:v>United States</c:v>
+                </c:pt>
+              </c:strCache>
+            </c:strRef>
+          </c:tx>
+          <c:spPr>
+            <a:solidFill>
+              <a:srgbClr val="86BC25"/>
+            </a:solidFill>
+            <a:effectLst/>
+          </c:spPr>
+          <c:invertIfNegative val="0"/>
+          <c:dLbls>
+            <c:numFmt formatCode="#,##0" sourceLinked="0"/>
+            <c:txPr>
+              <a:bodyPr/>
+              <a:lstStyle/>
+              <a:p>
+                <a:pPr>
+                  <a:defRPr b="0" i="0" strike="noStrike" sz="600" u="none">
+                    <a:solidFill>
+                      <a:srgbClr val="FFFFFF"/>
+                    </a:solidFill>
+                    <a:latin typeface="Arial"/>
+                  </a:defRPr>
+                </a:pPr>
+              </a:p>
+            </c:txPr>
+            <c:dLblPos val="ctr"/>
+            <c:showLegendKey val="0"/>
+            <c:showVal val="1"/>
+            <c:showCatName val="0"/>
+            <c:showSerName val="0"/>
+            <c:showPercent val="0"/>
+            <c:showBubbleSize val="0"/>
+            <c:showLeaderLines val="0"/>
+          </c:dLbls>
+          <c:cat>
+            <c:multiLvlStrRef>
+              <c:f>Sheet1!$A$2:$A$9</c:f>
+              <c:multiLvlStrCache>
+                <c:ptCount val="8"/>
+                <c:lvl>
+                  <c:pt idx="0">
+                    <c:v>Staff awareness &amp; training — Banking (49%)</c:v>
+                  </c:pt>
+                  <c:pt idx="1">
+                    <c:v>Staff awareness &amp; training — Insurance (64%)</c:v>
+                  </c:pt>
+                  <c:pt idx="2">
+                    <c:v>ID verification / prevention — Banking (51%)</c:v>
+                  </c:pt>
+                  <c:pt idx="3">
+                    <c:v>ID verification / prevention — Insurance (48%)</c:v>
+                  </c:pt>
+                  <c:pt idx="4">
+                    <c:v>Fraud detection technology — Banking (48%)</c:v>
+                  </c:pt>
+                  <c:pt idx="5">
+                    <c:v>Fraud detection technology — Insurance (40%)</c:v>
+                  </c:pt>
+                  <c:pt idx="6">
+                    <c:v>3rd-party intel / consortium — Banking (43%)</c:v>
+                  </c:pt>
+                  <c:pt idx="7">
+                    <c:v>3rd-party intel / consortium — Insurance (44%)</c:v>
+                  </c:pt>
+                </c:lvl>
+              </c:multiLvlStrCache>
+            </c:multiLvlStrRef>
+          </c:cat>
+          <c:val>
+            <c:numRef>
+              <c:f>Sheet1!$B$2:$B$9</c:f>
+              <c:numCache>
+                <c:formatCode>General</c:formatCode>
+                <c:ptCount val="8"/>
+                <c:pt idx="0">
+                  <c:v>23</c:v>
+                </c:pt>
+                <c:pt idx="1">
+                  <c:v>20</c:v>
+                </c:pt>
+                <c:pt idx="2">
+                  <c:v>24</c:v>
+                </c:pt>
+                <c:pt idx="3">
+                  <c:v>24</c:v>
+                </c:pt>
+                <c:pt idx="4">
+                  <c:v>21</c:v>
+                </c:pt>
+                <c:pt idx="5">
+                  <c:v>8</c:v>
+                </c:pt>
+                <c:pt idx="6">
+                  <c:v>12</c:v>
+                </c:pt>
+                <c:pt idx="7">
+                  <c:v>20</c:v>
+                </c:pt>
+              </c:numCache>
+            </c:numRef>
+          </c:val>
+        </c:ser>
+        <c:ser>
+          <c:idx val="1"/>
+          <c:order val="1"/>
+          <c:tx>
+            <c:strRef>
+              <c:f>Sheet1!$C$1</c:f>
+              <c:strCache>
+                <c:ptCount val="1"/>
+                <c:pt idx="0">
+                  <c:v>Canada</c:v>
+                </c:pt>
+              </c:strCache>
+            </c:strRef>
+          </c:tx>
+          <c:spPr>
+            <a:solidFill>
+              <a:srgbClr val="43B02A"/>
+            </a:solidFill>
+            <a:effectLst/>
+          </c:spPr>
+          <c:invertIfNegative val="0"/>
+          <c:dLbls>
+            <c:numFmt formatCode="#,##0" sourceLinked="0"/>
+            <c:txPr>
+              <a:bodyPr/>
+              <a:lstStyle/>
+              <a:p>
+                <a:pPr>
+                  <a:defRPr b="0" i="0" strike="noStrike" sz="600" u="none">
+                    <a:solidFill>
+                      <a:srgbClr val="FFFFFF"/>
+                    </a:solidFill>
+                    <a:latin typeface="Arial"/>
+                  </a:defRPr>
+                </a:pPr>
+              </a:p>
+            </c:txPr>
+            <c:dLblPos val="ctr"/>
+            <c:showLegendKey val="0"/>
+            <c:showVal val="1"/>
+            <c:showCatName val="0"/>
+            <c:showSerName val="0"/>
+            <c:showPercent val="0"/>
+            <c:showBubbleSize val="0"/>
+            <c:showLeaderLines val="0"/>
+          </c:dLbls>
+          <c:cat>
+            <c:multiLvlStrRef>
+              <c:f>Sheet1!$A$2:$A$9</c:f>
+              <c:multiLvlStrCache>
+                <c:ptCount val="8"/>
+                <c:lvl>
+                  <c:pt idx="0">
+                    <c:v>Staff awareness &amp; training — Banking (49%)</c:v>
+                  </c:pt>
+                  <c:pt idx="1">
+                    <c:v>Staff awareness &amp; training — Insurance (64%)</c:v>
+                  </c:pt>
+                  <c:pt idx="2">
+                    <c:v>ID verification / prevention — Banking (51%)</c:v>
+                  </c:pt>
+                  <c:pt idx="3">
+                    <c:v>ID verification / prevention — Insurance (48%)</c:v>
+                  </c:pt>
+                  <c:pt idx="4">
+                    <c:v>Fraud detection technology — Banking (48%)</c:v>
+                  </c:pt>
+                  <c:pt idx="5">
+                    <c:v>Fraud detection technology — Insurance (40%)</c:v>
+                  </c:pt>
+                  <c:pt idx="6">
+                    <c:v>3rd-party intel / consortium — Banking (43%)</c:v>
+                  </c:pt>
+                  <c:pt idx="7">
+                    <c:v>3rd-party intel / consortium — Insurance (44%)</c:v>
+                  </c:pt>
+                </c:lvl>
+              </c:multiLvlStrCache>
+            </c:multiLvlStrRef>
+          </c:cat>
+          <c:val>
+            <c:numRef>
+              <c:f>Sheet1!$C$2:$C$9</c:f>
+              <c:numCache>
+                <c:formatCode>General</c:formatCode>
+                <c:ptCount val="8"/>
+                <c:pt idx="0">
+                  <c:v>16</c:v>
+                </c:pt>
+                <c:pt idx="1">
+                  <c:v>36</c:v>
+                </c:pt>
+                <c:pt idx="2">
+                  <c:v>13</c:v>
+                </c:pt>
+                <c:pt idx="3">
+                  <c:v>20</c:v>
+                </c:pt>
+                <c:pt idx="4">
+                  <c:v>12</c:v>
+                </c:pt>
+                <c:pt idx="5">
+                  <c:v>28</c:v>
+                </c:pt>
+                <c:pt idx="6">
+                  <c:v>15</c:v>
+                </c:pt>
+                <c:pt idx="7">
+                  <c:v>20</c:v>
+                </c:pt>
+              </c:numCache>
+            </c:numRef>
+          </c:val>
+        </c:ser>
+        <c:ser>
+          <c:idx val="2"/>
+          <c:order val="2"/>
+          <c:tx>
+            <c:strRef>
+              <c:f>Sheet1!$D$1</c:f>
+              <c:strCache>
+                <c:ptCount val="1"/>
+                <c:pt idx="0">
+                  <c:v>Europe (EU + UK)</c:v>
+                </c:pt>
+              </c:strCache>
+            </c:strRef>
+          </c:tx>
+          <c:spPr>
+            <a:solidFill>
+              <a:srgbClr val="046A38"/>
+            </a:solidFill>
+            <a:effectLst/>
+          </c:spPr>
+          <c:invertIfNegative val="0"/>
+          <c:dLbls>
+            <c:numFmt formatCode="#,##0" sourceLinked="0"/>
+            <c:txPr>
+              <a:bodyPr/>
+              <a:lstStyle/>
+              <a:p>
+                <a:pPr>
+                  <a:defRPr b="0" i="0" strike="noStrike" sz="600" u="none">
+                    <a:solidFill>
+                      <a:srgbClr val="FFFFFF"/>
+                    </a:solidFill>
+                    <a:latin typeface="Arial"/>
+                  </a:defRPr>
+                </a:pPr>
+              </a:p>
+            </c:txPr>
+            <c:dLblPos val="ctr"/>
+            <c:showLegendKey val="0"/>
+            <c:showVal val="1"/>
+            <c:showCatName val="0"/>
+            <c:showSerName val="0"/>
+            <c:showPercent val="0"/>
+            <c:showBubbleSize val="0"/>
+            <c:showLeaderLines val="0"/>
+          </c:dLbls>
+          <c:cat>
+            <c:multiLvlStrRef>
+              <c:f>Sheet1!$A$2:$A$9</c:f>
+              <c:multiLvlStrCache>
+                <c:ptCount val="8"/>
+                <c:lvl>
+                  <c:pt idx="0">
+                    <c:v>Staff awareness &amp; training — Banking (49%)</c:v>
+                  </c:pt>
+                  <c:pt idx="1">
+                    <c:v>Staff awareness &amp; training — Insurance (64%)</c:v>
+                  </c:pt>
+                  <c:pt idx="2">
+                    <c:v>ID verification / prevention — Banking (51%)</c:v>
+                  </c:pt>
+                  <c:pt idx="3">
+                    <c:v>ID verification / prevention — Insurance (48%)</c:v>
+                  </c:pt>
+                  <c:pt idx="4">
+                    <c:v>Fraud detection technology — Banking (48%)</c:v>
+                  </c:pt>
+                  <c:pt idx="5">
+                    <c:v>Fraud detection technology — Insurance (40%)</c:v>
+                  </c:pt>
+                  <c:pt idx="6">
+                    <c:v>3rd-party intel / consortium — Banking (43%)</c:v>
+                  </c:pt>
+                  <c:pt idx="7">
+                    <c:v>3rd-party intel / consortium — Insurance (44%)</c:v>
+                  </c:pt>
+                </c:lvl>
+              </c:multiLvlStrCache>
+            </c:multiLvlStrRef>
+          </c:cat>
+          <c:val>
+            <c:numRef>
+              <c:f>Sheet1!$D$2:$D$9</c:f>
+              <c:numCache>
+                <c:formatCode>General</c:formatCode>
+                <c:ptCount val="8"/>
+                <c:pt idx="0">
+                  <c:v>5</c:v>
+                </c:pt>
+                <c:pt idx="1">
+                  <c:v>0</c:v>
+                </c:pt>
+                <c:pt idx="2">
+                  <c:v>8</c:v>
+                </c:pt>
+                <c:pt idx="3">
+                  <c:v>0</c:v>
+                </c:pt>
+                <c:pt idx="4">
+                  <c:v>8</c:v>
+                </c:pt>
+                <c:pt idx="5">
+                  <c:v>0</c:v>
+                </c:pt>
+                <c:pt idx="6">
+                  <c:v>7</c:v>
+                </c:pt>
+                <c:pt idx="7">
+                  <c:v>0</c:v>
+                </c:pt>
+              </c:numCache>
+            </c:numRef>
+          </c:val>
+        </c:ser>
+        <c:ser>
+          <c:idx val="3"/>
+          <c:order val="3"/>
+          <c:tx>
+            <c:strRef>
+              <c:f>Sheet1!$E$1</c:f>
+              <c:strCache>
+                <c:ptCount val="1"/>
+                <c:pt idx="0">
+                  <c:v>Australia</c:v>
+                </c:pt>
+              </c:strCache>
+            </c:strRef>
+          </c:tx>
+          <c:spPr>
+            <a:solidFill>
+              <a:srgbClr val="0D8390"/>
+            </a:solidFill>
+            <a:effectLst/>
+          </c:spPr>
+          <c:invertIfNegative val="0"/>
+          <c:dLbls>
+            <c:numFmt formatCode="#,##0" sourceLinked="0"/>
+            <c:txPr>
+              <a:bodyPr/>
+              <a:lstStyle/>
+              <a:p>
+                <a:pPr>
+                  <a:defRPr b="0" i="0" strike="noStrike" sz="600" u="none">
+                    <a:solidFill>
+                      <a:srgbClr val="FFFFFF"/>
+                    </a:solidFill>
+                    <a:latin typeface="Arial"/>
+                  </a:defRPr>
+                </a:pPr>
+              </a:p>
+            </c:txPr>
+            <c:dLblPos val="ctr"/>
+            <c:showLegendKey val="0"/>
+            <c:showVal val="1"/>
+            <c:showCatName val="0"/>
+            <c:showSerName val="0"/>
+            <c:showPercent val="0"/>
+            <c:showBubbleSize val="0"/>
+            <c:showLeaderLines val="0"/>
+          </c:dLbls>
+          <c:cat>
+            <c:multiLvlStrRef>
+              <c:f>Sheet1!$A$2:$A$9</c:f>
+              <c:multiLvlStrCache>
+                <c:ptCount val="8"/>
+                <c:lvl>
+                  <c:pt idx="0">
+                    <c:v>Staff awareness &amp; training — Banking (49%)</c:v>
+                  </c:pt>
+                  <c:pt idx="1">
+                    <c:v>Staff awareness &amp; training — Insurance (64%)</c:v>
+                  </c:pt>
+                  <c:pt idx="2">
+                    <c:v>ID verification / prevention — Banking (51%)</c:v>
+                  </c:pt>
+                  <c:pt idx="3">
+                    <c:v>ID verification / prevention — Insurance (48%)</c:v>
+                  </c:pt>
+                  <c:pt idx="4">
+                    <c:v>Fraud detection technology — Banking (48%)</c:v>
+                  </c:pt>
+                  <c:pt idx="5">
+                    <c:v>Fraud detection technology — Insurance (40%)</c:v>
+                  </c:pt>
+                  <c:pt idx="6">
+                    <c:v>3rd-party intel / consortium — Banking (43%)</c:v>
+                  </c:pt>
+                  <c:pt idx="7">
+                    <c:v>3rd-party intel / consortium — Insurance (44%)</c:v>
+                  </c:pt>
+                </c:lvl>
+              </c:multiLvlStrCache>
+            </c:multiLvlStrRef>
+          </c:cat>
+          <c:val>
+            <c:numRef>
+              <c:f>Sheet1!$E$2:$E$9</c:f>
+              <c:numCache>
+                <c:formatCode>General</c:formatCode>
+                <c:ptCount val="8"/>
+                <c:pt idx="0">
+                  <c:v>3</c:v>
+                </c:pt>
+                <c:pt idx="1">
+                  <c:v>0</c:v>
+                </c:pt>
+                <c:pt idx="2">
+                  <c:v>3</c:v>
+                </c:pt>
+                <c:pt idx="3">
+                  <c:v>0</c:v>
+                </c:pt>
+                <c:pt idx="4">
+                  <c:v>4</c:v>
+                </c:pt>
+                <c:pt idx="5">
+                  <c:v>0</c:v>
+                </c:pt>
+                <c:pt idx="6">
+                  <c:v>7</c:v>
+                </c:pt>
+                <c:pt idx="7">
+                  <c:v>0</c:v>
+                </c:pt>
+              </c:numCache>
+            </c:numRef>
+          </c:val>
+        </c:ser>
+        <c:ser>
+          <c:idx val="4"/>
+          <c:order val="4"/>
+          <c:tx>
+            <c:strRef>
+              <c:f>Sheet1!$F$1</c:f>
+              <c:strCache>
+                <c:ptCount val="1"/>
+                <c:pt idx="0">
+                  <c:v>Singapore</c:v>
+                </c:pt>
+              </c:strCache>
+            </c:strRef>
+          </c:tx>
+          <c:spPr>
+            <a:solidFill>
+              <a:srgbClr val="53565A"/>
+            </a:solidFill>
+            <a:effectLst/>
+          </c:spPr>
+          <c:invertIfNegative val="0"/>
+          <c:dLbls>
+            <c:numFmt formatCode="#,##0" sourceLinked="0"/>
+            <c:txPr>
+              <a:bodyPr/>
+              <a:lstStyle/>
+              <a:p>
+                <a:pPr>
+                  <a:defRPr b="0" i="0" strike="noStrike" sz="600" u="none">
+                    <a:solidFill>
+                      <a:srgbClr val="FFFFFF"/>
+                    </a:solidFill>
+                    <a:latin typeface="Arial"/>
+                  </a:defRPr>
+                </a:pPr>
+              </a:p>
+            </c:txPr>
+            <c:dLblPos val="ctr"/>
+            <c:showLegendKey val="0"/>
+            <c:showVal val="1"/>
+            <c:showCatName val="0"/>
+            <c:showSerName val="0"/>
+            <c:showPercent val="0"/>
+            <c:showBubbleSize val="0"/>
+            <c:showLeaderLines val="0"/>
+          </c:dLbls>
+          <c:cat>
+            <c:multiLvlStrRef>
+              <c:f>Sheet1!$A$2:$A$9</c:f>
+              <c:multiLvlStrCache>
+                <c:ptCount val="8"/>
+                <c:lvl>
+                  <c:pt idx="0">
+                    <c:v>Staff awareness &amp; training — Banking (49%)</c:v>
+                  </c:pt>
+                  <c:pt idx="1">
+                    <c:v>Staff awareness &amp; training — Insurance (64%)</c:v>
+                  </c:pt>
+                  <c:pt idx="2">
+                    <c:v>ID verification / prevention — Banking (51%)</c:v>
+                  </c:pt>
+                  <c:pt idx="3">
+                    <c:v>ID verification / prevention — Insurance (48%)</c:v>
+                  </c:pt>
+                  <c:pt idx="4">
+                    <c:v>Fraud detection technology — Banking (48%)</c:v>
+                  </c:pt>
+                  <c:pt idx="5">
+                    <c:v>Fraud detection technology — Insurance (40%)</c:v>
+                  </c:pt>
+                  <c:pt idx="6">
+                    <c:v>3rd-party intel / consortium — Banking (43%)</c:v>
+                  </c:pt>
+                  <c:pt idx="7">
+                    <c:v>3rd-party intel / consortium — Insurance (44%)</c:v>
+                  </c:pt>
+                </c:lvl>
+              </c:multiLvlStrCache>
+            </c:multiLvlStrRef>
+          </c:cat>
+          <c:val>
+            <c:numRef>
+              <c:f>Sheet1!$F$2:$F$9</c:f>
+              <c:numCache>
+                <c:formatCode>General</c:formatCode>
+                <c:ptCount val="8"/>
+                <c:pt idx="0">
+                  <c:v>3</c:v>
+                </c:pt>
+                <c:pt idx="1">
+                  <c:v>0</c:v>
+                </c:pt>
+                <c:pt idx="2">
+                  <c:v>3</c:v>
+                </c:pt>
+                <c:pt idx="3">
+                  <c:v>0</c:v>
+                </c:pt>
+                <c:pt idx="4">
+                  <c:v>3</c:v>
+                </c:pt>
+                <c:pt idx="5">
+                  <c:v>0</c:v>
+                </c:pt>
+                <c:pt idx="6">
+                  <c:v>3</c:v>
+                </c:pt>
+                <c:pt idx="7">
+                  <c:v>0</c:v>
+                </c:pt>
+              </c:numCache>
+            </c:numRef>
+          </c:val>
+        </c:ser>
+        <c:ser>
+          <c:idx val="5"/>
+          <c:order val="5"/>
+          <c:tx>
+            <c:strRef>
+              <c:f>Sheet1!$G$1</c:f>
+              <c:strCache>
+                <c:ptCount val="1"/>
+                <c:pt idx="0">
+                  <c:v>Other markets (Insurance: UK/AU/SG)</c:v>
+                </c:pt>
+              </c:strCache>
+            </c:strRef>
+          </c:tx>
+          <c:spPr>
+            <a:solidFill>
+              <a:srgbClr val="D0D0CE"/>
+            </a:solidFill>
+            <a:effectLst/>
+          </c:spPr>
+          <c:invertIfNegative val="0"/>
+          <c:dLbls>
+            <c:numFmt formatCode="#,##0" sourceLinked="0"/>
+            <c:txPr>
+              <a:bodyPr/>
+              <a:lstStyle/>
+              <a:p>
+                <a:pPr>
+                  <a:defRPr b="0" i="0" strike="noStrike" sz="600" u="none">
+                    <a:solidFill>
+                      <a:srgbClr val="FFFFFF"/>
+                    </a:solidFill>
+                    <a:latin typeface="Arial"/>
+                  </a:defRPr>
+                </a:pPr>
+              </a:p>
+            </c:txPr>
+            <c:dLblPos val="ctr"/>
+            <c:showLegendKey val="0"/>
+            <c:showVal val="1"/>
+            <c:showCatName val="0"/>
+            <c:showSerName val="0"/>
+            <c:showPercent val="0"/>
+            <c:showBubbleSize val="0"/>
+            <c:showLeaderLines val="0"/>
+          </c:dLbls>
+          <c:cat>
+            <c:multiLvlStrRef>
+              <c:f>Sheet1!$A$2:$A$9</c:f>
+              <c:multiLvlStrCache>
+                <c:ptCount val="8"/>
+                <c:lvl>
+                  <c:pt idx="0">
+                    <c:v>Staff awareness &amp; training — Banking (49%)</c:v>
+                  </c:pt>
+                  <c:pt idx="1">
+                    <c:v>Staff awareness &amp; training — Insurance (64%)</c:v>
+                  </c:pt>
+                  <c:pt idx="2">
+                    <c:v>ID verification / prevention — Banking (51%)</c:v>
+                  </c:pt>
+                  <c:pt idx="3">
+                    <c:v>ID verification / prevention — Insurance (48%)</c:v>
+                  </c:pt>
+                  <c:pt idx="4">
+                    <c:v>Fraud detection technology — Banking (48%)</c:v>
+                  </c:pt>
+                  <c:pt idx="5">
+                    <c:v>Fraud detection technology — Insurance (40%)</c:v>
+                  </c:pt>
+                  <c:pt idx="6">
+                    <c:v>3rd-party intel / consortium — Banking (43%)</c:v>
+                  </c:pt>
+                  <c:pt idx="7">
+                    <c:v>3rd-party intel / consortium — Insurance (44%)</c:v>
+                  </c:pt>
+                </c:lvl>
+              </c:multiLvlStrCache>
+            </c:multiLvlStrRef>
+          </c:cat>
+          <c:val>
+            <c:numRef>
+              <c:f>Sheet1!$G$2:$G$9</c:f>
+              <c:numCache>
+                <c:formatCode>General</c:formatCode>
+                <c:ptCount val="8"/>
+                <c:pt idx="0">
+                  <c:v>0</c:v>
+                </c:pt>
+                <c:pt idx="1">
+                  <c:v>8</c:v>
+                </c:pt>
+                <c:pt idx="2">
+                  <c:v>0</c:v>
+                </c:pt>
+                <c:pt idx="3">
+                  <c:v>4</c:v>
+                </c:pt>
+                <c:pt idx="4">
+                  <c:v>0</c:v>
+                </c:pt>
+                <c:pt idx="5">
+                  <c:v>4</c:v>
+                </c:pt>
+                <c:pt idx="6">
+                  <c:v>0</c:v>
+                </c:pt>
+                <c:pt idx="7">
+                  <c:v>4</c:v>
+                </c:pt>
+              </c:numCache>
+            </c:numRef>
+          </c:val>
+        </c:ser>
+        <c:dLbls>
+          <c:numFmt formatCode="#,##0" sourceLinked="0"/>
+          <c:txPr>
+            <a:bodyPr/>
+            <a:lstStyle/>
+            <a:p>
+              <a:pPr>
+                <a:defRPr b="0" i="0" strike="noStrike" sz="600" u="none">
+                  <a:solidFill>
+                    <a:srgbClr val="FFFFFF"/>
+                  </a:solidFill>
+                  <a:latin typeface="Arial"/>
+                </a:defRPr>
+              </a:pPr>
+            </a:p>
+          </c:txPr>
+          <c:dLblPos val="ctr"/>
+          <c:showLegendKey val="0"/>
+          <c:showVal val="1"/>
+          <c:showCatName val="0"/>
+          <c:showSerName val="0"/>
+          <c:showPercent val="0"/>
+          <c:showBubbleSize val="0"/>
+          <c:showLeaderLines val="0"/>
+        </c:dLbls>
+        <c:gapWidth val="40"/>
+        <c:overlap val="100"/>
+        <c:axId val="2094734554"/>
+        <c:axId val="2094734552"/>
+        <c:axId val="2094734556"/>
+      </c:barChart>
+      <c:catAx>
+        <c:axId val="2094734554"/>
+        <c:scaling>
+          <c:orientation val="minMax"/>
+        </c:scaling>
+        <c:delete val="0"/>
+        <c:axPos val="l"/>
+        <c:numFmt formatCode="General" sourceLinked="1"/>
+        <c:majorTickMark val="out"/>
+        <c:minorTickMark val="none"/>
+        <c:tickLblPos val="nextTo"/>
+        <c:spPr>
+          <a:ln w="12700" cap="flat">
+            <a:noFill/>
+            <a:prstDash val="solid"/>
+            <a:round/>
+          </a:ln>
+        </c:spPr>
+        <c:txPr>
+          <a:bodyPr/>
+          <a:lstStyle/>
+          <a:p>
+            <a:pPr>
+              <a:defRPr sz="850" b="0" i="0" u="none" strike="noStrike">
+                <a:solidFill>
+                  <a:srgbClr val="53565A"/>
+                </a:solidFill>
+                <a:latin typeface="Arial"/>
+              </a:defRPr>
+            </a:pPr>
+            <a:endParaRPr lang="en-US"/>
+          </a:p>
+        </c:txPr>
+        <c:crossAx val="2094734552"/>
+        <c:crosses val="autoZero"/>
+        <c:auto val="1"/>
+        <c:lblAlgn val="ctr"/>
+        <c:noMultiLvlLbl val="1"/>
+      </c:catAx>
+      <c:valAx>
+        <c:axId val="2094734552"/>
+        <c:scaling>
+          <c:orientation val="minMax"/>
+        </c:scaling>
+        <c:delete val="1"/>
+        <c:axPos val="b"/>
+        <c:numFmt formatCode="General" sourceLinked="0"/>
+        <c:majorTickMark val="out"/>
+        <c:minorTickMark val="none"/>
+        <c:tickLblPos val="low"/>
+        <c:spPr>
+          <a:ln w="12700" cap="flat">
+            <a:noFill/>
+            <a:prstDash val="solid"/>
+            <a:round/>
+          </a:ln>
+        </c:spPr>
+        <c:txPr>
+          <a:bodyPr/>
+          <a:lstStyle/>
+          <a:p>
+            <a:pPr>
+              <a:defRPr sz="1200" b="0" i="0" u="none" strike="noStrike">
+                <a:solidFill>
+                  <a:srgbClr val="000000"/>
+                </a:solidFill>
+                <a:latin typeface="Arial"/>
+              </a:defRPr>
+            </a:pPr>
+            <a:endParaRPr lang="en-US"/>
+          </a:p>
+        </c:txPr>
+        <c:crossAx val="2094734554"/>
+        <c:crosses val="autoZero"/>
+        <c:crossBetween val="between"/>
+      </c:valAx>
+      <c:spPr>
+        <a:solidFill>
+          <a:srgbClr val="FFFFFF"/>
+        </a:solidFill>
+        <a:ln>
+          <a:noFill/>
+        </a:ln>
+        <a:effectLst/>
+      </c:spPr>
+    </c:plotArea>
+    <c:legend>
+      <c:legendPos val="b"/>
+      <c:overlay val="0"/>
+      <c:txPr>
+        <a:bodyPr/>
+        <a:lstStyle/>
+        <a:p>
+          <a:pPr>
+            <a:defRPr sz="750">      </a:defRPr>
+          </a:pPr>
+          <a:endParaRPr lang="en-US"/>
+        </a:p>
+      </c:txPr>
+    </c:legend>
+    <c:plotVisOnly val="1"/>
+    <c:dispBlanksAs val="span"/>
+  </c:chart>
+  <c:spPr>
+    <a:noFill/>
+    <a:ln>
+      <a:noFill/>
+    </a:ln>
+    <a:effectLst/>
+  </c:spPr>
+  <c:externalData r:id="rId1">
+    <c:autoUpdate val="0"/>
+  </c:externalData>
+</c:chartSpace>
+</file>
+
+<file path=ppt/charts/chart9.xml><?xml version="1.0" encoding="utf-8"?>
+<c:chartSpace xmlns:c="http://schemas.openxmlformats.org/drawingml/2006/chart" xmlns:a="http://schemas.openxmlformats.org/drawingml/2006/main" xmlns:r="http://schemas.openxmlformats.org/officeDocument/2006/relationships">
+  <c:date1904 val="0"/>
+  <c:roundedCorners val="1"/>
+  <c:chart>
+    <c:autoTitleDeleted val="1"/>
+    <c:plotArea>
+      <c:layout/>
+      <c:barChart>
+        <c:barDir val="bar"/>
         <c:grouping val="clustered"/>
         <c:varyColors val="0"/>
         <c:ser>
@@ -4501,251 +5590,6 @@
                 </c:pt>
                 <c:pt idx="5">
                   <c:v>26</c:v>
-                </c:pt>
-              </c:numCache>
-            </c:numRef>
-          </c:val>
-        </c:ser>
-        <c:dLbls>
-          <c:numFmt formatCode="0&quot;%&quot;" sourceLinked="0"/>
-          <c:txPr>
-            <a:bodyPr/>
-            <a:lstStyle/>
-            <a:p>
-              <a:pPr>
-                <a:defRPr b="0" i="0" strike="noStrike" sz="1000" u="none">
-                  <a:solidFill>
-                    <a:srgbClr val="000000"/>
-                  </a:solidFill>
-                  <a:latin typeface="Arial"/>
-                </a:defRPr>
-              </a:pPr>
-            </a:p>
-          </c:txPr>
-          <c:showLegendKey val="0"/>
-          <c:showVal val="1"/>
-          <c:showCatName val="0"/>
-          <c:showSerName val="0"/>
-          <c:showPercent val="0"/>
-          <c:showBubbleSize val="0"/>
-          <c:showLeaderLines val="0"/>
-        </c:dLbls>
-        <c:gapWidth val="40"/>
-        <c:overlap val="0"/>
-        <c:axId val="2094734554"/>
-        <c:axId val="2094734552"/>
-        <c:axId val="2094734556"/>
-      </c:barChart>
-      <c:catAx>
-        <c:axId val="2094734554"/>
-        <c:scaling>
-          <c:orientation val="minMax"/>
-        </c:scaling>
-        <c:delete val="0"/>
-        <c:axPos val="l"/>
-        <c:numFmt formatCode="General" sourceLinked="1"/>
-        <c:majorTickMark val="out"/>
-        <c:minorTickMark val="none"/>
-        <c:tickLblPos val="nextTo"/>
-        <c:spPr>
-          <a:ln w="12700" cap="flat">
-            <a:noFill/>
-            <a:prstDash val="solid"/>
-            <a:round/>
-          </a:ln>
-        </c:spPr>
-        <c:txPr>
-          <a:bodyPr/>
-          <a:lstStyle/>
-          <a:p>
-            <a:pPr>
-              <a:defRPr sz="1000" b="0" i="0" u="none" strike="noStrike">
-                <a:solidFill>
-                  <a:srgbClr val="53565A"/>
-                </a:solidFill>
-                <a:latin typeface="Arial"/>
-              </a:defRPr>
-            </a:pPr>
-            <a:endParaRPr lang="en-US"/>
-          </a:p>
-        </c:txPr>
-        <c:crossAx val="2094734552"/>
-        <c:crosses val="autoZero"/>
-        <c:auto val="1"/>
-        <c:lblAlgn val="ctr"/>
-        <c:noMultiLvlLbl val="1"/>
-      </c:catAx>
-      <c:valAx>
-        <c:axId val="2094734552"/>
-        <c:scaling>
-          <c:orientation val="minMax"/>
-        </c:scaling>
-        <c:delete val="1"/>
-        <c:axPos val="b"/>
-        <c:numFmt formatCode="General" sourceLinked="0"/>
-        <c:majorTickMark val="out"/>
-        <c:minorTickMark val="none"/>
-        <c:tickLblPos val="low"/>
-        <c:spPr>
-          <a:ln w="12700" cap="flat">
-            <a:noFill/>
-            <a:prstDash val="solid"/>
-            <a:round/>
-          </a:ln>
-        </c:spPr>
-        <c:txPr>
-          <a:bodyPr/>
-          <a:lstStyle/>
-          <a:p>
-            <a:pPr>
-              <a:defRPr sz="1200" b="0" i="0" u="none" strike="noStrike">
-                <a:solidFill>
-                  <a:srgbClr val="000000"/>
-                </a:solidFill>
-                <a:latin typeface="Arial"/>
-              </a:defRPr>
-            </a:pPr>
-            <a:endParaRPr lang="en-US"/>
-          </a:p>
-        </c:txPr>
-        <c:crossAx val="2094734554"/>
-        <c:crosses val="autoZero"/>
-        <c:crossBetween val="between"/>
-      </c:valAx>
-      <c:spPr>
-        <a:solidFill>
-          <a:srgbClr val="FFFFFF"/>
-        </a:solidFill>
-        <a:ln>
-          <a:noFill/>
-        </a:ln>
-        <a:effectLst/>
-      </c:spPr>
-    </c:plotArea>
-    <c:plotVisOnly val="1"/>
-    <c:dispBlanksAs val="span"/>
-  </c:chart>
-  <c:spPr>
-    <a:noFill/>
-    <a:ln>
-      <a:noFill/>
-    </a:ln>
-    <a:effectLst/>
-  </c:spPr>
-  <c:externalData r:id="rId1">
-    <c:autoUpdate val="0"/>
-  </c:externalData>
-</c:chartSpace>
-</file>
-
-<file path=ppt/charts/chart9.xml><?xml version="1.0" encoding="utf-8"?>
-<c:chartSpace xmlns:c="http://schemas.openxmlformats.org/drawingml/2006/chart" xmlns:a="http://schemas.openxmlformats.org/drawingml/2006/main" xmlns:r="http://schemas.openxmlformats.org/officeDocument/2006/relationships">
-  <c:date1904 val="0"/>
-  <c:roundedCorners val="1"/>
-  <c:chart>
-    <c:autoTitleDeleted val="1"/>
-    <c:plotArea>
-      <c:layout/>
-      <c:barChart>
-        <c:barDir val="bar"/>
-        <c:grouping val="clustered"/>
-        <c:varyColors val="0"/>
-        <c:ser>
-          <c:idx val="0"/>
-          <c:order val="0"/>
-          <c:tx>
-            <c:strRef>
-              <c:f>Sheet1!$B$1</c:f>
-              <c:strCache>
-                <c:ptCount val="1"/>
-                <c:pt idx="0">
-                  <c:v>Government Action With the Greatest Impact on Info Sharing</c:v>
-                </c:pt>
-              </c:strCache>
-            </c:strRef>
-          </c:tx>
-          <c:spPr>
-            <a:solidFill>
-              <a:srgbClr val="86BC25"/>
-            </a:solidFill>
-            <a:effectLst/>
-          </c:spPr>
-          <c:invertIfNegative val="0"/>
-          <c:dLbls>
-            <c:numFmt formatCode="0&quot;%&quot;" sourceLinked="0"/>
-            <c:txPr>
-              <a:bodyPr/>
-              <a:lstStyle/>
-              <a:p>
-                <a:pPr>
-                  <a:defRPr b="0" i="0" strike="noStrike" sz="1000" u="none">
-                    <a:solidFill>
-                      <a:srgbClr val="000000"/>
-                    </a:solidFill>
-                    <a:latin typeface="Arial"/>
-                  </a:defRPr>
-                </a:pPr>
-              </a:p>
-            </c:txPr>
-            <c:showLegendKey val="0"/>
-            <c:showVal val="1"/>
-            <c:showCatName val="0"/>
-            <c:showSerName val="0"/>
-            <c:showPercent val="0"/>
-            <c:showBubbleSize val="0"/>
-            <c:showLeaderLines val="0"/>
-          </c:dLbls>
-          <c:cat>
-            <c:multiLvlStrRef>
-              <c:f>Sheet1!$A$2:$A$7</c:f>
-              <c:multiLvlStrCache>
-                <c:ptCount val="6"/>
-                <c:lvl>
-                  <c:pt idx="0">
-                    <c:v>Centralized fraud info-sharing platform / utility</c:v>
-                  </c:pt>
-                  <c:pt idx="1">
-                    <c:v>Clearer legal &amp; regulatory frameworks</c:v>
-                  </c:pt>
-                  <c:pt idx="2">
-                    <c:v>Common data standards &amp; definitions</c:v>
-                  </c:pt>
-                  <c:pt idx="3">
-                    <c:v>Greater public-private collaboration</c:v>
-                  </c:pt>
-                  <c:pt idx="4">
-                    <c:v>Prioritized industry use cases</c:v>
-                  </c:pt>
-                  <c:pt idx="5">
-                    <c:v>Funding or incentives</c:v>
-                  </c:pt>
-                </c:lvl>
-              </c:multiLvlStrCache>
-            </c:multiLvlStrRef>
-          </c:cat>
-          <c:val>
-            <c:numRef>
-              <c:f>Sheet1!$B$2:$B$7</c:f>
-              <c:numCache>
-                <c:formatCode>General</c:formatCode>
-                <c:ptCount val="6"/>
-                <c:pt idx="0">
-                  <c:v>35</c:v>
-                </c:pt>
-                <c:pt idx="1">
-                  <c:v>26</c:v>
-                </c:pt>
-                <c:pt idx="2">
-                  <c:v>14</c:v>
-                </c:pt>
-                <c:pt idx="3">
-                  <c:v>13</c:v>
-                </c:pt>
-                <c:pt idx="4">
-                  <c:v>9</c:v>
-                </c:pt>
-                <c:pt idx="5">
-                  <c:v>3</c:v>
                 </c:pt>
               </c:numCache>
             </c:numRef>
@@ -6710,6 +7554,94 @@
             <a:fld id="{F7021451-1387-4CA6-816F-3879F97B5CBC}" type="slidenum">
               <a:rPr lang="en-US"/>
               <a:t>24</a:t>
+            </a:fld>
+            <a:endParaRPr lang="en-US"/>
+          </a:p>
+        </p:txBody>
+      </p:sp>
+    </p:spTree>
+    <p:extLst>
+      <p:ext uri="{BB962C8B-B14F-4D97-AF65-F5344CB8AC3E}">
+        <p14:creationId xmlns:p14="http://schemas.microsoft.com/office/powerpoint/2010/main" val="1024086991"/>
+      </p:ext>
+    </p:extLst>
+  </p:cSld>
+  <p:clrMapOvr>
+    <a:masterClrMapping/>
+  </p:clrMapOvr>
+</p:notes>
+</file>
+
+<file path=ppt/notesSlides/notesSlide25.xml><?xml version="1.0" encoding="utf-8"?>
+<p:notes xmlns:a="http://schemas.openxmlformats.org/drawingml/2006/main" xmlns:r="http://schemas.openxmlformats.org/officeDocument/2006/relationships" xmlns:p="http://schemas.openxmlformats.org/presentationml/2006/main">
+  <p:cSld>
+    <p:spTree>
+      <p:nvGrpSpPr>
+        <p:cNvPr id="1" name=""/>
+        <p:cNvGrpSpPr/>
+        <p:nvPr/>
+      </p:nvGrpSpPr>
+      <p:grpSpPr>
+        <a:xfrm>
+          <a:off x="0" y="0"/>
+          <a:ext cx="0" cy="0"/>
+          <a:chOff x="0" y="0"/>
+          <a:chExt cx="0" cy="0"/>
+        </a:xfrm>
+      </p:grpSpPr>
+      <p:sp>
+        <p:nvSpPr>
+          <p:cNvPr id="2" name="Slide Image Placeholder 1"/>
+          <p:cNvSpPr>
+            <a:spLocks noGrp="1" noRot="1" noChangeAspect="1"/>
+          </p:cNvSpPr>
+          <p:nvPr>
+            <p:ph type="sldImg"/>
+          </p:nvPr>
+        </p:nvSpPr>
+        <p:spPr/>
+      </p:sp>
+      <p:sp>
+        <p:nvSpPr>
+          <p:cNvPr id="3" name="Notes Placeholder 2"/>
+          <p:cNvSpPr>
+            <a:spLocks noGrp="1"/>
+          </p:cNvSpPr>
+          <p:nvPr>
+            <p:ph type="body" idx="1"/>
+          </p:nvPr>
+        </p:nvSpPr>
+        <p:spPr/>
+        <p:txBody>
+          <a:bodyPr/>
+          <a:lstStyle/>
+          <a:p>
+            <a:r>
+              <a:rPr lang="en-US" dirty="0"/>
+              <a:t/>
+            </a:r>
+            <a:endParaRPr lang="en-US" dirty="0"/>
+          </a:p>
+        </p:txBody>
+      </p:sp>
+      <p:sp>
+        <p:nvSpPr>
+          <p:cNvPr id="4" name="Slide Number Placeholder 3"/>
+          <p:cNvSpPr>
+            <a:spLocks noGrp="1"/>
+          </p:cNvSpPr>
+          <p:nvPr>
+            <p:ph type="sldNum" sz="quarter" idx="10"/>
+          </p:nvPr>
+        </p:nvSpPr>
+        <p:spPr/>
+        <p:txBody>
+          <a:bodyPr/>
+          <a:lstStyle/>
+          <a:p>
+            <a:fld id="{F7021451-1387-4CA6-816F-3879F97B5CBC}" type="slidenum">
+              <a:rPr lang="en-US"/>
+              <a:t>25</a:t>
             </a:fld>
             <a:endParaRPr lang="en-US"/>
           </a:p>
@@ -8076,7 +9008,7 @@
     <p:bg>
       <p:bgPr>
         <a:solidFill>
-          <a:srgbClr val="FFFFFF"/>
+          <a:srgbClr val="86BC25"/>
         </a:solidFill>
       </p:bgPr>
     </p:bg>
@@ -8102,8 +9034,8 @@
         </p:nvSpPr>
         <p:spPr>
           <a:xfrm>
-            <a:off x="502006" y="256032"/>
-            <a:ext cx="11188598" cy="310896"/>
+            <a:off x="502920" y="1699870"/>
+            <a:ext cx="10415016" cy="1591970"/>
           </a:xfrm>
           <a:prstGeom prst="rect">
             <a:avLst/>
@@ -8112,24 +9044,24 @@
           <a:ln/>
         </p:spPr>
         <p:txBody>
-          <a:bodyPr wrap="square" lIns="0" tIns="0" rIns="0" bIns="0" rtlCol="0" anchor="t"/>
-          <a:lstStyle/>
-          <a:p>
-            <a:pPr algn="l" indent="0" marL="0">
-              <a:buNone/>
-            </a:pPr>
-            <a:r>
-              <a:rPr lang="en-US" sz="1900" b="1" dirty="0">
-                <a:solidFill>
-                  <a:srgbClr val="000000"/>
-                </a:solidFill>
-                <a:latin typeface="Calibri" pitchFamily="34" charset="0"/>
-                <a:ea typeface="Calibri" pitchFamily="34" charset="-122"/>
-                <a:cs typeface="Calibri" pitchFamily="34" charset="-120"/>
-              </a:rPr>
-              <a:t>Biggest Barriers to Effective Information Sharing</a:t>
-            </a:r>
-            <a:endParaRPr lang="en-US" sz="1900" dirty="0"/>
+          <a:bodyPr wrap="square" lIns="0" tIns="0" rIns="0" bIns="0" rtlCol="0" anchor="b"/>
+          <a:lstStyle/>
+          <a:p>
+            <a:pPr algn="l" indent="0" marL="0">
+              <a:buNone/>
+            </a:pPr>
+            <a:r>
+              <a:rPr lang="en-US" sz="3600" b="1" dirty="0">
+                <a:solidFill>
+                  <a:srgbClr val="FFFFFF"/>
+                </a:solidFill>
+                <a:latin typeface="Calibri" pitchFamily="34" charset="0"/>
+                <a:ea typeface="Calibri" pitchFamily="34" charset="-122"/>
+                <a:cs typeface="Calibri" pitchFamily="34" charset="-120"/>
+              </a:rPr>
+              <a:t>2. Fraud Information Sharing</a:t>
+            </a:r>
+            <a:endParaRPr lang="en-US" sz="3600" dirty="0"/>
           </a:p>
         </p:txBody>
       </p:sp>
@@ -8141,8 +9073,8 @@
         </p:nvSpPr>
         <p:spPr>
           <a:xfrm>
-            <a:off x="502006" y="585216"/>
-            <a:ext cx="11188598" cy="713232"/>
+            <a:off x="502920" y="3423514"/>
+            <a:ext cx="10415016" cy="1563624"/>
           </a:xfrm>
           <a:prstGeom prst="rect">
             <a:avLst/>
@@ -8156,58 +9088,35 @@
           <a:p>
             <a:pPr algn="l" indent="0" marL="0">
               <a:lnSpc>
-                <a:spcPct val="105000"/>
+                <a:spcPct val="110000"/>
               </a:lnSpc>
               <a:buNone/>
             </a:pPr>
             <a:r>
-              <a:rPr lang="en-US" sz="1350" b="1" dirty="0">
-                <a:solidFill>
-                  <a:srgbClr val="046A38"/>
-                </a:solidFill>
-                <a:latin typeface="Calibri" pitchFamily="34" charset="0"/>
-                <a:ea typeface="Calibri" pitchFamily="34" charset="-122"/>
-                <a:cs typeface="Calibri" pitchFamily="34" charset="-120"/>
-              </a:rPr>
-              <a:t>What's blocking sharing is structural — messy, inconsistent data even more than legal rules — not unwillingness.</a:t>
-            </a:r>
-            <a:endParaRPr lang="en-US" sz="1350" dirty="0"/>
-          </a:p>
-        </p:txBody>
-      </p:sp>
-      <p:sp>
-        <p:nvSpPr>
-          <p:cNvPr id="4" name="Shape 2"/>
-          <p:cNvSpPr/>
-          <p:nvPr/>
-        </p:nvSpPr>
-        <p:spPr>
-          <a:xfrm>
-            <a:off x="502006" y="1335024"/>
-            <a:ext cx="0" cy="512064"/>
-          </a:xfrm>
-          <a:prstGeom prst="line">
-            <a:avLst/>
-          </a:prstGeom>
-          <a:noFill/>
-          <a:ln w="25400">
-            <a:solidFill>
-              <a:srgbClr val="D0D0CE"/>
-            </a:solidFill>
-            <a:prstDash val="solid"/>
-          </a:ln>
-        </p:spPr>
-      </p:sp>
-      <p:sp>
-        <p:nvSpPr>
-          <p:cNvPr id="5" name="Text 3"/>
+              <a:rPr lang="en-US" sz="1600" dirty="0">
+                <a:solidFill>
+                  <a:srgbClr val="FFFFFF"/>
+                </a:solidFill>
+                <a:latin typeface="Calibri" pitchFamily="34" charset="0"/>
+                <a:ea typeface="Calibri" pitchFamily="34" charset="-122"/>
+                <a:cs typeface="Calibri" pitchFamily="34" charset="-120"/>
+              </a:rPr>
+              <a:t>What's blocking industry-wide information sharing, and what leaders want government to do about it.</a:t>
+            </a:r>
+            <a:endParaRPr lang="en-US" sz="1600" dirty="0"/>
+          </a:p>
+        </p:txBody>
+      </p:sp>
+      <p:sp>
+        <p:nvSpPr>
+          <p:cNvPr id="4" name="Text 2"/>
           <p:cNvSpPr txBox="1"/>
           <p:nvPr/>
         </p:nvSpPr>
         <p:spPr>
           <a:xfrm>
-            <a:off x="648310" y="1335024"/>
-            <a:ext cx="11042294" cy="512064"/>
+            <a:off x="11346790" y="6537960"/>
+            <a:ext cx="343814" cy="182880"/>
           </a:xfrm>
           <a:prstGeom prst="rect">
             <a:avLst/>
@@ -8216,65 +9125,6 @@
           <a:ln/>
         </p:spPr>
         <p:txBody>
-          <a:bodyPr wrap="square" lIns="0" tIns="0" rIns="0" bIns="0" rtlCol="0" anchor="t"/>
-          <a:lstStyle/>
-          <a:p>
-            <a:pPr algn="l" indent="0" marL="0">
-              <a:lnSpc>
-                <a:spcPct val="106000"/>
-              </a:lnSpc>
-              <a:buNone/>
-            </a:pPr>
-            <a:r>
-              <a:rPr lang="en-US" sz="900" b="1" dirty="0">
-                <a:solidFill>
-                  <a:srgbClr val="046A38"/>
-                </a:solidFill>
-                <a:latin typeface="IBM Plex Mono" pitchFamily="34" charset="0"/>
-                <a:ea typeface="IBM Plex Mono" pitchFamily="34" charset="-122"/>
-                <a:cs typeface="IBM Plex Mono" pitchFamily="34" charset="-120"/>
-              </a:rPr>
-              <a:t>Q5  </a:t>
-            </a:r>
-            <a:pPr algn="l" indent="0" marL="0">
-              <a:lnSpc>
-                <a:spcPct val="106000"/>
-              </a:lnSpc>
-              <a:buNone/>
-            </a:pPr>
-            <a:r>
-              <a:rPr lang="en-US" sz="1000" i="1" dirty="0">
-                <a:solidFill>
-                  <a:srgbClr val="575757"/>
-                </a:solidFill>
-                <a:latin typeface="Calibri" pitchFamily="34" charset="0"/>
-                <a:ea typeface="Calibri" pitchFamily="34" charset="-122"/>
-                <a:cs typeface="Calibri" pitchFamily="34" charset="-120"/>
-              </a:rPr>
-              <a:t>“What are the biggest barriers to enable effective fraud information sharing?”</a:t>
-            </a:r>
-            <a:endParaRPr lang="en-US" sz="1000" dirty="0"/>
-          </a:p>
-        </p:txBody>
-      </p:sp>
-      <p:sp>
-        <p:nvSpPr>
-          <p:cNvPr id="6" name="Text 4"/>
-          <p:cNvSpPr txBox="1"/>
-          <p:nvPr/>
-        </p:nvSpPr>
-        <p:spPr>
-          <a:xfrm>
-            <a:off x="11346790" y="6537960"/>
-            <a:ext cx="343814" cy="182880"/>
-          </a:xfrm>
-          <a:prstGeom prst="rect">
-            <a:avLst/>
-          </a:prstGeom>
-          <a:noFill/>
-          <a:ln/>
-        </p:spPr>
-        <p:txBody>
           <a:bodyPr wrap="square" rtlCol="0" anchor="ctr"/>
           <a:lstStyle/>
           <a:p>
@@ -8284,7 +9134,7 @@
             <a:r>
               <a:rPr lang="en-US" sz="900" dirty="0">
                 <a:solidFill>
-                  <a:srgbClr val="53565A"/>
+                  <a:srgbClr val="FFFFFF"/>
                 </a:solidFill>
                 <a:latin typeface="Calibri" pitchFamily="34" charset="0"/>
                 <a:ea typeface="Calibri" pitchFamily="34" charset="-122"/>
@@ -8293,291 +9143,6 @@
               <a:t>9</a:t>
             </a:r>
             <a:endParaRPr lang="en-US" sz="900" dirty="0"/>
-          </a:p>
-        </p:txBody>
-      </p:sp>
-      <p:graphicFrame>
-        <p:nvGraphicFramePr>
-          <p:cNvPr id="7" name="Chart 0" descr=""/>
-          <p:cNvGraphicFramePr/>
-          <p:nvPr/>
-        </p:nvGraphicFramePr>
-        <p:xfrm>
-          <a:off x="502006" y="2011680"/>
-          <a:ext cx="11188598" cy="3063240"/>
-        </p:xfrm>
-        <a:graphic xmlns:a="http://schemas.openxmlformats.org/drawingml/2006/main">
-          <a:graphicData uri="http://schemas.openxmlformats.org/drawingml/2006/chart">
-            <c:chart xmlns:c="http://schemas.openxmlformats.org/drawingml/2006/chart" r:id="rId1"/>
-          </a:graphicData>
-        </a:graphic>
-      </p:graphicFrame>
-      <p:sp>
-        <p:nvSpPr>
-          <p:cNvPr id="8" name="Shape 5"/>
-          <p:cNvSpPr/>
-          <p:nvPr/>
-        </p:nvSpPr>
-        <p:spPr>
-          <a:xfrm>
-            <a:off x="502006" y="5202936"/>
-            <a:ext cx="11188598" cy="0"/>
-          </a:xfrm>
-          <a:prstGeom prst="line">
-            <a:avLst/>
-          </a:prstGeom>
-          <a:noFill/>
-          <a:ln w="9525">
-            <a:solidFill>
-              <a:srgbClr val="D0D0CE"/>
-            </a:solidFill>
-            <a:prstDash val="solid"/>
-          </a:ln>
-        </p:spPr>
-      </p:sp>
-      <p:sp>
-        <p:nvSpPr>
-          <p:cNvPr id="9" name="Text 6"/>
-          <p:cNvSpPr txBox="1"/>
-          <p:nvPr/>
-        </p:nvSpPr>
-        <p:spPr>
-          <a:xfrm>
-            <a:off x="502006" y="5276088"/>
-            <a:ext cx="11188598" cy="886968"/>
-          </a:xfrm>
-          <a:prstGeom prst="rect">
-            <a:avLst/>
-          </a:prstGeom>
-          <a:noFill/>
-          <a:ln/>
-        </p:spPr>
-        <p:txBody>
-          <a:bodyPr wrap="square" lIns="0" tIns="0" rIns="0" bIns="0" rtlCol="0" anchor="t"/>
-          <a:lstStyle/>
-          <a:p>
-            <a:pPr algn="l" indent="0" marL="0">
-              <a:lnSpc>
-                <a:spcPct val="118000"/>
-              </a:lnSpc>
-              <a:buNone/>
-            </a:pPr>
-            <a:r>
-              <a:rPr lang="en-US" sz="850" b="1" dirty="0">
-                <a:solidFill>
-                  <a:srgbClr val="53565A"/>
-                </a:solidFill>
-                <a:latin typeface="Calibri" pitchFamily="34" charset="0"/>
-                <a:ea typeface="Calibri" pitchFamily="34" charset="-122"/>
-                <a:cs typeface="Calibri" pitchFamily="34" charset="-120"/>
-              </a:rPr>
-              <a:t>Ranked top 3 — shown as % of respondents who placed the option anywhere in their top 3 (not mutually exclusive; bars don't sum to 100%).  </a:t>
-            </a:r>
-            <a:pPr algn="l" indent="0" marL="0">
-              <a:lnSpc>
-                <a:spcPct val="118000"/>
-              </a:lnSpc>
-              <a:buNone/>
-            </a:pPr>
-            <a:r>
-              <a:rPr lang="en-US" sz="850" b="1" dirty="0">
-                <a:solidFill>
-                  <a:srgbClr val="53565A"/>
-                </a:solidFill>
-                <a:latin typeface="Calibri" pitchFamily="34" charset="0"/>
-                <a:ea typeface="Calibri" pitchFamily="34" charset="-122"/>
-                <a:cs typeface="Calibri" pitchFamily="34" charset="-120"/>
-              </a:rPr>
-              <a:t>Response options as fielded: </a:t>
-            </a:r>
-            <a:pPr algn="l" indent="0" marL="0">
-              <a:lnSpc>
-                <a:spcPct val="118000"/>
-              </a:lnSpc>
-              <a:buNone/>
-            </a:pPr>
-            <a:r>
-              <a:rPr lang="en-US" sz="850" i="1" dirty="0">
-                <a:solidFill>
-                  <a:srgbClr val="53565A"/>
-                </a:solidFill>
-                <a:latin typeface="Calibri" pitchFamily="34" charset="0"/>
-                <a:ea typeface="Calibri" pitchFamily="34" charset="-122"/>
-                <a:cs typeface="Calibri" pitchFamily="34" charset="-120"/>
-              </a:rPr>
-              <a:t>“Legal, privacy, or regulatory constraints”</a:t>
-            </a:r>
-            <a:pPr algn="l" indent="0" marL="0">
-              <a:lnSpc>
-                <a:spcPct val="118000"/>
-              </a:lnSpc>
-              <a:buNone/>
-            </a:pPr>
-            <a:r>
-              <a:rPr lang="en-US" sz="850" dirty="0">
-                <a:solidFill>
-                  <a:srgbClr val="D0D0CE"/>
-                </a:solidFill>
-                <a:latin typeface="Calibri" pitchFamily="34" charset="0"/>
-                <a:ea typeface="Calibri" pitchFamily="34" charset="-122"/>
-                <a:cs typeface="Calibri" pitchFamily="34" charset="-120"/>
-              </a:rPr>
-              <a:t>  ·  </a:t>
-            </a:r>
-            <a:pPr algn="l" indent="0" marL="0">
-              <a:lnSpc>
-                <a:spcPct val="118000"/>
-              </a:lnSpc>
-              <a:buNone/>
-            </a:pPr>
-            <a:r>
-              <a:rPr lang="en-US" sz="850" i="1" dirty="0">
-                <a:solidFill>
-                  <a:srgbClr val="53565A"/>
-                </a:solidFill>
-                <a:latin typeface="Calibri" pitchFamily="34" charset="0"/>
-                <a:ea typeface="Calibri" pitchFamily="34" charset="-122"/>
-                <a:cs typeface="Calibri" pitchFamily="34" charset="-120"/>
-              </a:rPr>
-              <a:t>“Limited data standardization, poor quality, and different definitions”</a:t>
-            </a:r>
-            <a:pPr algn="l" indent="0" marL="0">
-              <a:lnSpc>
-                <a:spcPct val="118000"/>
-              </a:lnSpc>
-              <a:buNone/>
-            </a:pPr>
-            <a:r>
-              <a:rPr lang="en-US" sz="850" dirty="0">
-                <a:solidFill>
-                  <a:srgbClr val="D0D0CE"/>
-                </a:solidFill>
-                <a:latin typeface="Calibri" pitchFamily="34" charset="0"/>
-                <a:ea typeface="Calibri" pitchFamily="34" charset="-122"/>
-                <a:cs typeface="Calibri" pitchFamily="34" charset="-120"/>
-              </a:rPr>
-              <a:t>  ·  </a:t>
-            </a:r>
-            <a:pPr algn="l" indent="0" marL="0">
-              <a:lnSpc>
-                <a:spcPct val="118000"/>
-              </a:lnSpc>
-              <a:buNone/>
-            </a:pPr>
-            <a:r>
-              <a:rPr lang="en-US" sz="850" i="1" dirty="0">
-                <a:solidFill>
-                  <a:srgbClr val="53565A"/>
-                </a:solidFill>
-                <a:latin typeface="Calibri" pitchFamily="34" charset="0"/>
-                <a:ea typeface="Calibri" pitchFamily="34" charset="-122"/>
-                <a:cs typeface="Calibri" pitchFamily="34" charset="-120"/>
-              </a:rPr>
-              <a:t>“Insufficient budget or resource investment”</a:t>
-            </a:r>
-            <a:pPr algn="l" indent="0" marL="0">
-              <a:lnSpc>
-                <a:spcPct val="118000"/>
-              </a:lnSpc>
-              <a:buNone/>
-            </a:pPr>
-            <a:r>
-              <a:rPr lang="en-US" sz="850" dirty="0">
-                <a:solidFill>
-                  <a:srgbClr val="D0D0CE"/>
-                </a:solidFill>
-                <a:latin typeface="Calibri" pitchFamily="34" charset="0"/>
-                <a:ea typeface="Calibri" pitchFamily="34" charset="-122"/>
-                <a:cs typeface="Calibri" pitchFamily="34" charset="-120"/>
-              </a:rPr>
-              <a:t>  ·  </a:t>
-            </a:r>
-            <a:pPr algn="l" indent="0" marL="0">
-              <a:lnSpc>
-                <a:spcPct val="118000"/>
-              </a:lnSpc>
-              <a:buNone/>
-            </a:pPr>
-            <a:r>
-              <a:rPr lang="en-US" sz="850" i="1" dirty="0">
-                <a:solidFill>
-                  <a:srgbClr val="53565A"/>
-                </a:solidFill>
-                <a:latin typeface="Calibri" pitchFamily="34" charset="0"/>
-                <a:ea typeface="Calibri" pitchFamily="34" charset="-122"/>
-                <a:cs typeface="Calibri" pitchFamily="34" charset="-120"/>
-              </a:rPr>
-              <a:t>“Lack of external industry participation or collaboration”</a:t>
-            </a:r>
-            <a:pPr algn="l" indent="0" marL="0">
-              <a:lnSpc>
-                <a:spcPct val="118000"/>
-              </a:lnSpc>
-              <a:buNone/>
-            </a:pPr>
-            <a:r>
-              <a:rPr lang="en-US" sz="850" dirty="0">
-                <a:solidFill>
-                  <a:srgbClr val="D0D0CE"/>
-                </a:solidFill>
-                <a:latin typeface="Calibri" pitchFamily="34" charset="0"/>
-                <a:ea typeface="Calibri" pitchFamily="34" charset="-122"/>
-                <a:cs typeface="Calibri" pitchFamily="34" charset="-120"/>
-              </a:rPr>
-              <a:t>  ·  </a:t>
-            </a:r>
-            <a:pPr algn="l" indent="0" marL="0">
-              <a:lnSpc>
-                <a:spcPct val="118000"/>
-              </a:lnSpc>
-              <a:buNone/>
-            </a:pPr>
-            <a:r>
-              <a:rPr lang="en-US" sz="850" i="1" dirty="0">
-                <a:solidFill>
-                  <a:srgbClr val="53565A"/>
-                </a:solidFill>
-                <a:latin typeface="Calibri" pitchFamily="34" charset="0"/>
-                <a:ea typeface="Calibri" pitchFamily="34" charset="-122"/>
-                <a:cs typeface="Calibri" pitchFamily="34" charset="-120"/>
-              </a:rPr>
-              <a:t>“Unclear internal ownership or governance”</a:t>
-            </a:r>
-            <a:pPr algn="l" indent="0" marL="0">
-              <a:lnSpc>
-                <a:spcPct val="118000"/>
-              </a:lnSpc>
-              <a:buNone/>
-            </a:pPr>
-            <a:r>
-              <a:rPr lang="en-US" sz="850" dirty="0">
-                <a:solidFill>
-                  <a:srgbClr val="D0D0CE"/>
-                </a:solidFill>
-                <a:latin typeface="Calibri" pitchFamily="34" charset="0"/>
-                <a:ea typeface="Calibri" pitchFamily="34" charset="-122"/>
-                <a:cs typeface="Calibri" pitchFamily="34" charset="-120"/>
-              </a:rPr>
-              <a:t>  ·  </a:t>
-            </a:r>
-            <a:pPr algn="l" indent="0" marL="0">
-              <a:lnSpc>
-                <a:spcPct val="118000"/>
-              </a:lnSpc>
-              <a:buNone/>
-            </a:pPr>
-            <a:r>
-              <a:rPr lang="en-US" sz="850" i="1" dirty="0">
-                <a:solidFill>
-                  <a:srgbClr val="53565A"/>
-                </a:solidFill>
-                <a:latin typeface="Calibri" pitchFamily="34" charset="0"/>
-                <a:ea typeface="Calibri" pitchFamily="34" charset="-122"/>
-                <a:cs typeface="Calibri" pitchFamily="34" charset="-120"/>
-              </a:rPr>
-              <a:t>“Difficulty demonstrating ROI or business value”</a:t>
-            </a:r>
-            <a:endParaRPr lang="en-US" sz="850" dirty="0"/>
           </a:p>
         </p:txBody>
       </p:sp>
@@ -8646,7 +9211,7 @@
                 <a:ea typeface="Calibri" pitchFamily="34" charset="-122"/>
                 <a:cs typeface="Calibri" pitchFamily="34" charset="-120"/>
               </a:rPr>
-              <a:t>Government Action With the Greatest Impact on Info Sharing</a:t>
+              <a:t>Biggest Barriers to Effective Information Sharing</a:t>
             </a:r>
             <a:endParaRPr lang="en-US" sz="1900" dirty="0"/>
           </a:p>
@@ -8688,7 +9253,7 @@
                 <a:ea typeface="Calibri" pitchFamily="34" charset="-122"/>
                 <a:cs typeface="Calibri" pitchFamily="34" charset="-120"/>
               </a:rPr>
-              <a:t>Leaders want government to build shared infrastructure, not just pass new laws.</a:t>
+              <a:t>What's blocking sharing is structural — messy, inconsistent data even more than legal rules — not unwillingness.</a:t>
             </a:r>
             <a:endParaRPr lang="en-US" sz="1350" dirty="0"/>
           </a:p>
@@ -8753,7 +9318,7 @@
                 <a:ea typeface="IBM Plex Mono" pitchFamily="34" charset="-122"/>
                 <a:cs typeface="IBM Plex Mono" pitchFamily="34" charset="-120"/>
               </a:rPr>
-              <a:t>Q4  </a:t>
+              <a:t>Q5  </a:t>
             </a:r>
             <a:pPr algn="l" indent="0" marL="0">
               <a:lnSpc>
@@ -8770,7 +9335,7 @@
                 <a:ea typeface="Calibri" pitchFamily="34" charset="-122"/>
                 <a:cs typeface="Calibri" pitchFamily="34" charset="-120"/>
               </a:rPr>
-              <a:t>“What government action would have or has had the greatest impact on enabling more effective fraud information sharing?”</a:t>
+              <a:t>“What are the biggest barriers to enable effective fraud information sharing?”</a:t>
             </a:r>
             <a:endParaRPr lang="en-US" sz="1000" dirty="0"/>
           </a:p>
@@ -8890,7 +9455,7 @@
                 <a:ea typeface="Calibri" pitchFamily="34" charset="-122"/>
                 <a:cs typeface="Calibri" pitchFamily="34" charset="-120"/>
               </a:rPr>
-              <a:t>Single select.  </a:t>
+              <a:t>Ranked top 3 — shown as % of respondents who placed the option anywhere in their top 3 (not mutually exclusive; bars don't sum to 100%).  </a:t>
             </a:r>
             <a:pPr algn="l" indent="0" marL="0">
               <a:lnSpc>
@@ -8924,7 +9489,7 @@
                 <a:ea typeface="Calibri" pitchFamily="34" charset="-122"/>
                 <a:cs typeface="Calibri" pitchFamily="34" charset="-120"/>
               </a:rPr>
-              <a:t>“Establish clearer legal and regulatory frameworks for information sharing”</a:t>
+              <a:t>“Legal, privacy, or regulatory constraints”</a:t>
             </a:r>
             <a:pPr algn="l" indent="0" marL="0">
               <a:lnSpc>
@@ -8958,7 +9523,7 @@
                 <a:ea typeface="Calibri" pitchFamily="34" charset="-122"/>
                 <a:cs typeface="Calibri" pitchFamily="34" charset="-120"/>
               </a:rPr>
-              <a:t>“Develop common data standards and definitions”</a:t>
+              <a:t>“Limited data standardization, poor quality, and different definitions”</a:t>
             </a:r>
             <a:pPr algn="l" indent="0" marL="0">
               <a:lnSpc>
@@ -8992,7 +9557,7 @@
                 <a:ea typeface="Calibri" pitchFamily="34" charset="-122"/>
                 <a:cs typeface="Calibri" pitchFamily="34" charset="-120"/>
               </a:rPr>
-              <a:t>“Create a centralized fraud information-sharing platform or utility”</a:t>
+              <a:t>“Insufficient budget or resource investment”</a:t>
             </a:r>
             <a:pPr algn="l" indent="0" marL="0">
               <a:lnSpc>
@@ -9026,7 +9591,7 @@
                 <a:ea typeface="Calibri" pitchFamily="34" charset="-122"/>
                 <a:cs typeface="Calibri" pitchFamily="34" charset="-120"/>
               </a:rPr>
-              <a:t>“Facilitate greater public-private collaboration and coordination”</a:t>
+              <a:t>“Lack of external industry participation or collaboration”</a:t>
             </a:r>
             <a:pPr algn="l" indent="0" marL="0">
               <a:lnSpc>
@@ -9060,7 +9625,7 @@
                 <a:ea typeface="Calibri" pitchFamily="34" charset="-122"/>
                 <a:cs typeface="Calibri" pitchFamily="34" charset="-120"/>
               </a:rPr>
-              <a:t>“Provide funding or incentives to support participation”</a:t>
+              <a:t>“Unclear internal ownership or governance”</a:t>
             </a:r>
             <a:pPr algn="l" indent="0" marL="0">
               <a:lnSpc>
@@ -9094,7 +9659,7 @@
                 <a:ea typeface="Calibri" pitchFamily="34" charset="-122"/>
                 <a:cs typeface="Calibri" pitchFamily="34" charset="-120"/>
               </a:rPr>
-              <a:t>“Identify and prioritize industry use cases for fraud information sharing”</a:t>
+              <a:t>“Difficulty demonstrating ROI or business value”</a:t>
             </a:r>
             <a:endParaRPr lang="en-US" sz="850" dirty="0"/>
           </a:p>
@@ -9111,6 +9676,525 @@
 <file path=ppt/slides/slide12.xml><?xml version="1.0" encoding="utf-8"?>
 <p:sld xmlns:a="http://schemas.openxmlformats.org/drawingml/2006/main" xmlns:r="http://schemas.openxmlformats.org/officeDocument/2006/relationships" xmlns:p="http://schemas.openxmlformats.org/presentationml/2006/main">
   <p:cSld name="Slide 12">
+    <p:bg>
+      <p:bgPr>
+        <a:solidFill>
+          <a:srgbClr val="FFFFFF"/>
+        </a:solidFill>
+      </p:bgPr>
+    </p:bg>
+    <p:spTree>
+      <p:nvGrpSpPr>
+        <p:cNvPr id="1" name=""/>
+        <p:cNvGrpSpPr/>
+        <p:nvPr/>
+      </p:nvGrpSpPr>
+      <p:grpSpPr>
+        <a:xfrm>
+          <a:off x="0" y="0"/>
+          <a:ext cx="0" cy="0"/>
+          <a:chOff x="0" y="0"/>
+          <a:chExt cx="0" cy="0"/>
+        </a:xfrm>
+      </p:grpSpPr>
+      <p:sp>
+        <p:nvSpPr>
+          <p:cNvPr id="2" name="Text 0"/>
+          <p:cNvSpPr txBox="1"/>
+          <p:nvPr/>
+        </p:nvSpPr>
+        <p:spPr>
+          <a:xfrm>
+            <a:off x="502006" y="256032"/>
+            <a:ext cx="11188598" cy="310896"/>
+          </a:xfrm>
+          <a:prstGeom prst="rect">
+            <a:avLst/>
+          </a:prstGeom>
+          <a:noFill/>
+          <a:ln/>
+        </p:spPr>
+        <p:txBody>
+          <a:bodyPr wrap="square" lIns="0" tIns="0" rIns="0" bIns="0" rtlCol="0" anchor="t"/>
+          <a:lstStyle/>
+          <a:p>
+            <a:pPr algn="l" indent="0" marL="0">
+              <a:buNone/>
+            </a:pPr>
+            <a:r>
+              <a:rPr lang="en-US" sz="1900" b="1" dirty="0">
+                <a:solidFill>
+                  <a:srgbClr val="000000"/>
+                </a:solidFill>
+                <a:latin typeface="Calibri" pitchFamily="34" charset="0"/>
+                <a:ea typeface="Calibri" pitchFamily="34" charset="-122"/>
+                <a:cs typeface="Calibri" pitchFamily="34" charset="-120"/>
+              </a:rPr>
+              <a:t>Government Action With the Greatest Impact on Info Sharing</a:t>
+            </a:r>
+            <a:endParaRPr lang="en-US" sz="1900" dirty="0"/>
+          </a:p>
+        </p:txBody>
+      </p:sp>
+      <p:sp>
+        <p:nvSpPr>
+          <p:cNvPr id="3" name="Text 1"/>
+          <p:cNvSpPr txBox="1"/>
+          <p:nvPr/>
+        </p:nvSpPr>
+        <p:spPr>
+          <a:xfrm>
+            <a:off x="502006" y="585216"/>
+            <a:ext cx="11188598" cy="713232"/>
+          </a:xfrm>
+          <a:prstGeom prst="rect">
+            <a:avLst/>
+          </a:prstGeom>
+          <a:noFill/>
+          <a:ln/>
+        </p:spPr>
+        <p:txBody>
+          <a:bodyPr wrap="square" lIns="0" tIns="0" rIns="0" bIns="0" rtlCol="0" anchor="t"/>
+          <a:lstStyle/>
+          <a:p>
+            <a:pPr algn="l" indent="0" marL="0">
+              <a:lnSpc>
+                <a:spcPct val="105000"/>
+              </a:lnSpc>
+              <a:buNone/>
+            </a:pPr>
+            <a:r>
+              <a:rPr lang="en-US" sz="1350" b="1" dirty="0">
+                <a:solidFill>
+                  <a:srgbClr val="046A38"/>
+                </a:solidFill>
+                <a:latin typeface="Calibri" pitchFamily="34" charset="0"/>
+                <a:ea typeface="Calibri" pitchFamily="34" charset="-122"/>
+                <a:cs typeface="Calibri" pitchFamily="34" charset="-120"/>
+              </a:rPr>
+              <a:t>Leaders want government to build shared infrastructure, not just pass new laws.</a:t>
+            </a:r>
+            <a:endParaRPr lang="en-US" sz="1350" dirty="0"/>
+          </a:p>
+        </p:txBody>
+      </p:sp>
+      <p:sp>
+        <p:nvSpPr>
+          <p:cNvPr id="4" name="Shape 2"/>
+          <p:cNvSpPr/>
+          <p:nvPr/>
+        </p:nvSpPr>
+        <p:spPr>
+          <a:xfrm>
+            <a:off x="502006" y="1335024"/>
+            <a:ext cx="0" cy="512064"/>
+          </a:xfrm>
+          <a:prstGeom prst="line">
+            <a:avLst/>
+          </a:prstGeom>
+          <a:noFill/>
+          <a:ln w="25400">
+            <a:solidFill>
+              <a:srgbClr val="D0D0CE"/>
+            </a:solidFill>
+            <a:prstDash val="solid"/>
+          </a:ln>
+        </p:spPr>
+      </p:sp>
+      <p:sp>
+        <p:nvSpPr>
+          <p:cNvPr id="5" name="Text 3"/>
+          <p:cNvSpPr txBox="1"/>
+          <p:nvPr/>
+        </p:nvSpPr>
+        <p:spPr>
+          <a:xfrm>
+            <a:off x="648310" y="1335024"/>
+            <a:ext cx="11042294" cy="512064"/>
+          </a:xfrm>
+          <a:prstGeom prst="rect">
+            <a:avLst/>
+          </a:prstGeom>
+          <a:noFill/>
+          <a:ln/>
+        </p:spPr>
+        <p:txBody>
+          <a:bodyPr wrap="square" lIns="0" tIns="0" rIns="0" bIns="0" rtlCol="0" anchor="t"/>
+          <a:lstStyle/>
+          <a:p>
+            <a:pPr algn="l" indent="0" marL="0">
+              <a:lnSpc>
+                <a:spcPct val="106000"/>
+              </a:lnSpc>
+              <a:buNone/>
+            </a:pPr>
+            <a:r>
+              <a:rPr lang="en-US" sz="900" b="1" dirty="0">
+                <a:solidFill>
+                  <a:srgbClr val="046A38"/>
+                </a:solidFill>
+                <a:latin typeface="IBM Plex Mono" pitchFamily="34" charset="0"/>
+                <a:ea typeface="IBM Plex Mono" pitchFamily="34" charset="-122"/>
+                <a:cs typeface="IBM Plex Mono" pitchFamily="34" charset="-120"/>
+              </a:rPr>
+              <a:t>Q4  </a:t>
+            </a:r>
+            <a:pPr algn="l" indent="0" marL="0">
+              <a:lnSpc>
+                <a:spcPct val="106000"/>
+              </a:lnSpc>
+              <a:buNone/>
+            </a:pPr>
+            <a:r>
+              <a:rPr lang="en-US" sz="1000" i="1" dirty="0">
+                <a:solidFill>
+                  <a:srgbClr val="575757"/>
+                </a:solidFill>
+                <a:latin typeface="Calibri" pitchFamily="34" charset="0"/>
+                <a:ea typeface="Calibri" pitchFamily="34" charset="-122"/>
+                <a:cs typeface="Calibri" pitchFamily="34" charset="-120"/>
+              </a:rPr>
+              <a:t>“What government action would have or has had the greatest impact on enabling more effective fraud information sharing?”</a:t>
+            </a:r>
+            <a:endParaRPr lang="en-US" sz="1000" dirty="0"/>
+          </a:p>
+        </p:txBody>
+      </p:sp>
+      <p:sp>
+        <p:nvSpPr>
+          <p:cNvPr id="6" name="Text 4"/>
+          <p:cNvSpPr txBox="1"/>
+          <p:nvPr/>
+        </p:nvSpPr>
+        <p:spPr>
+          <a:xfrm>
+            <a:off x="11346790" y="6537960"/>
+            <a:ext cx="343814" cy="182880"/>
+          </a:xfrm>
+          <a:prstGeom prst="rect">
+            <a:avLst/>
+          </a:prstGeom>
+          <a:noFill/>
+          <a:ln/>
+        </p:spPr>
+        <p:txBody>
+          <a:bodyPr wrap="square" rtlCol="0" anchor="ctr"/>
+          <a:lstStyle/>
+          <a:p>
+            <a:pPr algn="r" indent="0" marL="0">
+              <a:buNone/>
+            </a:pPr>
+            <a:r>
+              <a:rPr lang="en-US" sz="900" dirty="0">
+                <a:solidFill>
+                  <a:srgbClr val="53565A"/>
+                </a:solidFill>
+                <a:latin typeface="Calibri" pitchFamily="34" charset="0"/>
+                <a:ea typeface="Calibri" pitchFamily="34" charset="-122"/>
+                <a:cs typeface="Calibri" pitchFamily="34" charset="-120"/>
+              </a:rPr>
+              <a:t>11</a:t>
+            </a:r>
+            <a:endParaRPr lang="en-US" sz="900" dirty="0"/>
+          </a:p>
+        </p:txBody>
+      </p:sp>
+      <p:graphicFrame>
+        <p:nvGraphicFramePr>
+          <p:cNvPr id="7" name="Chart 0" descr=""/>
+          <p:cNvGraphicFramePr/>
+          <p:nvPr/>
+        </p:nvGraphicFramePr>
+        <p:xfrm>
+          <a:off x="502006" y="2011680"/>
+          <a:ext cx="11188598" cy="3063240"/>
+        </p:xfrm>
+        <a:graphic xmlns:a="http://schemas.openxmlformats.org/drawingml/2006/main">
+          <a:graphicData uri="http://schemas.openxmlformats.org/drawingml/2006/chart">
+            <c:chart xmlns:c="http://schemas.openxmlformats.org/drawingml/2006/chart" r:id="rId1"/>
+          </a:graphicData>
+        </a:graphic>
+      </p:graphicFrame>
+      <p:sp>
+        <p:nvSpPr>
+          <p:cNvPr id="8" name="Shape 5"/>
+          <p:cNvSpPr/>
+          <p:nvPr/>
+        </p:nvSpPr>
+        <p:spPr>
+          <a:xfrm>
+            <a:off x="502006" y="5202936"/>
+            <a:ext cx="11188598" cy="0"/>
+          </a:xfrm>
+          <a:prstGeom prst="line">
+            <a:avLst/>
+          </a:prstGeom>
+          <a:noFill/>
+          <a:ln w="9525">
+            <a:solidFill>
+              <a:srgbClr val="D0D0CE"/>
+            </a:solidFill>
+            <a:prstDash val="solid"/>
+          </a:ln>
+        </p:spPr>
+      </p:sp>
+      <p:sp>
+        <p:nvSpPr>
+          <p:cNvPr id="9" name="Text 6"/>
+          <p:cNvSpPr txBox="1"/>
+          <p:nvPr/>
+        </p:nvSpPr>
+        <p:spPr>
+          <a:xfrm>
+            <a:off x="502006" y="5276088"/>
+            <a:ext cx="11188598" cy="886968"/>
+          </a:xfrm>
+          <a:prstGeom prst="rect">
+            <a:avLst/>
+          </a:prstGeom>
+          <a:noFill/>
+          <a:ln/>
+        </p:spPr>
+        <p:txBody>
+          <a:bodyPr wrap="square" lIns="0" tIns="0" rIns="0" bIns="0" rtlCol="0" anchor="t"/>
+          <a:lstStyle/>
+          <a:p>
+            <a:pPr algn="l" indent="0" marL="0">
+              <a:lnSpc>
+                <a:spcPct val="118000"/>
+              </a:lnSpc>
+              <a:buNone/>
+            </a:pPr>
+            <a:r>
+              <a:rPr lang="en-US" sz="850" b="1" dirty="0">
+                <a:solidFill>
+                  <a:srgbClr val="53565A"/>
+                </a:solidFill>
+                <a:latin typeface="Calibri" pitchFamily="34" charset="0"/>
+                <a:ea typeface="Calibri" pitchFamily="34" charset="-122"/>
+                <a:cs typeface="Calibri" pitchFamily="34" charset="-120"/>
+              </a:rPr>
+              <a:t>Single select.  </a:t>
+            </a:r>
+            <a:pPr algn="l" indent="0" marL="0">
+              <a:lnSpc>
+                <a:spcPct val="118000"/>
+              </a:lnSpc>
+              <a:buNone/>
+            </a:pPr>
+            <a:r>
+              <a:rPr lang="en-US" sz="850" b="1" dirty="0">
+                <a:solidFill>
+                  <a:srgbClr val="53565A"/>
+                </a:solidFill>
+                <a:latin typeface="Calibri" pitchFamily="34" charset="0"/>
+                <a:ea typeface="Calibri" pitchFamily="34" charset="-122"/>
+                <a:cs typeface="Calibri" pitchFamily="34" charset="-120"/>
+              </a:rPr>
+              <a:t>Response options as fielded: </a:t>
+            </a:r>
+            <a:pPr algn="l" indent="0" marL="0">
+              <a:lnSpc>
+                <a:spcPct val="118000"/>
+              </a:lnSpc>
+              <a:buNone/>
+            </a:pPr>
+            <a:r>
+              <a:rPr lang="en-US" sz="850" i="1" dirty="0">
+                <a:solidFill>
+                  <a:srgbClr val="53565A"/>
+                </a:solidFill>
+                <a:latin typeface="Calibri" pitchFamily="34" charset="0"/>
+                <a:ea typeface="Calibri" pitchFamily="34" charset="-122"/>
+                <a:cs typeface="Calibri" pitchFamily="34" charset="-120"/>
+              </a:rPr>
+              <a:t>“Establish clearer legal and regulatory frameworks for information sharing”</a:t>
+            </a:r>
+            <a:pPr algn="l" indent="0" marL="0">
+              <a:lnSpc>
+                <a:spcPct val="118000"/>
+              </a:lnSpc>
+              <a:buNone/>
+            </a:pPr>
+            <a:r>
+              <a:rPr lang="en-US" sz="850" dirty="0">
+                <a:solidFill>
+                  <a:srgbClr val="D0D0CE"/>
+                </a:solidFill>
+                <a:latin typeface="Calibri" pitchFamily="34" charset="0"/>
+                <a:ea typeface="Calibri" pitchFamily="34" charset="-122"/>
+                <a:cs typeface="Calibri" pitchFamily="34" charset="-120"/>
+              </a:rPr>
+              <a:t>  ·  </a:t>
+            </a:r>
+            <a:pPr algn="l" indent="0" marL="0">
+              <a:lnSpc>
+                <a:spcPct val="118000"/>
+              </a:lnSpc>
+              <a:buNone/>
+            </a:pPr>
+            <a:r>
+              <a:rPr lang="en-US" sz="850" i="1" dirty="0">
+                <a:solidFill>
+                  <a:srgbClr val="53565A"/>
+                </a:solidFill>
+                <a:latin typeface="Calibri" pitchFamily="34" charset="0"/>
+                <a:ea typeface="Calibri" pitchFamily="34" charset="-122"/>
+                <a:cs typeface="Calibri" pitchFamily="34" charset="-120"/>
+              </a:rPr>
+              <a:t>“Develop common data standards and definitions”</a:t>
+            </a:r>
+            <a:pPr algn="l" indent="0" marL="0">
+              <a:lnSpc>
+                <a:spcPct val="118000"/>
+              </a:lnSpc>
+              <a:buNone/>
+            </a:pPr>
+            <a:r>
+              <a:rPr lang="en-US" sz="850" dirty="0">
+                <a:solidFill>
+                  <a:srgbClr val="D0D0CE"/>
+                </a:solidFill>
+                <a:latin typeface="Calibri" pitchFamily="34" charset="0"/>
+                <a:ea typeface="Calibri" pitchFamily="34" charset="-122"/>
+                <a:cs typeface="Calibri" pitchFamily="34" charset="-120"/>
+              </a:rPr>
+              <a:t>  ·  </a:t>
+            </a:r>
+            <a:pPr algn="l" indent="0" marL="0">
+              <a:lnSpc>
+                <a:spcPct val="118000"/>
+              </a:lnSpc>
+              <a:buNone/>
+            </a:pPr>
+            <a:r>
+              <a:rPr lang="en-US" sz="850" i="1" dirty="0">
+                <a:solidFill>
+                  <a:srgbClr val="53565A"/>
+                </a:solidFill>
+                <a:latin typeface="Calibri" pitchFamily="34" charset="0"/>
+                <a:ea typeface="Calibri" pitchFamily="34" charset="-122"/>
+                <a:cs typeface="Calibri" pitchFamily="34" charset="-120"/>
+              </a:rPr>
+              <a:t>“Create a centralized fraud information-sharing platform or utility”</a:t>
+            </a:r>
+            <a:pPr algn="l" indent="0" marL="0">
+              <a:lnSpc>
+                <a:spcPct val="118000"/>
+              </a:lnSpc>
+              <a:buNone/>
+            </a:pPr>
+            <a:r>
+              <a:rPr lang="en-US" sz="850" dirty="0">
+                <a:solidFill>
+                  <a:srgbClr val="D0D0CE"/>
+                </a:solidFill>
+                <a:latin typeface="Calibri" pitchFamily="34" charset="0"/>
+                <a:ea typeface="Calibri" pitchFamily="34" charset="-122"/>
+                <a:cs typeface="Calibri" pitchFamily="34" charset="-120"/>
+              </a:rPr>
+              <a:t>  ·  </a:t>
+            </a:r>
+            <a:pPr algn="l" indent="0" marL="0">
+              <a:lnSpc>
+                <a:spcPct val="118000"/>
+              </a:lnSpc>
+              <a:buNone/>
+            </a:pPr>
+            <a:r>
+              <a:rPr lang="en-US" sz="850" i="1" dirty="0">
+                <a:solidFill>
+                  <a:srgbClr val="53565A"/>
+                </a:solidFill>
+                <a:latin typeface="Calibri" pitchFamily="34" charset="0"/>
+                <a:ea typeface="Calibri" pitchFamily="34" charset="-122"/>
+                <a:cs typeface="Calibri" pitchFamily="34" charset="-120"/>
+              </a:rPr>
+              <a:t>“Facilitate greater public-private collaboration and coordination”</a:t>
+            </a:r>
+            <a:pPr algn="l" indent="0" marL="0">
+              <a:lnSpc>
+                <a:spcPct val="118000"/>
+              </a:lnSpc>
+              <a:buNone/>
+            </a:pPr>
+            <a:r>
+              <a:rPr lang="en-US" sz="850" dirty="0">
+                <a:solidFill>
+                  <a:srgbClr val="D0D0CE"/>
+                </a:solidFill>
+                <a:latin typeface="Calibri" pitchFamily="34" charset="0"/>
+                <a:ea typeface="Calibri" pitchFamily="34" charset="-122"/>
+                <a:cs typeface="Calibri" pitchFamily="34" charset="-120"/>
+              </a:rPr>
+              <a:t>  ·  </a:t>
+            </a:r>
+            <a:pPr algn="l" indent="0" marL="0">
+              <a:lnSpc>
+                <a:spcPct val="118000"/>
+              </a:lnSpc>
+              <a:buNone/>
+            </a:pPr>
+            <a:r>
+              <a:rPr lang="en-US" sz="850" i="1" dirty="0">
+                <a:solidFill>
+                  <a:srgbClr val="53565A"/>
+                </a:solidFill>
+                <a:latin typeface="Calibri" pitchFamily="34" charset="0"/>
+                <a:ea typeface="Calibri" pitchFamily="34" charset="-122"/>
+                <a:cs typeface="Calibri" pitchFamily="34" charset="-120"/>
+              </a:rPr>
+              <a:t>“Provide funding or incentives to support participation”</a:t>
+            </a:r>
+            <a:pPr algn="l" indent="0" marL="0">
+              <a:lnSpc>
+                <a:spcPct val="118000"/>
+              </a:lnSpc>
+              <a:buNone/>
+            </a:pPr>
+            <a:r>
+              <a:rPr lang="en-US" sz="850" dirty="0">
+                <a:solidFill>
+                  <a:srgbClr val="D0D0CE"/>
+                </a:solidFill>
+                <a:latin typeface="Calibri" pitchFamily="34" charset="0"/>
+                <a:ea typeface="Calibri" pitchFamily="34" charset="-122"/>
+                <a:cs typeface="Calibri" pitchFamily="34" charset="-120"/>
+              </a:rPr>
+              <a:t>  ·  </a:t>
+            </a:r>
+            <a:pPr algn="l" indent="0" marL="0">
+              <a:lnSpc>
+                <a:spcPct val="118000"/>
+              </a:lnSpc>
+              <a:buNone/>
+            </a:pPr>
+            <a:r>
+              <a:rPr lang="en-US" sz="850" i="1" dirty="0">
+                <a:solidFill>
+                  <a:srgbClr val="53565A"/>
+                </a:solidFill>
+                <a:latin typeface="Calibri" pitchFamily="34" charset="0"/>
+                <a:ea typeface="Calibri" pitchFamily="34" charset="-122"/>
+                <a:cs typeface="Calibri" pitchFamily="34" charset="-120"/>
+              </a:rPr>
+              <a:t>“Identify and prioritize industry use cases for fraud information sharing”</a:t>
+            </a:r>
+            <a:endParaRPr lang="en-US" sz="850" dirty="0"/>
+          </a:p>
+        </p:txBody>
+      </p:sp>
+    </p:spTree>
+  </p:cSld>
+  <p:clrMapOvr>
+    <a:masterClrMapping/>
+  </p:clrMapOvr>
+</p:sld>
+</file>
+
+<file path=ppt/slides/slide13.xml><?xml version="1.0" encoding="utf-8"?>
+<p:sld xmlns:a="http://schemas.openxmlformats.org/drawingml/2006/main" xmlns:r="http://schemas.openxmlformats.org/officeDocument/2006/relationships" xmlns:p="http://schemas.openxmlformats.org/presentationml/2006/main">
+  <p:cSld name="Slide 13">
     <p:bg>
       <p:bgPr>
         <a:solidFill>
@@ -9246,486 +10330,9 @@
                 <a:ea typeface="Calibri" pitchFamily="34" charset="-122"/>
                 <a:cs typeface="Calibri" pitchFamily="34" charset="-120"/>
               </a:rPr>
-              <a:t>11</a:t>
+              <a:t>12</a:t>
             </a:r>
             <a:endParaRPr lang="en-US" sz="900" dirty="0"/>
-          </a:p>
-        </p:txBody>
-      </p:sp>
-    </p:spTree>
-  </p:cSld>
-  <p:clrMapOvr>
-    <a:masterClrMapping/>
-  </p:clrMapOvr>
-</p:sld>
-</file>
-
-<file path=ppt/slides/slide13.xml><?xml version="1.0" encoding="utf-8"?>
-<p:sld xmlns:a="http://schemas.openxmlformats.org/drawingml/2006/main" xmlns:r="http://schemas.openxmlformats.org/officeDocument/2006/relationships" xmlns:p="http://schemas.openxmlformats.org/presentationml/2006/main">
-  <p:cSld name="Slide 13">
-    <p:bg>
-      <p:bgPr>
-        <a:solidFill>
-          <a:srgbClr val="FFFFFF"/>
-        </a:solidFill>
-      </p:bgPr>
-    </p:bg>
-    <p:spTree>
-      <p:nvGrpSpPr>
-        <p:cNvPr id="1" name=""/>
-        <p:cNvGrpSpPr/>
-        <p:nvPr/>
-      </p:nvGrpSpPr>
-      <p:grpSpPr>
-        <a:xfrm>
-          <a:off x="0" y="0"/>
-          <a:ext cx="0" cy="0"/>
-          <a:chOff x="0" y="0"/>
-          <a:chExt cx="0" cy="0"/>
-        </a:xfrm>
-      </p:grpSpPr>
-      <p:sp>
-        <p:nvSpPr>
-          <p:cNvPr id="2" name="Text 0"/>
-          <p:cNvSpPr txBox="1"/>
-          <p:nvPr/>
-        </p:nvSpPr>
-        <p:spPr>
-          <a:xfrm>
-            <a:off x="502006" y="256032"/>
-            <a:ext cx="11188598" cy="310896"/>
-          </a:xfrm>
-          <a:prstGeom prst="rect">
-            <a:avLst/>
-          </a:prstGeom>
-          <a:noFill/>
-          <a:ln/>
-        </p:spPr>
-        <p:txBody>
-          <a:bodyPr wrap="square" lIns="0" tIns="0" rIns="0" bIns="0" rtlCol="0" anchor="t"/>
-          <a:lstStyle/>
-          <a:p>
-            <a:pPr algn="l" indent="0" marL="0">
-              <a:buNone/>
-            </a:pPr>
-            <a:r>
-              <a:rPr lang="en-US" sz="1900" b="1" dirty="0">
-                <a:solidFill>
-                  <a:srgbClr val="000000"/>
-                </a:solidFill>
-                <a:latin typeface="Calibri" pitchFamily="34" charset="0"/>
-                <a:ea typeface="Calibri" pitchFamily="34" charset="-122"/>
-                <a:cs typeface="Calibri" pitchFamily="34" charset="-120"/>
-              </a:rPr>
-              <a:t>Greatest Third-Party Fraud Risk Exposure, by Sector</a:t>
-            </a:r>
-            <a:endParaRPr lang="en-US" sz="1900" dirty="0"/>
-          </a:p>
-        </p:txBody>
-      </p:sp>
-      <p:sp>
-        <p:nvSpPr>
-          <p:cNvPr id="3" name="Text 1"/>
-          <p:cNvSpPr txBox="1"/>
-          <p:nvPr/>
-        </p:nvSpPr>
-        <p:spPr>
-          <a:xfrm>
-            <a:off x="502006" y="585216"/>
-            <a:ext cx="11188598" cy="713232"/>
-          </a:xfrm>
-          <a:prstGeom prst="rect">
-            <a:avLst/>
-          </a:prstGeom>
-          <a:noFill/>
-          <a:ln/>
-        </p:spPr>
-        <p:txBody>
-          <a:bodyPr wrap="square" lIns="0" tIns="0" rIns="0" bIns="0" rtlCol="0" anchor="t"/>
-          <a:lstStyle/>
-          <a:p>
-            <a:pPr algn="l" indent="0" marL="0">
-              <a:lnSpc>
-                <a:spcPct val="105000"/>
-              </a:lnSpc>
-              <a:buNone/>
-            </a:pPr>
-            <a:r>
-              <a:rPr lang="en-US" sz="1350" b="1" dirty="0">
-                <a:solidFill>
-                  <a:srgbClr val="046A38"/>
-                </a:solidFill>
-                <a:latin typeface="Calibri" pitchFamily="34" charset="0"/>
-                <a:ea typeface="Calibri" pitchFamily="34" charset="-122"/>
-                <a:cs typeface="Calibri" pitchFamily="34" charset="-120"/>
-              </a:rPr>
-              <a:t>Banks and insurers face very different third-party risks — one fix won't work for both.</a:t>
-            </a:r>
-            <a:endParaRPr lang="en-US" sz="1350" dirty="0"/>
-          </a:p>
-        </p:txBody>
-      </p:sp>
-      <p:sp>
-        <p:nvSpPr>
-          <p:cNvPr id="4" name="Shape 2"/>
-          <p:cNvSpPr/>
-          <p:nvPr/>
-        </p:nvSpPr>
-        <p:spPr>
-          <a:xfrm>
-            <a:off x="502006" y="1335024"/>
-            <a:ext cx="0" cy="512064"/>
-          </a:xfrm>
-          <a:prstGeom prst="line">
-            <a:avLst/>
-          </a:prstGeom>
-          <a:noFill/>
-          <a:ln w="25400">
-            <a:solidFill>
-              <a:srgbClr val="D0D0CE"/>
-            </a:solidFill>
-            <a:prstDash val="solid"/>
-          </a:ln>
-        </p:spPr>
-      </p:sp>
-      <p:sp>
-        <p:nvSpPr>
-          <p:cNvPr id="5" name="Text 3"/>
-          <p:cNvSpPr txBox="1"/>
-          <p:nvPr/>
-        </p:nvSpPr>
-        <p:spPr>
-          <a:xfrm>
-            <a:off x="648310" y="1335024"/>
-            <a:ext cx="11042294" cy="512064"/>
-          </a:xfrm>
-          <a:prstGeom prst="rect">
-            <a:avLst/>
-          </a:prstGeom>
-          <a:noFill/>
-          <a:ln/>
-        </p:spPr>
-        <p:txBody>
-          <a:bodyPr wrap="square" lIns="0" tIns="0" rIns="0" bIns="0" rtlCol="0" anchor="t"/>
-          <a:lstStyle/>
-          <a:p>
-            <a:pPr algn="l" indent="0" marL="0">
-              <a:lnSpc>
-                <a:spcPct val="106000"/>
-              </a:lnSpc>
-              <a:buNone/>
-            </a:pPr>
-            <a:r>
-              <a:rPr lang="en-US" sz="900" b="1" dirty="0">
-                <a:solidFill>
-                  <a:srgbClr val="046A38"/>
-                </a:solidFill>
-                <a:latin typeface="IBM Plex Mono" pitchFamily="34" charset="0"/>
-                <a:ea typeface="IBM Plex Mono" pitchFamily="34" charset="-122"/>
-                <a:cs typeface="IBM Plex Mono" pitchFamily="34" charset="-120"/>
-              </a:rPr>
-              <a:t>Q6a / Q6b  </a:t>
-            </a:r>
-            <a:pPr algn="l" indent="0" marL="0">
-              <a:lnSpc>
-                <a:spcPct val="106000"/>
-              </a:lnSpc>
-              <a:buNone/>
-            </a:pPr>
-            <a:r>
-              <a:rPr lang="en-US" sz="1000" i="1" dirty="0">
-                <a:solidFill>
-                  <a:srgbClr val="575757"/>
-                </a:solidFill>
-                <a:latin typeface="Calibri" pitchFamily="34" charset="0"/>
-                <a:ea typeface="Calibri" pitchFamily="34" charset="-122"/>
-                <a:cs typeface="Calibri" pitchFamily="34" charset="-120"/>
-              </a:rPr>
-              <a:t>“Which external party currently presents the greatest fraud risk exposure to your organization? (asked separately of Banking and Insurance respondents)”</a:t>
-            </a:r>
-            <a:endParaRPr lang="en-US" sz="1000" dirty="0"/>
-          </a:p>
-        </p:txBody>
-      </p:sp>
-      <p:sp>
-        <p:nvSpPr>
-          <p:cNvPr id="6" name="Text 4"/>
-          <p:cNvSpPr txBox="1"/>
-          <p:nvPr/>
-        </p:nvSpPr>
-        <p:spPr>
-          <a:xfrm>
-            <a:off x="11346790" y="6537960"/>
-            <a:ext cx="343814" cy="182880"/>
-          </a:xfrm>
-          <a:prstGeom prst="rect">
-            <a:avLst/>
-          </a:prstGeom>
-          <a:noFill/>
-          <a:ln/>
-        </p:spPr>
-        <p:txBody>
-          <a:bodyPr wrap="square" rtlCol="0" anchor="ctr"/>
-          <a:lstStyle/>
-          <a:p>
-            <a:pPr algn="r" indent="0" marL="0">
-              <a:buNone/>
-            </a:pPr>
-            <a:r>
-              <a:rPr lang="en-US" sz="900" dirty="0">
-                <a:solidFill>
-                  <a:srgbClr val="53565A"/>
-                </a:solidFill>
-                <a:latin typeface="Calibri" pitchFamily="34" charset="0"/>
-                <a:ea typeface="Calibri" pitchFamily="34" charset="-122"/>
-                <a:cs typeface="Calibri" pitchFamily="34" charset="-120"/>
-              </a:rPr>
-              <a:t>12</a:t>
-            </a:r>
-            <a:endParaRPr lang="en-US" sz="900" dirty="0"/>
-          </a:p>
-        </p:txBody>
-      </p:sp>
-      <p:sp>
-        <p:nvSpPr>
-          <p:cNvPr id="7" name="Text 5"/>
-          <p:cNvSpPr txBox="1"/>
-          <p:nvPr/>
-        </p:nvSpPr>
-        <p:spPr>
-          <a:xfrm>
-            <a:off x="502006" y="1965960"/>
-            <a:ext cx="5486400" cy="256032"/>
-          </a:xfrm>
-          <a:prstGeom prst="rect">
-            <a:avLst/>
-          </a:prstGeom>
-          <a:noFill/>
-          <a:ln/>
-        </p:spPr>
-        <p:txBody>
-          <a:bodyPr wrap="square" rtlCol="0" anchor="ctr"/>
-          <a:lstStyle/>
-          <a:p>
-            <a:pPr indent="0" marL="0">
-              <a:buNone/>
-            </a:pPr>
-            <a:r>
-              <a:rPr lang="en-US" sz="1150" b="1" dirty="0">
-                <a:solidFill>
-                  <a:srgbClr val="000000"/>
-                </a:solidFill>
-                <a:latin typeface="Calibri" pitchFamily="34" charset="0"/>
-                <a:ea typeface="Calibri" pitchFamily="34" charset="-122"/>
-                <a:cs typeface="Calibri" pitchFamily="34" charset="-120"/>
-              </a:rPr>
-              <a:t>Banking (n=75)</a:t>
-            </a:r>
-            <a:endParaRPr lang="en-US" sz="1150" dirty="0"/>
-          </a:p>
-        </p:txBody>
-      </p:sp>
-      <p:graphicFrame>
-        <p:nvGraphicFramePr>
-          <p:cNvPr id="8" name="Chart 0" descr=""/>
-          <p:cNvGraphicFramePr/>
-          <p:nvPr/>
-        </p:nvGraphicFramePr>
-        <p:xfrm>
-          <a:off x="502006" y="2267712"/>
-          <a:ext cx="5486400" cy="2743200"/>
-        </p:xfrm>
-        <a:graphic xmlns:a="http://schemas.openxmlformats.org/drawingml/2006/main">
-          <a:graphicData uri="http://schemas.openxmlformats.org/drawingml/2006/chart">
-            <c:chart xmlns:c="http://schemas.openxmlformats.org/drawingml/2006/chart" r:id="rId1"/>
-          </a:graphicData>
-        </a:graphic>
-      </p:graphicFrame>
-      <p:sp>
-        <p:nvSpPr>
-          <p:cNvPr id="9" name="Text 6"/>
-          <p:cNvSpPr txBox="1"/>
-          <p:nvPr/>
-        </p:nvSpPr>
-        <p:spPr>
-          <a:xfrm>
-            <a:off x="6172200" y="1965960"/>
-            <a:ext cx="5486400" cy="256032"/>
-          </a:xfrm>
-          <a:prstGeom prst="rect">
-            <a:avLst/>
-          </a:prstGeom>
-          <a:noFill/>
-          <a:ln/>
-        </p:spPr>
-        <p:txBody>
-          <a:bodyPr wrap="square" rtlCol="0" anchor="ctr"/>
-          <a:lstStyle/>
-          <a:p>
-            <a:pPr indent="0" marL="0">
-              <a:buNone/>
-            </a:pPr>
-            <a:r>
-              <a:rPr lang="en-US" sz="1150" b="1" dirty="0">
-                <a:solidFill>
-                  <a:srgbClr val="000000"/>
-                </a:solidFill>
-                <a:latin typeface="Calibri" pitchFamily="34" charset="0"/>
-                <a:ea typeface="Calibri" pitchFamily="34" charset="-122"/>
-                <a:cs typeface="Calibri" pitchFamily="34" charset="-120"/>
-              </a:rPr>
-              <a:t>Insurance (n=25)</a:t>
-            </a:r>
-            <a:endParaRPr lang="en-US" sz="1150" dirty="0"/>
-          </a:p>
-        </p:txBody>
-      </p:sp>
-      <p:graphicFrame>
-        <p:nvGraphicFramePr>
-          <p:cNvPr id="10" name="Chart 1" descr=""/>
-          <p:cNvGraphicFramePr/>
-          <p:nvPr/>
-        </p:nvGraphicFramePr>
-        <p:xfrm>
-          <a:off x="6172200" y="2267712"/>
-          <a:ext cx="5486400" cy="2743200"/>
-        </p:xfrm>
-        <a:graphic xmlns:a="http://schemas.openxmlformats.org/drawingml/2006/main">
-          <a:graphicData uri="http://schemas.openxmlformats.org/drawingml/2006/chart">
-            <c:chart xmlns:c="http://schemas.openxmlformats.org/drawingml/2006/chart" r:id="rId2"/>
-          </a:graphicData>
-        </a:graphic>
-      </p:graphicFrame>
-      <p:sp>
-        <p:nvSpPr>
-          <p:cNvPr id="11" name="Shape 7"/>
-          <p:cNvSpPr/>
-          <p:nvPr/>
-        </p:nvSpPr>
-        <p:spPr>
-          <a:xfrm>
-            <a:off x="502006" y="5120640"/>
-            <a:ext cx="11188598" cy="0"/>
-          </a:xfrm>
-          <a:prstGeom prst="line">
-            <a:avLst/>
-          </a:prstGeom>
-          <a:noFill/>
-          <a:ln w="9525">
-            <a:solidFill>
-              <a:srgbClr val="D0D0CE"/>
-            </a:solidFill>
-            <a:prstDash val="solid"/>
-          </a:ln>
-        </p:spPr>
-      </p:sp>
-      <p:sp>
-        <p:nvSpPr>
-          <p:cNvPr id="12" name="Text 8"/>
-          <p:cNvSpPr txBox="1"/>
-          <p:nvPr/>
-        </p:nvSpPr>
-        <p:spPr>
-          <a:xfrm>
-            <a:off x="502006" y="5193792"/>
-            <a:ext cx="11188598" cy="914400"/>
-          </a:xfrm>
-          <a:prstGeom prst="rect">
-            <a:avLst/>
-          </a:prstGeom>
-          <a:noFill/>
-          <a:ln/>
-        </p:spPr>
-        <p:txBody>
-          <a:bodyPr wrap="square" lIns="0" tIns="0" rIns="0" bIns="0" rtlCol="0" anchor="t"/>
-          <a:lstStyle/>
-          <a:p>
-            <a:pPr algn="l" indent="0" marL="0">
-              <a:lnSpc>
-                <a:spcPct val="118000"/>
-              </a:lnSpc>
-              <a:buNone/>
-            </a:pPr>
-            <a:r>
-              <a:rPr lang="en-US" sz="850" b="1" dirty="0">
-                <a:solidFill>
-                  <a:srgbClr val="53565A"/>
-                </a:solidFill>
-                <a:latin typeface="Calibri" pitchFamily="34" charset="0"/>
-                <a:ea typeface="Calibri" pitchFamily="34" charset="-122"/>
-                <a:cs typeface="Calibri" pitchFamily="34" charset="-120"/>
-              </a:rPr>
-              <a:t>Response options as fielded — </a:t>
-            </a:r>
-            <a:pPr algn="l" indent="0" marL="0">
-              <a:lnSpc>
-                <a:spcPct val="118000"/>
-              </a:lnSpc>
-              <a:buNone/>
-            </a:pPr>
-            <a:r>
-              <a:rPr lang="en-US" sz="850" b="1" dirty="0">
-                <a:solidFill>
-                  <a:srgbClr val="046A38"/>
-                </a:solidFill>
-                <a:latin typeface="Calibri" pitchFamily="34" charset="0"/>
-                <a:ea typeface="Calibri" pitchFamily="34" charset="-122"/>
-                <a:cs typeface="Calibri" pitchFamily="34" charset="-120"/>
-              </a:rPr>
-              <a:t>Q6a Banking: </a:t>
-            </a:r>
-            <a:pPr algn="l" indent="0" marL="0">
-              <a:lnSpc>
-                <a:spcPct val="118000"/>
-              </a:lnSpc>
-              <a:buNone/>
-            </a:pPr>
-            <a:r>
-              <a:rPr lang="en-US" sz="850" i="1" dirty="0">
-                <a:solidFill>
-                  <a:srgbClr val="53565A"/>
-                </a:solidFill>
-                <a:latin typeface="Calibri" pitchFamily="34" charset="0"/>
-                <a:ea typeface="Calibri" pitchFamily="34" charset="-122"/>
-                <a:cs typeface="Calibri" pitchFamily="34" charset="-120"/>
-              </a:rPr>
-              <a:t>Mortgage brokers · Merchants · Fintech Partners · Dealers &amp; Indirect Lending Partners · Business &amp; Commercial Clients · Appraisers</a:t>
-            </a:r>
-            <a:pPr algn="l" indent="0" marL="0">
-              <a:lnSpc>
-                <a:spcPct val="118000"/>
-              </a:lnSpc>
-              <a:buNone/>
-            </a:pPr>
-            <a:r>
-              <a:rPr lang="en-US" sz="850" b="1" dirty="0">
-                <a:solidFill>
-                  <a:srgbClr val="046A38"/>
-                </a:solidFill>
-                <a:latin typeface="Calibri" pitchFamily="34" charset="0"/>
-                <a:ea typeface="Calibri" pitchFamily="34" charset="-122"/>
-                <a:cs typeface="Calibri" pitchFamily="34" charset="-120"/>
-              </a:rPr>
-              <a:t>  ·  Q6b Insurance: </a:t>
-            </a:r>
-            <a:pPr algn="l" indent="0" marL="0">
-              <a:lnSpc>
-                <a:spcPct val="118000"/>
-              </a:lnSpc>
-              <a:buNone/>
-            </a:pPr>
-            <a:r>
-              <a:rPr lang="en-US" sz="850" i="1" dirty="0">
-                <a:solidFill>
-                  <a:srgbClr val="53565A"/>
-                </a:solidFill>
-                <a:latin typeface="Calibri" pitchFamily="34" charset="0"/>
-                <a:ea typeface="Calibri" pitchFamily="34" charset="-122"/>
-                <a:cs typeface="Calibri" pitchFamily="34" charset="-120"/>
-              </a:rPr>
-              <a:t>Brokers and distribution partners · Health care providers · Automotive service providers · Legal representatives and paralegals · Third-party administrators (TPAs) · Property claims service providers</a:t>
-            </a:r>
-            <a:endParaRPr lang="en-US" sz="850" dirty="0"/>
           </a:p>
         </p:txBody>
       </p:sp>
@@ -9794,7 +10401,7 @@
                 <a:ea typeface="Calibri" pitchFamily="34" charset="-122"/>
                 <a:cs typeface="Calibri" pitchFamily="34" charset="-120"/>
               </a:rPr>
-              <a:t>Strategy Expected to Most Reduce Third-Party Risk</a:t>
+              <a:t>Greatest Third-Party Fraud Risk Exposure, by Sector</a:t>
             </a:r>
             <a:endParaRPr lang="en-US" sz="1900" dirty="0"/>
           </a:p>
@@ -9836,7 +10443,7 @@
                 <a:ea typeface="Calibri" pitchFamily="34" charset="-122"/>
                 <a:cs typeface="Calibri" pitchFamily="34" charset="-120"/>
               </a:rPr>
-              <a:t>Leaders would rather get smarter about spotting risk than tighten the front door.</a:t>
+              <a:t>Banks and insurers face very different third-party risks — one fix won't work for both.</a:t>
             </a:r>
             <a:endParaRPr lang="en-US" sz="1350" dirty="0"/>
           </a:p>
@@ -9901,7 +10508,7 @@
                 <a:ea typeface="IBM Plex Mono" pitchFamily="34" charset="-122"/>
                 <a:cs typeface="IBM Plex Mono" pitchFamily="34" charset="-120"/>
               </a:rPr>
-              <a:t>Q7  </a:t>
+              <a:t>Q6a / Q6b  </a:t>
             </a:r>
             <a:pPr algn="l" indent="0" marL="0">
               <a:lnSpc>
@@ -9918,7 +10525,7 @@
                 <a:ea typeface="Calibri" pitchFamily="34" charset="-122"/>
                 <a:cs typeface="Calibri" pitchFamily="34" charset="-120"/>
               </a:rPr>
-              <a:t>“Which strategy is expected to have the greatest impact on reducing third-party fraud risk over the next three years?”</a:t>
+              <a:t>“Which external party currently presents the greatest fraud risk exposure to your organization? (asked separately of Banking and Insurance respondents)”</a:t>
             </a:r>
             <a:endParaRPr lang="en-US" sz="1000" dirty="0"/>
           </a:p>
@@ -9963,15 +10570,54 @@
           </a:p>
         </p:txBody>
       </p:sp>
+      <p:sp>
+        <p:nvSpPr>
+          <p:cNvPr id="7" name="Text 5"/>
+          <p:cNvSpPr txBox="1"/>
+          <p:nvPr/>
+        </p:nvSpPr>
+        <p:spPr>
+          <a:xfrm>
+            <a:off x="502006" y="1965960"/>
+            <a:ext cx="5486400" cy="256032"/>
+          </a:xfrm>
+          <a:prstGeom prst="rect">
+            <a:avLst/>
+          </a:prstGeom>
+          <a:noFill/>
+          <a:ln/>
+        </p:spPr>
+        <p:txBody>
+          <a:bodyPr wrap="square" rtlCol="0" anchor="ctr"/>
+          <a:lstStyle/>
+          <a:p>
+            <a:pPr indent="0" marL="0">
+              <a:buNone/>
+            </a:pPr>
+            <a:r>
+              <a:rPr lang="en-US" sz="1150" b="1" dirty="0">
+                <a:solidFill>
+                  <a:srgbClr val="000000"/>
+                </a:solidFill>
+                <a:latin typeface="Calibri" pitchFamily="34" charset="0"/>
+                <a:ea typeface="Calibri" pitchFamily="34" charset="-122"/>
+                <a:cs typeface="Calibri" pitchFamily="34" charset="-120"/>
+              </a:rPr>
+              <a:t>Banking (n=75)</a:t>
+            </a:r>
+            <a:endParaRPr lang="en-US" sz="1150" dirty="0"/>
+          </a:p>
+        </p:txBody>
+      </p:sp>
       <p:graphicFrame>
         <p:nvGraphicFramePr>
-          <p:cNvPr id="7" name="Chart 0" descr=""/>
+          <p:cNvPr id="8" name="Chart 0" descr=""/>
           <p:cNvGraphicFramePr/>
           <p:nvPr/>
         </p:nvGraphicFramePr>
         <p:xfrm>
-          <a:off x="502006" y="2011680"/>
-          <a:ext cx="11188598" cy="3063240"/>
+          <a:off x="502006" y="2267712"/>
+          <a:ext cx="5486400" cy="2743200"/>
         </p:xfrm>
         <a:graphic xmlns:a="http://schemas.openxmlformats.org/drawingml/2006/main">
           <a:graphicData uri="http://schemas.openxmlformats.org/drawingml/2006/chart">
@@ -9981,13 +10627,68 @@
       </p:graphicFrame>
       <p:sp>
         <p:nvSpPr>
-          <p:cNvPr id="8" name="Shape 5"/>
+          <p:cNvPr id="9" name="Text 6"/>
+          <p:cNvSpPr txBox="1"/>
+          <p:nvPr/>
+        </p:nvSpPr>
+        <p:spPr>
+          <a:xfrm>
+            <a:off x="6172200" y="1965960"/>
+            <a:ext cx="5486400" cy="256032"/>
+          </a:xfrm>
+          <a:prstGeom prst="rect">
+            <a:avLst/>
+          </a:prstGeom>
+          <a:noFill/>
+          <a:ln/>
+        </p:spPr>
+        <p:txBody>
+          <a:bodyPr wrap="square" rtlCol="0" anchor="ctr"/>
+          <a:lstStyle/>
+          <a:p>
+            <a:pPr indent="0" marL="0">
+              <a:buNone/>
+            </a:pPr>
+            <a:r>
+              <a:rPr lang="en-US" sz="1150" b="1" dirty="0">
+                <a:solidFill>
+                  <a:srgbClr val="000000"/>
+                </a:solidFill>
+                <a:latin typeface="Calibri" pitchFamily="34" charset="0"/>
+                <a:ea typeface="Calibri" pitchFamily="34" charset="-122"/>
+                <a:cs typeface="Calibri" pitchFamily="34" charset="-120"/>
+              </a:rPr>
+              <a:t>Insurance (n=25)</a:t>
+            </a:r>
+            <a:endParaRPr lang="en-US" sz="1150" dirty="0"/>
+          </a:p>
+        </p:txBody>
+      </p:sp>
+      <p:graphicFrame>
+        <p:nvGraphicFramePr>
+          <p:cNvPr id="10" name="Chart 1" descr=""/>
+          <p:cNvGraphicFramePr/>
+          <p:nvPr/>
+        </p:nvGraphicFramePr>
+        <p:xfrm>
+          <a:off x="6172200" y="2267712"/>
+          <a:ext cx="5486400" cy="2743200"/>
+        </p:xfrm>
+        <a:graphic xmlns:a="http://schemas.openxmlformats.org/drawingml/2006/main">
+          <a:graphicData uri="http://schemas.openxmlformats.org/drawingml/2006/chart">
+            <c:chart xmlns:c="http://schemas.openxmlformats.org/drawingml/2006/chart" r:id="rId2"/>
+          </a:graphicData>
+        </a:graphic>
+      </p:graphicFrame>
+      <p:sp>
+        <p:nvSpPr>
+          <p:cNvPr id="11" name="Shape 7"/>
           <p:cNvSpPr/>
           <p:nvPr/>
         </p:nvSpPr>
         <p:spPr>
           <a:xfrm>
-            <a:off x="502006" y="5202936"/>
+            <a:off x="502006" y="5120640"/>
             <a:ext cx="11188598" cy="0"/>
           </a:xfrm>
           <a:prstGeom prst="line">
@@ -10004,14 +10705,14 @@
       </p:sp>
       <p:sp>
         <p:nvSpPr>
-          <p:cNvPr id="9" name="Text 6"/>
+          <p:cNvPr id="12" name="Text 8"/>
           <p:cNvSpPr txBox="1"/>
           <p:nvPr/>
         </p:nvSpPr>
         <p:spPr>
           <a:xfrm>
-            <a:off x="502006" y="5276088"/>
-            <a:ext cx="11188598" cy="886968"/>
+            <a:off x="502006" y="5193792"/>
+            <a:ext cx="11188598" cy="914400"/>
           </a:xfrm>
           <a:prstGeom prst="rect">
             <a:avLst/>
@@ -10038,7 +10739,7 @@
                 <a:ea typeface="Calibri" pitchFamily="34" charset="-122"/>
                 <a:cs typeface="Calibri" pitchFamily="34" charset="-120"/>
               </a:rPr>
-              <a:t>Single select.  </a:t>
+              <a:t>Response options as fielded — </a:t>
             </a:r>
             <a:pPr algn="l" indent="0" marL="0">
               <a:lnSpc>
@@ -10049,13 +10750,13 @@
             <a:r>
               <a:rPr lang="en-US" sz="850" b="1" dirty="0">
                 <a:solidFill>
-                  <a:srgbClr val="53565A"/>
-                </a:solidFill>
-                <a:latin typeface="Calibri" pitchFamily="34" charset="0"/>
-                <a:ea typeface="Calibri" pitchFamily="34" charset="-122"/>
-                <a:cs typeface="Calibri" pitchFamily="34" charset="-120"/>
-              </a:rPr>
-              <a:t>Response options as fielded: </a:t>
+                  <a:srgbClr val="046A38"/>
+                </a:solidFill>
+                <a:latin typeface="Calibri" pitchFamily="34" charset="0"/>
+                <a:ea typeface="Calibri" pitchFamily="34" charset="-122"/>
+                <a:cs typeface="Calibri" pitchFamily="34" charset="-120"/>
+              </a:rPr>
+              <a:t>Q6a Banking: </a:t>
             </a:r>
             <a:pPr algn="l" indent="0" marL="0">
               <a:lnSpc>
@@ -10072,7 +10773,7 @@
                 <a:ea typeface="Calibri" pitchFamily="34" charset="-122"/>
                 <a:cs typeface="Calibri" pitchFamily="34" charset="-120"/>
               </a:rPr>
-              <a:t>“Strengthen onboarding verification and due diligence controls”</a:t>
+              <a:t>Mortgage brokers · Merchants · Fintech Partners · Dealers &amp; Indirect Lending Partners · Business &amp; Commercial Clients · Appraisers</a:t>
             </a:r>
             <a:pPr algn="l" indent="0" marL="0">
               <a:lnSpc>
@@ -10081,15 +10782,15 @@
               <a:buNone/>
             </a:pPr>
             <a:r>
-              <a:rPr lang="en-US" sz="850" dirty="0">
-                <a:solidFill>
-                  <a:srgbClr val="D0D0CE"/>
-                </a:solidFill>
-                <a:latin typeface="Calibri" pitchFamily="34" charset="0"/>
-                <a:ea typeface="Calibri" pitchFamily="34" charset="-122"/>
-                <a:cs typeface="Calibri" pitchFamily="34" charset="-120"/>
-              </a:rPr>
-              <a:t>  ·  </a:t>
+              <a:rPr lang="en-US" sz="850" b="1" dirty="0">
+                <a:solidFill>
+                  <a:srgbClr val="046A38"/>
+                </a:solidFill>
+                <a:latin typeface="Calibri" pitchFamily="34" charset="0"/>
+                <a:ea typeface="Calibri" pitchFamily="34" charset="-122"/>
+                <a:cs typeface="Calibri" pitchFamily="34" charset="-120"/>
+              </a:rPr>
+              <a:t>  ·  Q6b Insurance: </a:t>
             </a:r>
             <a:pPr algn="l" indent="0" marL="0">
               <a:lnSpc>
@@ -10106,75 +10807,7 @@
                 <a:ea typeface="Calibri" pitchFamily="34" charset="-122"/>
                 <a:cs typeface="Calibri" pitchFamily="34" charset="-120"/>
               </a:rPr>
-              <a:t>“Enhance ongoing monitoring and detection (e.g., surveillance, analytics, anomaly detection)”</a:t>
-            </a:r>
-            <a:pPr algn="l" indent="0" marL="0">
-              <a:lnSpc>
-                <a:spcPct val="118000"/>
-              </a:lnSpc>
-              <a:buNone/>
-            </a:pPr>
-            <a:r>
-              <a:rPr lang="en-US" sz="850" dirty="0">
-                <a:solidFill>
-                  <a:srgbClr val="D0D0CE"/>
-                </a:solidFill>
-                <a:latin typeface="Calibri" pitchFamily="34" charset="0"/>
-                <a:ea typeface="Calibri" pitchFamily="34" charset="-122"/>
-                <a:cs typeface="Calibri" pitchFamily="34" charset="-120"/>
-              </a:rPr>
-              <a:t>  ·  </a:t>
-            </a:r>
-            <a:pPr algn="l" indent="0" marL="0">
-              <a:lnSpc>
-                <a:spcPct val="118000"/>
-              </a:lnSpc>
-              <a:buNone/>
-            </a:pPr>
-            <a:r>
-              <a:rPr lang="en-US" sz="850" i="1" dirty="0">
-                <a:solidFill>
-                  <a:srgbClr val="53565A"/>
-                </a:solidFill>
-                <a:latin typeface="Calibri" pitchFamily="34" charset="0"/>
-                <a:ea typeface="Calibri" pitchFamily="34" charset="-122"/>
-                <a:cs typeface="Calibri" pitchFamily="34" charset="-120"/>
-              </a:rPr>
-              <a:t>“Increase information sharing and intelligence across onboarding and ongoing monitoring”</a:t>
-            </a:r>
-            <a:pPr algn="l" indent="0" marL="0">
-              <a:lnSpc>
-                <a:spcPct val="118000"/>
-              </a:lnSpc>
-              <a:buNone/>
-            </a:pPr>
-            <a:r>
-              <a:rPr lang="en-US" sz="850" dirty="0">
-                <a:solidFill>
-                  <a:srgbClr val="D0D0CE"/>
-                </a:solidFill>
-                <a:latin typeface="Calibri" pitchFamily="34" charset="0"/>
-                <a:ea typeface="Calibri" pitchFamily="34" charset="-122"/>
-                <a:cs typeface="Calibri" pitchFamily="34" charset="-120"/>
-              </a:rPr>
-              <a:t>  ·  </a:t>
-            </a:r>
-            <a:pPr algn="l" indent="0" marL="0">
-              <a:lnSpc>
-                <a:spcPct val="118000"/>
-              </a:lnSpc>
-              <a:buNone/>
-            </a:pPr>
-            <a:r>
-              <a:rPr lang="en-US" sz="850" i="1" dirty="0">
-                <a:solidFill>
-                  <a:srgbClr val="53565A"/>
-                </a:solidFill>
-                <a:latin typeface="Calibri" pitchFamily="34" charset="0"/>
-                <a:ea typeface="Calibri" pitchFamily="34" charset="-122"/>
-                <a:cs typeface="Calibri" pitchFamily="34" charset="-120"/>
-              </a:rPr>
-              <a:t>“Strengthen third-party oversight and accountability (e.g., annual review, standards, performance monitoring)”</a:t>
+              <a:t>Brokers and distribution partners · Health care providers · Automotive service providers · Legal representatives and paralegals · Third-party administrators (TPAs) · Property claims service providers</a:t>
             </a:r>
             <a:endParaRPr lang="en-US" sz="850" dirty="0"/>
           </a:p>
@@ -10245,7 +10878,7 @@
                 <a:ea typeface="Calibri" pitchFamily="34" charset="-122"/>
                 <a:cs typeface="Calibri" pitchFamily="34" charset="-120"/>
               </a:rPr>
-              <a:t>Strategy to Reduce Third-Party Risk — By Sector</a:t>
+              <a:t>Strategy Expected to Most Reduce Third-Party Risk</a:t>
             </a:r>
             <a:endParaRPr lang="en-US" sz="1900" dirty="0"/>
           </a:p>
@@ -10287,7 +10920,7 @@
                 <a:ea typeface="Calibri" pitchFamily="34" charset="-122"/>
                 <a:cs typeface="Calibri" pitchFamily="34" charset="-120"/>
               </a:rPr>
-              <a:t>Banking leans toward intelligence-sharing; Insurance is split evenly between monitoring and oversight.</a:t>
+              <a:t>Leaders would rather get smarter about spotting risk than tighten the front door.</a:t>
             </a:r>
             <a:endParaRPr lang="en-US" sz="1350" dirty="0"/>
           </a:p>
@@ -10369,7 +11002,7 @@
                 <a:ea typeface="Calibri" pitchFamily="34" charset="-122"/>
                 <a:cs typeface="Calibri" pitchFamily="34" charset="-120"/>
               </a:rPr>
-              <a:t>“Which strategy is expected to have the greatest impact on reducing third-party fraud risk over the next three years? (Banking vs. Insurance)”</a:t>
+              <a:t>“Which strategy is expected to have the greatest impact on reducing third-party fraud risk over the next three years?”</a:t>
             </a:r>
             <a:endParaRPr lang="en-US" sz="1000" dirty="0"/>
           </a:p>
@@ -10642,6 +11275,457 @@
 <file path=ppt/slides/slide16.xml><?xml version="1.0" encoding="utf-8"?>
 <p:sld xmlns:a="http://schemas.openxmlformats.org/drawingml/2006/main" xmlns:r="http://schemas.openxmlformats.org/officeDocument/2006/relationships" xmlns:p="http://schemas.openxmlformats.org/presentationml/2006/main">
   <p:cSld name="Slide 16">
+    <p:bg>
+      <p:bgPr>
+        <a:solidFill>
+          <a:srgbClr val="FFFFFF"/>
+        </a:solidFill>
+      </p:bgPr>
+    </p:bg>
+    <p:spTree>
+      <p:nvGrpSpPr>
+        <p:cNvPr id="1" name=""/>
+        <p:cNvGrpSpPr/>
+        <p:nvPr/>
+      </p:nvGrpSpPr>
+      <p:grpSpPr>
+        <a:xfrm>
+          <a:off x="0" y="0"/>
+          <a:ext cx="0" cy="0"/>
+          <a:chOff x="0" y="0"/>
+          <a:chExt cx="0" cy="0"/>
+        </a:xfrm>
+      </p:grpSpPr>
+      <p:sp>
+        <p:nvSpPr>
+          <p:cNvPr id="2" name="Text 0"/>
+          <p:cNvSpPr txBox="1"/>
+          <p:nvPr/>
+        </p:nvSpPr>
+        <p:spPr>
+          <a:xfrm>
+            <a:off x="502006" y="256032"/>
+            <a:ext cx="11188598" cy="310896"/>
+          </a:xfrm>
+          <a:prstGeom prst="rect">
+            <a:avLst/>
+          </a:prstGeom>
+          <a:noFill/>
+          <a:ln/>
+        </p:spPr>
+        <p:txBody>
+          <a:bodyPr wrap="square" lIns="0" tIns="0" rIns="0" bIns="0" rtlCol="0" anchor="t"/>
+          <a:lstStyle/>
+          <a:p>
+            <a:pPr algn="l" indent="0" marL="0">
+              <a:buNone/>
+            </a:pPr>
+            <a:r>
+              <a:rPr lang="en-US" sz="1900" b="1" dirty="0">
+                <a:solidFill>
+                  <a:srgbClr val="000000"/>
+                </a:solidFill>
+                <a:latin typeface="Calibri" pitchFamily="34" charset="0"/>
+                <a:ea typeface="Calibri" pitchFamily="34" charset="-122"/>
+                <a:cs typeface="Calibri" pitchFamily="34" charset="-120"/>
+              </a:rPr>
+              <a:t>Strategy to Reduce Third-Party Risk — By Sector</a:t>
+            </a:r>
+            <a:endParaRPr lang="en-US" sz="1900" dirty="0"/>
+          </a:p>
+        </p:txBody>
+      </p:sp>
+      <p:sp>
+        <p:nvSpPr>
+          <p:cNvPr id="3" name="Text 1"/>
+          <p:cNvSpPr txBox="1"/>
+          <p:nvPr/>
+        </p:nvSpPr>
+        <p:spPr>
+          <a:xfrm>
+            <a:off x="502006" y="585216"/>
+            <a:ext cx="11188598" cy="713232"/>
+          </a:xfrm>
+          <a:prstGeom prst="rect">
+            <a:avLst/>
+          </a:prstGeom>
+          <a:noFill/>
+          <a:ln/>
+        </p:spPr>
+        <p:txBody>
+          <a:bodyPr wrap="square" lIns="0" tIns="0" rIns="0" bIns="0" rtlCol="0" anchor="t"/>
+          <a:lstStyle/>
+          <a:p>
+            <a:pPr algn="l" indent="0" marL="0">
+              <a:lnSpc>
+                <a:spcPct val="105000"/>
+              </a:lnSpc>
+              <a:buNone/>
+            </a:pPr>
+            <a:r>
+              <a:rPr lang="en-US" sz="1350" b="1" dirty="0">
+                <a:solidFill>
+                  <a:srgbClr val="046A38"/>
+                </a:solidFill>
+                <a:latin typeface="Calibri" pitchFamily="34" charset="0"/>
+                <a:ea typeface="Calibri" pitchFamily="34" charset="-122"/>
+                <a:cs typeface="Calibri" pitchFamily="34" charset="-120"/>
+              </a:rPr>
+              <a:t>Banking leans toward intelligence-sharing; Insurance is split evenly between monitoring and oversight.</a:t>
+            </a:r>
+            <a:endParaRPr lang="en-US" sz="1350" dirty="0"/>
+          </a:p>
+        </p:txBody>
+      </p:sp>
+      <p:sp>
+        <p:nvSpPr>
+          <p:cNvPr id="4" name="Shape 2"/>
+          <p:cNvSpPr/>
+          <p:nvPr/>
+        </p:nvSpPr>
+        <p:spPr>
+          <a:xfrm>
+            <a:off x="502006" y="1335024"/>
+            <a:ext cx="0" cy="512064"/>
+          </a:xfrm>
+          <a:prstGeom prst="line">
+            <a:avLst/>
+          </a:prstGeom>
+          <a:noFill/>
+          <a:ln w="25400">
+            <a:solidFill>
+              <a:srgbClr val="D0D0CE"/>
+            </a:solidFill>
+            <a:prstDash val="solid"/>
+          </a:ln>
+        </p:spPr>
+      </p:sp>
+      <p:sp>
+        <p:nvSpPr>
+          <p:cNvPr id="5" name="Text 3"/>
+          <p:cNvSpPr txBox="1"/>
+          <p:nvPr/>
+        </p:nvSpPr>
+        <p:spPr>
+          <a:xfrm>
+            <a:off x="648310" y="1335024"/>
+            <a:ext cx="11042294" cy="512064"/>
+          </a:xfrm>
+          <a:prstGeom prst="rect">
+            <a:avLst/>
+          </a:prstGeom>
+          <a:noFill/>
+          <a:ln/>
+        </p:spPr>
+        <p:txBody>
+          <a:bodyPr wrap="square" lIns="0" tIns="0" rIns="0" bIns="0" rtlCol="0" anchor="t"/>
+          <a:lstStyle/>
+          <a:p>
+            <a:pPr algn="l" indent="0" marL="0">
+              <a:lnSpc>
+                <a:spcPct val="106000"/>
+              </a:lnSpc>
+              <a:buNone/>
+            </a:pPr>
+            <a:r>
+              <a:rPr lang="en-US" sz="900" b="1" dirty="0">
+                <a:solidFill>
+                  <a:srgbClr val="046A38"/>
+                </a:solidFill>
+                <a:latin typeface="IBM Plex Mono" pitchFamily="34" charset="0"/>
+                <a:ea typeface="IBM Plex Mono" pitchFamily="34" charset="-122"/>
+                <a:cs typeface="IBM Plex Mono" pitchFamily="34" charset="-120"/>
+              </a:rPr>
+              <a:t>Q7  </a:t>
+            </a:r>
+            <a:pPr algn="l" indent="0" marL="0">
+              <a:lnSpc>
+                <a:spcPct val="106000"/>
+              </a:lnSpc>
+              <a:buNone/>
+            </a:pPr>
+            <a:r>
+              <a:rPr lang="en-US" sz="1000" i="1" dirty="0">
+                <a:solidFill>
+                  <a:srgbClr val="575757"/>
+                </a:solidFill>
+                <a:latin typeface="Calibri" pitchFamily="34" charset="0"/>
+                <a:ea typeface="Calibri" pitchFamily="34" charset="-122"/>
+                <a:cs typeface="Calibri" pitchFamily="34" charset="-120"/>
+              </a:rPr>
+              <a:t>“Which strategy is expected to have the greatest impact on reducing third-party fraud risk over the next three years? (Banking vs. Insurance)”</a:t>
+            </a:r>
+            <a:endParaRPr lang="en-US" sz="1000" dirty="0"/>
+          </a:p>
+        </p:txBody>
+      </p:sp>
+      <p:sp>
+        <p:nvSpPr>
+          <p:cNvPr id="6" name="Text 4"/>
+          <p:cNvSpPr txBox="1"/>
+          <p:nvPr/>
+        </p:nvSpPr>
+        <p:spPr>
+          <a:xfrm>
+            <a:off x="11346790" y="6537960"/>
+            <a:ext cx="343814" cy="182880"/>
+          </a:xfrm>
+          <a:prstGeom prst="rect">
+            <a:avLst/>
+          </a:prstGeom>
+          <a:noFill/>
+          <a:ln/>
+        </p:spPr>
+        <p:txBody>
+          <a:bodyPr wrap="square" rtlCol="0" anchor="ctr"/>
+          <a:lstStyle/>
+          <a:p>
+            <a:pPr algn="r" indent="0" marL="0">
+              <a:buNone/>
+            </a:pPr>
+            <a:r>
+              <a:rPr lang="en-US" sz="900" dirty="0">
+                <a:solidFill>
+                  <a:srgbClr val="53565A"/>
+                </a:solidFill>
+                <a:latin typeface="Calibri" pitchFamily="34" charset="0"/>
+                <a:ea typeface="Calibri" pitchFamily="34" charset="-122"/>
+                <a:cs typeface="Calibri" pitchFamily="34" charset="-120"/>
+              </a:rPr>
+              <a:t>15</a:t>
+            </a:r>
+            <a:endParaRPr lang="en-US" sz="900" dirty="0"/>
+          </a:p>
+        </p:txBody>
+      </p:sp>
+      <p:graphicFrame>
+        <p:nvGraphicFramePr>
+          <p:cNvPr id="7" name="Chart 0" descr=""/>
+          <p:cNvGraphicFramePr/>
+          <p:nvPr/>
+        </p:nvGraphicFramePr>
+        <p:xfrm>
+          <a:off x="502006" y="2011680"/>
+          <a:ext cx="11188598" cy="3063240"/>
+        </p:xfrm>
+        <a:graphic xmlns:a="http://schemas.openxmlformats.org/drawingml/2006/main">
+          <a:graphicData uri="http://schemas.openxmlformats.org/drawingml/2006/chart">
+            <c:chart xmlns:c="http://schemas.openxmlformats.org/drawingml/2006/chart" r:id="rId1"/>
+          </a:graphicData>
+        </a:graphic>
+      </p:graphicFrame>
+      <p:sp>
+        <p:nvSpPr>
+          <p:cNvPr id="8" name="Shape 5"/>
+          <p:cNvSpPr/>
+          <p:nvPr/>
+        </p:nvSpPr>
+        <p:spPr>
+          <a:xfrm>
+            <a:off x="502006" y="5202936"/>
+            <a:ext cx="11188598" cy="0"/>
+          </a:xfrm>
+          <a:prstGeom prst="line">
+            <a:avLst/>
+          </a:prstGeom>
+          <a:noFill/>
+          <a:ln w="9525">
+            <a:solidFill>
+              <a:srgbClr val="D0D0CE"/>
+            </a:solidFill>
+            <a:prstDash val="solid"/>
+          </a:ln>
+        </p:spPr>
+      </p:sp>
+      <p:sp>
+        <p:nvSpPr>
+          <p:cNvPr id="9" name="Text 6"/>
+          <p:cNvSpPr txBox="1"/>
+          <p:nvPr/>
+        </p:nvSpPr>
+        <p:spPr>
+          <a:xfrm>
+            <a:off x="502006" y="5276088"/>
+            <a:ext cx="11188598" cy="886968"/>
+          </a:xfrm>
+          <a:prstGeom prst="rect">
+            <a:avLst/>
+          </a:prstGeom>
+          <a:noFill/>
+          <a:ln/>
+        </p:spPr>
+        <p:txBody>
+          <a:bodyPr wrap="square" lIns="0" tIns="0" rIns="0" bIns="0" rtlCol="0" anchor="t"/>
+          <a:lstStyle/>
+          <a:p>
+            <a:pPr algn="l" indent="0" marL="0">
+              <a:lnSpc>
+                <a:spcPct val="118000"/>
+              </a:lnSpc>
+              <a:buNone/>
+            </a:pPr>
+            <a:r>
+              <a:rPr lang="en-US" sz="850" b="1" dirty="0">
+                <a:solidFill>
+                  <a:srgbClr val="53565A"/>
+                </a:solidFill>
+                <a:latin typeface="Calibri" pitchFamily="34" charset="0"/>
+                <a:ea typeface="Calibri" pitchFamily="34" charset="-122"/>
+                <a:cs typeface="Calibri" pitchFamily="34" charset="-120"/>
+              </a:rPr>
+              <a:t>Single select.  </a:t>
+            </a:r>
+            <a:pPr algn="l" indent="0" marL="0">
+              <a:lnSpc>
+                <a:spcPct val="118000"/>
+              </a:lnSpc>
+              <a:buNone/>
+            </a:pPr>
+            <a:r>
+              <a:rPr lang="en-US" sz="850" b="1" dirty="0">
+                <a:solidFill>
+                  <a:srgbClr val="53565A"/>
+                </a:solidFill>
+                <a:latin typeface="Calibri" pitchFamily="34" charset="0"/>
+                <a:ea typeface="Calibri" pitchFamily="34" charset="-122"/>
+                <a:cs typeface="Calibri" pitchFamily="34" charset="-120"/>
+              </a:rPr>
+              <a:t>Response options as fielded: </a:t>
+            </a:r>
+            <a:pPr algn="l" indent="0" marL="0">
+              <a:lnSpc>
+                <a:spcPct val="118000"/>
+              </a:lnSpc>
+              <a:buNone/>
+            </a:pPr>
+            <a:r>
+              <a:rPr lang="en-US" sz="850" i="1" dirty="0">
+                <a:solidFill>
+                  <a:srgbClr val="53565A"/>
+                </a:solidFill>
+                <a:latin typeface="Calibri" pitchFamily="34" charset="0"/>
+                <a:ea typeface="Calibri" pitchFamily="34" charset="-122"/>
+                <a:cs typeface="Calibri" pitchFamily="34" charset="-120"/>
+              </a:rPr>
+              <a:t>“Strengthen onboarding verification and due diligence controls”</a:t>
+            </a:r>
+            <a:pPr algn="l" indent="0" marL="0">
+              <a:lnSpc>
+                <a:spcPct val="118000"/>
+              </a:lnSpc>
+              <a:buNone/>
+            </a:pPr>
+            <a:r>
+              <a:rPr lang="en-US" sz="850" dirty="0">
+                <a:solidFill>
+                  <a:srgbClr val="D0D0CE"/>
+                </a:solidFill>
+                <a:latin typeface="Calibri" pitchFamily="34" charset="0"/>
+                <a:ea typeface="Calibri" pitchFamily="34" charset="-122"/>
+                <a:cs typeface="Calibri" pitchFamily="34" charset="-120"/>
+              </a:rPr>
+              <a:t>  ·  </a:t>
+            </a:r>
+            <a:pPr algn="l" indent="0" marL="0">
+              <a:lnSpc>
+                <a:spcPct val="118000"/>
+              </a:lnSpc>
+              <a:buNone/>
+            </a:pPr>
+            <a:r>
+              <a:rPr lang="en-US" sz="850" i="1" dirty="0">
+                <a:solidFill>
+                  <a:srgbClr val="53565A"/>
+                </a:solidFill>
+                <a:latin typeface="Calibri" pitchFamily="34" charset="0"/>
+                <a:ea typeface="Calibri" pitchFamily="34" charset="-122"/>
+                <a:cs typeface="Calibri" pitchFamily="34" charset="-120"/>
+              </a:rPr>
+              <a:t>“Enhance ongoing monitoring and detection (e.g., surveillance, analytics, anomaly detection)”</a:t>
+            </a:r>
+            <a:pPr algn="l" indent="0" marL="0">
+              <a:lnSpc>
+                <a:spcPct val="118000"/>
+              </a:lnSpc>
+              <a:buNone/>
+            </a:pPr>
+            <a:r>
+              <a:rPr lang="en-US" sz="850" dirty="0">
+                <a:solidFill>
+                  <a:srgbClr val="D0D0CE"/>
+                </a:solidFill>
+                <a:latin typeface="Calibri" pitchFamily="34" charset="0"/>
+                <a:ea typeface="Calibri" pitchFamily="34" charset="-122"/>
+                <a:cs typeface="Calibri" pitchFamily="34" charset="-120"/>
+              </a:rPr>
+              <a:t>  ·  </a:t>
+            </a:r>
+            <a:pPr algn="l" indent="0" marL="0">
+              <a:lnSpc>
+                <a:spcPct val="118000"/>
+              </a:lnSpc>
+              <a:buNone/>
+            </a:pPr>
+            <a:r>
+              <a:rPr lang="en-US" sz="850" i="1" dirty="0">
+                <a:solidFill>
+                  <a:srgbClr val="53565A"/>
+                </a:solidFill>
+                <a:latin typeface="Calibri" pitchFamily="34" charset="0"/>
+                <a:ea typeface="Calibri" pitchFamily="34" charset="-122"/>
+                <a:cs typeface="Calibri" pitchFamily="34" charset="-120"/>
+              </a:rPr>
+              <a:t>“Increase information sharing and intelligence across onboarding and ongoing monitoring”</a:t>
+            </a:r>
+            <a:pPr algn="l" indent="0" marL="0">
+              <a:lnSpc>
+                <a:spcPct val="118000"/>
+              </a:lnSpc>
+              <a:buNone/>
+            </a:pPr>
+            <a:r>
+              <a:rPr lang="en-US" sz="850" dirty="0">
+                <a:solidFill>
+                  <a:srgbClr val="D0D0CE"/>
+                </a:solidFill>
+                <a:latin typeface="Calibri" pitchFamily="34" charset="0"/>
+                <a:ea typeface="Calibri" pitchFamily="34" charset="-122"/>
+                <a:cs typeface="Calibri" pitchFamily="34" charset="-120"/>
+              </a:rPr>
+              <a:t>  ·  </a:t>
+            </a:r>
+            <a:pPr algn="l" indent="0" marL="0">
+              <a:lnSpc>
+                <a:spcPct val="118000"/>
+              </a:lnSpc>
+              <a:buNone/>
+            </a:pPr>
+            <a:r>
+              <a:rPr lang="en-US" sz="850" i="1" dirty="0">
+                <a:solidFill>
+                  <a:srgbClr val="53565A"/>
+                </a:solidFill>
+                <a:latin typeface="Calibri" pitchFamily="34" charset="0"/>
+                <a:ea typeface="Calibri" pitchFamily="34" charset="-122"/>
+                <a:cs typeface="Calibri" pitchFamily="34" charset="-120"/>
+              </a:rPr>
+              <a:t>“Strengthen third-party oversight and accountability (e.g., annual review, standards, performance monitoring)”</a:t>
+            </a:r>
+            <a:endParaRPr lang="en-US" sz="850" dirty="0"/>
+          </a:p>
+        </p:txBody>
+      </p:sp>
+    </p:spTree>
+  </p:cSld>
+  <p:clrMapOvr>
+    <a:masterClrMapping/>
+  </p:clrMapOvr>
+</p:sld>
+</file>
+
+<file path=ppt/slides/slide17.xml><?xml version="1.0" encoding="utf-8"?>
+<p:sld xmlns:a="http://schemas.openxmlformats.org/drawingml/2006/main" xmlns:r="http://schemas.openxmlformats.org/officeDocument/2006/relationships" xmlns:p="http://schemas.openxmlformats.org/presentationml/2006/main">
+  <p:cSld name="Slide 17">
     <p:bg>
       <p:bgPr>
         <a:solidFill>
@@ -10777,494 +11861,9 @@
                 <a:ea typeface="Calibri" pitchFamily="34" charset="-122"/>
                 <a:cs typeface="Calibri" pitchFamily="34" charset="-120"/>
               </a:rPr>
-              <a:t>15</a:t>
+              <a:t>16</a:t>
             </a:r>
             <a:endParaRPr lang="en-US" sz="900" dirty="0"/>
-          </a:p>
-        </p:txBody>
-      </p:sp>
-    </p:spTree>
-  </p:cSld>
-  <p:clrMapOvr>
-    <a:masterClrMapping/>
-  </p:clrMapOvr>
-</p:sld>
-</file>
-
-<file path=ppt/slides/slide17.xml><?xml version="1.0" encoding="utf-8"?>
-<p:sld xmlns:a="http://schemas.openxmlformats.org/drawingml/2006/main" xmlns:r="http://schemas.openxmlformats.org/officeDocument/2006/relationships" xmlns:p="http://schemas.openxmlformats.org/presentationml/2006/main">
-  <p:cSld name="Slide 17">
-    <p:bg>
-      <p:bgPr>
-        <a:solidFill>
-          <a:srgbClr val="FFFFFF"/>
-        </a:solidFill>
-      </p:bgPr>
-    </p:bg>
-    <p:spTree>
-      <p:nvGrpSpPr>
-        <p:cNvPr id="1" name=""/>
-        <p:cNvGrpSpPr/>
-        <p:nvPr/>
-      </p:nvGrpSpPr>
-      <p:grpSpPr>
-        <a:xfrm>
-          <a:off x="0" y="0"/>
-          <a:ext cx="0" cy="0"/>
-          <a:chOff x="0" y="0"/>
-          <a:chExt cx="0" cy="0"/>
-        </a:xfrm>
-      </p:grpSpPr>
-      <p:sp>
-        <p:nvSpPr>
-          <p:cNvPr id="2" name="Text 0"/>
-          <p:cNvSpPr txBox="1"/>
-          <p:nvPr/>
-        </p:nvSpPr>
-        <p:spPr>
-          <a:xfrm>
-            <a:off x="502006" y="256032"/>
-            <a:ext cx="11188598" cy="310896"/>
-          </a:xfrm>
-          <a:prstGeom prst="rect">
-            <a:avLst/>
-          </a:prstGeom>
-          <a:noFill/>
-          <a:ln/>
-        </p:spPr>
-        <p:txBody>
-          <a:bodyPr wrap="square" lIns="0" tIns="0" rIns="0" bIns="0" rtlCol="0" anchor="t"/>
-          <a:lstStyle/>
-          <a:p>
-            <a:pPr algn="l" indent="0" marL="0">
-              <a:buNone/>
-            </a:pPr>
-            <a:r>
-              <a:rPr lang="en-US" sz="1900" b="1" dirty="0">
-                <a:solidFill>
-                  <a:srgbClr val="000000"/>
-                </a:solidFill>
-                <a:latin typeface="Calibri" pitchFamily="34" charset="0"/>
-                <a:ea typeface="Calibri" pitchFamily="34" charset="-122"/>
-                <a:cs typeface="Calibri" pitchFamily="34" charset="-120"/>
-              </a:rPr>
-              <a:t>Self-Reported Fraud Program Maturity — By Sector</a:t>
-            </a:r>
-            <a:endParaRPr lang="en-US" sz="1900" dirty="0"/>
-          </a:p>
-        </p:txBody>
-      </p:sp>
-      <p:sp>
-        <p:nvSpPr>
-          <p:cNvPr id="3" name="Text 1"/>
-          <p:cNvSpPr txBox="1"/>
-          <p:nvPr/>
-        </p:nvSpPr>
-        <p:spPr>
-          <a:xfrm>
-            <a:off x="502006" y="585216"/>
-            <a:ext cx="11188598" cy="713232"/>
-          </a:xfrm>
-          <a:prstGeom prst="rect">
-            <a:avLst/>
-          </a:prstGeom>
-          <a:noFill/>
-          <a:ln/>
-        </p:spPr>
-        <p:txBody>
-          <a:bodyPr wrap="square" lIns="0" tIns="0" rIns="0" bIns="0" rtlCol="0" anchor="t"/>
-          <a:lstStyle/>
-          <a:p>
-            <a:pPr algn="l" indent="0" marL="0">
-              <a:lnSpc>
-                <a:spcPct val="105000"/>
-              </a:lnSpc>
-              <a:buNone/>
-            </a:pPr>
-            <a:r>
-              <a:rPr lang="en-US" sz="1350" b="1" dirty="0">
-                <a:solidFill>
-                  <a:srgbClr val="046A38"/>
-                </a:solidFill>
-                <a:latin typeface="Calibri" pitchFamily="34" charset="0"/>
-                <a:ea typeface="Calibri" pitchFamily="34" charset="-122"/>
-                <a:cs typeface="Calibri" pitchFamily="34" charset="-120"/>
-              </a:rPr>
-              <a:t>82% self-rate “Integrated” or “Advanced” overall — but Banking clusters at Integrated while Insurance skews further, to Advanced.</a:t>
-            </a:r>
-            <a:endParaRPr lang="en-US" sz="1350" dirty="0"/>
-          </a:p>
-        </p:txBody>
-      </p:sp>
-      <p:sp>
-        <p:nvSpPr>
-          <p:cNvPr id="4" name="Shape 2"/>
-          <p:cNvSpPr/>
-          <p:nvPr/>
-        </p:nvSpPr>
-        <p:spPr>
-          <a:xfrm>
-            <a:off x="502006" y="1335024"/>
-            <a:ext cx="0" cy="512064"/>
-          </a:xfrm>
-          <a:prstGeom prst="line">
-            <a:avLst/>
-          </a:prstGeom>
-          <a:noFill/>
-          <a:ln w="25400">
-            <a:solidFill>
-              <a:srgbClr val="D0D0CE"/>
-            </a:solidFill>
-            <a:prstDash val="solid"/>
-          </a:ln>
-        </p:spPr>
-      </p:sp>
-      <p:sp>
-        <p:nvSpPr>
-          <p:cNvPr id="5" name="Text 3"/>
-          <p:cNvSpPr txBox="1"/>
-          <p:nvPr/>
-        </p:nvSpPr>
-        <p:spPr>
-          <a:xfrm>
-            <a:off x="648310" y="1335024"/>
-            <a:ext cx="11042294" cy="512064"/>
-          </a:xfrm>
-          <a:prstGeom prst="rect">
-            <a:avLst/>
-          </a:prstGeom>
-          <a:noFill/>
-          <a:ln/>
-        </p:spPr>
-        <p:txBody>
-          <a:bodyPr wrap="square" lIns="0" tIns="0" rIns="0" bIns="0" rtlCol="0" anchor="t"/>
-          <a:lstStyle/>
-          <a:p>
-            <a:pPr algn="l" indent="0" marL="0">
-              <a:lnSpc>
-                <a:spcPct val="106000"/>
-              </a:lnSpc>
-              <a:buNone/>
-            </a:pPr>
-            <a:r>
-              <a:rPr lang="en-US" sz="900" b="1" dirty="0">
-                <a:solidFill>
-                  <a:srgbClr val="046A38"/>
-                </a:solidFill>
-                <a:latin typeface="IBM Plex Mono" pitchFamily="34" charset="0"/>
-                <a:ea typeface="IBM Plex Mono" pitchFamily="34" charset="-122"/>
-                <a:cs typeface="IBM Plex Mono" pitchFamily="34" charset="-120"/>
-              </a:rPr>
-              <a:t>Q1  </a:t>
-            </a:r>
-            <a:pPr algn="l" indent="0" marL="0">
-              <a:lnSpc>
-                <a:spcPct val="106000"/>
-              </a:lnSpc>
-              <a:buNone/>
-            </a:pPr>
-            <a:r>
-              <a:rPr lang="en-US" sz="1000" i="1" dirty="0">
-                <a:solidFill>
-                  <a:srgbClr val="575757"/>
-                </a:solidFill>
-                <a:latin typeface="Calibri" pitchFamily="34" charset="0"/>
-                <a:ea typeface="Calibri" pitchFamily="34" charset="-122"/>
-                <a:cs typeface="Calibri" pitchFamily="34" charset="-120"/>
-              </a:rPr>
-              <a:t>“Which statement best describes the current maturity of your organization's fraud program? (Banking vs. Insurance)”</a:t>
-            </a:r>
-            <a:endParaRPr lang="en-US" sz="1000" dirty="0"/>
-          </a:p>
-        </p:txBody>
-      </p:sp>
-      <p:sp>
-        <p:nvSpPr>
-          <p:cNvPr id="6" name="Text 4"/>
-          <p:cNvSpPr txBox="1"/>
-          <p:nvPr/>
-        </p:nvSpPr>
-        <p:spPr>
-          <a:xfrm>
-            <a:off x="11346790" y="6537960"/>
-            <a:ext cx="343814" cy="182880"/>
-          </a:xfrm>
-          <a:prstGeom prst="rect">
-            <a:avLst/>
-          </a:prstGeom>
-          <a:noFill/>
-          <a:ln/>
-        </p:spPr>
-        <p:txBody>
-          <a:bodyPr wrap="square" rtlCol="0" anchor="ctr"/>
-          <a:lstStyle/>
-          <a:p>
-            <a:pPr algn="r" indent="0" marL="0">
-              <a:buNone/>
-            </a:pPr>
-            <a:r>
-              <a:rPr lang="en-US" sz="900" dirty="0">
-                <a:solidFill>
-                  <a:srgbClr val="53565A"/>
-                </a:solidFill>
-                <a:latin typeface="Calibri" pitchFamily="34" charset="0"/>
-                <a:ea typeface="Calibri" pitchFamily="34" charset="-122"/>
-                <a:cs typeface="Calibri" pitchFamily="34" charset="-120"/>
-              </a:rPr>
-              <a:t>16</a:t>
-            </a:r>
-            <a:endParaRPr lang="en-US" sz="900" dirty="0"/>
-          </a:p>
-        </p:txBody>
-      </p:sp>
-      <p:graphicFrame>
-        <p:nvGraphicFramePr>
-          <p:cNvPr id="7" name="Chart 0" descr=""/>
-          <p:cNvGraphicFramePr/>
-          <p:nvPr/>
-        </p:nvGraphicFramePr>
-        <p:xfrm>
-          <a:off x="502006" y="2011680"/>
-          <a:ext cx="11188598" cy="3063240"/>
-        </p:xfrm>
-        <a:graphic xmlns:a="http://schemas.openxmlformats.org/drawingml/2006/main">
-          <a:graphicData uri="http://schemas.openxmlformats.org/drawingml/2006/chart">
-            <c:chart xmlns:c="http://schemas.openxmlformats.org/drawingml/2006/chart" r:id="rId1"/>
-          </a:graphicData>
-        </a:graphic>
-      </p:graphicFrame>
-      <p:sp>
-        <p:nvSpPr>
-          <p:cNvPr id="8" name="Shape 5"/>
-          <p:cNvSpPr/>
-          <p:nvPr/>
-        </p:nvSpPr>
-        <p:spPr>
-          <a:xfrm>
-            <a:off x="502006" y="5202936"/>
-            <a:ext cx="11188598" cy="0"/>
-          </a:xfrm>
-          <a:prstGeom prst="line">
-            <a:avLst/>
-          </a:prstGeom>
-          <a:noFill/>
-          <a:ln w="9525">
-            <a:solidFill>
-              <a:srgbClr val="D0D0CE"/>
-            </a:solidFill>
-            <a:prstDash val="solid"/>
-          </a:ln>
-        </p:spPr>
-      </p:sp>
-      <p:sp>
-        <p:nvSpPr>
-          <p:cNvPr id="9" name="Text 6"/>
-          <p:cNvSpPr txBox="1"/>
-          <p:nvPr/>
-        </p:nvSpPr>
-        <p:spPr>
-          <a:xfrm>
-            <a:off x="502006" y="5276088"/>
-            <a:ext cx="11188598" cy="886968"/>
-          </a:xfrm>
-          <a:prstGeom prst="rect">
-            <a:avLst/>
-          </a:prstGeom>
-          <a:noFill/>
-          <a:ln/>
-        </p:spPr>
-        <p:txBody>
-          <a:bodyPr wrap="square" lIns="0" tIns="0" rIns="0" bIns="0" rtlCol="0" anchor="t"/>
-          <a:lstStyle/>
-          <a:p>
-            <a:pPr algn="l" indent="0" marL="0">
-              <a:lnSpc>
-                <a:spcPct val="118000"/>
-              </a:lnSpc>
-              <a:buNone/>
-            </a:pPr>
-            <a:r>
-              <a:rPr lang="en-US" sz="850" b="1" dirty="0">
-                <a:solidFill>
-                  <a:srgbClr val="53565A"/>
-                </a:solidFill>
-                <a:latin typeface="Calibri" pitchFamily="34" charset="0"/>
-                <a:ea typeface="Calibri" pitchFamily="34" charset="-122"/>
-                <a:cs typeface="Calibri" pitchFamily="34" charset="-120"/>
-              </a:rPr>
-              <a:t>Single select · low → high maturity.  </a:t>
-            </a:r>
-            <a:pPr algn="l" indent="0" marL="0">
-              <a:lnSpc>
-                <a:spcPct val="118000"/>
-              </a:lnSpc>
-              <a:buNone/>
-            </a:pPr>
-            <a:r>
-              <a:rPr lang="en-US" sz="850" b="1" dirty="0">
-                <a:solidFill>
-                  <a:srgbClr val="53565A"/>
-                </a:solidFill>
-                <a:latin typeface="Calibri" pitchFamily="34" charset="0"/>
-                <a:ea typeface="Calibri" pitchFamily="34" charset="-122"/>
-                <a:cs typeface="Calibri" pitchFamily="34" charset="-120"/>
-              </a:rPr>
-              <a:t>Response options as fielded: </a:t>
-            </a:r>
-            <a:pPr algn="l" indent="0" marL="0">
-              <a:lnSpc>
-                <a:spcPct val="118000"/>
-              </a:lnSpc>
-              <a:buNone/>
-            </a:pPr>
-            <a:r>
-              <a:rPr lang="en-US" sz="850" i="1" dirty="0">
-                <a:solidFill>
-                  <a:srgbClr val="53565A"/>
-                </a:solidFill>
-                <a:latin typeface="Calibri" pitchFamily="34" charset="0"/>
-                <a:ea typeface="Calibri" pitchFamily="34" charset="-122"/>
-                <a:cs typeface="Calibri" pitchFamily="34" charset="-120"/>
-              </a:rPr>
-              <a:t>“Reactive: Primarily incident-driven”</a:t>
-            </a:r>
-            <a:pPr algn="l" indent="0" marL="0">
-              <a:lnSpc>
-                <a:spcPct val="118000"/>
-              </a:lnSpc>
-              <a:buNone/>
-            </a:pPr>
-            <a:r>
-              <a:rPr lang="en-US" sz="850" dirty="0">
-                <a:solidFill>
-                  <a:srgbClr val="D0D0CE"/>
-                </a:solidFill>
-                <a:latin typeface="Calibri" pitchFamily="34" charset="0"/>
-                <a:ea typeface="Calibri" pitchFamily="34" charset="-122"/>
-                <a:cs typeface="Calibri" pitchFamily="34" charset="-120"/>
-              </a:rPr>
-              <a:t>  ·  </a:t>
-            </a:r>
-            <a:pPr algn="l" indent="0" marL="0">
-              <a:lnSpc>
-                <a:spcPct val="118000"/>
-              </a:lnSpc>
-              <a:buNone/>
-            </a:pPr>
-            <a:r>
-              <a:rPr lang="en-US" sz="850" i="1" dirty="0">
-                <a:solidFill>
-                  <a:srgbClr val="53565A"/>
-                </a:solidFill>
-                <a:latin typeface="Calibri" pitchFamily="34" charset="0"/>
-                <a:ea typeface="Calibri" pitchFamily="34" charset="-122"/>
-                <a:cs typeface="Calibri" pitchFamily="34" charset="-120"/>
-              </a:rPr>
-              <a:t>“Foundational: Controls established within individual business units”</a:t>
-            </a:r>
-            <a:pPr algn="l" indent="0" marL="0">
-              <a:lnSpc>
-                <a:spcPct val="118000"/>
-              </a:lnSpc>
-              <a:buNone/>
-            </a:pPr>
-            <a:r>
-              <a:rPr lang="en-US" sz="850" dirty="0">
-                <a:solidFill>
-                  <a:srgbClr val="D0D0CE"/>
-                </a:solidFill>
-                <a:latin typeface="Calibri" pitchFamily="34" charset="0"/>
-                <a:ea typeface="Calibri" pitchFamily="34" charset="-122"/>
-                <a:cs typeface="Calibri" pitchFamily="34" charset="-120"/>
-              </a:rPr>
-              <a:t>  ·  </a:t>
-            </a:r>
-            <a:pPr algn="l" indent="0" marL="0">
-              <a:lnSpc>
-                <a:spcPct val="118000"/>
-              </a:lnSpc>
-              <a:buNone/>
-            </a:pPr>
-            <a:r>
-              <a:rPr lang="en-US" sz="850" i="1" dirty="0">
-                <a:solidFill>
-                  <a:srgbClr val="53565A"/>
-                </a:solidFill>
-                <a:latin typeface="Calibri" pitchFamily="34" charset="0"/>
-                <a:ea typeface="Calibri" pitchFamily="34" charset="-122"/>
-                <a:cs typeface="Calibri" pitchFamily="34" charset="-120"/>
-              </a:rPr>
-              <a:t>“Managed: Enterprise standards and governance are in place”</a:t>
-            </a:r>
-            <a:pPr algn="l" indent="0" marL="0">
-              <a:lnSpc>
-                <a:spcPct val="118000"/>
-              </a:lnSpc>
-              <a:buNone/>
-            </a:pPr>
-            <a:r>
-              <a:rPr lang="en-US" sz="850" dirty="0">
-                <a:solidFill>
-                  <a:srgbClr val="D0D0CE"/>
-                </a:solidFill>
-                <a:latin typeface="Calibri" pitchFamily="34" charset="0"/>
-                <a:ea typeface="Calibri" pitchFamily="34" charset="-122"/>
-                <a:cs typeface="Calibri" pitchFamily="34" charset="-120"/>
-              </a:rPr>
-              <a:t>  ·  </a:t>
-            </a:r>
-            <a:pPr algn="l" indent="0" marL="0">
-              <a:lnSpc>
-                <a:spcPct val="118000"/>
-              </a:lnSpc>
-              <a:buNone/>
-            </a:pPr>
-            <a:r>
-              <a:rPr lang="en-US" sz="850" i="1" dirty="0">
-                <a:solidFill>
-                  <a:srgbClr val="53565A"/>
-                </a:solidFill>
-                <a:latin typeface="Calibri" pitchFamily="34" charset="0"/>
-                <a:ea typeface="Calibri" pitchFamily="34" charset="-122"/>
-                <a:cs typeface="Calibri" pitchFamily="34" charset="-120"/>
-              </a:rPr>
-              <a:t>“Integrated: Data, analytics, and operations are integrated across major fraud types”</a:t>
-            </a:r>
-            <a:pPr algn="l" indent="0" marL="0">
-              <a:lnSpc>
-                <a:spcPct val="118000"/>
-              </a:lnSpc>
-              <a:buNone/>
-            </a:pPr>
-            <a:r>
-              <a:rPr lang="en-US" sz="850" dirty="0">
-                <a:solidFill>
-                  <a:srgbClr val="D0D0CE"/>
-                </a:solidFill>
-                <a:latin typeface="Calibri" pitchFamily="34" charset="0"/>
-                <a:ea typeface="Calibri" pitchFamily="34" charset="-122"/>
-                <a:cs typeface="Calibri" pitchFamily="34" charset="-120"/>
-              </a:rPr>
-              <a:t>  ·  </a:t>
-            </a:r>
-            <a:pPr algn="l" indent="0" marL="0">
-              <a:lnSpc>
-                <a:spcPct val="118000"/>
-              </a:lnSpc>
-              <a:buNone/>
-            </a:pPr>
-            <a:r>
-              <a:rPr lang="en-US" sz="850" i="1" dirty="0">
-                <a:solidFill>
-                  <a:srgbClr val="53565A"/>
-                </a:solidFill>
-                <a:latin typeface="Calibri" pitchFamily="34" charset="0"/>
-                <a:ea typeface="Calibri" pitchFamily="34" charset="-122"/>
-                <a:cs typeface="Calibri" pitchFamily="34" charset="-120"/>
-              </a:rPr>
-              <a:t>“Advanced: Predictive intelligence and ecosystem collaboration are embedded”</a:t>
-            </a:r>
-            <a:endParaRPr lang="en-US" sz="850" dirty="0"/>
           </a:p>
         </p:txBody>
       </p:sp>
@@ -11333,7 +11932,7 @@
                 <a:ea typeface="Calibri" pitchFamily="34" charset="-122"/>
                 <a:cs typeface="Calibri" pitchFamily="34" charset="-120"/>
               </a:rPr>
-              <a:t>Scaling Approach — Today vs. 3-Year Focus</a:t>
+              <a:t>Self-Reported Fraud Program Maturity — By Sector</a:t>
             </a:r>
             <a:endParaRPr lang="en-US" sz="1900" dirty="0"/>
           </a:p>
@@ -11375,7 +11974,7 @@
                 <a:ea typeface="Calibri" pitchFamily="34" charset="-122"/>
                 <a:cs typeface="Calibri" pitchFamily="34" charset="-120"/>
               </a:rPr>
-              <a:t>AI is already the top way fraud teams scale, and its lead is only growing.</a:t>
+              <a:t>82% self-rate “Integrated” or “Advanced” overall — but Banking clusters at Integrated while Insurance skews further, to Advanced.</a:t>
             </a:r>
             <a:endParaRPr lang="en-US" sz="1350" dirty="0"/>
           </a:p>
@@ -11440,7 +12039,7 @@
                 <a:ea typeface="IBM Plex Mono" pitchFamily="34" charset="-122"/>
                 <a:cs typeface="IBM Plex Mono" pitchFamily="34" charset="-120"/>
               </a:rPr>
-              <a:t>Q8 / Q9  </a:t>
+              <a:t>Q1  </a:t>
             </a:r>
             <a:pPr algn="l" indent="0" marL="0">
               <a:lnSpc>
@@ -11457,7 +12056,7 @@
                 <a:ea typeface="Calibri" pitchFamily="34" charset="-122"/>
                 <a:cs typeface="Calibri" pitchFamily="34" charset="-120"/>
               </a:rPr>
-              <a:t>“Which statement best describes your current approach to scaling fraud/investigations operations as fraud volume and complexity increases? / Which area do you expect will receive the greatest focus for operations transformation over the next three years?”</a:t>
+              <a:t>“Which statement best describes the current maturity of your organization's fraud program? (Banking vs. Insurance)”</a:t>
             </a:r>
             <a:endParaRPr lang="en-US" sz="1000" dirty="0"/>
           </a:p>
@@ -11577,7 +12176,7 @@
                 <a:ea typeface="Calibri" pitchFamily="34" charset="-122"/>
                 <a:cs typeface="Calibri" pitchFamily="34" charset="-120"/>
               </a:rPr>
-              <a:t>Single select, asked twice.  </a:t>
+              <a:t>Single select · low → high maturity.  </a:t>
             </a:r>
             <a:pPr algn="l" indent="0" marL="0">
               <a:lnSpc>
@@ -11611,7 +12210,7 @@
                 <a:ea typeface="Calibri" pitchFamily="34" charset="-122"/>
                 <a:cs typeface="Calibri" pitchFamily="34" charset="-120"/>
               </a:rPr>
-              <a:t>“Adding capacity through hiring full-time employees and workforce expansion”</a:t>
+              <a:t>“Reactive: Primarily incident-driven”</a:t>
             </a:r>
             <a:pPr algn="l" indent="0" marL="0">
               <a:lnSpc>
@@ -11645,7 +12244,7 @@
                 <a:ea typeface="Calibri" pitchFamily="34" charset="-122"/>
                 <a:cs typeface="Calibri" pitchFamily="34" charset="-120"/>
               </a:rPr>
-              <a:t>“Adding capacity through outsourcing arrangements (e.g., contractors)”</a:t>
+              <a:t>“Foundational: Controls established within individual business units”</a:t>
             </a:r>
             <a:pPr algn="l" indent="0" marL="0">
               <a:lnSpc>
@@ -11679,7 +12278,7 @@
                 <a:ea typeface="Calibri" pitchFamily="34" charset="-122"/>
                 <a:cs typeface="Calibri" pitchFamily="34" charset="-120"/>
               </a:rPr>
-              <a:t>“Automating workflows and minimizing manual activities”</a:t>
+              <a:t>“Managed: Enterprise standards and governance are in place”</a:t>
             </a:r>
             <a:pPr algn="l" indent="0" marL="0">
               <a:lnSpc>
@@ -11713,7 +12312,7 @@
                 <a:ea typeface="Calibri" pitchFamily="34" charset="-122"/>
                 <a:cs typeface="Calibri" pitchFamily="34" charset="-120"/>
               </a:rPr>
-              <a:t>“Augmenting existing capacity with AI-enabled tools”</a:t>
+              <a:t>“Integrated: Data, analytics, and operations are integrated across major fraud types”</a:t>
             </a:r>
             <a:pPr algn="l" indent="0" marL="0">
               <a:lnSpc>
@@ -11747,41 +12346,7 @@
                 <a:ea typeface="Calibri" pitchFamily="34" charset="-122"/>
                 <a:cs typeface="Calibri" pitchFamily="34" charset="-120"/>
               </a:rPr>
-              <a:t>“Redesigning operation processes and playbooks across the lifecycle”</a:t>
-            </a:r>
-            <a:pPr algn="l" indent="0" marL="0">
-              <a:lnSpc>
-                <a:spcPct val="118000"/>
-              </a:lnSpc>
-              <a:buNone/>
-            </a:pPr>
-            <a:r>
-              <a:rPr lang="en-US" sz="850" dirty="0">
-                <a:solidFill>
-                  <a:srgbClr val="D0D0CE"/>
-                </a:solidFill>
-                <a:latin typeface="Calibri" pitchFamily="34" charset="0"/>
-                <a:ea typeface="Calibri" pitchFamily="34" charset="-122"/>
-                <a:cs typeface="Calibri" pitchFamily="34" charset="-120"/>
-              </a:rPr>
-              <a:t>  ·  </a:t>
-            </a:r>
-            <a:pPr algn="l" indent="0" marL="0">
-              <a:lnSpc>
-                <a:spcPct val="118000"/>
-              </a:lnSpc>
-              <a:buNone/>
-            </a:pPr>
-            <a:r>
-              <a:rPr lang="en-US" sz="850" i="1" dirty="0">
-                <a:solidFill>
-                  <a:srgbClr val="53565A"/>
-                </a:solidFill>
-                <a:latin typeface="Calibri" pitchFamily="34" charset="0"/>
-                <a:ea typeface="Calibri" pitchFamily="34" charset="-122"/>
-                <a:cs typeface="Calibri" pitchFamily="34" charset="-120"/>
-              </a:rPr>
-              <a:t>“Pursuing a combination of the above approaches”</a:t>
+              <a:t>“Advanced: Predictive intelligence and ecosystem collaboration are embedded”</a:t>
             </a:r>
             <a:endParaRPr lang="en-US" sz="850" dirty="0"/>
           </a:p>
@@ -11801,7 +12366,7 @@
     <p:bg>
       <p:bgPr>
         <a:solidFill>
-          <a:srgbClr val="86BC25"/>
+          <a:srgbClr val="FFFFFF"/>
         </a:solidFill>
       </p:bgPr>
     </p:bg>
@@ -11827,8 +12392,8 @@
         </p:nvSpPr>
         <p:spPr>
           <a:xfrm>
-            <a:off x="502920" y="1699870"/>
-            <a:ext cx="10415016" cy="1591970"/>
+            <a:off x="502006" y="256032"/>
+            <a:ext cx="11188598" cy="310896"/>
           </a:xfrm>
           <a:prstGeom prst="rect">
             <a:avLst/>
@@ -11837,24 +12402,24 @@
           <a:ln/>
         </p:spPr>
         <p:txBody>
-          <a:bodyPr wrap="square" lIns="0" tIns="0" rIns="0" bIns="0" rtlCol="0" anchor="b"/>
-          <a:lstStyle/>
-          <a:p>
-            <a:pPr algn="l" indent="0" marL="0">
-              <a:buNone/>
-            </a:pPr>
-            <a:r>
-              <a:rPr lang="en-US" sz="3600" b="1" dirty="0">
-                <a:solidFill>
-                  <a:srgbClr val="FFFFFF"/>
-                </a:solidFill>
-                <a:latin typeface="Calibri" pitchFamily="34" charset="0"/>
-                <a:ea typeface="Calibri" pitchFamily="34" charset="-122"/>
-                <a:cs typeface="Calibri" pitchFamily="34" charset="-120"/>
-              </a:rPr>
-              <a:t>5. Regulatory &amp; Market Change</a:t>
-            </a:r>
-            <a:endParaRPr lang="en-US" sz="3600" dirty="0"/>
+          <a:bodyPr wrap="square" lIns="0" tIns="0" rIns="0" bIns="0" rtlCol="0" anchor="t"/>
+          <a:lstStyle/>
+          <a:p>
+            <a:pPr algn="l" indent="0" marL="0">
+              <a:buNone/>
+            </a:pPr>
+            <a:r>
+              <a:rPr lang="en-US" sz="1900" b="1" dirty="0">
+                <a:solidFill>
+                  <a:srgbClr val="000000"/>
+                </a:solidFill>
+                <a:latin typeface="Calibri" pitchFamily="34" charset="0"/>
+                <a:ea typeface="Calibri" pitchFamily="34" charset="-122"/>
+                <a:cs typeface="Calibri" pitchFamily="34" charset="-120"/>
+              </a:rPr>
+              <a:t>Scaling Approach — Today vs. 3-Year Focus</a:t>
+            </a:r>
+            <a:endParaRPr lang="en-US" sz="1900" dirty="0"/>
           </a:p>
         </p:txBody>
       </p:sp>
@@ -11866,8 +12431,8 @@
         </p:nvSpPr>
         <p:spPr>
           <a:xfrm>
-            <a:off x="502920" y="3423514"/>
-            <a:ext cx="10415016" cy="1563624"/>
+            <a:off x="502006" y="585216"/>
+            <a:ext cx="11188598" cy="713232"/>
           </a:xfrm>
           <a:prstGeom prst="rect">
             <a:avLst/>
@@ -11881,28 +12446,110 @@
           <a:p>
             <a:pPr algn="l" indent="0" marL="0">
               <a:lnSpc>
-                <a:spcPct val="110000"/>
+                <a:spcPct val="105000"/>
               </a:lnSpc>
               <a:buNone/>
             </a:pPr>
             <a:r>
-              <a:rPr lang="en-US" sz="1600" dirty="0">
-                <a:solidFill>
-                  <a:srgbClr val="FFFFFF"/>
-                </a:solidFill>
-                <a:latin typeface="Calibri" pitchFamily="34" charset="0"/>
-                <a:ea typeface="Calibri" pitchFamily="34" charset="-122"/>
-                <a:cs typeface="Calibri" pitchFamily="34" charset="-120"/>
-              </a:rPr>
-              <a:t>Where fraud investment is really going, and the disruption leaders see coming next.</a:t>
-            </a:r>
-            <a:endParaRPr lang="en-US" sz="1600" dirty="0"/>
-          </a:p>
-        </p:txBody>
-      </p:sp>
-      <p:sp>
-        <p:nvSpPr>
-          <p:cNvPr id="4" name="Text 2"/>
+              <a:rPr lang="en-US" sz="1350" b="1" dirty="0">
+                <a:solidFill>
+                  <a:srgbClr val="046A38"/>
+                </a:solidFill>
+                <a:latin typeface="Calibri" pitchFamily="34" charset="0"/>
+                <a:ea typeface="Calibri" pitchFamily="34" charset="-122"/>
+                <a:cs typeface="Calibri" pitchFamily="34" charset="-120"/>
+              </a:rPr>
+              <a:t>AI is already the top way fraud teams scale, and its lead is only growing.</a:t>
+            </a:r>
+            <a:endParaRPr lang="en-US" sz="1350" dirty="0"/>
+          </a:p>
+        </p:txBody>
+      </p:sp>
+      <p:sp>
+        <p:nvSpPr>
+          <p:cNvPr id="4" name="Shape 2"/>
+          <p:cNvSpPr/>
+          <p:nvPr/>
+        </p:nvSpPr>
+        <p:spPr>
+          <a:xfrm>
+            <a:off x="502006" y="1335024"/>
+            <a:ext cx="0" cy="512064"/>
+          </a:xfrm>
+          <a:prstGeom prst="line">
+            <a:avLst/>
+          </a:prstGeom>
+          <a:noFill/>
+          <a:ln w="25400">
+            <a:solidFill>
+              <a:srgbClr val="D0D0CE"/>
+            </a:solidFill>
+            <a:prstDash val="solid"/>
+          </a:ln>
+        </p:spPr>
+      </p:sp>
+      <p:sp>
+        <p:nvSpPr>
+          <p:cNvPr id="5" name="Text 3"/>
+          <p:cNvSpPr txBox="1"/>
+          <p:nvPr/>
+        </p:nvSpPr>
+        <p:spPr>
+          <a:xfrm>
+            <a:off x="648310" y="1335024"/>
+            <a:ext cx="11042294" cy="512064"/>
+          </a:xfrm>
+          <a:prstGeom prst="rect">
+            <a:avLst/>
+          </a:prstGeom>
+          <a:noFill/>
+          <a:ln/>
+        </p:spPr>
+        <p:txBody>
+          <a:bodyPr wrap="square" lIns="0" tIns="0" rIns="0" bIns="0" rtlCol="0" anchor="t"/>
+          <a:lstStyle/>
+          <a:p>
+            <a:pPr algn="l" indent="0" marL="0">
+              <a:lnSpc>
+                <a:spcPct val="106000"/>
+              </a:lnSpc>
+              <a:buNone/>
+            </a:pPr>
+            <a:r>
+              <a:rPr lang="en-US" sz="900" b="1" dirty="0">
+                <a:solidFill>
+                  <a:srgbClr val="046A38"/>
+                </a:solidFill>
+                <a:latin typeface="IBM Plex Mono" pitchFamily="34" charset="0"/>
+                <a:ea typeface="IBM Plex Mono" pitchFamily="34" charset="-122"/>
+                <a:cs typeface="IBM Plex Mono" pitchFamily="34" charset="-120"/>
+              </a:rPr>
+              <a:t>Q8 / Q9  </a:t>
+            </a:r>
+            <a:pPr algn="l" indent="0" marL="0">
+              <a:lnSpc>
+                <a:spcPct val="106000"/>
+              </a:lnSpc>
+              <a:buNone/>
+            </a:pPr>
+            <a:r>
+              <a:rPr lang="en-US" sz="1000" i="1" dirty="0">
+                <a:solidFill>
+                  <a:srgbClr val="575757"/>
+                </a:solidFill>
+                <a:latin typeface="Calibri" pitchFamily="34" charset="0"/>
+                <a:ea typeface="Calibri" pitchFamily="34" charset="-122"/>
+                <a:cs typeface="Calibri" pitchFamily="34" charset="-120"/>
+              </a:rPr>
+              <a:t>“Which statement best describes your current approach to scaling fraud/investigations operations as fraud volume and complexity increases? / Which area do you expect will receive the greatest focus for operations transformation over the next three years?”</a:t>
+            </a:r>
+            <a:endParaRPr lang="en-US" sz="1000" dirty="0"/>
+          </a:p>
+        </p:txBody>
+      </p:sp>
+      <p:sp>
+        <p:nvSpPr>
+          <p:cNvPr id="6" name="Text 4"/>
           <p:cNvSpPr txBox="1"/>
           <p:nvPr/>
         </p:nvSpPr>
@@ -11927,7 +12574,7 @@
             <a:r>
               <a:rPr lang="en-US" sz="900" dirty="0">
                 <a:solidFill>
-                  <a:srgbClr val="FFFFFF"/>
+                  <a:srgbClr val="53565A"/>
                 </a:solidFill>
                 <a:latin typeface="Calibri" pitchFamily="34" charset="0"/>
                 <a:ea typeface="Calibri" pitchFamily="34" charset="-122"/>
@@ -11936,6 +12583,291 @@
               <a:t>18</a:t>
             </a:r>
             <a:endParaRPr lang="en-US" sz="900" dirty="0"/>
+          </a:p>
+        </p:txBody>
+      </p:sp>
+      <p:graphicFrame>
+        <p:nvGraphicFramePr>
+          <p:cNvPr id="7" name="Chart 0" descr=""/>
+          <p:cNvGraphicFramePr/>
+          <p:nvPr/>
+        </p:nvGraphicFramePr>
+        <p:xfrm>
+          <a:off x="502006" y="2011680"/>
+          <a:ext cx="11188598" cy="3063240"/>
+        </p:xfrm>
+        <a:graphic xmlns:a="http://schemas.openxmlformats.org/drawingml/2006/main">
+          <a:graphicData uri="http://schemas.openxmlformats.org/drawingml/2006/chart">
+            <c:chart xmlns:c="http://schemas.openxmlformats.org/drawingml/2006/chart" r:id="rId1"/>
+          </a:graphicData>
+        </a:graphic>
+      </p:graphicFrame>
+      <p:sp>
+        <p:nvSpPr>
+          <p:cNvPr id="8" name="Shape 5"/>
+          <p:cNvSpPr/>
+          <p:nvPr/>
+        </p:nvSpPr>
+        <p:spPr>
+          <a:xfrm>
+            <a:off x="502006" y="5202936"/>
+            <a:ext cx="11188598" cy="0"/>
+          </a:xfrm>
+          <a:prstGeom prst="line">
+            <a:avLst/>
+          </a:prstGeom>
+          <a:noFill/>
+          <a:ln w="9525">
+            <a:solidFill>
+              <a:srgbClr val="D0D0CE"/>
+            </a:solidFill>
+            <a:prstDash val="solid"/>
+          </a:ln>
+        </p:spPr>
+      </p:sp>
+      <p:sp>
+        <p:nvSpPr>
+          <p:cNvPr id="9" name="Text 6"/>
+          <p:cNvSpPr txBox="1"/>
+          <p:nvPr/>
+        </p:nvSpPr>
+        <p:spPr>
+          <a:xfrm>
+            <a:off x="502006" y="5276088"/>
+            <a:ext cx="11188598" cy="886968"/>
+          </a:xfrm>
+          <a:prstGeom prst="rect">
+            <a:avLst/>
+          </a:prstGeom>
+          <a:noFill/>
+          <a:ln/>
+        </p:spPr>
+        <p:txBody>
+          <a:bodyPr wrap="square" lIns="0" tIns="0" rIns="0" bIns="0" rtlCol="0" anchor="t"/>
+          <a:lstStyle/>
+          <a:p>
+            <a:pPr algn="l" indent="0" marL="0">
+              <a:lnSpc>
+                <a:spcPct val="118000"/>
+              </a:lnSpc>
+              <a:buNone/>
+            </a:pPr>
+            <a:r>
+              <a:rPr lang="en-US" sz="850" b="1" dirty="0">
+                <a:solidFill>
+                  <a:srgbClr val="53565A"/>
+                </a:solidFill>
+                <a:latin typeface="Calibri" pitchFamily="34" charset="0"/>
+                <a:ea typeface="Calibri" pitchFamily="34" charset="-122"/>
+                <a:cs typeface="Calibri" pitchFamily="34" charset="-120"/>
+              </a:rPr>
+              <a:t>Single select, asked twice.  </a:t>
+            </a:r>
+            <a:pPr algn="l" indent="0" marL="0">
+              <a:lnSpc>
+                <a:spcPct val="118000"/>
+              </a:lnSpc>
+              <a:buNone/>
+            </a:pPr>
+            <a:r>
+              <a:rPr lang="en-US" sz="850" b="1" dirty="0">
+                <a:solidFill>
+                  <a:srgbClr val="53565A"/>
+                </a:solidFill>
+                <a:latin typeface="Calibri" pitchFamily="34" charset="0"/>
+                <a:ea typeface="Calibri" pitchFamily="34" charset="-122"/>
+                <a:cs typeface="Calibri" pitchFamily="34" charset="-120"/>
+              </a:rPr>
+              <a:t>Response options as fielded: </a:t>
+            </a:r>
+            <a:pPr algn="l" indent="0" marL="0">
+              <a:lnSpc>
+                <a:spcPct val="118000"/>
+              </a:lnSpc>
+              <a:buNone/>
+            </a:pPr>
+            <a:r>
+              <a:rPr lang="en-US" sz="850" i="1" dirty="0">
+                <a:solidFill>
+                  <a:srgbClr val="53565A"/>
+                </a:solidFill>
+                <a:latin typeface="Calibri" pitchFamily="34" charset="0"/>
+                <a:ea typeface="Calibri" pitchFamily="34" charset="-122"/>
+                <a:cs typeface="Calibri" pitchFamily="34" charset="-120"/>
+              </a:rPr>
+              <a:t>“Adding capacity through hiring full-time employees and workforce expansion”</a:t>
+            </a:r>
+            <a:pPr algn="l" indent="0" marL="0">
+              <a:lnSpc>
+                <a:spcPct val="118000"/>
+              </a:lnSpc>
+              <a:buNone/>
+            </a:pPr>
+            <a:r>
+              <a:rPr lang="en-US" sz="850" dirty="0">
+                <a:solidFill>
+                  <a:srgbClr val="D0D0CE"/>
+                </a:solidFill>
+                <a:latin typeface="Calibri" pitchFamily="34" charset="0"/>
+                <a:ea typeface="Calibri" pitchFamily="34" charset="-122"/>
+                <a:cs typeface="Calibri" pitchFamily="34" charset="-120"/>
+              </a:rPr>
+              <a:t>  ·  </a:t>
+            </a:r>
+            <a:pPr algn="l" indent="0" marL="0">
+              <a:lnSpc>
+                <a:spcPct val="118000"/>
+              </a:lnSpc>
+              <a:buNone/>
+            </a:pPr>
+            <a:r>
+              <a:rPr lang="en-US" sz="850" i="1" dirty="0">
+                <a:solidFill>
+                  <a:srgbClr val="53565A"/>
+                </a:solidFill>
+                <a:latin typeface="Calibri" pitchFamily="34" charset="0"/>
+                <a:ea typeface="Calibri" pitchFamily="34" charset="-122"/>
+                <a:cs typeface="Calibri" pitchFamily="34" charset="-120"/>
+              </a:rPr>
+              <a:t>“Adding capacity through outsourcing arrangements (e.g., contractors)”</a:t>
+            </a:r>
+            <a:pPr algn="l" indent="0" marL="0">
+              <a:lnSpc>
+                <a:spcPct val="118000"/>
+              </a:lnSpc>
+              <a:buNone/>
+            </a:pPr>
+            <a:r>
+              <a:rPr lang="en-US" sz="850" dirty="0">
+                <a:solidFill>
+                  <a:srgbClr val="D0D0CE"/>
+                </a:solidFill>
+                <a:latin typeface="Calibri" pitchFamily="34" charset="0"/>
+                <a:ea typeface="Calibri" pitchFamily="34" charset="-122"/>
+                <a:cs typeface="Calibri" pitchFamily="34" charset="-120"/>
+              </a:rPr>
+              <a:t>  ·  </a:t>
+            </a:r>
+            <a:pPr algn="l" indent="0" marL="0">
+              <a:lnSpc>
+                <a:spcPct val="118000"/>
+              </a:lnSpc>
+              <a:buNone/>
+            </a:pPr>
+            <a:r>
+              <a:rPr lang="en-US" sz="850" i="1" dirty="0">
+                <a:solidFill>
+                  <a:srgbClr val="53565A"/>
+                </a:solidFill>
+                <a:latin typeface="Calibri" pitchFamily="34" charset="0"/>
+                <a:ea typeface="Calibri" pitchFamily="34" charset="-122"/>
+                <a:cs typeface="Calibri" pitchFamily="34" charset="-120"/>
+              </a:rPr>
+              <a:t>“Automating workflows and minimizing manual activities”</a:t>
+            </a:r>
+            <a:pPr algn="l" indent="0" marL="0">
+              <a:lnSpc>
+                <a:spcPct val="118000"/>
+              </a:lnSpc>
+              <a:buNone/>
+            </a:pPr>
+            <a:r>
+              <a:rPr lang="en-US" sz="850" dirty="0">
+                <a:solidFill>
+                  <a:srgbClr val="D0D0CE"/>
+                </a:solidFill>
+                <a:latin typeface="Calibri" pitchFamily="34" charset="0"/>
+                <a:ea typeface="Calibri" pitchFamily="34" charset="-122"/>
+                <a:cs typeface="Calibri" pitchFamily="34" charset="-120"/>
+              </a:rPr>
+              <a:t>  ·  </a:t>
+            </a:r>
+            <a:pPr algn="l" indent="0" marL="0">
+              <a:lnSpc>
+                <a:spcPct val="118000"/>
+              </a:lnSpc>
+              <a:buNone/>
+            </a:pPr>
+            <a:r>
+              <a:rPr lang="en-US" sz="850" i="1" dirty="0">
+                <a:solidFill>
+                  <a:srgbClr val="53565A"/>
+                </a:solidFill>
+                <a:latin typeface="Calibri" pitchFamily="34" charset="0"/>
+                <a:ea typeface="Calibri" pitchFamily="34" charset="-122"/>
+                <a:cs typeface="Calibri" pitchFamily="34" charset="-120"/>
+              </a:rPr>
+              <a:t>“Augmenting existing capacity with AI-enabled tools”</a:t>
+            </a:r>
+            <a:pPr algn="l" indent="0" marL="0">
+              <a:lnSpc>
+                <a:spcPct val="118000"/>
+              </a:lnSpc>
+              <a:buNone/>
+            </a:pPr>
+            <a:r>
+              <a:rPr lang="en-US" sz="850" dirty="0">
+                <a:solidFill>
+                  <a:srgbClr val="D0D0CE"/>
+                </a:solidFill>
+                <a:latin typeface="Calibri" pitchFamily="34" charset="0"/>
+                <a:ea typeface="Calibri" pitchFamily="34" charset="-122"/>
+                <a:cs typeface="Calibri" pitchFamily="34" charset="-120"/>
+              </a:rPr>
+              <a:t>  ·  </a:t>
+            </a:r>
+            <a:pPr algn="l" indent="0" marL="0">
+              <a:lnSpc>
+                <a:spcPct val="118000"/>
+              </a:lnSpc>
+              <a:buNone/>
+            </a:pPr>
+            <a:r>
+              <a:rPr lang="en-US" sz="850" i="1" dirty="0">
+                <a:solidFill>
+                  <a:srgbClr val="53565A"/>
+                </a:solidFill>
+                <a:latin typeface="Calibri" pitchFamily="34" charset="0"/>
+                <a:ea typeface="Calibri" pitchFamily="34" charset="-122"/>
+                <a:cs typeface="Calibri" pitchFamily="34" charset="-120"/>
+              </a:rPr>
+              <a:t>“Redesigning operation processes and playbooks across the lifecycle”</a:t>
+            </a:r>
+            <a:pPr algn="l" indent="0" marL="0">
+              <a:lnSpc>
+                <a:spcPct val="118000"/>
+              </a:lnSpc>
+              <a:buNone/>
+            </a:pPr>
+            <a:r>
+              <a:rPr lang="en-US" sz="850" dirty="0">
+                <a:solidFill>
+                  <a:srgbClr val="D0D0CE"/>
+                </a:solidFill>
+                <a:latin typeface="Calibri" pitchFamily="34" charset="0"/>
+                <a:ea typeface="Calibri" pitchFamily="34" charset="-122"/>
+                <a:cs typeface="Calibri" pitchFamily="34" charset="-120"/>
+              </a:rPr>
+              <a:t>  ·  </a:t>
+            </a:r>
+            <a:pPr algn="l" indent="0" marL="0">
+              <a:lnSpc>
+                <a:spcPct val="118000"/>
+              </a:lnSpc>
+              <a:buNone/>
+            </a:pPr>
+            <a:r>
+              <a:rPr lang="en-US" sz="850" i="1" dirty="0">
+                <a:solidFill>
+                  <a:srgbClr val="53565A"/>
+                </a:solidFill>
+                <a:latin typeface="Calibri" pitchFamily="34" charset="0"/>
+                <a:ea typeface="Calibri" pitchFamily="34" charset="-122"/>
+                <a:cs typeface="Calibri" pitchFamily="34" charset="-120"/>
+              </a:rPr>
+              <a:t>“Pursuing a combination of the above approaches”</a:t>
+            </a:r>
+            <a:endParaRPr lang="en-US" sz="850" dirty="0"/>
           </a:p>
         </p:txBody>
       </p:sp>
@@ -12889,7 +13821,7 @@
     <p:bg>
       <p:bgPr>
         <a:solidFill>
-          <a:srgbClr val="FFFFFF"/>
+          <a:srgbClr val="86BC25"/>
         </a:solidFill>
       </p:bgPr>
     </p:bg>
@@ -12915,8 +13847,8 @@
         </p:nvSpPr>
         <p:spPr>
           <a:xfrm>
-            <a:off x="502006" y="256032"/>
-            <a:ext cx="11188598" cy="310896"/>
+            <a:off x="502920" y="1699870"/>
+            <a:ext cx="10415016" cy="1591970"/>
           </a:xfrm>
           <a:prstGeom prst="rect">
             <a:avLst/>
@@ -12925,24 +13857,24 @@
           <a:ln/>
         </p:spPr>
         <p:txBody>
-          <a:bodyPr wrap="square" lIns="0" tIns="0" rIns="0" bIns="0" rtlCol="0" anchor="t"/>
-          <a:lstStyle/>
-          <a:p>
-            <a:pPr algn="l" indent="0" marL="0">
-              <a:buNone/>
-            </a:pPr>
-            <a:r>
-              <a:rPr lang="en-US" sz="1900" b="1" dirty="0">
-                <a:solidFill>
-                  <a:srgbClr val="000000"/>
-                </a:solidFill>
-                <a:latin typeface="Calibri" pitchFamily="34" charset="0"/>
-                <a:ea typeface="Calibri" pitchFamily="34" charset="-122"/>
-                <a:cs typeface="Calibri" pitchFamily="34" charset="-120"/>
-              </a:rPr>
-              <a:t>Fraud Investment Relative to Regulatory Requirements</a:t>
-            </a:r>
-            <a:endParaRPr lang="en-US" sz="1900" dirty="0"/>
+          <a:bodyPr wrap="square" lIns="0" tIns="0" rIns="0" bIns="0" rtlCol="0" anchor="b"/>
+          <a:lstStyle/>
+          <a:p>
+            <a:pPr algn="l" indent="0" marL="0">
+              <a:buNone/>
+            </a:pPr>
+            <a:r>
+              <a:rPr lang="en-US" sz="3600" b="1" dirty="0">
+                <a:solidFill>
+                  <a:srgbClr val="FFFFFF"/>
+                </a:solidFill>
+                <a:latin typeface="Calibri" pitchFamily="34" charset="0"/>
+                <a:ea typeface="Calibri" pitchFamily="34" charset="-122"/>
+                <a:cs typeface="Calibri" pitchFamily="34" charset="-120"/>
+              </a:rPr>
+              <a:t>5. Regulatory &amp; Market Change</a:t>
+            </a:r>
+            <a:endParaRPr lang="en-US" sz="3600" dirty="0"/>
           </a:p>
         </p:txBody>
       </p:sp>
@@ -12954,8 +13886,8 @@
         </p:nvSpPr>
         <p:spPr>
           <a:xfrm>
-            <a:off x="502006" y="585216"/>
-            <a:ext cx="11188598" cy="713232"/>
+            <a:off x="502920" y="3423514"/>
+            <a:ext cx="10415016" cy="1563624"/>
           </a:xfrm>
           <a:prstGeom prst="rect">
             <a:avLst/>
@@ -12969,58 +13901,35 @@
           <a:p>
             <a:pPr algn="l" indent="0" marL="0">
               <a:lnSpc>
-                <a:spcPct val="105000"/>
+                <a:spcPct val="110000"/>
               </a:lnSpc>
               <a:buNone/>
             </a:pPr>
             <a:r>
-              <a:rPr lang="en-US" sz="1350" b="1" dirty="0">
-                <a:solidFill>
-                  <a:srgbClr val="046A38"/>
-                </a:solidFill>
-                <a:latin typeface="Calibri" pitchFamily="34" charset="0"/>
-                <a:ea typeface="Calibri" pitchFamily="34" charset="-122"/>
-                <a:cs typeface="Calibri" pitchFamily="34" charset="-120"/>
-              </a:rPr>
-              <a:t>Most fraud spending today is about fixing past problems, not getting ahead of new ones.</a:t>
-            </a:r>
-            <a:endParaRPr lang="en-US" sz="1350" dirty="0"/>
-          </a:p>
-        </p:txBody>
-      </p:sp>
-      <p:sp>
-        <p:nvSpPr>
-          <p:cNvPr id="4" name="Shape 2"/>
-          <p:cNvSpPr/>
-          <p:nvPr/>
-        </p:nvSpPr>
-        <p:spPr>
-          <a:xfrm>
-            <a:off x="502006" y="1335024"/>
-            <a:ext cx="0" cy="512064"/>
-          </a:xfrm>
-          <a:prstGeom prst="line">
-            <a:avLst/>
-          </a:prstGeom>
-          <a:noFill/>
-          <a:ln w="25400">
-            <a:solidFill>
-              <a:srgbClr val="D0D0CE"/>
-            </a:solidFill>
-            <a:prstDash val="solid"/>
-          </a:ln>
-        </p:spPr>
-      </p:sp>
-      <p:sp>
-        <p:nvSpPr>
-          <p:cNvPr id="5" name="Text 3"/>
+              <a:rPr lang="en-US" sz="1600" dirty="0">
+                <a:solidFill>
+                  <a:srgbClr val="FFFFFF"/>
+                </a:solidFill>
+                <a:latin typeface="Calibri" pitchFamily="34" charset="0"/>
+                <a:ea typeface="Calibri" pitchFamily="34" charset="-122"/>
+                <a:cs typeface="Calibri" pitchFamily="34" charset="-120"/>
+              </a:rPr>
+              <a:t>Where fraud investment is really going, and the disruption leaders see coming next.</a:t>
+            </a:r>
+            <a:endParaRPr lang="en-US" sz="1600" dirty="0"/>
+          </a:p>
+        </p:txBody>
+      </p:sp>
+      <p:sp>
+        <p:nvSpPr>
+          <p:cNvPr id="4" name="Text 2"/>
           <p:cNvSpPr txBox="1"/>
           <p:nvPr/>
         </p:nvSpPr>
         <p:spPr>
           <a:xfrm>
-            <a:off x="648310" y="1335024"/>
-            <a:ext cx="11042294" cy="512064"/>
+            <a:off x="11346790" y="6537960"/>
+            <a:ext cx="343814" cy="182880"/>
           </a:xfrm>
           <a:prstGeom prst="rect">
             <a:avLst/>
@@ -13029,65 +13938,6 @@
           <a:ln/>
         </p:spPr>
         <p:txBody>
-          <a:bodyPr wrap="square" lIns="0" tIns="0" rIns="0" bIns="0" rtlCol="0" anchor="t"/>
-          <a:lstStyle/>
-          <a:p>
-            <a:pPr algn="l" indent="0" marL="0">
-              <a:lnSpc>
-                <a:spcPct val="106000"/>
-              </a:lnSpc>
-              <a:buNone/>
-            </a:pPr>
-            <a:r>
-              <a:rPr lang="en-US" sz="900" b="1" dirty="0">
-                <a:solidFill>
-                  <a:srgbClr val="046A38"/>
-                </a:solidFill>
-                <a:latin typeface="IBM Plex Mono" pitchFamily="34" charset="0"/>
-                <a:ea typeface="IBM Plex Mono" pitchFamily="34" charset="-122"/>
-                <a:cs typeface="IBM Plex Mono" pitchFamily="34" charset="-120"/>
-              </a:rPr>
-              <a:t>Q10  </a:t>
-            </a:r>
-            <a:pPr algn="l" indent="0" marL="0">
-              <a:lnSpc>
-                <a:spcPct val="106000"/>
-              </a:lnSpc>
-              <a:buNone/>
-            </a:pPr>
-            <a:r>
-              <a:rPr lang="en-US" sz="1000" i="1" dirty="0">
-                <a:solidFill>
-                  <a:srgbClr val="575757"/>
-                </a:solidFill>
-                <a:latin typeface="Calibri" pitchFamily="34" charset="0"/>
-                <a:ea typeface="Calibri" pitchFamily="34" charset="-122"/>
-                <a:cs typeface="Calibri" pitchFamily="34" charset="-120"/>
-              </a:rPr>
-              <a:t>“Which statement best reflects how your organization is allocating fraud-related investment in response to regulatory and compliance requirements?”</a:t>
-            </a:r>
-            <a:endParaRPr lang="en-US" sz="1000" dirty="0"/>
-          </a:p>
-        </p:txBody>
-      </p:sp>
-      <p:sp>
-        <p:nvSpPr>
-          <p:cNvPr id="6" name="Text 4"/>
-          <p:cNvSpPr txBox="1"/>
-          <p:nvPr/>
-        </p:nvSpPr>
-        <p:spPr>
-          <a:xfrm>
-            <a:off x="11346790" y="6537960"/>
-            <a:ext cx="343814" cy="182880"/>
-          </a:xfrm>
-          <a:prstGeom prst="rect">
-            <a:avLst/>
-          </a:prstGeom>
-          <a:noFill/>
-          <a:ln/>
-        </p:spPr>
-        <p:txBody>
           <a:bodyPr wrap="square" rtlCol="0" anchor="ctr"/>
           <a:lstStyle/>
           <a:p>
@@ -13097,7 +13947,7 @@
             <a:r>
               <a:rPr lang="en-US" sz="900" dirty="0">
                 <a:solidFill>
-                  <a:srgbClr val="53565A"/>
+                  <a:srgbClr val="FFFFFF"/>
                 </a:solidFill>
                 <a:latin typeface="Calibri" pitchFamily="34" charset="0"/>
                 <a:ea typeface="Calibri" pitchFamily="34" charset="-122"/>
@@ -13106,189 +13956,6 @@
               <a:t>19</a:t>
             </a:r>
             <a:endParaRPr lang="en-US" sz="900" dirty="0"/>
-          </a:p>
-        </p:txBody>
-      </p:sp>
-      <p:graphicFrame>
-        <p:nvGraphicFramePr>
-          <p:cNvPr id="7" name="Chart 0" descr=""/>
-          <p:cNvGraphicFramePr/>
-          <p:nvPr/>
-        </p:nvGraphicFramePr>
-        <p:xfrm>
-          <a:off x="502006" y="2011680"/>
-          <a:ext cx="11188598" cy="3063240"/>
-        </p:xfrm>
-        <a:graphic xmlns:a="http://schemas.openxmlformats.org/drawingml/2006/main">
-          <a:graphicData uri="http://schemas.openxmlformats.org/drawingml/2006/chart">
-            <c:chart xmlns:c="http://schemas.openxmlformats.org/drawingml/2006/chart" r:id="rId1"/>
-          </a:graphicData>
-        </a:graphic>
-      </p:graphicFrame>
-      <p:sp>
-        <p:nvSpPr>
-          <p:cNvPr id="8" name="Shape 5"/>
-          <p:cNvSpPr/>
-          <p:nvPr/>
-        </p:nvSpPr>
-        <p:spPr>
-          <a:xfrm>
-            <a:off x="502006" y="5202936"/>
-            <a:ext cx="11188598" cy="0"/>
-          </a:xfrm>
-          <a:prstGeom prst="line">
-            <a:avLst/>
-          </a:prstGeom>
-          <a:noFill/>
-          <a:ln w="9525">
-            <a:solidFill>
-              <a:srgbClr val="D0D0CE"/>
-            </a:solidFill>
-            <a:prstDash val="solid"/>
-          </a:ln>
-        </p:spPr>
-      </p:sp>
-      <p:sp>
-        <p:nvSpPr>
-          <p:cNvPr id="9" name="Text 6"/>
-          <p:cNvSpPr txBox="1"/>
-          <p:nvPr/>
-        </p:nvSpPr>
-        <p:spPr>
-          <a:xfrm>
-            <a:off x="502006" y="5276088"/>
-            <a:ext cx="11188598" cy="886968"/>
-          </a:xfrm>
-          <a:prstGeom prst="rect">
-            <a:avLst/>
-          </a:prstGeom>
-          <a:noFill/>
-          <a:ln/>
-        </p:spPr>
-        <p:txBody>
-          <a:bodyPr wrap="square" lIns="0" tIns="0" rIns="0" bIns="0" rtlCol="0" anchor="t"/>
-          <a:lstStyle/>
-          <a:p>
-            <a:pPr algn="l" indent="0" marL="0">
-              <a:lnSpc>
-                <a:spcPct val="118000"/>
-              </a:lnSpc>
-              <a:buNone/>
-            </a:pPr>
-            <a:r>
-              <a:rPr lang="en-US" sz="850" b="1" dirty="0">
-                <a:solidFill>
-                  <a:srgbClr val="53565A"/>
-                </a:solidFill>
-                <a:latin typeface="Calibri" pitchFamily="34" charset="0"/>
-                <a:ea typeface="Calibri" pitchFamily="34" charset="-122"/>
-                <a:cs typeface="Calibri" pitchFamily="34" charset="-120"/>
-              </a:rPr>
-              <a:t>Single select.  </a:t>
-            </a:r>
-            <a:pPr algn="l" indent="0" marL="0">
-              <a:lnSpc>
-                <a:spcPct val="118000"/>
-              </a:lnSpc>
-              <a:buNone/>
-            </a:pPr>
-            <a:r>
-              <a:rPr lang="en-US" sz="850" b="1" dirty="0">
-                <a:solidFill>
-                  <a:srgbClr val="53565A"/>
-                </a:solidFill>
-                <a:latin typeface="Calibri" pitchFamily="34" charset="0"/>
-                <a:ea typeface="Calibri" pitchFamily="34" charset="-122"/>
-                <a:cs typeface="Calibri" pitchFamily="34" charset="-120"/>
-              </a:rPr>
-              <a:t>Response options as fielded: </a:t>
-            </a:r>
-            <a:pPr algn="l" indent="0" marL="0">
-              <a:lnSpc>
-                <a:spcPct val="118000"/>
-              </a:lnSpc>
-              <a:buNone/>
-            </a:pPr>
-            <a:r>
-              <a:rPr lang="en-US" sz="850" i="1" dirty="0">
-                <a:solidFill>
-                  <a:srgbClr val="53565A"/>
-                </a:solidFill>
-                <a:latin typeface="Calibri" pitchFamily="34" charset="0"/>
-                <a:ea typeface="Calibri" pitchFamily="34" charset="-122"/>
-                <a:cs typeface="Calibri" pitchFamily="34" charset="-120"/>
-              </a:rPr>
-              <a:t>“Primarily investing to meet upcoming and draft regulatory requirements”</a:t>
-            </a:r>
-            <a:pPr algn="l" indent="0" marL="0">
-              <a:lnSpc>
-                <a:spcPct val="118000"/>
-              </a:lnSpc>
-              <a:buNone/>
-            </a:pPr>
-            <a:r>
-              <a:rPr lang="en-US" sz="850" dirty="0">
-                <a:solidFill>
-                  <a:srgbClr val="D0D0CE"/>
-                </a:solidFill>
-                <a:latin typeface="Calibri" pitchFamily="34" charset="0"/>
-                <a:ea typeface="Calibri" pitchFamily="34" charset="-122"/>
-                <a:cs typeface="Calibri" pitchFamily="34" charset="-120"/>
-              </a:rPr>
-              <a:t>  ·  </a:t>
-            </a:r>
-            <a:pPr algn="l" indent="0" marL="0">
-              <a:lnSpc>
-                <a:spcPct val="118000"/>
-              </a:lnSpc>
-              <a:buNone/>
-            </a:pPr>
-            <a:r>
-              <a:rPr lang="en-US" sz="850" i="1" dirty="0">
-                <a:solidFill>
-                  <a:srgbClr val="53565A"/>
-                </a:solidFill>
-                <a:latin typeface="Calibri" pitchFamily="34" charset="0"/>
-                <a:ea typeface="Calibri" pitchFamily="34" charset="-122"/>
-                <a:cs typeface="Calibri" pitchFamily="34" charset="-120"/>
-              </a:rPr>
-              <a:t>“Primarily investing to remediate existing compliance and control gaps”</a:t>
-            </a:r>
-            <a:pPr algn="l" indent="0" marL="0">
-              <a:lnSpc>
-                <a:spcPct val="118000"/>
-              </a:lnSpc>
-              <a:buNone/>
-            </a:pPr>
-            <a:r>
-              <a:rPr lang="en-US" sz="850" dirty="0">
-                <a:solidFill>
-                  <a:srgbClr val="D0D0CE"/>
-                </a:solidFill>
-                <a:latin typeface="Calibri" pitchFamily="34" charset="0"/>
-                <a:ea typeface="Calibri" pitchFamily="34" charset="-122"/>
-                <a:cs typeface="Calibri" pitchFamily="34" charset="-120"/>
-              </a:rPr>
-              <a:t>  ·  </a:t>
-            </a:r>
-            <a:pPr algn="l" indent="0" marL="0">
-              <a:lnSpc>
-                <a:spcPct val="118000"/>
-              </a:lnSpc>
-              <a:buNone/>
-            </a:pPr>
-            <a:r>
-              <a:rPr lang="en-US" sz="850" i="1" dirty="0">
-                <a:solidFill>
-                  <a:srgbClr val="53565A"/>
-                </a:solidFill>
-                <a:latin typeface="Calibri" pitchFamily="34" charset="0"/>
-                <a:ea typeface="Calibri" pitchFamily="34" charset="-122"/>
-                <a:cs typeface="Calibri" pitchFamily="34" charset="-120"/>
-              </a:rPr>
-              <a:t>“Regulatory requirements are not a primary driver of fraud-related investment”</a:t>
-            </a:r>
-            <a:endParaRPr lang="en-US" sz="850" dirty="0"/>
           </a:p>
         </p:txBody>
       </p:sp>
@@ -13357,7 +14024,7 @@
                 <a:ea typeface="Calibri" pitchFamily="34" charset="-122"/>
                 <a:cs typeface="Calibri" pitchFamily="34" charset="-120"/>
               </a:rPr>
-              <a:t>Upcoming Regulatory / Market Change With Greatest Expected Impact</a:t>
+              <a:t>Fraud Investment Relative to Regulatory Requirements</a:t>
             </a:r>
             <a:endParaRPr lang="en-US" sz="1900" dirty="0"/>
           </a:p>
@@ -13399,7 +14066,7 @@
                 <a:ea typeface="Calibri" pitchFamily="34" charset="-122"/>
                 <a:cs typeface="Calibri" pitchFamily="34" charset="-120"/>
               </a:rPr>
-              <a:t>Identity and authentication tops a close three-way race for the next big disruption.</a:t>
+              <a:t>Most fraud spending today is about fixing past problems, not getting ahead of new ones.</a:t>
             </a:r>
             <a:endParaRPr lang="en-US" sz="1350" dirty="0"/>
           </a:p>
@@ -13464,7 +14131,7 @@
                 <a:ea typeface="IBM Plex Mono" pitchFamily="34" charset="-122"/>
                 <a:cs typeface="IBM Plex Mono" pitchFamily="34" charset="-120"/>
               </a:rPr>
-              <a:t>Q11  </a:t>
+              <a:t>Q10  </a:t>
             </a:r>
             <a:pPr algn="l" indent="0" marL="0">
               <a:lnSpc>
@@ -13481,7 +14148,7 @@
                 <a:ea typeface="Calibri" pitchFamily="34" charset="-122"/>
                 <a:cs typeface="Calibri" pitchFamily="34" charset="-120"/>
               </a:rPr>
-              <a:t>“Which upcoming regulatory or market changes is expected to have the greatest impact on your fraud program?”</a:t>
+              <a:t>“Which statement best reflects how your organization is allocating fraud-related investment in response to regulatory and compliance requirements?”</a:t>
             </a:r>
             <a:endParaRPr lang="en-US" sz="1000" dirty="0"/>
           </a:p>
@@ -13601,7 +14268,7 @@
                 <a:ea typeface="Calibri" pitchFamily="34" charset="-122"/>
                 <a:cs typeface="Calibri" pitchFamily="34" charset="-120"/>
               </a:rPr>
-              <a:t>Ranked top 3 — shown as % of respondents who placed the option anywhere in their top 3 (not mutually exclusive; bars don't sum to 100%).  </a:t>
+              <a:t>Single select.  </a:t>
             </a:r>
             <a:pPr algn="l" indent="0" marL="0">
               <a:lnSpc>
@@ -13635,7 +14302,7 @@
                 <a:ea typeface="Calibri" pitchFamily="34" charset="-122"/>
                 <a:cs typeface="Calibri" pitchFamily="34" charset="-120"/>
               </a:rPr>
-              <a:t>“Payment innovation and adoption (e.g., real-time payments, stable coins, agentic payments)”</a:t>
+              <a:t>“Primarily investing to meet upcoming and draft regulatory requirements”</a:t>
             </a:r>
             <a:pPr algn="l" indent="0" marL="0">
               <a:lnSpc>
@@ -13669,7 +14336,7 @@
                 <a:ea typeface="Calibri" pitchFamily="34" charset="-122"/>
                 <a:cs typeface="Calibri" pitchFamily="34" charset="-120"/>
               </a:rPr>
-              <a:t>“Liability and reimbursement changes”</a:t>
+              <a:t>“Primarily investing to remediate existing compliance and control gaps”</a:t>
             </a:r>
             <a:pPr algn="l" indent="0" marL="0">
               <a:lnSpc>
@@ -13703,109 +14370,7 @@
                 <a:ea typeface="Calibri" pitchFamily="34" charset="-122"/>
                 <a:cs typeface="Calibri" pitchFamily="34" charset="-120"/>
               </a:rPr>
-              <a:t>“Open Banking / Consumer-driven banking initiatives”</a:t>
-            </a:r>
-            <a:pPr algn="l" indent="0" marL="0">
-              <a:lnSpc>
-                <a:spcPct val="118000"/>
-              </a:lnSpc>
-              <a:buNone/>
-            </a:pPr>
-            <a:r>
-              <a:rPr lang="en-US" sz="850" dirty="0">
-                <a:solidFill>
-                  <a:srgbClr val="D0D0CE"/>
-                </a:solidFill>
-                <a:latin typeface="Calibri" pitchFamily="34" charset="0"/>
-                <a:ea typeface="Calibri" pitchFamily="34" charset="-122"/>
-                <a:cs typeface="Calibri" pitchFamily="34" charset="-120"/>
-              </a:rPr>
-              <a:t>  ·  </a:t>
-            </a:r>
-            <a:pPr algn="l" indent="0" marL="0">
-              <a:lnSpc>
-                <a:spcPct val="118000"/>
-              </a:lnSpc>
-              <a:buNone/>
-            </a:pPr>
-            <a:r>
-              <a:rPr lang="en-US" sz="850" i="1" dirty="0">
-                <a:solidFill>
-                  <a:srgbClr val="53565A"/>
-                </a:solidFill>
-                <a:latin typeface="Calibri" pitchFamily="34" charset="0"/>
-                <a:ea typeface="Calibri" pitchFamily="34" charset="-122"/>
-                <a:cs typeface="Calibri" pitchFamily="34" charset="-120"/>
-              </a:rPr>
-              <a:t>“AML related modernization initiatives”</a:t>
-            </a:r>
-            <a:pPr algn="l" indent="0" marL="0">
-              <a:lnSpc>
-                <a:spcPct val="118000"/>
-              </a:lnSpc>
-              <a:buNone/>
-            </a:pPr>
-            <a:r>
-              <a:rPr lang="en-US" sz="850" dirty="0">
-                <a:solidFill>
-                  <a:srgbClr val="D0D0CE"/>
-                </a:solidFill>
-                <a:latin typeface="Calibri" pitchFamily="34" charset="0"/>
-                <a:ea typeface="Calibri" pitchFamily="34" charset="-122"/>
-                <a:cs typeface="Calibri" pitchFamily="34" charset="-120"/>
-              </a:rPr>
-              <a:t>  ·  </a:t>
-            </a:r>
-            <a:pPr algn="l" indent="0" marL="0">
-              <a:lnSpc>
-                <a:spcPct val="118000"/>
-              </a:lnSpc>
-              <a:buNone/>
-            </a:pPr>
-            <a:r>
-              <a:rPr lang="en-US" sz="850" i="1" dirty="0">
-                <a:solidFill>
-                  <a:srgbClr val="53565A"/>
-                </a:solidFill>
-                <a:latin typeface="Calibri" pitchFamily="34" charset="0"/>
-                <a:ea typeface="Calibri" pitchFamily="34" charset="-122"/>
-                <a:cs typeface="Calibri" pitchFamily="34" charset="-120"/>
-              </a:rPr>
-              <a:t>“Privacy, data-sharing requirements, and AI governance requirements”</a:t>
-            </a:r>
-            <a:pPr algn="l" indent="0" marL="0">
-              <a:lnSpc>
-                <a:spcPct val="118000"/>
-              </a:lnSpc>
-              <a:buNone/>
-            </a:pPr>
-            <a:r>
-              <a:rPr lang="en-US" sz="850" dirty="0">
-                <a:solidFill>
-                  <a:srgbClr val="D0D0CE"/>
-                </a:solidFill>
-                <a:latin typeface="Calibri" pitchFamily="34" charset="0"/>
-                <a:ea typeface="Calibri" pitchFamily="34" charset="-122"/>
-                <a:cs typeface="Calibri" pitchFamily="34" charset="-120"/>
-              </a:rPr>
-              <a:t>  ·  </a:t>
-            </a:r>
-            <a:pPr algn="l" indent="0" marL="0">
-              <a:lnSpc>
-                <a:spcPct val="118000"/>
-              </a:lnSpc>
-              <a:buNone/>
-            </a:pPr>
-            <a:r>
-              <a:rPr lang="en-US" sz="850" i="1" dirty="0">
-                <a:solidFill>
-                  <a:srgbClr val="53565A"/>
-                </a:solidFill>
-                <a:latin typeface="Calibri" pitchFamily="34" charset="0"/>
-                <a:ea typeface="Calibri" pitchFamily="34" charset="-122"/>
-                <a:cs typeface="Calibri" pitchFamily="34" charset="-120"/>
-              </a:rPr>
-              <a:t>“Customer identity, authentication, and digital trust expectations”</a:t>
+              <a:t>“Regulatory requirements are not a primary driver of fraud-related investment”</a:t>
             </a:r>
             <a:endParaRPr lang="en-US" sz="850" dirty="0"/>
           </a:p>
@@ -13822,6 +14387,525 @@
 <file path=ppt/slides/slide22.xml><?xml version="1.0" encoding="utf-8"?>
 <p:sld xmlns:a="http://schemas.openxmlformats.org/drawingml/2006/main" xmlns:r="http://schemas.openxmlformats.org/officeDocument/2006/relationships" xmlns:p="http://schemas.openxmlformats.org/presentationml/2006/main">
   <p:cSld name="Slide 22">
+    <p:bg>
+      <p:bgPr>
+        <a:solidFill>
+          <a:srgbClr val="FFFFFF"/>
+        </a:solidFill>
+      </p:bgPr>
+    </p:bg>
+    <p:spTree>
+      <p:nvGrpSpPr>
+        <p:cNvPr id="1" name=""/>
+        <p:cNvGrpSpPr/>
+        <p:nvPr/>
+      </p:nvGrpSpPr>
+      <p:grpSpPr>
+        <a:xfrm>
+          <a:off x="0" y="0"/>
+          <a:ext cx="0" cy="0"/>
+          <a:chOff x="0" y="0"/>
+          <a:chExt cx="0" cy="0"/>
+        </a:xfrm>
+      </p:grpSpPr>
+      <p:sp>
+        <p:nvSpPr>
+          <p:cNvPr id="2" name="Text 0"/>
+          <p:cNvSpPr txBox="1"/>
+          <p:nvPr/>
+        </p:nvSpPr>
+        <p:spPr>
+          <a:xfrm>
+            <a:off x="502006" y="256032"/>
+            <a:ext cx="11188598" cy="310896"/>
+          </a:xfrm>
+          <a:prstGeom prst="rect">
+            <a:avLst/>
+          </a:prstGeom>
+          <a:noFill/>
+          <a:ln/>
+        </p:spPr>
+        <p:txBody>
+          <a:bodyPr wrap="square" lIns="0" tIns="0" rIns="0" bIns="0" rtlCol="0" anchor="t"/>
+          <a:lstStyle/>
+          <a:p>
+            <a:pPr algn="l" indent="0" marL="0">
+              <a:buNone/>
+            </a:pPr>
+            <a:r>
+              <a:rPr lang="en-US" sz="1900" b="1" dirty="0">
+                <a:solidFill>
+                  <a:srgbClr val="000000"/>
+                </a:solidFill>
+                <a:latin typeface="Calibri" pitchFamily="34" charset="0"/>
+                <a:ea typeface="Calibri" pitchFamily="34" charset="-122"/>
+                <a:cs typeface="Calibri" pitchFamily="34" charset="-120"/>
+              </a:rPr>
+              <a:t>Upcoming Regulatory / Market Change With Greatest Expected Impact</a:t>
+            </a:r>
+            <a:endParaRPr lang="en-US" sz="1900" dirty="0"/>
+          </a:p>
+        </p:txBody>
+      </p:sp>
+      <p:sp>
+        <p:nvSpPr>
+          <p:cNvPr id="3" name="Text 1"/>
+          <p:cNvSpPr txBox="1"/>
+          <p:nvPr/>
+        </p:nvSpPr>
+        <p:spPr>
+          <a:xfrm>
+            <a:off x="502006" y="585216"/>
+            <a:ext cx="11188598" cy="713232"/>
+          </a:xfrm>
+          <a:prstGeom prst="rect">
+            <a:avLst/>
+          </a:prstGeom>
+          <a:noFill/>
+          <a:ln/>
+        </p:spPr>
+        <p:txBody>
+          <a:bodyPr wrap="square" lIns="0" tIns="0" rIns="0" bIns="0" rtlCol="0" anchor="t"/>
+          <a:lstStyle/>
+          <a:p>
+            <a:pPr algn="l" indent="0" marL="0">
+              <a:lnSpc>
+                <a:spcPct val="105000"/>
+              </a:lnSpc>
+              <a:buNone/>
+            </a:pPr>
+            <a:r>
+              <a:rPr lang="en-US" sz="1350" b="1" dirty="0">
+                <a:solidFill>
+                  <a:srgbClr val="046A38"/>
+                </a:solidFill>
+                <a:latin typeface="Calibri" pitchFamily="34" charset="0"/>
+                <a:ea typeface="Calibri" pitchFamily="34" charset="-122"/>
+                <a:cs typeface="Calibri" pitchFamily="34" charset="-120"/>
+              </a:rPr>
+              <a:t>Identity and authentication tops a close three-way race for the next big disruption.</a:t>
+            </a:r>
+            <a:endParaRPr lang="en-US" sz="1350" dirty="0"/>
+          </a:p>
+        </p:txBody>
+      </p:sp>
+      <p:sp>
+        <p:nvSpPr>
+          <p:cNvPr id="4" name="Shape 2"/>
+          <p:cNvSpPr/>
+          <p:nvPr/>
+        </p:nvSpPr>
+        <p:spPr>
+          <a:xfrm>
+            <a:off x="502006" y="1335024"/>
+            <a:ext cx="0" cy="512064"/>
+          </a:xfrm>
+          <a:prstGeom prst="line">
+            <a:avLst/>
+          </a:prstGeom>
+          <a:noFill/>
+          <a:ln w="25400">
+            <a:solidFill>
+              <a:srgbClr val="D0D0CE"/>
+            </a:solidFill>
+            <a:prstDash val="solid"/>
+          </a:ln>
+        </p:spPr>
+      </p:sp>
+      <p:sp>
+        <p:nvSpPr>
+          <p:cNvPr id="5" name="Text 3"/>
+          <p:cNvSpPr txBox="1"/>
+          <p:nvPr/>
+        </p:nvSpPr>
+        <p:spPr>
+          <a:xfrm>
+            <a:off x="648310" y="1335024"/>
+            <a:ext cx="11042294" cy="512064"/>
+          </a:xfrm>
+          <a:prstGeom prst="rect">
+            <a:avLst/>
+          </a:prstGeom>
+          <a:noFill/>
+          <a:ln/>
+        </p:spPr>
+        <p:txBody>
+          <a:bodyPr wrap="square" lIns="0" tIns="0" rIns="0" bIns="0" rtlCol="0" anchor="t"/>
+          <a:lstStyle/>
+          <a:p>
+            <a:pPr algn="l" indent="0" marL="0">
+              <a:lnSpc>
+                <a:spcPct val="106000"/>
+              </a:lnSpc>
+              <a:buNone/>
+            </a:pPr>
+            <a:r>
+              <a:rPr lang="en-US" sz="900" b="1" dirty="0">
+                <a:solidFill>
+                  <a:srgbClr val="046A38"/>
+                </a:solidFill>
+                <a:latin typeface="IBM Plex Mono" pitchFamily="34" charset="0"/>
+                <a:ea typeface="IBM Plex Mono" pitchFamily="34" charset="-122"/>
+                <a:cs typeface="IBM Plex Mono" pitchFamily="34" charset="-120"/>
+              </a:rPr>
+              <a:t>Q11  </a:t>
+            </a:r>
+            <a:pPr algn="l" indent="0" marL="0">
+              <a:lnSpc>
+                <a:spcPct val="106000"/>
+              </a:lnSpc>
+              <a:buNone/>
+            </a:pPr>
+            <a:r>
+              <a:rPr lang="en-US" sz="1000" i="1" dirty="0">
+                <a:solidFill>
+                  <a:srgbClr val="575757"/>
+                </a:solidFill>
+                <a:latin typeface="Calibri" pitchFamily="34" charset="0"/>
+                <a:ea typeface="Calibri" pitchFamily="34" charset="-122"/>
+                <a:cs typeface="Calibri" pitchFamily="34" charset="-120"/>
+              </a:rPr>
+              <a:t>“Which upcoming regulatory or market changes is expected to have the greatest impact on your fraud program?”</a:t>
+            </a:r>
+            <a:endParaRPr lang="en-US" sz="1000" dirty="0"/>
+          </a:p>
+        </p:txBody>
+      </p:sp>
+      <p:sp>
+        <p:nvSpPr>
+          <p:cNvPr id="6" name="Text 4"/>
+          <p:cNvSpPr txBox="1"/>
+          <p:nvPr/>
+        </p:nvSpPr>
+        <p:spPr>
+          <a:xfrm>
+            <a:off x="11346790" y="6537960"/>
+            <a:ext cx="343814" cy="182880"/>
+          </a:xfrm>
+          <a:prstGeom prst="rect">
+            <a:avLst/>
+          </a:prstGeom>
+          <a:noFill/>
+          <a:ln/>
+        </p:spPr>
+        <p:txBody>
+          <a:bodyPr wrap="square" rtlCol="0" anchor="ctr"/>
+          <a:lstStyle/>
+          <a:p>
+            <a:pPr algn="r" indent="0" marL="0">
+              <a:buNone/>
+            </a:pPr>
+            <a:r>
+              <a:rPr lang="en-US" sz="900" dirty="0">
+                <a:solidFill>
+                  <a:srgbClr val="53565A"/>
+                </a:solidFill>
+                <a:latin typeface="Calibri" pitchFamily="34" charset="0"/>
+                <a:ea typeface="Calibri" pitchFamily="34" charset="-122"/>
+                <a:cs typeface="Calibri" pitchFamily="34" charset="-120"/>
+              </a:rPr>
+              <a:t>21</a:t>
+            </a:r>
+            <a:endParaRPr lang="en-US" sz="900" dirty="0"/>
+          </a:p>
+        </p:txBody>
+      </p:sp>
+      <p:graphicFrame>
+        <p:nvGraphicFramePr>
+          <p:cNvPr id="7" name="Chart 0" descr=""/>
+          <p:cNvGraphicFramePr/>
+          <p:nvPr/>
+        </p:nvGraphicFramePr>
+        <p:xfrm>
+          <a:off x="502006" y="2011680"/>
+          <a:ext cx="11188598" cy="3063240"/>
+        </p:xfrm>
+        <a:graphic xmlns:a="http://schemas.openxmlformats.org/drawingml/2006/main">
+          <a:graphicData uri="http://schemas.openxmlformats.org/drawingml/2006/chart">
+            <c:chart xmlns:c="http://schemas.openxmlformats.org/drawingml/2006/chart" r:id="rId1"/>
+          </a:graphicData>
+        </a:graphic>
+      </p:graphicFrame>
+      <p:sp>
+        <p:nvSpPr>
+          <p:cNvPr id="8" name="Shape 5"/>
+          <p:cNvSpPr/>
+          <p:nvPr/>
+        </p:nvSpPr>
+        <p:spPr>
+          <a:xfrm>
+            <a:off x="502006" y="5202936"/>
+            <a:ext cx="11188598" cy="0"/>
+          </a:xfrm>
+          <a:prstGeom prst="line">
+            <a:avLst/>
+          </a:prstGeom>
+          <a:noFill/>
+          <a:ln w="9525">
+            <a:solidFill>
+              <a:srgbClr val="D0D0CE"/>
+            </a:solidFill>
+            <a:prstDash val="solid"/>
+          </a:ln>
+        </p:spPr>
+      </p:sp>
+      <p:sp>
+        <p:nvSpPr>
+          <p:cNvPr id="9" name="Text 6"/>
+          <p:cNvSpPr txBox="1"/>
+          <p:nvPr/>
+        </p:nvSpPr>
+        <p:spPr>
+          <a:xfrm>
+            <a:off x="502006" y="5276088"/>
+            <a:ext cx="11188598" cy="886968"/>
+          </a:xfrm>
+          <a:prstGeom prst="rect">
+            <a:avLst/>
+          </a:prstGeom>
+          <a:noFill/>
+          <a:ln/>
+        </p:spPr>
+        <p:txBody>
+          <a:bodyPr wrap="square" lIns="0" tIns="0" rIns="0" bIns="0" rtlCol="0" anchor="t"/>
+          <a:lstStyle/>
+          <a:p>
+            <a:pPr algn="l" indent="0" marL="0">
+              <a:lnSpc>
+                <a:spcPct val="118000"/>
+              </a:lnSpc>
+              <a:buNone/>
+            </a:pPr>
+            <a:r>
+              <a:rPr lang="en-US" sz="850" b="1" dirty="0">
+                <a:solidFill>
+                  <a:srgbClr val="53565A"/>
+                </a:solidFill>
+                <a:latin typeface="Calibri" pitchFamily="34" charset="0"/>
+                <a:ea typeface="Calibri" pitchFamily="34" charset="-122"/>
+                <a:cs typeface="Calibri" pitchFamily="34" charset="-120"/>
+              </a:rPr>
+              <a:t>Ranked top 3 — shown as % of respondents who placed the option anywhere in their top 3 (not mutually exclusive; bars don't sum to 100%).  </a:t>
+            </a:r>
+            <a:pPr algn="l" indent="0" marL="0">
+              <a:lnSpc>
+                <a:spcPct val="118000"/>
+              </a:lnSpc>
+              <a:buNone/>
+            </a:pPr>
+            <a:r>
+              <a:rPr lang="en-US" sz="850" b="1" dirty="0">
+                <a:solidFill>
+                  <a:srgbClr val="53565A"/>
+                </a:solidFill>
+                <a:latin typeface="Calibri" pitchFamily="34" charset="0"/>
+                <a:ea typeface="Calibri" pitchFamily="34" charset="-122"/>
+                <a:cs typeface="Calibri" pitchFamily="34" charset="-120"/>
+              </a:rPr>
+              <a:t>Response options as fielded: </a:t>
+            </a:r>
+            <a:pPr algn="l" indent="0" marL="0">
+              <a:lnSpc>
+                <a:spcPct val="118000"/>
+              </a:lnSpc>
+              <a:buNone/>
+            </a:pPr>
+            <a:r>
+              <a:rPr lang="en-US" sz="850" i="1" dirty="0">
+                <a:solidFill>
+                  <a:srgbClr val="53565A"/>
+                </a:solidFill>
+                <a:latin typeface="Calibri" pitchFamily="34" charset="0"/>
+                <a:ea typeface="Calibri" pitchFamily="34" charset="-122"/>
+                <a:cs typeface="Calibri" pitchFamily="34" charset="-120"/>
+              </a:rPr>
+              <a:t>“Payment innovation and adoption (e.g., real-time payments, stable coins, agentic payments)”</a:t>
+            </a:r>
+            <a:pPr algn="l" indent="0" marL="0">
+              <a:lnSpc>
+                <a:spcPct val="118000"/>
+              </a:lnSpc>
+              <a:buNone/>
+            </a:pPr>
+            <a:r>
+              <a:rPr lang="en-US" sz="850" dirty="0">
+                <a:solidFill>
+                  <a:srgbClr val="D0D0CE"/>
+                </a:solidFill>
+                <a:latin typeface="Calibri" pitchFamily="34" charset="0"/>
+                <a:ea typeface="Calibri" pitchFamily="34" charset="-122"/>
+                <a:cs typeface="Calibri" pitchFamily="34" charset="-120"/>
+              </a:rPr>
+              <a:t>  ·  </a:t>
+            </a:r>
+            <a:pPr algn="l" indent="0" marL="0">
+              <a:lnSpc>
+                <a:spcPct val="118000"/>
+              </a:lnSpc>
+              <a:buNone/>
+            </a:pPr>
+            <a:r>
+              <a:rPr lang="en-US" sz="850" i="1" dirty="0">
+                <a:solidFill>
+                  <a:srgbClr val="53565A"/>
+                </a:solidFill>
+                <a:latin typeface="Calibri" pitchFamily="34" charset="0"/>
+                <a:ea typeface="Calibri" pitchFamily="34" charset="-122"/>
+                <a:cs typeface="Calibri" pitchFamily="34" charset="-120"/>
+              </a:rPr>
+              <a:t>“Liability and reimbursement changes”</a:t>
+            </a:r>
+            <a:pPr algn="l" indent="0" marL="0">
+              <a:lnSpc>
+                <a:spcPct val="118000"/>
+              </a:lnSpc>
+              <a:buNone/>
+            </a:pPr>
+            <a:r>
+              <a:rPr lang="en-US" sz="850" dirty="0">
+                <a:solidFill>
+                  <a:srgbClr val="D0D0CE"/>
+                </a:solidFill>
+                <a:latin typeface="Calibri" pitchFamily="34" charset="0"/>
+                <a:ea typeface="Calibri" pitchFamily="34" charset="-122"/>
+                <a:cs typeface="Calibri" pitchFamily="34" charset="-120"/>
+              </a:rPr>
+              <a:t>  ·  </a:t>
+            </a:r>
+            <a:pPr algn="l" indent="0" marL="0">
+              <a:lnSpc>
+                <a:spcPct val="118000"/>
+              </a:lnSpc>
+              <a:buNone/>
+            </a:pPr>
+            <a:r>
+              <a:rPr lang="en-US" sz="850" i="1" dirty="0">
+                <a:solidFill>
+                  <a:srgbClr val="53565A"/>
+                </a:solidFill>
+                <a:latin typeface="Calibri" pitchFamily="34" charset="0"/>
+                <a:ea typeface="Calibri" pitchFamily="34" charset="-122"/>
+                <a:cs typeface="Calibri" pitchFamily="34" charset="-120"/>
+              </a:rPr>
+              <a:t>“Open Banking / Consumer-driven banking initiatives”</a:t>
+            </a:r>
+            <a:pPr algn="l" indent="0" marL="0">
+              <a:lnSpc>
+                <a:spcPct val="118000"/>
+              </a:lnSpc>
+              <a:buNone/>
+            </a:pPr>
+            <a:r>
+              <a:rPr lang="en-US" sz="850" dirty="0">
+                <a:solidFill>
+                  <a:srgbClr val="D0D0CE"/>
+                </a:solidFill>
+                <a:latin typeface="Calibri" pitchFamily="34" charset="0"/>
+                <a:ea typeface="Calibri" pitchFamily="34" charset="-122"/>
+                <a:cs typeface="Calibri" pitchFamily="34" charset="-120"/>
+              </a:rPr>
+              <a:t>  ·  </a:t>
+            </a:r>
+            <a:pPr algn="l" indent="0" marL="0">
+              <a:lnSpc>
+                <a:spcPct val="118000"/>
+              </a:lnSpc>
+              <a:buNone/>
+            </a:pPr>
+            <a:r>
+              <a:rPr lang="en-US" sz="850" i="1" dirty="0">
+                <a:solidFill>
+                  <a:srgbClr val="53565A"/>
+                </a:solidFill>
+                <a:latin typeface="Calibri" pitchFamily="34" charset="0"/>
+                <a:ea typeface="Calibri" pitchFamily="34" charset="-122"/>
+                <a:cs typeface="Calibri" pitchFamily="34" charset="-120"/>
+              </a:rPr>
+              <a:t>“AML related modernization initiatives”</a:t>
+            </a:r>
+            <a:pPr algn="l" indent="0" marL="0">
+              <a:lnSpc>
+                <a:spcPct val="118000"/>
+              </a:lnSpc>
+              <a:buNone/>
+            </a:pPr>
+            <a:r>
+              <a:rPr lang="en-US" sz="850" dirty="0">
+                <a:solidFill>
+                  <a:srgbClr val="D0D0CE"/>
+                </a:solidFill>
+                <a:latin typeface="Calibri" pitchFamily="34" charset="0"/>
+                <a:ea typeface="Calibri" pitchFamily="34" charset="-122"/>
+                <a:cs typeface="Calibri" pitchFamily="34" charset="-120"/>
+              </a:rPr>
+              <a:t>  ·  </a:t>
+            </a:r>
+            <a:pPr algn="l" indent="0" marL="0">
+              <a:lnSpc>
+                <a:spcPct val="118000"/>
+              </a:lnSpc>
+              <a:buNone/>
+            </a:pPr>
+            <a:r>
+              <a:rPr lang="en-US" sz="850" i="1" dirty="0">
+                <a:solidFill>
+                  <a:srgbClr val="53565A"/>
+                </a:solidFill>
+                <a:latin typeface="Calibri" pitchFamily="34" charset="0"/>
+                <a:ea typeface="Calibri" pitchFamily="34" charset="-122"/>
+                <a:cs typeface="Calibri" pitchFamily="34" charset="-120"/>
+              </a:rPr>
+              <a:t>“Privacy, data-sharing requirements, and AI governance requirements”</a:t>
+            </a:r>
+            <a:pPr algn="l" indent="0" marL="0">
+              <a:lnSpc>
+                <a:spcPct val="118000"/>
+              </a:lnSpc>
+              <a:buNone/>
+            </a:pPr>
+            <a:r>
+              <a:rPr lang="en-US" sz="850" dirty="0">
+                <a:solidFill>
+                  <a:srgbClr val="D0D0CE"/>
+                </a:solidFill>
+                <a:latin typeface="Calibri" pitchFamily="34" charset="0"/>
+                <a:ea typeface="Calibri" pitchFamily="34" charset="-122"/>
+                <a:cs typeface="Calibri" pitchFamily="34" charset="-120"/>
+              </a:rPr>
+              <a:t>  ·  </a:t>
+            </a:r>
+            <a:pPr algn="l" indent="0" marL="0">
+              <a:lnSpc>
+                <a:spcPct val="118000"/>
+              </a:lnSpc>
+              <a:buNone/>
+            </a:pPr>
+            <a:r>
+              <a:rPr lang="en-US" sz="850" i="1" dirty="0">
+                <a:solidFill>
+                  <a:srgbClr val="53565A"/>
+                </a:solidFill>
+                <a:latin typeface="Calibri" pitchFamily="34" charset="0"/>
+                <a:ea typeface="Calibri" pitchFamily="34" charset="-122"/>
+                <a:cs typeface="Calibri" pitchFamily="34" charset="-120"/>
+              </a:rPr>
+              <a:t>“Customer identity, authentication, and digital trust expectations”</a:t>
+            </a:r>
+            <a:endParaRPr lang="en-US" sz="850" dirty="0"/>
+          </a:p>
+        </p:txBody>
+      </p:sp>
+    </p:spTree>
+  </p:cSld>
+  <p:clrMapOvr>
+    <a:masterClrMapping/>
+  </p:clrMapOvr>
+</p:sld>
+</file>
+
+<file path=ppt/slides/slide23.xml><?xml version="1.0" encoding="utf-8"?>
+<p:sld xmlns:a="http://schemas.openxmlformats.org/drawingml/2006/main" xmlns:r="http://schemas.openxmlformats.org/officeDocument/2006/relationships" xmlns:p="http://schemas.openxmlformats.org/presentationml/2006/main">
+  <p:cSld name="Slide 23">
     <p:bg>
       <p:bgPr>
         <a:solidFill>
@@ -13915,7 +14999,7 @@
                 <a:ea typeface="Calibri" pitchFamily="34" charset="-122"/>
                 <a:cs typeface="Calibri" pitchFamily="34" charset="-120"/>
               </a:rPr>
-              <a:t>21</a:t>
+              <a:t>22</a:t>
             </a:r>
             <a:endParaRPr lang="en-US" sz="900" dirty="0"/>
           </a:p>
@@ -13929,9 +15013,9 @@
 </p:sld>
 </file>
 
-<file path=ppt/slides/slide23.xml><?xml version="1.0" encoding="utf-8"?>
+<file path=ppt/slides/slide24.xml><?xml version="1.0" encoding="utf-8"?>
 <p:sld xmlns:a="http://schemas.openxmlformats.org/drawingml/2006/main" xmlns:r="http://schemas.openxmlformats.org/officeDocument/2006/relationships" xmlns:p="http://schemas.openxmlformats.org/presentationml/2006/main">
-  <p:cSld name="Slide 23">
+  <p:cSld name="Slide 24">
     <p:bg>
       <p:bgPr>
         <a:solidFill>
@@ -14149,7 +15233,7 @@
                 <a:ea typeface="Calibri" pitchFamily="34" charset="-122"/>
                 <a:cs typeface="Calibri" pitchFamily="34" charset="-120"/>
               </a:rPr>
-              <a:t>22</a:t>
+              <a:t>23</a:t>
             </a:r>
             <a:endParaRPr lang="en-US" sz="900" dirty="0"/>
           </a:p>
@@ -14698,9 +15782,9 @@
 </p:sld>
 </file>
 
-<file path=ppt/slides/slide24.xml><?xml version="1.0" encoding="utf-8"?>
+<file path=ppt/slides/slide25.xml><?xml version="1.0" encoding="utf-8"?>
 <p:sld xmlns:a="http://schemas.openxmlformats.org/drawingml/2006/main" xmlns:r="http://schemas.openxmlformats.org/officeDocument/2006/relationships" xmlns:p="http://schemas.openxmlformats.org/presentationml/2006/main">
-  <p:cSld name="Slide 24">
+  <p:cSld name="Slide 25">
     <p:bg>
       <p:bgPr>
         <a:solidFill>
@@ -17666,7 +18750,7 @@
     <p:bg>
       <p:bgPr>
         <a:solidFill>
-          <a:srgbClr val="86BC25"/>
+          <a:srgbClr val="FFFFFF"/>
         </a:solidFill>
       </p:bgPr>
     </p:bg>
@@ -17692,8 +18776,8 @@
         </p:nvSpPr>
         <p:spPr>
           <a:xfrm>
-            <a:off x="502920" y="1699870"/>
-            <a:ext cx="10415016" cy="1591970"/>
+            <a:off x="502006" y="256032"/>
+            <a:ext cx="11188598" cy="310896"/>
           </a:xfrm>
           <a:prstGeom prst="rect">
             <a:avLst/>
@@ -17702,24 +18786,24 @@
           <a:ln/>
         </p:spPr>
         <p:txBody>
-          <a:bodyPr wrap="square" lIns="0" tIns="0" rIns="0" bIns="0" rtlCol="0" anchor="b"/>
-          <a:lstStyle/>
-          <a:p>
-            <a:pPr algn="l" indent="0" marL="0">
-              <a:buNone/>
-            </a:pPr>
-            <a:r>
-              <a:rPr lang="en-US" sz="3600" b="1" dirty="0">
-                <a:solidFill>
-                  <a:srgbClr val="FFFFFF"/>
-                </a:solidFill>
-                <a:latin typeface="Calibri" pitchFamily="34" charset="0"/>
-                <a:ea typeface="Calibri" pitchFamily="34" charset="-122"/>
-                <a:cs typeface="Calibri" pitchFamily="34" charset="-120"/>
-              </a:rPr>
-              <a:t>2. Fraud Information Sharing</a:t>
-            </a:r>
-            <a:endParaRPr lang="en-US" sz="3600" dirty="0"/>
+          <a:bodyPr wrap="square" lIns="0" tIns="0" rIns="0" bIns="0" rtlCol="0" anchor="t"/>
+          <a:lstStyle/>
+          <a:p>
+            <a:pPr algn="l" indent="0" marL="0">
+              <a:buNone/>
+            </a:pPr>
+            <a:r>
+              <a:rPr lang="en-US" sz="1900" b="1" dirty="0">
+                <a:solidFill>
+                  <a:srgbClr val="000000"/>
+                </a:solidFill>
+                <a:latin typeface="Calibri" pitchFamily="34" charset="0"/>
+                <a:ea typeface="Calibri" pitchFamily="34" charset="-122"/>
+                <a:cs typeface="Calibri" pitchFamily="34" charset="-120"/>
+              </a:rPr>
+              <a:t>Obstacles to Managing AI-Driven Fraud Risk — By Sector and Region</a:t>
+            </a:r>
+            <a:endParaRPr lang="en-US" sz="1900" dirty="0"/>
           </a:p>
         </p:txBody>
       </p:sp>
@@ -17731,8 +18815,8 @@
         </p:nvSpPr>
         <p:spPr>
           <a:xfrm>
-            <a:off x="502920" y="3423514"/>
-            <a:ext cx="10415016" cy="1563624"/>
+            <a:off x="502006" y="585216"/>
+            <a:ext cx="11188598" cy="713232"/>
           </a:xfrm>
           <a:prstGeom prst="rect">
             <a:avLst/>
@@ -17746,28 +18830,110 @@
           <a:p>
             <a:pPr algn="l" indent="0" marL="0">
               <a:lnSpc>
-                <a:spcPct val="110000"/>
+                <a:spcPct val="105000"/>
               </a:lnSpc>
               <a:buNone/>
             </a:pPr>
             <a:r>
-              <a:rPr lang="en-US" sz="1600" dirty="0">
-                <a:solidFill>
-                  <a:srgbClr val="FFFFFF"/>
-                </a:solidFill>
-                <a:latin typeface="Calibri" pitchFamily="34" charset="0"/>
-                <a:ea typeface="Calibri" pitchFamily="34" charset="-122"/>
-                <a:cs typeface="Calibri" pitchFamily="34" charset="-120"/>
-              </a:rPr>
-              <a:t>What's blocking industry-wide information sharing, and what leaders want government to do about it.</a:t>
-            </a:r>
-            <a:endParaRPr lang="en-US" sz="1600" dirty="0"/>
-          </a:p>
-        </p:txBody>
-      </p:sp>
-      <p:sp>
-        <p:nvSpPr>
-          <p:cNvPr id="4" name="Text 2"/>
+              <a:rPr lang="en-US" sz="1350" b="1" dirty="0">
+                <a:solidFill>
+                  <a:srgbClr val="046A38"/>
+                </a:solidFill>
+                <a:latin typeface="Calibri" pitchFamily="34" charset="0"/>
+                <a:ea typeface="Calibri" pitchFamily="34" charset="-122"/>
+                <a:cs typeface="Calibri" pitchFamily="34" charset="-120"/>
+              </a:rPr>
+              <a:t>Within each sector, the mix of obstacles shifts somewhat by region — though several regional cells are thin and should be read directionally, not precisely.</a:t>
+            </a:r>
+            <a:endParaRPr lang="en-US" sz="1350" dirty="0"/>
+          </a:p>
+        </p:txBody>
+      </p:sp>
+      <p:sp>
+        <p:nvSpPr>
+          <p:cNvPr id="4" name="Shape 2"/>
+          <p:cNvSpPr/>
+          <p:nvPr/>
+        </p:nvSpPr>
+        <p:spPr>
+          <a:xfrm>
+            <a:off x="502006" y="1335024"/>
+            <a:ext cx="0" cy="512064"/>
+          </a:xfrm>
+          <a:prstGeom prst="line">
+            <a:avLst/>
+          </a:prstGeom>
+          <a:noFill/>
+          <a:ln w="25400">
+            <a:solidFill>
+              <a:srgbClr val="D0D0CE"/>
+            </a:solidFill>
+            <a:prstDash val="solid"/>
+          </a:ln>
+        </p:spPr>
+      </p:sp>
+      <p:sp>
+        <p:nvSpPr>
+          <p:cNvPr id="5" name="Text 3"/>
+          <p:cNvSpPr txBox="1"/>
+          <p:nvPr/>
+        </p:nvSpPr>
+        <p:spPr>
+          <a:xfrm>
+            <a:off x="648310" y="1335024"/>
+            <a:ext cx="11042294" cy="512064"/>
+          </a:xfrm>
+          <a:prstGeom prst="rect">
+            <a:avLst/>
+          </a:prstGeom>
+          <a:noFill/>
+          <a:ln/>
+        </p:spPr>
+        <p:txBody>
+          <a:bodyPr wrap="square" lIns="0" tIns="0" rIns="0" bIns="0" rtlCol="0" anchor="t"/>
+          <a:lstStyle/>
+          <a:p>
+            <a:pPr algn="l" indent="0" marL="0">
+              <a:lnSpc>
+                <a:spcPct val="106000"/>
+              </a:lnSpc>
+              <a:buNone/>
+            </a:pPr>
+            <a:r>
+              <a:rPr lang="en-US" sz="900" b="1" dirty="0">
+                <a:solidFill>
+                  <a:srgbClr val="046A38"/>
+                </a:solidFill>
+                <a:latin typeface="IBM Plex Mono" pitchFamily="34" charset="0"/>
+                <a:ea typeface="IBM Plex Mono" pitchFamily="34" charset="-122"/>
+                <a:cs typeface="IBM Plex Mono" pitchFamily="34" charset="-120"/>
+              </a:rPr>
+              <a:t>Q3  </a:t>
+            </a:r>
+            <a:pPr algn="l" indent="0" marL="0">
+              <a:lnSpc>
+                <a:spcPct val="106000"/>
+              </a:lnSpc>
+              <a:buNone/>
+            </a:pPr>
+            <a:r>
+              <a:rPr lang="en-US" sz="1000" i="1" dirty="0">
+                <a:solidFill>
+                  <a:srgbClr val="575757"/>
+                </a:solidFill>
+                <a:latin typeface="Calibri" pitchFamily="34" charset="0"/>
+                <a:ea typeface="Calibri" pitchFamily="34" charset="-122"/>
+                <a:cs typeface="Calibri" pitchFamily="34" charset="-120"/>
+              </a:rPr>
+              <a:t>“What are the key obstacles to managing fraud risks created or amplified by advanced and frontier AI capabilities? (Banking vs. Insurance, further broken down by region)”</a:t>
+            </a:r>
+            <a:endParaRPr lang="en-US" sz="1000" dirty="0"/>
+          </a:p>
+        </p:txBody>
+      </p:sp>
+      <p:sp>
+        <p:nvSpPr>
+          <p:cNvPr id="6" name="Text 4"/>
           <p:cNvSpPr txBox="1"/>
           <p:nvPr/>
         </p:nvSpPr>
@@ -17792,7 +18958,7 @@
             <a:r>
               <a:rPr lang="en-US" sz="900" dirty="0">
                 <a:solidFill>
-                  <a:srgbClr val="FFFFFF"/>
+                  <a:srgbClr val="53565A"/>
                 </a:solidFill>
                 <a:latin typeface="Calibri" pitchFamily="34" charset="0"/>
                 <a:ea typeface="Calibri" pitchFamily="34" charset="-122"/>
@@ -17801,6 +18967,163 @@
               <a:t>8</a:t>
             </a:r>
             <a:endParaRPr lang="en-US" sz="900" dirty="0"/>
+          </a:p>
+        </p:txBody>
+      </p:sp>
+      <p:graphicFrame>
+        <p:nvGraphicFramePr>
+          <p:cNvPr id="7" name="Chart 0" descr=""/>
+          <p:cNvGraphicFramePr/>
+          <p:nvPr/>
+        </p:nvGraphicFramePr>
+        <p:xfrm>
+          <a:off x="502006" y="2011680"/>
+          <a:ext cx="11188598" cy="3063240"/>
+        </p:xfrm>
+        <a:graphic xmlns:a="http://schemas.openxmlformats.org/drawingml/2006/main">
+          <a:graphicData uri="http://schemas.openxmlformats.org/drawingml/2006/chart">
+            <c:chart xmlns:c="http://schemas.openxmlformats.org/drawingml/2006/chart" r:id="rId1"/>
+          </a:graphicData>
+        </a:graphic>
+      </p:graphicFrame>
+      <p:sp>
+        <p:nvSpPr>
+          <p:cNvPr id="8" name="Shape 5"/>
+          <p:cNvSpPr/>
+          <p:nvPr/>
+        </p:nvSpPr>
+        <p:spPr>
+          <a:xfrm>
+            <a:off x="502006" y="5202936"/>
+            <a:ext cx="11188598" cy="0"/>
+          </a:xfrm>
+          <a:prstGeom prst="line">
+            <a:avLst/>
+          </a:prstGeom>
+          <a:noFill/>
+          <a:ln w="9525">
+            <a:solidFill>
+              <a:srgbClr val="D0D0CE"/>
+            </a:solidFill>
+            <a:prstDash val="solid"/>
+          </a:ln>
+        </p:spPr>
+      </p:sp>
+      <p:sp>
+        <p:nvSpPr>
+          <p:cNvPr id="9" name="Text 6"/>
+          <p:cNvSpPr txBox="1"/>
+          <p:nvPr/>
+        </p:nvSpPr>
+        <p:spPr>
+          <a:xfrm>
+            <a:off x="502006" y="5276088"/>
+            <a:ext cx="11188598" cy="457200"/>
+          </a:xfrm>
+          <a:prstGeom prst="rect">
+            <a:avLst/>
+          </a:prstGeom>
+          <a:noFill/>
+          <a:ln/>
+        </p:spPr>
+        <p:txBody>
+          <a:bodyPr wrap="square" lIns="0" tIns="0" rIns="0" bIns="0" rtlCol="0" anchor="t"/>
+          <a:lstStyle/>
+          <a:p>
+            <a:pPr algn="l" indent="0" marL="0">
+              <a:lnSpc>
+                <a:spcPct val="118000"/>
+              </a:lnSpc>
+              <a:buNone/>
+            </a:pPr>
+            <a:r>
+              <a:rPr lang="en-US" sz="850" b="1" dirty="0">
+                <a:solidFill>
+                  <a:srgbClr val="53565A"/>
+                </a:solidFill>
+                <a:latin typeface="Calibri" pitchFamily="34" charset="0"/>
+                <a:ea typeface="Calibri" pitchFamily="34" charset="-122"/>
+                <a:cs typeface="Calibri" pitchFamily="34" charset="-120"/>
+              </a:rPr>
+              <a:t>Select all that apply — figures don't sum to 100%. </a:t>
+            </a:r>
+            <a:pPr algn="l" indent="0" marL="0">
+              <a:lnSpc>
+                <a:spcPct val="118000"/>
+              </a:lnSpc>
+              <a:buNone/>
+            </a:pPr>
+            <a:r>
+              <a:rPr lang="en-US" sz="850" dirty="0">
+                <a:solidFill>
+                  <a:srgbClr val="53565A"/>
+                </a:solidFill>
+                <a:latin typeface="Calibri" pitchFamily="34" charset="0"/>
+                <a:ea typeface="Calibri" pitchFamily="34" charset="-122"/>
+                <a:cs typeface="Calibri" pitchFamily="34" charset="-120"/>
+              </a:rPr>
+              <a:t>The % in each category label is the full sector-level figure; stacked region segments are rounded to the nearest whole percent and may sum to within ±1pt of that total. Banking/Australia (n=7) and Banking/Singapore (n=4) are thin samples shown directionally. Insurance's “Other markets” bucket combines UK (n=2), Australia (n=1), and Singapore (n=0) — too thin individually to break out.</a:t>
+            </a:r>
+            <a:endParaRPr lang="en-US" sz="850" dirty="0"/>
+          </a:p>
+        </p:txBody>
+      </p:sp>
+      <p:sp>
+        <p:nvSpPr>
+          <p:cNvPr id="10" name="Text 7"/>
+          <p:cNvSpPr txBox="1"/>
+          <p:nvPr/>
+        </p:nvSpPr>
+        <p:spPr>
+          <a:xfrm>
+            <a:off x="502006" y="5779008"/>
+            <a:ext cx="11188598" cy="365760"/>
+          </a:xfrm>
+          <a:prstGeom prst="rect">
+            <a:avLst/>
+          </a:prstGeom>
+          <a:noFill/>
+          <a:ln/>
+        </p:spPr>
+        <p:txBody>
+          <a:bodyPr wrap="square" lIns="0" tIns="0" rIns="0" bIns="0" rtlCol="0" anchor="t"/>
+          <a:lstStyle/>
+          <a:p>
+            <a:pPr algn="l" indent="0" marL="0">
+              <a:lnSpc>
+                <a:spcPct val="115000"/>
+              </a:lnSpc>
+              <a:buNone/>
+            </a:pPr>
+            <a:r>
+              <a:rPr lang="en-US" sz="850" b="1" dirty="0">
+                <a:solidFill>
+                  <a:srgbClr val="53565A"/>
+                </a:solidFill>
+                <a:latin typeface="Calibri" pitchFamily="34" charset="0"/>
+                <a:ea typeface="Calibri" pitchFamily="34" charset="-122"/>
+                <a:cs typeface="Calibri" pitchFamily="34" charset="-120"/>
+              </a:rPr>
+              <a:t>Response options as fielded: </a:t>
+            </a:r>
+            <a:pPr algn="l" indent="0" marL="0">
+              <a:lnSpc>
+                <a:spcPct val="115000"/>
+              </a:lnSpc>
+              <a:buNone/>
+            </a:pPr>
+            <a:r>
+              <a:rPr lang="en-US" sz="850" i="1" dirty="0">
+                <a:solidFill>
+                  <a:srgbClr val="53565A"/>
+                </a:solidFill>
+                <a:latin typeface="Calibri" pitchFamily="34" charset="0"/>
+                <a:ea typeface="Calibri" pitchFamily="34" charset="-122"/>
+                <a:cs typeface="Calibri" pitchFamily="34" charset="-120"/>
+              </a:rPr>
+              <a:t>“Insufficient identity verification or prevention capabilities in the existing environment” · “Lack of fraud detection technology in the existing environment” · “Limited or no available 3rd party fraud intelligence and/or consortium information” · “Limited staff awareness and training on deepfake-related fraud risk”</a:t>
+            </a:r>
+            <a:endParaRPr lang="en-US" sz="850" dirty="0"/>
           </a:p>
         </p:txBody>
       </p:sp>

--- a/Fraud in 2026 - Full Results.pptx
+++ b/Fraud in 2026 - Full Results.pptx
@@ -4707,25 +4707,25 @@
                     <c:v>Staff awareness &amp; training — Banking (49%)</c:v>
                   </c:pt>
                   <c:pt idx="1">
-                    <c:v>Staff awareness &amp; training — Insurance (64%)</c:v>
+                    <c:v>Staff awareness &amp; training — Insurance (US &amp; Canada only, 56%)</c:v>
                   </c:pt>
                   <c:pt idx="2">
                     <c:v>ID verification / prevention — Banking (51%)</c:v>
                   </c:pt>
                   <c:pt idx="3">
-                    <c:v>ID verification / prevention — Insurance (48%)</c:v>
+                    <c:v>ID verification / prevention — Insurance (US &amp; Canada only, 44%)</c:v>
                   </c:pt>
                   <c:pt idx="4">
                     <c:v>Fraud detection technology — Banking (48%)</c:v>
                   </c:pt>
                   <c:pt idx="5">
-                    <c:v>Fraud detection technology — Insurance (40%)</c:v>
+                    <c:v>Fraud detection technology — Insurance (US &amp; Canada only, 36%)</c:v>
                   </c:pt>
                   <c:pt idx="6">
                     <c:v>3rd-party intel / consortium — Banking (43%)</c:v>
                   </c:pt>
                   <c:pt idx="7">
-                    <c:v>3rd-party intel / consortium — Insurance (44%)</c:v>
+                    <c:v>3rd-party intel / consortium — Insurance (US &amp; Canada only, 40%)</c:v>
                   </c:pt>
                 </c:lvl>
               </c:multiLvlStrCache>
@@ -4821,25 +4821,25 @@
                     <c:v>Staff awareness &amp; training — Banking (49%)</c:v>
                   </c:pt>
                   <c:pt idx="1">
-                    <c:v>Staff awareness &amp; training — Insurance (64%)</c:v>
+                    <c:v>Staff awareness &amp; training — Insurance (US &amp; Canada only, 56%)</c:v>
                   </c:pt>
                   <c:pt idx="2">
                     <c:v>ID verification / prevention — Banking (51%)</c:v>
                   </c:pt>
                   <c:pt idx="3">
-                    <c:v>ID verification / prevention — Insurance (48%)</c:v>
+                    <c:v>ID verification / prevention — Insurance (US &amp; Canada only, 44%)</c:v>
                   </c:pt>
                   <c:pt idx="4">
                     <c:v>Fraud detection technology — Banking (48%)</c:v>
                   </c:pt>
                   <c:pt idx="5">
-                    <c:v>Fraud detection technology — Insurance (40%)</c:v>
+                    <c:v>Fraud detection technology — Insurance (US &amp; Canada only, 36%)</c:v>
                   </c:pt>
                   <c:pt idx="6">
                     <c:v>3rd-party intel / consortium — Banking (43%)</c:v>
                   </c:pt>
                   <c:pt idx="7">
-                    <c:v>3rd-party intel / consortium — Insurance (44%)</c:v>
+                    <c:v>3rd-party intel / consortium — Insurance (US &amp; Canada only, 40%)</c:v>
                   </c:pt>
                 </c:lvl>
               </c:multiLvlStrCache>
@@ -4935,25 +4935,25 @@
                     <c:v>Staff awareness &amp; training — Banking (49%)</c:v>
                   </c:pt>
                   <c:pt idx="1">
-                    <c:v>Staff awareness &amp; training — Insurance (64%)</c:v>
+                    <c:v>Staff awareness &amp; training — Insurance (US &amp; Canada only, 56%)</c:v>
                   </c:pt>
                   <c:pt idx="2">
                     <c:v>ID verification / prevention — Banking (51%)</c:v>
                   </c:pt>
                   <c:pt idx="3">
-                    <c:v>ID verification / prevention — Insurance (48%)</c:v>
+                    <c:v>ID verification / prevention — Insurance (US &amp; Canada only, 44%)</c:v>
                   </c:pt>
                   <c:pt idx="4">
                     <c:v>Fraud detection technology — Banking (48%)</c:v>
                   </c:pt>
                   <c:pt idx="5">
-                    <c:v>Fraud detection technology — Insurance (40%)</c:v>
+                    <c:v>Fraud detection technology — Insurance (US &amp; Canada only, 36%)</c:v>
                   </c:pt>
                   <c:pt idx="6">
                     <c:v>3rd-party intel / consortium — Banking (43%)</c:v>
                   </c:pt>
                   <c:pt idx="7">
-                    <c:v>3rd-party intel / consortium — Insurance (44%)</c:v>
+                    <c:v>3rd-party intel / consortium — Insurance (US &amp; Canada only, 40%)</c:v>
                   </c:pt>
                 </c:lvl>
               </c:multiLvlStrCache>
@@ -5049,25 +5049,25 @@
                     <c:v>Staff awareness &amp; training — Banking (49%)</c:v>
                   </c:pt>
                   <c:pt idx="1">
-                    <c:v>Staff awareness &amp; training — Insurance (64%)</c:v>
+                    <c:v>Staff awareness &amp; training — Insurance (US &amp; Canada only, 56%)</c:v>
                   </c:pt>
                   <c:pt idx="2">
                     <c:v>ID verification / prevention — Banking (51%)</c:v>
                   </c:pt>
                   <c:pt idx="3">
-                    <c:v>ID verification / prevention — Insurance (48%)</c:v>
+                    <c:v>ID verification / prevention — Insurance (US &amp; Canada only, 44%)</c:v>
                   </c:pt>
                   <c:pt idx="4">
                     <c:v>Fraud detection technology — Banking (48%)</c:v>
                   </c:pt>
                   <c:pt idx="5">
-                    <c:v>Fraud detection technology — Insurance (40%)</c:v>
+                    <c:v>Fraud detection technology — Insurance (US &amp; Canada only, 36%)</c:v>
                   </c:pt>
                   <c:pt idx="6">
                     <c:v>3rd-party intel / consortium — Banking (43%)</c:v>
                   </c:pt>
                   <c:pt idx="7">
-                    <c:v>3rd-party intel / consortium — Insurance (44%)</c:v>
+                    <c:v>3rd-party intel / consortium — Insurance (US &amp; Canada only, 40%)</c:v>
                   </c:pt>
                 </c:lvl>
               </c:multiLvlStrCache>
@@ -5163,25 +5163,25 @@
                     <c:v>Staff awareness &amp; training — Banking (49%)</c:v>
                   </c:pt>
                   <c:pt idx="1">
-                    <c:v>Staff awareness &amp; training — Insurance (64%)</c:v>
+                    <c:v>Staff awareness &amp; training — Insurance (US &amp; Canada only, 56%)</c:v>
                   </c:pt>
                   <c:pt idx="2">
                     <c:v>ID verification / prevention — Banking (51%)</c:v>
                   </c:pt>
                   <c:pt idx="3">
-                    <c:v>ID verification / prevention — Insurance (48%)</c:v>
+                    <c:v>ID verification / prevention — Insurance (US &amp; Canada only, 44%)</c:v>
                   </c:pt>
                   <c:pt idx="4">
                     <c:v>Fraud detection technology — Banking (48%)</c:v>
                   </c:pt>
                   <c:pt idx="5">
-                    <c:v>Fraud detection technology — Insurance (40%)</c:v>
+                    <c:v>Fraud detection technology — Insurance (US &amp; Canada only, 36%)</c:v>
                   </c:pt>
                   <c:pt idx="6">
                     <c:v>3rd-party intel / consortium — Banking (43%)</c:v>
                   </c:pt>
                   <c:pt idx="7">
-                    <c:v>3rd-party intel / consortium — Insurance (44%)</c:v>
+                    <c:v>3rd-party intel / consortium — Insurance (US &amp; Canada only, 40%)</c:v>
                   </c:pt>
                 </c:lvl>
               </c:multiLvlStrCache>
@@ -5216,120 +5216,6 @@
                 </c:pt>
                 <c:pt idx="7">
                   <c:v>0</c:v>
-                </c:pt>
-              </c:numCache>
-            </c:numRef>
-          </c:val>
-        </c:ser>
-        <c:ser>
-          <c:idx val="5"/>
-          <c:order val="5"/>
-          <c:tx>
-            <c:strRef>
-              <c:f>Sheet1!$G$1</c:f>
-              <c:strCache>
-                <c:ptCount val="1"/>
-                <c:pt idx="0">
-                  <c:v>Other markets (Insurance: UK/AU/SG)</c:v>
-                </c:pt>
-              </c:strCache>
-            </c:strRef>
-          </c:tx>
-          <c:spPr>
-            <a:solidFill>
-              <a:srgbClr val="D0D0CE"/>
-            </a:solidFill>
-            <a:effectLst/>
-          </c:spPr>
-          <c:invertIfNegative val="0"/>
-          <c:dLbls>
-            <c:numFmt formatCode="#,##0" sourceLinked="0"/>
-            <c:txPr>
-              <a:bodyPr/>
-              <a:lstStyle/>
-              <a:p>
-                <a:pPr>
-                  <a:defRPr b="0" i="0" strike="noStrike" sz="600" u="none">
-                    <a:solidFill>
-                      <a:srgbClr val="FFFFFF"/>
-                    </a:solidFill>
-                    <a:latin typeface="Arial"/>
-                  </a:defRPr>
-                </a:pPr>
-              </a:p>
-            </c:txPr>
-            <c:dLblPos val="ctr"/>
-            <c:showLegendKey val="0"/>
-            <c:showVal val="1"/>
-            <c:showCatName val="0"/>
-            <c:showSerName val="0"/>
-            <c:showPercent val="0"/>
-            <c:showBubbleSize val="0"/>
-            <c:showLeaderLines val="0"/>
-          </c:dLbls>
-          <c:cat>
-            <c:multiLvlStrRef>
-              <c:f>Sheet1!$A$2:$A$9</c:f>
-              <c:multiLvlStrCache>
-                <c:ptCount val="8"/>
-                <c:lvl>
-                  <c:pt idx="0">
-                    <c:v>Staff awareness &amp; training — Banking (49%)</c:v>
-                  </c:pt>
-                  <c:pt idx="1">
-                    <c:v>Staff awareness &amp; training — Insurance (64%)</c:v>
-                  </c:pt>
-                  <c:pt idx="2">
-                    <c:v>ID verification / prevention — Banking (51%)</c:v>
-                  </c:pt>
-                  <c:pt idx="3">
-                    <c:v>ID verification / prevention — Insurance (48%)</c:v>
-                  </c:pt>
-                  <c:pt idx="4">
-                    <c:v>Fraud detection technology — Banking (48%)</c:v>
-                  </c:pt>
-                  <c:pt idx="5">
-                    <c:v>Fraud detection technology — Insurance (40%)</c:v>
-                  </c:pt>
-                  <c:pt idx="6">
-                    <c:v>3rd-party intel / consortium — Banking (43%)</c:v>
-                  </c:pt>
-                  <c:pt idx="7">
-                    <c:v>3rd-party intel / consortium — Insurance (44%)</c:v>
-                  </c:pt>
-                </c:lvl>
-              </c:multiLvlStrCache>
-            </c:multiLvlStrRef>
-          </c:cat>
-          <c:val>
-            <c:numRef>
-              <c:f>Sheet1!$G$2:$G$9</c:f>
-              <c:numCache>
-                <c:formatCode>General</c:formatCode>
-                <c:ptCount val="8"/>
-                <c:pt idx="0">
-                  <c:v>0</c:v>
-                </c:pt>
-                <c:pt idx="1">
-                  <c:v>8</c:v>
-                </c:pt>
-                <c:pt idx="2">
-                  <c:v>0</c:v>
-                </c:pt>
-                <c:pt idx="3">
-                  <c:v>4</c:v>
-                </c:pt>
-                <c:pt idx="4">
-                  <c:v>0</c:v>
-                </c:pt>
-                <c:pt idx="5">
-                  <c:v>4</c:v>
-                </c:pt>
-                <c:pt idx="6">
-                  <c:v>0</c:v>
-                </c:pt>
-                <c:pt idx="7">
-                  <c:v>4</c:v>
                 </c:pt>
               </c:numCache>
             </c:numRef>
@@ -19018,7 +18904,7 @@
         <p:spPr>
           <a:xfrm>
             <a:off x="502006" y="5276088"/>
-            <a:ext cx="11188598" cy="457200"/>
+            <a:ext cx="11188598" cy="566928"/>
           </a:xfrm>
           <a:prstGeom prst="rect">
             <a:avLst/>
@@ -19062,7 +18948,7 @@
                 <a:ea typeface="Calibri" pitchFamily="34" charset="-122"/>
                 <a:cs typeface="Calibri" pitchFamily="34" charset="-120"/>
               </a:rPr>
-              <a:t>The % in each category label is the full sector-level figure; stacked region segments are rounded to the nearest whole percent and may sum to within ±1pt of that total. Banking/Australia (n=7) and Banking/Singapore (n=4) are thin samples shown directionally. Insurance's “Other markets” bucket combines UK (n=2), Australia (n=1), and Singapore (n=0) — too thin individually to break out.</a:t>
+              <a:t>The % in each Banking category label is the full sector-level figure; stacked region segments are rounded to the nearest whole percent and may sum to within ±1pt of that total. Banking/Australia (n=7) and Banking/Singapore (n=4) are thin samples shown directionally. Insurance bars reflect only its United States and Canada respondents (n=22 of 25) — UK (n=2), Australia (n=1), and Singapore (n=0) are excluded here for insufficient individual sample size, so Insurance's stacked totals run below the full-sample figures shown on the previous slide (64%, 48%, 40%, 44%).</a:t>
             </a:r>
             <a:endParaRPr lang="en-US" sz="850" dirty="0"/>
           </a:p>
@@ -19076,8 +18962,8 @@
         </p:nvSpPr>
         <p:spPr>
           <a:xfrm>
-            <a:off x="502006" y="5779008"/>
-            <a:ext cx="11188598" cy="365760"/>
+            <a:off x="502006" y="5897880"/>
+            <a:ext cx="11188598" cy="320040"/>
           </a:xfrm>
           <a:prstGeom prst="rect">
             <a:avLst/>

--- a/Fraud in 2026 - Full Results.pptx
+++ b/Fraud in 2026 - Full Results.pptx
@@ -30,9 +30,12 @@
     <p:sldId id="278" r:id="rId24"/>
     <p:sldId id="279" r:id="rId25"/>
     <p:sldId id="280" r:id="rId26"/>
+    <p:sldId id="281" r:id="rId27"/>
+    <p:sldId id="282" r:id="rId28"/>
+    <p:sldId id="283" r:id="rId29"/>
   </p:sldIdLst>
   <p:notesMasterIdLst>
-    <p:notesMasterId r:id="rId27"/>
+    <p:notesMasterId r:id="rId30"/>
   </p:notesMasterIdLst>
   <p:sldSz cx="12192000" cy="6858000"/>
   <p:notesSz cx="6858000" cy="12192000"/>
@@ -501,6 +504,855 @@
       <c:layout/>
       <c:barChart>
         <c:barDir val="bar"/>
+        <c:grouping val="stacked"/>
+        <c:varyColors val="0"/>
+        <c:ser>
+          <c:idx val="0"/>
+          <c:order val="0"/>
+          <c:tx>
+            <c:strRef>
+              <c:f>Sheet1!$B$1</c:f>
+              <c:strCache>
+                <c:ptCount val="1"/>
+                <c:pt idx="0">
+                  <c:v>United States</c:v>
+                </c:pt>
+              </c:strCache>
+            </c:strRef>
+          </c:tx>
+          <c:spPr>
+            <a:solidFill>
+              <a:srgbClr val="86BC25"/>
+            </a:solidFill>
+            <a:effectLst/>
+          </c:spPr>
+          <c:invertIfNegative val="0"/>
+          <c:dLbls>
+            <c:numFmt formatCode="#,##0" sourceLinked="0"/>
+            <c:txPr>
+              <a:bodyPr/>
+              <a:lstStyle/>
+              <a:p>
+                <a:pPr>
+                  <a:defRPr b="0" i="0" strike="noStrike" sz="600" u="none">
+                    <a:solidFill>
+                      <a:srgbClr val="FFFFFF"/>
+                    </a:solidFill>
+                    <a:latin typeface="Arial"/>
+                  </a:defRPr>
+                </a:pPr>
+              </a:p>
+            </c:txPr>
+            <c:dLblPos val="ctr"/>
+            <c:showLegendKey val="0"/>
+            <c:showVal val="1"/>
+            <c:showCatName val="0"/>
+            <c:showSerName val="0"/>
+            <c:showPercent val="0"/>
+            <c:showBubbleSize val="0"/>
+            <c:showLeaderLines val="0"/>
+          </c:dLbls>
+          <c:cat>
+            <c:multiLvlStrRef>
+              <c:f>Sheet1!$A$2:$A$13</c:f>
+              <c:multiLvlStrCache>
+                <c:ptCount val="12"/>
+                <c:lvl>
+                  <c:pt idx="0">
+                    <c:v>Limited data standardization — Banking (73%)</c:v>
+                  </c:pt>
+                  <c:pt idx="1">
+                    <c:v>Limited data standardization — Insurance (US &amp; Canada only, 76%)</c:v>
+                  </c:pt>
+                  <c:pt idx="2">
+                    <c:v>Legal, privacy &amp; regulatory constraints — Banking (73%)</c:v>
+                  </c:pt>
+                  <c:pt idx="3">
+                    <c:v>Legal, privacy &amp; regulatory constraints — Insurance (US &amp; Canada only, 64%)</c:v>
+                  </c:pt>
+                  <c:pt idx="4">
+                    <c:v>Lack of external industry participation — Banking (64%)</c:v>
+                  </c:pt>
+                  <c:pt idx="5">
+                    <c:v>Lack of external industry participation — Insurance (US &amp; Canada only, 40%)</c:v>
+                  </c:pt>
+                  <c:pt idx="6">
+                    <c:v>Insufficient budget or resources — Banking (36%)</c:v>
+                  </c:pt>
+                  <c:pt idx="7">
+                    <c:v>Insufficient budget or resources — Insurance (US &amp; Canada only, 32%)</c:v>
+                  </c:pt>
+                  <c:pt idx="8">
+                    <c:v>Difficulty demonstrating ROI — Banking (31%)</c:v>
+                  </c:pt>
+                  <c:pt idx="9">
+                    <c:v>Difficulty demonstrating ROI — Insurance (US &amp; Canada only, 16%)</c:v>
+                  </c:pt>
+                  <c:pt idx="10">
+                    <c:v>Unclear internal ownership / governance — Banking (23%)</c:v>
+                  </c:pt>
+                  <c:pt idx="11">
+                    <c:v>Unclear internal ownership / governance — Insurance (US &amp; Canada only, 32%)</c:v>
+                  </c:pt>
+                </c:lvl>
+              </c:multiLvlStrCache>
+            </c:multiLvlStrRef>
+          </c:cat>
+          <c:val>
+            <c:numRef>
+              <c:f>Sheet1!$B$2:$B$13</c:f>
+              <c:numCache>
+                <c:formatCode>General</c:formatCode>
+                <c:ptCount val="12"/>
+                <c:pt idx="0">
+                  <c:v>33</c:v>
+                </c:pt>
+                <c:pt idx="1">
+                  <c:v>36</c:v>
+                </c:pt>
+                <c:pt idx="2">
+                  <c:v>33</c:v>
+                </c:pt>
+                <c:pt idx="3">
+                  <c:v>40</c:v>
+                </c:pt>
+                <c:pt idx="4">
+                  <c:v>33</c:v>
+                </c:pt>
+                <c:pt idx="5">
+                  <c:v>16</c:v>
+                </c:pt>
+                <c:pt idx="6">
+                  <c:v>16</c:v>
+                </c:pt>
+                <c:pt idx="7">
+                  <c:v>16</c:v>
+                </c:pt>
+                <c:pt idx="8">
+                  <c:v>8</c:v>
+                </c:pt>
+                <c:pt idx="9">
+                  <c:v>4</c:v>
+                </c:pt>
+                <c:pt idx="10">
+                  <c:v>12</c:v>
+                </c:pt>
+                <c:pt idx="11">
+                  <c:v>8</c:v>
+                </c:pt>
+              </c:numCache>
+            </c:numRef>
+          </c:val>
+        </c:ser>
+        <c:ser>
+          <c:idx val="1"/>
+          <c:order val="1"/>
+          <c:tx>
+            <c:strRef>
+              <c:f>Sheet1!$C$1</c:f>
+              <c:strCache>
+                <c:ptCount val="1"/>
+                <c:pt idx="0">
+                  <c:v>Canada</c:v>
+                </c:pt>
+              </c:strCache>
+            </c:strRef>
+          </c:tx>
+          <c:spPr>
+            <a:solidFill>
+              <a:srgbClr val="43B02A"/>
+            </a:solidFill>
+            <a:effectLst/>
+          </c:spPr>
+          <c:invertIfNegative val="0"/>
+          <c:dLbls>
+            <c:numFmt formatCode="#,##0" sourceLinked="0"/>
+            <c:txPr>
+              <a:bodyPr/>
+              <a:lstStyle/>
+              <a:p>
+                <a:pPr>
+                  <a:defRPr b="0" i="0" strike="noStrike" sz="600" u="none">
+                    <a:solidFill>
+                      <a:srgbClr val="FFFFFF"/>
+                    </a:solidFill>
+                    <a:latin typeface="Arial"/>
+                  </a:defRPr>
+                </a:pPr>
+              </a:p>
+            </c:txPr>
+            <c:dLblPos val="ctr"/>
+            <c:showLegendKey val="0"/>
+            <c:showVal val="1"/>
+            <c:showCatName val="0"/>
+            <c:showSerName val="0"/>
+            <c:showPercent val="0"/>
+            <c:showBubbleSize val="0"/>
+            <c:showLeaderLines val="0"/>
+          </c:dLbls>
+          <c:cat>
+            <c:multiLvlStrRef>
+              <c:f>Sheet1!$A$2:$A$13</c:f>
+              <c:multiLvlStrCache>
+                <c:ptCount val="12"/>
+                <c:lvl>
+                  <c:pt idx="0">
+                    <c:v>Limited data standardization — Banking (73%)</c:v>
+                  </c:pt>
+                  <c:pt idx="1">
+                    <c:v>Limited data standardization — Insurance (US &amp; Canada only, 76%)</c:v>
+                  </c:pt>
+                  <c:pt idx="2">
+                    <c:v>Legal, privacy &amp; regulatory constraints — Banking (73%)</c:v>
+                  </c:pt>
+                  <c:pt idx="3">
+                    <c:v>Legal, privacy &amp; regulatory constraints — Insurance (US &amp; Canada only, 64%)</c:v>
+                  </c:pt>
+                  <c:pt idx="4">
+                    <c:v>Lack of external industry participation — Banking (64%)</c:v>
+                  </c:pt>
+                  <c:pt idx="5">
+                    <c:v>Lack of external industry participation — Insurance (US &amp; Canada only, 40%)</c:v>
+                  </c:pt>
+                  <c:pt idx="6">
+                    <c:v>Insufficient budget or resources — Banking (36%)</c:v>
+                  </c:pt>
+                  <c:pt idx="7">
+                    <c:v>Insufficient budget or resources — Insurance (US &amp; Canada only, 32%)</c:v>
+                  </c:pt>
+                  <c:pt idx="8">
+                    <c:v>Difficulty demonstrating ROI — Banking (31%)</c:v>
+                  </c:pt>
+                  <c:pt idx="9">
+                    <c:v>Difficulty demonstrating ROI — Insurance (US &amp; Canada only, 16%)</c:v>
+                  </c:pt>
+                  <c:pt idx="10">
+                    <c:v>Unclear internal ownership / governance — Banking (23%)</c:v>
+                  </c:pt>
+                  <c:pt idx="11">
+                    <c:v>Unclear internal ownership / governance — Insurance (US &amp; Canada only, 32%)</c:v>
+                  </c:pt>
+                </c:lvl>
+              </c:multiLvlStrCache>
+            </c:multiLvlStrRef>
+          </c:cat>
+          <c:val>
+            <c:numRef>
+              <c:f>Sheet1!$C$2:$C$13</c:f>
+              <c:numCache>
+                <c:formatCode>General</c:formatCode>
+                <c:ptCount val="12"/>
+                <c:pt idx="0">
+                  <c:v>17</c:v>
+                </c:pt>
+                <c:pt idx="1">
+                  <c:v>40</c:v>
+                </c:pt>
+                <c:pt idx="2">
+                  <c:v>17</c:v>
+                </c:pt>
+                <c:pt idx="3">
+                  <c:v>24</c:v>
+                </c:pt>
+                <c:pt idx="4">
+                  <c:v>15</c:v>
+                </c:pt>
+                <c:pt idx="5">
+                  <c:v>24</c:v>
+                </c:pt>
+                <c:pt idx="6">
+                  <c:v>7</c:v>
+                </c:pt>
+                <c:pt idx="7">
+                  <c:v>16</c:v>
+                </c:pt>
+                <c:pt idx="8">
+                  <c:v>9</c:v>
+                </c:pt>
+                <c:pt idx="9">
+                  <c:v>12</c:v>
+                </c:pt>
+                <c:pt idx="10">
+                  <c:v>7</c:v>
+                </c:pt>
+                <c:pt idx="11">
+                  <c:v>24</c:v>
+                </c:pt>
+              </c:numCache>
+            </c:numRef>
+          </c:val>
+        </c:ser>
+        <c:ser>
+          <c:idx val="2"/>
+          <c:order val="2"/>
+          <c:tx>
+            <c:strRef>
+              <c:f>Sheet1!$D$1</c:f>
+              <c:strCache>
+                <c:ptCount val="1"/>
+                <c:pt idx="0">
+                  <c:v>Europe (EU + UK)</c:v>
+                </c:pt>
+              </c:strCache>
+            </c:strRef>
+          </c:tx>
+          <c:spPr>
+            <a:solidFill>
+              <a:srgbClr val="046A38"/>
+            </a:solidFill>
+            <a:effectLst/>
+          </c:spPr>
+          <c:invertIfNegative val="0"/>
+          <c:dLbls>
+            <c:numFmt formatCode="#,##0" sourceLinked="0"/>
+            <c:txPr>
+              <a:bodyPr/>
+              <a:lstStyle/>
+              <a:p>
+                <a:pPr>
+                  <a:defRPr b="0" i="0" strike="noStrike" sz="600" u="none">
+                    <a:solidFill>
+                      <a:srgbClr val="FFFFFF"/>
+                    </a:solidFill>
+                    <a:latin typeface="Arial"/>
+                  </a:defRPr>
+                </a:pPr>
+              </a:p>
+            </c:txPr>
+            <c:dLblPos val="ctr"/>
+            <c:showLegendKey val="0"/>
+            <c:showVal val="1"/>
+            <c:showCatName val="0"/>
+            <c:showSerName val="0"/>
+            <c:showPercent val="0"/>
+            <c:showBubbleSize val="0"/>
+            <c:showLeaderLines val="0"/>
+          </c:dLbls>
+          <c:cat>
+            <c:multiLvlStrRef>
+              <c:f>Sheet1!$A$2:$A$13</c:f>
+              <c:multiLvlStrCache>
+                <c:ptCount val="12"/>
+                <c:lvl>
+                  <c:pt idx="0">
+                    <c:v>Limited data standardization — Banking (73%)</c:v>
+                  </c:pt>
+                  <c:pt idx="1">
+                    <c:v>Limited data standardization — Insurance (US &amp; Canada only, 76%)</c:v>
+                  </c:pt>
+                  <c:pt idx="2">
+                    <c:v>Legal, privacy &amp; regulatory constraints — Banking (73%)</c:v>
+                  </c:pt>
+                  <c:pt idx="3">
+                    <c:v>Legal, privacy &amp; regulatory constraints — Insurance (US &amp; Canada only, 64%)</c:v>
+                  </c:pt>
+                  <c:pt idx="4">
+                    <c:v>Lack of external industry participation — Banking (64%)</c:v>
+                  </c:pt>
+                  <c:pt idx="5">
+                    <c:v>Lack of external industry participation — Insurance (US &amp; Canada only, 40%)</c:v>
+                  </c:pt>
+                  <c:pt idx="6">
+                    <c:v>Insufficient budget or resources — Banking (36%)</c:v>
+                  </c:pt>
+                  <c:pt idx="7">
+                    <c:v>Insufficient budget or resources — Insurance (US &amp; Canada only, 32%)</c:v>
+                  </c:pt>
+                  <c:pt idx="8">
+                    <c:v>Difficulty demonstrating ROI — Banking (31%)</c:v>
+                  </c:pt>
+                  <c:pt idx="9">
+                    <c:v>Difficulty demonstrating ROI — Insurance (US &amp; Canada only, 16%)</c:v>
+                  </c:pt>
+                  <c:pt idx="10">
+                    <c:v>Unclear internal ownership / governance — Banking (23%)</c:v>
+                  </c:pt>
+                  <c:pt idx="11">
+                    <c:v>Unclear internal ownership / governance — Insurance (US &amp; Canada only, 32%)</c:v>
+                  </c:pt>
+                </c:lvl>
+              </c:multiLvlStrCache>
+            </c:multiLvlStrRef>
+          </c:cat>
+          <c:val>
+            <c:numRef>
+              <c:f>Sheet1!$D$2:$D$13</c:f>
+              <c:numCache>
+                <c:formatCode>General</c:formatCode>
+                <c:ptCount val="12"/>
+                <c:pt idx="0">
+                  <c:v>11</c:v>
+                </c:pt>
+                <c:pt idx="1">
+                  <c:v>0</c:v>
+                </c:pt>
+                <c:pt idx="2">
+                  <c:v>11</c:v>
+                </c:pt>
+                <c:pt idx="3">
+                  <c:v>0</c:v>
+                </c:pt>
+                <c:pt idx="4">
+                  <c:v>9</c:v>
+                </c:pt>
+                <c:pt idx="5">
+                  <c:v>0</c:v>
+                </c:pt>
+                <c:pt idx="6">
+                  <c:v>7</c:v>
+                </c:pt>
+                <c:pt idx="7">
+                  <c:v>0</c:v>
+                </c:pt>
+                <c:pt idx="8">
+                  <c:v>9</c:v>
+                </c:pt>
+                <c:pt idx="9">
+                  <c:v>0</c:v>
+                </c:pt>
+                <c:pt idx="10">
+                  <c:v>1</c:v>
+                </c:pt>
+                <c:pt idx="11">
+                  <c:v>0</c:v>
+                </c:pt>
+              </c:numCache>
+            </c:numRef>
+          </c:val>
+        </c:ser>
+        <c:ser>
+          <c:idx val="3"/>
+          <c:order val="3"/>
+          <c:tx>
+            <c:strRef>
+              <c:f>Sheet1!$E$1</c:f>
+              <c:strCache>
+                <c:ptCount val="1"/>
+                <c:pt idx="0">
+                  <c:v>Australia</c:v>
+                </c:pt>
+              </c:strCache>
+            </c:strRef>
+          </c:tx>
+          <c:spPr>
+            <a:solidFill>
+              <a:srgbClr val="0D8390"/>
+            </a:solidFill>
+            <a:effectLst/>
+          </c:spPr>
+          <c:invertIfNegative val="0"/>
+          <c:dLbls>
+            <c:numFmt formatCode="#,##0" sourceLinked="0"/>
+            <c:txPr>
+              <a:bodyPr/>
+              <a:lstStyle/>
+              <a:p>
+                <a:pPr>
+                  <a:defRPr b="0" i="0" strike="noStrike" sz="600" u="none">
+                    <a:solidFill>
+                      <a:srgbClr val="FFFFFF"/>
+                    </a:solidFill>
+                    <a:latin typeface="Arial"/>
+                  </a:defRPr>
+                </a:pPr>
+              </a:p>
+            </c:txPr>
+            <c:dLblPos val="ctr"/>
+            <c:showLegendKey val="0"/>
+            <c:showVal val="1"/>
+            <c:showCatName val="0"/>
+            <c:showSerName val="0"/>
+            <c:showPercent val="0"/>
+            <c:showBubbleSize val="0"/>
+            <c:showLeaderLines val="0"/>
+          </c:dLbls>
+          <c:cat>
+            <c:multiLvlStrRef>
+              <c:f>Sheet1!$A$2:$A$13</c:f>
+              <c:multiLvlStrCache>
+                <c:ptCount val="12"/>
+                <c:lvl>
+                  <c:pt idx="0">
+                    <c:v>Limited data standardization — Banking (73%)</c:v>
+                  </c:pt>
+                  <c:pt idx="1">
+                    <c:v>Limited data standardization — Insurance (US &amp; Canada only, 76%)</c:v>
+                  </c:pt>
+                  <c:pt idx="2">
+                    <c:v>Legal, privacy &amp; regulatory constraints — Banking (73%)</c:v>
+                  </c:pt>
+                  <c:pt idx="3">
+                    <c:v>Legal, privacy &amp; regulatory constraints — Insurance (US &amp; Canada only, 64%)</c:v>
+                  </c:pt>
+                  <c:pt idx="4">
+                    <c:v>Lack of external industry participation — Banking (64%)</c:v>
+                  </c:pt>
+                  <c:pt idx="5">
+                    <c:v>Lack of external industry participation — Insurance (US &amp; Canada only, 40%)</c:v>
+                  </c:pt>
+                  <c:pt idx="6">
+                    <c:v>Insufficient budget or resources — Banking (36%)</c:v>
+                  </c:pt>
+                  <c:pt idx="7">
+                    <c:v>Insufficient budget or resources — Insurance (US &amp; Canada only, 32%)</c:v>
+                  </c:pt>
+                  <c:pt idx="8">
+                    <c:v>Difficulty demonstrating ROI — Banking (31%)</c:v>
+                  </c:pt>
+                  <c:pt idx="9">
+                    <c:v>Difficulty demonstrating ROI — Insurance (US &amp; Canada only, 16%)</c:v>
+                  </c:pt>
+                  <c:pt idx="10">
+                    <c:v>Unclear internal ownership / governance — Banking (23%)</c:v>
+                  </c:pt>
+                  <c:pt idx="11">
+                    <c:v>Unclear internal ownership / governance — Insurance (US &amp; Canada only, 32%)</c:v>
+                  </c:pt>
+                </c:lvl>
+              </c:multiLvlStrCache>
+            </c:multiLvlStrRef>
+          </c:cat>
+          <c:val>
+            <c:numRef>
+              <c:f>Sheet1!$E$2:$E$13</c:f>
+              <c:numCache>
+                <c:formatCode>General</c:formatCode>
+                <c:ptCount val="12"/>
+                <c:pt idx="0">
+                  <c:v>7</c:v>
+                </c:pt>
+                <c:pt idx="1">
+                  <c:v>0</c:v>
+                </c:pt>
+                <c:pt idx="2">
+                  <c:v>9</c:v>
+                </c:pt>
+                <c:pt idx="3">
+                  <c:v>0</c:v>
+                </c:pt>
+                <c:pt idx="4">
+                  <c:v>4</c:v>
+                </c:pt>
+                <c:pt idx="5">
+                  <c:v>0</c:v>
+                </c:pt>
+                <c:pt idx="6">
+                  <c:v>5</c:v>
+                </c:pt>
+                <c:pt idx="7">
+                  <c:v>0</c:v>
+                </c:pt>
+                <c:pt idx="8">
+                  <c:v>1</c:v>
+                </c:pt>
+                <c:pt idx="9">
+                  <c:v>0</c:v>
+                </c:pt>
+                <c:pt idx="10">
+                  <c:v>1</c:v>
+                </c:pt>
+                <c:pt idx="11">
+                  <c:v>0</c:v>
+                </c:pt>
+              </c:numCache>
+            </c:numRef>
+          </c:val>
+        </c:ser>
+        <c:ser>
+          <c:idx val="4"/>
+          <c:order val="4"/>
+          <c:tx>
+            <c:strRef>
+              <c:f>Sheet1!$F$1</c:f>
+              <c:strCache>
+                <c:ptCount val="1"/>
+                <c:pt idx="0">
+                  <c:v>Singapore</c:v>
+                </c:pt>
+              </c:strCache>
+            </c:strRef>
+          </c:tx>
+          <c:spPr>
+            <a:solidFill>
+              <a:srgbClr val="53565A"/>
+            </a:solidFill>
+            <a:effectLst/>
+          </c:spPr>
+          <c:invertIfNegative val="0"/>
+          <c:dLbls>
+            <c:numFmt formatCode="#,##0" sourceLinked="0"/>
+            <c:txPr>
+              <a:bodyPr/>
+              <a:lstStyle/>
+              <a:p>
+                <a:pPr>
+                  <a:defRPr b="0" i="0" strike="noStrike" sz="600" u="none">
+                    <a:solidFill>
+                      <a:srgbClr val="FFFFFF"/>
+                    </a:solidFill>
+                    <a:latin typeface="Arial"/>
+                  </a:defRPr>
+                </a:pPr>
+              </a:p>
+            </c:txPr>
+            <c:dLblPos val="ctr"/>
+            <c:showLegendKey val="0"/>
+            <c:showVal val="1"/>
+            <c:showCatName val="0"/>
+            <c:showSerName val="0"/>
+            <c:showPercent val="0"/>
+            <c:showBubbleSize val="0"/>
+            <c:showLeaderLines val="0"/>
+          </c:dLbls>
+          <c:cat>
+            <c:multiLvlStrRef>
+              <c:f>Sheet1!$A$2:$A$13</c:f>
+              <c:multiLvlStrCache>
+                <c:ptCount val="12"/>
+                <c:lvl>
+                  <c:pt idx="0">
+                    <c:v>Limited data standardization — Banking (73%)</c:v>
+                  </c:pt>
+                  <c:pt idx="1">
+                    <c:v>Limited data standardization — Insurance (US &amp; Canada only, 76%)</c:v>
+                  </c:pt>
+                  <c:pt idx="2">
+                    <c:v>Legal, privacy &amp; regulatory constraints — Banking (73%)</c:v>
+                  </c:pt>
+                  <c:pt idx="3">
+                    <c:v>Legal, privacy &amp; regulatory constraints — Insurance (US &amp; Canada only, 64%)</c:v>
+                  </c:pt>
+                  <c:pt idx="4">
+                    <c:v>Lack of external industry participation — Banking (64%)</c:v>
+                  </c:pt>
+                  <c:pt idx="5">
+                    <c:v>Lack of external industry participation — Insurance (US &amp; Canada only, 40%)</c:v>
+                  </c:pt>
+                  <c:pt idx="6">
+                    <c:v>Insufficient budget or resources — Banking (36%)</c:v>
+                  </c:pt>
+                  <c:pt idx="7">
+                    <c:v>Insufficient budget or resources — Insurance (US &amp; Canada only, 32%)</c:v>
+                  </c:pt>
+                  <c:pt idx="8">
+                    <c:v>Difficulty demonstrating ROI — Banking (31%)</c:v>
+                  </c:pt>
+                  <c:pt idx="9">
+                    <c:v>Difficulty demonstrating ROI — Insurance (US &amp; Canada only, 16%)</c:v>
+                  </c:pt>
+                  <c:pt idx="10">
+                    <c:v>Unclear internal ownership / governance — Banking (23%)</c:v>
+                  </c:pt>
+                  <c:pt idx="11">
+                    <c:v>Unclear internal ownership / governance — Insurance (US &amp; Canada only, 32%)</c:v>
+                  </c:pt>
+                </c:lvl>
+              </c:multiLvlStrCache>
+            </c:multiLvlStrRef>
+          </c:cat>
+          <c:val>
+            <c:numRef>
+              <c:f>Sheet1!$F$2:$F$13</c:f>
+              <c:numCache>
+                <c:formatCode>General</c:formatCode>
+                <c:ptCount val="12"/>
+                <c:pt idx="0">
+                  <c:v>5</c:v>
+                </c:pt>
+                <c:pt idx="1">
+                  <c:v>0</c:v>
+                </c:pt>
+                <c:pt idx="2">
+                  <c:v>3</c:v>
+                </c:pt>
+                <c:pt idx="3">
+                  <c:v>0</c:v>
+                </c:pt>
+                <c:pt idx="4">
+                  <c:v>3</c:v>
+                </c:pt>
+                <c:pt idx="5">
+                  <c:v>0</c:v>
+                </c:pt>
+                <c:pt idx="6">
+                  <c:v>1</c:v>
+                </c:pt>
+                <c:pt idx="7">
+                  <c:v>0</c:v>
+                </c:pt>
+                <c:pt idx="8">
+                  <c:v>3</c:v>
+                </c:pt>
+                <c:pt idx="9">
+                  <c:v>0</c:v>
+                </c:pt>
+                <c:pt idx="10">
+                  <c:v>1</c:v>
+                </c:pt>
+                <c:pt idx="11">
+                  <c:v>0</c:v>
+                </c:pt>
+              </c:numCache>
+            </c:numRef>
+          </c:val>
+        </c:ser>
+        <c:dLbls>
+          <c:numFmt formatCode="#,##0" sourceLinked="0"/>
+          <c:txPr>
+            <a:bodyPr/>
+            <a:lstStyle/>
+            <a:p>
+              <a:pPr>
+                <a:defRPr b="0" i="0" strike="noStrike" sz="600" u="none">
+                  <a:solidFill>
+                    <a:srgbClr val="FFFFFF"/>
+                  </a:solidFill>
+                  <a:latin typeface="Arial"/>
+                </a:defRPr>
+              </a:pPr>
+            </a:p>
+          </c:txPr>
+          <c:dLblPos val="ctr"/>
+          <c:showLegendKey val="0"/>
+          <c:showVal val="1"/>
+          <c:showCatName val="0"/>
+          <c:showSerName val="0"/>
+          <c:showPercent val="0"/>
+          <c:showBubbleSize val="0"/>
+          <c:showLeaderLines val="0"/>
+        </c:dLbls>
+        <c:gapWidth val="40"/>
+        <c:overlap val="100"/>
+        <c:axId val="2094734554"/>
+        <c:axId val="2094734552"/>
+        <c:axId val="2094734556"/>
+      </c:barChart>
+      <c:catAx>
+        <c:axId val="2094734554"/>
+        <c:scaling>
+          <c:orientation val="minMax"/>
+        </c:scaling>
+        <c:delete val="0"/>
+        <c:axPos val="l"/>
+        <c:numFmt formatCode="General" sourceLinked="1"/>
+        <c:majorTickMark val="out"/>
+        <c:minorTickMark val="none"/>
+        <c:tickLblPos val="nextTo"/>
+        <c:spPr>
+          <a:ln w="12700" cap="flat">
+            <a:noFill/>
+            <a:prstDash val="solid"/>
+            <a:round/>
+          </a:ln>
+        </c:spPr>
+        <c:txPr>
+          <a:bodyPr/>
+          <a:lstStyle/>
+          <a:p>
+            <a:pPr>
+              <a:defRPr sz="750" b="0" i="0" u="none" strike="noStrike">
+                <a:solidFill>
+                  <a:srgbClr val="53565A"/>
+                </a:solidFill>
+                <a:latin typeface="Arial"/>
+              </a:defRPr>
+            </a:pPr>
+            <a:endParaRPr lang="en-US"/>
+          </a:p>
+        </c:txPr>
+        <c:crossAx val="2094734552"/>
+        <c:crosses val="autoZero"/>
+        <c:auto val="1"/>
+        <c:lblAlgn val="ctr"/>
+        <c:noMultiLvlLbl val="1"/>
+      </c:catAx>
+      <c:valAx>
+        <c:axId val="2094734552"/>
+        <c:scaling>
+          <c:orientation val="minMax"/>
+        </c:scaling>
+        <c:delete val="1"/>
+        <c:axPos val="b"/>
+        <c:numFmt formatCode="General" sourceLinked="0"/>
+        <c:majorTickMark val="out"/>
+        <c:minorTickMark val="none"/>
+        <c:tickLblPos val="low"/>
+        <c:spPr>
+          <a:ln w="12700" cap="flat">
+            <a:noFill/>
+            <a:prstDash val="solid"/>
+            <a:round/>
+          </a:ln>
+        </c:spPr>
+        <c:txPr>
+          <a:bodyPr/>
+          <a:lstStyle/>
+          <a:p>
+            <a:pPr>
+              <a:defRPr sz="1200" b="0" i="0" u="none" strike="noStrike">
+                <a:solidFill>
+                  <a:srgbClr val="000000"/>
+                </a:solidFill>
+                <a:latin typeface="Arial"/>
+              </a:defRPr>
+            </a:pPr>
+            <a:endParaRPr lang="en-US"/>
+          </a:p>
+        </c:txPr>
+        <c:crossAx val="2094734554"/>
+        <c:crosses val="autoZero"/>
+        <c:crossBetween val="between"/>
+      </c:valAx>
+      <c:spPr>
+        <a:solidFill>
+          <a:srgbClr val="FFFFFF"/>
+        </a:solidFill>
+        <a:ln>
+          <a:noFill/>
+        </a:ln>
+        <a:effectLst/>
+      </c:spPr>
+    </c:plotArea>
+    <c:legend>
+      <c:legendPos val="b"/>
+      <c:overlay val="0"/>
+      <c:txPr>
+        <a:bodyPr/>
+        <a:lstStyle/>
+        <a:p>
+          <a:pPr>
+            <a:defRPr sz="750">      </a:defRPr>
+          </a:pPr>
+          <a:endParaRPr lang="en-US"/>
+        </a:p>
+      </c:txPr>
+    </c:legend>
+    <c:plotVisOnly val="1"/>
+    <c:dispBlanksAs val="span"/>
+  </c:chart>
+  <c:spPr>
+    <a:noFill/>
+    <a:ln>
+      <a:noFill/>
+    </a:ln>
+    <a:effectLst/>
+  </c:spPr>
+  <c:externalData r:id="rId1">
+    <c:autoUpdate val="0"/>
+  </c:externalData>
+</c:chartSpace>
+</file>
+
+<file path=ppt/charts/chart11.xml><?xml version="1.0" encoding="utf-8"?>
+<c:chartSpace xmlns:c="http://schemas.openxmlformats.org/drawingml/2006/chart" xmlns:a="http://schemas.openxmlformats.org/drawingml/2006/main" xmlns:r="http://schemas.openxmlformats.org/officeDocument/2006/relationships">
+  <c:date1904 val="0"/>
+  <c:roundedCorners val="1"/>
+  <c:chart>
+    <c:autoTitleDeleted val="1"/>
+    <c:plotArea>
+      <c:layout/>
+      <c:barChart>
+        <c:barDir val="bar"/>
         <c:grouping val="clustered"/>
         <c:varyColors val="0"/>
         <c:ser>
@@ -736,7 +1588,670 @@
 </c:chartSpace>
 </file>
 
-<file path=ppt/charts/chart11.xml><?xml version="1.0" encoding="utf-8"?>
+<file path=ppt/charts/chart12.xml><?xml version="1.0" encoding="utf-8"?>
+<c:chartSpace xmlns:c="http://schemas.openxmlformats.org/drawingml/2006/chart" xmlns:a="http://schemas.openxmlformats.org/drawingml/2006/main" xmlns:r="http://schemas.openxmlformats.org/officeDocument/2006/relationships">
+  <c:date1904 val="0"/>
+  <c:roundedCorners val="1"/>
+  <c:chart>
+    <c:autoTitleDeleted val="1"/>
+    <c:plotArea>
+      <c:layout/>
+      <c:barChart>
+        <c:barDir val="bar"/>
+        <c:grouping val="clustered"/>
+        <c:varyColors val="0"/>
+        <c:ser>
+          <c:idx val="0"/>
+          <c:order val="0"/>
+          <c:tx>
+            <c:strRef>
+              <c:f>Sheet1!$B$1</c:f>
+              <c:strCache>
+                <c:ptCount val="1"/>
+                <c:pt idx="0">
+                  <c:v>United States (n=44)</c:v>
+                </c:pt>
+              </c:strCache>
+            </c:strRef>
+          </c:tx>
+          <c:spPr>
+            <a:solidFill>
+              <a:srgbClr val="86BC25"/>
+            </a:solidFill>
+            <a:effectLst/>
+          </c:spPr>
+          <c:invertIfNegative val="0"/>
+          <c:dLbls>
+            <c:numFmt formatCode="0&quot;%&quot;" sourceLinked="0"/>
+            <c:txPr>
+              <a:bodyPr/>
+              <a:lstStyle/>
+              <a:p>
+                <a:pPr>
+                  <a:defRPr b="0" i="0" strike="noStrike" sz="650" u="none">
+                    <a:solidFill>
+                      <a:srgbClr val="000000"/>
+                    </a:solidFill>
+                    <a:latin typeface="Arial"/>
+                  </a:defRPr>
+                </a:pPr>
+              </a:p>
+            </c:txPr>
+            <c:showLegendKey val="0"/>
+            <c:showVal val="1"/>
+            <c:showCatName val="0"/>
+            <c:showSerName val="0"/>
+            <c:showPercent val="0"/>
+            <c:showBubbleSize val="0"/>
+            <c:showLeaderLines val="0"/>
+          </c:dLbls>
+          <c:cat>
+            <c:multiLvlStrRef>
+              <c:f>Sheet1!$A$2:$A$7</c:f>
+              <c:multiLvlStrCache>
+                <c:ptCount val="6"/>
+                <c:lvl>
+                  <c:pt idx="0">
+                    <c:v>Centralized fraud info-sharing platform / utility</c:v>
+                  </c:pt>
+                  <c:pt idx="1">
+                    <c:v>Clearer legal &amp; regulatory frameworks</c:v>
+                  </c:pt>
+                  <c:pt idx="2">
+                    <c:v>Common data standards &amp; definitions</c:v>
+                  </c:pt>
+                  <c:pt idx="3">
+                    <c:v>Greater public-private collaboration</c:v>
+                  </c:pt>
+                  <c:pt idx="4">
+                    <c:v>Prioritized industry use cases</c:v>
+                  </c:pt>
+                  <c:pt idx="5">
+                    <c:v>Funding or incentives</c:v>
+                  </c:pt>
+                </c:lvl>
+              </c:multiLvlStrCache>
+            </c:multiLvlStrRef>
+          </c:cat>
+          <c:val>
+            <c:numRef>
+              <c:f>Sheet1!$B$2:$B$7</c:f>
+              <c:numCache>
+                <c:formatCode>General</c:formatCode>
+                <c:ptCount val="6"/>
+                <c:pt idx="0">
+                  <c:v>36</c:v>
+                </c:pt>
+                <c:pt idx="1">
+                  <c:v>16</c:v>
+                </c:pt>
+                <c:pt idx="2">
+                  <c:v>18</c:v>
+                </c:pt>
+                <c:pt idx="3">
+                  <c:v>20</c:v>
+                </c:pt>
+                <c:pt idx="4">
+                  <c:v>5</c:v>
+                </c:pt>
+                <c:pt idx="5">
+                  <c:v>5</c:v>
+                </c:pt>
+              </c:numCache>
+            </c:numRef>
+          </c:val>
+        </c:ser>
+        <c:ser>
+          <c:idx val="1"/>
+          <c:order val="1"/>
+          <c:tx>
+            <c:strRef>
+              <c:f>Sheet1!$C$1</c:f>
+              <c:strCache>
+                <c:ptCount val="1"/>
+                <c:pt idx="0">
+                  <c:v>Canada (n=30)</c:v>
+                </c:pt>
+              </c:strCache>
+            </c:strRef>
+          </c:tx>
+          <c:spPr>
+            <a:solidFill>
+              <a:srgbClr val="43B02A"/>
+            </a:solidFill>
+            <a:effectLst/>
+          </c:spPr>
+          <c:invertIfNegative val="0"/>
+          <c:dLbls>
+            <c:numFmt formatCode="0&quot;%&quot;" sourceLinked="0"/>
+            <c:txPr>
+              <a:bodyPr/>
+              <a:lstStyle/>
+              <a:p>
+                <a:pPr>
+                  <a:defRPr b="0" i="0" strike="noStrike" sz="650" u="none">
+                    <a:solidFill>
+                      <a:srgbClr val="000000"/>
+                    </a:solidFill>
+                    <a:latin typeface="Arial"/>
+                  </a:defRPr>
+                </a:pPr>
+              </a:p>
+            </c:txPr>
+            <c:showLegendKey val="0"/>
+            <c:showVal val="1"/>
+            <c:showCatName val="0"/>
+            <c:showSerName val="0"/>
+            <c:showPercent val="0"/>
+            <c:showBubbleSize val="0"/>
+            <c:showLeaderLines val="0"/>
+          </c:dLbls>
+          <c:cat>
+            <c:multiLvlStrRef>
+              <c:f>Sheet1!$A$2:$A$7</c:f>
+              <c:multiLvlStrCache>
+                <c:ptCount val="6"/>
+                <c:lvl>
+                  <c:pt idx="0">
+                    <c:v>Centralized fraud info-sharing platform / utility</c:v>
+                  </c:pt>
+                  <c:pt idx="1">
+                    <c:v>Clearer legal &amp; regulatory frameworks</c:v>
+                  </c:pt>
+                  <c:pt idx="2">
+                    <c:v>Common data standards &amp; definitions</c:v>
+                  </c:pt>
+                  <c:pt idx="3">
+                    <c:v>Greater public-private collaboration</c:v>
+                  </c:pt>
+                  <c:pt idx="4">
+                    <c:v>Prioritized industry use cases</c:v>
+                  </c:pt>
+                  <c:pt idx="5">
+                    <c:v>Funding or incentives</c:v>
+                  </c:pt>
+                </c:lvl>
+              </c:multiLvlStrCache>
+            </c:multiLvlStrRef>
+          </c:cat>
+          <c:val>
+            <c:numRef>
+              <c:f>Sheet1!$C$2:$C$7</c:f>
+              <c:numCache>
+                <c:formatCode>General</c:formatCode>
+                <c:ptCount val="6"/>
+                <c:pt idx="0">
+                  <c:v>33</c:v>
+                </c:pt>
+                <c:pt idx="1">
+                  <c:v>40</c:v>
+                </c:pt>
+                <c:pt idx="2">
+                  <c:v>7</c:v>
+                </c:pt>
+                <c:pt idx="3">
+                  <c:v>7</c:v>
+                </c:pt>
+                <c:pt idx="4">
+                  <c:v>13</c:v>
+                </c:pt>
+                <c:pt idx="5">
+                  <c:v>0</c:v>
+                </c:pt>
+              </c:numCache>
+            </c:numRef>
+          </c:val>
+        </c:ser>
+        <c:ser>
+          <c:idx val="2"/>
+          <c:order val="2"/>
+          <c:tx>
+            <c:strRef>
+              <c:f>Sheet1!$D$1</c:f>
+              <c:strCache>
+                <c:ptCount val="1"/>
+                <c:pt idx="0">
+                  <c:v>Europe — EU+UK (n=14)</c:v>
+                </c:pt>
+              </c:strCache>
+            </c:strRef>
+          </c:tx>
+          <c:spPr>
+            <a:solidFill>
+              <a:srgbClr val="046A38"/>
+            </a:solidFill>
+            <a:effectLst/>
+          </c:spPr>
+          <c:invertIfNegative val="0"/>
+          <c:dLbls>
+            <c:numFmt formatCode="0&quot;%&quot;" sourceLinked="0"/>
+            <c:txPr>
+              <a:bodyPr/>
+              <a:lstStyle/>
+              <a:p>
+                <a:pPr>
+                  <a:defRPr b="0" i="0" strike="noStrike" sz="650" u="none">
+                    <a:solidFill>
+                      <a:srgbClr val="000000"/>
+                    </a:solidFill>
+                    <a:latin typeface="Arial"/>
+                  </a:defRPr>
+                </a:pPr>
+              </a:p>
+            </c:txPr>
+            <c:showLegendKey val="0"/>
+            <c:showVal val="1"/>
+            <c:showCatName val="0"/>
+            <c:showSerName val="0"/>
+            <c:showPercent val="0"/>
+            <c:showBubbleSize val="0"/>
+            <c:showLeaderLines val="0"/>
+          </c:dLbls>
+          <c:cat>
+            <c:multiLvlStrRef>
+              <c:f>Sheet1!$A$2:$A$7</c:f>
+              <c:multiLvlStrCache>
+                <c:ptCount val="6"/>
+                <c:lvl>
+                  <c:pt idx="0">
+                    <c:v>Centralized fraud info-sharing platform / utility</c:v>
+                  </c:pt>
+                  <c:pt idx="1">
+                    <c:v>Clearer legal &amp; regulatory frameworks</c:v>
+                  </c:pt>
+                  <c:pt idx="2">
+                    <c:v>Common data standards &amp; definitions</c:v>
+                  </c:pt>
+                  <c:pt idx="3">
+                    <c:v>Greater public-private collaboration</c:v>
+                  </c:pt>
+                  <c:pt idx="4">
+                    <c:v>Prioritized industry use cases</c:v>
+                  </c:pt>
+                  <c:pt idx="5">
+                    <c:v>Funding or incentives</c:v>
+                  </c:pt>
+                </c:lvl>
+              </c:multiLvlStrCache>
+            </c:multiLvlStrRef>
+          </c:cat>
+          <c:val>
+            <c:numRef>
+              <c:f>Sheet1!$D$2:$D$7</c:f>
+              <c:numCache>
+                <c:formatCode>General</c:formatCode>
+                <c:ptCount val="6"/>
+                <c:pt idx="0">
+                  <c:v>36</c:v>
+                </c:pt>
+                <c:pt idx="1">
+                  <c:v>29</c:v>
+                </c:pt>
+                <c:pt idx="2">
+                  <c:v>14</c:v>
+                </c:pt>
+                <c:pt idx="3">
+                  <c:v>7</c:v>
+                </c:pt>
+                <c:pt idx="4">
+                  <c:v>7</c:v>
+                </c:pt>
+                <c:pt idx="5">
+                  <c:v>7</c:v>
+                </c:pt>
+              </c:numCache>
+            </c:numRef>
+          </c:val>
+        </c:ser>
+        <c:ser>
+          <c:idx val="3"/>
+          <c:order val="3"/>
+          <c:tx>
+            <c:strRef>
+              <c:f>Sheet1!$E$1</c:f>
+              <c:strCache>
+                <c:ptCount val="1"/>
+                <c:pt idx="0">
+                  <c:v>Australia (n=8)</c:v>
+                </c:pt>
+              </c:strCache>
+            </c:strRef>
+          </c:tx>
+          <c:spPr>
+            <a:solidFill>
+              <a:srgbClr val="0D8390"/>
+            </a:solidFill>
+            <a:effectLst/>
+          </c:spPr>
+          <c:invertIfNegative val="0"/>
+          <c:dLbls>
+            <c:numFmt formatCode="0&quot;%&quot;" sourceLinked="0"/>
+            <c:txPr>
+              <a:bodyPr/>
+              <a:lstStyle/>
+              <a:p>
+                <a:pPr>
+                  <a:defRPr b="0" i="0" strike="noStrike" sz="650" u="none">
+                    <a:solidFill>
+                      <a:srgbClr val="000000"/>
+                    </a:solidFill>
+                    <a:latin typeface="Arial"/>
+                  </a:defRPr>
+                </a:pPr>
+              </a:p>
+            </c:txPr>
+            <c:showLegendKey val="0"/>
+            <c:showVal val="1"/>
+            <c:showCatName val="0"/>
+            <c:showSerName val="0"/>
+            <c:showPercent val="0"/>
+            <c:showBubbleSize val="0"/>
+            <c:showLeaderLines val="0"/>
+          </c:dLbls>
+          <c:cat>
+            <c:multiLvlStrRef>
+              <c:f>Sheet1!$A$2:$A$7</c:f>
+              <c:multiLvlStrCache>
+                <c:ptCount val="6"/>
+                <c:lvl>
+                  <c:pt idx="0">
+                    <c:v>Centralized fraud info-sharing platform / utility</c:v>
+                  </c:pt>
+                  <c:pt idx="1">
+                    <c:v>Clearer legal &amp; regulatory frameworks</c:v>
+                  </c:pt>
+                  <c:pt idx="2">
+                    <c:v>Common data standards &amp; definitions</c:v>
+                  </c:pt>
+                  <c:pt idx="3">
+                    <c:v>Greater public-private collaboration</c:v>
+                  </c:pt>
+                  <c:pt idx="4">
+                    <c:v>Prioritized industry use cases</c:v>
+                  </c:pt>
+                  <c:pt idx="5">
+                    <c:v>Funding or incentives</c:v>
+                  </c:pt>
+                </c:lvl>
+              </c:multiLvlStrCache>
+            </c:multiLvlStrRef>
+          </c:cat>
+          <c:val>
+            <c:numRef>
+              <c:f>Sheet1!$E$2:$E$7</c:f>
+              <c:numCache>
+                <c:formatCode>General</c:formatCode>
+                <c:ptCount val="6"/>
+                <c:pt idx="0">
+                  <c:v>25</c:v>
+                </c:pt>
+                <c:pt idx="1">
+                  <c:v>38</c:v>
+                </c:pt>
+                <c:pt idx="2">
+                  <c:v>0</c:v>
+                </c:pt>
+                <c:pt idx="3">
+                  <c:v>12</c:v>
+                </c:pt>
+                <c:pt idx="4">
+                  <c:v>25</c:v>
+                </c:pt>
+                <c:pt idx="5">
+                  <c:v>0</c:v>
+                </c:pt>
+              </c:numCache>
+            </c:numRef>
+          </c:val>
+        </c:ser>
+        <c:ser>
+          <c:idx val="4"/>
+          <c:order val="4"/>
+          <c:tx>
+            <c:strRef>
+              <c:f>Sheet1!$F$1</c:f>
+              <c:strCache>
+                <c:ptCount val="1"/>
+                <c:pt idx="0">
+                  <c:v>Singapore (n=4)</c:v>
+                </c:pt>
+              </c:strCache>
+            </c:strRef>
+          </c:tx>
+          <c:spPr>
+            <a:solidFill>
+              <a:srgbClr val="53565A"/>
+            </a:solidFill>
+            <a:effectLst/>
+          </c:spPr>
+          <c:invertIfNegative val="0"/>
+          <c:dLbls>
+            <c:numFmt formatCode="0&quot;%&quot;" sourceLinked="0"/>
+            <c:txPr>
+              <a:bodyPr/>
+              <a:lstStyle/>
+              <a:p>
+                <a:pPr>
+                  <a:defRPr b="0" i="0" strike="noStrike" sz="650" u="none">
+                    <a:solidFill>
+                      <a:srgbClr val="000000"/>
+                    </a:solidFill>
+                    <a:latin typeface="Arial"/>
+                  </a:defRPr>
+                </a:pPr>
+              </a:p>
+            </c:txPr>
+            <c:showLegendKey val="0"/>
+            <c:showVal val="1"/>
+            <c:showCatName val="0"/>
+            <c:showSerName val="0"/>
+            <c:showPercent val="0"/>
+            <c:showBubbleSize val="0"/>
+            <c:showLeaderLines val="0"/>
+          </c:dLbls>
+          <c:cat>
+            <c:multiLvlStrRef>
+              <c:f>Sheet1!$A$2:$A$7</c:f>
+              <c:multiLvlStrCache>
+                <c:ptCount val="6"/>
+                <c:lvl>
+                  <c:pt idx="0">
+                    <c:v>Centralized fraud info-sharing platform / utility</c:v>
+                  </c:pt>
+                  <c:pt idx="1">
+                    <c:v>Clearer legal &amp; regulatory frameworks</c:v>
+                  </c:pt>
+                  <c:pt idx="2">
+                    <c:v>Common data standards &amp; definitions</c:v>
+                  </c:pt>
+                  <c:pt idx="3">
+                    <c:v>Greater public-private collaboration</c:v>
+                  </c:pt>
+                  <c:pt idx="4">
+                    <c:v>Prioritized industry use cases</c:v>
+                  </c:pt>
+                  <c:pt idx="5">
+                    <c:v>Funding or incentives</c:v>
+                  </c:pt>
+                </c:lvl>
+              </c:multiLvlStrCache>
+            </c:multiLvlStrRef>
+          </c:cat>
+          <c:val>
+            <c:numRef>
+              <c:f>Sheet1!$F$2:$F$7</c:f>
+              <c:numCache>
+                <c:formatCode>General</c:formatCode>
+                <c:ptCount val="6"/>
+                <c:pt idx="0">
+                  <c:v>50</c:v>
+                </c:pt>
+                <c:pt idx="1">
+                  <c:v>0</c:v>
+                </c:pt>
+                <c:pt idx="2">
+                  <c:v>50</c:v>
+                </c:pt>
+                <c:pt idx="3">
+                  <c:v>0</c:v>
+                </c:pt>
+                <c:pt idx="4">
+                  <c:v>0</c:v>
+                </c:pt>
+                <c:pt idx="5">
+                  <c:v>0</c:v>
+                </c:pt>
+              </c:numCache>
+            </c:numRef>
+          </c:val>
+        </c:ser>
+        <c:dLbls>
+          <c:numFmt formatCode="0&quot;%&quot;" sourceLinked="0"/>
+          <c:txPr>
+            <a:bodyPr/>
+            <a:lstStyle/>
+            <a:p>
+              <a:pPr>
+                <a:defRPr b="0" i="0" strike="noStrike" sz="650" u="none">
+                  <a:solidFill>
+                    <a:srgbClr val="000000"/>
+                  </a:solidFill>
+                  <a:latin typeface="Arial"/>
+                </a:defRPr>
+              </a:pPr>
+            </a:p>
+          </c:txPr>
+          <c:showLegendKey val="0"/>
+          <c:showVal val="1"/>
+          <c:showCatName val="0"/>
+          <c:showSerName val="0"/>
+          <c:showPercent val="0"/>
+          <c:showBubbleSize val="0"/>
+          <c:showLeaderLines val="0"/>
+        </c:dLbls>
+        <c:gapWidth val="40"/>
+        <c:overlap val="0"/>
+        <c:axId val="2094734554"/>
+        <c:axId val="2094734552"/>
+        <c:axId val="2094734556"/>
+      </c:barChart>
+      <c:catAx>
+        <c:axId val="2094734554"/>
+        <c:scaling>
+          <c:orientation val="minMax"/>
+        </c:scaling>
+        <c:delete val="0"/>
+        <c:axPos val="l"/>
+        <c:numFmt formatCode="General" sourceLinked="1"/>
+        <c:majorTickMark val="out"/>
+        <c:minorTickMark val="none"/>
+        <c:tickLblPos val="nextTo"/>
+        <c:spPr>
+          <a:ln w="12700" cap="flat">
+            <a:noFill/>
+            <a:prstDash val="solid"/>
+            <a:round/>
+          </a:ln>
+        </c:spPr>
+        <c:txPr>
+          <a:bodyPr/>
+          <a:lstStyle/>
+          <a:p>
+            <a:pPr>
+              <a:defRPr sz="900" b="0" i="0" u="none" strike="noStrike">
+                <a:solidFill>
+                  <a:srgbClr val="53565A"/>
+                </a:solidFill>
+                <a:latin typeface="Arial"/>
+              </a:defRPr>
+            </a:pPr>
+            <a:endParaRPr lang="en-US"/>
+          </a:p>
+        </c:txPr>
+        <c:crossAx val="2094734552"/>
+        <c:crosses val="autoZero"/>
+        <c:auto val="1"/>
+        <c:lblAlgn val="ctr"/>
+        <c:noMultiLvlLbl val="1"/>
+      </c:catAx>
+      <c:valAx>
+        <c:axId val="2094734552"/>
+        <c:scaling>
+          <c:orientation val="minMax"/>
+        </c:scaling>
+        <c:delete val="1"/>
+        <c:axPos val="b"/>
+        <c:numFmt formatCode="General" sourceLinked="0"/>
+        <c:majorTickMark val="out"/>
+        <c:minorTickMark val="none"/>
+        <c:tickLblPos val="low"/>
+        <c:spPr>
+          <a:ln w="12700" cap="flat">
+            <a:noFill/>
+            <a:prstDash val="solid"/>
+            <a:round/>
+          </a:ln>
+        </c:spPr>
+        <c:txPr>
+          <a:bodyPr/>
+          <a:lstStyle/>
+          <a:p>
+            <a:pPr>
+              <a:defRPr sz="1200" b="0" i="0" u="none" strike="noStrike">
+                <a:solidFill>
+                  <a:srgbClr val="000000"/>
+                </a:solidFill>
+                <a:latin typeface="Arial"/>
+              </a:defRPr>
+            </a:pPr>
+            <a:endParaRPr lang="en-US"/>
+          </a:p>
+        </c:txPr>
+        <c:crossAx val="2094734554"/>
+        <c:crosses val="autoZero"/>
+        <c:crossBetween val="between"/>
+      </c:valAx>
+      <c:spPr>
+        <a:solidFill>
+          <a:srgbClr val="FFFFFF"/>
+        </a:solidFill>
+        <a:ln>
+          <a:noFill/>
+        </a:ln>
+        <a:effectLst/>
+      </c:spPr>
+    </c:plotArea>
+    <c:legend>
+      <c:legendPos val="b"/>
+      <c:overlay val="0"/>
+      <c:txPr>
+        <a:bodyPr/>
+        <a:lstStyle/>
+        <a:p>
+          <a:pPr>
+            <a:defRPr sz="800">      </a:defRPr>
+          </a:pPr>
+          <a:endParaRPr lang="en-US"/>
+        </a:p>
+      </c:txPr>
+    </c:legend>
+    <c:plotVisOnly val="1"/>
+    <c:dispBlanksAs val="span"/>
+  </c:chart>
+  <c:spPr>
+    <a:noFill/>
+    <a:ln>
+      <a:noFill/>
+    </a:ln>
+    <a:effectLst/>
+  </c:spPr>
+  <c:externalData r:id="rId1">
+    <c:autoUpdate val="0"/>
+  </c:externalData>
+</c:chartSpace>
+</file>
+
+<file path=ppt/charts/chart13.xml><?xml version="1.0" encoding="utf-8"?>
 <c:chartSpace xmlns:c="http://schemas.openxmlformats.org/drawingml/2006/chart" xmlns:a="http://schemas.openxmlformats.org/drawingml/2006/main" xmlns:r="http://schemas.openxmlformats.org/officeDocument/2006/relationships">
   <c:date1904 val="0"/>
   <c:roundedCorners val="1"/>
@@ -981,7 +2496,7 @@
 </c:chartSpace>
 </file>
 
-<file path=ppt/charts/chart12.xml><?xml version="1.0" encoding="utf-8"?>
+<file path=ppt/charts/chart14.xml><?xml version="1.0" encoding="utf-8"?>
 <c:chartSpace xmlns:c="http://schemas.openxmlformats.org/drawingml/2006/chart" xmlns:a="http://schemas.openxmlformats.org/drawingml/2006/main" xmlns:r="http://schemas.openxmlformats.org/officeDocument/2006/relationships">
   <c:date1904 val="0"/>
   <c:roundedCorners val="1"/>
@@ -1226,7 +2741,7 @@
 </c:chartSpace>
 </file>
 
-<file path=ppt/charts/chart13.xml><?xml version="1.0" encoding="utf-8"?>
+<file path=ppt/charts/chart15.xml><?xml version="1.0" encoding="utf-8"?>
 <c:chartSpace xmlns:c="http://schemas.openxmlformats.org/drawingml/2006/chart" xmlns:a="http://schemas.openxmlformats.org/drawingml/2006/main" xmlns:r="http://schemas.openxmlformats.org/officeDocument/2006/relationships">
   <c:date1904 val="0"/>
   <c:roundedCorners val="1"/>
@@ -1459,7 +2974,7 @@
 </c:chartSpace>
 </file>
 
-<file path=ppt/charts/chart14.xml><?xml version="1.0" encoding="utf-8"?>
+<file path=ppt/charts/chart16.xml><?xml version="1.0" encoding="utf-8"?>
 <c:chartSpace xmlns:c="http://schemas.openxmlformats.org/drawingml/2006/chart" xmlns:a="http://schemas.openxmlformats.org/drawingml/2006/main" xmlns:r="http://schemas.openxmlformats.org/officeDocument/2006/relationships">
   <c:date1904 val="0"/>
   <c:roundedCorners val="1"/>
@@ -1795,7 +3310,736 @@
 </c:chartSpace>
 </file>
 
-<file path=ppt/charts/chart15.xml><?xml version="1.0" encoding="utf-8"?>
+<file path=ppt/charts/chart17.xml><?xml version="1.0" encoding="utf-8"?>
+<c:chartSpace xmlns:c="http://schemas.openxmlformats.org/drawingml/2006/chart" xmlns:a="http://schemas.openxmlformats.org/drawingml/2006/main" xmlns:r="http://schemas.openxmlformats.org/officeDocument/2006/relationships">
+  <c:date1904 val="0"/>
+  <c:roundedCorners val="1"/>
+  <c:chart>
+    <c:autoTitleDeleted val="1"/>
+    <c:plotArea>
+      <c:layout/>
+      <c:barChart>
+        <c:barDir val="bar"/>
+        <c:grouping val="stacked"/>
+        <c:varyColors val="0"/>
+        <c:ser>
+          <c:idx val="0"/>
+          <c:order val="0"/>
+          <c:tx>
+            <c:strRef>
+              <c:f>Sheet1!$B$1</c:f>
+              <c:strCache>
+                <c:ptCount val="1"/>
+                <c:pt idx="0">
+                  <c:v>United States</c:v>
+                </c:pt>
+              </c:strCache>
+            </c:strRef>
+          </c:tx>
+          <c:spPr>
+            <a:solidFill>
+              <a:srgbClr val="86BC25"/>
+            </a:solidFill>
+            <a:effectLst/>
+          </c:spPr>
+          <c:invertIfNegative val="0"/>
+          <c:dLbls>
+            <c:numFmt formatCode="#,##0" sourceLinked="0"/>
+            <c:txPr>
+              <a:bodyPr/>
+              <a:lstStyle/>
+              <a:p>
+                <a:pPr>
+                  <a:defRPr b="0" i="0" strike="noStrike" sz="600" u="none">
+                    <a:solidFill>
+                      <a:srgbClr val="FFFFFF"/>
+                    </a:solidFill>
+                    <a:latin typeface="Arial"/>
+                  </a:defRPr>
+                </a:pPr>
+              </a:p>
+            </c:txPr>
+            <c:dLblPos val="ctr"/>
+            <c:showLegendKey val="0"/>
+            <c:showVal val="1"/>
+            <c:showCatName val="0"/>
+            <c:showSerName val="0"/>
+            <c:showPercent val="0"/>
+            <c:showBubbleSize val="0"/>
+            <c:showLeaderLines val="0"/>
+          </c:dLbls>
+          <c:cat>
+            <c:multiLvlStrRef>
+              <c:f>Sheet1!$A$2:$A$9</c:f>
+              <c:multiLvlStrCache>
+                <c:ptCount val="8"/>
+                <c:lvl>
+                  <c:pt idx="0">
+                    <c:v>Increase info sharing &amp; intelligence — Banking (33%)</c:v>
+                  </c:pt>
+                  <c:pt idx="1">
+                    <c:v>Increase info sharing &amp; intelligence — Insurance (US &amp; Canada only, 20%)</c:v>
+                  </c:pt>
+                  <c:pt idx="2">
+                    <c:v>Enhance ongoing monitoring &amp; detection — Banking (25%)</c:v>
+                  </c:pt>
+                  <c:pt idx="3">
+                    <c:v>Enhance ongoing monitoring &amp; detection — Insurance (US &amp; Canada only, 28%)</c:v>
+                  </c:pt>
+                  <c:pt idx="4">
+                    <c:v>Strengthen onboarding verification — Banking (23%)</c:v>
+                  </c:pt>
+                  <c:pt idx="5">
+                    <c:v>Strengthen onboarding verification — Insurance (US &amp; Canada only, 20%)</c:v>
+                  </c:pt>
+                  <c:pt idx="6">
+                    <c:v>Strengthen 3rd-party oversight — Banking (17%)</c:v>
+                  </c:pt>
+                  <c:pt idx="7">
+                    <c:v>Strengthen 3rd-party oversight — Insurance (US &amp; Canada only, 20%)</c:v>
+                  </c:pt>
+                </c:lvl>
+              </c:multiLvlStrCache>
+            </c:multiLvlStrRef>
+          </c:cat>
+          <c:val>
+            <c:numRef>
+              <c:f>Sheet1!$B$2:$B$9</c:f>
+              <c:numCache>
+                <c:formatCode>General</c:formatCode>
+                <c:ptCount val="8"/>
+                <c:pt idx="0">
+                  <c:v>13</c:v>
+                </c:pt>
+                <c:pt idx="1">
+                  <c:v>8</c:v>
+                </c:pt>
+                <c:pt idx="2">
+                  <c:v>12</c:v>
+                </c:pt>
+                <c:pt idx="3">
+                  <c:v>16</c:v>
+                </c:pt>
+                <c:pt idx="4">
+                  <c:v>11</c:v>
+                </c:pt>
+                <c:pt idx="5">
+                  <c:v>12</c:v>
+                </c:pt>
+                <c:pt idx="6">
+                  <c:v>8</c:v>
+                </c:pt>
+                <c:pt idx="7">
+                  <c:v>4</c:v>
+                </c:pt>
+              </c:numCache>
+            </c:numRef>
+          </c:val>
+        </c:ser>
+        <c:ser>
+          <c:idx val="1"/>
+          <c:order val="1"/>
+          <c:tx>
+            <c:strRef>
+              <c:f>Sheet1!$C$1</c:f>
+              <c:strCache>
+                <c:ptCount val="1"/>
+                <c:pt idx="0">
+                  <c:v>Canada</c:v>
+                </c:pt>
+              </c:strCache>
+            </c:strRef>
+          </c:tx>
+          <c:spPr>
+            <a:solidFill>
+              <a:srgbClr val="43B02A"/>
+            </a:solidFill>
+            <a:effectLst/>
+          </c:spPr>
+          <c:invertIfNegative val="0"/>
+          <c:dLbls>
+            <c:numFmt formatCode="#,##0" sourceLinked="0"/>
+            <c:txPr>
+              <a:bodyPr/>
+              <a:lstStyle/>
+              <a:p>
+                <a:pPr>
+                  <a:defRPr b="0" i="0" strike="noStrike" sz="600" u="none">
+                    <a:solidFill>
+                      <a:srgbClr val="FFFFFF"/>
+                    </a:solidFill>
+                    <a:latin typeface="Arial"/>
+                  </a:defRPr>
+                </a:pPr>
+              </a:p>
+            </c:txPr>
+            <c:dLblPos val="ctr"/>
+            <c:showLegendKey val="0"/>
+            <c:showVal val="1"/>
+            <c:showCatName val="0"/>
+            <c:showSerName val="0"/>
+            <c:showPercent val="0"/>
+            <c:showBubbleSize val="0"/>
+            <c:showLeaderLines val="0"/>
+          </c:dLbls>
+          <c:cat>
+            <c:multiLvlStrRef>
+              <c:f>Sheet1!$A$2:$A$9</c:f>
+              <c:multiLvlStrCache>
+                <c:ptCount val="8"/>
+                <c:lvl>
+                  <c:pt idx="0">
+                    <c:v>Increase info sharing &amp; intelligence — Banking (33%)</c:v>
+                  </c:pt>
+                  <c:pt idx="1">
+                    <c:v>Increase info sharing &amp; intelligence — Insurance (US &amp; Canada only, 20%)</c:v>
+                  </c:pt>
+                  <c:pt idx="2">
+                    <c:v>Enhance ongoing monitoring &amp; detection — Banking (25%)</c:v>
+                  </c:pt>
+                  <c:pt idx="3">
+                    <c:v>Enhance ongoing monitoring &amp; detection — Insurance (US &amp; Canada only, 28%)</c:v>
+                  </c:pt>
+                  <c:pt idx="4">
+                    <c:v>Strengthen onboarding verification — Banking (23%)</c:v>
+                  </c:pt>
+                  <c:pt idx="5">
+                    <c:v>Strengthen onboarding verification — Insurance (US &amp; Canada only, 20%)</c:v>
+                  </c:pt>
+                  <c:pt idx="6">
+                    <c:v>Strengthen 3rd-party oversight — Banking (17%)</c:v>
+                  </c:pt>
+                  <c:pt idx="7">
+                    <c:v>Strengthen 3rd-party oversight — Insurance (US &amp; Canada only, 20%)</c:v>
+                  </c:pt>
+                </c:lvl>
+              </c:multiLvlStrCache>
+            </c:multiLvlStrRef>
+          </c:cat>
+          <c:val>
+            <c:numRef>
+              <c:f>Sheet1!$C$2:$C$9</c:f>
+              <c:numCache>
+                <c:formatCode>General</c:formatCode>
+                <c:ptCount val="8"/>
+                <c:pt idx="0">
+                  <c:v>9</c:v>
+                </c:pt>
+                <c:pt idx="1">
+                  <c:v>12</c:v>
+                </c:pt>
+                <c:pt idx="2">
+                  <c:v>7</c:v>
+                </c:pt>
+                <c:pt idx="3">
+                  <c:v>12</c:v>
+                </c:pt>
+                <c:pt idx="4">
+                  <c:v>4</c:v>
+                </c:pt>
+                <c:pt idx="5">
+                  <c:v>8</c:v>
+                </c:pt>
+                <c:pt idx="6">
+                  <c:v>4</c:v>
+                </c:pt>
+                <c:pt idx="7">
+                  <c:v>16</c:v>
+                </c:pt>
+              </c:numCache>
+            </c:numRef>
+          </c:val>
+        </c:ser>
+        <c:ser>
+          <c:idx val="2"/>
+          <c:order val="2"/>
+          <c:tx>
+            <c:strRef>
+              <c:f>Sheet1!$D$1</c:f>
+              <c:strCache>
+                <c:ptCount val="1"/>
+                <c:pt idx="0">
+                  <c:v>Europe (EU + UK)</c:v>
+                </c:pt>
+              </c:strCache>
+            </c:strRef>
+          </c:tx>
+          <c:spPr>
+            <a:solidFill>
+              <a:srgbClr val="046A38"/>
+            </a:solidFill>
+            <a:effectLst/>
+          </c:spPr>
+          <c:invertIfNegative val="0"/>
+          <c:dLbls>
+            <c:numFmt formatCode="#,##0" sourceLinked="0"/>
+            <c:txPr>
+              <a:bodyPr/>
+              <a:lstStyle/>
+              <a:p>
+                <a:pPr>
+                  <a:defRPr b="0" i="0" strike="noStrike" sz="600" u="none">
+                    <a:solidFill>
+                      <a:srgbClr val="FFFFFF"/>
+                    </a:solidFill>
+                    <a:latin typeface="Arial"/>
+                  </a:defRPr>
+                </a:pPr>
+              </a:p>
+            </c:txPr>
+            <c:dLblPos val="ctr"/>
+            <c:showLegendKey val="0"/>
+            <c:showVal val="1"/>
+            <c:showCatName val="0"/>
+            <c:showSerName val="0"/>
+            <c:showPercent val="0"/>
+            <c:showBubbleSize val="0"/>
+            <c:showLeaderLines val="0"/>
+          </c:dLbls>
+          <c:cat>
+            <c:multiLvlStrRef>
+              <c:f>Sheet1!$A$2:$A$9</c:f>
+              <c:multiLvlStrCache>
+                <c:ptCount val="8"/>
+                <c:lvl>
+                  <c:pt idx="0">
+                    <c:v>Increase info sharing &amp; intelligence — Banking (33%)</c:v>
+                  </c:pt>
+                  <c:pt idx="1">
+                    <c:v>Increase info sharing &amp; intelligence — Insurance (US &amp; Canada only, 20%)</c:v>
+                  </c:pt>
+                  <c:pt idx="2">
+                    <c:v>Enhance ongoing monitoring &amp; detection — Banking (25%)</c:v>
+                  </c:pt>
+                  <c:pt idx="3">
+                    <c:v>Enhance ongoing monitoring &amp; detection — Insurance (US &amp; Canada only, 28%)</c:v>
+                  </c:pt>
+                  <c:pt idx="4">
+                    <c:v>Strengthen onboarding verification — Banking (23%)</c:v>
+                  </c:pt>
+                  <c:pt idx="5">
+                    <c:v>Strengthen onboarding verification — Insurance (US &amp; Canada only, 20%)</c:v>
+                  </c:pt>
+                  <c:pt idx="6">
+                    <c:v>Strengthen 3rd-party oversight — Banking (17%)</c:v>
+                  </c:pt>
+                  <c:pt idx="7">
+                    <c:v>Strengthen 3rd-party oversight — Insurance (US &amp; Canada only, 20%)</c:v>
+                  </c:pt>
+                </c:lvl>
+              </c:multiLvlStrCache>
+            </c:multiLvlStrRef>
+          </c:cat>
+          <c:val>
+            <c:numRef>
+              <c:f>Sheet1!$D$2:$D$9</c:f>
+              <c:numCache>
+                <c:formatCode>General</c:formatCode>
+                <c:ptCount val="8"/>
+                <c:pt idx="0">
+                  <c:v>7</c:v>
+                </c:pt>
+                <c:pt idx="1">
+                  <c:v>0</c:v>
+                </c:pt>
+                <c:pt idx="2">
+                  <c:v>3</c:v>
+                </c:pt>
+                <c:pt idx="3">
+                  <c:v>0</c:v>
+                </c:pt>
+                <c:pt idx="4">
+                  <c:v>5</c:v>
+                </c:pt>
+                <c:pt idx="5">
+                  <c:v>0</c:v>
+                </c:pt>
+                <c:pt idx="6">
+                  <c:v>1</c:v>
+                </c:pt>
+                <c:pt idx="7">
+                  <c:v>0</c:v>
+                </c:pt>
+              </c:numCache>
+            </c:numRef>
+          </c:val>
+        </c:ser>
+        <c:ser>
+          <c:idx val="3"/>
+          <c:order val="3"/>
+          <c:tx>
+            <c:strRef>
+              <c:f>Sheet1!$E$1</c:f>
+              <c:strCache>
+                <c:ptCount val="1"/>
+                <c:pt idx="0">
+                  <c:v>Australia</c:v>
+                </c:pt>
+              </c:strCache>
+            </c:strRef>
+          </c:tx>
+          <c:spPr>
+            <a:solidFill>
+              <a:srgbClr val="0D8390"/>
+            </a:solidFill>
+            <a:effectLst/>
+          </c:spPr>
+          <c:invertIfNegative val="0"/>
+          <c:dLbls>
+            <c:numFmt formatCode="#,##0" sourceLinked="0"/>
+            <c:txPr>
+              <a:bodyPr/>
+              <a:lstStyle/>
+              <a:p>
+                <a:pPr>
+                  <a:defRPr b="0" i="0" strike="noStrike" sz="600" u="none">
+                    <a:solidFill>
+                      <a:srgbClr val="FFFFFF"/>
+                    </a:solidFill>
+                    <a:latin typeface="Arial"/>
+                  </a:defRPr>
+                </a:pPr>
+              </a:p>
+            </c:txPr>
+            <c:dLblPos val="ctr"/>
+            <c:showLegendKey val="0"/>
+            <c:showVal val="1"/>
+            <c:showCatName val="0"/>
+            <c:showSerName val="0"/>
+            <c:showPercent val="0"/>
+            <c:showBubbleSize val="0"/>
+            <c:showLeaderLines val="0"/>
+          </c:dLbls>
+          <c:cat>
+            <c:multiLvlStrRef>
+              <c:f>Sheet1!$A$2:$A$9</c:f>
+              <c:multiLvlStrCache>
+                <c:ptCount val="8"/>
+                <c:lvl>
+                  <c:pt idx="0">
+                    <c:v>Increase info sharing &amp; intelligence — Banking (33%)</c:v>
+                  </c:pt>
+                  <c:pt idx="1">
+                    <c:v>Increase info sharing &amp; intelligence — Insurance (US &amp; Canada only, 20%)</c:v>
+                  </c:pt>
+                  <c:pt idx="2">
+                    <c:v>Enhance ongoing monitoring &amp; detection — Banking (25%)</c:v>
+                  </c:pt>
+                  <c:pt idx="3">
+                    <c:v>Enhance ongoing monitoring &amp; detection — Insurance (US &amp; Canada only, 28%)</c:v>
+                  </c:pt>
+                  <c:pt idx="4">
+                    <c:v>Strengthen onboarding verification — Banking (23%)</c:v>
+                  </c:pt>
+                  <c:pt idx="5">
+                    <c:v>Strengthen onboarding verification — Insurance (US &amp; Canada only, 20%)</c:v>
+                  </c:pt>
+                  <c:pt idx="6">
+                    <c:v>Strengthen 3rd-party oversight — Banking (17%)</c:v>
+                  </c:pt>
+                  <c:pt idx="7">
+                    <c:v>Strengthen 3rd-party oversight — Insurance (US &amp; Canada only, 20%)</c:v>
+                  </c:pt>
+                </c:lvl>
+              </c:multiLvlStrCache>
+            </c:multiLvlStrRef>
+          </c:cat>
+          <c:val>
+            <c:numRef>
+              <c:f>Sheet1!$E$2:$E$9</c:f>
+              <c:numCache>
+                <c:formatCode>General</c:formatCode>
+                <c:ptCount val="8"/>
+                <c:pt idx="0">
+                  <c:v>3</c:v>
+                </c:pt>
+                <c:pt idx="1">
+                  <c:v>0</c:v>
+                </c:pt>
+                <c:pt idx="2">
+                  <c:v>3</c:v>
+                </c:pt>
+                <c:pt idx="3">
+                  <c:v>0</c:v>
+                </c:pt>
+                <c:pt idx="4">
+                  <c:v>3</c:v>
+                </c:pt>
+                <c:pt idx="5">
+                  <c:v>0</c:v>
+                </c:pt>
+                <c:pt idx="6">
+                  <c:v>1</c:v>
+                </c:pt>
+                <c:pt idx="7">
+                  <c:v>0</c:v>
+                </c:pt>
+              </c:numCache>
+            </c:numRef>
+          </c:val>
+        </c:ser>
+        <c:ser>
+          <c:idx val="4"/>
+          <c:order val="4"/>
+          <c:tx>
+            <c:strRef>
+              <c:f>Sheet1!$F$1</c:f>
+              <c:strCache>
+                <c:ptCount val="1"/>
+                <c:pt idx="0">
+                  <c:v>Singapore</c:v>
+                </c:pt>
+              </c:strCache>
+            </c:strRef>
+          </c:tx>
+          <c:spPr>
+            <a:solidFill>
+              <a:srgbClr val="53565A"/>
+            </a:solidFill>
+            <a:effectLst/>
+          </c:spPr>
+          <c:invertIfNegative val="0"/>
+          <c:dLbls>
+            <c:numFmt formatCode="#,##0" sourceLinked="0"/>
+            <c:txPr>
+              <a:bodyPr/>
+              <a:lstStyle/>
+              <a:p>
+                <a:pPr>
+                  <a:defRPr b="0" i="0" strike="noStrike" sz="600" u="none">
+                    <a:solidFill>
+                      <a:srgbClr val="FFFFFF"/>
+                    </a:solidFill>
+                    <a:latin typeface="Arial"/>
+                  </a:defRPr>
+                </a:pPr>
+              </a:p>
+            </c:txPr>
+            <c:dLblPos val="ctr"/>
+            <c:showLegendKey val="0"/>
+            <c:showVal val="1"/>
+            <c:showCatName val="0"/>
+            <c:showSerName val="0"/>
+            <c:showPercent val="0"/>
+            <c:showBubbleSize val="0"/>
+            <c:showLeaderLines val="0"/>
+          </c:dLbls>
+          <c:cat>
+            <c:multiLvlStrRef>
+              <c:f>Sheet1!$A$2:$A$9</c:f>
+              <c:multiLvlStrCache>
+                <c:ptCount val="8"/>
+                <c:lvl>
+                  <c:pt idx="0">
+                    <c:v>Increase info sharing &amp; intelligence — Banking (33%)</c:v>
+                  </c:pt>
+                  <c:pt idx="1">
+                    <c:v>Increase info sharing &amp; intelligence — Insurance (US &amp; Canada only, 20%)</c:v>
+                  </c:pt>
+                  <c:pt idx="2">
+                    <c:v>Enhance ongoing monitoring &amp; detection — Banking (25%)</c:v>
+                  </c:pt>
+                  <c:pt idx="3">
+                    <c:v>Enhance ongoing monitoring &amp; detection — Insurance (US &amp; Canada only, 28%)</c:v>
+                  </c:pt>
+                  <c:pt idx="4">
+                    <c:v>Strengthen onboarding verification — Banking (23%)</c:v>
+                  </c:pt>
+                  <c:pt idx="5">
+                    <c:v>Strengthen onboarding verification — Insurance (US &amp; Canada only, 20%)</c:v>
+                  </c:pt>
+                  <c:pt idx="6">
+                    <c:v>Strengthen 3rd-party oversight — Banking (17%)</c:v>
+                  </c:pt>
+                  <c:pt idx="7">
+                    <c:v>Strengthen 3rd-party oversight — Insurance (US &amp; Canada only, 20%)</c:v>
+                  </c:pt>
+                </c:lvl>
+              </c:multiLvlStrCache>
+            </c:multiLvlStrRef>
+          </c:cat>
+          <c:val>
+            <c:numRef>
+              <c:f>Sheet1!$F$2:$F$9</c:f>
+              <c:numCache>
+                <c:formatCode>General</c:formatCode>
+                <c:ptCount val="8"/>
+                <c:pt idx="0">
+                  <c:v>1</c:v>
+                </c:pt>
+                <c:pt idx="1">
+                  <c:v>0</c:v>
+                </c:pt>
+                <c:pt idx="2">
+                  <c:v>1</c:v>
+                </c:pt>
+                <c:pt idx="3">
+                  <c:v>0</c:v>
+                </c:pt>
+                <c:pt idx="4">
+                  <c:v>0</c:v>
+                </c:pt>
+                <c:pt idx="5">
+                  <c:v>0</c:v>
+                </c:pt>
+                <c:pt idx="6">
+                  <c:v>3</c:v>
+                </c:pt>
+                <c:pt idx="7">
+                  <c:v>0</c:v>
+                </c:pt>
+              </c:numCache>
+            </c:numRef>
+          </c:val>
+        </c:ser>
+        <c:dLbls>
+          <c:numFmt formatCode="#,##0" sourceLinked="0"/>
+          <c:txPr>
+            <a:bodyPr/>
+            <a:lstStyle/>
+            <a:p>
+              <a:pPr>
+                <a:defRPr b="0" i="0" strike="noStrike" sz="600" u="none">
+                  <a:solidFill>
+                    <a:srgbClr val="FFFFFF"/>
+                  </a:solidFill>
+                  <a:latin typeface="Arial"/>
+                </a:defRPr>
+              </a:pPr>
+            </a:p>
+          </c:txPr>
+          <c:dLblPos val="ctr"/>
+          <c:showLegendKey val="0"/>
+          <c:showVal val="1"/>
+          <c:showCatName val="0"/>
+          <c:showSerName val="0"/>
+          <c:showPercent val="0"/>
+          <c:showBubbleSize val="0"/>
+          <c:showLeaderLines val="0"/>
+        </c:dLbls>
+        <c:gapWidth val="40"/>
+        <c:overlap val="100"/>
+        <c:axId val="2094734554"/>
+        <c:axId val="2094734552"/>
+        <c:axId val="2094734556"/>
+      </c:barChart>
+      <c:catAx>
+        <c:axId val="2094734554"/>
+        <c:scaling>
+          <c:orientation val="minMax"/>
+        </c:scaling>
+        <c:delete val="0"/>
+        <c:axPos val="l"/>
+        <c:numFmt formatCode="General" sourceLinked="1"/>
+        <c:majorTickMark val="out"/>
+        <c:minorTickMark val="none"/>
+        <c:tickLblPos val="nextTo"/>
+        <c:spPr>
+          <a:ln w="12700" cap="flat">
+            <a:noFill/>
+            <a:prstDash val="solid"/>
+            <a:round/>
+          </a:ln>
+        </c:spPr>
+        <c:txPr>
+          <a:bodyPr/>
+          <a:lstStyle/>
+          <a:p>
+            <a:pPr>
+              <a:defRPr sz="800" b="0" i="0" u="none" strike="noStrike">
+                <a:solidFill>
+                  <a:srgbClr val="53565A"/>
+                </a:solidFill>
+                <a:latin typeface="Arial"/>
+              </a:defRPr>
+            </a:pPr>
+            <a:endParaRPr lang="en-US"/>
+          </a:p>
+        </c:txPr>
+        <c:crossAx val="2094734552"/>
+        <c:crosses val="autoZero"/>
+        <c:auto val="1"/>
+        <c:lblAlgn val="ctr"/>
+        <c:noMultiLvlLbl val="1"/>
+      </c:catAx>
+      <c:valAx>
+        <c:axId val="2094734552"/>
+        <c:scaling>
+          <c:orientation val="minMax"/>
+        </c:scaling>
+        <c:delete val="1"/>
+        <c:axPos val="b"/>
+        <c:numFmt formatCode="General" sourceLinked="0"/>
+        <c:majorTickMark val="out"/>
+        <c:minorTickMark val="none"/>
+        <c:tickLblPos val="low"/>
+        <c:spPr>
+          <a:ln w="12700" cap="flat">
+            <a:noFill/>
+            <a:prstDash val="solid"/>
+            <a:round/>
+          </a:ln>
+        </c:spPr>
+        <c:txPr>
+          <a:bodyPr/>
+          <a:lstStyle/>
+          <a:p>
+            <a:pPr>
+              <a:defRPr sz="1200" b="0" i="0" u="none" strike="noStrike">
+                <a:solidFill>
+                  <a:srgbClr val="000000"/>
+                </a:solidFill>
+                <a:latin typeface="Arial"/>
+              </a:defRPr>
+            </a:pPr>
+            <a:endParaRPr lang="en-US"/>
+          </a:p>
+        </c:txPr>
+        <c:crossAx val="2094734554"/>
+        <c:crosses val="autoZero"/>
+        <c:crossBetween val="between"/>
+      </c:valAx>
+      <c:spPr>
+        <a:solidFill>
+          <a:srgbClr val="FFFFFF"/>
+        </a:solidFill>
+        <a:ln>
+          <a:noFill/>
+        </a:ln>
+        <a:effectLst/>
+      </c:spPr>
+    </c:plotArea>
+    <c:legend>
+      <c:legendPos val="b"/>
+      <c:overlay val="0"/>
+      <c:txPr>
+        <a:bodyPr/>
+        <a:lstStyle/>
+        <a:p>
+          <a:pPr>
+            <a:defRPr sz="750">      </a:defRPr>
+          </a:pPr>
+          <a:endParaRPr lang="en-US"/>
+        </a:p>
+      </c:txPr>
+    </c:legend>
+    <c:plotVisOnly val="1"/>
+    <c:dispBlanksAs val="span"/>
+  </c:chart>
+  <c:spPr>
+    <a:noFill/>
+    <a:ln>
+      <a:noFill/>
+    </a:ln>
+    <a:effectLst/>
+  </c:spPr>
+  <c:externalData r:id="rId1">
+    <c:autoUpdate val="0"/>
+  </c:externalData>
+</c:chartSpace>
+</file>
+
+<file path=ppt/charts/chart18.xml><?xml version="1.0" encoding="utf-8"?>
 <c:chartSpace xmlns:c="http://schemas.openxmlformats.org/drawingml/2006/chart" xmlns:a="http://schemas.openxmlformats.org/drawingml/2006/main" xmlns:r="http://schemas.openxmlformats.org/officeDocument/2006/relationships">
   <c:date1904 val="0"/>
   <c:roundedCorners val="1"/>
@@ -2143,7 +4387,7 @@
 </c:chartSpace>
 </file>
 
-<file path=ppt/charts/chart16.xml><?xml version="1.0" encoding="utf-8"?>
+<file path=ppt/charts/chart19.xml><?xml version="1.0" encoding="utf-8"?>
 <c:chartSpace xmlns:c="http://schemas.openxmlformats.org/drawingml/2006/chart" xmlns:a="http://schemas.openxmlformats.org/drawingml/2006/main" xmlns:r="http://schemas.openxmlformats.org/officeDocument/2006/relationships">
   <c:date1904 val="0"/>
   <c:roundedCorners val="1"/>
@@ -2503,7 +4747,367 @@
 </c:chartSpace>
 </file>
 
-<file path=ppt/charts/chart17.xml><?xml version="1.0" encoding="utf-8"?>
+<file path=ppt/charts/chart2.xml><?xml version="1.0" encoding="utf-8"?>
+<c:chartSpace xmlns:c="http://schemas.openxmlformats.org/drawingml/2006/chart" xmlns:a="http://schemas.openxmlformats.org/drawingml/2006/main" xmlns:r="http://schemas.openxmlformats.org/officeDocument/2006/relationships">
+  <c:date1904 val="0"/>
+  <c:roundedCorners val="1"/>
+  <c:chart>
+    <c:autoTitleDeleted val="1"/>
+    <c:plotArea>
+      <c:layout/>
+      <c:barChart>
+        <c:barDir val="bar"/>
+        <c:grouping val="clustered"/>
+        <c:varyColors val="0"/>
+        <c:ser>
+          <c:idx val="0"/>
+          <c:order val="0"/>
+          <c:tx>
+            <c:strRef>
+              <c:f>Sheet1!$B$1</c:f>
+              <c:strCache>
+                <c:ptCount val="1"/>
+                <c:pt idx="0">
+                  <c:v>Banking (n=75)</c:v>
+                </c:pt>
+              </c:strCache>
+            </c:strRef>
+          </c:tx>
+          <c:spPr>
+            <a:solidFill>
+              <a:srgbClr val="86BC25"/>
+            </a:solidFill>
+            <a:effectLst/>
+          </c:spPr>
+          <c:invertIfNegative val="0"/>
+          <c:dLbls>
+            <c:numFmt formatCode="0&quot;%&quot;" sourceLinked="0"/>
+            <c:txPr>
+              <a:bodyPr/>
+              <a:lstStyle/>
+              <a:p>
+                <a:pPr>
+                  <a:defRPr b="0" i="0" strike="noStrike" sz="850" u="none">
+                    <a:solidFill>
+                      <a:srgbClr val="000000"/>
+                    </a:solidFill>
+                    <a:latin typeface="Arial"/>
+                  </a:defRPr>
+                </a:pPr>
+              </a:p>
+            </c:txPr>
+            <c:showLegendKey val="0"/>
+            <c:showVal val="1"/>
+            <c:showCatName val="0"/>
+            <c:showSerName val="0"/>
+            <c:showPercent val="0"/>
+            <c:showBubbleSize val="0"/>
+            <c:showLeaderLines val="0"/>
+          </c:dLbls>
+          <c:cat>
+            <c:multiLvlStrRef>
+              <c:f>Sheet1!$A$2:$A$7</c:f>
+              <c:multiLvlStrCache>
+                <c:ptCount val="6"/>
+                <c:lvl>
+                  <c:pt idx="0">
+                    <c:v>Fraud Operations</c:v>
+                  </c:pt>
+                  <c:pt idx="1">
+                    <c:v>Fraud Analytics/Intelligence</c:v>
+                  </c:pt>
+                  <c:pt idx="2">
+                    <c:v>Fraud Strategy &amp; Transformation</c:v>
+                  </c:pt>
+                  <c:pt idx="3">
+                    <c:v>Fraud Risk &amp; Governance</c:v>
+                  </c:pt>
+                  <c:pt idx="4">
+                    <c:v>Fraud Investigations Unit</c:v>
+                  </c:pt>
+                  <c:pt idx="5">
+                    <c:v>Special Investigations Unit</c:v>
+                  </c:pt>
+                </c:lvl>
+              </c:multiLvlStrCache>
+            </c:multiLvlStrRef>
+          </c:cat>
+          <c:val>
+            <c:numRef>
+              <c:f>Sheet1!$B$2:$B$7</c:f>
+              <c:numCache>
+                <c:formatCode>General</c:formatCode>
+                <c:ptCount val="6"/>
+                <c:pt idx="0">
+                  <c:v>27</c:v>
+                </c:pt>
+                <c:pt idx="1">
+                  <c:v>20</c:v>
+                </c:pt>
+                <c:pt idx="2">
+                  <c:v>20</c:v>
+                </c:pt>
+                <c:pt idx="3">
+                  <c:v>19</c:v>
+                </c:pt>
+                <c:pt idx="4">
+                  <c:v>8</c:v>
+                </c:pt>
+                <c:pt idx="5">
+                  <c:v>7</c:v>
+                </c:pt>
+              </c:numCache>
+            </c:numRef>
+          </c:val>
+        </c:ser>
+        <c:ser>
+          <c:idx val="1"/>
+          <c:order val="1"/>
+          <c:tx>
+            <c:strRef>
+              <c:f>Sheet1!$C$1</c:f>
+              <c:strCache>
+                <c:ptCount val="1"/>
+                <c:pt idx="0">
+                  <c:v>Insurance (n=25)</c:v>
+                </c:pt>
+              </c:strCache>
+            </c:strRef>
+          </c:tx>
+          <c:spPr>
+            <a:solidFill>
+              <a:srgbClr val="046A38"/>
+            </a:solidFill>
+            <a:effectLst/>
+          </c:spPr>
+          <c:invertIfNegative val="0"/>
+          <c:dLbls>
+            <c:numFmt formatCode="0&quot;%&quot;" sourceLinked="0"/>
+            <c:txPr>
+              <a:bodyPr/>
+              <a:lstStyle/>
+              <a:p>
+                <a:pPr>
+                  <a:defRPr b="0" i="0" strike="noStrike" sz="850" u="none">
+                    <a:solidFill>
+                      <a:srgbClr val="000000"/>
+                    </a:solidFill>
+                    <a:latin typeface="Arial"/>
+                  </a:defRPr>
+                </a:pPr>
+              </a:p>
+            </c:txPr>
+            <c:showLegendKey val="0"/>
+            <c:showVal val="1"/>
+            <c:showCatName val="0"/>
+            <c:showSerName val="0"/>
+            <c:showPercent val="0"/>
+            <c:showBubbleSize val="0"/>
+            <c:showLeaderLines val="0"/>
+          </c:dLbls>
+          <c:cat>
+            <c:multiLvlStrRef>
+              <c:f>Sheet1!$A$2:$A$7</c:f>
+              <c:multiLvlStrCache>
+                <c:ptCount val="6"/>
+                <c:lvl>
+                  <c:pt idx="0">
+                    <c:v>Fraud Operations</c:v>
+                  </c:pt>
+                  <c:pt idx="1">
+                    <c:v>Fraud Analytics/Intelligence</c:v>
+                  </c:pt>
+                  <c:pt idx="2">
+                    <c:v>Fraud Strategy &amp; Transformation</c:v>
+                  </c:pt>
+                  <c:pt idx="3">
+                    <c:v>Fraud Risk &amp; Governance</c:v>
+                  </c:pt>
+                  <c:pt idx="4">
+                    <c:v>Fraud Investigations Unit</c:v>
+                  </c:pt>
+                  <c:pt idx="5">
+                    <c:v>Special Investigations Unit</c:v>
+                  </c:pt>
+                </c:lvl>
+              </c:multiLvlStrCache>
+            </c:multiLvlStrRef>
+          </c:cat>
+          <c:val>
+            <c:numRef>
+              <c:f>Sheet1!$C$2:$C$7</c:f>
+              <c:numCache>
+                <c:formatCode>General</c:formatCode>
+                <c:ptCount val="6"/>
+                <c:pt idx="0">
+                  <c:v>20</c:v>
+                </c:pt>
+                <c:pt idx="1">
+                  <c:v>8</c:v>
+                </c:pt>
+                <c:pt idx="2">
+                  <c:v>12</c:v>
+                </c:pt>
+                <c:pt idx="3">
+                  <c:v>32</c:v>
+                </c:pt>
+                <c:pt idx="4">
+                  <c:v>12</c:v>
+                </c:pt>
+                <c:pt idx="5">
+                  <c:v>16</c:v>
+                </c:pt>
+              </c:numCache>
+            </c:numRef>
+          </c:val>
+        </c:ser>
+        <c:dLbls>
+          <c:numFmt formatCode="0&quot;%&quot;" sourceLinked="0"/>
+          <c:txPr>
+            <a:bodyPr/>
+            <a:lstStyle/>
+            <a:p>
+              <a:pPr>
+                <a:defRPr b="0" i="0" strike="noStrike" sz="850" u="none">
+                  <a:solidFill>
+                    <a:srgbClr val="000000"/>
+                  </a:solidFill>
+                  <a:latin typeface="Arial"/>
+                </a:defRPr>
+              </a:pPr>
+            </a:p>
+          </c:txPr>
+          <c:showLegendKey val="0"/>
+          <c:showVal val="1"/>
+          <c:showCatName val="0"/>
+          <c:showSerName val="0"/>
+          <c:showPercent val="0"/>
+          <c:showBubbleSize val="0"/>
+          <c:showLeaderLines val="0"/>
+        </c:dLbls>
+        <c:gapWidth val="40"/>
+        <c:overlap val="0"/>
+        <c:axId val="2094734554"/>
+        <c:axId val="2094734552"/>
+        <c:axId val="2094734556"/>
+      </c:barChart>
+      <c:catAx>
+        <c:axId val="2094734554"/>
+        <c:scaling>
+          <c:orientation val="minMax"/>
+        </c:scaling>
+        <c:delete val="0"/>
+        <c:axPos val="l"/>
+        <c:numFmt formatCode="General" sourceLinked="1"/>
+        <c:majorTickMark val="out"/>
+        <c:minorTickMark val="none"/>
+        <c:tickLblPos val="nextTo"/>
+        <c:spPr>
+          <a:ln w="12700" cap="flat">
+            <a:noFill/>
+            <a:prstDash val="solid"/>
+            <a:round/>
+          </a:ln>
+        </c:spPr>
+        <c:txPr>
+          <a:bodyPr/>
+          <a:lstStyle/>
+          <a:p>
+            <a:pPr>
+              <a:defRPr sz="1000" b="0" i="0" u="none" strike="noStrike">
+                <a:solidFill>
+                  <a:srgbClr val="53565A"/>
+                </a:solidFill>
+                <a:latin typeface="Arial"/>
+              </a:defRPr>
+            </a:pPr>
+            <a:endParaRPr lang="en-US"/>
+          </a:p>
+        </c:txPr>
+        <c:crossAx val="2094734552"/>
+        <c:crosses val="autoZero"/>
+        <c:auto val="1"/>
+        <c:lblAlgn val="ctr"/>
+        <c:noMultiLvlLbl val="1"/>
+      </c:catAx>
+      <c:valAx>
+        <c:axId val="2094734552"/>
+        <c:scaling>
+          <c:orientation val="minMax"/>
+        </c:scaling>
+        <c:delete val="1"/>
+        <c:axPos val="b"/>
+        <c:numFmt formatCode="General" sourceLinked="0"/>
+        <c:majorTickMark val="out"/>
+        <c:minorTickMark val="none"/>
+        <c:tickLblPos val="low"/>
+        <c:spPr>
+          <a:ln w="12700" cap="flat">
+            <a:noFill/>
+            <a:prstDash val="solid"/>
+            <a:round/>
+          </a:ln>
+        </c:spPr>
+        <c:txPr>
+          <a:bodyPr/>
+          <a:lstStyle/>
+          <a:p>
+            <a:pPr>
+              <a:defRPr sz="1200" b="0" i="0" u="none" strike="noStrike">
+                <a:solidFill>
+                  <a:srgbClr val="000000"/>
+                </a:solidFill>
+                <a:latin typeface="Arial"/>
+              </a:defRPr>
+            </a:pPr>
+            <a:endParaRPr lang="en-US"/>
+          </a:p>
+        </c:txPr>
+        <c:crossAx val="2094734554"/>
+        <c:crosses val="autoZero"/>
+        <c:crossBetween val="between"/>
+      </c:valAx>
+      <c:spPr>
+        <a:solidFill>
+          <a:srgbClr val="FFFFFF"/>
+        </a:solidFill>
+        <a:ln>
+          <a:noFill/>
+        </a:ln>
+        <a:effectLst/>
+      </c:spPr>
+    </c:plotArea>
+    <c:legend>
+      <c:legendPos val="b"/>
+      <c:overlay val="0"/>
+      <c:txPr>
+        <a:bodyPr/>
+        <a:lstStyle/>
+        <a:p>
+          <a:pPr>
+            <a:defRPr sz="900">      </a:defRPr>
+          </a:pPr>
+          <a:endParaRPr lang="en-US"/>
+        </a:p>
+      </c:txPr>
+    </c:legend>
+    <c:plotVisOnly val="1"/>
+    <c:dispBlanksAs val="span"/>
+  </c:chart>
+  <c:spPr>
+    <a:noFill/>
+    <a:ln>
+      <a:noFill/>
+    </a:ln>
+    <a:effectLst/>
+  </c:spPr>
+  <c:externalData r:id="rId1">
+    <c:autoUpdate val="0"/>
+  </c:externalData>
+</c:chartSpace>
+</file>
+
+<file path=ppt/charts/chart20.xml><?xml version="1.0" encoding="utf-8"?>
 <c:chartSpace xmlns:c="http://schemas.openxmlformats.org/drawingml/2006/chart" xmlns:a="http://schemas.openxmlformats.org/drawingml/2006/main" xmlns:r="http://schemas.openxmlformats.org/officeDocument/2006/relationships">
   <c:date1904 val="0"/>
   <c:roundedCorners val="1"/>
@@ -2730,7 +5334,7 @@
 </c:chartSpace>
 </file>
 
-<file path=ppt/charts/chart18.xml><?xml version="1.0" encoding="utf-8"?>
+<file path=ppt/charts/chart21.xml><?xml version="1.0" encoding="utf-8"?>
 <c:chartSpace xmlns:c="http://schemas.openxmlformats.org/drawingml/2006/chart" xmlns:a="http://schemas.openxmlformats.org/drawingml/2006/main" xmlns:r="http://schemas.openxmlformats.org/officeDocument/2006/relationships">
   <c:date1904 val="0"/>
   <c:roundedCorners val="1"/>
@@ -2959,366 +5563,6 @@
         <a:effectLst/>
       </c:spPr>
     </c:plotArea>
-    <c:plotVisOnly val="1"/>
-    <c:dispBlanksAs val="span"/>
-  </c:chart>
-  <c:spPr>
-    <a:noFill/>
-    <a:ln>
-      <a:noFill/>
-    </a:ln>
-    <a:effectLst/>
-  </c:spPr>
-  <c:externalData r:id="rId1">
-    <c:autoUpdate val="0"/>
-  </c:externalData>
-</c:chartSpace>
-</file>
-
-<file path=ppt/charts/chart2.xml><?xml version="1.0" encoding="utf-8"?>
-<c:chartSpace xmlns:c="http://schemas.openxmlformats.org/drawingml/2006/chart" xmlns:a="http://schemas.openxmlformats.org/drawingml/2006/main" xmlns:r="http://schemas.openxmlformats.org/officeDocument/2006/relationships">
-  <c:date1904 val="0"/>
-  <c:roundedCorners val="1"/>
-  <c:chart>
-    <c:autoTitleDeleted val="1"/>
-    <c:plotArea>
-      <c:layout/>
-      <c:barChart>
-        <c:barDir val="bar"/>
-        <c:grouping val="clustered"/>
-        <c:varyColors val="0"/>
-        <c:ser>
-          <c:idx val="0"/>
-          <c:order val="0"/>
-          <c:tx>
-            <c:strRef>
-              <c:f>Sheet1!$B$1</c:f>
-              <c:strCache>
-                <c:ptCount val="1"/>
-                <c:pt idx="0">
-                  <c:v>Banking (n=75)</c:v>
-                </c:pt>
-              </c:strCache>
-            </c:strRef>
-          </c:tx>
-          <c:spPr>
-            <a:solidFill>
-              <a:srgbClr val="86BC25"/>
-            </a:solidFill>
-            <a:effectLst/>
-          </c:spPr>
-          <c:invertIfNegative val="0"/>
-          <c:dLbls>
-            <c:numFmt formatCode="0&quot;%&quot;" sourceLinked="0"/>
-            <c:txPr>
-              <a:bodyPr/>
-              <a:lstStyle/>
-              <a:p>
-                <a:pPr>
-                  <a:defRPr b="0" i="0" strike="noStrike" sz="850" u="none">
-                    <a:solidFill>
-                      <a:srgbClr val="000000"/>
-                    </a:solidFill>
-                    <a:latin typeface="Arial"/>
-                  </a:defRPr>
-                </a:pPr>
-              </a:p>
-            </c:txPr>
-            <c:showLegendKey val="0"/>
-            <c:showVal val="1"/>
-            <c:showCatName val="0"/>
-            <c:showSerName val="0"/>
-            <c:showPercent val="0"/>
-            <c:showBubbleSize val="0"/>
-            <c:showLeaderLines val="0"/>
-          </c:dLbls>
-          <c:cat>
-            <c:multiLvlStrRef>
-              <c:f>Sheet1!$A$2:$A$7</c:f>
-              <c:multiLvlStrCache>
-                <c:ptCount val="6"/>
-                <c:lvl>
-                  <c:pt idx="0">
-                    <c:v>Fraud Operations</c:v>
-                  </c:pt>
-                  <c:pt idx="1">
-                    <c:v>Fraud Analytics/Intelligence</c:v>
-                  </c:pt>
-                  <c:pt idx="2">
-                    <c:v>Fraud Strategy &amp; Transformation</c:v>
-                  </c:pt>
-                  <c:pt idx="3">
-                    <c:v>Fraud Risk &amp; Governance</c:v>
-                  </c:pt>
-                  <c:pt idx="4">
-                    <c:v>Fraud Investigations Unit</c:v>
-                  </c:pt>
-                  <c:pt idx="5">
-                    <c:v>Special Investigations Unit</c:v>
-                  </c:pt>
-                </c:lvl>
-              </c:multiLvlStrCache>
-            </c:multiLvlStrRef>
-          </c:cat>
-          <c:val>
-            <c:numRef>
-              <c:f>Sheet1!$B$2:$B$7</c:f>
-              <c:numCache>
-                <c:formatCode>General</c:formatCode>
-                <c:ptCount val="6"/>
-                <c:pt idx="0">
-                  <c:v>27</c:v>
-                </c:pt>
-                <c:pt idx="1">
-                  <c:v>20</c:v>
-                </c:pt>
-                <c:pt idx="2">
-                  <c:v>20</c:v>
-                </c:pt>
-                <c:pt idx="3">
-                  <c:v>19</c:v>
-                </c:pt>
-                <c:pt idx="4">
-                  <c:v>8</c:v>
-                </c:pt>
-                <c:pt idx="5">
-                  <c:v>7</c:v>
-                </c:pt>
-              </c:numCache>
-            </c:numRef>
-          </c:val>
-        </c:ser>
-        <c:ser>
-          <c:idx val="1"/>
-          <c:order val="1"/>
-          <c:tx>
-            <c:strRef>
-              <c:f>Sheet1!$C$1</c:f>
-              <c:strCache>
-                <c:ptCount val="1"/>
-                <c:pt idx="0">
-                  <c:v>Insurance (n=25)</c:v>
-                </c:pt>
-              </c:strCache>
-            </c:strRef>
-          </c:tx>
-          <c:spPr>
-            <a:solidFill>
-              <a:srgbClr val="046A38"/>
-            </a:solidFill>
-            <a:effectLst/>
-          </c:spPr>
-          <c:invertIfNegative val="0"/>
-          <c:dLbls>
-            <c:numFmt formatCode="0&quot;%&quot;" sourceLinked="0"/>
-            <c:txPr>
-              <a:bodyPr/>
-              <a:lstStyle/>
-              <a:p>
-                <a:pPr>
-                  <a:defRPr b="0" i="0" strike="noStrike" sz="850" u="none">
-                    <a:solidFill>
-                      <a:srgbClr val="000000"/>
-                    </a:solidFill>
-                    <a:latin typeface="Arial"/>
-                  </a:defRPr>
-                </a:pPr>
-              </a:p>
-            </c:txPr>
-            <c:showLegendKey val="0"/>
-            <c:showVal val="1"/>
-            <c:showCatName val="0"/>
-            <c:showSerName val="0"/>
-            <c:showPercent val="0"/>
-            <c:showBubbleSize val="0"/>
-            <c:showLeaderLines val="0"/>
-          </c:dLbls>
-          <c:cat>
-            <c:multiLvlStrRef>
-              <c:f>Sheet1!$A$2:$A$7</c:f>
-              <c:multiLvlStrCache>
-                <c:ptCount val="6"/>
-                <c:lvl>
-                  <c:pt idx="0">
-                    <c:v>Fraud Operations</c:v>
-                  </c:pt>
-                  <c:pt idx="1">
-                    <c:v>Fraud Analytics/Intelligence</c:v>
-                  </c:pt>
-                  <c:pt idx="2">
-                    <c:v>Fraud Strategy &amp; Transformation</c:v>
-                  </c:pt>
-                  <c:pt idx="3">
-                    <c:v>Fraud Risk &amp; Governance</c:v>
-                  </c:pt>
-                  <c:pt idx="4">
-                    <c:v>Fraud Investigations Unit</c:v>
-                  </c:pt>
-                  <c:pt idx="5">
-                    <c:v>Special Investigations Unit</c:v>
-                  </c:pt>
-                </c:lvl>
-              </c:multiLvlStrCache>
-            </c:multiLvlStrRef>
-          </c:cat>
-          <c:val>
-            <c:numRef>
-              <c:f>Sheet1!$C$2:$C$7</c:f>
-              <c:numCache>
-                <c:formatCode>General</c:formatCode>
-                <c:ptCount val="6"/>
-                <c:pt idx="0">
-                  <c:v>20</c:v>
-                </c:pt>
-                <c:pt idx="1">
-                  <c:v>8</c:v>
-                </c:pt>
-                <c:pt idx="2">
-                  <c:v>12</c:v>
-                </c:pt>
-                <c:pt idx="3">
-                  <c:v>32</c:v>
-                </c:pt>
-                <c:pt idx="4">
-                  <c:v>12</c:v>
-                </c:pt>
-                <c:pt idx="5">
-                  <c:v>16</c:v>
-                </c:pt>
-              </c:numCache>
-            </c:numRef>
-          </c:val>
-        </c:ser>
-        <c:dLbls>
-          <c:numFmt formatCode="0&quot;%&quot;" sourceLinked="0"/>
-          <c:txPr>
-            <a:bodyPr/>
-            <a:lstStyle/>
-            <a:p>
-              <a:pPr>
-                <a:defRPr b="0" i="0" strike="noStrike" sz="850" u="none">
-                  <a:solidFill>
-                    <a:srgbClr val="000000"/>
-                  </a:solidFill>
-                  <a:latin typeface="Arial"/>
-                </a:defRPr>
-              </a:pPr>
-            </a:p>
-          </c:txPr>
-          <c:showLegendKey val="0"/>
-          <c:showVal val="1"/>
-          <c:showCatName val="0"/>
-          <c:showSerName val="0"/>
-          <c:showPercent val="0"/>
-          <c:showBubbleSize val="0"/>
-          <c:showLeaderLines val="0"/>
-        </c:dLbls>
-        <c:gapWidth val="40"/>
-        <c:overlap val="0"/>
-        <c:axId val="2094734554"/>
-        <c:axId val="2094734552"/>
-        <c:axId val="2094734556"/>
-      </c:barChart>
-      <c:catAx>
-        <c:axId val="2094734554"/>
-        <c:scaling>
-          <c:orientation val="minMax"/>
-        </c:scaling>
-        <c:delete val="0"/>
-        <c:axPos val="l"/>
-        <c:numFmt formatCode="General" sourceLinked="1"/>
-        <c:majorTickMark val="out"/>
-        <c:minorTickMark val="none"/>
-        <c:tickLblPos val="nextTo"/>
-        <c:spPr>
-          <a:ln w="12700" cap="flat">
-            <a:noFill/>
-            <a:prstDash val="solid"/>
-            <a:round/>
-          </a:ln>
-        </c:spPr>
-        <c:txPr>
-          <a:bodyPr/>
-          <a:lstStyle/>
-          <a:p>
-            <a:pPr>
-              <a:defRPr sz="1000" b="0" i="0" u="none" strike="noStrike">
-                <a:solidFill>
-                  <a:srgbClr val="53565A"/>
-                </a:solidFill>
-                <a:latin typeface="Arial"/>
-              </a:defRPr>
-            </a:pPr>
-            <a:endParaRPr lang="en-US"/>
-          </a:p>
-        </c:txPr>
-        <c:crossAx val="2094734552"/>
-        <c:crosses val="autoZero"/>
-        <c:auto val="1"/>
-        <c:lblAlgn val="ctr"/>
-        <c:noMultiLvlLbl val="1"/>
-      </c:catAx>
-      <c:valAx>
-        <c:axId val="2094734552"/>
-        <c:scaling>
-          <c:orientation val="minMax"/>
-        </c:scaling>
-        <c:delete val="1"/>
-        <c:axPos val="b"/>
-        <c:numFmt formatCode="General" sourceLinked="0"/>
-        <c:majorTickMark val="out"/>
-        <c:minorTickMark val="none"/>
-        <c:tickLblPos val="low"/>
-        <c:spPr>
-          <a:ln w="12700" cap="flat">
-            <a:noFill/>
-            <a:prstDash val="solid"/>
-            <a:round/>
-          </a:ln>
-        </c:spPr>
-        <c:txPr>
-          <a:bodyPr/>
-          <a:lstStyle/>
-          <a:p>
-            <a:pPr>
-              <a:defRPr sz="1200" b="0" i="0" u="none" strike="noStrike">
-                <a:solidFill>
-                  <a:srgbClr val="000000"/>
-                </a:solidFill>
-                <a:latin typeface="Arial"/>
-              </a:defRPr>
-            </a:pPr>
-            <a:endParaRPr lang="en-US"/>
-          </a:p>
-        </c:txPr>
-        <c:crossAx val="2094734554"/>
-        <c:crosses val="autoZero"/>
-        <c:crossBetween val="between"/>
-      </c:valAx>
-      <c:spPr>
-        <a:solidFill>
-          <a:srgbClr val="FFFFFF"/>
-        </a:solidFill>
-        <a:ln>
-          <a:noFill/>
-        </a:ln>
-        <a:effectLst/>
-      </c:spPr>
-    </c:plotArea>
-    <c:legend>
-      <c:legendPos val="b"/>
-      <c:overlay val="0"/>
-      <c:txPr>
-        <a:bodyPr/>
-        <a:lstStyle/>
-        <a:p>
-          <a:pPr>
-            <a:defRPr sz="900">      </a:defRPr>
-          </a:pPr>
-          <a:endParaRPr lang="en-US"/>
-        </a:p>
-      </c:txPr>
-    </c:legend>
     <c:plotVisOnly val="1"/>
     <c:dispBlanksAs val="span"/>
   </c:chart>
@@ -7528,6 +9772,270 @@
             <a:fld id="{F7021451-1387-4CA6-816F-3879F97B5CBC}" type="slidenum">
               <a:rPr lang="en-US"/>
               <a:t>25</a:t>
+            </a:fld>
+            <a:endParaRPr lang="en-US"/>
+          </a:p>
+        </p:txBody>
+      </p:sp>
+    </p:spTree>
+    <p:extLst>
+      <p:ext uri="{BB962C8B-B14F-4D97-AF65-F5344CB8AC3E}">
+        <p14:creationId xmlns:p14="http://schemas.microsoft.com/office/powerpoint/2010/main" val="1024086991"/>
+      </p:ext>
+    </p:extLst>
+  </p:cSld>
+  <p:clrMapOvr>
+    <a:masterClrMapping/>
+  </p:clrMapOvr>
+</p:notes>
+</file>
+
+<file path=ppt/notesSlides/notesSlide26.xml><?xml version="1.0" encoding="utf-8"?>
+<p:notes xmlns:a="http://schemas.openxmlformats.org/drawingml/2006/main" xmlns:r="http://schemas.openxmlformats.org/officeDocument/2006/relationships" xmlns:p="http://schemas.openxmlformats.org/presentationml/2006/main">
+  <p:cSld>
+    <p:spTree>
+      <p:nvGrpSpPr>
+        <p:cNvPr id="1" name=""/>
+        <p:cNvGrpSpPr/>
+        <p:nvPr/>
+      </p:nvGrpSpPr>
+      <p:grpSpPr>
+        <a:xfrm>
+          <a:off x="0" y="0"/>
+          <a:ext cx="0" cy="0"/>
+          <a:chOff x="0" y="0"/>
+          <a:chExt cx="0" cy="0"/>
+        </a:xfrm>
+      </p:grpSpPr>
+      <p:sp>
+        <p:nvSpPr>
+          <p:cNvPr id="2" name="Slide Image Placeholder 1"/>
+          <p:cNvSpPr>
+            <a:spLocks noGrp="1" noRot="1" noChangeAspect="1"/>
+          </p:cNvSpPr>
+          <p:nvPr>
+            <p:ph type="sldImg"/>
+          </p:nvPr>
+        </p:nvSpPr>
+        <p:spPr/>
+      </p:sp>
+      <p:sp>
+        <p:nvSpPr>
+          <p:cNvPr id="3" name="Notes Placeholder 2"/>
+          <p:cNvSpPr>
+            <a:spLocks noGrp="1"/>
+          </p:cNvSpPr>
+          <p:nvPr>
+            <p:ph type="body" idx="1"/>
+          </p:nvPr>
+        </p:nvSpPr>
+        <p:spPr/>
+        <p:txBody>
+          <a:bodyPr/>
+          <a:lstStyle/>
+          <a:p>
+            <a:r>
+              <a:rPr lang="en-US" dirty="0"/>
+              <a:t/>
+            </a:r>
+            <a:endParaRPr lang="en-US" dirty="0"/>
+          </a:p>
+        </p:txBody>
+      </p:sp>
+      <p:sp>
+        <p:nvSpPr>
+          <p:cNvPr id="4" name="Slide Number Placeholder 3"/>
+          <p:cNvSpPr>
+            <a:spLocks noGrp="1"/>
+          </p:cNvSpPr>
+          <p:nvPr>
+            <p:ph type="sldNum" sz="quarter" idx="10"/>
+          </p:nvPr>
+        </p:nvSpPr>
+        <p:spPr/>
+        <p:txBody>
+          <a:bodyPr/>
+          <a:lstStyle/>
+          <a:p>
+            <a:fld id="{F7021451-1387-4CA6-816F-3879F97B5CBC}" type="slidenum">
+              <a:rPr lang="en-US"/>
+              <a:t>26</a:t>
+            </a:fld>
+            <a:endParaRPr lang="en-US"/>
+          </a:p>
+        </p:txBody>
+      </p:sp>
+    </p:spTree>
+    <p:extLst>
+      <p:ext uri="{BB962C8B-B14F-4D97-AF65-F5344CB8AC3E}">
+        <p14:creationId xmlns:p14="http://schemas.microsoft.com/office/powerpoint/2010/main" val="1024086991"/>
+      </p:ext>
+    </p:extLst>
+  </p:cSld>
+  <p:clrMapOvr>
+    <a:masterClrMapping/>
+  </p:clrMapOvr>
+</p:notes>
+</file>
+
+<file path=ppt/notesSlides/notesSlide27.xml><?xml version="1.0" encoding="utf-8"?>
+<p:notes xmlns:a="http://schemas.openxmlformats.org/drawingml/2006/main" xmlns:r="http://schemas.openxmlformats.org/officeDocument/2006/relationships" xmlns:p="http://schemas.openxmlformats.org/presentationml/2006/main">
+  <p:cSld>
+    <p:spTree>
+      <p:nvGrpSpPr>
+        <p:cNvPr id="1" name=""/>
+        <p:cNvGrpSpPr/>
+        <p:nvPr/>
+      </p:nvGrpSpPr>
+      <p:grpSpPr>
+        <a:xfrm>
+          <a:off x="0" y="0"/>
+          <a:ext cx="0" cy="0"/>
+          <a:chOff x="0" y="0"/>
+          <a:chExt cx="0" cy="0"/>
+        </a:xfrm>
+      </p:grpSpPr>
+      <p:sp>
+        <p:nvSpPr>
+          <p:cNvPr id="2" name="Slide Image Placeholder 1"/>
+          <p:cNvSpPr>
+            <a:spLocks noGrp="1" noRot="1" noChangeAspect="1"/>
+          </p:cNvSpPr>
+          <p:nvPr>
+            <p:ph type="sldImg"/>
+          </p:nvPr>
+        </p:nvSpPr>
+        <p:spPr/>
+      </p:sp>
+      <p:sp>
+        <p:nvSpPr>
+          <p:cNvPr id="3" name="Notes Placeholder 2"/>
+          <p:cNvSpPr>
+            <a:spLocks noGrp="1"/>
+          </p:cNvSpPr>
+          <p:nvPr>
+            <p:ph type="body" idx="1"/>
+          </p:nvPr>
+        </p:nvSpPr>
+        <p:spPr/>
+        <p:txBody>
+          <a:bodyPr/>
+          <a:lstStyle/>
+          <a:p>
+            <a:r>
+              <a:rPr lang="en-US" dirty="0"/>
+              <a:t/>
+            </a:r>
+            <a:endParaRPr lang="en-US" dirty="0"/>
+          </a:p>
+        </p:txBody>
+      </p:sp>
+      <p:sp>
+        <p:nvSpPr>
+          <p:cNvPr id="4" name="Slide Number Placeholder 3"/>
+          <p:cNvSpPr>
+            <a:spLocks noGrp="1"/>
+          </p:cNvSpPr>
+          <p:nvPr>
+            <p:ph type="sldNum" sz="quarter" idx="10"/>
+          </p:nvPr>
+        </p:nvSpPr>
+        <p:spPr/>
+        <p:txBody>
+          <a:bodyPr/>
+          <a:lstStyle/>
+          <a:p>
+            <a:fld id="{F7021451-1387-4CA6-816F-3879F97B5CBC}" type="slidenum">
+              <a:rPr lang="en-US"/>
+              <a:t>27</a:t>
+            </a:fld>
+            <a:endParaRPr lang="en-US"/>
+          </a:p>
+        </p:txBody>
+      </p:sp>
+    </p:spTree>
+    <p:extLst>
+      <p:ext uri="{BB962C8B-B14F-4D97-AF65-F5344CB8AC3E}">
+        <p14:creationId xmlns:p14="http://schemas.microsoft.com/office/powerpoint/2010/main" val="1024086991"/>
+      </p:ext>
+    </p:extLst>
+  </p:cSld>
+  <p:clrMapOvr>
+    <a:masterClrMapping/>
+  </p:clrMapOvr>
+</p:notes>
+</file>
+
+<file path=ppt/notesSlides/notesSlide28.xml><?xml version="1.0" encoding="utf-8"?>
+<p:notes xmlns:a="http://schemas.openxmlformats.org/drawingml/2006/main" xmlns:r="http://schemas.openxmlformats.org/officeDocument/2006/relationships" xmlns:p="http://schemas.openxmlformats.org/presentationml/2006/main">
+  <p:cSld>
+    <p:spTree>
+      <p:nvGrpSpPr>
+        <p:cNvPr id="1" name=""/>
+        <p:cNvGrpSpPr/>
+        <p:nvPr/>
+      </p:nvGrpSpPr>
+      <p:grpSpPr>
+        <a:xfrm>
+          <a:off x="0" y="0"/>
+          <a:ext cx="0" cy="0"/>
+          <a:chOff x="0" y="0"/>
+          <a:chExt cx="0" cy="0"/>
+        </a:xfrm>
+      </p:grpSpPr>
+      <p:sp>
+        <p:nvSpPr>
+          <p:cNvPr id="2" name="Slide Image Placeholder 1"/>
+          <p:cNvSpPr>
+            <a:spLocks noGrp="1" noRot="1" noChangeAspect="1"/>
+          </p:cNvSpPr>
+          <p:nvPr>
+            <p:ph type="sldImg"/>
+          </p:nvPr>
+        </p:nvSpPr>
+        <p:spPr/>
+      </p:sp>
+      <p:sp>
+        <p:nvSpPr>
+          <p:cNvPr id="3" name="Notes Placeholder 2"/>
+          <p:cNvSpPr>
+            <a:spLocks noGrp="1"/>
+          </p:cNvSpPr>
+          <p:nvPr>
+            <p:ph type="body" idx="1"/>
+          </p:nvPr>
+        </p:nvSpPr>
+        <p:spPr/>
+        <p:txBody>
+          <a:bodyPr/>
+          <a:lstStyle/>
+          <a:p>
+            <a:r>
+              <a:rPr lang="en-US" dirty="0"/>
+              <a:t/>
+            </a:r>
+            <a:endParaRPr lang="en-US" dirty="0"/>
+          </a:p>
+        </p:txBody>
+      </p:sp>
+      <p:sp>
+        <p:nvSpPr>
+          <p:cNvPr id="4" name="Slide Number Placeholder 3"/>
+          <p:cNvSpPr>
+            <a:spLocks noGrp="1"/>
+          </p:cNvSpPr>
+          <p:nvPr>
+            <p:ph type="sldNum" sz="quarter" idx="10"/>
+          </p:nvPr>
+        </p:nvSpPr>
+        <p:spPr/>
+        <p:txBody>
+          <a:bodyPr/>
+          <a:lstStyle/>
+          <a:p>
+            <a:fld id="{F7021451-1387-4CA6-816F-3879F97B5CBC}" type="slidenum">
+              <a:rPr lang="en-US"/>
+              <a:t>28</a:t>
             </a:fld>
             <a:endParaRPr lang="en-US"/>
           </a:p>
@@ -9616,7 +12124,7 @@
                 <a:ea typeface="Calibri" pitchFamily="34" charset="-122"/>
                 <a:cs typeface="Calibri" pitchFamily="34" charset="-120"/>
               </a:rPr>
-              <a:t>Government Action With the Greatest Impact on Info Sharing</a:t>
+              <a:t>Barriers to Effective Information Sharing — By Sector and Region</a:t>
             </a:r>
             <a:endParaRPr lang="en-US" sz="1900" dirty="0"/>
           </a:p>
@@ -9658,7 +12166,7 @@
                 <a:ea typeface="Calibri" pitchFamily="34" charset="-122"/>
                 <a:cs typeface="Calibri" pitchFamily="34" charset="-120"/>
               </a:rPr>
-              <a:t>Leaders want government to build shared infrastructure, not just pass new laws.</a:t>
+              <a:t>Within each sector, the barrier mix shifts somewhat by region — though several regional cells are thin and should be read directionally, not precisely.</a:t>
             </a:r>
             <a:endParaRPr lang="en-US" sz="1350" dirty="0"/>
           </a:p>
@@ -9723,7 +12231,7 @@
                 <a:ea typeface="IBM Plex Mono" pitchFamily="34" charset="-122"/>
                 <a:cs typeface="IBM Plex Mono" pitchFamily="34" charset="-120"/>
               </a:rPr>
-              <a:t>Q4  </a:t>
+              <a:t>Q5  </a:t>
             </a:r>
             <a:pPr algn="l" indent="0" marL="0">
               <a:lnSpc>
@@ -9740,7 +12248,7 @@
                 <a:ea typeface="Calibri" pitchFamily="34" charset="-122"/>
                 <a:cs typeface="Calibri" pitchFamily="34" charset="-120"/>
               </a:rPr>
-              <a:t>“What government action would have or has had the greatest impact on enabling more effective fraud information sharing?”</a:t>
+              <a:t>“What are the biggest barriers to enable effective fraud information sharing? (Banking vs. Insurance, further broken down by region)”</a:t>
             </a:r>
             <a:endParaRPr lang="en-US" sz="1000" dirty="0"/>
           </a:p>
@@ -9833,7 +12341,7 @@
         <p:spPr>
           <a:xfrm>
             <a:off x="502006" y="5276088"/>
-            <a:ext cx="11188598" cy="886968"/>
+            <a:ext cx="11188598" cy="713232"/>
           </a:xfrm>
           <a:prstGeom prst="rect">
             <a:avLst/>
@@ -9847,7 +12355,7 @@
           <a:p>
             <a:pPr algn="l" indent="0" marL="0">
               <a:lnSpc>
-                <a:spcPct val="118000"/>
+                <a:spcPct val="115000"/>
               </a:lnSpc>
               <a:buNone/>
             </a:pPr>
@@ -9860,15 +12368,57 @@
                 <a:ea typeface="Calibri" pitchFamily="34" charset="-122"/>
                 <a:cs typeface="Calibri" pitchFamily="34" charset="-120"/>
               </a:rPr>
-              <a:t>Single select.  </a:t>
+              <a:t>Ranked top 3 — figures don't sum to 100%. </a:t>
             </a:r>
             <a:pPr algn="l" indent="0" marL="0">
               <a:lnSpc>
-                <a:spcPct val="118000"/>
+                <a:spcPct val="115000"/>
               </a:lnSpc>
               <a:buNone/>
             </a:pPr>
             <a:r>
+              <a:rPr lang="en-US" sz="850" dirty="0">
+                <a:solidFill>
+                  <a:srgbClr val="53565A"/>
+                </a:solidFill>
+                <a:latin typeface="Calibri" pitchFamily="34" charset="0"/>
+                <a:ea typeface="Calibri" pitchFamily="34" charset="-122"/>
+                <a:cs typeface="Calibri" pitchFamily="34" charset="-120"/>
+              </a:rPr>
+              <a:t>The % in each Banking category label is the full sector-level figure; stacked region segments are rounded to the nearest whole percent and may sum to within ±1pt of that total. Banking/Australia (n=7) and Banking/Singapore (n=4) are thin samples shown directionally. Insurance bars reflect only its United States and Canada respondents (n=22 of 25) — UK (n=2), Australia (n=1), and Singapore (n=0) are excluded here for insufficient individual sample size. Insurance's full-sample totals (all regions, n=25) are: data standardization 88%, legal/privacy 72%, external participation 48%, budget/resources 36%, ROI 16%, ownership 36%.</a:t>
+            </a:r>
+            <a:endParaRPr lang="en-US" sz="850" dirty="0"/>
+          </a:p>
+        </p:txBody>
+      </p:sp>
+      <p:sp>
+        <p:nvSpPr>
+          <p:cNvPr id="10" name="Text 7"/>
+          <p:cNvSpPr txBox="1"/>
+          <p:nvPr/>
+        </p:nvSpPr>
+        <p:spPr>
+          <a:xfrm>
+            <a:off x="502006" y="6007608"/>
+            <a:ext cx="11188598" cy="320040"/>
+          </a:xfrm>
+          <a:prstGeom prst="rect">
+            <a:avLst/>
+          </a:prstGeom>
+          <a:noFill/>
+          <a:ln/>
+        </p:spPr>
+        <p:txBody>
+          <a:bodyPr wrap="square" lIns="0" tIns="0" rIns="0" bIns="0" rtlCol="0" anchor="t"/>
+          <a:lstStyle/>
+          <a:p>
+            <a:pPr algn="l" indent="0" marL="0">
+              <a:lnSpc>
+                <a:spcPct val="110000"/>
+              </a:lnSpc>
+              <a:buNone/>
+            </a:pPr>
+            <a:r>
               <a:rPr lang="en-US" sz="850" b="1" dirty="0">
                 <a:solidFill>
                   <a:srgbClr val="53565A"/>
@@ -9881,12 +12431,12 @@
             </a:r>
             <a:pPr algn="l" indent="0" marL="0">
               <a:lnSpc>
-                <a:spcPct val="118000"/>
+                <a:spcPct val="110000"/>
               </a:lnSpc>
               <a:buNone/>
             </a:pPr>
             <a:r>
-              <a:rPr lang="en-US" sz="850" i="1" dirty="0">
+              <a:rPr lang="en-US" sz="800" i="1" dirty="0">
                 <a:solidFill>
                   <a:srgbClr val="53565A"/>
                 </a:solidFill>
@@ -9894,177 +12444,7 @@
                 <a:ea typeface="Calibri" pitchFamily="34" charset="-122"/>
                 <a:cs typeface="Calibri" pitchFamily="34" charset="-120"/>
               </a:rPr>
-              <a:t>“Establish clearer legal and regulatory frameworks for information sharing”</a:t>
-            </a:r>
-            <a:pPr algn="l" indent="0" marL="0">
-              <a:lnSpc>
-                <a:spcPct val="118000"/>
-              </a:lnSpc>
-              <a:buNone/>
-            </a:pPr>
-            <a:r>
-              <a:rPr lang="en-US" sz="850" dirty="0">
-                <a:solidFill>
-                  <a:srgbClr val="D0D0CE"/>
-                </a:solidFill>
-                <a:latin typeface="Calibri" pitchFamily="34" charset="0"/>
-                <a:ea typeface="Calibri" pitchFamily="34" charset="-122"/>
-                <a:cs typeface="Calibri" pitchFamily="34" charset="-120"/>
-              </a:rPr>
-              <a:t>  ·  </a:t>
-            </a:r>
-            <a:pPr algn="l" indent="0" marL="0">
-              <a:lnSpc>
-                <a:spcPct val="118000"/>
-              </a:lnSpc>
-              <a:buNone/>
-            </a:pPr>
-            <a:r>
-              <a:rPr lang="en-US" sz="850" i="1" dirty="0">
-                <a:solidFill>
-                  <a:srgbClr val="53565A"/>
-                </a:solidFill>
-                <a:latin typeface="Calibri" pitchFamily="34" charset="0"/>
-                <a:ea typeface="Calibri" pitchFamily="34" charset="-122"/>
-                <a:cs typeface="Calibri" pitchFamily="34" charset="-120"/>
-              </a:rPr>
-              <a:t>“Develop common data standards and definitions”</a:t>
-            </a:r>
-            <a:pPr algn="l" indent="0" marL="0">
-              <a:lnSpc>
-                <a:spcPct val="118000"/>
-              </a:lnSpc>
-              <a:buNone/>
-            </a:pPr>
-            <a:r>
-              <a:rPr lang="en-US" sz="850" dirty="0">
-                <a:solidFill>
-                  <a:srgbClr val="D0D0CE"/>
-                </a:solidFill>
-                <a:latin typeface="Calibri" pitchFamily="34" charset="0"/>
-                <a:ea typeface="Calibri" pitchFamily="34" charset="-122"/>
-                <a:cs typeface="Calibri" pitchFamily="34" charset="-120"/>
-              </a:rPr>
-              <a:t>  ·  </a:t>
-            </a:r>
-            <a:pPr algn="l" indent="0" marL="0">
-              <a:lnSpc>
-                <a:spcPct val="118000"/>
-              </a:lnSpc>
-              <a:buNone/>
-            </a:pPr>
-            <a:r>
-              <a:rPr lang="en-US" sz="850" i="1" dirty="0">
-                <a:solidFill>
-                  <a:srgbClr val="53565A"/>
-                </a:solidFill>
-                <a:latin typeface="Calibri" pitchFamily="34" charset="0"/>
-                <a:ea typeface="Calibri" pitchFamily="34" charset="-122"/>
-                <a:cs typeface="Calibri" pitchFamily="34" charset="-120"/>
-              </a:rPr>
-              <a:t>“Create a centralized fraud information-sharing platform or utility”</a:t>
-            </a:r>
-            <a:pPr algn="l" indent="0" marL="0">
-              <a:lnSpc>
-                <a:spcPct val="118000"/>
-              </a:lnSpc>
-              <a:buNone/>
-            </a:pPr>
-            <a:r>
-              <a:rPr lang="en-US" sz="850" dirty="0">
-                <a:solidFill>
-                  <a:srgbClr val="D0D0CE"/>
-                </a:solidFill>
-                <a:latin typeface="Calibri" pitchFamily="34" charset="0"/>
-                <a:ea typeface="Calibri" pitchFamily="34" charset="-122"/>
-                <a:cs typeface="Calibri" pitchFamily="34" charset="-120"/>
-              </a:rPr>
-              <a:t>  ·  </a:t>
-            </a:r>
-            <a:pPr algn="l" indent="0" marL="0">
-              <a:lnSpc>
-                <a:spcPct val="118000"/>
-              </a:lnSpc>
-              <a:buNone/>
-            </a:pPr>
-            <a:r>
-              <a:rPr lang="en-US" sz="850" i="1" dirty="0">
-                <a:solidFill>
-                  <a:srgbClr val="53565A"/>
-                </a:solidFill>
-                <a:latin typeface="Calibri" pitchFamily="34" charset="0"/>
-                <a:ea typeface="Calibri" pitchFamily="34" charset="-122"/>
-                <a:cs typeface="Calibri" pitchFamily="34" charset="-120"/>
-              </a:rPr>
-              <a:t>“Facilitate greater public-private collaboration and coordination”</a:t>
-            </a:r>
-            <a:pPr algn="l" indent="0" marL="0">
-              <a:lnSpc>
-                <a:spcPct val="118000"/>
-              </a:lnSpc>
-              <a:buNone/>
-            </a:pPr>
-            <a:r>
-              <a:rPr lang="en-US" sz="850" dirty="0">
-                <a:solidFill>
-                  <a:srgbClr val="D0D0CE"/>
-                </a:solidFill>
-                <a:latin typeface="Calibri" pitchFamily="34" charset="0"/>
-                <a:ea typeface="Calibri" pitchFamily="34" charset="-122"/>
-                <a:cs typeface="Calibri" pitchFamily="34" charset="-120"/>
-              </a:rPr>
-              <a:t>  ·  </a:t>
-            </a:r>
-            <a:pPr algn="l" indent="0" marL="0">
-              <a:lnSpc>
-                <a:spcPct val="118000"/>
-              </a:lnSpc>
-              <a:buNone/>
-            </a:pPr>
-            <a:r>
-              <a:rPr lang="en-US" sz="850" i="1" dirty="0">
-                <a:solidFill>
-                  <a:srgbClr val="53565A"/>
-                </a:solidFill>
-                <a:latin typeface="Calibri" pitchFamily="34" charset="0"/>
-                <a:ea typeface="Calibri" pitchFamily="34" charset="-122"/>
-                <a:cs typeface="Calibri" pitchFamily="34" charset="-120"/>
-              </a:rPr>
-              <a:t>“Provide funding or incentives to support participation”</a:t>
-            </a:r>
-            <a:pPr algn="l" indent="0" marL="0">
-              <a:lnSpc>
-                <a:spcPct val="118000"/>
-              </a:lnSpc>
-              <a:buNone/>
-            </a:pPr>
-            <a:r>
-              <a:rPr lang="en-US" sz="850" dirty="0">
-                <a:solidFill>
-                  <a:srgbClr val="D0D0CE"/>
-                </a:solidFill>
-                <a:latin typeface="Calibri" pitchFamily="34" charset="0"/>
-                <a:ea typeface="Calibri" pitchFamily="34" charset="-122"/>
-                <a:cs typeface="Calibri" pitchFamily="34" charset="-120"/>
-              </a:rPr>
-              <a:t>  ·  </a:t>
-            </a:r>
-            <a:pPr algn="l" indent="0" marL="0">
-              <a:lnSpc>
-                <a:spcPct val="118000"/>
-              </a:lnSpc>
-              <a:buNone/>
-            </a:pPr>
-            <a:r>
-              <a:rPr lang="en-US" sz="850" i="1" dirty="0">
-                <a:solidFill>
-                  <a:srgbClr val="53565A"/>
-                </a:solidFill>
-                <a:latin typeface="Calibri" pitchFamily="34" charset="0"/>
-                <a:ea typeface="Calibri" pitchFamily="34" charset="-122"/>
-                <a:cs typeface="Calibri" pitchFamily="34" charset="-120"/>
-              </a:rPr>
-              <a:t>“Identify and prioritize industry use cases for fraud information sharing”</a:t>
+              <a:t>“Legal, privacy, or regulatory constraints” · “Limited data standardization, poor quality, and different definitions” · “Insufficient budget or resource investment” · “Lack of external industry participation or collaboration” · “Unclear internal ownership or governance” · “Difficulty demonstrating ROI or business value”</a:t>
             </a:r>
             <a:endParaRPr lang="en-US" sz="850" dirty="0"/>
           </a:p>
@@ -10084,7 +12464,7 @@
     <p:bg>
       <p:bgPr>
         <a:solidFill>
-          <a:srgbClr val="86BC25"/>
+          <a:srgbClr val="FFFFFF"/>
         </a:solidFill>
       </p:bgPr>
     </p:bg>
@@ -10110,8 +12490,8 @@
         </p:nvSpPr>
         <p:spPr>
           <a:xfrm>
-            <a:off x="502920" y="1699870"/>
-            <a:ext cx="10415016" cy="1591970"/>
+            <a:off x="502006" y="256032"/>
+            <a:ext cx="11188598" cy="310896"/>
           </a:xfrm>
           <a:prstGeom prst="rect">
             <a:avLst/>
@@ -10120,24 +12500,24 @@
           <a:ln/>
         </p:spPr>
         <p:txBody>
-          <a:bodyPr wrap="square" lIns="0" tIns="0" rIns="0" bIns="0" rtlCol="0" anchor="b"/>
-          <a:lstStyle/>
-          <a:p>
-            <a:pPr algn="l" indent="0" marL="0">
-              <a:buNone/>
-            </a:pPr>
-            <a:r>
-              <a:rPr lang="en-US" sz="3600" b="1" dirty="0">
-                <a:solidFill>
-                  <a:srgbClr val="FFFFFF"/>
-                </a:solidFill>
-                <a:latin typeface="Calibri" pitchFamily="34" charset="0"/>
-                <a:ea typeface="Calibri" pitchFamily="34" charset="-122"/>
-                <a:cs typeface="Calibri" pitchFamily="34" charset="-120"/>
-              </a:rPr>
-              <a:t>3. Third-Party Fraud Risk</a:t>
-            </a:r>
-            <a:endParaRPr lang="en-US" sz="3600" dirty="0"/>
+          <a:bodyPr wrap="square" lIns="0" tIns="0" rIns="0" bIns="0" rtlCol="0" anchor="t"/>
+          <a:lstStyle/>
+          <a:p>
+            <a:pPr algn="l" indent="0" marL="0">
+              <a:buNone/>
+            </a:pPr>
+            <a:r>
+              <a:rPr lang="en-US" sz="1900" b="1" dirty="0">
+                <a:solidFill>
+                  <a:srgbClr val="000000"/>
+                </a:solidFill>
+                <a:latin typeface="Calibri" pitchFamily="34" charset="0"/>
+                <a:ea typeface="Calibri" pitchFamily="34" charset="-122"/>
+                <a:cs typeface="Calibri" pitchFamily="34" charset="-120"/>
+              </a:rPr>
+              <a:t>Government Action With the Greatest Impact on Info Sharing</a:t>
+            </a:r>
+            <a:endParaRPr lang="en-US" sz="1900" dirty="0"/>
           </a:p>
         </p:txBody>
       </p:sp>
@@ -10149,8 +12529,8 @@
         </p:nvSpPr>
         <p:spPr>
           <a:xfrm>
-            <a:off x="502920" y="3423514"/>
-            <a:ext cx="10415016" cy="1563624"/>
+            <a:off x="502006" y="585216"/>
+            <a:ext cx="11188598" cy="713232"/>
           </a:xfrm>
           <a:prstGeom prst="rect">
             <a:avLst/>
@@ -10164,28 +12544,110 @@
           <a:p>
             <a:pPr algn="l" indent="0" marL="0">
               <a:lnSpc>
-                <a:spcPct val="110000"/>
+                <a:spcPct val="105000"/>
               </a:lnSpc>
               <a:buNone/>
             </a:pPr>
             <a:r>
-              <a:rPr lang="en-US" sz="1600" dirty="0">
-                <a:solidFill>
-                  <a:srgbClr val="FFFFFF"/>
-                </a:solidFill>
-                <a:latin typeface="Calibri" pitchFamily="34" charset="0"/>
-                <a:ea typeface="Calibri" pitchFamily="34" charset="-122"/>
-                <a:cs typeface="Calibri" pitchFamily="34" charset="-120"/>
-              </a:rPr>
-              <a:t>Which external parties present the greatest exposure — and it splits sharply by sector.</a:t>
-            </a:r>
-            <a:endParaRPr lang="en-US" sz="1600" dirty="0"/>
+              <a:rPr lang="en-US" sz="1350" b="1" dirty="0">
+                <a:solidFill>
+                  <a:srgbClr val="046A38"/>
+                </a:solidFill>
+                <a:latin typeface="Calibri" pitchFamily="34" charset="0"/>
+                <a:ea typeface="Calibri" pitchFamily="34" charset="-122"/>
+                <a:cs typeface="Calibri" pitchFamily="34" charset="-120"/>
+              </a:rPr>
+              <a:t>Leaders want government to build shared infrastructure, not just pass new laws.</a:t>
+            </a:r>
+            <a:endParaRPr lang="en-US" sz="1350" dirty="0"/>
           </a:p>
         </p:txBody>
       </p:sp>
       <p:sp>
         <p:nvSpPr>
-          <p:cNvPr id="4" name="Text 2"/>
+          <p:cNvPr id="4" name="Shape 2"/>
+          <p:cNvSpPr/>
+          <p:nvPr/>
+        </p:nvSpPr>
+        <p:spPr>
+          <a:xfrm>
+            <a:off x="502006" y="1335024"/>
+            <a:ext cx="0" cy="512064"/>
+          </a:xfrm>
+          <a:prstGeom prst="line">
+            <a:avLst/>
+          </a:prstGeom>
+          <a:noFill/>
+          <a:ln w="25400">
+            <a:solidFill>
+              <a:srgbClr val="D0D0CE"/>
+            </a:solidFill>
+            <a:prstDash val="solid"/>
+          </a:ln>
+        </p:spPr>
+      </p:sp>
+      <p:sp>
+        <p:nvSpPr>
+          <p:cNvPr id="5" name="Text 3"/>
+          <p:cNvSpPr txBox="1"/>
+          <p:nvPr/>
+        </p:nvSpPr>
+        <p:spPr>
+          <a:xfrm>
+            <a:off x="648310" y="1335024"/>
+            <a:ext cx="11042294" cy="512064"/>
+          </a:xfrm>
+          <a:prstGeom prst="rect">
+            <a:avLst/>
+          </a:prstGeom>
+          <a:noFill/>
+          <a:ln/>
+        </p:spPr>
+        <p:txBody>
+          <a:bodyPr wrap="square" lIns="0" tIns="0" rIns="0" bIns="0" rtlCol="0" anchor="t"/>
+          <a:lstStyle/>
+          <a:p>
+            <a:pPr algn="l" indent="0" marL="0">
+              <a:lnSpc>
+                <a:spcPct val="106000"/>
+              </a:lnSpc>
+              <a:buNone/>
+            </a:pPr>
+            <a:r>
+              <a:rPr lang="en-US" sz="900" b="1" dirty="0">
+                <a:solidFill>
+                  <a:srgbClr val="046A38"/>
+                </a:solidFill>
+                <a:latin typeface="IBM Plex Mono" pitchFamily="34" charset="0"/>
+                <a:ea typeface="IBM Plex Mono" pitchFamily="34" charset="-122"/>
+                <a:cs typeface="IBM Plex Mono" pitchFamily="34" charset="-120"/>
+              </a:rPr>
+              <a:t>Q4  </a:t>
+            </a:r>
+            <a:pPr algn="l" indent="0" marL="0">
+              <a:lnSpc>
+                <a:spcPct val="106000"/>
+              </a:lnSpc>
+              <a:buNone/>
+            </a:pPr>
+            <a:r>
+              <a:rPr lang="en-US" sz="1000" i="1" dirty="0">
+                <a:solidFill>
+                  <a:srgbClr val="575757"/>
+                </a:solidFill>
+                <a:latin typeface="Calibri" pitchFamily="34" charset="0"/>
+                <a:ea typeface="Calibri" pitchFamily="34" charset="-122"/>
+                <a:cs typeface="Calibri" pitchFamily="34" charset="-120"/>
+              </a:rPr>
+              <a:t>“What government action would have or has had the greatest impact on enabling more effective fraud information sharing?”</a:t>
+            </a:r>
+            <a:endParaRPr lang="en-US" sz="1000" dirty="0"/>
+          </a:p>
+        </p:txBody>
+      </p:sp>
+      <p:sp>
+        <p:nvSpPr>
+          <p:cNvPr id="6" name="Text 4"/>
           <p:cNvSpPr txBox="1"/>
           <p:nvPr/>
         </p:nvSpPr>
@@ -10210,7 +12672,7 @@
             <a:r>
               <a:rPr lang="en-US" sz="900" dirty="0">
                 <a:solidFill>
-                  <a:srgbClr val="FFFFFF"/>
+                  <a:srgbClr val="53565A"/>
                 </a:solidFill>
                 <a:latin typeface="Calibri" pitchFamily="34" charset="0"/>
                 <a:ea typeface="Calibri" pitchFamily="34" charset="-122"/>
@@ -10219,6 +12681,291 @@
               <a:t>12</a:t>
             </a:r>
             <a:endParaRPr lang="en-US" sz="900" dirty="0"/>
+          </a:p>
+        </p:txBody>
+      </p:sp>
+      <p:graphicFrame>
+        <p:nvGraphicFramePr>
+          <p:cNvPr id="7" name="Chart 0" descr=""/>
+          <p:cNvGraphicFramePr/>
+          <p:nvPr/>
+        </p:nvGraphicFramePr>
+        <p:xfrm>
+          <a:off x="502006" y="2011680"/>
+          <a:ext cx="11188598" cy="3063240"/>
+        </p:xfrm>
+        <a:graphic xmlns:a="http://schemas.openxmlformats.org/drawingml/2006/main">
+          <a:graphicData uri="http://schemas.openxmlformats.org/drawingml/2006/chart">
+            <c:chart xmlns:c="http://schemas.openxmlformats.org/drawingml/2006/chart" r:id="rId1"/>
+          </a:graphicData>
+        </a:graphic>
+      </p:graphicFrame>
+      <p:sp>
+        <p:nvSpPr>
+          <p:cNvPr id="8" name="Shape 5"/>
+          <p:cNvSpPr/>
+          <p:nvPr/>
+        </p:nvSpPr>
+        <p:spPr>
+          <a:xfrm>
+            <a:off x="502006" y="5202936"/>
+            <a:ext cx="11188598" cy="0"/>
+          </a:xfrm>
+          <a:prstGeom prst="line">
+            <a:avLst/>
+          </a:prstGeom>
+          <a:noFill/>
+          <a:ln w="9525">
+            <a:solidFill>
+              <a:srgbClr val="D0D0CE"/>
+            </a:solidFill>
+            <a:prstDash val="solid"/>
+          </a:ln>
+        </p:spPr>
+      </p:sp>
+      <p:sp>
+        <p:nvSpPr>
+          <p:cNvPr id="9" name="Text 6"/>
+          <p:cNvSpPr txBox="1"/>
+          <p:nvPr/>
+        </p:nvSpPr>
+        <p:spPr>
+          <a:xfrm>
+            <a:off x="502006" y="5276088"/>
+            <a:ext cx="11188598" cy="886968"/>
+          </a:xfrm>
+          <a:prstGeom prst="rect">
+            <a:avLst/>
+          </a:prstGeom>
+          <a:noFill/>
+          <a:ln/>
+        </p:spPr>
+        <p:txBody>
+          <a:bodyPr wrap="square" lIns="0" tIns="0" rIns="0" bIns="0" rtlCol="0" anchor="t"/>
+          <a:lstStyle/>
+          <a:p>
+            <a:pPr algn="l" indent="0" marL="0">
+              <a:lnSpc>
+                <a:spcPct val="118000"/>
+              </a:lnSpc>
+              <a:buNone/>
+            </a:pPr>
+            <a:r>
+              <a:rPr lang="en-US" sz="850" b="1" dirty="0">
+                <a:solidFill>
+                  <a:srgbClr val="53565A"/>
+                </a:solidFill>
+                <a:latin typeface="Calibri" pitchFamily="34" charset="0"/>
+                <a:ea typeface="Calibri" pitchFamily="34" charset="-122"/>
+                <a:cs typeface="Calibri" pitchFamily="34" charset="-120"/>
+              </a:rPr>
+              <a:t>Single select.  </a:t>
+            </a:r>
+            <a:pPr algn="l" indent="0" marL="0">
+              <a:lnSpc>
+                <a:spcPct val="118000"/>
+              </a:lnSpc>
+              <a:buNone/>
+            </a:pPr>
+            <a:r>
+              <a:rPr lang="en-US" sz="850" b="1" dirty="0">
+                <a:solidFill>
+                  <a:srgbClr val="53565A"/>
+                </a:solidFill>
+                <a:latin typeface="Calibri" pitchFamily="34" charset="0"/>
+                <a:ea typeface="Calibri" pitchFamily="34" charset="-122"/>
+                <a:cs typeface="Calibri" pitchFamily="34" charset="-120"/>
+              </a:rPr>
+              <a:t>Response options as fielded: </a:t>
+            </a:r>
+            <a:pPr algn="l" indent="0" marL="0">
+              <a:lnSpc>
+                <a:spcPct val="118000"/>
+              </a:lnSpc>
+              <a:buNone/>
+            </a:pPr>
+            <a:r>
+              <a:rPr lang="en-US" sz="850" i="1" dirty="0">
+                <a:solidFill>
+                  <a:srgbClr val="53565A"/>
+                </a:solidFill>
+                <a:latin typeface="Calibri" pitchFamily="34" charset="0"/>
+                <a:ea typeface="Calibri" pitchFamily="34" charset="-122"/>
+                <a:cs typeface="Calibri" pitchFamily="34" charset="-120"/>
+              </a:rPr>
+              <a:t>“Establish clearer legal and regulatory frameworks for information sharing”</a:t>
+            </a:r>
+            <a:pPr algn="l" indent="0" marL="0">
+              <a:lnSpc>
+                <a:spcPct val="118000"/>
+              </a:lnSpc>
+              <a:buNone/>
+            </a:pPr>
+            <a:r>
+              <a:rPr lang="en-US" sz="850" dirty="0">
+                <a:solidFill>
+                  <a:srgbClr val="D0D0CE"/>
+                </a:solidFill>
+                <a:latin typeface="Calibri" pitchFamily="34" charset="0"/>
+                <a:ea typeface="Calibri" pitchFamily="34" charset="-122"/>
+                <a:cs typeface="Calibri" pitchFamily="34" charset="-120"/>
+              </a:rPr>
+              <a:t>  ·  </a:t>
+            </a:r>
+            <a:pPr algn="l" indent="0" marL="0">
+              <a:lnSpc>
+                <a:spcPct val="118000"/>
+              </a:lnSpc>
+              <a:buNone/>
+            </a:pPr>
+            <a:r>
+              <a:rPr lang="en-US" sz="850" i="1" dirty="0">
+                <a:solidFill>
+                  <a:srgbClr val="53565A"/>
+                </a:solidFill>
+                <a:latin typeface="Calibri" pitchFamily="34" charset="0"/>
+                <a:ea typeface="Calibri" pitchFamily="34" charset="-122"/>
+                <a:cs typeface="Calibri" pitchFamily="34" charset="-120"/>
+              </a:rPr>
+              <a:t>“Develop common data standards and definitions”</a:t>
+            </a:r>
+            <a:pPr algn="l" indent="0" marL="0">
+              <a:lnSpc>
+                <a:spcPct val="118000"/>
+              </a:lnSpc>
+              <a:buNone/>
+            </a:pPr>
+            <a:r>
+              <a:rPr lang="en-US" sz="850" dirty="0">
+                <a:solidFill>
+                  <a:srgbClr val="D0D0CE"/>
+                </a:solidFill>
+                <a:latin typeface="Calibri" pitchFamily="34" charset="0"/>
+                <a:ea typeface="Calibri" pitchFamily="34" charset="-122"/>
+                <a:cs typeface="Calibri" pitchFamily="34" charset="-120"/>
+              </a:rPr>
+              <a:t>  ·  </a:t>
+            </a:r>
+            <a:pPr algn="l" indent="0" marL="0">
+              <a:lnSpc>
+                <a:spcPct val="118000"/>
+              </a:lnSpc>
+              <a:buNone/>
+            </a:pPr>
+            <a:r>
+              <a:rPr lang="en-US" sz="850" i="1" dirty="0">
+                <a:solidFill>
+                  <a:srgbClr val="53565A"/>
+                </a:solidFill>
+                <a:latin typeface="Calibri" pitchFamily="34" charset="0"/>
+                <a:ea typeface="Calibri" pitchFamily="34" charset="-122"/>
+                <a:cs typeface="Calibri" pitchFamily="34" charset="-120"/>
+              </a:rPr>
+              <a:t>“Create a centralized fraud information-sharing platform or utility”</a:t>
+            </a:r>
+            <a:pPr algn="l" indent="0" marL="0">
+              <a:lnSpc>
+                <a:spcPct val="118000"/>
+              </a:lnSpc>
+              <a:buNone/>
+            </a:pPr>
+            <a:r>
+              <a:rPr lang="en-US" sz="850" dirty="0">
+                <a:solidFill>
+                  <a:srgbClr val="D0D0CE"/>
+                </a:solidFill>
+                <a:latin typeface="Calibri" pitchFamily="34" charset="0"/>
+                <a:ea typeface="Calibri" pitchFamily="34" charset="-122"/>
+                <a:cs typeface="Calibri" pitchFamily="34" charset="-120"/>
+              </a:rPr>
+              <a:t>  ·  </a:t>
+            </a:r>
+            <a:pPr algn="l" indent="0" marL="0">
+              <a:lnSpc>
+                <a:spcPct val="118000"/>
+              </a:lnSpc>
+              <a:buNone/>
+            </a:pPr>
+            <a:r>
+              <a:rPr lang="en-US" sz="850" i="1" dirty="0">
+                <a:solidFill>
+                  <a:srgbClr val="53565A"/>
+                </a:solidFill>
+                <a:latin typeface="Calibri" pitchFamily="34" charset="0"/>
+                <a:ea typeface="Calibri" pitchFamily="34" charset="-122"/>
+                <a:cs typeface="Calibri" pitchFamily="34" charset="-120"/>
+              </a:rPr>
+              <a:t>“Facilitate greater public-private collaboration and coordination”</a:t>
+            </a:r>
+            <a:pPr algn="l" indent="0" marL="0">
+              <a:lnSpc>
+                <a:spcPct val="118000"/>
+              </a:lnSpc>
+              <a:buNone/>
+            </a:pPr>
+            <a:r>
+              <a:rPr lang="en-US" sz="850" dirty="0">
+                <a:solidFill>
+                  <a:srgbClr val="D0D0CE"/>
+                </a:solidFill>
+                <a:latin typeface="Calibri" pitchFamily="34" charset="0"/>
+                <a:ea typeface="Calibri" pitchFamily="34" charset="-122"/>
+                <a:cs typeface="Calibri" pitchFamily="34" charset="-120"/>
+              </a:rPr>
+              <a:t>  ·  </a:t>
+            </a:r>
+            <a:pPr algn="l" indent="0" marL="0">
+              <a:lnSpc>
+                <a:spcPct val="118000"/>
+              </a:lnSpc>
+              <a:buNone/>
+            </a:pPr>
+            <a:r>
+              <a:rPr lang="en-US" sz="850" i="1" dirty="0">
+                <a:solidFill>
+                  <a:srgbClr val="53565A"/>
+                </a:solidFill>
+                <a:latin typeface="Calibri" pitchFamily="34" charset="0"/>
+                <a:ea typeface="Calibri" pitchFamily="34" charset="-122"/>
+                <a:cs typeface="Calibri" pitchFamily="34" charset="-120"/>
+              </a:rPr>
+              <a:t>“Provide funding or incentives to support participation”</a:t>
+            </a:r>
+            <a:pPr algn="l" indent="0" marL="0">
+              <a:lnSpc>
+                <a:spcPct val="118000"/>
+              </a:lnSpc>
+              <a:buNone/>
+            </a:pPr>
+            <a:r>
+              <a:rPr lang="en-US" sz="850" dirty="0">
+                <a:solidFill>
+                  <a:srgbClr val="D0D0CE"/>
+                </a:solidFill>
+                <a:latin typeface="Calibri" pitchFamily="34" charset="0"/>
+                <a:ea typeface="Calibri" pitchFamily="34" charset="-122"/>
+                <a:cs typeface="Calibri" pitchFamily="34" charset="-120"/>
+              </a:rPr>
+              <a:t>  ·  </a:t>
+            </a:r>
+            <a:pPr algn="l" indent="0" marL="0">
+              <a:lnSpc>
+                <a:spcPct val="118000"/>
+              </a:lnSpc>
+              <a:buNone/>
+            </a:pPr>
+            <a:r>
+              <a:rPr lang="en-US" sz="850" i="1" dirty="0">
+                <a:solidFill>
+                  <a:srgbClr val="53565A"/>
+                </a:solidFill>
+                <a:latin typeface="Calibri" pitchFamily="34" charset="0"/>
+                <a:ea typeface="Calibri" pitchFamily="34" charset="-122"/>
+                <a:cs typeface="Calibri" pitchFamily="34" charset="-120"/>
+              </a:rPr>
+              <a:t>“Identify and prioritize industry use cases for fraud information sharing”</a:t>
+            </a:r>
+            <a:endParaRPr lang="en-US" sz="850" dirty="0"/>
           </a:p>
         </p:txBody>
       </p:sp>
@@ -10287,7 +13034,7 @@
                 <a:ea typeface="Calibri" pitchFamily="34" charset="-122"/>
                 <a:cs typeface="Calibri" pitchFamily="34" charset="-120"/>
               </a:rPr>
-              <a:t>Greatest Third-Party Fraud Risk Exposure, by Sector</a:t>
+              <a:t>Top Government Action for Info Sharing — By Region</a:t>
             </a:r>
             <a:endParaRPr lang="en-US" sz="1900" dirty="0"/>
           </a:p>
@@ -10329,7 +13076,7 @@
                 <a:ea typeface="Calibri" pitchFamily="34" charset="-122"/>
                 <a:cs typeface="Calibri" pitchFamily="34" charset="-120"/>
               </a:rPr>
-              <a:t>Banks and insurers face very different third-party risks — one fix won't work for both.</a:t>
+              <a:t>A centralized platform or utility remains a leading choice in almost every market, though priorities shift somewhat by region.</a:t>
             </a:r>
             <a:endParaRPr lang="en-US" sz="1350" dirty="0"/>
           </a:p>
@@ -10394,7 +13141,7 @@
                 <a:ea typeface="IBM Plex Mono" pitchFamily="34" charset="-122"/>
                 <a:cs typeface="IBM Plex Mono" pitchFamily="34" charset="-120"/>
               </a:rPr>
-              <a:t>Q6a / Q6b  </a:t>
+              <a:t>Q4  </a:t>
             </a:r>
             <a:pPr algn="l" indent="0" marL="0">
               <a:lnSpc>
@@ -10411,7 +13158,7 @@
                 <a:ea typeface="Calibri" pitchFamily="34" charset="-122"/>
                 <a:cs typeface="Calibri" pitchFamily="34" charset="-120"/>
               </a:rPr>
-              <a:t>“Which external party currently presents the greatest fraud risk exposure to your organization? (asked separately of Banking and Insurance respondents)”</a:t>
+              <a:t>“What government action would have or has had the greatest impact on enabling more effective fraud information sharing? (by region, all respondents)”</a:t>
             </a:r>
             <a:endParaRPr lang="en-US" sz="1000" dirty="0"/>
           </a:p>
@@ -10456,54 +13203,15 @@
           </a:p>
         </p:txBody>
       </p:sp>
-      <p:sp>
-        <p:nvSpPr>
-          <p:cNvPr id="7" name="Text 5"/>
-          <p:cNvSpPr txBox="1"/>
-          <p:nvPr/>
-        </p:nvSpPr>
-        <p:spPr>
-          <a:xfrm>
-            <a:off x="502006" y="1965960"/>
-            <a:ext cx="5486400" cy="256032"/>
-          </a:xfrm>
-          <a:prstGeom prst="rect">
-            <a:avLst/>
-          </a:prstGeom>
-          <a:noFill/>
-          <a:ln/>
-        </p:spPr>
-        <p:txBody>
-          <a:bodyPr wrap="square" rtlCol="0" anchor="ctr"/>
-          <a:lstStyle/>
-          <a:p>
-            <a:pPr indent="0" marL="0">
-              <a:buNone/>
-            </a:pPr>
-            <a:r>
-              <a:rPr lang="en-US" sz="1150" b="1" dirty="0">
-                <a:solidFill>
-                  <a:srgbClr val="000000"/>
-                </a:solidFill>
-                <a:latin typeface="Calibri" pitchFamily="34" charset="0"/>
-                <a:ea typeface="Calibri" pitchFamily="34" charset="-122"/>
-                <a:cs typeface="Calibri" pitchFamily="34" charset="-120"/>
-              </a:rPr>
-              <a:t>Banking (n=75)</a:t>
-            </a:r>
-            <a:endParaRPr lang="en-US" sz="1150" dirty="0"/>
-          </a:p>
-        </p:txBody>
-      </p:sp>
       <p:graphicFrame>
         <p:nvGraphicFramePr>
-          <p:cNvPr id="8" name="Chart 0" descr=""/>
+          <p:cNvPr id="7" name="Chart 0" descr=""/>
           <p:cNvGraphicFramePr/>
           <p:nvPr/>
         </p:nvGraphicFramePr>
         <p:xfrm>
-          <a:off x="502006" y="2267712"/>
-          <a:ext cx="5486400" cy="2743200"/>
+          <a:off x="502006" y="2011680"/>
+          <a:ext cx="11188598" cy="3063240"/>
         </p:xfrm>
         <a:graphic xmlns:a="http://schemas.openxmlformats.org/drawingml/2006/main">
           <a:graphicData uri="http://schemas.openxmlformats.org/drawingml/2006/chart">
@@ -10513,68 +13221,13 @@
       </p:graphicFrame>
       <p:sp>
         <p:nvSpPr>
-          <p:cNvPr id="9" name="Text 6"/>
-          <p:cNvSpPr txBox="1"/>
-          <p:nvPr/>
-        </p:nvSpPr>
-        <p:spPr>
-          <a:xfrm>
-            <a:off x="6172200" y="1965960"/>
-            <a:ext cx="5486400" cy="256032"/>
-          </a:xfrm>
-          <a:prstGeom prst="rect">
-            <a:avLst/>
-          </a:prstGeom>
-          <a:noFill/>
-          <a:ln/>
-        </p:spPr>
-        <p:txBody>
-          <a:bodyPr wrap="square" rtlCol="0" anchor="ctr"/>
-          <a:lstStyle/>
-          <a:p>
-            <a:pPr indent="0" marL="0">
-              <a:buNone/>
-            </a:pPr>
-            <a:r>
-              <a:rPr lang="en-US" sz="1150" b="1" dirty="0">
-                <a:solidFill>
-                  <a:srgbClr val="000000"/>
-                </a:solidFill>
-                <a:latin typeface="Calibri" pitchFamily="34" charset="0"/>
-                <a:ea typeface="Calibri" pitchFamily="34" charset="-122"/>
-                <a:cs typeface="Calibri" pitchFamily="34" charset="-120"/>
-              </a:rPr>
-              <a:t>Insurance (n=25)</a:t>
-            </a:r>
-            <a:endParaRPr lang="en-US" sz="1150" dirty="0"/>
-          </a:p>
-        </p:txBody>
-      </p:sp>
-      <p:graphicFrame>
-        <p:nvGraphicFramePr>
-          <p:cNvPr id="10" name="Chart 1" descr=""/>
-          <p:cNvGraphicFramePr/>
-          <p:nvPr/>
-        </p:nvGraphicFramePr>
-        <p:xfrm>
-          <a:off x="6172200" y="2267712"/>
-          <a:ext cx="5486400" cy="2743200"/>
-        </p:xfrm>
-        <a:graphic xmlns:a="http://schemas.openxmlformats.org/drawingml/2006/main">
-          <a:graphicData uri="http://schemas.openxmlformats.org/drawingml/2006/chart">
-            <c:chart xmlns:c="http://schemas.openxmlformats.org/drawingml/2006/chart" r:id="rId2"/>
-          </a:graphicData>
-        </a:graphic>
-      </p:graphicFrame>
-      <p:sp>
-        <p:nvSpPr>
-          <p:cNvPr id="11" name="Shape 7"/>
+          <p:cNvPr id="8" name="Shape 5"/>
           <p:cNvSpPr/>
           <p:nvPr/>
         </p:nvSpPr>
         <p:spPr>
           <a:xfrm>
-            <a:off x="502006" y="5120640"/>
+            <a:off x="502006" y="5202936"/>
             <a:ext cx="11188598" cy="0"/>
           </a:xfrm>
           <a:prstGeom prst="line">
@@ -10591,14 +13244,14 @@
       </p:sp>
       <p:sp>
         <p:nvSpPr>
-          <p:cNvPr id="12" name="Text 8"/>
+          <p:cNvPr id="9" name="Text 6"/>
           <p:cNvSpPr txBox="1"/>
           <p:nvPr/>
         </p:nvSpPr>
         <p:spPr>
           <a:xfrm>
-            <a:off x="502006" y="5193792"/>
-            <a:ext cx="11188598" cy="914400"/>
+            <a:off x="502006" y="5276088"/>
+            <a:ext cx="11188598" cy="886968"/>
           </a:xfrm>
           <a:prstGeom prst="rect">
             <a:avLst/>
@@ -10625,7 +13278,7 @@
                 <a:ea typeface="Calibri" pitchFamily="34" charset="-122"/>
                 <a:cs typeface="Calibri" pitchFamily="34" charset="-120"/>
               </a:rPr>
-              <a:t>Response options as fielded — </a:t>
+              <a:t>Single select. Australia (n=8) and Singapore (n=4) are thin samples, shown directionally.  </a:t>
             </a:r>
             <a:pPr algn="l" indent="0" marL="0">
               <a:lnSpc>
@@ -10636,13 +13289,13 @@
             <a:r>
               <a:rPr lang="en-US" sz="850" b="1" dirty="0">
                 <a:solidFill>
-                  <a:srgbClr val="046A38"/>
-                </a:solidFill>
-                <a:latin typeface="Calibri" pitchFamily="34" charset="0"/>
-                <a:ea typeface="Calibri" pitchFamily="34" charset="-122"/>
-                <a:cs typeface="Calibri" pitchFamily="34" charset="-120"/>
-              </a:rPr>
-              <a:t>Q6a Banking: </a:t>
+                  <a:srgbClr val="53565A"/>
+                </a:solidFill>
+                <a:latin typeface="Calibri" pitchFamily="34" charset="0"/>
+                <a:ea typeface="Calibri" pitchFamily="34" charset="-122"/>
+                <a:cs typeface="Calibri" pitchFamily="34" charset="-120"/>
+              </a:rPr>
+              <a:t>Response options as fielded: </a:t>
             </a:r>
             <a:pPr algn="l" indent="0" marL="0">
               <a:lnSpc>
@@ -10659,7 +13312,7 @@
                 <a:ea typeface="Calibri" pitchFamily="34" charset="-122"/>
                 <a:cs typeface="Calibri" pitchFamily="34" charset="-120"/>
               </a:rPr>
-              <a:t>Mortgage brokers · Merchants · Fintech Partners · Dealers &amp; Indirect Lending Partners · Business &amp; Commercial Clients · Appraisers</a:t>
+              <a:t>“Establish clearer legal and regulatory frameworks for information sharing”</a:t>
             </a:r>
             <a:pPr algn="l" indent="0" marL="0">
               <a:lnSpc>
@@ -10668,15 +13321,15 @@
               <a:buNone/>
             </a:pPr>
             <a:r>
-              <a:rPr lang="en-US" sz="850" b="1" dirty="0">
-                <a:solidFill>
-                  <a:srgbClr val="046A38"/>
-                </a:solidFill>
-                <a:latin typeface="Calibri" pitchFamily="34" charset="0"/>
-                <a:ea typeface="Calibri" pitchFamily="34" charset="-122"/>
-                <a:cs typeface="Calibri" pitchFamily="34" charset="-120"/>
-              </a:rPr>
-              <a:t>  ·  Q6b Insurance: </a:t>
+              <a:rPr lang="en-US" sz="850" dirty="0">
+                <a:solidFill>
+                  <a:srgbClr val="D0D0CE"/>
+                </a:solidFill>
+                <a:latin typeface="Calibri" pitchFamily="34" charset="0"/>
+                <a:ea typeface="Calibri" pitchFamily="34" charset="-122"/>
+                <a:cs typeface="Calibri" pitchFamily="34" charset="-120"/>
+              </a:rPr>
+              <a:t>  ·  </a:t>
             </a:r>
             <a:pPr algn="l" indent="0" marL="0">
               <a:lnSpc>
@@ -10693,7 +13346,143 @@
                 <a:ea typeface="Calibri" pitchFamily="34" charset="-122"/>
                 <a:cs typeface="Calibri" pitchFamily="34" charset="-120"/>
               </a:rPr>
-              <a:t>Brokers and distribution partners · Health care providers · Automotive service providers · Legal representatives and paralegals · Third-party administrators (TPAs) · Property claims service providers</a:t>
+              <a:t>“Develop common data standards and definitions”</a:t>
+            </a:r>
+            <a:pPr algn="l" indent="0" marL="0">
+              <a:lnSpc>
+                <a:spcPct val="118000"/>
+              </a:lnSpc>
+              <a:buNone/>
+            </a:pPr>
+            <a:r>
+              <a:rPr lang="en-US" sz="850" dirty="0">
+                <a:solidFill>
+                  <a:srgbClr val="D0D0CE"/>
+                </a:solidFill>
+                <a:latin typeface="Calibri" pitchFamily="34" charset="0"/>
+                <a:ea typeface="Calibri" pitchFamily="34" charset="-122"/>
+                <a:cs typeface="Calibri" pitchFamily="34" charset="-120"/>
+              </a:rPr>
+              <a:t>  ·  </a:t>
+            </a:r>
+            <a:pPr algn="l" indent="0" marL="0">
+              <a:lnSpc>
+                <a:spcPct val="118000"/>
+              </a:lnSpc>
+              <a:buNone/>
+            </a:pPr>
+            <a:r>
+              <a:rPr lang="en-US" sz="850" i="1" dirty="0">
+                <a:solidFill>
+                  <a:srgbClr val="53565A"/>
+                </a:solidFill>
+                <a:latin typeface="Calibri" pitchFamily="34" charset="0"/>
+                <a:ea typeface="Calibri" pitchFamily="34" charset="-122"/>
+                <a:cs typeface="Calibri" pitchFamily="34" charset="-120"/>
+              </a:rPr>
+              <a:t>“Create a centralized fraud information-sharing platform or utility”</a:t>
+            </a:r>
+            <a:pPr algn="l" indent="0" marL="0">
+              <a:lnSpc>
+                <a:spcPct val="118000"/>
+              </a:lnSpc>
+              <a:buNone/>
+            </a:pPr>
+            <a:r>
+              <a:rPr lang="en-US" sz="850" dirty="0">
+                <a:solidFill>
+                  <a:srgbClr val="D0D0CE"/>
+                </a:solidFill>
+                <a:latin typeface="Calibri" pitchFamily="34" charset="0"/>
+                <a:ea typeface="Calibri" pitchFamily="34" charset="-122"/>
+                <a:cs typeface="Calibri" pitchFamily="34" charset="-120"/>
+              </a:rPr>
+              <a:t>  ·  </a:t>
+            </a:r>
+            <a:pPr algn="l" indent="0" marL="0">
+              <a:lnSpc>
+                <a:spcPct val="118000"/>
+              </a:lnSpc>
+              <a:buNone/>
+            </a:pPr>
+            <a:r>
+              <a:rPr lang="en-US" sz="850" i="1" dirty="0">
+                <a:solidFill>
+                  <a:srgbClr val="53565A"/>
+                </a:solidFill>
+                <a:latin typeface="Calibri" pitchFamily="34" charset="0"/>
+                <a:ea typeface="Calibri" pitchFamily="34" charset="-122"/>
+                <a:cs typeface="Calibri" pitchFamily="34" charset="-120"/>
+              </a:rPr>
+              <a:t>“Facilitate greater public-private collaboration and coordination”</a:t>
+            </a:r>
+            <a:pPr algn="l" indent="0" marL="0">
+              <a:lnSpc>
+                <a:spcPct val="118000"/>
+              </a:lnSpc>
+              <a:buNone/>
+            </a:pPr>
+            <a:r>
+              <a:rPr lang="en-US" sz="850" dirty="0">
+                <a:solidFill>
+                  <a:srgbClr val="D0D0CE"/>
+                </a:solidFill>
+                <a:latin typeface="Calibri" pitchFamily="34" charset="0"/>
+                <a:ea typeface="Calibri" pitchFamily="34" charset="-122"/>
+                <a:cs typeface="Calibri" pitchFamily="34" charset="-120"/>
+              </a:rPr>
+              <a:t>  ·  </a:t>
+            </a:r>
+            <a:pPr algn="l" indent="0" marL="0">
+              <a:lnSpc>
+                <a:spcPct val="118000"/>
+              </a:lnSpc>
+              <a:buNone/>
+            </a:pPr>
+            <a:r>
+              <a:rPr lang="en-US" sz="850" i="1" dirty="0">
+                <a:solidFill>
+                  <a:srgbClr val="53565A"/>
+                </a:solidFill>
+                <a:latin typeface="Calibri" pitchFamily="34" charset="0"/>
+                <a:ea typeface="Calibri" pitchFamily="34" charset="-122"/>
+                <a:cs typeface="Calibri" pitchFamily="34" charset="-120"/>
+              </a:rPr>
+              <a:t>“Provide funding or incentives to support participation”</a:t>
+            </a:r>
+            <a:pPr algn="l" indent="0" marL="0">
+              <a:lnSpc>
+                <a:spcPct val="118000"/>
+              </a:lnSpc>
+              <a:buNone/>
+            </a:pPr>
+            <a:r>
+              <a:rPr lang="en-US" sz="850" dirty="0">
+                <a:solidFill>
+                  <a:srgbClr val="D0D0CE"/>
+                </a:solidFill>
+                <a:latin typeface="Calibri" pitchFamily="34" charset="0"/>
+                <a:ea typeface="Calibri" pitchFamily="34" charset="-122"/>
+                <a:cs typeface="Calibri" pitchFamily="34" charset="-120"/>
+              </a:rPr>
+              <a:t>  ·  </a:t>
+            </a:r>
+            <a:pPr algn="l" indent="0" marL="0">
+              <a:lnSpc>
+                <a:spcPct val="118000"/>
+              </a:lnSpc>
+              <a:buNone/>
+            </a:pPr>
+            <a:r>
+              <a:rPr lang="en-US" sz="850" i="1" dirty="0">
+                <a:solidFill>
+                  <a:srgbClr val="53565A"/>
+                </a:solidFill>
+                <a:latin typeface="Calibri" pitchFamily="34" charset="0"/>
+                <a:ea typeface="Calibri" pitchFamily="34" charset="-122"/>
+                <a:cs typeface="Calibri" pitchFamily="34" charset="-120"/>
+              </a:rPr>
+              <a:t>“Identify and prioritize industry use cases for fraud information sharing”</a:t>
             </a:r>
             <a:endParaRPr lang="en-US" sz="850" dirty="0"/>
           </a:p>
@@ -10713,7 +13502,7 @@
     <p:bg>
       <p:bgPr>
         <a:solidFill>
-          <a:srgbClr val="FFFFFF"/>
+          <a:srgbClr val="86BC25"/>
         </a:solidFill>
       </p:bgPr>
     </p:bg>
@@ -10739,8 +13528,8 @@
         </p:nvSpPr>
         <p:spPr>
           <a:xfrm>
-            <a:off x="502006" y="256032"/>
-            <a:ext cx="11188598" cy="310896"/>
+            <a:off x="502920" y="1699870"/>
+            <a:ext cx="10415016" cy="1591970"/>
           </a:xfrm>
           <a:prstGeom prst="rect">
             <a:avLst/>
@@ -10749,24 +13538,24 @@
           <a:ln/>
         </p:spPr>
         <p:txBody>
-          <a:bodyPr wrap="square" lIns="0" tIns="0" rIns="0" bIns="0" rtlCol="0" anchor="t"/>
-          <a:lstStyle/>
-          <a:p>
-            <a:pPr algn="l" indent="0" marL="0">
-              <a:buNone/>
-            </a:pPr>
-            <a:r>
-              <a:rPr lang="en-US" sz="1900" b="1" dirty="0">
-                <a:solidFill>
-                  <a:srgbClr val="000000"/>
-                </a:solidFill>
-                <a:latin typeface="Calibri" pitchFamily="34" charset="0"/>
-                <a:ea typeface="Calibri" pitchFamily="34" charset="-122"/>
-                <a:cs typeface="Calibri" pitchFamily="34" charset="-120"/>
-              </a:rPr>
-              <a:t>Strategy Expected to Most Reduce Third-Party Risk</a:t>
-            </a:r>
-            <a:endParaRPr lang="en-US" sz="1900" dirty="0"/>
+          <a:bodyPr wrap="square" lIns="0" tIns="0" rIns="0" bIns="0" rtlCol="0" anchor="b"/>
+          <a:lstStyle/>
+          <a:p>
+            <a:pPr algn="l" indent="0" marL="0">
+              <a:buNone/>
+            </a:pPr>
+            <a:r>
+              <a:rPr lang="en-US" sz="3600" b="1" dirty="0">
+                <a:solidFill>
+                  <a:srgbClr val="FFFFFF"/>
+                </a:solidFill>
+                <a:latin typeface="Calibri" pitchFamily="34" charset="0"/>
+                <a:ea typeface="Calibri" pitchFamily="34" charset="-122"/>
+                <a:cs typeface="Calibri" pitchFamily="34" charset="-120"/>
+              </a:rPr>
+              <a:t>3. Third-Party Fraud Risk</a:t>
+            </a:r>
+            <a:endParaRPr lang="en-US" sz="3600" dirty="0"/>
           </a:p>
         </p:txBody>
       </p:sp>
@@ -10778,8 +13567,8 @@
         </p:nvSpPr>
         <p:spPr>
           <a:xfrm>
-            <a:off x="502006" y="585216"/>
-            <a:ext cx="11188598" cy="713232"/>
+            <a:off x="502920" y="3423514"/>
+            <a:ext cx="10415016" cy="1563624"/>
           </a:xfrm>
           <a:prstGeom prst="rect">
             <a:avLst/>
@@ -10793,58 +13582,35 @@
           <a:p>
             <a:pPr algn="l" indent="0" marL="0">
               <a:lnSpc>
-                <a:spcPct val="105000"/>
+                <a:spcPct val="110000"/>
               </a:lnSpc>
               <a:buNone/>
             </a:pPr>
             <a:r>
-              <a:rPr lang="en-US" sz="1350" b="1" dirty="0">
-                <a:solidFill>
-                  <a:srgbClr val="046A38"/>
-                </a:solidFill>
-                <a:latin typeface="Calibri" pitchFamily="34" charset="0"/>
-                <a:ea typeface="Calibri" pitchFamily="34" charset="-122"/>
-                <a:cs typeface="Calibri" pitchFamily="34" charset="-120"/>
-              </a:rPr>
-              <a:t>Leaders would rather get smarter about spotting risk than tighten the front door.</a:t>
-            </a:r>
-            <a:endParaRPr lang="en-US" sz="1350" dirty="0"/>
+              <a:rPr lang="en-US" sz="1600" dirty="0">
+                <a:solidFill>
+                  <a:srgbClr val="FFFFFF"/>
+                </a:solidFill>
+                <a:latin typeface="Calibri" pitchFamily="34" charset="0"/>
+                <a:ea typeface="Calibri" pitchFamily="34" charset="-122"/>
+                <a:cs typeface="Calibri" pitchFamily="34" charset="-120"/>
+              </a:rPr>
+              <a:t>Which external parties present the greatest exposure — and it splits sharply by sector.</a:t>
+            </a:r>
+            <a:endParaRPr lang="en-US" sz="1600" dirty="0"/>
           </a:p>
         </p:txBody>
       </p:sp>
       <p:sp>
         <p:nvSpPr>
-          <p:cNvPr id="4" name="Shape 2"/>
-          <p:cNvSpPr/>
-          <p:nvPr/>
-        </p:nvSpPr>
-        <p:spPr>
-          <a:xfrm>
-            <a:off x="502006" y="1335024"/>
-            <a:ext cx="0" cy="512064"/>
-          </a:xfrm>
-          <a:prstGeom prst="line">
-            <a:avLst/>
-          </a:prstGeom>
-          <a:noFill/>
-          <a:ln w="25400">
-            <a:solidFill>
-              <a:srgbClr val="D0D0CE"/>
-            </a:solidFill>
-            <a:prstDash val="solid"/>
-          </a:ln>
-        </p:spPr>
-      </p:sp>
-      <p:sp>
-        <p:nvSpPr>
-          <p:cNvPr id="5" name="Text 3"/>
+          <p:cNvPr id="4" name="Text 2"/>
           <p:cNvSpPr txBox="1"/>
           <p:nvPr/>
         </p:nvSpPr>
         <p:spPr>
           <a:xfrm>
-            <a:off x="648310" y="1335024"/>
-            <a:ext cx="11042294" cy="512064"/>
+            <a:off x="11346790" y="6537960"/>
+            <a:ext cx="343814" cy="182880"/>
           </a:xfrm>
           <a:prstGeom prst="rect">
             <a:avLst/>
@@ -10853,65 +13619,6 @@
           <a:ln/>
         </p:spPr>
         <p:txBody>
-          <a:bodyPr wrap="square" lIns="0" tIns="0" rIns="0" bIns="0" rtlCol="0" anchor="t"/>
-          <a:lstStyle/>
-          <a:p>
-            <a:pPr algn="l" indent="0" marL="0">
-              <a:lnSpc>
-                <a:spcPct val="106000"/>
-              </a:lnSpc>
-              <a:buNone/>
-            </a:pPr>
-            <a:r>
-              <a:rPr lang="en-US" sz="900" b="1" dirty="0">
-                <a:solidFill>
-                  <a:srgbClr val="046A38"/>
-                </a:solidFill>
-                <a:latin typeface="IBM Plex Mono" pitchFamily="34" charset="0"/>
-                <a:ea typeface="IBM Plex Mono" pitchFamily="34" charset="-122"/>
-                <a:cs typeface="IBM Plex Mono" pitchFamily="34" charset="-120"/>
-              </a:rPr>
-              <a:t>Q7  </a:t>
-            </a:r>
-            <a:pPr algn="l" indent="0" marL="0">
-              <a:lnSpc>
-                <a:spcPct val="106000"/>
-              </a:lnSpc>
-              <a:buNone/>
-            </a:pPr>
-            <a:r>
-              <a:rPr lang="en-US" sz="1000" i="1" dirty="0">
-                <a:solidFill>
-                  <a:srgbClr val="575757"/>
-                </a:solidFill>
-                <a:latin typeface="Calibri" pitchFamily="34" charset="0"/>
-                <a:ea typeface="Calibri" pitchFamily="34" charset="-122"/>
-                <a:cs typeface="Calibri" pitchFamily="34" charset="-120"/>
-              </a:rPr>
-              <a:t>“Which strategy is expected to have the greatest impact on reducing third-party fraud risk over the next three years?”</a:t>
-            </a:r>
-            <a:endParaRPr lang="en-US" sz="1000" dirty="0"/>
-          </a:p>
-        </p:txBody>
-      </p:sp>
-      <p:sp>
-        <p:nvSpPr>
-          <p:cNvPr id="6" name="Text 4"/>
-          <p:cNvSpPr txBox="1"/>
-          <p:nvPr/>
-        </p:nvSpPr>
-        <p:spPr>
-          <a:xfrm>
-            <a:off x="11346790" y="6537960"/>
-            <a:ext cx="343814" cy="182880"/>
-          </a:xfrm>
-          <a:prstGeom prst="rect">
-            <a:avLst/>
-          </a:prstGeom>
-          <a:noFill/>
-          <a:ln/>
-        </p:spPr>
-        <p:txBody>
           <a:bodyPr wrap="square" rtlCol="0" anchor="ctr"/>
           <a:lstStyle/>
           <a:p>
@@ -10921,7 +13628,7 @@
             <a:r>
               <a:rPr lang="en-US" sz="900" dirty="0">
                 <a:solidFill>
-                  <a:srgbClr val="53565A"/>
+                  <a:srgbClr val="FFFFFF"/>
                 </a:solidFill>
                 <a:latin typeface="Calibri" pitchFamily="34" charset="0"/>
                 <a:ea typeface="Calibri" pitchFamily="34" charset="-122"/>
@@ -10930,223 +13637,6 @@
               <a:t>14</a:t>
             </a:r>
             <a:endParaRPr lang="en-US" sz="900" dirty="0"/>
-          </a:p>
-        </p:txBody>
-      </p:sp>
-      <p:graphicFrame>
-        <p:nvGraphicFramePr>
-          <p:cNvPr id="7" name="Chart 0" descr=""/>
-          <p:cNvGraphicFramePr/>
-          <p:nvPr/>
-        </p:nvGraphicFramePr>
-        <p:xfrm>
-          <a:off x="502006" y="2011680"/>
-          <a:ext cx="11188598" cy="3063240"/>
-        </p:xfrm>
-        <a:graphic xmlns:a="http://schemas.openxmlformats.org/drawingml/2006/main">
-          <a:graphicData uri="http://schemas.openxmlformats.org/drawingml/2006/chart">
-            <c:chart xmlns:c="http://schemas.openxmlformats.org/drawingml/2006/chart" r:id="rId1"/>
-          </a:graphicData>
-        </a:graphic>
-      </p:graphicFrame>
-      <p:sp>
-        <p:nvSpPr>
-          <p:cNvPr id="8" name="Shape 5"/>
-          <p:cNvSpPr/>
-          <p:nvPr/>
-        </p:nvSpPr>
-        <p:spPr>
-          <a:xfrm>
-            <a:off x="502006" y="5202936"/>
-            <a:ext cx="11188598" cy="0"/>
-          </a:xfrm>
-          <a:prstGeom prst="line">
-            <a:avLst/>
-          </a:prstGeom>
-          <a:noFill/>
-          <a:ln w="9525">
-            <a:solidFill>
-              <a:srgbClr val="D0D0CE"/>
-            </a:solidFill>
-            <a:prstDash val="solid"/>
-          </a:ln>
-        </p:spPr>
-      </p:sp>
-      <p:sp>
-        <p:nvSpPr>
-          <p:cNvPr id="9" name="Text 6"/>
-          <p:cNvSpPr txBox="1"/>
-          <p:nvPr/>
-        </p:nvSpPr>
-        <p:spPr>
-          <a:xfrm>
-            <a:off x="502006" y="5276088"/>
-            <a:ext cx="11188598" cy="886968"/>
-          </a:xfrm>
-          <a:prstGeom prst="rect">
-            <a:avLst/>
-          </a:prstGeom>
-          <a:noFill/>
-          <a:ln/>
-        </p:spPr>
-        <p:txBody>
-          <a:bodyPr wrap="square" lIns="0" tIns="0" rIns="0" bIns="0" rtlCol="0" anchor="t"/>
-          <a:lstStyle/>
-          <a:p>
-            <a:pPr algn="l" indent="0" marL="0">
-              <a:lnSpc>
-                <a:spcPct val="118000"/>
-              </a:lnSpc>
-              <a:buNone/>
-            </a:pPr>
-            <a:r>
-              <a:rPr lang="en-US" sz="850" b="1" dirty="0">
-                <a:solidFill>
-                  <a:srgbClr val="53565A"/>
-                </a:solidFill>
-                <a:latin typeface="Calibri" pitchFamily="34" charset="0"/>
-                <a:ea typeface="Calibri" pitchFamily="34" charset="-122"/>
-                <a:cs typeface="Calibri" pitchFamily="34" charset="-120"/>
-              </a:rPr>
-              <a:t>Single select.  </a:t>
-            </a:r>
-            <a:pPr algn="l" indent="0" marL="0">
-              <a:lnSpc>
-                <a:spcPct val="118000"/>
-              </a:lnSpc>
-              <a:buNone/>
-            </a:pPr>
-            <a:r>
-              <a:rPr lang="en-US" sz="850" b="1" dirty="0">
-                <a:solidFill>
-                  <a:srgbClr val="53565A"/>
-                </a:solidFill>
-                <a:latin typeface="Calibri" pitchFamily="34" charset="0"/>
-                <a:ea typeface="Calibri" pitchFamily="34" charset="-122"/>
-                <a:cs typeface="Calibri" pitchFamily="34" charset="-120"/>
-              </a:rPr>
-              <a:t>Response options as fielded: </a:t>
-            </a:r>
-            <a:pPr algn="l" indent="0" marL="0">
-              <a:lnSpc>
-                <a:spcPct val="118000"/>
-              </a:lnSpc>
-              <a:buNone/>
-            </a:pPr>
-            <a:r>
-              <a:rPr lang="en-US" sz="850" i="1" dirty="0">
-                <a:solidFill>
-                  <a:srgbClr val="53565A"/>
-                </a:solidFill>
-                <a:latin typeface="Calibri" pitchFamily="34" charset="0"/>
-                <a:ea typeface="Calibri" pitchFamily="34" charset="-122"/>
-                <a:cs typeface="Calibri" pitchFamily="34" charset="-120"/>
-              </a:rPr>
-              <a:t>“Strengthen onboarding verification and due diligence controls”</a:t>
-            </a:r>
-            <a:pPr algn="l" indent="0" marL="0">
-              <a:lnSpc>
-                <a:spcPct val="118000"/>
-              </a:lnSpc>
-              <a:buNone/>
-            </a:pPr>
-            <a:r>
-              <a:rPr lang="en-US" sz="850" dirty="0">
-                <a:solidFill>
-                  <a:srgbClr val="D0D0CE"/>
-                </a:solidFill>
-                <a:latin typeface="Calibri" pitchFamily="34" charset="0"/>
-                <a:ea typeface="Calibri" pitchFamily="34" charset="-122"/>
-                <a:cs typeface="Calibri" pitchFamily="34" charset="-120"/>
-              </a:rPr>
-              <a:t>  ·  </a:t>
-            </a:r>
-            <a:pPr algn="l" indent="0" marL="0">
-              <a:lnSpc>
-                <a:spcPct val="118000"/>
-              </a:lnSpc>
-              <a:buNone/>
-            </a:pPr>
-            <a:r>
-              <a:rPr lang="en-US" sz="850" i="1" dirty="0">
-                <a:solidFill>
-                  <a:srgbClr val="53565A"/>
-                </a:solidFill>
-                <a:latin typeface="Calibri" pitchFamily="34" charset="0"/>
-                <a:ea typeface="Calibri" pitchFamily="34" charset="-122"/>
-                <a:cs typeface="Calibri" pitchFamily="34" charset="-120"/>
-              </a:rPr>
-              <a:t>“Enhance ongoing monitoring and detection (e.g., surveillance, analytics, anomaly detection)”</a:t>
-            </a:r>
-            <a:pPr algn="l" indent="0" marL="0">
-              <a:lnSpc>
-                <a:spcPct val="118000"/>
-              </a:lnSpc>
-              <a:buNone/>
-            </a:pPr>
-            <a:r>
-              <a:rPr lang="en-US" sz="850" dirty="0">
-                <a:solidFill>
-                  <a:srgbClr val="D0D0CE"/>
-                </a:solidFill>
-                <a:latin typeface="Calibri" pitchFamily="34" charset="0"/>
-                <a:ea typeface="Calibri" pitchFamily="34" charset="-122"/>
-                <a:cs typeface="Calibri" pitchFamily="34" charset="-120"/>
-              </a:rPr>
-              <a:t>  ·  </a:t>
-            </a:r>
-            <a:pPr algn="l" indent="0" marL="0">
-              <a:lnSpc>
-                <a:spcPct val="118000"/>
-              </a:lnSpc>
-              <a:buNone/>
-            </a:pPr>
-            <a:r>
-              <a:rPr lang="en-US" sz="850" i="1" dirty="0">
-                <a:solidFill>
-                  <a:srgbClr val="53565A"/>
-                </a:solidFill>
-                <a:latin typeface="Calibri" pitchFamily="34" charset="0"/>
-                <a:ea typeface="Calibri" pitchFamily="34" charset="-122"/>
-                <a:cs typeface="Calibri" pitchFamily="34" charset="-120"/>
-              </a:rPr>
-              <a:t>“Increase information sharing and intelligence across onboarding and ongoing monitoring”</a:t>
-            </a:r>
-            <a:pPr algn="l" indent="0" marL="0">
-              <a:lnSpc>
-                <a:spcPct val="118000"/>
-              </a:lnSpc>
-              <a:buNone/>
-            </a:pPr>
-            <a:r>
-              <a:rPr lang="en-US" sz="850" dirty="0">
-                <a:solidFill>
-                  <a:srgbClr val="D0D0CE"/>
-                </a:solidFill>
-                <a:latin typeface="Calibri" pitchFamily="34" charset="0"/>
-                <a:ea typeface="Calibri" pitchFamily="34" charset="-122"/>
-                <a:cs typeface="Calibri" pitchFamily="34" charset="-120"/>
-              </a:rPr>
-              <a:t>  ·  </a:t>
-            </a:r>
-            <a:pPr algn="l" indent="0" marL="0">
-              <a:lnSpc>
-                <a:spcPct val="118000"/>
-              </a:lnSpc>
-              <a:buNone/>
-            </a:pPr>
-            <a:r>
-              <a:rPr lang="en-US" sz="850" i="1" dirty="0">
-                <a:solidFill>
-                  <a:srgbClr val="53565A"/>
-                </a:solidFill>
-                <a:latin typeface="Calibri" pitchFamily="34" charset="0"/>
-                <a:ea typeface="Calibri" pitchFamily="34" charset="-122"/>
-                <a:cs typeface="Calibri" pitchFamily="34" charset="-120"/>
-              </a:rPr>
-              <a:t>“Strengthen third-party oversight and accountability (e.g., annual review, standards, performance monitoring)”</a:t>
-            </a:r>
-            <a:endParaRPr lang="en-US" sz="850" dirty="0"/>
           </a:p>
         </p:txBody>
       </p:sp>
@@ -11215,7 +13705,7 @@
                 <a:ea typeface="Calibri" pitchFamily="34" charset="-122"/>
                 <a:cs typeface="Calibri" pitchFamily="34" charset="-120"/>
               </a:rPr>
-              <a:t>Strategy to Reduce Third-Party Risk — By Sector</a:t>
+              <a:t>Greatest Third-Party Fraud Risk Exposure, by Sector</a:t>
             </a:r>
             <a:endParaRPr lang="en-US" sz="1900" dirty="0"/>
           </a:p>
@@ -11257,7 +13747,7 @@
                 <a:ea typeface="Calibri" pitchFamily="34" charset="-122"/>
                 <a:cs typeface="Calibri" pitchFamily="34" charset="-120"/>
               </a:rPr>
-              <a:t>Banking leans toward intelligence-sharing; Insurance is split evenly between monitoring and oversight.</a:t>
+              <a:t>Banks and insurers face very different third-party risks — one fix won't work for both.</a:t>
             </a:r>
             <a:endParaRPr lang="en-US" sz="1350" dirty="0"/>
           </a:p>
@@ -11322,7 +13812,7 @@
                 <a:ea typeface="IBM Plex Mono" pitchFamily="34" charset="-122"/>
                 <a:cs typeface="IBM Plex Mono" pitchFamily="34" charset="-120"/>
               </a:rPr>
-              <a:t>Q7  </a:t>
+              <a:t>Q6a / Q6b  </a:t>
             </a:r>
             <a:pPr algn="l" indent="0" marL="0">
               <a:lnSpc>
@@ -11339,7 +13829,7 @@
                 <a:ea typeface="Calibri" pitchFamily="34" charset="-122"/>
                 <a:cs typeface="Calibri" pitchFamily="34" charset="-120"/>
               </a:rPr>
-              <a:t>“Which strategy is expected to have the greatest impact on reducing third-party fraud risk over the next three years? (Banking vs. Insurance)”</a:t>
+              <a:t>“Which external party currently presents the greatest fraud risk exposure to your organization? (asked separately of Banking and Insurance respondents)”</a:t>
             </a:r>
             <a:endParaRPr lang="en-US" sz="1000" dirty="0"/>
           </a:p>
@@ -11384,15 +13874,54 @@
           </a:p>
         </p:txBody>
       </p:sp>
+      <p:sp>
+        <p:nvSpPr>
+          <p:cNvPr id="7" name="Text 5"/>
+          <p:cNvSpPr txBox="1"/>
+          <p:nvPr/>
+        </p:nvSpPr>
+        <p:spPr>
+          <a:xfrm>
+            <a:off x="502006" y="1965960"/>
+            <a:ext cx="5486400" cy="256032"/>
+          </a:xfrm>
+          <a:prstGeom prst="rect">
+            <a:avLst/>
+          </a:prstGeom>
+          <a:noFill/>
+          <a:ln/>
+        </p:spPr>
+        <p:txBody>
+          <a:bodyPr wrap="square" rtlCol="0" anchor="ctr"/>
+          <a:lstStyle/>
+          <a:p>
+            <a:pPr indent="0" marL="0">
+              <a:buNone/>
+            </a:pPr>
+            <a:r>
+              <a:rPr lang="en-US" sz="1150" b="1" dirty="0">
+                <a:solidFill>
+                  <a:srgbClr val="000000"/>
+                </a:solidFill>
+                <a:latin typeface="Calibri" pitchFamily="34" charset="0"/>
+                <a:ea typeface="Calibri" pitchFamily="34" charset="-122"/>
+                <a:cs typeface="Calibri" pitchFamily="34" charset="-120"/>
+              </a:rPr>
+              <a:t>Banking (n=75)</a:t>
+            </a:r>
+            <a:endParaRPr lang="en-US" sz="1150" dirty="0"/>
+          </a:p>
+        </p:txBody>
+      </p:sp>
       <p:graphicFrame>
         <p:nvGraphicFramePr>
-          <p:cNvPr id="7" name="Chart 0" descr=""/>
+          <p:cNvPr id="8" name="Chart 0" descr=""/>
           <p:cNvGraphicFramePr/>
           <p:nvPr/>
         </p:nvGraphicFramePr>
         <p:xfrm>
-          <a:off x="502006" y="2011680"/>
-          <a:ext cx="11188598" cy="3063240"/>
+          <a:off x="502006" y="2267712"/>
+          <a:ext cx="5486400" cy="2743200"/>
         </p:xfrm>
         <a:graphic xmlns:a="http://schemas.openxmlformats.org/drawingml/2006/main">
           <a:graphicData uri="http://schemas.openxmlformats.org/drawingml/2006/chart">
@@ -11402,13 +13931,68 @@
       </p:graphicFrame>
       <p:sp>
         <p:nvSpPr>
-          <p:cNvPr id="8" name="Shape 5"/>
+          <p:cNvPr id="9" name="Text 6"/>
+          <p:cNvSpPr txBox="1"/>
+          <p:nvPr/>
+        </p:nvSpPr>
+        <p:spPr>
+          <a:xfrm>
+            <a:off x="6172200" y="1965960"/>
+            <a:ext cx="5486400" cy="256032"/>
+          </a:xfrm>
+          <a:prstGeom prst="rect">
+            <a:avLst/>
+          </a:prstGeom>
+          <a:noFill/>
+          <a:ln/>
+        </p:spPr>
+        <p:txBody>
+          <a:bodyPr wrap="square" rtlCol="0" anchor="ctr"/>
+          <a:lstStyle/>
+          <a:p>
+            <a:pPr indent="0" marL="0">
+              <a:buNone/>
+            </a:pPr>
+            <a:r>
+              <a:rPr lang="en-US" sz="1150" b="1" dirty="0">
+                <a:solidFill>
+                  <a:srgbClr val="000000"/>
+                </a:solidFill>
+                <a:latin typeface="Calibri" pitchFamily="34" charset="0"/>
+                <a:ea typeface="Calibri" pitchFamily="34" charset="-122"/>
+                <a:cs typeface="Calibri" pitchFamily="34" charset="-120"/>
+              </a:rPr>
+              <a:t>Insurance (n=25)</a:t>
+            </a:r>
+            <a:endParaRPr lang="en-US" sz="1150" dirty="0"/>
+          </a:p>
+        </p:txBody>
+      </p:sp>
+      <p:graphicFrame>
+        <p:nvGraphicFramePr>
+          <p:cNvPr id="10" name="Chart 1" descr=""/>
+          <p:cNvGraphicFramePr/>
+          <p:nvPr/>
+        </p:nvGraphicFramePr>
+        <p:xfrm>
+          <a:off x="6172200" y="2267712"/>
+          <a:ext cx="5486400" cy="2743200"/>
+        </p:xfrm>
+        <a:graphic xmlns:a="http://schemas.openxmlformats.org/drawingml/2006/main">
+          <a:graphicData uri="http://schemas.openxmlformats.org/drawingml/2006/chart">
+            <c:chart xmlns:c="http://schemas.openxmlformats.org/drawingml/2006/chart" r:id="rId2"/>
+          </a:graphicData>
+        </a:graphic>
+      </p:graphicFrame>
+      <p:sp>
+        <p:nvSpPr>
+          <p:cNvPr id="11" name="Shape 7"/>
           <p:cNvSpPr/>
           <p:nvPr/>
         </p:nvSpPr>
         <p:spPr>
           <a:xfrm>
-            <a:off x="502006" y="5202936"/>
+            <a:off x="502006" y="5120640"/>
             <a:ext cx="11188598" cy="0"/>
           </a:xfrm>
           <a:prstGeom prst="line">
@@ -11425,14 +14009,14 @@
       </p:sp>
       <p:sp>
         <p:nvSpPr>
-          <p:cNvPr id="9" name="Text 6"/>
+          <p:cNvPr id="12" name="Text 8"/>
           <p:cNvSpPr txBox="1"/>
           <p:nvPr/>
         </p:nvSpPr>
         <p:spPr>
           <a:xfrm>
-            <a:off x="502006" y="5276088"/>
-            <a:ext cx="11188598" cy="886968"/>
+            <a:off x="502006" y="5193792"/>
+            <a:ext cx="11188598" cy="914400"/>
           </a:xfrm>
           <a:prstGeom prst="rect">
             <a:avLst/>
@@ -11459,7 +14043,7 @@
                 <a:ea typeface="Calibri" pitchFamily="34" charset="-122"/>
                 <a:cs typeface="Calibri" pitchFamily="34" charset="-120"/>
               </a:rPr>
-              <a:t>Single select.  </a:t>
+              <a:t>Response options as fielded — </a:t>
             </a:r>
             <a:pPr algn="l" indent="0" marL="0">
               <a:lnSpc>
@@ -11470,13 +14054,13 @@
             <a:r>
               <a:rPr lang="en-US" sz="850" b="1" dirty="0">
                 <a:solidFill>
-                  <a:srgbClr val="53565A"/>
-                </a:solidFill>
-                <a:latin typeface="Calibri" pitchFamily="34" charset="0"/>
-                <a:ea typeface="Calibri" pitchFamily="34" charset="-122"/>
-                <a:cs typeface="Calibri" pitchFamily="34" charset="-120"/>
-              </a:rPr>
-              <a:t>Response options as fielded: </a:t>
+                  <a:srgbClr val="046A38"/>
+                </a:solidFill>
+                <a:latin typeface="Calibri" pitchFamily="34" charset="0"/>
+                <a:ea typeface="Calibri" pitchFamily="34" charset="-122"/>
+                <a:cs typeface="Calibri" pitchFamily="34" charset="-120"/>
+              </a:rPr>
+              <a:t>Q6a Banking: </a:t>
             </a:r>
             <a:pPr algn="l" indent="0" marL="0">
               <a:lnSpc>
@@ -11493,7 +14077,7 @@
                 <a:ea typeface="Calibri" pitchFamily="34" charset="-122"/>
                 <a:cs typeface="Calibri" pitchFamily="34" charset="-120"/>
               </a:rPr>
-              <a:t>“Strengthen onboarding verification and due diligence controls”</a:t>
+              <a:t>Mortgage brokers · Merchants · Fintech Partners · Dealers &amp; Indirect Lending Partners · Business &amp; Commercial Clients · Appraisers</a:t>
             </a:r>
             <a:pPr algn="l" indent="0" marL="0">
               <a:lnSpc>
@@ -11502,15 +14086,15 @@
               <a:buNone/>
             </a:pPr>
             <a:r>
-              <a:rPr lang="en-US" sz="850" dirty="0">
-                <a:solidFill>
-                  <a:srgbClr val="D0D0CE"/>
-                </a:solidFill>
-                <a:latin typeface="Calibri" pitchFamily="34" charset="0"/>
-                <a:ea typeface="Calibri" pitchFamily="34" charset="-122"/>
-                <a:cs typeface="Calibri" pitchFamily="34" charset="-120"/>
-              </a:rPr>
-              <a:t>  ·  </a:t>
+              <a:rPr lang="en-US" sz="850" b="1" dirty="0">
+                <a:solidFill>
+                  <a:srgbClr val="046A38"/>
+                </a:solidFill>
+                <a:latin typeface="Calibri" pitchFamily="34" charset="0"/>
+                <a:ea typeface="Calibri" pitchFamily="34" charset="-122"/>
+                <a:cs typeface="Calibri" pitchFamily="34" charset="-120"/>
+              </a:rPr>
+              <a:t>  ·  Q6b Insurance: </a:t>
             </a:r>
             <a:pPr algn="l" indent="0" marL="0">
               <a:lnSpc>
@@ -11527,75 +14111,7 @@
                 <a:ea typeface="Calibri" pitchFamily="34" charset="-122"/>
                 <a:cs typeface="Calibri" pitchFamily="34" charset="-120"/>
               </a:rPr>
-              <a:t>“Enhance ongoing monitoring and detection (e.g., surveillance, analytics, anomaly detection)”</a:t>
-            </a:r>
-            <a:pPr algn="l" indent="0" marL="0">
-              <a:lnSpc>
-                <a:spcPct val="118000"/>
-              </a:lnSpc>
-              <a:buNone/>
-            </a:pPr>
-            <a:r>
-              <a:rPr lang="en-US" sz="850" dirty="0">
-                <a:solidFill>
-                  <a:srgbClr val="D0D0CE"/>
-                </a:solidFill>
-                <a:latin typeface="Calibri" pitchFamily="34" charset="0"/>
-                <a:ea typeface="Calibri" pitchFamily="34" charset="-122"/>
-                <a:cs typeface="Calibri" pitchFamily="34" charset="-120"/>
-              </a:rPr>
-              <a:t>  ·  </a:t>
-            </a:r>
-            <a:pPr algn="l" indent="0" marL="0">
-              <a:lnSpc>
-                <a:spcPct val="118000"/>
-              </a:lnSpc>
-              <a:buNone/>
-            </a:pPr>
-            <a:r>
-              <a:rPr lang="en-US" sz="850" i="1" dirty="0">
-                <a:solidFill>
-                  <a:srgbClr val="53565A"/>
-                </a:solidFill>
-                <a:latin typeface="Calibri" pitchFamily="34" charset="0"/>
-                <a:ea typeface="Calibri" pitchFamily="34" charset="-122"/>
-                <a:cs typeface="Calibri" pitchFamily="34" charset="-120"/>
-              </a:rPr>
-              <a:t>“Increase information sharing and intelligence across onboarding and ongoing monitoring”</a:t>
-            </a:r>
-            <a:pPr algn="l" indent="0" marL="0">
-              <a:lnSpc>
-                <a:spcPct val="118000"/>
-              </a:lnSpc>
-              <a:buNone/>
-            </a:pPr>
-            <a:r>
-              <a:rPr lang="en-US" sz="850" dirty="0">
-                <a:solidFill>
-                  <a:srgbClr val="D0D0CE"/>
-                </a:solidFill>
-                <a:latin typeface="Calibri" pitchFamily="34" charset="0"/>
-                <a:ea typeface="Calibri" pitchFamily="34" charset="-122"/>
-                <a:cs typeface="Calibri" pitchFamily="34" charset="-120"/>
-              </a:rPr>
-              <a:t>  ·  </a:t>
-            </a:r>
-            <a:pPr algn="l" indent="0" marL="0">
-              <a:lnSpc>
-                <a:spcPct val="118000"/>
-              </a:lnSpc>
-              <a:buNone/>
-            </a:pPr>
-            <a:r>
-              <a:rPr lang="en-US" sz="850" i="1" dirty="0">
-                <a:solidFill>
-                  <a:srgbClr val="53565A"/>
-                </a:solidFill>
-                <a:latin typeface="Calibri" pitchFamily="34" charset="0"/>
-                <a:ea typeface="Calibri" pitchFamily="34" charset="-122"/>
-                <a:cs typeface="Calibri" pitchFamily="34" charset="-120"/>
-              </a:rPr>
-              <a:t>“Strengthen third-party oversight and accountability (e.g., annual review, standards, performance monitoring)”</a:t>
+              <a:t>Brokers and distribution partners · Health care providers · Automotive service providers · Legal representatives and paralegals · Third-party administrators (TPAs) · Property claims service providers</a:t>
             </a:r>
             <a:endParaRPr lang="en-US" sz="850" dirty="0"/>
           </a:p>
@@ -11615,7 +14131,7 @@
     <p:bg>
       <p:bgPr>
         <a:solidFill>
-          <a:srgbClr val="86BC25"/>
+          <a:srgbClr val="FFFFFF"/>
         </a:solidFill>
       </p:bgPr>
     </p:bg>
@@ -11641,8 +14157,8 @@
         </p:nvSpPr>
         <p:spPr>
           <a:xfrm>
-            <a:off x="502920" y="1699870"/>
-            <a:ext cx="10415016" cy="1591970"/>
+            <a:off x="502006" y="256032"/>
+            <a:ext cx="11188598" cy="310896"/>
           </a:xfrm>
           <a:prstGeom prst="rect">
             <a:avLst/>
@@ -11651,24 +14167,24 @@
           <a:ln/>
         </p:spPr>
         <p:txBody>
-          <a:bodyPr wrap="square" lIns="0" tIns="0" rIns="0" bIns="0" rtlCol="0" anchor="b"/>
-          <a:lstStyle/>
-          <a:p>
-            <a:pPr algn="l" indent="0" marL="0">
-              <a:buNone/>
-            </a:pPr>
-            <a:r>
-              <a:rPr lang="en-US" sz="3600" b="1" dirty="0">
-                <a:solidFill>
-                  <a:srgbClr val="FFFFFF"/>
-                </a:solidFill>
-                <a:latin typeface="Calibri" pitchFamily="34" charset="0"/>
-                <a:ea typeface="Calibri" pitchFamily="34" charset="-122"/>
-                <a:cs typeface="Calibri" pitchFamily="34" charset="-120"/>
-              </a:rPr>
-              <a:t>4. Operating Model Transformation</a:t>
-            </a:r>
-            <a:endParaRPr lang="en-US" sz="3600" dirty="0"/>
+          <a:bodyPr wrap="square" lIns="0" tIns="0" rIns="0" bIns="0" rtlCol="0" anchor="t"/>
+          <a:lstStyle/>
+          <a:p>
+            <a:pPr algn="l" indent="0" marL="0">
+              <a:buNone/>
+            </a:pPr>
+            <a:r>
+              <a:rPr lang="en-US" sz="1900" b="1" dirty="0">
+                <a:solidFill>
+                  <a:srgbClr val="000000"/>
+                </a:solidFill>
+                <a:latin typeface="Calibri" pitchFamily="34" charset="0"/>
+                <a:ea typeface="Calibri" pitchFamily="34" charset="-122"/>
+                <a:cs typeface="Calibri" pitchFamily="34" charset="-120"/>
+              </a:rPr>
+              <a:t>Strategy Expected to Most Reduce Third-Party Risk</a:t>
+            </a:r>
+            <a:endParaRPr lang="en-US" sz="1900" dirty="0"/>
           </a:p>
         </p:txBody>
       </p:sp>
@@ -11680,8 +14196,8 @@
         </p:nvSpPr>
         <p:spPr>
           <a:xfrm>
-            <a:off x="502920" y="3423514"/>
-            <a:ext cx="10415016" cy="1563624"/>
+            <a:off x="502006" y="585216"/>
+            <a:ext cx="11188598" cy="713232"/>
           </a:xfrm>
           <a:prstGeom prst="rect">
             <a:avLst/>
@@ -11695,28 +14211,110 @@
           <a:p>
             <a:pPr algn="l" indent="0" marL="0">
               <a:lnSpc>
-                <a:spcPct val="110000"/>
+                <a:spcPct val="105000"/>
               </a:lnSpc>
               <a:buNone/>
             </a:pPr>
             <a:r>
-              <a:rPr lang="en-US" sz="1600" dirty="0">
-                <a:solidFill>
-                  <a:srgbClr val="FFFFFF"/>
-                </a:solidFill>
-                <a:latin typeface="Calibri" pitchFamily="34" charset="0"/>
-                <a:ea typeface="Calibri" pitchFamily="34" charset="-122"/>
-                <a:cs typeface="Calibri" pitchFamily="34" charset="-120"/>
-              </a:rPr>
-              <a:t>Self-reported program maturity, and how the mix of scaling levers shifts over the next 3 years.</a:t>
-            </a:r>
-            <a:endParaRPr lang="en-US" sz="1600" dirty="0"/>
+              <a:rPr lang="en-US" sz="1350" b="1" dirty="0">
+                <a:solidFill>
+                  <a:srgbClr val="046A38"/>
+                </a:solidFill>
+                <a:latin typeface="Calibri" pitchFamily="34" charset="0"/>
+                <a:ea typeface="Calibri" pitchFamily="34" charset="-122"/>
+                <a:cs typeface="Calibri" pitchFamily="34" charset="-120"/>
+              </a:rPr>
+              <a:t>Leaders would rather get smarter about spotting risk than tighten the front door.</a:t>
+            </a:r>
+            <a:endParaRPr lang="en-US" sz="1350" dirty="0"/>
           </a:p>
         </p:txBody>
       </p:sp>
       <p:sp>
         <p:nvSpPr>
-          <p:cNvPr id="4" name="Text 2"/>
+          <p:cNvPr id="4" name="Shape 2"/>
+          <p:cNvSpPr/>
+          <p:nvPr/>
+        </p:nvSpPr>
+        <p:spPr>
+          <a:xfrm>
+            <a:off x="502006" y="1335024"/>
+            <a:ext cx="0" cy="512064"/>
+          </a:xfrm>
+          <a:prstGeom prst="line">
+            <a:avLst/>
+          </a:prstGeom>
+          <a:noFill/>
+          <a:ln w="25400">
+            <a:solidFill>
+              <a:srgbClr val="D0D0CE"/>
+            </a:solidFill>
+            <a:prstDash val="solid"/>
+          </a:ln>
+        </p:spPr>
+      </p:sp>
+      <p:sp>
+        <p:nvSpPr>
+          <p:cNvPr id="5" name="Text 3"/>
+          <p:cNvSpPr txBox="1"/>
+          <p:nvPr/>
+        </p:nvSpPr>
+        <p:spPr>
+          <a:xfrm>
+            <a:off x="648310" y="1335024"/>
+            <a:ext cx="11042294" cy="512064"/>
+          </a:xfrm>
+          <a:prstGeom prst="rect">
+            <a:avLst/>
+          </a:prstGeom>
+          <a:noFill/>
+          <a:ln/>
+        </p:spPr>
+        <p:txBody>
+          <a:bodyPr wrap="square" lIns="0" tIns="0" rIns="0" bIns="0" rtlCol="0" anchor="t"/>
+          <a:lstStyle/>
+          <a:p>
+            <a:pPr algn="l" indent="0" marL="0">
+              <a:lnSpc>
+                <a:spcPct val="106000"/>
+              </a:lnSpc>
+              <a:buNone/>
+            </a:pPr>
+            <a:r>
+              <a:rPr lang="en-US" sz="900" b="1" dirty="0">
+                <a:solidFill>
+                  <a:srgbClr val="046A38"/>
+                </a:solidFill>
+                <a:latin typeface="IBM Plex Mono" pitchFamily="34" charset="0"/>
+                <a:ea typeface="IBM Plex Mono" pitchFamily="34" charset="-122"/>
+                <a:cs typeface="IBM Plex Mono" pitchFamily="34" charset="-120"/>
+              </a:rPr>
+              <a:t>Q7  </a:t>
+            </a:r>
+            <a:pPr algn="l" indent="0" marL="0">
+              <a:lnSpc>
+                <a:spcPct val="106000"/>
+              </a:lnSpc>
+              <a:buNone/>
+            </a:pPr>
+            <a:r>
+              <a:rPr lang="en-US" sz="1000" i="1" dirty="0">
+                <a:solidFill>
+                  <a:srgbClr val="575757"/>
+                </a:solidFill>
+                <a:latin typeface="Calibri" pitchFamily="34" charset="0"/>
+                <a:ea typeface="Calibri" pitchFamily="34" charset="-122"/>
+                <a:cs typeface="Calibri" pitchFamily="34" charset="-120"/>
+              </a:rPr>
+              <a:t>“Which strategy is expected to have the greatest impact on reducing third-party fraud risk over the next three years?”</a:t>
+            </a:r>
+            <a:endParaRPr lang="en-US" sz="1000" dirty="0"/>
+          </a:p>
+        </p:txBody>
+      </p:sp>
+      <p:sp>
+        <p:nvSpPr>
+          <p:cNvPr id="6" name="Text 4"/>
           <p:cNvSpPr txBox="1"/>
           <p:nvPr/>
         </p:nvSpPr>
@@ -11741,7 +14339,7 @@
             <a:r>
               <a:rPr lang="en-US" sz="900" dirty="0">
                 <a:solidFill>
-                  <a:srgbClr val="FFFFFF"/>
+                  <a:srgbClr val="53565A"/>
                 </a:solidFill>
                 <a:latin typeface="Calibri" pitchFamily="34" charset="0"/>
                 <a:ea typeface="Calibri" pitchFamily="34" charset="-122"/>
@@ -11750,6 +14348,223 @@
               <a:t>16</a:t>
             </a:r>
             <a:endParaRPr lang="en-US" sz="900" dirty="0"/>
+          </a:p>
+        </p:txBody>
+      </p:sp>
+      <p:graphicFrame>
+        <p:nvGraphicFramePr>
+          <p:cNvPr id="7" name="Chart 0" descr=""/>
+          <p:cNvGraphicFramePr/>
+          <p:nvPr/>
+        </p:nvGraphicFramePr>
+        <p:xfrm>
+          <a:off x="502006" y="2011680"/>
+          <a:ext cx="11188598" cy="3063240"/>
+        </p:xfrm>
+        <a:graphic xmlns:a="http://schemas.openxmlformats.org/drawingml/2006/main">
+          <a:graphicData uri="http://schemas.openxmlformats.org/drawingml/2006/chart">
+            <c:chart xmlns:c="http://schemas.openxmlformats.org/drawingml/2006/chart" r:id="rId1"/>
+          </a:graphicData>
+        </a:graphic>
+      </p:graphicFrame>
+      <p:sp>
+        <p:nvSpPr>
+          <p:cNvPr id="8" name="Shape 5"/>
+          <p:cNvSpPr/>
+          <p:nvPr/>
+        </p:nvSpPr>
+        <p:spPr>
+          <a:xfrm>
+            <a:off x="502006" y="5202936"/>
+            <a:ext cx="11188598" cy="0"/>
+          </a:xfrm>
+          <a:prstGeom prst="line">
+            <a:avLst/>
+          </a:prstGeom>
+          <a:noFill/>
+          <a:ln w="9525">
+            <a:solidFill>
+              <a:srgbClr val="D0D0CE"/>
+            </a:solidFill>
+            <a:prstDash val="solid"/>
+          </a:ln>
+        </p:spPr>
+      </p:sp>
+      <p:sp>
+        <p:nvSpPr>
+          <p:cNvPr id="9" name="Text 6"/>
+          <p:cNvSpPr txBox="1"/>
+          <p:nvPr/>
+        </p:nvSpPr>
+        <p:spPr>
+          <a:xfrm>
+            <a:off x="502006" y="5276088"/>
+            <a:ext cx="11188598" cy="886968"/>
+          </a:xfrm>
+          <a:prstGeom prst="rect">
+            <a:avLst/>
+          </a:prstGeom>
+          <a:noFill/>
+          <a:ln/>
+        </p:spPr>
+        <p:txBody>
+          <a:bodyPr wrap="square" lIns="0" tIns="0" rIns="0" bIns="0" rtlCol="0" anchor="t"/>
+          <a:lstStyle/>
+          <a:p>
+            <a:pPr algn="l" indent="0" marL="0">
+              <a:lnSpc>
+                <a:spcPct val="118000"/>
+              </a:lnSpc>
+              <a:buNone/>
+            </a:pPr>
+            <a:r>
+              <a:rPr lang="en-US" sz="850" b="1" dirty="0">
+                <a:solidFill>
+                  <a:srgbClr val="53565A"/>
+                </a:solidFill>
+                <a:latin typeface="Calibri" pitchFamily="34" charset="0"/>
+                <a:ea typeface="Calibri" pitchFamily="34" charset="-122"/>
+                <a:cs typeface="Calibri" pitchFamily="34" charset="-120"/>
+              </a:rPr>
+              <a:t>Single select.  </a:t>
+            </a:r>
+            <a:pPr algn="l" indent="0" marL="0">
+              <a:lnSpc>
+                <a:spcPct val="118000"/>
+              </a:lnSpc>
+              <a:buNone/>
+            </a:pPr>
+            <a:r>
+              <a:rPr lang="en-US" sz="850" b="1" dirty="0">
+                <a:solidFill>
+                  <a:srgbClr val="53565A"/>
+                </a:solidFill>
+                <a:latin typeface="Calibri" pitchFamily="34" charset="0"/>
+                <a:ea typeface="Calibri" pitchFamily="34" charset="-122"/>
+                <a:cs typeface="Calibri" pitchFamily="34" charset="-120"/>
+              </a:rPr>
+              <a:t>Response options as fielded: </a:t>
+            </a:r>
+            <a:pPr algn="l" indent="0" marL="0">
+              <a:lnSpc>
+                <a:spcPct val="118000"/>
+              </a:lnSpc>
+              <a:buNone/>
+            </a:pPr>
+            <a:r>
+              <a:rPr lang="en-US" sz="850" i="1" dirty="0">
+                <a:solidFill>
+                  <a:srgbClr val="53565A"/>
+                </a:solidFill>
+                <a:latin typeface="Calibri" pitchFamily="34" charset="0"/>
+                <a:ea typeface="Calibri" pitchFamily="34" charset="-122"/>
+                <a:cs typeface="Calibri" pitchFamily="34" charset="-120"/>
+              </a:rPr>
+              <a:t>“Strengthen onboarding verification and due diligence controls”</a:t>
+            </a:r>
+            <a:pPr algn="l" indent="0" marL="0">
+              <a:lnSpc>
+                <a:spcPct val="118000"/>
+              </a:lnSpc>
+              <a:buNone/>
+            </a:pPr>
+            <a:r>
+              <a:rPr lang="en-US" sz="850" dirty="0">
+                <a:solidFill>
+                  <a:srgbClr val="D0D0CE"/>
+                </a:solidFill>
+                <a:latin typeface="Calibri" pitchFamily="34" charset="0"/>
+                <a:ea typeface="Calibri" pitchFamily="34" charset="-122"/>
+                <a:cs typeface="Calibri" pitchFamily="34" charset="-120"/>
+              </a:rPr>
+              <a:t>  ·  </a:t>
+            </a:r>
+            <a:pPr algn="l" indent="0" marL="0">
+              <a:lnSpc>
+                <a:spcPct val="118000"/>
+              </a:lnSpc>
+              <a:buNone/>
+            </a:pPr>
+            <a:r>
+              <a:rPr lang="en-US" sz="850" i="1" dirty="0">
+                <a:solidFill>
+                  <a:srgbClr val="53565A"/>
+                </a:solidFill>
+                <a:latin typeface="Calibri" pitchFamily="34" charset="0"/>
+                <a:ea typeface="Calibri" pitchFamily="34" charset="-122"/>
+                <a:cs typeface="Calibri" pitchFamily="34" charset="-120"/>
+              </a:rPr>
+              <a:t>“Enhance ongoing monitoring and detection (e.g., surveillance, analytics, anomaly detection)”</a:t>
+            </a:r>
+            <a:pPr algn="l" indent="0" marL="0">
+              <a:lnSpc>
+                <a:spcPct val="118000"/>
+              </a:lnSpc>
+              <a:buNone/>
+            </a:pPr>
+            <a:r>
+              <a:rPr lang="en-US" sz="850" dirty="0">
+                <a:solidFill>
+                  <a:srgbClr val="D0D0CE"/>
+                </a:solidFill>
+                <a:latin typeface="Calibri" pitchFamily="34" charset="0"/>
+                <a:ea typeface="Calibri" pitchFamily="34" charset="-122"/>
+                <a:cs typeface="Calibri" pitchFamily="34" charset="-120"/>
+              </a:rPr>
+              <a:t>  ·  </a:t>
+            </a:r>
+            <a:pPr algn="l" indent="0" marL="0">
+              <a:lnSpc>
+                <a:spcPct val="118000"/>
+              </a:lnSpc>
+              <a:buNone/>
+            </a:pPr>
+            <a:r>
+              <a:rPr lang="en-US" sz="850" i="1" dirty="0">
+                <a:solidFill>
+                  <a:srgbClr val="53565A"/>
+                </a:solidFill>
+                <a:latin typeface="Calibri" pitchFamily="34" charset="0"/>
+                <a:ea typeface="Calibri" pitchFamily="34" charset="-122"/>
+                <a:cs typeface="Calibri" pitchFamily="34" charset="-120"/>
+              </a:rPr>
+              <a:t>“Increase information sharing and intelligence across onboarding and ongoing monitoring”</a:t>
+            </a:r>
+            <a:pPr algn="l" indent="0" marL="0">
+              <a:lnSpc>
+                <a:spcPct val="118000"/>
+              </a:lnSpc>
+              <a:buNone/>
+            </a:pPr>
+            <a:r>
+              <a:rPr lang="en-US" sz="850" dirty="0">
+                <a:solidFill>
+                  <a:srgbClr val="D0D0CE"/>
+                </a:solidFill>
+                <a:latin typeface="Calibri" pitchFamily="34" charset="0"/>
+                <a:ea typeface="Calibri" pitchFamily="34" charset="-122"/>
+                <a:cs typeface="Calibri" pitchFamily="34" charset="-120"/>
+              </a:rPr>
+              <a:t>  ·  </a:t>
+            </a:r>
+            <a:pPr algn="l" indent="0" marL="0">
+              <a:lnSpc>
+                <a:spcPct val="118000"/>
+              </a:lnSpc>
+              <a:buNone/>
+            </a:pPr>
+            <a:r>
+              <a:rPr lang="en-US" sz="850" i="1" dirty="0">
+                <a:solidFill>
+                  <a:srgbClr val="53565A"/>
+                </a:solidFill>
+                <a:latin typeface="Calibri" pitchFamily="34" charset="0"/>
+                <a:ea typeface="Calibri" pitchFamily="34" charset="-122"/>
+                <a:cs typeface="Calibri" pitchFamily="34" charset="-120"/>
+              </a:rPr>
+              <a:t>“Strengthen third-party oversight and accountability (e.g., annual review, standards, performance monitoring)”</a:t>
+            </a:r>
+            <a:endParaRPr lang="en-US" sz="850" dirty="0"/>
           </a:p>
         </p:txBody>
       </p:sp>
@@ -11818,7 +14633,7 @@
                 <a:ea typeface="Calibri" pitchFamily="34" charset="-122"/>
                 <a:cs typeface="Calibri" pitchFamily="34" charset="-120"/>
               </a:rPr>
-              <a:t>Self-Reported Fraud Program Maturity — By Sector</a:t>
+              <a:t>Strategy to Reduce Third-Party Risk — By Sector</a:t>
             </a:r>
             <a:endParaRPr lang="en-US" sz="1900" dirty="0"/>
           </a:p>
@@ -11860,7 +14675,7 @@
                 <a:ea typeface="Calibri" pitchFamily="34" charset="-122"/>
                 <a:cs typeface="Calibri" pitchFamily="34" charset="-120"/>
               </a:rPr>
-              <a:t>82% self-rate “Integrated” or “Advanced” overall — but Banking clusters at Integrated while Insurance skews further, to Advanced.</a:t>
+              <a:t>Banking leans toward intelligence-sharing; Insurance is split evenly between monitoring and oversight.</a:t>
             </a:r>
             <a:endParaRPr lang="en-US" sz="1350" dirty="0"/>
           </a:p>
@@ -11925,7 +14740,7 @@
                 <a:ea typeface="IBM Plex Mono" pitchFamily="34" charset="-122"/>
                 <a:cs typeface="IBM Plex Mono" pitchFamily="34" charset="-120"/>
               </a:rPr>
-              <a:t>Q1  </a:t>
+              <a:t>Q7  </a:t>
             </a:r>
             <a:pPr algn="l" indent="0" marL="0">
               <a:lnSpc>
@@ -11942,7 +14757,7 @@
                 <a:ea typeface="Calibri" pitchFamily="34" charset="-122"/>
                 <a:cs typeface="Calibri" pitchFamily="34" charset="-120"/>
               </a:rPr>
-              <a:t>“Which statement best describes the current maturity of your organization's fraud program? (Banking vs. Insurance)”</a:t>
+              <a:t>“Which strategy is expected to have the greatest impact on reducing third-party fraud risk over the next three years? (Banking vs. Insurance)”</a:t>
             </a:r>
             <a:endParaRPr lang="en-US" sz="1000" dirty="0"/>
           </a:p>
@@ -12062,7 +14877,7 @@
                 <a:ea typeface="Calibri" pitchFamily="34" charset="-122"/>
                 <a:cs typeface="Calibri" pitchFamily="34" charset="-120"/>
               </a:rPr>
-              <a:t>Single select · low → high maturity.  </a:t>
+              <a:t>Single select.  </a:t>
             </a:r>
             <a:pPr algn="l" indent="0" marL="0">
               <a:lnSpc>
@@ -12096,7 +14911,7 @@
                 <a:ea typeface="Calibri" pitchFamily="34" charset="-122"/>
                 <a:cs typeface="Calibri" pitchFamily="34" charset="-120"/>
               </a:rPr>
-              <a:t>“Reactive: Primarily incident-driven”</a:t>
+              <a:t>“Strengthen onboarding verification and due diligence controls”</a:t>
             </a:r>
             <a:pPr algn="l" indent="0" marL="0">
               <a:lnSpc>
@@ -12130,7 +14945,7 @@
                 <a:ea typeface="Calibri" pitchFamily="34" charset="-122"/>
                 <a:cs typeface="Calibri" pitchFamily="34" charset="-120"/>
               </a:rPr>
-              <a:t>“Foundational: Controls established within individual business units”</a:t>
+              <a:t>“Enhance ongoing monitoring and detection (e.g., surveillance, analytics, anomaly detection)”</a:t>
             </a:r>
             <a:pPr algn="l" indent="0" marL="0">
               <a:lnSpc>
@@ -12164,7 +14979,7 @@
                 <a:ea typeface="Calibri" pitchFamily="34" charset="-122"/>
                 <a:cs typeface="Calibri" pitchFamily="34" charset="-120"/>
               </a:rPr>
-              <a:t>“Managed: Enterprise standards and governance are in place”</a:t>
+              <a:t>“Increase information sharing and intelligence across onboarding and ongoing monitoring”</a:t>
             </a:r>
             <a:pPr algn="l" indent="0" marL="0">
               <a:lnSpc>
@@ -12198,41 +15013,7 @@
                 <a:ea typeface="Calibri" pitchFamily="34" charset="-122"/>
                 <a:cs typeface="Calibri" pitchFamily="34" charset="-120"/>
               </a:rPr>
-              <a:t>“Integrated: Data, analytics, and operations are integrated across major fraud types”</a:t>
-            </a:r>
-            <a:pPr algn="l" indent="0" marL="0">
-              <a:lnSpc>
-                <a:spcPct val="118000"/>
-              </a:lnSpc>
-              <a:buNone/>
-            </a:pPr>
-            <a:r>
-              <a:rPr lang="en-US" sz="850" dirty="0">
-                <a:solidFill>
-                  <a:srgbClr val="D0D0CE"/>
-                </a:solidFill>
-                <a:latin typeface="Calibri" pitchFamily="34" charset="0"/>
-                <a:ea typeface="Calibri" pitchFamily="34" charset="-122"/>
-                <a:cs typeface="Calibri" pitchFamily="34" charset="-120"/>
-              </a:rPr>
-              <a:t>  ·  </a:t>
-            </a:r>
-            <a:pPr algn="l" indent="0" marL="0">
-              <a:lnSpc>
-                <a:spcPct val="118000"/>
-              </a:lnSpc>
-              <a:buNone/>
-            </a:pPr>
-            <a:r>
-              <a:rPr lang="en-US" sz="850" i="1" dirty="0">
-                <a:solidFill>
-                  <a:srgbClr val="53565A"/>
-                </a:solidFill>
-                <a:latin typeface="Calibri" pitchFamily="34" charset="0"/>
-                <a:ea typeface="Calibri" pitchFamily="34" charset="-122"/>
-                <a:cs typeface="Calibri" pitchFamily="34" charset="-120"/>
-              </a:rPr>
-              <a:t>“Advanced: Predictive intelligence and ecosystem collaboration are embedded”</a:t>
+              <a:t>“Strengthen third-party oversight and accountability (e.g., annual review, standards, performance monitoring)”</a:t>
             </a:r>
             <a:endParaRPr lang="en-US" sz="850" dirty="0"/>
           </a:p>
@@ -12303,7 +15084,7 @@
                 <a:ea typeface="Calibri" pitchFamily="34" charset="-122"/>
                 <a:cs typeface="Calibri" pitchFamily="34" charset="-120"/>
               </a:rPr>
-              <a:t>Scaling Approach — Today vs. 3-Year Focus</a:t>
+              <a:t>Strategy to Reduce Third-Party Risk — By Sector and Region</a:t>
             </a:r>
             <a:endParaRPr lang="en-US" sz="1900" dirty="0"/>
           </a:p>
@@ -12345,7 +15126,7 @@
                 <a:ea typeface="Calibri" pitchFamily="34" charset="-122"/>
                 <a:cs typeface="Calibri" pitchFamily="34" charset="-120"/>
               </a:rPr>
-              <a:t>AI is already the top way fraud teams scale, and its lead is only growing.</a:t>
+              <a:t>Within each sector, the preferred strategy shifts somewhat by region — though several regional cells are thin and should be read directionally, not precisely.</a:t>
             </a:r>
             <a:endParaRPr lang="en-US" sz="1350" dirty="0"/>
           </a:p>
@@ -12410,7 +15191,7 @@
                 <a:ea typeface="IBM Plex Mono" pitchFamily="34" charset="-122"/>
                 <a:cs typeface="IBM Plex Mono" pitchFamily="34" charset="-120"/>
               </a:rPr>
-              <a:t>Q8 / Q9  </a:t>
+              <a:t>Q7  </a:t>
             </a:r>
             <a:pPr algn="l" indent="0" marL="0">
               <a:lnSpc>
@@ -12427,7 +15208,7 @@
                 <a:ea typeface="Calibri" pitchFamily="34" charset="-122"/>
                 <a:cs typeface="Calibri" pitchFamily="34" charset="-120"/>
               </a:rPr>
-              <a:t>“Which statement best describes your current approach to scaling fraud/investigations operations as fraud volume and complexity increases? / Which area do you expect will receive the greatest focus for operations transformation over the next three years?”</a:t>
+              <a:t>“Which strategy is expected to have the greatest impact on reducing third-party fraud risk over the next three years? (Banking vs. Insurance, further broken down by region)”</a:t>
             </a:r>
             <a:endParaRPr lang="en-US" sz="1000" dirty="0"/>
           </a:p>
@@ -12520,7 +15301,7 @@
         <p:spPr>
           <a:xfrm>
             <a:off x="502006" y="5276088"/>
-            <a:ext cx="11188598" cy="886968"/>
+            <a:ext cx="11188598" cy="566928"/>
           </a:xfrm>
           <a:prstGeom prst="rect">
             <a:avLst/>
@@ -12534,7 +15315,7 @@
           <a:p>
             <a:pPr algn="l" indent="0" marL="0">
               <a:lnSpc>
-                <a:spcPct val="118000"/>
+                <a:spcPct val="115000"/>
               </a:lnSpc>
               <a:buNone/>
             </a:pPr>
@@ -12547,15 +15328,57 @@
                 <a:ea typeface="Calibri" pitchFamily="34" charset="-122"/>
                 <a:cs typeface="Calibri" pitchFamily="34" charset="-120"/>
               </a:rPr>
-              <a:t>Single select, asked twice.  </a:t>
+              <a:t>Single select. </a:t>
             </a:r>
             <a:pPr algn="l" indent="0" marL="0">
               <a:lnSpc>
-                <a:spcPct val="118000"/>
+                <a:spcPct val="115000"/>
               </a:lnSpc>
               <a:buNone/>
             </a:pPr>
             <a:r>
+              <a:rPr lang="en-US" sz="850" dirty="0">
+                <a:solidFill>
+                  <a:srgbClr val="53565A"/>
+                </a:solidFill>
+                <a:latin typeface="Calibri" pitchFamily="34" charset="0"/>
+                <a:ea typeface="Calibri" pitchFamily="34" charset="-122"/>
+                <a:cs typeface="Calibri" pitchFamily="34" charset="-120"/>
+              </a:rPr>
+              <a:t>The % in each Banking category label is the full sector-level figure; stacked region segments are rounded to the nearest whole percent and may sum to within ±1pt of that total. Banking/Australia (n=7) and Banking/Singapore (n=4) are thin samples shown directionally. Insurance bars reflect only its United States and Canada respondents (n=22 of 25) — UK (n=2), Australia (n=1), and Singapore (n=0) are excluded here for insufficient individual sample size. Insurance's full-sample totals (all regions, n=25) are: info sharing 20%, monitoring 32%, onboarding 24%, oversight 24%.</a:t>
+            </a:r>
+            <a:endParaRPr lang="en-US" sz="850" dirty="0"/>
+          </a:p>
+        </p:txBody>
+      </p:sp>
+      <p:sp>
+        <p:nvSpPr>
+          <p:cNvPr id="10" name="Text 7"/>
+          <p:cNvSpPr txBox="1"/>
+          <p:nvPr/>
+        </p:nvSpPr>
+        <p:spPr>
+          <a:xfrm>
+            <a:off x="502006" y="5861304"/>
+            <a:ext cx="11188598" cy="365760"/>
+          </a:xfrm>
+          <a:prstGeom prst="rect">
+            <a:avLst/>
+          </a:prstGeom>
+          <a:noFill/>
+          <a:ln/>
+        </p:spPr>
+        <p:txBody>
+          <a:bodyPr wrap="square" lIns="0" tIns="0" rIns="0" bIns="0" rtlCol="0" anchor="t"/>
+          <a:lstStyle/>
+          <a:p>
+            <a:pPr algn="l" indent="0" marL="0">
+              <a:lnSpc>
+                <a:spcPct val="110000"/>
+              </a:lnSpc>
+              <a:buNone/>
+            </a:pPr>
+            <a:r>
               <a:rPr lang="en-US" sz="850" b="1" dirty="0">
                 <a:solidFill>
                   <a:srgbClr val="53565A"/>
@@ -12568,12 +15391,12 @@
             </a:r>
             <a:pPr algn="l" indent="0" marL="0">
               <a:lnSpc>
-                <a:spcPct val="118000"/>
+                <a:spcPct val="110000"/>
               </a:lnSpc>
               <a:buNone/>
             </a:pPr>
             <a:r>
-              <a:rPr lang="en-US" sz="850" i="1" dirty="0">
+              <a:rPr lang="en-US" sz="800" i="1" dirty="0">
                 <a:solidFill>
                   <a:srgbClr val="53565A"/>
                 </a:solidFill>
@@ -12581,177 +15404,7 @@
                 <a:ea typeface="Calibri" pitchFamily="34" charset="-122"/>
                 <a:cs typeface="Calibri" pitchFamily="34" charset="-120"/>
               </a:rPr>
-              <a:t>“Adding capacity through hiring full-time employees and workforce expansion”</a:t>
-            </a:r>
-            <a:pPr algn="l" indent="0" marL="0">
-              <a:lnSpc>
-                <a:spcPct val="118000"/>
-              </a:lnSpc>
-              <a:buNone/>
-            </a:pPr>
-            <a:r>
-              <a:rPr lang="en-US" sz="850" dirty="0">
-                <a:solidFill>
-                  <a:srgbClr val="D0D0CE"/>
-                </a:solidFill>
-                <a:latin typeface="Calibri" pitchFamily="34" charset="0"/>
-                <a:ea typeface="Calibri" pitchFamily="34" charset="-122"/>
-                <a:cs typeface="Calibri" pitchFamily="34" charset="-120"/>
-              </a:rPr>
-              <a:t>  ·  </a:t>
-            </a:r>
-            <a:pPr algn="l" indent="0" marL="0">
-              <a:lnSpc>
-                <a:spcPct val="118000"/>
-              </a:lnSpc>
-              <a:buNone/>
-            </a:pPr>
-            <a:r>
-              <a:rPr lang="en-US" sz="850" i="1" dirty="0">
-                <a:solidFill>
-                  <a:srgbClr val="53565A"/>
-                </a:solidFill>
-                <a:latin typeface="Calibri" pitchFamily="34" charset="0"/>
-                <a:ea typeface="Calibri" pitchFamily="34" charset="-122"/>
-                <a:cs typeface="Calibri" pitchFamily="34" charset="-120"/>
-              </a:rPr>
-              <a:t>“Adding capacity through outsourcing arrangements (e.g., contractors)”</a:t>
-            </a:r>
-            <a:pPr algn="l" indent="0" marL="0">
-              <a:lnSpc>
-                <a:spcPct val="118000"/>
-              </a:lnSpc>
-              <a:buNone/>
-            </a:pPr>
-            <a:r>
-              <a:rPr lang="en-US" sz="850" dirty="0">
-                <a:solidFill>
-                  <a:srgbClr val="D0D0CE"/>
-                </a:solidFill>
-                <a:latin typeface="Calibri" pitchFamily="34" charset="0"/>
-                <a:ea typeface="Calibri" pitchFamily="34" charset="-122"/>
-                <a:cs typeface="Calibri" pitchFamily="34" charset="-120"/>
-              </a:rPr>
-              <a:t>  ·  </a:t>
-            </a:r>
-            <a:pPr algn="l" indent="0" marL="0">
-              <a:lnSpc>
-                <a:spcPct val="118000"/>
-              </a:lnSpc>
-              <a:buNone/>
-            </a:pPr>
-            <a:r>
-              <a:rPr lang="en-US" sz="850" i="1" dirty="0">
-                <a:solidFill>
-                  <a:srgbClr val="53565A"/>
-                </a:solidFill>
-                <a:latin typeface="Calibri" pitchFamily="34" charset="0"/>
-                <a:ea typeface="Calibri" pitchFamily="34" charset="-122"/>
-                <a:cs typeface="Calibri" pitchFamily="34" charset="-120"/>
-              </a:rPr>
-              <a:t>“Automating workflows and minimizing manual activities”</a:t>
-            </a:r>
-            <a:pPr algn="l" indent="0" marL="0">
-              <a:lnSpc>
-                <a:spcPct val="118000"/>
-              </a:lnSpc>
-              <a:buNone/>
-            </a:pPr>
-            <a:r>
-              <a:rPr lang="en-US" sz="850" dirty="0">
-                <a:solidFill>
-                  <a:srgbClr val="D0D0CE"/>
-                </a:solidFill>
-                <a:latin typeface="Calibri" pitchFamily="34" charset="0"/>
-                <a:ea typeface="Calibri" pitchFamily="34" charset="-122"/>
-                <a:cs typeface="Calibri" pitchFamily="34" charset="-120"/>
-              </a:rPr>
-              <a:t>  ·  </a:t>
-            </a:r>
-            <a:pPr algn="l" indent="0" marL="0">
-              <a:lnSpc>
-                <a:spcPct val="118000"/>
-              </a:lnSpc>
-              <a:buNone/>
-            </a:pPr>
-            <a:r>
-              <a:rPr lang="en-US" sz="850" i="1" dirty="0">
-                <a:solidFill>
-                  <a:srgbClr val="53565A"/>
-                </a:solidFill>
-                <a:latin typeface="Calibri" pitchFamily="34" charset="0"/>
-                <a:ea typeface="Calibri" pitchFamily="34" charset="-122"/>
-                <a:cs typeface="Calibri" pitchFamily="34" charset="-120"/>
-              </a:rPr>
-              <a:t>“Augmenting existing capacity with AI-enabled tools”</a:t>
-            </a:r>
-            <a:pPr algn="l" indent="0" marL="0">
-              <a:lnSpc>
-                <a:spcPct val="118000"/>
-              </a:lnSpc>
-              <a:buNone/>
-            </a:pPr>
-            <a:r>
-              <a:rPr lang="en-US" sz="850" dirty="0">
-                <a:solidFill>
-                  <a:srgbClr val="D0D0CE"/>
-                </a:solidFill>
-                <a:latin typeface="Calibri" pitchFamily="34" charset="0"/>
-                <a:ea typeface="Calibri" pitchFamily="34" charset="-122"/>
-                <a:cs typeface="Calibri" pitchFamily="34" charset="-120"/>
-              </a:rPr>
-              <a:t>  ·  </a:t>
-            </a:r>
-            <a:pPr algn="l" indent="0" marL="0">
-              <a:lnSpc>
-                <a:spcPct val="118000"/>
-              </a:lnSpc>
-              <a:buNone/>
-            </a:pPr>
-            <a:r>
-              <a:rPr lang="en-US" sz="850" i="1" dirty="0">
-                <a:solidFill>
-                  <a:srgbClr val="53565A"/>
-                </a:solidFill>
-                <a:latin typeface="Calibri" pitchFamily="34" charset="0"/>
-                <a:ea typeface="Calibri" pitchFamily="34" charset="-122"/>
-                <a:cs typeface="Calibri" pitchFamily="34" charset="-120"/>
-              </a:rPr>
-              <a:t>“Redesigning operation processes and playbooks across the lifecycle”</a:t>
-            </a:r>
-            <a:pPr algn="l" indent="0" marL="0">
-              <a:lnSpc>
-                <a:spcPct val="118000"/>
-              </a:lnSpc>
-              <a:buNone/>
-            </a:pPr>
-            <a:r>
-              <a:rPr lang="en-US" sz="850" dirty="0">
-                <a:solidFill>
-                  <a:srgbClr val="D0D0CE"/>
-                </a:solidFill>
-                <a:latin typeface="Calibri" pitchFamily="34" charset="0"/>
-                <a:ea typeface="Calibri" pitchFamily="34" charset="-122"/>
-                <a:cs typeface="Calibri" pitchFamily="34" charset="-120"/>
-              </a:rPr>
-              <a:t>  ·  </a:t>
-            </a:r>
-            <a:pPr algn="l" indent="0" marL="0">
-              <a:lnSpc>
-                <a:spcPct val="118000"/>
-              </a:lnSpc>
-              <a:buNone/>
-            </a:pPr>
-            <a:r>
-              <a:rPr lang="en-US" sz="850" i="1" dirty="0">
-                <a:solidFill>
-                  <a:srgbClr val="53565A"/>
-                </a:solidFill>
-                <a:latin typeface="Calibri" pitchFamily="34" charset="0"/>
-                <a:ea typeface="Calibri" pitchFamily="34" charset="-122"/>
-                <a:cs typeface="Calibri" pitchFamily="34" charset="-120"/>
-              </a:rPr>
-              <a:t>“Pursuing a combination of the above approaches”</a:t>
+              <a:t>“Strengthen onboarding verification and due diligence controls” · “Enhance ongoing monitoring and detection (e.g., surveillance, analytics, anomaly detection)” · “Increase information sharing and intelligence across onboarding and ongoing monitoring” · “Strengthen third-party oversight and accountability (e.g., annual review, standards, performance monitoring)”</a:t>
             </a:r>
             <a:endParaRPr lang="en-US" sz="850" dirty="0"/>
           </a:p>
@@ -13758,7 +16411,7 @@
                 <a:ea typeface="Calibri" pitchFamily="34" charset="-122"/>
                 <a:cs typeface="Calibri" pitchFamily="34" charset="-120"/>
               </a:rPr>
-              <a:t>5. Regulatory &amp; Market Change</a:t>
+              <a:t>4. Operating Model Transformation</a:t>
             </a:r>
             <a:endParaRPr lang="en-US" sz="3600" dirty="0"/>
           </a:p>
@@ -13800,7 +16453,7 @@
                 <a:ea typeface="Calibri" pitchFamily="34" charset="-122"/>
                 <a:cs typeface="Calibri" pitchFamily="34" charset="-120"/>
               </a:rPr>
-              <a:t>Where fraud investment is really going, and the disruption leaders see coming next.</a:t>
+              <a:t>Self-reported program maturity, and how the mix of scaling levers shifts over the next 3 years.</a:t>
             </a:r>
             <a:endParaRPr lang="en-US" sz="1600" dirty="0"/>
           </a:p>
@@ -13910,7 +16563,7 @@
                 <a:ea typeface="Calibri" pitchFamily="34" charset="-122"/>
                 <a:cs typeface="Calibri" pitchFamily="34" charset="-120"/>
               </a:rPr>
-              <a:t>Fraud Investment Relative to Regulatory Requirements</a:t>
+              <a:t>Self-Reported Fraud Program Maturity — By Sector</a:t>
             </a:r>
             <a:endParaRPr lang="en-US" sz="1900" dirty="0"/>
           </a:p>
@@ -13952,7 +16605,7 @@
                 <a:ea typeface="Calibri" pitchFamily="34" charset="-122"/>
                 <a:cs typeface="Calibri" pitchFamily="34" charset="-120"/>
               </a:rPr>
-              <a:t>Most fraud spending today is about fixing past problems, not getting ahead of new ones.</a:t>
+              <a:t>82% self-rate “Integrated” or “Advanced” overall — but Banking clusters at Integrated while Insurance skews further, to Advanced.</a:t>
             </a:r>
             <a:endParaRPr lang="en-US" sz="1350" dirty="0"/>
           </a:p>
@@ -14017,7 +16670,7 @@
                 <a:ea typeface="IBM Plex Mono" pitchFamily="34" charset="-122"/>
                 <a:cs typeface="IBM Plex Mono" pitchFamily="34" charset="-120"/>
               </a:rPr>
-              <a:t>Q10  </a:t>
+              <a:t>Q1  </a:t>
             </a:r>
             <a:pPr algn="l" indent="0" marL="0">
               <a:lnSpc>
@@ -14034,7 +16687,7 @@
                 <a:ea typeface="Calibri" pitchFamily="34" charset="-122"/>
                 <a:cs typeface="Calibri" pitchFamily="34" charset="-120"/>
               </a:rPr>
-              <a:t>“Which statement best reflects how your organization is allocating fraud-related investment in response to regulatory and compliance requirements?”</a:t>
+              <a:t>“Which statement best describes the current maturity of your organization's fraud program? (Banking vs. Insurance)”</a:t>
             </a:r>
             <a:endParaRPr lang="en-US" sz="1000" dirty="0"/>
           </a:p>
@@ -14154,7 +16807,7 @@
                 <a:ea typeface="Calibri" pitchFamily="34" charset="-122"/>
                 <a:cs typeface="Calibri" pitchFamily="34" charset="-120"/>
               </a:rPr>
-              <a:t>Single select.  </a:t>
+              <a:t>Single select · low → high maturity.  </a:t>
             </a:r>
             <a:pPr algn="l" indent="0" marL="0">
               <a:lnSpc>
@@ -14188,7 +16841,7 @@
                 <a:ea typeface="Calibri" pitchFamily="34" charset="-122"/>
                 <a:cs typeface="Calibri" pitchFamily="34" charset="-120"/>
               </a:rPr>
-              <a:t>“Primarily investing to meet upcoming and draft regulatory requirements”</a:t>
+              <a:t>“Reactive: Primarily incident-driven”</a:t>
             </a:r>
             <a:pPr algn="l" indent="0" marL="0">
               <a:lnSpc>
@@ -14222,7 +16875,7 @@
                 <a:ea typeface="Calibri" pitchFamily="34" charset="-122"/>
                 <a:cs typeface="Calibri" pitchFamily="34" charset="-120"/>
               </a:rPr>
-              <a:t>“Primarily investing to remediate existing compliance and control gaps”</a:t>
+              <a:t>“Foundational: Controls established within individual business units”</a:t>
             </a:r>
             <a:pPr algn="l" indent="0" marL="0">
               <a:lnSpc>
@@ -14256,7 +16909,75 @@
                 <a:ea typeface="Calibri" pitchFamily="34" charset="-122"/>
                 <a:cs typeface="Calibri" pitchFamily="34" charset="-120"/>
               </a:rPr>
-              <a:t>“Regulatory requirements are not a primary driver of fraud-related investment”</a:t>
+              <a:t>“Managed: Enterprise standards and governance are in place”</a:t>
+            </a:r>
+            <a:pPr algn="l" indent="0" marL="0">
+              <a:lnSpc>
+                <a:spcPct val="118000"/>
+              </a:lnSpc>
+              <a:buNone/>
+            </a:pPr>
+            <a:r>
+              <a:rPr lang="en-US" sz="850" dirty="0">
+                <a:solidFill>
+                  <a:srgbClr val="D0D0CE"/>
+                </a:solidFill>
+                <a:latin typeface="Calibri" pitchFamily="34" charset="0"/>
+                <a:ea typeface="Calibri" pitchFamily="34" charset="-122"/>
+                <a:cs typeface="Calibri" pitchFamily="34" charset="-120"/>
+              </a:rPr>
+              <a:t>  ·  </a:t>
+            </a:r>
+            <a:pPr algn="l" indent="0" marL="0">
+              <a:lnSpc>
+                <a:spcPct val="118000"/>
+              </a:lnSpc>
+              <a:buNone/>
+            </a:pPr>
+            <a:r>
+              <a:rPr lang="en-US" sz="850" i="1" dirty="0">
+                <a:solidFill>
+                  <a:srgbClr val="53565A"/>
+                </a:solidFill>
+                <a:latin typeface="Calibri" pitchFamily="34" charset="0"/>
+                <a:ea typeface="Calibri" pitchFamily="34" charset="-122"/>
+                <a:cs typeface="Calibri" pitchFamily="34" charset="-120"/>
+              </a:rPr>
+              <a:t>“Integrated: Data, analytics, and operations are integrated across major fraud types”</a:t>
+            </a:r>
+            <a:pPr algn="l" indent="0" marL="0">
+              <a:lnSpc>
+                <a:spcPct val="118000"/>
+              </a:lnSpc>
+              <a:buNone/>
+            </a:pPr>
+            <a:r>
+              <a:rPr lang="en-US" sz="850" dirty="0">
+                <a:solidFill>
+                  <a:srgbClr val="D0D0CE"/>
+                </a:solidFill>
+                <a:latin typeface="Calibri" pitchFamily="34" charset="0"/>
+                <a:ea typeface="Calibri" pitchFamily="34" charset="-122"/>
+                <a:cs typeface="Calibri" pitchFamily="34" charset="-120"/>
+              </a:rPr>
+              <a:t>  ·  </a:t>
+            </a:r>
+            <a:pPr algn="l" indent="0" marL="0">
+              <a:lnSpc>
+                <a:spcPct val="118000"/>
+              </a:lnSpc>
+              <a:buNone/>
+            </a:pPr>
+            <a:r>
+              <a:rPr lang="en-US" sz="850" i="1" dirty="0">
+                <a:solidFill>
+                  <a:srgbClr val="53565A"/>
+                </a:solidFill>
+                <a:latin typeface="Calibri" pitchFamily="34" charset="0"/>
+                <a:ea typeface="Calibri" pitchFamily="34" charset="-122"/>
+                <a:cs typeface="Calibri" pitchFamily="34" charset="-120"/>
+              </a:rPr>
+              <a:t>“Advanced: Predictive intelligence and ecosystem collaboration are embedded”</a:t>
             </a:r>
             <a:endParaRPr lang="en-US" sz="850" dirty="0"/>
           </a:p>
@@ -14327,7 +17048,7 @@
                 <a:ea typeface="Calibri" pitchFamily="34" charset="-122"/>
                 <a:cs typeface="Calibri" pitchFamily="34" charset="-120"/>
               </a:rPr>
-              <a:t>Upcoming Regulatory / Market Change With Greatest Expected Impact</a:t>
+              <a:t>Scaling Approach — Today vs. 3-Year Focus</a:t>
             </a:r>
             <a:endParaRPr lang="en-US" sz="1900" dirty="0"/>
           </a:p>
@@ -14369,7 +17090,7 @@
                 <a:ea typeface="Calibri" pitchFamily="34" charset="-122"/>
                 <a:cs typeface="Calibri" pitchFamily="34" charset="-120"/>
               </a:rPr>
-              <a:t>Identity and authentication tops a close three-way race for the next big disruption.</a:t>
+              <a:t>AI is already the top way fraud teams scale, and its lead is only growing.</a:t>
             </a:r>
             <a:endParaRPr lang="en-US" sz="1350" dirty="0"/>
           </a:p>
@@ -14434,7 +17155,7 @@
                 <a:ea typeface="IBM Plex Mono" pitchFamily="34" charset="-122"/>
                 <a:cs typeface="IBM Plex Mono" pitchFamily="34" charset="-120"/>
               </a:rPr>
-              <a:t>Q11  </a:t>
+              <a:t>Q8 / Q9  </a:t>
             </a:r>
             <a:pPr algn="l" indent="0" marL="0">
               <a:lnSpc>
@@ -14451,7 +17172,7 @@
                 <a:ea typeface="Calibri" pitchFamily="34" charset="-122"/>
                 <a:cs typeface="Calibri" pitchFamily="34" charset="-120"/>
               </a:rPr>
-              <a:t>“Which upcoming regulatory or market changes is expected to have the greatest impact on your fraud program?”</a:t>
+              <a:t>“Which statement best describes your current approach to scaling fraud/investigations operations as fraud volume and complexity increases? / Which area do you expect will receive the greatest focus for operations transformation over the next three years?”</a:t>
             </a:r>
             <a:endParaRPr lang="en-US" sz="1000" dirty="0"/>
           </a:p>
@@ -14571,7 +17292,7 @@
                 <a:ea typeface="Calibri" pitchFamily="34" charset="-122"/>
                 <a:cs typeface="Calibri" pitchFamily="34" charset="-120"/>
               </a:rPr>
-              <a:t>Ranked top 3 — shown as % of respondents who placed the option anywhere in their top 3 (not mutually exclusive; bars don't sum to 100%).  </a:t>
+              <a:t>Single select, asked twice.  </a:t>
             </a:r>
             <a:pPr algn="l" indent="0" marL="0">
               <a:lnSpc>
@@ -14605,7 +17326,7 @@
                 <a:ea typeface="Calibri" pitchFamily="34" charset="-122"/>
                 <a:cs typeface="Calibri" pitchFamily="34" charset="-120"/>
               </a:rPr>
-              <a:t>“Payment innovation and adoption (e.g., real-time payments, stable coins, agentic payments)”</a:t>
+              <a:t>“Adding capacity through hiring full-time employees and workforce expansion”</a:t>
             </a:r>
             <a:pPr algn="l" indent="0" marL="0">
               <a:lnSpc>
@@ -14639,7 +17360,7 @@
                 <a:ea typeface="Calibri" pitchFamily="34" charset="-122"/>
                 <a:cs typeface="Calibri" pitchFamily="34" charset="-120"/>
               </a:rPr>
-              <a:t>“Liability and reimbursement changes”</a:t>
+              <a:t>“Adding capacity through outsourcing arrangements (e.g., contractors)”</a:t>
             </a:r>
             <a:pPr algn="l" indent="0" marL="0">
               <a:lnSpc>
@@ -14673,7 +17394,7 @@
                 <a:ea typeface="Calibri" pitchFamily="34" charset="-122"/>
                 <a:cs typeface="Calibri" pitchFamily="34" charset="-120"/>
               </a:rPr>
-              <a:t>“Open Banking / Consumer-driven banking initiatives”</a:t>
+              <a:t>“Automating workflows and minimizing manual activities”</a:t>
             </a:r>
             <a:pPr algn="l" indent="0" marL="0">
               <a:lnSpc>
@@ -14707,7 +17428,7 @@
                 <a:ea typeface="Calibri" pitchFamily="34" charset="-122"/>
                 <a:cs typeface="Calibri" pitchFamily="34" charset="-120"/>
               </a:rPr>
-              <a:t>“AML related modernization initiatives”</a:t>
+              <a:t>“Augmenting existing capacity with AI-enabled tools”</a:t>
             </a:r>
             <a:pPr algn="l" indent="0" marL="0">
               <a:lnSpc>
@@ -14741,7 +17462,7 @@
                 <a:ea typeface="Calibri" pitchFamily="34" charset="-122"/>
                 <a:cs typeface="Calibri" pitchFamily="34" charset="-120"/>
               </a:rPr>
-              <a:t>“Privacy, data-sharing requirements, and AI governance requirements”</a:t>
+              <a:t>“Redesigning operation processes and playbooks across the lifecycle”</a:t>
             </a:r>
             <a:pPr algn="l" indent="0" marL="0">
               <a:lnSpc>
@@ -14775,7 +17496,7 @@
                 <a:ea typeface="Calibri" pitchFamily="34" charset="-122"/>
                 <a:cs typeface="Calibri" pitchFamily="34" charset="-120"/>
               </a:rPr>
-              <a:t>“Customer identity, authentication, and digital trust expectations”</a:t>
+              <a:t>“Pursuing a combination of the above approaches”</a:t>
             </a:r>
             <a:endParaRPr lang="en-US" sz="850" dirty="0"/>
           </a:p>
@@ -14846,7 +17567,7 @@
                 <a:ea typeface="Calibri" pitchFamily="34" charset="-122"/>
                 <a:cs typeface="Calibri" pitchFamily="34" charset="-120"/>
               </a:rPr>
-              <a:t>6. Looking Ahead Three Years</a:t>
+              <a:t>5. Regulatory &amp; Market Change</a:t>
             </a:r>
             <a:endParaRPr lang="en-US" sz="3600" dirty="0"/>
           </a:p>
@@ -14855,6 +17576,48 @@
       <p:sp>
         <p:nvSpPr>
           <p:cNvPr id="3" name="Text 1"/>
+          <p:cNvSpPr txBox="1"/>
+          <p:nvPr/>
+        </p:nvSpPr>
+        <p:spPr>
+          <a:xfrm>
+            <a:off x="502920" y="3423514"/>
+            <a:ext cx="10415016" cy="1563624"/>
+          </a:xfrm>
+          <a:prstGeom prst="rect">
+            <a:avLst/>
+          </a:prstGeom>
+          <a:noFill/>
+          <a:ln/>
+        </p:spPr>
+        <p:txBody>
+          <a:bodyPr wrap="square" lIns="0" tIns="0" rIns="0" bIns="0" rtlCol="0" anchor="t"/>
+          <a:lstStyle/>
+          <a:p>
+            <a:pPr algn="l" indent="0" marL="0">
+              <a:lnSpc>
+                <a:spcPct val="110000"/>
+              </a:lnSpc>
+              <a:buNone/>
+            </a:pPr>
+            <a:r>
+              <a:rPr lang="en-US" sz="1600" dirty="0">
+                <a:solidFill>
+                  <a:srgbClr val="FFFFFF"/>
+                </a:solidFill>
+                <a:latin typeface="Calibri" pitchFamily="34" charset="0"/>
+                <a:ea typeface="Calibri" pitchFamily="34" charset="-122"/>
+                <a:cs typeface="Calibri" pitchFamily="34" charset="-120"/>
+              </a:rPr>
+              <a:t>Where fraud investment is really going, and the disruption leaders see coming next.</a:t>
+            </a:r>
+            <a:endParaRPr lang="en-US" sz="1600" dirty="0"/>
+          </a:p>
+        </p:txBody>
+      </p:sp>
+      <p:sp>
+        <p:nvSpPr>
+          <p:cNvPr id="4" name="Text 2"/>
           <p:cNvSpPr txBox="1"/>
           <p:nvPr/>
         </p:nvSpPr>
@@ -14956,7 +17719,7 @@
                 <a:ea typeface="Calibri" pitchFamily="34" charset="-122"/>
                 <a:cs typeface="Calibri" pitchFamily="34" charset="-120"/>
               </a:rPr>
-              <a:t>What Leaders Say, Unprompted</a:t>
+              <a:t>Fraud Investment Relative to Regulatory Requirements</a:t>
             </a:r>
             <a:endParaRPr lang="en-US" sz="1900" dirty="0"/>
           </a:p>
@@ -14998,7 +17761,7 @@
                 <a:ea typeface="Calibri" pitchFamily="34" charset="-122"/>
                 <a:cs typeface="Calibri" pitchFamily="34" charset="-120"/>
               </a:rPr>
-              <a:t>Left to answer in their own words, leaders converge on the same trend.</a:t>
+              <a:t>Most fraud spending today is about fixing past problems, not getting ahead of new ones.</a:t>
             </a:r>
             <a:endParaRPr lang="en-US" sz="1350" dirty="0"/>
           </a:p>
@@ -15063,7 +17826,7 @@
                 <a:ea typeface="IBM Plex Mono" pitchFamily="34" charset="-122"/>
                 <a:cs typeface="IBM Plex Mono" pitchFamily="34" charset="-120"/>
               </a:rPr>
-              <a:t>Q12  </a:t>
+              <a:t>Q10  </a:t>
             </a:r>
             <a:pPr algn="l" indent="0" marL="0">
               <a:lnSpc>
@@ -15080,7 +17843,7 @@
                 <a:ea typeface="Calibri" pitchFamily="34" charset="-122"/>
                 <a:cs typeface="Calibri" pitchFamily="34" charset="-120"/>
               </a:rPr>
-              <a:t>“Looking ahead three years, what development do you believe will have the greatest impact on fraud risk management, and why? (open-ended)”</a:t>
+              <a:t>“Which statement best reflects how your organization is allocating fraud-related investment in response to regulatory and compliance requirements?”</a:t>
             </a:r>
             <a:endParaRPr lang="en-US" sz="1000" dirty="0"/>
           </a:p>
@@ -15125,128 +17888,37 @@
           </a:p>
         </p:txBody>
       </p:sp>
-      <p:sp>
-        <p:nvSpPr>
-          <p:cNvPr id="7" name="Shape 5"/>
+      <p:graphicFrame>
+        <p:nvGraphicFramePr>
+          <p:cNvPr id="7" name="Chart 0" descr=""/>
+          <p:cNvGraphicFramePr/>
+          <p:nvPr/>
+        </p:nvGraphicFramePr>
+        <p:xfrm>
+          <a:off x="502006" y="2011680"/>
+          <a:ext cx="11188598" cy="3063240"/>
+        </p:xfrm>
+        <a:graphic xmlns:a="http://schemas.openxmlformats.org/drawingml/2006/main">
+          <a:graphicData uri="http://schemas.openxmlformats.org/drawingml/2006/chart">
+            <c:chart xmlns:c="http://schemas.openxmlformats.org/drawingml/2006/chart" r:id="rId1"/>
+          </a:graphicData>
+        </a:graphic>
+      </p:graphicFrame>
+      <p:sp>
+        <p:nvSpPr>
+          <p:cNvPr id="8" name="Shape 5"/>
           <p:cNvSpPr/>
           <p:nvPr/>
         </p:nvSpPr>
         <p:spPr>
           <a:xfrm>
-            <a:off x="502006" y="2011680"/>
-            <a:ext cx="11188598" cy="914400"/>
-          </a:xfrm>
-          <a:prstGeom prst="roundRect">
-            <a:avLst>
-              <a:gd name="adj" fmla="val 6000"/>
-            </a:avLst>
-          </a:prstGeom>
-          <a:solidFill>
-            <a:srgbClr val="F2F2F2"/>
-          </a:solidFill>
-          <a:ln/>
-        </p:spPr>
-      </p:sp>
-      <p:sp>
-        <p:nvSpPr>
-          <p:cNvPr id="8" name="Text 6"/>
-          <p:cNvSpPr txBox="1"/>
-          <p:nvPr/>
-        </p:nvSpPr>
-        <p:spPr>
-          <a:xfrm>
-            <a:off x="776326" y="2011680"/>
-            <a:ext cx="2011680" cy="914400"/>
-          </a:xfrm>
-          <a:prstGeom prst="rect">
+            <a:off x="502006" y="5202936"/>
+            <a:ext cx="11188598" cy="0"/>
+          </a:xfrm>
+          <a:prstGeom prst="line">
             <a:avLst/>
           </a:prstGeom>
           <a:noFill/>
-          <a:ln/>
-        </p:spPr>
-        <p:txBody>
-          <a:bodyPr wrap="square" rtlCol="0" anchor="ctr"/>
-          <a:lstStyle/>
-          <a:p>
-            <a:pPr indent="0" marL="0">
-              <a:buNone/>
-            </a:pPr>
-            <a:r>
-              <a:rPr lang="en-US" sz="3000" b="1" dirty="0">
-                <a:solidFill>
-                  <a:srgbClr val="046A38"/>
-                </a:solidFill>
-                <a:latin typeface="Calibri" pitchFamily="34" charset="0"/>
-                <a:ea typeface="Calibri" pitchFamily="34" charset="-122"/>
-                <a:cs typeface="Calibri" pitchFamily="34" charset="-120"/>
-              </a:rPr>
-              <a:t>100/100</a:t>
-            </a:r>
-            <a:endParaRPr lang="en-US" sz="3000" dirty="0"/>
-          </a:p>
-        </p:txBody>
-      </p:sp>
-      <p:sp>
-        <p:nvSpPr>
-          <p:cNvPr id="9" name="Text 7"/>
-          <p:cNvSpPr txBox="1"/>
-          <p:nvPr/>
-        </p:nvSpPr>
-        <p:spPr>
-          <a:xfrm>
-            <a:off x="2970886" y="2057400"/>
-            <a:ext cx="8445398" cy="822960"/>
-          </a:xfrm>
-          <a:prstGeom prst="rect">
-            <a:avLst/>
-          </a:prstGeom>
-          <a:noFill/>
-          <a:ln/>
-        </p:spPr>
-        <p:txBody>
-          <a:bodyPr wrap="square" rtlCol="0" anchor="ctr"/>
-          <a:lstStyle/>
-          <a:p>
-            <a:pPr indent="0" marL="0">
-              <a:lnSpc>
-                <a:spcPct val="110000"/>
-              </a:lnSpc>
-              <a:buNone/>
-            </a:pPr>
-            <a:r>
-              <a:rPr lang="en-US" sz="1150" dirty="0">
-                <a:solidFill>
-                  <a:srgbClr val="53565A"/>
-                </a:solidFill>
-                <a:latin typeface="Calibri" pitchFamily="34" charset="0"/>
-                <a:ea typeface="Calibri" pitchFamily="34" charset="-122"/>
-                <a:cs typeface="Calibri" pitchFamily="34" charset="-120"/>
-              </a:rPr>
-              <a:t>respondents answered in their own words — a full response rate on an open text field. The dominant unprompted theme: the convergence of GenAI, synthetic identity, and real-time payments — the same thread running through every closed-ended question above.</a:t>
-            </a:r>
-            <a:endParaRPr lang="en-US" sz="1150" dirty="0"/>
-          </a:p>
-        </p:txBody>
-      </p:sp>
-      <p:sp>
-        <p:nvSpPr>
-          <p:cNvPr id="10" name="Shape 8"/>
-          <p:cNvSpPr/>
-          <p:nvPr/>
-        </p:nvSpPr>
-        <p:spPr>
-          <a:xfrm>
-            <a:off x="502006" y="3154680"/>
-            <a:ext cx="5457139" cy="1600200"/>
-          </a:xfrm>
-          <a:prstGeom prst="roundRect">
-            <a:avLst>
-              <a:gd name="adj" fmla="val 2857"/>
-            </a:avLst>
-          </a:prstGeom>
-          <a:solidFill>
-            <a:srgbClr val="FFFFFF"/>
-          </a:solidFill>
           <a:ln w="9525">
             <a:solidFill>
               <a:srgbClr val="D0D0CE"/>
@@ -15257,14 +17929,14 @@
       </p:sp>
       <p:sp>
         <p:nvSpPr>
-          <p:cNvPr id="11" name="Text 9"/>
+          <p:cNvPr id="9" name="Text 6"/>
           <p:cNvSpPr txBox="1"/>
           <p:nvPr/>
         </p:nvSpPr>
         <p:spPr>
           <a:xfrm>
-            <a:off x="684886" y="3282696"/>
-            <a:ext cx="5091379" cy="1143000"/>
+            <a:off x="502006" y="5276088"/>
+            <a:ext cx="11188598" cy="886968"/>
           </a:xfrm>
           <a:prstGeom prst="rect">
             <a:avLst/>
@@ -15273,390 +17945,129 @@
           <a:ln/>
         </p:spPr>
         <p:txBody>
-          <a:bodyPr wrap="square" rtlCol="0" anchor="t"/>
-          <a:lstStyle/>
-          <a:p>
-            <a:pPr indent="0" marL="0">
+          <a:bodyPr wrap="square" lIns="0" tIns="0" rIns="0" bIns="0" rtlCol="0" anchor="t"/>
+          <a:lstStyle/>
+          <a:p>
+            <a:pPr algn="l" indent="0" marL="0">
               <a:lnSpc>
-                <a:spcPct val="112000"/>
+                <a:spcPct val="118000"/>
               </a:lnSpc>
               <a:buNone/>
             </a:pPr>
             <a:r>
-              <a:rPr lang="en-US" sz="1000" i="1" dirty="0">
-                <a:solidFill>
-                  <a:srgbClr val="000000"/>
-                </a:solidFill>
-                <a:latin typeface="Calibri" pitchFamily="34" charset="0"/>
-                <a:ea typeface="Calibri" pitchFamily="34" charset="-122"/>
-                <a:cs typeface="Calibri" pitchFamily="34" charset="-120"/>
-              </a:rPr>
-              <a:t>“The convergence of genAI, synthetic identities and real time digital identity verification. This will matter significantly because fraudsters will become AI-native, identity becomes the new battleground, fraud prevention will replace fraud detection, and the winners will use AI against AI.”</a:t>
-            </a:r>
-            <a:endParaRPr lang="en-US" sz="1000" dirty="0"/>
-          </a:p>
-        </p:txBody>
-      </p:sp>
-      <p:sp>
-        <p:nvSpPr>
-          <p:cNvPr id="12" name="Text 10"/>
-          <p:cNvSpPr txBox="1"/>
-          <p:nvPr/>
-        </p:nvSpPr>
-        <p:spPr>
-          <a:xfrm>
-            <a:off x="684886" y="4443984"/>
-            <a:ext cx="5091379" cy="256032"/>
-          </a:xfrm>
-          <a:prstGeom prst="rect">
-            <a:avLst/>
-          </a:prstGeom>
-          <a:noFill/>
-          <a:ln/>
-        </p:spPr>
-        <p:txBody>
-          <a:bodyPr wrap="square" rtlCol="0" anchor="ctr"/>
-          <a:lstStyle/>
-          <a:p>
-            <a:pPr indent="0" marL="0">
-              <a:buNone/>
-            </a:pPr>
-            <a:r>
-              <a:rPr lang="en-US" sz="900" dirty="0">
+              <a:rPr lang="en-US" sz="850" b="1" dirty="0">
                 <a:solidFill>
                   <a:srgbClr val="53565A"/>
                 </a:solidFill>
-                <a:latin typeface="IBM Plex Mono" pitchFamily="34" charset="0"/>
-                <a:ea typeface="IBM Plex Mono" pitchFamily="34" charset="-122"/>
-                <a:cs typeface="IBM Plex Mono" pitchFamily="34" charset="-120"/>
-              </a:rPr>
-              <a:t>Director · Insurance</a:t>
-            </a:r>
-            <a:endParaRPr lang="en-US" sz="900" dirty="0"/>
-          </a:p>
-        </p:txBody>
-      </p:sp>
-      <p:sp>
-        <p:nvSpPr>
-          <p:cNvPr id="13" name="Shape 11"/>
-          <p:cNvSpPr/>
-          <p:nvPr/>
-        </p:nvSpPr>
-        <p:spPr>
-          <a:xfrm>
-            <a:off x="6233465" y="3154680"/>
-            <a:ext cx="5457139" cy="1600200"/>
-          </a:xfrm>
-          <a:prstGeom prst="roundRect">
-            <a:avLst>
-              <a:gd name="adj" fmla="val 2857"/>
-            </a:avLst>
-          </a:prstGeom>
-          <a:solidFill>
-            <a:srgbClr val="FFFFFF"/>
-          </a:solidFill>
-          <a:ln w="9525">
-            <a:solidFill>
-              <a:srgbClr val="D0D0CE"/>
-            </a:solidFill>
-            <a:prstDash val="solid"/>
-          </a:ln>
-        </p:spPr>
-      </p:sp>
-      <p:sp>
-        <p:nvSpPr>
-          <p:cNvPr id="14" name="Text 12"/>
-          <p:cNvSpPr txBox="1"/>
-          <p:nvPr/>
-        </p:nvSpPr>
-        <p:spPr>
-          <a:xfrm>
-            <a:off x="6416345" y="3282696"/>
-            <a:ext cx="5091379" cy="1143000"/>
-          </a:xfrm>
-          <a:prstGeom prst="rect">
-            <a:avLst/>
-          </a:prstGeom>
-          <a:noFill/>
-          <a:ln/>
-        </p:spPr>
-        <p:txBody>
-          <a:bodyPr wrap="square" rtlCol="0" anchor="t"/>
-          <a:lstStyle/>
-          <a:p>
-            <a:pPr indent="0" marL="0">
+                <a:latin typeface="Calibri" pitchFamily="34" charset="0"/>
+                <a:ea typeface="Calibri" pitchFamily="34" charset="-122"/>
+                <a:cs typeface="Calibri" pitchFamily="34" charset="-120"/>
+              </a:rPr>
+              <a:t>Single select.  </a:t>
+            </a:r>
+            <a:pPr algn="l" indent="0" marL="0">
               <a:lnSpc>
-                <a:spcPct val="112000"/>
+                <a:spcPct val="118000"/>
               </a:lnSpc>
               <a:buNone/>
             </a:pPr>
             <a:r>
-              <a:rPr lang="en-US" sz="1000" i="1" dirty="0">
-                <a:solidFill>
-                  <a:srgbClr val="000000"/>
-                </a:solidFill>
-                <a:latin typeface="Calibri" pitchFamily="34" charset="0"/>
-                <a:ea typeface="Calibri" pitchFamily="34" charset="-122"/>
-                <a:cs typeface="Calibri" pitchFamily="34" charset="-120"/>
-              </a:rPr>
-              <a:t>“The biggest development will be the convergence of GenAI, synthetic identity, and real-time payments. Fraud will become faster, more personalized, and harder to distinguish from legitimate customer behaviour.”</a:t>
-            </a:r>
-            <a:endParaRPr lang="en-US" sz="1000" dirty="0"/>
-          </a:p>
-        </p:txBody>
-      </p:sp>
-      <p:sp>
-        <p:nvSpPr>
-          <p:cNvPr id="15" name="Text 13"/>
-          <p:cNvSpPr txBox="1"/>
-          <p:nvPr/>
-        </p:nvSpPr>
-        <p:spPr>
-          <a:xfrm>
-            <a:off x="6416345" y="4443984"/>
-            <a:ext cx="5091379" cy="256032"/>
-          </a:xfrm>
-          <a:prstGeom prst="rect">
-            <a:avLst/>
-          </a:prstGeom>
-          <a:noFill/>
-          <a:ln/>
-        </p:spPr>
-        <p:txBody>
-          <a:bodyPr wrap="square" rtlCol="0" anchor="ctr"/>
-          <a:lstStyle/>
-          <a:p>
-            <a:pPr indent="0" marL="0">
-              <a:buNone/>
-            </a:pPr>
-            <a:r>
-              <a:rPr lang="en-US" sz="900" dirty="0">
+              <a:rPr lang="en-US" sz="850" b="1" dirty="0">
                 <a:solidFill>
                   <a:srgbClr val="53565A"/>
                 </a:solidFill>
-                <a:latin typeface="IBM Plex Mono" pitchFamily="34" charset="0"/>
-                <a:ea typeface="IBM Plex Mono" pitchFamily="34" charset="-122"/>
-                <a:cs typeface="IBM Plex Mono" pitchFamily="34" charset="-120"/>
-              </a:rPr>
-              <a:t>C-level · Banking</a:t>
-            </a:r>
-            <a:endParaRPr lang="en-US" sz="900" dirty="0"/>
-          </a:p>
-        </p:txBody>
-      </p:sp>
-      <p:sp>
-        <p:nvSpPr>
-          <p:cNvPr id="16" name="Shape 14"/>
-          <p:cNvSpPr/>
-          <p:nvPr/>
-        </p:nvSpPr>
-        <p:spPr>
-          <a:xfrm>
-            <a:off x="502006" y="4937760"/>
-            <a:ext cx="5457139" cy="1600200"/>
-          </a:xfrm>
-          <a:prstGeom prst="roundRect">
-            <a:avLst>
-              <a:gd name="adj" fmla="val 2857"/>
-            </a:avLst>
-          </a:prstGeom>
-          <a:solidFill>
-            <a:srgbClr val="FFFFFF"/>
-          </a:solidFill>
-          <a:ln w="9525">
-            <a:solidFill>
-              <a:srgbClr val="D0D0CE"/>
-            </a:solidFill>
-            <a:prstDash val="solid"/>
-          </a:ln>
-        </p:spPr>
-      </p:sp>
-      <p:sp>
-        <p:nvSpPr>
-          <p:cNvPr id="17" name="Text 15"/>
-          <p:cNvSpPr txBox="1"/>
-          <p:nvPr/>
-        </p:nvSpPr>
-        <p:spPr>
-          <a:xfrm>
-            <a:off x="684886" y="5065776"/>
-            <a:ext cx="5091379" cy="1143000"/>
-          </a:xfrm>
-          <a:prstGeom prst="rect">
-            <a:avLst/>
-          </a:prstGeom>
-          <a:noFill/>
-          <a:ln/>
-        </p:spPr>
-        <p:txBody>
-          <a:bodyPr wrap="square" rtlCol="0" anchor="t"/>
-          <a:lstStyle/>
-          <a:p>
-            <a:pPr indent="0" marL="0">
+                <a:latin typeface="Calibri" pitchFamily="34" charset="0"/>
+                <a:ea typeface="Calibri" pitchFamily="34" charset="-122"/>
+                <a:cs typeface="Calibri" pitchFamily="34" charset="-120"/>
+              </a:rPr>
+              <a:t>Response options as fielded: </a:t>
+            </a:r>
+            <a:pPr algn="l" indent="0" marL="0">
               <a:lnSpc>
-                <a:spcPct val="112000"/>
+                <a:spcPct val="118000"/>
               </a:lnSpc>
               <a:buNone/>
             </a:pPr>
             <a:r>
-              <a:rPr lang="en-US" sz="1000" i="1" dirty="0">
-                <a:solidFill>
-                  <a:srgbClr val="000000"/>
-                </a:solidFill>
-                <a:latin typeface="Calibri" pitchFamily="34" charset="0"/>
-                <a:ea typeface="Calibri" pitchFamily="34" charset="-122"/>
-                <a:cs typeface="Calibri" pitchFamily="34" charset="-120"/>
-              </a:rPr>
-              <a:t>“Companies are moving away from regular passwords towards decentralized digital credentials and biometric passkeys, as this would minimize phishing and account hacking.”</a:t>
-            </a:r>
-            <a:endParaRPr lang="en-US" sz="1000" dirty="0"/>
-          </a:p>
-        </p:txBody>
-      </p:sp>
-      <p:sp>
-        <p:nvSpPr>
-          <p:cNvPr id="18" name="Text 16"/>
-          <p:cNvSpPr txBox="1"/>
-          <p:nvPr/>
-        </p:nvSpPr>
-        <p:spPr>
-          <a:xfrm>
-            <a:off x="684886" y="6227064"/>
-            <a:ext cx="5091379" cy="256032"/>
-          </a:xfrm>
-          <a:prstGeom prst="rect">
-            <a:avLst/>
-          </a:prstGeom>
-          <a:noFill/>
-          <a:ln/>
-        </p:spPr>
-        <p:txBody>
-          <a:bodyPr wrap="square" rtlCol="0" anchor="ctr"/>
-          <a:lstStyle/>
-          <a:p>
-            <a:pPr indent="0" marL="0">
-              <a:buNone/>
-            </a:pPr>
-            <a:r>
-              <a:rPr lang="en-US" sz="900" dirty="0">
+              <a:rPr lang="en-US" sz="850" i="1" dirty="0">
                 <a:solidFill>
                   <a:srgbClr val="53565A"/>
                 </a:solidFill>
-                <a:latin typeface="IBM Plex Mono" pitchFamily="34" charset="0"/>
-                <a:ea typeface="IBM Plex Mono" pitchFamily="34" charset="-122"/>
-                <a:cs typeface="IBM Plex Mono" pitchFamily="34" charset="-120"/>
-              </a:rPr>
-              <a:t>Senior Manager · Banking</a:t>
-            </a:r>
-            <a:endParaRPr lang="en-US" sz="900" dirty="0"/>
-          </a:p>
-        </p:txBody>
-      </p:sp>
-      <p:sp>
-        <p:nvSpPr>
-          <p:cNvPr id="19" name="Shape 17"/>
-          <p:cNvSpPr/>
-          <p:nvPr/>
-        </p:nvSpPr>
-        <p:spPr>
-          <a:xfrm>
-            <a:off x="6233465" y="4937760"/>
-            <a:ext cx="5457139" cy="1600200"/>
-          </a:xfrm>
-          <a:prstGeom prst="roundRect">
-            <a:avLst>
-              <a:gd name="adj" fmla="val 2857"/>
-            </a:avLst>
-          </a:prstGeom>
-          <a:solidFill>
-            <a:srgbClr val="FFFFFF"/>
-          </a:solidFill>
-          <a:ln w="9525">
-            <a:solidFill>
-              <a:srgbClr val="D0D0CE"/>
-            </a:solidFill>
-            <a:prstDash val="solid"/>
-          </a:ln>
-        </p:spPr>
-      </p:sp>
-      <p:sp>
-        <p:nvSpPr>
-          <p:cNvPr id="20" name="Text 18"/>
-          <p:cNvSpPr txBox="1"/>
-          <p:nvPr/>
-        </p:nvSpPr>
-        <p:spPr>
-          <a:xfrm>
-            <a:off x="6416345" y="5065776"/>
-            <a:ext cx="5091379" cy="1143000"/>
-          </a:xfrm>
-          <a:prstGeom prst="rect">
-            <a:avLst/>
-          </a:prstGeom>
-          <a:noFill/>
-          <a:ln/>
-        </p:spPr>
-        <p:txBody>
-          <a:bodyPr wrap="square" rtlCol="0" anchor="t"/>
-          <a:lstStyle/>
-          <a:p>
-            <a:pPr indent="0" marL="0">
+                <a:latin typeface="Calibri" pitchFamily="34" charset="0"/>
+                <a:ea typeface="Calibri" pitchFamily="34" charset="-122"/>
+                <a:cs typeface="Calibri" pitchFamily="34" charset="-120"/>
+              </a:rPr>
+              <a:t>“Primarily investing to meet upcoming and draft regulatory requirements”</a:t>
+            </a:r>
+            <a:pPr algn="l" indent="0" marL="0">
               <a:lnSpc>
-                <a:spcPct val="112000"/>
+                <a:spcPct val="118000"/>
               </a:lnSpc>
               <a:buNone/>
             </a:pPr>
             <a:r>
-              <a:rPr lang="en-US" sz="1000" i="1" dirty="0">
-                <a:solidFill>
-                  <a:srgbClr val="000000"/>
-                </a:solidFill>
-                <a:latin typeface="Calibri" pitchFamily="34" charset="0"/>
-                <a:ea typeface="Calibri" pitchFamily="34" charset="-122"/>
-                <a:cs typeface="Calibri" pitchFamily="34" charset="-120"/>
-              </a:rPr>
-              <a:t>“AI will shift fraud management from reactive investigation toward more predictive prevention, which should help us identify risks before losses occur.”</a:t>
-            </a:r>
-            <a:endParaRPr lang="en-US" sz="1000" dirty="0"/>
-          </a:p>
-        </p:txBody>
-      </p:sp>
-      <p:sp>
-        <p:nvSpPr>
-          <p:cNvPr id="21" name="Text 19"/>
-          <p:cNvSpPr txBox="1"/>
-          <p:nvPr/>
-        </p:nvSpPr>
-        <p:spPr>
-          <a:xfrm>
-            <a:off x="6416345" y="6227064"/>
-            <a:ext cx="5091379" cy="256032"/>
-          </a:xfrm>
-          <a:prstGeom prst="rect">
-            <a:avLst/>
-          </a:prstGeom>
-          <a:noFill/>
-          <a:ln/>
-        </p:spPr>
-        <p:txBody>
-          <a:bodyPr wrap="square" rtlCol="0" anchor="ctr"/>
-          <a:lstStyle/>
-          <a:p>
-            <a:pPr indent="0" marL="0">
-              <a:buNone/>
-            </a:pPr>
-            <a:r>
-              <a:rPr lang="en-US" sz="900" dirty="0">
+              <a:rPr lang="en-US" sz="850" dirty="0">
+                <a:solidFill>
+                  <a:srgbClr val="D0D0CE"/>
+                </a:solidFill>
+                <a:latin typeface="Calibri" pitchFamily="34" charset="0"/>
+                <a:ea typeface="Calibri" pitchFamily="34" charset="-122"/>
+                <a:cs typeface="Calibri" pitchFamily="34" charset="-120"/>
+              </a:rPr>
+              <a:t>  ·  </a:t>
+            </a:r>
+            <a:pPr algn="l" indent="0" marL="0">
+              <a:lnSpc>
+                <a:spcPct val="118000"/>
+              </a:lnSpc>
+              <a:buNone/>
+            </a:pPr>
+            <a:r>
+              <a:rPr lang="en-US" sz="850" i="1" dirty="0">
                 <a:solidFill>
                   <a:srgbClr val="53565A"/>
                 </a:solidFill>
-                <a:latin typeface="IBM Plex Mono" pitchFamily="34" charset="0"/>
-                <a:ea typeface="IBM Plex Mono" pitchFamily="34" charset="-122"/>
-                <a:cs typeface="IBM Plex Mono" pitchFamily="34" charset="-120"/>
-              </a:rPr>
-              <a:t>VP · Banking</a:t>
-            </a:r>
-            <a:endParaRPr lang="en-US" sz="900" dirty="0"/>
+                <a:latin typeface="Calibri" pitchFamily="34" charset="0"/>
+                <a:ea typeface="Calibri" pitchFamily="34" charset="-122"/>
+                <a:cs typeface="Calibri" pitchFamily="34" charset="-120"/>
+              </a:rPr>
+              <a:t>“Primarily investing to remediate existing compliance and control gaps”</a:t>
+            </a:r>
+            <a:pPr algn="l" indent="0" marL="0">
+              <a:lnSpc>
+                <a:spcPct val="118000"/>
+              </a:lnSpc>
+              <a:buNone/>
+            </a:pPr>
+            <a:r>
+              <a:rPr lang="en-US" sz="850" dirty="0">
+                <a:solidFill>
+                  <a:srgbClr val="D0D0CE"/>
+                </a:solidFill>
+                <a:latin typeface="Calibri" pitchFamily="34" charset="0"/>
+                <a:ea typeface="Calibri" pitchFamily="34" charset="-122"/>
+                <a:cs typeface="Calibri" pitchFamily="34" charset="-120"/>
+              </a:rPr>
+              <a:t>  ·  </a:t>
+            </a:r>
+            <a:pPr algn="l" indent="0" marL="0">
+              <a:lnSpc>
+                <a:spcPct val="118000"/>
+              </a:lnSpc>
+              <a:buNone/>
+            </a:pPr>
+            <a:r>
+              <a:rPr lang="en-US" sz="850" i="1" dirty="0">
+                <a:solidFill>
+                  <a:srgbClr val="53565A"/>
+                </a:solidFill>
+                <a:latin typeface="Calibri" pitchFamily="34" charset="0"/>
+                <a:ea typeface="Calibri" pitchFamily="34" charset="-122"/>
+                <a:cs typeface="Calibri" pitchFamily="34" charset="-120"/>
+              </a:rPr>
+              <a:t>“Regulatory requirements are not a primary driver of fraud-related investment”</a:t>
+            </a:r>
+            <a:endParaRPr lang="en-US" sz="850" dirty="0"/>
           </a:p>
         </p:txBody>
       </p:sp>
@@ -15671,6 +18082,1404 @@
 <file path=ppt/slides/slide25.xml><?xml version="1.0" encoding="utf-8"?>
 <p:sld xmlns:a="http://schemas.openxmlformats.org/drawingml/2006/main" xmlns:r="http://schemas.openxmlformats.org/officeDocument/2006/relationships" xmlns:p="http://schemas.openxmlformats.org/presentationml/2006/main">
   <p:cSld name="Slide 25">
+    <p:bg>
+      <p:bgPr>
+        <a:solidFill>
+          <a:srgbClr val="FFFFFF"/>
+        </a:solidFill>
+      </p:bgPr>
+    </p:bg>
+    <p:spTree>
+      <p:nvGrpSpPr>
+        <p:cNvPr id="1" name=""/>
+        <p:cNvGrpSpPr/>
+        <p:nvPr/>
+      </p:nvGrpSpPr>
+      <p:grpSpPr>
+        <a:xfrm>
+          <a:off x="0" y="0"/>
+          <a:ext cx="0" cy="0"/>
+          <a:chOff x="0" y="0"/>
+          <a:chExt cx="0" cy="0"/>
+        </a:xfrm>
+      </p:grpSpPr>
+      <p:sp>
+        <p:nvSpPr>
+          <p:cNvPr id="2" name="Text 0"/>
+          <p:cNvSpPr txBox="1"/>
+          <p:nvPr/>
+        </p:nvSpPr>
+        <p:spPr>
+          <a:xfrm>
+            <a:off x="502006" y="256032"/>
+            <a:ext cx="11188598" cy="310896"/>
+          </a:xfrm>
+          <a:prstGeom prst="rect">
+            <a:avLst/>
+          </a:prstGeom>
+          <a:noFill/>
+          <a:ln/>
+        </p:spPr>
+        <p:txBody>
+          <a:bodyPr wrap="square" lIns="0" tIns="0" rIns="0" bIns="0" rtlCol="0" anchor="t"/>
+          <a:lstStyle/>
+          <a:p>
+            <a:pPr algn="l" indent="0" marL="0">
+              <a:buNone/>
+            </a:pPr>
+            <a:r>
+              <a:rPr lang="en-US" sz="1900" b="1" dirty="0">
+                <a:solidFill>
+                  <a:srgbClr val="000000"/>
+                </a:solidFill>
+                <a:latin typeface="Calibri" pitchFamily="34" charset="0"/>
+                <a:ea typeface="Calibri" pitchFamily="34" charset="-122"/>
+                <a:cs typeface="Calibri" pitchFamily="34" charset="-120"/>
+              </a:rPr>
+              <a:t>Upcoming Regulatory / Market Change With Greatest Expected Impact</a:t>
+            </a:r>
+            <a:endParaRPr lang="en-US" sz="1900" dirty="0"/>
+          </a:p>
+        </p:txBody>
+      </p:sp>
+      <p:sp>
+        <p:nvSpPr>
+          <p:cNvPr id="3" name="Text 1"/>
+          <p:cNvSpPr txBox="1"/>
+          <p:nvPr/>
+        </p:nvSpPr>
+        <p:spPr>
+          <a:xfrm>
+            <a:off x="502006" y="585216"/>
+            <a:ext cx="11188598" cy="713232"/>
+          </a:xfrm>
+          <a:prstGeom prst="rect">
+            <a:avLst/>
+          </a:prstGeom>
+          <a:noFill/>
+          <a:ln/>
+        </p:spPr>
+        <p:txBody>
+          <a:bodyPr wrap="square" lIns="0" tIns="0" rIns="0" bIns="0" rtlCol="0" anchor="t"/>
+          <a:lstStyle/>
+          <a:p>
+            <a:pPr algn="l" indent="0" marL="0">
+              <a:lnSpc>
+                <a:spcPct val="105000"/>
+              </a:lnSpc>
+              <a:buNone/>
+            </a:pPr>
+            <a:r>
+              <a:rPr lang="en-US" sz="1350" b="1" dirty="0">
+                <a:solidFill>
+                  <a:srgbClr val="046A38"/>
+                </a:solidFill>
+                <a:latin typeface="Calibri" pitchFamily="34" charset="0"/>
+                <a:ea typeface="Calibri" pitchFamily="34" charset="-122"/>
+                <a:cs typeface="Calibri" pitchFamily="34" charset="-120"/>
+              </a:rPr>
+              <a:t>Identity and authentication tops a close three-way race for the next big disruption.</a:t>
+            </a:r>
+            <a:endParaRPr lang="en-US" sz="1350" dirty="0"/>
+          </a:p>
+        </p:txBody>
+      </p:sp>
+      <p:sp>
+        <p:nvSpPr>
+          <p:cNvPr id="4" name="Shape 2"/>
+          <p:cNvSpPr/>
+          <p:nvPr/>
+        </p:nvSpPr>
+        <p:spPr>
+          <a:xfrm>
+            <a:off x="502006" y="1335024"/>
+            <a:ext cx="0" cy="512064"/>
+          </a:xfrm>
+          <a:prstGeom prst="line">
+            <a:avLst/>
+          </a:prstGeom>
+          <a:noFill/>
+          <a:ln w="25400">
+            <a:solidFill>
+              <a:srgbClr val="D0D0CE"/>
+            </a:solidFill>
+            <a:prstDash val="solid"/>
+          </a:ln>
+        </p:spPr>
+      </p:sp>
+      <p:sp>
+        <p:nvSpPr>
+          <p:cNvPr id="5" name="Text 3"/>
+          <p:cNvSpPr txBox="1"/>
+          <p:nvPr/>
+        </p:nvSpPr>
+        <p:spPr>
+          <a:xfrm>
+            <a:off x="648310" y="1335024"/>
+            <a:ext cx="11042294" cy="512064"/>
+          </a:xfrm>
+          <a:prstGeom prst="rect">
+            <a:avLst/>
+          </a:prstGeom>
+          <a:noFill/>
+          <a:ln/>
+        </p:spPr>
+        <p:txBody>
+          <a:bodyPr wrap="square" lIns="0" tIns="0" rIns="0" bIns="0" rtlCol="0" anchor="t"/>
+          <a:lstStyle/>
+          <a:p>
+            <a:pPr algn="l" indent="0" marL="0">
+              <a:lnSpc>
+                <a:spcPct val="106000"/>
+              </a:lnSpc>
+              <a:buNone/>
+            </a:pPr>
+            <a:r>
+              <a:rPr lang="en-US" sz="900" b="1" dirty="0">
+                <a:solidFill>
+                  <a:srgbClr val="046A38"/>
+                </a:solidFill>
+                <a:latin typeface="IBM Plex Mono" pitchFamily="34" charset="0"/>
+                <a:ea typeface="IBM Plex Mono" pitchFamily="34" charset="-122"/>
+                <a:cs typeface="IBM Plex Mono" pitchFamily="34" charset="-120"/>
+              </a:rPr>
+              <a:t>Q11  </a:t>
+            </a:r>
+            <a:pPr algn="l" indent="0" marL="0">
+              <a:lnSpc>
+                <a:spcPct val="106000"/>
+              </a:lnSpc>
+              <a:buNone/>
+            </a:pPr>
+            <a:r>
+              <a:rPr lang="en-US" sz="1000" i="1" dirty="0">
+                <a:solidFill>
+                  <a:srgbClr val="575757"/>
+                </a:solidFill>
+                <a:latin typeface="Calibri" pitchFamily="34" charset="0"/>
+                <a:ea typeface="Calibri" pitchFamily="34" charset="-122"/>
+                <a:cs typeface="Calibri" pitchFamily="34" charset="-120"/>
+              </a:rPr>
+              <a:t>“Which upcoming regulatory or market changes is expected to have the greatest impact on your fraud program?”</a:t>
+            </a:r>
+            <a:endParaRPr lang="en-US" sz="1000" dirty="0"/>
+          </a:p>
+        </p:txBody>
+      </p:sp>
+      <p:sp>
+        <p:nvSpPr>
+          <p:cNvPr id="6" name="Text 4"/>
+          <p:cNvSpPr txBox="1"/>
+          <p:nvPr/>
+        </p:nvSpPr>
+        <p:spPr>
+          <a:xfrm>
+            <a:off x="11346790" y="6537960"/>
+            <a:ext cx="343814" cy="182880"/>
+          </a:xfrm>
+          <a:prstGeom prst="rect">
+            <a:avLst/>
+          </a:prstGeom>
+          <a:noFill/>
+          <a:ln/>
+        </p:spPr>
+        <p:txBody>
+          <a:bodyPr wrap="square" rtlCol="0" anchor="ctr"/>
+          <a:lstStyle/>
+          <a:p>
+            <a:pPr algn="r" indent="0" marL="0">
+              <a:buNone/>
+            </a:pPr>
+            <a:r>
+              <a:rPr lang="en-US" sz="900" dirty="0">
+                <a:solidFill>
+                  <a:srgbClr val="53565A"/>
+                </a:solidFill>
+                <a:latin typeface="Calibri" pitchFamily="34" charset="0"/>
+                <a:ea typeface="Calibri" pitchFamily="34" charset="-122"/>
+                <a:cs typeface="Calibri" pitchFamily="34" charset="-120"/>
+              </a:rPr>
+              <a:t>24</a:t>
+            </a:r>
+            <a:endParaRPr lang="en-US" sz="900" dirty="0"/>
+          </a:p>
+        </p:txBody>
+      </p:sp>
+      <p:graphicFrame>
+        <p:nvGraphicFramePr>
+          <p:cNvPr id="7" name="Chart 0" descr=""/>
+          <p:cNvGraphicFramePr/>
+          <p:nvPr/>
+        </p:nvGraphicFramePr>
+        <p:xfrm>
+          <a:off x="502006" y="2011680"/>
+          <a:ext cx="11188598" cy="3063240"/>
+        </p:xfrm>
+        <a:graphic xmlns:a="http://schemas.openxmlformats.org/drawingml/2006/main">
+          <a:graphicData uri="http://schemas.openxmlformats.org/drawingml/2006/chart">
+            <c:chart xmlns:c="http://schemas.openxmlformats.org/drawingml/2006/chart" r:id="rId1"/>
+          </a:graphicData>
+        </a:graphic>
+      </p:graphicFrame>
+      <p:sp>
+        <p:nvSpPr>
+          <p:cNvPr id="8" name="Shape 5"/>
+          <p:cNvSpPr/>
+          <p:nvPr/>
+        </p:nvSpPr>
+        <p:spPr>
+          <a:xfrm>
+            <a:off x="502006" y="5202936"/>
+            <a:ext cx="11188598" cy="0"/>
+          </a:xfrm>
+          <a:prstGeom prst="line">
+            <a:avLst/>
+          </a:prstGeom>
+          <a:noFill/>
+          <a:ln w="9525">
+            <a:solidFill>
+              <a:srgbClr val="D0D0CE"/>
+            </a:solidFill>
+            <a:prstDash val="solid"/>
+          </a:ln>
+        </p:spPr>
+      </p:sp>
+      <p:sp>
+        <p:nvSpPr>
+          <p:cNvPr id="9" name="Text 6"/>
+          <p:cNvSpPr txBox="1"/>
+          <p:nvPr/>
+        </p:nvSpPr>
+        <p:spPr>
+          <a:xfrm>
+            <a:off x="502006" y="5276088"/>
+            <a:ext cx="11188598" cy="886968"/>
+          </a:xfrm>
+          <a:prstGeom prst="rect">
+            <a:avLst/>
+          </a:prstGeom>
+          <a:noFill/>
+          <a:ln/>
+        </p:spPr>
+        <p:txBody>
+          <a:bodyPr wrap="square" lIns="0" tIns="0" rIns="0" bIns="0" rtlCol="0" anchor="t"/>
+          <a:lstStyle/>
+          <a:p>
+            <a:pPr algn="l" indent="0" marL="0">
+              <a:lnSpc>
+                <a:spcPct val="118000"/>
+              </a:lnSpc>
+              <a:buNone/>
+            </a:pPr>
+            <a:r>
+              <a:rPr lang="en-US" sz="850" b="1" dirty="0">
+                <a:solidFill>
+                  <a:srgbClr val="53565A"/>
+                </a:solidFill>
+                <a:latin typeface="Calibri" pitchFamily="34" charset="0"/>
+                <a:ea typeface="Calibri" pitchFamily="34" charset="-122"/>
+                <a:cs typeface="Calibri" pitchFamily="34" charset="-120"/>
+              </a:rPr>
+              <a:t>Ranked top 3 — shown as % of respondents who placed the option anywhere in their top 3 (not mutually exclusive; bars don't sum to 100%).  </a:t>
+            </a:r>
+            <a:pPr algn="l" indent="0" marL="0">
+              <a:lnSpc>
+                <a:spcPct val="118000"/>
+              </a:lnSpc>
+              <a:buNone/>
+            </a:pPr>
+            <a:r>
+              <a:rPr lang="en-US" sz="850" b="1" dirty="0">
+                <a:solidFill>
+                  <a:srgbClr val="53565A"/>
+                </a:solidFill>
+                <a:latin typeface="Calibri" pitchFamily="34" charset="0"/>
+                <a:ea typeface="Calibri" pitchFamily="34" charset="-122"/>
+                <a:cs typeface="Calibri" pitchFamily="34" charset="-120"/>
+              </a:rPr>
+              <a:t>Response options as fielded: </a:t>
+            </a:r>
+            <a:pPr algn="l" indent="0" marL="0">
+              <a:lnSpc>
+                <a:spcPct val="118000"/>
+              </a:lnSpc>
+              <a:buNone/>
+            </a:pPr>
+            <a:r>
+              <a:rPr lang="en-US" sz="850" i="1" dirty="0">
+                <a:solidFill>
+                  <a:srgbClr val="53565A"/>
+                </a:solidFill>
+                <a:latin typeface="Calibri" pitchFamily="34" charset="0"/>
+                <a:ea typeface="Calibri" pitchFamily="34" charset="-122"/>
+                <a:cs typeface="Calibri" pitchFamily="34" charset="-120"/>
+              </a:rPr>
+              <a:t>“Payment innovation and adoption (e.g., real-time payments, stable coins, agentic payments)”</a:t>
+            </a:r>
+            <a:pPr algn="l" indent="0" marL="0">
+              <a:lnSpc>
+                <a:spcPct val="118000"/>
+              </a:lnSpc>
+              <a:buNone/>
+            </a:pPr>
+            <a:r>
+              <a:rPr lang="en-US" sz="850" dirty="0">
+                <a:solidFill>
+                  <a:srgbClr val="D0D0CE"/>
+                </a:solidFill>
+                <a:latin typeface="Calibri" pitchFamily="34" charset="0"/>
+                <a:ea typeface="Calibri" pitchFamily="34" charset="-122"/>
+                <a:cs typeface="Calibri" pitchFamily="34" charset="-120"/>
+              </a:rPr>
+              <a:t>  ·  </a:t>
+            </a:r>
+            <a:pPr algn="l" indent="0" marL="0">
+              <a:lnSpc>
+                <a:spcPct val="118000"/>
+              </a:lnSpc>
+              <a:buNone/>
+            </a:pPr>
+            <a:r>
+              <a:rPr lang="en-US" sz="850" i="1" dirty="0">
+                <a:solidFill>
+                  <a:srgbClr val="53565A"/>
+                </a:solidFill>
+                <a:latin typeface="Calibri" pitchFamily="34" charset="0"/>
+                <a:ea typeface="Calibri" pitchFamily="34" charset="-122"/>
+                <a:cs typeface="Calibri" pitchFamily="34" charset="-120"/>
+              </a:rPr>
+              <a:t>“Liability and reimbursement changes”</a:t>
+            </a:r>
+            <a:pPr algn="l" indent="0" marL="0">
+              <a:lnSpc>
+                <a:spcPct val="118000"/>
+              </a:lnSpc>
+              <a:buNone/>
+            </a:pPr>
+            <a:r>
+              <a:rPr lang="en-US" sz="850" dirty="0">
+                <a:solidFill>
+                  <a:srgbClr val="D0D0CE"/>
+                </a:solidFill>
+                <a:latin typeface="Calibri" pitchFamily="34" charset="0"/>
+                <a:ea typeface="Calibri" pitchFamily="34" charset="-122"/>
+                <a:cs typeface="Calibri" pitchFamily="34" charset="-120"/>
+              </a:rPr>
+              <a:t>  ·  </a:t>
+            </a:r>
+            <a:pPr algn="l" indent="0" marL="0">
+              <a:lnSpc>
+                <a:spcPct val="118000"/>
+              </a:lnSpc>
+              <a:buNone/>
+            </a:pPr>
+            <a:r>
+              <a:rPr lang="en-US" sz="850" i="1" dirty="0">
+                <a:solidFill>
+                  <a:srgbClr val="53565A"/>
+                </a:solidFill>
+                <a:latin typeface="Calibri" pitchFamily="34" charset="0"/>
+                <a:ea typeface="Calibri" pitchFamily="34" charset="-122"/>
+                <a:cs typeface="Calibri" pitchFamily="34" charset="-120"/>
+              </a:rPr>
+              <a:t>“Open Banking / Consumer-driven banking initiatives”</a:t>
+            </a:r>
+            <a:pPr algn="l" indent="0" marL="0">
+              <a:lnSpc>
+                <a:spcPct val="118000"/>
+              </a:lnSpc>
+              <a:buNone/>
+            </a:pPr>
+            <a:r>
+              <a:rPr lang="en-US" sz="850" dirty="0">
+                <a:solidFill>
+                  <a:srgbClr val="D0D0CE"/>
+                </a:solidFill>
+                <a:latin typeface="Calibri" pitchFamily="34" charset="0"/>
+                <a:ea typeface="Calibri" pitchFamily="34" charset="-122"/>
+                <a:cs typeface="Calibri" pitchFamily="34" charset="-120"/>
+              </a:rPr>
+              <a:t>  ·  </a:t>
+            </a:r>
+            <a:pPr algn="l" indent="0" marL="0">
+              <a:lnSpc>
+                <a:spcPct val="118000"/>
+              </a:lnSpc>
+              <a:buNone/>
+            </a:pPr>
+            <a:r>
+              <a:rPr lang="en-US" sz="850" i="1" dirty="0">
+                <a:solidFill>
+                  <a:srgbClr val="53565A"/>
+                </a:solidFill>
+                <a:latin typeface="Calibri" pitchFamily="34" charset="0"/>
+                <a:ea typeface="Calibri" pitchFamily="34" charset="-122"/>
+                <a:cs typeface="Calibri" pitchFamily="34" charset="-120"/>
+              </a:rPr>
+              <a:t>“AML related modernization initiatives”</a:t>
+            </a:r>
+            <a:pPr algn="l" indent="0" marL="0">
+              <a:lnSpc>
+                <a:spcPct val="118000"/>
+              </a:lnSpc>
+              <a:buNone/>
+            </a:pPr>
+            <a:r>
+              <a:rPr lang="en-US" sz="850" dirty="0">
+                <a:solidFill>
+                  <a:srgbClr val="D0D0CE"/>
+                </a:solidFill>
+                <a:latin typeface="Calibri" pitchFamily="34" charset="0"/>
+                <a:ea typeface="Calibri" pitchFamily="34" charset="-122"/>
+                <a:cs typeface="Calibri" pitchFamily="34" charset="-120"/>
+              </a:rPr>
+              <a:t>  ·  </a:t>
+            </a:r>
+            <a:pPr algn="l" indent="0" marL="0">
+              <a:lnSpc>
+                <a:spcPct val="118000"/>
+              </a:lnSpc>
+              <a:buNone/>
+            </a:pPr>
+            <a:r>
+              <a:rPr lang="en-US" sz="850" i="1" dirty="0">
+                <a:solidFill>
+                  <a:srgbClr val="53565A"/>
+                </a:solidFill>
+                <a:latin typeface="Calibri" pitchFamily="34" charset="0"/>
+                <a:ea typeface="Calibri" pitchFamily="34" charset="-122"/>
+                <a:cs typeface="Calibri" pitchFamily="34" charset="-120"/>
+              </a:rPr>
+              <a:t>“Privacy, data-sharing requirements, and AI governance requirements”</a:t>
+            </a:r>
+            <a:pPr algn="l" indent="0" marL="0">
+              <a:lnSpc>
+                <a:spcPct val="118000"/>
+              </a:lnSpc>
+              <a:buNone/>
+            </a:pPr>
+            <a:r>
+              <a:rPr lang="en-US" sz="850" dirty="0">
+                <a:solidFill>
+                  <a:srgbClr val="D0D0CE"/>
+                </a:solidFill>
+                <a:latin typeface="Calibri" pitchFamily="34" charset="0"/>
+                <a:ea typeface="Calibri" pitchFamily="34" charset="-122"/>
+                <a:cs typeface="Calibri" pitchFamily="34" charset="-120"/>
+              </a:rPr>
+              <a:t>  ·  </a:t>
+            </a:r>
+            <a:pPr algn="l" indent="0" marL="0">
+              <a:lnSpc>
+                <a:spcPct val="118000"/>
+              </a:lnSpc>
+              <a:buNone/>
+            </a:pPr>
+            <a:r>
+              <a:rPr lang="en-US" sz="850" i="1" dirty="0">
+                <a:solidFill>
+                  <a:srgbClr val="53565A"/>
+                </a:solidFill>
+                <a:latin typeface="Calibri" pitchFamily="34" charset="0"/>
+                <a:ea typeface="Calibri" pitchFamily="34" charset="-122"/>
+                <a:cs typeface="Calibri" pitchFamily="34" charset="-120"/>
+              </a:rPr>
+              <a:t>“Customer identity, authentication, and digital trust expectations”</a:t>
+            </a:r>
+            <a:endParaRPr lang="en-US" sz="850" dirty="0"/>
+          </a:p>
+        </p:txBody>
+      </p:sp>
+    </p:spTree>
+  </p:cSld>
+  <p:clrMapOvr>
+    <a:masterClrMapping/>
+  </p:clrMapOvr>
+</p:sld>
+</file>
+
+<file path=ppt/slides/slide26.xml><?xml version="1.0" encoding="utf-8"?>
+<p:sld xmlns:a="http://schemas.openxmlformats.org/drawingml/2006/main" xmlns:r="http://schemas.openxmlformats.org/officeDocument/2006/relationships" xmlns:p="http://schemas.openxmlformats.org/presentationml/2006/main">
+  <p:cSld name="Slide 26">
+    <p:bg>
+      <p:bgPr>
+        <a:solidFill>
+          <a:srgbClr val="86BC25"/>
+        </a:solidFill>
+      </p:bgPr>
+    </p:bg>
+    <p:spTree>
+      <p:nvGrpSpPr>
+        <p:cNvPr id="1" name=""/>
+        <p:cNvGrpSpPr/>
+        <p:nvPr/>
+      </p:nvGrpSpPr>
+      <p:grpSpPr>
+        <a:xfrm>
+          <a:off x="0" y="0"/>
+          <a:ext cx="0" cy="0"/>
+          <a:chOff x="0" y="0"/>
+          <a:chExt cx="0" cy="0"/>
+        </a:xfrm>
+      </p:grpSpPr>
+      <p:sp>
+        <p:nvSpPr>
+          <p:cNvPr id="2" name="Text 0"/>
+          <p:cNvSpPr txBox="1"/>
+          <p:nvPr/>
+        </p:nvSpPr>
+        <p:spPr>
+          <a:xfrm>
+            <a:off x="502920" y="1699870"/>
+            <a:ext cx="10415016" cy="1591970"/>
+          </a:xfrm>
+          <a:prstGeom prst="rect">
+            <a:avLst/>
+          </a:prstGeom>
+          <a:noFill/>
+          <a:ln/>
+        </p:spPr>
+        <p:txBody>
+          <a:bodyPr wrap="square" lIns="0" tIns="0" rIns="0" bIns="0" rtlCol="0" anchor="b"/>
+          <a:lstStyle/>
+          <a:p>
+            <a:pPr algn="l" indent="0" marL="0">
+              <a:buNone/>
+            </a:pPr>
+            <a:r>
+              <a:rPr lang="en-US" sz="3600" b="1" dirty="0">
+                <a:solidFill>
+                  <a:srgbClr val="FFFFFF"/>
+                </a:solidFill>
+                <a:latin typeface="Calibri" pitchFamily="34" charset="0"/>
+                <a:ea typeface="Calibri" pitchFamily="34" charset="-122"/>
+                <a:cs typeface="Calibri" pitchFamily="34" charset="-120"/>
+              </a:rPr>
+              <a:t>6. Looking Ahead Three Years</a:t>
+            </a:r>
+            <a:endParaRPr lang="en-US" sz="3600" dirty="0"/>
+          </a:p>
+        </p:txBody>
+      </p:sp>
+      <p:sp>
+        <p:nvSpPr>
+          <p:cNvPr id="3" name="Text 1"/>
+          <p:cNvSpPr txBox="1"/>
+          <p:nvPr/>
+        </p:nvSpPr>
+        <p:spPr>
+          <a:xfrm>
+            <a:off x="11346790" y="6537960"/>
+            <a:ext cx="343814" cy="182880"/>
+          </a:xfrm>
+          <a:prstGeom prst="rect">
+            <a:avLst/>
+          </a:prstGeom>
+          <a:noFill/>
+          <a:ln/>
+        </p:spPr>
+        <p:txBody>
+          <a:bodyPr wrap="square" rtlCol="0" anchor="ctr"/>
+          <a:lstStyle/>
+          <a:p>
+            <a:pPr algn="r" indent="0" marL="0">
+              <a:buNone/>
+            </a:pPr>
+            <a:r>
+              <a:rPr lang="en-US" sz="900" dirty="0">
+                <a:solidFill>
+                  <a:srgbClr val="FFFFFF"/>
+                </a:solidFill>
+                <a:latin typeface="Calibri" pitchFamily="34" charset="0"/>
+                <a:ea typeface="Calibri" pitchFamily="34" charset="-122"/>
+                <a:cs typeface="Calibri" pitchFamily="34" charset="-120"/>
+              </a:rPr>
+              <a:t>25</a:t>
+            </a:r>
+            <a:endParaRPr lang="en-US" sz="900" dirty="0"/>
+          </a:p>
+        </p:txBody>
+      </p:sp>
+    </p:spTree>
+  </p:cSld>
+  <p:clrMapOvr>
+    <a:masterClrMapping/>
+  </p:clrMapOvr>
+</p:sld>
+</file>
+
+<file path=ppt/slides/slide27.xml><?xml version="1.0" encoding="utf-8"?>
+<p:sld xmlns:a="http://schemas.openxmlformats.org/drawingml/2006/main" xmlns:r="http://schemas.openxmlformats.org/officeDocument/2006/relationships" xmlns:p="http://schemas.openxmlformats.org/presentationml/2006/main">
+  <p:cSld name="Slide 27">
+    <p:bg>
+      <p:bgPr>
+        <a:solidFill>
+          <a:srgbClr val="FFFFFF"/>
+        </a:solidFill>
+      </p:bgPr>
+    </p:bg>
+    <p:spTree>
+      <p:nvGrpSpPr>
+        <p:cNvPr id="1" name=""/>
+        <p:cNvGrpSpPr/>
+        <p:nvPr/>
+      </p:nvGrpSpPr>
+      <p:grpSpPr>
+        <a:xfrm>
+          <a:off x="0" y="0"/>
+          <a:ext cx="0" cy="0"/>
+          <a:chOff x="0" y="0"/>
+          <a:chExt cx="0" cy="0"/>
+        </a:xfrm>
+      </p:grpSpPr>
+      <p:sp>
+        <p:nvSpPr>
+          <p:cNvPr id="2" name="Text 0"/>
+          <p:cNvSpPr txBox="1"/>
+          <p:nvPr/>
+        </p:nvSpPr>
+        <p:spPr>
+          <a:xfrm>
+            <a:off x="502006" y="256032"/>
+            <a:ext cx="11188598" cy="310896"/>
+          </a:xfrm>
+          <a:prstGeom prst="rect">
+            <a:avLst/>
+          </a:prstGeom>
+          <a:noFill/>
+          <a:ln/>
+        </p:spPr>
+        <p:txBody>
+          <a:bodyPr wrap="square" lIns="0" tIns="0" rIns="0" bIns="0" rtlCol="0" anchor="t"/>
+          <a:lstStyle/>
+          <a:p>
+            <a:pPr algn="l" indent="0" marL="0">
+              <a:buNone/>
+            </a:pPr>
+            <a:r>
+              <a:rPr lang="en-US" sz="1900" b="1" dirty="0">
+                <a:solidFill>
+                  <a:srgbClr val="000000"/>
+                </a:solidFill>
+                <a:latin typeface="Calibri" pitchFamily="34" charset="0"/>
+                <a:ea typeface="Calibri" pitchFamily="34" charset="-122"/>
+                <a:cs typeface="Calibri" pitchFamily="34" charset="-120"/>
+              </a:rPr>
+              <a:t>What Leaders Say, Unprompted</a:t>
+            </a:r>
+            <a:endParaRPr lang="en-US" sz="1900" dirty="0"/>
+          </a:p>
+        </p:txBody>
+      </p:sp>
+      <p:sp>
+        <p:nvSpPr>
+          <p:cNvPr id="3" name="Text 1"/>
+          <p:cNvSpPr txBox="1"/>
+          <p:nvPr/>
+        </p:nvSpPr>
+        <p:spPr>
+          <a:xfrm>
+            <a:off x="502006" y="585216"/>
+            <a:ext cx="11188598" cy="713232"/>
+          </a:xfrm>
+          <a:prstGeom prst="rect">
+            <a:avLst/>
+          </a:prstGeom>
+          <a:noFill/>
+          <a:ln/>
+        </p:spPr>
+        <p:txBody>
+          <a:bodyPr wrap="square" lIns="0" tIns="0" rIns="0" bIns="0" rtlCol="0" anchor="t"/>
+          <a:lstStyle/>
+          <a:p>
+            <a:pPr algn="l" indent="0" marL="0">
+              <a:lnSpc>
+                <a:spcPct val="105000"/>
+              </a:lnSpc>
+              <a:buNone/>
+            </a:pPr>
+            <a:r>
+              <a:rPr lang="en-US" sz="1350" b="1" dirty="0">
+                <a:solidFill>
+                  <a:srgbClr val="046A38"/>
+                </a:solidFill>
+                <a:latin typeface="Calibri" pitchFamily="34" charset="0"/>
+                <a:ea typeface="Calibri" pitchFamily="34" charset="-122"/>
+                <a:cs typeface="Calibri" pitchFamily="34" charset="-120"/>
+              </a:rPr>
+              <a:t>Left to answer in their own words, leaders converge on the same trend.</a:t>
+            </a:r>
+            <a:endParaRPr lang="en-US" sz="1350" dirty="0"/>
+          </a:p>
+        </p:txBody>
+      </p:sp>
+      <p:sp>
+        <p:nvSpPr>
+          <p:cNvPr id="4" name="Shape 2"/>
+          <p:cNvSpPr/>
+          <p:nvPr/>
+        </p:nvSpPr>
+        <p:spPr>
+          <a:xfrm>
+            <a:off x="502006" y="1335024"/>
+            <a:ext cx="0" cy="512064"/>
+          </a:xfrm>
+          <a:prstGeom prst="line">
+            <a:avLst/>
+          </a:prstGeom>
+          <a:noFill/>
+          <a:ln w="25400">
+            <a:solidFill>
+              <a:srgbClr val="D0D0CE"/>
+            </a:solidFill>
+            <a:prstDash val="solid"/>
+          </a:ln>
+        </p:spPr>
+      </p:sp>
+      <p:sp>
+        <p:nvSpPr>
+          <p:cNvPr id="5" name="Text 3"/>
+          <p:cNvSpPr txBox="1"/>
+          <p:nvPr/>
+        </p:nvSpPr>
+        <p:spPr>
+          <a:xfrm>
+            <a:off x="648310" y="1335024"/>
+            <a:ext cx="11042294" cy="512064"/>
+          </a:xfrm>
+          <a:prstGeom prst="rect">
+            <a:avLst/>
+          </a:prstGeom>
+          <a:noFill/>
+          <a:ln/>
+        </p:spPr>
+        <p:txBody>
+          <a:bodyPr wrap="square" lIns="0" tIns="0" rIns="0" bIns="0" rtlCol="0" anchor="t"/>
+          <a:lstStyle/>
+          <a:p>
+            <a:pPr algn="l" indent="0" marL="0">
+              <a:lnSpc>
+                <a:spcPct val="106000"/>
+              </a:lnSpc>
+              <a:buNone/>
+            </a:pPr>
+            <a:r>
+              <a:rPr lang="en-US" sz="900" b="1" dirty="0">
+                <a:solidFill>
+                  <a:srgbClr val="046A38"/>
+                </a:solidFill>
+                <a:latin typeface="IBM Plex Mono" pitchFamily="34" charset="0"/>
+                <a:ea typeface="IBM Plex Mono" pitchFamily="34" charset="-122"/>
+                <a:cs typeface="IBM Plex Mono" pitchFamily="34" charset="-120"/>
+              </a:rPr>
+              <a:t>Q12  </a:t>
+            </a:r>
+            <a:pPr algn="l" indent="0" marL="0">
+              <a:lnSpc>
+                <a:spcPct val="106000"/>
+              </a:lnSpc>
+              <a:buNone/>
+            </a:pPr>
+            <a:r>
+              <a:rPr lang="en-US" sz="1000" i="1" dirty="0">
+                <a:solidFill>
+                  <a:srgbClr val="575757"/>
+                </a:solidFill>
+                <a:latin typeface="Calibri" pitchFamily="34" charset="0"/>
+                <a:ea typeface="Calibri" pitchFamily="34" charset="-122"/>
+                <a:cs typeface="Calibri" pitchFamily="34" charset="-120"/>
+              </a:rPr>
+              <a:t>“Looking ahead three years, what development do you believe will have the greatest impact on fraud risk management, and why? (open-ended)”</a:t>
+            </a:r>
+            <a:endParaRPr lang="en-US" sz="1000" dirty="0"/>
+          </a:p>
+        </p:txBody>
+      </p:sp>
+      <p:sp>
+        <p:nvSpPr>
+          <p:cNvPr id="6" name="Text 4"/>
+          <p:cNvSpPr txBox="1"/>
+          <p:nvPr/>
+        </p:nvSpPr>
+        <p:spPr>
+          <a:xfrm>
+            <a:off x="11346790" y="6537960"/>
+            <a:ext cx="343814" cy="182880"/>
+          </a:xfrm>
+          <a:prstGeom prst="rect">
+            <a:avLst/>
+          </a:prstGeom>
+          <a:noFill/>
+          <a:ln/>
+        </p:spPr>
+        <p:txBody>
+          <a:bodyPr wrap="square" rtlCol="0" anchor="ctr"/>
+          <a:lstStyle/>
+          <a:p>
+            <a:pPr algn="r" indent="0" marL="0">
+              <a:buNone/>
+            </a:pPr>
+            <a:r>
+              <a:rPr lang="en-US" sz="900" dirty="0">
+                <a:solidFill>
+                  <a:srgbClr val="53565A"/>
+                </a:solidFill>
+                <a:latin typeface="Calibri" pitchFamily="34" charset="0"/>
+                <a:ea typeface="Calibri" pitchFamily="34" charset="-122"/>
+                <a:cs typeface="Calibri" pitchFamily="34" charset="-120"/>
+              </a:rPr>
+              <a:t>26</a:t>
+            </a:r>
+            <a:endParaRPr lang="en-US" sz="900" dirty="0"/>
+          </a:p>
+        </p:txBody>
+      </p:sp>
+      <p:sp>
+        <p:nvSpPr>
+          <p:cNvPr id="7" name="Shape 5"/>
+          <p:cNvSpPr/>
+          <p:nvPr/>
+        </p:nvSpPr>
+        <p:spPr>
+          <a:xfrm>
+            <a:off x="502006" y="2011680"/>
+            <a:ext cx="11188598" cy="914400"/>
+          </a:xfrm>
+          <a:prstGeom prst="roundRect">
+            <a:avLst>
+              <a:gd name="adj" fmla="val 6000"/>
+            </a:avLst>
+          </a:prstGeom>
+          <a:solidFill>
+            <a:srgbClr val="F2F2F2"/>
+          </a:solidFill>
+          <a:ln/>
+        </p:spPr>
+      </p:sp>
+      <p:sp>
+        <p:nvSpPr>
+          <p:cNvPr id="8" name="Text 6"/>
+          <p:cNvSpPr txBox="1"/>
+          <p:nvPr/>
+        </p:nvSpPr>
+        <p:spPr>
+          <a:xfrm>
+            <a:off x="776326" y="2011680"/>
+            <a:ext cx="2011680" cy="914400"/>
+          </a:xfrm>
+          <a:prstGeom prst="rect">
+            <a:avLst/>
+          </a:prstGeom>
+          <a:noFill/>
+          <a:ln/>
+        </p:spPr>
+        <p:txBody>
+          <a:bodyPr wrap="square" rtlCol="0" anchor="ctr"/>
+          <a:lstStyle/>
+          <a:p>
+            <a:pPr indent="0" marL="0">
+              <a:buNone/>
+            </a:pPr>
+            <a:r>
+              <a:rPr lang="en-US" sz="3000" b="1" dirty="0">
+                <a:solidFill>
+                  <a:srgbClr val="046A38"/>
+                </a:solidFill>
+                <a:latin typeface="Calibri" pitchFamily="34" charset="0"/>
+                <a:ea typeface="Calibri" pitchFamily="34" charset="-122"/>
+                <a:cs typeface="Calibri" pitchFamily="34" charset="-120"/>
+              </a:rPr>
+              <a:t>100/100</a:t>
+            </a:r>
+            <a:endParaRPr lang="en-US" sz="3000" dirty="0"/>
+          </a:p>
+        </p:txBody>
+      </p:sp>
+      <p:sp>
+        <p:nvSpPr>
+          <p:cNvPr id="9" name="Text 7"/>
+          <p:cNvSpPr txBox="1"/>
+          <p:nvPr/>
+        </p:nvSpPr>
+        <p:spPr>
+          <a:xfrm>
+            <a:off x="2970886" y="2057400"/>
+            <a:ext cx="8445398" cy="822960"/>
+          </a:xfrm>
+          <a:prstGeom prst="rect">
+            <a:avLst/>
+          </a:prstGeom>
+          <a:noFill/>
+          <a:ln/>
+        </p:spPr>
+        <p:txBody>
+          <a:bodyPr wrap="square" rtlCol="0" anchor="ctr"/>
+          <a:lstStyle/>
+          <a:p>
+            <a:pPr indent="0" marL="0">
+              <a:lnSpc>
+                <a:spcPct val="110000"/>
+              </a:lnSpc>
+              <a:buNone/>
+            </a:pPr>
+            <a:r>
+              <a:rPr lang="en-US" sz="1150" dirty="0">
+                <a:solidFill>
+                  <a:srgbClr val="53565A"/>
+                </a:solidFill>
+                <a:latin typeface="Calibri" pitchFamily="34" charset="0"/>
+                <a:ea typeface="Calibri" pitchFamily="34" charset="-122"/>
+                <a:cs typeface="Calibri" pitchFamily="34" charset="-120"/>
+              </a:rPr>
+              <a:t>respondents answered in their own words — a full response rate on an open text field. The dominant unprompted theme: the convergence of GenAI, synthetic identity, and real-time payments — the same thread running through every closed-ended question above.</a:t>
+            </a:r>
+            <a:endParaRPr lang="en-US" sz="1150" dirty="0"/>
+          </a:p>
+        </p:txBody>
+      </p:sp>
+      <p:sp>
+        <p:nvSpPr>
+          <p:cNvPr id="10" name="Shape 8"/>
+          <p:cNvSpPr/>
+          <p:nvPr/>
+        </p:nvSpPr>
+        <p:spPr>
+          <a:xfrm>
+            <a:off x="502006" y="3154680"/>
+            <a:ext cx="5457139" cy="1600200"/>
+          </a:xfrm>
+          <a:prstGeom prst="roundRect">
+            <a:avLst>
+              <a:gd name="adj" fmla="val 2857"/>
+            </a:avLst>
+          </a:prstGeom>
+          <a:solidFill>
+            <a:srgbClr val="FFFFFF"/>
+          </a:solidFill>
+          <a:ln w="9525">
+            <a:solidFill>
+              <a:srgbClr val="D0D0CE"/>
+            </a:solidFill>
+            <a:prstDash val="solid"/>
+          </a:ln>
+        </p:spPr>
+      </p:sp>
+      <p:sp>
+        <p:nvSpPr>
+          <p:cNvPr id="11" name="Text 9"/>
+          <p:cNvSpPr txBox="1"/>
+          <p:nvPr/>
+        </p:nvSpPr>
+        <p:spPr>
+          <a:xfrm>
+            <a:off x="684886" y="3282696"/>
+            <a:ext cx="5091379" cy="1143000"/>
+          </a:xfrm>
+          <a:prstGeom prst="rect">
+            <a:avLst/>
+          </a:prstGeom>
+          <a:noFill/>
+          <a:ln/>
+        </p:spPr>
+        <p:txBody>
+          <a:bodyPr wrap="square" rtlCol="0" anchor="t"/>
+          <a:lstStyle/>
+          <a:p>
+            <a:pPr indent="0" marL="0">
+              <a:lnSpc>
+                <a:spcPct val="112000"/>
+              </a:lnSpc>
+              <a:buNone/>
+            </a:pPr>
+            <a:r>
+              <a:rPr lang="en-US" sz="1000" i="1" dirty="0">
+                <a:solidFill>
+                  <a:srgbClr val="000000"/>
+                </a:solidFill>
+                <a:latin typeface="Calibri" pitchFamily="34" charset="0"/>
+                <a:ea typeface="Calibri" pitchFamily="34" charset="-122"/>
+                <a:cs typeface="Calibri" pitchFamily="34" charset="-120"/>
+              </a:rPr>
+              <a:t>“The convergence of genAI, synthetic identities and real time digital identity verification. This will matter significantly because fraudsters will become AI-native, identity becomes the new battleground, fraud prevention will replace fraud detection, and the winners will use AI against AI.”</a:t>
+            </a:r>
+            <a:endParaRPr lang="en-US" sz="1000" dirty="0"/>
+          </a:p>
+        </p:txBody>
+      </p:sp>
+      <p:sp>
+        <p:nvSpPr>
+          <p:cNvPr id="12" name="Text 10"/>
+          <p:cNvSpPr txBox="1"/>
+          <p:nvPr/>
+        </p:nvSpPr>
+        <p:spPr>
+          <a:xfrm>
+            <a:off x="684886" y="4443984"/>
+            <a:ext cx="5091379" cy="256032"/>
+          </a:xfrm>
+          <a:prstGeom prst="rect">
+            <a:avLst/>
+          </a:prstGeom>
+          <a:noFill/>
+          <a:ln/>
+        </p:spPr>
+        <p:txBody>
+          <a:bodyPr wrap="square" rtlCol="0" anchor="ctr"/>
+          <a:lstStyle/>
+          <a:p>
+            <a:pPr indent="0" marL="0">
+              <a:buNone/>
+            </a:pPr>
+            <a:r>
+              <a:rPr lang="en-US" sz="900" dirty="0">
+                <a:solidFill>
+                  <a:srgbClr val="53565A"/>
+                </a:solidFill>
+                <a:latin typeface="IBM Plex Mono" pitchFamily="34" charset="0"/>
+                <a:ea typeface="IBM Plex Mono" pitchFamily="34" charset="-122"/>
+                <a:cs typeface="IBM Plex Mono" pitchFamily="34" charset="-120"/>
+              </a:rPr>
+              <a:t>Director · Insurance</a:t>
+            </a:r>
+            <a:endParaRPr lang="en-US" sz="900" dirty="0"/>
+          </a:p>
+        </p:txBody>
+      </p:sp>
+      <p:sp>
+        <p:nvSpPr>
+          <p:cNvPr id="13" name="Shape 11"/>
+          <p:cNvSpPr/>
+          <p:nvPr/>
+        </p:nvSpPr>
+        <p:spPr>
+          <a:xfrm>
+            <a:off x="6233465" y="3154680"/>
+            <a:ext cx="5457139" cy="1600200"/>
+          </a:xfrm>
+          <a:prstGeom prst="roundRect">
+            <a:avLst>
+              <a:gd name="adj" fmla="val 2857"/>
+            </a:avLst>
+          </a:prstGeom>
+          <a:solidFill>
+            <a:srgbClr val="FFFFFF"/>
+          </a:solidFill>
+          <a:ln w="9525">
+            <a:solidFill>
+              <a:srgbClr val="D0D0CE"/>
+            </a:solidFill>
+            <a:prstDash val="solid"/>
+          </a:ln>
+        </p:spPr>
+      </p:sp>
+      <p:sp>
+        <p:nvSpPr>
+          <p:cNvPr id="14" name="Text 12"/>
+          <p:cNvSpPr txBox="1"/>
+          <p:nvPr/>
+        </p:nvSpPr>
+        <p:spPr>
+          <a:xfrm>
+            <a:off x="6416345" y="3282696"/>
+            <a:ext cx="5091379" cy="1143000"/>
+          </a:xfrm>
+          <a:prstGeom prst="rect">
+            <a:avLst/>
+          </a:prstGeom>
+          <a:noFill/>
+          <a:ln/>
+        </p:spPr>
+        <p:txBody>
+          <a:bodyPr wrap="square" rtlCol="0" anchor="t"/>
+          <a:lstStyle/>
+          <a:p>
+            <a:pPr indent="0" marL="0">
+              <a:lnSpc>
+                <a:spcPct val="112000"/>
+              </a:lnSpc>
+              <a:buNone/>
+            </a:pPr>
+            <a:r>
+              <a:rPr lang="en-US" sz="1000" i="1" dirty="0">
+                <a:solidFill>
+                  <a:srgbClr val="000000"/>
+                </a:solidFill>
+                <a:latin typeface="Calibri" pitchFamily="34" charset="0"/>
+                <a:ea typeface="Calibri" pitchFamily="34" charset="-122"/>
+                <a:cs typeface="Calibri" pitchFamily="34" charset="-120"/>
+              </a:rPr>
+              <a:t>“The biggest development will be the convergence of GenAI, synthetic identity, and real-time payments. Fraud will become faster, more personalized, and harder to distinguish from legitimate customer behaviour.”</a:t>
+            </a:r>
+            <a:endParaRPr lang="en-US" sz="1000" dirty="0"/>
+          </a:p>
+        </p:txBody>
+      </p:sp>
+      <p:sp>
+        <p:nvSpPr>
+          <p:cNvPr id="15" name="Text 13"/>
+          <p:cNvSpPr txBox="1"/>
+          <p:nvPr/>
+        </p:nvSpPr>
+        <p:spPr>
+          <a:xfrm>
+            <a:off x="6416345" y="4443984"/>
+            <a:ext cx="5091379" cy="256032"/>
+          </a:xfrm>
+          <a:prstGeom prst="rect">
+            <a:avLst/>
+          </a:prstGeom>
+          <a:noFill/>
+          <a:ln/>
+        </p:spPr>
+        <p:txBody>
+          <a:bodyPr wrap="square" rtlCol="0" anchor="ctr"/>
+          <a:lstStyle/>
+          <a:p>
+            <a:pPr indent="0" marL="0">
+              <a:buNone/>
+            </a:pPr>
+            <a:r>
+              <a:rPr lang="en-US" sz="900" dirty="0">
+                <a:solidFill>
+                  <a:srgbClr val="53565A"/>
+                </a:solidFill>
+                <a:latin typeface="IBM Plex Mono" pitchFamily="34" charset="0"/>
+                <a:ea typeface="IBM Plex Mono" pitchFamily="34" charset="-122"/>
+                <a:cs typeface="IBM Plex Mono" pitchFamily="34" charset="-120"/>
+              </a:rPr>
+              <a:t>C-level · Banking</a:t>
+            </a:r>
+            <a:endParaRPr lang="en-US" sz="900" dirty="0"/>
+          </a:p>
+        </p:txBody>
+      </p:sp>
+      <p:sp>
+        <p:nvSpPr>
+          <p:cNvPr id="16" name="Shape 14"/>
+          <p:cNvSpPr/>
+          <p:nvPr/>
+        </p:nvSpPr>
+        <p:spPr>
+          <a:xfrm>
+            <a:off x="502006" y="4937760"/>
+            <a:ext cx="5457139" cy="1600200"/>
+          </a:xfrm>
+          <a:prstGeom prst="roundRect">
+            <a:avLst>
+              <a:gd name="adj" fmla="val 2857"/>
+            </a:avLst>
+          </a:prstGeom>
+          <a:solidFill>
+            <a:srgbClr val="FFFFFF"/>
+          </a:solidFill>
+          <a:ln w="9525">
+            <a:solidFill>
+              <a:srgbClr val="D0D0CE"/>
+            </a:solidFill>
+            <a:prstDash val="solid"/>
+          </a:ln>
+        </p:spPr>
+      </p:sp>
+      <p:sp>
+        <p:nvSpPr>
+          <p:cNvPr id="17" name="Text 15"/>
+          <p:cNvSpPr txBox="1"/>
+          <p:nvPr/>
+        </p:nvSpPr>
+        <p:spPr>
+          <a:xfrm>
+            <a:off x="684886" y="5065776"/>
+            <a:ext cx="5091379" cy="1143000"/>
+          </a:xfrm>
+          <a:prstGeom prst="rect">
+            <a:avLst/>
+          </a:prstGeom>
+          <a:noFill/>
+          <a:ln/>
+        </p:spPr>
+        <p:txBody>
+          <a:bodyPr wrap="square" rtlCol="0" anchor="t"/>
+          <a:lstStyle/>
+          <a:p>
+            <a:pPr indent="0" marL="0">
+              <a:lnSpc>
+                <a:spcPct val="112000"/>
+              </a:lnSpc>
+              <a:buNone/>
+            </a:pPr>
+            <a:r>
+              <a:rPr lang="en-US" sz="1000" i="1" dirty="0">
+                <a:solidFill>
+                  <a:srgbClr val="000000"/>
+                </a:solidFill>
+                <a:latin typeface="Calibri" pitchFamily="34" charset="0"/>
+                <a:ea typeface="Calibri" pitchFamily="34" charset="-122"/>
+                <a:cs typeface="Calibri" pitchFamily="34" charset="-120"/>
+              </a:rPr>
+              <a:t>“Companies are moving away from regular passwords towards decentralized digital credentials and biometric passkeys, as this would minimize phishing and account hacking.”</a:t>
+            </a:r>
+            <a:endParaRPr lang="en-US" sz="1000" dirty="0"/>
+          </a:p>
+        </p:txBody>
+      </p:sp>
+      <p:sp>
+        <p:nvSpPr>
+          <p:cNvPr id="18" name="Text 16"/>
+          <p:cNvSpPr txBox="1"/>
+          <p:nvPr/>
+        </p:nvSpPr>
+        <p:spPr>
+          <a:xfrm>
+            <a:off x="684886" y="6227064"/>
+            <a:ext cx="5091379" cy="256032"/>
+          </a:xfrm>
+          <a:prstGeom prst="rect">
+            <a:avLst/>
+          </a:prstGeom>
+          <a:noFill/>
+          <a:ln/>
+        </p:spPr>
+        <p:txBody>
+          <a:bodyPr wrap="square" rtlCol="0" anchor="ctr"/>
+          <a:lstStyle/>
+          <a:p>
+            <a:pPr indent="0" marL="0">
+              <a:buNone/>
+            </a:pPr>
+            <a:r>
+              <a:rPr lang="en-US" sz="900" dirty="0">
+                <a:solidFill>
+                  <a:srgbClr val="53565A"/>
+                </a:solidFill>
+                <a:latin typeface="IBM Plex Mono" pitchFamily="34" charset="0"/>
+                <a:ea typeface="IBM Plex Mono" pitchFamily="34" charset="-122"/>
+                <a:cs typeface="IBM Plex Mono" pitchFamily="34" charset="-120"/>
+              </a:rPr>
+              <a:t>Senior Manager · Banking</a:t>
+            </a:r>
+            <a:endParaRPr lang="en-US" sz="900" dirty="0"/>
+          </a:p>
+        </p:txBody>
+      </p:sp>
+      <p:sp>
+        <p:nvSpPr>
+          <p:cNvPr id="19" name="Shape 17"/>
+          <p:cNvSpPr/>
+          <p:nvPr/>
+        </p:nvSpPr>
+        <p:spPr>
+          <a:xfrm>
+            <a:off x="6233465" y="4937760"/>
+            <a:ext cx="5457139" cy="1600200"/>
+          </a:xfrm>
+          <a:prstGeom prst="roundRect">
+            <a:avLst>
+              <a:gd name="adj" fmla="val 2857"/>
+            </a:avLst>
+          </a:prstGeom>
+          <a:solidFill>
+            <a:srgbClr val="FFFFFF"/>
+          </a:solidFill>
+          <a:ln w="9525">
+            <a:solidFill>
+              <a:srgbClr val="D0D0CE"/>
+            </a:solidFill>
+            <a:prstDash val="solid"/>
+          </a:ln>
+        </p:spPr>
+      </p:sp>
+      <p:sp>
+        <p:nvSpPr>
+          <p:cNvPr id="20" name="Text 18"/>
+          <p:cNvSpPr txBox="1"/>
+          <p:nvPr/>
+        </p:nvSpPr>
+        <p:spPr>
+          <a:xfrm>
+            <a:off x="6416345" y="5065776"/>
+            <a:ext cx="5091379" cy="1143000"/>
+          </a:xfrm>
+          <a:prstGeom prst="rect">
+            <a:avLst/>
+          </a:prstGeom>
+          <a:noFill/>
+          <a:ln/>
+        </p:spPr>
+        <p:txBody>
+          <a:bodyPr wrap="square" rtlCol="0" anchor="t"/>
+          <a:lstStyle/>
+          <a:p>
+            <a:pPr indent="0" marL="0">
+              <a:lnSpc>
+                <a:spcPct val="112000"/>
+              </a:lnSpc>
+              <a:buNone/>
+            </a:pPr>
+            <a:r>
+              <a:rPr lang="en-US" sz="1000" i="1" dirty="0">
+                <a:solidFill>
+                  <a:srgbClr val="000000"/>
+                </a:solidFill>
+                <a:latin typeface="Calibri" pitchFamily="34" charset="0"/>
+                <a:ea typeface="Calibri" pitchFamily="34" charset="-122"/>
+                <a:cs typeface="Calibri" pitchFamily="34" charset="-120"/>
+              </a:rPr>
+              <a:t>“AI will shift fraud management from reactive investigation toward more predictive prevention, which should help us identify risks before losses occur.”</a:t>
+            </a:r>
+            <a:endParaRPr lang="en-US" sz="1000" dirty="0"/>
+          </a:p>
+        </p:txBody>
+      </p:sp>
+      <p:sp>
+        <p:nvSpPr>
+          <p:cNvPr id="21" name="Text 19"/>
+          <p:cNvSpPr txBox="1"/>
+          <p:nvPr/>
+        </p:nvSpPr>
+        <p:spPr>
+          <a:xfrm>
+            <a:off x="6416345" y="6227064"/>
+            <a:ext cx="5091379" cy="256032"/>
+          </a:xfrm>
+          <a:prstGeom prst="rect">
+            <a:avLst/>
+          </a:prstGeom>
+          <a:noFill/>
+          <a:ln/>
+        </p:spPr>
+        <p:txBody>
+          <a:bodyPr wrap="square" rtlCol="0" anchor="ctr"/>
+          <a:lstStyle/>
+          <a:p>
+            <a:pPr indent="0" marL="0">
+              <a:buNone/>
+            </a:pPr>
+            <a:r>
+              <a:rPr lang="en-US" sz="900" dirty="0">
+                <a:solidFill>
+                  <a:srgbClr val="53565A"/>
+                </a:solidFill>
+                <a:latin typeface="IBM Plex Mono" pitchFamily="34" charset="0"/>
+                <a:ea typeface="IBM Plex Mono" pitchFamily="34" charset="-122"/>
+                <a:cs typeface="IBM Plex Mono" pitchFamily="34" charset="-120"/>
+              </a:rPr>
+              <a:t>VP · Banking</a:t>
+            </a:r>
+            <a:endParaRPr lang="en-US" sz="900" dirty="0"/>
+          </a:p>
+        </p:txBody>
+      </p:sp>
+    </p:spTree>
+  </p:cSld>
+  <p:clrMapOvr>
+    <a:masterClrMapping/>
+  </p:clrMapOvr>
+</p:sld>
+</file>
+
+<file path=ppt/slides/slide28.xml><?xml version="1.0" encoding="utf-8"?>
+<p:sld xmlns:a="http://schemas.openxmlformats.org/drawingml/2006/main" xmlns:r="http://schemas.openxmlformats.org/officeDocument/2006/relationships" xmlns:p="http://schemas.openxmlformats.org/presentationml/2006/main">
+  <p:cSld name="Slide 28">
     <p:bg>
       <p:bgPr>
         <a:solidFill>

--- a/Fraud in 2026 - Full Results.pptx
+++ b/Fraud in 2026 - Full Results.pptx
@@ -1598,7 +1598,7 @@
       <c:layout/>
       <c:barChart>
         <c:barDir val="bar"/>
-        <c:grouping val="clustered"/>
+        <c:grouping val="stacked"/>
         <c:varyColors val="0"/>
         <c:ser>
           <c:idx val="0"/>
@@ -1630,13 +1630,14 @@
                 <a:pPr>
                   <a:defRPr b="0" i="0" strike="noStrike" sz="650" u="none">
                     <a:solidFill>
-                      <a:srgbClr val="000000"/>
+                      <a:srgbClr val="FFFFFF"/>
                     </a:solidFill>
                     <a:latin typeface="Arial"/>
                   </a:defRPr>
                 </a:pPr>
               </a:p>
             </c:txPr>
+            <c:dLblPos val="ctr"/>
             <c:showLegendKey val="0"/>
             <c:showVal val="1"/>
             <c:showCatName val="0"/>
@@ -1652,22 +1653,22 @@
                 <c:ptCount val="6"/>
                 <c:lvl>
                   <c:pt idx="0">
-                    <c:v>Centralized fraud info-sharing platform / utility</c:v>
+                    <c:v>Centralized fraud info-sharing platform / utility (35%)</c:v>
                   </c:pt>
                   <c:pt idx="1">
-                    <c:v>Clearer legal &amp; regulatory frameworks</c:v>
+                    <c:v>Clearer legal &amp; regulatory frameworks (26%)</c:v>
                   </c:pt>
                   <c:pt idx="2">
-                    <c:v>Common data standards &amp; definitions</c:v>
+                    <c:v>Common data standards &amp; definitions (14%)</c:v>
                   </c:pt>
                   <c:pt idx="3">
-                    <c:v>Greater public-private collaboration</c:v>
+                    <c:v>Greater public-private collaboration (13%)</c:v>
                   </c:pt>
                   <c:pt idx="4">
-                    <c:v>Prioritized industry use cases</c:v>
+                    <c:v>Prioritized industry use cases (9%)</c:v>
                   </c:pt>
                   <c:pt idx="5">
-                    <c:v>Funding or incentives</c:v>
+                    <c:v>Funding or incentives (3%)</c:v>
                   </c:pt>
                 </c:lvl>
               </c:multiLvlStrCache>
@@ -1680,22 +1681,22 @@
                 <c:formatCode>General</c:formatCode>
                 <c:ptCount val="6"/>
                 <c:pt idx="0">
-                  <c:v>36</c:v>
+                  <c:v>16</c:v>
                 </c:pt>
                 <c:pt idx="1">
-                  <c:v>16</c:v>
+                  <c:v>7</c:v>
                 </c:pt>
                 <c:pt idx="2">
-                  <c:v>18</c:v>
+                  <c:v>8</c:v>
                 </c:pt>
                 <c:pt idx="3">
-                  <c:v>20</c:v>
+                  <c:v>9</c:v>
                 </c:pt>
                 <c:pt idx="4">
-                  <c:v>5</c:v>
+                  <c:v>2</c:v>
                 </c:pt>
                 <c:pt idx="5">
-                  <c:v>5</c:v>
+                  <c:v>2</c:v>
                 </c:pt>
               </c:numCache>
             </c:numRef>
@@ -1731,13 +1732,14 @@
                 <a:pPr>
                   <a:defRPr b="0" i="0" strike="noStrike" sz="650" u="none">
                     <a:solidFill>
-                      <a:srgbClr val="000000"/>
+                      <a:srgbClr val="FFFFFF"/>
                     </a:solidFill>
                     <a:latin typeface="Arial"/>
                   </a:defRPr>
                 </a:pPr>
               </a:p>
             </c:txPr>
+            <c:dLblPos val="ctr"/>
             <c:showLegendKey val="0"/>
             <c:showVal val="1"/>
             <c:showCatName val="0"/>
@@ -1753,22 +1755,22 @@
                 <c:ptCount val="6"/>
                 <c:lvl>
                   <c:pt idx="0">
-                    <c:v>Centralized fraud info-sharing platform / utility</c:v>
+                    <c:v>Centralized fraud info-sharing platform / utility (35%)</c:v>
                   </c:pt>
                   <c:pt idx="1">
-                    <c:v>Clearer legal &amp; regulatory frameworks</c:v>
+                    <c:v>Clearer legal &amp; regulatory frameworks (26%)</c:v>
                   </c:pt>
                   <c:pt idx="2">
-                    <c:v>Common data standards &amp; definitions</c:v>
+                    <c:v>Common data standards &amp; definitions (14%)</c:v>
                   </c:pt>
                   <c:pt idx="3">
-                    <c:v>Greater public-private collaboration</c:v>
+                    <c:v>Greater public-private collaboration (13%)</c:v>
                   </c:pt>
                   <c:pt idx="4">
-                    <c:v>Prioritized industry use cases</c:v>
+                    <c:v>Prioritized industry use cases (9%)</c:v>
                   </c:pt>
                   <c:pt idx="5">
-                    <c:v>Funding or incentives</c:v>
+                    <c:v>Funding or incentives (3%)</c:v>
                   </c:pt>
                 </c:lvl>
               </c:multiLvlStrCache>
@@ -1781,19 +1783,19 @@
                 <c:formatCode>General</c:formatCode>
                 <c:ptCount val="6"/>
                 <c:pt idx="0">
-                  <c:v>33</c:v>
+                  <c:v>10</c:v>
                 </c:pt>
                 <c:pt idx="1">
-                  <c:v>40</c:v>
+                  <c:v>12</c:v>
                 </c:pt>
                 <c:pt idx="2">
-                  <c:v>7</c:v>
+                  <c:v>2</c:v>
                 </c:pt>
                 <c:pt idx="3">
-                  <c:v>7</c:v>
+                  <c:v>2</c:v>
                 </c:pt>
                 <c:pt idx="4">
-                  <c:v>13</c:v>
+                  <c:v>4</c:v>
                 </c:pt>
                 <c:pt idx="5">
                   <c:v>0</c:v>
@@ -1832,13 +1834,14 @@
                 <a:pPr>
                   <a:defRPr b="0" i="0" strike="noStrike" sz="650" u="none">
                     <a:solidFill>
-                      <a:srgbClr val="000000"/>
+                      <a:srgbClr val="FFFFFF"/>
                     </a:solidFill>
                     <a:latin typeface="Arial"/>
                   </a:defRPr>
                 </a:pPr>
               </a:p>
             </c:txPr>
+            <c:dLblPos val="ctr"/>
             <c:showLegendKey val="0"/>
             <c:showVal val="1"/>
             <c:showCatName val="0"/>
@@ -1854,22 +1857,22 @@
                 <c:ptCount val="6"/>
                 <c:lvl>
                   <c:pt idx="0">
-                    <c:v>Centralized fraud info-sharing platform / utility</c:v>
+                    <c:v>Centralized fraud info-sharing platform / utility (35%)</c:v>
                   </c:pt>
                   <c:pt idx="1">
-                    <c:v>Clearer legal &amp; regulatory frameworks</c:v>
+                    <c:v>Clearer legal &amp; regulatory frameworks (26%)</c:v>
                   </c:pt>
                   <c:pt idx="2">
-                    <c:v>Common data standards &amp; definitions</c:v>
+                    <c:v>Common data standards &amp; definitions (14%)</c:v>
                   </c:pt>
                   <c:pt idx="3">
-                    <c:v>Greater public-private collaboration</c:v>
+                    <c:v>Greater public-private collaboration (13%)</c:v>
                   </c:pt>
                   <c:pt idx="4">
-                    <c:v>Prioritized industry use cases</c:v>
+                    <c:v>Prioritized industry use cases (9%)</c:v>
                   </c:pt>
                   <c:pt idx="5">
-                    <c:v>Funding or incentives</c:v>
+                    <c:v>Funding or incentives (3%)</c:v>
                   </c:pt>
                 </c:lvl>
               </c:multiLvlStrCache>
@@ -1882,22 +1885,22 @@
                 <c:formatCode>General</c:formatCode>
                 <c:ptCount val="6"/>
                 <c:pt idx="0">
-                  <c:v>36</c:v>
+                  <c:v>5</c:v>
                 </c:pt>
                 <c:pt idx="1">
-                  <c:v>29</c:v>
+                  <c:v>4</c:v>
                 </c:pt>
                 <c:pt idx="2">
-                  <c:v>14</c:v>
+                  <c:v>2</c:v>
                 </c:pt>
                 <c:pt idx="3">
-                  <c:v>7</c:v>
+                  <c:v>1</c:v>
                 </c:pt>
                 <c:pt idx="4">
-                  <c:v>7</c:v>
+                  <c:v>1</c:v>
                 </c:pt>
                 <c:pt idx="5">
-                  <c:v>7</c:v>
+                  <c:v>1</c:v>
                 </c:pt>
               </c:numCache>
             </c:numRef>
@@ -1933,13 +1936,14 @@
                 <a:pPr>
                   <a:defRPr b="0" i="0" strike="noStrike" sz="650" u="none">
                     <a:solidFill>
-                      <a:srgbClr val="000000"/>
+                      <a:srgbClr val="FFFFFF"/>
                     </a:solidFill>
                     <a:latin typeface="Arial"/>
                   </a:defRPr>
                 </a:pPr>
               </a:p>
             </c:txPr>
+            <c:dLblPos val="ctr"/>
             <c:showLegendKey val="0"/>
             <c:showVal val="1"/>
             <c:showCatName val="0"/>
@@ -1955,22 +1959,22 @@
                 <c:ptCount val="6"/>
                 <c:lvl>
                   <c:pt idx="0">
-                    <c:v>Centralized fraud info-sharing platform / utility</c:v>
+                    <c:v>Centralized fraud info-sharing platform / utility (35%)</c:v>
                   </c:pt>
                   <c:pt idx="1">
-                    <c:v>Clearer legal &amp; regulatory frameworks</c:v>
+                    <c:v>Clearer legal &amp; regulatory frameworks (26%)</c:v>
                   </c:pt>
                   <c:pt idx="2">
-                    <c:v>Common data standards &amp; definitions</c:v>
+                    <c:v>Common data standards &amp; definitions (14%)</c:v>
                   </c:pt>
                   <c:pt idx="3">
-                    <c:v>Greater public-private collaboration</c:v>
+                    <c:v>Greater public-private collaboration (13%)</c:v>
                   </c:pt>
                   <c:pt idx="4">
-                    <c:v>Prioritized industry use cases</c:v>
+                    <c:v>Prioritized industry use cases (9%)</c:v>
                   </c:pt>
                   <c:pt idx="5">
-                    <c:v>Funding or incentives</c:v>
+                    <c:v>Funding or incentives (3%)</c:v>
                   </c:pt>
                 </c:lvl>
               </c:multiLvlStrCache>
@@ -1983,19 +1987,19 @@
                 <c:formatCode>General</c:formatCode>
                 <c:ptCount val="6"/>
                 <c:pt idx="0">
-                  <c:v>25</c:v>
+                  <c:v>2</c:v>
                 </c:pt>
                 <c:pt idx="1">
-                  <c:v>38</c:v>
+                  <c:v>3</c:v>
                 </c:pt>
                 <c:pt idx="2">
                   <c:v>0</c:v>
                 </c:pt>
                 <c:pt idx="3">
-                  <c:v>12</c:v>
+                  <c:v>1</c:v>
                 </c:pt>
                 <c:pt idx="4">
-                  <c:v>25</c:v>
+                  <c:v>2</c:v>
                 </c:pt>
                 <c:pt idx="5">
                   <c:v>0</c:v>
@@ -2034,13 +2038,14 @@
                 <a:pPr>
                   <a:defRPr b="0" i="0" strike="noStrike" sz="650" u="none">
                     <a:solidFill>
-                      <a:srgbClr val="000000"/>
+                      <a:srgbClr val="FFFFFF"/>
                     </a:solidFill>
                     <a:latin typeface="Arial"/>
                   </a:defRPr>
                 </a:pPr>
               </a:p>
             </c:txPr>
+            <c:dLblPos val="ctr"/>
             <c:showLegendKey val="0"/>
             <c:showVal val="1"/>
             <c:showCatName val="0"/>
@@ -2056,22 +2061,22 @@
                 <c:ptCount val="6"/>
                 <c:lvl>
                   <c:pt idx="0">
-                    <c:v>Centralized fraud info-sharing platform / utility</c:v>
+                    <c:v>Centralized fraud info-sharing platform / utility (35%)</c:v>
                   </c:pt>
                   <c:pt idx="1">
-                    <c:v>Clearer legal &amp; regulatory frameworks</c:v>
+                    <c:v>Clearer legal &amp; regulatory frameworks (26%)</c:v>
                   </c:pt>
                   <c:pt idx="2">
-                    <c:v>Common data standards &amp; definitions</c:v>
+                    <c:v>Common data standards &amp; definitions (14%)</c:v>
                   </c:pt>
                   <c:pt idx="3">
-                    <c:v>Greater public-private collaboration</c:v>
+                    <c:v>Greater public-private collaboration (13%)</c:v>
                   </c:pt>
                   <c:pt idx="4">
-                    <c:v>Prioritized industry use cases</c:v>
+                    <c:v>Prioritized industry use cases (9%)</c:v>
                   </c:pt>
                   <c:pt idx="5">
-                    <c:v>Funding or incentives</c:v>
+                    <c:v>Funding or incentives (3%)</c:v>
                   </c:pt>
                 </c:lvl>
               </c:multiLvlStrCache>
@@ -2084,13 +2089,13 @@
                 <c:formatCode>General</c:formatCode>
                 <c:ptCount val="6"/>
                 <c:pt idx="0">
-                  <c:v>50</c:v>
+                  <c:v>2</c:v>
                 </c:pt>
                 <c:pt idx="1">
                   <c:v>0</c:v>
                 </c:pt>
                 <c:pt idx="2">
-                  <c:v>50</c:v>
+                  <c:v>2</c:v>
                 </c:pt>
                 <c:pt idx="3">
                   <c:v>0</c:v>
@@ -2114,13 +2119,14 @@
               <a:pPr>
                 <a:defRPr b="0" i="0" strike="noStrike" sz="650" u="none">
                   <a:solidFill>
-                    <a:srgbClr val="000000"/>
+                    <a:srgbClr val="FFFFFF"/>
                   </a:solidFill>
                   <a:latin typeface="Arial"/>
                 </a:defRPr>
               </a:pPr>
             </a:p>
           </c:txPr>
+          <c:dLblPos val="ctr"/>
           <c:showLegendKey val="0"/>
           <c:showVal val="1"/>
           <c:showCatName val="0"/>
@@ -2130,7 +2136,7 @@
           <c:showLeaderLines val="0"/>
         </c:dLbls>
         <c:gapWidth val="40"/>
-        <c:overlap val="0"/>
+        <c:overlap val="100"/>
         <c:axId val="2094734554"/>
         <c:axId val="2094734552"/>
         <c:axId val="2094734556"/>
@@ -13278,7 +13284,7 @@
                 <a:ea typeface="Calibri" pitchFamily="34" charset="-122"/>
                 <a:cs typeface="Calibri" pitchFamily="34" charset="-120"/>
               </a:rPr>
-              <a:t>Single select. Australia (n=8) and Singapore (n=4) are thin samples, shown directionally.  </a:t>
+              <a:t>Single select — % shown is each region's share of the full 100-respondent sample, so segments sum to the overall figure in each category label. Australia (n=8) and Singapore (n=4) are thin samples, shown directionally.  </a:t>
             </a:r>
             <a:pPr algn="l" indent="0" marL="0">
               <a:lnSpc>

--- a/Fraud in 2026 - Full Results.pptx
+++ b/Fraud in 2026 - Full Results.pptx
@@ -528,7 +528,7 @@
           </c:spPr>
           <c:invertIfNegative val="0"/>
           <c:dLbls>
-            <c:numFmt formatCode="#,##0" sourceLinked="0"/>
+            <c:numFmt formatCode="0&quot;%&quot;;-0&quot;%&quot;;;@" sourceLinked="0"/>
             <c:txPr>
               <a:bodyPr/>
               <a:lstStyle/>
@@ -666,7 +666,7 @@
           </c:spPr>
           <c:invertIfNegative val="0"/>
           <c:dLbls>
-            <c:numFmt formatCode="#,##0" sourceLinked="0"/>
+            <c:numFmt formatCode="0&quot;%&quot;;-0&quot;%&quot;;;@" sourceLinked="0"/>
             <c:txPr>
               <a:bodyPr/>
               <a:lstStyle/>
@@ -804,7 +804,7 @@
           </c:spPr>
           <c:invertIfNegative val="0"/>
           <c:dLbls>
-            <c:numFmt formatCode="#,##0" sourceLinked="0"/>
+            <c:numFmt formatCode="0&quot;%&quot;;-0&quot;%&quot;;;@" sourceLinked="0"/>
             <c:txPr>
               <a:bodyPr/>
               <a:lstStyle/>
@@ -942,7 +942,7 @@
           </c:spPr>
           <c:invertIfNegative val="0"/>
           <c:dLbls>
-            <c:numFmt formatCode="#,##0" sourceLinked="0"/>
+            <c:numFmt formatCode="0&quot;%&quot;;-0&quot;%&quot;;;@" sourceLinked="0"/>
             <c:txPr>
               <a:bodyPr/>
               <a:lstStyle/>
@@ -1080,7 +1080,7 @@
           </c:spPr>
           <c:invertIfNegative val="0"/>
           <c:dLbls>
-            <c:numFmt formatCode="#,##0" sourceLinked="0"/>
+            <c:numFmt formatCode="0&quot;%&quot;;-0&quot;%&quot;;;@" sourceLinked="0"/>
             <c:txPr>
               <a:bodyPr/>
               <a:lstStyle/>
@@ -1197,7 +1197,7 @@
           </c:val>
         </c:ser>
         <c:dLbls>
-          <c:numFmt formatCode="#,##0" sourceLinked="0"/>
+          <c:numFmt formatCode="0&quot;%&quot;;-0&quot;%&quot;;;@" sourceLinked="0"/>
           <c:txPr>
             <a:bodyPr/>
             <a:lstStyle/>
@@ -1622,7 +1622,7 @@
           </c:spPr>
           <c:invertIfNegative val="0"/>
           <c:dLbls>
-            <c:numFmt formatCode="0&quot;%&quot;" sourceLinked="0"/>
+            <c:numFmt formatCode="0&quot;%&quot;;-0&quot;%&quot;;;@" sourceLinked="0"/>
             <c:txPr>
               <a:bodyPr/>
               <a:lstStyle/>
@@ -1724,7 +1724,7 @@
           </c:spPr>
           <c:invertIfNegative val="0"/>
           <c:dLbls>
-            <c:numFmt formatCode="0&quot;%&quot;" sourceLinked="0"/>
+            <c:numFmt formatCode="0&quot;%&quot;;-0&quot;%&quot;;;@" sourceLinked="0"/>
             <c:txPr>
               <a:bodyPr/>
               <a:lstStyle/>
@@ -1826,7 +1826,7 @@
           </c:spPr>
           <c:invertIfNegative val="0"/>
           <c:dLbls>
-            <c:numFmt formatCode="0&quot;%&quot;" sourceLinked="0"/>
+            <c:numFmt formatCode="0&quot;%&quot;;-0&quot;%&quot;;;@" sourceLinked="0"/>
             <c:txPr>
               <a:bodyPr/>
               <a:lstStyle/>
@@ -1928,7 +1928,7 @@
           </c:spPr>
           <c:invertIfNegative val="0"/>
           <c:dLbls>
-            <c:numFmt formatCode="0&quot;%&quot;" sourceLinked="0"/>
+            <c:numFmt formatCode="0&quot;%&quot;;-0&quot;%&quot;;;@" sourceLinked="0"/>
             <c:txPr>
               <a:bodyPr/>
               <a:lstStyle/>
@@ -2030,7 +2030,7 @@
           </c:spPr>
           <c:invertIfNegative val="0"/>
           <c:dLbls>
-            <c:numFmt formatCode="0&quot;%&quot;" sourceLinked="0"/>
+            <c:numFmt formatCode="0&quot;%&quot;;-0&quot;%&quot;;;@" sourceLinked="0"/>
             <c:txPr>
               <a:bodyPr/>
               <a:lstStyle/>
@@ -2111,7 +2111,7 @@
           </c:val>
         </c:ser>
         <c:dLbls>
-          <c:numFmt formatCode="0&quot;%&quot;" sourceLinked="0"/>
+          <c:numFmt formatCode="0&quot;%&quot;;-0&quot;%&quot;;;@" sourceLinked="0"/>
           <c:txPr>
             <a:bodyPr/>
             <a:lstStyle/>
@@ -3350,7 +3350,7 @@
           </c:spPr>
           <c:invertIfNegative val="0"/>
           <c:dLbls>
-            <c:numFmt formatCode="#,##0" sourceLinked="0"/>
+            <c:numFmt formatCode="0&quot;%&quot;;-0&quot;%&quot;;;@" sourceLinked="0"/>
             <c:txPr>
               <a:bodyPr/>
               <a:lstStyle/>
@@ -3464,7 +3464,7 @@
           </c:spPr>
           <c:invertIfNegative val="0"/>
           <c:dLbls>
-            <c:numFmt formatCode="#,##0" sourceLinked="0"/>
+            <c:numFmt formatCode="0&quot;%&quot;;-0&quot;%&quot;;;@" sourceLinked="0"/>
             <c:txPr>
               <a:bodyPr/>
               <a:lstStyle/>
@@ -3578,7 +3578,7 @@
           </c:spPr>
           <c:invertIfNegative val="0"/>
           <c:dLbls>
-            <c:numFmt formatCode="#,##0" sourceLinked="0"/>
+            <c:numFmt formatCode="0&quot;%&quot;;-0&quot;%&quot;;;@" sourceLinked="0"/>
             <c:txPr>
               <a:bodyPr/>
               <a:lstStyle/>
@@ -3692,7 +3692,7 @@
           </c:spPr>
           <c:invertIfNegative val="0"/>
           <c:dLbls>
-            <c:numFmt formatCode="#,##0" sourceLinked="0"/>
+            <c:numFmt formatCode="0&quot;%&quot;;-0&quot;%&quot;;;@" sourceLinked="0"/>
             <c:txPr>
               <a:bodyPr/>
               <a:lstStyle/>
@@ -3806,7 +3806,7 @@
           </c:spPr>
           <c:invertIfNegative val="0"/>
           <c:dLbls>
-            <c:numFmt formatCode="#,##0" sourceLinked="0"/>
+            <c:numFmt formatCode="0&quot;%&quot;;-0&quot;%&quot;;;@" sourceLinked="0"/>
             <c:txPr>
               <a:bodyPr/>
               <a:lstStyle/>
@@ -3899,7 +3899,7 @@
           </c:val>
         </c:ser>
         <c:dLbls>
-          <c:numFmt formatCode="#,##0" sourceLinked="0"/>
+          <c:numFmt formatCode="0&quot;%&quot;;-0&quot;%&quot;;;@" sourceLinked="0"/>
           <c:txPr>
             <a:bodyPr/>
             <a:lstStyle/>
@@ -6923,7 +6923,7 @@
           </c:spPr>
           <c:invertIfNegative val="0"/>
           <c:dLbls>
-            <c:numFmt formatCode="#,##0" sourceLinked="0"/>
+            <c:numFmt formatCode="0&quot;%&quot;;-0&quot;%&quot;;;@" sourceLinked="0"/>
             <c:txPr>
               <a:bodyPr/>
               <a:lstStyle/>
@@ -7037,7 +7037,7 @@
           </c:spPr>
           <c:invertIfNegative val="0"/>
           <c:dLbls>
-            <c:numFmt formatCode="#,##0" sourceLinked="0"/>
+            <c:numFmt formatCode="0&quot;%&quot;;-0&quot;%&quot;;;@" sourceLinked="0"/>
             <c:txPr>
               <a:bodyPr/>
               <a:lstStyle/>
@@ -7151,7 +7151,7 @@
           </c:spPr>
           <c:invertIfNegative val="0"/>
           <c:dLbls>
-            <c:numFmt formatCode="#,##0" sourceLinked="0"/>
+            <c:numFmt formatCode="0&quot;%&quot;;-0&quot;%&quot;;;@" sourceLinked="0"/>
             <c:txPr>
               <a:bodyPr/>
               <a:lstStyle/>
@@ -7265,7 +7265,7 @@
           </c:spPr>
           <c:invertIfNegative val="0"/>
           <c:dLbls>
-            <c:numFmt formatCode="#,##0" sourceLinked="0"/>
+            <c:numFmt formatCode="0&quot;%&quot;;-0&quot;%&quot;;;@" sourceLinked="0"/>
             <c:txPr>
               <a:bodyPr/>
               <a:lstStyle/>
@@ -7379,7 +7379,7 @@
           </c:spPr>
           <c:invertIfNegative val="0"/>
           <c:dLbls>
-            <c:numFmt formatCode="#,##0" sourceLinked="0"/>
+            <c:numFmt formatCode="0&quot;%&quot;;-0&quot;%&quot;;;@" sourceLinked="0"/>
             <c:txPr>
               <a:bodyPr/>
               <a:lstStyle/>
@@ -7472,7 +7472,7 @@
           </c:val>
         </c:ser>
         <c:dLbls>
-          <c:numFmt formatCode="#,##0" sourceLinked="0"/>
+          <c:numFmt formatCode="0&quot;%&quot;;-0&quot;%&quot;;;@" sourceLinked="0"/>
           <c:txPr>
             <a:bodyPr/>
             <a:lstStyle/>

--- a/Fraud in 2026 - Full Results.pptx
+++ b/Fraud in 2026 - Full Results.pptx
@@ -33,9 +33,12 @@
     <p:sldId id="281" r:id="rId27"/>
     <p:sldId id="282" r:id="rId28"/>
     <p:sldId id="283" r:id="rId29"/>
+    <p:sldId id="284" r:id="rId30"/>
+    <p:sldId id="285" r:id="rId31"/>
+    <p:sldId id="286" r:id="rId32"/>
   </p:sldIdLst>
   <p:notesMasterIdLst>
-    <p:notesMasterId r:id="rId30"/>
+    <p:notesMasterId r:id="rId33"/>
   </p:notesMasterIdLst>
   <p:sldSz cx="12192000" cy="6858000"/>
   <p:notesSz cx="6858000" cy="12192000"/>
@@ -4403,7 +4406,7 @@
       <c:layout/>
       <c:barChart>
         <c:barDir val="bar"/>
-        <c:grouping val="clustered"/>
+        <c:grouping val="stacked"/>
         <c:varyColors val="0"/>
         <c:ser>
           <c:idx val="0"/>
@@ -4414,7 +4417,7 @@
               <c:strCache>
                 <c:ptCount val="1"/>
                 <c:pt idx="0">
-                  <c:v>Current approach</c:v>
+                  <c:v>Top tier (Top 100 Banking / Top 50 Insurance)</c:v>
                 </c:pt>
               </c:strCache>
             </c:strRef>
@@ -4427,21 +4430,22 @@
           </c:spPr>
           <c:invertIfNegative val="0"/>
           <c:dLbls>
-            <c:numFmt formatCode="0&quot;%&quot;" sourceLinked="0"/>
+            <c:numFmt formatCode="0&quot;%&quot;;-0&quot;%&quot;;;@" sourceLinked="0"/>
             <c:txPr>
               <a:bodyPr/>
               <a:lstStyle/>
               <a:p>
                 <a:pPr>
-                  <a:defRPr b="0" i="0" strike="noStrike" sz="1000" u="none">
+                  <a:defRPr b="0" i="0" strike="noStrike" sz="700" u="none">
                     <a:solidFill>
-                      <a:srgbClr val="000000"/>
+                      <a:srgbClr val="FFFFFF"/>
                     </a:solidFill>
                     <a:latin typeface="Arial"/>
                   </a:defRPr>
                 </a:pPr>
               </a:p>
             </c:txPr>
+            <c:dLblPos val="ctr"/>
             <c:showLegendKey val="0"/>
             <c:showVal val="1"/>
             <c:showCatName val="0"/>
@@ -4452,27 +4456,39 @@
           </c:dLbls>
           <c:cat>
             <c:multiLvlStrRef>
-              <c:f>Sheet1!$A$2:$A$7</c:f>
+              <c:f>Sheet1!$A$2:$A$11</c:f>
               <c:multiLvlStrCache>
-                <c:ptCount val="6"/>
+                <c:ptCount val="10"/>
                 <c:lvl>
                   <c:pt idx="0">
-                    <c:v>AI-enabled tools augmentation</c:v>
+                    <c:v>Reactive — Banking (0%)</c:v>
                   </c:pt>
                   <c:pt idx="1">
-                    <c:v>Automating workflows</c:v>
+                    <c:v>Reactive — Insurance (4%)</c:v>
                   </c:pt>
                   <c:pt idx="2">
-                    <c:v>Redesigning processes &amp; playbooks</c:v>
+                    <c:v>Foundational — Banking (5%)</c:v>
                   </c:pt>
                   <c:pt idx="3">
-                    <c:v>Outsourcing</c:v>
+                    <c:v>Foundational — Insurance (4%)</c:v>
                   </c:pt>
                   <c:pt idx="4">
-                    <c:v>Hiring / workforce expansion</c:v>
+                    <c:v>Managed — Banking (9%)</c:v>
                   </c:pt>
                   <c:pt idx="5">
-                    <c:v>Combination of approaches</c:v>
+                    <c:v>Managed — Insurance (20%)</c:v>
+                  </c:pt>
+                  <c:pt idx="6">
+                    <c:v>Integrated — Banking (48%)</c:v>
+                  </c:pt>
+                  <c:pt idx="7">
+                    <c:v>Integrated — Insurance (32%)</c:v>
+                  </c:pt>
+                  <c:pt idx="8">
+                    <c:v>Advanced — Banking (37%)</c:v>
+                  </c:pt>
+                  <c:pt idx="9">
+                    <c:v>Advanced — Insurance (40%)</c:v>
                   </c:pt>
                 </c:lvl>
               </c:multiLvlStrCache>
@@ -4480,27 +4496,39 @@
           </c:cat>
           <c:val>
             <c:numRef>
-              <c:f>Sheet1!$B$2:$B$7</c:f>
+              <c:f>Sheet1!$B$2:$B$11</c:f>
               <c:numCache>
                 <c:formatCode>General</c:formatCode>
-                <c:ptCount val="6"/>
+                <c:ptCount val="10"/>
                 <c:pt idx="0">
-                  <c:v>34</c:v>
+                  <c:v>0</c:v>
                 </c:pt>
                 <c:pt idx="1">
-                  <c:v>29</c:v>
+                  <c:v>0</c:v>
                 </c:pt>
                 <c:pt idx="2">
-                  <c:v>10</c:v>
+                  <c:v>0</c:v>
                 </c:pt>
                 <c:pt idx="3">
-                  <c:v>10</c:v>
+                  <c:v>4</c:v>
                 </c:pt>
                 <c:pt idx="4">
-                  <c:v>10</c:v>
+                  <c:v>4</c:v>
                 </c:pt>
                 <c:pt idx="5">
-                  <c:v>7</c:v>
+                  <c:v>8</c:v>
+                </c:pt>
+                <c:pt idx="6">
+                  <c:v>24</c:v>
+                </c:pt>
+                <c:pt idx="7">
+                  <c:v>20</c:v>
+                </c:pt>
+                <c:pt idx="8">
+                  <c:v>25</c:v>
+                </c:pt>
+                <c:pt idx="9">
+                  <c:v>28</c:v>
                 </c:pt>
               </c:numCache>
             </c:numRef>
@@ -4515,7 +4543,7 @@
               <c:strCache>
                 <c:ptCount val="1"/>
                 <c:pt idx="0">
-                  <c:v>3-year focus</c:v>
+                  <c:v>Large institution (outside Top 100 / Top 50)</c:v>
                 </c:pt>
               </c:strCache>
             </c:strRef>
@@ -4528,21 +4556,22 @@
           </c:spPr>
           <c:invertIfNegative val="0"/>
           <c:dLbls>
-            <c:numFmt formatCode="0&quot;%&quot;" sourceLinked="0"/>
+            <c:numFmt formatCode="0&quot;%&quot;;-0&quot;%&quot;;;@" sourceLinked="0"/>
             <c:txPr>
               <a:bodyPr/>
               <a:lstStyle/>
               <a:p>
                 <a:pPr>
-                  <a:defRPr b="0" i="0" strike="noStrike" sz="1000" u="none">
+                  <a:defRPr b="0" i="0" strike="noStrike" sz="700" u="none">
                     <a:solidFill>
-                      <a:srgbClr val="000000"/>
+                      <a:srgbClr val="FFFFFF"/>
                     </a:solidFill>
                     <a:latin typeface="Arial"/>
                   </a:defRPr>
                 </a:pPr>
               </a:p>
             </c:txPr>
+            <c:dLblPos val="ctr"/>
             <c:showLegendKey val="0"/>
             <c:showVal val="1"/>
             <c:showCatName val="0"/>
@@ -4553,27 +4582,39 @@
           </c:dLbls>
           <c:cat>
             <c:multiLvlStrRef>
-              <c:f>Sheet1!$A$2:$A$7</c:f>
+              <c:f>Sheet1!$A$2:$A$11</c:f>
               <c:multiLvlStrCache>
-                <c:ptCount val="6"/>
+                <c:ptCount val="10"/>
                 <c:lvl>
                   <c:pt idx="0">
-                    <c:v>AI-enabled tools augmentation</c:v>
+                    <c:v>Reactive — Banking (0%)</c:v>
                   </c:pt>
                   <c:pt idx="1">
-                    <c:v>Automating workflows</c:v>
+                    <c:v>Reactive — Insurance (4%)</c:v>
                   </c:pt>
                   <c:pt idx="2">
-                    <c:v>Redesigning processes &amp; playbooks</c:v>
+                    <c:v>Foundational — Banking (5%)</c:v>
                   </c:pt>
                   <c:pt idx="3">
-                    <c:v>Outsourcing</c:v>
+                    <c:v>Foundational — Insurance (4%)</c:v>
                   </c:pt>
                   <c:pt idx="4">
-                    <c:v>Hiring / workforce expansion</c:v>
+                    <c:v>Managed — Banking (9%)</c:v>
                   </c:pt>
                   <c:pt idx="5">
-                    <c:v>Combination of approaches</c:v>
+                    <c:v>Managed — Insurance (20%)</c:v>
+                  </c:pt>
+                  <c:pt idx="6">
+                    <c:v>Integrated — Banking (48%)</c:v>
+                  </c:pt>
+                  <c:pt idx="7">
+                    <c:v>Integrated — Insurance (32%)</c:v>
+                  </c:pt>
+                  <c:pt idx="8">
+                    <c:v>Advanced — Banking (37%)</c:v>
+                  </c:pt>
+                  <c:pt idx="9">
+                    <c:v>Advanced — Insurance (40%)</c:v>
                   </c:pt>
                 </c:lvl>
               </c:multiLvlStrCache>
@@ -4581,48 +4622,61 @@
           </c:cat>
           <c:val>
             <c:numRef>
-              <c:f>Sheet1!$C$2:$C$7</c:f>
+              <c:f>Sheet1!$C$2:$C$11</c:f>
               <c:numCache>
                 <c:formatCode>General</c:formatCode>
-                <c:ptCount val="6"/>
+                <c:ptCount val="10"/>
                 <c:pt idx="0">
-                  <c:v>41</c:v>
+                  <c:v>0</c:v>
                 </c:pt>
                 <c:pt idx="1">
-                  <c:v>27</c:v>
+                  <c:v>4</c:v>
                 </c:pt>
                 <c:pt idx="2">
-                  <c:v>18</c:v>
+                  <c:v>5</c:v>
                 </c:pt>
                 <c:pt idx="3">
-                  <c:v>7</c:v>
+                  <c:v>0</c:v>
                 </c:pt>
                 <c:pt idx="4">
                   <c:v>5</c:v>
                 </c:pt>
                 <c:pt idx="5">
-                  <c:v>2</c:v>
+                  <c:v>12</c:v>
+                </c:pt>
+                <c:pt idx="6">
+                  <c:v>24</c:v>
+                </c:pt>
+                <c:pt idx="7">
+                  <c:v>12</c:v>
+                </c:pt>
+                <c:pt idx="8">
+                  <c:v>12</c:v>
+                </c:pt>
+                <c:pt idx="9">
+                  <c:v>12</c:v>
                 </c:pt>
               </c:numCache>
             </c:numRef>
           </c:val>
         </c:ser>
         <c:dLbls>
-          <c:numFmt formatCode="0&quot;%&quot;" sourceLinked="0"/>
+          <c:numFmt formatCode="0&quot;%&quot;;-0&quot;%&quot;;;@" sourceLinked="0"/>
           <c:txPr>
             <a:bodyPr/>
             <a:lstStyle/>
             <a:p>
               <a:pPr>
-                <a:defRPr b="0" i="0" strike="noStrike" sz="1000" u="none">
+                <a:defRPr b="0" i="0" strike="noStrike" sz="700" u="none">
                   <a:solidFill>
-                    <a:srgbClr val="000000"/>
+                    <a:srgbClr val="FFFFFF"/>
                   </a:solidFill>
                   <a:latin typeface="Arial"/>
                 </a:defRPr>
               </a:pPr>
             </a:p>
           </c:txPr>
+          <c:dLblPos val="ctr"/>
           <c:showLegendKey val="0"/>
           <c:showVal val="1"/>
           <c:showCatName val="0"/>
@@ -4632,7 +4686,7 @@
           <c:showLeaderLines val="0"/>
         </c:dLbls>
         <c:gapWidth val="40"/>
-        <c:overlap val="0"/>
+        <c:overlap val="100"/>
         <c:axId val="2094734554"/>
         <c:axId val="2094734552"/>
         <c:axId val="2094734556"/>
@@ -4660,7 +4714,7 @@
           <a:lstStyle/>
           <a:p>
             <a:pPr>
-              <a:defRPr sz="1000" b="0" i="0" u="none" strike="noStrike">
+              <a:defRPr sz="800" b="0" i="0" u="none" strike="noStrike">
                 <a:solidFill>
                   <a:srgbClr val="53565A"/>
                 </a:solidFill>
@@ -4731,7 +4785,7 @@
         <a:lstStyle/>
         <a:p>
           <a:pPr>
-            <a:defRPr sz="1000">      </a:defRPr>
+            <a:defRPr sz="850">      </a:defRPr>
           </a:pPr>
           <a:endParaRPr lang="en-US"/>
         </a:p>
@@ -5123,6 +5177,1206 @@
       <c:layout/>
       <c:barChart>
         <c:barDir val="bar"/>
+        <c:grouping val="stacked"/>
+        <c:varyColors val="0"/>
+        <c:ser>
+          <c:idx val="0"/>
+          <c:order val="0"/>
+          <c:tx>
+            <c:strRef>
+              <c:f>Sheet1!$B$1</c:f>
+              <c:strCache>
+                <c:ptCount val="1"/>
+                <c:pt idx="0">
+                  <c:v>United States</c:v>
+                </c:pt>
+              </c:strCache>
+            </c:strRef>
+          </c:tx>
+          <c:spPr>
+            <a:solidFill>
+              <a:srgbClr val="86BC25"/>
+            </a:solidFill>
+            <a:effectLst/>
+          </c:spPr>
+          <c:invertIfNegative val="0"/>
+          <c:dLbls>
+            <c:numFmt formatCode="0&quot;%&quot;;-0&quot;%&quot;;;@" sourceLinked="0"/>
+            <c:txPr>
+              <a:bodyPr/>
+              <a:lstStyle/>
+              <a:p>
+                <a:pPr>
+                  <a:defRPr b="0" i="0" strike="noStrike" sz="600" u="none">
+                    <a:solidFill>
+                      <a:srgbClr val="FFFFFF"/>
+                    </a:solidFill>
+                    <a:latin typeface="Arial"/>
+                  </a:defRPr>
+                </a:pPr>
+              </a:p>
+            </c:txPr>
+            <c:dLblPos val="ctr"/>
+            <c:showLegendKey val="0"/>
+            <c:showVal val="1"/>
+            <c:showCatName val="0"/>
+            <c:showSerName val="0"/>
+            <c:showPercent val="0"/>
+            <c:showBubbleSize val="0"/>
+            <c:showLeaderLines val="0"/>
+          </c:dLbls>
+          <c:cat>
+            <c:multiLvlStrRef>
+              <c:f>Sheet1!$A$2:$A$11</c:f>
+              <c:multiLvlStrCache>
+                <c:ptCount val="10"/>
+                <c:lvl>
+                  <c:pt idx="0">
+                    <c:v>Reactive — Top 100 (0%)</c:v>
+                  </c:pt>
+                  <c:pt idx="1">
+                    <c:v>Reactive — Large (0%)</c:v>
+                  </c:pt>
+                  <c:pt idx="2">
+                    <c:v>Foundational — Top 100 (0%)</c:v>
+                  </c:pt>
+                  <c:pt idx="3">
+                    <c:v>Foundational — Large (11%)</c:v>
+                  </c:pt>
+                  <c:pt idx="4">
+                    <c:v>Managed — Top 100 (8%)</c:v>
+                  </c:pt>
+                  <c:pt idx="5">
+                    <c:v>Managed — Large (11%)</c:v>
+                  </c:pt>
+                  <c:pt idx="6">
+                    <c:v>Integrated — Top 100 (45%)</c:v>
+                  </c:pt>
+                  <c:pt idx="7">
+                    <c:v>Integrated — Large (51%)</c:v>
+                  </c:pt>
+                  <c:pt idx="8">
+                    <c:v>Advanced — Top 100 (48%)</c:v>
+                  </c:pt>
+                  <c:pt idx="9">
+                    <c:v>Advanced — Large (26%)</c:v>
+                  </c:pt>
+                </c:lvl>
+              </c:multiLvlStrCache>
+            </c:multiLvlStrRef>
+          </c:cat>
+          <c:val>
+            <c:numRef>
+              <c:f>Sheet1!$B$2:$B$11</c:f>
+              <c:numCache>
+                <c:formatCode>General</c:formatCode>
+                <c:ptCount val="10"/>
+                <c:pt idx="0">
+                  <c:v>0</c:v>
+                </c:pt>
+                <c:pt idx="1">
+                  <c:v>0</c:v>
+                </c:pt>
+                <c:pt idx="2">
+                  <c:v>0</c:v>
+                </c:pt>
+                <c:pt idx="3">
+                  <c:v>3</c:v>
+                </c:pt>
+                <c:pt idx="4">
+                  <c:v>3</c:v>
+                </c:pt>
+                <c:pt idx="5">
+                  <c:v>6</c:v>
+                </c:pt>
+                <c:pt idx="6">
+                  <c:v>13</c:v>
+                </c:pt>
+                <c:pt idx="7">
+                  <c:v>34</c:v>
+                </c:pt>
+                <c:pt idx="8">
+                  <c:v>20</c:v>
+                </c:pt>
+                <c:pt idx="9">
+                  <c:v>14</c:v>
+                </c:pt>
+              </c:numCache>
+            </c:numRef>
+          </c:val>
+        </c:ser>
+        <c:ser>
+          <c:idx val="1"/>
+          <c:order val="1"/>
+          <c:tx>
+            <c:strRef>
+              <c:f>Sheet1!$C$1</c:f>
+              <c:strCache>
+                <c:ptCount val="1"/>
+                <c:pt idx="0">
+                  <c:v>Canada</c:v>
+                </c:pt>
+              </c:strCache>
+            </c:strRef>
+          </c:tx>
+          <c:spPr>
+            <a:solidFill>
+              <a:srgbClr val="43B02A"/>
+            </a:solidFill>
+            <a:effectLst/>
+          </c:spPr>
+          <c:invertIfNegative val="0"/>
+          <c:dLbls>
+            <c:numFmt formatCode="0&quot;%&quot;;-0&quot;%&quot;;;@" sourceLinked="0"/>
+            <c:txPr>
+              <a:bodyPr/>
+              <a:lstStyle/>
+              <a:p>
+                <a:pPr>
+                  <a:defRPr b="0" i="0" strike="noStrike" sz="600" u="none">
+                    <a:solidFill>
+                      <a:srgbClr val="FFFFFF"/>
+                    </a:solidFill>
+                    <a:latin typeface="Arial"/>
+                  </a:defRPr>
+                </a:pPr>
+              </a:p>
+            </c:txPr>
+            <c:dLblPos val="ctr"/>
+            <c:showLegendKey val="0"/>
+            <c:showVal val="1"/>
+            <c:showCatName val="0"/>
+            <c:showSerName val="0"/>
+            <c:showPercent val="0"/>
+            <c:showBubbleSize val="0"/>
+            <c:showLeaderLines val="0"/>
+          </c:dLbls>
+          <c:cat>
+            <c:multiLvlStrRef>
+              <c:f>Sheet1!$A$2:$A$11</c:f>
+              <c:multiLvlStrCache>
+                <c:ptCount val="10"/>
+                <c:lvl>
+                  <c:pt idx="0">
+                    <c:v>Reactive — Top 100 (0%)</c:v>
+                  </c:pt>
+                  <c:pt idx="1">
+                    <c:v>Reactive — Large (0%)</c:v>
+                  </c:pt>
+                  <c:pt idx="2">
+                    <c:v>Foundational — Top 100 (0%)</c:v>
+                  </c:pt>
+                  <c:pt idx="3">
+                    <c:v>Foundational — Large (11%)</c:v>
+                  </c:pt>
+                  <c:pt idx="4">
+                    <c:v>Managed — Top 100 (8%)</c:v>
+                  </c:pt>
+                  <c:pt idx="5">
+                    <c:v>Managed — Large (11%)</c:v>
+                  </c:pt>
+                  <c:pt idx="6">
+                    <c:v>Integrated — Top 100 (45%)</c:v>
+                  </c:pt>
+                  <c:pt idx="7">
+                    <c:v>Integrated — Large (51%)</c:v>
+                  </c:pt>
+                  <c:pt idx="8">
+                    <c:v>Advanced — Top 100 (48%)</c:v>
+                  </c:pt>
+                  <c:pt idx="9">
+                    <c:v>Advanced — Large (26%)</c:v>
+                  </c:pt>
+                </c:lvl>
+              </c:multiLvlStrCache>
+            </c:multiLvlStrRef>
+          </c:cat>
+          <c:val>
+            <c:numRef>
+              <c:f>Sheet1!$C$2:$C$11</c:f>
+              <c:numCache>
+                <c:formatCode>General</c:formatCode>
+                <c:ptCount val="10"/>
+                <c:pt idx="0">
+                  <c:v>0</c:v>
+                </c:pt>
+                <c:pt idx="1">
+                  <c:v>0</c:v>
+                </c:pt>
+                <c:pt idx="2">
+                  <c:v>0</c:v>
+                </c:pt>
+                <c:pt idx="3">
+                  <c:v>6</c:v>
+                </c:pt>
+                <c:pt idx="4">
+                  <c:v>3</c:v>
+                </c:pt>
+                <c:pt idx="5">
+                  <c:v>3</c:v>
+                </c:pt>
+                <c:pt idx="6">
+                  <c:v>20</c:v>
+                </c:pt>
+                <c:pt idx="7">
+                  <c:v>0</c:v>
+                </c:pt>
+                <c:pt idx="8">
+                  <c:v>10</c:v>
+                </c:pt>
+                <c:pt idx="9">
+                  <c:v>6</c:v>
+                </c:pt>
+              </c:numCache>
+            </c:numRef>
+          </c:val>
+        </c:ser>
+        <c:ser>
+          <c:idx val="2"/>
+          <c:order val="2"/>
+          <c:tx>
+            <c:strRef>
+              <c:f>Sheet1!$D$1</c:f>
+              <c:strCache>
+                <c:ptCount val="1"/>
+                <c:pt idx="0">
+                  <c:v>Europe (EU + UK)</c:v>
+                </c:pt>
+              </c:strCache>
+            </c:strRef>
+          </c:tx>
+          <c:spPr>
+            <a:solidFill>
+              <a:srgbClr val="046A38"/>
+            </a:solidFill>
+            <a:effectLst/>
+          </c:spPr>
+          <c:invertIfNegative val="0"/>
+          <c:dLbls>
+            <c:numFmt formatCode="0&quot;%&quot;;-0&quot;%&quot;;;@" sourceLinked="0"/>
+            <c:txPr>
+              <a:bodyPr/>
+              <a:lstStyle/>
+              <a:p>
+                <a:pPr>
+                  <a:defRPr b="0" i="0" strike="noStrike" sz="600" u="none">
+                    <a:solidFill>
+                      <a:srgbClr val="FFFFFF"/>
+                    </a:solidFill>
+                    <a:latin typeface="Arial"/>
+                  </a:defRPr>
+                </a:pPr>
+              </a:p>
+            </c:txPr>
+            <c:dLblPos val="ctr"/>
+            <c:showLegendKey val="0"/>
+            <c:showVal val="1"/>
+            <c:showCatName val="0"/>
+            <c:showSerName val="0"/>
+            <c:showPercent val="0"/>
+            <c:showBubbleSize val="0"/>
+            <c:showLeaderLines val="0"/>
+          </c:dLbls>
+          <c:cat>
+            <c:multiLvlStrRef>
+              <c:f>Sheet1!$A$2:$A$11</c:f>
+              <c:multiLvlStrCache>
+                <c:ptCount val="10"/>
+                <c:lvl>
+                  <c:pt idx="0">
+                    <c:v>Reactive — Top 100 (0%)</c:v>
+                  </c:pt>
+                  <c:pt idx="1">
+                    <c:v>Reactive — Large (0%)</c:v>
+                  </c:pt>
+                  <c:pt idx="2">
+                    <c:v>Foundational — Top 100 (0%)</c:v>
+                  </c:pt>
+                  <c:pt idx="3">
+                    <c:v>Foundational — Large (11%)</c:v>
+                  </c:pt>
+                  <c:pt idx="4">
+                    <c:v>Managed — Top 100 (8%)</c:v>
+                  </c:pt>
+                  <c:pt idx="5">
+                    <c:v>Managed — Large (11%)</c:v>
+                  </c:pt>
+                  <c:pt idx="6">
+                    <c:v>Integrated — Top 100 (45%)</c:v>
+                  </c:pt>
+                  <c:pt idx="7">
+                    <c:v>Integrated — Large (51%)</c:v>
+                  </c:pt>
+                  <c:pt idx="8">
+                    <c:v>Advanced — Top 100 (48%)</c:v>
+                  </c:pt>
+                  <c:pt idx="9">
+                    <c:v>Advanced — Large (26%)</c:v>
+                  </c:pt>
+                </c:lvl>
+              </c:multiLvlStrCache>
+            </c:multiLvlStrRef>
+          </c:cat>
+          <c:val>
+            <c:numRef>
+              <c:f>Sheet1!$D$2:$D$11</c:f>
+              <c:numCache>
+                <c:formatCode>General</c:formatCode>
+                <c:ptCount val="10"/>
+                <c:pt idx="0">
+                  <c:v>0</c:v>
+                </c:pt>
+                <c:pt idx="1">
+                  <c:v>0</c:v>
+                </c:pt>
+                <c:pt idx="2">
+                  <c:v>0</c:v>
+                </c:pt>
+                <c:pt idx="3">
+                  <c:v>3</c:v>
+                </c:pt>
+                <c:pt idx="4">
+                  <c:v>3</c:v>
+                </c:pt>
+                <c:pt idx="5">
+                  <c:v>0</c:v>
+                </c:pt>
+                <c:pt idx="6">
+                  <c:v>5</c:v>
+                </c:pt>
+                <c:pt idx="7">
+                  <c:v>11</c:v>
+                </c:pt>
+                <c:pt idx="8">
+                  <c:v>10</c:v>
+                </c:pt>
+                <c:pt idx="9">
+                  <c:v>0</c:v>
+                </c:pt>
+              </c:numCache>
+            </c:numRef>
+          </c:val>
+        </c:ser>
+        <c:ser>
+          <c:idx val="3"/>
+          <c:order val="3"/>
+          <c:tx>
+            <c:strRef>
+              <c:f>Sheet1!$E$1</c:f>
+              <c:strCache>
+                <c:ptCount val="1"/>
+                <c:pt idx="0">
+                  <c:v>Australia</c:v>
+                </c:pt>
+              </c:strCache>
+            </c:strRef>
+          </c:tx>
+          <c:spPr>
+            <a:solidFill>
+              <a:srgbClr val="0D8390"/>
+            </a:solidFill>
+            <a:effectLst/>
+          </c:spPr>
+          <c:invertIfNegative val="0"/>
+          <c:dLbls>
+            <c:numFmt formatCode="0&quot;%&quot;;-0&quot;%&quot;;;@" sourceLinked="0"/>
+            <c:txPr>
+              <a:bodyPr/>
+              <a:lstStyle/>
+              <a:p>
+                <a:pPr>
+                  <a:defRPr b="0" i="0" strike="noStrike" sz="600" u="none">
+                    <a:solidFill>
+                      <a:srgbClr val="FFFFFF"/>
+                    </a:solidFill>
+                    <a:latin typeface="Arial"/>
+                  </a:defRPr>
+                </a:pPr>
+              </a:p>
+            </c:txPr>
+            <c:dLblPos val="ctr"/>
+            <c:showLegendKey val="0"/>
+            <c:showVal val="1"/>
+            <c:showCatName val="0"/>
+            <c:showSerName val="0"/>
+            <c:showPercent val="0"/>
+            <c:showBubbleSize val="0"/>
+            <c:showLeaderLines val="0"/>
+          </c:dLbls>
+          <c:cat>
+            <c:multiLvlStrRef>
+              <c:f>Sheet1!$A$2:$A$11</c:f>
+              <c:multiLvlStrCache>
+                <c:ptCount val="10"/>
+                <c:lvl>
+                  <c:pt idx="0">
+                    <c:v>Reactive — Top 100 (0%)</c:v>
+                  </c:pt>
+                  <c:pt idx="1">
+                    <c:v>Reactive — Large (0%)</c:v>
+                  </c:pt>
+                  <c:pt idx="2">
+                    <c:v>Foundational — Top 100 (0%)</c:v>
+                  </c:pt>
+                  <c:pt idx="3">
+                    <c:v>Foundational — Large (11%)</c:v>
+                  </c:pt>
+                  <c:pt idx="4">
+                    <c:v>Managed — Top 100 (8%)</c:v>
+                  </c:pt>
+                  <c:pt idx="5">
+                    <c:v>Managed — Large (11%)</c:v>
+                  </c:pt>
+                  <c:pt idx="6">
+                    <c:v>Integrated — Top 100 (45%)</c:v>
+                  </c:pt>
+                  <c:pt idx="7">
+                    <c:v>Integrated — Large (51%)</c:v>
+                  </c:pt>
+                  <c:pt idx="8">
+                    <c:v>Advanced — Top 100 (48%)</c:v>
+                  </c:pt>
+                  <c:pt idx="9">
+                    <c:v>Advanced — Large (26%)</c:v>
+                  </c:pt>
+                </c:lvl>
+              </c:multiLvlStrCache>
+            </c:multiLvlStrRef>
+          </c:cat>
+          <c:val>
+            <c:numRef>
+              <c:f>Sheet1!$E$2:$E$11</c:f>
+              <c:numCache>
+                <c:formatCode>General</c:formatCode>
+                <c:ptCount val="10"/>
+                <c:pt idx="0">
+                  <c:v>0</c:v>
+                </c:pt>
+                <c:pt idx="1">
+                  <c:v>0</c:v>
+                </c:pt>
+                <c:pt idx="2">
+                  <c:v>0</c:v>
+                </c:pt>
+                <c:pt idx="3">
+                  <c:v>0</c:v>
+                </c:pt>
+                <c:pt idx="4">
+                  <c:v>0</c:v>
+                </c:pt>
+                <c:pt idx="5">
+                  <c:v>0</c:v>
+                </c:pt>
+                <c:pt idx="6">
+                  <c:v>3</c:v>
+                </c:pt>
+                <c:pt idx="7">
+                  <c:v>6</c:v>
+                </c:pt>
+                <c:pt idx="8">
+                  <c:v>8</c:v>
+                </c:pt>
+                <c:pt idx="9">
+                  <c:v>3</c:v>
+                </c:pt>
+              </c:numCache>
+            </c:numRef>
+          </c:val>
+        </c:ser>
+        <c:ser>
+          <c:idx val="4"/>
+          <c:order val="4"/>
+          <c:tx>
+            <c:strRef>
+              <c:f>Sheet1!$F$1</c:f>
+              <c:strCache>
+                <c:ptCount val="1"/>
+                <c:pt idx="0">
+                  <c:v>Singapore</c:v>
+                </c:pt>
+              </c:strCache>
+            </c:strRef>
+          </c:tx>
+          <c:spPr>
+            <a:solidFill>
+              <a:srgbClr val="53565A"/>
+            </a:solidFill>
+            <a:effectLst/>
+          </c:spPr>
+          <c:invertIfNegative val="0"/>
+          <c:dLbls>
+            <c:numFmt formatCode="0&quot;%&quot;;-0&quot;%&quot;;;@" sourceLinked="0"/>
+            <c:txPr>
+              <a:bodyPr/>
+              <a:lstStyle/>
+              <a:p>
+                <a:pPr>
+                  <a:defRPr b="0" i="0" strike="noStrike" sz="600" u="none">
+                    <a:solidFill>
+                      <a:srgbClr val="FFFFFF"/>
+                    </a:solidFill>
+                    <a:latin typeface="Arial"/>
+                  </a:defRPr>
+                </a:pPr>
+              </a:p>
+            </c:txPr>
+            <c:dLblPos val="ctr"/>
+            <c:showLegendKey val="0"/>
+            <c:showVal val="1"/>
+            <c:showCatName val="0"/>
+            <c:showSerName val="0"/>
+            <c:showPercent val="0"/>
+            <c:showBubbleSize val="0"/>
+            <c:showLeaderLines val="0"/>
+          </c:dLbls>
+          <c:cat>
+            <c:multiLvlStrRef>
+              <c:f>Sheet1!$A$2:$A$11</c:f>
+              <c:multiLvlStrCache>
+                <c:ptCount val="10"/>
+                <c:lvl>
+                  <c:pt idx="0">
+                    <c:v>Reactive — Top 100 (0%)</c:v>
+                  </c:pt>
+                  <c:pt idx="1">
+                    <c:v>Reactive — Large (0%)</c:v>
+                  </c:pt>
+                  <c:pt idx="2">
+                    <c:v>Foundational — Top 100 (0%)</c:v>
+                  </c:pt>
+                  <c:pt idx="3">
+                    <c:v>Foundational — Large (11%)</c:v>
+                  </c:pt>
+                  <c:pt idx="4">
+                    <c:v>Managed — Top 100 (8%)</c:v>
+                  </c:pt>
+                  <c:pt idx="5">
+                    <c:v>Managed — Large (11%)</c:v>
+                  </c:pt>
+                  <c:pt idx="6">
+                    <c:v>Integrated — Top 100 (45%)</c:v>
+                  </c:pt>
+                  <c:pt idx="7">
+                    <c:v>Integrated — Large (51%)</c:v>
+                  </c:pt>
+                  <c:pt idx="8">
+                    <c:v>Advanced — Top 100 (48%)</c:v>
+                  </c:pt>
+                  <c:pt idx="9">
+                    <c:v>Advanced — Large (26%)</c:v>
+                  </c:pt>
+                </c:lvl>
+              </c:multiLvlStrCache>
+            </c:multiLvlStrRef>
+          </c:cat>
+          <c:val>
+            <c:numRef>
+              <c:f>Sheet1!$F$2:$F$11</c:f>
+              <c:numCache>
+                <c:formatCode>General</c:formatCode>
+                <c:ptCount val="10"/>
+                <c:pt idx="0">
+                  <c:v>0</c:v>
+                </c:pt>
+                <c:pt idx="1">
+                  <c:v>0</c:v>
+                </c:pt>
+                <c:pt idx="2">
+                  <c:v>0</c:v>
+                </c:pt>
+                <c:pt idx="3">
+                  <c:v>0</c:v>
+                </c:pt>
+                <c:pt idx="4">
+                  <c:v>0</c:v>
+                </c:pt>
+                <c:pt idx="5">
+                  <c:v>3</c:v>
+                </c:pt>
+                <c:pt idx="6">
+                  <c:v>5</c:v>
+                </c:pt>
+                <c:pt idx="7">
+                  <c:v>0</c:v>
+                </c:pt>
+                <c:pt idx="8">
+                  <c:v>0</c:v>
+                </c:pt>
+                <c:pt idx="9">
+                  <c:v>3</c:v>
+                </c:pt>
+              </c:numCache>
+            </c:numRef>
+          </c:val>
+        </c:ser>
+        <c:dLbls>
+          <c:numFmt formatCode="0&quot;%&quot;;-0&quot;%&quot;;;@" sourceLinked="0"/>
+          <c:txPr>
+            <a:bodyPr/>
+            <a:lstStyle/>
+            <a:p>
+              <a:pPr>
+                <a:defRPr b="0" i="0" strike="noStrike" sz="600" u="none">
+                  <a:solidFill>
+                    <a:srgbClr val="FFFFFF"/>
+                  </a:solidFill>
+                  <a:latin typeface="Arial"/>
+                </a:defRPr>
+              </a:pPr>
+            </a:p>
+          </c:txPr>
+          <c:dLblPos val="ctr"/>
+          <c:showLegendKey val="0"/>
+          <c:showVal val="1"/>
+          <c:showCatName val="0"/>
+          <c:showSerName val="0"/>
+          <c:showPercent val="0"/>
+          <c:showBubbleSize val="0"/>
+          <c:showLeaderLines val="0"/>
+        </c:dLbls>
+        <c:gapWidth val="40"/>
+        <c:overlap val="100"/>
+        <c:axId val="2094734554"/>
+        <c:axId val="2094734552"/>
+        <c:axId val="2094734556"/>
+      </c:barChart>
+      <c:catAx>
+        <c:axId val="2094734554"/>
+        <c:scaling>
+          <c:orientation val="minMax"/>
+        </c:scaling>
+        <c:delete val="0"/>
+        <c:axPos val="l"/>
+        <c:numFmt formatCode="General" sourceLinked="1"/>
+        <c:majorTickMark val="out"/>
+        <c:minorTickMark val="none"/>
+        <c:tickLblPos val="nextTo"/>
+        <c:spPr>
+          <a:ln w="12700" cap="flat">
+            <a:noFill/>
+            <a:prstDash val="solid"/>
+            <a:round/>
+          </a:ln>
+        </c:spPr>
+        <c:txPr>
+          <a:bodyPr/>
+          <a:lstStyle/>
+          <a:p>
+            <a:pPr>
+              <a:defRPr sz="750" b="0" i="0" u="none" strike="noStrike">
+                <a:solidFill>
+                  <a:srgbClr val="53565A"/>
+                </a:solidFill>
+                <a:latin typeface="Arial"/>
+              </a:defRPr>
+            </a:pPr>
+            <a:endParaRPr lang="en-US"/>
+          </a:p>
+        </c:txPr>
+        <c:crossAx val="2094734552"/>
+        <c:crosses val="autoZero"/>
+        <c:auto val="1"/>
+        <c:lblAlgn val="ctr"/>
+        <c:noMultiLvlLbl val="1"/>
+      </c:catAx>
+      <c:valAx>
+        <c:axId val="2094734552"/>
+        <c:scaling>
+          <c:orientation val="minMax"/>
+        </c:scaling>
+        <c:delete val="1"/>
+        <c:axPos val="b"/>
+        <c:numFmt formatCode="General" sourceLinked="0"/>
+        <c:majorTickMark val="out"/>
+        <c:minorTickMark val="none"/>
+        <c:tickLblPos val="low"/>
+        <c:spPr>
+          <a:ln w="12700" cap="flat">
+            <a:noFill/>
+            <a:prstDash val="solid"/>
+            <a:round/>
+          </a:ln>
+        </c:spPr>
+        <c:txPr>
+          <a:bodyPr/>
+          <a:lstStyle/>
+          <a:p>
+            <a:pPr>
+              <a:defRPr sz="1200" b="0" i="0" u="none" strike="noStrike">
+                <a:solidFill>
+                  <a:srgbClr val="000000"/>
+                </a:solidFill>
+                <a:latin typeface="Arial"/>
+              </a:defRPr>
+            </a:pPr>
+            <a:endParaRPr lang="en-US"/>
+          </a:p>
+        </c:txPr>
+        <c:crossAx val="2094734554"/>
+        <c:crosses val="autoZero"/>
+        <c:crossBetween val="between"/>
+      </c:valAx>
+      <c:spPr>
+        <a:solidFill>
+          <a:srgbClr val="FFFFFF"/>
+        </a:solidFill>
+        <a:ln>
+          <a:noFill/>
+        </a:ln>
+        <a:effectLst/>
+      </c:spPr>
+    </c:plotArea>
+    <c:legend>
+      <c:legendPos val="b"/>
+      <c:overlay val="0"/>
+      <c:txPr>
+        <a:bodyPr/>
+        <a:lstStyle/>
+        <a:p>
+          <a:pPr>
+            <a:defRPr sz="750">      </a:defRPr>
+          </a:pPr>
+          <a:endParaRPr lang="en-US"/>
+        </a:p>
+      </c:txPr>
+    </c:legend>
+    <c:plotVisOnly val="1"/>
+    <c:dispBlanksAs val="span"/>
+  </c:chart>
+  <c:spPr>
+    <a:noFill/>
+    <a:ln>
+      <a:noFill/>
+    </a:ln>
+    <a:effectLst/>
+  </c:spPr>
+  <c:externalData r:id="rId1">
+    <c:autoUpdate val="0"/>
+  </c:externalData>
+</c:chartSpace>
+</file>
+
+<file path=ppt/charts/chart21.xml><?xml version="1.0" encoding="utf-8"?>
+<c:chartSpace xmlns:c="http://schemas.openxmlformats.org/drawingml/2006/chart" xmlns:a="http://schemas.openxmlformats.org/drawingml/2006/main" xmlns:r="http://schemas.openxmlformats.org/officeDocument/2006/relationships">
+  <c:date1904 val="0"/>
+  <c:roundedCorners val="1"/>
+  <c:chart>
+    <c:autoTitleDeleted val="1"/>
+    <c:plotArea>
+      <c:layout/>
+      <c:barChart>
+        <c:barDir val="bar"/>
+        <c:grouping val="stacked"/>
+        <c:varyColors val="0"/>
+        <c:ser>
+          <c:idx val="0"/>
+          <c:order val="0"/>
+          <c:tx>
+            <c:strRef>
+              <c:f>Sheet1!$B$1</c:f>
+              <c:strCache>
+                <c:ptCount val="1"/>
+                <c:pt idx="0">
+                  <c:v>United States</c:v>
+                </c:pt>
+              </c:strCache>
+            </c:strRef>
+          </c:tx>
+          <c:spPr>
+            <a:solidFill>
+              <a:srgbClr val="86BC25"/>
+            </a:solidFill>
+            <a:effectLst/>
+          </c:spPr>
+          <c:invertIfNegative val="0"/>
+          <c:dLbls>
+            <c:numFmt formatCode="0&quot;%&quot;;-0&quot;%&quot;;;@" sourceLinked="0"/>
+            <c:txPr>
+              <a:bodyPr/>
+              <a:lstStyle/>
+              <a:p>
+                <a:pPr>
+                  <a:defRPr b="0" i="0" strike="noStrike" sz="700" u="none">
+                    <a:solidFill>
+                      <a:srgbClr val="FFFFFF"/>
+                    </a:solidFill>
+                    <a:latin typeface="Arial"/>
+                  </a:defRPr>
+                </a:pPr>
+              </a:p>
+            </c:txPr>
+            <c:dLblPos val="ctr"/>
+            <c:showLegendKey val="0"/>
+            <c:showVal val="1"/>
+            <c:showCatName val="0"/>
+            <c:showSerName val="0"/>
+            <c:showPercent val="0"/>
+            <c:showBubbleSize val="0"/>
+            <c:showLeaderLines val="0"/>
+          </c:dLbls>
+          <c:cat>
+            <c:multiLvlStrRef>
+              <c:f>Sheet1!$A$2:$A$11</c:f>
+              <c:multiLvlStrCache>
+                <c:ptCount val="10"/>
+                <c:lvl>
+                  <c:pt idx="0">
+                    <c:v>Reactive — Top 50 (US &amp; Canada only, 0%)</c:v>
+                  </c:pt>
+                  <c:pt idx="1">
+                    <c:v>Reactive — Large (US &amp; Canada only, 10%)</c:v>
+                  </c:pt>
+                  <c:pt idx="2">
+                    <c:v>Foundational — Top 50 (US &amp; Canada only, 7%)</c:v>
+                  </c:pt>
+                  <c:pt idx="3">
+                    <c:v>Foundational — Large (US &amp; Canada only, 0%)</c:v>
+                  </c:pt>
+                  <c:pt idx="4">
+                    <c:v>Managed — Top 50 (US &amp; Canada only, 14%)</c:v>
+                  </c:pt>
+                  <c:pt idx="5">
+                    <c:v>Managed — Large (US &amp; Canada only, 30%)</c:v>
+                  </c:pt>
+                  <c:pt idx="6">
+                    <c:v>Integrated — Top 50 (US &amp; Canada only, 34%)</c:v>
+                  </c:pt>
+                  <c:pt idx="7">
+                    <c:v>Integrated — Large (US &amp; Canada only, 30%)</c:v>
+                  </c:pt>
+                  <c:pt idx="8">
+                    <c:v>Advanced — Top 50 (US &amp; Canada only, 33%)</c:v>
+                  </c:pt>
+                  <c:pt idx="9">
+                    <c:v>Advanced — Large (US &amp; Canada only, 20%)</c:v>
+                  </c:pt>
+                </c:lvl>
+              </c:multiLvlStrCache>
+            </c:multiLvlStrRef>
+          </c:cat>
+          <c:val>
+            <c:numRef>
+              <c:f>Sheet1!$B$2:$B$11</c:f>
+              <c:numCache>
+                <c:formatCode>General</c:formatCode>
+                <c:ptCount val="10"/>
+                <c:pt idx="0">
+                  <c:v>0</c:v>
+                </c:pt>
+                <c:pt idx="1">
+                  <c:v>0</c:v>
+                </c:pt>
+                <c:pt idx="2">
+                  <c:v>0</c:v>
+                </c:pt>
+                <c:pt idx="3">
+                  <c:v>0</c:v>
+                </c:pt>
+                <c:pt idx="4">
+                  <c:v>7</c:v>
+                </c:pt>
+                <c:pt idx="5">
+                  <c:v>10</c:v>
+                </c:pt>
+                <c:pt idx="6">
+                  <c:v>27</c:v>
+                </c:pt>
+                <c:pt idx="7">
+                  <c:v>20</c:v>
+                </c:pt>
+                <c:pt idx="8">
+                  <c:v>13</c:v>
+                </c:pt>
+                <c:pt idx="9">
+                  <c:v>0</c:v>
+                </c:pt>
+              </c:numCache>
+            </c:numRef>
+          </c:val>
+        </c:ser>
+        <c:ser>
+          <c:idx val="1"/>
+          <c:order val="1"/>
+          <c:tx>
+            <c:strRef>
+              <c:f>Sheet1!$C$1</c:f>
+              <c:strCache>
+                <c:ptCount val="1"/>
+                <c:pt idx="0">
+                  <c:v>Canada</c:v>
+                </c:pt>
+              </c:strCache>
+            </c:strRef>
+          </c:tx>
+          <c:spPr>
+            <a:solidFill>
+              <a:srgbClr val="046A38"/>
+            </a:solidFill>
+            <a:effectLst/>
+          </c:spPr>
+          <c:invertIfNegative val="0"/>
+          <c:dLbls>
+            <c:numFmt formatCode="0&quot;%&quot;;-0&quot;%&quot;;;@" sourceLinked="0"/>
+            <c:txPr>
+              <a:bodyPr/>
+              <a:lstStyle/>
+              <a:p>
+                <a:pPr>
+                  <a:defRPr b="0" i="0" strike="noStrike" sz="700" u="none">
+                    <a:solidFill>
+                      <a:srgbClr val="FFFFFF"/>
+                    </a:solidFill>
+                    <a:latin typeface="Arial"/>
+                  </a:defRPr>
+                </a:pPr>
+              </a:p>
+            </c:txPr>
+            <c:dLblPos val="ctr"/>
+            <c:showLegendKey val="0"/>
+            <c:showVal val="1"/>
+            <c:showCatName val="0"/>
+            <c:showSerName val="0"/>
+            <c:showPercent val="0"/>
+            <c:showBubbleSize val="0"/>
+            <c:showLeaderLines val="0"/>
+          </c:dLbls>
+          <c:cat>
+            <c:multiLvlStrRef>
+              <c:f>Sheet1!$A$2:$A$11</c:f>
+              <c:multiLvlStrCache>
+                <c:ptCount val="10"/>
+                <c:lvl>
+                  <c:pt idx="0">
+                    <c:v>Reactive — Top 50 (US &amp; Canada only, 0%)</c:v>
+                  </c:pt>
+                  <c:pt idx="1">
+                    <c:v>Reactive — Large (US &amp; Canada only, 10%)</c:v>
+                  </c:pt>
+                  <c:pt idx="2">
+                    <c:v>Foundational — Top 50 (US &amp; Canada only, 7%)</c:v>
+                  </c:pt>
+                  <c:pt idx="3">
+                    <c:v>Foundational — Large (US &amp; Canada only, 0%)</c:v>
+                  </c:pt>
+                  <c:pt idx="4">
+                    <c:v>Managed — Top 50 (US &amp; Canada only, 14%)</c:v>
+                  </c:pt>
+                  <c:pt idx="5">
+                    <c:v>Managed — Large (US &amp; Canada only, 30%)</c:v>
+                  </c:pt>
+                  <c:pt idx="6">
+                    <c:v>Integrated — Top 50 (US &amp; Canada only, 34%)</c:v>
+                  </c:pt>
+                  <c:pt idx="7">
+                    <c:v>Integrated — Large (US &amp; Canada only, 30%)</c:v>
+                  </c:pt>
+                  <c:pt idx="8">
+                    <c:v>Advanced — Top 50 (US &amp; Canada only, 33%)</c:v>
+                  </c:pt>
+                  <c:pt idx="9">
+                    <c:v>Advanced — Large (US &amp; Canada only, 20%)</c:v>
+                  </c:pt>
+                </c:lvl>
+              </c:multiLvlStrCache>
+            </c:multiLvlStrRef>
+          </c:cat>
+          <c:val>
+            <c:numRef>
+              <c:f>Sheet1!$C$2:$C$11</c:f>
+              <c:numCache>
+                <c:formatCode>General</c:formatCode>
+                <c:ptCount val="10"/>
+                <c:pt idx="0">
+                  <c:v>0</c:v>
+                </c:pt>
+                <c:pt idx="1">
+                  <c:v>10</c:v>
+                </c:pt>
+                <c:pt idx="2">
+                  <c:v>7</c:v>
+                </c:pt>
+                <c:pt idx="3">
+                  <c:v>0</c:v>
+                </c:pt>
+                <c:pt idx="4">
+                  <c:v>7</c:v>
+                </c:pt>
+                <c:pt idx="5">
+                  <c:v>20</c:v>
+                </c:pt>
+                <c:pt idx="6">
+                  <c:v>7</c:v>
+                </c:pt>
+                <c:pt idx="7">
+                  <c:v>10</c:v>
+                </c:pt>
+                <c:pt idx="8">
+                  <c:v>20</c:v>
+                </c:pt>
+                <c:pt idx="9">
+                  <c:v>20</c:v>
+                </c:pt>
+              </c:numCache>
+            </c:numRef>
+          </c:val>
+        </c:ser>
+        <c:dLbls>
+          <c:numFmt formatCode="0&quot;%&quot;;-0&quot;%&quot;;;@" sourceLinked="0"/>
+          <c:txPr>
+            <a:bodyPr/>
+            <a:lstStyle/>
+            <a:p>
+              <a:pPr>
+                <a:defRPr b="0" i="0" strike="noStrike" sz="700" u="none">
+                  <a:solidFill>
+                    <a:srgbClr val="FFFFFF"/>
+                  </a:solidFill>
+                  <a:latin typeface="Arial"/>
+                </a:defRPr>
+              </a:pPr>
+            </a:p>
+          </c:txPr>
+          <c:dLblPos val="ctr"/>
+          <c:showLegendKey val="0"/>
+          <c:showVal val="1"/>
+          <c:showCatName val="0"/>
+          <c:showSerName val="0"/>
+          <c:showPercent val="0"/>
+          <c:showBubbleSize val="0"/>
+          <c:showLeaderLines val="0"/>
+        </c:dLbls>
+        <c:gapWidth val="40"/>
+        <c:overlap val="100"/>
+        <c:axId val="2094734554"/>
+        <c:axId val="2094734552"/>
+        <c:axId val="2094734556"/>
+      </c:barChart>
+      <c:catAx>
+        <c:axId val="2094734554"/>
+        <c:scaling>
+          <c:orientation val="minMax"/>
+        </c:scaling>
+        <c:delete val="0"/>
+        <c:axPos val="l"/>
+        <c:numFmt formatCode="General" sourceLinked="1"/>
+        <c:majorTickMark val="out"/>
+        <c:minorTickMark val="none"/>
+        <c:tickLblPos val="nextTo"/>
+        <c:spPr>
+          <a:ln w="12700" cap="flat">
+            <a:noFill/>
+            <a:prstDash val="solid"/>
+            <a:round/>
+          </a:ln>
+        </c:spPr>
+        <c:txPr>
+          <a:bodyPr/>
+          <a:lstStyle/>
+          <a:p>
+            <a:pPr>
+              <a:defRPr sz="750" b="0" i="0" u="none" strike="noStrike">
+                <a:solidFill>
+                  <a:srgbClr val="53565A"/>
+                </a:solidFill>
+                <a:latin typeface="Arial"/>
+              </a:defRPr>
+            </a:pPr>
+            <a:endParaRPr lang="en-US"/>
+          </a:p>
+        </c:txPr>
+        <c:crossAx val="2094734552"/>
+        <c:crosses val="autoZero"/>
+        <c:auto val="1"/>
+        <c:lblAlgn val="ctr"/>
+        <c:noMultiLvlLbl val="1"/>
+      </c:catAx>
+      <c:valAx>
+        <c:axId val="2094734552"/>
+        <c:scaling>
+          <c:orientation val="minMax"/>
+        </c:scaling>
+        <c:delete val="1"/>
+        <c:axPos val="b"/>
+        <c:numFmt formatCode="General" sourceLinked="0"/>
+        <c:majorTickMark val="out"/>
+        <c:minorTickMark val="none"/>
+        <c:tickLblPos val="low"/>
+        <c:spPr>
+          <a:ln w="12700" cap="flat">
+            <a:noFill/>
+            <a:prstDash val="solid"/>
+            <a:round/>
+          </a:ln>
+        </c:spPr>
+        <c:txPr>
+          <a:bodyPr/>
+          <a:lstStyle/>
+          <a:p>
+            <a:pPr>
+              <a:defRPr sz="1200" b="0" i="0" u="none" strike="noStrike">
+                <a:solidFill>
+                  <a:srgbClr val="000000"/>
+                </a:solidFill>
+                <a:latin typeface="Arial"/>
+              </a:defRPr>
+            </a:pPr>
+            <a:endParaRPr lang="en-US"/>
+          </a:p>
+        </c:txPr>
+        <c:crossAx val="2094734554"/>
+        <c:crosses val="autoZero"/>
+        <c:crossBetween val="between"/>
+      </c:valAx>
+      <c:spPr>
+        <a:solidFill>
+          <a:srgbClr val="FFFFFF"/>
+        </a:solidFill>
+        <a:ln>
+          <a:noFill/>
+        </a:ln>
+        <a:effectLst/>
+      </c:spPr>
+    </c:plotArea>
+    <c:legend>
+      <c:legendPos val="b"/>
+      <c:overlay val="0"/>
+      <c:txPr>
+        <a:bodyPr/>
+        <a:lstStyle/>
+        <a:p>
+          <a:pPr>
+            <a:defRPr sz="850">      </a:defRPr>
+          </a:pPr>
+          <a:endParaRPr lang="en-US"/>
+        </a:p>
+      </c:txPr>
+    </c:legend>
+    <c:plotVisOnly val="1"/>
+    <c:dispBlanksAs val="span"/>
+  </c:chart>
+  <c:spPr>
+    <a:noFill/>
+    <a:ln>
+      <a:noFill/>
+    </a:ln>
+    <a:effectLst/>
+  </c:spPr>
+  <c:externalData r:id="rId1">
+    <c:autoUpdate val="0"/>
+  </c:externalData>
+</c:chartSpace>
+</file>
+
+<file path=ppt/charts/chart22.xml><?xml version="1.0" encoding="utf-8"?>
+<c:chartSpace xmlns:c="http://schemas.openxmlformats.org/drawingml/2006/chart" xmlns:a="http://schemas.openxmlformats.org/drawingml/2006/main" xmlns:r="http://schemas.openxmlformats.org/officeDocument/2006/relationships">
+  <c:date1904 val="0"/>
+  <c:roundedCorners val="1"/>
+  <c:chart>
+    <c:autoTitleDeleted val="1"/>
+    <c:plotArea>
+      <c:layout/>
+      <c:barChart>
+        <c:barDir val="bar"/>
         <c:grouping val="clustered"/>
         <c:varyColors val="0"/>
         <c:ser>
@@ -5134,7 +6388,7 @@
               <c:strCache>
                 <c:ptCount val="1"/>
                 <c:pt idx="0">
-                  <c:v>Fraud Investment Relative to Regulatory Requirements</c:v>
+                  <c:v>Current approach</c:v>
                 </c:pt>
               </c:strCache>
             </c:strRef>
@@ -5172,18 +6426,27 @@
           </c:dLbls>
           <c:cat>
             <c:multiLvlStrRef>
-              <c:f>Sheet1!$A$2:$A$4</c:f>
+              <c:f>Sheet1!$A$2:$A$7</c:f>
               <c:multiLvlStrCache>
-                <c:ptCount val="3"/>
+                <c:ptCount val="6"/>
                 <c:lvl>
                   <c:pt idx="0">
-                    <c:v>Investing to remediate existing compliance gaps</c:v>
+                    <c:v>AI-enabled tools augmentation</c:v>
                   </c:pt>
                   <c:pt idx="1">
-                    <c:v>Investing to meet upcoming / draft regulations</c:v>
+                    <c:v>Automating workflows</c:v>
                   </c:pt>
                   <c:pt idx="2">
-                    <c:v>Regulation not a primary driver</c:v>
+                    <c:v>Redesigning processes &amp; playbooks</c:v>
+                  </c:pt>
+                  <c:pt idx="3">
+                    <c:v>Outsourcing</c:v>
+                  </c:pt>
+                  <c:pt idx="4">
+                    <c:v>Hiring / workforce expansion</c:v>
+                  </c:pt>
+                  <c:pt idx="5">
+                    <c:v>Combination of approaches</c:v>
                   </c:pt>
                 </c:lvl>
               </c:multiLvlStrCache>
@@ -5191,18 +6454,128 @@
           </c:cat>
           <c:val>
             <c:numRef>
-              <c:f>Sheet1!$B$2:$B$4</c:f>
+              <c:f>Sheet1!$B$2:$B$7</c:f>
               <c:numCache>
                 <c:formatCode>General</c:formatCode>
-                <c:ptCount val="3"/>
+                <c:ptCount val="6"/>
                 <c:pt idx="0">
-                  <c:v>48</c:v>
+                  <c:v>34</c:v>
                 </c:pt>
                 <c:pt idx="1">
-                  <c:v>39</c:v>
+                  <c:v>29</c:v>
                 </c:pt>
                 <c:pt idx="2">
-                  <c:v>13</c:v>
+                  <c:v>10</c:v>
+                </c:pt>
+                <c:pt idx="3">
+                  <c:v>10</c:v>
+                </c:pt>
+                <c:pt idx="4">
+                  <c:v>10</c:v>
+                </c:pt>
+                <c:pt idx="5">
+                  <c:v>7</c:v>
+                </c:pt>
+              </c:numCache>
+            </c:numRef>
+          </c:val>
+        </c:ser>
+        <c:ser>
+          <c:idx val="1"/>
+          <c:order val="1"/>
+          <c:tx>
+            <c:strRef>
+              <c:f>Sheet1!$C$1</c:f>
+              <c:strCache>
+                <c:ptCount val="1"/>
+                <c:pt idx="0">
+                  <c:v>3-year focus</c:v>
+                </c:pt>
+              </c:strCache>
+            </c:strRef>
+          </c:tx>
+          <c:spPr>
+            <a:solidFill>
+              <a:srgbClr val="046A38"/>
+            </a:solidFill>
+            <a:effectLst/>
+          </c:spPr>
+          <c:invertIfNegative val="0"/>
+          <c:dLbls>
+            <c:numFmt formatCode="0&quot;%&quot;" sourceLinked="0"/>
+            <c:txPr>
+              <a:bodyPr/>
+              <a:lstStyle/>
+              <a:p>
+                <a:pPr>
+                  <a:defRPr b="0" i="0" strike="noStrike" sz="1000" u="none">
+                    <a:solidFill>
+                      <a:srgbClr val="000000"/>
+                    </a:solidFill>
+                    <a:latin typeface="Arial"/>
+                  </a:defRPr>
+                </a:pPr>
+              </a:p>
+            </c:txPr>
+            <c:showLegendKey val="0"/>
+            <c:showVal val="1"/>
+            <c:showCatName val="0"/>
+            <c:showSerName val="0"/>
+            <c:showPercent val="0"/>
+            <c:showBubbleSize val="0"/>
+            <c:showLeaderLines val="0"/>
+          </c:dLbls>
+          <c:cat>
+            <c:multiLvlStrRef>
+              <c:f>Sheet1!$A$2:$A$7</c:f>
+              <c:multiLvlStrCache>
+                <c:ptCount val="6"/>
+                <c:lvl>
+                  <c:pt idx="0">
+                    <c:v>AI-enabled tools augmentation</c:v>
+                  </c:pt>
+                  <c:pt idx="1">
+                    <c:v>Automating workflows</c:v>
+                  </c:pt>
+                  <c:pt idx="2">
+                    <c:v>Redesigning processes &amp; playbooks</c:v>
+                  </c:pt>
+                  <c:pt idx="3">
+                    <c:v>Outsourcing</c:v>
+                  </c:pt>
+                  <c:pt idx="4">
+                    <c:v>Hiring / workforce expansion</c:v>
+                  </c:pt>
+                  <c:pt idx="5">
+                    <c:v>Combination of approaches</c:v>
+                  </c:pt>
+                </c:lvl>
+              </c:multiLvlStrCache>
+            </c:multiLvlStrRef>
+          </c:cat>
+          <c:val>
+            <c:numRef>
+              <c:f>Sheet1!$C$2:$C$7</c:f>
+              <c:numCache>
+                <c:formatCode>General</c:formatCode>
+                <c:ptCount val="6"/>
+                <c:pt idx="0">
+                  <c:v>41</c:v>
+                </c:pt>
+                <c:pt idx="1">
+                  <c:v>27</c:v>
+                </c:pt>
+                <c:pt idx="2">
+                  <c:v>18</c:v>
+                </c:pt>
+                <c:pt idx="3">
+                  <c:v>7</c:v>
+                </c:pt>
+                <c:pt idx="4">
+                  <c:v>5</c:v>
+                </c:pt>
+                <c:pt idx="5">
+                  <c:v>2</c:v>
                 </c:pt>
               </c:numCache>
             </c:numRef>
@@ -5324,6 +6697,20 @@
         <a:effectLst/>
       </c:spPr>
     </c:plotArea>
+    <c:legend>
+      <c:legendPos val="b"/>
+      <c:overlay val="0"/>
+      <c:txPr>
+        <a:bodyPr/>
+        <a:lstStyle/>
+        <a:p>
+          <a:pPr>
+            <a:defRPr sz="1000">      </a:defRPr>
+          </a:pPr>
+          <a:endParaRPr lang="en-US"/>
+        </a:p>
+      </c:txPr>
+    </c:legend>
     <c:plotVisOnly val="1"/>
     <c:dispBlanksAs val="span"/>
   </c:chart>
@@ -5340,7 +6727,234 @@
 </c:chartSpace>
 </file>
 
-<file path=ppt/charts/chart21.xml><?xml version="1.0" encoding="utf-8"?>
+<file path=ppt/charts/chart23.xml><?xml version="1.0" encoding="utf-8"?>
+<c:chartSpace xmlns:c="http://schemas.openxmlformats.org/drawingml/2006/chart" xmlns:a="http://schemas.openxmlformats.org/drawingml/2006/main" xmlns:r="http://schemas.openxmlformats.org/officeDocument/2006/relationships">
+  <c:date1904 val="0"/>
+  <c:roundedCorners val="1"/>
+  <c:chart>
+    <c:autoTitleDeleted val="1"/>
+    <c:plotArea>
+      <c:layout/>
+      <c:barChart>
+        <c:barDir val="bar"/>
+        <c:grouping val="clustered"/>
+        <c:varyColors val="0"/>
+        <c:ser>
+          <c:idx val="0"/>
+          <c:order val="0"/>
+          <c:tx>
+            <c:strRef>
+              <c:f>Sheet1!$B$1</c:f>
+              <c:strCache>
+                <c:ptCount val="1"/>
+                <c:pt idx="0">
+                  <c:v>Fraud Investment Relative to Regulatory Requirements</c:v>
+                </c:pt>
+              </c:strCache>
+            </c:strRef>
+          </c:tx>
+          <c:spPr>
+            <a:solidFill>
+              <a:srgbClr val="86BC25"/>
+            </a:solidFill>
+            <a:effectLst/>
+          </c:spPr>
+          <c:invertIfNegative val="0"/>
+          <c:dLbls>
+            <c:numFmt formatCode="0&quot;%&quot;" sourceLinked="0"/>
+            <c:txPr>
+              <a:bodyPr/>
+              <a:lstStyle/>
+              <a:p>
+                <a:pPr>
+                  <a:defRPr b="0" i="0" strike="noStrike" sz="1000" u="none">
+                    <a:solidFill>
+                      <a:srgbClr val="000000"/>
+                    </a:solidFill>
+                    <a:latin typeface="Arial"/>
+                  </a:defRPr>
+                </a:pPr>
+              </a:p>
+            </c:txPr>
+            <c:showLegendKey val="0"/>
+            <c:showVal val="1"/>
+            <c:showCatName val="0"/>
+            <c:showSerName val="0"/>
+            <c:showPercent val="0"/>
+            <c:showBubbleSize val="0"/>
+            <c:showLeaderLines val="0"/>
+          </c:dLbls>
+          <c:cat>
+            <c:multiLvlStrRef>
+              <c:f>Sheet1!$A$2:$A$4</c:f>
+              <c:multiLvlStrCache>
+                <c:ptCount val="3"/>
+                <c:lvl>
+                  <c:pt idx="0">
+                    <c:v>Investing to remediate existing compliance gaps</c:v>
+                  </c:pt>
+                  <c:pt idx="1">
+                    <c:v>Investing to meet upcoming / draft regulations</c:v>
+                  </c:pt>
+                  <c:pt idx="2">
+                    <c:v>Regulation not a primary driver</c:v>
+                  </c:pt>
+                </c:lvl>
+              </c:multiLvlStrCache>
+            </c:multiLvlStrRef>
+          </c:cat>
+          <c:val>
+            <c:numRef>
+              <c:f>Sheet1!$B$2:$B$4</c:f>
+              <c:numCache>
+                <c:formatCode>General</c:formatCode>
+                <c:ptCount val="3"/>
+                <c:pt idx="0">
+                  <c:v>48</c:v>
+                </c:pt>
+                <c:pt idx="1">
+                  <c:v>39</c:v>
+                </c:pt>
+                <c:pt idx="2">
+                  <c:v>13</c:v>
+                </c:pt>
+              </c:numCache>
+            </c:numRef>
+          </c:val>
+        </c:ser>
+        <c:dLbls>
+          <c:numFmt formatCode="0&quot;%&quot;" sourceLinked="0"/>
+          <c:txPr>
+            <a:bodyPr/>
+            <a:lstStyle/>
+            <a:p>
+              <a:pPr>
+                <a:defRPr b="0" i="0" strike="noStrike" sz="1000" u="none">
+                  <a:solidFill>
+                    <a:srgbClr val="000000"/>
+                  </a:solidFill>
+                  <a:latin typeface="Arial"/>
+                </a:defRPr>
+              </a:pPr>
+            </a:p>
+          </c:txPr>
+          <c:showLegendKey val="0"/>
+          <c:showVal val="1"/>
+          <c:showCatName val="0"/>
+          <c:showSerName val="0"/>
+          <c:showPercent val="0"/>
+          <c:showBubbleSize val="0"/>
+          <c:showLeaderLines val="0"/>
+        </c:dLbls>
+        <c:gapWidth val="40"/>
+        <c:overlap val="0"/>
+        <c:axId val="2094734554"/>
+        <c:axId val="2094734552"/>
+        <c:axId val="2094734556"/>
+      </c:barChart>
+      <c:catAx>
+        <c:axId val="2094734554"/>
+        <c:scaling>
+          <c:orientation val="minMax"/>
+        </c:scaling>
+        <c:delete val="0"/>
+        <c:axPos val="l"/>
+        <c:numFmt formatCode="General" sourceLinked="1"/>
+        <c:majorTickMark val="out"/>
+        <c:minorTickMark val="none"/>
+        <c:tickLblPos val="nextTo"/>
+        <c:spPr>
+          <a:ln w="12700" cap="flat">
+            <a:noFill/>
+            <a:prstDash val="solid"/>
+            <a:round/>
+          </a:ln>
+        </c:spPr>
+        <c:txPr>
+          <a:bodyPr/>
+          <a:lstStyle/>
+          <a:p>
+            <a:pPr>
+              <a:defRPr sz="1000" b="0" i="0" u="none" strike="noStrike">
+                <a:solidFill>
+                  <a:srgbClr val="53565A"/>
+                </a:solidFill>
+                <a:latin typeface="Arial"/>
+              </a:defRPr>
+            </a:pPr>
+            <a:endParaRPr lang="en-US"/>
+          </a:p>
+        </c:txPr>
+        <c:crossAx val="2094734552"/>
+        <c:crosses val="autoZero"/>
+        <c:auto val="1"/>
+        <c:lblAlgn val="ctr"/>
+        <c:noMultiLvlLbl val="1"/>
+      </c:catAx>
+      <c:valAx>
+        <c:axId val="2094734552"/>
+        <c:scaling>
+          <c:orientation val="minMax"/>
+        </c:scaling>
+        <c:delete val="1"/>
+        <c:axPos val="b"/>
+        <c:numFmt formatCode="General" sourceLinked="0"/>
+        <c:majorTickMark val="out"/>
+        <c:minorTickMark val="none"/>
+        <c:tickLblPos val="low"/>
+        <c:spPr>
+          <a:ln w="12700" cap="flat">
+            <a:noFill/>
+            <a:prstDash val="solid"/>
+            <a:round/>
+          </a:ln>
+        </c:spPr>
+        <c:txPr>
+          <a:bodyPr/>
+          <a:lstStyle/>
+          <a:p>
+            <a:pPr>
+              <a:defRPr sz="1200" b="0" i="0" u="none" strike="noStrike">
+                <a:solidFill>
+                  <a:srgbClr val="000000"/>
+                </a:solidFill>
+                <a:latin typeface="Arial"/>
+              </a:defRPr>
+            </a:pPr>
+            <a:endParaRPr lang="en-US"/>
+          </a:p>
+        </c:txPr>
+        <c:crossAx val="2094734554"/>
+        <c:crosses val="autoZero"/>
+        <c:crossBetween val="between"/>
+      </c:valAx>
+      <c:spPr>
+        <a:solidFill>
+          <a:srgbClr val="FFFFFF"/>
+        </a:solidFill>
+        <a:ln>
+          <a:noFill/>
+        </a:ln>
+        <a:effectLst/>
+      </c:spPr>
+    </c:plotArea>
+    <c:plotVisOnly val="1"/>
+    <c:dispBlanksAs val="span"/>
+  </c:chart>
+  <c:spPr>
+    <a:noFill/>
+    <a:ln>
+      <a:noFill/>
+    </a:ln>
+    <a:effectLst/>
+  </c:spPr>
+  <c:externalData r:id="rId1">
+    <c:autoUpdate val="0"/>
+  </c:externalData>
+</c:chartSpace>
+</file>
+
+<file path=ppt/charts/chart24.xml><?xml version="1.0" encoding="utf-8"?>
 <c:chartSpace xmlns:c="http://schemas.openxmlformats.org/drawingml/2006/chart" xmlns:a="http://schemas.openxmlformats.org/drawingml/2006/main" xmlns:r="http://schemas.openxmlformats.org/officeDocument/2006/relationships">
   <c:date1904 val="0"/>
   <c:roundedCorners val="1"/>
@@ -10060,6 +11674,94 @@
 </p:notes>
 </file>
 
+<file path=ppt/notesSlides/notesSlide29.xml><?xml version="1.0" encoding="utf-8"?>
+<p:notes xmlns:a="http://schemas.openxmlformats.org/drawingml/2006/main" xmlns:r="http://schemas.openxmlformats.org/officeDocument/2006/relationships" xmlns:p="http://schemas.openxmlformats.org/presentationml/2006/main">
+  <p:cSld>
+    <p:spTree>
+      <p:nvGrpSpPr>
+        <p:cNvPr id="1" name=""/>
+        <p:cNvGrpSpPr/>
+        <p:nvPr/>
+      </p:nvGrpSpPr>
+      <p:grpSpPr>
+        <a:xfrm>
+          <a:off x="0" y="0"/>
+          <a:ext cx="0" cy="0"/>
+          <a:chOff x="0" y="0"/>
+          <a:chExt cx="0" cy="0"/>
+        </a:xfrm>
+      </p:grpSpPr>
+      <p:sp>
+        <p:nvSpPr>
+          <p:cNvPr id="2" name="Slide Image Placeholder 1"/>
+          <p:cNvSpPr>
+            <a:spLocks noGrp="1" noRot="1" noChangeAspect="1"/>
+          </p:cNvSpPr>
+          <p:nvPr>
+            <p:ph type="sldImg"/>
+          </p:nvPr>
+        </p:nvSpPr>
+        <p:spPr/>
+      </p:sp>
+      <p:sp>
+        <p:nvSpPr>
+          <p:cNvPr id="3" name="Notes Placeholder 2"/>
+          <p:cNvSpPr>
+            <a:spLocks noGrp="1"/>
+          </p:cNvSpPr>
+          <p:nvPr>
+            <p:ph type="body" idx="1"/>
+          </p:nvPr>
+        </p:nvSpPr>
+        <p:spPr/>
+        <p:txBody>
+          <a:bodyPr/>
+          <a:lstStyle/>
+          <a:p>
+            <a:r>
+              <a:rPr lang="en-US" dirty="0"/>
+              <a:t/>
+            </a:r>
+            <a:endParaRPr lang="en-US" dirty="0"/>
+          </a:p>
+        </p:txBody>
+      </p:sp>
+      <p:sp>
+        <p:nvSpPr>
+          <p:cNvPr id="4" name="Slide Number Placeholder 3"/>
+          <p:cNvSpPr>
+            <a:spLocks noGrp="1"/>
+          </p:cNvSpPr>
+          <p:nvPr>
+            <p:ph type="sldNum" sz="quarter" idx="10"/>
+          </p:nvPr>
+        </p:nvSpPr>
+        <p:spPr/>
+        <p:txBody>
+          <a:bodyPr/>
+          <a:lstStyle/>
+          <a:p>
+            <a:fld id="{F7021451-1387-4CA6-816F-3879F97B5CBC}" type="slidenum">
+              <a:rPr lang="en-US"/>
+              <a:t>29</a:t>
+            </a:fld>
+            <a:endParaRPr lang="en-US"/>
+          </a:p>
+        </p:txBody>
+      </p:sp>
+    </p:spTree>
+    <p:extLst>
+      <p:ext uri="{BB962C8B-B14F-4D97-AF65-F5344CB8AC3E}">
+        <p14:creationId xmlns:p14="http://schemas.microsoft.com/office/powerpoint/2010/main" val="1024086991"/>
+      </p:ext>
+    </p:extLst>
+  </p:cSld>
+  <p:clrMapOvr>
+    <a:masterClrMapping/>
+  </p:clrMapOvr>
+</p:notes>
+</file>
+
 <file path=ppt/notesSlides/notesSlide3.xml><?xml version="1.0" encoding="utf-8"?>
 <p:notes xmlns:a="http://schemas.openxmlformats.org/drawingml/2006/main" xmlns:r="http://schemas.openxmlformats.org/officeDocument/2006/relationships" xmlns:p="http://schemas.openxmlformats.org/presentationml/2006/main">
   <p:cSld>
@@ -10130,6 +11832,182 @@
             <a:fld id="{F7021451-1387-4CA6-816F-3879F97B5CBC}" type="slidenum">
               <a:rPr lang="en-US"/>
               <a:t>3</a:t>
+            </a:fld>
+            <a:endParaRPr lang="en-US"/>
+          </a:p>
+        </p:txBody>
+      </p:sp>
+    </p:spTree>
+    <p:extLst>
+      <p:ext uri="{BB962C8B-B14F-4D97-AF65-F5344CB8AC3E}">
+        <p14:creationId xmlns:p14="http://schemas.microsoft.com/office/powerpoint/2010/main" val="1024086991"/>
+      </p:ext>
+    </p:extLst>
+  </p:cSld>
+  <p:clrMapOvr>
+    <a:masterClrMapping/>
+  </p:clrMapOvr>
+</p:notes>
+</file>
+
+<file path=ppt/notesSlides/notesSlide30.xml><?xml version="1.0" encoding="utf-8"?>
+<p:notes xmlns:a="http://schemas.openxmlformats.org/drawingml/2006/main" xmlns:r="http://schemas.openxmlformats.org/officeDocument/2006/relationships" xmlns:p="http://schemas.openxmlformats.org/presentationml/2006/main">
+  <p:cSld>
+    <p:spTree>
+      <p:nvGrpSpPr>
+        <p:cNvPr id="1" name=""/>
+        <p:cNvGrpSpPr/>
+        <p:nvPr/>
+      </p:nvGrpSpPr>
+      <p:grpSpPr>
+        <a:xfrm>
+          <a:off x="0" y="0"/>
+          <a:ext cx="0" cy="0"/>
+          <a:chOff x="0" y="0"/>
+          <a:chExt cx="0" cy="0"/>
+        </a:xfrm>
+      </p:grpSpPr>
+      <p:sp>
+        <p:nvSpPr>
+          <p:cNvPr id="2" name="Slide Image Placeholder 1"/>
+          <p:cNvSpPr>
+            <a:spLocks noGrp="1" noRot="1" noChangeAspect="1"/>
+          </p:cNvSpPr>
+          <p:nvPr>
+            <p:ph type="sldImg"/>
+          </p:nvPr>
+        </p:nvSpPr>
+        <p:spPr/>
+      </p:sp>
+      <p:sp>
+        <p:nvSpPr>
+          <p:cNvPr id="3" name="Notes Placeholder 2"/>
+          <p:cNvSpPr>
+            <a:spLocks noGrp="1"/>
+          </p:cNvSpPr>
+          <p:nvPr>
+            <p:ph type="body" idx="1"/>
+          </p:nvPr>
+        </p:nvSpPr>
+        <p:spPr/>
+        <p:txBody>
+          <a:bodyPr/>
+          <a:lstStyle/>
+          <a:p>
+            <a:r>
+              <a:rPr lang="en-US" dirty="0"/>
+              <a:t/>
+            </a:r>
+            <a:endParaRPr lang="en-US" dirty="0"/>
+          </a:p>
+        </p:txBody>
+      </p:sp>
+      <p:sp>
+        <p:nvSpPr>
+          <p:cNvPr id="4" name="Slide Number Placeholder 3"/>
+          <p:cNvSpPr>
+            <a:spLocks noGrp="1"/>
+          </p:cNvSpPr>
+          <p:nvPr>
+            <p:ph type="sldNum" sz="quarter" idx="10"/>
+          </p:nvPr>
+        </p:nvSpPr>
+        <p:spPr/>
+        <p:txBody>
+          <a:bodyPr/>
+          <a:lstStyle/>
+          <a:p>
+            <a:fld id="{F7021451-1387-4CA6-816F-3879F97B5CBC}" type="slidenum">
+              <a:rPr lang="en-US"/>
+              <a:t>30</a:t>
+            </a:fld>
+            <a:endParaRPr lang="en-US"/>
+          </a:p>
+        </p:txBody>
+      </p:sp>
+    </p:spTree>
+    <p:extLst>
+      <p:ext uri="{BB962C8B-B14F-4D97-AF65-F5344CB8AC3E}">
+        <p14:creationId xmlns:p14="http://schemas.microsoft.com/office/powerpoint/2010/main" val="1024086991"/>
+      </p:ext>
+    </p:extLst>
+  </p:cSld>
+  <p:clrMapOvr>
+    <a:masterClrMapping/>
+  </p:clrMapOvr>
+</p:notes>
+</file>
+
+<file path=ppt/notesSlides/notesSlide31.xml><?xml version="1.0" encoding="utf-8"?>
+<p:notes xmlns:a="http://schemas.openxmlformats.org/drawingml/2006/main" xmlns:r="http://schemas.openxmlformats.org/officeDocument/2006/relationships" xmlns:p="http://schemas.openxmlformats.org/presentationml/2006/main">
+  <p:cSld>
+    <p:spTree>
+      <p:nvGrpSpPr>
+        <p:cNvPr id="1" name=""/>
+        <p:cNvGrpSpPr/>
+        <p:nvPr/>
+      </p:nvGrpSpPr>
+      <p:grpSpPr>
+        <a:xfrm>
+          <a:off x="0" y="0"/>
+          <a:ext cx="0" cy="0"/>
+          <a:chOff x="0" y="0"/>
+          <a:chExt cx="0" cy="0"/>
+        </a:xfrm>
+      </p:grpSpPr>
+      <p:sp>
+        <p:nvSpPr>
+          <p:cNvPr id="2" name="Slide Image Placeholder 1"/>
+          <p:cNvSpPr>
+            <a:spLocks noGrp="1" noRot="1" noChangeAspect="1"/>
+          </p:cNvSpPr>
+          <p:nvPr>
+            <p:ph type="sldImg"/>
+          </p:nvPr>
+        </p:nvSpPr>
+        <p:spPr/>
+      </p:sp>
+      <p:sp>
+        <p:nvSpPr>
+          <p:cNvPr id="3" name="Notes Placeholder 2"/>
+          <p:cNvSpPr>
+            <a:spLocks noGrp="1"/>
+          </p:cNvSpPr>
+          <p:nvPr>
+            <p:ph type="body" idx="1"/>
+          </p:nvPr>
+        </p:nvSpPr>
+        <p:spPr/>
+        <p:txBody>
+          <a:bodyPr/>
+          <a:lstStyle/>
+          <a:p>
+            <a:r>
+              <a:rPr lang="en-US" dirty="0"/>
+              <a:t/>
+            </a:r>
+            <a:endParaRPr lang="en-US" dirty="0"/>
+          </a:p>
+        </p:txBody>
+      </p:sp>
+      <p:sp>
+        <p:nvSpPr>
+          <p:cNvPr id="4" name="Slide Number Placeholder 3"/>
+          <p:cNvSpPr>
+            <a:spLocks noGrp="1"/>
+          </p:cNvSpPr>
+          <p:nvPr>
+            <p:ph type="sldNum" sz="quarter" idx="10"/>
+          </p:nvPr>
+        </p:nvSpPr>
+        <p:spPr/>
+        <p:txBody>
+          <a:bodyPr/>
+          <a:lstStyle/>
+          <a:p>
+            <a:fld id="{F7021451-1387-4CA6-816F-3879F97B5CBC}" type="slidenum">
+              <a:rPr lang="en-US"/>
+              <a:t>31</a:t>
             </a:fld>
             <a:endParaRPr lang="en-US"/>
           </a:p>
@@ -17054,7 +18932,7 @@
                 <a:ea typeface="Calibri" pitchFamily="34" charset="-122"/>
                 <a:cs typeface="Calibri" pitchFamily="34" charset="-120"/>
               </a:rPr>
-              <a:t>Scaling Approach — Today vs. 3-Year Focus</a:t>
+              <a:t>Fraud Program Maturity — By Sector and Institution Tier</a:t>
             </a:r>
             <a:endParaRPr lang="en-US" sz="1900" dirty="0"/>
           </a:p>
@@ -17096,7 +18974,7 @@
                 <a:ea typeface="Calibri" pitchFamily="34" charset="-122"/>
                 <a:cs typeface="Calibri" pitchFamily="34" charset="-120"/>
               </a:rPr>
-              <a:t>AI is already the top way fraud teams scale, and its lead is only growing.</a:t>
+              <a:t>Within each sector, maturity skews somewhat by institution tier — top-tier institutions lean more Advanced, particularly in Insurance.</a:t>
             </a:r>
             <a:endParaRPr lang="en-US" sz="1350" dirty="0"/>
           </a:p>
@@ -17161,7 +19039,7 @@
                 <a:ea typeface="IBM Plex Mono" pitchFamily="34" charset="-122"/>
                 <a:cs typeface="IBM Plex Mono" pitchFamily="34" charset="-120"/>
               </a:rPr>
-              <a:t>Q8 / Q9  </a:t>
+              <a:t>Q1 / newS8 / S9  </a:t>
             </a:r>
             <a:pPr algn="l" indent="0" marL="0">
               <a:lnSpc>
@@ -17178,7 +19056,7 @@
                 <a:ea typeface="Calibri" pitchFamily="34" charset="-122"/>
                 <a:cs typeface="Calibri" pitchFamily="34" charset="-120"/>
               </a:rPr>
-              <a:t>“Which statement best describes your current approach to scaling fraud/investigations operations as fraud volume and complexity increases? / Which area do you expect will receive the greatest focus for operations transformation over the next three years?”</a:t>
+              <a:t>“Which statement best describes the current maturity of your organization's fraud program? (Banking vs. Insurance, further broken down by institution tier)”</a:t>
             </a:r>
             <a:endParaRPr lang="en-US" sz="1000" dirty="0"/>
           </a:p>
@@ -17271,7 +19149,7 @@
         <p:spPr>
           <a:xfrm>
             <a:off x="502006" y="5276088"/>
-            <a:ext cx="11188598" cy="886968"/>
+            <a:ext cx="11188598" cy="685800"/>
           </a:xfrm>
           <a:prstGeom prst="rect">
             <a:avLst/>
@@ -17285,7 +19163,7 @@
           <a:p>
             <a:pPr algn="l" indent="0" marL="0">
               <a:lnSpc>
-                <a:spcPct val="118000"/>
+                <a:spcPct val="115000"/>
               </a:lnSpc>
               <a:buNone/>
             </a:pPr>
@@ -17298,15 +19176,57 @@
                 <a:ea typeface="Calibri" pitchFamily="34" charset="-122"/>
                 <a:cs typeface="Calibri" pitchFamily="34" charset="-120"/>
               </a:rPr>
-              <a:t>Single select, asked twice.  </a:t>
+              <a:t>Single select · low → high maturity. </a:t>
             </a:r>
             <a:pPr algn="l" indent="0" marL="0">
               <a:lnSpc>
-                <a:spcPct val="118000"/>
+                <a:spcPct val="115000"/>
               </a:lnSpc>
               <a:buNone/>
             </a:pPr>
             <a:r>
+              <a:rPr lang="en-US" sz="850" dirty="0">
+                <a:solidFill>
+                  <a:srgbClr val="53565A"/>
+                </a:solidFill>
+                <a:latin typeface="Calibri" pitchFamily="34" charset="0"/>
+                <a:ea typeface="Calibri" pitchFamily="34" charset="-122"/>
+                <a:cs typeface="Calibri" pitchFamily="34" charset="-120"/>
+              </a:rPr>
+              <a:t>The % in each category label is the full sector-level figure; tier segments are rounded to the nearest whole percent. Institution tier is based on newS8 (Banking) / S9 (Insurance); 5 Banking and 1 Insurance respondent who did not directly answer that question were classified from their employer description elsewhere in the survey (Top 100 and Large Insurance Carrier, respectively) — Banking Top 100 is n=40 (35 direct + 5 reclassified) and Insurance Large is n=10 (9 direct + 1 reclassified).</a:t>
+            </a:r>
+            <a:endParaRPr lang="en-US" sz="850" dirty="0"/>
+          </a:p>
+        </p:txBody>
+      </p:sp>
+      <p:sp>
+        <p:nvSpPr>
+          <p:cNvPr id="10" name="Text 7"/>
+          <p:cNvSpPr txBox="1"/>
+          <p:nvPr/>
+        </p:nvSpPr>
+        <p:spPr>
+          <a:xfrm>
+            <a:off x="502006" y="5980176"/>
+            <a:ext cx="11188598" cy="365760"/>
+          </a:xfrm>
+          <a:prstGeom prst="rect">
+            <a:avLst/>
+          </a:prstGeom>
+          <a:noFill/>
+          <a:ln/>
+        </p:spPr>
+        <p:txBody>
+          <a:bodyPr wrap="square" lIns="0" tIns="0" rIns="0" bIns="0" rtlCol="0" anchor="t"/>
+          <a:lstStyle/>
+          <a:p>
+            <a:pPr algn="l" indent="0" marL="0">
+              <a:lnSpc>
+                <a:spcPct val="110000"/>
+              </a:lnSpc>
+              <a:buNone/>
+            </a:pPr>
+            <a:r>
               <a:rPr lang="en-US" sz="850" b="1" dirty="0">
                 <a:solidFill>
                   <a:srgbClr val="53565A"/>
@@ -17319,12 +19239,12 @@
             </a:r>
             <a:pPr algn="l" indent="0" marL="0">
               <a:lnSpc>
-                <a:spcPct val="118000"/>
+                <a:spcPct val="110000"/>
               </a:lnSpc>
               <a:buNone/>
             </a:pPr>
             <a:r>
-              <a:rPr lang="en-US" sz="850" i="1" dirty="0">
+              <a:rPr lang="en-US" sz="800" i="1" dirty="0">
                 <a:solidFill>
                   <a:srgbClr val="53565A"/>
                 </a:solidFill>
@@ -17332,177 +19252,7 @@
                 <a:ea typeface="Calibri" pitchFamily="34" charset="-122"/>
                 <a:cs typeface="Calibri" pitchFamily="34" charset="-120"/>
               </a:rPr>
-              <a:t>“Adding capacity through hiring full-time employees and workforce expansion”</a:t>
-            </a:r>
-            <a:pPr algn="l" indent="0" marL="0">
-              <a:lnSpc>
-                <a:spcPct val="118000"/>
-              </a:lnSpc>
-              <a:buNone/>
-            </a:pPr>
-            <a:r>
-              <a:rPr lang="en-US" sz="850" dirty="0">
-                <a:solidFill>
-                  <a:srgbClr val="D0D0CE"/>
-                </a:solidFill>
-                <a:latin typeface="Calibri" pitchFamily="34" charset="0"/>
-                <a:ea typeface="Calibri" pitchFamily="34" charset="-122"/>
-                <a:cs typeface="Calibri" pitchFamily="34" charset="-120"/>
-              </a:rPr>
-              <a:t>  ·  </a:t>
-            </a:r>
-            <a:pPr algn="l" indent="0" marL="0">
-              <a:lnSpc>
-                <a:spcPct val="118000"/>
-              </a:lnSpc>
-              <a:buNone/>
-            </a:pPr>
-            <a:r>
-              <a:rPr lang="en-US" sz="850" i="1" dirty="0">
-                <a:solidFill>
-                  <a:srgbClr val="53565A"/>
-                </a:solidFill>
-                <a:latin typeface="Calibri" pitchFamily="34" charset="0"/>
-                <a:ea typeface="Calibri" pitchFamily="34" charset="-122"/>
-                <a:cs typeface="Calibri" pitchFamily="34" charset="-120"/>
-              </a:rPr>
-              <a:t>“Adding capacity through outsourcing arrangements (e.g., contractors)”</a:t>
-            </a:r>
-            <a:pPr algn="l" indent="0" marL="0">
-              <a:lnSpc>
-                <a:spcPct val="118000"/>
-              </a:lnSpc>
-              <a:buNone/>
-            </a:pPr>
-            <a:r>
-              <a:rPr lang="en-US" sz="850" dirty="0">
-                <a:solidFill>
-                  <a:srgbClr val="D0D0CE"/>
-                </a:solidFill>
-                <a:latin typeface="Calibri" pitchFamily="34" charset="0"/>
-                <a:ea typeface="Calibri" pitchFamily="34" charset="-122"/>
-                <a:cs typeface="Calibri" pitchFamily="34" charset="-120"/>
-              </a:rPr>
-              <a:t>  ·  </a:t>
-            </a:r>
-            <a:pPr algn="l" indent="0" marL="0">
-              <a:lnSpc>
-                <a:spcPct val="118000"/>
-              </a:lnSpc>
-              <a:buNone/>
-            </a:pPr>
-            <a:r>
-              <a:rPr lang="en-US" sz="850" i="1" dirty="0">
-                <a:solidFill>
-                  <a:srgbClr val="53565A"/>
-                </a:solidFill>
-                <a:latin typeface="Calibri" pitchFamily="34" charset="0"/>
-                <a:ea typeface="Calibri" pitchFamily="34" charset="-122"/>
-                <a:cs typeface="Calibri" pitchFamily="34" charset="-120"/>
-              </a:rPr>
-              <a:t>“Automating workflows and minimizing manual activities”</a:t>
-            </a:r>
-            <a:pPr algn="l" indent="0" marL="0">
-              <a:lnSpc>
-                <a:spcPct val="118000"/>
-              </a:lnSpc>
-              <a:buNone/>
-            </a:pPr>
-            <a:r>
-              <a:rPr lang="en-US" sz="850" dirty="0">
-                <a:solidFill>
-                  <a:srgbClr val="D0D0CE"/>
-                </a:solidFill>
-                <a:latin typeface="Calibri" pitchFamily="34" charset="0"/>
-                <a:ea typeface="Calibri" pitchFamily="34" charset="-122"/>
-                <a:cs typeface="Calibri" pitchFamily="34" charset="-120"/>
-              </a:rPr>
-              <a:t>  ·  </a:t>
-            </a:r>
-            <a:pPr algn="l" indent="0" marL="0">
-              <a:lnSpc>
-                <a:spcPct val="118000"/>
-              </a:lnSpc>
-              <a:buNone/>
-            </a:pPr>
-            <a:r>
-              <a:rPr lang="en-US" sz="850" i="1" dirty="0">
-                <a:solidFill>
-                  <a:srgbClr val="53565A"/>
-                </a:solidFill>
-                <a:latin typeface="Calibri" pitchFamily="34" charset="0"/>
-                <a:ea typeface="Calibri" pitchFamily="34" charset="-122"/>
-                <a:cs typeface="Calibri" pitchFamily="34" charset="-120"/>
-              </a:rPr>
-              <a:t>“Augmenting existing capacity with AI-enabled tools”</a:t>
-            </a:r>
-            <a:pPr algn="l" indent="0" marL="0">
-              <a:lnSpc>
-                <a:spcPct val="118000"/>
-              </a:lnSpc>
-              <a:buNone/>
-            </a:pPr>
-            <a:r>
-              <a:rPr lang="en-US" sz="850" dirty="0">
-                <a:solidFill>
-                  <a:srgbClr val="D0D0CE"/>
-                </a:solidFill>
-                <a:latin typeface="Calibri" pitchFamily="34" charset="0"/>
-                <a:ea typeface="Calibri" pitchFamily="34" charset="-122"/>
-                <a:cs typeface="Calibri" pitchFamily="34" charset="-120"/>
-              </a:rPr>
-              <a:t>  ·  </a:t>
-            </a:r>
-            <a:pPr algn="l" indent="0" marL="0">
-              <a:lnSpc>
-                <a:spcPct val="118000"/>
-              </a:lnSpc>
-              <a:buNone/>
-            </a:pPr>
-            <a:r>
-              <a:rPr lang="en-US" sz="850" i="1" dirty="0">
-                <a:solidFill>
-                  <a:srgbClr val="53565A"/>
-                </a:solidFill>
-                <a:latin typeface="Calibri" pitchFamily="34" charset="0"/>
-                <a:ea typeface="Calibri" pitchFamily="34" charset="-122"/>
-                <a:cs typeface="Calibri" pitchFamily="34" charset="-120"/>
-              </a:rPr>
-              <a:t>“Redesigning operation processes and playbooks across the lifecycle”</a:t>
-            </a:r>
-            <a:pPr algn="l" indent="0" marL="0">
-              <a:lnSpc>
-                <a:spcPct val="118000"/>
-              </a:lnSpc>
-              <a:buNone/>
-            </a:pPr>
-            <a:r>
-              <a:rPr lang="en-US" sz="850" dirty="0">
-                <a:solidFill>
-                  <a:srgbClr val="D0D0CE"/>
-                </a:solidFill>
-                <a:latin typeface="Calibri" pitchFamily="34" charset="0"/>
-                <a:ea typeface="Calibri" pitchFamily="34" charset="-122"/>
-                <a:cs typeface="Calibri" pitchFamily="34" charset="-120"/>
-              </a:rPr>
-              <a:t>  ·  </a:t>
-            </a:r>
-            <a:pPr algn="l" indent="0" marL="0">
-              <a:lnSpc>
-                <a:spcPct val="118000"/>
-              </a:lnSpc>
-              <a:buNone/>
-            </a:pPr>
-            <a:r>
-              <a:rPr lang="en-US" sz="850" i="1" dirty="0">
-                <a:solidFill>
-                  <a:srgbClr val="53565A"/>
-                </a:solidFill>
-                <a:latin typeface="Calibri" pitchFamily="34" charset="0"/>
-                <a:ea typeface="Calibri" pitchFamily="34" charset="-122"/>
-                <a:cs typeface="Calibri" pitchFamily="34" charset="-120"/>
-              </a:rPr>
-              <a:t>“Pursuing a combination of the above approaches”</a:t>
+              <a:t>“Reactive: Primarily incident-driven” · “Foundational: Controls established within individual business units” · “Managed: Enterprise standards and governance are in place” · “Integrated: Data, analytics, and operations are integrated across major fraud types” · “Advanced: Predictive intelligence and ecosystem collaboration are embedded”</a:t>
             </a:r>
             <a:endParaRPr lang="en-US" sz="850" dirty="0"/>
           </a:p>
@@ -17522,7 +19272,7 @@
     <p:bg>
       <p:bgPr>
         <a:solidFill>
-          <a:srgbClr val="86BC25"/>
+          <a:srgbClr val="FFFFFF"/>
         </a:solidFill>
       </p:bgPr>
     </p:bg>
@@ -17548,47 +19298,8 @@
         </p:nvSpPr>
         <p:spPr>
           <a:xfrm>
-            <a:off x="502920" y="1699870"/>
-            <a:ext cx="10415016" cy="1591970"/>
-          </a:xfrm>
-          <a:prstGeom prst="rect">
-            <a:avLst/>
-          </a:prstGeom>
-          <a:noFill/>
-          <a:ln/>
-        </p:spPr>
-        <p:txBody>
-          <a:bodyPr wrap="square" lIns="0" tIns="0" rIns="0" bIns="0" rtlCol="0" anchor="b"/>
-          <a:lstStyle/>
-          <a:p>
-            <a:pPr algn="l" indent="0" marL="0">
-              <a:buNone/>
-            </a:pPr>
-            <a:r>
-              <a:rPr lang="en-US" sz="3600" b="1" dirty="0">
-                <a:solidFill>
-                  <a:srgbClr val="FFFFFF"/>
-                </a:solidFill>
-                <a:latin typeface="Calibri" pitchFamily="34" charset="0"/>
-                <a:ea typeface="Calibri" pitchFamily="34" charset="-122"/>
-                <a:cs typeface="Calibri" pitchFamily="34" charset="-120"/>
-              </a:rPr>
-              <a:t>5. Regulatory &amp; Market Change</a:t>
-            </a:r>
-            <a:endParaRPr lang="en-US" sz="3600" dirty="0"/>
-          </a:p>
-        </p:txBody>
-      </p:sp>
-      <p:sp>
-        <p:nvSpPr>
-          <p:cNvPr id="3" name="Text 1"/>
-          <p:cNvSpPr txBox="1"/>
-          <p:nvPr/>
-        </p:nvSpPr>
-        <p:spPr>
-          <a:xfrm>
-            <a:off x="502920" y="3423514"/>
-            <a:ext cx="10415016" cy="1563624"/>
+            <a:off x="502006" y="256032"/>
+            <a:ext cx="11188598" cy="310896"/>
           </a:xfrm>
           <a:prstGeom prst="rect">
             <a:avLst/>
@@ -17601,29 +19312,150 @@
           <a:lstStyle/>
           <a:p>
             <a:pPr algn="l" indent="0" marL="0">
+              <a:buNone/>
+            </a:pPr>
+            <a:r>
+              <a:rPr lang="en-US" sz="1900" b="1" dirty="0">
+                <a:solidFill>
+                  <a:srgbClr val="000000"/>
+                </a:solidFill>
+                <a:latin typeface="Calibri" pitchFamily="34" charset="0"/>
+                <a:ea typeface="Calibri" pitchFamily="34" charset="-122"/>
+                <a:cs typeface="Calibri" pitchFamily="34" charset="-120"/>
+              </a:rPr>
+              <a:t>Fraud Program Maturity — Banking, by Institution Tier and Region</a:t>
+            </a:r>
+            <a:endParaRPr lang="en-US" sz="1900" dirty="0"/>
+          </a:p>
+        </p:txBody>
+      </p:sp>
+      <p:sp>
+        <p:nvSpPr>
+          <p:cNvPr id="3" name="Text 1"/>
+          <p:cNvSpPr txBox="1"/>
+          <p:nvPr/>
+        </p:nvSpPr>
+        <p:spPr>
+          <a:xfrm>
+            <a:off x="502006" y="585216"/>
+            <a:ext cx="11188598" cy="713232"/>
+          </a:xfrm>
+          <a:prstGeom prst="rect">
+            <a:avLst/>
+          </a:prstGeom>
+          <a:noFill/>
+          <a:ln/>
+        </p:spPr>
+        <p:txBody>
+          <a:bodyPr wrap="square" lIns="0" tIns="0" rIns="0" bIns="0" rtlCol="0" anchor="t"/>
+          <a:lstStyle/>
+          <a:p>
+            <a:pPr algn="l" indent="0" marL="0">
               <a:lnSpc>
-                <a:spcPct val="110000"/>
+                <a:spcPct val="105000"/>
               </a:lnSpc>
               <a:buNone/>
             </a:pPr>
             <a:r>
-              <a:rPr lang="en-US" sz="1600" dirty="0">
-                <a:solidFill>
-                  <a:srgbClr val="FFFFFF"/>
-                </a:solidFill>
-                <a:latin typeface="Calibri" pitchFamily="34" charset="0"/>
-                <a:ea typeface="Calibri" pitchFamily="34" charset="-122"/>
-                <a:cs typeface="Calibri" pitchFamily="34" charset="-120"/>
-              </a:rPr>
-              <a:t>Where fraud investment is really going, and the disruption leaders see coming next.</a:t>
-            </a:r>
-            <a:endParaRPr lang="en-US" sz="1600" dirty="0"/>
+              <a:rPr lang="en-US" sz="1350" b="1" dirty="0">
+                <a:solidFill>
+                  <a:srgbClr val="046A38"/>
+                </a:solidFill>
+                <a:latin typeface="Calibri" pitchFamily="34" charset="0"/>
+                <a:ea typeface="Calibri" pitchFamily="34" charset="-122"/>
+                <a:cs typeface="Calibri" pitchFamily="34" charset="-120"/>
+              </a:rPr>
+              <a:t>Top 100 institutions lean more Advanced across most regions; Large institutions cluster more heavily at Integrated.</a:t>
+            </a:r>
+            <a:endParaRPr lang="en-US" sz="1350" dirty="0"/>
           </a:p>
         </p:txBody>
       </p:sp>
       <p:sp>
         <p:nvSpPr>
-          <p:cNvPr id="4" name="Text 2"/>
+          <p:cNvPr id="4" name="Shape 2"/>
+          <p:cNvSpPr/>
+          <p:nvPr/>
+        </p:nvSpPr>
+        <p:spPr>
+          <a:xfrm>
+            <a:off x="502006" y="1335024"/>
+            <a:ext cx="0" cy="512064"/>
+          </a:xfrm>
+          <a:prstGeom prst="line">
+            <a:avLst/>
+          </a:prstGeom>
+          <a:noFill/>
+          <a:ln w="25400">
+            <a:solidFill>
+              <a:srgbClr val="D0D0CE"/>
+            </a:solidFill>
+            <a:prstDash val="solid"/>
+          </a:ln>
+        </p:spPr>
+      </p:sp>
+      <p:sp>
+        <p:nvSpPr>
+          <p:cNvPr id="5" name="Text 3"/>
+          <p:cNvSpPr txBox="1"/>
+          <p:nvPr/>
+        </p:nvSpPr>
+        <p:spPr>
+          <a:xfrm>
+            <a:off x="648310" y="1335024"/>
+            <a:ext cx="11042294" cy="512064"/>
+          </a:xfrm>
+          <a:prstGeom prst="rect">
+            <a:avLst/>
+          </a:prstGeom>
+          <a:noFill/>
+          <a:ln/>
+        </p:spPr>
+        <p:txBody>
+          <a:bodyPr wrap="square" lIns="0" tIns="0" rIns="0" bIns="0" rtlCol="0" anchor="t"/>
+          <a:lstStyle/>
+          <a:p>
+            <a:pPr algn="l" indent="0" marL="0">
+              <a:lnSpc>
+                <a:spcPct val="106000"/>
+              </a:lnSpc>
+              <a:buNone/>
+            </a:pPr>
+            <a:r>
+              <a:rPr lang="en-US" sz="900" b="1" dirty="0">
+                <a:solidFill>
+                  <a:srgbClr val="046A38"/>
+                </a:solidFill>
+                <a:latin typeface="IBM Plex Mono" pitchFamily="34" charset="0"/>
+                <a:ea typeface="IBM Plex Mono" pitchFamily="34" charset="-122"/>
+                <a:cs typeface="IBM Plex Mono" pitchFamily="34" charset="-120"/>
+              </a:rPr>
+              <a:t>Q1 / newS8  </a:t>
+            </a:r>
+            <a:pPr algn="l" indent="0" marL="0">
+              <a:lnSpc>
+                <a:spcPct val="106000"/>
+              </a:lnSpc>
+              <a:buNone/>
+            </a:pPr>
+            <a:r>
+              <a:rPr lang="en-US" sz="1000" i="1" dirty="0">
+                <a:solidFill>
+                  <a:srgbClr val="575757"/>
+                </a:solidFill>
+                <a:latin typeface="Calibri" pitchFamily="34" charset="0"/>
+                <a:ea typeface="Calibri" pitchFamily="34" charset="-122"/>
+                <a:cs typeface="Calibri" pitchFamily="34" charset="-120"/>
+              </a:rPr>
+              <a:t>“Which statement best describes the current maturity of your organization's fraud program? (Banking only, Top 100 vs. Large institution, further broken down by region)”</a:t>
+            </a:r>
+            <a:endParaRPr lang="en-US" sz="1000" dirty="0"/>
+          </a:p>
+        </p:txBody>
+      </p:sp>
+      <p:sp>
+        <p:nvSpPr>
+          <p:cNvPr id="6" name="Text 4"/>
           <p:cNvSpPr txBox="1"/>
           <p:nvPr/>
         </p:nvSpPr>
@@ -17648,7 +19480,7 @@
             <a:r>
               <a:rPr lang="en-US" sz="900" dirty="0">
                 <a:solidFill>
-                  <a:srgbClr val="FFFFFF"/>
+                  <a:srgbClr val="53565A"/>
                 </a:solidFill>
                 <a:latin typeface="Calibri" pitchFamily="34" charset="0"/>
                 <a:ea typeface="Calibri" pitchFamily="34" charset="-122"/>
@@ -17657,6 +19489,163 @@
               <a:t>22</a:t>
             </a:r>
             <a:endParaRPr lang="en-US" sz="900" dirty="0"/>
+          </a:p>
+        </p:txBody>
+      </p:sp>
+      <p:graphicFrame>
+        <p:nvGraphicFramePr>
+          <p:cNvPr id="7" name="Chart 0" descr=""/>
+          <p:cNvGraphicFramePr/>
+          <p:nvPr/>
+        </p:nvGraphicFramePr>
+        <p:xfrm>
+          <a:off x="502006" y="2011680"/>
+          <a:ext cx="11188598" cy="3063240"/>
+        </p:xfrm>
+        <a:graphic xmlns:a="http://schemas.openxmlformats.org/drawingml/2006/main">
+          <a:graphicData uri="http://schemas.openxmlformats.org/drawingml/2006/chart">
+            <c:chart xmlns:c="http://schemas.openxmlformats.org/drawingml/2006/chart" r:id="rId1"/>
+          </a:graphicData>
+        </a:graphic>
+      </p:graphicFrame>
+      <p:sp>
+        <p:nvSpPr>
+          <p:cNvPr id="8" name="Shape 5"/>
+          <p:cNvSpPr/>
+          <p:nvPr/>
+        </p:nvSpPr>
+        <p:spPr>
+          <a:xfrm>
+            <a:off x="502006" y="5202936"/>
+            <a:ext cx="11188598" cy="0"/>
+          </a:xfrm>
+          <a:prstGeom prst="line">
+            <a:avLst/>
+          </a:prstGeom>
+          <a:noFill/>
+          <a:ln w="9525">
+            <a:solidFill>
+              <a:srgbClr val="D0D0CE"/>
+            </a:solidFill>
+            <a:prstDash val="solid"/>
+          </a:ln>
+        </p:spPr>
+      </p:sp>
+      <p:sp>
+        <p:nvSpPr>
+          <p:cNvPr id="9" name="Text 6"/>
+          <p:cNvSpPr txBox="1"/>
+          <p:nvPr/>
+        </p:nvSpPr>
+        <p:spPr>
+          <a:xfrm>
+            <a:off x="502006" y="5276088"/>
+            <a:ext cx="11188598" cy="566928"/>
+          </a:xfrm>
+          <a:prstGeom prst="rect">
+            <a:avLst/>
+          </a:prstGeom>
+          <a:noFill/>
+          <a:ln/>
+        </p:spPr>
+        <p:txBody>
+          <a:bodyPr wrap="square" lIns="0" tIns="0" rIns="0" bIns="0" rtlCol="0" anchor="t"/>
+          <a:lstStyle/>
+          <a:p>
+            <a:pPr algn="l" indent="0" marL="0">
+              <a:lnSpc>
+                <a:spcPct val="115000"/>
+              </a:lnSpc>
+              <a:buNone/>
+            </a:pPr>
+            <a:r>
+              <a:rPr lang="en-US" sz="850" b="1" dirty="0">
+                <a:solidFill>
+                  <a:srgbClr val="53565A"/>
+                </a:solidFill>
+                <a:latin typeface="Calibri" pitchFamily="34" charset="0"/>
+                <a:ea typeface="Calibri" pitchFamily="34" charset="-122"/>
+                <a:cs typeface="Calibri" pitchFamily="34" charset="-120"/>
+              </a:rPr>
+              <a:t>Single select · low → high maturity. </a:t>
+            </a:r>
+            <a:pPr algn="l" indent="0" marL="0">
+              <a:lnSpc>
+                <a:spcPct val="115000"/>
+              </a:lnSpc>
+              <a:buNone/>
+            </a:pPr>
+            <a:r>
+              <a:rPr lang="en-US" sz="850" dirty="0">
+                <a:solidFill>
+                  <a:srgbClr val="53565A"/>
+                </a:solidFill>
+                <a:latin typeface="Calibri" pitchFamily="34" charset="0"/>
+                <a:ea typeface="Calibri" pitchFamily="34" charset="-122"/>
+                <a:cs typeface="Calibri" pitchFamily="34" charset="-120"/>
+              </a:rPr>
+              <a:t>The % in each category label is the full tier-level figure (Top 100 n=40, Large n=35); region segments are rounded to the nearest whole percent. Australia (n=4 Top 100 / n=3 Large) and Singapore (n=2 / n=2) are thin samples shown directionally. Top 100 includes 5 respondents reclassified from their employer description elsewhere in the survey (see previous slide).</a:t>
+            </a:r>
+            <a:endParaRPr lang="en-US" sz="850" dirty="0"/>
+          </a:p>
+        </p:txBody>
+      </p:sp>
+      <p:sp>
+        <p:nvSpPr>
+          <p:cNvPr id="10" name="Text 7"/>
+          <p:cNvSpPr txBox="1"/>
+          <p:nvPr/>
+        </p:nvSpPr>
+        <p:spPr>
+          <a:xfrm>
+            <a:off x="502006" y="5861304"/>
+            <a:ext cx="11188598" cy="365760"/>
+          </a:xfrm>
+          <a:prstGeom prst="rect">
+            <a:avLst/>
+          </a:prstGeom>
+          <a:noFill/>
+          <a:ln/>
+        </p:spPr>
+        <p:txBody>
+          <a:bodyPr wrap="square" lIns="0" tIns="0" rIns="0" bIns="0" rtlCol="0" anchor="t"/>
+          <a:lstStyle/>
+          <a:p>
+            <a:pPr algn="l" indent="0" marL="0">
+              <a:lnSpc>
+                <a:spcPct val="110000"/>
+              </a:lnSpc>
+              <a:buNone/>
+            </a:pPr>
+            <a:r>
+              <a:rPr lang="en-US" sz="850" b="1" dirty="0">
+                <a:solidFill>
+                  <a:srgbClr val="53565A"/>
+                </a:solidFill>
+                <a:latin typeface="Calibri" pitchFamily="34" charset="0"/>
+                <a:ea typeface="Calibri" pitchFamily="34" charset="-122"/>
+                <a:cs typeface="Calibri" pitchFamily="34" charset="-120"/>
+              </a:rPr>
+              <a:t>Response options as fielded: </a:t>
+            </a:r>
+            <a:pPr algn="l" indent="0" marL="0">
+              <a:lnSpc>
+                <a:spcPct val="110000"/>
+              </a:lnSpc>
+              <a:buNone/>
+            </a:pPr>
+            <a:r>
+              <a:rPr lang="en-US" sz="800" i="1" dirty="0">
+                <a:solidFill>
+                  <a:srgbClr val="53565A"/>
+                </a:solidFill>
+                <a:latin typeface="Calibri" pitchFamily="34" charset="0"/>
+                <a:ea typeface="Calibri" pitchFamily="34" charset="-122"/>
+                <a:cs typeface="Calibri" pitchFamily="34" charset="-120"/>
+              </a:rPr>
+              <a:t>“Reactive: Primarily incident-driven” · “Foundational: Controls established within individual business units” · “Managed: Enterprise standards and governance are in place” · “Integrated: Data, analytics, and operations are integrated across major fraud types” · “Advanced: Predictive intelligence and ecosystem collaboration are embedded”</a:t>
+            </a:r>
+            <a:endParaRPr lang="en-US" sz="850" dirty="0"/>
           </a:p>
         </p:txBody>
       </p:sp>
@@ -17725,7 +19714,7 @@
                 <a:ea typeface="Calibri" pitchFamily="34" charset="-122"/>
                 <a:cs typeface="Calibri" pitchFamily="34" charset="-120"/>
               </a:rPr>
-              <a:t>Fraud Investment Relative to Regulatory Requirements</a:t>
+              <a:t>Fraud Program Maturity — Insurance, by Institution Tier and Region</a:t>
             </a:r>
             <a:endParaRPr lang="en-US" sz="1900" dirty="0"/>
           </a:p>
@@ -17767,7 +19756,7 @@
                 <a:ea typeface="Calibri" pitchFamily="34" charset="-122"/>
                 <a:cs typeface="Calibri" pitchFamily="34" charset="-120"/>
               </a:rPr>
-              <a:t>Most fraud spending today is about fixing past problems, not getting ahead of new ones.</a:t>
+              <a:t>Within Insurance, Large carriers show a wider spread across maturity levels than Top 50 carriers — though the regional cut here is thin.</a:t>
             </a:r>
             <a:endParaRPr lang="en-US" sz="1350" dirty="0"/>
           </a:p>
@@ -17832,7 +19821,7 @@
                 <a:ea typeface="IBM Plex Mono" pitchFamily="34" charset="-122"/>
                 <a:cs typeface="IBM Plex Mono" pitchFamily="34" charset="-120"/>
               </a:rPr>
-              <a:t>Q10  </a:t>
+              <a:t>Q1 / S9  </a:t>
             </a:r>
             <a:pPr algn="l" indent="0" marL="0">
               <a:lnSpc>
@@ -17849,7 +19838,7 @@
                 <a:ea typeface="Calibri" pitchFamily="34" charset="-122"/>
                 <a:cs typeface="Calibri" pitchFamily="34" charset="-120"/>
               </a:rPr>
-              <a:t>“Which statement best reflects how your organization is allocating fraud-related investment in response to regulatory and compliance requirements?”</a:t>
+              <a:t>“Which statement best describes the current maturity of your organization's fraud program? (Insurance only, Top 50 vs. Large carrier, further broken down by region)”</a:t>
             </a:r>
             <a:endParaRPr lang="en-US" sz="1000" dirty="0"/>
           </a:p>
@@ -17942,7 +19931,7 @@
         <p:spPr>
           <a:xfrm>
             <a:off x="502006" y="5276088"/>
-            <a:ext cx="11188598" cy="886968"/>
+            <a:ext cx="11188598" cy="777240"/>
           </a:xfrm>
           <a:prstGeom prst="rect">
             <a:avLst/>
@@ -17956,7 +19945,7 @@
           <a:p>
             <a:pPr algn="l" indent="0" marL="0">
               <a:lnSpc>
-                <a:spcPct val="118000"/>
+                <a:spcPct val="112000"/>
               </a:lnSpc>
               <a:buNone/>
             </a:pPr>
@@ -17969,15 +19958,57 @@
                 <a:ea typeface="Calibri" pitchFamily="34" charset="-122"/>
                 <a:cs typeface="Calibri" pitchFamily="34" charset="-120"/>
               </a:rPr>
-              <a:t>Single select.  </a:t>
+              <a:t>Single select · low → high maturity. </a:t>
             </a:r>
             <a:pPr algn="l" indent="0" marL="0">
               <a:lnSpc>
-                <a:spcPct val="118000"/>
+                <a:spcPct val="112000"/>
               </a:lnSpc>
               <a:buNone/>
             </a:pPr>
             <a:r>
+              <a:rPr lang="en-US" sz="850" dirty="0">
+                <a:solidFill>
+                  <a:srgbClr val="53565A"/>
+                </a:solidFill>
+                <a:latin typeface="Calibri" pitchFamily="34" charset="0"/>
+                <a:ea typeface="Calibri" pitchFamily="34" charset="-122"/>
+                <a:cs typeface="Calibri" pitchFamily="34" charset="-120"/>
+              </a:rPr>
+              <a:t>Bars reflect only United States and Canada respondents. Top 50 (n=15 full sample) excludes Europe (n=1) and Australia (n=1) here — shown totals are 13 of 15. Large (n=10 full sample, including 1 respondent reclassified from their employer description) excludes Europe (n=1) here — shown totals are 9 of 10. Full-sample tier totals (all regions) are: Top 50 — Reactive 0%, Foundational 7%, Managed 13%, Integrated 33%, Advanced 47%; Large — Reactive 10%, Foundational 0%, Managed 30%, Integrated 30%, Advanced 30%.</a:t>
+            </a:r>
+            <a:endParaRPr lang="en-US" sz="850" dirty="0"/>
+          </a:p>
+        </p:txBody>
+      </p:sp>
+      <p:sp>
+        <p:nvSpPr>
+          <p:cNvPr id="10" name="Text 7"/>
+          <p:cNvSpPr txBox="1"/>
+          <p:nvPr/>
+        </p:nvSpPr>
+        <p:spPr>
+          <a:xfrm>
+            <a:off x="502006" y="6080760"/>
+            <a:ext cx="11188598" cy="347472"/>
+          </a:xfrm>
+          <a:prstGeom prst="rect">
+            <a:avLst/>
+          </a:prstGeom>
+          <a:noFill/>
+          <a:ln/>
+        </p:spPr>
+        <p:txBody>
+          <a:bodyPr wrap="square" lIns="0" tIns="0" rIns="0" bIns="0" rtlCol="0" anchor="t"/>
+          <a:lstStyle/>
+          <a:p>
+            <a:pPr algn="l" indent="0" marL="0">
+              <a:lnSpc>
+                <a:spcPct val="110000"/>
+              </a:lnSpc>
+              <a:buNone/>
+            </a:pPr>
+            <a:r>
               <a:rPr lang="en-US" sz="850" b="1" dirty="0">
                 <a:solidFill>
                   <a:srgbClr val="53565A"/>
@@ -17990,12 +20021,12 @@
             </a:r>
             <a:pPr algn="l" indent="0" marL="0">
               <a:lnSpc>
-                <a:spcPct val="118000"/>
+                <a:spcPct val="110000"/>
               </a:lnSpc>
               <a:buNone/>
             </a:pPr>
             <a:r>
-              <a:rPr lang="en-US" sz="850" i="1" dirty="0">
+              <a:rPr lang="en-US" sz="800" i="1" dirty="0">
                 <a:solidFill>
                   <a:srgbClr val="53565A"/>
                 </a:solidFill>
@@ -18003,75 +20034,7 @@
                 <a:ea typeface="Calibri" pitchFamily="34" charset="-122"/>
                 <a:cs typeface="Calibri" pitchFamily="34" charset="-120"/>
               </a:rPr>
-              <a:t>“Primarily investing to meet upcoming and draft regulatory requirements”</a:t>
-            </a:r>
-            <a:pPr algn="l" indent="0" marL="0">
-              <a:lnSpc>
-                <a:spcPct val="118000"/>
-              </a:lnSpc>
-              <a:buNone/>
-            </a:pPr>
-            <a:r>
-              <a:rPr lang="en-US" sz="850" dirty="0">
-                <a:solidFill>
-                  <a:srgbClr val="D0D0CE"/>
-                </a:solidFill>
-                <a:latin typeface="Calibri" pitchFamily="34" charset="0"/>
-                <a:ea typeface="Calibri" pitchFamily="34" charset="-122"/>
-                <a:cs typeface="Calibri" pitchFamily="34" charset="-120"/>
-              </a:rPr>
-              <a:t>  ·  </a:t>
-            </a:r>
-            <a:pPr algn="l" indent="0" marL="0">
-              <a:lnSpc>
-                <a:spcPct val="118000"/>
-              </a:lnSpc>
-              <a:buNone/>
-            </a:pPr>
-            <a:r>
-              <a:rPr lang="en-US" sz="850" i="1" dirty="0">
-                <a:solidFill>
-                  <a:srgbClr val="53565A"/>
-                </a:solidFill>
-                <a:latin typeface="Calibri" pitchFamily="34" charset="0"/>
-                <a:ea typeface="Calibri" pitchFamily="34" charset="-122"/>
-                <a:cs typeface="Calibri" pitchFamily="34" charset="-120"/>
-              </a:rPr>
-              <a:t>“Primarily investing to remediate existing compliance and control gaps”</a:t>
-            </a:r>
-            <a:pPr algn="l" indent="0" marL="0">
-              <a:lnSpc>
-                <a:spcPct val="118000"/>
-              </a:lnSpc>
-              <a:buNone/>
-            </a:pPr>
-            <a:r>
-              <a:rPr lang="en-US" sz="850" dirty="0">
-                <a:solidFill>
-                  <a:srgbClr val="D0D0CE"/>
-                </a:solidFill>
-                <a:latin typeface="Calibri" pitchFamily="34" charset="0"/>
-                <a:ea typeface="Calibri" pitchFamily="34" charset="-122"/>
-                <a:cs typeface="Calibri" pitchFamily="34" charset="-120"/>
-              </a:rPr>
-              <a:t>  ·  </a:t>
-            </a:r>
-            <a:pPr algn="l" indent="0" marL="0">
-              <a:lnSpc>
-                <a:spcPct val="118000"/>
-              </a:lnSpc>
-              <a:buNone/>
-            </a:pPr>
-            <a:r>
-              <a:rPr lang="en-US" sz="850" i="1" dirty="0">
-                <a:solidFill>
-                  <a:srgbClr val="53565A"/>
-                </a:solidFill>
-                <a:latin typeface="Calibri" pitchFamily="34" charset="0"/>
-                <a:ea typeface="Calibri" pitchFamily="34" charset="-122"/>
-                <a:cs typeface="Calibri" pitchFamily="34" charset="-120"/>
-              </a:rPr>
-              <a:t>“Regulatory requirements are not a primary driver of fraud-related investment”</a:t>
+              <a:t>“Reactive: Primarily incident-driven” · “Foundational: Controls established within individual business units” · “Managed: Enterprise standards and governance are in place” · “Integrated: Data, analytics, and operations are integrated across major fraud types” · “Advanced: Predictive intelligence and ecosystem collaboration are embedded”</a:t>
             </a:r>
             <a:endParaRPr lang="en-US" sz="850" dirty="0"/>
           </a:p>
@@ -18142,7 +20105,7 @@
                 <a:ea typeface="Calibri" pitchFamily="34" charset="-122"/>
                 <a:cs typeface="Calibri" pitchFamily="34" charset="-120"/>
               </a:rPr>
-              <a:t>Upcoming Regulatory / Market Change With Greatest Expected Impact</a:t>
+              <a:t>Scaling Approach — Today vs. 3-Year Focus</a:t>
             </a:r>
             <a:endParaRPr lang="en-US" sz="1900" dirty="0"/>
           </a:p>
@@ -18184,7 +20147,7 @@
                 <a:ea typeface="Calibri" pitchFamily="34" charset="-122"/>
                 <a:cs typeface="Calibri" pitchFamily="34" charset="-120"/>
               </a:rPr>
-              <a:t>Identity and authentication tops a close three-way race for the next big disruption.</a:t>
+              <a:t>AI is already the top way fraud teams scale, and its lead is only growing.</a:t>
             </a:r>
             <a:endParaRPr lang="en-US" sz="1350" dirty="0"/>
           </a:p>
@@ -18249,7 +20212,7 @@
                 <a:ea typeface="IBM Plex Mono" pitchFamily="34" charset="-122"/>
                 <a:cs typeface="IBM Plex Mono" pitchFamily="34" charset="-120"/>
               </a:rPr>
-              <a:t>Q11  </a:t>
+              <a:t>Q8 / Q9  </a:t>
             </a:r>
             <a:pPr algn="l" indent="0" marL="0">
               <a:lnSpc>
@@ -18266,7 +20229,7 @@
                 <a:ea typeface="Calibri" pitchFamily="34" charset="-122"/>
                 <a:cs typeface="Calibri" pitchFamily="34" charset="-120"/>
               </a:rPr>
-              <a:t>“Which upcoming regulatory or market changes is expected to have the greatest impact on your fraud program?”</a:t>
+              <a:t>“Which statement best describes your current approach to scaling fraud/investigations operations as fraud volume and complexity increases? / Which area do you expect will receive the greatest focus for operations transformation over the next three years?”</a:t>
             </a:r>
             <a:endParaRPr lang="en-US" sz="1000" dirty="0"/>
           </a:p>
@@ -18386,7 +20349,7 @@
                 <a:ea typeface="Calibri" pitchFamily="34" charset="-122"/>
                 <a:cs typeface="Calibri" pitchFamily="34" charset="-120"/>
               </a:rPr>
-              <a:t>Ranked top 3 — shown as % of respondents who placed the option anywhere in their top 3 (not mutually exclusive; bars don't sum to 100%).  </a:t>
+              <a:t>Single select, asked twice.  </a:t>
             </a:r>
             <a:pPr algn="l" indent="0" marL="0">
               <a:lnSpc>
@@ -18420,7 +20383,7 @@
                 <a:ea typeface="Calibri" pitchFamily="34" charset="-122"/>
                 <a:cs typeface="Calibri" pitchFamily="34" charset="-120"/>
               </a:rPr>
-              <a:t>“Payment innovation and adoption (e.g., real-time payments, stable coins, agentic payments)”</a:t>
+              <a:t>“Adding capacity through hiring full-time employees and workforce expansion”</a:t>
             </a:r>
             <a:pPr algn="l" indent="0" marL="0">
               <a:lnSpc>
@@ -18454,7 +20417,7 @@
                 <a:ea typeface="Calibri" pitchFamily="34" charset="-122"/>
                 <a:cs typeface="Calibri" pitchFamily="34" charset="-120"/>
               </a:rPr>
-              <a:t>“Liability and reimbursement changes”</a:t>
+              <a:t>“Adding capacity through outsourcing arrangements (e.g., contractors)”</a:t>
             </a:r>
             <a:pPr algn="l" indent="0" marL="0">
               <a:lnSpc>
@@ -18488,7 +20451,7 @@
                 <a:ea typeface="Calibri" pitchFamily="34" charset="-122"/>
                 <a:cs typeface="Calibri" pitchFamily="34" charset="-120"/>
               </a:rPr>
-              <a:t>“Open Banking / Consumer-driven banking initiatives”</a:t>
+              <a:t>“Automating workflows and minimizing manual activities”</a:t>
             </a:r>
             <a:pPr algn="l" indent="0" marL="0">
               <a:lnSpc>
@@ -18522,7 +20485,7 @@
                 <a:ea typeface="Calibri" pitchFamily="34" charset="-122"/>
                 <a:cs typeface="Calibri" pitchFamily="34" charset="-120"/>
               </a:rPr>
-              <a:t>“AML related modernization initiatives”</a:t>
+              <a:t>“Augmenting existing capacity with AI-enabled tools”</a:t>
             </a:r>
             <a:pPr algn="l" indent="0" marL="0">
               <a:lnSpc>
@@ -18556,7 +20519,7 @@
                 <a:ea typeface="Calibri" pitchFamily="34" charset="-122"/>
                 <a:cs typeface="Calibri" pitchFamily="34" charset="-120"/>
               </a:rPr>
-              <a:t>“Privacy, data-sharing requirements, and AI governance requirements”</a:t>
+              <a:t>“Redesigning operation processes and playbooks across the lifecycle”</a:t>
             </a:r>
             <a:pPr algn="l" indent="0" marL="0">
               <a:lnSpc>
@@ -18590,7 +20553,7 @@
                 <a:ea typeface="Calibri" pitchFamily="34" charset="-122"/>
                 <a:cs typeface="Calibri" pitchFamily="34" charset="-120"/>
               </a:rPr>
-              <a:t>“Customer identity, authentication, and digital trust expectations”</a:t>
+              <a:t>“Pursuing a combination of the above approaches”</a:t>
             </a:r>
             <a:endParaRPr lang="en-US" sz="850" dirty="0"/>
           </a:p>
@@ -18661,7 +20624,7 @@
                 <a:ea typeface="Calibri" pitchFamily="34" charset="-122"/>
                 <a:cs typeface="Calibri" pitchFamily="34" charset="-120"/>
               </a:rPr>
-              <a:t>6. Looking Ahead Three Years</a:t>
+              <a:t>5. Regulatory &amp; Market Change</a:t>
             </a:r>
             <a:endParaRPr lang="en-US" sz="3600" dirty="0"/>
           </a:p>
@@ -18670,6 +20633,48 @@
       <p:sp>
         <p:nvSpPr>
           <p:cNvPr id="3" name="Text 1"/>
+          <p:cNvSpPr txBox="1"/>
+          <p:nvPr/>
+        </p:nvSpPr>
+        <p:spPr>
+          <a:xfrm>
+            <a:off x="502920" y="3423514"/>
+            <a:ext cx="10415016" cy="1563624"/>
+          </a:xfrm>
+          <a:prstGeom prst="rect">
+            <a:avLst/>
+          </a:prstGeom>
+          <a:noFill/>
+          <a:ln/>
+        </p:spPr>
+        <p:txBody>
+          <a:bodyPr wrap="square" lIns="0" tIns="0" rIns="0" bIns="0" rtlCol="0" anchor="t"/>
+          <a:lstStyle/>
+          <a:p>
+            <a:pPr algn="l" indent="0" marL="0">
+              <a:lnSpc>
+                <a:spcPct val="110000"/>
+              </a:lnSpc>
+              <a:buNone/>
+            </a:pPr>
+            <a:r>
+              <a:rPr lang="en-US" sz="1600" dirty="0">
+                <a:solidFill>
+                  <a:srgbClr val="FFFFFF"/>
+                </a:solidFill>
+                <a:latin typeface="Calibri" pitchFamily="34" charset="0"/>
+                <a:ea typeface="Calibri" pitchFamily="34" charset="-122"/>
+                <a:cs typeface="Calibri" pitchFamily="34" charset="-120"/>
+              </a:rPr>
+              <a:t>Where fraud investment is really going, and the disruption leaders see coming next.</a:t>
+            </a:r>
+            <a:endParaRPr lang="en-US" sz="1600" dirty="0"/>
+          </a:p>
+        </p:txBody>
+      </p:sp>
+      <p:sp>
+        <p:nvSpPr>
+          <p:cNvPr id="4" name="Text 2"/>
           <p:cNvSpPr txBox="1"/>
           <p:nvPr/>
         </p:nvSpPr>
@@ -18771,7 +20776,7 @@
                 <a:ea typeface="Calibri" pitchFamily="34" charset="-122"/>
                 <a:cs typeface="Calibri" pitchFamily="34" charset="-120"/>
               </a:rPr>
-              <a:t>What Leaders Say, Unprompted</a:t>
+              <a:t>Fraud Investment Relative to Regulatory Requirements</a:t>
             </a:r>
             <a:endParaRPr lang="en-US" sz="1900" dirty="0"/>
           </a:p>
@@ -18813,7 +20818,7 @@
                 <a:ea typeface="Calibri" pitchFamily="34" charset="-122"/>
                 <a:cs typeface="Calibri" pitchFamily="34" charset="-120"/>
               </a:rPr>
-              <a:t>Left to answer in their own words, leaders converge on the same trend.</a:t>
+              <a:t>Most fraud spending today is about fixing past problems, not getting ahead of new ones.</a:t>
             </a:r>
             <a:endParaRPr lang="en-US" sz="1350" dirty="0"/>
           </a:p>
@@ -18878,7 +20883,7 @@
                 <a:ea typeface="IBM Plex Mono" pitchFamily="34" charset="-122"/>
                 <a:cs typeface="IBM Plex Mono" pitchFamily="34" charset="-120"/>
               </a:rPr>
-              <a:t>Q12  </a:t>
+              <a:t>Q10  </a:t>
             </a:r>
             <a:pPr algn="l" indent="0" marL="0">
               <a:lnSpc>
@@ -18895,7 +20900,7 @@
                 <a:ea typeface="Calibri" pitchFamily="34" charset="-122"/>
                 <a:cs typeface="Calibri" pitchFamily="34" charset="-120"/>
               </a:rPr>
-              <a:t>“Looking ahead three years, what development do you believe will have the greatest impact on fraud risk management, and why? (open-ended)”</a:t>
+              <a:t>“Which statement best reflects how your organization is allocating fraud-related investment in response to regulatory and compliance requirements?”</a:t>
             </a:r>
             <a:endParaRPr lang="en-US" sz="1000" dirty="0"/>
           </a:p>
@@ -18940,38 +20945,55 @@
           </a:p>
         </p:txBody>
       </p:sp>
-      <p:sp>
-        <p:nvSpPr>
-          <p:cNvPr id="7" name="Shape 5"/>
+      <p:graphicFrame>
+        <p:nvGraphicFramePr>
+          <p:cNvPr id="7" name="Chart 0" descr=""/>
+          <p:cNvGraphicFramePr/>
+          <p:nvPr/>
+        </p:nvGraphicFramePr>
+        <p:xfrm>
+          <a:off x="502006" y="2011680"/>
+          <a:ext cx="11188598" cy="3063240"/>
+        </p:xfrm>
+        <a:graphic xmlns:a="http://schemas.openxmlformats.org/drawingml/2006/main">
+          <a:graphicData uri="http://schemas.openxmlformats.org/drawingml/2006/chart">
+            <c:chart xmlns:c="http://schemas.openxmlformats.org/drawingml/2006/chart" r:id="rId1"/>
+          </a:graphicData>
+        </a:graphic>
+      </p:graphicFrame>
+      <p:sp>
+        <p:nvSpPr>
+          <p:cNvPr id="8" name="Shape 5"/>
           <p:cNvSpPr/>
           <p:nvPr/>
         </p:nvSpPr>
         <p:spPr>
           <a:xfrm>
-            <a:off x="502006" y="2011680"/>
-            <a:ext cx="11188598" cy="914400"/>
+            <a:off x="502006" y="5202936"/>
+            <a:ext cx="11188598" cy="0"/>
           </a:xfrm>
-          <a:prstGeom prst="roundRect">
-            <a:avLst>
-              <a:gd name="adj" fmla="val 6000"/>
-            </a:avLst>
+          <a:prstGeom prst="line">
+            <a:avLst/>
           </a:prstGeom>
-          <a:solidFill>
-            <a:srgbClr val="F2F2F2"/>
-          </a:solidFill>
-          <a:ln/>
+          <a:noFill/>
+          <a:ln w="9525">
+            <a:solidFill>
+              <a:srgbClr val="D0D0CE"/>
+            </a:solidFill>
+            <a:prstDash val="solid"/>
+          </a:ln>
         </p:spPr>
       </p:sp>
       <p:sp>
         <p:nvSpPr>
-          <p:cNvPr id="8" name="Text 6"/>
+          <p:cNvPr id="9" name="Text 6"/>
           <p:cNvSpPr txBox="1"/>
           <p:nvPr/>
         </p:nvSpPr>
         <p:spPr>
           <a:xfrm>
-            <a:off x="776326" y="2011680"/>
-            <a:ext cx="2011680" cy="914400"/>
+            <a:off x="502006" y="5276088"/>
+            <a:ext cx="11188598" cy="886968"/>
           </a:xfrm>
           <a:prstGeom prst="rect">
             <a:avLst/>
@@ -18980,56 +21002,17 @@
           <a:ln/>
         </p:spPr>
         <p:txBody>
-          <a:bodyPr wrap="square" rtlCol="0" anchor="ctr"/>
-          <a:lstStyle/>
-          <a:p>
-            <a:pPr indent="0" marL="0">
-              <a:buNone/>
-            </a:pPr>
-            <a:r>
-              <a:rPr lang="en-US" sz="3000" b="1" dirty="0">
-                <a:solidFill>
-                  <a:srgbClr val="046A38"/>
-                </a:solidFill>
-                <a:latin typeface="Calibri" pitchFamily="34" charset="0"/>
-                <a:ea typeface="Calibri" pitchFamily="34" charset="-122"/>
-                <a:cs typeface="Calibri" pitchFamily="34" charset="-120"/>
-              </a:rPr>
-              <a:t>100/100</a:t>
-            </a:r>
-            <a:endParaRPr lang="en-US" sz="3000" dirty="0"/>
-          </a:p>
-        </p:txBody>
-      </p:sp>
-      <p:sp>
-        <p:nvSpPr>
-          <p:cNvPr id="9" name="Text 7"/>
-          <p:cNvSpPr txBox="1"/>
-          <p:nvPr/>
-        </p:nvSpPr>
-        <p:spPr>
-          <a:xfrm>
-            <a:off x="2970886" y="2057400"/>
-            <a:ext cx="8445398" cy="822960"/>
-          </a:xfrm>
-          <a:prstGeom prst="rect">
-            <a:avLst/>
-          </a:prstGeom>
-          <a:noFill/>
-          <a:ln/>
-        </p:spPr>
-        <p:txBody>
-          <a:bodyPr wrap="square" rtlCol="0" anchor="ctr"/>
-          <a:lstStyle/>
-          <a:p>
-            <a:pPr indent="0" marL="0">
+          <a:bodyPr wrap="square" lIns="0" tIns="0" rIns="0" bIns="0" rtlCol="0" anchor="t"/>
+          <a:lstStyle/>
+          <a:p>
+            <a:pPr algn="l" indent="0" marL="0">
               <a:lnSpc>
-                <a:spcPct val="110000"/>
+                <a:spcPct val="118000"/>
               </a:lnSpc>
               <a:buNone/>
             </a:pPr>
             <a:r>
-              <a:rPr lang="en-US" sz="1150" dirty="0">
+              <a:rPr lang="en-US" sz="850" b="1" dirty="0">
                 <a:solidFill>
                   <a:srgbClr val="53565A"/>
                 </a:solidFill>
@@ -19037,441 +21020,111 @@
                 <a:ea typeface="Calibri" pitchFamily="34" charset="-122"/>
                 <a:cs typeface="Calibri" pitchFamily="34" charset="-120"/>
               </a:rPr>
-              <a:t>respondents answered in their own words — a full response rate on an open text field. The dominant unprompted theme: the convergence of GenAI, synthetic identity, and real-time payments — the same thread running through every closed-ended question above.</a:t>
-            </a:r>
-            <a:endParaRPr lang="en-US" sz="1150" dirty="0"/>
-          </a:p>
-        </p:txBody>
-      </p:sp>
-      <p:sp>
-        <p:nvSpPr>
-          <p:cNvPr id="10" name="Shape 8"/>
-          <p:cNvSpPr/>
-          <p:nvPr/>
-        </p:nvSpPr>
-        <p:spPr>
-          <a:xfrm>
-            <a:off x="502006" y="3154680"/>
-            <a:ext cx="5457139" cy="1600200"/>
-          </a:xfrm>
-          <a:prstGeom prst="roundRect">
-            <a:avLst>
-              <a:gd name="adj" fmla="val 2857"/>
-            </a:avLst>
-          </a:prstGeom>
-          <a:solidFill>
-            <a:srgbClr val="FFFFFF"/>
-          </a:solidFill>
-          <a:ln w="9525">
-            <a:solidFill>
-              <a:srgbClr val="D0D0CE"/>
-            </a:solidFill>
-            <a:prstDash val="solid"/>
-          </a:ln>
-        </p:spPr>
-      </p:sp>
-      <p:sp>
-        <p:nvSpPr>
-          <p:cNvPr id="11" name="Text 9"/>
-          <p:cNvSpPr txBox="1"/>
-          <p:nvPr/>
-        </p:nvSpPr>
-        <p:spPr>
-          <a:xfrm>
-            <a:off x="684886" y="3282696"/>
-            <a:ext cx="5091379" cy="1143000"/>
-          </a:xfrm>
-          <a:prstGeom prst="rect">
-            <a:avLst/>
-          </a:prstGeom>
-          <a:noFill/>
-          <a:ln/>
-        </p:spPr>
-        <p:txBody>
-          <a:bodyPr wrap="square" rtlCol="0" anchor="t"/>
-          <a:lstStyle/>
-          <a:p>
-            <a:pPr indent="0" marL="0">
+              <a:t>Single select.  </a:t>
+            </a:r>
+            <a:pPr algn="l" indent="0" marL="0">
               <a:lnSpc>
-                <a:spcPct val="112000"/>
+                <a:spcPct val="118000"/>
               </a:lnSpc>
               <a:buNone/>
             </a:pPr>
             <a:r>
-              <a:rPr lang="en-US" sz="1000" i="1" dirty="0">
-                <a:solidFill>
-                  <a:srgbClr val="000000"/>
-                </a:solidFill>
-                <a:latin typeface="Calibri" pitchFamily="34" charset="0"/>
-                <a:ea typeface="Calibri" pitchFamily="34" charset="-122"/>
-                <a:cs typeface="Calibri" pitchFamily="34" charset="-120"/>
-              </a:rPr>
-              <a:t>“The convergence of genAI, synthetic identities and real time digital identity verification. This will matter significantly because fraudsters will become AI-native, identity becomes the new battleground, fraud prevention will replace fraud detection, and the winners will use AI against AI.”</a:t>
-            </a:r>
-            <a:endParaRPr lang="en-US" sz="1000" dirty="0"/>
-          </a:p>
-        </p:txBody>
-      </p:sp>
-      <p:sp>
-        <p:nvSpPr>
-          <p:cNvPr id="12" name="Text 10"/>
-          <p:cNvSpPr txBox="1"/>
-          <p:nvPr/>
-        </p:nvSpPr>
-        <p:spPr>
-          <a:xfrm>
-            <a:off x="684886" y="4443984"/>
-            <a:ext cx="5091379" cy="256032"/>
-          </a:xfrm>
-          <a:prstGeom prst="rect">
-            <a:avLst/>
-          </a:prstGeom>
-          <a:noFill/>
-          <a:ln/>
-        </p:spPr>
-        <p:txBody>
-          <a:bodyPr wrap="square" rtlCol="0" anchor="ctr"/>
-          <a:lstStyle/>
-          <a:p>
-            <a:pPr indent="0" marL="0">
-              <a:buNone/>
-            </a:pPr>
-            <a:r>
-              <a:rPr lang="en-US" sz="900" dirty="0">
+              <a:rPr lang="en-US" sz="850" b="1" dirty="0">
                 <a:solidFill>
                   <a:srgbClr val="53565A"/>
                 </a:solidFill>
-                <a:latin typeface="IBM Plex Mono" pitchFamily="34" charset="0"/>
-                <a:ea typeface="IBM Plex Mono" pitchFamily="34" charset="-122"/>
-                <a:cs typeface="IBM Plex Mono" pitchFamily="34" charset="-120"/>
-              </a:rPr>
-              <a:t>Director · Insurance</a:t>
-            </a:r>
-            <a:endParaRPr lang="en-US" sz="900" dirty="0"/>
-          </a:p>
-        </p:txBody>
-      </p:sp>
-      <p:sp>
-        <p:nvSpPr>
-          <p:cNvPr id="13" name="Shape 11"/>
-          <p:cNvSpPr/>
-          <p:nvPr/>
-        </p:nvSpPr>
-        <p:spPr>
-          <a:xfrm>
-            <a:off x="6233465" y="3154680"/>
-            <a:ext cx="5457139" cy="1600200"/>
-          </a:xfrm>
-          <a:prstGeom prst="roundRect">
-            <a:avLst>
-              <a:gd name="adj" fmla="val 2857"/>
-            </a:avLst>
-          </a:prstGeom>
-          <a:solidFill>
-            <a:srgbClr val="FFFFFF"/>
-          </a:solidFill>
-          <a:ln w="9525">
-            <a:solidFill>
-              <a:srgbClr val="D0D0CE"/>
-            </a:solidFill>
-            <a:prstDash val="solid"/>
-          </a:ln>
-        </p:spPr>
-      </p:sp>
-      <p:sp>
-        <p:nvSpPr>
-          <p:cNvPr id="14" name="Text 12"/>
-          <p:cNvSpPr txBox="1"/>
-          <p:nvPr/>
-        </p:nvSpPr>
-        <p:spPr>
-          <a:xfrm>
-            <a:off x="6416345" y="3282696"/>
-            <a:ext cx="5091379" cy="1143000"/>
-          </a:xfrm>
-          <a:prstGeom prst="rect">
-            <a:avLst/>
-          </a:prstGeom>
-          <a:noFill/>
-          <a:ln/>
-        </p:spPr>
-        <p:txBody>
-          <a:bodyPr wrap="square" rtlCol="0" anchor="t"/>
-          <a:lstStyle/>
-          <a:p>
-            <a:pPr indent="0" marL="0">
+                <a:latin typeface="Calibri" pitchFamily="34" charset="0"/>
+                <a:ea typeface="Calibri" pitchFamily="34" charset="-122"/>
+                <a:cs typeface="Calibri" pitchFamily="34" charset="-120"/>
+              </a:rPr>
+              <a:t>Response options as fielded: </a:t>
+            </a:r>
+            <a:pPr algn="l" indent="0" marL="0">
               <a:lnSpc>
-                <a:spcPct val="112000"/>
+                <a:spcPct val="118000"/>
               </a:lnSpc>
               <a:buNone/>
             </a:pPr>
             <a:r>
-              <a:rPr lang="en-US" sz="1000" i="1" dirty="0">
-                <a:solidFill>
-                  <a:srgbClr val="000000"/>
-                </a:solidFill>
-                <a:latin typeface="Calibri" pitchFamily="34" charset="0"/>
-                <a:ea typeface="Calibri" pitchFamily="34" charset="-122"/>
-                <a:cs typeface="Calibri" pitchFamily="34" charset="-120"/>
-              </a:rPr>
-              <a:t>“The biggest development will be the convergence of GenAI, synthetic identity, and real-time payments. Fraud will become faster, more personalized, and harder to distinguish from legitimate customer behaviour.”</a:t>
-            </a:r>
-            <a:endParaRPr lang="en-US" sz="1000" dirty="0"/>
-          </a:p>
-        </p:txBody>
-      </p:sp>
-      <p:sp>
-        <p:nvSpPr>
-          <p:cNvPr id="15" name="Text 13"/>
-          <p:cNvSpPr txBox="1"/>
-          <p:nvPr/>
-        </p:nvSpPr>
-        <p:spPr>
-          <a:xfrm>
-            <a:off x="6416345" y="4443984"/>
-            <a:ext cx="5091379" cy="256032"/>
-          </a:xfrm>
-          <a:prstGeom prst="rect">
-            <a:avLst/>
-          </a:prstGeom>
-          <a:noFill/>
-          <a:ln/>
-        </p:spPr>
-        <p:txBody>
-          <a:bodyPr wrap="square" rtlCol="0" anchor="ctr"/>
-          <a:lstStyle/>
-          <a:p>
-            <a:pPr indent="0" marL="0">
-              <a:buNone/>
-            </a:pPr>
-            <a:r>
-              <a:rPr lang="en-US" sz="900" dirty="0">
+              <a:rPr lang="en-US" sz="850" i="1" dirty="0">
                 <a:solidFill>
                   <a:srgbClr val="53565A"/>
                 </a:solidFill>
-                <a:latin typeface="IBM Plex Mono" pitchFamily="34" charset="0"/>
-                <a:ea typeface="IBM Plex Mono" pitchFamily="34" charset="-122"/>
-                <a:cs typeface="IBM Plex Mono" pitchFamily="34" charset="-120"/>
-              </a:rPr>
-              <a:t>C-level · Banking</a:t>
-            </a:r>
-            <a:endParaRPr lang="en-US" sz="900" dirty="0"/>
-          </a:p>
-        </p:txBody>
-      </p:sp>
-      <p:sp>
-        <p:nvSpPr>
-          <p:cNvPr id="16" name="Shape 14"/>
-          <p:cNvSpPr/>
-          <p:nvPr/>
-        </p:nvSpPr>
-        <p:spPr>
-          <a:xfrm>
-            <a:off x="502006" y="4937760"/>
-            <a:ext cx="5457139" cy="1600200"/>
-          </a:xfrm>
-          <a:prstGeom prst="roundRect">
-            <a:avLst>
-              <a:gd name="adj" fmla="val 2857"/>
-            </a:avLst>
-          </a:prstGeom>
-          <a:solidFill>
-            <a:srgbClr val="FFFFFF"/>
-          </a:solidFill>
-          <a:ln w="9525">
-            <a:solidFill>
-              <a:srgbClr val="D0D0CE"/>
-            </a:solidFill>
-            <a:prstDash val="solid"/>
-          </a:ln>
-        </p:spPr>
-      </p:sp>
-      <p:sp>
-        <p:nvSpPr>
-          <p:cNvPr id="17" name="Text 15"/>
-          <p:cNvSpPr txBox="1"/>
-          <p:nvPr/>
-        </p:nvSpPr>
-        <p:spPr>
-          <a:xfrm>
-            <a:off x="684886" y="5065776"/>
-            <a:ext cx="5091379" cy="1143000"/>
-          </a:xfrm>
-          <a:prstGeom prst="rect">
-            <a:avLst/>
-          </a:prstGeom>
-          <a:noFill/>
-          <a:ln/>
-        </p:spPr>
-        <p:txBody>
-          <a:bodyPr wrap="square" rtlCol="0" anchor="t"/>
-          <a:lstStyle/>
-          <a:p>
-            <a:pPr indent="0" marL="0">
+                <a:latin typeface="Calibri" pitchFamily="34" charset="0"/>
+                <a:ea typeface="Calibri" pitchFamily="34" charset="-122"/>
+                <a:cs typeface="Calibri" pitchFamily="34" charset="-120"/>
+              </a:rPr>
+              <a:t>“Primarily investing to meet upcoming and draft regulatory requirements”</a:t>
+            </a:r>
+            <a:pPr algn="l" indent="0" marL="0">
               <a:lnSpc>
-                <a:spcPct val="112000"/>
+                <a:spcPct val="118000"/>
               </a:lnSpc>
               <a:buNone/>
             </a:pPr>
             <a:r>
-              <a:rPr lang="en-US" sz="1000" i="1" dirty="0">
-                <a:solidFill>
-                  <a:srgbClr val="000000"/>
-                </a:solidFill>
-                <a:latin typeface="Calibri" pitchFamily="34" charset="0"/>
-                <a:ea typeface="Calibri" pitchFamily="34" charset="-122"/>
-                <a:cs typeface="Calibri" pitchFamily="34" charset="-120"/>
-              </a:rPr>
-              <a:t>“Companies are moving away from regular passwords towards decentralized digital credentials and biometric passkeys, as this would minimize phishing and account hacking.”</a:t>
-            </a:r>
-            <a:endParaRPr lang="en-US" sz="1000" dirty="0"/>
-          </a:p>
-        </p:txBody>
-      </p:sp>
-      <p:sp>
-        <p:nvSpPr>
-          <p:cNvPr id="18" name="Text 16"/>
-          <p:cNvSpPr txBox="1"/>
-          <p:nvPr/>
-        </p:nvSpPr>
-        <p:spPr>
-          <a:xfrm>
-            <a:off x="684886" y="6227064"/>
-            <a:ext cx="5091379" cy="256032"/>
-          </a:xfrm>
-          <a:prstGeom prst="rect">
-            <a:avLst/>
-          </a:prstGeom>
-          <a:noFill/>
-          <a:ln/>
-        </p:spPr>
-        <p:txBody>
-          <a:bodyPr wrap="square" rtlCol="0" anchor="ctr"/>
-          <a:lstStyle/>
-          <a:p>
-            <a:pPr indent="0" marL="0">
-              <a:buNone/>
-            </a:pPr>
-            <a:r>
-              <a:rPr lang="en-US" sz="900" dirty="0">
+              <a:rPr lang="en-US" sz="850" dirty="0">
+                <a:solidFill>
+                  <a:srgbClr val="D0D0CE"/>
+                </a:solidFill>
+                <a:latin typeface="Calibri" pitchFamily="34" charset="0"/>
+                <a:ea typeface="Calibri" pitchFamily="34" charset="-122"/>
+                <a:cs typeface="Calibri" pitchFamily="34" charset="-120"/>
+              </a:rPr>
+              <a:t>  ·  </a:t>
+            </a:r>
+            <a:pPr algn="l" indent="0" marL="0">
+              <a:lnSpc>
+                <a:spcPct val="118000"/>
+              </a:lnSpc>
+              <a:buNone/>
+            </a:pPr>
+            <a:r>
+              <a:rPr lang="en-US" sz="850" i="1" dirty="0">
                 <a:solidFill>
                   <a:srgbClr val="53565A"/>
                 </a:solidFill>
-                <a:latin typeface="IBM Plex Mono" pitchFamily="34" charset="0"/>
-                <a:ea typeface="IBM Plex Mono" pitchFamily="34" charset="-122"/>
-                <a:cs typeface="IBM Plex Mono" pitchFamily="34" charset="-120"/>
-              </a:rPr>
-              <a:t>Senior Manager · Banking</a:t>
-            </a:r>
-            <a:endParaRPr lang="en-US" sz="900" dirty="0"/>
-          </a:p>
-        </p:txBody>
-      </p:sp>
-      <p:sp>
-        <p:nvSpPr>
-          <p:cNvPr id="19" name="Shape 17"/>
-          <p:cNvSpPr/>
-          <p:nvPr/>
-        </p:nvSpPr>
-        <p:spPr>
-          <a:xfrm>
-            <a:off x="6233465" y="4937760"/>
-            <a:ext cx="5457139" cy="1600200"/>
-          </a:xfrm>
-          <a:prstGeom prst="roundRect">
-            <a:avLst>
-              <a:gd name="adj" fmla="val 2857"/>
-            </a:avLst>
-          </a:prstGeom>
-          <a:solidFill>
-            <a:srgbClr val="FFFFFF"/>
-          </a:solidFill>
-          <a:ln w="9525">
-            <a:solidFill>
-              <a:srgbClr val="D0D0CE"/>
-            </a:solidFill>
-            <a:prstDash val="solid"/>
-          </a:ln>
-        </p:spPr>
-      </p:sp>
-      <p:sp>
-        <p:nvSpPr>
-          <p:cNvPr id="20" name="Text 18"/>
-          <p:cNvSpPr txBox="1"/>
-          <p:nvPr/>
-        </p:nvSpPr>
-        <p:spPr>
-          <a:xfrm>
-            <a:off x="6416345" y="5065776"/>
-            <a:ext cx="5091379" cy="1143000"/>
-          </a:xfrm>
-          <a:prstGeom prst="rect">
-            <a:avLst/>
-          </a:prstGeom>
-          <a:noFill/>
-          <a:ln/>
-        </p:spPr>
-        <p:txBody>
-          <a:bodyPr wrap="square" rtlCol="0" anchor="t"/>
-          <a:lstStyle/>
-          <a:p>
-            <a:pPr indent="0" marL="0">
+                <a:latin typeface="Calibri" pitchFamily="34" charset="0"/>
+                <a:ea typeface="Calibri" pitchFamily="34" charset="-122"/>
+                <a:cs typeface="Calibri" pitchFamily="34" charset="-120"/>
+              </a:rPr>
+              <a:t>“Primarily investing to remediate existing compliance and control gaps”</a:t>
+            </a:r>
+            <a:pPr algn="l" indent="0" marL="0">
               <a:lnSpc>
-                <a:spcPct val="112000"/>
+                <a:spcPct val="118000"/>
               </a:lnSpc>
               <a:buNone/>
             </a:pPr>
             <a:r>
-              <a:rPr lang="en-US" sz="1000" i="1" dirty="0">
-                <a:solidFill>
-                  <a:srgbClr val="000000"/>
-                </a:solidFill>
-                <a:latin typeface="Calibri" pitchFamily="34" charset="0"/>
-                <a:ea typeface="Calibri" pitchFamily="34" charset="-122"/>
-                <a:cs typeface="Calibri" pitchFamily="34" charset="-120"/>
-              </a:rPr>
-              <a:t>“AI will shift fraud management from reactive investigation toward more predictive prevention, which should help us identify risks before losses occur.”</a:t>
-            </a:r>
-            <a:endParaRPr lang="en-US" sz="1000" dirty="0"/>
-          </a:p>
-        </p:txBody>
-      </p:sp>
-      <p:sp>
-        <p:nvSpPr>
-          <p:cNvPr id="21" name="Text 19"/>
-          <p:cNvSpPr txBox="1"/>
-          <p:nvPr/>
-        </p:nvSpPr>
-        <p:spPr>
-          <a:xfrm>
-            <a:off x="6416345" y="6227064"/>
-            <a:ext cx="5091379" cy="256032"/>
-          </a:xfrm>
-          <a:prstGeom prst="rect">
-            <a:avLst/>
-          </a:prstGeom>
-          <a:noFill/>
-          <a:ln/>
-        </p:spPr>
-        <p:txBody>
-          <a:bodyPr wrap="square" rtlCol="0" anchor="ctr"/>
-          <a:lstStyle/>
-          <a:p>
-            <a:pPr indent="0" marL="0">
-              <a:buNone/>
-            </a:pPr>
-            <a:r>
-              <a:rPr lang="en-US" sz="900" dirty="0">
+              <a:rPr lang="en-US" sz="850" dirty="0">
+                <a:solidFill>
+                  <a:srgbClr val="D0D0CE"/>
+                </a:solidFill>
+                <a:latin typeface="Calibri" pitchFamily="34" charset="0"/>
+                <a:ea typeface="Calibri" pitchFamily="34" charset="-122"/>
+                <a:cs typeface="Calibri" pitchFamily="34" charset="-120"/>
+              </a:rPr>
+              <a:t>  ·  </a:t>
+            </a:r>
+            <a:pPr algn="l" indent="0" marL="0">
+              <a:lnSpc>
+                <a:spcPct val="118000"/>
+              </a:lnSpc>
+              <a:buNone/>
+            </a:pPr>
+            <a:r>
+              <a:rPr lang="en-US" sz="850" i="1" dirty="0">
                 <a:solidFill>
                   <a:srgbClr val="53565A"/>
                 </a:solidFill>
-                <a:latin typeface="IBM Plex Mono" pitchFamily="34" charset="0"/>
-                <a:ea typeface="IBM Plex Mono" pitchFamily="34" charset="-122"/>
-                <a:cs typeface="IBM Plex Mono" pitchFamily="34" charset="-120"/>
-              </a:rPr>
-              <a:t>VP · Banking</a:t>
-            </a:r>
-            <a:endParaRPr lang="en-US" sz="900" dirty="0"/>
+                <a:latin typeface="Calibri" pitchFamily="34" charset="0"/>
+                <a:ea typeface="Calibri" pitchFamily="34" charset="-122"/>
+                <a:cs typeface="Calibri" pitchFamily="34" charset="-120"/>
+              </a:rPr>
+              <a:t>“Regulatory requirements are not a primary driver of fraud-related investment”</a:t>
+            </a:r>
+            <a:endParaRPr lang="en-US" sz="850" dirty="0"/>
           </a:p>
         </p:txBody>
       </p:sp>
@@ -19489,7 +21142,7 @@
     <p:bg>
       <p:bgPr>
         <a:solidFill>
-          <a:srgbClr val="050607"/>
+          <a:srgbClr val="FFFFFF"/>
         </a:solidFill>
       </p:bgPr>
     </p:bg>
@@ -19515,67 +21168,8 @@
         </p:nvSpPr>
         <p:spPr>
           <a:xfrm>
-            <a:off x="502006" y="457200"/>
-            <a:ext cx="1417320" cy="274320"/>
-          </a:xfrm>
-          <a:prstGeom prst="rect">
-            <a:avLst/>
-          </a:prstGeom>
-          <a:noFill/>
-          <a:ln/>
-        </p:spPr>
-        <p:txBody>
-          <a:bodyPr wrap="square" lIns="0" tIns="0" rIns="0" bIns="0" rtlCol="0" anchor="ctr"/>
-          <a:lstStyle/>
-          <a:p>
-            <a:pPr algn="l" indent="0" marL="0">
-              <a:buNone/>
-            </a:pPr>
-            <a:r>
-              <a:rPr lang="en-US" sz="1600" b="1" dirty="0">
-                <a:solidFill>
-                  <a:srgbClr val="FFFFFF"/>
-                </a:solidFill>
-                <a:latin typeface="Calibri" pitchFamily="34" charset="0"/>
-                <a:ea typeface="Calibri" pitchFamily="34" charset="-122"/>
-                <a:cs typeface="Calibri" pitchFamily="34" charset="-120"/>
-              </a:rPr>
-              <a:t>Deloitte</a:t>
-            </a:r>
-            <a:endParaRPr lang="en-US" sz="1600" dirty="0"/>
-          </a:p>
-        </p:txBody>
-      </p:sp>
-      <p:sp>
-        <p:nvSpPr>
-          <p:cNvPr id="3" name="Shape 1"/>
-          <p:cNvSpPr/>
-          <p:nvPr/>
-        </p:nvSpPr>
-        <p:spPr>
-          <a:xfrm>
-            <a:off x="1800454" y="598932"/>
-            <a:ext cx="82296" cy="82296"/>
-          </a:xfrm>
-          <a:prstGeom prst="ellipse">
-            <a:avLst/>
-          </a:prstGeom>
-          <a:solidFill>
-            <a:srgbClr val="86BC25"/>
-          </a:solidFill>
-          <a:ln/>
-        </p:spPr>
-      </p:sp>
-      <p:sp>
-        <p:nvSpPr>
-          <p:cNvPr id="4" name="Text 2"/>
-          <p:cNvSpPr txBox="1"/>
-          <p:nvPr/>
-        </p:nvSpPr>
-        <p:spPr>
-          <a:xfrm>
-            <a:off x="502006" y="4215384"/>
-            <a:ext cx="8531352" cy="2167128"/>
+            <a:off x="502006" y="256032"/>
+            <a:ext cx="11188598" cy="310896"/>
           </a:xfrm>
           <a:prstGeom prst="rect">
             <a:avLst/>
@@ -19588,109 +21182,83 @@
           <a:lstStyle/>
           <a:p>
             <a:pPr algn="l" indent="0" marL="0">
-              <a:lnSpc>
-                <a:spcPct val="120000"/>
-              </a:lnSpc>
-              <a:buNone/>
-            </a:pPr>
-            <a:r>
-              <a:rPr lang="en-US" sz="2800" b="1" dirty="0">
-                <a:solidFill>
-                  <a:srgbClr val="FFFFFF"/>
-                </a:solidFill>
-                <a:latin typeface="Calibri" pitchFamily="34" charset="0"/>
-                <a:ea typeface="Calibri" pitchFamily="34" charset="-122"/>
-                <a:cs typeface="Calibri" pitchFamily="34" charset="-120"/>
-              </a:rPr>
-              <a:t>Thank you
-</a:t>
-            </a:r>
-            <a:endParaRPr lang="en-US" sz="2800" dirty="0"/>
-          </a:p>
-          <a:p>
-            <a:pPr algn="l" indent="0" marL="0">
-              <a:lnSpc>
-                <a:spcPct val="120000"/>
-              </a:lnSpc>
-              <a:buNone/>
-            </a:pPr>
-            <a:r>
-              <a:rPr lang="en-US" sz="1600" b="1" dirty="0">
-                <a:solidFill>
-                  <a:srgbClr val="86BC25"/>
-                </a:solidFill>
-                <a:latin typeface="Calibri" pitchFamily="34" charset="0"/>
-                <a:ea typeface="Calibri" pitchFamily="34" charset="-122"/>
-                <a:cs typeface="Calibri" pitchFamily="34" charset="-120"/>
-              </a:rPr>
-              <a:t>[Presenter Name]
-</a:t>
-            </a:r>
-            <a:endParaRPr lang="en-US" sz="2800" dirty="0"/>
-          </a:p>
-          <a:p>
-            <a:pPr algn="l" indent="0" marL="0">
-              <a:lnSpc>
-                <a:spcPct val="120000"/>
-              </a:lnSpc>
-              <a:buNone/>
-            </a:pPr>
-            <a:r>
-              <a:rPr lang="en-US" sz="1300" dirty="0">
-                <a:solidFill>
-                  <a:srgbClr val="FFFFFF"/>
-                </a:solidFill>
-                <a:latin typeface="Calibri" pitchFamily="34" charset="0"/>
-                <a:ea typeface="Calibri" pitchFamily="34" charset="-122"/>
-                <a:cs typeface="Calibri" pitchFamily="34" charset="-120"/>
-              </a:rPr>
-              <a:t>[Title | Practice]
-</a:t>
-            </a:r>
-            <a:endParaRPr lang="en-US" sz="2800" dirty="0"/>
-          </a:p>
-          <a:p>
-            <a:pPr algn="l" indent="0" marL="0">
-              <a:lnSpc>
-                <a:spcPct val="120000"/>
-              </a:lnSpc>
-              <a:buNone/>
-            </a:pPr>
-            <a:r>
-              <a:rPr lang="en-US" sz="1300" dirty="0">
-                <a:solidFill>
-                  <a:srgbClr val="D0D0CE"/>
-                </a:solidFill>
-                <a:latin typeface="Calibri" pitchFamily="34" charset="0"/>
-                <a:ea typeface="Calibri" pitchFamily="34" charset="-122"/>
-                <a:cs typeface="Calibri" pitchFamily="34" charset="-120"/>
-              </a:rPr>
-              <a:t>[email@deloitte.com]</a:t>
-            </a:r>
-            <a:endParaRPr lang="en-US" sz="2800" dirty="0"/>
+              <a:buNone/>
+            </a:pPr>
+            <a:r>
+              <a:rPr lang="en-US" sz="1900" b="1" dirty="0">
+                <a:solidFill>
+                  <a:srgbClr val="000000"/>
+                </a:solidFill>
+                <a:latin typeface="Calibri" pitchFamily="34" charset="0"/>
+                <a:ea typeface="Calibri" pitchFamily="34" charset="-122"/>
+                <a:cs typeface="Calibri" pitchFamily="34" charset="-120"/>
+              </a:rPr>
+              <a:t>Upcoming Regulatory / Market Change With Greatest Expected Impact</a:t>
+            </a:r>
+            <a:endParaRPr lang="en-US" sz="1900" dirty="0"/>
           </a:p>
         </p:txBody>
       </p:sp>
       <p:sp>
         <p:nvSpPr>
-          <p:cNvPr id="5" name="Shape 3"/>
-          <p:cNvSpPr/>
+          <p:cNvPr id="3" name="Text 1"/>
+          <p:cNvSpPr txBox="1"/>
           <p:nvPr/>
         </p:nvSpPr>
         <p:spPr>
           <a:xfrm>
-            <a:off x="9372600" y="4215384"/>
-            <a:ext cx="2322576" cy="1728216"/>
+            <a:off x="502006" y="585216"/>
+            <a:ext cx="11188598" cy="713232"/>
           </a:xfrm>
           <a:prstGeom prst="rect">
             <a:avLst/>
           </a:prstGeom>
-          <a:solidFill>
-            <a:srgbClr val="0B1C14"/>
-          </a:solidFill>
-          <a:ln w="9525">
+          <a:noFill/>
+          <a:ln/>
+        </p:spPr>
+        <p:txBody>
+          <a:bodyPr wrap="square" lIns="0" tIns="0" rIns="0" bIns="0" rtlCol="0" anchor="t"/>
+          <a:lstStyle/>
+          <a:p>
+            <a:pPr algn="l" indent="0" marL="0">
+              <a:lnSpc>
+                <a:spcPct val="105000"/>
+              </a:lnSpc>
+              <a:buNone/>
+            </a:pPr>
+            <a:r>
+              <a:rPr lang="en-US" sz="1350" b="1" dirty="0">
+                <a:solidFill>
+                  <a:srgbClr val="046A38"/>
+                </a:solidFill>
+                <a:latin typeface="Calibri" pitchFamily="34" charset="0"/>
+                <a:ea typeface="Calibri" pitchFamily="34" charset="-122"/>
+                <a:cs typeface="Calibri" pitchFamily="34" charset="-120"/>
+              </a:rPr>
+              <a:t>Identity and authentication tops a close three-way race for the next big disruption.</a:t>
+            </a:r>
+            <a:endParaRPr lang="en-US" sz="1350" dirty="0"/>
+          </a:p>
+        </p:txBody>
+      </p:sp>
+      <p:sp>
+        <p:nvSpPr>
+          <p:cNvPr id="4" name="Shape 2"/>
+          <p:cNvSpPr/>
+          <p:nvPr/>
+        </p:nvSpPr>
+        <p:spPr>
+          <a:xfrm>
+            <a:off x="502006" y="1335024"/>
+            <a:ext cx="0" cy="512064"/>
+          </a:xfrm>
+          <a:prstGeom prst="line">
+            <a:avLst/>
+          </a:prstGeom>
+          <a:noFill/>
+          <a:ln w="25400">
             <a:solidFill>
-              <a:srgbClr val="86BC25"/>
+              <a:srgbClr val="D0D0CE"/>
             </a:solidFill>
             <a:prstDash val="solid"/>
           </a:ln>
@@ -19698,14 +21266,73 @@
       </p:sp>
       <p:sp>
         <p:nvSpPr>
+          <p:cNvPr id="5" name="Text 3"/>
+          <p:cNvSpPr txBox="1"/>
+          <p:nvPr/>
+        </p:nvSpPr>
+        <p:spPr>
+          <a:xfrm>
+            <a:off x="648310" y="1335024"/>
+            <a:ext cx="11042294" cy="512064"/>
+          </a:xfrm>
+          <a:prstGeom prst="rect">
+            <a:avLst/>
+          </a:prstGeom>
+          <a:noFill/>
+          <a:ln/>
+        </p:spPr>
+        <p:txBody>
+          <a:bodyPr wrap="square" lIns="0" tIns="0" rIns="0" bIns="0" rtlCol="0" anchor="t"/>
+          <a:lstStyle/>
+          <a:p>
+            <a:pPr algn="l" indent="0" marL="0">
+              <a:lnSpc>
+                <a:spcPct val="106000"/>
+              </a:lnSpc>
+              <a:buNone/>
+            </a:pPr>
+            <a:r>
+              <a:rPr lang="en-US" sz="900" b="1" dirty="0">
+                <a:solidFill>
+                  <a:srgbClr val="046A38"/>
+                </a:solidFill>
+                <a:latin typeface="IBM Plex Mono" pitchFamily="34" charset="0"/>
+                <a:ea typeface="IBM Plex Mono" pitchFamily="34" charset="-122"/>
+                <a:cs typeface="IBM Plex Mono" pitchFamily="34" charset="-120"/>
+              </a:rPr>
+              <a:t>Q11  </a:t>
+            </a:r>
+            <a:pPr algn="l" indent="0" marL="0">
+              <a:lnSpc>
+                <a:spcPct val="106000"/>
+              </a:lnSpc>
+              <a:buNone/>
+            </a:pPr>
+            <a:r>
+              <a:rPr lang="en-US" sz="1000" i="1" dirty="0">
+                <a:solidFill>
+                  <a:srgbClr val="575757"/>
+                </a:solidFill>
+                <a:latin typeface="Calibri" pitchFamily="34" charset="0"/>
+                <a:ea typeface="Calibri" pitchFamily="34" charset="-122"/>
+                <a:cs typeface="Calibri" pitchFamily="34" charset="-120"/>
+              </a:rPr>
+              <a:t>“Which upcoming regulatory or market changes is expected to have the greatest impact on your fraud program?”</a:t>
+            </a:r>
+            <a:endParaRPr lang="en-US" sz="1000" dirty="0"/>
+          </a:p>
+        </p:txBody>
+      </p:sp>
+      <p:sp>
+        <p:nvSpPr>
           <p:cNvPr id="6" name="Text 4"/>
           <p:cNvSpPr txBox="1"/>
           <p:nvPr/>
         </p:nvSpPr>
         <p:spPr>
           <a:xfrm>
-            <a:off x="9372600" y="4892040"/>
-            <a:ext cx="2322576" cy="365760"/>
+            <a:off x="11346790" y="6537960"/>
+            <a:ext cx="343814" cy="182880"/>
           </a:xfrm>
           <a:prstGeom prst="rect">
             <a:avLst/>
@@ -19717,34 +21344,390 @@
           <a:bodyPr wrap="square" rtlCol="0" anchor="ctr"/>
           <a:lstStyle/>
           <a:p>
-            <a:pPr algn="ctr" indent="0" marL="0">
-              <a:buNone/>
-            </a:pPr>
-            <a:r>
-              <a:rPr lang="en-US" sz="1600" b="1" dirty="0">
-                <a:solidFill>
-                  <a:srgbClr val="86BC25"/>
-                </a:solidFill>
-                <a:latin typeface="Calibri" pitchFamily="34" charset="0"/>
-                <a:ea typeface="Calibri" pitchFamily="34" charset="-122"/>
-                <a:cs typeface="Calibri" pitchFamily="34" charset="-120"/>
-              </a:rPr>
-              <a:t>D.FEND</a:t>
-            </a:r>
-            <a:endParaRPr lang="en-US" sz="1600" dirty="0"/>
+            <a:pPr algn="r" indent="0" marL="0">
+              <a:buNone/>
+            </a:pPr>
+            <a:r>
+              <a:rPr lang="en-US" sz="900" dirty="0">
+                <a:solidFill>
+                  <a:srgbClr val="53565A"/>
+                </a:solidFill>
+                <a:latin typeface="Calibri" pitchFamily="34" charset="0"/>
+                <a:ea typeface="Calibri" pitchFamily="34" charset="-122"/>
+                <a:cs typeface="Calibri" pitchFamily="34" charset="-120"/>
+              </a:rPr>
+              <a:t>27</a:t>
+            </a:r>
+            <a:endParaRPr lang="en-US" sz="900" dirty="0"/>
           </a:p>
         </p:txBody>
       </p:sp>
-      <p:sp>
-        <p:nvSpPr>
-          <p:cNvPr id="7" name="Text 5"/>
-          <p:cNvSpPr txBox="1"/>
+      <p:graphicFrame>
+        <p:nvGraphicFramePr>
+          <p:cNvPr id="7" name="Chart 0" descr=""/>
+          <p:cNvGraphicFramePr/>
+          <p:nvPr/>
+        </p:nvGraphicFramePr>
+        <p:xfrm>
+          <a:off x="502006" y="2011680"/>
+          <a:ext cx="11188598" cy="3063240"/>
+        </p:xfrm>
+        <a:graphic xmlns:a="http://schemas.openxmlformats.org/drawingml/2006/main">
+          <a:graphicData uri="http://schemas.openxmlformats.org/drawingml/2006/chart">
+            <c:chart xmlns:c="http://schemas.openxmlformats.org/drawingml/2006/chart" r:id="rId1"/>
+          </a:graphicData>
+        </a:graphic>
+      </p:graphicFrame>
+      <p:sp>
+        <p:nvSpPr>
+          <p:cNvPr id="8" name="Shape 5"/>
+          <p:cNvSpPr/>
           <p:nvPr/>
         </p:nvSpPr>
         <p:spPr>
           <a:xfrm>
-            <a:off x="9370771" y="6016752"/>
-            <a:ext cx="2322576" cy="365760"/>
+            <a:off x="502006" y="5202936"/>
+            <a:ext cx="11188598" cy="0"/>
+          </a:xfrm>
+          <a:prstGeom prst="line">
+            <a:avLst/>
+          </a:prstGeom>
+          <a:noFill/>
+          <a:ln w="9525">
+            <a:solidFill>
+              <a:srgbClr val="D0D0CE"/>
+            </a:solidFill>
+            <a:prstDash val="solid"/>
+          </a:ln>
+        </p:spPr>
+      </p:sp>
+      <p:sp>
+        <p:nvSpPr>
+          <p:cNvPr id="9" name="Text 6"/>
+          <p:cNvSpPr txBox="1"/>
+          <p:nvPr/>
+        </p:nvSpPr>
+        <p:spPr>
+          <a:xfrm>
+            <a:off x="502006" y="5276088"/>
+            <a:ext cx="11188598" cy="886968"/>
+          </a:xfrm>
+          <a:prstGeom prst="rect">
+            <a:avLst/>
+          </a:prstGeom>
+          <a:noFill/>
+          <a:ln/>
+        </p:spPr>
+        <p:txBody>
+          <a:bodyPr wrap="square" lIns="0" tIns="0" rIns="0" bIns="0" rtlCol="0" anchor="t"/>
+          <a:lstStyle/>
+          <a:p>
+            <a:pPr algn="l" indent="0" marL="0">
+              <a:lnSpc>
+                <a:spcPct val="118000"/>
+              </a:lnSpc>
+              <a:buNone/>
+            </a:pPr>
+            <a:r>
+              <a:rPr lang="en-US" sz="850" b="1" dirty="0">
+                <a:solidFill>
+                  <a:srgbClr val="53565A"/>
+                </a:solidFill>
+                <a:latin typeface="Calibri" pitchFamily="34" charset="0"/>
+                <a:ea typeface="Calibri" pitchFamily="34" charset="-122"/>
+                <a:cs typeface="Calibri" pitchFamily="34" charset="-120"/>
+              </a:rPr>
+              <a:t>Ranked top 3 — shown as % of respondents who placed the option anywhere in their top 3 (not mutually exclusive; bars don't sum to 100%).  </a:t>
+            </a:r>
+            <a:pPr algn="l" indent="0" marL="0">
+              <a:lnSpc>
+                <a:spcPct val="118000"/>
+              </a:lnSpc>
+              <a:buNone/>
+            </a:pPr>
+            <a:r>
+              <a:rPr lang="en-US" sz="850" b="1" dirty="0">
+                <a:solidFill>
+                  <a:srgbClr val="53565A"/>
+                </a:solidFill>
+                <a:latin typeface="Calibri" pitchFamily="34" charset="0"/>
+                <a:ea typeface="Calibri" pitchFamily="34" charset="-122"/>
+                <a:cs typeface="Calibri" pitchFamily="34" charset="-120"/>
+              </a:rPr>
+              <a:t>Response options as fielded: </a:t>
+            </a:r>
+            <a:pPr algn="l" indent="0" marL="0">
+              <a:lnSpc>
+                <a:spcPct val="118000"/>
+              </a:lnSpc>
+              <a:buNone/>
+            </a:pPr>
+            <a:r>
+              <a:rPr lang="en-US" sz="850" i="1" dirty="0">
+                <a:solidFill>
+                  <a:srgbClr val="53565A"/>
+                </a:solidFill>
+                <a:latin typeface="Calibri" pitchFamily="34" charset="0"/>
+                <a:ea typeface="Calibri" pitchFamily="34" charset="-122"/>
+                <a:cs typeface="Calibri" pitchFamily="34" charset="-120"/>
+              </a:rPr>
+              <a:t>“Payment innovation and adoption (e.g., real-time payments, stable coins, agentic payments)”</a:t>
+            </a:r>
+            <a:pPr algn="l" indent="0" marL="0">
+              <a:lnSpc>
+                <a:spcPct val="118000"/>
+              </a:lnSpc>
+              <a:buNone/>
+            </a:pPr>
+            <a:r>
+              <a:rPr lang="en-US" sz="850" dirty="0">
+                <a:solidFill>
+                  <a:srgbClr val="D0D0CE"/>
+                </a:solidFill>
+                <a:latin typeface="Calibri" pitchFamily="34" charset="0"/>
+                <a:ea typeface="Calibri" pitchFamily="34" charset="-122"/>
+                <a:cs typeface="Calibri" pitchFamily="34" charset="-120"/>
+              </a:rPr>
+              <a:t>  ·  </a:t>
+            </a:r>
+            <a:pPr algn="l" indent="0" marL="0">
+              <a:lnSpc>
+                <a:spcPct val="118000"/>
+              </a:lnSpc>
+              <a:buNone/>
+            </a:pPr>
+            <a:r>
+              <a:rPr lang="en-US" sz="850" i="1" dirty="0">
+                <a:solidFill>
+                  <a:srgbClr val="53565A"/>
+                </a:solidFill>
+                <a:latin typeface="Calibri" pitchFamily="34" charset="0"/>
+                <a:ea typeface="Calibri" pitchFamily="34" charset="-122"/>
+                <a:cs typeface="Calibri" pitchFamily="34" charset="-120"/>
+              </a:rPr>
+              <a:t>“Liability and reimbursement changes”</a:t>
+            </a:r>
+            <a:pPr algn="l" indent="0" marL="0">
+              <a:lnSpc>
+                <a:spcPct val="118000"/>
+              </a:lnSpc>
+              <a:buNone/>
+            </a:pPr>
+            <a:r>
+              <a:rPr lang="en-US" sz="850" dirty="0">
+                <a:solidFill>
+                  <a:srgbClr val="D0D0CE"/>
+                </a:solidFill>
+                <a:latin typeface="Calibri" pitchFamily="34" charset="0"/>
+                <a:ea typeface="Calibri" pitchFamily="34" charset="-122"/>
+                <a:cs typeface="Calibri" pitchFamily="34" charset="-120"/>
+              </a:rPr>
+              <a:t>  ·  </a:t>
+            </a:r>
+            <a:pPr algn="l" indent="0" marL="0">
+              <a:lnSpc>
+                <a:spcPct val="118000"/>
+              </a:lnSpc>
+              <a:buNone/>
+            </a:pPr>
+            <a:r>
+              <a:rPr lang="en-US" sz="850" i="1" dirty="0">
+                <a:solidFill>
+                  <a:srgbClr val="53565A"/>
+                </a:solidFill>
+                <a:latin typeface="Calibri" pitchFamily="34" charset="0"/>
+                <a:ea typeface="Calibri" pitchFamily="34" charset="-122"/>
+                <a:cs typeface="Calibri" pitchFamily="34" charset="-120"/>
+              </a:rPr>
+              <a:t>“Open Banking / Consumer-driven banking initiatives”</a:t>
+            </a:r>
+            <a:pPr algn="l" indent="0" marL="0">
+              <a:lnSpc>
+                <a:spcPct val="118000"/>
+              </a:lnSpc>
+              <a:buNone/>
+            </a:pPr>
+            <a:r>
+              <a:rPr lang="en-US" sz="850" dirty="0">
+                <a:solidFill>
+                  <a:srgbClr val="D0D0CE"/>
+                </a:solidFill>
+                <a:latin typeface="Calibri" pitchFamily="34" charset="0"/>
+                <a:ea typeface="Calibri" pitchFamily="34" charset="-122"/>
+                <a:cs typeface="Calibri" pitchFamily="34" charset="-120"/>
+              </a:rPr>
+              <a:t>  ·  </a:t>
+            </a:r>
+            <a:pPr algn="l" indent="0" marL="0">
+              <a:lnSpc>
+                <a:spcPct val="118000"/>
+              </a:lnSpc>
+              <a:buNone/>
+            </a:pPr>
+            <a:r>
+              <a:rPr lang="en-US" sz="850" i="1" dirty="0">
+                <a:solidFill>
+                  <a:srgbClr val="53565A"/>
+                </a:solidFill>
+                <a:latin typeface="Calibri" pitchFamily="34" charset="0"/>
+                <a:ea typeface="Calibri" pitchFamily="34" charset="-122"/>
+                <a:cs typeface="Calibri" pitchFamily="34" charset="-120"/>
+              </a:rPr>
+              <a:t>“AML related modernization initiatives”</a:t>
+            </a:r>
+            <a:pPr algn="l" indent="0" marL="0">
+              <a:lnSpc>
+                <a:spcPct val="118000"/>
+              </a:lnSpc>
+              <a:buNone/>
+            </a:pPr>
+            <a:r>
+              <a:rPr lang="en-US" sz="850" dirty="0">
+                <a:solidFill>
+                  <a:srgbClr val="D0D0CE"/>
+                </a:solidFill>
+                <a:latin typeface="Calibri" pitchFamily="34" charset="0"/>
+                <a:ea typeface="Calibri" pitchFamily="34" charset="-122"/>
+                <a:cs typeface="Calibri" pitchFamily="34" charset="-120"/>
+              </a:rPr>
+              <a:t>  ·  </a:t>
+            </a:r>
+            <a:pPr algn="l" indent="0" marL="0">
+              <a:lnSpc>
+                <a:spcPct val="118000"/>
+              </a:lnSpc>
+              <a:buNone/>
+            </a:pPr>
+            <a:r>
+              <a:rPr lang="en-US" sz="850" i="1" dirty="0">
+                <a:solidFill>
+                  <a:srgbClr val="53565A"/>
+                </a:solidFill>
+                <a:latin typeface="Calibri" pitchFamily="34" charset="0"/>
+                <a:ea typeface="Calibri" pitchFamily="34" charset="-122"/>
+                <a:cs typeface="Calibri" pitchFamily="34" charset="-120"/>
+              </a:rPr>
+              <a:t>“Privacy, data-sharing requirements, and AI governance requirements”</a:t>
+            </a:r>
+            <a:pPr algn="l" indent="0" marL="0">
+              <a:lnSpc>
+                <a:spcPct val="118000"/>
+              </a:lnSpc>
+              <a:buNone/>
+            </a:pPr>
+            <a:r>
+              <a:rPr lang="en-US" sz="850" dirty="0">
+                <a:solidFill>
+                  <a:srgbClr val="D0D0CE"/>
+                </a:solidFill>
+                <a:latin typeface="Calibri" pitchFamily="34" charset="0"/>
+                <a:ea typeface="Calibri" pitchFamily="34" charset="-122"/>
+                <a:cs typeface="Calibri" pitchFamily="34" charset="-120"/>
+              </a:rPr>
+              <a:t>  ·  </a:t>
+            </a:r>
+            <a:pPr algn="l" indent="0" marL="0">
+              <a:lnSpc>
+                <a:spcPct val="118000"/>
+              </a:lnSpc>
+              <a:buNone/>
+            </a:pPr>
+            <a:r>
+              <a:rPr lang="en-US" sz="850" i="1" dirty="0">
+                <a:solidFill>
+                  <a:srgbClr val="53565A"/>
+                </a:solidFill>
+                <a:latin typeface="Calibri" pitchFamily="34" charset="0"/>
+                <a:ea typeface="Calibri" pitchFamily="34" charset="-122"/>
+                <a:cs typeface="Calibri" pitchFamily="34" charset="-120"/>
+              </a:rPr>
+              <a:t>“Customer identity, authentication, and digital trust expectations”</a:t>
+            </a:r>
+            <a:endParaRPr lang="en-US" sz="850" dirty="0"/>
+          </a:p>
+        </p:txBody>
+      </p:sp>
+    </p:spTree>
+  </p:cSld>
+  <p:clrMapOvr>
+    <a:masterClrMapping/>
+  </p:clrMapOvr>
+</p:sld>
+</file>
+
+<file path=ppt/slides/slide29.xml><?xml version="1.0" encoding="utf-8"?>
+<p:sld xmlns:a="http://schemas.openxmlformats.org/drawingml/2006/main" xmlns:r="http://schemas.openxmlformats.org/officeDocument/2006/relationships" xmlns:p="http://schemas.openxmlformats.org/presentationml/2006/main">
+  <p:cSld name="Slide 29">
+    <p:bg>
+      <p:bgPr>
+        <a:solidFill>
+          <a:srgbClr val="86BC25"/>
+        </a:solidFill>
+      </p:bgPr>
+    </p:bg>
+    <p:spTree>
+      <p:nvGrpSpPr>
+        <p:cNvPr id="1" name=""/>
+        <p:cNvGrpSpPr/>
+        <p:nvPr/>
+      </p:nvGrpSpPr>
+      <p:grpSpPr>
+        <a:xfrm>
+          <a:off x="0" y="0"/>
+          <a:ext cx="0" cy="0"/>
+          <a:chOff x="0" y="0"/>
+          <a:chExt cx="0" cy="0"/>
+        </a:xfrm>
+      </p:grpSpPr>
+      <p:sp>
+        <p:nvSpPr>
+          <p:cNvPr id="2" name="Text 0"/>
+          <p:cNvSpPr txBox="1"/>
+          <p:nvPr/>
+        </p:nvSpPr>
+        <p:spPr>
+          <a:xfrm>
+            <a:off x="502920" y="1699870"/>
+            <a:ext cx="10415016" cy="1591970"/>
+          </a:xfrm>
+          <a:prstGeom prst="rect">
+            <a:avLst/>
+          </a:prstGeom>
+          <a:noFill/>
+          <a:ln/>
+        </p:spPr>
+        <p:txBody>
+          <a:bodyPr wrap="square" lIns="0" tIns="0" rIns="0" bIns="0" rtlCol="0" anchor="b"/>
+          <a:lstStyle/>
+          <a:p>
+            <a:pPr algn="l" indent="0" marL="0">
+              <a:buNone/>
+            </a:pPr>
+            <a:r>
+              <a:rPr lang="en-US" sz="3600" b="1" dirty="0">
+                <a:solidFill>
+                  <a:srgbClr val="FFFFFF"/>
+                </a:solidFill>
+                <a:latin typeface="Calibri" pitchFamily="34" charset="0"/>
+                <a:ea typeface="Calibri" pitchFamily="34" charset="-122"/>
+                <a:cs typeface="Calibri" pitchFamily="34" charset="-120"/>
+              </a:rPr>
+              <a:t>6. Looking Ahead Three Years</a:t>
+            </a:r>
+            <a:endParaRPr lang="en-US" sz="3600" dirty="0"/>
+          </a:p>
+        </p:txBody>
+      </p:sp>
+      <p:sp>
+        <p:nvSpPr>
+          <p:cNvPr id="3" name="Text 1"/>
+          <p:cNvSpPr txBox="1"/>
+          <p:nvPr/>
+        </p:nvSpPr>
+        <p:spPr>
+          <a:xfrm>
+            <a:off x="11346790" y="6537960"/>
+            <a:ext cx="343814" cy="182880"/>
           </a:xfrm>
           <a:prstGeom prst="rect">
             <a:avLst/>
@@ -19756,21 +21739,21 @@
           <a:bodyPr wrap="square" rtlCol="0" anchor="ctr"/>
           <a:lstStyle/>
           <a:p>
-            <a:pPr algn="ctr" indent="0" marL="0">
-              <a:buNone/>
-            </a:pPr>
-            <a:r>
-              <a:rPr lang="en-US" sz="1000" i="1" dirty="0">
-                <a:solidFill>
-                  <a:srgbClr val="D0D0CE"/>
-                </a:solidFill>
-                <a:latin typeface="Calibri" pitchFamily="34" charset="0"/>
-                <a:ea typeface="Calibri" pitchFamily="34" charset="-122"/>
-                <a:cs typeface="Calibri" pitchFamily="34" charset="-120"/>
-              </a:rPr>
-              <a:t>Fin Crime Forum</a:t>
-            </a:r>
-            <a:endParaRPr lang="en-US" sz="1000" dirty="0"/>
+            <a:pPr algn="r" indent="0" marL="0">
+              <a:buNone/>
+            </a:pPr>
+            <a:r>
+              <a:rPr lang="en-US" sz="900" dirty="0">
+                <a:solidFill>
+                  <a:srgbClr val="FFFFFF"/>
+                </a:solidFill>
+                <a:latin typeface="Calibri" pitchFamily="34" charset="0"/>
+                <a:ea typeface="Calibri" pitchFamily="34" charset="-122"/>
+                <a:cs typeface="Calibri" pitchFamily="34" charset="-120"/>
+              </a:rPr>
+              <a:t>28</a:t>
+            </a:r>
+            <a:endParaRPr lang="en-US" sz="900" dirty="0"/>
           </a:p>
         </p:txBody>
       </p:sp>
@@ -20456,6 +22439,1074 @@
           </a:graphicData>
         </a:graphic>
       </p:graphicFrame>
+    </p:spTree>
+  </p:cSld>
+  <p:clrMapOvr>
+    <a:masterClrMapping/>
+  </p:clrMapOvr>
+</p:sld>
+</file>
+
+<file path=ppt/slides/slide30.xml><?xml version="1.0" encoding="utf-8"?>
+<p:sld xmlns:a="http://schemas.openxmlformats.org/drawingml/2006/main" xmlns:r="http://schemas.openxmlformats.org/officeDocument/2006/relationships" xmlns:p="http://schemas.openxmlformats.org/presentationml/2006/main">
+  <p:cSld name="Slide 30">
+    <p:bg>
+      <p:bgPr>
+        <a:solidFill>
+          <a:srgbClr val="FFFFFF"/>
+        </a:solidFill>
+      </p:bgPr>
+    </p:bg>
+    <p:spTree>
+      <p:nvGrpSpPr>
+        <p:cNvPr id="1" name=""/>
+        <p:cNvGrpSpPr/>
+        <p:nvPr/>
+      </p:nvGrpSpPr>
+      <p:grpSpPr>
+        <a:xfrm>
+          <a:off x="0" y="0"/>
+          <a:ext cx="0" cy="0"/>
+          <a:chOff x="0" y="0"/>
+          <a:chExt cx="0" cy="0"/>
+        </a:xfrm>
+      </p:grpSpPr>
+      <p:sp>
+        <p:nvSpPr>
+          <p:cNvPr id="2" name="Text 0"/>
+          <p:cNvSpPr txBox="1"/>
+          <p:nvPr/>
+        </p:nvSpPr>
+        <p:spPr>
+          <a:xfrm>
+            <a:off x="502006" y="256032"/>
+            <a:ext cx="11188598" cy="310896"/>
+          </a:xfrm>
+          <a:prstGeom prst="rect">
+            <a:avLst/>
+          </a:prstGeom>
+          <a:noFill/>
+          <a:ln/>
+        </p:spPr>
+        <p:txBody>
+          <a:bodyPr wrap="square" lIns="0" tIns="0" rIns="0" bIns="0" rtlCol="0" anchor="t"/>
+          <a:lstStyle/>
+          <a:p>
+            <a:pPr algn="l" indent="0" marL="0">
+              <a:buNone/>
+            </a:pPr>
+            <a:r>
+              <a:rPr lang="en-US" sz="1900" b="1" dirty="0">
+                <a:solidFill>
+                  <a:srgbClr val="000000"/>
+                </a:solidFill>
+                <a:latin typeface="Calibri" pitchFamily="34" charset="0"/>
+                <a:ea typeface="Calibri" pitchFamily="34" charset="-122"/>
+                <a:cs typeface="Calibri" pitchFamily="34" charset="-120"/>
+              </a:rPr>
+              <a:t>What Leaders Say, Unprompted</a:t>
+            </a:r>
+            <a:endParaRPr lang="en-US" sz="1900" dirty="0"/>
+          </a:p>
+        </p:txBody>
+      </p:sp>
+      <p:sp>
+        <p:nvSpPr>
+          <p:cNvPr id="3" name="Text 1"/>
+          <p:cNvSpPr txBox="1"/>
+          <p:nvPr/>
+        </p:nvSpPr>
+        <p:spPr>
+          <a:xfrm>
+            <a:off x="502006" y="585216"/>
+            <a:ext cx="11188598" cy="713232"/>
+          </a:xfrm>
+          <a:prstGeom prst="rect">
+            <a:avLst/>
+          </a:prstGeom>
+          <a:noFill/>
+          <a:ln/>
+        </p:spPr>
+        <p:txBody>
+          <a:bodyPr wrap="square" lIns="0" tIns="0" rIns="0" bIns="0" rtlCol="0" anchor="t"/>
+          <a:lstStyle/>
+          <a:p>
+            <a:pPr algn="l" indent="0" marL="0">
+              <a:lnSpc>
+                <a:spcPct val="105000"/>
+              </a:lnSpc>
+              <a:buNone/>
+            </a:pPr>
+            <a:r>
+              <a:rPr lang="en-US" sz="1350" b="1" dirty="0">
+                <a:solidFill>
+                  <a:srgbClr val="046A38"/>
+                </a:solidFill>
+                <a:latin typeface="Calibri" pitchFamily="34" charset="0"/>
+                <a:ea typeface="Calibri" pitchFamily="34" charset="-122"/>
+                <a:cs typeface="Calibri" pitchFamily="34" charset="-120"/>
+              </a:rPr>
+              <a:t>Left to answer in their own words, leaders converge on the same trend.</a:t>
+            </a:r>
+            <a:endParaRPr lang="en-US" sz="1350" dirty="0"/>
+          </a:p>
+        </p:txBody>
+      </p:sp>
+      <p:sp>
+        <p:nvSpPr>
+          <p:cNvPr id="4" name="Shape 2"/>
+          <p:cNvSpPr/>
+          <p:nvPr/>
+        </p:nvSpPr>
+        <p:spPr>
+          <a:xfrm>
+            <a:off x="502006" y="1335024"/>
+            <a:ext cx="0" cy="512064"/>
+          </a:xfrm>
+          <a:prstGeom prst="line">
+            <a:avLst/>
+          </a:prstGeom>
+          <a:noFill/>
+          <a:ln w="25400">
+            <a:solidFill>
+              <a:srgbClr val="D0D0CE"/>
+            </a:solidFill>
+            <a:prstDash val="solid"/>
+          </a:ln>
+        </p:spPr>
+      </p:sp>
+      <p:sp>
+        <p:nvSpPr>
+          <p:cNvPr id="5" name="Text 3"/>
+          <p:cNvSpPr txBox="1"/>
+          <p:nvPr/>
+        </p:nvSpPr>
+        <p:spPr>
+          <a:xfrm>
+            <a:off x="648310" y="1335024"/>
+            <a:ext cx="11042294" cy="512064"/>
+          </a:xfrm>
+          <a:prstGeom prst="rect">
+            <a:avLst/>
+          </a:prstGeom>
+          <a:noFill/>
+          <a:ln/>
+        </p:spPr>
+        <p:txBody>
+          <a:bodyPr wrap="square" lIns="0" tIns="0" rIns="0" bIns="0" rtlCol="0" anchor="t"/>
+          <a:lstStyle/>
+          <a:p>
+            <a:pPr algn="l" indent="0" marL="0">
+              <a:lnSpc>
+                <a:spcPct val="106000"/>
+              </a:lnSpc>
+              <a:buNone/>
+            </a:pPr>
+            <a:r>
+              <a:rPr lang="en-US" sz="900" b="1" dirty="0">
+                <a:solidFill>
+                  <a:srgbClr val="046A38"/>
+                </a:solidFill>
+                <a:latin typeface="IBM Plex Mono" pitchFamily="34" charset="0"/>
+                <a:ea typeface="IBM Plex Mono" pitchFamily="34" charset="-122"/>
+                <a:cs typeface="IBM Plex Mono" pitchFamily="34" charset="-120"/>
+              </a:rPr>
+              <a:t>Q12  </a:t>
+            </a:r>
+            <a:pPr algn="l" indent="0" marL="0">
+              <a:lnSpc>
+                <a:spcPct val="106000"/>
+              </a:lnSpc>
+              <a:buNone/>
+            </a:pPr>
+            <a:r>
+              <a:rPr lang="en-US" sz="1000" i="1" dirty="0">
+                <a:solidFill>
+                  <a:srgbClr val="575757"/>
+                </a:solidFill>
+                <a:latin typeface="Calibri" pitchFamily="34" charset="0"/>
+                <a:ea typeface="Calibri" pitchFamily="34" charset="-122"/>
+                <a:cs typeface="Calibri" pitchFamily="34" charset="-120"/>
+              </a:rPr>
+              <a:t>“Looking ahead three years, what development do you believe will have the greatest impact on fraud risk management, and why? (open-ended)”</a:t>
+            </a:r>
+            <a:endParaRPr lang="en-US" sz="1000" dirty="0"/>
+          </a:p>
+        </p:txBody>
+      </p:sp>
+      <p:sp>
+        <p:nvSpPr>
+          <p:cNvPr id="6" name="Text 4"/>
+          <p:cNvSpPr txBox="1"/>
+          <p:nvPr/>
+        </p:nvSpPr>
+        <p:spPr>
+          <a:xfrm>
+            <a:off x="11346790" y="6537960"/>
+            <a:ext cx="343814" cy="182880"/>
+          </a:xfrm>
+          <a:prstGeom prst="rect">
+            <a:avLst/>
+          </a:prstGeom>
+          <a:noFill/>
+          <a:ln/>
+        </p:spPr>
+        <p:txBody>
+          <a:bodyPr wrap="square" rtlCol="0" anchor="ctr"/>
+          <a:lstStyle/>
+          <a:p>
+            <a:pPr algn="r" indent="0" marL="0">
+              <a:buNone/>
+            </a:pPr>
+            <a:r>
+              <a:rPr lang="en-US" sz="900" dirty="0">
+                <a:solidFill>
+                  <a:srgbClr val="53565A"/>
+                </a:solidFill>
+                <a:latin typeface="Calibri" pitchFamily="34" charset="0"/>
+                <a:ea typeface="Calibri" pitchFamily="34" charset="-122"/>
+                <a:cs typeface="Calibri" pitchFamily="34" charset="-120"/>
+              </a:rPr>
+              <a:t>29</a:t>
+            </a:r>
+            <a:endParaRPr lang="en-US" sz="900" dirty="0"/>
+          </a:p>
+        </p:txBody>
+      </p:sp>
+      <p:sp>
+        <p:nvSpPr>
+          <p:cNvPr id="7" name="Shape 5"/>
+          <p:cNvSpPr/>
+          <p:nvPr/>
+        </p:nvSpPr>
+        <p:spPr>
+          <a:xfrm>
+            <a:off x="502006" y="2011680"/>
+            <a:ext cx="11188598" cy="914400"/>
+          </a:xfrm>
+          <a:prstGeom prst="roundRect">
+            <a:avLst>
+              <a:gd name="adj" fmla="val 6000"/>
+            </a:avLst>
+          </a:prstGeom>
+          <a:solidFill>
+            <a:srgbClr val="F2F2F2"/>
+          </a:solidFill>
+          <a:ln/>
+        </p:spPr>
+      </p:sp>
+      <p:sp>
+        <p:nvSpPr>
+          <p:cNvPr id="8" name="Text 6"/>
+          <p:cNvSpPr txBox="1"/>
+          <p:nvPr/>
+        </p:nvSpPr>
+        <p:spPr>
+          <a:xfrm>
+            <a:off x="776326" y="2011680"/>
+            <a:ext cx="2011680" cy="914400"/>
+          </a:xfrm>
+          <a:prstGeom prst="rect">
+            <a:avLst/>
+          </a:prstGeom>
+          <a:noFill/>
+          <a:ln/>
+        </p:spPr>
+        <p:txBody>
+          <a:bodyPr wrap="square" rtlCol="0" anchor="ctr"/>
+          <a:lstStyle/>
+          <a:p>
+            <a:pPr indent="0" marL="0">
+              <a:buNone/>
+            </a:pPr>
+            <a:r>
+              <a:rPr lang="en-US" sz="3000" b="1" dirty="0">
+                <a:solidFill>
+                  <a:srgbClr val="046A38"/>
+                </a:solidFill>
+                <a:latin typeface="Calibri" pitchFamily="34" charset="0"/>
+                <a:ea typeface="Calibri" pitchFamily="34" charset="-122"/>
+                <a:cs typeface="Calibri" pitchFamily="34" charset="-120"/>
+              </a:rPr>
+              <a:t>100/100</a:t>
+            </a:r>
+            <a:endParaRPr lang="en-US" sz="3000" dirty="0"/>
+          </a:p>
+        </p:txBody>
+      </p:sp>
+      <p:sp>
+        <p:nvSpPr>
+          <p:cNvPr id="9" name="Text 7"/>
+          <p:cNvSpPr txBox="1"/>
+          <p:nvPr/>
+        </p:nvSpPr>
+        <p:spPr>
+          <a:xfrm>
+            <a:off x="2970886" y="2057400"/>
+            <a:ext cx="8445398" cy="822960"/>
+          </a:xfrm>
+          <a:prstGeom prst="rect">
+            <a:avLst/>
+          </a:prstGeom>
+          <a:noFill/>
+          <a:ln/>
+        </p:spPr>
+        <p:txBody>
+          <a:bodyPr wrap="square" rtlCol="0" anchor="ctr"/>
+          <a:lstStyle/>
+          <a:p>
+            <a:pPr indent="0" marL="0">
+              <a:lnSpc>
+                <a:spcPct val="110000"/>
+              </a:lnSpc>
+              <a:buNone/>
+            </a:pPr>
+            <a:r>
+              <a:rPr lang="en-US" sz="1150" dirty="0">
+                <a:solidFill>
+                  <a:srgbClr val="53565A"/>
+                </a:solidFill>
+                <a:latin typeface="Calibri" pitchFamily="34" charset="0"/>
+                <a:ea typeface="Calibri" pitchFamily="34" charset="-122"/>
+                <a:cs typeface="Calibri" pitchFamily="34" charset="-120"/>
+              </a:rPr>
+              <a:t>respondents answered in their own words — a full response rate on an open text field. The dominant unprompted theme: the convergence of GenAI, synthetic identity, and real-time payments — the same thread running through every closed-ended question above.</a:t>
+            </a:r>
+            <a:endParaRPr lang="en-US" sz="1150" dirty="0"/>
+          </a:p>
+        </p:txBody>
+      </p:sp>
+      <p:sp>
+        <p:nvSpPr>
+          <p:cNvPr id="10" name="Shape 8"/>
+          <p:cNvSpPr/>
+          <p:nvPr/>
+        </p:nvSpPr>
+        <p:spPr>
+          <a:xfrm>
+            <a:off x="502006" y="3154680"/>
+            <a:ext cx="5457139" cy="1600200"/>
+          </a:xfrm>
+          <a:prstGeom prst="roundRect">
+            <a:avLst>
+              <a:gd name="adj" fmla="val 2857"/>
+            </a:avLst>
+          </a:prstGeom>
+          <a:solidFill>
+            <a:srgbClr val="FFFFFF"/>
+          </a:solidFill>
+          <a:ln w="9525">
+            <a:solidFill>
+              <a:srgbClr val="D0D0CE"/>
+            </a:solidFill>
+            <a:prstDash val="solid"/>
+          </a:ln>
+        </p:spPr>
+      </p:sp>
+      <p:sp>
+        <p:nvSpPr>
+          <p:cNvPr id="11" name="Text 9"/>
+          <p:cNvSpPr txBox="1"/>
+          <p:nvPr/>
+        </p:nvSpPr>
+        <p:spPr>
+          <a:xfrm>
+            <a:off x="684886" y="3282696"/>
+            <a:ext cx="5091379" cy="1143000"/>
+          </a:xfrm>
+          <a:prstGeom prst="rect">
+            <a:avLst/>
+          </a:prstGeom>
+          <a:noFill/>
+          <a:ln/>
+        </p:spPr>
+        <p:txBody>
+          <a:bodyPr wrap="square" rtlCol="0" anchor="t"/>
+          <a:lstStyle/>
+          <a:p>
+            <a:pPr indent="0" marL="0">
+              <a:lnSpc>
+                <a:spcPct val="112000"/>
+              </a:lnSpc>
+              <a:buNone/>
+            </a:pPr>
+            <a:r>
+              <a:rPr lang="en-US" sz="1000" i="1" dirty="0">
+                <a:solidFill>
+                  <a:srgbClr val="000000"/>
+                </a:solidFill>
+                <a:latin typeface="Calibri" pitchFamily="34" charset="0"/>
+                <a:ea typeface="Calibri" pitchFamily="34" charset="-122"/>
+                <a:cs typeface="Calibri" pitchFamily="34" charset="-120"/>
+              </a:rPr>
+              <a:t>“The convergence of genAI, synthetic identities and real time digital identity verification. This will matter significantly because fraudsters will become AI-native, identity becomes the new battleground, fraud prevention will replace fraud detection, and the winners will use AI against AI.”</a:t>
+            </a:r>
+            <a:endParaRPr lang="en-US" sz="1000" dirty="0"/>
+          </a:p>
+        </p:txBody>
+      </p:sp>
+      <p:sp>
+        <p:nvSpPr>
+          <p:cNvPr id="12" name="Text 10"/>
+          <p:cNvSpPr txBox="1"/>
+          <p:nvPr/>
+        </p:nvSpPr>
+        <p:spPr>
+          <a:xfrm>
+            <a:off x="684886" y="4443984"/>
+            <a:ext cx="5091379" cy="256032"/>
+          </a:xfrm>
+          <a:prstGeom prst="rect">
+            <a:avLst/>
+          </a:prstGeom>
+          <a:noFill/>
+          <a:ln/>
+        </p:spPr>
+        <p:txBody>
+          <a:bodyPr wrap="square" rtlCol="0" anchor="ctr"/>
+          <a:lstStyle/>
+          <a:p>
+            <a:pPr indent="0" marL="0">
+              <a:buNone/>
+            </a:pPr>
+            <a:r>
+              <a:rPr lang="en-US" sz="900" dirty="0">
+                <a:solidFill>
+                  <a:srgbClr val="53565A"/>
+                </a:solidFill>
+                <a:latin typeface="IBM Plex Mono" pitchFamily="34" charset="0"/>
+                <a:ea typeface="IBM Plex Mono" pitchFamily="34" charset="-122"/>
+                <a:cs typeface="IBM Plex Mono" pitchFamily="34" charset="-120"/>
+              </a:rPr>
+              <a:t>Director · Insurance</a:t>
+            </a:r>
+            <a:endParaRPr lang="en-US" sz="900" dirty="0"/>
+          </a:p>
+        </p:txBody>
+      </p:sp>
+      <p:sp>
+        <p:nvSpPr>
+          <p:cNvPr id="13" name="Shape 11"/>
+          <p:cNvSpPr/>
+          <p:nvPr/>
+        </p:nvSpPr>
+        <p:spPr>
+          <a:xfrm>
+            <a:off x="6233465" y="3154680"/>
+            <a:ext cx="5457139" cy="1600200"/>
+          </a:xfrm>
+          <a:prstGeom prst="roundRect">
+            <a:avLst>
+              <a:gd name="adj" fmla="val 2857"/>
+            </a:avLst>
+          </a:prstGeom>
+          <a:solidFill>
+            <a:srgbClr val="FFFFFF"/>
+          </a:solidFill>
+          <a:ln w="9525">
+            <a:solidFill>
+              <a:srgbClr val="D0D0CE"/>
+            </a:solidFill>
+            <a:prstDash val="solid"/>
+          </a:ln>
+        </p:spPr>
+      </p:sp>
+      <p:sp>
+        <p:nvSpPr>
+          <p:cNvPr id="14" name="Text 12"/>
+          <p:cNvSpPr txBox="1"/>
+          <p:nvPr/>
+        </p:nvSpPr>
+        <p:spPr>
+          <a:xfrm>
+            <a:off x="6416345" y="3282696"/>
+            <a:ext cx="5091379" cy="1143000"/>
+          </a:xfrm>
+          <a:prstGeom prst="rect">
+            <a:avLst/>
+          </a:prstGeom>
+          <a:noFill/>
+          <a:ln/>
+        </p:spPr>
+        <p:txBody>
+          <a:bodyPr wrap="square" rtlCol="0" anchor="t"/>
+          <a:lstStyle/>
+          <a:p>
+            <a:pPr indent="0" marL="0">
+              <a:lnSpc>
+                <a:spcPct val="112000"/>
+              </a:lnSpc>
+              <a:buNone/>
+            </a:pPr>
+            <a:r>
+              <a:rPr lang="en-US" sz="1000" i="1" dirty="0">
+                <a:solidFill>
+                  <a:srgbClr val="000000"/>
+                </a:solidFill>
+                <a:latin typeface="Calibri" pitchFamily="34" charset="0"/>
+                <a:ea typeface="Calibri" pitchFamily="34" charset="-122"/>
+                <a:cs typeface="Calibri" pitchFamily="34" charset="-120"/>
+              </a:rPr>
+              <a:t>“The biggest development will be the convergence of GenAI, synthetic identity, and real-time payments. Fraud will become faster, more personalized, and harder to distinguish from legitimate customer behaviour.”</a:t>
+            </a:r>
+            <a:endParaRPr lang="en-US" sz="1000" dirty="0"/>
+          </a:p>
+        </p:txBody>
+      </p:sp>
+      <p:sp>
+        <p:nvSpPr>
+          <p:cNvPr id="15" name="Text 13"/>
+          <p:cNvSpPr txBox="1"/>
+          <p:nvPr/>
+        </p:nvSpPr>
+        <p:spPr>
+          <a:xfrm>
+            <a:off x="6416345" y="4443984"/>
+            <a:ext cx="5091379" cy="256032"/>
+          </a:xfrm>
+          <a:prstGeom prst="rect">
+            <a:avLst/>
+          </a:prstGeom>
+          <a:noFill/>
+          <a:ln/>
+        </p:spPr>
+        <p:txBody>
+          <a:bodyPr wrap="square" rtlCol="0" anchor="ctr"/>
+          <a:lstStyle/>
+          <a:p>
+            <a:pPr indent="0" marL="0">
+              <a:buNone/>
+            </a:pPr>
+            <a:r>
+              <a:rPr lang="en-US" sz="900" dirty="0">
+                <a:solidFill>
+                  <a:srgbClr val="53565A"/>
+                </a:solidFill>
+                <a:latin typeface="IBM Plex Mono" pitchFamily="34" charset="0"/>
+                <a:ea typeface="IBM Plex Mono" pitchFamily="34" charset="-122"/>
+                <a:cs typeface="IBM Plex Mono" pitchFamily="34" charset="-120"/>
+              </a:rPr>
+              <a:t>C-level · Banking</a:t>
+            </a:r>
+            <a:endParaRPr lang="en-US" sz="900" dirty="0"/>
+          </a:p>
+        </p:txBody>
+      </p:sp>
+      <p:sp>
+        <p:nvSpPr>
+          <p:cNvPr id="16" name="Shape 14"/>
+          <p:cNvSpPr/>
+          <p:nvPr/>
+        </p:nvSpPr>
+        <p:spPr>
+          <a:xfrm>
+            <a:off x="502006" y="4937760"/>
+            <a:ext cx="5457139" cy="1600200"/>
+          </a:xfrm>
+          <a:prstGeom prst="roundRect">
+            <a:avLst>
+              <a:gd name="adj" fmla="val 2857"/>
+            </a:avLst>
+          </a:prstGeom>
+          <a:solidFill>
+            <a:srgbClr val="FFFFFF"/>
+          </a:solidFill>
+          <a:ln w="9525">
+            <a:solidFill>
+              <a:srgbClr val="D0D0CE"/>
+            </a:solidFill>
+            <a:prstDash val="solid"/>
+          </a:ln>
+        </p:spPr>
+      </p:sp>
+      <p:sp>
+        <p:nvSpPr>
+          <p:cNvPr id="17" name="Text 15"/>
+          <p:cNvSpPr txBox="1"/>
+          <p:nvPr/>
+        </p:nvSpPr>
+        <p:spPr>
+          <a:xfrm>
+            <a:off x="684886" y="5065776"/>
+            <a:ext cx="5091379" cy="1143000"/>
+          </a:xfrm>
+          <a:prstGeom prst="rect">
+            <a:avLst/>
+          </a:prstGeom>
+          <a:noFill/>
+          <a:ln/>
+        </p:spPr>
+        <p:txBody>
+          <a:bodyPr wrap="square" rtlCol="0" anchor="t"/>
+          <a:lstStyle/>
+          <a:p>
+            <a:pPr indent="0" marL="0">
+              <a:lnSpc>
+                <a:spcPct val="112000"/>
+              </a:lnSpc>
+              <a:buNone/>
+            </a:pPr>
+            <a:r>
+              <a:rPr lang="en-US" sz="1000" i="1" dirty="0">
+                <a:solidFill>
+                  <a:srgbClr val="000000"/>
+                </a:solidFill>
+                <a:latin typeface="Calibri" pitchFamily="34" charset="0"/>
+                <a:ea typeface="Calibri" pitchFamily="34" charset="-122"/>
+                <a:cs typeface="Calibri" pitchFamily="34" charset="-120"/>
+              </a:rPr>
+              <a:t>“Companies are moving away from regular passwords towards decentralized digital credentials and biometric passkeys, as this would minimize phishing and account hacking.”</a:t>
+            </a:r>
+            <a:endParaRPr lang="en-US" sz="1000" dirty="0"/>
+          </a:p>
+        </p:txBody>
+      </p:sp>
+      <p:sp>
+        <p:nvSpPr>
+          <p:cNvPr id="18" name="Text 16"/>
+          <p:cNvSpPr txBox="1"/>
+          <p:nvPr/>
+        </p:nvSpPr>
+        <p:spPr>
+          <a:xfrm>
+            <a:off x="684886" y="6227064"/>
+            <a:ext cx="5091379" cy="256032"/>
+          </a:xfrm>
+          <a:prstGeom prst="rect">
+            <a:avLst/>
+          </a:prstGeom>
+          <a:noFill/>
+          <a:ln/>
+        </p:spPr>
+        <p:txBody>
+          <a:bodyPr wrap="square" rtlCol="0" anchor="ctr"/>
+          <a:lstStyle/>
+          <a:p>
+            <a:pPr indent="0" marL="0">
+              <a:buNone/>
+            </a:pPr>
+            <a:r>
+              <a:rPr lang="en-US" sz="900" dirty="0">
+                <a:solidFill>
+                  <a:srgbClr val="53565A"/>
+                </a:solidFill>
+                <a:latin typeface="IBM Plex Mono" pitchFamily="34" charset="0"/>
+                <a:ea typeface="IBM Plex Mono" pitchFamily="34" charset="-122"/>
+                <a:cs typeface="IBM Plex Mono" pitchFamily="34" charset="-120"/>
+              </a:rPr>
+              <a:t>Senior Manager · Banking</a:t>
+            </a:r>
+            <a:endParaRPr lang="en-US" sz="900" dirty="0"/>
+          </a:p>
+        </p:txBody>
+      </p:sp>
+      <p:sp>
+        <p:nvSpPr>
+          <p:cNvPr id="19" name="Shape 17"/>
+          <p:cNvSpPr/>
+          <p:nvPr/>
+        </p:nvSpPr>
+        <p:spPr>
+          <a:xfrm>
+            <a:off x="6233465" y="4937760"/>
+            <a:ext cx="5457139" cy="1600200"/>
+          </a:xfrm>
+          <a:prstGeom prst="roundRect">
+            <a:avLst>
+              <a:gd name="adj" fmla="val 2857"/>
+            </a:avLst>
+          </a:prstGeom>
+          <a:solidFill>
+            <a:srgbClr val="FFFFFF"/>
+          </a:solidFill>
+          <a:ln w="9525">
+            <a:solidFill>
+              <a:srgbClr val="D0D0CE"/>
+            </a:solidFill>
+            <a:prstDash val="solid"/>
+          </a:ln>
+        </p:spPr>
+      </p:sp>
+      <p:sp>
+        <p:nvSpPr>
+          <p:cNvPr id="20" name="Text 18"/>
+          <p:cNvSpPr txBox="1"/>
+          <p:nvPr/>
+        </p:nvSpPr>
+        <p:spPr>
+          <a:xfrm>
+            <a:off x="6416345" y="5065776"/>
+            <a:ext cx="5091379" cy="1143000"/>
+          </a:xfrm>
+          <a:prstGeom prst="rect">
+            <a:avLst/>
+          </a:prstGeom>
+          <a:noFill/>
+          <a:ln/>
+        </p:spPr>
+        <p:txBody>
+          <a:bodyPr wrap="square" rtlCol="0" anchor="t"/>
+          <a:lstStyle/>
+          <a:p>
+            <a:pPr indent="0" marL="0">
+              <a:lnSpc>
+                <a:spcPct val="112000"/>
+              </a:lnSpc>
+              <a:buNone/>
+            </a:pPr>
+            <a:r>
+              <a:rPr lang="en-US" sz="1000" i="1" dirty="0">
+                <a:solidFill>
+                  <a:srgbClr val="000000"/>
+                </a:solidFill>
+                <a:latin typeface="Calibri" pitchFamily="34" charset="0"/>
+                <a:ea typeface="Calibri" pitchFamily="34" charset="-122"/>
+                <a:cs typeface="Calibri" pitchFamily="34" charset="-120"/>
+              </a:rPr>
+              <a:t>“AI will shift fraud management from reactive investigation toward more predictive prevention, which should help us identify risks before losses occur.”</a:t>
+            </a:r>
+            <a:endParaRPr lang="en-US" sz="1000" dirty="0"/>
+          </a:p>
+        </p:txBody>
+      </p:sp>
+      <p:sp>
+        <p:nvSpPr>
+          <p:cNvPr id="21" name="Text 19"/>
+          <p:cNvSpPr txBox="1"/>
+          <p:nvPr/>
+        </p:nvSpPr>
+        <p:spPr>
+          <a:xfrm>
+            <a:off x="6416345" y="6227064"/>
+            <a:ext cx="5091379" cy="256032"/>
+          </a:xfrm>
+          <a:prstGeom prst="rect">
+            <a:avLst/>
+          </a:prstGeom>
+          <a:noFill/>
+          <a:ln/>
+        </p:spPr>
+        <p:txBody>
+          <a:bodyPr wrap="square" rtlCol="0" anchor="ctr"/>
+          <a:lstStyle/>
+          <a:p>
+            <a:pPr indent="0" marL="0">
+              <a:buNone/>
+            </a:pPr>
+            <a:r>
+              <a:rPr lang="en-US" sz="900" dirty="0">
+                <a:solidFill>
+                  <a:srgbClr val="53565A"/>
+                </a:solidFill>
+                <a:latin typeface="IBM Plex Mono" pitchFamily="34" charset="0"/>
+                <a:ea typeface="IBM Plex Mono" pitchFamily="34" charset="-122"/>
+                <a:cs typeface="IBM Plex Mono" pitchFamily="34" charset="-120"/>
+              </a:rPr>
+              <a:t>VP · Banking</a:t>
+            </a:r>
+            <a:endParaRPr lang="en-US" sz="900" dirty="0"/>
+          </a:p>
+        </p:txBody>
+      </p:sp>
+    </p:spTree>
+  </p:cSld>
+  <p:clrMapOvr>
+    <a:masterClrMapping/>
+  </p:clrMapOvr>
+</p:sld>
+</file>
+
+<file path=ppt/slides/slide31.xml><?xml version="1.0" encoding="utf-8"?>
+<p:sld xmlns:a="http://schemas.openxmlformats.org/drawingml/2006/main" xmlns:r="http://schemas.openxmlformats.org/officeDocument/2006/relationships" xmlns:p="http://schemas.openxmlformats.org/presentationml/2006/main">
+  <p:cSld name="Slide 31">
+    <p:bg>
+      <p:bgPr>
+        <a:solidFill>
+          <a:srgbClr val="050607"/>
+        </a:solidFill>
+      </p:bgPr>
+    </p:bg>
+    <p:spTree>
+      <p:nvGrpSpPr>
+        <p:cNvPr id="1" name=""/>
+        <p:cNvGrpSpPr/>
+        <p:nvPr/>
+      </p:nvGrpSpPr>
+      <p:grpSpPr>
+        <a:xfrm>
+          <a:off x="0" y="0"/>
+          <a:ext cx="0" cy="0"/>
+          <a:chOff x="0" y="0"/>
+          <a:chExt cx="0" cy="0"/>
+        </a:xfrm>
+      </p:grpSpPr>
+      <p:sp>
+        <p:nvSpPr>
+          <p:cNvPr id="2" name="Text 0"/>
+          <p:cNvSpPr txBox="1"/>
+          <p:nvPr/>
+        </p:nvSpPr>
+        <p:spPr>
+          <a:xfrm>
+            <a:off x="502006" y="457200"/>
+            <a:ext cx="1417320" cy="274320"/>
+          </a:xfrm>
+          <a:prstGeom prst="rect">
+            <a:avLst/>
+          </a:prstGeom>
+          <a:noFill/>
+          <a:ln/>
+        </p:spPr>
+        <p:txBody>
+          <a:bodyPr wrap="square" lIns="0" tIns="0" rIns="0" bIns="0" rtlCol="0" anchor="ctr"/>
+          <a:lstStyle/>
+          <a:p>
+            <a:pPr algn="l" indent="0" marL="0">
+              <a:buNone/>
+            </a:pPr>
+            <a:r>
+              <a:rPr lang="en-US" sz="1600" b="1" dirty="0">
+                <a:solidFill>
+                  <a:srgbClr val="FFFFFF"/>
+                </a:solidFill>
+                <a:latin typeface="Calibri" pitchFamily="34" charset="0"/>
+                <a:ea typeface="Calibri" pitchFamily="34" charset="-122"/>
+                <a:cs typeface="Calibri" pitchFamily="34" charset="-120"/>
+              </a:rPr>
+              <a:t>Deloitte</a:t>
+            </a:r>
+            <a:endParaRPr lang="en-US" sz="1600" dirty="0"/>
+          </a:p>
+        </p:txBody>
+      </p:sp>
+      <p:sp>
+        <p:nvSpPr>
+          <p:cNvPr id="3" name="Shape 1"/>
+          <p:cNvSpPr/>
+          <p:nvPr/>
+        </p:nvSpPr>
+        <p:spPr>
+          <a:xfrm>
+            <a:off x="1800454" y="598932"/>
+            <a:ext cx="82296" cy="82296"/>
+          </a:xfrm>
+          <a:prstGeom prst="ellipse">
+            <a:avLst/>
+          </a:prstGeom>
+          <a:solidFill>
+            <a:srgbClr val="86BC25"/>
+          </a:solidFill>
+          <a:ln/>
+        </p:spPr>
+      </p:sp>
+      <p:sp>
+        <p:nvSpPr>
+          <p:cNvPr id="4" name="Text 2"/>
+          <p:cNvSpPr txBox="1"/>
+          <p:nvPr/>
+        </p:nvSpPr>
+        <p:spPr>
+          <a:xfrm>
+            <a:off x="502006" y="4215384"/>
+            <a:ext cx="8531352" cy="2167128"/>
+          </a:xfrm>
+          <a:prstGeom prst="rect">
+            <a:avLst/>
+          </a:prstGeom>
+          <a:noFill/>
+          <a:ln/>
+        </p:spPr>
+        <p:txBody>
+          <a:bodyPr wrap="square" lIns="0" tIns="0" rIns="0" bIns="0" rtlCol="0" anchor="t"/>
+          <a:lstStyle/>
+          <a:p>
+            <a:pPr algn="l" indent="0" marL="0">
+              <a:lnSpc>
+                <a:spcPct val="120000"/>
+              </a:lnSpc>
+              <a:buNone/>
+            </a:pPr>
+            <a:r>
+              <a:rPr lang="en-US" sz="2800" b="1" dirty="0">
+                <a:solidFill>
+                  <a:srgbClr val="FFFFFF"/>
+                </a:solidFill>
+                <a:latin typeface="Calibri" pitchFamily="34" charset="0"/>
+                <a:ea typeface="Calibri" pitchFamily="34" charset="-122"/>
+                <a:cs typeface="Calibri" pitchFamily="34" charset="-120"/>
+              </a:rPr>
+              <a:t>Thank you
+</a:t>
+            </a:r>
+            <a:endParaRPr lang="en-US" sz="2800" dirty="0"/>
+          </a:p>
+          <a:p>
+            <a:pPr algn="l" indent="0" marL="0">
+              <a:lnSpc>
+                <a:spcPct val="120000"/>
+              </a:lnSpc>
+              <a:buNone/>
+            </a:pPr>
+            <a:r>
+              <a:rPr lang="en-US" sz="1600" b="1" dirty="0">
+                <a:solidFill>
+                  <a:srgbClr val="86BC25"/>
+                </a:solidFill>
+                <a:latin typeface="Calibri" pitchFamily="34" charset="0"/>
+                <a:ea typeface="Calibri" pitchFamily="34" charset="-122"/>
+                <a:cs typeface="Calibri" pitchFamily="34" charset="-120"/>
+              </a:rPr>
+              <a:t>[Presenter Name]
+</a:t>
+            </a:r>
+            <a:endParaRPr lang="en-US" sz="2800" dirty="0"/>
+          </a:p>
+          <a:p>
+            <a:pPr algn="l" indent="0" marL="0">
+              <a:lnSpc>
+                <a:spcPct val="120000"/>
+              </a:lnSpc>
+              <a:buNone/>
+            </a:pPr>
+            <a:r>
+              <a:rPr lang="en-US" sz="1300" dirty="0">
+                <a:solidFill>
+                  <a:srgbClr val="FFFFFF"/>
+                </a:solidFill>
+                <a:latin typeface="Calibri" pitchFamily="34" charset="0"/>
+                <a:ea typeface="Calibri" pitchFamily="34" charset="-122"/>
+                <a:cs typeface="Calibri" pitchFamily="34" charset="-120"/>
+              </a:rPr>
+              <a:t>[Title | Practice]
+</a:t>
+            </a:r>
+            <a:endParaRPr lang="en-US" sz="2800" dirty="0"/>
+          </a:p>
+          <a:p>
+            <a:pPr algn="l" indent="0" marL="0">
+              <a:lnSpc>
+                <a:spcPct val="120000"/>
+              </a:lnSpc>
+              <a:buNone/>
+            </a:pPr>
+            <a:r>
+              <a:rPr lang="en-US" sz="1300" dirty="0">
+                <a:solidFill>
+                  <a:srgbClr val="D0D0CE"/>
+                </a:solidFill>
+                <a:latin typeface="Calibri" pitchFamily="34" charset="0"/>
+                <a:ea typeface="Calibri" pitchFamily="34" charset="-122"/>
+                <a:cs typeface="Calibri" pitchFamily="34" charset="-120"/>
+              </a:rPr>
+              <a:t>[email@deloitte.com]</a:t>
+            </a:r>
+            <a:endParaRPr lang="en-US" sz="2800" dirty="0"/>
+          </a:p>
+        </p:txBody>
+      </p:sp>
+      <p:sp>
+        <p:nvSpPr>
+          <p:cNvPr id="5" name="Shape 3"/>
+          <p:cNvSpPr/>
+          <p:nvPr/>
+        </p:nvSpPr>
+        <p:spPr>
+          <a:xfrm>
+            <a:off x="9372600" y="4215384"/>
+            <a:ext cx="2322576" cy="1728216"/>
+          </a:xfrm>
+          <a:prstGeom prst="rect">
+            <a:avLst/>
+          </a:prstGeom>
+          <a:solidFill>
+            <a:srgbClr val="0B1C14"/>
+          </a:solidFill>
+          <a:ln w="9525">
+            <a:solidFill>
+              <a:srgbClr val="86BC25"/>
+            </a:solidFill>
+            <a:prstDash val="solid"/>
+          </a:ln>
+        </p:spPr>
+      </p:sp>
+      <p:sp>
+        <p:nvSpPr>
+          <p:cNvPr id="6" name="Text 4"/>
+          <p:cNvSpPr txBox="1"/>
+          <p:nvPr/>
+        </p:nvSpPr>
+        <p:spPr>
+          <a:xfrm>
+            <a:off x="9372600" y="4892040"/>
+            <a:ext cx="2322576" cy="365760"/>
+          </a:xfrm>
+          <a:prstGeom prst="rect">
+            <a:avLst/>
+          </a:prstGeom>
+          <a:noFill/>
+          <a:ln/>
+        </p:spPr>
+        <p:txBody>
+          <a:bodyPr wrap="square" rtlCol="0" anchor="ctr"/>
+          <a:lstStyle/>
+          <a:p>
+            <a:pPr algn="ctr" indent="0" marL="0">
+              <a:buNone/>
+            </a:pPr>
+            <a:r>
+              <a:rPr lang="en-US" sz="1600" b="1" dirty="0">
+                <a:solidFill>
+                  <a:srgbClr val="86BC25"/>
+                </a:solidFill>
+                <a:latin typeface="Calibri" pitchFamily="34" charset="0"/>
+                <a:ea typeface="Calibri" pitchFamily="34" charset="-122"/>
+                <a:cs typeface="Calibri" pitchFamily="34" charset="-120"/>
+              </a:rPr>
+              <a:t>D.FEND</a:t>
+            </a:r>
+            <a:endParaRPr lang="en-US" sz="1600" dirty="0"/>
+          </a:p>
+        </p:txBody>
+      </p:sp>
+      <p:sp>
+        <p:nvSpPr>
+          <p:cNvPr id="7" name="Text 5"/>
+          <p:cNvSpPr txBox="1"/>
+          <p:nvPr/>
+        </p:nvSpPr>
+        <p:spPr>
+          <a:xfrm>
+            <a:off x="9370771" y="6016752"/>
+            <a:ext cx="2322576" cy="365760"/>
+          </a:xfrm>
+          <a:prstGeom prst="rect">
+            <a:avLst/>
+          </a:prstGeom>
+          <a:noFill/>
+          <a:ln/>
+        </p:spPr>
+        <p:txBody>
+          <a:bodyPr wrap="square" rtlCol="0" anchor="ctr"/>
+          <a:lstStyle/>
+          <a:p>
+            <a:pPr algn="ctr" indent="0" marL="0">
+              <a:buNone/>
+            </a:pPr>
+            <a:r>
+              <a:rPr lang="en-US" sz="1000" i="1" dirty="0">
+                <a:solidFill>
+                  <a:srgbClr val="D0D0CE"/>
+                </a:solidFill>
+                <a:latin typeface="Calibri" pitchFamily="34" charset="0"/>
+                <a:ea typeface="Calibri" pitchFamily="34" charset="-122"/>
+                <a:cs typeface="Calibri" pitchFamily="34" charset="-120"/>
+              </a:rPr>
+              <a:t>Fin Crime Forum</a:t>
+            </a:r>
+            <a:endParaRPr lang="en-US" sz="1000" dirty="0"/>
+          </a:p>
+        </p:txBody>
+      </p:sp>
     </p:spTree>
   </p:cSld>
   <p:clrMapOvr>

--- a/Fraud in 2026 - Full Results.pptx
+++ b/Fraud in 2026 - Full Results.pptx
@@ -8571,25 +8571,25 @@
                     <c:v>Staff awareness &amp; training — Banking (49%)</c:v>
                   </c:pt>
                   <c:pt idx="1">
-                    <c:v>Staff awareness &amp; training — Insurance (US &amp; Canada only, 56%)</c:v>
+                    <c:v>Staff awareness &amp; training — Insurance (64%)</c:v>
                   </c:pt>
                   <c:pt idx="2">
                     <c:v>ID verification / prevention — Banking (51%)</c:v>
                   </c:pt>
                   <c:pt idx="3">
-                    <c:v>ID verification / prevention — Insurance (US &amp; Canada only, 44%)</c:v>
+                    <c:v>ID verification / prevention — Insurance (48%)</c:v>
                   </c:pt>
                   <c:pt idx="4">
                     <c:v>Fraud detection technology — Banking (48%)</c:v>
                   </c:pt>
                   <c:pt idx="5">
-                    <c:v>Fraud detection technology — Insurance (US &amp; Canada only, 36%)</c:v>
+                    <c:v>Fraud detection technology — Insurance (40%)</c:v>
                   </c:pt>
                   <c:pt idx="6">
                     <c:v>3rd-party intel / consortium — Banking (43%)</c:v>
                   </c:pt>
                   <c:pt idx="7">
-                    <c:v>3rd-party intel / consortium — Insurance (US &amp; Canada only, 40%)</c:v>
+                    <c:v>3rd-party intel / consortium — Insurance (44%)</c:v>
                   </c:pt>
                 </c:lvl>
               </c:multiLvlStrCache>
@@ -8685,25 +8685,25 @@
                     <c:v>Staff awareness &amp; training — Banking (49%)</c:v>
                   </c:pt>
                   <c:pt idx="1">
-                    <c:v>Staff awareness &amp; training — Insurance (US &amp; Canada only, 56%)</c:v>
+                    <c:v>Staff awareness &amp; training — Insurance (64%)</c:v>
                   </c:pt>
                   <c:pt idx="2">
                     <c:v>ID verification / prevention — Banking (51%)</c:v>
                   </c:pt>
                   <c:pt idx="3">
-                    <c:v>ID verification / prevention — Insurance (US &amp; Canada only, 44%)</c:v>
+                    <c:v>ID verification / prevention — Insurance (48%)</c:v>
                   </c:pt>
                   <c:pt idx="4">
                     <c:v>Fraud detection technology — Banking (48%)</c:v>
                   </c:pt>
                   <c:pt idx="5">
-                    <c:v>Fraud detection technology — Insurance (US &amp; Canada only, 36%)</c:v>
+                    <c:v>Fraud detection technology — Insurance (40%)</c:v>
                   </c:pt>
                   <c:pt idx="6">
                     <c:v>3rd-party intel / consortium — Banking (43%)</c:v>
                   </c:pt>
                   <c:pt idx="7">
-                    <c:v>3rd-party intel / consortium — Insurance (US &amp; Canada only, 40%)</c:v>
+                    <c:v>3rd-party intel / consortium — Insurance (44%)</c:v>
                   </c:pt>
                 </c:lvl>
               </c:multiLvlStrCache>
@@ -8799,25 +8799,25 @@
                     <c:v>Staff awareness &amp; training — Banking (49%)</c:v>
                   </c:pt>
                   <c:pt idx="1">
-                    <c:v>Staff awareness &amp; training — Insurance (US &amp; Canada only, 56%)</c:v>
+                    <c:v>Staff awareness &amp; training — Insurance (64%)</c:v>
                   </c:pt>
                   <c:pt idx="2">
                     <c:v>ID verification / prevention — Banking (51%)</c:v>
                   </c:pt>
                   <c:pt idx="3">
-                    <c:v>ID verification / prevention — Insurance (US &amp; Canada only, 44%)</c:v>
+                    <c:v>ID verification / prevention — Insurance (48%)</c:v>
                   </c:pt>
                   <c:pt idx="4">
                     <c:v>Fraud detection technology — Banking (48%)</c:v>
                   </c:pt>
                   <c:pt idx="5">
-                    <c:v>Fraud detection technology — Insurance (US &amp; Canada only, 36%)</c:v>
+                    <c:v>Fraud detection technology — Insurance (40%)</c:v>
                   </c:pt>
                   <c:pt idx="6">
                     <c:v>3rd-party intel / consortium — Banking (43%)</c:v>
                   </c:pt>
                   <c:pt idx="7">
-                    <c:v>3rd-party intel / consortium — Insurance (US &amp; Canada only, 40%)</c:v>
+                    <c:v>3rd-party intel / consortium — Insurance (44%)</c:v>
                   </c:pt>
                 </c:lvl>
               </c:multiLvlStrCache>
@@ -8833,13 +8833,13 @@
                   <c:v>5</c:v>
                 </c:pt>
                 <c:pt idx="1">
-                  <c:v>0</c:v>
+                  <c:v>4</c:v>
                 </c:pt>
                 <c:pt idx="2">
                   <c:v>8</c:v>
                 </c:pt>
                 <c:pt idx="3">
-                  <c:v>0</c:v>
+                  <c:v>4</c:v>
                 </c:pt>
                 <c:pt idx="4">
                   <c:v>8</c:v>
@@ -8851,7 +8851,7 @@
                   <c:v>7</c:v>
                 </c:pt>
                 <c:pt idx="7">
-                  <c:v>0</c:v>
+                  <c:v>4</c:v>
                 </c:pt>
               </c:numCache>
             </c:numRef>
@@ -8913,25 +8913,25 @@
                     <c:v>Staff awareness &amp; training — Banking (49%)</c:v>
                   </c:pt>
                   <c:pt idx="1">
-                    <c:v>Staff awareness &amp; training — Insurance (US &amp; Canada only, 56%)</c:v>
+                    <c:v>Staff awareness &amp; training — Insurance (64%)</c:v>
                   </c:pt>
                   <c:pt idx="2">
                     <c:v>ID verification / prevention — Banking (51%)</c:v>
                   </c:pt>
                   <c:pt idx="3">
-                    <c:v>ID verification / prevention — Insurance (US &amp; Canada only, 44%)</c:v>
+                    <c:v>ID verification / prevention — Insurance (48%)</c:v>
                   </c:pt>
                   <c:pt idx="4">
                     <c:v>Fraud detection technology — Banking (48%)</c:v>
                   </c:pt>
                   <c:pt idx="5">
-                    <c:v>Fraud detection technology — Insurance (US &amp; Canada only, 36%)</c:v>
+                    <c:v>Fraud detection technology — Insurance (40%)</c:v>
                   </c:pt>
                   <c:pt idx="6">
                     <c:v>3rd-party intel / consortium — Banking (43%)</c:v>
                   </c:pt>
                   <c:pt idx="7">
-                    <c:v>3rd-party intel / consortium — Insurance (US &amp; Canada only, 40%)</c:v>
+                    <c:v>3rd-party intel / consortium — Insurance (44%)</c:v>
                   </c:pt>
                 </c:lvl>
               </c:multiLvlStrCache>
@@ -8947,7 +8947,7 @@
                   <c:v>3</c:v>
                 </c:pt>
                 <c:pt idx="1">
-                  <c:v>0</c:v>
+                  <c:v>4</c:v>
                 </c:pt>
                 <c:pt idx="2">
                   <c:v>3</c:v>
@@ -8959,7 +8959,7 @@
                   <c:v>4</c:v>
                 </c:pt>
                 <c:pt idx="5">
-                  <c:v>0</c:v>
+                  <c:v>4</c:v>
                 </c:pt>
                 <c:pt idx="6">
                   <c:v>7</c:v>
@@ -9027,25 +9027,25 @@
                     <c:v>Staff awareness &amp; training — Banking (49%)</c:v>
                   </c:pt>
                   <c:pt idx="1">
-                    <c:v>Staff awareness &amp; training — Insurance (US &amp; Canada only, 56%)</c:v>
+                    <c:v>Staff awareness &amp; training — Insurance (64%)</c:v>
                   </c:pt>
                   <c:pt idx="2">
                     <c:v>ID verification / prevention — Banking (51%)</c:v>
                   </c:pt>
                   <c:pt idx="3">
-                    <c:v>ID verification / prevention — Insurance (US &amp; Canada only, 44%)</c:v>
+                    <c:v>ID verification / prevention — Insurance (48%)</c:v>
                   </c:pt>
                   <c:pt idx="4">
                     <c:v>Fraud detection technology — Banking (48%)</c:v>
                   </c:pt>
                   <c:pt idx="5">
-                    <c:v>Fraud detection technology — Insurance (US &amp; Canada only, 36%)</c:v>
+                    <c:v>Fraud detection technology — Insurance (40%)</c:v>
                   </c:pt>
                   <c:pt idx="6">
                     <c:v>3rd-party intel / consortium — Banking (43%)</c:v>
                   </c:pt>
                   <c:pt idx="7">
-                    <c:v>3rd-party intel / consortium — Insurance (US &amp; Canada only, 40%)</c:v>
+                    <c:v>3rd-party intel / consortium — Insurance (44%)</c:v>
                   </c:pt>
                 </c:lvl>
               </c:multiLvlStrCache>
@@ -25814,7 +25814,7 @@
                 <a:ea typeface="Calibri" pitchFamily="34" charset="-122"/>
                 <a:cs typeface="Calibri" pitchFamily="34" charset="-120"/>
               </a:rPr>
-              <a:t>The % in each Banking category label is the full sector-level figure; stacked region segments are rounded to the nearest whole percent and may sum to within ±1pt of that total. Banking/Australia (n=7) and Banking/Singapore (n=4) are thin samples shown directionally. Insurance bars reflect only its United States and Canada respondents (n=22 of 25) — UK (n=2), Australia (n=1), and Singapore (n=0) are excluded here for insufficient individual sample size, so Insurance's stacked totals run below the full-sample figures shown on the previous slide (64%, 48%, 40%, 44%).</a:t>
+              <a:t>The % in each category label is the full sector-level figure; stacked region segments are rounded to the nearest whole percent and may sum to within ±1pt of that total. Banking/Australia (n=7) and Banking/Singapore (n=4) are thin samples shown directionally. Insurance/Europe (n=2, both United Kingdom) and Insurance/Australia (n=1) are extremely thin — each segment reflects just 1–2 respondents — and are shown for completeness, not as statistically reliable estimates. Insurance had zero Singapore respondents, so no segment appears there.</a:t>
             </a:r>
             <a:endParaRPr lang="en-US" sz="850" dirty="0"/>
           </a:p>

--- a/Fraud in 2026 - Full Results.pptx
+++ b/Fraud in 2026 - Full Results.pptx
@@ -565,37 +565,37 @@
                     <c:v>Limited data standardization — Banking (73%)</c:v>
                   </c:pt>
                   <c:pt idx="1">
-                    <c:v>Limited data standardization — Insurance (US &amp; Canada only, 76%)</c:v>
+                    <c:v>Limited data standardization — Insurance (88%)</c:v>
                   </c:pt>
                   <c:pt idx="2">
                     <c:v>Legal, privacy &amp; regulatory constraints — Banking (73%)</c:v>
                   </c:pt>
                   <c:pt idx="3">
-                    <c:v>Legal, privacy &amp; regulatory constraints — Insurance (US &amp; Canada only, 64%)</c:v>
+                    <c:v>Legal, privacy &amp; regulatory constraints — Insurance (72%)</c:v>
                   </c:pt>
                   <c:pt idx="4">
                     <c:v>Lack of external industry participation — Banking (64%)</c:v>
                   </c:pt>
                   <c:pt idx="5">
-                    <c:v>Lack of external industry participation — Insurance (US &amp; Canada only, 40%)</c:v>
+                    <c:v>Lack of external industry participation — Insurance (48%)</c:v>
                   </c:pt>
                   <c:pt idx="6">
                     <c:v>Insufficient budget or resources — Banking (36%)</c:v>
                   </c:pt>
                   <c:pt idx="7">
-                    <c:v>Insufficient budget or resources — Insurance (US &amp; Canada only, 32%)</c:v>
+                    <c:v>Insufficient budget or resources — Insurance (36%)</c:v>
                   </c:pt>
                   <c:pt idx="8">
                     <c:v>Difficulty demonstrating ROI — Banking (31%)</c:v>
                   </c:pt>
                   <c:pt idx="9">
-                    <c:v>Difficulty demonstrating ROI — Insurance (US &amp; Canada only, 16%)</c:v>
+                    <c:v>Difficulty demonstrating ROI — Insurance (16%)</c:v>
                   </c:pt>
                   <c:pt idx="10">
                     <c:v>Unclear internal ownership / governance — Banking (23%)</c:v>
                   </c:pt>
                   <c:pt idx="11">
-                    <c:v>Unclear internal ownership / governance — Insurance (US &amp; Canada only, 32%)</c:v>
+                    <c:v>Unclear internal ownership / governance — Insurance (36%)</c:v>
                   </c:pt>
                 </c:lvl>
               </c:multiLvlStrCache>
@@ -703,37 +703,37 @@
                     <c:v>Limited data standardization — Banking (73%)</c:v>
                   </c:pt>
                   <c:pt idx="1">
-                    <c:v>Limited data standardization — Insurance (US &amp; Canada only, 76%)</c:v>
+                    <c:v>Limited data standardization — Insurance (88%)</c:v>
                   </c:pt>
                   <c:pt idx="2">
                     <c:v>Legal, privacy &amp; regulatory constraints — Banking (73%)</c:v>
                   </c:pt>
                   <c:pt idx="3">
-                    <c:v>Legal, privacy &amp; regulatory constraints — Insurance (US &amp; Canada only, 64%)</c:v>
+                    <c:v>Legal, privacy &amp; regulatory constraints — Insurance (72%)</c:v>
                   </c:pt>
                   <c:pt idx="4">
                     <c:v>Lack of external industry participation — Banking (64%)</c:v>
                   </c:pt>
                   <c:pt idx="5">
-                    <c:v>Lack of external industry participation — Insurance (US &amp; Canada only, 40%)</c:v>
+                    <c:v>Lack of external industry participation — Insurance (48%)</c:v>
                   </c:pt>
                   <c:pt idx="6">
                     <c:v>Insufficient budget or resources — Banking (36%)</c:v>
                   </c:pt>
                   <c:pt idx="7">
-                    <c:v>Insufficient budget or resources — Insurance (US &amp; Canada only, 32%)</c:v>
+                    <c:v>Insufficient budget or resources — Insurance (36%)</c:v>
                   </c:pt>
                   <c:pt idx="8">
                     <c:v>Difficulty demonstrating ROI — Banking (31%)</c:v>
                   </c:pt>
                   <c:pt idx="9">
-                    <c:v>Difficulty demonstrating ROI — Insurance (US &amp; Canada only, 16%)</c:v>
+                    <c:v>Difficulty demonstrating ROI — Insurance (16%)</c:v>
                   </c:pt>
                   <c:pt idx="10">
                     <c:v>Unclear internal ownership / governance — Banking (23%)</c:v>
                   </c:pt>
                   <c:pt idx="11">
-                    <c:v>Unclear internal ownership / governance — Insurance (US &amp; Canada only, 32%)</c:v>
+                    <c:v>Unclear internal ownership / governance — Insurance (36%)</c:v>
                   </c:pt>
                 </c:lvl>
               </c:multiLvlStrCache>
@@ -841,37 +841,37 @@
                     <c:v>Limited data standardization — Banking (73%)</c:v>
                   </c:pt>
                   <c:pt idx="1">
-                    <c:v>Limited data standardization — Insurance (US &amp; Canada only, 76%)</c:v>
+                    <c:v>Limited data standardization — Insurance (88%)</c:v>
                   </c:pt>
                   <c:pt idx="2">
                     <c:v>Legal, privacy &amp; regulatory constraints — Banking (73%)</c:v>
                   </c:pt>
                   <c:pt idx="3">
-                    <c:v>Legal, privacy &amp; regulatory constraints — Insurance (US &amp; Canada only, 64%)</c:v>
+                    <c:v>Legal, privacy &amp; regulatory constraints — Insurance (72%)</c:v>
                   </c:pt>
                   <c:pt idx="4">
                     <c:v>Lack of external industry participation — Banking (64%)</c:v>
                   </c:pt>
                   <c:pt idx="5">
-                    <c:v>Lack of external industry participation — Insurance (US &amp; Canada only, 40%)</c:v>
+                    <c:v>Lack of external industry participation — Insurance (48%)</c:v>
                   </c:pt>
                   <c:pt idx="6">
                     <c:v>Insufficient budget or resources — Banking (36%)</c:v>
                   </c:pt>
                   <c:pt idx="7">
-                    <c:v>Insufficient budget or resources — Insurance (US &amp; Canada only, 32%)</c:v>
+                    <c:v>Insufficient budget or resources — Insurance (36%)</c:v>
                   </c:pt>
                   <c:pt idx="8">
                     <c:v>Difficulty demonstrating ROI — Banking (31%)</c:v>
                   </c:pt>
                   <c:pt idx="9">
-                    <c:v>Difficulty demonstrating ROI — Insurance (US &amp; Canada only, 16%)</c:v>
+                    <c:v>Difficulty demonstrating ROI — Insurance (16%)</c:v>
                   </c:pt>
                   <c:pt idx="10">
                     <c:v>Unclear internal ownership / governance — Banking (23%)</c:v>
                   </c:pt>
                   <c:pt idx="11">
-                    <c:v>Unclear internal ownership / governance — Insurance (US &amp; Canada only, 32%)</c:v>
+                    <c:v>Unclear internal ownership / governance — Insurance (36%)</c:v>
                   </c:pt>
                 </c:lvl>
               </c:multiLvlStrCache>
@@ -887,25 +887,25 @@
                   <c:v>11</c:v>
                 </c:pt>
                 <c:pt idx="1">
-                  <c:v>0</c:v>
+                  <c:v>8</c:v>
                 </c:pt>
                 <c:pt idx="2">
                   <c:v>11</c:v>
                 </c:pt>
                 <c:pt idx="3">
-                  <c:v>0</c:v>
+                  <c:v>4</c:v>
                 </c:pt>
                 <c:pt idx="4">
                   <c:v>9</c:v>
                 </c:pt>
                 <c:pt idx="5">
-                  <c:v>0</c:v>
+                  <c:v>4</c:v>
                 </c:pt>
                 <c:pt idx="6">
                   <c:v>7</c:v>
                 </c:pt>
                 <c:pt idx="7">
-                  <c:v>0</c:v>
+                  <c:v>4</c:v>
                 </c:pt>
                 <c:pt idx="8">
                   <c:v>9</c:v>
@@ -917,7 +917,7 @@
                   <c:v>1</c:v>
                 </c:pt>
                 <c:pt idx="11">
-                  <c:v>0</c:v>
+                  <c:v>4</c:v>
                 </c:pt>
               </c:numCache>
             </c:numRef>
@@ -979,37 +979,37 @@
                     <c:v>Limited data standardization — Banking (73%)</c:v>
                   </c:pt>
                   <c:pt idx="1">
-                    <c:v>Limited data standardization — Insurance (US &amp; Canada only, 76%)</c:v>
+                    <c:v>Limited data standardization — Insurance (88%)</c:v>
                   </c:pt>
                   <c:pt idx="2">
                     <c:v>Legal, privacy &amp; regulatory constraints — Banking (73%)</c:v>
                   </c:pt>
                   <c:pt idx="3">
-                    <c:v>Legal, privacy &amp; regulatory constraints — Insurance (US &amp; Canada only, 64%)</c:v>
+                    <c:v>Legal, privacy &amp; regulatory constraints — Insurance (72%)</c:v>
                   </c:pt>
                   <c:pt idx="4">
                     <c:v>Lack of external industry participation — Banking (64%)</c:v>
                   </c:pt>
                   <c:pt idx="5">
-                    <c:v>Lack of external industry participation — Insurance (US &amp; Canada only, 40%)</c:v>
+                    <c:v>Lack of external industry participation — Insurance (48%)</c:v>
                   </c:pt>
                   <c:pt idx="6">
                     <c:v>Insufficient budget or resources — Banking (36%)</c:v>
                   </c:pt>
                   <c:pt idx="7">
-                    <c:v>Insufficient budget or resources — Insurance (US &amp; Canada only, 32%)</c:v>
+                    <c:v>Insufficient budget or resources — Insurance (36%)</c:v>
                   </c:pt>
                   <c:pt idx="8">
                     <c:v>Difficulty demonstrating ROI — Banking (31%)</c:v>
                   </c:pt>
                   <c:pt idx="9">
-                    <c:v>Difficulty demonstrating ROI — Insurance (US &amp; Canada only, 16%)</c:v>
+                    <c:v>Difficulty demonstrating ROI — Insurance (16%)</c:v>
                   </c:pt>
                   <c:pt idx="10">
                     <c:v>Unclear internal ownership / governance — Banking (23%)</c:v>
                   </c:pt>
                   <c:pt idx="11">
-                    <c:v>Unclear internal ownership / governance — Insurance (US &amp; Canada only, 32%)</c:v>
+                    <c:v>Unclear internal ownership / governance — Insurance (36%)</c:v>
                   </c:pt>
                 </c:lvl>
               </c:multiLvlStrCache>
@@ -1025,19 +1025,19 @@
                   <c:v>7</c:v>
                 </c:pt>
                 <c:pt idx="1">
-                  <c:v>0</c:v>
+                  <c:v>4</c:v>
                 </c:pt>
                 <c:pt idx="2">
                   <c:v>9</c:v>
                 </c:pt>
                 <c:pt idx="3">
-                  <c:v>0</c:v>
+                  <c:v>4</c:v>
                 </c:pt>
                 <c:pt idx="4">
                   <c:v>4</c:v>
                 </c:pt>
                 <c:pt idx="5">
-                  <c:v>0</c:v>
+                  <c:v>4</c:v>
                 </c:pt>
                 <c:pt idx="6">
                   <c:v>5</c:v>
@@ -1117,37 +1117,37 @@
                     <c:v>Limited data standardization — Banking (73%)</c:v>
                   </c:pt>
                   <c:pt idx="1">
-                    <c:v>Limited data standardization — Insurance (US &amp; Canada only, 76%)</c:v>
+                    <c:v>Limited data standardization — Insurance (88%)</c:v>
                   </c:pt>
                   <c:pt idx="2">
                     <c:v>Legal, privacy &amp; regulatory constraints — Banking (73%)</c:v>
                   </c:pt>
                   <c:pt idx="3">
-                    <c:v>Legal, privacy &amp; regulatory constraints — Insurance (US &amp; Canada only, 64%)</c:v>
+                    <c:v>Legal, privacy &amp; regulatory constraints — Insurance (72%)</c:v>
                   </c:pt>
                   <c:pt idx="4">
                     <c:v>Lack of external industry participation — Banking (64%)</c:v>
                   </c:pt>
                   <c:pt idx="5">
-                    <c:v>Lack of external industry participation — Insurance (US &amp; Canada only, 40%)</c:v>
+                    <c:v>Lack of external industry participation — Insurance (48%)</c:v>
                   </c:pt>
                   <c:pt idx="6">
                     <c:v>Insufficient budget or resources — Banking (36%)</c:v>
                   </c:pt>
                   <c:pt idx="7">
-                    <c:v>Insufficient budget or resources — Insurance (US &amp; Canada only, 32%)</c:v>
+                    <c:v>Insufficient budget or resources — Insurance (36%)</c:v>
                   </c:pt>
                   <c:pt idx="8">
                     <c:v>Difficulty demonstrating ROI — Banking (31%)</c:v>
                   </c:pt>
                   <c:pt idx="9">
-                    <c:v>Difficulty demonstrating ROI — Insurance (US &amp; Canada only, 16%)</c:v>
+                    <c:v>Difficulty demonstrating ROI — Insurance (16%)</c:v>
                   </c:pt>
                   <c:pt idx="10">
                     <c:v>Unclear internal ownership / governance — Banking (23%)</c:v>
                   </c:pt>
                   <c:pt idx="11">
-                    <c:v>Unclear internal ownership / governance — Insurance (US &amp; Canada only, 32%)</c:v>
+                    <c:v>Unclear internal ownership / governance — Insurance (36%)</c:v>
                   </c:pt>
                 </c:lvl>
               </c:multiLvlStrCache>
@@ -3387,25 +3387,25 @@
                     <c:v>Increase info sharing &amp; intelligence — Banking (33%)</c:v>
                   </c:pt>
                   <c:pt idx="1">
-                    <c:v>Increase info sharing &amp; intelligence — Insurance (US &amp; Canada only, 20%)</c:v>
+                    <c:v>Increase info sharing &amp; intelligence — Insurance (20%)</c:v>
                   </c:pt>
                   <c:pt idx="2">
                     <c:v>Enhance ongoing monitoring &amp; detection — Banking (25%)</c:v>
                   </c:pt>
                   <c:pt idx="3">
-                    <c:v>Enhance ongoing monitoring &amp; detection — Insurance (US &amp; Canada only, 28%)</c:v>
+                    <c:v>Enhance ongoing monitoring &amp; detection — Insurance (32%)</c:v>
                   </c:pt>
                   <c:pt idx="4">
                     <c:v>Strengthen onboarding verification — Banking (23%)</c:v>
                   </c:pt>
                   <c:pt idx="5">
-                    <c:v>Strengthen onboarding verification — Insurance (US &amp; Canada only, 20%)</c:v>
+                    <c:v>Strengthen onboarding verification — Insurance (24%)</c:v>
                   </c:pt>
                   <c:pt idx="6">
                     <c:v>Strengthen 3rd-party oversight — Banking (17%)</c:v>
                   </c:pt>
                   <c:pt idx="7">
-                    <c:v>Strengthen 3rd-party oversight — Insurance (US &amp; Canada only, 20%)</c:v>
+                    <c:v>Strengthen 3rd-party oversight — Insurance (24%)</c:v>
                   </c:pt>
                 </c:lvl>
               </c:multiLvlStrCache>
@@ -3501,25 +3501,25 @@
                     <c:v>Increase info sharing &amp; intelligence — Banking (33%)</c:v>
                   </c:pt>
                   <c:pt idx="1">
-                    <c:v>Increase info sharing &amp; intelligence — Insurance (US &amp; Canada only, 20%)</c:v>
+                    <c:v>Increase info sharing &amp; intelligence — Insurance (20%)</c:v>
                   </c:pt>
                   <c:pt idx="2">
                     <c:v>Enhance ongoing monitoring &amp; detection — Banking (25%)</c:v>
                   </c:pt>
                   <c:pt idx="3">
-                    <c:v>Enhance ongoing monitoring &amp; detection — Insurance (US &amp; Canada only, 28%)</c:v>
+                    <c:v>Enhance ongoing monitoring &amp; detection — Insurance (32%)</c:v>
                   </c:pt>
                   <c:pt idx="4">
                     <c:v>Strengthen onboarding verification — Banking (23%)</c:v>
                   </c:pt>
                   <c:pt idx="5">
-                    <c:v>Strengthen onboarding verification — Insurance (US &amp; Canada only, 20%)</c:v>
+                    <c:v>Strengthen onboarding verification — Insurance (24%)</c:v>
                   </c:pt>
                   <c:pt idx="6">
                     <c:v>Strengthen 3rd-party oversight — Banking (17%)</c:v>
                   </c:pt>
                   <c:pt idx="7">
-                    <c:v>Strengthen 3rd-party oversight — Insurance (US &amp; Canada only, 20%)</c:v>
+                    <c:v>Strengthen 3rd-party oversight — Insurance (24%)</c:v>
                   </c:pt>
                 </c:lvl>
               </c:multiLvlStrCache>
@@ -3615,25 +3615,25 @@
                     <c:v>Increase info sharing &amp; intelligence — Banking (33%)</c:v>
                   </c:pt>
                   <c:pt idx="1">
-                    <c:v>Increase info sharing &amp; intelligence — Insurance (US &amp; Canada only, 20%)</c:v>
+                    <c:v>Increase info sharing &amp; intelligence — Insurance (20%)</c:v>
                   </c:pt>
                   <c:pt idx="2">
                     <c:v>Enhance ongoing monitoring &amp; detection — Banking (25%)</c:v>
                   </c:pt>
                   <c:pt idx="3">
-                    <c:v>Enhance ongoing monitoring &amp; detection — Insurance (US &amp; Canada only, 28%)</c:v>
+                    <c:v>Enhance ongoing monitoring &amp; detection — Insurance (32%)</c:v>
                   </c:pt>
                   <c:pt idx="4">
                     <c:v>Strengthen onboarding verification — Banking (23%)</c:v>
                   </c:pt>
                   <c:pt idx="5">
-                    <c:v>Strengthen onboarding verification — Insurance (US &amp; Canada only, 20%)</c:v>
+                    <c:v>Strengthen onboarding verification — Insurance (24%)</c:v>
                   </c:pt>
                   <c:pt idx="6">
                     <c:v>Strengthen 3rd-party oversight — Banking (17%)</c:v>
                   </c:pt>
                   <c:pt idx="7">
-                    <c:v>Strengthen 3rd-party oversight — Insurance (US &amp; Canada only, 20%)</c:v>
+                    <c:v>Strengthen 3rd-party oversight — Insurance (24%)</c:v>
                   </c:pt>
                 </c:lvl>
               </c:multiLvlStrCache>
@@ -3655,7 +3655,7 @@
                   <c:v>3</c:v>
                 </c:pt>
                 <c:pt idx="3">
-                  <c:v>0</c:v>
+                  <c:v>4</c:v>
                 </c:pt>
                 <c:pt idx="4">
                   <c:v>5</c:v>
@@ -3667,7 +3667,7 @@
                   <c:v>1</c:v>
                 </c:pt>
                 <c:pt idx="7">
-                  <c:v>0</c:v>
+                  <c:v>4</c:v>
                 </c:pt>
               </c:numCache>
             </c:numRef>
@@ -3729,25 +3729,25 @@
                     <c:v>Increase info sharing &amp; intelligence — Banking (33%)</c:v>
                   </c:pt>
                   <c:pt idx="1">
-                    <c:v>Increase info sharing &amp; intelligence — Insurance (US &amp; Canada only, 20%)</c:v>
+                    <c:v>Increase info sharing &amp; intelligence — Insurance (20%)</c:v>
                   </c:pt>
                   <c:pt idx="2">
                     <c:v>Enhance ongoing monitoring &amp; detection — Banking (25%)</c:v>
                   </c:pt>
                   <c:pt idx="3">
-                    <c:v>Enhance ongoing monitoring &amp; detection — Insurance (US &amp; Canada only, 28%)</c:v>
+                    <c:v>Enhance ongoing monitoring &amp; detection — Insurance (32%)</c:v>
                   </c:pt>
                   <c:pt idx="4">
                     <c:v>Strengthen onboarding verification — Banking (23%)</c:v>
                   </c:pt>
                   <c:pt idx="5">
-                    <c:v>Strengthen onboarding verification — Insurance (US &amp; Canada only, 20%)</c:v>
+                    <c:v>Strengthen onboarding verification — Insurance (24%)</c:v>
                   </c:pt>
                   <c:pt idx="6">
                     <c:v>Strengthen 3rd-party oversight — Banking (17%)</c:v>
                   </c:pt>
                   <c:pt idx="7">
-                    <c:v>Strengthen 3rd-party oversight — Insurance (US &amp; Canada only, 20%)</c:v>
+                    <c:v>Strengthen 3rd-party oversight — Insurance (24%)</c:v>
                   </c:pt>
                 </c:lvl>
               </c:multiLvlStrCache>
@@ -3775,7 +3775,7 @@
                   <c:v>3</c:v>
                 </c:pt>
                 <c:pt idx="5">
-                  <c:v>0</c:v>
+                  <c:v>4</c:v>
                 </c:pt>
                 <c:pt idx="6">
                   <c:v>1</c:v>
@@ -3843,25 +3843,25 @@
                     <c:v>Increase info sharing &amp; intelligence — Banking (33%)</c:v>
                   </c:pt>
                   <c:pt idx="1">
-                    <c:v>Increase info sharing &amp; intelligence — Insurance (US &amp; Canada only, 20%)</c:v>
+                    <c:v>Increase info sharing &amp; intelligence — Insurance (20%)</c:v>
                   </c:pt>
                   <c:pt idx="2">
                     <c:v>Enhance ongoing monitoring &amp; detection — Banking (25%)</c:v>
                   </c:pt>
                   <c:pt idx="3">
-                    <c:v>Enhance ongoing monitoring &amp; detection — Insurance (US &amp; Canada only, 28%)</c:v>
+                    <c:v>Enhance ongoing monitoring &amp; detection — Insurance (32%)</c:v>
                   </c:pt>
                   <c:pt idx="4">
                     <c:v>Strengthen onboarding verification — Banking (23%)</c:v>
                   </c:pt>
                   <c:pt idx="5">
-                    <c:v>Strengthen onboarding verification — Insurance (US &amp; Canada only, 20%)</c:v>
+                    <c:v>Strengthen onboarding verification — Insurance (24%)</c:v>
                   </c:pt>
                   <c:pt idx="6">
                     <c:v>Strengthen 3rd-party oversight — Banking (17%)</c:v>
                   </c:pt>
                   <c:pt idx="7">
-                    <c:v>Strengthen 3rd-party oversight — Insurance (US &amp; Canada only, 20%)</c:v>
+                    <c:v>Strengthen 3rd-party oversight — Insurance (24%)</c:v>
                   </c:pt>
                 </c:lvl>
               </c:multiLvlStrCache>
@@ -6021,34 +6021,34 @@
                 <c:ptCount val="10"/>
                 <c:lvl>
                   <c:pt idx="0">
-                    <c:v>Reactive — Top 50 (US &amp; Canada only, 0%)</c:v>
+                    <c:v>Reactive — Top 50 (0%)</c:v>
                   </c:pt>
                   <c:pt idx="1">
-                    <c:v>Reactive — Large (US &amp; Canada only, 10%)</c:v>
+                    <c:v>Reactive — Large (10%)</c:v>
                   </c:pt>
                   <c:pt idx="2">
-                    <c:v>Foundational — Top 50 (US &amp; Canada only, 7%)</c:v>
+                    <c:v>Foundational — Top 50 (7%)</c:v>
                   </c:pt>
                   <c:pt idx="3">
-                    <c:v>Foundational — Large (US &amp; Canada only, 0%)</c:v>
+                    <c:v>Foundational — Large (0%)</c:v>
                   </c:pt>
                   <c:pt idx="4">
-                    <c:v>Managed — Top 50 (US &amp; Canada only, 14%)</c:v>
+                    <c:v>Managed — Top 50 (13%)</c:v>
                   </c:pt>
                   <c:pt idx="5">
-                    <c:v>Managed — Large (US &amp; Canada only, 30%)</c:v>
+                    <c:v>Managed — Large (30%)</c:v>
                   </c:pt>
                   <c:pt idx="6">
-                    <c:v>Integrated — Top 50 (US &amp; Canada only, 34%)</c:v>
+                    <c:v>Integrated — Top 50 (33%)</c:v>
                   </c:pt>
                   <c:pt idx="7">
-                    <c:v>Integrated — Large (US &amp; Canada only, 30%)</c:v>
+                    <c:v>Integrated — Large (30%)</c:v>
                   </c:pt>
                   <c:pt idx="8">
-                    <c:v>Advanced — Top 50 (US &amp; Canada only, 33%)</c:v>
+                    <c:v>Advanced — Top 50 (47%)</c:v>
                   </c:pt>
                   <c:pt idx="9">
-                    <c:v>Advanced — Large (US &amp; Canada only, 20%)</c:v>
+                    <c:v>Advanced — Large (30%)</c:v>
                   </c:pt>
                 </c:lvl>
               </c:multiLvlStrCache>
@@ -6104,6 +6104,132 @@
                 <c:ptCount val="1"/>
                 <c:pt idx="0">
                   <c:v>Canada</c:v>
+                </c:pt>
+              </c:strCache>
+            </c:strRef>
+          </c:tx>
+          <c:spPr>
+            <a:solidFill>
+              <a:srgbClr val="43B02A"/>
+            </a:solidFill>
+            <a:effectLst/>
+          </c:spPr>
+          <c:invertIfNegative val="0"/>
+          <c:dLbls>
+            <c:numFmt formatCode="0&quot;%&quot;;-0&quot;%&quot;;;@" sourceLinked="0"/>
+            <c:txPr>
+              <a:bodyPr/>
+              <a:lstStyle/>
+              <a:p>
+                <a:pPr>
+                  <a:defRPr b="0" i="0" strike="noStrike" sz="700" u="none">
+                    <a:solidFill>
+                      <a:srgbClr val="FFFFFF"/>
+                    </a:solidFill>
+                    <a:latin typeface="Arial"/>
+                  </a:defRPr>
+                </a:pPr>
+              </a:p>
+            </c:txPr>
+            <c:dLblPos val="ctr"/>
+            <c:showLegendKey val="0"/>
+            <c:showVal val="1"/>
+            <c:showCatName val="0"/>
+            <c:showSerName val="0"/>
+            <c:showPercent val="0"/>
+            <c:showBubbleSize val="0"/>
+            <c:showLeaderLines val="0"/>
+          </c:dLbls>
+          <c:cat>
+            <c:multiLvlStrRef>
+              <c:f>Sheet1!$A$2:$A$11</c:f>
+              <c:multiLvlStrCache>
+                <c:ptCount val="10"/>
+                <c:lvl>
+                  <c:pt idx="0">
+                    <c:v>Reactive — Top 50 (0%)</c:v>
+                  </c:pt>
+                  <c:pt idx="1">
+                    <c:v>Reactive — Large (10%)</c:v>
+                  </c:pt>
+                  <c:pt idx="2">
+                    <c:v>Foundational — Top 50 (7%)</c:v>
+                  </c:pt>
+                  <c:pt idx="3">
+                    <c:v>Foundational — Large (0%)</c:v>
+                  </c:pt>
+                  <c:pt idx="4">
+                    <c:v>Managed — Top 50 (13%)</c:v>
+                  </c:pt>
+                  <c:pt idx="5">
+                    <c:v>Managed — Large (30%)</c:v>
+                  </c:pt>
+                  <c:pt idx="6">
+                    <c:v>Integrated — Top 50 (33%)</c:v>
+                  </c:pt>
+                  <c:pt idx="7">
+                    <c:v>Integrated — Large (30%)</c:v>
+                  </c:pt>
+                  <c:pt idx="8">
+                    <c:v>Advanced — Top 50 (47%)</c:v>
+                  </c:pt>
+                  <c:pt idx="9">
+                    <c:v>Advanced — Large (30%)</c:v>
+                  </c:pt>
+                </c:lvl>
+              </c:multiLvlStrCache>
+            </c:multiLvlStrRef>
+          </c:cat>
+          <c:val>
+            <c:numRef>
+              <c:f>Sheet1!$C$2:$C$11</c:f>
+              <c:numCache>
+                <c:formatCode>General</c:formatCode>
+                <c:ptCount val="10"/>
+                <c:pt idx="0">
+                  <c:v>0</c:v>
+                </c:pt>
+                <c:pt idx="1">
+                  <c:v>10</c:v>
+                </c:pt>
+                <c:pt idx="2">
+                  <c:v>7</c:v>
+                </c:pt>
+                <c:pt idx="3">
+                  <c:v>0</c:v>
+                </c:pt>
+                <c:pt idx="4">
+                  <c:v>7</c:v>
+                </c:pt>
+                <c:pt idx="5">
+                  <c:v>20</c:v>
+                </c:pt>
+                <c:pt idx="6">
+                  <c:v>7</c:v>
+                </c:pt>
+                <c:pt idx="7">
+                  <c:v>10</c:v>
+                </c:pt>
+                <c:pt idx="8">
+                  <c:v>20</c:v>
+                </c:pt>
+                <c:pt idx="9">
+                  <c:v>20</c:v>
+                </c:pt>
+              </c:numCache>
+            </c:numRef>
+          </c:val>
+        </c:ser>
+        <c:ser>
+          <c:idx val="2"/>
+          <c:order val="2"/>
+          <c:tx>
+            <c:strRef>
+              <c:f>Sheet1!$D$1</c:f>
+              <c:strCache>
+                <c:ptCount val="1"/>
+                <c:pt idx="0">
+                  <c:v>Europe (EU + UK)</c:v>
                 </c:pt>
               </c:strCache>
             </c:strRef>
@@ -6147,34 +6273,34 @@
                 <c:ptCount val="10"/>
                 <c:lvl>
                   <c:pt idx="0">
-                    <c:v>Reactive — Top 50 (US &amp; Canada only, 0%)</c:v>
+                    <c:v>Reactive — Top 50 (0%)</c:v>
                   </c:pt>
                   <c:pt idx="1">
-                    <c:v>Reactive — Large (US &amp; Canada only, 10%)</c:v>
+                    <c:v>Reactive — Large (10%)</c:v>
                   </c:pt>
                   <c:pt idx="2">
-                    <c:v>Foundational — Top 50 (US &amp; Canada only, 7%)</c:v>
+                    <c:v>Foundational — Top 50 (7%)</c:v>
                   </c:pt>
                   <c:pt idx="3">
-                    <c:v>Foundational — Large (US &amp; Canada only, 0%)</c:v>
+                    <c:v>Foundational — Large (0%)</c:v>
                   </c:pt>
                   <c:pt idx="4">
-                    <c:v>Managed — Top 50 (US &amp; Canada only, 14%)</c:v>
+                    <c:v>Managed — Top 50 (13%)</c:v>
                   </c:pt>
                   <c:pt idx="5">
-                    <c:v>Managed — Large (US &amp; Canada only, 30%)</c:v>
+                    <c:v>Managed — Large (30%)</c:v>
                   </c:pt>
                   <c:pt idx="6">
-                    <c:v>Integrated — Top 50 (US &amp; Canada only, 34%)</c:v>
+                    <c:v>Integrated — Top 50 (33%)</c:v>
                   </c:pt>
                   <c:pt idx="7">
-                    <c:v>Integrated — Large (US &amp; Canada only, 30%)</c:v>
+                    <c:v>Integrated — Large (30%)</c:v>
                   </c:pt>
                   <c:pt idx="8">
-                    <c:v>Advanced — Top 50 (US &amp; Canada only, 33%)</c:v>
+                    <c:v>Advanced — Top 50 (47%)</c:v>
                   </c:pt>
                   <c:pt idx="9">
-                    <c:v>Advanced — Large (US &amp; Canada only, 20%)</c:v>
+                    <c:v>Advanced — Large (30%)</c:v>
                   </c:pt>
                 </c:lvl>
               </c:multiLvlStrCache>
@@ -6182,7 +6308,7 @@
           </c:cat>
           <c:val>
             <c:numRef>
-              <c:f>Sheet1!$C$2:$C$11</c:f>
+              <c:f>Sheet1!$D$2:$D$11</c:f>
               <c:numCache>
                 <c:formatCode>General</c:formatCode>
                 <c:ptCount val="10"/>
@@ -6190,31 +6316,157 @@
                   <c:v>0</c:v>
                 </c:pt>
                 <c:pt idx="1">
-                  <c:v>10</c:v>
+                  <c:v>0</c:v>
                 </c:pt>
                 <c:pt idx="2">
-                  <c:v>7</c:v>
+                  <c:v>0</c:v>
                 </c:pt>
                 <c:pt idx="3">
                   <c:v>0</c:v>
                 </c:pt>
                 <c:pt idx="4">
+                  <c:v>0</c:v>
+                </c:pt>
+                <c:pt idx="5">
+                  <c:v>0</c:v>
+                </c:pt>
+                <c:pt idx="6">
+                  <c:v>0</c:v>
+                </c:pt>
+                <c:pt idx="7">
+                  <c:v>0</c:v>
+                </c:pt>
+                <c:pt idx="8">
                   <c:v>7</c:v>
                 </c:pt>
+                <c:pt idx="9">
+                  <c:v>10</c:v>
+                </c:pt>
+              </c:numCache>
+            </c:numRef>
+          </c:val>
+        </c:ser>
+        <c:ser>
+          <c:idx val="3"/>
+          <c:order val="3"/>
+          <c:tx>
+            <c:strRef>
+              <c:f>Sheet1!$E$1</c:f>
+              <c:strCache>
+                <c:ptCount val="1"/>
+                <c:pt idx="0">
+                  <c:v>Australia</c:v>
+                </c:pt>
+              </c:strCache>
+            </c:strRef>
+          </c:tx>
+          <c:spPr>
+            <a:solidFill>
+              <a:srgbClr val="0D8390"/>
+            </a:solidFill>
+            <a:effectLst/>
+          </c:spPr>
+          <c:invertIfNegative val="0"/>
+          <c:dLbls>
+            <c:numFmt formatCode="0&quot;%&quot;;-0&quot;%&quot;;;@" sourceLinked="0"/>
+            <c:txPr>
+              <a:bodyPr/>
+              <a:lstStyle/>
+              <a:p>
+                <a:pPr>
+                  <a:defRPr b="0" i="0" strike="noStrike" sz="700" u="none">
+                    <a:solidFill>
+                      <a:srgbClr val="FFFFFF"/>
+                    </a:solidFill>
+                    <a:latin typeface="Arial"/>
+                  </a:defRPr>
+                </a:pPr>
+              </a:p>
+            </c:txPr>
+            <c:dLblPos val="ctr"/>
+            <c:showLegendKey val="0"/>
+            <c:showVal val="1"/>
+            <c:showCatName val="0"/>
+            <c:showSerName val="0"/>
+            <c:showPercent val="0"/>
+            <c:showBubbleSize val="0"/>
+            <c:showLeaderLines val="0"/>
+          </c:dLbls>
+          <c:cat>
+            <c:multiLvlStrRef>
+              <c:f>Sheet1!$A$2:$A$11</c:f>
+              <c:multiLvlStrCache>
+                <c:ptCount val="10"/>
+                <c:lvl>
+                  <c:pt idx="0">
+                    <c:v>Reactive — Top 50 (0%)</c:v>
+                  </c:pt>
+                  <c:pt idx="1">
+                    <c:v>Reactive — Large (10%)</c:v>
+                  </c:pt>
+                  <c:pt idx="2">
+                    <c:v>Foundational — Top 50 (7%)</c:v>
+                  </c:pt>
+                  <c:pt idx="3">
+                    <c:v>Foundational — Large (0%)</c:v>
+                  </c:pt>
+                  <c:pt idx="4">
+                    <c:v>Managed — Top 50 (13%)</c:v>
+                  </c:pt>
+                  <c:pt idx="5">
+                    <c:v>Managed — Large (30%)</c:v>
+                  </c:pt>
+                  <c:pt idx="6">
+                    <c:v>Integrated — Top 50 (33%)</c:v>
+                  </c:pt>
+                  <c:pt idx="7">
+                    <c:v>Integrated — Large (30%)</c:v>
+                  </c:pt>
+                  <c:pt idx="8">
+                    <c:v>Advanced — Top 50 (47%)</c:v>
+                  </c:pt>
+                  <c:pt idx="9">
+                    <c:v>Advanced — Large (30%)</c:v>
+                  </c:pt>
+                </c:lvl>
+              </c:multiLvlStrCache>
+            </c:multiLvlStrRef>
+          </c:cat>
+          <c:val>
+            <c:numRef>
+              <c:f>Sheet1!$E$2:$E$11</c:f>
+              <c:numCache>
+                <c:formatCode>General</c:formatCode>
+                <c:ptCount val="10"/>
+                <c:pt idx="0">
+                  <c:v>0</c:v>
+                </c:pt>
+                <c:pt idx="1">
+                  <c:v>0</c:v>
+                </c:pt>
+                <c:pt idx="2">
+                  <c:v>0</c:v>
+                </c:pt>
+                <c:pt idx="3">
+                  <c:v>0</c:v>
+                </c:pt>
+                <c:pt idx="4">
+                  <c:v>0</c:v>
+                </c:pt>
                 <c:pt idx="5">
-                  <c:v>20</c:v>
+                  <c:v>0</c:v>
                 </c:pt>
                 <c:pt idx="6">
+                  <c:v>0</c:v>
+                </c:pt>
+                <c:pt idx="7">
+                  <c:v>0</c:v>
+                </c:pt>
+                <c:pt idx="8">
                   <c:v>7</c:v>
                 </c:pt>
-                <c:pt idx="7">
-                  <c:v>10</c:v>
-                </c:pt>
-                <c:pt idx="8">
-                  <c:v>20</c:v>
-                </c:pt>
                 <c:pt idx="9">
-                  <c:v>20</c:v>
+                  <c:v>0</c:v>
                 </c:pt>
               </c:numCache>
             </c:numRef>
@@ -14269,7 +14521,7 @@
                 <a:ea typeface="Calibri" pitchFamily="34" charset="-122"/>
                 <a:cs typeface="Calibri" pitchFamily="34" charset="-120"/>
               </a:rPr>
-              <a:t>The % in each Banking category label is the full sector-level figure; stacked region segments are rounded to the nearest whole percent and may sum to within ±1pt of that total. Banking/Australia (n=7) and Banking/Singapore (n=4) are thin samples shown directionally. Insurance bars reflect only its United States and Canada respondents (n=22 of 25) — UK (n=2), Australia (n=1), and Singapore (n=0) are excluded here for insufficient individual sample size. Insurance's full-sample totals (all regions, n=25) are: data standardization 88%, legal/privacy 72%, external participation 48%, budget/resources 36%, ROI 16%, ownership 36%.</a:t>
+              <a:t>The % in each category label is the full sector-level figure; stacked region segments are rounded to the nearest whole percent and may sum to within ±1pt of that total. Banking/Australia (n=7) and Banking/Singapore (n=4) are thin samples shown directionally. Insurance/Europe (n=2, both United Kingdom) and Insurance/Australia (n=1) are extremely thin — each segment reflects just 1–2 respondents — and are shown for completeness, not as statistically reliable estimates. Insurance had zero Singapore respondents, so no segment appears there.</a:t>
             </a:r>
             <a:endParaRPr lang="en-US" sz="850" dirty="0"/>
           </a:p>
@@ -17229,7 +17481,7 @@
                 <a:ea typeface="Calibri" pitchFamily="34" charset="-122"/>
                 <a:cs typeface="Calibri" pitchFamily="34" charset="-120"/>
               </a:rPr>
-              <a:t>The % in each Banking category label is the full sector-level figure; stacked region segments are rounded to the nearest whole percent and may sum to within ±1pt of that total. Banking/Australia (n=7) and Banking/Singapore (n=4) are thin samples shown directionally. Insurance bars reflect only its United States and Canada respondents (n=22 of 25) — UK (n=2), Australia (n=1), and Singapore (n=0) are excluded here for insufficient individual sample size. Insurance's full-sample totals (all regions, n=25) are: info sharing 20%, monitoring 32%, onboarding 24%, oversight 24%.</a:t>
+              <a:t>The % in each category label is the full sector-level figure; stacked region segments are rounded to the nearest whole percent and may sum to within ±1pt of that total. Banking/Australia (n=7) and Banking/Singapore (n=4) are thin samples shown directionally. Insurance/Europe (n=2, both United Kingdom) and Insurance/Australia (n=1) are extremely thin — each segment reflects just 1 respondent — and are shown for completeness, not as statistically reliable estimates. Insurance had zero Singapore respondents, so no segment appears there.</a:t>
             </a:r>
             <a:endParaRPr lang="en-US" sz="850" dirty="0"/>
           </a:p>
@@ -19931,7 +20183,7 @@
         <p:spPr>
           <a:xfrm>
             <a:off x="502006" y="5276088"/>
-            <a:ext cx="11188598" cy="777240"/>
+            <a:ext cx="11188598" cy="685800"/>
           </a:xfrm>
           <a:prstGeom prst="rect">
             <a:avLst/>
@@ -19975,7 +20227,7 @@
                 <a:ea typeface="Calibri" pitchFamily="34" charset="-122"/>
                 <a:cs typeface="Calibri" pitchFamily="34" charset="-120"/>
               </a:rPr>
-              <a:t>Bars reflect only United States and Canada respondents. Top 50 (n=15 full sample) excludes Europe (n=1) and Australia (n=1) here — shown totals are 13 of 15. Large (n=10 full sample, including 1 respondent reclassified from their employer description) excludes Europe (n=1) here — shown totals are 9 of 10. Full-sample tier totals (all regions) are: Top 50 — Reactive 0%, Foundational 7%, Managed 13%, Integrated 33%, Advanced 47%; Large — Reactive 10%, Foundational 0%, Managed 30%, Integrated 30%, Advanced 30%.</a:t>
+              <a:t>The % in each category label is the full tier-level figure; region segments are rounded to the nearest whole percent. Insurance/Europe (n=1, United Kingdom) and Insurance/Australia (n=1) are extremely thin — each segment reflects a single respondent — and are shown for completeness, not as statistically reliable estimates. Insurance had zero Singapore respondents in either tier, so no segment appears there. Large includes 1 respondent (Canada) reclassified from their employer description elsewhere in the survey (see the sector x tier slide).</a:t>
             </a:r>
             <a:endParaRPr lang="en-US" sz="850" dirty="0"/>
           </a:p>

--- a/Fraud in 2026 - Full Results.pptx
+++ b/Fraud in 2026 - Full Results.pptx
@@ -36,9 +36,11 @@
     <p:sldId id="284" r:id="rId30"/>
     <p:sldId id="285" r:id="rId31"/>
     <p:sldId id="286" r:id="rId32"/>
+    <p:sldId id="287" r:id="rId33"/>
+    <p:sldId id="288" r:id="rId34"/>
   </p:sldIdLst>
   <p:notesMasterIdLst>
-    <p:notesMasterId r:id="rId33"/>
+    <p:notesMasterId r:id="rId35"/>
   </p:notesMasterIdLst>
   <p:sldSz cx="12192000" cy="6858000"/>
   <p:notesSz cx="6858000" cy="12192000"/>
@@ -6989,6 +6991,876 @@
       <c:layout/>
       <c:barChart>
         <c:barDir val="bar"/>
+        <c:grouping val="stacked"/>
+        <c:varyColors val="0"/>
+        <c:ser>
+          <c:idx val="0"/>
+          <c:order val="0"/>
+          <c:tx>
+            <c:strRef>
+              <c:f>Sheet1!$B$1</c:f>
+              <c:strCache>
+                <c:ptCount val="1"/>
+                <c:pt idx="0">
+                  <c:v>Top tier (Top 100 Banking / Top 50 Insurance)</c:v>
+                </c:pt>
+              </c:strCache>
+            </c:strRef>
+          </c:tx>
+          <c:spPr>
+            <a:solidFill>
+              <a:srgbClr val="86BC25"/>
+            </a:solidFill>
+            <a:effectLst/>
+          </c:spPr>
+          <c:invertIfNegative val="0"/>
+          <c:dLbls>
+            <c:numFmt formatCode="0&quot;%&quot;;-0&quot;%&quot;;;@" sourceLinked="0"/>
+            <c:txPr>
+              <a:bodyPr/>
+              <a:lstStyle/>
+              <a:p>
+                <a:pPr>
+                  <a:defRPr b="0" i="0" strike="noStrike" sz="700" u="none">
+                    <a:solidFill>
+                      <a:srgbClr val="FFFFFF"/>
+                    </a:solidFill>
+                    <a:latin typeface="Arial"/>
+                  </a:defRPr>
+                </a:pPr>
+              </a:p>
+            </c:txPr>
+            <c:dLblPos val="ctr"/>
+            <c:showLegendKey val="0"/>
+            <c:showVal val="1"/>
+            <c:showCatName val="0"/>
+            <c:showSerName val="0"/>
+            <c:showPercent val="0"/>
+            <c:showBubbleSize val="0"/>
+            <c:showLeaderLines val="0"/>
+          </c:dLbls>
+          <c:cat>
+            <c:multiLvlStrRef>
+              <c:f>Sheet1!$A$2:$A$13</c:f>
+              <c:multiLvlStrCache>
+                <c:ptCount val="12"/>
+                <c:lvl>
+                  <c:pt idx="0">
+                    <c:v>AI-enabled tools augmentation — Banking (34%)</c:v>
+                  </c:pt>
+                  <c:pt idx="1">
+                    <c:v>AI-enabled tools augmentation — Insurance (32%)</c:v>
+                  </c:pt>
+                  <c:pt idx="2">
+                    <c:v>Automating workflows — Banking (29%)</c:v>
+                  </c:pt>
+                  <c:pt idx="3">
+                    <c:v>Automating workflows — Insurance (28%)</c:v>
+                  </c:pt>
+                  <c:pt idx="4">
+                    <c:v>Redesigning processes &amp; playbooks — Banking (10%)</c:v>
+                  </c:pt>
+                  <c:pt idx="5">
+                    <c:v>Redesigning processes &amp; playbooks — Insurance (12%)</c:v>
+                  </c:pt>
+                  <c:pt idx="6">
+                    <c:v>Outsourcing — Banking (10%)</c:v>
+                  </c:pt>
+                  <c:pt idx="7">
+                    <c:v>Outsourcing — Insurance (16%)</c:v>
+                  </c:pt>
+                  <c:pt idx="8">
+                    <c:v>Hiring / workforce expansion — Banking (10%)</c:v>
+                  </c:pt>
+                  <c:pt idx="9">
+                    <c:v>Hiring / workforce expansion — Insurance (12%)</c:v>
+                  </c:pt>
+                  <c:pt idx="10">
+                    <c:v>Combination of approaches — Banking (7%)</c:v>
+                  </c:pt>
+                  <c:pt idx="11">
+                    <c:v>Combination of approaches — Insurance (0%)</c:v>
+                  </c:pt>
+                </c:lvl>
+              </c:multiLvlStrCache>
+            </c:multiLvlStrRef>
+          </c:cat>
+          <c:val>
+            <c:numRef>
+              <c:f>Sheet1!$B$2:$B$13</c:f>
+              <c:numCache>
+                <c:formatCode>General</c:formatCode>
+                <c:ptCount val="12"/>
+                <c:pt idx="0">
+                  <c:v>19</c:v>
+                </c:pt>
+                <c:pt idx="1">
+                  <c:v>28</c:v>
+                </c:pt>
+                <c:pt idx="2">
+                  <c:v>17</c:v>
+                </c:pt>
+                <c:pt idx="3">
+                  <c:v>20</c:v>
+                </c:pt>
+                <c:pt idx="4">
+                  <c:v>4</c:v>
+                </c:pt>
+                <c:pt idx="5">
+                  <c:v>4</c:v>
+                </c:pt>
+                <c:pt idx="6">
+                  <c:v>3</c:v>
+                </c:pt>
+                <c:pt idx="7">
+                  <c:v>4</c:v>
+                </c:pt>
+                <c:pt idx="8">
+                  <c:v>3</c:v>
+                </c:pt>
+                <c:pt idx="9">
+                  <c:v>4</c:v>
+                </c:pt>
+                <c:pt idx="10">
+                  <c:v>8</c:v>
+                </c:pt>
+                <c:pt idx="11">
+                  <c:v>0</c:v>
+                </c:pt>
+              </c:numCache>
+            </c:numRef>
+          </c:val>
+        </c:ser>
+        <c:ser>
+          <c:idx val="1"/>
+          <c:order val="1"/>
+          <c:tx>
+            <c:strRef>
+              <c:f>Sheet1!$C$1</c:f>
+              <c:strCache>
+                <c:ptCount val="1"/>
+                <c:pt idx="0">
+                  <c:v>Large institution (outside Top 100 / Top 50)</c:v>
+                </c:pt>
+              </c:strCache>
+            </c:strRef>
+          </c:tx>
+          <c:spPr>
+            <a:solidFill>
+              <a:srgbClr val="046A38"/>
+            </a:solidFill>
+            <a:effectLst/>
+          </c:spPr>
+          <c:invertIfNegative val="0"/>
+          <c:dLbls>
+            <c:numFmt formatCode="0&quot;%&quot;;-0&quot;%&quot;;;@" sourceLinked="0"/>
+            <c:txPr>
+              <a:bodyPr/>
+              <a:lstStyle/>
+              <a:p>
+                <a:pPr>
+                  <a:defRPr b="0" i="0" strike="noStrike" sz="700" u="none">
+                    <a:solidFill>
+                      <a:srgbClr val="FFFFFF"/>
+                    </a:solidFill>
+                    <a:latin typeface="Arial"/>
+                  </a:defRPr>
+                </a:pPr>
+              </a:p>
+            </c:txPr>
+            <c:dLblPos val="ctr"/>
+            <c:showLegendKey val="0"/>
+            <c:showVal val="1"/>
+            <c:showCatName val="0"/>
+            <c:showSerName val="0"/>
+            <c:showPercent val="0"/>
+            <c:showBubbleSize val="0"/>
+            <c:showLeaderLines val="0"/>
+          </c:dLbls>
+          <c:cat>
+            <c:multiLvlStrRef>
+              <c:f>Sheet1!$A$2:$A$13</c:f>
+              <c:multiLvlStrCache>
+                <c:ptCount val="12"/>
+                <c:lvl>
+                  <c:pt idx="0">
+                    <c:v>AI-enabled tools augmentation — Banking (34%)</c:v>
+                  </c:pt>
+                  <c:pt idx="1">
+                    <c:v>AI-enabled tools augmentation — Insurance (32%)</c:v>
+                  </c:pt>
+                  <c:pt idx="2">
+                    <c:v>Automating workflows — Banking (29%)</c:v>
+                  </c:pt>
+                  <c:pt idx="3">
+                    <c:v>Automating workflows — Insurance (28%)</c:v>
+                  </c:pt>
+                  <c:pt idx="4">
+                    <c:v>Redesigning processes &amp; playbooks — Banking (10%)</c:v>
+                  </c:pt>
+                  <c:pt idx="5">
+                    <c:v>Redesigning processes &amp; playbooks — Insurance (12%)</c:v>
+                  </c:pt>
+                  <c:pt idx="6">
+                    <c:v>Outsourcing — Banking (10%)</c:v>
+                  </c:pt>
+                  <c:pt idx="7">
+                    <c:v>Outsourcing — Insurance (16%)</c:v>
+                  </c:pt>
+                  <c:pt idx="8">
+                    <c:v>Hiring / workforce expansion — Banking (10%)</c:v>
+                  </c:pt>
+                  <c:pt idx="9">
+                    <c:v>Hiring / workforce expansion — Insurance (12%)</c:v>
+                  </c:pt>
+                  <c:pt idx="10">
+                    <c:v>Combination of approaches — Banking (7%)</c:v>
+                  </c:pt>
+                  <c:pt idx="11">
+                    <c:v>Combination of approaches — Insurance (0%)</c:v>
+                  </c:pt>
+                </c:lvl>
+              </c:multiLvlStrCache>
+            </c:multiLvlStrRef>
+          </c:cat>
+          <c:val>
+            <c:numRef>
+              <c:f>Sheet1!$C$2:$C$13</c:f>
+              <c:numCache>
+                <c:formatCode>General</c:formatCode>
+                <c:ptCount val="12"/>
+                <c:pt idx="0">
+                  <c:v>16</c:v>
+                </c:pt>
+                <c:pt idx="1">
+                  <c:v>4</c:v>
+                </c:pt>
+                <c:pt idx="2">
+                  <c:v>12</c:v>
+                </c:pt>
+                <c:pt idx="3">
+                  <c:v>8</c:v>
+                </c:pt>
+                <c:pt idx="4">
+                  <c:v>5</c:v>
+                </c:pt>
+                <c:pt idx="5">
+                  <c:v>8</c:v>
+                </c:pt>
+                <c:pt idx="6">
+                  <c:v>5</c:v>
+                </c:pt>
+                <c:pt idx="7">
+                  <c:v>12</c:v>
+                </c:pt>
+                <c:pt idx="8">
+                  <c:v>7</c:v>
+                </c:pt>
+                <c:pt idx="9">
+                  <c:v>8</c:v>
+                </c:pt>
+                <c:pt idx="10">
+                  <c:v>1</c:v>
+                </c:pt>
+                <c:pt idx="11">
+                  <c:v>0</c:v>
+                </c:pt>
+              </c:numCache>
+            </c:numRef>
+          </c:val>
+        </c:ser>
+        <c:dLbls>
+          <c:numFmt formatCode="0&quot;%&quot;;-0&quot;%&quot;;;@" sourceLinked="0"/>
+          <c:txPr>
+            <a:bodyPr/>
+            <a:lstStyle/>
+            <a:p>
+              <a:pPr>
+                <a:defRPr b="0" i="0" strike="noStrike" sz="700" u="none">
+                  <a:solidFill>
+                    <a:srgbClr val="FFFFFF"/>
+                  </a:solidFill>
+                  <a:latin typeface="Arial"/>
+                </a:defRPr>
+              </a:pPr>
+            </a:p>
+          </c:txPr>
+          <c:dLblPos val="ctr"/>
+          <c:showLegendKey val="0"/>
+          <c:showVal val="1"/>
+          <c:showCatName val="0"/>
+          <c:showSerName val="0"/>
+          <c:showPercent val="0"/>
+          <c:showBubbleSize val="0"/>
+          <c:showLeaderLines val="0"/>
+        </c:dLbls>
+        <c:gapWidth val="40"/>
+        <c:overlap val="100"/>
+        <c:axId val="2094734554"/>
+        <c:axId val="2094734552"/>
+        <c:axId val="2094734556"/>
+      </c:barChart>
+      <c:catAx>
+        <c:axId val="2094734554"/>
+        <c:scaling>
+          <c:orientation val="minMax"/>
+        </c:scaling>
+        <c:delete val="0"/>
+        <c:axPos val="l"/>
+        <c:numFmt formatCode="General" sourceLinked="1"/>
+        <c:majorTickMark val="out"/>
+        <c:minorTickMark val="none"/>
+        <c:tickLblPos val="nextTo"/>
+        <c:spPr>
+          <a:ln w="12700" cap="flat">
+            <a:noFill/>
+            <a:prstDash val="solid"/>
+            <a:round/>
+          </a:ln>
+        </c:spPr>
+        <c:txPr>
+          <a:bodyPr/>
+          <a:lstStyle/>
+          <a:p>
+            <a:pPr>
+              <a:defRPr sz="750" b="0" i="0" u="none" strike="noStrike">
+                <a:solidFill>
+                  <a:srgbClr val="53565A"/>
+                </a:solidFill>
+                <a:latin typeface="Arial"/>
+              </a:defRPr>
+            </a:pPr>
+            <a:endParaRPr lang="en-US"/>
+          </a:p>
+        </c:txPr>
+        <c:crossAx val="2094734552"/>
+        <c:crosses val="autoZero"/>
+        <c:auto val="1"/>
+        <c:lblAlgn val="ctr"/>
+        <c:noMultiLvlLbl val="1"/>
+      </c:catAx>
+      <c:valAx>
+        <c:axId val="2094734552"/>
+        <c:scaling>
+          <c:orientation val="minMax"/>
+        </c:scaling>
+        <c:delete val="1"/>
+        <c:axPos val="b"/>
+        <c:numFmt formatCode="General" sourceLinked="0"/>
+        <c:majorTickMark val="out"/>
+        <c:minorTickMark val="none"/>
+        <c:tickLblPos val="low"/>
+        <c:spPr>
+          <a:ln w="12700" cap="flat">
+            <a:noFill/>
+            <a:prstDash val="solid"/>
+            <a:round/>
+          </a:ln>
+        </c:spPr>
+        <c:txPr>
+          <a:bodyPr/>
+          <a:lstStyle/>
+          <a:p>
+            <a:pPr>
+              <a:defRPr sz="1200" b="0" i="0" u="none" strike="noStrike">
+                <a:solidFill>
+                  <a:srgbClr val="000000"/>
+                </a:solidFill>
+                <a:latin typeface="Arial"/>
+              </a:defRPr>
+            </a:pPr>
+            <a:endParaRPr lang="en-US"/>
+          </a:p>
+        </c:txPr>
+        <c:crossAx val="2094734554"/>
+        <c:crosses val="autoZero"/>
+        <c:crossBetween val="between"/>
+      </c:valAx>
+      <c:spPr>
+        <a:solidFill>
+          <a:srgbClr val="FFFFFF"/>
+        </a:solidFill>
+        <a:ln>
+          <a:noFill/>
+        </a:ln>
+        <a:effectLst/>
+      </c:spPr>
+    </c:plotArea>
+    <c:legend>
+      <c:legendPos val="b"/>
+      <c:overlay val="0"/>
+      <c:txPr>
+        <a:bodyPr/>
+        <a:lstStyle/>
+        <a:p>
+          <a:pPr>
+            <a:defRPr sz="850">      </a:defRPr>
+          </a:pPr>
+          <a:endParaRPr lang="en-US"/>
+        </a:p>
+      </c:txPr>
+    </c:legend>
+    <c:plotVisOnly val="1"/>
+    <c:dispBlanksAs val="span"/>
+  </c:chart>
+  <c:spPr>
+    <a:noFill/>
+    <a:ln>
+      <a:noFill/>
+    </a:ln>
+    <a:effectLst/>
+  </c:spPr>
+  <c:externalData r:id="rId1">
+    <c:autoUpdate val="0"/>
+  </c:externalData>
+</c:chartSpace>
+</file>
+
+<file path=ppt/charts/chart24.xml><?xml version="1.0" encoding="utf-8"?>
+<c:chartSpace xmlns:c="http://schemas.openxmlformats.org/drawingml/2006/chart" xmlns:a="http://schemas.openxmlformats.org/drawingml/2006/main" xmlns:r="http://schemas.openxmlformats.org/officeDocument/2006/relationships">
+  <c:date1904 val="0"/>
+  <c:roundedCorners val="1"/>
+  <c:chart>
+    <c:autoTitleDeleted val="1"/>
+    <c:plotArea>
+      <c:layout/>
+      <c:barChart>
+        <c:barDir val="bar"/>
+        <c:grouping val="stacked"/>
+        <c:varyColors val="0"/>
+        <c:ser>
+          <c:idx val="0"/>
+          <c:order val="0"/>
+          <c:tx>
+            <c:strRef>
+              <c:f>Sheet1!$B$1</c:f>
+              <c:strCache>
+                <c:ptCount val="1"/>
+                <c:pt idx="0">
+                  <c:v>Top tier (Top 100 Banking / Top 50 Insurance)</c:v>
+                </c:pt>
+              </c:strCache>
+            </c:strRef>
+          </c:tx>
+          <c:spPr>
+            <a:solidFill>
+              <a:srgbClr val="86BC25"/>
+            </a:solidFill>
+            <a:effectLst/>
+          </c:spPr>
+          <c:invertIfNegative val="0"/>
+          <c:dLbls>
+            <c:numFmt formatCode="0&quot;%&quot;;-0&quot;%&quot;;;@" sourceLinked="0"/>
+            <c:txPr>
+              <a:bodyPr/>
+              <a:lstStyle/>
+              <a:p>
+                <a:pPr>
+                  <a:defRPr b="0" i="0" strike="noStrike" sz="700" u="none">
+                    <a:solidFill>
+                      <a:srgbClr val="FFFFFF"/>
+                    </a:solidFill>
+                    <a:latin typeface="Arial"/>
+                  </a:defRPr>
+                </a:pPr>
+              </a:p>
+            </c:txPr>
+            <c:dLblPos val="ctr"/>
+            <c:showLegendKey val="0"/>
+            <c:showVal val="1"/>
+            <c:showCatName val="0"/>
+            <c:showSerName val="0"/>
+            <c:showPercent val="0"/>
+            <c:showBubbleSize val="0"/>
+            <c:showLeaderLines val="0"/>
+          </c:dLbls>
+          <c:cat>
+            <c:multiLvlStrRef>
+              <c:f>Sheet1!$A$2:$A$13</c:f>
+              <c:multiLvlStrCache>
+                <c:ptCount val="12"/>
+                <c:lvl>
+                  <c:pt idx="0">
+                    <c:v>AI-enabled tools augmentation — Banking (41%)</c:v>
+                  </c:pt>
+                  <c:pt idx="1">
+                    <c:v>AI-enabled tools augmentation — Insurance (40%)</c:v>
+                  </c:pt>
+                  <c:pt idx="2">
+                    <c:v>Automating workflows — Banking (27%)</c:v>
+                  </c:pt>
+                  <c:pt idx="3">
+                    <c:v>Automating workflows — Insurance (28%)</c:v>
+                  </c:pt>
+                  <c:pt idx="4">
+                    <c:v>Redesigning processes &amp; playbooks — Banking (18%)</c:v>
+                  </c:pt>
+                  <c:pt idx="5">
+                    <c:v>Redesigning processes &amp; playbooks — Insurance (24%)</c:v>
+                  </c:pt>
+                  <c:pt idx="6">
+                    <c:v>Outsourcing — Banking (7%)</c:v>
+                  </c:pt>
+                  <c:pt idx="7">
+                    <c:v>Outsourcing — Insurance (4%)</c:v>
+                  </c:pt>
+                  <c:pt idx="8">
+                    <c:v>Hiring / workforce expansion — Banking (5%)</c:v>
+                  </c:pt>
+                  <c:pt idx="9">
+                    <c:v>Hiring / workforce expansion — Insurance (4%)</c:v>
+                  </c:pt>
+                  <c:pt idx="10">
+                    <c:v>Combination of approaches — Banking (2%)</c:v>
+                  </c:pt>
+                  <c:pt idx="11">
+                    <c:v>Combination of approaches — Insurance (0%)</c:v>
+                  </c:pt>
+                </c:lvl>
+              </c:multiLvlStrCache>
+            </c:multiLvlStrRef>
+          </c:cat>
+          <c:val>
+            <c:numRef>
+              <c:f>Sheet1!$B$2:$B$13</c:f>
+              <c:numCache>
+                <c:formatCode>General</c:formatCode>
+                <c:ptCount val="12"/>
+                <c:pt idx="0">
+                  <c:v>21</c:v>
+                </c:pt>
+                <c:pt idx="1">
+                  <c:v>24</c:v>
+                </c:pt>
+                <c:pt idx="2">
+                  <c:v>17</c:v>
+                </c:pt>
+                <c:pt idx="3">
+                  <c:v>16</c:v>
+                </c:pt>
+                <c:pt idx="4">
+                  <c:v>8</c:v>
+                </c:pt>
+                <c:pt idx="5">
+                  <c:v>16</c:v>
+                </c:pt>
+                <c:pt idx="6">
+                  <c:v>4</c:v>
+                </c:pt>
+                <c:pt idx="7">
+                  <c:v>4</c:v>
+                </c:pt>
+                <c:pt idx="8">
+                  <c:v>1</c:v>
+                </c:pt>
+                <c:pt idx="9">
+                  <c:v>0</c:v>
+                </c:pt>
+                <c:pt idx="10">
+                  <c:v>1</c:v>
+                </c:pt>
+                <c:pt idx="11">
+                  <c:v>0</c:v>
+                </c:pt>
+              </c:numCache>
+            </c:numRef>
+          </c:val>
+        </c:ser>
+        <c:ser>
+          <c:idx val="1"/>
+          <c:order val="1"/>
+          <c:tx>
+            <c:strRef>
+              <c:f>Sheet1!$C$1</c:f>
+              <c:strCache>
+                <c:ptCount val="1"/>
+                <c:pt idx="0">
+                  <c:v>Large institution (outside Top 100 / Top 50)</c:v>
+                </c:pt>
+              </c:strCache>
+            </c:strRef>
+          </c:tx>
+          <c:spPr>
+            <a:solidFill>
+              <a:srgbClr val="046A38"/>
+            </a:solidFill>
+            <a:effectLst/>
+          </c:spPr>
+          <c:invertIfNegative val="0"/>
+          <c:dLbls>
+            <c:numFmt formatCode="0&quot;%&quot;;-0&quot;%&quot;;;@" sourceLinked="0"/>
+            <c:txPr>
+              <a:bodyPr/>
+              <a:lstStyle/>
+              <a:p>
+                <a:pPr>
+                  <a:defRPr b="0" i="0" strike="noStrike" sz="700" u="none">
+                    <a:solidFill>
+                      <a:srgbClr val="FFFFFF"/>
+                    </a:solidFill>
+                    <a:latin typeface="Arial"/>
+                  </a:defRPr>
+                </a:pPr>
+              </a:p>
+            </c:txPr>
+            <c:dLblPos val="ctr"/>
+            <c:showLegendKey val="0"/>
+            <c:showVal val="1"/>
+            <c:showCatName val="0"/>
+            <c:showSerName val="0"/>
+            <c:showPercent val="0"/>
+            <c:showBubbleSize val="0"/>
+            <c:showLeaderLines val="0"/>
+          </c:dLbls>
+          <c:cat>
+            <c:multiLvlStrRef>
+              <c:f>Sheet1!$A$2:$A$13</c:f>
+              <c:multiLvlStrCache>
+                <c:ptCount val="12"/>
+                <c:lvl>
+                  <c:pt idx="0">
+                    <c:v>AI-enabled tools augmentation — Banking (41%)</c:v>
+                  </c:pt>
+                  <c:pt idx="1">
+                    <c:v>AI-enabled tools augmentation — Insurance (40%)</c:v>
+                  </c:pt>
+                  <c:pt idx="2">
+                    <c:v>Automating workflows — Banking (27%)</c:v>
+                  </c:pt>
+                  <c:pt idx="3">
+                    <c:v>Automating workflows — Insurance (28%)</c:v>
+                  </c:pt>
+                  <c:pt idx="4">
+                    <c:v>Redesigning processes &amp; playbooks — Banking (18%)</c:v>
+                  </c:pt>
+                  <c:pt idx="5">
+                    <c:v>Redesigning processes &amp; playbooks — Insurance (24%)</c:v>
+                  </c:pt>
+                  <c:pt idx="6">
+                    <c:v>Outsourcing — Banking (7%)</c:v>
+                  </c:pt>
+                  <c:pt idx="7">
+                    <c:v>Outsourcing — Insurance (4%)</c:v>
+                  </c:pt>
+                  <c:pt idx="8">
+                    <c:v>Hiring / workforce expansion — Banking (5%)</c:v>
+                  </c:pt>
+                  <c:pt idx="9">
+                    <c:v>Hiring / workforce expansion — Insurance (4%)</c:v>
+                  </c:pt>
+                  <c:pt idx="10">
+                    <c:v>Combination of approaches — Banking (2%)</c:v>
+                  </c:pt>
+                  <c:pt idx="11">
+                    <c:v>Combination of approaches — Insurance (0%)</c:v>
+                  </c:pt>
+                </c:lvl>
+              </c:multiLvlStrCache>
+            </c:multiLvlStrRef>
+          </c:cat>
+          <c:val>
+            <c:numRef>
+              <c:f>Sheet1!$C$2:$C$13</c:f>
+              <c:numCache>
+                <c:formatCode>General</c:formatCode>
+                <c:ptCount val="12"/>
+                <c:pt idx="0">
+                  <c:v>20</c:v>
+                </c:pt>
+                <c:pt idx="1">
+                  <c:v>16</c:v>
+                </c:pt>
+                <c:pt idx="2">
+                  <c:v>9</c:v>
+                </c:pt>
+                <c:pt idx="3">
+                  <c:v>12</c:v>
+                </c:pt>
+                <c:pt idx="4">
+                  <c:v>8</c:v>
+                </c:pt>
+                <c:pt idx="5">
+                  <c:v>8</c:v>
+                </c:pt>
+                <c:pt idx="6">
+                  <c:v>4</c:v>
+                </c:pt>
+                <c:pt idx="7">
+                  <c:v>0</c:v>
+                </c:pt>
+                <c:pt idx="8">
+                  <c:v>4</c:v>
+                </c:pt>
+                <c:pt idx="9">
+                  <c:v>4</c:v>
+                </c:pt>
+                <c:pt idx="10">
+                  <c:v>1</c:v>
+                </c:pt>
+                <c:pt idx="11">
+                  <c:v>0</c:v>
+                </c:pt>
+              </c:numCache>
+            </c:numRef>
+          </c:val>
+        </c:ser>
+        <c:dLbls>
+          <c:numFmt formatCode="0&quot;%&quot;;-0&quot;%&quot;;;@" sourceLinked="0"/>
+          <c:txPr>
+            <a:bodyPr/>
+            <a:lstStyle/>
+            <a:p>
+              <a:pPr>
+                <a:defRPr b="0" i="0" strike="noStrike" sz="700" u="none">
+                  <a:solidFill>
+                    <a:srgbClr val="FFFFFF"/>
+                  </a:solidFill>
+                  <a:latin typeface="Arial"/>
+                </a:defRPr>
+              </a:pPr>
+            </a:p>
+          </c:txPr>
+          <c:dLblPos val="ctr"/>
+          <c:showLegendKey val="0"/>
+          <c:showVal val="1"/>
+          <c:showCatName val="0"/>
+          <c:showSerName val="0"/>
+          <c:showPercent val="0"/>
+          <c:showBubbleSize val="0"/>
+          <c:showLeaderLines val="0"/>
+        </c:dLbls>
+        <c:gapWidth val="40"/>
+        <c:overlap val="100"/>
+        <c:axId val="2094734554"/>
+        <c:axId val="2094734552"/>
+        <c:axId val="2094734556"/>
+      </c:barChart>
+      <c:catAx>
+        <c:axId val="2094734554"/>
+        <c:scaling>
+          <c:orientation val="minMax"/>
+        </c:scaling>
+        <c:delete val="0"/>
+        <c:axPos val="l"/>
+        <c:numFmt formatCode="General" sourceLinked="1"/>
+        <c:majorTickMark val="out"/>
+        <c:minorTickMark val="none"/>
+        <c:tickLblPos val="nextTo"/>
+        <c:spPr>
+          <a:ln w="12700" cap="flat">
+            <a:noFill/>
+            <a:prstDash val="solid"/>
+            <a:round/>
+          </a:ln>
+        </c:spPr>
+        <c:txPr>
+          <a:bodyPr/>
+          <a:lstStyle/>
+          <a:p>
+            <a:pPr>
+              <a:defRPr sz="750" b="0" i="0" u="none" strike="noStrike">
+                <a:solidFill>
+                  <a:srgbClr val="53565A"/>
+                </a:solidFill>
+                <a:latin typeface="Arial"/>
+              </a:defRPr>
+            </a:pPr>
+            <a:endParaRPr lang="en-US"/>
+          </a:p>
+        </c:txPr>
+        <c:crossAx val="2094734552"/>
+        <c:crosses val="autoZero"/>
+        <c:auto val="1"/>
+        <c:lblAlgn val="ctr"/>
+        <c:noMultiLvlLbl val="1"/>
+      </c:catAx>
+      <c:valAx>
+        <c:axId val="2094734552"/>
+        <c:scaling>
+          <c:orientation val="minMax"/>
+        </c:scaling>
+        <c:delete val="1"/>
+        <c:axPos val="b"/>
+        <c:numFmt formatCode="General" sourceLinked="0"/>
+        <c:majorTickMark val="out"/>
+        <c:minorTickMark val="none"/>
+        <c:tickLblPos val="low"/>
+        <c:spPr>
+          <a:ln w="12700" cap="flat">
+            <a:noFill/>
+            <a:prstDash val="solid"/>
+            <a:round/>
+          </a:ln>
+        </c:spPr>
+        <c:txPr>
+          <a:bodyPr/>
+          <a:lstStyle/>
+          <a:p>
+            <a:pPr>
+              <a:defRPr sz="1200" b="0" i="0" u="none" strike="noStrike">
+                <a:solidFill>
+                  <a:srgbClr val="000000"/>
+                </a:solidFill>
+                <a:latin typeface="Arial"/>
+              </a:defRPr>
+            </a:pPr>
+            <a:endParaRPr lang="en-US"/>
+          </a:p>
+        </c:txPr>
+        <c:crossAx val="2094734554"/>
+        <c:crosses val="autoZero"/>
+        <c:crossBetween val="between"/>
+      </c:valAx>
+      <c:spPr>
+        <a:solidFill>
+          <a:srgbClr val="FFFFFF"/>
+        </a:solidFill>
+        <a:ln>
+          <a:noFill/>
+        </a:ln>
+        <a:effectLst/>
+      </c:spPr>
+    </c:plotArea>
+    <c:legend>
+      <c:legendPos val="b"/>
+      <c:overlay val="0"/>
+      <c:txPr>
+        <a:bodyPr/>
+        <a:lstStyle/>
+        <a:p>
+          <a:pPr>
+            <a:defRPr sz="850">      </a:defRPr>
+          </a:pPr>
+          <a:endParaRPr lang="en-US"/>
+        </a:p>
+      </c:txPr>
+    </c:legend>
+    <c:plotVisOnly val="1"/>
+    <c:dispBlanksAs val="span"/>
+  </c:chart>
+  <c:spPr>
+    <a:noFill/>
+    <a:ln>
+      <a:noFill/>
+    </a:ln>
+    <a:effectLst/>
+  </c:spPr>
+  <c:externalData r:id="rId1">
+    <c:autoUpdate val="0"/>
+  </c:externalData>
+</c:chartSpace>
+</file>
+
+<file path=ppt/charts/chart25.xml><?xml version="1.0" encoding="utf-8"?>
+<c:chartSpace xmlns:c="http://schemas.openxmlformats.org/drawingml/2006/chart" xmlns:a="http://schemas.openxmlformats.org/drawingml/2006/main" xmlns:r="http://schemas.openxmlformats.org/officeDocument/2006/relationships">
+  <c:date1904 val="0"/>
+  <c:roundedCorners val="1"/>
+  <c:chart>
+    <c:autoTitleDeleted val="1"/>
+    <c:plotArea>
+      <c:layout/>
+      <c:barChart>
+        <c:barDir val="bar"/>
         <c:grouping val="clustered"/>
         <c:varyColors val="0"/>
         <c:ser>
@@ -7206,7 +8078,7 @@
 </c:chartSpace>
 </file>
 
-<file path=ppt/charts/chart24.xml><?xml version="1.0" encoding="utf-8"?>
+<file path=ppt/charts/chart26.xml><?xml version="1.0" encoding="utf-8"?>
 <c:chartSpace xmlns:c="http://schemas.openxmlformats.org/drawingml/2006/chart" xmlns:a="http://schemas.openxmlformats.org/drawingml/2006/main" xmlns:r="http://schemas.openxmlformats.org/officeDocument/2006/relationships">
   <c:date1904 val="0"/>
   <c:roundedCorners val="1"/>
@@ -12260,6 +13132,182 @@
             <a:fld id="{F7021451-1387-4CA6-816F-3879F97B5CBC}" type="slidenum">
               <a:rPr lang="en-US"/>
               <a:t>31</a:t>
+            </a:fld>
+            <a:endParaRPr lang="en-US"/>
+          </a:p>
+        </p:txBody>
+      </p:sp>
+    </p:spTree>
+    <p:extLst>
+      <p:ext uri="{BB962C8B-B14F-4D97-AF65-F5344CB8AC3E}">
+        <p14:creationId xmlns:p14="http://schemas.microsoft.com/office/powerpoint/2010/main" val="1024086991"/>
+      </p:ext>
+    </p:extLst>
+  </p:cSld>
+  <p:clrMapOvr>
+    <a:masterClrMapping/>
+  </p:clrMapOvr>
+</p:notes>
+</file>
+
+<file path=ppt/notesSlides/notesSlide32.xml><?xml version="1.0" encoding="utf-8"?>
+<p:notes xmlns:a="http://schemas.openxmlformats.org/drawingml/2006/main" xmlns:r="http://schemas.openxmlformats.org/officeDocument/2006/relationships" xmlns:p="http://schemas.openxmlformats.org/presentationml/2006/main">
+  <p:cSld>
+    <p:spTree>
+      <p:nvGrpSpPr>
+        <p:cNvPr id="1" name=""/>
+        <p:cNvGrpSpPr/>
+        <p:nvPr/>
+      </p:nvGrpSpPr>
+      <p:grpSpPr>
+        <a:xfrm>
+          <a:off x="0" y="0"/>
+          <a:ext cx="0" cy="0"/>
+          <a:chOff x="0" y="0"/>
+          <a:chExt cx="0" cy="0"/>
+        </a:xfrm>
+      </p:grpSpPr>
+      <p:sp>
+        <p:nvSpPr>
+          <p:cNvPr id="2" name="Slide Image Placeholder 1"/>
+          <p:cNvSpPr>
+            <a:spLocks noGrp="1" noRot="1" noChangeAspect="1"/>
+          </p:cNvSpPr>
+          <p:nvPr>
+            <p:ph type="sldImg"/>
+          </p:nvPr>
+        </p:nvSpPr>
+        <p:spPr/>
+      </p:sp>
+      <p:sp>
+        <p:nvSpPr>
+          <p:cNvPr id="3" name="Notes Placeholder 2"/>
+          <p:cNvSpPr>
+            <a:spLocks noGrp="1"/>
+          </p:cNvSpPr>
+          <p:nvPr>
+            <p:ph type="body" idx="1"/>
+          </p:nvPr>
+        </p:nvSpPr>
+        <p:spPr/>
+        <p:txBody>
+          <a:bodyPr/>
+          <a:lstStyle/>
+          <a:p>
+            <a:r>
+              <a:rPr lang="en-US" dirty="0"/>
+              <a:t/>
+            </a:r>
+            <a:endParaRPr lang="en-US" dirty="0"/>
+          </a:p>
+        </p:txBody>
+      </p:sp>
+      <p:sp>
+        <p:nvSpPr>
+          <p:cNvPr id="4" name="Slide Number Placeholder 3"/>
+          <p:cNvSpPr>
+            <a:spLocks noGrp="1"/>
+          </p:cNvSpPr>
+          <p:nvPr>
+            <p:ph type="sldNum" sz="quarter" idx="10"/>
+          </p:nvPr>
+        </p:nvSpPr>
+        <p:spPr/>
+        <p:txBody>
+          <a:bodyPr/>
+          <a:lstStyle/>
+          <a:p>
+            <a:fld id="{F7021451-1387-4CA6-816F-3879F97B5CBC}" type="slidenum">
+              <a:rPr lang="en-US"/>
+              <a:t>32</a:t>
+            </a:fld>
+            <a:endParaRPr lang="en-US"/>
+          </a:p>
+        </p:txBody>
+      </p:sp>
+    </p:spTree>
+    <p:extLst>
+      <p:ext uri="{BB962C8B-B14F-4D97-AF65-F5344CB8AC3E}">
+        <p14:creationId xmlns:p14="http://schemas.microsoft.com/office/powerpoint/2010/main" val="1024086991"/>
+      </p:ext>
+    </p:extLst>
+  </p:cSld>
+  <p:clrMapOvr>
+    <a:masterClrMapping/>
+  </p:clrMapOvr>
+</p:notes>
+</file>
+
+<file path=ppt/notesSlides/notesSlide33.xml><?xml version="1.0" encoding="utf-8"?>
+<p:notes xmlns:a="http://schemas.openxmlformats.org/drawingml/2006/main" xmlns:r="http://schemas.openxmlformats.org/officeDocument/2006/relationships" xmlns:p="http://schemas.openxmlformats.org/presentationml/2006/main">
+  <p:cSld>
+    <p:spTree>
+      <p:nvGrpSpPr>
+        <p:cNvPr id="1" name=""/>
+        <p:cNvGrpSpPr/>
+        <p:nvPr/>
+      </p:nvGrpSpPr>
+      <p:grpSpPr>
+        <a:xfrm>
+          <a:off x="0" y="0"/>
+          <a:ext cx="0" cy="0"/>
+          <a:chOff x="0" y="0"/>
+          <a:chExt cx="0" cy="0"/>
+        </a:xfrm>
+      </p:grpSpPr>
+      <p:sp>
+        <p:nvSpPr>
+          <p:cNvPr id="2" name="Slide Image Placeholder 1"/>
+          <p:cNvSpPr>
+            <a:spLocks noGrp="1" noRot="1" noChangeAspect="1"/>
+          </p:cNvSpPr>
+          <p:nvPr>
+            <p:ph type="sldImg"/>
+          </p:nvPr>
+        </p:nvSpPr>
+        <p:spPr/>
+      </p:sp>
+      <p:sp>
+        <p:nvSpPr>
+          <p:cNvPr id="3" name="Notes Placeholder 2"/>
+          <p:cNvSpPr>
+            <a:spLocks noGrp="1"/>
+          </p:cNvSpPr>
+          <p:nvPr>
+            <p:ph type="body" idx="1"/>
+          </p:nvPr>
+        </p:nvSpPr>
+        <p:spPr/>
+        <p:txBody>
+          <a:bodyPr/>
+          <a:lstStyle/>
+          <a:p>
+            <a:r>
+              <a:rPr lang="en-US" dirty="0"/>
+              <a:t/>
+            </a:r>
+            <a:endParaRPr lang="en-US" dirty="0"/>
+          </a:p>
+        </p:txBody>
+      </p:sp>
+      <p:sp>
+        <p:nvSpPr>
+          <p:cNvPr id="4" name="Slide Number Placeholder 3"/>
+          <p:cNvSpPr>
+            <a:spLocks noGrp="1"/>
+          </p:cNvSpPr>
+          <p:nvPr>
+            <p:ph type="sldNum" sz="quarter" idx="10"/>
+          </p:nvPr>
+        </p:nvSpPr>
+        <p:spPr/>
+        <p:txBody>
+          <a:bodyPr/>
+          <a:lstStyle/>
+          <a:p>
+            <a:fld id="{F7021451-1387-4CA6-816F-3879F97B5CBC}" type="slidenum">
+              <a:rPr lang="en-US"/>
+              <a:t>33</a:t>
             </a:fld>
             <a:endParaRPr lang="en-US"/>
           </a:p>
@@ -20825,7 +21873,7 @@
     <p:bg>
       <p:bgPr>
         <a:solidFill>
-          <a:srgbClr val="86BC25"/>
+          <a:srgbClr val="FFFFFF"/>
         </a:solidFill>
       </p:bgPr>
     </p:bg>
@@ -20851,47 +21899,8 @@
         </p:nvSpPr>
         <p:spPr>
           <a:xfrm>
-            <a:off x="502920" y="1699870"/>
-            <a:ext cx="10415016" cy="1591970"/>
-          </a:xfrm>
-          <a:prstGeom prst="rect">
-            <a:avLst/>
-          </a:prstGeom>
-          <a:noFill/>
-          <a:ln/>
-        </p:spPr>
-        <p:txBody>
-          <a:bodyPr wrap="square" lIns="0" tIns="0" rIns="0" bIns="0" rtlCol="0" anchor="b"/>
-          <a:lstStyle/>
-          <a:p>
-            <a:pPr algn="l" indent="0" marL="0">
-              <a:buNone/>
-            </a:pPr>
-            <a:r>
-              <a:rPr lang="en-US" sz="3600" b="1" dirty="0">
-                <a:solidFill>
-                  <a:srgbClr val="FFFFFF"/>
-                </a:solidFill>
-                <a:latin typeface="Calibri" pitchFamily="34" charset="0"/>
-                <a:ea typeface="Calibri" pitchFamily="34" charset="-122"/>
-                <a:cs typeface="Calibri" pitchFamily="34" charset="-120"/>
-              </a:rPr>
-              <a:t>5. Regulatory &amp; Market Change</a:t>
-            </a:r>
-            <a:endParaRPr lang="en-US" sz="3600" dirty="0"/>
-          </a:p>
-        </p:txBody>
-      </p:sp>
-      <p:sp>
-        <p:nvSpPr>
-          <p:cNvPr id="3" name="Text 1"/>
-          <p:cNvSpPr txBox="1"/>
-          <p:nvPr/>
-        </p:nvSpPr>
-        <p:spPr>
-          <a:xfrm>
-            <a:off x="502920" y="3423514"/>
-            <a:ext cx="10415016" cy="1563624"/>
+            <a:off x="502006" y="256032"/>
+            <a:ext cx="11188598" cy="310896"/>
           </a:xfrm>
           <a:prstGeom prst="rect">
             <a:avLst/>
@@ -20904,29 +21913,150 @@
           <a:lstStyle/>
           <a:p>
             <a:pPr algn="l" indent="0" marL="0">
+              <a:buNone/>
+            </a:pPr>
+            <a:r>
+              <a:rPr lang="en-US" sz="1900" b="1" dirty="0">
+                <a:solidFill>
+                  <a:srgbClr val="000000"/>
+                </a:solidFill>
+                <a:latin typeface="Calibri" pitchFamily="34" charset="0"/>
+                <a:ea typeface="Calibri" pitchFamily="34" charset="-122"/>
+                <a:cs typeface="Calibri" pitchFamily="34" charset="-120"/>
+              </a:rPr>
+              <a:t>Current Scaling Approach — By Sector and Institution Tier</a:t>
+            </a:r>
+            <a:endParaRPr lang="en-US" sz="1900" dirty="0"/>
+          </a:p>
+        </p:txBody>
+      </p:sp>
+      <p:sp>
+        <p:nvSpPr>
+          <p:cNvPr id="3" name="Text 1"/>
+          <p:cNvSpPr txBox="1"/>
+          <p:nvPr/>
+        </p:nvSpPr>
+        <p:spPr>
+          <a:xfrm>
+            <a:off x="502006" y="585216"/>
+            <a:ext cx="11188598" cy="713232"/>
+          </a:xfrm>
+          <a:prstGeom prst="rect">
+            <a:avLst/>
+          </a:prstGeom>
+          <a:noFill/>
+          <a:ln/>
+        </p:spPr>
+        <p:txBody>
+          <a:bodyPr wrap="square" lIns="0" tIns="0" rIns="0" bIns="0" rtlCol="0" anchor="t"/>
+          <a:lstStyle/>
+          <a:p>
+            <a:pPr algn="l" indent="0" marL="0">
               <a:lnSpc>
-                <a:spcPct val="110000"/>
+                <a:spcPct val="105000"/>
               </a:lnSpc>
               <a:buNone/>
             </a:pPr>
             <a:r>
-              <a:rPr lang="en-US" sz="1600" dirty="0">
-                <a:solidFill>
-                  <a:srgbClr val="FFFFFF"/>
-                </a:solidFill>
-                <a:latin typeface="Calibri" pitchFamily="34" charset="0"/>
-                <a:ea typeface="Calibri" pitchFamily="34" charset="-122"/>
-                <a:cs typeface="Calibri" pitchFamily="34" charset="-120"/>
-              </a:rPr>
-              <a:t>Where fraud investment is really going, and the disruption leaders see coming next.</a:t>
-            </a:r>
-            <a:endParaRPr lang="en-US" sz="1600" dirty="0"/>
+              <a:rPr lang="en-US" sz="1350" b="1" dirty="0">
+                <a:solidFill>
+                  <a:srgbClr val="046A38"/>
+                </a:solidFill>
+                <a:latin typeface="Calibri" pitchFamily="34" charset="0"/>
+                <a:ea typeface="Calibri" pitchFamily="34" charset="-122"/>
+                <a:cs typeface="Calibri" pitchFamily="34" charset="-120"/>
+              </a:rPr>
+              <a:t>AI-enabled tools lead in both sectors, but Top-tier institutions lean on it more heavily than Large institutions.</a:t>
+            </a:r>
+            <a:endParaRPr lang="en-US" sz="1350" dirty="0"/>
           </a:p>
         </p:txBody>
       </p:sp>
       <p:sp>
         <p:nvSpPr>
-          <p:cNvPr id="4" name="Text 2"/>
+          <p:cNvPr id="4" name="Shape 2"/>
+          <p:cNvSpPr/>
+          <p:nvPr/>
+        </p:nvSpPr>
+        <p:spPr>
+          <a:xfrm>
+            <a:off x="502006" y="1335024"/>
+            <a:ext cx="0" cy="512064"/>
+          </a:xfrm>
+          <a:prstGeom prst="line">
+            <a:avLst/>
+          </a:prstGeom>
+          <a:noFill/>
+          <a:ln w="25400">
+            <a:solidFill>
+              <a:srgbClr val="D0D0CE"/>
+            </a:solidFill>
+            <a:prstDash val="solid"/>
+          </a:ln>
+        </p:spPr>
+      </p:sp>
+      <p:sp>
+        <p:nvSpPr>
+          <p:cNvPr id="5" name="Text 3"/>
+          <p:cNvSpPr txBox="1"/>
+          <p:nvPr/>
+        </p:nvSpPr>
+        <p:spPr>
+          <a:xfrm>
+            <a:off x="648310" y="1335024"/>
+            <a:ext cx="11042294" cy="512064"/>
+          </a:xfrm>
+          <a:prstGeom prst="rect">
+            <a:avLst/>
+          </a:prstGeom>
+          <a:noFill/>
+          <a:ln/>
+        </p:spPr>
+        <p:txBody>
+          <a:bodyPr wrap="square" lIns="0" tIns="0" rIns="0" bIns="0" rtlCol="0" anchor="t"/>
+          <a:lstStyle/>
+          <a:p>
+            <a:pPr algn="l" indent="0" marL="0">
+              <a:lnSpc>
+                <a:spcPct val="106000"/>
+              </a:lnSpc>
+              <a:buNone/>
+            </a:pPr>
+            <a:r>
+              <a:rPr lang="en-US" sz="900" b="1" dirty="0">
+                <a:solidFill>
+                  <a:srgbClr val="046A38"/>
+                </a:solidFill>
+                <a:latin typeface="IBM Plex Mono" pitchFamily="34" charset="0"/>
+                <a:ea typeface="IBM Plex Mono" pitchFamily="34" charset="-122"/>
+                <a:cs typeface="IBM Plex Mono" pitchFamily="34" charset="-120"/>
+              </a:rPr>
+              <a:t>Q8 / newS8 / S9  </a:t>
+            </a:r>
+            <a:pPr algn="l" indent="0" marL="0">
+              <a:lnSpc>
+                <a:spcPct val="106000"/>
+              </a:lnSpc>
+              <a:buNone/>
+            </a:pPr>
+            <a:r>
+              <a:rPr lang="en-US" sz="1000" i="1" dirty="0">
+                <a:solidFill>
+                  <a:srgbClr val="575757"/>
+                </a:solidFill>
+                <a:latin typeface="Calibri" pitchFamily="34" charset="0"/>
+                <a:ea typeface="Calibri" pitchFamily="34" charset="-122"/>
+                <a:cs typeface="Calibri" pitchFamily="34" charset="-120"/>
+              </a:rPr>
+              <a:t>“Which statement best describes your current approach to scaling fraud/investigations operations as fraud volume and complexity increases? (Banking vs. Insurance, further broken down by institution tier)”</a:t>
+            </a:r>
+            <a:endParaRPr lang="en-US" sz="1000" dirty="0"/>
+          </a:p>
+        </p:txBody>
+      </p:sp>
+      <p:sp>
+        <p:nvSpPr>
+          <p:cNvPr id="6" name="Text 4"/>
           <p:cNvSpPr txBox="1"/>
           <p:nvPr/>
         </p:nvSpPr>
@@ -20951,7 +22081,7 @@
             <a:r>
               <a:rPr lang="en-US" sz="900" dirty="0">
                 <a:solidFill>
-                  <a:srgbClr val="FFFFFF"/>
+                  <a:srgbClr val="53565A"/>
                 </a:solidFill>
                 <a:latin typeface="Calibri" pitchFamily="34" charset="0"/>
                 <a:ea typeface="Calibri" pitchFamily="34" charset="-122"/>
@@ -20960,6 +22090,163 @@
               <a:t>25</a:t>
             </a:r>
             <a:endParaRPr lang="en-US" sz="900" dirty="0"/>
+          </a:p>
+        </p:txBody>
+      </p:sp>
+      <p:graphicFrame>
+        <p:nvGraphicFramePr>
+          <p:cNvPr id="7" name="Chart 0" descr=""/>
+          <p:cNvGraphicFramePr/>
+          <p:nvPr/>
+        </p:nvGraphicFramePr>
+        <p:xfrm>
+          <a:off x="502006" y="2011680"/>
+          <a:ext cx="11188598" cy="3063240"/>
+        </p:xfrm>
+        <a:graphic xmlns:a="http://schemas.openxmlformats.org/drawingml/2006/main">
+          <a:graphicData uri="http://schemas.openxmlformats.org/drawingml/2006/chart">
+            <c:chart xmlns:c="http://schemas.openxmlformats.org/drawingml/2006/chart" r:id="rId1"/>
+          </a:graphicData>
+        </a:graphic>
+      </p:graphicFrame>
+      <p:sp>
+        <p:nvSpPr>
+          <p:cNvPr id="8" name="Shape 5"/>
+          <p:cNvSpPr/>
+          <p:nvPr/>
+        </p:nvSpPr>
+        <p:spPr>
+          <a:xfrm>
+            <a:off x="502006" y="5202936"/>
+            <a:ext cx="11188598" cy="0"/>
+          </a:xfrm>
+          <a:prstGeom prst="line">
+            <a:avLst/>
+          </a:prstGeom>
+          <a:noFill/>
+          <a:ln w="9525">
+            <a:solidFill>
+              <a:srgbClr val="D0D0CE"/>
+            </a:solidFill>
+            <a:prstDash val="solid"/>
+          </a:ln>
+        </p:spPr>
+      </p:sp>
+      <p:sp>
+        <p:nvSpPr>
+          <p:cNvPr id="9" name="Text 6"/>
+          <p:cNvSpPr txBox="1"/>
+          <p:nvPr/>
+        </p:nvSpPr>
+        <p:spPr>
+          <a:xfrm>
+            <a:off x="502006" y="5276088"/>
+            <a:ext cx="11188598" cy="548640"/>
+          </a:xfrm>
+          <a:prstGeom prst="rect">
+            <a:avLst/>
+          </a:prstGeom>
+          <a:noFill/>
+          <a:ln/>
+        </p:spPr>
+        <p:txBody>
+          <a:bodyPr wrap="square" lIns="0" tIns="0" rIns="0" bIns="0" rtlCol="0" anchor="t"/>
+          <a:lstStyle/>
+          <a:p>
+            <a:pPr algn="l" indent="0" marL="0">
+              <a:lnSpc>
+                <a:spcPct val="115000"/>
+              </a:lnSpc>
+              <a:buNone/>
+            </a:pPr>
+            <a:r>
+              <a:rPr lang="en-US" sz="850" b="1" dirty="0">
+                <a:solidFill>
+                  <a:srgbClr val="53565A"/>
+                </a:solidFill>
+                <a:latin typeface="Calibri" pitchFamily="34" charset="0"/>
+                <a:ea typeface="Calibri" pitchFamily="34" charset="-122"/>
+                <a:cs typeface="Calibri" pitchFamily="34" charset="-120"/>
+              </a:rPr>
+              <a:t>Single select. </a:t>
+            </a:r>
+            <a:pPr algn="l" indent="0" marL="0">
+              <a:lnSpc>
+                <a:spcPct val="115000"/>
+              </a:lnSpc>
+              <a:buNone/>
+            </a:pPr>
+            <a:r>
+              <a:rPr lang="en-US" sz="850" dirty="0">
+                <a:solidFill>
+                  <a:srgbClr val="53565A"/>
+                </a:solidFill>
+                <a:latin typeface="Calibri" pitchFamily="34" charset="0"/>
+                <a:ea typeface="Calibri" pitchFamily="34" charset="-122"/>
+                <a:cs typeface="Calibri" pitchFamily="34" charset="-120"/>
+              </a:rPr>
+              <a:t>The % in each category label is the full sector-level figure; tier segments are rounded to the nearest whole percent and may sum to within ±1pt of that total. Institution tier is based on newS8 (Banking) / S9 (Insurance), including respondents reclassified from their employer description elsewhere in the survey — Banking Top 100 is n=40, Insurance Large is n=10 (see the Q1 sector x tier slide for detail).</a:t>
+            </a:r>
+            <a:endParaRPr lang="en-US" sz="850" dirty="0"/>
+          </a:p>
+        </p:txBody>
+      </p:sp>
+      <p:sp>
+        <p:nvSpPr>
+          <p:cNvPr id="10" name="Text 7"/>
+          <p:cNvSpPr txBox="1"/>
+          <p:nvPr/>
+        </p:nvSpPr>
+        <p:spPr>
+          <a:xfrm>
+            <a:off x="502006" y="5843016"/>
+            <a:ext cx="11188598" cy="402336"/>
+          </a:xfrm>
+          <a:prstGeom prst="rect">
+            <a:avLst/>
+          </a:prstGeom>
+          <a:noFill/>
+          <a:ln/>
+        </p:spPr>
+        <p:txBody>
+          <a:bodyPr wrap="square" lIns="0" tIns="0" rIns="0" bIns="0" rtlCol="0" anchor="t"/>
+          <a:lstStyle/>
+          <a:p>
+            <a:pPr algn="l" indent="0" marL="0">
+              <a:lnSpc>
+                <a:spcPct val="110000"/>
+              </a:lnSpc>
+              <a:buNone/>
+            </a:pPr>
+            <a:r>
+              <a:rPr lang="en-US" sz="850" b="1" dirty="0">
+                <a:solidFill>
+                  <a:srgbClr val="53565A"/>
+                </a:solidFill>
+                <a:latin typeface="Calibri" pitchFamily="34" charset="0"/>
+                <a:ea typeface="Calibri" pitchFamily="34" charset="-122"/>
+                <a:cs typeface="Calibri" pitchFamily="34" charset="-120"/>
+              </a:rPr>
+              <a:t>Response options as fielded: </a:t>
+            </a:r>
+            <a:pPr algn="l" indent="0" marL="0">
+              <a:lnSpc>
+                <a:spcPct val="110000"/>
+              </a:lnSpc>
+              <a:buNone/>
+            </a:pPr>
+            <a:r>
+              <a:rPr lang="en-US" sz="800" i="1" dirty="0">
+                <a:solidFill>
+                  <a:srgbClr val="53565A"/>
+                </a:solidFill>
+                <a:latin typeface="Calibri" pitchFamily="34" charset="0"/>
+                <a:ea typeface="Calibri" pitchFamily="34" charset="-122"/>
+                <a:cs typeface="Calibri" pitchFamily="34" charset="-120"/>
+              </a:rPr>
+              <a:t>“Adding capacity through hiring full-time employees and workforce expansion” · “Adding capacity through outsourcing arrangements (e.g., contractors)” · “Automating workflows and minimizing manual activities” · “Augmenting existing capacity with AI-enabled tools” · “Redesigning operation processes and playbooks across the lifecycle” · “Pursuing a combination of the above approaches”</a:t>
+            </a:r>
+            <a:endParaRPr lang="en-US" sz="850" dirty="0"/>
           </a:p>
         </p:txBody>
       </p:sp>
@@ -21028,7 +22315,7 @@
                 <a:ea typeface="Calibri" pitchFamily="34" charset="-122"/>
                 <a:cs typeface="Calibri" pitchFamily="34" charset="-120"/>
               </a:rPr>
-              <a:t>Fraud Investment Relative to Regulatory Requirements</a:t>
+              <a:t>3-Year Scaling Focus — By Sector and Institution Tier</a:t>
             </a:r>
             <a:endParaRPr lang="en-US" sz="1900" dirty="0"/>
           </a:p>
@@ -21070,7 +22357,7 @@
                 <a:ea typeface="Calibri" pitchFamily="34" charset="-122"/>
                 <a:cs typeface="Calibri" pitchFamily="34" charset="-120"/>
               </a:rPr>
-              <a:t>Most fraud spending today is about fixing past problems, not getting ahead of new ones.</a:t>
+              <a:t>AI's lead grows in every tier — but Insurance's Top-tier carriers show the sharpest three-year pivot toward it.</a:t>
             </a:r>
             <a:endParaRPr lang="en-US" sz="1350" dirty="0"/>
           </a:p>
@@ -21135,7 +22422,7 @@
                 <a:ea typeface="IBM Plex Mono" pitchFamily="34" charset="-122"/>
                 <a:cs typeface="IBM Plex Mono" pitchFamily="34" charset="-120"/>
               </a:rPr>
-              <a:t>Q10  </a:t>
+              <a:t>Q9 / newS8 / S9  </a:t>
             </a:r>
             <a:pPr algn="l" indent="0" marL="0">
               <a:lnSpc>
@@ -21152,7 +22439,7 @@
                 <a:ea typeface="Calibri" pitchFamily="34" charset="-122"/>
                 <a:cs typeface="Calibri" pitchFamily="34" charset="-120"/>
               </a:rPr>
-              <a:t>“Which statement best reflects how your organization is allocating fraud-related investment in response to regulatory and compliance requirements?”</a:t>
+              <a:t>“Which area do you expect will receive the greatest focus for fraud/investigations operations transformation over the next three years? (Banking vs. Insurance, further broken down by institution tier)”</a:t>
             </a:r>
             <a:endParaRPr lang="en-US" sz="1000" dirty="0"/>
           </a:p>
@@ -21245,7 +22532,7 @@
         <p:spPr>
           <a:xfrm>
             <a:off x="502006" y="5276088"/>
-            <a:ext cx="11188598" cy="886968"/>
+            <a:ext cx="11188598" cy="548640"/>
           </a:xfrm>
           <a:prstGeom prst="rect">
             <a:avLst/>
@@ -21259,7 +22546,7 @@
           <a:p>
             <a:pPr algn="l" indent="0" marL="0">
               <a:lnSpc>
-                <a:spcPct val="118000"/>
+                <a:spcPct val="115000"/>
               </a:lnSpc>
               <a:buNone/>
             </a:pPr>
@@ -21272,15 +22559,57 @@
                 <a:ea typeface="Calibri" pitchFamily="34" charset="-122"/>
                 <a:cs typeface="Calibri" pitchFamily="34" charset="-120"/>
               </a:rPr>
-              <a:t>Single select.  </a:t>
+              <a:t>Single select. </a:t>
             </a:r>
             <a:pPr algn="l" indent="0" marL="0">
               <a:lnSpc>
-                <a:spcPct val="118000"/>
+                <a:spcPct val="115000"/>
               </a:lnSpc>
               <a:buNone/>
             </a:pPr>
             <a:r>
+              <a:rPr lang="en-US" sz="850" dirty="0">
+                <a:solidFill>
+                  <a:srgbClr val="53565A"/>
+                </a:solidFill>
+                <a:latin typeface="Calibri" pitchFamily="34" charset="0"/>
+                <a:ea typeface="Calibri" pitchFamily="34" charset="-122"/>
+                <a:cs typeface="Calibri" pitchFamily="34" charset="-120"/>
+              </a:rPr>
+              <a:t>The % in each category label is the full sector-level figure; tier segments are rounded to the nearest whole percent and may sum to within ±1pt of that total. Institution tier is based on newS8 (Banking) / S9 (Insurance), including respondents reclassified from their employer description elsewhere in the survey — Banking Top 100 is n=40, Insurance Large is n=10 (see the Q1 sector x tier slide for detail).</a:t>
+            </a:r>
+            <a:endParaRPr lang="en-US" sz="850" dirty="0"/>
+          </a:p>
+        </p:txBody>
+      </p:sp>
+      <p:sp>
+        <p:nvSpPr>
+          <p:cNvPr id="10" name="Text 7"/>
+          <p:cNvSpPr txBox="1"/>
+          <p:nvPr/>
+        </p:nvSpPr>
+        <p:spPr>
+          <a:xfrm>
+            <a:off x="502006" y="5843016"/>
+            <a:ext cx="11188598" cy="402336"/>
+          </a:xfrm>
+          <a:prstGeom prst="rect">
+            <a:avLst/>
+          </a:prstGeom>
+          <a:noFill/>
+          <a:ln/>
+        </p:spPr>
+        <p:txBody>
+          <a:bodyPr wrap="square" lIns="0" tIns="0" rIns="0" bIns="0" rtlCol="0" anchor="t"/>
+          <a:lstStyle/>
+          <a:p>
+            <a:pPr algn="l" indent="0" marL="0">
+              <a:lnSpc>
+                <a:spcPct val="110000"/>
+              </a:lnSpc>
+              <a:buNone/>
+            </a:pPr>
+            <a:r>
               <a:rPr lang="en-US" sz="850" b="1" dirty="0">
                 <a:solidFill>
                   <a:srgbClr val="53565A"/>
@@ -21293,12 +22622,12 @@
             </a:r>
             <a:pPr algn="l" indent="0" marL="0">
               <a:lnSpc>
-                <a:spcPct val="118000"/>
+                <a:spcPct val="110000"/>
               </a:lnSpc>
               <a:buNone/>
             </a:pPr>
             <a:r>
-              <a:rPr lang="en-US" sz="850" i="1" dirty="0">
+              <a:rPr lang="en-US" sz="800" i="1" dirty="0">
                 <a:solidFill>
                   <a:srgbClr val="53565A"/>
                 </a:solidFill>
@@ -21306,75 +22635,7 @@
                 <a:ea typeface="Calibri" pitchFamily="34" charset="-122"/>
                 <a:cs typeface="Calibri" pitchFamily="34" charset="-120"/>
               </a:rPr>
-              <a:t>“Primarily investing to meet upcoming and draft regulatory requirements”</a:t>
-            </a:r>
-            <a:pPr algn="l" indent="0" marL="0">
-              <a:lnSpc>
-                <a:spcPct val="118000"/>
-              </a:lnSpc>
-              <a:buNone/>
-            </a:pPr>
-            <a:r>
-              <a:rPr lang="en-US" sz="850" dirty="0">
-                <a:solidFill>
-                  <a:srgbClr val="D0D0CE"/>
-                </a:solidFill>
-                <a:latin typeface="Calibri" pitchFamily="34" charset="0"/>
-                <a:ea typeface="Calibri" pitchFamily="34" charset="-122"/>
-                <a:cs typeface="Calibri" pitchFamily="34" charset="-120"/>
-              </a:rPr>
-              <a:t>  ·  </a:t>
-            </a:r>
-            <a:pPr algn="l" indent="0" marL="0">
-              <a:lnSpc>
-                <a:spcPct val="118000"/>
-              </a:lnSpc>
-              <a:buNone/>
-            </a:pPr>
-            <a:r>
-              <a:rPr lang="en-US" sz="850" i="1" dirty="0">
-                <a:solidFill>
-                  <a:srgbClr val="53565A"/>
-                </a:solidFill>
-                <a:latin typeface="Calibri" pitchFamily="34" charset="0"/>
-                <a:ea typeface="Calibri" pitchFamily="34" charset="-122"/>
-                <a:cs typeface="Calibri" pitchFamily="34" charset="-120"/>
-              </a:rPr>
-              <a:t>“Primarily investing to remediate existing compliance and control gaps”</a:t>
-            </a:r>
-            <a:pPr algn="l" indent="0" marL="0">
-              <a:lnSpc>
-                <a:spcPct val="118000"/>
-              </a:lnSpc>
-              <a:buNone/>
-            </a:pPr>
-            <a:r>
-              <a:rPr lang="en-US" sz="850" dirty="0">
-                <a:solidFill>
-                  <a:srgbClr val="D0D0CE"/>
-                </a:solidFill>
-                <a:latin typeface="Calibri" pitchFamily="34" charset="0"/>
-                <a:ea typeface="Calibri" pitchFamily="34" charset="-122"/>
-                <a:cs typeface="Calibri" pitchFamily="34" charset="-120"/>
-              </a:rPr>
-              <a:t>  ·  </a:t>
-            </a:r>
-            <a:pPr algn="l" indent="0" marL="0">
-              <a:lnSpc>
-                <a:spcPct val="118000"/>
-              </a:lnSpc>
-              <a:buNone/>
-            </a:pPr>
-            <a:r>
-              <a:rPr lang="en-US" sz="850" i="1" dirty="0">
-                <a:solidFill>
-                  <a:srgbClr val="53565A"/>
-                </a:solidFill>
-                <a:latin typeface="Calibri" pitchFamily="34" charset="0"/>
-                <a:ea typeface="Calibri" pitchFamily="34" charset="-122"/>
-                <a:cs typeface="Calibri" pitchFamily="34" charset="-120"/>
-              </a:rPr>
-              <a:t>“Regulatory requirements are not a primary driver of fraud-related investment”</a:t>
+              <a:t>“Adding capacity through hiring full-time employees and workforce expansion” · “Adding capacity through outsourcing arrangements (e.g., contractors)” · “Automating workflows and minimizing manual activities” · “Augmenting existing capacity with AI-enabled tools” · “Redesigning operation processes and playbooks across the lifecycle” · “Pursuing a combination of the above approaches”</a:t>
             </a:r>
             <a:endParaRPr lang="en-US" sz="850" dirty="0"/>
           </a:p>
@@ -21391,6 +22652,158 @@
 <file path=ppt/slides/slide28.xml><?xml version="1.0" encoding="utf-8"?>
 <p:sld xmlns:a="http://schemas.openxmlformats.org/drawingml/2006/main" xmlns:r="http://schemas.openxmlformats.org/officeDocument/2006/relationships" xmlns:p="http://schemas.openxmlformats.org/presentationml/2006/main">
   <p:cSld name="Slide 28">
+    <p:bg>
+      <p:bgPr>
+        <a:solidFill>
+          <a:srgbClr val="86BC25"/>
+        </a:solidFill>
+      </p:bgPr>
+    </p:bg>
+    <p:spTree>
+      <p:nvGrpSpPr>
+        <p:cNvPr id="1" name=""/>
+        <p:cNvGrpSpPr/>
+        <p:nvPr/>
+      </p:nvGrpSpPr>
+      <p:grpSpPr>
+        <a:xfrm>
+          <a:off x="0" y="0"/>
+          <a:ext cx="0" cy="0"/>
+          <a:chOff x="0" y="0"/>
+          <a:chExt cx="0" cy="0"/>
+        </a:xfrm>
+      </p:grpSpPr>
+      <p:sp>
+        <p:nvSpPr>
+          <p:cNvPr id="2" name="Text 0"/>
+          <p:cNvSpPr txBox="1"/>
+          <p:nvPr/>
+        </p:nvSpPr>
+        <p:spPr>
+          <a:xfrm>
+            <a:off x="502920" y="1699870"/>
+            <a:ext cx="10415016" cy="1591970"/>
+          </a:xfrm>
+          <a:prstGeom prst="rect">
+            <a:avLst/>
+          </a:prstGeom>
+          <a:noFill/>
+          <a:ln/>
+        </p:spPr>
+        <p:txBody>
+          <a:bodyPr wrap="square" lIns="0" tIns="0" rIns="0" bIns="0" rtlCol="0" anchor="b"/>
+          <a:lstStyle/>
+          <a:p>
+            <a:pPr algn="l" indent="0" marL="0">
+              <a:buNone/>
+            </a:pPr>
+            <a:r>
+              <a:rPr lang="en-US" sz="3600" b="1" dirty="0">
+                <a:solidFill>
+                  <a:srgbClr val="FFFFFF"/>
+                </a:solidFill>
+                <a:latin typeface="Calibri" pitchFamily="34" charset="0"/>
+                <a:ea typeface="Calibri" pitchFamily="34" charset="-122"/>
+                <a:cs typeface="Calibri" pitchFamily="34" charset="-120"/>
+              </a:rPr>
+              <a:t>5. Regulatory &amp; Market Change</a:t>
+            </a:r>
+            <a:endParaRPr lang="en-US" sz="3600" dirty="0"/>
+          </a:p>
+        </p:txBody>
+      </p:sp>
+      <p:sp>
+        <p:nvSpPr>
+          <p:cNvPr id="3" name="Text 1"/>
+          <p:cNvSpPr txBox="1"/>
+          <p:nvPr/>
+        </p:nvSpPr>
+        <p:spPr>
+          <a:xfrm>
+            <a:off x="502920" y="3423514"/>
+            <a:ext cx="10415016" cy="1563624"/>
+          </a:xfrm>
+          <a:prstGeom prst="rect">
+            <a:avLst/>
+          </a:prstGeom>
+          <a:noFill/>
+          <a:ln/>
+        </p:spPr>
+        <p:txBody>
+          <a:bodyPr wrap="square" lIns="0" tIns="0" rIns="0" bIns="0" rtlCol="0" anchor="t"/>
+          <a:lstStyle/>
+          <a:p>
+            <a:pPr algn="l" indent="0" marL="0">
+              <a:lnSpc>
+                <a:spcPct val="110000"/>
+              </a:lnSpc>
+              <a:buNone/>
+            </a:pPr>
+            <a:r>
+              <a:rPr lang="en-US" sz="1600" dirty="0">
+                <a:solidFill>
+                  <a:srgbClr val="FFFFFF"/>
+                </a:solidFill>
+                <a:latin typeface="Calibri" pitchFamily="34" charset="0"/>
+                <a:ea typeface="Calibri" pitchFamily="34" charset="-122"/>
+                <a:cs typeface="Calibri" pitchFamily="34" charset="-120"/>
+              </a:rPr>
+              <a:t>Where fraud investment is really going, and the disruption leaders see coming next.</a:t>
+            </a:r>
+            <a:endParaRPr lang="en-US" sz="1600" dirty="0"/>
+          </a:p>
+        </p:txBody>
+      </p:sp>
+      <p:sp>
+        <p:nvSpPr>
+          <p:cNvPr id="4" name="Text 2"/>
+          <p:cNvSpPr txBox="1"/>
+          <p:nvPr/>
+        </p:nvSpPr>
+        <p:spPr>
+          <a:xfrm>
+            <a:off x="11346790" y="6537960"/>
+            <a:ext cx="343814" cy="182880"/>
+          </a:xfrm>
+          <a:prstGeom prst="rect">
+            <a:avLst/>
+          </a:prstGeom>
+          <a:noFill/>
+          <a:ln/>
+        </p:spPr>
+        <p:txBody>
+          <a:bodyPr wrap="square" rtlCol="0" anchor="ctr"/>
+          <a:lstStyle/>
+          <a:p>
+            <a:pPr algn="r" indent="0" marL="0">
+              <a:buNone/>
+            </a:pPr>
+            <a:r>
+              <a:rPr lang="en-US" sz="900" dirty="0">
+                <a:solidFill>
+                  <a:srgbClr val="FFFFFF"/>
+                </a:solidFill>
+                <a:latin typeface="Calibri" pitchFamily="34" charset="0"/>
+                <a:ea typeface="Calibri" pitchFamily="34" charset="-122"/>
+                <a:cs typeface="Calibri" pitchFamily="34" charset="-120"/>
+              </a:rPr>
+              <a:t>27</a:t>
+            </a:r>
+            <a:endParaRPr lang="en-US" sz="900" dirty="0"/>
+          </a:p>
+        </p:txBody>
+      </p:sp>
+    </p:spTree>
+  </p:cSld>
+  <p:clrMapOvr>
+    <a:masterClrMapping/>
+  </p:clrMapOvr>
+</p:sld>
+</file>
+
+<file path=ppt/slides/slide29.xml><?xml version="1.0" encoding="utf-8"?>
+<p:sld xmlns:a="http://schemas.openxmlformats.org/drawingml/2006/main" xmlns:r="http://schemas.openxmlformats.org/officeDocument/2006/relationships" xmlns:p="http://schemas.openxmlformats.org/presentationml/2006/main">
+  <p:cSld name="Slide 29">
     <p:bg>
       <p:bgPr>
         <a:solidFill>
@@ -21445,7 +22858,7 @@
                 <a:ea typeface="Calibri" pitchFamily="34" charset="-122"/>
                 <a:cs typeface="Calibri" pitchFamily="34" charset="-120"/>
               </a:rPr>
-              <a:t>Upcoming Regulatory / Market Change With Greatest Expected Impact</a:t>
+              <a:t>Fraud Investment Relative to Regulatory Requirements</a:t>
             </a:r>
             <a:endParaRPr lang="en-US" sz="1900" dirty="0"/>
           </a:p>
@@ -21487,7 +22900,7 @@
                 <a:ea typeface="Calibri" pitchFamily="34" charset="-122"/>
                 <a:cs typeface="Calibri" pitchFamily="34" charset="-120"/>
               </a:rPr>
-              <a:t>Identity and authentication tops a close three-way race for the next big disruption.</a:t>
+              <a:t>Most fraud spending today is about fixing past problems, not getting ahead of new ones.</a:t>
             </a:r>
             <a:endParaRPr lang="en-US" sz="1350" dirty="0"/>
           </a:p>
@@ -21552,7 +22965,7 @@
                 <a:ea typeface="IBM Plex Mono" pitchFamily="34" charset="-122"/>
                 <a:cs typeface="IBM Plex Mono" pitchFamily="34" charset="-120"/>
               </a:rPr>
-              <a:t>Q11  </a:t>
+              <a:t>Q10  </a:t>
             </a:r>
             <a:pPr algn="l" indent="0" marL="0">
               <a:lnSpc>
@@ -21569,7 +22982,7 @@
                 <a:ea typeface="Calibri" pitchFamily="34" charset="-122"/>
                 <a:cs typeface="Calibri" pitchFamily="34" charset="-120"/>
               </a:rPr>
-              <a:t>“Which upcoming regulatory or market changes is expected to have the greatest impact on your fraud program?”</a:t>
+              <a:t>“Which statement best reflects how your organization is allocating fraud-related investment in response to regulatory and compliance requirements?”</a:t>
             </a:r>
             <a:endParaRPr lang="en-US" sz="1000" dirty="0"/>
           </a:p>
@@ -21608,7 +23021,7 @@
                 <a:ea typeface="Calibri" pitchFamily="34" charset="-122"/>
                 <a:cs typeface="Calibri" pitchFamily="34" charset="-120"/>
               </a:rPr>
-              <a:t>27</a:t>
+              <a:t>28</a:t>
             </a:r>
             <a:endParaRPr lang="en-US" sz="900" dirty="0"/>
           </a:p>
@@ -21689,7 +23102,7 @@
                 <a:ea typeface="Calibri" pitchFamily="34" charset="-122"/>
                 <a:cs typeface="Calibri" pitchFamily="34" charset="-120"/>
               </a:rPr>
-              <a:t>Ranked top 3 — shown as % of respondents who placed the option anywhere in their top 3 (not mutually exclusive; bars don't sum to 100%).  </a:t>
+              <a:t>Single select.  </a:t>
             </a:r>
             <a:pPr algn="l" indent="0" marL="0">
               <a:lnSpc>
@@ -21723,7 +23136,7 @@
                 <a:ea typeface="Calibri" pitchFamily="34" charset="-122"/>
                 <a:cs typeface="Calibri" pitchFamily="34" charset="-120"/>
               </a:rPr>
-              <a:t>“Payment innovation and adoption (e.g., real-time payments, stable coins, agentic payments)”</a:t>
+              <a:t>“Primarily investing to meet upcoming and draft regulatory requirements”</a:t>
             </a:r>
             <a:pPr algn="l" indent="0" marL="0">
               <a:lnSpc>
@@ -21757,7 +23170,7 @@
                 <a:ea typeface="Calibri" pitchFamily="34" charset="-122"/>
                 <a:cs typeface="Calibri" pitchFamily="34" charset="-120"/>
               </a:rPr>
-              <a:t>“Liability and reimbursement changes”</a:t>
+              <a:t>“Primarily investing to remediate existing compliance and control gaps”</a:t>
             </a:r>
             <a:pPr algn="l" indent="0" marL="0">
               <a:lnSpc>
@@ -21791,221 +23204,9 @@
                 <a:ea typeface="Calibri" pitchFamily="34" charset="-122"/>
                 <a:cs typeface="Calibri" pitchFamily="34" charset="-120"/>
               </a:rPr>
-              <a:t>“Open Banking / Consumer-driven banking initiatives”</a:t>
-            </a:r>
-            <a:pPr algn="l" indent="0" marL="0">
-              <a:lnSpc>
-                <a:spcPct val="118000"/>
-              </a:lnSpc>
-              <a:buNone/>
-            </a:pPr>
-            <a:r>
-              <a:rPr lang="en-US" sz="850" dirty="0">
-                <a:solidFill>
-                  <a:srgbClr val="D0D0CE"/>
-                </a:solidFill>
-                <a:latin typeface="Calibri" pitchFamily="34" charset="0"/>
-                <a:ea typeface="Calibri" pitchFamily="34" charset="-122"/>
-                <a:cs typeface="Calibri" pitchFamily="34" charset="-120"/>
-              </a:rPr>
-              <a:t>  ·  </a:t>
-            </a:r>
-            <a:pPr algn="l" indent="0" marL="0">
-              <a:lnSpc>
-                <a:spcPct val="118000"/>
-              </a:lnSpc>
-              <a:buNone/>
-            </a:pPr>
-            <a:r>
-              <a:rPr lang="en-US" sz="850" i="1" dirty="0">
-                <a:solidFill>
-                  <a:srgbClr val="53565A"/>
-                </a:solidFill>
-                <a:latin typeface="Calibri" pitchFamily="34" charset="0"/>
-                <a:ea typeface="Calibri" pitchFamily="34" charset="-122"/>
-                <a:cs typeface="Calibri" pitchFamily="34" charset="-120"/>
-              </a:rPr>
-              <a:t>“AML related modernization initiatives”</a:t>
-            </a:r>
-            <a:pPr algn="l" indent="0" marL="0">
-              <a:lnSpc>
-                <a:spcPct val="118000"/>
-              </a:lnSpc>
-              <a:buNone/>
-            </a:pPr>
-            <a:r>
-              <a:rPr lang="en-US" sz="850" dirty="0">
-                <a:solidFill>
-                  <a:srgbClr val="D0D0CE"/>
-                </a:solidFill>
-                <a:latin typeface="Calibri" pitchFamily="34" charset="0"/>
-                <a:ea typeface="Calibri" pitchFamily="34" charset="-122"/>
-                <a:cs typeface="Calibri" pitchFamily="34" charset="-120"/>
-              </a:rPr>
-              <a:t>  ·  </a:t>
-            </a:r>
-            <a:pPr algn="l" indent="0" marL="0">
-              <a:lnSpc>
-                <a:spcPct val="118000"/>
-              </a:lnSpc>
-              <a:buNone/>
-            </a:pPr>
-            <a:r>
-              <a:rPr lang="en-US" sz="850" i="1" dirty="0">
-                <a:solidFill>
-                  <a:srgbClr val="53565A"/>
-                </a:solidFill>
-                <a:latin typeface="Calibri" pitchFamily="34" charset="0"/>
-                <a:ea typeface="Calibri" pitchFamily="34" charset="-122"/>
-                <a:cs typeface="Calibri" pitchFamily="34" charset="-120"/>
-              </a:rPr>
-              <a:t>“Privacy, data-sharing requirements, and AI governance requirements”</a:t>
-            </a:r>
-            <a:pPr algn="l" indent="0" marL="0">
-              <a:lnSpc>
-                <a:spcPct val="118000"/>
-              </a:lnSpc>
-              <a:buNone/>
-            </a:pPr>
-            <a:r>
-              <a:rPr lang="en-US" sz="850" dirty="0">
-                <a:solidFill>
-                  <a:srgbClr val="D0D0CE"/>
-                </a:solidFill>
-                <a:latin typeface="Calibri" pitchFamily="34" charset="0"/>
-                <a:ea typeface="Calibri" pitchFamily="34" charset="-122"/>
-                <a:cs typeface="Calibri" pitchFamily="34" charset="-120"/>
-              </a:rPr>
-              <a:t>  ·  </a:t>
-            </a:r>
-            <a:pPr algn="l" indent="0" marL="0">
-              <a:lnSpc>
-                <a:spcPct val="118000"/>
-              </a:lnSpc>
-              <a:buNone/>
-            </a:pPr>
-            <a:r>
-              <a:rPr lang="en-US" sz="850" i="1" dirty="0">
-                <a:solidFill>
-                  <a:srgbClr val="53565A"/>
-                </a:solidFill>
-                <a:latin typeface="Calibri" pitchFamily="34" charset="0"/>
-                <a:ea typeface="Calibri" pitchFamily="34" charset="-122"/>
-                <a:cs typeface="Calibri" pitchFamily="34" charset="-120"/>
-              </a:rPr>
-              <a:t>“Customer identity, authentication, and digital trust expectations”</a:t>
+              <a:t>“Regulatory requirements are not a primary driver of fraud-related investment”</a:t>
             </a:r>
             <a:endParaRPr lang="en-US" sz="850" dirty="0"/>
-          </a:p>
-        </p:txBody>
-      </p:sp>
-    </p:spTree>
-  </p:cSld>
-  <p:clrMapOvr>
-    <a:masterClrMapping/>
-  </p:clrMapOvr>
-</p:sld>
-</file>
-
-<file path=ppt/slides/slide29.xml><?xml version="1.0" encoding="utf-8"?>
-<p:sld xmlns:a="http://schemas.openxmlformats.org/drawingml/2006/main" xmlns:r="http://schemas.openxmlformats.org/officeDocument/2006/relationships" xmlns:p="http://schemas.openxmlformats.org/presentationml/2006/main">
-  <p:cSld name="Slide 29">
-    <p:bg>
-      <p:bgPr>
-        <a:solidFill>
-          <a:srgbClr val="86BC25"/>
-        </a:solidFill>
-      </p:bgPr>
-    </p:bg>
-    <p:spTree>
-      <p:nvGrpSpPr>
-        <p:cNvPr id="1" name=""/>
-        <p:cNvGrpSpPr/>
-        <p:nvPr/>
-      </p:nvGrpSpPr>
-      <p:grpSpPr>
-        <a:xfrm>
-          <a:off x="0" y="0"/>
-          <a:ext cx="0" cy="0"/>
-          <a:chOff x="0" y="0"/>
-          <a:chExt cx="0" cy="0"/>
-        </a:xfrm>
-      </p:grpSpPr>
-      <p:sp>
-        <p:nvSpPr>
-          <p:cNvPr id="2" name="Text 0"/>
-          <p:cNvSpPr txBox="1"/>
-          <p:nvPr/>
-        </p:nvSpPr>
-        <p:spPr>
-          <a:xfrm>
-            <a:off x="502920" y="1699870"/>
-            <a:ext cx="10415016" cy="1591970"/>
-          </a:xfrm>
-          <a:prstGeom prst="rect">
-            <a:avLst/>
-          </a:prstGeom>
-          <a:noFill/>
-          <a:ln/>
-        </p:spPr>
-        <p:txBody>
-          <a:bodyPr wrap="square" lIns="0" tIns="0" rIns="0" bIns="0" rtlCol="0" anchor="b"/>
-          <a:lstStyle/>
-          <a:p>
-            <a:pPr algn="l" indent="0" marL="0">
-              <a:buNone/>
-            </a:pPr>
-            <a:r>
-              <a:rPr lang="en-US" sz="3600" b="1" dirty="0">
-                <a:solidFill>
-                  <a:srgbClr val="FFFFFF"/>
-                </a:solidFill>
-                <a:latin typeface="Calibri" pitchFamily="34" charset="0"/>
-                <a:ea typeface="Calibri" pitchFamily="34" charset="-122"/>
-                <a:cs typeface="Calibri" pitchFamily="34" charset="-120"/>
-              </a:rPr>
-              <a:t>6. Looking Ahead Three Years</a:t>
-            </a:r>
-            <a:endParaRPr lang="en-US" sz="3600" dirty="0"/>
-          </a:p>
-        </p:txBody>
-      </p:sp>
-      <p:sp>
-        <p:nvSpPr>
-          <p:cNvPr id="3" name="Text 1"/>
-          <p:cNvSpPr txBox="1"/>
-          <p:nvPr/>
-        </p:nvSpPr>
-        <p:spPr>
-          <a:xfrm>
-            <a:off x="11346790" y="6537960"/>
-            <a:ext cx="343814" cy="182880"/>
-          </a:xfrm>
-          <a:prstGeom prst="rect">
-            <a:avLst/>
-          </a:prstGeom>
-          <a:noFill/>
-          <a:ln/>
-        </p:spPr>
-        <p:txBody>
-          <a:bodyPr wrap="square" rtlCol="0" anchor="ctr"/>
-          <a:lstStyle/>
-          <a:p>
-            <a:pPr algn="r" indent="0" marL="0">
-              <a:buNone/>
-            </a:pPr>
-            <a:r>
-              <a:rPr lang="en-US" sz="900" dirty="0">
-                <a:solidFill>
-                  <a:srgbClr val="FFFFFF"/>
-                </a:solidFill>
-                <a:latin typeface="Calibri" pitchFamily="34" charset="0"/>
-                <a:ea typeface="Calibri" pitchFamily="34" charset="-122"/>
-                <a:cs typeface="Calibri" pitchFamily="34" charset="-120"/>
-              </a:rPr>
-              <a:t>28</a:t>
-            </a:r>
-            <a:endParaRPr lang="en-US" sz="900" dirty="0"/>
           </a:p>
         </p:txBody>
       </p:sp>
@@ -22756,7 +23957,7 @@
                 <a:ea typeface="Calibri" pitchFamily="34" charset="-122"/>
                 <a:cs typeface="Calibri" pitchFamily="34" charset="-120"/>
               </a:rPr>
-              <a:t>What Leaders Say, Unprompted</a:t>
+              <a:t>Upcoming Regulatory / Market Change With Greatest Expected Impact</a:t>
             </a:r>
             <a:endParaRPr lang="en-US" sz="1900" dirty="0"/>
           </a:p>
@@ -22798,7 +23999,7 @@
                 <a:ea typeface="Calibri" pitchFamily="34" charset="-122"/>
                 <a:cs typeface="Calibri" pitchFamily="34" charset="-120"/>
               </a:rPr>
-              <a:t>Left to answer in their own words, leaders converge on the same trend.</a:t>
+              <a:t>Identity and authentication tops a close three-way race for the next big disruption.</a:t>
             </a:r>
             <a:endParaRPr lang="en-US" sz="1350" dirty="0"/>
           </a:p>
@@ -22863,7 +24064,7 @@
                 <a:ea typeface="IBM Plex Mono" pitchFamily="34" charset="-122"/>
                 <a:cs typeface="IBM Plex Mono" pitchFamily="34" charset="-120"/>
               </a:rPr>
-              <a:t>Q12  </a:t>
+              <a:t>Q11  </a:t>
             </a:r>
             <a:pPr algn="l" indent="0" marL="0">
               <a:lnSpc>
@@ -22880,7 +24081,7 @@
                 <a:ea typeface="Calibri" pitchFamily="34" charset="-122"/>
                 <a:cs typeface="Calibri" pitchFamily="34" charset="-120"/>
               </a:rPr>
-              <a:t>“Looking ahead three years, what development do you believe will have the greatest impact on fraud risk management, and why? (open-ended)”</a:t>
+              <a:t>“Which upcoming regulatory or market changes is expected to have the greatest impact on your fraud program?”</a:t>
             </a:r>
             <a:endParaRPr lang="en-US" sz="1000" dirty="0"/>
           </a:p>
@@ -22920,6 +24121,635 @@
                 <a:cs typeface="Calibri" pitchFamily="34" charset="-120"/>
               </a:rPr>
               <a:t>29</a:t>
+            </a:r>
+            <a:endParaRPr lang="en-US" sz="900" dirty="0"/>
+          </a:p>
+        </p:txBody>
+      </p:sp>
+      <p:graphicFrame>
+        <p:nvGraphicFramePr>
+          <p:cNvPr id="7" name="Chart 0" descr=""/>
+          <p:cNvGraphicFramePr/>
+          <p:nvPr/>
+        </p:nvGraphicFramePr>
+        <p:xfrm>
+          <a:off x="502006" y="2011680"/>
+          <a:ext cx="11188598" cy="3063240"/>
+        </p:xfrm>
+        <a:graphic xmlns:a="http://schemas.openxmlformats.org/drawingml/2006/main">
+          <a:graphicData uri="http://schemas.openxmlformats.org/drawingml/2006/chart">
+            <c:chart xmlns:c="http://schemas.openxmlformats.org/drawingml/2006/chart" r:id="rId1"/>
+          </a:graphicData>
+        </a:graphic>
+      </p:graphicFrame>
+      <p:sp>
+        <p:nvSpPr>
+          <p:cNvPr id="8" name="Shape 5"/>
+          <p:cNvSpPr/>
+          <p:nvPr/>
+        </p:nvSpPr>
+        <p:spPr>
+          <a:xfrm>
+            <a:off x="502006" y="5202936"/>
+            <a:ext cx="11188598" cy="0"/>
+          </a:xfrm>
+          <a:prstGeom prst="line">
+            <a:avLst/>
+          </a:prstGeom>
+          <a:noFill/>
+          <a:ln w="9525">
+            <a:solidFill>
+              <a:srgbClr val="D0D0CE"/>
+            </a:solidFill>
+            <a:prstDash val="solid"/>
+          </a:ln>
+        </p:spPr>
+      </p:sp>
+      <p:sp>
+        <p:nvSpPr>
+          <p:cNvPr id="9" name="Text 6"/>
+          <p:cNvSpPr txBox="1"/>
+          <p:nvPr/>
+        </p:nvSpPr>
+        <p:spPr>
+          <a:xfrm>
+            <a:off x="502006" y="5276088"/>
+            <a:ext cx="11188598" cy="886968"/>
+          </a:xfrm>
+          <a:prstGeom prst="rect">
+            <a:avLst/>
+          </a:prstGeom>
+          <a:noFill/>
+          <a:ln/>
+        </p:spPr>
+        <p:txBody>
+          <a:bodyPr wrap="square" lIns="0" tIns="0" rIns="0" bIns="0" rtlCol="0" anchor="t"/>
+          <a:lstStyle/>
+          <a:p>
+            <a:pPr algn="l" indent="0" marL="0">
+              <a:lnSpc>
+                <a:spcPct val="118000"/>
+              </a:lnSpc>
+              <a:buNone/>
+            </a:pPr>
+            <a:r>
+              <a:rPr lang="en-US" sz="850" b="1" dirty="0">
+                <a:solidFill>
+                  <a:srgbClr val="53565A"/>
+                </a:solidFill>
+                <a:latin typeface="Calibri" pitchFamily="34" charset="0"/>
+                <a:ea typeface="Calibri" pitchFamily="34" charset="-122"/>
+                <a:cs typeface="Calibri" pitchFamily="34" charset="-120"/>
+              </a:rPr>
+              <a:t>Ranked top 3 — shown as % of respondents who placed the option anywhere in their top 3 (not mutually exclusive; bars don't sum to 100%).  </a:t>
+            </a:r>
+            <a:pPr algn="l" indent="0" marL="0">
+              <a:lnSpc>
+                <a:spcPct val="118000"/>
+              </a:lnSpc>
+              <a:buNone/>
+            </a:pPr>
+            <a:r>
+              <a:rPr lang="en-US" sz="850" b="1" dirty="0">
+                <a:solidFill>
+                  <a:srgbClr val="53565A"/>
+                </a:solidFill>
+                <a:latin typeface="Calibri" pitchFamily="34" charset="0"/>
+                <a:ea typeface="Calibri" pitchFamily="34" charset="-122"/>
+                <a:cs typeface="Calibri" pitchFamily="34" charset="-120"/>
+              </a:rPr>
+              <a:t>Response options as fielded: </a:t>
+            </a:r>
+            <a:pPr algn="l" indent="0" marL="0">
+              <a:lnSpc>
+                <a:spcPct val="118000"/>
+              </a:lnSpc>
+              <a:buNone/>
+            </a:pPr>
+            <a:r>
+              <a:rPr lang="en-US" sz="850" i="1" dirty="0">
+                <a:solidFill>
+                  <a:srgbClr val="53565A"/>
+                </a:solidFill>
+                <a:latin typeface="Calibri" pitchFamily="34" charset="0"/>
+                <a:ea typeface="Calibri" pitchFamily="34" charset="-122"/>
+                <a:cs typeface="Calibri" pitchFamily="34" charset="-120"/>
+              </a:rPr>
+              <a:t>“Payment innovation and adoption (e.g., real-time payments, stable coins, agentic payments)”</a:t>
+            </a:r>
+            <a:pPr algn="l" indent="0" marL="0">
+              <a:lnSpc>
+                <a:spcPct val="118000"/>
+              </a:lnSpc>
+              <a:buNone/>
+            </a:pPr>
+            <a:r>
+              <a:rPr lang="en-US" sz="850" dirty="0">
+                <a:solidFill>
+                  <a:srgbClr val="D0D0CE"/>
+                </a:solidFill>
+                <a:latin typeface="Calibri" pitchFamily="34" charset="0"/>
+                <a:ea typeface="Calibri" pitchFamily="34" charset="-122"/>
+                <a:cs typeface="Calibri" pitchFamily="34" charset="-120"/>
+              </a:rPr>
+              <a:t>  ·  </a:t>
+            </a:r>
+            <a:pPr algn="l" indent="0" marL="0">
+              <a:lnSpc>
+                <a:spcPct val="118000"/>
+              </a:lnSpc>
+              <a:buNone/>
+            </a:pPr>
+            <a:r>
+              <a:rPr lang="en-US" sz="850" i="1" dirty="0">
+                <a:solidFill>
+                  <a:srgbClr val="53565A"/>
+                </a:solidFill>
+                <a:latin typeface="Calibri" pitchFamily="34" charset="0"/>
+                <a:ea typeface="Calibri" pitchFamily="34" charset="-122"/>
+                <a:cs typeface="Calibri" pitchFamily="34" charset="-120"/>
+              </a:rPr>
+              <a:t>“Liability and reimbursement changes”</a:t>
+            </a:r>
+            <a:pPr algn="l" indent="0" marL="0">
+              <a:lnSpc>
+                <a:spcPct val="118000"/>
+              </a:lnSpc>
+              <a:buNone/>
+            </a:pPr>
+            <a:r>
+              <a:rPr lang="en-US" sz="850" dirty="0">
+                <a:solidFill>
+                  <a:srgbClr val="D0D0CE"/>
+                </a:solidFill>
+                <a:latin typeface="Calibri" pitchFamily="34" charset="0"/>
+                <a:ea typeface="Calibri" pitchFamily="34" charset="-122"/>
+                <a:cs typeface="Calibri" pitchFamily="34" charset="-120"/>
+              </a:rPr>
+              <a:t>  ·  </a:t>
+            </a:r>
+            <a:pPr algn="l" indent="0" marL="0">
+              <a:lnSpc>
+                <a:spcPct val="118000"/>
+              </a:lnSpc>
+              <a:buNone/>
+            </a:pPr>
+            <a:r>
+              <a:rPr lang="en-US" sz="850" i="1" dirty="0">
+                <a:solidFill>
+                  <a:srgbClr val="53565A"/>
+                </a:solidFill>
+                <a:latin typeface="Calibri" pitchFamily="34" charset="0"/>
+                <a:ea typeface="Calibri" pitchFamily="34" charset="-122"/>
+                <a:cs typeface="Calibri" pitchFamily="34" charset="-120"/>
+              </a:rPr>
+              <a:t>“Open Banking / Consumer-driven banking initiatives”</a:t>
+            </a:r>
+            <a:pPr algn="l" indent="0" marL="0">
+              <a:lnSpc>
+                <a:spcPct val="118000"/>
+              </a:lnSpc>
+              <a:buNone/>
+            </a:pPr>
+            <a:r>
+              <a:rPr lang="en-US" sz="850" dirty="0">
+                <a:solidFill>
+                  <a:srgbClr val="D0D0CE"/>
+                </a:solidFill>
+                <a:latin typeface="Calibri" pitchFamily="34" charset="0"/>
+                <a:ea typeface="Calibri" pitchFamily="34" charset="-122"/>
+                <a:cs typeface="Calibri" pitchFamily="34" charset="-120"/>
+              </a:rPr>
+              <a:t>  ·  </a:t>
+            </a:r>
+            <a:pPr algn="l" indent="0" marL="0">
+              <a:lnSpc>
+                <a:spcPct val="118000"/>
+              </a:lnSpc>
+              <a:buNone/>
+            </a:pPr>
+            <a:r>
+              <a:rPr lang="en-US" sz="850" i="1" dirty="0">
+                <a:solidFill>
+                  <a:srgbClr val="53565A"/>
+                </a:solidFill>
+                <a:latin typeface="Calibri" pitchFamily="34" charset="0"/>
+                <a:ea typeface="Calibri" pitchFamily="34" charset="-122"/>
+                <a:cs typeface="Calibri" pitchFamily="34" charset="-120"/>
+              </a:rPr>
+              <a:t>“AML related modernization initiatives”</a:t>
+            </a:r>
+            <a:pPr algn="l" indent="0" marL="0">
+              <a:lnSpc>
+                <a:spcPct val="118000"/>
+              </a:lnSpc>
+              <a:buNone/>
+            </a:pPr>
+            <a:r>
+              <a:rPr lang="en-US" sz="850" dirty="0">
+                <a:solidFill>
+                  <a:srgbClr val="D0D0CE"/>
+                </a:solidFill>
+                <a:latin typeface="Calibri" pitchFamily="34" charset="0"/>
+                <a:ea typeface="Calibri" pitchFamily="34" charset="-122"/>
+                <a:cs typeface="Calibri" pitchFamily="34" charset="-120"/>
+              </a:rPr>
+              <a:t>  ·  </a:t>
+            </a:r>
+            <a:pPr algn="l" indent="0" marL="0">
+              <a:lnSpc>
+                <a:spcPct val="118000"/>
+              </a:lnSpc>
+              <a:buNone/>
+            </a:pPr>
+            <a:r>
+              <a:rPr lang="en-US" sz="850" i="1" dirty="0">
+                <a:solidFill>
+                  <a:srgbClr val="53565A"/>
+                </a:solidFill>
+                <a:latin typeface="Calibri" pitchFamily="34" charset="0"/>
+                <a:ea typeface="Calibri" pitchFamily="34" charset="-122"/>
+                <a:cs typeface="Calibri" pitchFamily="34" charset="-120"/>
+              </a:rPr>
+              <a:t>“Privacy, data-sharing requirements, and AI governance requirements”</a:t>
+            </a:r>
+            <a:pPr algn="l" indent="0" marL="0">
+              <a:lnSpc>
+                <a:spcPct val="118000"/>
+              </a:lnSpc>
+              <a:buNone/>
+            </a:pPr>
+            <a:r>
+              <a:rPr lang="en-US" sz="850" dirty="0">
+                <a:solidFill>
+                  <a:srgbClr val="D0D0CE"/>
+                </a:solidFill>
+                <a:latin typeface="Calibri" pitchFamily="34" charset="0"/>
+                <a:ea typeface="Calibri" pitchFamily="34" charset="-122"/>
+                <a:cs typeface="Calibri" pitchFamily="34" charset="-120"/>
+              </a:rPr>
+              <a:t>  ·  </a:t>
+            </a:r>
+            <a:pPr algn="l" indent="0" marL="0">
+              <a:lnSpc>
+                <a:spcPct val="118000"/>
+              </a:lnSpc>
+              <a:buNone/>
+            </a:pPr>
+            <a:r>
+              <a:rPr lang="en-US" sz="850" i="1" dirty="0">
+                <a:solidFill>
+                  <a:srgbClr val="53565A"/>
+                </a:solidFill>
+                <a:latin typeface="Calibri" pitchFamily="34" charset="0"/>
+                <a:ea typeface="Calibri" pitchFamily="34" charset="-122"/>
+                <a:cs typeface="Calibri" pitchFamily="34" charset="-120"/>
+              </a:rPr>
+              <a:t>“Customer identity, authentication, and digital trust expectations”</a:t>
+            </a:r>
+            <a:endParaRPr lang="en-US" sz="850" dirty="0"/>
+          </a:p>
+        </p:txBody>
+      </p:sp>
+    </p:spTree>
+  </p:cSld>
+  <p:clrMapOvr>
+    <a:masterClrMapping/>
+  </p:clrMapOvr>
+</p:sld>
+</file>
+
+<file path=ppt/slides/slide31.xml><?xml version="1.0" encoding="utf-8"?>
+<p:sld xmlns:a="http://schemas.openxmlformats.org/drawingml/2006/main" xmlns:r="http://schemas.openxmlformats.org/officeDocument/2006/relationships" xmlns:p="http://schemas.openxmlformats.org/presentationml/2006/main">
+  <p:cSld name="Slide 31">
+    <p:bg>
+      <p:bgPr>
+        <a:solidFill>
+          <a:srgbClr val="86BC25"/>
+        </a:solidFill>
+      </p:bgPr>
+    </p:bg>
+    <p:spTree>
+      <p:nvGrpSpPr>
+        <p:cNvPr id="1" name=""/>
+        <p:cNvGrpSpPr/>
+        <p:nvPr/>
+      </p:nvGrpSpPr>
+      <p:grpSpPr>
+        <a:xfrm>
+          <a:off x="0" y="0"/>
+          <a:ext cx="0" cy="0"/>
+          <a:chOff x="0" y="0"/>
+          <a:chExt cx="0" cy="0"/>
+        </a:xfrm>
+      </p:grpSpPr>
+      <p:sp>
+        <p:nvSpPr>
+          <p:cNvPr id="2" name="Text 0"/>
+          <p:cNvSpPr txBox="1"/>
+          <p:nvPr/>
+        </p:nvSpPr>
+        <p:spPr>
+          <a:xfrm>
+            <a:off x="502920" y="1699870"/>
+            <a:ext cx="10415016" cy="1591970"/>
+          </a:xfrm>
+          <a:prstGeom prst="rect">
+            <a:avLst/>
+          </a:prstGeom>
+          <a:noFill/>
+          <a:ln/>
+        </p:spPr>
+        <p:txBody>
+          <a:bodyPr wrap="square" lIns="0" tIns="0" rIns="0" bIns="0" rtlCol="0" anchor="b"/>
+          <a:lstStyle/>
+          <a:p>
+            <a:pPr algn="l" indent="0" marL="0">
+              <a:buNone/>
+            </a:pPr>
+            <a:r>
+              <a:rPr lang="en-US" sz="3600" b="1" dirty="0">
+                <a:solidFill>
+                  <a:srgbClr val="FFFFFF"/>
+                </a:solidFill>
+                <a:latin typeface="Calibri" pitchFamily="34" charset="0"/>
+                <a:ea typeface="Calibri" pitchFamily="34" charset="-122"/>
+                <a:cs typeface="Calibri" pitchFamily="34" charset="-120"/>
+              </a:rPr>
+              <a:t>6. Looking Ahead Three Years</a:t>
+            </a:r>
+            <a:endParaRPr lang="en-US" sz="3600" dirty="0"/>
+          </a:p>
+        </p:txBody>
+      </p:sp>
+      <p:sp>
+        <p:nvSpPr>
+          <p:cNvPr id="3" name="Text 1"/>
+          <p:cNvSpPr txBox="1"/>
+          <p:nvPr/>
+        </p:nvSpPr>
+        <p:spPr>
+          <a:xfrm>
+            <a:off x="11346790" y="6537960"/>
+            <a:ext cx="343814" cy="182880"/>
+          </a:xfrm>
+          <a:prstGeom prst="rect">
+            <a:avLst/>
+          </a:prstGeom>
+          <a:noFill/>
+          <a:ln/>
+        </p:spPr>
+        <p:txBody>
+          <a:bodyPr wrap="square" rtlCol="0" anchor="ctr"/>
+          <a:lstStyle/>
+          <a:p>
+            <a:pPr algn="r" indent="0" marL="0">
+              <a:buNone/>
+            </a:pPr>
+            <a:r>
+              <a:rPr lang="en-US" sz="900" dirty="0">
+                <a:solidFill>
+                  <a:srgbClr val="FFFFFF"/>
+                </a:solidFill>
+                <a:latin typeface="Calibri" pitchFamily="34" charset="0"/>
+                <a:ea typeface="Calibri" pitchFamily="34" charset="-122"/>
+                <a:cs typeface="Calibri" pitchFamily="34" charset="-120"/>
+              </a:rPr>
+              <a:t>30</a:t>
+            </a:r>
+            <a:endParaRPr lang="en-US" sz="900" dirty="0"/>
+          </a:p>
+        </p:txBody>
+      </p:sp>
+    </p:spTree>
+  </p:cSld>
+  <p:clrMapOvr>
+    <a:masterClrMapping/>
+  </p:clrMapOvr>
+</p:sld>
+</file>
+
+<file path=ppt/slides/slide32.xml><?xml version="1.0" encoding="utf-8"?>
+<p:sld xmlns:a="http://schemas.openxmlformats.org/drawingml/2006/main" xmlns:r="http://schemas.openxmlformats.org/officeDocument/2006/relationships" xmlns:p="http://schemas.openxmlformats.org/presentationml/2006/main">
+  <p:cSld name="Slide 32">
+    <p:bg>
+      <p:bgPr>
+        <a:solidFill>
+          <a:srgbClr val="FFFFFF"/>
+        </a:solidFill>
+      </p:bgPr>
+    </p:bg>
+    <p:spTree>
+      <p:nvGrpSpPr>
+        <p:cNvPr id="1" name=""/>
+        <p:cNvGrpSpPr/>
+        <p:nvPr/>
+      </p:nvGrpSpPr>
+      <p:grpSpPr>
+        <a:xfrm>
+          <a:off x="0" y="0"/>
+          <a:ext cx="0" cy="0"/>
+          <a:chOff x="0" y="0"/>
+          <a:chExt cx="0" cy="0"/>
+        </a:xfrm>
+      </p:grpSpPr>
+      <p:sp>
+        <p:nvSpPr>
+          <p:cNvPr id="2" name="Text 0"/>
+          <p:cNvSpPr txBox="1"/>
+          <p:nvPr/>
+        </p:nvSpPr>
+        <p:spPr>
+          <a:xfrm>
+            <a:off x="502006" y="256032"/>
+            <a:ext cx="11188598" cy="310896"/>
+          </a:xfrm>
+          <a:prstGeom prst="rect">
+            <a:avLst/>
+          </a:prstGeom>
+          <a:noFill/>
+          <a:ln/>
+        </p:spPr>
+        <p:txBody>
+          <a:bodyPr wrap="square" lIns="0" tIns="0" rIns="0" bIns="0" rtlCol="0" anchor="t"/>
+          <a:lstStyle/>
+          <a:p>
+            <a:pPr algn="l" indent="0" marL="0">
+              <a:buNone/>
+            </a:pPr>
+            <a:r>
+              <a:rPr lang="en-US" sz="1900" b="1" dirty="0">
+                <a:solidFill>
+                  <a:srgbClr val="000000"/>
+                </a:solidFill>
+                <a:latin typeface="Calibri" pitchFamily="34" charset="0"/>
+                <a:ea typeface="Calibri" pitchFamily="34" charset="-122"/>
+                <a:cs typeface="Calibri" pitchFamily="34" charset="-120"/>
+              </a:rPr>
+              <a:t>What Leaders Say, Unprompted</a:t>
+            </a:r>
+            <a:endParaRPr lang="en-US" sz="1900" dirty="0"/>
+          </a:p>
+        </p:txBody>
+      </p:sp>
+      <p:sp>
+        <p:nvSpPr>
+          <p:cNvPr id="3" name="Text 1"/>
+          <p:cNvSpPr txBox="1"/>
+          <p:nvPr/>
+        </p:nvSpPr>
+        <p:spPr>
+          <a:xfrm>
+            <a:off x="502006" y="585216"/>
+            <a:ext cx="11188598" cy="713232"/>
+          </a:xfrm>
+          <a:prstGeom prst="rect">
+            <a:avLst/>
+          </a:prstGeom>
+          <a:noFill/>
+          <a:ln/>
+        </p:spPr>
+        <p:txBody>
+          <a:bodyPr wrap="square" lIns="0" tIns="0" rIns="0" bIns="0" rtlCol="0" anchor="t"/>
+          <a:lstStyle/>
+          <a:p>
+            <a:pPr algn="l" indent="0" marL="0">
+              <a:lnSpc>
+                <a:spcPct val="105000"/>
+              </a:lnSpc>
+              <a:buNone/>
+            </a:pPr>
+            <a:r>
+              <a:rPr lang="en-US" sz="1350" b="1" dirty="0">
+                <a:solidFill>
+                  <a:srgbClr val="046A38"/>
+                </a:solidFill>
+                <a:latin typeface="Calibri" pitchFamily="34" charset="0"/>
+                <a:ea typeface="Calibri" pitchFamily="34" charset="-122"/>
+                <a:cs typeface="Calibri" pitchFamily="34" charset="-120"/>
+              </a:rPr>
+              <a:t>Left to answer in their own words, leaders converge on the same trend.</a:t>
+            </a:r>
+            <a:endParaRPr lang="en-US" sz="1350" dirty="0"/>
+          </a:p>
+        </p:txBody>
+      </p:sp>
+      <p:sp>
+        <p:nvSpPr>
+          <p:cNvPr id="4" name="Shape 2"/>
+          <p:cNvSpPr/>
+          <p:nvPr/>
+        </p:nvSpPr>
+        <p:spPr>
+          <a:xfrm>
+            <a:off x="502006" y="1335024"/>
+            <a:ext cx="0" cy="512064"/>
+          </a:xfrm>
+          <a:prstGeom prst="line">
+            <a:avLst/>
+          </a:prstGeom>
+          <a:noFill/>
+          <a:ln w="25400">
+            <a:solidFill>
+              <a:srgbClr val="D0D0CE"/>
+            </a:solidFill>
+            <a:prstDash val="solid"/>
+          </a:ln>
+        </p:spPr>
+      </p:sp>
+      <p:sp>
+        <p:nvSpPr>
+          <p:cNvPr id="5" name="Text 3"/>
+          <p:cNvSpPr txBox="1"/>
+          <p:nvPr/>
+        </p:nvSpPr>
+        <p:spPr>
+          <a:xfrm>
+            <a:off x="648310" y="1335024"/>
+            <a:ext cx="11042294" cy="512064"/>
+          </a:xfrm>
+          <a:prstGeom prst="rect">
+            <a:avLst/>
+          </a:prstGeom>
+          <a:noFill/>
+          <a:ln/>
+        </p:spPr>
+        <p:txBody>
+          <a:bodyPr wrap="square" lIns="0" tIns="0" rIns="0" bIns="0" rtlCol="0" anchor="t"/>
+          <a:lstStyle/>
+          <a:p>
+            <a:pPr algn="l" indent="0" marL="0">
+              <a:lnSpc>
+                <a:spcPct val="106000"/>
+              </a:lnSpc>
+              <a:buNone/>
+            </a:pPr>
+            <a:r>
+              <a:rPr lang="en-US" sz="900" b="1" dirty="0">
+                <a:solidFill>
+                  <a:srgbClr val="046A38"/>
+                </a:solidFill>
+                <a:latin typeface="IBM Plex Mono" pitchFamily="34" charset="0"/>
+                <a:ea typeface="IBM Plex Mono" pitchFamily="34" charset="-122"/>
+                <a:cs typeface="IBM Plex Mono" pitchFamily="34" charset="-120"/>
+              </a:rPr>
+              <a:t>Q12  </a:t>
+            </a:r>
+            <a:pPr algn="l" indent="0" marL="0">
+              <a:lnSpc>
+                <a:spcPct val="106000"/>
+              </a:lnSpc>
+              <a:buNone/>
+            </a:pPr>
+            <a:r>
+              <a:rPr lang="en-US" sz="1000" i="1" dirty="0">
+                <a:solidFill>
+                  <a:srgbClr val="575757"/>
+                </a:solidFill>
+                <a:latin typeface="Calibri" pitchFamily="34" charset="0"/>
+                <a:ea typeface="Calibri" pitchFamily="34" charset="-122"/>
+                <a:cs typeface="Calibri" pitchFamily="34" charset="-120"/>
+              </a:rPr>
+              <a:t>“Looking ahead three years, what development do you believe will have the greatest impact on fraud risk management, and why? (open-ended)”</a:t>
+            </a:r>
+            <a:endParaRPr lang="en-US" sz="1000" dirty="0"/>
+          </a:p>
+        </p:txBody>
+      </p:sp>
+      <p:sp>
+        <p:nvSpPr>
+          <p:cNvPr id="6" name="Text 4"/>
+          <p:cNvSpPr txBox="1"/>
+          <p:nvPr/>
+        </p:nvSpPr>
+        <p:spPr>
+          <a:xfrm>
+            <a:off x="11346790" y="6537960"/>
+            <a:ext cx="343814" cy="182880"/>
+          </a:xfrm>
+          <a:prstGeom prst="rect">
+            <a:avLst/>
+          </a:prstGeom>
+          <a:noFill/>
+          <a:ln/>
+        </p:spPr>
+        <p:txBody>
+          <a:bodyPr wrap="square" rtlCol="0" anchor="ctr"/>
+          <a:lstStyle/>
+          <a:p>
+            <a:pPr algn="r" indent="0" marL="0">
+              <a:buNone/>
+            </a:pPr>
+            <a:r>
+              <a:rPr lang="en-US" sz="900" dirty="0">
+                <a:solidFill>
+                  <a:srgbClr val="53565A"/>
+                </a:solidFill>
+                <a:latin typeface="Calibri" pitchFamily="34" charset="0"/>
+                <a:ea typeface="Calibri" pitchFamily="34" charset="-122"/>
+                <a:cs typeface="Calibri" pitchFamily="34" charset="-120"/>
+              </a:rPr>
+              <a:t>31</a:t>
             </a:r>
             <a:endParaRPr lang="en-US" sz="900" dirty="0"/>
           </a:p>
@@ -23468,9 +25298,9 @@
 </p:sld>
 </file>
 
-<file path=ppt/slides/slide31.xml><?xml version="1.0" encoding="utf-8"?>
+<file path=ppt/slides/slide33.xml><?xml version="1.0" encoding="utf-8"?>
 <p:sld xmlns:a="http://schemas.openxmlformats.org/drawingml/2006/main" xmlns:r="http://schemas.openxmlformats.org/officeDocument/2006/relationships" xmlns:p="http://schemas.openxmlformats.org/presentationml/2006/main">
-  <p:cSld name="Slide 31">
+  <p:cSld name="Slide 33">
     <p:bg>
       <p:bgPr>
         <a:solidFill>

--- a/Fraud in 2026 - Full Results.pptx
+++ b/Fraud in 2026 - Full Results.pptx
@@ -38,9 +38,13 @@
     <p:sldId id="286" r:id="rId32"/>
     <p:sldId id="287" r:id="rId33"/>
     <p:sldId id="288" r:id="rId34"/>
+    <p:sldId id="289" r:id="rId35"/>
+    <p:sldId id="290" r:id="rId36"/>
+    <p:sldId id="291" r:id="rId37"/>
+    <p:sldId id="292" r:id="rId38"/>
   </p:sldIdLst>
   <p:notesMasterIdLst>
-    <p:notesMasterId r:id="rId35"/>
+    <p:notesMasterId r:id="rId39"/>
   </p:notesMasterIdLst>
   <p:sldSz cx="12192000" cy="6858000"/>
   <p:notesSz cx="6858000" cy="12192000"/>
@@ -6991,6 +6995,726 @@
       <c:layout/>
       <c:barChart>
         <c:barDir val="bar"/>
+        <c:grouping val="clustered"/>
+        <c:varyColors val="0"/>
+        <c:ser>
+          <c:idx val="0"/>
+          <c:order val="0"/>
+          <c:tx>
+            <c:strRef>
+              <c:f>Sheet1!$B$1</c:f>
+              <c:strCache>
+                <c:ptCount val="1"/>
+                <c:pt idx="0">
+                  <c:v>Today</c:v>
+                </c:pt>
+              </c:strCache>
+            </c:strRef>
+          </c:tx>
+          <c:spPr>
+            <a:solidFill>
+              <a:srgbClr val="86BC25"/>
+            </a:solidFill>
+            <a:effectLst/>
+          </c:spPr>
+          <c:invertIfNegative val="0"/>
+          <c:dLbls>
+            <c:numFmt formatCode="0&quot;%&quot;" sourceLinked="0"/>
+            <c:txPr>
+              <a:bodyPr/>
+              <a:lstStyle/>
+              <a:p>
+                <a:pPr>
+                  <a:defRPr b="0" i="0" strike="noStrike" sz="800" u="none">
+                    <a:solidFill>
+                      <a:srgbClr val="000000"/>
+                    </a:solidFill>
+                    <a:latin typeface="Arial"/>
+                  </a:defRPr>
+                </a:pPr>
+              </a:p>
+            </c:txPr>
+            <c:showLegendKey val="0"/>
+            <c:showVal val="1"/>
+            <c:showCatName val="0"/>
+            <c:showSerName val="0"/>
+            <c:showPercent val="0"/>
+            <c:showBubbleSize val="0"/>
+            <c:showLeaderLines val="0"/>
+          </c:dLbls>
+          <c:cat>
+            <c:multiLvlStrRef>
+              <c:f>Sheet1!$A$2:$A$7</c:f>
+              <c:multiLvlStrCache>
+                <c:ptCount val="6"/>
+                <c:lvl>
+                  <c:pt idx="0">
+                    <c:v>AI-enabled tools</c:v>
+                  </c:pt>
+                  <c:pt idx="1">
+                    <c:v>Automating workflows</c:v>
+                  </c:pt>
+                  <c:pt idx="2">
+                    <c:v>Redesigning processes</c:v>
+                  </c:pt>
+                  <c:pt idx="3">
+                    <c:v>Outsourcing</c:v>
+                  </c:pt>
+                  <c:pt idx="4">
+                    <c:v>Hiring / workforce</c:v>
+                  </c:pt>
+                  <c:pt idx="5">
+                    <c:v>Combination</c:v>
+                  </c:pt>
+                </c:lvl>
+              </c:multiLvlStrCache>
+            </c:multiLvlStrRef>
+          </c:cat>
+          <c:val>
+            <c:numRef>
+              <c:f>Sheet1!$B$2:$B$7</c:f>
+              <c:numCache>
+                <c:formatCode>General</c:formatCode>
+                <c:ptCount val="6"/>
+                <c:pt idx="0">
+                  <c:v>47</c:v>
+                </c:pt>
+                <c:pt idx="1">
+                  <c:v>33</c:v>
+                </c:pt>
+                <c:pt idx="2">
+                  <c:v>7</c:v>
+                </c:pt>
+                <c:pt idx="3">
+                  <c:v>7</c:v>
+                </c:pt>
+                <c:pt idx="4">
+                  <c:v>7</c:v>
+                </c:pt>
+                <c:pt idx="5">
+                  <c:v>0</c:v>
+                </c:pt>
+              </c:numCache>
+            </c:numRef>
+          </c:val>
+        </c:ser>
+        <c:ser>
+          <c:idx val="1"/>
+          <c:order val="1"/>
+          <c:tx>
+            <c:strRef>
+              <c:f>Sheet1!$C$1</c:f>
+              <c:strCache>
+                <c:ptCount val="1"/>
+                <c:pt idx="0">
+                  <c:v>3-Year Focus</c:v>
+                </c:pt>
+              </c:strCache>
+            </c:strRef>
+          </c:tx>
+          <c:spPr>
+            <a:solidFill>
+              <a:srgbClr val="046A38"/>
+            </a:solidFill>
+            <a:effectLst/>
+          </c:spPr>
+          <c:invertIfNegative val="0"/>
+          <c:dLbls>
+            <c:numFmt formatCode="0&quot;%&quot;" sourceLinked="0"/>
+            <c:txPr>
+              <a:bodyPr/>
+              <a:lstStyle/>
+              <a:p>
+                <a:pPr>
+                  <a:defRPr b="0" i="0" strike="noStrike" sz="800" u="none">
+                    <a:solidFill>
+                      <a:srgbClr val="000000"/>
+                    </a:solidFill>
+                    <a:latin typeface="Arial"/>
+                  </a:defRPr>
+                </a:pPr>
+              </a:p>
+            </c:txPr>
+            <c:showLegendKey val="0"/>
+            <c:showVal val="1"/>
+            <c:showCatName val="0"/>
+            <c:showSerName val="0"/>
+            <c:showPercent val="0"/>
+            <c:showBubbleSize val="0"/>
+            <c:showLeaderLines val="0"/>
+          </c:dLbls>
+          <c:cat>
+            <c:multiLvlStrRef>
+              <c:f>Sheet1!$A$2:$A$7</c:f>
+              <c:multiLvlStrCache>
+                <c:ptCount val="6"/>
+                <c:lvl>
+                  <c:pt idx="0">
+                    <c:v>AI-enabled tools</c:v>
+                  </c:pt>
+                  <c:pt idx="1">
+                    <c:v>Automating workflows</c:v>
+                  </c:pt>
+                  <c:pt idx="2">
+                    <c:v>Redesigning processes</c:v>
+                  </c:pt>
+                  <c:pt idx="3">
+                    <c:v>Outsourcing</c:v>
+                  </c:pt>
+                  <c:pt idx="4">
+                    <c:v>Hiring / workforce</c:v>
+                  </c:pt>
+                  <c:pt idx="5">
+                    <c:v>Combination</c:v>
+                  </c:pt>
+                </c:lvl>
+              </c:multiLvlStrCache>
+            </c:multiLvlStrRef>
+          </c:cat>
+          <c:val>
+            <c:numRef>
+              <c:f>Sheet1!$C$2:$C$7</c:f>
+              <c:numCache>
+                <c:formatCode>General</c:formatCode>
+                <c:ptCount val="6"/>
+                <c:pt idx="0">
+                  <c:v>40</c:v>
+                </c:pt>
+                <c:pt idx="1">
+                  <c:v>27</c:v>
+                </c:pt>
+                <c:pt idx="2">
+                  <c:v>27</c:v>
+                </c:pt>
+                <c:pt idx="3">
+                  <c:v>7</c:v>
+                </c:pt>
+                <c:pt idx="4">
+                  <c:v>0</c:v>
+                </c:pt>
+                <c:pt idx="5">
+                  <c:v>0</c:v>
+                </c:pt>
+              </c:numCache>
+            </c:numRef>
+          </c:val>
+        </c:ser>
+        <c:dLbls>
+          <c:numFmt formatCode="0&quot;%&quot;" sourceLinked="0"/>
+          <c:txPr>
+            <a:bodyPr/>
+            <a:lstStyle/>
+            <a:p>
+              <a:pPr>
+                <a:defRPr b="0" i="0" strike="noStrike" sz="800" u="none">
+                  <a:solidFill>
+                    <a:srgbClr val="000000"/>
+                  </a:solidFill>
+                  <a:latin typeface="Arial"/>
+                </a:defRPr>
+              </a:pPr>
+            </a:p>
+          </c:txPr>
+          <c:showLegendKey val="0"/>
+          <c:showVal val="1"/>
+          <c:showCatName val="0"/>
+          <c:showSerName val="0"/>
+          <c:showPercent val="0"/>
+          <c:showBubbleSize val="0"/>
+          <c:showLeaderLines val="0"/>
+        </c:dLbls>
+        <c:gapWidth val="40"/>
+        <c:overlap val="0"/>
+        <c:axId val="2094734554"/>
+        <c:axId val="2094734552"/>
+        <c:axId val="2094734556"/>
+      </c:barChart>
+      <c:catAx>
+        <c:axId val="2094734554"/>
+        <c:scaling>
+          <c:orientation val="minMax"/>
+        </c:scaling>
+        <c:delete val="0"/>
+        <c:axPos val="l"/>
+        <c:numFmt formatCode="General" sourceLinked="1"/>
+        <c:majorTickMark val="out"/>
+        <c:minorTickMark val="none"/>
+        <c:tickLblPos val="nextTo"/>
+        <c:spPr>
+          <a:ln w="12700" cap="flat">
+            <a:noFill/>
+            <a:prstDash val="solid"/>
+            <a:round/>
+          </a:ln>
+        </c:spPr>
+        <c:txPr>
+          <a:bodyPr/>
+          <a:lstStyle/>
+          <a:p>
+            <a:pPr>
+              <a:defRPr sz="1000" b="0" i="0" u="none" strike="noStrike">
+                <a:solidFill>
+                  <a:srgbClr val="53565A"/>
+                </a:solidFill>
+                <a:latin typeface="Arial"/>
+              </a:defRPr>
+            </a:pPr>
+            <a:endParaRPr lang="en-US"/>
+          </a:p>
+        </c:txPr>
+        <c:crossAx val="2094734552"/>
+        <c:crosses val="autoZero"/>
+        <c:auto val="1"/>
+        <c:lblAlgn val="ctr"/>
+        <c:noMultiLvlLbl val="1"/>
+      </c:catAx>
+      <c:valAx>
+        <c:axId val="2094734552"/>
+        <c:scaling>
+          <c:orientation val="minMax"/>
+        </c:scaling>
+        <c:delete val="1"/>
+        <c:axPos val="b"/>
+        <c:numFmt formatCode="General" sourceLinked="0"/>
+        <c:majorTickMark val="out"/>
+        <c:minorTickMark val="none"/>
+        <c:tickLblPos val="low"/>
+        <c:spPr>
+          <a:ln w="12700" cap="flat">
+            <a:noFill/>
+            <a:prstDash val="solid"/>
+            <a:round/>
+          </a:ln>
+        </c:spPr>
+        <c:txPr>
+          <a:bodyPr/>
+          <a:lstStyle/>
+          <a:p>
+            <a:pPr>
+              <a:defRPr sz="1200" b="0" i="0" u="none" strike="noStrike">
+                <a:solidFill>
+                  <a:srgbClr val="000000"/>
+                </a:solidFill>
+                <a:latin typeface="Arial"/>
+              </a:defRPr>
+            </a:pPr>
+            <a:endParaRPr lang="en-US"/>
+          </a:p>
+        </c:txPr>
+        <c:crossAx val="2094734554"/>
+        <c:crosses val="autoZero"/>
+        <c:crossBetween val="between"/>
+      </c:valAx>
+      <c:spPr>
+        <a:solidFill>
+          <a:srgbClr val="FFFFFF"/>
+        </a:solidFill>
+        <a:ln>
+          <a:noFill/>
+        </a:ln>
+        <a:effectLst/>
+      </c:spPr>
+    </c:plotArea>
+    <c:legend>
+      <c:legendPos val="b"/>
+      <c:overlay val="0"/>
+      <c:txPr>
+        <a:bodyPr/>
+        <a:lstStyle/>
+        <a:p>
+          <a:pPr>
+            <a:defRPr sz="900">      </a:defRPr>
+          </a:pPr>
+          <a:endParaRPr lang="en-US"/>
+        </a:p>
+      </c:txPr>
+    </c:legend>
+    <c:plotVisOnly val="1"/>
+    <c:dispBlanksAs val="span"/>
+  </c:chart>
+  <c:spPr>
+    <a:noFill/>
+    <a:ln>
+      <a:noFill/>
+    </a:ln>
+    <a:effectLst/>
+  </c:spPr>
+  <c:externalData r:id="rId1">
+    <c:autoUpdate val="0"/>
+  </c:externalData>
+</c:chartSpace>
+</file>
+
+<file path=ppt/charts/chart24.xml><?xml version="1.0" encoding="utf-8"?>
+<c:chartSpace xmlns:c="http://schemas.openxmlformats.org/drawingml/2006/chart" xmlns:a="http://schemas.openxmlformats.org/drawingml/2006/main" xmlns:r="http://schemas.openxmlformats.org/officeDocument/2006/relationships">
+  <c:date1904 val="0"/>
+  <c:roundedCorners val="1"/>
+  <c:chart>
+    <c:autoTitleDeleted val="1"/>
+    <c:plotArea>
+      <c:layout/>
+      <c:barChart>
+        <c:barDir val="bar"/>
+        <c:grouping val="clustered"/>
+        <c:varyColors val="0"/>
+        <c:ser>
+          <c:idx val="0"/>
+          <c:order val="0"/>
+          <c:tx>
+            <c:strRef>
+              <c:f>Sheet1!$B$1</c:f>
+              <c:strCache>
+                <c:ptCount val="1"/>
+                <c:pt idx="0">
+                  <c:v>Today</c:v>
+                </c:pt>
+              </c:strCache>
+            </c:strRef>
+          </c:tx>
+          <c:spPr>
+            <a:solidFill>
+              <a:srgbClr val="86BC25"/>
+            </a:solidFill>
+            <a:effectLst/>
+          </c:spPr>
+          <c:invertIfNegative val="0"/>
+          <c:dLbls>
+            <c:numFmt formatCode="0&quot;%&quot;" sourceLinked="0"/>
+            <c:txPr>
+              <a:bodyPr/>
+              <a:lstStyle/>
+              <a:p>
+                <a:pPr>
+                  <a:defRPr b="0" i="0" strike="noStrike" sz="800" u="none">
+                    <a:solidFill>
+                      <a:srgbClr val="000000"/>
+                    </a:solidFill>
+                    <a:latin typeface="Arial"/>
+                  </a:defRPr>
+                </a:pPr>
+              </a:p>
+            </c:txPr>
+            <c:showLegendKey val="0"/>
+            <c:showVal val="1"/>
+            <c:showCatName val="0"/>
+            <c:showSerName val="0"/>
+            <c:showPercent val="0"/>
+            <c:showBubbleSize val="0"/>
+            <c:showLeaderLines val="0"/>
+          </c:dLbls>
+          <c:cat>
+            <c:multiLvlStrRef>
+              <c:f>Sheet1!$A$2:$A$7</c:f>
+              <c:multiLvlStrCache>
+                <c:ptCount val="6"/>
+                <c:lvl>
+                  <c:pt idx="0">
+                    <c:v>AI-enabled tools</c:v>
+                  </c:pt>
+                  <c:pt idx="1">
+                    <c:v>Automating workflows</c:v>
+                  </c:pt>
+                  <c:pt idx="2">
+                    <c:v>Redesigning processes</c:v>
+                  </c:pt>
+                  <c:pt idx="3">
+                    <c:v>Outsourcing</c:v>
+                  </c:pt>
+                  <c:pt idx="4">
+                    <c:v>Hiring / workforce</c:v>
+                  </c:pt>
+                  <c:pt idx="5">
+                    <c:v>Combination</c:v>
+                  </c:pt>
+                </c:lvl>
+              </c:multiLvlStrCache>
+            </c:multiLvlStrRef>
+          </c:cat>
+          <c:val>
+            <c:numRef>
+              <c:f>Sheet1!$B$2:$B$7</c:f>
+              <c:numCache>
+                <c:formatCode>General</c:formatCode>
+                <c:ptCount val="6"/>
+                <c:pt idx="0">
+                  <c:v>10</c:v>
+                </c:pt>
+                <c:pt idx="1">
+                  <c:v>20</c:v>
+                </c:pt>
+                <c:pt idx="2">
+                  <c:v>20</c:v>
+                </c:pt>
+                <c:pt idx="3">
+                  <c:v>30</c:v>
+                </c:pt>
+                <c:pt idx="4">
+                  <c:v>20</c:v>
+                </c:pt>
+                <c:pt idx="5">
+                  <c:v>0</c:v>
+                </c:pt>
+              </c:numCache>
+            </c:numRef>
+          </c:val>
+        </c:ser>
+        <c:ser>
+          <c:idx val="1"/>
+          <c:order val="1"/>
+          <c:tx>
+            <c:strRef>
+              <c:f>Sheet1!$C$1</c:f>
+              <c:strCache>
+                <c:ptCount val="1"/>
+                <c:pt idx="0">
+                  <c:v>3-Year Focus</c:v>
+                </c:pt>
+              </c:strCache>
+            </c:strRef>
+          </c:tx>
+          <c:spPr>
+            <a:solidFill>
+              <a:srgbClr val="046A38"/>
+            </a:solidFill>
+            <a:effectLst/>
+          </c:spPr>
+          <c:invertIfNegative val="0"/>
+          <c:dLbls>
+            <c:numFmt formatCode="0&quot;%&quot;" sourceLinked="0"/>
+            <c:txPr>
+              <a:bodyPr/>
+              <a:lstStyle/>
+              <a:p>
+                <a:pPr>
+                  <a:defRPr b="0" i="0" strike="noStrike" sz="800" u="none">
+                    <a:solidFill>
+                      <a:srgbClr val="000000"/>
+                    </a:solidFill>
+                    <a:latin typeface="Arial"/>
+                  </a:defRPr>
+                </a:pPr>
+              </a:p>
+            </c:txPr>
+            <c:showLegendKey val="0"/>
+            <c:showVal val="1"/>
+            <c:showCatName val="0"/>
+            <c:showSerName val="0"/>
+            <c:showPercent val="0"/>
+            <c:showBubbleSize val="0"/>
+            <c:showLeaderLines val="0"/>
+          </c:dLbls>
+          <c:cat>
+            <c:multiLvlStrRef>
+              <c:f>Sheet1!$A$2:$A$7</c:f>
+              <c:multiLvlStrCache>
+                <c:ptCount val="6"/>
+                <c:lvl>
+                  <c:pt idx="0">
+                    <c:v>AI-enabled tools</c:v>
+                  </c:pt>
+                  <c:pt idx="1">
+                    <c:v>Automating workflows</c:v>
+                  </c:pt>
+                  <c:pt idx="2">
+                    <c:v>Redesigning processes</c:v>
+                  </c:pt>
+                  <c:pt idx="3">
+                    <c:v>Outsourcing</c:v>
+                  </c:pt>
+                  <c:pt idx="4">
+                    <c:v>Hiring / workforce</c:v>
+                  </c:pt>
+                  <c:pt idx="5">
+                    <c:v>Combination</c:v>
+                  </c:pt>
+                </c:lvl>
+              </c:multiLvlStrCache>
+            </c:multiLvlStrRef>
+          </c:cat>
+          <c:val>
+            <c:numRef>
+              <c:f>Sheet1!$C$2:$C$7</c:f>
+              <c:numCache>
+                <c:formatCode>General</c:formatCode>
+                <c:ptCount val="6"/>
+                <c:pt idx="0">
+                  <c:v>40</c:v>
+                </c:pt>
+                <c:pt idx="1">
+                  <c:v>30</c:v>
+                </c:pt>
+                <c:pt idx="2">
+                  <c:v>20</c:v>
+                </c:pt>
+                <c:pt idx="3">
+                  <c:v>0</c:v>
+                </c:pt>
+                <c:pt idx="4">
+                  <c:v>10</c:v>
+                </c:pt>
+                <c:pt idx="5">
+                  <c:v>0</c:v>
+                </c:pt>
+              </c:numCache>
+            </c:numRef>
+          </c:val>
+        </c:ser>
+        <c:dLbls>
+          <c:numFmt formatCode="0&quot;%&quot;" sourceLinked="0"/>
+          <c:txPr>
+            <a:bodyPr/>
+            <a:lstStyle/>
+            <a:p>
+              <a:pPr>
+                <a:defRPr b="0" i="0" strike="noStrike" sz="800" u="none">
+                  <a:solidFill>
+                    <a:srgbClr val="000000"/>
+                  </a:solidFill>
+                  <a:latin typeface="Arial"/>
+                </a:defRPr>
+              </a:pPr>
+            </a:p>
+          </c:txPr>
+          <c:showLegendKey val="0"/>
+          <c:showVal val="1"/>
+          <c:showCatName val="0"/>
+          <c:showSerName val="0"/>
+          <c:showPercent val="0"/>
+          <c:showBubbleSize val="0"/>
+          <c:showLeaderLines val="0"/>
+        </c:dLbls>
+        <c:gapWidth val="40"/>
+        <c:overlap val="0"/>
+        <c:axId val="2094734554"/>
+        <c:axId val="2094734552"/>
+        <c:axId val="2094734556"/>
+      </c:barChart>
+      <c:catAx>
+        <c:axId val="2094734554"/>
+        <c:scaling>
+          <c:orientation val="minMax"/>
+        </c:scaling>
+        <c:delete val="0"/>
+        <c:axPos val="l"/>
+        <c:numFmt formatCode="General" sourceLinked="1"/>
+        <c:majorTickMark val="out"/>
+        <c:minorTickMark val="none"/>
+        <c:tickLblPos val="nextTo"/>
+        <c:spPr>
+          <a:ln w="12700" cap="flat">
+            <a:noFill/>
+            <a:prstDash val="solid"/>
+            <a:round/>
+          </a:ln>
+        </c:spPr>
+        <c:txPr>
+          <a:bodyPr/>
+          <a:lstStyle/>
+          <a:p>
+            <a:pPr>
+              <a:defRPr sz="1000" b="0" i="0" u="none" strike="noStrike">
+                <a:solidFill>
+                  <a:srgbClr val="53565A"/>
+                </a:solidFill>
+                <a:latin typeface="Arial"/>
+              </a:defRPr>
+            </a:pPr>
+            <a:endParaRPr lang="en-US"/>
+          </a:p>
+        </c:txPr>
+        <c:crossAx val="2094734552"/>
+        <c:crosses val="autoZero"/>
+        <c:auto val="1"/>
+        <c:lblAlgn val="ctr"/>
+        <c:noMultiLvlLbl val="1"/>
+      </c:catAx>
+      <c:valAx>
+        <c:axId val="2094734552"/>
+        <c:scaling>
+          <c:orientation val="minMax"/>
+        </c:scaling>
+        <c:delete val="1"/>
+        <c:axPos val="b"/>
+        <c:numFmt formatCode="General" sourceLinked="0"/>
+        <c:majorTickMark val="out"/>
+        <c:minorTickMark val="none"/>
+        <c:tickLblPos val="low"/>
+        <c:spPr>
+          <a:ln w="12700" cap="flat">
+            <a:noFill/>
+            <a:prstDash val="solid"/>
+            <a:round/>
+          </a:ln>
+        </c:spPr>
+        <c:txPr>
+          <a:bodyPr/>
+          <a:lstStyle/>
+          <a:p>
+            <a:pPr>
+              <a:defRPr sz="1200" b="0" i="0" u="none" strike="noStrike">
+                <a:solidFill>
+                  <a:srgbClr val="000000"/>
+                </a:solidFill>
+                <a:latin typeface="Arial"/>
+              </a:defRPr>
+            </a:pPr>
+            <a:endParaRPr lang="en-US"/>
+          </a:p>
+        </c:txPr>
+        <c:crossAx val="2094734554"/>
+        <c:crosses val="autoZero"/>
+        <c:crossBetween val="between"/>
+      </c:valAx>
+      <c:spPr>
+        <a:solidFill>
+          <a:srgbClr val="FFFFFF"/>
+        </a:solidFill>
+        <a:ln>
+          <a:noFill/>
+        </a:ln>
+        <a:effectLst/>
+      </c:spPr>
+    </c:plotArea>
+    <c:legend>
+      <c:legendPos val="b"/>
+      <c:overlay val="0"/>
+      <c:txPr>
+        <a:bodyPr/>
+        <a:lstStyle/>
+        <a:p>
+          <a:pPr>
+            <a:defRPr sz="900">      </a:defRPr>
+          </a:pPr>
+          <a:endParaRPr lang="en-US"/>
+        </a:p>
+      </c:txPr>
+    </c:legend>
+    <c:plotVisOnly val="1"/>
+    <c:dispBlanksAs val="span"/>
+  </c:chart>
+  <c:spPr>
+    <a:noFill/>
+    <a:ln>
+      <a:noFill/>
+    </a:ln>
+    <a:effectLst/>
+  </c:spPr>
+  <c:externalData r:id="rId1">
+    <c:autoUpdate val="0"/>
+  </c:externalData>
+</c:chartSpace>
+</file>
+
+<file path=ppt/charts/chart25.xml><?xml version="1.0" encoding="utf-8"?>
+<c:chartSpace xmlns:c="http://schemas.openxmlformats.org/drawingml/2006/chart" xmlns:a="http://schemas.openxmlformats.org/drawingml/2006/main" xmlns:r="http://schemas.openxmlformats.org/officeDocument/2006/relationships">
+  <c:date1904 val="0"/>
+  <c:roundedCorners val="1"/>
+  <c:chart>
+    <c:autoTitleDeleted val="1"/>
+    <c:plotArea>
+      <c:layout/>
+      <c:barChart>
+        <c:barDir val="bar"/>
         <c:grouping val="stacked"/>
         <c:varyColors val="0"/>
         <c:ser>
@@ -7002,7 +7726,7 @@
               <c:strCache>
                 <c:ptCount val="1"/>
                 <c:pt idx="0">
-                  <c:v>Top tier (Top 100 Banking / Top 50 Insurance)</c:v>
+                  <c:v>United States</c:v>
                 </c:pt>
               </c:strCache>
             </c:strRef>
@@ -7021,7 +7745,7 @@
               <a:lstStyle/>
               <a:p>
                 <a:pPr>
-                  <a:defRPr b="0" i="0" strike="noStrike" sz="700" u="none">
+                  <a:defRPr b="0" i="0" strike="noStrike" sz="650" u="none">
                     <a:solidFill>
                       <a:srgbClr val="FFFFFF"/>
                     </a:solidFill>
@@ -7046,40 +7770,40 @@
                 <c:ptCount val="12"/>
                 <c:lvl>
                   <c:pt idx="0">
-                    <c:v>AI-enabled tools augmentation — Banking (34%)</c:v>
+                    <c:v>AI-enabled tools — Top 50 (47%)</c:v>
                   </c:pt>
                   <c:pt idx="1">
-                    <c:v>AI-enabled tools augmentation — Insurance (32%)</c:v>
+                    <c:v>AI-enabled tools — Large (10%)</c:v>
                   </c:pt>
                   <c:pt idx="2">
-                    <c:v>Automating workflows — Banking (29%)</c:v>
+                    <c:v>Automating workflows — Top 50 (33%)</c:v>
                   </c:pt>
                   <c:pt idx="3">
-                    <c:v>Automating workflows — Insurance (28%)</c:v>
+                    <c:v>Automating workflows — Large (20%)</c:v>
                   </c:pt>
                   <c:pt idx="4">
-                    <c:v>Redesigning processes &amp; playbooks — Banking (10%)</c:v>
+                    <c:v>Redesigning processes — Top 50 (7%)</c:v>
                   </c:pt>
                   <c:pt idx="5">
-                    <c:v>Redesigning processes &amp; playbooks — Insurance (12%)</c:v>
+                    <c:v>Redesigning processes — Large (20%)</c:v>
                   </c:pt>
                   <c:pt idx="6">
-                    <c:v>Outsourcing — Banking (10%)</c:v>
+                    <c:v>Outsourcing — Top 50 (7%)</c:v>
                   </c:pt>
                   <c:pt idx="7">
-                    <c:v>Outsourcing — Insurance (16%)</c:v>
+                    <c:v>Outsourcing — Large (30%)</c:v>
                   </c:pt>
                   <c:pt idx="8">
-                    <c:v>Hiring / workforce expansion — Banking (10%)</c:v>
+                    <c:v>Hiring / workforce — Top 50 (7%)</c:v>
                   </c:pt>
                   <c:pt idx="9">
-                    <c:v>Hiring / workforce expansion — Insurance (12%)</c:v>
+                    <c:v>Hiring / workforce — Large (20%)</c:v>
                   </c:pt>
                   <c:pt idx="10">
-                    <c:v>Combination of approaches — Banking (7%)</c:v>
+                    <c:v>Combination — Top 50 (0%)</c:v>
                   </c:pt>
                   <c:pt idx="11">
-                    <c:v>Combination of approaches — Insurance (0%)</c:v>
+                    <c:v>Combination — Large (0%)</c:v>
                   </c:pt>
                 </c:lvl>
               </c:multiLvlStrCache>
@@ -7092,37 +7816,37 @@
                 <c:formatCode>General</c:formatCode>
                 <c:ptCount val="12"/>
                 <c:pt idx="0">
-                  <c:v>19</c:v>
+                  <c:v>20</c:v>
                 </c:pt>
                 <c:pt idx="1">
-                  <c:v>28</c:v>
+                  <c:v>0</c:v>
                 </c:pt>
                 <c:pt idx="2">
-                  <c:v>17</c:v>
+                  <c:v>27</c:v>
                 </c:pt>
                 <c:pt idx="3">
+                  <c:v>0</c:v>
+                </c:pt>
+                <c:pt idx="4">
+                  <c:v>0</c:v>
+                </c:pt>
+                <c:pt idx="5">
                   <c:v>20</c:v>
                 </c:pt>
-                <c:pt idx="4">
-                  <c:v>4</c:v>
-                </c:pt>
-                <c:pt idx="5">
-                  <c:v>4</c:v>
-                </c:pt>
                 <c:pt idx="6">
-                  <c:v>3</c:v>
+                  <c:v>0</c:v>
                 </c:pt>
                 <c:pt idx="7">
-                  <c:v>4</c:v>
+                  <c:v>0</c:v>
                 </c:pt>
                 <c:pt idx="8">
-                  <c:v>3</c:v>
+                  <c:v>0</c:v>
                 </c:pt>
                 <c:pt idx="9">
-                  <c:v>4</c:v>
+                  <c:v>10</c:v>
                 </c:pt>
                 <c:pt idx="10">
-                  <c:v>8</c:v>
+                  <c:v>0</c:v>
                 </c:pt>
                 <c:pt idx="11">
                   <c:v>0</c:v>
@@ -7140,14 +7864,14 @@
               <c:strCache>
                 <c:ptCount val="1"/>
                 <c:pt idx="0">
-                  <c:v>Large institution (outside Top 100 / Top 50)</c:v>
+                  <c:v>Canada</c:v>
                 </c:pt>
               </c:strCache>
             </c:strRef>
           </c:tx>
           <c:spPr>
             <a:solidFill>
-              <a:srgbClr val="046A38"/>
+              <a:srgbClr val="43B02A"/>
             </a:solidFill>
             <a:effectLst/>
           </c:spPr>
@@ -7159,7 +7883,7 @@
               <a:lstStyle/>
               <a:p>
                 <a:pPr>
-                  <a:defRPr b="0" i="0" strike="noStrike" sz="700" u="none">
+                  <a:defRPr b="0" i="0" strike="noStrike" sz="650" u="none">
                     <a:solidFill>
                       <a:srgbClr val="FFFFFF"/>
                     </a:solidFill>
@@ -7184,40 +7908,40 @@
                 <c:ptCount val="12"/>
                 <c:lvl>
                   <c:pt idx="0">
-                    <c:v>AI-enabled tools augmentation — Banking (34%)</c:v>
+                    <c:v>AI-enabled tools — Top 50 (47%)</c:v>
                   </c:pt>
                   <c:pt idx="1">
-                    <c:v>AI-enabled tools augmentation — Insurance (32%)</c:v>
+                    <c:v>AI-enabled tools — Large (10%)</c:v>
                   </c:pt>
                   <c:pt idx="2">
-                    <c:v>Automating workflows — Banking (29%)</c:v>
+                    <c:v>Automating workflows — Top 50 (33%)</c:v>
                   </c:pt>
                   <c:pt idx="3">
-                    <c:v>Automating workflows — Insurance (28%)</c:v>
+                    <c:v>Automating workflows — Large (20%)</c:v>
                   </c:pt>
                   <c:pt idx="4">
-                    <c:v>Redesigning processes &amp; playbooks — Banking (10%)</c:v>
+                    <c:v>Redesigning processes — Top 50 (7%)</c:v>
                   </c:pt>
                   <c:pt idx="5">
-                    <c:v>Redesigning processes &amp; playbooks — Insurance (12%)</c:v>
+                    <c:v>Redesigning processes — Large (20%)</c:v>
                   </c:pt>
                   <c:pt idx="6">
-                    <c:v>Outsourcing — Banking (10%)</c:v>
+                    <c:v>Outsourcing — Top 50 (7%)</c:v>
                   </c:pt>
                   <c:pt idx="7">
-                    <c:v>Outsourcing — Insurance (16%)</c:v>
+                    <c:v>Outsourcing — Large (30%)</c:v>
                   </c:pt>
                   <c:pt idx="8">
-                    <c:v>Hiring / workforce expansion — Banking (10%)</c:v>
+                    <c:v>Hiring / workforce — Top 50 (7%)</c:v>
                   </c:pt>
                   <c:pt idx="9">
-                    <c:v>Hiring / workforce expansion — Insurance (12%)</c:v>
+                    <c:v>Hiring / workforce — Large (20%)</c:v>
                   </c:pt>
                   <c:pt idx="10">
-                    <c:v>Combination of approaches — Banking (7%)</c:v>
+                    <c:v>Combination — Top 50 (0%)</c:v>
                   </c:pt>
                   <c:pt idx="11">
-                    <c:v>Combination of approaches — Insurance (0%)</c:v>
+                    <c:v>Combination — Large (0%)</c:v>
                   </c:pt>
                 </c:lvl>
               </c:multiLvlStrCache>
@@ -7230,37 +7954,313 @@
                 <c:formatCode>General</c:formatCode>
                 <c:ptCount val="12"/>
                 <c:pt idx="0">
-                  <c:v>16</c:v>
+                  <c:v>20</c:v>
                 </c:pt>
                 <c:pt idx="1">
-                  <c:v>4</c:v>
+                  <c:v>10</c:v>
                 </c:pt>
                 <c:pt idx="2">
-                  <c:v>12</c:v>
+                  <c:v>7</c:v>
                 </c:pt>
                 <c:pt idx="3">
-                  <c:v>8</c:v>
+                  <c:v>20</c:v>
                 </c:pt>
                 <c:pt idx="4">
-                  <c:v>5</c:v>
+                  <c:v>7</c:v>
                 </c:pt>
                 <c:pt idx="5">
-                  <c:v>8</c:v>
+                  <c:v>0</c:v>
                 </c:pt>
                 <c:pt idx="6">
-                  <c:v>5</c:v>
+                  <c:v>7</c:v>
                 </c:pt>
                 <c:pt idx="7">
-                  <c:v>12</c:v>
+                  <c:v>20</c:v>
+                </c:pt>
+                <c:pt idx="8">
+                  <c:v>0</c:v>
+                </c:pt>
+                <c:pt idx="9">
+                  <c:v>10</c:v>
+                </c:pt>
+                <c:pt idx="10">
+                  <c:v>0</c:v>
+                </c:pt>
+                <c:pt idx="11">
+                  <c:v>0</c:v>
+                </c:pt>
+              </c:numCache>
+            </c:numRef>
+          </c:val>
+        </c:ser>
+        <c:ser>
+          <c:idx val="2"/>
+          <c:order val="2"/>
+          <c:tx>
+            <c:strRef>
+              <c:f>Sheet1!$D$1</c:f>
+              <c:strCache>
+                <c:ptCount val="1"/>
+                <c:pt idx="0">
+                  <c:v>Europe (EU + UK)</c:v>
+                </c:pt>
+              </c:strCache>
+            </c:strRef>
+          </c:tx>
+          <c:spPr>
+            <a:solidFill>
+              <a:srgbClr val="046A38"/>
+            </a:solidFill>
+            <a:effectLst/>
+          </c:spPr>
+          <c:invertIfNegative val="0"/>
+          <c:dLbls>
+            <c:numFmt formatCode="0&quot;%&quot;;-0&quot;%&quot;;;@" sourceLinked="0"/>
+            <c:txPr>
+              <a:bodyPr/>
+              <a:lstStyle/>
+              <a:p>
+                <a:pPr>
+                  <a:defRPr b="0" i="0" strike="noStrike" sz="650" u="none">
+                    <a:solidFill>
+                      <a:srgbClr val="FFFFFF"/>
+                    </a:solidFill>
+                    <a:latin typeface="Arial"/>
+                  </a:defRPr>
+                </a:pPr>
+              </a:p>
+            </c:txPr>
+            <c:dLblPos val="ctr"/>
+            <c:showLegendKey val="0"/>
+            <c:showVal val="1"/>
+            <c:showCatName val="0"/>
+            <c:showSerName val="0"/>
+            <c:showPercent val="0"/>
+            <c:showBubbleSize val="0"/>
+            <c:showLeaderLines val="0"/>
+          </c:dLbls>
+          <c:cat>
+            <c:multiLvlStrRef>
+              <c:f>Sheet1!$A$2:$A$13</c:f>
+              <c:multiLvlStrCache>
+                <c:ptCount val="12"/>
+                <c:lvl>
+                  <c:pt idx="0">
+                    <c:v>AI-enabled tools — Top 50 (47%)</c:v>
+                  </c:pt>
+                  <c:pt idx="1">
+                    <c:v>AI-enabled tools — Large (10%)</c:v>
+                  </c:pt>
+                  <c:pt idx="2">
+                    <c:v>Automating workflows — Top 50 (33%)</c:v>
+                  </c:pt>
+                  <c:pt idx="3">
+                    <c:v>Automating workflows — Large (20%)</c:v>
+                  </c:pt>
+                  <c:pt idx="4">
+                    <c:v>Redesigning processes — Top 50 (7%)</c:v>
+                  </c:pt>
+                  <c:pt idx="5">
+                    <c:v>Redesigning processes — Large (20%)</c:v>
+                  </c:pt>
+                  <c:pt idx="6">
+                    <c:v>Outsourcing — Top 50 (7%)</c:v>
+                  </c:pt>
+                  <c:pt idx="7">
+                    <c:v>Outsourcing — Large (30%)</c:v>
+                  </c:pt>
+                  <c:pt idx="8">
+                    <c:v>Hiring / workforce — Top 50 (7%)</c:v>
+                  </c:pt>
+                  <c:pt idx="9">
+                    <c:v>Hiring / workforce — Large (20%)</c:v>
+                  </c:pt>
+                  <c:pt idx="10">
+                    <c:v>Combination — Top 50 (0%)</c:v>
+                  </c:pt>
+                  <c:pt idx="11">
+                    <c:v>Combination — Large (0%)</c:v>
+                  </c:pt>
+                </c:lvl>
+              </c:multiLvlStrCache>
+            </c:multiLvlStrRef>
+          </c:cat>
+          <c:val>
+            <c:numRef>
+              <c:f>Sheet1!$D$2:$D$13</c:f>
+              <c:numCache>
+                <c:formatCode>General</c:formatCode>
+                <c:ptCount val="12"/>
+                <c:pt idx="0">
+                  <c:v>7</c:v>
+                </c:pt>
+                <c:pt idx="1">
+                  <c:v>0</c:v>
+                </c:pt>
+                <c:pt idx="2">
+                  <c:v>0</c:v>
+                </c:pt>
+                <c:pt idx="3">
+                  <c:v>0</c:v>
+                </c:pt>
+                <c:pt idx="4">
+                  <c:v>0</c:v>
+                </c:pt>
+                <c:pt idx="5">
+                  <c:v>0</c:v>
+                </c:pt>
+                <c:pt idx="6">
+                  <c:v>0</c:v>
+                </c:pt>
+                <c:pt idx="7">
+                  <c:v>10</c:v>
+                </c:pt>
+                <c:pt idx="8">
+                  <c:v>0</c:v>
+                </c:pt>
+                <c:pt idx="9">
+                  <c:v>0</c:v>
+                </c:pt>
+                <c:pt idx="10">
+                  <c:v>0</c:v>
+                </c:pt>
+                <c:pt idx="11">
+                  <c:v>0</c:v>
+                </c:pt>
+              </c:numCache>
+            </c:numRef>
+          </c:val>
+        </c:ser>
+        <c:ser>
+          <c:idx val="3"/>
+          <c:order val="3"/>
+          <c:tx>
+            <c:strRef>
+              <c:f>Sheet1!$E$1</c:f>
+              <c:strCache>
+                <c:ptCount val="1"/>
+                <c:pt idx="0">
+                  <c:v>Australia</c:v>
+                </c:pt>
+              </c:strCache>
+            </c:strRef>
+          </c:tx>
+          <c:spPr>
+            <a:solidFill>
+              <a:srgbClr val="0D8390"/>
+            </a:solidFill>
+            <a:effectLst/>
+          </c:spPr>
+          <c:invertIfNegative val="0"/>
+          <c:dLbls>
+            <c:numFmt formatCode="0&quot;%&quot;;-0&quot;%&quot;;;@" sourceLinked="0"/>
+            <c:txPr>
+              <a:bodyPr/>
+              <a:lstStyle/>
+              <a:p>
+                <a:pPr>
+                  <a:defRPr b="0" i="0" strike="noStrike" sz="650" u="none">
+                    <a:solidFill>
+                      <a:srgbClr val="FFFFFF"/>
+                    </a:solidFill>
+                    <a:latin typeface="Arial"/>
+                  </a:defRPr>
+                </a:pPr>
+              </a:p>
+            </c:txPr>
+            <c:dLblPos val="ctr"/>
+            <c:showLegendKey val="0"/>
+            <c:showVal val="1"/>
+            <c:showCatName val="0"/>
+            <c:showSerName val="0"/>
+            <c:showPercent val="0"/>
+            <c:showBubbleSize val="0"/>
+            <c:showLeaderLines val="0"/>
+          </c:dLbls>
+          <c:cat>
+            <c:multiLvlStrRef>
+              <c:f>Sheet1!$A$2:$A$13</c:f>
+              <c:multiLvlStrCache>
+                <c:ptCount val="12"/>
+                <c:lvl>
+                  <c:pt idx="0">
+                    <c:v>AI-enabled tools — Top 50 (47%)</c:v>
+                  </c:pt>
+                  <c:pt idx="1">
+                    <c:v>AI-enabled tools — Large (10%)</c:v>
+                  </c:pt>
+                  <c:pt idx="2">
+                    <c:v>Automating workflows — Top 50 (33%)</c:v>
+                  </c:pt>
+                  <c:pt idx="3">
+                    <c:v>Automating workflows — Large (20%)</c:v>
+                  </c:pt>
+                  <c:pt idx="4">
+                    <c:v>Redesigning processes — Top 50 (7%)</c:v>
+                  </c:pt>
+                  <c:pt idx="5">
+                    <c:v>Redesigning processes — Large (20%)</c:v>
+                  </c:pt>
+                  <c:pt idx="6">
+                    <c:v>Outsourcing — Top 50 (7%)</c:v>
+                  </c:pt>
+                  <c:pt idx="7">
+                    <c:v>Outsourcing — Large (30%)</c:v>
+                  </c:pt>
+                  <c:pt idx="8">
+                    <c:v>Hiring / workforce — Top 50 (7%)</c:v>
+                  </c:pt>
+                  <c:pt idx="9">
+                    <c:v>Hiring / workforce — Large (20%)</c:v>
+                  </c:pt>
+                  <c:pt idx="10">
+                    <c:v>Combination — Top 50 (0%)</c:v>
+                  </c:pt>
+                  <c:pt idx="11">
+                    <c:v>Combination — Large (0%)</c:v>
+                  </c:pt>
+                </c:lvl>
+              </c:multiLvlStrCache>
+            </c:multiLvlStrRef>
+          </c:cat>
+          <c:val>
+            <c:numRef>
+              <c:f>Sheet1!$E$2:$E$13</c:f>
+              <c:numCache>
+                <c:formatCode>General</c:formatCode>
+                <c:ptCount val="12"/>
+                <c:pt idx="0">
+                  <c:v>0</c:v>
+                </c:pt>
+                <c:pt idx="1">
+                  <c:v>0</c:v>
+                </c:pt>
+                <c:pt idx="2">
+                  <c:v>0</c:v>
+                </c:pt>
+                <c:pt idx="3">
+                  <c:v>0</c:v>
+                </c:pt>
+                <c:pt idx="4">
+                  <c:v>0</c:v>
+                </c:pt>
+                <c:pt idx="5">
+                  <c:v>0</c:v>
+                </c:pt>
+                <c:pt idx="6">
+                  <c:v>0</c:v>
+                </c:pt>
+                <c:pt idx="7">
+                  <c:v>0</c:v>
                 </c:pt>
                 <c:pt idx="8">
                   <c:v>7</c:v>
                 </c:pt>
                 <c:pt idx="9">
-                  <c:v>8</c:v>
+                  <c:v>0</c:v>
                 </c:pt>
                 <c:pt idx="10">
-                  <c:v>1</c:v>
+                  <c:v>0</c:v>
                 </c:pt>
                 <c:pt idx="11">
                   <c:v>0</c:v>
@@ -7276,7 +8276,7 @@
             <a:lstStyle/>
             <a:p>
               <a:pPr>
-                <a:defRPr b="0" i="0" strike="noStrike" sz="700" u="none">
+                <a:defRPr b="0" i="0" strike="noStrike" sz="650" u="none">
                   <a:solidFill>
                     <a:srgbClr val="FFFFFF"/>
                   </a:solidFill>
@@ -7394,7 +8394,7 @@
         <a:lstStyle/>
         <a:p>
           <a:pPr>
-            <a:defRPr sz="850">      </a:defRPr>
+            <a:defRPr sz="800">      </a:defRPr>
           </a:pPr>
           <a:endParaRPr lang="en-US"/>
         </a:p>
@@ -7416,7 +8416,7 @@
 </c:chartSpace>
 </file>
 
-<file path=ppt/charts/chart24.xml><?xml version="1.0" encoding="utf-8"?>
+<file path=ppt/charts/chart26.xml><?xml version="1.0" encoding="utf-8"?>
 <c:chartSpace xmlns:c="http://schemas.openxmlformats.org/drawingml/2006/chart" xmlns:a="http://schemas.openxmlformats.org/drawingml/2006/main" xmlns:r="http://schemas.openxmlformats.org/officeDocument/2006/relationships">
   <c:date1904 val="0"/>
   <c:roundedCorners val="1"/>
@@ -7437,7 +8437,7 @@
               <c:strCache>
                 <c:ptCount val="1"/>
                 <c:pt idx="0">
-                  <c:v>Top tier (Top 100 Banking / Top 50 Insurance)</c:v>
+                  <c:v>United States</c:v>
                 </c:pt>
               </c:strCache>
             </c:strRef>
@@ -7456,7 +8456,7 @@
               <a:lstStyle/>
               <a:p>
                 <a:pPr>
-                  <a:defRPr b="0" i="0" strike="noStrike" sz="700" u="none">
+                  <a:defRPr b="0" i="0" strike="noStrike" sz="650" u="none">
                     <a:solidFill>
                       <a:srgbClr val="FFFFFF"/>
                     </a:solidFill>
@@ -7481,40 +8481,40 @@
                 <c:ptCount val="12"/>
                 <c:lvl>
                   <c:pt idx="0">
-                    <c:v>AI-enabled tools augmentation — Banking (41%)</c:v>
+                    <c:v>AI-enabled tools — Top 50 (40%)</c:v>
                   </c:pt>
                   <c:pt idx="1">
-                    <c:v>AI-enabled tools augmentation — Insurance (40%)</c:v>
+                    <c:v>AI-enabled tools — Large (40%)</c:v>
                   </c:pt>
                   <c:pt idx="2">
-                    <c:v>Automating workflows — Banking (27%)</c:v>
+                    <c:v>Automating workflows — Top 50 (27%)</c:v>
                   </c:pt>
                   <c:pt idx="3">
-                    <c:v>Automating workflows — Insurance (28%)</c:v>
+                    <c:v>Automating workflows — Large (30%)</c:v>
                   </c:pt>
                   <c:pt idx="4">
-                    <c:v>Redesigning processes &amp; playbooks — Banking (18%)</c:v>
+                    <c:v>Redesigning processes — Top 50 (27%)</c:v>
                   </c:pt>
                   <c:pt idx="5">
-                    <c:v>Redesigning processes &amp; playbooks — Insurance (24%)</c:v>
+                    <c:v>Redesigning processes — Large (20%)</c:v>
                   </c:pt>
                   <c:pt idx="6">
-                    <c:v>Outsourcing — Banking (7%)</c:v>
+                    <c:v>Outsourcing — Top 50 (7%)</c:v>
                   </c:pt>
                   <c:pt idx="7">
-                    <c:v>Outsourcing — Insurance (4%)</c:v>
+                    <c:v>Outsourcing — Large (0%)</c:v>
                   </c:pt>
                   <c:pt idx="8">
-                    <c:v>Hiring / workforce expansion — Banking (5%)</c:v>
+                    <c:v>Hiring / workforce — Top 50 (0%)</c:v>
                   </c:pt>
                   <c:pt idx="9">
-                    <c:v>Hiring / workforce expansion — Insurance (4%)</c:v>
+                    <c:v>Hiring / workforce — Large (10%)</c:v>
                   </c:pt>
                   <c:pt idx="10">
-                    <c:v>Combination of approaches — Banking (2%)</c:v>
+                    <c:v>Combination — Top 50 (0%)</c:v>
                   </c:pt>
                   <c:pt idx="11">
-                    <c:v>Combination of approaches — Insurance (0%)</c:v>
+                    <c:v>Combination — Large (0%)</c:v>
                   </c:pt>
                 </c:lvl>
               </c:multiLvlStrCache>
@@ -7527,37 +8527,37 @@
                 <c:formatCode>General</c:formatCode>
                 <c:ptCount val="12"/>
                 <c:pt idx="0">
-                  <c:v>21</c:v>
+                  <c:v>27</c:v>
                 </c:pt>
                 <c:pt idx="1">
-                  <c:v>24</c:v>
+                  <c:v>10</c:v>
                 </c:pt>
                 <c:pt idx="2">
-                  <c:v>17</c:v>
+                  <c:v>7</c:v>
                 </c:pt>
                 <c:pt idx="3">
-                  <c:v>16</c:v>
+                  <c:v>20</c:v>
                 </c:pt>
                 <c:pt idx="4">
-                  <c:v>8</c:v>
+                  <c:v>7</c:v>
                 </c:pt>
                 <c:pt idx="5">
-                  <c:v>16</c:v>
+                  <c:v>0</c:v>
                 </c:pt>
                 <c:pt idx="6">
-                  <c:v>4</c:v>
+                  <c:v>7</c:v>
                 </c:pt>
                 <c:pt idx="7">
-                  <c:v>4</c:v>
+                  <c:v>0</c:v>
                 </c:pt>
                 <c:pt idx="8">
-                  <c:v>1</c:v>
+                  <c:v>0</c:v>
                 </c:pt>
                 <c:pt idx="9">
                   <c:v>0</c:v>
                 </c:pt>
                 <c:pt idx="10">
-                  <c:v>1</c:v>
+                  <c:v>0</c:v>
                 </c:pt>
                 <c:pt idx="11">
                   <c:v>0</c:v>
@@ -7575,14 +8575,14 @@
               <c:strCache>
                 <c:ptCount val="1"/>
                 <c:pt idx="0">
-                  <c:v>Large institution (outside Top 100 / Top 50)</c:v>
+                  <c:v>Canada</c:v>
                 </c:pt>
               </c:strCache>
             </c:strRef>
           </c:tx>
           <c:spPr>
             <a:solidFill>
-              <a:srgbClr val="046A38"/>
+              <a:srgbClr val="43B02A"/>
             </a:solidFill>
             <a:effectLst/>
           </c:spPr>
@@ -7594,7 +8594,7 @@
               <a:lstStyle/>
               <a:p>
                 <a:pPr>
-                  <a:defRPr b="0" i="0" strike="noStrike" sz="700" u="none">
+                  <a:defRPr b="0" i="0" strike="noStrike" sz="650" u="none">
                     <a:solidFill>
                       <a:srgbClr val="FFFFFF"/>
                     </a:solidFill>
@@ -7619,40 +8619,40 @@
                 <c:ptCount val="12"/>
                 <c:lvl>
                   <c:pt idx="0">
-                    <c:v>AI-enabled tools augmentation — Banking (41%)</c:v>
+                    <c:v>AI-enabled tools — Top 50 (40%)</c:v>
                   </c:pt>
                   <c:pt idx="1">
-                    <c:v>AI-enabled tools augmentation — Insurance (40%)</c:v>
+                    <c:v>AI-enabled tools — Large (40%)</c:v>
                   </c:pt>
                   <c:pt idx="2">
-                    <c:v>Automating workflows — Banking (27%)</c:v>
+                    <c:v>Automating workflows — Top 50 (27%)</c:v>
                   </c:pt>
                   <c:pt idx="3">
-                    <c:v>Automating workflows — Insurance (28%)</c:v>
+                    <c:v>Automating workflows — Large (30%)</c:v>
                   </c:pt>
                   <c:pt idx="4">
-                    <c:v>Redesigning processes &amp; playbooks — Banking (18%)</c:v>
+                    <c:v>Redesigning processes — Top 50 (27%)</c:v>
                   </c:pt>
                   <c:pt idx="5">
-                    <c:v>Redesigning processes &amp; playbooks — Insurance (24%)</c:v>
+                    <c:v>Redesigning processes — Large (20%)</c:v>
                   </c:pt>
                   <c:pt idx="6">
-                    <c:v>Outsourcing — Banking (7%)</c:v>
+                    <c:v>Outsourcing — Top 50 (7%)</c:v>
                   </c:pt>
                   <c:pt idx="7">
-                    <c:v>Outsourcing — Insurance (4%)</c:v>
+                    <c:v>Outsourcing — Large (0%)</c:v>
                   </c:pt>
                   <c:pt idx="8">
-                    <c:v>Hiring / workforce expansion — Banking (5%)</c:v>
+                    <c:v>Hiring / workforce — Top 50 (0%)</c:v>
                   </c:pt>
                   <c:pt idx="9">
-                    <c:v>Hiring / workforce expansion — Insurance (4%)</c:v>
+                    <c:v>Hiring / workforce — Large (10%)</c:v>
                   </c:pt>
                   <c:pt idx="10">
-                    <c:v>Combination of approaches — Banking (2%)</c:v>
+                    <c:v>Combination — Top 50 (0%)</c:v>
                   </c:pt>
                   <c:pt idx="11">
-                    <c:v>Combination of approaches — Insurance (0%)</c:v>
+                    <c:v>Combination — Large (0%)</c:v>
                   </c:pt>
                 </c:lvl>
               </c:multiLvlStrCache>
@@ -7665,37 +8665,313 @@
                 <c:formatCode>General</c:formatCode>
                 <c:ptCount val="12"/>
                 <c:pt idx="0">
+                  <c:v>13</c:v>
+                </c:pt>
+                <c:pt idx="1">
+                  <c:v>30</c:v>
+                </c:pt>
+                <c:pt idx="2">
                   <c:v>20</c:v>
                 </c:pt>
-                <c:pt idx="1">
-                  <c:v>16</c:v>
-                </c:pt>
-                <c:pt idx="2">
-                  <c:v>9</c:v>
-                </c:pt>
                 <c:pt idx="3">
-                  <c:v>12</c:v>
+                  <c:v>10</c:v>
                 </c:pt>
                 <c:pt idx="4">
-                  <c:v>8</c:v>
+                  <c:v>7</c:v>
                 </c:pt>
                 <c:pt idx="5">
-                  <c:v>8</c:v>
+                  <c:v>20</c:v>
                 </c:pt>
                 <c:pt idx="6">
-                  <c:v>4</c:v>
+                  <c:v>0</c:v>
                 </c:pt>
                 <c:pt idx="7">
                   <c:v>0</c:v>
                 </c:pt>
                 <c:pt idx="8">
-                  <c:v>4</c:v>
+                  <c:v>0</c:v>
                 </c:pt>
                 <c:pt idx="9">
-                  <c:v>4</c:v>
+                  <c:v>0</c:v>
                 </c:pt>
                 <c:pt idx="10">
-                  <c:v>1</c:v>
+                  <c:v>0</c:v>
+                </c:pt>
+                <c:pt idx="11">
+                  <c:v>0</c:v>
+                </c:pt>
+              </c:numCache>
+            </c:numRef>
+          </c:val>
+        </c:ser>
+        <c:ser>
+          <c:idx val="2"/>
+          <c:order val="2"/>
+          <c:tx>
+            <c:strRef>
+              <c:f>Sheet1!$D$1</c:f>
+              <c:strCache>
+                <c:ptCount val="1"/>
+                <c:pt idx="0">
+                  <c:v>Europe (EU + UK)</c:v>
+                </c:pt>
+              </c:strCache>
+            </c:strRef>
+          </c:tx>
+          <c:spPr>
+            <a:solidFill>
+              <a:srgbClr val="046A38"/>
+            </a:solidFill>
+            <a:effectLst/>
+          </c:spPr>
+          <c:invertIfNegative val="0"/>
+          <c:dLbls>
+            <c:numFmt formatCode="0&quot;%&quot;;-0&quot;%&quot;;;@" sourceLinked="0"/>
+            <c:txPr>
+              <a:bodyPr/>
+              <a:lstStyle/>
+              <a:p>
+                <a:pPr>
+                  <a:defRPr b="0" i="0" strike="noStrike" sz="650" u="none">
+                    <a:solidFill>
+                      <a:srgbClr val="FFFFFF"/>
+                    </a:solidFill>
+                    <a:latin typeface="Arial"/>
+                  </a:defRPr>
+                </a:pPr>
+              </a:p>
+            </c:txPr>
+            <c:dLblPos val="ctr"/>
+            <c:showLegendKey val="0"/>
+            <c:showVal val="1"/>
+            <c:showCatName val="0"/>
+            <c:showSerName val="0"/>
+            <c:showPercent val="0"/>
+            <c:showBubbleSize val="0"/>
+            <c:showLeaderLines val="0"/>
+          </c:dLbls>
+          <c:cat>
+            <c:multiLvlStrRef>
+              <c:f>Sheet1!$A$2:$A$13</c:f>
+              <c:multiLvlStrCache>
+                <c:ptCount val="12"/>
+                <c:lvl>
+                  <c:pt idx="0">
+                    <c:v>AI-enabled tools — Top 50 (40%)</c:v>
+                  </c:pt>
+                  <c:pt idx="1">
+                    <c:v>AI-enabled tools — Large (40%)</c:v>
+                  </c:pt>
+                  <c:pt idx="2">
+                    <c:v>Automating workflows — Top 50 (27%)</c:v>
+                  </c:pt>
+                  <c:pt idx="3">
+                    <c:v>Automating workflows — Large (30%)</c:v>
+                  </c:pt>
+                  <c:pt idx="4">
+                    <c:v>Redesigning processes — Top 50 (27%)</c:v>
+                  </c:pt>
+                  <c:pt idx="5">
+                    <c:v>Redesigning processes — Large (20%)</c:v>
+                  </c:pt>
+                  <c:pt idx="6">
+                    <c:v>Outsourcing — Top 50 (7%)</c:v>
+                  </c:pt>
+                  <c:pt idx="7">
+                    <c:v>Outsourcing — Large (0%)</c:v>
+                  </c:pt>
+                  <c:pt idx="8">
+                    <c:v>Hiring / workforce — Top 50 (0%)</c:v>
+                  </c:pt>
+                  <c:pt idx="9">
+                    <c:v>Hiring / workforce — Large (10%)</c:v>
+                  </c:pt>
+                  <c:pt idx="10">
+                    <c:v>Combination — Top 50 (0%)</c:v>
+                  </c:pt>
+                  <c:pt idx="11">
+                    <c:v>Combination — Large (0%)</c:v>
+                  </c:pt>
+                </c:lvl>
+              </c:multiLvlStrCache>
+            </c:multiLvlStrRef>
+          </c:cat>
+          <c:val>
+            <c:numRef>
+              <c:f>Sheet1!$D$2:$D$13</c:f>
+              <c:numCache>
+                <c:formatCode>General</c:formatCode>
+                <c:ptCount val="12"/>
+                <c:pt idx="0">
+                  <c:v>0</c:v>
+                </c:pt>
+                <c:pt idx="1">
+                  <c:v>0</c:v>
+                </c:pt>
+                <c:pt idx="2">
+                  <c:v>0</c:v>
+                </c:pt>
+                <c:pt idx="3">
+                  <c:v>0</c:v>
+                </c:pt>
+                <c:pt idx="4">
+                  <c:v>7</c:v>
+                </c:pt>
+                <c:pt idx="5">
+                  <c:v>0</c:v>
+                </c:pt>
+                <c:pt idx="6">
+                  <c:v>0</c:v>
+                </c:pt>
+                <c:pt idx="7">
+                  <c:v>0</c:v>
+                </c:pt>
+                <c:pt idx="8">
+                  <c:v>0</c:v>
+                </c:pt>
+                <c:pt idx="9">
+                  <c:v>10</c:v>
+                </c:pt>
+                <c:pt idx="10">
+                  <c:v>0</c:v>
+                </c:pt>
+                <c:pt idx="11">
+                  <c:v>0</c:v>
+                </c:pt>
+              </c:numCache>
+            </c:numRef>
+          </c:val>
+        </c:ser>
+        <c:ser>
+          <c:idx val="3"/>
+          <c:order val="3"/>
+          <c:tx>
+            <c:strRef>
+              <c:f>Sheet1!$E$1</c:f>
+              <c:strCache>
+                <c:ptCount val="1"/>
+                <c:pt idx="0">
+                  <c:v>Australia</c:v>
+                </c:pt>
+              </c:strCache>
+            </c:strRef>
+          </c:tx>
+          <c:spPr>
+            <a:solidFill>
+              <a:srgbClr val="0D8390"/>
+            </a:solidFill>
+            <a:effectLst/>
+          </c:spPr>
+          <c:invertIfNegative val="0"/>
+          <c:dLbls>
+            <c:numFmt formatCode="0&quot;%&quot;;-0&quot;%&quot;;;@" sourceLinked="0"/>
+            <c:txPr>
+              <a:bodyPr/>
+              <a:lstStyle/>
+              <a:p>
+                <a:pPr>
+                  <a:defRPr b="0" i="0" strike="noStrike" sz="650" u="none">
+                    <a:solidFill>
+                      <a:srgbClr val="FFFFFF"/>
+                    </a:solidFill>
+                    <a:latin typeface="Arial"/>
+                  </a:defRPr>
+                </a:pPr>
+              </a:p>
+            </c:txPr>
+            <c:dLblPos val="ctr"/>
+            <c:showLegendKey val="0"/>
+            <c:showVal val="1"/>
+            <c:showCatName val="0"/>
+            <c:showSerName val="0"/>
+            <c:showPercent val="0"/>
+            <c:showBubbleSize val="0"/>
+            <c:showLeaderLines val="0"/>
+          </c:dLbls>
+          <c:cat>
+            <c:multiLvlStrRef>
+              <c:f>Sheet1!$A$2:$A$13</c:f>
+              <c:multiLvlStrCache>
+                <c:ptCount val="12"/>
+                <c:lvl>
+                  <c:pt idx="0">
+                    <c:v>AI-enabled tools — Top 50 (40%)</c:v>
+                  </c:pt>
+                  <c:pt idx="1">
+                    <c:v>AI-enabled tools — Large (40%)</c:v>
+                  </c:pt>
+                  <c:pt idx="2">
+                    <c:v>Automating workflows — Top 50 (27%)</c:v>
+                  </c:pt>
+                  <c:pt idx="3">
+                    <c:v>Automating workflows — Large (30%)</c:v>
+                  </c:pt>
+                  <c:pt idx="4">
+                    <c:v>Redesigning processes — Top 50 (27%)</c:v>
+                  </c:pt>
+                  <c:pt idx="5">
+                    <c:v>Redesigning processes — Large (20%)</c:v>
+                  </c:pt>
+                  <c:pt idx="6">
+                    <c:v>Outsourcing — Top 50 (7%)</c:v>
+                  </c:pt>
+                  <c:pt idx="7">
+                    <c:v>Outsourcing — Large (0%)</c:v>
+                  </c:pt>
+                  <c:pt idx="8">
+                    <c:v>Hiring / workforce — Top 50 (0%)</c:v>
+                  </c:pt>
+                  <c:pt idx="9">
+                    <c:v>Hiring / workforce — Large (10%)</c:v>
+                  </c:pt>
+                  <c:pt idx="10">
+                    <c:v>Combination — Top 50 (0%)</c:v>
+                  </c:pt>
+                  <c:pt idx="11">
+                    <c:v>Combination — Large (0%)</c:v>
+                  </c:pt>
+                </c:lvl>
+              </c:multiLvlStrCache>
+            </c:multiLvlStrRef>
+          </c:cat>
+          <c:val>
+            <c:numRef>
+              <c:f>Sheet1!$E$2:$E$13</c:f>
+              <c:numCache>
+                <c:formatCode>General</c:formatCode>
+                <c:ptCount val="12"/>
+                <c:pt idx="0">
+                  <c:v>0</c:v>
+                </c:pt>
+                <c:pt idx="1">
+                  <c:v>0</c:v>
+                </c:pt>
+                <c:pt idx="2">
+                  <c:v>0</c:v>
+                </c:pt>
+                <c:pt idx="3">
+                  <c:v>0</c:v>
+                </c:pt>
+                <c:pt idx="4">
+                  <c:v>7</c:v>
+                </c:pt>
+                <c:pt idx="5">
+                  <c:v>0</c:v>
+                </c:pt>
+                <c:pt idx="6">
+                  <c:v>0</c:v>
+                </c:pt>
+                <c:pt idx="7">
+                  <c:v>0</c:v>
+                </c:pt>
+                <c:pt idx="8">
+                  <c:v>0</c:v>
+                </c:pt>
+                <c:pt idx="9">
+                  <c:v>0</c:v>
+                </c:pt>
+                <c:pt idx="10">
+                  <c:v>0</c:v>
                 </c:pt>
                 <c:pt idx="11">
                   <c:v>0</c:v>
@@ -7711,7 +8987,7 @@
             <a:lstStyle/>
             <a:p>
               <a:pPr>
-                <a:defRPr b="0" i="0" strike="noStrike" sz="700" u="none">
+                <a:defRPr b="0" i="0" strike="noStrike" sz="650" u="none">
                   <a:solidFill>
                     <a:srgbClr val="FFFFFF"/>
                   </a:solidFill>
@@ -7829,7 +9105,7 @@
         <a:lstStyle/>
         <a:p>
           <a:pPr>
-            <a:defRPr sz="850">      </a:defRPr>
+            <a:defRPr sz="800">      </a:defRPr>
           </a:pPr>
           <a:endParaRPr lang="en-US"/>
         </a:p>
@@ -7851,7 +9127,7 @@
 </c:chartSpace>
 </file>
 
-<file path=ppt/charts/chart25.xml><?xml version="1.0" encoding="utf-8"?>
+<file path=ppt/charts/chart27.xml><?xml version="1.0" encoding="utf-8"?>
 <c:chartSpace xmlns:c="http://schemas.openxmlformats.org/drawingml/2006/chart" xmlns:a="http://schemas.openxmlformats.org/drawingml/2006/main" xmlns:r="http://schemas.openxmlformats.org/officeDocument/2006/relationships">
   <c:date1904 val="0"/>
   <c:roundedCorners val="1"/>
@@ -7872,7 +9148,1576 @@
               <c:strCache>
                 <c:ptCount val="1"/>
                 <c:pt idx="0">
-                  <c:v>Fraud Investment Relative to Regulatory Requirements</c:v>
+                  <c:v>Today</c:v>
+                </c:pt>
+              </c:strCache>
+            </c:strRef>
+          </c:tx>
+          <c:spPr>
+            <a:solidFill>
+              <a:srgbClr val="86BC25"/>
+            </a:solidFill>
+            <a:effectLst/>
+          </c:spPr>
+          <c:invertIfNegative val="0"/>
+          <c:dLbls>
+            <c:numFmt formatCode="0&quot;%&quot;" sourceLinked="0"/>
+            <c:txPr>
+              <a:bodyPr/>
+              <a:lstStyle/>
+              <a:p>
+                <a:pPr>
+                  <a:defRPr b="0" i="0" strike="noStrike" sz="800" u="none">
+                    <a:solidFill>
+                      <a:srgbClr val="000000"/>
+                    </a:solidFill>
+                    <a:latin typeface="Arial"/>
+                  </a:defRPr>
+                </a:pPr>
+              </a:p>
+            </c:txPr>
+            <c:showLegendKey val="0"/>
+            <c:showVal val="1"/>
+            <c:showCatName val="0"/>
+            <c:showSerName val="0"/>
+            <c:showPercent val="0"/>
+            <c:showBubbleSize val="0"/>
+            <c:showLeaderLines val="0"/>
+          </c:dLbls>
+          <c:cat>
+            <c:multiLvlStrRef>
+              <c:f>Sheet1!$A$2:$A$7</c:f>
+              <c:multiLvlStrCache>
+                <c:ptCount val="6"/>
+                <c:lvl>
+                  <c:pt idx="0">
+                    <c:v>AI-enabled tools</c:v>
+                  </c:pt>
+                  <c:pt idx="1">
+                    <c:v>Automating workflows</c:v>
+                  </c:pt>
+                  <c:pt idx="2">
+                    <c:v>Redesigning processes</c:v>
+                  </c:pt>
+                  <c:pt idx="3">
+                    <c:v>Outsourcing</c:v>
+                  </c:pt>
+                  <c:pt idx="4">
+                    <c:v>Hiring / workforce</c:v>
+                  </c:pt>
+                  <c:pt idx="5">
+                    <c:v>Combination</c:v>
+                  </c:pt>
+                </c:lvl>
+              </c:multiLvlStrCache>
+            </c:multiLvlStrRef>
+          </c:cat>
+          <c:val>
+            <c:numRef>
+              <c:f>Sheet1!$B$2:$B$7</c:f>
+              <c:numCache>
+                <c:formatCode>General</c:formatCode>
+                <c:ptCount val="6"/>
+                <c:pt idx="0">
+                  <c:v>35</c:v>
+                </c:pt>
+                <c:pt idx="1">
+                  <c:v>32</c:v>
+                </c:pt>
+                <c:pt idx="2">
+                  <c:v>8</c:v>
+                </c:pt>
+                <c:pt idx="3">
+                  <c:v>5</c:v>
+                </c:pt>
+                <c:pt idx="4">
+                  <c:v>5</c:v>
+                </c:pt>
+                <c:pt idx="5">
+                  <c:v>15</c:v>
+                </c:pt>
+              </c:numCache>
+            </c:numRef>
+          </c:val>
+        </c:ser>
+        <c:ser>
+          <c:idx val="1"/>
+          <c:order val="1"/>
+          <c:tx>
+            <c:strRef>
+              <c:f>Sheet1!$C$1</c:f>
+              <c:strCache>
+                <c:ptCount val="1"/>
+                <c:pt idx="0">
+                  <c:v>3-Year Focus</c:v>
+                </c:pt>
+              </c:strCache>
+            </c:strRef>
+          </c:tx>
+          <c:spPr>
+            <a:solidFill>
+              <a:srgbClr val="046A38"/>
+            </a:solidFill>
+            <a:effectLst/>
+          </c:spPr>
+          <c:invertIfNegative val="0"/>
+          <c:dLbls>
+            <c:numFmt formatCode="0&quot;%&quot;" sourceLinked="0"/>
+            <c:txPr>
+              <a:bodyPr/>
+              <a:lstStyle/>
+              <a:p>
+                <a:pPr>
+                  <a:defRPr b="0" i="0" strike="noStrike" sz="800" u="none">
+                    <a:solidFill>
+                      <a:srgbClr val="000000"/>
+                    </a:solidFill>
+                    <a:latin typeface="Arial"/>
+                  </a:defRPr>
+                </a:pPr>
+              </a:p>
+            </c:txPr>
+            <c:showLegendKey val="0"/>
+            <c:showVal val="1"/>
+            <c:showCatName val="0"/>
+            <c:showSerName val="0"/>
+            <c:showPercent val="0"/>
+            <c:showBubbleSize val="0"/>
+            <c:showLeaderLines val="0"/>
+          </c:dLbls>
+          <c:cat>
+            <c:multiLvlStrRef>
+              <c:f>Sheet1!$A$2:$A$7</c:f>
+              <c:multiLvlStrCache>
+                <c:ptCount val="6"/>
+                <c:lvl>
+                  <c:pt idx="0">
+                    <c:v>AI-enabled tools</c:v>
+                  </c:pt>
+                  <c:pt idx="1">
+                    <c:v>Automating workflows</c:v>
+                  </c:pt>
+                  <c:pt idx="2">
+                    <c:v>Redesigning processes</c:v>
+                  </c:pt>
+                  <c:pt idx="3">
+                    <c:v>Outsourcing</c:v>
+                  </c:pt>
+                  <c:pt idx="4">
+                    <c:v>Hiring / workforce</c:v>
+                  </c:pt>
+                  <c:pt idx="5">
+                    <c:v>Combination</c:v>
+                  </c:pt>
+                </c:lvl>
+              </c:multiLvlStrCache>
+            </c:multiLvlStrRef>
+          </c:cat>
+          <c:val>
+            <c:numRef>
+              <c:f>Sheet1!$C$2:$C$7</c:f>
+              <c:numCache>
+                <c:formatCode>General</c:formatCode>
+                <c:ptCount val="6"/>
+                <c:pt idx="0">
+                  <c:v>40</c:v>
+                </c:pt>
+                <c:pt idx="1">
+                  <c:v>32</c:v>
+                </c:pt>
+                <c:pt idx="2">
+                  <c:v>15</c:v>
+                </c:pt>
+                <c:pt idx="3">
+                  <c:v>8</c:v>
+                </c:pt>
+                <c:pt idx="4">
+                  <c:v>2</c:v>
+                </c:pt>
+                <c:pt idx="5">
+                  <c:v>2</c:v>
+                </c:pt>
+              </c:numCache>
+            </c:numRef>
+          </c:val>
+        </c:ser>
+        <c:dLbls>
+          <c:numFmt formatCode="0&quot;%&quot;" sourceLinked="0"/>
+          <c:txPr>
+            <a:bodyPr/>
+            <a:lstStyle/>
+            <a:p>
+              <a:pPr>
+                <a:defRPr b="0" i="0" strike="noStrike" sz="800" u="none">
+                  <a:solidFill>
+                    <a:srgbClr val="000000"/>
+                  </a:solidFill>
+                  <a:latin typeface="Arial"/>
+                </a:defRPr>
+              </a:pPr>
+            </a:p>
+          </c:txPr>
+          <c:showLegendKey val="0"/>
+          <c:showVal val="1"/>
+          <c:showCatName val="0"/>
+          <c:showSerName val="0"/>
+          <c:showPercent val="0"/>
+          <c:showBubbleSize val="0"/>
+          <c:showLeaderLines val="0"/>
+        </c:dLbls>
+        <c:gapWidth val="40"/>
+        <c:overlap val="0"/>
+        <c:axId val="2094734554"/>
+        <c:axId val="2094734552"/>
+        <c:axId val="2094734556"/>
+      </c:barChart>
+      <c:catAx>
+        <c:axId val="2094734554"/>
+        <c:scaling>
+          <c:orientation val="minMax"/>
+        </c:scaling>
+        <c:delete val="0"/>
+        <c:axPos val="l"/>
+        <c:numFmt formatCode="General" sourceLinked="1"/>
+        <c:majorTickMark val="out"/>
+        <c:minorTickMark val="none"/>
+        <c:tickLblPos val="nextTo"/>
+        <c:spPr>
+          <a:ln w="12700" cap="flat">
+            <a:noFill/>
+            <a:prstDash val="solid"/>
+            <a:round/>
+          </a:ln>
+        </c:spPr>
+        <c:txPr>
+          <a:bodyPr/>
+          <a:lstStyle/>
+          <a:p>
+            <a:pPr>
+              <a:defRPr sz="1000" b="0" i="0" u="none" strike="noStrike">
+                <a:solidFill>
+                  <a:srgbClr val="53565A"/>
+                </a:solidFill>
+                <a:latin typeface="Arial"/>
+              </a:defRPr>
+            </a:pPr>
+            <a:endParaRPr lang="en-US"/>
+          </a:p>
+        </c:txPr>
+        <c:crossAx val="2094734552"/>
+        <c:crosses val="autoZero"/>
+        <c:auto val="1"/>
+        <c:lblAlgn val="ctr"/>
+        <c:noMultiLvlLbl val="1"/>
+      </c:catAx>
+      <c:valAx>
+        <c:axId val="2094734552"/>
+        <c:scaling>
+          <c:orientation val="minMax"/>
+        </c:scaling>
+        <c:delete val="1"/>
+        <c:axPos val="b"/>
+        <c:numFmt formatCode="General" sourceLinked="0"/>
+        <c:majorTickMark val="out"/>
+        <c:minorTickMark val="none"/>
+        <c:tickLblPos val="low"/>
+        <c:spPr>
+          <a:ln w="12700" cap="flat">
+            <a:noFill/>
+            <a:prstDash val="solid"/>
+            <a:round/>
+          </a:ln>
+        </c:spPr>
+        <c:txPr>
+          <a:bodyPr/>
+          <a:lstStyle/>
+          <a:p>
+            <a:pPr>
+              <a:defRPr sz="1200" b="0" i="0" u="none" strike="noStrike">
+                <a:solidFill>
+                  <a:srgbClr val="000000"/>
+                </a:solidFill>
+                <a:latin typeface="Arial"/>
+              </a:defRPr>
+            </a:pPr>
+            <a:endParaRPr lang="en-US"/>
+          </a:p>
+        </c:txPr>
+        <c:crossAx val="2094734554"/>
+        <c:crosses val="autoZero"/>
+        <c:crossBetween val="between"/>
+      </c:valAx>
+      <c:spPr>
+        <a:solidFill>
+          <a:srgbClr val="FFFFFF"/>
+        </a:solidFill>
+        <a:ln>
+          <a:noFill/>
+        </a:ln>
+        <a:effectLst/>
+      </c:spPr>
+    </c:plotArea>
+    <c:legend>
+      <c:legendPos val="b"/>
+      <c:overlay val="0"/>
+      <c:txPr>
+        <a:bodyPr/>
+        <a:lstStyle/>
+        <a:p>
+          <a:pPr>
+            <a:defRPr sz="900">      </a:defRPr>
+          </a:pPr>
+          <a:endParaRPr lang="en-US"/>
+        </a:p>
+      </c:txPr>
+    </c:legend>
+    <c:plotVisOnly val="1"/>
+    <c:dispBlanksAs val="span"/>
+  </c:chart>
+  <c:spPr>
+    <a:noFill/>
+    <a:ln>
+      <a:noFill/>
+    </a:ln>
+    <a:effectLst/>
+  </c:spPr>
+  <c:externalData r:id="rId1">
+    <c:autoUpdate val="0"/>
+  </c:externalData>
+</c:chartSpace>
+</file>
+
+<file path=ppt/charts/chart28.xml><?xml version="1.0" encoding="utf-8"?>
+<c:chartSpace xmlns:c="http://schemas.openxmlformats.org/drawingml/2006/chart" xmlns:a="http://schemas.openxmlformats.org/drawingml/2006/main" xmlns:r="http://schemas.openxmlformats.org/officeDocument/2006/relationships">
+  <c:date1904 val="0"/>
+  <c:roundedCorners val="1"/>
+  <c:chart>
+    <c:autoTitleDeleted val="1"/>
+    <c:plotArea>
+      <c:layout/>
+      <c:barChart>
+        <c:barDir val="bar"/>
+        <c:grouping val="clustered"/>
+        <c:varyColors val="0"/>
+        <c:ser>
+          <c:idx val="0"/>
+          <c:order val="0"/>
+          <c:tx>
+            <c:strRef>
+              <c:f>Sheet1!$B$1</c:f>
+              <c:strCache>
+                <c:ptCount val="1"/>
+                <c:pt idx="0">
+                  <c:v>Today</c:v>
+                </c:pt>
+              </c:strCache>
+            </c:strRef>
+          </c:tx>
+          <c:spPr>
+            <a:solidFill>
+              <a:srgbClr val="86BC25"/>
+            </a:solidFill>
+            <a:effectLst/>
+          </c:spPr>
+          <c:invertIfNegative val="0"/>
+          <c:dLbls>
+            <c:numFmt formatCode="0&quot;%&quot;" sourceLinked="0"/>
+            <c:txPr>
+              <a:bodyPr/>
+              <a:lstStyle/>
+              <a:p>
+                <a:pPr>
+                  <a:defRPr b="0" i="0" strike="noStrike" sz="800" u="none">
+                    <a:solidFill>
+                      <a:srgbClr val="000000"/>
+                    </a:solidFill>
+                    <a:latin typeface="Arial"/>
+                  </a:defRPr>
+                </a:pPr>
+              </a:p>
+            </c:txPr>
+            <c:showLegendKey val="0"/>
+            <c:showVal val="1"/>
+            <c:showCatName val="0"/>
+            <c:showSerName val="0"/>
+            <c:showPercent val="0"/>
+            <c:showBubbleSize val="0"/>
+            <c:showLeaderLines val="0"/>
+          </c:dLbls>
+          <c:cat>
+            <c:multiLvlStrRef>
+              <c:f>Sheet1!$A$2:$A$7</c:f>
+              <c:multiLvlStrCache>
+                <c:ptCount val="6"/>
+                <c:lvl>
+                  <c:pt idx="0">
+                    <c:v>AI-enabled tools</c:v>
+                  </c:pt>
+                  <c:pt idx="1">
+                    <c:v>Automating workflows</c:v>
+                  </c:pt>
+                  <c:pt idx="2">
+                    <c:v>Redesigning processes</c:v>
+                  </c:pt>
+                  <c:pt idx="3">
+                    <c:v>Outsourcing</c:v>
+                  </c:pt>
+                  <c:pt idx="4">
+                    <c:v>Hiring / workforce</c:v>
+                  </c:pt>
+                  <c:pt idx="5">
+                    <c:v>Combination</c:v>
+                  </c:pt>
+                </c:lvl>
+              </c:multiLvlStrCache>
+            </c:multiLvlStrRef>
+          </c:cat>
+          <c:val>
+            <c:numRef>
+              <c:f>Sheet1!$B$2:$B$7</c:f>
+              <c:numCache>
+                <c:formatCode>General</c:formatCode>
+                <c:ptCount val="6"/>
+                <c:pt idx="0">
+                  <c:v>34</c:v>
+                </c:pt>
+                <c:pt idx="1">
+                  <c:v>26</c:v>
+                </c:pt>
+                <c:pt idx="2">
+                  <c:v>11</c:v>
+                </c:pt>
+                <c:pt idx="3">
+                  <c:v>11</c:v>
+                </c:pt>
+                <c:pt idx="4">
+                  <c:v>14</c:v>
+                </c:pt>
+                <c:pt idx="5">
+                  <c:v>3</c:v>
+                </c:pt>
+              </c:numCache>
+            </c:numRef>
+          </c:val>
+        </c:ser>
+        <c:ser>
+          <c:idx val="1"/>
+          <c:order val="1"/>
+          <c:tx>
+            <c:strRef>
+              <c:f>Sheet1!$C$1</c:f>
+              <c:strCache>
+                <c:ptCount val="1"/>
+                <c:pt idx="0">
+                  <c:v>3-Year Focus</c:v>
+                </c:pt>
+              </c:strCache>
+            </c:strRef>
+          </c:tx>
+          <c:spPr>
+            <a:solidFill>
+              <a:srgbClr val="046A38"/>
+            </a:solidFill>
+            <a:effectLst/>
+          </c:spPr>
+          <c:invertIfNegative val="0"/>
+          <c:dLbls>
+            <c:numFmt formatCode="0&quot;%&quot;" sourceLinked="0"/>
+            <c:txPr>
+              <a:bodyPr/>
+              <a:lstStyle/>
+              <a:p>
+                <a:pPr>
+                  <a:defRPr b="0" i="0" strike="noStrike" sz="800" u="none">
+                    <a:solidFill>
+                      <a:srgbClr val="000000"/>
+                    </a:solidFill>
+                    <a:latin typeface="Arial"/>
+                  </a:defRPr>
+                </a:pPr>
+              </a:p>
+            </c:txPr>
+            <c:showLegendKey val="0"/>
+            <c:showVal val="1"/>
+            <c:showCatName val="0"/>
+            <c:showSerName val="0"/>
+            <c:showPercent val="0"/>
+            <c:showBubbleSize val="0"/>
+            <c:showLeaderLines val="0"/>
+          </c:dLbls>
+          <c:cat>
+            <c:multiLvlStrRef>
+              <c:f>Sheet1!$A$2:$A$7</c:f>
+              <c:multiLvlStrCache>
+                <c:ptCount val="6"/>
+                <c:lvl>
+                  <c:pt idx="0">
+                    <c:v>AI-enabled tools</c:v>
+                  </c:pt>
+                  <c:pt idx="1">
+                    <c:v>Automating workflows</c:v>
+                  </c:pt>
+                  <c:pt idx="2">
+                    <c:v>Redesigning processes</c:v>
+                  </c:pt>
+                  <c:pt idx="3">
+                    <c:v>Outsourcing</c:v>
+                  </c:pt>
+                  <c:pt idx="4">
+                    <c:v>Hiring / workforce</c:v>
+                  </c:pt>
+                  <c:pt idx="5">
+                    <c:v>Combination</c:v>
+                  </c:pt>
+                </c:lvl>
+              </c:multiLvlStrCache>
+            </c:multiLvlStrRef>
+          </c:cat>
+          <c:val>
+            <c:numRef>
+              <c:f>Sheet1!$C$2:$C$7</c:f>
+              <c:numCache>
+                <c:formatCode>General</c:formatCode>
+                <c:ptCount val="6"/>
+                <c:pt idx="0">
+                  <c:v>43</c:v>
+                </c:pt>
+                <c:pt idx="1">
+                  <c:v>20</c:v>
+                </c:pt>
+                <c:pt idx="2">
+                  <c:v>17</c:v>
+                </c:pt>
+                <c:pt idx="3">
+                  <c:v>9</c:v>
+                </c:pt>
+                <c:pt idx="4">
+                  <c:v>9</c:v>
+                </c:pt>
+                <c:pt idx="5">
+                  <c:v>3</c:v>
+                </c:pt>
+              </c:numCache>
+            </c:numRef>
+          </c:val>
+        </c:ser>
+        <c:dLbls>
+          <c:numFmt formatCode="0&quot;%&quot;" sourceLinked="0"/>
+          <c:txPr>
+            <a:bodyPr/>
+            <a:lstStyle/>
+            <a:p>
+              <a:pPr>
+                <a:defRPr b="0" i="0" strike="noStrike" sz="800" u="none">
+                  <a:solidFill>
+                    <a:srgbClr val="000000"/>
+                  </a:solidFill>
+                  <a:latin typeface="Arial"/>
+                </a:defRPr>
+              </a:pPr>
+            </a:p>
+          </c:txPr>
+          <c:showLegendKey val="0"/>
+          <c:showVal val="1"/>
+          <c:showCatName val="0"/>
+          <c:showSerName val="0"/>
+          <c:showPercent val="0"/>
+          <c:showBubbleSize val="0"/>
+          <c:showLeaderLines val="0"/>
+        </c:dLbls>
+        <c:gapWidth val="40"/>
+        <c:overlap val="0"/>
+        <c:axId val="2094734554"/>
+        <c:axId val="2094734552"/>
+        <c:axId val="2094734556"/>
+      </c:barChart>
+      <c:catAx>
+        <c:axId val="2094734554"/>
+        <c:scaling>
+          <c:orientation val="minMax"/>
+        </c:scaling>
+        <c:delete val="0"/>
+        <c:axPos val="l"/>
+        <c:numFmt formatCode="General" sourceLinked="1"/>
+        <c:majorTickMark val="out"/>
+        <c:minorTickMark val="none"/>
+        <c:tickLblPos val="nextTo"/>
+        <c:spPr>
+          <a:ln w="12700" cap="flat">
+            <a:noFill/>
+            <a:prstDash val="solid"/>
+            <a:round/>
+          </a:ln>
+        </c:spPr>
+        <c:txPr>
+          <a:bodyPr/>
+          <a:lstStyle/>
+          <a:p>
+            <a:pPr>
+              <a:defRPr sz="1000" b="0" i="0" u="none" strike="noStrike">
+                <a:solidFill>
+                  <a:srgbClr val="53565A"/>
+                </a:solidFill>
+                <a:latin typeface="Arial"/>
+              </a:defRPr>
+            </a:pPr>
+            <a:endParaRPr lang="en-US"/>
+          </a:p>
+        </c:txPr>
+        <c:crossAx val="2094734552"/>
+        <c:crosses val="autoZero"/>
+        <c:auto val="1"/>
+        <c:lblAlgn val="ctr"/>
+        <c:noMultiLvlLbl val="1"/>
+      </c:catAx>
+      <c:valAx>
+        <c:axId val="2094734552"/>
+        <c:scaling>
+          <c:orientation val="minMax"/>
+        </c:scaling>
+        <c:delete val="1"/>
+        <c:axPos val="b"/>
+        <c:numFmt formatCode="General" sourceLinked="0"/>
+        <c:majorTickMark val="out"/>
+        <c:minorTickMark val="none"/>
+        <c:tickLblPos val="low"/>
+        <c:spPr>
+          <a:ln w="12700" cap="flat">
+            <a:noFill/>
+            <a:prstDash val="solid"/>
+            <a:round/>
+          </a:ln>
+        </c:spPr>
+        <c:txPr>
+          <a:bodyPr/>
+          <a:lstStyle/>
+          <a:p>
+            <a:pPr>
+              <a:defRPr sz="1200" b="0" i="0" u="none" strike="noStrike">
+                <a:solidFill>
+                  <a:srgbClr val="000000"/>
+                </a:solidFill>
+                <a:latin typeface="Arial"/>
+              </a:defRPr>
+            </a:pPr>
+            <a:endParaRPr lang="en-US"/>
+          </a:p>
+        </c:txPr>
+        <c:crossAx val="2094734554"/>
+        <c:crosses val="autoZero"/>
+        <c:crossBetween val="between"/>
+      </c:valAx>
+      <c:spPr>
+        <a:solidFill>
+          <a:srgbClr val="FFFFFF"/>
+        </a:solidFill>
+        <a:ln>
+          <a:noFill/>
+        </a:ln>
+        <a:effectLst/>
+      </c:spPr>
+    </c:plotArea>
+    <c:legend>
+      <c:legendPos val="b"/>
+      <c:overlay val="0"/>
+      <c:txPr>
+        <a:bodyPr/>
+        <a:lstStyle/>
+        <a:p>
+          <a:pPr>
+            <a:defRPr sz="900">      </a:defRPr>
+          </a:pPr>
+          <a:endParaRPr lang="en-US"/>
+        </a:p>
+      </c:txPr>
+    </c:legend>
+    <c:plotVisOnly val="1"/>
+    <c:dispBlanksAs val="span"/>
+  </c:chart>
+  <c:spPr>
+    <a:noFill/>
+    <a:ln>
+      <a:noFill/>
+    </a:ln>
+    <a:effectLst/>
+  </c:spPr>
+  <c:externalData r:id="rId1">
+    <c:autoUpdate val="0"/>
+  </c:externalData>
+</c:chartSpace>
+</file>
+
+<file path=ppt/charts/chart29.xml><?xml version="1.0" encoding="utf-8"?>
+<c:chartSpace xmlns:c="http://schemas.openxmlformats.org/drawingml/2006/chart" xmlns:a="http://schemas.openxmlformats.org/drawingml/2006/main" xmlns:r="http://schemas.openxmlformats.org/officeDocument/2006/relationships">
+  <c:date1904 val="0"/>
+  <c:roundedCorners val="1"/>
+  <c:chart>
+    <c:autoTitleDeleted val="1"/>
+    <c:plotArea>
+      <c:layout/>
+      <c:barChart>
+        <c:barDir val="bar"/>
+        <c:grouping val="stacked"/>
+        <c:varyColors val="0"/>
+        <c:ser>
+          <c:idx val="0"/>
+          <c:order val="0"/>
+          <c:tx>
+            <c:strRef>
+              <c:f>Sheet1!$B$1</c:f>
+              <c:strCache>
+                <c:ptCount val="1"/>
+                <c:pt idx="0">
+                  <c:v>United States</c:v>
+                </c:pt>
+              </c:strCache>
+            </c:strRef>
+          </c:tx>
+          <c:spPr>
+            <a:solidFill>
+              <a:srgbClr val="86BC25"/>
+            </a:solidFill>
+            <a:effectLst/>
+          </c:spPr>
+          <c:invertIfNegative val="0"/>
+          <c:dLbls>
+            <c:numFmt formatCode="0&quot;%&quot;;-0&quot;%&quot;;;@" sourceLinked="0"/>
+            <c:txPr>
+              <a:bodyPr/>
+              <a:lstStyle/>
+              <a:p>
+                <a:pPr>
+                  <a:defRPr b="0" i="0" strike="noStrike" sz="600" u="none">
+                    <a:solidFill>
+                      <a:srgbClr val="FFFFFF"/>
+                    </a:solidFill>
+                    <a:latin typeface="Arial"/>
+                  </a:defRPr>
+                </a:pPr>
+              </a:p>
+            </c:txPr>
+            <c:dLblPos val="ctr"/>
+            <c:showLegendKey val="0"/>
+            <c:showVal val="1"/>
+            <c:showCatName val="0"/>
+            <c:showSerName val="0"/>
+            <c:showPercent val="0"/>
+            <c:showBubbleSize val="0"/>
+            <c:showLeaderLines val="0"/>
+          </c:dLbls>
+          <c:cat>
+            <c:multiLvlStrRef>
+              <c:f>Sheet1!$A$2:$A$13</c:f>
+              <c:multiLvlStrCache>
+                <c:ptCount val="12"/>
+                <c:lvl>
+                  <c:pt idx="0">
+                    <c:v>AI-enabled tools — Top 100 (34%)</c:v>
+                  </c:pt>
+                  <c:pt idx="1">
+                    <c:v>AI-enabled tools — Large (35%)</c:v>
+                  </c:pt>
+                  <c:pt idx="2">
+                    <c:v>Automating workflows — Top 100 (32%)</c:v>
+                  </c:pt>
+                  <c:pt idx="3">
+                    <c:v>Automating workflows — Large (26%)</c:v>
+                  </c:pt>
+                  <c:pt idx="4">
+                    <c:v>Redesigning processes — Top 100 (6%)</c:v>
+                  </c:pt>
+                  <c:pt idx="5">
+                    <c:v>Redesigning processes — Large (12%)</c:v>
+                  </c:pt>
+                  <c:pt idx="6">
+                    <c:v>Outsourcing — Top 100 (4%)</c:v>
+                  </c:pt>
+                  <c:pt idx="7">
+                    <c:v>Outsourcing — Large (12%)</c:v>
+                  </c:pt>
+                  <c:pt idx="8">
+                    <c:v>Hiring / workforce — Top 100 (4%)</c:v>
+                  </c:pt>
+                  <c:pt idx="9">
+                    <c:v>Hiring / workforce — Large (14%)</c:v>
+                  </c:pt>
+                  <c:pt idx="10">
+                    <c:v>Combination — Top 100 (15%)</c:v>
+                  </c:pt>
+                  <c:pt idx="11">
+                    <c:v>Combination — Large (3%)</c:v>
+                  </c:pt>
+                </c:lvl>
+              </c:multiLvlStrCache>
+            </c:multiLvlStrRef>
+          </c:cat>
+          <c:val>
+            <c:numRef>
+              <c:f>Sheet1!$B$2:$B$13</c:f>
+              <c:numCache>
+                <c:formatCode>General</c:formatCode>
+                <c:ptCount val="12"/>
+                <c:pt idx="0">
+                  <c:v>20</c:v>
+                </c:pt>
+                <c:pt idx="1">
+                  <c:v>17</c:v>
+                </c:pt>
+                <c:pt idx="2">
+                  <c:v>10</c:v>
+                </c:pt>
+                <c:pt idx="3">
+                  <c:v>11</c:v>
+                </c:pt>
+                <c:pt idx="4">
+                  <c:v>0</c:v>
+                </c:pt>
+                <c:pt idx="5">
+                  <c:v>6</c:v>
+                </c:pt>
+                <c:pt idx="6">
+                  <c:v>0</c:v>
+                </c:pt>
+                <c:pt idx="7">
+                  <c:v>9</c:v>
+                </c:pt>
+                <c:pt idx="8">
+                  <c:v>0</c:v>
+                </c:pt>
+                <c:pt idx="9">
+                  <c:v>14</c:v>
+                </c:pt>
+                <c:pt idx="10">
+                  <c:v>5</c:v>
+                </c:pt>
+                <c:pt idx="11">
+                  <c:v>0</c:v>
+                </c:pt>
+              </c:numCache>
+            </c:numRef>
+          </c:val>
+        </c:ser>
+        <c:ser>
+          <c:idx val="1"/>
+          <c:order val="1"/>
+          <c:tx>
+            <c:strRef>
+              <c:f>Sheet1!$C$1</c:f>
+              <c:strCache>
+                <c:ptCount val="1"/>
+                <c:pt idx="0">
+                  <c:v>Canada</c:v>
+                </c:pt>
+              </c:strCache>
+            </c:strRef>
+          </c:tx>
+          <c:spPr>
+            <a:solidFill>
+              <a:srgbClr val="43B02A"/>
+            </a:solidFill>
+            <a:effectLst/>
+          </c:spPr>
+          <c:invertIfNegative val="0"/>
+          <c:dLbls>
+            <c:numFmt formatCode="0&quot;%&quot;;-0&quot;%&quot;;;@" sourceLinked="0"/>
+            <c:txPr>
+              <a:bodyPr/>
+              <a:lstStyle/>
+              <a:p>
+                <a:pPr>
+                  <a:defRPr b="0" i="0" strike="noStrike" sz="600" u="none">
+                    <a:solidFill>
+                      <a:srgbClr val="FFFFFF"/>
+                    </a:solidFill>
+                    <a:latin typeface="Arial"/>
+                  </a:defRPr>
+                </a:pPr>
+              </a:p>
+            </c:txPr>
+            <c:dLblPos val="ctr"/>
+            <c:showLegendKey val="0"/>
+            <c:showVal val="1"/>
+            <c:showCatName val="0"/>
+            <c:showSerName val="0"/>
+            <c:showPercent val="0"/>
+            <c:showBubbleSize val="0"/>
+            <c:showLeaderLines val="0"/>
+          </c:dLbls>
+          <c:cat>
+            <c:multiLvlStrRef>
+              <c:f>Sheet1!$A$2:$A$13</c:f>
+              <c:multiLvlStrCache>
+                <c:ptCount val="12"/>
+                <c:lvl>
+                  <c:pt idx="0">
+                    <c:v>AI-enabled tools — Top 100 (34%)</c:v>
+                  </c:pt>
+                  <c:pt idx="1">
+                    <c:v>AI-enabled tools — Large (35%)</c:v>
+                  </c:pt>
+                  <c:pt idx="2">
+                    <c:v>Automating workflows — Top 100 (32%)</c:v>
+                  </c:pt>
+                  <c:pt idx="3">
+                    <c:v>Automating workflows — Large (26%)</c:v>
+                  </c:pt>
+                  <c:pt idx="4">
+                    <c:v>Redesigning processes — Top 100 (6%)</c:v>
+                  </c:pt>
+                  <c:pt idx="5">
+                    <c:v>Redesigning processes — Large (12%)</c:v>
+                  </c:pt>
+                  <c:pt idx="6">
+                    <c:v>Outsourcing — Top 100 (4%)</c:v>
+                  </c:pt>
+                  <c:pt idx="7">
+                    <c:v>Outsourcing — Large (12%)</c:v>
+                  </c:pt>
+                  <c:pt idx="8">
+                    <c:v>Hiring / workforce — Top 100 (4%)</c:v>
+                  </c:pt>
+                  <c:pt idx="9">
+                    <c:v>Hiring / workforce — Large (14%)</c:v>
+                  </c:pt>
+                  <c:pt idx="10">
+                    <c:v>Combination — Top 100 (15%)</c:v>
+                  </c:pt>
+                  <c:pt idx="11">
+                    <c:v>Combination — Large (3%)</c:v>
+                  </c:pt>
+                </c:lvl>
+              </c:multiLvlStrCache>
+            </c:multiLvlStrRef>
+          </c:cat>
+          <c:val>
+            <c:numRef>
+              <c:f>Sheet1!$C$2:$C$13</c:f>
+              <c:numCache>
+                <c:formatCode>General</c:formatCode>
+                <c:ptCount val="12"/>
+                <c:pt idx="0">
+                  <c:v>5</c:v>
+                </c:pt>
+                <c:pt idx="1">
+                  <c:v>6</c:v>
+                </c:pt>
+                <c:pt idx="2">
+                  <c:v>12</c:v>
+                </c:pt>
+                <c:pt idx="3">
+                  <c:v>9</c:v>
+                </c:pt>
+                <c:pt idx="4">
+                  <c:v>2</c:v>
+                </c:pt>
+                <c:pt idx="5">
+                  <c:v>0</c:v>
+                </c:pt>
+                <c:pt idx="6">
+                  <c:v>2</c:v>
+                </c:pt>
+                <c:pt idx="7">
+                  <c:v>0</c:v>
+                </c:pt>
+                <c:pt idx="8">
+                  <c:v>2</c:v>
+                </c:pt>
+                <c:pt idx="9">
+                  <c:v>0</c:v>
+                </c:pt>
+                <c:pt idx="10">
+                  <c:v>8</c:v>
+                </c:pt>
+                <c:pt idx="11">
+                  <c:v>0</c:v>
+                </c:pt>
+              </c:numCache>
+            </c:numRef>
+          </c:val>
+        </c:ser>
+        <c:ser>
+          <c:idx val="2"/>
+          <c:order val="2"/>
+          <c:tx>
+            <c:strRef>
+              <c:f>Sheet1!$D$1</c:f>
+              <c:strCache>
+                <c:ptCount val="1"/>
+                <c:pt idx="0">
+                  <c:v>Europe (EU + UK)</c:v>
+                </c:pt>
+              </c:strCache>
+            </c:strRef>
+          </c:tx>
+          <c:spPr>
+            <a:solidFill>
+              <a:srgbClr val="046A38"/>
+            </a:solidFill>
+            <a:effectLst/>
+          </c:spPr>
+          <c:invertIfNegative val="0"/>
+          <c:dLbls>
+            <c:numFmt formatCode="0&quot;%&quot;;-0&quot;%&quot;;;@" sourceLinked="0"/>
+            <c:txPr>
+              <a:bodyPr/>
+              <a:lstStyle/>
+              <a:p>
+                <a:pPr>
+                  <a:defRPr b="0" i="0" strike="noStrike" sz="600" u="none">
+                    <a:solidFill>
+                      <a:srgbClr val="FFFFFF"/>
+                    </a:solidFill>
+                    <a:latin typeface="Arial"/>
+                  </a:defRPr>
+                </a:pPr>
+              </a:p>
+            </c:txPr>
+            <c:dLblPos val="ctr"/>
+            <c:showLegendKey val="0"/>
+            <c:showVal val="1"/>
+            <c:showCatName val="0"/>
+            <c:showSerName val="0"/>
+            <c:showPercent val="0"/>
+            <c:showBubbleSize val="0"/>
+            <c:showLeaderLines val="0"/>
+          </c:dLbls>
+          <c:cat>
+            <c:multiLvlStrRef>
+              <c:f>Sheet1!$A$2:$A$13</c:f>
+              <c:multiLvlStrCache>
+                <c:ptCount val="12"/>
+                <c:lvl>
+                  <c:pt idx="0">
+                    <c:v>AI-enabled tools — Top 100 (34%)</c:v>
+                  </c:pt>
+                  <c:pt idx="1">
+                    <c:v>AI-enabled tools — Large (35%)</c:v>
+                  </c:pt>
+                  <c:pt idx="2">
+                    <c:v>Automating workflows — Top 100 (32%)</c:v>
+                  </c:pt>
+                  <c:pt idx="3">
+                    <c:v>Automating workflows — Large (26%)</c:v>
+                  </c:pt>
+                  <c:pt idx="4">
+                    <c:v>Redesigning processes — Top 100 (6%)</c:v>
+                  </c:pt>
+                  <c:pt idx="5">
+                    <c:v>Redesigning processes — Large (12%)</c:v>
+                  </c:pt>
+                  <c:pt idx="6">
+                    <c:v>Outsourcing — Top 100 (4%)</c:v>
+                  </c:pt>
+                  <c:pt idx="7">
+                    <c:v>Outsourcing — Large (12%)</c:v>
+                  </c:pt>
+                  <c:pt idx="8">
+                    <c:v>Hiring / workforce — Top 100 (4%)</c:v>
+                  </c:pt>
+                  <c:pt idx="9">
+                    <c:v>Hiring / workforce — Large (14%)</c:v>
+                  </c:pt>
+                  <c:pt idx="10">
+                    <c:v>Combination — Top 100 (15%)</c:v>
+                  </c:pt>
+                  <c:pt idx="11">
+                    <c:v>Combination — Large (3%)</c:v>
+                  </c:pt>
+                </c:lvl>
+              </c:multiLvlStrCache>
+            </c:multiLvlStrRef>
+          </c:cat>
+          <c:val>
+            <c:numRef>
+              <c:f>Sheet1!$D$2:$D$13</c:f>
+              <c:numCache>
+                <c:formatCode>General</c:formatCode>
+                <c:ptCount val="12"/>
+                <c:pt idx="0">
+                  <c:v>5</c:v>
+                </c:pt>
+                <c:pt idx="1">
+                  <c:v>6</c:v>
+                </c:pt>
+                <c:pt idx="2">
+                  <c:v>5</c:v>
+                </c:pt>
+                <c:pt idx="3">
+                  <c:v>3</c:v>
+                </c:pt>
+                <c:pt idx="4">
+                  <c:v>2</c:v>
+                </c:pt>
+                <c:pt idx="5">
+                  <c:v>3</c:v>
+                </c:pt>
+                <c:pt idx="6">
+                  <c:v>0</c:v>
+                </c:pt>
+                <c:pt idx="7">
+                  <c:v>0</c:v>
+                </c:pt>
+                <c:pt idx="8">
+                  <c:v>2</c:v>
+                </c:pt>
+                <c:pt idx="9">
+                  <c:v>0</c:v>
+                </c:pt>
+                <c:pt idx="10">
+                  <c:v>2</c:v>
+                </c:pt>
+                <c:pt idx="11">
+                  <c:v>3</c:v>
+                </c:pt>
+              </c:numCache>
+            </c:numRef>
+          </c:val>
+        </c:ser>
+        <c:ser>
+          <c:idx val="3"/>
+          <c:order val="3"/>
+          <c:tx>
+            <c:strRef>
+              <c:f>Sheet1!$E$1</c:f>
+              <c:strCache>
+                <c:ptCount val="1"/>
+                <c:pt idx="0">
+                  <c:v>Australia</c:v>
+                </c:pt>
+              </c:strCache>
+            </c:strRef>
+          </c:tx>
+          <c:spPr>
+            <a:solidFill>
+              <a:srgbClr val="0D8390"/>
+            </a:solidFill>
+            <a:effectLst/>
+          </c:spPr>
+          <c:invertIfNegative val="0"/>
+          <c:dLbls>
+            <c:numFmt formatCode="0&quot;%&quot;;-0&quot;%&quot;;;@" sourceLinked="0"/>
+            <c:txPr>
+              <a:bodyPr/>
+              <a:lstStyle/>
+              <a:p>
+                <a:pPr>
+                  <a:defRPr b="0" i="0" strike="noStrike" sz="600" u="none">
+                    <a:solidFill>
+                      <a:srgbClr val="FFFFFF"/>
+                    </a:solidFill>
+                    <a:latin typeface="Arial"/>
+                  </a:defRPr>
+                </a:pPr>
+              </a:p>
+            </c:txPr>
+            <c:dLblPos val="ctr"/>
+            <c:showLegendKey val="0"/>
+            <c:showVal val="1"/>
+            <c:showCatName val="0"/>
+            <c:showSerName val="0"/>
+            <c:showPercent val="0"/>
+            <c:showBubbleSize val="0"/>
+            <c:showLeaderLines val="0"/>
+          </c:dLbls>
+          <c:cat>
+            <c:multiLvlStrRef>
+              <c:f>Sheet1!$A$2:$A$13</c:f>
+              <c:multiLvlStrCache>
+                <c:ptCount val="12"/>
+                <c:lvl>
+                  <c:pt idx="0">
+                    <c:v>AI-enabled tools — Top 100 (34%)</c:v>
+                  </c:pt>
+                  <c:pt idx="1">
+                    <c:v>AI-enabled tools — Large (35%)</c:v>
+                  </c:pt>
+                  <c:pt idx="2">
+                    <c:v>Automating workflows — Top 100 (32%)</c:v>
+                  </c:pt>
+                  <c:pt idx="3">
+                    <c:v>Automating workflows — Large (26%)</c:v>
+                  </c:pt>
+                  <c:pt idx="4">
+                    <c:v>Redesigning processes — Top 100 (6%)</c:v>
+                  </c:pt>
+                  <c:pt idx="5">
+                    <c:v>Redesigning processes — Large (12%)</c:v>
+                  </c:pt>
+                  <c:pt idx="6">
+                    <c:v>Outsourcing — Top 100 (4%)</c:v>
+                  </c:pt>
+                  <c:pt idx="7">
+                    <c:v>Outsourcing — Large (12%)</c:v>
+                  </c:pt>
+                  <c:pt idx="8">
+                    <c:v>Hiring / workforce — Top 100 (4%)</c:v>
+                  </c:pt>
+                  <c:pt idx="9">
+                    <c:v>Hiring / workforce — Large (14%)</c:v>
+                  </c:pt>
+                  <c:pt idx="10">
+                    <c:v>Combination — Top 100 (15%)</c:v>
+                  </c:pt>
+                  <c:pt idx="11">
+                    <c:v>Combination — Large (3%)</c:v>
+                  </c:pt>
+                </c:lvl>
+              </c:multiLvlStrCache>
+            </c:multiLvlStrRef>
+          </c:cat>
+          <c:val>
+            <c:numRef>
+              <c:f>Sheet1!$E$2:$E$13</c:f>
+              <c:numCache>
+                <c:formatCode>General</c:formatCode>
+                <c:ptCount val="12"/>
+                <c:pt idx="0">
+                  <c:v>2</c:v>
+                </c:pt>
+                <c:pt idx="1">
+                  <c:v>6</c:v>
+                </c:pt>
+                <c:pt idx="2">
+                  <c:v>5</c:v>
+                </c:pt>
+                <c:pt idx="3">
+                  <c:v>0</c:v>
+                </c:pt>
+                <c:pt idx="4">
+                  <c:v>2</c:v>
+                </c:pt>
+                <c:pt idx="5">
+                  <c:v>0</c:v>
+                </c:pt>
+                <c:pt idx="6">
+                  <c:v>0</c:v>
+                </c:pt>
+                <c:pt idx="7">
+                  <c:v>3</c:v>
+                </c:pt>
+                <c:pt idx="8">
+                  <c:v>0</c:v>
+                </c:pt>
+                <c:pt idx="9">
+                  <c:v>0</c:v>
+                </c:pt>
+                <c:pt idx="10">
+                  <c:v>0</c:v>
+                </c:pt>
+                <c:pt idx="11">
+                  <c:v>0</c:v>
+                </c:pt>
+              </c:numCache>
+            </c:numRef>
+          </c:val>
+        </c:ser>
+        <c:ser>
+          <c:idx val="4"/>
+          <c:order val="4"/>
+          <c:tx>
+            <c:strRef>
+              <c:f>Sheet1!$F$1</c:f>
+              <c:strCache>
+                <c:ptCount val="1"/>
+                <c:pt idx="0">
+                  <c:v>Singapore</c:v>
+                </c:pt>
+              </c:strCache>
+            </c:strRef>
+          </c:tx>
+          <c:spPr>
+            <a:solidFill>
+              <a:srgbClr val="53565A"/>
+            </a:solidFill>
+            <a:effectLst/>
+          </c:spPr>
+          <c:invertIfNegative val="0"/>
+          <c:dLbls>
+            <c:numFmt formatCode="0&quot;%&quot;;-0&quot;%&quot;;;@" sourceLinked="0"/>
+            <c:txPr>
+              <a:bodyPr/>
+              <a:lstStyle/>
+              <a:p>
+                <a:pPr>
+                  <a:defRPr b="0" i="0" strike="noStrike" sz="600" u="none">
+                    <a:solidFill>
+                      <a:srgbClr val="FFFFFF"/>
+                    </a:solidFill>
+                    <a:latin typeface="Arial"/>
+                  </a:defRPr>
+                </a:pPr>
+              </a:p>
+            </c:txPr>
+            <c:dLblPos val="ctr"/>
+            <c:showLegendKey val="0"/>
+            <c:showVal val="1"/>
+            <c:showCatName val="0"/>
+            <c:showSerName val="0"/>
+            <c:showPercent val="0"/>
+            <c:showBubbleSize val="0"/>
+            <c:showLeaderLines val="0"/>
+          </c:dLbls>
+          <c:cat>
+            <c:multiLvlStrRef>
+              <c:f>Sheet1!$A$2:$A$13</c:f>
+              <c:multiLvlStrCache>
+                <c:ptCount val="12"/>
+                <c:lvl>
+                  <c:pt idx="0">
+                    <c:v>AI-enabled tools — Top 100 (34%)</c:v>
+                  </c:pt>
+                  <c:pt idx="1">
+                    <c:v>AI-enabled tools — Large (35%)</c:v>
+                  </c:pt>
+                  <c:pt idx="2">
+                    <c:v>Automating workflows — Top 100 (32%)</c:v>
+                  </c:pt>
+                  <c:pt idx="3">
+                    <c:v>Automating workflows — Large (26%)</c:v>
+                  </c:pt>
+                  <c:pt idx="4">
+                    <c:v>Redesigning processes — Top 100 (6%)</c:v>
+                  </c:pt>
+                  <c:pt idx="5">
+                    <c:v>Redesigning processes — Large (12%)</c:v>
+                  </c:pt>
+                  <c:pt idx="6">
+                    <c:v>Outsourcing — Top 100 (4%)</c:v>
+                  </c:pt>
+                  <c:pt idx="7">
+                    <c:v>Outsourcing — Large (12%)</c:v>
+                  </c:pt>
+                  <c:pt idx="8">
+                    <c:v>Hiring / workforce — Top 100 (4%)</c:v>
+                  </c:pt>
+                  <c:pt idx="9">
+                    <c:v>Hiring / workforce — Large (14%)</c:v>
+                  </c:pt>
+                  <c:pt idx="10">
+                    <c:v>Combination — Top 100 (15%)</c:v>
+                  </c:pt>
+                  <c:pt idx="11">
+                    <c:v>Combination — Large (3%)</c:v>
+                  </c:pt>
+                </c:lvl>
+              </c:multiLvlStrCache>
+            </c:multiLvlStrRef>
+          </c:cat>
+          <c:val>
+            <c:numRef>
+              <c:f>Sheet1!$F$2:$F$13</c:f>
+              <c:numCache>
+                <c:formatCode>General</c:formatCode>
+                <c:ptCount val="12"/>
+                <c:pt idx="0">
+                  <c:v>2</c:v>
+                </c:pt>
+                <c:pt idx="1">
+                  <c:v>0</c:v>
+                </c:pt>
+                <c:pt idx="2">
+                  <c:v>0</c:v>
+                </c:pt>
+                <c:pt idx="3">
+                  <c:v>3</c:v>
+                </c:pt>
+                <c:pt idx="4">
+                  <c:v>0</c:v>
+                </c:pt>
+                <c:pt idx="5">
+                  <c:v>3</c:v>
+                </c:pt>
+                <c:pt idx="6">
+                  <c:v>2</c:v>
+                </c:pt>
+                <c:pt idx="7">
+                  <c:v>0</c:v>
+                </c:pt>
+                <c:pt idx="8">
+                  <c:v>0</c:v>
+                </c:pt>
+                <c:pt idx="9">
+                  <c:v>0</c:v>
+                </c:pt>
+                <c:pt idx="10">
+                  <c:v>0</c:v>
+                </c:pt>
+                <c:pt idx="11">
+                  <c:v>0</c:v>
+                </c:pt>
+              </c:numCache>
+            </c:numRef>
+          </c:val>
+        </c:ser>
+        <c:dLbls>
+          <c:numFmt formatCode="0&quot;%&quot;;-0&quot;%&quot;;;@" sourceLinked="0"/>
+          <c:txPr>
+            <a:bodyPr/>
+            <a:lstStyle/>
+            <a:p>
+              <a:pPr>
+                <a:defRPr b="0" i="0" strike="noStrike" sz="600" u="none">
+                  <a:solidFill>
+                    <a:srgbClr val="FFFFFF"/>
+                  </a:solidFill>
+                  <a:latin typeface="Arial"/>
+                </a:defRPr>
+              </a:pPr>
+            </a:p>
+          </c:txPr>
+          <c:dLblPos val="ctr"/>
+          <c:showLegendKey val="0"/>
+          <c:showVal val="1"/>
+          <c:showCatName val="0"/>
+          <c:showSerName val="0"/>
+          <c:showPercent val="0"/>
+          <c:showBubbleSize val="0"/>
+          <c:showLeaderLines val="0"/>
+        </c:dLbls>
+        <c:gapWidth val="40"/>
+        <c:overlap val="100"/>
+        <c:axId val="2094734554"/>
+        <c:axId val="2094734552"/>
+        <c:axId val="2094734556"/>
+      </c:barChart>
+      <c:catAx>
+        <c:axId val="2094734554"/>
+        <c:scaling>
+          <c:orientation val="minMax"/>
+        </c:scaling>
+        <c:delete val="0"/>
+        <c:axPos val="l"/>
+        <c:numFmt formatCode="General" sourceLinked="1"/>
+        <c:majorTickMark val="out"/>
+        <c:minorTickMark val="none"/>
+        <c:tickLblPos val="nextTo"/>
+        <c:spPr>
+          <a:ln w="12700" cap="flat">
+            <a:noFill/>
+            <a:prstDash val="solid"/>
+            <a:round/>
+          </a:ln>
+        </c:spPr>
+        <c:txPr>
+          <a:bodyPr/>
+          <a:lstStyle/>
+          <a:p>
+            <a:pPr>
+              <a:defRPr sz="750" b="0" i="0" u="none" strike="noStrike">
+                <a:solidFill>
+                  <a:srgbClr val="53565A"/>
+                </a:solidFill>
+                <a:latin typeface="Arial"/>
+              </a:defRPr>
+            </a:pPr>
+            <a:endParaRPr lang="en-US"/>
+          </a:p>
+        </c:txPr>
+        <c:crossAx val="2094734552"/>
+        <c:crosses val="autoZero"/>
+        <c:auto val="1"/>
+        <c:lblAlgn val="ctr"/>
+        <c:noMultiLvlLbl val="1"/>
+      </c:catAx>
+      <c:valAx>
+        <c:axId val="2094734552"/>
+        <c:scaling>
+          <c:orientation val="minMax"/>
+        </c:scaling>
+        <c:delete val="1"/>
+        <c:axPos val="b"/>
+        <c:numFmt formatCode="General" sourceLinked="0"/>
+        <c:majorTickMark val="out"/>
+        <c:minorTickMark val="none"/>
+        <c:tickLblPos val="low"/>
+        <c:spPr>
+          <a:ln w="12700" cap="flat">
+            <a:noFill/>
+            <a:prstDash val="solid"/>
+            <a:round/>
+          </a:ln>
+        </c:spPr>
+        <c:txPr>
+          <a:bodyPr/>
+          <a:lstStyle/>
+          <a:p>
+            <a:pPr>
+              <a:defRPr sz="1200" b="0" i="0" u="none" strike="noStrike">
+                <a:solidFill>
+                  <a:srgbClr val="000000"/>
+                </a:solidFill>
+                <a:latin typeface="Arial"/>
+              </a:defRPr>
+            </a:pPr>
+            <a:endParaRPr lang="en-US"/>
+          </a:p>
+        </c:txPr>
+        <c:crossAx val="2094734554"/>
+        <c:crosses val="autoZero"/>
+        <c:crossBetween val="between"/>
+      </c:valAx>
+      <c:spPr>
+        <a:solidFill>
+          <a:srgbClr val="FFFFFF"/>
+        </a:solidFill>
+        <a:ln>
+          <a:noFill/>
+        </a:ln>
+        <a:effectLst/>
+      </c:spPr>
+    </c:plotArea>
+    <c:legend>
+      <c:legendPos val="b"/>
+      <c:overlay val="0"/>
+      <c:txPr>
+        <a:bodyPr/>
+        <a:lstStyle/>
+        <a:p>
+          <a:pPr>
+            <a:defRPr sz="750">      </a:defRPr>
+          </a:pPr>
+          <a:endParaRPr lang="en-US"/>
+        </a:p>
+      </c:txPr>
+    </c:legend>
+    <c:plotVisOnly val="1"/>
+    <c:dispBlanksAs val="span"/>
+  </c:chart>
+  <c:spPr>
+    <a:noFill/>
+    <a:ln>
+      <a:noFill/>
+    </a:ln>
+    <a:effectLst/>
+  </c:spPr>
+  <c:externalData r:id="rId1">
+    <c:autoUpdate val="0"/>
+  </c:externalData>
+</c:chartSpace>
+</file>
+
+<file path=ppt/charts/chart3.xml><?xml version="1.0" encoding="utf-8"?>
+<c:chartSpace xmlns:c="http://schemas.openxmlformats.org/drawingml/2006/chart" xmlns:a="http://schemas.openxmlformats.org/drawingml/2006/main" xmlns:r="http://schemas.openxmlformats.org/officeDocument/2006/relationships">
+  <c:date1904 val="0"/>
+  <c:roundedCorners val="1"/>
+  <c:chart>
+    <c:autoTitleDeleted val="1"/>
+    <c:plotArea>
+      <c:layout/>
+      <c:barChart>
+        <c:barDir val="bar"/>
+        <c:grouping val="clustered"/>
+        <c:varyColors val="0"/>
+        <c:ser>
+          <c:idx val="0"/>
+          <c:order val="0"/>
+          <c:tx>
+            <c:strRef>
+              <c:f>Sheet1!$B$1</c:f>
+              <c:strCache>
+                <c:ptCount val="1"/>
+                <c:pt idx="0">
+                  <c:v>Greatest Increase in AI/Deepfake Vulnerability</c:v>
                 </c:pt>
               </c:strCache>
             </c:strRef>
@@ -7910,18 +10755,27 @@
           </c:dLbls>
           <c:cat>
             <c:multiLvlStrRef>
-              <c:f>Sheet1!$A$2:$A$4</c:f>
+              <c:f>Sheet1!$A$2:$A$7</c:f>
               <c:multiLvlStrCache>
-                <c:ptCount val="3"/>
+                <c:ptCount val="6"/>
                 <c:lvl>
                   <c:pt idx="0">
-                    <c:v>Investing to remediate existing compliance gaps</c:v>
+                    <c:v>Digital onboarding, KYC &amp; identity verification</c:v>
                   </c:pt>
                   <c:pt idx="1">
-                    <c:v>Investing to meet upcoming / draft regulations</c:v>
+                    <c:v>Payment, wire &amp; transaction approvals</c:v>
                   </c:pt>
                   <c:pt idx="2">
-                    <c:v>Regulation not a primary driver</c:v>
+                    <c:v>Claims, underwriting &amp; lending review</c:v>
+                  </c:pt>
+                  <c:pt idx="3">
+                    <c:v>Contact center / phone-based authentication</c:v>
+                  </c:pt>
+                  <c:pt idx="4">
+                    <c:v>Executive / employee / broker impersonation</c:v>
+                  </c:pt>
+                  <c:pt idx="5">
+                    <c:v>Video meetings &amp; remote advisory</c:v>
                   </c:pt>
                 </c:lvl>
               </c:multiLvlStrCache>
@@ -7929,18 +10783,27 @@
           </c:cat>
           <c:val>
             <c:numRef>
-              <c:f>Sheet1!$B$2:$B$4</c:f>
+              <c:f>Sheet1!$B$2:$B$7</c:f>
               <c:numCache>
                 <c:formatCode>General</c:formatCode>
-                <c:ptCount val="3"/>
+                <c:ptCount val="6"/>
                 <c:pt idx="0">
-                  <c:v>48</c:v>
+                  <c:v>70</c:v>
                 </c:pt>
                 <c:pt idx="1">
-                  <c:v>39</c:v>
+                  <c:v>64</c:v>
                 </c:pt>
                 <c:pt idx="2">
-                  <c:v>13</c:v>
+                  <c:v>53</c:v>
+                </c:pt>
+                <c:pt idx="3">
+                  <c:v>52</c:v>
+                </c:pt>
+                <c:pt idx="4">
+                  <c:v>43</c:v>
+                </c:pt>
+                <c:pt idx="5">
+                  <c:v>15</c:v>
                 </c:pt>
               </c:numCache>
             </c:numRef>
@@ -8078,7 +10941,856 @@
 </c:chartSpace>
 </file>
 
-<file path=ppt/charts/chart26.xml><?xml version="1.0" encoding="utf-8"?>
+<file path=ppt/charts/chart30.xml><?xml version="1.0" encoding="utf-8"?>
+<c:chartSpace xmlns:c="http://schemas.openxmlformats.org/drawingml/2006/chart" xmlns:a="http://schemas.openxmlformats.org/drawingml/2006/main" xmlns:r="http://schemas.openxmlformats.org/officeDocument/2006/relationships">
+  <c:date1904 val="0"/>
+  <c:roundedCorners val="1"/>
+  <c:chart>
+    <c:autoTitleDeleted val="1"/>
+    <c:plotArea>
+      <c:layout/>
+      <c:barChart>
+        <c:barDir val="bar"/>
+        <c:grouping val="stacked"/>
+        <c:varyColors val="0"/>
+        <c:ser>
+          <c:idx val="0"/>
+          <c:order val="0"/>
+          <c:tx>
+            <c:strRef>
+              <c:f>Sheet1!$B$1</c:f>
+              <c:strCache>
+                <c:ptCount val="1"/>
+                <c:pt idx="0">
+                  <c:v>United States</c:v>
+                </c:pt>
+              </c:strCache>
+            </c:strRef>
+          </c:tx>
+          <c:spPr>
+            <a:solidFill>
+              <a:srgbClr val="86BC25"/>
+            </a:solidFill>
+            <a:effectLst/>
+          </c:spPr>
+          <c:invertIfNegative val="0"/>
+          <c:dLbls>
+            <c:numFmt formatCode="0&quot;%&quot;;-0&quot;%&quot;;;@" sourceLinked="0"/>
+            <c:txPr>
+              <a:bodyPr/>
+              <a:lstStyle/>
+              <a:p>
+                <a:pPr>
+                  <a:defRPr b="0" i="0" strike="noStrike" sz="600" u="none">
+                    <a:solidFill>
+                      <a:srgbClr val="FFFFFF"/>
+                    </a:solidFill>
+                    <a:latin typeface="Arial"/>
+                  </a:defRPr>
+                </a:pPr>
+              </a:p>
+            </c:txPr>
+            <c:dLblPos val="ctr"/>
+            <c:showLegendKey val="0"/>
+            <c:showVal val="1"/>
+            <c:showCatName val="0"/>
+            <c:showSerName val="0"/>
+            <c:showPercent val="0"/>
+            <c:showBubbleSize val="0"/>
+            <c:showLeaderLines val="0"/>
+          </c:dLbls>
+          <c:cat>
+            <c:multiLvlStrRef>
+              <c:f>Sheet1!$A$2:$A$13</c:f>
+              <c:multiLvlStrCache>
+                <c:ptCount val="12"/>
+                <c:lvl>
+                  <c:pt idx="0">
+                    <c:v>AI-enabled tools — Top 100 (40%)</c:v>
+                  </c:pt>
+                  <c:pt idx="1">
+                    <c:v>AI-enabled tools — Large (43%)</c:v>
+                  </c:pt>
+                  <c:pt idx="2">
+                    <c:v>Automating workflows — Top 100 (33%)</c:v>
+                  </c:pt>
+                  <c:pt idx="3">
+                    <c:v>Automating workflows — Large (20%)</c:v>
+                  </c:pt>
+                  <c:pt idx="4">
+                    <c:v>Redesigning processes — Top 100 (14%)</c:v>
+                  </c:pt>
+                  <c:pt idx="5">
+                    <c:v>Redesigning processes — Large (17%)</c:v>
+                  </c:pt>
+                  <c:pt idx="6">
+                    <c:v>Outsourcing — Top 100 (7%)</c:v>
+                  </c:pt>
+                  <c:pt idx="7">
+                    <c:v>Outsourcing — Large (9%)</c:v>
+                  </c:pt>
+                  <c:pt idx="8">
+                    <c:v>Hiring / workforce — Top 100 (2%)</c:v>
+                  </c:pt>
+                  <c:pt idx="9">
+                    <c:v>Hiring / workforce — Large (9%)</c:v>
+                  </c:pt>
+                  <c:pt idx="10">
+                    <c:v>Combination — Top 100 (2%)</c:v>
+                  </c:pt>
+                  <c:pt idx="11">
+                    <c:v>Combination — Large (3%)</c:v>
+                  </c:pt>
+                </c:lvl>
+              </c:multiLvlStrCache>
+            </c:multiLvlStrRef>
+          </c:cat>
+          <c:val>
+            <c:numRef>
+              <c:f>Sheet1!$B$2:$B$13</c:f>
+              <c:numCache>
+                <c:formatCode>General</c:formatCode>
+                <c:ptCount val="12"/>
+                <c:pt idx="0">
+                  <c:v>10</c:v>
+                </c:pt>
+                <c:pt idx="1">
+                  <c:v>20</c:v>
+                </c:pt>
+                <c:pt idx="2">
+                  <c:v>8</c:v>
+                </c:pt>
+                <c:pt idx="3">
+                  <c:v>14</c:v>
+                </c:pt>
+                <c:pt idx="4">
+                  <c:v>10</c:v>
+                </c:pt>
+                <c:pt idx="5">
+                  <c:v>11</c:v>
+                </c:pt>
+                <c:pt idx="6">
+                  <c:v>5</c:v>
+                </c:pt>
+                <c:pt idx="7">
+                  <c:v>3</c:v>
+                </c:pt>
+                <c:pt idx="8">
+                  <c:v>0</c:v>
+                </c:pt>
+                <c:pt idx="9">
+                  <c:v>9</c:v>
+                </c:pt>
+                <c:pt idx="10">
+                  <c:v>2</c:v>
+                </c:pt>
+                <c:pt idx="11">
+                  <c:v>0</c:v>
+                </c:pt>
+              </c:numCache>
+            </c:numRef>
+          </c:val>
+        </c:ser>
+        <c:ser>
+          <c:idx val="1"/>
+          <c:order val="1"/>
+          <c:tx>
+            <c:strRef>
+              <c:f>Sheet1!$C$1</c:f>
+              <c:strCache>
+                <c:ptCount val="1"/>
+                <c:pt idx="0">
+                  <c:v>Canada</c:v>
+                </c:pt>
+              </c:strCache>
+            </c:strRef>
+          </c:tx>
+          <c:spPr>
+            <a:solidFill>
+              <a:srgbClr val="43B02A"/>
+            </a:solidFill>
+            <a:effectLst/>
+          </c:spPr>
+          <c:invertIfNegative val="0"/>
+          <c:dLbls>
+            <c:numFmt formatCode="0&quot;%&quot;;-0&quot;%&quot;;;@" sourceLinked="0"/>
+            <c:txPr>
+              <a:bodyPr/>
+              <a:lstStyle/>
+              <a:p>
+                <a:pPr>
+                  <a:defRPr b="0" i="0" strike="noStrike" sz="600" u="none">
+                    <a:solidFill>
+                      <a:srgbClr val="FFFFFF"/>
+                    </a:solidFill>
+                    <a:latin typeface="Arial"/>
+                  </a:defRPr>
+                </a:pPr>
+              </a:p>
+            </c:txPr>
+            <c:dLblPos val="ctr"/>
+            <c:showLegendKey val="0"/>
+            <c:showVal val="1"/>
+            <c:showCatName val="0"/>
+            <c:showSerName val="0"/>
+            <c:showPercent val="0"/>
+            <c:showBubbleSize val="0"/>
+            <c:showLeaderLines val="0"/>
+          </c:dLbls>
+          <c:cat>
+            <c:multiLvlStrRef>
+              <c:f>Sheet1!$A$2:$A$13</c:f>
+              <c:multiLvlStrCache>
+                <c:ptCount val="12"/>
+                <c:lvl>
+                  <c:pt idx="0">
+                    <c:v>AI-enabled tools — Top 100 (40%)</c:v>
+                  </c:pt>
+                  <c:pt idx="1">
+                    <c:v>AI-enabled tools — Large (43%)</c:v>
+                  </c:pt>
+                  <c:pt idx="2">
+                    <c:v>Automating workflows — Top 100 (33%)</c:v>
+                  </c:pt>
+                  <c:pt idx="3">
+                    <c:v>Automating workflows — Large (20%)</c:v>
+                  </c:pt>
+                  <c:pt idx="4">
+                    <c:v>Redesigning processes — Top 100 (14%)</c:v>
+                  </c:pt>
+                  <c:pt idx="5">
+                    <c:v>Redesigning processes — Large (17%)</c:v>
+                  </c:pt>
+                  <c:pt idx="6">
+                    <c:v>Outsourcing — Top 100 (7%)</c:v>
+                  </c:pt>
+                  <c:pt idx="7">
+                    <c:v>Outsourcing — Large (9%)</c:v>
+                  </c:pt>
+                  <c:pt idx="8">
+                    <c:v>Hiring / workforce — Top 100 (2%)</c:v>
+                  </c:pt>
+                  <c:pt idx="9">
+                    <c:v>Hiring / workforce — Large (9%)</c:v>
+                  </c:pt>
+                  <c:pt idx="10">
+                    <c:v>Combination — Top 100 (2%)</c:v>
+                  </c:pt>
+                  <c:pt idx="11">
+                    <c:v>Combination — Large (3%)</c:v>
+                  </c:pt>
+                </c:lvl>
+              </c:multiLvlStrCache>
+            </c:multiLvlStrRef>
+          </c:cat>
+          <c:val>
+            <c:numRef>
+              <c:f>Sheet1!$C$2:$C$13</c:f>
+              <c:numCache>
+                <c:formatCode>General</c:formatCode>
+                <c:ptCount val="12"/>
+                <c:pt idx="0">
+                  <c:v>20</c:v>
+                </c:pt>
+                <c:pt idx="1">
+                  <c:v>9</c:v>
+                </c:pt>
+                <c:pt idx="2">
+                  <c:v>10</c:v>
+                </c:pt>
+                <c:pt idx="3">
+                  <c:v>0</c:v>
+                </c:pt>
+                <c:pt idx="4">
+                  <c:v>2</c:v>
+                </c:pt>
+                <c:pt idx="5">
+                  <c:v>3</c:v>
+                </c:pt>
+                <c:pt idx="6">
+                  <c:v>0</c:v>
+                </c:pt>
+                <c:pt idx="7">
+                  <c:v>3</c:v>
+                </c:pt>
+                <c:pt idx="8">
+                  <c:v>0</c:v>
+                </c:pt>
+                <c:pt idx="9">
+                  <c:v>0</c:v>
+                </c:pt>
+                <c:pt idx="10">
+                  <c:v>0</c:v>
+                </c:pt>
+                <c:pt idx="11">
+                  <c:v>0</c:v>
+                </c:pt>
+              </c:numCache>
+            </c:numRef>
+          </c:val>
+        </c:ser>
+        <c:ser>
+          <c:idx val="2"/>
+          <c:order val="2"/>
+          <c:tx>
+            <c:strRef>
+              <c:f>Sheet1!$D$1</c:f>
+              <c:strCache>
+                <c:ptCount val="1"/>
+                <c:pt idx="0">
+                  <c:v>Europe (EU + UK)</c:v>
+                </c:pt>
+              </c:strCache>
+            </c:strRef>
+          </c:tx>
+          <c:spPr>
+            <a:solidFill>
+              <a:srgbClr val="046A38"/>
+            </a:solidFill>
+            <a:effectLst/>
+          </c:spPr>
+          <c:invertIfNegative val="0"/>
+          <c:dLbls>
+            <c:numFmt formatCode="0&quot;%&quot;;-0&quot;%&quot;;;@" sourceLinked="0"/>
+            <c:txPr>
+              <a:bodyPr/>
+              <a:lstStyle/>
+              <a:p>
+                <a:pPr>
+                  <a:defRPr b="0" i="0" strike="noStrike" sz="600" u="none">
+                    <a:solidFill>
+                      <a:srgbClr val="FFFFFF"/>
+                    </a:solidFill>
+                    <a:latin typeface="Arial"/>
+                  </a:defRPr>
+                </a:pPr>
+              </a:p>
+            </c:txPr>
+            <c:dLblPos val="ctr"/>
+            <c:showLegendKey val="0"/>
+            <c:showVal val="1"/>
+            <c:showCatName val="0"/>
+            <c:showSerName val="0"/>
+            <c:showPercent val="0"/>
+            <c:showBubbleSize val="0"/>
+            <c:showLeaderLines val="0"/>
+          </c:dLbls>
+          <c:cat>
+            <c:multiLvlStrRef>
+              <c:f>Sheet1!$A$2:$A$13</c:f>
+              <c:multiLvlStrCache>
+                <c:ptCount val="12"/>
+                <c:lvl>
+                  <c:pt idx="0">
+                    <c:v>AI-enabled tools — Top 100 (40%)</c:v>
+                  </c:pt>
+                  <c:pt idx="1">
+                    <c:v>AI-enabled tools — Large (43%)</c:v>
+                  </c:pt>
+                  <c:pt idx="2">
+                    <c:v>Automating workflows — Top 100 (33%)</c:v>
+                  </c:pt>
+                  <c:pt idx="3">
+                    <c:v>Automating workflows — Large (20%)</c:v>
+                  </c:pt>
+                  <c:pt idx="4">
+                    <c:v>Redesigning processes — Top 100 (14%)</c:v>
+                  </c:pt>
+                  <c:pt idx="5">
+                    <c:v>Redesigning processes — Large (17%)</c:v>
+                  </c:pt>
+                  <c:pt idx="6">
+                    <c:v>Outsourcing — Top 100 (7%)</c:v>
+                  </c:pt>
+                  <c:pt idx="7">
+                    <c:v>Outsourcing — Large (9%)</c:v>
+                  </c:pt>
+                  <c:pt idx="8">
+                    <c:v>Hiring / workforce — Top 100 (2%)</c:v>
+                  </c:pt>
+                  <c:pt idx="9">
+                    <c:v>Hiring / workforce — Large (9%)</c:v>
+                  </c:pt>
+                  <c:pt idx="10">
+                    <c:v>Combination — Top 100 (2%)</c:v>
+                  </c:pt>
+                  <c:pt idx="11">
+                    <c:v>Combination — Large (3%)</c:v>
+                  </c:pt>
+                </c:lvl>
+              </c:multiLvlStrCache>
+            </c:multiLvlStrRef>
+          </c:cat>
+          <c:val>
+            <c:numRef>
+              <c:f>Sheet1!$D$2:$D$13</c:f>
+              <c:numCache>
+                <c:formatCode>General</c:formatCode>
+                <c:ptCount val="12"/>
+                <c:pt idx="0">
+                  <c:v>10</c:v>
+                </c:pt>
+                <c:pt idx="1">
+                  <c:v>6</c:v>
+                </c:pt>
+                <c:pt idx="2">
+                  <c:v>5</c:v>
+                </c:pt>
+                <c:pt idx="3">
+                  <c:v>3</c:v>
+                </c:pt>
+                <c:pt idx="4">
+                  <c:v>2</c:v>
+                </c:pt>
+                <c:pt idx="5">
+                  <c:v>0</c:v>
+                </c:pt>
+                <c:pt idx="6">
+                  <c:v>0</c:v>
+                </c:pt>
+                <c:pt idx="7">
+                  <c:v>3</c:v>
+                </c:pt>
+                <c:pt idx="8">
+                  <c:v>0</c:v>
+                </c:pt>
+                <c:pt idx="9">
+                  <c:v>0</c:v>
+                </c:pt>
+                <c:pt idx="10">
+                  <c:v>0</c:v>
+                </c:pt>
+                <c:pt idx="11">
+                  <c:v>3</c:v>
+                </c:pt>
+              </c:numCache>
+            </c:numRef>
+          </c:val>
+        </c:ser>
+        <c:ser>
+          <c:idx val="3"/>
+          <c:order val="3"/>
+          <c:tx>
+            <c:strRef>
+              <c:f>Sheet1!$E$1</c:f>
+              <c:strCache>
+                <c:ptCount val="1"/>
+                <c:pt idx="0">
+                  <c:v>Australia</c:v>
+                </c:pt>
+              </c:strCache>
+            </c:strRef>
+          </c:tx>
+          <c:spPr>
+            <a:solidFill>
+              <a:srgbClr val="0D8390"/>
+            </a:solidFill>
+            <a:effectLst/>
+          </c:spPr>
+          <c:invertIfNegative val="0"/>
+          <c:dLbls>
+            <c:numFmt formatCode="0&quot;%&quot;;-0&quot;%&quot;;;@" sourceLinked="0"/>
+            <c:txPr>
+              <a:bodyPr/>
+              <a:lstStyle/>
+              <a:p>
+                <a:pPr>
+                  <a:defRPr b="0" i="0" strike="noStrike" sz="600" u="none">
+                    <a:solidFill>
+                      <a:srgbClr val="FFFFFF"/>
+                    </a:solidFill>
+                    <a:latin typeface="Arial"/>
+                  </a:defRPr>
+                </a:pPr>
+              </a:p>
+            </c:txPr>
+            <c:dLblPos val="ctr"/>
+            <c:showLegendKey val="0"/>
+            <c:showVal val="1"/>
+            <c:showCatName val="0"/>
+            <c:showSerName val="0"/>
+            <c:showPercent val="0"/>
+            <c:showBubbleSize val="0"/>
+            <c:showLeaderLines val="0"/>
+          </c:dLbls>
+          <c:cat>
+            <c:multiLvlStrRef>
+              <c:f>Sheet1!$A$2:$A$13</c:f>
+              <c:multiLvlStrCache>
+                <c:ptCount val="12"/>
+                <c:lvl>
+                  <c:pt idx="0">
+                    <c:v>AI-enabled tools — Top 100 (40%)</c:v>
+                  </c:pt>
+                  <c:pt idx="1">
+                    <c:v>AI-enabled tools — Large (43%)</c:v>
+                  </c:pt>
+                  <c:pt idx="2">
+                    <c:v>Automating workflows — Top 100 (33%)</c:v>
+                  </c:pt>
+                  <c:pt idx="3">
+                    <c:v>Automating workflows — Large (20%)</c:v>
+                  </c:pt>
+                  <c:pt idx="4">
+                    <c:v>Redesigning processes — Top 100 (14%)</c:v>
+                  </c:pt>
+                  <c:pt idx="5">
+                    <c:v>Redesigning processes — Large (17%)</c:v>
+                  </c:pt>
+                  <c:pt idx="6">
+                    <c:v>Outsourcing — Top 100 (7%)</c:v>
+                  </c:pt>
+                  <c:pt idx="7">
+                    <c:v>Outsourcing — Large (9%)</c:v>
+                  </c:pt>
+                  <c:pt idx="8">
+                    <c:v>Hiring / workforce — Top 100 (2%)</c:v>
+                  </c:pt>
+                  <c:pt idx="9">
+                    <c:v>Hiring / workforce — Large (9%)</c:v>
+                  </c:pt>
+                  <c:pt idx="10">
+                    <c:v>Combination — Top 100 (2%)</c:v>
+                  </c:pt>
+                  <c:pt idx="11">
+                    <c:v>Combination — Large (3%)</c:v>
+                  </c:pt>
+                </c:lvl>
+              </c:multiLvlStrCache>
+            </c:multiLvlStrRef>
+          </c:cat>
+          <c:val>
+            <c:numRef>
+              <c:f>Sheet1!$E$2:$E$13</c:f>
+              <c:numCache>
+                <c:formatCode>General</c:formatCode>
+                <c:ptCount val="12"/>
+                <c:pt idx="0">
+                  <c:v>0</c:v>
+                </c:pt>
+                <c:pt idx="1">
+                  <c:v>3</c:v>
+                </c:pt>
+                <c:pt idx="2">
+                  <c:v>5</c:v>
+                </c:pt>
+                <c:pt idx="3">
+                  <c:v>3</c:v>
+                </c:pt>
+                <c:pt idx="4">
+                  <c:v>0</c:v>
+                </c:pt>
+                <c:pt idx="5">
+                  <c:v>3</c:v>
+                </c:pt>
+                <c:pt idx="6">
+                  <c:v>2</c:v>
+                </c:pt>
+                <c:pt idx="7">
+                  <c:v>0</c:v>
+                </c:pt>
+                <c:pt idx="8">
+                  <c:v>2</c:v>
+                </c:pt>
+                <c:pt idx="9">
+                  <c:v>0</c:v>
+                </c:pt>
+                <c:pt idx="10">
+                  <c:v>0</c:v>
+                </c:pt>
+                <c:pt idx="11">
+                  <c:v>0</c:v>
+                </c:pt>
+              </c:numCache>
+            </c:numRef>
+          </c:val>
+        </c:ser>
+        <c:ser>
+          <c:idx val="4"/>
+          <c:order val="4"/>
+          <c:tx>
+            <c:strRef>
+              <c:f>Sheet1!$F$1</c:f>
+              <c:strCache>
+                <c:ptCount val="1"/>
+                <c:pt idx="0">
+                  <c:v>Singapore</c:v>
+                </c:pt>
+              </c:strCache>
+            </c:strRef>
+          </c:tx>
+          <c:spPr>
+            <a:solidFill>
+              <a:srgbClr val="53565A"/>
+            </a:solidFill>
+            <a:effectLst/>
+          </c:spPr>
+          <c:invertIfNegative val="0"/>
+          <c:dLbls>
+            <c:numFmt formatCode="0&quot;%&quot;;-0&quot;%&quot;;;@" sourceLinked="0"/>
+            <c:txPr>
+              <a:bodyPr/>
+              <a:lstStyle/>
+              <a:p>
+                <a:pPr>
+                  <a:defRPr b="0" i="0" strike="noStrike" sz="600" u="none">
+                    <a:solidFill>
+                      <a:srgbClr val="FFFFFF"/>
+                    </a:solidFill>
+                    <a:latin typeface="Arial"/>
+                  </a:defRPr>
+                </a:pPr>
+              </a:p>
+            </c:txPr>
+            <c:dLblPos val="ctr"/>
+            <c:showLegendKey val="0"/>
+            <c:showVal val="1"/>
+            <c:showCatName val="0"/>
+            <c:showSerName val="0"/>
+            <c:showPercent val="0"/>
+            <c:showBubbleSize val="0"/>
+            <c:showLeaderLines val="0"/>
+          </c:dLbls>
+          <c:cat>
+            <c:multiLvlStrRef>
+              <c:f>Sheet1!$A$2:$A$13</c:f>
+              <c:multiLvlStrCache>
+                <c:ptCount val="12"/>
+                <c:lvl>
+                  <c:pt idx="0">
+                    <c:v>AI-enabled tools — Top 100 (40%)</c:v>
+                  </c:pt>
+                  <c:pt idx="1">
+                    <c:v>AI-enabled tools — Large (43%)</c:v>
+                  </c:pt>
+                  <c:pt idx="2">
+                    <c:v>Automating workflows — Top 100 (33%)</c:v>
+                  </c:pt>
+                  <c:pt idx="3">
+                    <c:v>Automating workflows — Large (20%)</c:v>
+                  </c:pt>
+                  <c:pt idx="4">
+                    <c:v>Redesigning processes — Top 100 (14%)</c:v>
+                  </c:pt>
+                  <c:pt idx="5">
+                    <c:v>Redesigning processes — Large (17%)</c:v>
+                  </c:pt>
+                  <c:pt idx="6">
+                    <c:v>Outsourcing — Top 100 (7%)</c:v>
+                  </c:pt>
+                  <c:pt idx="7">
+                    <c:v>Outsourcing — Large (9%)</c:v>
+                  </c:pt>
+                  <c:pt idx="8">
+                    <c:v>Hiring / workforce — Top 100 (2%)</c:v>
+                  </c:pt>
+                  <c:pt idx="9">
+                    <c:v>Hiring / workforce — Large (9%)</c:v>
+                  </c:pt>
+                  <c:pt idx="10">
+                    <c:v>Combination — Top 100 (2%)</c:v>
+                  </c:pt>
+                  <c:pt idx="11">
+                    <c:v>Combination — Large (3%)</c:v>
+                  </c:pt>
+                </c:lvl>
+              </c:multiLvlStrCache>
+            </c:multiLvlStrRef>
+          </c:cat>
+          <c:val>
+            <c:numRef>
+              <c:f>Sheet1!$F$2:$F$13</c:f>
+              <c:numCache>
+                <c:formatCode>General</c:formatCode>
+                <c:ptCount val="12"/>
+                <c:pt idx="0">
+                  <c:v>0</c:v>
+                </c:pt>
+                <c:pt idx="1">
+                  <c:v>6</c:v>
+                </c:pt>
+                <c:pt idx="2">
+                  <c:v>5</c:v>
+                </c:pt>
+                <c:pt idx="3">
+                  <c:v>0</c:v>
+                </c:pt>
+                <c:pt idx="4">
+                  <c:v>0</c:v>
+                </c:pt>
+                <c:pt idx="5">
+                  <c:v>0</c:v>
+                </c:pt>
+                <c:pt idx="6">
+                  <c:v>0</c:v>
+                </c:pt>
+                <c:pt idx="7">
+                  <c:v>0</c:v>
+                </c:pt>
+                <c:pt idx="8">
+                  <c:v>0</c:v>
+                </c:pt>
+                <c:pt idx="9">
+                  <c:v>0</c:v>
+                </c:pt>
+                <c:pt idx="10">
+                  <c:v>0</c:v>
+                </c:pt>
+                <c:pt idx="11">
+                  <c:v>0</c:v>
+                </c:pt>
+              </c:numCache>
+            </c:numRef>
+          </c:val>
+        </c:ser>
+        <c:dLbls>
+          <c:numFmt formatCode="0&quot;%&quot;;-0&quot;%&quot;;;@" sourceLinked="0"/>
+          <c:txPr>
+            <a:bodyPr/>
+            <a:lstStyle/>
+            <a:p>
+              <a:pPr>
+                <a:defRPr b="0" i="0" strike="noStrike" sz="600" u="none">
+                  <a:solidFill>
+                    <a:srgbClr val="FFFFFF"/>
+                  </a:solidFill>
+                  <a:latin typeface="Arial"/>
+                </a:defRPr>
+              </a:pPr>
+            </a:p>
+          </c:txPr>
+          <c:dLblPos val="ctr"/>
+          <c:showLegendKey val="0"/>
+          <c:showVal val="1"/>
+          <c:showCatName val="0"/>
+          <c:showSerName val="0"/>
+          <c:showPercent val="0"/>
+          <c:showBubbleSize val="0"/>
+          <c:showLeaderLines val="0"/>
+        </c:dLbls>
+        <c:gapWidth val="40"/>
+        <c:overlap val="100"/>
+        <c:axId val="2094734554"/>
+        <c:axId val="2094734552"/>
+        <c:axId val="2094734556"/>
+      </c:barChart>
+      <c:catAx>
+        <c:axId val="2094734554"/>
+        <c:scaling>
+          <c:orientation val="minMax"/>
+        </c:scaling>
+        <c:delete val="0"/>
+        <c:axPos val="l"/>
+        <c:numFmt formatCode="General" sourceLinked="1"/>
+        <c:majorTickMark val="out"/>
+        <c:minorTickMark val="none"/>
+        <c:tickLblPos val="nextTo"/>
+        <c:spPr>
+          <a:ln w="12700" cap="flat">
+            <a:noFill/>
+            <a:prstDash val="solid"/>
+            <a:round/>
+          </a:ln>
+        </c:spPr>
+        <c:txPr>
+          <a:bodyPr/>
+          <a:lstStyle/>
+          <a:p>
+            <a:pPr>
+              <a:defRPr sz="750" b="0" i="0" u="none" strike="noStrike">
+                <a:solidFill>
+                  <a:srgbClr val="53565A"/>
+                </a:solidFill>
+                <a:latin typeface="Arial"/>
+              </a:defRPr>
+            </a:pPr>
+            <a:endParaRPr lang="en-US"/>
+          </a:p>
+        </c:txPr>
+        <c:crossAx val="2094734552"/>
+        <c:crosses val="autoZero"/>
+        <c:auto val="1"/>
+        <c:lblAlgn val="ctr"/>
+        <c:noMultiLvlLbl val="1"/>
+      </c:catAx>
+      <c:valAx>
+        <c:axId val="2094734552"/>
+        <c:scaling>
+          <c:orientation val="minMax"/>
+        </c:scaling>
+        <c:delete val="1"/>
+        <c:axPos val="b"/>
+        <c:numFmt formatCode="General" sourceLinked="0"/>
+        <c:majorTickMark val="out"/>
+        <c:minorTickMark val="none"/>
+        <c:tickLblPos val="low"/>
+        <c:spPr>
+          <a:ln w="12700" cap="flat">
+            <a:noFill/>
+            <a:prstDash val="solid"/>
+            <a:round/>
+          </a:ln>
+        </c:spPr>
+        <c:txPr>
+          <a:bodyPr/>
+          <a:lstStyle/>
+          <a:p>
+            <a:pPr>
+              <a:defRPr sz="1200" b="0" i="0" u="none" strike="noStrike">
+                <a:solidFill>
+                  <a:srgbClr val="000000"/>
+                </a:solidFill>
+                <a:latin typeface="Arial"/>
+              </a:defRPr>
+            </a:pPr>
+            <a:endParaRPr lang="en-US"/>
+          </a:p>
+        </c:txPr>
+        <c:crossAx val="2094734554"/>
+        <c:crosses val="autoZero"/>
+        <c:crossBetween val="between"/>
+      </c:valAx>
+      <c:spPr>
+        <a:solidFill>
+          <a:srgbClr val="FFFFFF"/>
+        </a:solidFill>
+        <a:ln>
+          <a:noFill/>
+        </a:ln>
+        <a:effectLst/>
+      </c:spPr>
+    </c:plotArea>
+    <c:legend>
+      <c:legendPos val="b"/>
+      <c:overlay val="0"/>
+      <c:txPr>
+        <a:bodyPr/>
+        <a:lstStyle/>
+        <a:p>
+          <a:pPr>
+            <a:defRPr sz="750">      </a:defRPr>
+          </a:pPr>
+          <a:endParaRPr lang="en-US"/>
+        </a:p>
+      </c:txPr>
+    </c:legend>
+    <c:plotVisOnly val="1"/>
+    <c:dispBlanksAs val="span"/>
+  </c:chart>
+  <c:spPr>
+    <a:noFill/>
+    <a:ln>
+      <a:noFill/>
+    </a:ln>
+    <a:effectLst/>
+  </c:spPr>
+  <c:externalData r:id="rId1">
+    <c:autoUpdate val="0"/>
+  </c:externalData>
+</c:chartSpace>
+</file>
+
+<file path=ppt/charts/chart31.xml><?xml version="1.0" encoding="utf-8"?>
 <c:chartSpace xmlns:c="http://schemas.openxmlformats.org/drawingml/2006/chart" xmlns:a="http://schemas.openxmlformats.org/drawingml/2006/main" xmlns:r="http://schemas.openxmlformats.org/officeDocument/2006/relationships">
   <c:date1904 val="0"/>
   <c:roundedCorners val="1"/>
@@ -8099,7 +11811,7 @@
               <c:strCache>
                 <c:ptCount val="1"/>
                 <c:pt idx="0">
-                  <c:v>Upcoming Regulatory / Market Change With Greatest Expected Impact</c:v>
+                  <c:v>Fraud Investment Relative to Regulatory Requirements</c:v>
                 </c:pt>
               </c:strCache>
             </c:strRef>
@@ -8137,27 +11849,18 @@
           </c:dLbls>
           <c:cat>
             <c:multiLvlStrRef>
-              <c:f>Sheet1!$A$2:$A$7</c:f>
+              <c:f>Sheet1!$A$2:$A$4</c:f>
               <c:multiLvlStrCache>
-                <c:ptCount val="6"/>
+                <c:ptCount val="3"/>
                 <c:lvl>
                   <c:pt idx="0">
-                    <c:v>Customer identity, authentication &amp; digital trust</c:v>
+                    <c:v>Investing to remediate existing compliance gaps</c:v>
                   </c:pt>
                   <c:pt idx="1">
-                    <c:v>Privacy, data-sharing &amp; AI governance requirements</c:v>
+                    <c:v>Investing to meet upcoming / draft regulations</c:v>
                   </c:pt>
                   <c:pt idx="2">
-                    <c:v>Payment innovation (RTP, stablecoins, agentic payments)</c:v>
-                  </c:pt>
-                  <c:pt idx="3">
-                    <c:v>Liability &amp; reimbursement changes</c:v>
-                  </c:pt>
-                  <c:pt idx="4">
-                    <c:v>AML modernization initiatives</c:v>
-                  </c:pt>
-                  <c:pt idx="5">
-                    <c:v>Open Banking / consumer-driven initiatives</c:v>
+                    <c:v>Regulation not a primary driver</c:v>
                   </c:pt>
                 </c:lvl>
               </c:multiLvlStrCache>
@@ -8165,27 +11868,18 @@
           </c:cat>
           <c:val>
             <c:numRef>
-              <c:f>Sheet1!$B$2:$B$7</c:f>
+              <c:f>Sheet1!$B$2:$B$4</c:f>
               <c:numCache>
                 <c:formatCode>General</c:formatCode>
-                <c:ptCount val="6"/>
+                <c:ptCount val="3"/>
                 <c:pt idx="0">
-                  <c:v>71</c:v>
+                  <c:v>48</c:v>
                 </c:pt>
                 <c:pt idx="1">
-                  <c:v>66</c:v>
+                  <c:v>39</c:v>
                 </c:pt>
                 <c:pt idx="2">
-                  <c:v>65</c:v>
-                </c:pt>
-                <c:pt idx="3">
-                  <c:v>36</c:v>
-                </c:pt>
-                <c:pt idx="4">
-                  <c:v>33</c:v>
-                </c:pt>
-                <c:pt idx="5">
-                  <c:v>29</c:v>
+                  <c:v>13</c:v>
                 </c:pt>
               </c:numCache>
             </c:numRef>
@@ -8323,7 +12017,7 @@
 </c:chartSpace>
 </file>
 
-<file path=ppt/charts/chart3.xml><?xml version="1.0" encoding="utf-8"?>
+<file path=ppt/charts/chart32.xml><?xml version="1.0" encoding="utf-8"?>
 <c:chartSpace xmlns:c="http://schemas.openxmlformats.org/drawingml/2006/chart" xmlns:a="http://schemas.openxmlformats.org/drawingml/2006/main" xmlns:r="http://schemas.openxmlformats.org/officeDocument/2006/relationships">
   <c:date1904 val="0"/>
   <c:roundedCorners val="1"/>
@@ -8344,7 +12038,7 @@
               <c:strCache>
                 <c:ptCount val="1"/>
                 <c:pt idx="0">
-                  <c:v>Greatest Increase in AI/Deepfake Vulnerability</c:v>
+                  <c:v>Upcoming Regulatory / Market Change With Greatest Expected Impact</c:v>
                 </c:pt>
               </c:strCache>
             </c:strRef>
@@ -8387,22 +12081,22 @@
                 <c:ptCount val="6"/>
                 <c:lvl>
                   <c:pt idx="0">
-                    <c:v>Digital onboarding, KYC &amp; identity verification</c:v>
+                    <c:v>Customer identity, authentication &amp; digital trust</c:v>
                   </c:pt>
                   <c:pt idx="1">
-                    <c:v>Payment, wire &amp; transaction approvals</c:v>
+                    <c:v>Privacy, data-sharing &amp; AI governance requirements</c:v>
                   </c:pt>
                   <c:pt idx="2">
-                    <c:v>Claims, underwriting &amp; lending review</c:v>
+                    <c:v>Payment innovation (RTP, stablecoins, agentic payments)</c:v>
                   </c:pt>
                   <c:pt idx="3">
-                    <c:v>Contact center / phone-based authentication</c:v>
+                    <c:v>Liability &amp; reimbursement changes</c:v>
                   </c:pt>
                   <c:pt idx="4">
-                    <c:v>Executive / employee / broker impersonation</c:v>
+                    <c:v>AML modernization initiatives</c:v>
                   </c:pt>
                   <c:pt idx="5">
-                    <c:v>Video meetings &amp; remote advisory</c:v>
+                    <c:v>Open Banking / consumer-driven initiatives</c:v>
                   </c:pt>
                 </c:lvl>
               </c:multiLvlStrCache>
@@ -8415,22 +12109,22 @@
                 <c:formatCode>General</c:formatCode>
                 <c:ptCount val="6"/>
                 <c:pt idx="0">
-                  <c:v>70</c:v>
+                  <c:v>71</c:v>
                 </c:pt>
                 <c:pt idx="1">
-                  <c:v>64</c:v>
+                  <c:v>66</c:v>
                 </c:pt>
                 <c:pt idx="2">
-                  <c:v>53</c:v>
+                  <c:v>65</c:v>
                 </c:pt>
                 <c:pt idx="3">
-                  <c:v>52</c:v>
+                  <c:v>36</c:v>
                 </c:pt>
                 <c:pt idx="4">
-                  <c:v>43</c:v>
+                  <c:v>33</c:v>
                 </c:pt>
                 <c:pt idx="5">
-                  <c:v>15</c:v>
+                  <c:v>29</c:v>
                 </c:pt>
               </c:numCache>
             </c:numRef>
@@ -13308,6 +17002,358 @@
             <a:fld id="{F7021451-1387-4CA6-816F-3879F97B5CBC}" type="slidenum">
               <a:rPr lang="en-US"/>
               <a:t>33</a:t>
+            </a:fld>
+            <a:endParaRPr lang="en-US"/>
+          </a:p>
+        </p:txBody>
+      </p:sp>
+    </p:spTree>
+    <p:extLst>
+      <p:ext uri="{BB962C8B-B14F-4D97-AF65-F5344CB8AC3E}">
+        <p14:creationId xmlns:p14="http://schemas.microsoft.com/office/powerpoint/2010/main" val="1024086991"/>
+      </p:ext>
+    </p:extLst>
+  </p:cSld>
+  <p:clrMapOvr>
+    <a:masterClrMapping/>
+  </p:clrMapOvr>
+</p:notes>
+</file>
+
+<file path=ppt/notesSlides/notesSlide34.xml><?xml version="1.0" encoding="utf-8"?>
+<p:notes xmlns:a="http://schemas.openxmlformats.org/drawingml/2006/main" xmlns:r="http://schemas.openxmlformats.org/officeDocument/2006/relationships" xmlns:p="http://schemas.openxmlformats.org/presentationml/2006/main">
+  <p:cSld>
+    <p:spTree>
+      <p:nvGrpSpPr>
+        <p:cNvPr id="1" name=""/>
+        <p:cNvGrpSpPr/>
+        <p:nvPr/>
+      </p:nvGrpSpPr>
+      <p:grpSpPr>
+        <a:xfrm>
+          <a:off x="0" y="0"/>
+          <a:ext cx="0" cy="0"/>
+          <a:chOff x="0" y="0"/>
+          <a:chExt cx="0" cy="0"/>
+        </a:xfrm>
+      </p:grpSpPr>
+      <p:sp>
+        <p:nvSpPr>
+          <p:cNvPr id="2" name="Slide Image Placeholder 1"/>
+          <p:cNvSpPr>
+            <a:spLocks noGrp="1" noRot="1" noChangeAspect="1"/>
+          </p:cNvSpPr>
+          <p:nvPr>
+            <p:ph type="sldImg"/>
+          </p:nvPr>
+        </p:nvSpPr>
+        <p:spPr/>
+      </p:sp>
+      <p:sp>
+        <p:nvSpPr>
+          <p:cNvPr id="3" name="Notes Placeholder 2"/>
+          <p:cNvSpPr>
+            <a:spLocks noGrp="1"/>
+          </p:cNvSpPr>
+          <p:nvPr>
+            <p:ph type="body" idx="1"/>
+          </p:nvPr>
+        </p:nvSpPr>
+        <p:spPr/>
+        <p:txBody>
+          <a:bodyPr/>
+          <a:lstStyle/>
+          <a:p>
+            <a:r>
+              <a:rPr lang="en-US" dirty="0"/>
+              <a:t/>
+            </a:r>
+            <a:endParaRPr lang="en-US" dirty="0"/>
+          </a:p>
+        </p:txBody>
+      </p:sp>
+      <p:sp>
+        <p:nvSpPr>
+          <p:cNvPr id="4" name="Slide Number Placeholder 3"/>
+          <p:cNvSpPr>
+            <a:spLocks noGrp="1"/>
+          </p:cNvSpPr>
+          <p:nvPr>
+            <p:ph type="sldNum" sz="quarter" idx="10"/>
+          </p:nvPr>
+        </p:nvSpPr>
+        <p:spPr/>
+        <p:txBody>
+          <a:bodyPr/>
+          <a:lstStyle/>
+          <a:p>
+            <a:fld id="{F7021451-1387-4CA6-816F-3879F97B5CBC}" type="slidenum">
+              <a:rPr lang="en-US"/>
+              <a:t>34</a:t>
+            </a:fld>
+            <a:endParaRPr lang="en-US"/>
+          </a:p>
+        </p:txBody>
+      </p:sp>
+    </p:spTree>
+    <p:extLst>
+      <p:ext uri="{BB962C8B-B14F-4D97-AF65-F5344CB8AC3E}">
+        <p14:creationId xmlns:p14="http://schemas.microsoft.com/office/powerpoint/2010/main" val="1024086991"/>
+      </p:ext>
+    </p:extLst>
+  </p:cSld>
+  <p:clrMapOvr>
+    <a:masterClrMapping/>
+  </p:clrMapOvr>
+</p:notes>
+</file>
+
+<file path=ppt/notesSlides/notesSlide35.xml><?xml version="1.0" encoding="utf-8"?>
+<p:notes xmlns:a="http://schemas.openxmlformats.org/drawingml/2006/main" xmlns:r="http://schemas.openxmlformats.org/officeDocument/2006/relationships" xmlns:p="http://schemas.openxmlformats.org/presentationml/2006/main">
+  <p:cSld>
+    <p:spTree>
+      <p:nvGrpSpPr>
+        <p:cNvPr id="1" name=""/>
+        <p:cNvGrpSpPr/>
+        <p:nvPr/>
+      </p:nvGrpSpPr>
+      <p:grpSpPr>
+        <a:xfrm>
+          <a:off x="0" y="0"/>
+          <a:ext cx="0" cy="0"/>
+          <a:chOff x="0" y="0"/>
+          <a:chExt cx="0" cy="0"/>
+        </a:xfrm>
+      </p:grpSpPr>
+      <p:sp>
+        <p:nvSpPr>
+          <p:cNvPr id="2" name="Slide Image Placeholder 1"/>
+          <p:cNvSpPr>
+            <a:spLocks noGrp="1" noRot="1" noChangeAspect="1"/>
+          </p:cNvSpPr>
+          <p:nvPr>
+            <p:ph type="sldImg"/>
+          </p:nvPr>
+        </p:nvSpPr>
+        <p:spPr/>
+      </p:sp>
+      <p:sp>
+        <p:nvSpPr>
+          <p:cNvPr id="3" name="Notes Placeholder 2"/>
+          <p:cNvSpPr>
+            <a:spLocks noGrp="1"/>
+          </p:cNvSpPr>
+          <p:nvPr>
+            <p:ph type="body" idx="1"/>
+          </p:nvPr>
+        </p:nvSpPr>
+        <p:spPr/>
+        <p:txBody>
+          <a:bodyPr/>
+          <a:lstStyle/>
+          <a:p>
+            <a:r>
+              <a:rPr lang="en-US" dirty="0"/>
+              <a:t/>
+            </a:r>
+            <a:endParaRPr lang="en-US" dirty="0"/>
+          </a:p>
+        </p:txBody>
+      </p:sp>
+      <p:sp>
+        <p:nvSpPr>
+          <p:cNvPr id="4" name="Slide Number Placeholder 3"/>
+          <p:cNvSpPr>
+            <a:spLocks noGrp="1"/>
+          </p:cNvSpPr>
+          <p:nvPr>
+            <p:ph type="sldNum" sz="quarter" idx="10"/>
+          </p:nvPr>
+        </p:nvSpPr>
+        <p:spPr/>
+        <p:txBody>
+          <a:bodyPr/>
+          <a:lstStyle/>
+          <a:p>
+            <a:fld id="{F7021451-1387-4CA6-816F-3879F97B5CBC}" type="slidenum">
+              <a:rPr lang="en-US"/>
+              <a:t>35</a:t>
+            </a:fld>
+            <a:endParaRPr lang="en-US"/>
+          </a:p>
+        </p:txBody>
+      </p:sp>
+    </p:spTree>
+    <p:extLst>
+      <p:ext uri="{BB962C8B-B14F-4D97-AF65-F5344CB8AC3E}">
+        <p14:creationId xmlns:p14="http://schemas.microsoft.com/office/powerpoint/2010/main" val="1024086991"/>
+      </p:ext>
+    </p:extLst>
+  </p:cSld>
+  <p:clrMapOvr>
+    <a:masterClrMapping/>
+  </p:clrMapOvr>
+</p:notes>
+</file>
+
+<file path=ppt/notesSlides/notesSlide36.xml><?xml version="1.0" encoding="utf-8"?>
+<p:notes xmlns:a="http://schemas.openxmlformats.org/drawingml/2006/main" xmlns:r="http://schemas.openxmlformats.org/officeDocument/2006/relationships" xmlns:p="http://schemas.openxmlformats.org/presentationml/2006/main">
+  <p:cSld>
+    <p:spTree>
+      <p:nvGrpSpPr>
+        <p:cNvPr id="1" name=""/>
+        <p:cNvGrpSpPr/>
+        <p:nvPr/>
+      </p:nvGrpSpPr>
+      <p:grpSpPr>
+        <a:xfrm>
+          <a:off x="0" y="0"/>
+          <a:ext cx="0" cy="0"/>
+          <a:chOff x="0" y="0"/>
+          <a:chExt cx="0" cy="0"/>
+        </a:xfrm>
+      </p:grpSpPr>
+      <p:sp>
+        <p:nvSpPr>
+          <p:cNvPr id="2" name="Slide Image Placeholder 1"/>
+          <p:cNvSpPr>
+            <a:spLocks noGrp="1" noRot="1" noChangeAspect="1"/>
+          </p:cNvSpPr>
+          <p:nvPr>
+            <p:ph type="sldImg"/>
+          </p:nvPr>
+        </p:nvSpPr>
+        <p:spPr/>
+      </p:sp>
+      <p:sp>
+        <p:nvSpPr>
+          <p:cNvPr id="3" name="Notes Placeholder 2"/>
+          <p:cNvSpPr>
+            <a:spLocks noGrp="1"/>
+          </p:cNvSpPr>
+          <p:nvPr>
+            <p:ph type="body" idx="1"/>
+          </p:nvPr>
+        </p:nvSpPr>
+        <p:spPr/>
+        <p:txBody>
+          <a:bodyPr/>
+          <a:lstStyle/>
+          <a:p>
+            <a:r>
+              <a:rPr lang="en-US" dirty="0"/>
+              <a:t/>
+            </a:r>
+            <a:endParaRPr lang="en-US" dirty="0"/>
+          </a:p>
+        </p:txBody>
+      </p:sp>
+      <p:sp>
+        <p:nvSpPr>
+          <p:cNvPr id="4" name="Slide Number Placeholder 3"/>
+          <p:cNvSpPr>
+            <a:spLocks noGrp="1"/>
+          </p:cNvSpPr>
+          <p:nvPr>
+            <p:ph type="sldNum" sz="quarter" idx="10"/>
+          </p:nvPr>
+        </p:nvSpPr>
+        <p:spPr/>
+        <p:txBody>
+          <a:bodyPr/>
+          <a:lstStyle/>
+          <a:p>
+            <a:fld id="{F7021451-1387-4CA6-816F-3879F97B5CBC}" type="slidenum">
+              <a:rPr lang="en-US"/>
+              <a:t>36</a:t>
+            </a:fld>
+            <a:endParaRPr lang="en-US"/>
+          </a:p>
+        </p:txBody>
+      </p:sp>
+    </p:spTree>
+    <p:extLst>
+      <p:ext uri="{BB962C8B-B14F-4D97-AF65-F5344CB8AC3E}">
+        <p14:creationId xmlns:p14="http://schemas.microsoft.com/office/powerpoint/2010/main" val="1024086991"/>
+      </p:ext>
+    </p:extLst>
+  </p:cSld>
+  <p:clrMapOvr>
+    <a:masterClrMapping/>
+  </p:clrMapOvr>
+</p:notes>
+</file>
+
+<file path=ppt/notesSlides/notesSlide37.xml><?xml version="1.0" encoding="utf-8"?>
+<p:notes xmlns:a="http://schemas.openxmlformats.org/drawingml/2006/main" xmlns:r="http://schemas.openxmlformats.org/officeDocument/2006/relationships" xmlns:p="http://schemas.openxmlformats.org/presentationml/2006/main">
+  <p:cSld>
+    <p:spTree>
+      <p:nvGrpSpPr>
+        <p:cNvPr id="1" name=""/>
+        <p:cNvGrpSpPr/>
+        <p:nvPr/>
+      </p:nvGrpSpPr>
+      <p:grpSpPr>
+        <a:xfrm>
+          <a:off x="0" y="0"/>
+          <a:ext cx="0" cy="0"/>
+          <a:chOff x="0" y="0"/>
+          <a:chExt cx="0" cy="0"/>
+        </a:xfrm>
+      </p:grpSpPr>
+      <p:sp>
+        <p:nvSpPr>
+          <p:cNvPr id="2" name="Slide Image Placeholder 1"/>
+          <p:cNvSpPr>
+            <a:spLocks noGrp="1" noRot="1" noChangeAspect="1"/>
+          </p:cNvSpPr>
+          <p:nvPr>
+            <p:ph type="sldImg"/>
+          </p:nvPr>
+        </p:nvSpPr>
+        <p:spPr/>
+      </p:sp>
+      <p:sp>
+        <p:nvSpPr>
+          <p:cNvPr id="3" name="Notes Placeholder 2"/>
+          <p:cNvSpPr>
+            <a:spLocks noGrp="1"/>
+          </p:cNvSpPr>
+          <p:nvPr>
+            <p:ph type="body" idx="1"/>
+          </p:nvPr>
+        </p:nvSpPr>
+        <p:spPr/>
+        <p:txBody>
+          <a:bodyPr/>
+          <a:lstStyle/>
+          <a:p>
+            <a:r>
+              <a:rPr lang="en-US" dirty="0"/>
+              <a:t/>
+            </a:r>
+            <a:endParaRPr lang="en-US" dirty="0"/>
+          </a:p>
+        </p:txBody>
+      </p:sp>
+      <p:sp>
+        <p:nvSpPr>
+          <p:cNvPr id="4" name="Slide Number Placeholder 3"/>
+          <p:cNvSpPr>
+            <a:spLocks noGrp="1"/>
+          </p:cNvSpPr>
+          <p:nvPr>
+            <p:ph type="sldNum" sz="quarter" idx="10"/>
+          </p:nvPr>
+        </p:nvSpPr>
+        <p:spPr/>
+        <p:txBody>
+          <a:bodyPr/>
+          <a:lstStyle/>
+          <a:p>
+            <a:fld id="{F7021451-1387-4CA6-816F-3879F97B5CBC}" type="slidenum">
+              <a:rPr lang="en-US"/>
+              <a:t>37</a:t>
             </a:fld>
             <a:endParaRPr lang="en-US"/>
           </a:p>
@@ -21924,7 +25970,7 @@
                 <a:ea typeface="Calibri" pitchFamily="34" charset="-122"/>
                 <a:cs typeface="Calibri" pitchFamily="34" charset="-120"/>
               </a:rPr>
-              <a:t>Current Scaling Approach — By Sector and Institution Tier</a:t>
+              <a:t>Scaling Approach — Insurance, by Institution Tier</a:t>
             </a:r>
             <a:endParaRPr lang="en-US" sz="1900" dirty="0"/>
           </a:p>
@@ -21966,7 +26012,7 @@
                 <a:ea typeface="Calibri" pitchFamily="34" charset="-122"/>
                 <a:cs typeface="Calibri" pitchFamily="34" charset="-120"/>
               </a:rPr>
-              <a:t>AI-enabled tools lead in both sectors, but Top-tier institutions lean on it more heavily than Large institutions.</a:t>
+              <a:t>Top 50 carriers are already leaning hardest on AI; Large carriers still split their effort more evenly, notably toward outsourcing today.</a:t>
             </a:r>
             <a:endParaRPr lang="en-US" sz="1350" dirty="0"/>
           </a:p>
@@ -22031,7 +26077,7 @@
                 <a:ea typeface="IBM Plex Mono" pitchFamily="34" charset="-122"/>
                 <a:cs typeface="IBM Plex Mono" pitchFamily="34" charset="-120"/>
               </a:rPr>
-              <a:t>Q8 / newS8 / S9  </a:t>
+              <a:t>Q8 / Q9 / S9  </a:t>
             </a:r>
             <a:pPr algn="l" indent="0" marL="0">
               <a:lnSpc>
@@ -22048,7 +26094,7 @@
                 <a:ea typeface="Calibri" pitchFamily="34" charset="-122"/>
                 <a:cs typeface="Calibri" pitchFamily="34" charset="-120"/>
               </a:rPr>
-              <a:t>“Which statement best describes your current approach to scaling fraud/investigations operations as fraud volume and complexity increases? (Banking vs. Insurance, further broken down by institution tier)”</a:t>
+              <a:t>“Which statement best describes your current approach to scaling fraud/investigations operations? / Which area do you expect will receive the greatest focus over the next three years? (Today vs. 3-Year Focus)”</a:t>
             </a:r>
             <a:endParaRPr lang="en-US" sz="1000" dirty="0"/>
           </a:p>
@@ -22093,15 +26139,54 @@
           </a:p>
         </p:txBody>
       </p:sp>
+      <p:sp>
+        <p:nvSpPr>
+          <p:cNvPr id="7" name="Text 5"/>
+          <p:cNvSpPr txBox="1"/>
+          <p:nvPr/>
+        </p:nvSpPr>
+        <p:spPr>
+          <a:xfrm>
+            <a:off x="502006" y="1965960"/>
+            <a:ext cx="5486400" cy="237744"/>
+          </a:xfrm>
+          <a:prstGeom prst="rect">
+            <a:avLst/>
+          </a:prstGeom>
+          <a:noFill/>
+          <a:ln/>
+        </p:spPr>
+        <p:txBody>
+          <a:bodyPr wrap="square" rtlCol="0" anchor="ctr"/>
+          <a:lstStyle/>
+          <a:p>
+            <a:pPr indent="0" marL="0">
+              <a:buNone/>
+            </a:pPr>
+            <a:r>
+              <a:rPr lang="en-US" sz="1150" b="1" dirty="0">
+                <a:solidFill>
+                  <a:srgbClr val="000000"/>
+                </a:solidFill>
+                <a:latin typeface="Calibri" pitchFamily="34" charset="0"/>
+                <a:ea typeface="Calibri" pitchFamily="34" charset="-122"/>
+                <a:cs typeface="Calibri" pitchFamily="34" charset="-120"/>
+              </a:rPr>
+              <a:t>Top 50 Insurance Carrier (n=15)</a:t>
+            </a:r>
+            <a:endParaRPr lang="en-US" sz="1150" dirty="0"/>
+          </a:p>
+        </p:txBody>
+      </p:sp>
       <p:graphicFrame>
         <p:nvGraphicFramePr>
-          <p:cNvPr id="7" name="Chart 0" descr=""/>
+          <p:cNvPr id="8" name="Chart 0" descr=""/>
           <p:cNvGraphicFramePr/>
           <p:nvPr/>
         </p:nvGraphicFramePr>
         <p:xfrm>
-          <a:off x="502006" y="2011680"/>
-          <a:ext cx="11188598" cy="3063240"/>
+          <a:off x="502006" y="2240280"/>
+          <a:ext cx="5486400" cy="2834640"/>
         </p:xfrm>
         <a:graphic xmlns:a="http://schemas.openxmlformats.org/drawingml/2006/main">
           <a:graphicData uri="http://schemas.openxmlformats.org/drawingml/2006/chart">
@@ -22111,7 +26196,62 @@
       </p:graphicFrame>
       <p:sp>
         <p:nvSpPr>
-          <p:cNvPr id="8" name="Shape 5"/>
+          <p:cNvPr id="9" name="Text 6"/>
+          <p:cNvSpPr txBox="1"/>
+          <p:nvPr/>
+        </p:nvSpPr>
+        <p:spPr>
+          <a:xfrm>
+            <a:off x="6172200" y="1965960"/>
+            <a:ext cx="5486400" cy="237744"/>
+          </a:xfrm>
+          <a:prstGeom prst="rect">
+            <a:avLst/>
+          </a:prstGeom>
+          <a:noFill/>
+          <a:ln/>
+        </p:spPr>
+        <p:txBody>
+          <a:bodyPr wrap="square" rtlCol="0" anchor="ctr"/>
+          <a:lstStyle/>
+          <a:p>
+            <a:pPr indent="0" marL="0">
+              <a:buNone/>
+            </a:pPr>
+            <a:r>
+              <a:rPr lang="en-US" sz="1150" b="1" dirty="0">
+                <a:solidFill>
+                  <a:srgbClr val="000000"/>
+                </a:solidFill>
+                <a:latin typeface="Calibri" pitchFamily="34" charset="0"/>
+                <a:ea typeface="Calibri" pitchFamily="34" charset="-122"/>
+                <a:cs typeface="Calibri" pitchFamily="34" charset="-120"/>
+              </a:rPr>
+              <a:t>Large Insurance Carrier (n=10)</a:t>
+            </a:r>
+            <a:endParaRPr lang="en-US" sz="1150" dirty="0"/>
+          </a:p>
+        </p:txBody>
+      </p:sp>
+      <p:graphicFrame>
+        <p:nvGraphicFramePr>
+          <p:cNvPr id="10" name="Chart 1" descr=""/>
+          <p:cNvGraphicFramePr/>
+          <p:nvPr/>
+        </p:nvGraphicFramePr>
+        <p:xfrm>
+          <a:off x="6172200" y="2240280"/>
+          <a:ext cx="5486400" cy="2834640"/>
+        </p:xfrm>
+        <a:graphic xmlns:a="http://schemas.openxmlformats.org/drawingml/2006/main">
+          <a:graphicData uri="http://schemas.openxmlformats.org/drawingml/2006/chart">
+            <c:chart xmlns:c="http://schemas.openxmlformats.org/drawingml/2006/chart" r:id="rId2"/>
+          </a:graphicData>
+        </a:graphic>
+      </p:graphicFrame>
+      <p:sp>
+        <p:nvSpPr>
+          <p:cNvPr id="11" name="Shape 7"/>
           <p:cNvSpPr/>
           <p:nvPr/>
         </p:nvSpPr>
@@ -22134,14 +26274,14 @@
       </p:sp>
       <p:sp>
         <p:nvSpPr>
-          <p:cNvPr id="9" name="Text 6"/>
+          <p:cNvPr id="12" name="Text 8"/>
           <p:cNvSpPr txBox="1"/>
           <p:nvPr/>
         </p:nvSpPr>
         <p:spPr>
           <a:xfrm>
             <a:off x="502006" y="5276088"/>
-            <a:ext cx="11188598" cy="548640"/>
+            <a:ext cx="11188598" cy="777240"/>
           </a:xfrm>
           <a:prstGeom prst="rect">
             <a:avLst/>
@@ -22168,7 +26308,7 @@
                 <a:ea typeface="Calibri" pitchFamily="34" charset="-122"/>
                 <a:cs typeface="Calibri" pitchFamily="34" charset="-120"/>
               </a:rPr>
-              <a:t>Single select. </a:t>
+              <a:t>Single select, asked twice. </a:t>
             </a:r>
             <a:pPr algn="l" indent="0" marL="0">
               <a:lnSpc>
@@ -22185,41 +26325,16 @@
                 <a:ea typeface="Calibri" pitchFamily="34" charset="-122"/>
                 <a:cs typeface="Calibri" pitchFamily="34" charset="-120"/>
               </a:rPr>
-              <a:t>The % in each category label is the full sector-level figure; tier segments are rounded to the nearest whole percent and may sum to within ±1pt of that total. Institution tier is based on newS8 (Banking) / S9 (Insurance), including respondents reclassified from their employer description elsewhere in the survey — Banking Top 100 is n=40, Insurance Large is n=10 (see the Q1 sector x tier slide for detail).</a:t>
-            </a:r>
-            <a:endParaRPr lang="en-US" sz="850" dirty="0"/>
-          </a:p>
-        </p:txBody>
-      </p:sp>
-      <p:sp>
-        <p:nvSpPr>
-          <p:cNvPr id="10" name="Text 7"/>
-          <p:cNvSpPr txBox="1"/>
-          <p:nvPr/>
-        </p:nvSpPr>
-        <p:spPr>
-          <a:xfrm>
-            <a:off x="502006" y="5843016"/>
-            <a:ext cx="11188598" cy="402336"/>
-          </a:xfrm>
-          <a:prstGeom prst="rect">
-            <a:avLst/>
-          </a:prstGeom>
-          <a:noFill/>
-          <a:ln/>
-        </p:spPr>
-        <p:txBody>
-          <a:bodyPr wrap="square" lIns="0" tIns="0" rIns="0" bIns="0" rtlCol="0" anchor="t"/>
-          <a:lstStyle/>
-          <a:p>
+              <a:t>Institution tier is based on S9, including 1 respondent reclassified from their employer description elsewhere in the survey (see the Q1 sector x tier slide for detail). Response options as fielded: </a:t>
+            </a:r>
             <a:pPr algn="l" indent="0" marL="0">
               <a:lnSpc>
-                <a:spcPct val="110000"/>
+                <a:spcPct val="115000"/>
               </a:lnSpc>
               <a:buNone/>
             </a:pPr>
             <a:r>
-              <a:rPr lang="en-US" sz="850" b="1" dirty="0">
+              <a:rPr lang="en-US" sz="850" i="1" dirty="0">
                 <a:solidFill>
                   <a:srgbClr val="53565A"/>
                 </a:solidFill>
@@ -22227,24 +26342,7 @@
                 <a:ea typeface="Calibri" pitchFamily="34" charset="-122"/>
                 <a:cs typeface="Calibri" pitchFamily="34" charset="-120"/>
               </a:rPr>
-              <a:t>Response options as fielded: </a:t>
-            </a:r>
-            <a:pPr algn="l" indent="0" marL="0">
-              <a:lnSpc>
-                <a:spcPct val="110000"/>
-              </a:lnSpc>
-              <a:buNone/>
-            </a:pPr>
-            <a:r>
-              <a:rPr lang="en-US" sz="800" i="1" dirty="0">
-                <a:solidFill>
-                  <a:srgbClr val="53565A"/>
-                </a:solidFill>
-                <a:latin typeface="Calibri" pitchFamily="34" charset="0"/>
-                <a:ea typeface="Calibri" pitchFamily="34" charset="-122"/>
-                <a:cs typeface="Calibri" pitchFamily="34" charset="-120"/>
-              </a:rPr>
-              <a:t>“Adding capacity through hiring full-time employees and workforce expansion” · “Adding capacity through outsourcing arrangements (e.g., contractors)” · “Automating workflows and minimizing manual activities” · “Augmenting existing capacity with AI-enabled tools” · “Redesigning operation processes and playbooks across the lifecycle” · “Pursuing a combination of the above approaches”</a:t>
+              <a:t>“Adding capacity through hiring full-time employees and workforce expansion”  ·  “Adding capacity through outsourcing arrangements (e.g., contractors)”  ·  “Automating workflows and minimizing manual activities”  ·  “Augmenting existing capacity with AI-enabled tools”  ·  “Redesigning operation processes and playbooks across the lifecycle”  ·  “Pursuing a combination of the above approaches”</a:t>
             </a:r>
             <a:endParaRPr lang="en-US" sz="850" dirty="0"/>
           </a:p>
@@ -22315,7 +26413,7 @@
                 <a:ea typeface="Calibri" pitchFamily="34" charset="-122"/>
                 <a:cs typeface="Calibri" pitchFamily="34" charset="-120"/>
               </a:rPr>
-              <a:t>3-Year Scaling Focus — By Sector and Institution Tier</a:t>
+              <a:t>Current Scaling Approach — Insurance, by Institution Tier and Region</a:t>
             </a:r>
             <a:endParaRPr lang="en-US" sz="1900" dirty="0"/>
           </a:p>
@@ -22357,7 +26455,7 @@
                 <a:ea typeface="Calibri" pitchFamily="34" charset="-122"/>
                 <a:cs typeface="Calibri" pitchFamily="34" charset="-120"/>
               </a:rPr>
-              <a:t>AI's lead grows in every tier — but Insurance's Top-tier carriers show the sharpest three-year pivot toward it.</a:t>
+              <a:t>Within Insurance, the regional pattern is thin but directionally consistent with the tier-level split.</a:t>
             </a:r>
             <a:endParaRPr lang="en-US" sz="1350" dirty="0"/>
           </a:p>
@@ -22422,7 +26520,7 @@
                 <a:ea typeface="IBM Plex Mono" pitchFamily="34" charset="-122"/>
                 <a:cs typeface="IBM Plex Mono" pitchFamily="34" charset="-120"/>
               </a:rPr>
-              <a:t>Q9 / newS8 / S9  </a:t>
+              <a:t>Q8 / S9  </a:t>
             </a:r>
             <a:pPr algn="l" indent="0" marL="0">
               <a:lnSpc>
@@ -22439,7 +26537,7 @@
                 <a:ea typeface="Calibri" pitchFamily="34" charset="-122"/>
                 <a:cs typeface="Calibri" pitchFamily="34" charset="-120"/>
               </a:rPr>
-              <a:t>“Which area do you expect will receive the greatest focus for fraud/investigations operations transformation over the next three years? (Banking vs. Insurance, further broken down by institution tier)”</a:t>
+              <a:t>“Which statement best describes your current approach to scaling fraud/investigations operations as fraud volume and complexity increases? (Insurance only, Top 50 vs. Large carrier, further broken down by region)”</a:t>
             </a:r>
             <a:endParaRPr lang="en-US" sz="1000" dirty="0"/>
           </a:p>
@@ -22576,7 +26674,7 @@
                 <a:ea typeface="Calibri" pitchFamily="34" charset="-122"/>
                 <a:cs typeface="Calibri" pitchFamily="34" charset="-120"/>
               </a:rPr>
-              <a:t>The % in each category label is the full sector-level figure; tier segments are rounded to the nearest whole percent and may sum to within ±1pt of that total. Institution tier is based on newS8 (Banking) / S9 (Insurance), including respondents reclassified from their employer description elsewhere in the survey — Banking Top 100 is n=40, Insurance Large is n=10 (see the Q1 sector x tier slide for detail).</a:t>
+              <a:t>The % in each category label is the full tier-level figure; region segments are rounded to the nearest whole percent and may not sum exactly due to rounding. Every regional cell here is thin (n=1–7) and should be read directionally. Insurance had zero Singapore respondents in either tier, so no segment appears there.</a:t>
             </a:r>
             <a:endParaRPr lang="en-US" sz="850" dirty="0"/>
           </a:p>
@@ -22590,8 +26688,8 @@
         </p:nvSpPr>
         <p:spPr>
           <a:xfrm>
-            <a:off x="502006" y="5843016"/>
-            <a:ext cx="11188598" cy="402336"/>
+            <a:off x="502006" y="5861304"/>
+            <a:ext cx="11188598" cy="420624"/>
           </a:xfrm>
           <a:prstGeom prst="rect">
             <a:avLst/>
@@ -22635,7 +26733,7 @@
                 <a:ea typeface="Calibri" pitchFamily="34" charset="-122"/>
                 <a:cs typeface="Calibri" pitchFamily="34" charset="-120"/>
               </a:rPr>
-              <a:t>“Adding capacity through hiring full-time employees and workforce expansion” · “Adding capacity through outsourcing arrangements (e.g., contractors)” · “Automating workflows and minimizing manual activities” · “Augmenting existing capacity with AI-enabled tools” · “Redesigning operation processes and playbooks across the lifecycle” · “Pursuing a combination of the above approaches”</a:t>
+              <a:t>“Adding capacity through hiring full-time employees and workforce expansion”  ·  “Adding capacity through outsourcing arrangements (e.g., contractors)”  ·  “Automating workflows and minimizing manual activities”  ·  “Augmenting existing capacity with AI-enabled tools”  ·  “Redesigning operation processes and playbooks across the lifecycle”  ·  “Pursuing a combination of the above approaches”</a:t>
             </a:r>
             <a:endParaRPr lang="en-US" sz="850" dirty="0"/>
           </a:p>
@@ -22655,7 +26753,7 @@
     <p:bg>
       <p:bgPr>
         <a:solidFill>
-          <a:srgbClr val="86BC25"/>
+          <a:srgbClr val="FFFFFF"/>
         </a:solidFill>
       </p:bgPr>
     </p:bg>
@@ -22681,47 +26779,8 @@
         </p:nvSpPr>
         <p:spPr>
           <a:xfrm>
-            <a:off x="502920" y="1699870"/>
-            <a:ext cx="10415016" cy="1591970"/>
-          </a:xfrm>
-          <a:prstGeom prst="rect">
-            <a:avLst/>
-          </a:prstGeom>
-          <a:noFill/>
-          <a:ln/>
-        </p:spPr>
-        <p:txBody>
-          <a:bodyPr wrap="square" lIns="0" tIns="0" rIns="0" bIns="0" rtlCol="0" anchor="b"/>
-          <a:lstStyle/>
-          <a:p>
-            <a:pPr algn="l" indent="0" marL="0">
-              <a:buNone/>
-            </a:pPr>
-            <a:r>
-              <a:rPr lang="en-US" sz="3600" b="1" dirty="0">
-                <a:solidFill>
-                  <a:srgbClr val="FFFFFF"/>
-                </a:solidFill>
-                <a:latin typeface="Calibri" pitchFamily="34" charset="0"/>
-                <a:ea typeface="Calibri" pitchFamily="34" charset="-122"/>
-                <a:cs typeface="Calibri" pitchFamily="34" charset="-120"/>
-              </a:rPr>
-              <a:t>5. Regulatory &amp; Market Change</a:t>
-            </a:r>
-            <a:endParaRPr lang="en-US" sz="3600" dirty="0"/>
-          </a:p>
-        </p:txBody>
-      </p:sp>
-      <p:sp>
-        <p:nvSpPr>
-          <p:cNvPr id="3" name="Text 1"/>
-          <p:cNvSpPr txBox="1"/>
-          <p:nvPr/>
-        </p:nvSpPr>
-        <p:spPr>
-          <a:xfrm>
-            <a:off x="502920" y="3423514"/>
-            <a:ext cx="10415016" cy="1563624"/>
+            <a:off x="502006" y="256032"/>
+            <a:ext cx="11188598" cy="310896"/>
           </a:xfrm>
           <a:prstGeom prst="rect">
             <a:avLst/>
@@ -22734,29 +26793,150 @@
           <a:lstStyle/>
           <a:p>
             <a:pPr algn="l" indent="0" marL="0">
+              <a:buNone/>
+            </a:pPr>
+            <a:r>
+              <a:rPr lang="en-US" sz="1900" b="1" dirty="0">
+                <a:solidFill>
+                  <a:srgbClr val="000000"/>
+                </a:solidFill>
+                <a:latin typeface="Calibri" pitchFamily="34" charset="0"/>
+                <a:ea typeface="Calibri" pitchFamily="34" charset="-122"/>
+                <a:cs typeface="Calibri" pitchFamily="34" charset="-120"/>
+              </a:rPr>
+              <a:t>3-Year Scaling Focus — Insurance, by Institution Tier and Region</a:t>
+            </a:r>
+            <a:endParaRPr lang="en-US" sz="1900" dirty="0"/>
+          </a:p>
+        </p:txBody>
+      </p:sp>
+      <p:sp>
+        <p:nvSpPr>
+          <p:cNvPr id="3" name="Text 1"/>
+          <p:cNvSpPr txBox="1"/>
+          <p:nvPr/>
+        </p:nvSpPr>
+        <p:spPr>
+          <a:xfrm>
+            <a:off x="502006" y="585216"/>
+            <a:ext cx="11188598" cy="713232"/>
+          </a:xfrm>
+          <a:prstGeom prst="rect">
+            <a:avLst/>
+          </a:prstGeom>
+          <a:noFill/>
+          <a:ln/>
+        </p:spPr>
+        <p:txBody>
+          <a:bodyPr wrap="square" lIns="0" tIns="0" rIns="0" bIns="0" rtlCol="0" anchor="t"/>
+          <a:lstStyle/>
+          <a:p>
+            <a:pPr algn="l" indent="0" marL="0">
               <a:lnSpc>
-                <a:spcPct val="110000"/>
+                <a:spcPct val="105000"/>
               </a:lnSpc>
               <a:buNone/>
             </a:pPr>
             <a:r>
-              <a:rPr lang="en-US" sz="1600" dirty="0">
-                <a:solidFill>
-                  <a:srgbClr val="FFFFFF"/>
-                </a:solidFill>
-                <a:latin typeface="Calibri" pitchFamily="34" charset="0"/>
-                <a:ea typeface="Calibri" pitchFamily="34" charset="-122"/>
-                <a:cs typeface="Calibri" pitchFamily="34" charset="-120"/>
-              </a:rPr>
-              <a:t>Where fraud investment is really going, and the disruption leaders see coming next.</a:t>
-            </a:r>
-            <a:endParaRPr lang="en-US" sz="1600" dirty="0"/>
+              <a:rPr lang="en-US" sz="1350" b="1" dirty="0">
+                <a:solidFill>
+                  <a:srgbClr val="046A38"/>
+                </a:solidFill>
+                <a:latin typeface="Calibri" pitchFamily="34" charset="0"/>
+                <a:ea typeface="Calibri" pitchFamily="34" charset="-122"/>
+                <a:cs typeface="Calibri" pitchFamily="34" charset="-120"/>
+              </a:rPr>
+              <a:t>Looking ahead, Insurance's regional pattern shifts further toward AI and process redesign in both tiers.</a:t>
+            </a:r>
+            <a:endParaRPr lang="en-US" sz="1350" dirty="0"/>
           </a:p>
         </p:txBody>
       </p:sp>
       <p:sp>
         <p:nvSpPr>
-          <p:cNvPr id="4" name="Text 2"/>
+          <p:cNvPr id="4" name="Shape 2"/>
+          <p:cNvSpPr/>
+          <p:nvPr/>
+        </p:nvSpPr>
+        <p:spPr>
+          <a:xfrm>
+            <a:off x="502006" y="1335024"/>
+            <a:ext cx="0" cy="512064"/>
+          </a:xfrm>
+          <a:prstGeom prst="line">
+            <a:avLst/>
+          </a:prstGeom>
+          <a:noFill/>
+          <a:ln w="25400">
+            <a:solidFill>
+              <a:srgbClr val="D0D0CE"/>
+            </a:solidFill>
+            <a:prstDash val="solid"/>
+          </a:ln>
+        </p:spPr>
+      </p:sp>
+      <p:sp>
+        <p:nvSpPr>
+          <p:cNvPr id="5" name="Text 3"/>
+          <p:cNvSpPr txBox="1"/>
+          <p:nvPr/>
+        </p:nvSpPr>
+        <p:spPr>
+          <a:xfrm>
+            <a:off x="648310" y="1335024"/>
+            <a:ext cx="11042294" cy="512064"/>
+          </a:xfrm>
+          <a:prstGeom prst="rect">
+            <a:avLst/>
+          </a:prstGeom>
+          <a:noFill/>
+          <a:ln/>
+        </p:spPr>
+        <p:txBody>
+          <a:bodyPr wrap="square" lIns="0" tIns="0" rIns="0" bIns="0" rtlCol="0" anchor="t"/>
+          <a:lstStyle/>
+          <a:p>
+            <a:pPr algn="l" indent="0" marL="0">
+              <a:lnSpc>
+                <a:spcPct val="106000"/>
+              </a:lnSpc>
+              <a:buNone/>
+            </a:pPr>
+            <a:r>
+              <a:rPr lang="en-US" sz="900" b="1" dirty="0">
+                <a:solidFill>
+                  <a:srgbClr val="046A38"/>
+                </a:solidFill>
+                <a:latin typeface="IBM Plex Mono" pitchFamily="34" charset="0"/>
+                <a:ea typeface="IBM Plex Mono" pitchFamily="34" charset="-122"/>
+                <a:cs typeface="IBM Plex Mono" pitchFamily="34" charset="-120"/>
+              </a:rPr>
+              <a:t>Q9 / S9  </a:t>
+            </a:r>
+            <a:pPr algn="l" indent="0" marL="0">
+              <a:lnSpc>
+                <a:spcPct val="106000"/>
+              </a:lnSpc>
+              <a:buNone/>
+            </a:pPr>
+            <a:r>
+              <a:rPr lang="en-US" sz="1000" i="1" dirty="0">
+                <a:solidFill>
+                  <a:srgbClr val="575757"/>
+                </a:solidFill>
+                <a:latin typeface="Calibri" pitchFamily="34" charset="0"/>
+                <a:ea typeface="Calibri" pitchFamily="34" charset="-122"/>
+                <a:cs typeface="Calibri" pitchFamily="34" charset="-120"/>
+              </a:rPr>
+              <a:t>“Which area do you expect will receive the greatest focus for fraud/investigations operations transformation over the next three years? (Insurance only, Top 50 vs. Large carrier, further broken down by region)”</a:t>
+            </a:r>
+            <a:endParaRPr lang="en-US" sz="1000" dirty="0"/>
+          </a:p>
+        </p:txBody>
+      </p:sp>
+      <p:sp>
+        <p:nvSpPr>
+          <p:cNvPr id="6" name="Text 4"/>
           <p:cNvSpPr txBox="1"/>
           <p:nvPr/>
         </p:nvSpPr>
@@ -22781,7 +26961,7 @@
             <a:r>
               <a:rPr lang="en-US" sz="900" dirty="0">
                 <a:solidFill>
-                  <a:srgbClr val="FFFFFF"/>
+                  <a:srgbClr val="53565A"/>
                 </a:solidFill>
                 <a:latin typeface="Calibri" pitchFamily="34" charset="0"/>
                 <a:ea typeface="Calibri" pitchFamily="34" charset="-122"/>
@@ -22790,6 +26970,163 @@
               <a:t>27</a:t>
             </a:r>
             <a:endParaRPr lang="en-US" sz="900" dirty="0"/>
+          </a:p>
+        </p:txBody>
+      </p:sp>
+      <p:graphicFrame>
+        <p:nvGraphicFramePr>
+          <p:cNvPr id="7" name="Chart 0" descr=""/>
+          <p:cNvGraphicFramePr/>
+          <p:nvPr/>
+        </p:nvGraphicFramePr>
+        <p:xfrm>
+          <a:off x="502006" y="2011680"/>
+          <a:ext cx="11188598" cy="3063240"/>
+        </p:xfrm>
+        <a:graphic xmlns:a="http://schemas.openxmlformats.org/drawingml/2006/main">
+          <a:graphicData uri="http://schemas.openxmlformats.org/drawingml/2006/chart">
+            <c:chart xmlns:c="http://schemas.openxmlformats.org/drawingml/2006/chart" r:id="rId1"/>
+          </a:graphicData>
+        </a:graphic>
+      </p:graphicFrame>
+      <p:sp>
+        <p:nvSpPr>
+          <p:cNvPr id="8" name="Shape 5"/>
+          <p:cNvSpPr/>
+          <p:nvPr/>
+        </p:nvSpPr>
+        <p:spPr>
+          <a:xfrm>
+            <a:off x="502006" y="5202936"/>
+            <a:ext cx="11188598" cy="0"/>
+          </a:xfrm>
+          <a:prstGeom prst="line">
+            <a:avLst/>
+          </a:prstGeom>
+          <a:noFill/>
+          <a:ln w="9525">
+            <a:solidFill>
+              <a:srgbClr val="D0D0CE"/>
+            </a:solidFill>
+            <a:prstDash val="solid"/>
+          </a:ln>
+        </p:spPr>
+      </p:sp>
+      <p:sp>
+        <p:nvSpPr>
+          <p:cNvPr id="9" name="Text 6"/>
+          <p:cNvSpPr txBox="1"/>
+          <p:nvPr/>
+        </p:nvSpPr>
+        <p:spPr>
+          <a:xfrm>
+            <a:off x="502006" y="5276088"/>
+            <a:ext cx="11188598" cy="548640"/>
+          </a:xfrm>
+          <a:prstGeom prst="rect">
+            <a:avLst/>
+          </a:prstGeom>
+          <a:noFill/>
+          <a:ln/>
+        </p:spPr>
+        <p:txBody>
+          <a:bodyPr wrap="square" lIns="0" tIns="0" rIns="0" bIns="0" rtlCol="0" anchor="t"/>
+          <a:lstStyle/>
+          <a:p>
+            <a:pPr algn="l" indent="0" marL="0">
+              <a:lnSpc>
+                <a:spcPct val="115000"/>
+              </a:lnSpc>
+              <a:buNone/>
+            </a:pPr>
+            <a:r>
+              <a:rPr lang="en-US" sz="850" b="1" dirty="0">
+                <a:solidFill>
+                  <a:srgbClr val="53565A"/>
+                </a:solidFill>
+                <a:latin typeface="Calibri" pitchFamily="34" charset="0"/>
+                <a:ea typeface="Calibri" pitchFamily="34" charset="-122"/>
+                <a:cs typeface="Calibri" pitchFamily="34" charset="-120"/>
+              </a:rPr>
+              <a:t>Single select. </a:t>
+            </a:r>
+            <a:pPr algn="l" indent="0" marL="0">
+              <a:lnSpc>
+                <a:spcPct val="115000"/>
+              </a:lnSpc>
+              <a:buNone/>
+            </a:pPr>
+            <a:r>
+              <a:rPr lang="en-US" sz="850" dirty="0">
+                <a:solidFill>
+                  <a:srgbClr val="53565A"/>
+                </a:solidFill>
+                <a:latin typeface="Calibri" pitchFamily="34" charset="0"/>
+                <a:ea typeface="Calibri" pitchFamily="34" charset="-122"/>
+                <a:cs typeface="Calibri" pitchFamily="34" charset="-120"/>
+              </a:rPr>
+              <a:t>The % in each category label is the full tier-level figure; region segments are rounded to the nearest whole percent and may not sum exactly due to rounding. Every regional cell here is thin (n=1–7) and should be read directionally. Insurance had zero Singapore respondents in either tier, so no segment appears there.</a:t>
+            </a:r>
+            <a:endParaRPr lang="en-US" sz="850" dirty="0"/>
+          </a:p>
+        </p:txBody>
+      </p:sp>
+      <p:sp>
+        <p:nvSpPr>
+          <p:cNvPr id="10" name="Text 7"/>
+          <p:cNvSpPr txBox="1"/>
+          <p:nvPr/>
+        </p:nvSpPr>
+        <p:spPr>
+          <a:xfrm>
+            <a:off x="502006" y="5861304"/>
+            <a:ext cx="11188598" cy="420624"/>
+          </a:xfrm>
+          <a:prstGeom prst="rect">
+            <a:avLst/>
+          </a:prstGeom>
+          <a:noFill/>
+          <a:ln/>
+        </p:spPr>
+        <p:txBody>
+          <a:bodyPr wrap="square" lIns="0" tIns="0" rIns="0" bIns="0" rtlCol="0" anchor="t"/>
+          <a:lstStyle/>
+          <a:p>
+            <a:pPr algn="l" indent="0" marL="0">
+              <a:lnSpc>
+                <a:spcPct val="110000"/>
+              </a:lnSpc>
+              <a:buNone/>
+            </a:pPr>
+            <a:r>
+              <a:rPr lang="en-US" sz="850" b="1" dirty="0">
+                <a:solidFill>
+                  <a:srgbClr val="53565A"/>
+                </a:solidFill>
+                <a:latin typeface="Calibri" pitchFamily="34" charset="0"/>
+                <a:ea typeface="Calibri" pitchFamily="34" charset="-122"/>
+                <a:cs typeface="Calibri" pitchFamily="34" charset="-120"/>
+              </a:rPr>
+              <a:t>Response options as fielded: </a:t>
+            </a:r>
+            <a:pPr algn="l" indent="0" marL="0">
+              <a:lnSpc>
+                <a:spcPct val="110000"/>
+              </a:lnSpc>
+              <a:buNone/>
+            </a:pPr>
+            <a:r>
+              <a:rPr lang="en-US" sz="800" i="1" dirty="0">
+                <a:solidFill>
+                  <a:srgbClr val="53565A"/>
+                </a:solidFill>
+                <a:latin typeface="Calibri" pitchFamily="34" charset="0"/>
+                <a:ea typeface="Calibri" pitchFamily="34" charset="-122"/>
+                <a:cs typeface="Calibri" pitchFamily="34" charset="-120"/>
+              </a:rPr>
+              <a:t>“Adding capacity through hiring full-time employees and workforce expansion”  ·  “Adding capacity through outsourcing arrangements (e.g., contractors)”  ·  “Automating workflows and minimizing manual activities”  ·  “Augmenting existing capacity with AI-enabled tools”  ·  “Redesigning operation processes and playbooks across the lifecycle”  ·  “Pursuing a combination of the above approaches”</a:t>
+            </a:r>
+            <a:endParaRPr lang="en-US" sz="850" dirty="0"/>
           </a:p>
         </p:txBody>
       </p:sp>
@@ -22858,7 +27195,7 @@
                 <a:ea typeface="Calibri" pitchFamily="34" charset="-122"/>
                 <a:cs typeface="Calibri" pitchFamily="34" charset="-120"/>
               </a:rPr>
-              <a:t>Fraud Investment Relative to Regulatory Requirements</a:t>
+              <a:t>Scaling Approach — Banking, by Institution Tier</a:t>
             </a:r>
             <a:endParaRPr lang="en-US" sz="1900" dirty="0"/>
           </a:p>
@@ -22900,7 +27237,7 @@
                 <a:ea typeface="Calibri" pitchFamily="34" charset="-122"/>
                 <a:cs typeface="Calibri" pitchFamily="34" charset="-120"/>
               </a:rPr>
-              <a:t>Most fraud spending today is about fixing past problems, not getting ahead of new ones.</a:t>
+              <a:t>Top 100 institutions already lean hardest on AI and automation; Large institutions rely more on hiring and outsourcing, today and in three years.</a:t>
             </a:r>
             <a:endParaRPr lang="en-US" sz="1350" dirty="0"/>
           </a:p>
@@ -22965,7 +27302,7 @@
                 <a:ea typeface="IBM Plex Mono" pitchFamily="34" charset="-122"/>
                 <a:cs typeface="IBM Plex Mono" pitchFamily="34" charset="-120"/>
               </a:rPr>
-              <a:t>Q10  </a:t>
+              <a:t>Q8 / Q9 / newS8  </a:t>
             </a:r>
             <a:pPr algn="l" indent="0" marL="0">
               <a:lnSpc>
@@ -22982,7 +27319,7 @@
                 <a:ea typeface="Calibri" pitchFamily="34" charset="-122"/>
                 <a:cs typeface="Calibri" pitchFamily="34" charset="-120"/>
               </a:rPr>
-              <a:t>“Which statement best reflects how your organization is allocating fraud-related investment in response to regulatory and compliance requirements?”</a:t>
+              <a:t>“Which statement best describes your current approach to scaling fraud/investigations operations? / Which area do you expect will receive the greatest focus over the next three years? (Today vs. 3-Year Focus)”</a:t>
             </a:r>
             <a:endParaRPr lang="en-US" sz="1000" dirty="0"/>
           </a:p>
@@ -23027,15 +27364,54 @@
           </a:p>
         </p:txBody>
       </p:sp>
+      <p:sp>
+        <p:nvSpPr>
+          <p:cNvPr id="7" name="Text 5"/>
+          <p:cNvSpPr txBox="1"/>
+          <p:nvPr/>
+        </p:nvSpPr>
+        <p:spPr>
+          <a:xfrm>
+            <a:off x="502006" y="1965960"/>
+            <a:ext cx="5486400" cy="237744"/>
+          </a:xfrm>
+          <a:prstGeom prst="rect">
+            <a:avLst/>
+          </a:prstGeom>
+          <a:noFill/>
+          <a:ln/>
+        </p:spPr>
+        <p:txBody>
+          <a:bodyPr wrap="square" rtlCol="0" anchor="ctr"/>
+          <a:lstStyle/>
+          <a:p>
+            <a:pPr indent="0" marL="0">
+              <a:buNone/>
+            </a:pPr>
+            <a:r>
+              <a:rPr lang="en-US" sz="1150" b="1" dirty="0">
+                <a:solidFill>
+                  <a:srgbClr val="000000"/>
+                </a:solidFill>
+                <a:latin typeface="Calibri" pitchFamily="34" charset="0"/>
+                <a:ea typeface="Calibri" pitchFamily="34" charset="-122"/>
+                <a:cs typeface="Calibri" pitchFamily="34" charset="-120"/>
+              </a:rPr>
+              <a:t>Top 100 Financial Institution (n=40)</a:t>
+            </a:r>
+            <a:endParaRPr lang="en-US" sz="1150" dirty="0"/>
+          </a:p>
+        </p:txBody>
+      </p:sp>
       <p:graphicFrame>
         <p:nvGraphicFramePr>
-          <p:cNvPr id="7" name="Chart 0" descr=""/>
+          <p:cNvPr id="8" name="Chart 0" descr=""/>
           <p:cNvGraphicFramePr/>
           <p:nvPr/>
         </p:nvGraphicFramePr>
         <p:xfrm>
-          <a:off x="502006" y="2011680"/>
-          <a:ext cx="11188598" cy="3063240"/>
+          <a:off x="502006" y="2240280"/>
+          <a:ext cx="5486400" cy="2834640"/>
         </p:xfrm>
         <a:graphic xmlns:a="http://schemas.openxmlformats.org/drawingml/2006/main">
           <a:graphicData uri="http://schemas.openxmlformats.org/drawingml/2006/chart">
@@ -23045,7 +27421,62 @@
       </p:graphicFrame>
       <p:sp>
         <p:nvSpPr>
-          <p:cNvPr id="8" name="Shape 5"/>
+          <p:cNvPr id="9" name="Text 6"/>
+          <p:cNvSpPr txBox="1"/>
+          <p:nvPr/>
+        </p:nvSpPr>
+        <p:spPr>
+          <a:xfrm>
+            <a:off x="6172200" y="1965960"/>
+            <a:ext cx="5486400" cy="237744"/>
+          </a:xfrm>
+          <a:prstGeom prst="rect">
+            <a:avLst/>
+          </a:prstGeom>
+          <a:noFill/>
+          <a:ln/>
+        </p:spPr>
+        <p:txBody>
+          <a:bodyPr wrap="square" rtlCol="0" anchor="ctr"/>
+          <a:lstStyle/>
+          <a:p>
+            <a:pPr indent="0" marL="0">
+              <a:buNone/>
+            </a:pPr>
+            <a:r>
+              <a:rPr lang="en-US" sz="1150" b="1" dirty="0">
+                <a:solidFill>
+                  <a:srgbClr val="000000"/>
+                </a:solidFill>
+                <a:latin typeface="Calibri" pitchFamily="34" charset="0"/>
+                <a:ea typeface="Calibri" pitchFamily="34" charset="-122"/>
+                <a:cs typeface="Calibri" pitchFamily="34" charset="-120"/>
+              </a:rPr>
+              <a:t>Large Financial Institution (n=35)</a:t>
+            </a:r>
+            <a:endParaRPr lang="en-US" sz="1150" dirty="0"/>
+          </a:p>
+        </p:txBody>
+      </p:sp>
+      <p:graphicFrame>
+        <p:nvGraphicFramePr>
+          <p:cNvPr id="10" name="Chart 1" descr=""/>
+          <p:cNvGraphicFramePr/>
+          <p:nvPr/>
+        </p:nvGraphicFramePr>
+        <p:xfrm>
+          <a:off x="6172200" y="2240280"/>
+          <a:ext cx="5486400" cy="2834640"/>
+        </p:xfrm>
+        <a:graphic xmlns:a="http://schemas.openxmlformats.org/drawingml/2006/main">
+          <a:graphicData uri="http://schemas.openxmlformats.org/drawingml/2006/chart">
+            <c:chart xmlns:c="http://schemas.openxmlformats.org/drawingml/2006/chart" r:id="rId2"/>
+          </a:graphicData>
+        </a:graphic>
+      </p:graphicFrame>
+      <p:sp>
+        <p:nvSpPr>
+          <p:cNvPr id="11" name="Shape 7"/>
           <p:cNvSpPr/>
           <p:nvPr/>
         </p:nvSpPr>
@@ -23068,14 +27499,14 @@
       </p:sp>
       <p:sp>
         <p:nvSpPr>
-          <p:cNvPr id="9" name="Text 6"/>
+          <p:cNvPr id="12" name="Text 8"/>
           <p:cNvSpPr txBox="1"/>
           <p:nvPr/>
         </p:nvSpPr>
         <p:spPr>
           <a:xfrm>
             <a:off x="502006" y="5276088"/>
-            <a:ext cx="11188598" cy="886968"/>
+            <a:ext cx="11188598" cy="777240"/>
           </a:xfrm>
           <a:prstGeom prst="rect">
             <a:avLst/>
@@ -23089,7 +27520,7 @@
           <a:p>
             <a:pPr algn="l" indent="0" marL="0">
               <a:lnSpc>
-                <a:spcPct val="118000"/>
+                <a:spcPct val="115000"/>
               </a:lnSpc>
               <a:buNone/>
             </a:pPr>
@@ -23102,16 +27533,16 @@
                 <a:ea typeface="Calibri" pitchFamily="34" charset="-122"/>
                 <a:cs typeface="Calibri" pitchFamily="34" charset="-120"/>
               </a:rPr>
-              <a:t>Single select.  </a:t>
+              <a:t>Single select, asked twice. </a:t>
             </a:r>
             <a:pPr algn="l" indent="0" marL="0">
               <a:lnSpc>
-                <a:spcPct val="118000"/>
+                <a:spcPct val="115000"/>
               </a:lnSpc>
               <a:buNone/>
             </a:pPr>
             <a:r>
-              <a:rPr lang="en-US" sz="850" b="1" dirty="0">
+              <a:rPr lang="en-US" sz="850" dirty="0">
                 <a:solidFill>
                   <a:srgbClr val="53565A"/>
                 </a:solidFill>
@@ -23119,11 +27550,11 @@
                 <a:ea typeface="Calibri" pitchFamily="34" charset="-122"/>
                 <a:cs typeface="Calibri" pitchFamily="34" charset="-120"/>
               </a:rPr>
-              <a:t>Response options as fielded: </a:t>
+              <a:t>Institution tier is based on newS8, including 5 respondents reclassified from their employer description elsewhere in the survey (see the Q1 sector x tier slide for detail). Response options as fielded: </a:t>
             </a:r>
             <a:pPr algn="l" indent="0" marL="0">
               <a:lnSpc>
-                <a:spcPct val="118000"/>
+                <a:spcPct val="115000"/>
               </a:lnSpc>
               <a:buNone/>
             </a:pPr>
@@ -23136,75 +27567,7 @@
                 <a:ea typeface="Calibri" pitchFamily="34" charset="-122"/>
                 <a:cs typeface="Calibri" pitchFamily="34" charset="-120"/>
               </a:rPr>
-              <a:t>“Primarily investing to meet upcoming and draft regulatory requirements”</a:t>
-            </a:r>
-            <a:pPr algn="l" indent="0" marL="0">
-              <a:lnSpc>
-                <a:spcPct val="118000"/>
-              </a:lnSpc>
-              <a:buNone/>
-            </a:pPr>
-            <a:r>
-              <a:rPr lang="en-US" sz="850" dirty="0">
-                <a:solidFill>
-                  <a:srgbClr val="D0D0CE"/>
-                </a:solidFill>
-                <a:latin typeface="Calibri" pitchFamily="34" charset="0"/>
-                <a:ea typeface="Calibri" pitchFamily="34" charset="-122"/>
-                <a:cs typeface="Calibri" pitchFamily="34" charset="-120"/>
-              </a:rPr>
-              <a:t>  ·  </a:t>
-            </a:r>
-            <a:pPr algn="l" indent="0" marL="0">
-              <a:lnSpc>
-                <a:spcPct val="118000"/>
-              </a:lnSpc>
-              <a:buNone/>
-            </a:pPr>
-            <a:r>
-              <a:rPr lang="en-US" sz="850" i="1" dirty="0">
-                <a:solidFill>
-                  <a:srgbClr val="53565A"/>
-                </a:solidFill>
-                <a:latin typeface="Calibri" pitchFamily="34" charset="0"/>
-                <a:ea typeface="Calibri" pitchFamily="34" charset="-122"/>
-                <a:cs typeface="Calibri" pitchFamily="34" charset="-120"/>
-              </a:rPr>
-              <a:t>“Primarily investing to remediate existing compliance and control gaps”</a:t>
-            </a:r>
-            <a:pPr algn="l" indent="0" marL="0">
-              <a:lnSpc>
-                <a:spcPct val="118000"/>
-              </a:lnSpc>
-              <a:buNone/>
-            </a:pPr>
-            <a:r>
-              <a:rPr lang="en-US" sz="850" dirty="0">
-                <a:solidFill>
-                  <a:srgbClr val="D0D0CE"/>
-                </a:solidFill>
-                <a:latin typeface="Calibri" pitchFamily="34" charset="0"/>
-                <a:ea typeface="Calibri" pitchFamily="34" charset="-122"/>
-                <a:cs typeface="Calibri" pitchFamily="34" charset="-120"/>
-              </a:rPr>
-              <a:t>  ·  </a:t>
-            </a:r>
-            <a:pPr algn="l" indent="0" marL="0">
-              <a:lnSpc>
-                <a:spcPct val="118000"/>
-              </a:lnSpc>
-              <a:buNone/>
-            </a:pPr>
-            <a:r>
-              <a:rPr lang="en-US" sz="850" i="1" dirty="0">
-                <a:solidFill>
-                  <a:srgbClr val="53565A"/>
-                </a:solidFill>
-                <a:latin typeface="Calibri" pitchFamily="34" charset="0"/>
-                <a:ea typeface="Calibri" pitchFamily="34" charset="-122"/>
-                <a:cs typeface="Calibri" pitchFamily="34" charset="-120"/>
-              </a:rPr>
-              <a:t>“Regulatory requirements are not a primary driver of fraud-related investment”</a:t>
+              <a:t>“Adding capacity through hiring full-time employees and workforce expansion”  ·  “Adding capacity through outsourcing arrangements (e.g., contractors)”  ·  “Automating workflows and minimizing manual activities”  ·  “Augmenting existing capacity with AI-enabled tools”  ·  “Redesigning operation processes and playbooks across the lifecycle”  ·  “Pursuing a combination of the above approaches”</a:t>
             </a:r>
             <a:endParaRPr lang="en-US" sz="850" dirty="0"/>
           </a:p>
@@ -23957,7 +28320,7 @@
                 <a:ea typeface="Calibri" pitchFamily="34" charset="-122"/>
                 <a:cs typeface="Calibri" pitchFamily="34" charset="-120"/>
               </a:rPr>
-              <a:t>Upcoming Regulatory / Market Change With Greatest Expected Impact</a:t>
+              <a:t>Current Scaling Approach — Banking, by Institution Tier and Region</a:t>
             </a:r>
             <a:endParaRPr lang="en-US" sz="1900" dirty="0"/>
           </a:p>
@@ -23999,7 +28362,7 @@
                 <a:ea typeface="Calibri" pitchFamily="34" charset="-122"/>
                 <a:cs typeface="Calibri" pitchFamily="34" charset="-120"/>
               </a:rPr>
-              <a:t>Identity and authentication tops a close three-way race for the next big disruption.</a:t>
+              <a:t>Top 100 institutions in the U.S. lean hardest on AI today; Large institutions show a more even regional spread.</a:t>
             </a:r>
             <a:endParaRPr lang="en-US" sz="1350" dirty="0"/>
           </a:p>
@@ -24064,7 +28427,7 @@
                 <a:ea typeface="IBM Plex Mono" pitchFamily="34" charset="-122"/>
                 <a:cs typeface="IBM Plex Mono" pitchFamily="34" charset="-120"/>
               </a:rPr>
-              <a:t>Q11  </a:t>
+              <a:t>Q8 / newS8  </a:t>
             </a:r>
             <a:pPr algn="l" indent="0" marL="0">
               <a:lnSpc>
@@ -24081,7 +28444,7 @@
                 <a:ea typeface="Calibri" pitchFamily="34" charset="-122"/>
                 <a:cs typeface="Calibri" pitchFamily="34" charset="-120"/>
               </a:rPr>
-              <a:t>“Which upcoming regulatory or market changes is expected to have the greatest impact on your fraud program?”</a:t>
+              <a:t>“Which statement best describes your current approach to scaling fraud/investigations operations as fraud volume and complexity increases? (Banking only, Top 100 vs. Large institution, further broken down by region)”</a:t>
             </a:r>
             <a:endParaRPr lang="en-US" sz="1000" dirty="0"/>
           </a:p>
@@ -24174,7 +28537,7 @@
         <p:spPr>
           <a:xfrm>
             <a:off x="502006" y="5276088"/>
-            <a:ext cx="11188598" cy="886968"/>
+            <a:ext cx="11188598" cy="548640"/>
           </a:xfrm>
           <a:prstGeom prst="rect">
             <a:avLst/>
@@ -24188,7 +28551,7 @@
           <a:p>
             <a:pPr algn="l" indent="0" marL="0">
               <a:lnSpc>
-                <a:spcPct val="118000"/>
+                <a:spcPct val="115000"/>
               </a:lnSpc>
               <a:buNone/>
             </a:pPr>
@@ -24201,16 +28564,16 @@
                 <a:ea typeface="Calibri" pitchFamily="34" charset="-122"/>
                 <a:cs typeface="Calibri" pitchFamily="34" charset="-120"/>
               </a:rPr>
-              <a:t>Ranked top 3 — shown as % of respondents who placed the option anywhere in their top 3 (not mutually exclusive; bars don't sum to 100%).  </a:t>
+              <a:t>Single select. </a:t>
             </a:r>
             <a:pPr algn="l" indent="0" marL="0">
               <a:lnSpc>
-                <a:spcPct val="118000"/>
+                <a:spcPct val="115000"/>
               </a:lnSpc>
               <a:buNone/>
             </a:pPr>
             <a:r>
-              <a:rPr lang="en-US" sz="850" b="1" dirty="0">
+              <a:rPr lang="en-US" sz="850" dirty="0">
                 <a:solidFill>
                   <a:srgbClr val="53565A"/>
                 </a:solidFill>
@@ -24218,16 +28581,41 @@
                 <a:ea typeface="Calibri" pitchFamily="34" charset="-122"/>
                 <a:cs typeface="Calibri" pitchFamily="34" charset="-120"/>
               </a:rPr>
-              <a:t>Response options as fielded: </a:t>
-            </a:r>
+              <a:t>The % in each category label is the full tier-level figure; region segments are rounded to the nearest whole percent and may not sum exactly due to rounding. Australia (n=4 Top 100 / n=3 Large) and Singapore (n=2 / n=2) are thin samples shown directionally.</a:t>
+            </a:r>
+            <a:endParaRPr lang="en-US" sz="850" dirty="0"/>
+          </a:p>
+        </p:txBody>
+      </p:sp>
+      <p:sp>
+        <p:nvSpPr>
+          <p:cNvPr id="10" name="Text 7"/>
+          <p:cNvSpPr txBox="1"/>
+          <p:nvPr/>
+        </p:nvSpPr>
+        <p:spPr>
+          <a:xfrm>
+            <a:off x="502006" y="5861304"/>
+            <a:ext cx="11188598" cy="420624"/>
+          </a:xfrm>
+          <a:prstGeom prst="rect">
+            <a:avLst/>
+          </a:prstGeom>
+          <a:noFill/>
+          <a:ln/>
+        </p:spPr>
+        <p:txBody>
+          <a:bodyPr wrap="square" lIns="0" tIns="0" rIns="0" bIns="0" rtlCol="0" anchor="t"/>
+          <a:lstStyle/>
+          <a:p>
             <a:pPr algn="l" indent="0" marL="0">
               <a:lnSpc>
-                <a:spcPct val="118000"/>
+                <a:spcPct val="110000"/>
               </a:lnSpc>
               <a:buNone/>
             </a:pPr>
             <a:r>
-              <a:rPr lang="en-US" sz="850" i="1" dirty="0">
+              <a:rPr lang="en-US" sz="850" b="1" dirty="0">
                 <a:solidFill>
                   <a:srgbClr val="53565A"/>
                 </a:solidFill>
@@ -24235,33 +28623,16 @@
                 <a:ea typeface="Calibri" pitchFamily="34" charset="-122"/>
                 <a:cs typeface="Calibri" pitchFamily="34" charset="-120"/>
               </a:rPr>
-              <a:t>“Payment innovation and adoption (e.g., real-time payments, stable coins, agentic payments)”</a:t>
+              <a:t>Response options as fielded: </a:t>
             </a:r>
             <a:pPr algn="l" indent="0" marL="0">
               <a:lnSpc>
-                <a:spcPct val="118000"/>
+                <a:spcPct val="110000"/>
               </a:lnSpc>
               <a:buNone/>
             </a:pPr>
             <a:r>
-              <a:rPr lang="en-US" sz="850" dirty="0">
-                <a:solidFill>
-                  <a:srgbClr val="D0D0CE"/>
-                </a:solidFill>
-                <a:latin typeface="Calibri" pitchFamily="34" charset="0"/>
-                <a:ea typeface="Calibri" pitchFamily="34" charset="-122"/>
-                <a:cs typeface="Calibri" pitchFamily="34" charset="-120"/>
-              </a:rPr>
-              <a:t>  ·  </a:t>
-            </a:r>
-            <a:pPr algn="l" indent="0" marL="0">
-              <a:lnSpc>
-                <a:spcPct val="118000"/>
-              </a:lnSpc>
-              <a:buNone/>
-            </a:pPr>
-            <a:r>
-              <a:rPr lang="en-US" sz="850" i="1" dirty="0">
+              <a:rPr lang="en-US" sz="800" i="1" dirty="0">
                 <a:solidFill>
                   <a:srgbClr val="53565A"/>
                 </a:solidFill>
@@ -24269,143 +28640,7 @@
                 <a:ea typeface="Calibri" pitchFamily="34" charset="-122"/>
                 <a:cs typeface="Calibri" pitchFamily="34" charset="-120"/>
               </a:rPr>
-              <a:t>“Liability and reimbursement changes”</a:t>
-            </a:r>
-            <a:pPr algn="l" indent="0" marL="0">
-              <a:lnSpc>
-                <a:spcPct val="118000"/>
-              </a:lnSpc>
-              <a:buNone/>
-            </a:pPr>
-            <a:r>
-              <a:rPr lang="en-US" sz="850" dirty="0">
-                <a:solidFill>
-                  <a:srgbClr val="D0D0CE"/>
-                </a:solidFill>
-                <a:latin typeface="Calibri" pitchFamily="34" charset="0"/>
-                <a:ea typeface="Calibri" pitchFamily="34" charset="-122"/>
-                <a:cs typeface="Calibri" pitchFamily="34" charset="-120"/>
-              </a:rPr>
-              <a:t>  ·  </a:t>
-            </a:r>
-            <a:pPr algn="l" indent="0" marL="0">
-              <a:lnSpc>
-                <a:spcPct val="118000"/>
-              </a:lnSpc>
-              <a:buNone/>
-            </a:pPr>
-            <a:r>
-              <a:rPr lang="en-US" sz="850" i="1" dirty="0">
-                <a:solidFill>
-                  <a:srgbClr val="53565A"/>
-                </a:solidFill>
-                <a:latin typeface="Calibri" pitchFamily="34" charset="0"/>
-                <a:ea typeface="Calibri" pitchFamily="34" charset="-122"/>
-                <a:cs typeface="Calibri" pitchFamily="34" charset="-120"/>
-              </a:rPr>
-              <a:t>“Open Banking / Consumer-driven banking initiatives”</a:t>
-            </a:r>
-            <a:pPr algn="l" indent="0" marL="0">
-              <a:lnSpc>
-                <a:spcPct val="118000"/>
-              </a:lnSpc>
-              <a:buNone/>
-            </a:pPr>
-            <a:r>
-              <a:rPr lang="en-US" sz="850" dirty="0">
-                <a:solidFill>
-                  <a:srgbClr val="D0D0CE"/>
-                </a:solidFill>
-                <a:latin typeface="Calibri" pitchFamily="34" charset="0"/>
-                <a:ea typeface="Calibri" pitchFamily="34" charset="-122"/>
-                <a:cs typeface="Calibri" pitchFamily="34" charset="-120"/>
-              </a:rPr>
-              <a:t>  ·  </a:t>
-            </a:r>
-            <a:pPr algn="l" indent="0" marL="0">
-              <a:lnSpc>
-                <a:spcPct val="118000"/>
-              </a:lnSpc>
-              <a:buNone/>
-            </a:pPr>
-            <a:r>
-              <a:rPr lang="en-US" sz="850" i="1" dirty="0">
-                <a:solidFill>
-                  <a:srgbClr val="53565A"/>
-                </a:solidFill>
-                <a:latin typeface="Calibri" pitchFamily="34" charset="0"/>
-                <a:ea typeface="Calibri" pitchFamily="34" charset="-122"/>
-                <a:cs typeface="Calibri" pitchFamily="34" charset="-120"/>
-              </a:rPr>
-              <a:t>“AML related modernization initiatives”</a:t>
-            </a:r>
-            <a:pPr algn="l" indent="0" marL="0">
-              <a:lnSpc>
-                <a:spcPct val="118000"/>
-              </a:lnSpc>
-              <a:buNone/>
-            </a:pPr>
-            <a:r>
-              <a:rPr lang="en-US" sz="850" dirty="0">
-                <a:solidFill>
-                  <a:srgbClr val="D0D0CE"/>
-                </a:solidFill>
-                <a:latin typeface="Calibri" pitchFamily="34" charset="0"/>
-                <a:ea typeface="Calibri" pitchFamily="34" charset="-122"/>
-                <a:cs typeface="Calibri" pitchFamily="34" charset="-120"/>
-              </a:rPr>
-              <a:t>  ·  </a:t>
-            </a:r>
-            <a:pPr algn="l" indent="0" marL="0">
-              <a:lnSpc>
-                <a:spcPct val="118000"/>
-              </a:lnSpc>
-              <a:buNone/>
-            </a:pPr>
-            <a:r>
-              <a:rPr lang="en-US" sz="850" i="1" dirty="0">
-                <a:solidFill>
-                  <a:srgbClr val="53565A"/>
-                </a:solidFill>
-                <a:latin typeface="Calibri" pitchFamily="34" charset="0"/>
-                <a:ea typeface="Calibri" pitchFamily="34" charset="-122"/>
-                <a:cs typeface="Calibri" pitchFamily="34" charset="-120"/>
-              </a:rPr>
-              <a:t>“Privacy, data-sharing requirements, and AI governance requirements”</a:t>
-            </a:r>
-            <a:pPr algn="l" indent="0" marL="0">
-              <a:lnSpc>
-                <a:spcPct val="118000"/>
-              </a:lnSpc>
-              <a:buNone/>
-            </a:pPr>
-            <a:r>
-              <a:rPr lang="en-US" sz="850" dirty="0">
-                <a:solidFill>
-                  <a:srgbClr val="D0D0CE"/>
-                </a:solidFill>
-                <a:latin typeface="Calibri" pitchFamily="34" charset="0"/>
-                <a:ea typeface="Calibri" pitchFamily="34" charset="-122"/>
-                <a:cs typeface="Calibri" pitchFamily="34" charset="-120"/>
-              </a:rPr>
-              <a:t>  ·  </a:t>
-            </a:r>
-            <a:pPr algn="l" indent="0" marL="0">
-              <a:lnSpc>
-                <a:spcPct val="118000"/>
-              </a:lnSpc>
-              <a:buNone/>
-            </a:pPr>
-            <a:r>
-              <a:rPr lang="en-US" sz="850" i="1" dirty="0">
-                <a:solidFill>
-                  <a:srgbClr val="53565A"/>
-                </a:solidFill>
-                <a:latin typeface="Calibri" pitchFamily="34" charset="0"/>
-                <a:ea typeface="Calibri" pitchFamily="34" charset="-122"/>
-                <a:cs typeface="Calibri" pitchFamily="34" charset="-120"/>
-              </a:rPr>
-              <a:t>“Customer identity, authentication, and digital trust expectations”</a:t>
+              <a:t>“Adding capacity through hiring full-time employees and workforce expansion”  ·  “Adding capacity through outsourcing arrangements (e.g., contractors)”  ·  “Automating workflows and minimizing manual activities”  ·  “Augmenting existing capacity with AI-enabled tools”  ·  “Redesigning operation processes and playbooks across the lifecycle”  ·  “Pursuing a combination of the above approaches”</a:t>
             </a:r>
             <a:endParaRPr lang="en-US" sz="850" dirty="0"/>
           </a:p>
@@ -24422,6 +28657,397 @@
 <file path=ppt/slides/slide31.xml><?xml version="1.0" encoding="utf-8"?>
 <p:sld xmlns:a="http://schemas.openxmlformats.org/drawingml/2006/main" xmlns:r="http://schemas.openxmlformats.org/officeDocument/2006/relationships" xmlns:p="http://schemas.openxmlformats.org/presentationml/2006/main">
   <p:cSld name="Slide 31">
+    <p:bg>
+      <p:bgPr>
+        <a:solidFill>
+          <a:srgbClr val="FFFFFF"/>
+        </a:solidFill>
+      </p:bgPr>
+    </p:bg>
+    <p:spTree>
+      <p:nvGrpSpPr>
+        <p:cNvPr id="1" name=""/>
+        <p:cNvGrpSpPr/>
+        <p:nvPr/>
+      </p:nvGrpSpPr>
+      <p:grpSpPr>
+        <a:xfrm>
+          <a:off x="0" y="0"/>
+          <a:ext cx="0" cy="0"/>
+          <a:chOff x="0" y="0"/>
+          <a:chExt cx="0" cy="0"/>
+        </a:xfrm>
+      </p:grpSpPr>
+      <p:sp>
+        <p:nvSpPr>
+          <p:cNvPr id="2" name="Text 0"/>
+          <p:cNvSpPr txBox="1"/>
+          <p:nvPr/>
+        </p:nvSpPr>
+        <p:spPr>
+          <a:xfrm>
+            <a:off x="502006" y="256032"/>
+            <a:ext cx="11188598" cy="310896"/>
+          </a:xfrm>
+          <a:prstGeom prst="rect">
+            <a:avLst/>
+          </a:prstGeom>
+          <a:noFill/>
+          <a:ln/>
+        </p:spPr>
+        <p:txBody>
+          <a:bodyPr wrap="square" lIns="0" tIns="0" rIns="0" bIns="0" rtlCol="0" anchor="t"/>
+          <a:lstStyle/>
+          <a:p>
+            <a:pPr algn="l" indent="0" marL="0">
+              <a:buNone/>
+            </a:pPr>
+            <a:r>
+              <a:rPr lang="en-US" sz="1900" b="1" dirty="0">
+                <a:solidFill>
+                  <a:srgbClr val="000000"/>
+                </a:solidFill>
+                <a:latin typeface="Calibri" pitchFamily="34" charset="0"/>
+                <a:ea typeface="Calibri" pitchFamily="34" charset="-122"/>
+                <a:cs typeface="Calibri" pitchFamily="34" charset="-120"/>
+              </a:rPr>
+              <a:t>3-Year Scaling Focus — Banking, by Institution Tier and Region</a:t>
+            </a:r>
+            <a:endParaRPr lang="en-US" sz="1900" dirty="0"/>
+          </a:p>
+        </p:txBody>
+      </p:sp>
+      <p:sp>
+        <p:nvSpPr>
+          <p:cNvPr id="3" name="Text 1"/>
+          <p:cNvSpPr txBox="1"/>
+          <p:nvPr/>
+        </p:nvSpPr>
+        <p:spPr>
+          <a:xfrm>
+            <a:off x="502006" y="585216"/>
+            <a:ext cx="11188598" cy="713232"/>
+          </a:xfrm>
+          <a:prstGeom prst="rect">
+            <a:avLst/>
+          </a:prstGeom>
+          <a:noFill/>
+          <a:ln/>
+        </p:spPr>
+        <p:txBody>
+          <a:bodyPr wrap="square" lIns="0" tIns="0" rIns="0" bIns="0" rtlCol="0" anchor="t"/>
+          <a:lstStyle/>
+          <a:p>
+            <a:pPr algn="l" indent="0" marL="0">
+              <a:lnSpc>
+                <a:spcPct val="105000"/>
+              </a:lnSpc>
+              <a:buNone/>
+            </a:pPr>
+            <a:r>
+              <a:rPr lang="en-US" sz="1350" b="1" dirty="0">
+                <a:solidFill>
+                  <a:srgbClr val="046A38"/>
+                </a:solidFill>
+                <a:latin typeface="Calibri" pitchFamily="34" charset="0"/>
+                <a:ea typeface="Calibri" pitchFamily="34" charset="-122"/>
+                <a:cs typeface="Calibri" pitchFamily="34" charset="-120"/>
+              </a:rPr>
+              <a:t>AI's three-year lead holds across nearly every region and tier in Banking.</a:t>
+            </a:r>
+            <a:endParaRPr lang="en-US" sz="1350" dirty="0"/>
+          </a:p>
+        </p:txBody>
+      </p:sp>
+      <p:sp>
+        <p:nvSpPr>
+          <p:cNvPr id="4" name="Shape 2"/>
+          <p:cNvSpPr/>
+          <p:nvPr/>
+        </p:nvSpPr>
+        <p:spPr>
+          <a:xfrm>
+            <a:off x="502006" y="1335024"/>
+            <a:ext cx="0" cy="512064"/>
+          </a:xfrm>
+          <a:prstGeom prst="line">
+            <a:avLst/>
+          </a:prstGeom>
+          <a:noFill/>
+          <a:ln w="25400">
+            <a:solidFill>
+              <a:srgbClr val="D0D0CE"/>
+            </a:solidFill>
+            <a:prstDash val="solid"/>
+          </a:ln>
+        </p:spPr>
+      </p:sp>
+      <p:sp>
+        <p:nvSpPr>
+          <p:cNvPr id="5" name="Text 3"/>
+          <p:cNvSpPr txBox="1"/>
+          <p:nvPr/>
+        </p:nvSpPr>
+        <p:spPr>
+          <a:xfrm>
+            <a:off x="648310" y="1335024"/>
+            <a:ext cx="11042294" cy="512064"/>
+          </a:xfrm>
+          <a:prstGeom prst="rect">
+            <a:avLst/>
+          </a:prstGeom>
+          <a:noFill/>
+          <a:ln/>
+        </p:spPr>
+        <p:txBody>
+          <a:bodyPr wrap="square" lIns="0" tIns="0" rIns="0" bIns="0" rtlCol="0" anchor="t"/>
+          <a:lstStyle/>
+          <a:p>
+            <a:pPr algn="l" indent="0" marL="0">
+              <a:lnSpc>
+                <a:spcPct val="106000"/>
+              </a:lnSpc>
+              <a:buNone/>
+            </a:pPr>
+            <a:r>
+              <a:rPr lang="en-US" sz="900" b="1" dirty="0">
+                <a:solidFill>
+                  <a:srgbClr val="046A38"/>
+                </a:solidFill>
+                <a:latin typeface="IBM Plex Mono" pitchFamily="34" charset="0"/>
+                <a:ea typeface="IBM Plex Mono" pitchFamily="34" charset="-122"/>
+                <a:cs typeface="IBM Plex Mono" pitchFamily="34" charset="-120"/>
+              </a:rPr>
+              <a:t>Q9 / newS8  </a:t>
+            </a:r>
+            <a:pPr algn="l" indent="0" marL="0">
+              <a:lnSpc>
+                <a:spcPct val="106000"/>
+              </a:lnSpc>
+              <a:buNone/>
+            </a:pPr>
+            <a:r>
+              <a:rPr lang="en-US" sz="1000" i="1" dirty="0">
+                <a:solidFill>
+                  <a:srgbClr val="575757"/>
+                </a:solidFill>
+                <a:latin typeface="Calibri" pitchFamily="34" charset="0"/>
+                <a:ea typeface="Calibri" pitchFamily="34" charset="-122"/>
+                <a:cs typeface="Calibri" pitchFamily="34" charset="-120"/>
+              </a:rPr>
+              <a:t>“Which area do you expect will receive the greatest focus for fraud/investigations operations transformation over the next three years? (Banking only, Top 100 vs. Large institution, further broken down by region)”</a:t>
+            </a:r>
+            <a:endParaRPr lang="en-US" sz="1000" dirty="0"/>
+          </a:p>
+        </p:txBody>
+      </p:sp>
+      <p:sp>
+        <p:nvSpPr>
+          <p:cNvPr id="6" name="Text 4"/>
+          <p:cNvSpPr txBox="1"/>
+          <p:nvPr/>
+        </p:nvSpPr>
+        <p:spPr>
+          <a:xfrm>
+            <a:off x="11346790" y="6537960"/>
+            <a:ext cx="343814" cy="182880"/>
+          </a:xfrm>
+          <a:prstGeom prst="rect">
+            <a:avLst/>
+          </a:prstGeom>
+          <a:noFill/>
+          <a:ln/>
+        </p:spPr>
+        <p:txBody>
+          <a:bodyPr wrap="square" rtlCol="0" anchor="ctr"/>
+          <a:lstStyle/>
+          <a:p>
+            <a:pPr algn="r" indent="0" marL="0">
+              <a:buNone/>
+            </a:pPr>
+            <a:r>
+              <a:rPr lang="en-US" sz="900" dirty="0">
+                <a:solidFill>
+                  <a:srgbClr val="53565A"/>
+                </a:solidFill>
+                <a:latin typeface="Calibri" pitchFamily="34" charset="0"/>
+                <a:ea typeface="Calibri" pitchFamily="34" charset="-122"/>
+                <a:cs typeface="Calibri" pitchFamily="34" charset="-120"/>
+              </a:rPr>
+              <a:t>30</a:t>
+            </a:r>
+            <a:endParaRPr lang="en-US" sz="900" dirty="0"/>
+          </a:p>
+        </p:txBody>
+      </p:sp>
+      <p:graphicFrame>
+        <p:nvGraphicFramePr>
+          <p:cNvPr id="7" name="Chart 0" descr=""/>
+          <p:cNvGraphicFramePr/>
+          <p:nvPr/>
+        </p:nvGraphicFramePr>
+        <p:xfrm>
+          <a:off x="502006" y="2011680"/>
+          <a:ext cx="11188598" cy="3063240"/>
+        </p:xfrm>
+        <a:graphic xmlns:a="http://schemas.openxmlformats.org/drawingml/2006/main">
+          <a:graphicData uri="http://schemas.openxmlformats.org/drawingml/2006/chart">
+            <c:chart xmlns:c="http://schemas.openxmlformats.org/drawingml/2006/chart" r:id="rId1"/>
+          </a:graphicData>
+        </a:graphic>
+      </p:graphicFrame>
+      <p:sp>
+        <p:nvSpPr>
+          <p:cNvPr id="8" name="Shape 5"/>
+          <p:cNvSpPr/>
+          <p:nvPr/>
+        </p:nvSpPr>
+        <p:spPr>
+          <a:xfrm>
+            <a:off x="502006" y="5202936"/>
+            <a:ext cx="11188598" cy="0"/>
+          </a:xfrm>
+          <a:prstGeom prst="line">
+            <a:avLst/>
+          </a:prstGeom>
+          <a:noFill/>
+          <a:ln w="9525">
+            <a:solidFill>
+              <a:srgbClr val="D0D0CE"/>
+            </a:solidFill>
+            <a:prstDash val="solid"/>
+          </a:ln>
+        </p:spPr>
+      </p:sp>
+      <p:sp>
+        <p:nvSpPr>
+          <p:cNvPr id="9" name="Text 6"/>
+          <p:cNvSpPr txBox="1"/>
+          <p:nvPr/>
+        </p:nvSpPr>
+        <p:spPr>
+          <a:xfrm>
+            <a:off x="502006" y="5276088"/>
+            <a:ext cx="11188598" cy="548640"/>
+          </a:xfrm>
+          <a:prstGeom prst="rect">
+            <a:avLst/>
+          </a:prstGeom>
+          <a:noFill/>
+          <a:ln/>
+        </p:spPr>
+        <p:txBody>
+          <a:bodyPr wrap="square" lIns="0" tIns="0" rIns="0" bIns="0" rtlCol="0" anchor="t"/>
+          <a:lstStyle/>
+          <a:p>
+            <a:pPr algn="l" indent="0" marL="0">
+              <a:lnSpc>
+                <a:spcPct val="115000"/>
+              </a:lnSpc>
+              <a:buNone/>
+            </a:pPr>
+            <a:r>
+              <a:rPr lang="en-US" sz="850" b="1" dirty="0">
+                <a:solidFill>
+                  <a:srgbClr val="53565A"/>
+                </a:solidFill>
+                <a:latin typeface="Calibri" pitchFamily="34" charset="0"/>
+                <a:ea typeface="Calibri" pitchFamily="34" charset="-122"/>
+                <a:cs typeface="Calibri" pitchFamily="34" charset="-120"/>
+              </a:rPr>
+              <a:t>Single select. </a:t>
+            </a:r>
+            <a:pPr algn="l" indent="0" marL="0">
+              <a:lnSpc>
+                <a:spcPct val="115000"/>
+              </a:lnSpc>
+              <a:buNone/>
+            </a:pPr>
+            <a:r>
+              <a:rPr lang="en-US" sz="850" dirty="0">
+                <a:solidFill>
+                  <a:srgbClr val="53565A"/>
+                </a:solidFill>
+                <a:latin typeface="Calibri" pitchFamily="34" charset="0"/>
+                <a:ea typeface="Calibri" pitchFamily="34" charset="-122"/>
+                <a:cs typeface="Calibri" pitchFamily="34" charset="-120"/>
+              </a:rPr>
+              <a:t>The % in each category label is the full tier-level figure; region segments are rounded to the nearest whole percent and may not sum exactly due to rounding. Australia (n=4 Top 100 / n=3 Large) and Singapore (n=2 / n=2) are thin samples shown directionally.</a:t>
+            </a:r>
+            <a:endParaRPr lang="en-US" sz="850" dirty="0"/>
+          </a:p>
+        </p:txBody>
+      </p:sp>
+      <p:sp>
+        <p:nvSpPr>
+          <p:cNvPr id="10" name="Text 7"/>
+          <p:cNvSpPr txBox="1"/>
+          <p:nvPr/>
+        </p:nvSpPr>
+        <p:spPr>
+          <a:xfrm>
+            <a:off x="502006" y="5861304"/>
+            <a:ext cx="11188598" cy="420624"/>
+          </a:xfrm>
+          <a:prstGeom prst="rect">
+            <a:avLst/>
+          </a:prstGeom>
+          <a:noFill/>
+          <a:ln/>
+        </p:spPr>
+        <p:txBody>
+          <a:bodyPr wrap="square" lIns="0" tIns="0" rIns="0" bIns="0" rtlCol="0" anchor="t"/>
+          <a:lstStyle/>
+          <a:p>
+            <a:pPr algn="l" indent="0" marL="0">
+              <a:lnSpc>
+                <a:spcPct val="110000"/>
+              </a:lnSpc>
+              <a:buNone/>
+            </a:pPr>
+            <a:r>
+              <a:rPr lang="en-US" sz="850" b="1" dirty="0">
+                <a:solidFill>
+                  <a:srgbClr val="53565A"/>
+                </a:solidFill>
+                <a:latin typeface="Calibri" pitchFamily="34" charset="0"/>
+                <a:ea typeface="Calibri" pitchFamily="34" charset="-122"/>
+                <a:cs typeface="Calibri" pitchFamily="34" charset="-120"/>
+              </a:rPr>
+              <a:t>Response options as fielded: </a:t>
+            </a:r>
+            <a:pPr algn="l" indent="0" marL="0">
+              <a:lnSpc>
+                <a:spcPct val="110000"/>
+              </a:lnSpc>
+              <a:buNone/>
+            </a:pPr>
+            <a:r>
+              <a:rPr lang="en-US" sz="800" i="1" dirty="0">
+                <a:solidFill>
+                  <a:srgbClr val="53565A"/>
+                </a:solidFill>
+                <a:latin typeface="Calibri" pitchFamily="34" charset="0"/>
+                <a:ea typeface="Calibri" pitchFamily="34" charset="-122"/>
+                <a:cs typeface="Calibri" pitchFamily="34" charset="-120"/>
+              </a:rPr>
+              <a:t>“Adding capacity through hiring full-time employees and workforce expansion”  ·  “Adding capacity through outsourcing arrangements (e.g., contractors)”  ·  “Automating workflows and minimizing manual activities”  ·  “Augmenting existing capacity with AI-enabled tools”  ·  “Redesigning operation processes and playbooks across the lifecycle”  ·  “Pursuing a combination of the above approaches”</a:t>
+            </a:r>
+            <a:endParaRPr lang="en-US" sz="850" dirty="0"/>
+          </a:p>
+        </p:txBody>
+      </p:sp>
+    </p:spTree>
+  </p:cSld>
+  <p:clrMapOvr>
+    <a:masterClrMapping/>
+  </p:clrMapOvr>
+</p:sld>
+</file>
+
+<file path=ppt/slides/slide32.xml><?xml version="1.0" encoding="utf-8"?>
+<p:sld xmlns:a="http://schemas.openxmlformats.org/drawingml/2006/main" xmlns:r="http://schemas.openxmlformats.org/officeDocument/2006/relationships" xmlns:p="http://schemas.openxmlformats.org/presentationml/2006/main">
+  <p:cSld name="Slide 32">
     <p:bg>
       <p:bgPr>
         <a:solidFill>
@@ -24476,7 +29102,7 @@
                 <a:ea typeface="Calibri" pitchFamily="34" charset="-122"/>
                 <a:cs typeface="Calibri" pitchFamily="34" charset="-120"/>
               </a:rPr>
-              <a:t>6. Looking Ahead Three Years</a:t>
+              <a:t>5. Regulatory &amp; Market Change</a:t>
             </a:r>
             <a:endParaRPr lang="en-US" sz="3600" dirty="0"/>
           </a:p>
@@ -24485,6 +29111,48 @@
       <p:sp>
         <p:nvSpPr>
           <p:cNvPr id="3" name="Text 1"/>
+          <p:cNvSpPr txBox="1"/>
+          <p:nvPr/>
+        </p:nvSpPr>
+        <p:spPr>
+          <a:xfrm>
+            <a:off x="502920" y="3423514"/>
+            <a:ext cx="10415016" cy="1563624"/>
+          </a:xfrm>
+          <a:prstGeom prst="rect">
+            <a:avLst/>
+          </a:prstGeom>
+          <a:noFill/>
+          <a:ln/>
+        </p:spPr>
+        <p:txBody>
+          <a:bodyPr wrap="square" lIns="0" tIns="0" rIns="0" bIns="0" rtlCol="0" anchor="t"/>
+          <a:lstStyle/>
+          <a:p>
+            <a:pPr algn="l" indent="0" marL="0">
+              <a:lnSpc>
+                <a:spcPct val="110000"/>
+              </a:lnSpc>
+              <a:buNone/>
+            </a:pPr>
+            <a:r>
+              <a:rPr lang="en-US" sz="1600" dirty="0">
+                <a:solidFill>
+                  <a:srgbClr val="FFFFFF"/>
+                </a:solidFill>
+                <a:latin typeface="Calibri" pitchFamily="34" charset="0"/>
+                <a:ea typeface="Calibri" pitchFamily="34" charset="-122"/>
+                <a:cs typeface="Calibri" pitchFamily="34" charset="-120"/>
+              </a:rPr>
+              <a:t>Where fraud investment is really going, and the disruption leaders see coming next.</a:t>
+            </a:r>
+            <a:endParaRPr lang="en-US" sz="1600" dirty="0"/>
+          </a:p>
+        </p:txBody>
+      </p:sp>
+      <p:sp>
+        <p:nvSpPr>
+          <p:cNvPr id="4" name="Text 2"/>
           <p:cNvSpPr txBox="1"/>
           <p:nvPr/>
         </p:nvSpPr>
@@ -24515,7 +29183,7 @@
                 <a:ea typeface="Calibri" pitchFamily="34" charset="-122"/>
                 <a:cs typeface="Calibri" pitchFamily="34" charset="-120"/>
               </a:rPr>
-              <a:t>30</a:t>
+              <a:t>31</a:t>
             </a:r>
             <a:endParaRPr lang="en-US" sz="900" dirty="0"/>
           </a:p>
@@ -24529,9 +29197,9 @@
 </p:sld>
 </file>
 
-<file path=ppt/slides/slide32.xml><?xml version="1.0" encoding="utf-8"?>
+<file path=ppt/slides/slide33.xml><?xml version="1.0" encoding="utf-8"?>
 <p:sld xmlns:a="http://schemas.openxmlformats.org/drawingml/2006/main" xmlns:r="http://schemas.openxmlformats.org/officeDocument/2006/relationships" xmlns:p="http://schemas.openxmlformats.org/presentationml/2006/main">
-  <p:cSld name="Slide 32">
+  <p:cSld name="Slide 33">
     <p:bg>
       <p:bgPr>
         <a:solidFill>
@@ -24586,7 +29254,7 @@
                 <a:ea typeface="Calibri" pitchFamily="34" charset="-122"/>
                 <a:cs typeface="Calibri" pitchFamily="34" charset="-120"/>
               </a:rPr>
-              <a:t>What Leaders Say, Unprompted</a:t>
+              <a:t>Fraud Investment Relative to Regulatory Requirements</a:t>
             </a:r>
             <a:endParaRPr lang="en-US" sz="1900" dirty="0"/>
           </a:p>
@@ -24628,7 +29296,7 @@
                 <a:ea typeface="Calibri" pitchFamily="34" charset="-122"/>
                 <a:cs typeface="Calibri" pitchFamily="34" charset="-120"/>
               </a:rPr>
-              <a:t>Left to answer in their own words, leaders converge on the same trend.</a:t>
+              <a:t>Most fraud spending today is about fixing past problems, not getting ahead of new ones.</a:t>
             </a:r>
             <a:endParaRPr lang="en-US" sz="1350" dirty="0"/>
           </a:p>
@@ -24693,7 +29361,7 @@
                 <a:ea typeface="IBM Plex Mono" pitchFamily="34" charset="-122"/>
                 <a:cs typeface="IBM Plex Mono" pitchFamily="34" charset="-120"/>
               </a:rPr>
-              <a:t>Q12  </a:t>
+              <a:t>Q10  </a:t>
             </a:r>
             <a:pPr algn="l" indent="0" marL="0">
               <a:lnSpc>
@@ -24710,7 +29378,7 @@
                 <a:ea typeface="Calibri" pitchFamily="34" charset="-122"/>
                 <a:cs typeface="Calibri" pitchFamily="34" charset="-120"/>
               </a:rPr>
-              <a:t>“Looking ahead three years, what development do you believe will have the greatest impact on fraud risk management, and why? (open-ended)”</a:t>
+              <a:t>“Which statement best reflects how your organization is allocating fraud-related investment in response to regulatory and compliance requirements?”</a:t>
             </a:r>
             <a:endParaRPr lang="en-US" sz="1000" dirty="0"/>
           </a:p>
@@ -24749,7 +29417,1053 @@
                 <a:ea typeface="Calibri" pitchFamily="34" charset="-122"/>
                 <a:cs typeface="Calibri" pitchFamily="34" charset="-120"/>
               </a:rPr>
-              <a:t>31</a:t>
+              <a:t>32</a:t>
+            </a:r>
+            <a:endParaRPr lang="en-US" sz="900" dirty="0"/>
+          </a:p>
+        </p:txBody>
+      </p:sp>
+      <p:graphicFrame>
+        <p:nvGraphicFramePr>
+          <p:cNvPr id="7" name="Chart 0" descr=""/>
+          <p:cNvGraphicFramePr/>
+          <p:nvPr/>
+        </p:nvGraphicFramePr>
+        <p:xfrm>
+          <a:off x="502006" y="2011680"/>
+          <a:ext cx="11188598" cy="3063240"/>
+        </p:xfrm>
+        <a:graphic xmlns:a="http://schemas.openxmlformats.org/drawingml/2006/main">
+          <a:graphicData uri="http://schemas.openxmlformats.org/drawingml/2006/chart">
+            <c:chart xmlns:c="http://schemas.openxmlformats.org/drawingml/2006/chart" r:id="rId1"/>
+          </a:graphicData>
+        </a:graphic>
+      </p:graphicFrame>
+      <p:sp>
+        <p:nvSpPr>
+          <p:cNvPr id="8" name="Shape 5"/>
+          <p:cNvSpPr/>
+          <p:nvPr/>
+        </p:nvSpPr>
+        <p:spPr>
+          <a:xfrm>
+            <a:off x="502006" y="5202936"/>
+            <a:ext cx="11188598" cy="0"/>
+          </a:xfrm>
+          <a:prstGeom prst="line">
+            <a:avLst/>
+          </a:prstGeom>
+          <a:noFill/>
+          <a:ln w="9525">
+            <a:solidFill>
+              <a:srgbClr val="D0D0CE"/>
+            </a:solidFill>
+            <a:prstDash val="solid"/>
+          </a:ln>
+        </p:spPr>
+      </p:sp>
+      <p:sp>
+        <p:nvSpPr>
+          <p:cNvPr id="9" name="Text 6"/>
+          <p:cNvSpPr txBox="1"/>
+          <p:nvPr/>
+        </p:nvSpPr>
+        <p:spPr>
+          <a:xfrm>
+            <a:off x="502006" y="5276088"/>
+            <a:ext cx="11188598" cy="886968"/>
+          </a:xfrm>
+          <a:prstGeom prst="rect">
+            <a:avLst/>
+          </a:prstGeom>
+          <a:noFill/>
+          <a:ln/>
+        </p:spPr>
+        <p:txBody>
+          <a:bodyPr wrap="square" lIns="0" tIns="0" rIns="0" bIns="0" rtlCol="0" anchor="t"/>
+          <a:lstStyle/>
+          <a:p>
+            <a:pPr algn="l" indent="0" marL="0">
+              <a:lnSpc>
+                <a:spcPct val="118000"/>
+              </a:lnSpc>
+              <a:buNone/>
+            </a:pPr>
+            <a:r>
+              <a:rPr lang="en-US" sz="850" b="1" dirty="0">
+                <a:solidFill>
+                  <a:srgbClr val="53565A"/>
+                </a:solidFill>
+                <a:latin typeface="Calibri" pitchFamily="34" charset="0"/>
+                <a:ea typeface="Calibri" pitchFamily="34" charset="-122"/>
+                <a:cs typeface="Calibri" pitchFamily="34" charset="-120"/>
+              </a:rPr>
+              <a:t>Single select.  </a:t>
+            </a:r>
+            <a:pPr algn="l" indent="0" marL="0">
+              <a:lnSpc>
+                <a:spcPct val="118000"/>
+              </a:lnSpc>
+              <a:buNone/>
+            </a:pPr>
+            <a:r>
+              <a:rPr lang="en-US" sz="850" b="1" dirty="0">
+                <a:solidFill>
+                  <a:srgbClr val="53565A"/>
+                </a:solidFill>
+                <a:latin typeface="Calibri" pitchFamily="34" charset="0"/>
+                <a:ea typeface="Calibri" pitchFamily="34" charset="-122"/>
+                <a:cs typeface="Calibri" pitchFamily="34" charset="-120"/>
+              </a:rPr>
+              <a:t>Response options as fielded: </a:t>
+            </a:r>
+            <a:pPr algn="l" indent="0" marL="0">
+              <a:lnSpc>
+                <a:spcPct val="118000"/>
+              </a:lnSpc>
+              <a:buNone/>
+            </a:pPr>
+            <a:r>
+              <a:rPr lang="en-US" sz="850" i="1" dirty="0">
+                <a:solidFill>
+                  <a:srgbClr val="53565A"/>
+                </a:solidFill>
+                <a:latin typeface="Calibri" pitchFamily="34" charset="0"/>
+                <a:ea typeface="Calibri" pitchFamily="34" charset="-122"/>
+                <a:cs typeface="Calibri" pitchFamily="34" charset="-120"/>
+              </a:rPr>
+              <a:t>“Primarily investing to meet upcoming and draft regulatory requirements”</a:t>
+            </a:r>
+            <a:pPr algn="l" indent="0" marL="0">
+              <a:lnSpc>
+                <a:spcPct val="118000"/>
+              </a:lnSpc>
+              <a:buNone/>
+            </a:pPr>
+            <a:r>
+              <a:rPr lang="en-US" sz="850" dirty="0">
+                <a:solidFill>
+                  <a:srgbClr val="D0D0CE"/>
+                </a:solidFill>
+                <a:latin typeface="Calibri" pitchFamily="34" charset="0"/>
+                <a:ea typeface="Calibri" pitchFamily="34" charset="-122"/>
+                <a:cs typeface="Calibri" pitchFamily="34" charset="-120"/>
+              </a:rPr>
+              <a:t>  ·  </a:t>
+            </a:r>
+            <a:pPr algn="l" indent="0" marL="0">
+              <a:lnSpc>
+                <a:spcPct val="118000"/>
+              </a:lnSpc>
+              <a:buNone/>
+            </a:pPr>
+            <a:r>
+              <a:rPr lang="en-US" sz="850" i="1" dirty="0">
+                <a:solidFill>
+                  <a:srgbClr val="53565A"/>
+                </a:solidFill>
+                <a:latin typeface="Calibri" pitchFamily="34" charset="0"/>
+                <a:ea typeface="Calibri" pitchFamily="34" charset="-122"/>
+                <a:cs typeface="Calibri" pitchFamily="34" charset="-120"/>
+              </a:rPr>
+              <a:t>“Primarily investing to remediate existing compliance and control gaps”</a:t>
+            </a:r>
+            <a:pPr algn="l" indent="0" marL="0">
+              <a:lnSpc>
+                <a:spcPct val="118000"/>
+              </a:lnSpc>
+              <a:buNone/>
+            </a:pPr>
+            <a:r>
+              <a:rPr lang="en-US" sz="850" dirty="0">
+                <a:solidFill>
+                  <a:srgbClr val="D0D0CE"/>
+                </a:solidFill>
+                <a:latin typeface="Calibri" pitchFamily="34" charset="0"/>
+                <a:ea typeface="Calibri" pitchFamily="34" charset="-122"/>
+                <a:cs typeface="Calibri" pitchFamily="34" charset="-120"/>
+              </a:rPr>
+              <a:t>  ·  </a:t>
+            </a:r>
+            <a:pPr algn="l" indent="0" marL="0">
+              <a:lnSpc>
+                <a:spcPct val="118000"/>
+              </a:lnSpc>
+              <a:buNone/>
+            </a:pPr>
+            <a:r>
+              <a:rPr lang="en-US" sz="850" i="1" dirty="0">
+                <a:solidFill>
+                  <a:srgbClr val="53565A"/>
+                </a:solidFill>
+                <a:latin typeface="Calibri" pitchFamily="34" charset="0"/>
+                <a:ea typeface="Calibri" pitchFamily="34" charset="-122"/>
+                <a:cs typeface="Calibri" pitchFamily="34" charset="-120"/>
+              </a:rPr>
+              <a:t>“Regulatory requirements are not a primary driver of fraud-related investment”</a:t>
+            </a:r>
+            <a:endParaRPr lang="en-US" sz="850" dirty="0"/>
+          </a:p>
+        </p:txBody>
+      </p:sp>
+    </p:spTree>
+  </p:cSld>
+  <p:clrMapOvr>
+    <a:masterClrMapping/>
+  </p:clrMapOvr>
+</p:sld>
+</file>
+
+<file path=ppt/slides/slide34.xml><?xml version="1.0" encoding="utf-8"?>
+<p:sld xmlns:a="http://schemas.openxmlformats.org/drawingml/2006/main" xmlns:r="http://schemas.openxmlformats.org/officeDocument/2006/relationships" xmlns:p="http://schemas.openxmlformats.org/presentationml/2006/main">
+  <p:cSld name="Slide 34">
+    <p:bg>
+      <p:bgPr>
+        <a:solidFill>
+          <a:srgbClr val="FFFFFF"/>
+        </a:solidFill>
+      </p:bgPr>
+    </p:bg>
+    <p:spTree>
+      <p:nvGrpSpPr>
+        <p:cNvPr id="1" name=""/>
+        <p:cNvGrpSpPr/>
+        <p:nvPr/>
+      </p:nvGrpSpPr>
+      <p:grpSpPr>
+        <a:xfrm>
+          <a:off x="0" y="0"/>
+          <a:ext cx="0" cy="0"/>
+          <a:chOff x="0" y="0"/>
+          <a:chExt cx="0" cy="0"/>
+        </a:xfrm>
+      </p:grpSpPr>
+      <p:sp>
+        <p:nvSpPr>
+          <p:cNvPr id="2" name="Text 0"/>
+          <p:cNvSpPr txBox="1"/>
+          <p:nvPr/>
+        </p:nvSpPr>
+        <p:spPr>
+          <a:xfrm>
+            <a:off x="502006" y="256032"/>
+            <a:ext cx="11188598" cy="310896"/>
+          </a:xfrm>
+          <a:prstGeom prst="rect">
+            <a:avLst/>
+          </a:prstGeom>
+          <a:noFill/>
+          <a:ln/>
+        </p:spPr>
+        <p:txBody>
+          <a:bodyPr wrap="square" lIns="0" tIns="0" rIns="0" bIns="0" rtlCol="0" anchor="t"/>
+          <a:lstStyle/>
+          <a:p>
+            <a:pPr algn="l" indent="0" marL="0">
+              <a:buNone/>
+            </a:pPr>
+            <a:r>
+              <a:rPr lang="en-US" sz="1900" b="1" dirty="0">
+                <a:solidFill>
+                  <a:srgbClr val="000000"/>
+                </a:solidFill>
+                <a:latin typeface="Calibri" pitchFamily="34" charset="0"/>
+                <a:ea typeface="Calibri" pitchFamily="34" charset="-122"/>
+                <a:cs typeface="Calibri" pitchFamily="34" charset="-120"/>
+              </a:rPr>
+              <a:t>Upcoming Regulatory / Market Change With Greatest Expected Impact</a:t>
+            </a:r>
+            <a:endParaRPr lang="en-US" sz="1900" dirty="0"/>
+          </a:p>
+        </p:txBody>
+      </p:sp>
+      <p:sp>
+        <p:nvSpPr>
+          <p:cNvPr id="3" name="Text 1"/>
+          <p:cNvSpPr txBox="1"/>
+          <p:nvPr/>
+        </p:nvSpPr>
+        <p:spPr>
+          <a:xfrm>
+            <a:off x="502006" y="585216"/>
+            <a:ext cx="11188598" cy="713232"/>
+          </a:xfrm>
+          <a:prstGeom prst="rect">
+            <a:avLst/>
+          </a:prstGeom>
+          <a:noFill/>
+          <a:ln/>
+        </p:spPr>
+        <p:txBody>
+          <a:bodyPr wrap="square" lIns="0" tIns="0" rIns="0" bIns="0" rtlCol="0" anchor="t"/>
+          <a:lstStyle/>
+          <a:p>
+            <a:pPr algn="l" indent="0" marL="0">
+              <a:lnSpc>
+                <a:spcPct val="105000"/>
+              </a:lnSpc>
+              <a:buNone/>
+            </a:pPr>
+            <a:r>
+              <a:rPr lang="en-US" sz="1350" b="1" dirty="0">
+                <a:solidFill>
+                  <a:srgbClr val="046A38"/>
+                </a:solidFill>
+                <a:latin typeface="Calibri" pitchFamily="34" charset="0"/>
+                <a:ea typeface="Calibri" pitchFamily="34" charset="-122"/>
+                <a:cs typeface="Calibri" pitchFamily="34" charset="-120"/>
+              </a:rPr>
+              <a:t>Identity and authentication tops a close three-way race for the next big disruption.</a:t>
+            </a:r>
+            <a:endParaRPr lang="en-US" sz="1350" dirty="0"/>
+          </a:p>
+        </p:txBody>
+      </p:sp>
+      <p:sp>
+        <p:nvSpPr>
+          <p:cNvPr id="4" name="Shape 2"/>
+          <p:cNvSpPr/>
+          <p:nvPr/>
+        </p:nvSpPr>
+        <p:spPr>
+          <a:xfrm>
+            <a:off x="502006" y="1335024"/>
+            <a:ext cx="0" cy="512064"/>
+          </a:xfrm>
+          <a:prstGeom prst="line">
+            <a:avLst/>
+          </a:prstGeom>
+          <a:noFill/>
+          <a:ln w="25400">
+            <a:solidFill>
+              <a:srgbClr val="D0D0CE"/>
+            </a:solidFill>
+            <a:prstDash val="solid"/>
+          </a:ln>
+        </p:spPr>
+      </p:sp>
+      <p:sp>
+        <p:nvSpPr>
+          <p:cNvPr id="5" name="Text 3"/>
+          <p:cNvSpPr txBox="1"/>
+          <p:nvPr/>
+        </p:nvSpPr>
+        <p:spPr>
+          <a:xfrm>
+            <a:off x="648310" y="1335024"/>
+            <a:ext cx="11042294" cy="512064"/>
+          </a:xfrm>
+          <a:prstGeom prst="rect">
+            <a:avLst/>
+          </a:prstGeom>
+          <a:noFill/>
+          <a:ln/>
+        </p:spPr>
+        <p:txBody>
+          <a:bodyPr wrap="square" lIns="0" tIns="0" rIns="0" bIns="0" rtlCol="0" anchor="t"/>
+          <a:lstStyle/>
+          <a:p>
+            <a:pPr algn="l" indent="0" marL="0">
+              <a:lnSpc>
+                <a:spcPct val="106000"/>
+              </a:lnSpc>
+              <a:buNone/>
+            </a:pPr>
+            <a:r>
+              <a:rPr lang="en-US" sz="900" b="1" dirty="0">
+                <a:solidFill>
+                  <a:srgbClr val="046A38"/>
+                </a:solidFill>
+                <a:latin typeface="IBM Plex Mono" pitchFamily="34" charset="0"/>
+                <a:ea typeface="IBM Plex Mono" pitchFamily="34" charset="-122"/>
+                <a:cs typeface="IBM Plex Mono" pitchFamily="34" charset="-120"/>
+              </a:rPr>
+              <a:t>Q11  </a:t>
+            </a:r>
+            <a:pPr algn="l" indent="0" marL="0">
+              <a:lnSpc>
+                <a:spcPct val="106000"/>
+              </a:lnSpc>
+              <a:buNone/>
+            </a:pPr>
+            <a:r>
+              <a:rPr lang="en-US" sz="1000" i="1" dirty="0">
+                <a:solidFill>
+                  <a:srgbClr val="575757"/>
+                </a:solidFill>
+                <a:latin typeface="Calibri" pitchFamily="34" charset="0"/>
+                <a:ea typeface="Calibri" pitchFamily="34" charset="-122"/>
+                <a:cs typeface="Calibri" pitchFamily="34" charset="-120"/>
+              </a:rPr>
+              <a:t>“Which upcoming regulatory or market changes is expected to have the greatest impact on your fraud program?”</a:t>
+            </a:r>
+            <a:endParaRPr lang="en-US" sz="1000" dirty="0"/>
+          </a:p>
+        </p:txBody>
+      </p:sp>
+      <p:sp>
+        <p:nvSpPr>
+          <p:cNvPr id="6" name="Text 4"/>
+          <p:cNvSpPr txBox="1"/>
+          <p:nvPr/>
+        </p:nvSpPr>
+        <p:spPr>
+          <a:xfrm>
+            <a:off x="11346790" y="6537960"/>
+            <a:ext cx="343814" cy="182880"/>
+          </a:xfrm>
+          <a:prstGeom prst="rect">
+            <a:avLst/>
+          </a:prstGeom>
+          <a:noFill/>
+          <a:ln/>
+        </p:spPr>
+        <p:txBody>
+          <a:bodyPr wrap="square" rtlCol="0" anchor="ctr"/>
+          <a:lstStyle/>
+          <a:p>
+            <a:pPr algn="r" indent="0" marL="0">
+              <a:buNone/>
+            </a:pPr>
+            <a:r>
+              <a:rPr lang="en-US" sz="900" dirty="0">
+                <a:solidFill>
+                  <a:srgbClr val="53565A"/>
+                </a:solidFill>
+                <a:latin typeface="Calibri" pitchFamily="34" charset="0"/>
+                <a:ea typeface="Calibri" pitchFamily="34" charset="-122"/>
+                <a:cs typeface="Calibri" pitchFamily="34" charset="-120"/>
+              </a:rPr>
+              <a:t>33</a:t>
+            </a:r>
+            <a:endParaRPr lang="en-US" sz="900" dirty="0"/>
+          </a:p>
+        </p:txBody>
+      </p:sp>
+      <p:graphicFrame>
+        <p:nvGraphicFramePr>
+          <p:cNvPr id="7" name="Chart 0" descr=""/>
+          <p:cNvGraphicFramePr/>
+          <p:nvPr/>
+        </p:nvGraphicFramePr>
+        <p:xfrm>
+          <a:off x="502006" y="2011680"/>
+          <a:ext cx="11188598" cy="3063240"/>
+        </p:xfrm>
+        <a:graphic xmlns:a="http://schemas.openxmlformats.org/drawingml/2006/main">
+          <a:graphicData uri="http://schemas.openxmlformats.org/drawingml/2006/chart">
+            <c:chart xmlns:c="http://schemas.openxmlformats.org/drawingml/2006/chart" r:id="rId1"/>
+          </a:graphicData>
+        </a:graphic>
+      </p:graphicFrame>
+      <p:sp>
+        <p:nvSpPr>
+          <p:cNvPr id="8" name="Shape 5"/>
+          <p:cNvSpPr/>
+          <p:nvPr/>
+        </p:nvSpPr>
+        <p:spPr>
+          <a:xfrm>
+            <a:off x="502006" y="5202936"/>
+            <a:ext cx="11188598" cy="0"/>
+          </a:xfrm>
+          <a:prstGeom prst="line">
+            <a:avLst/>
+          </a:prstGeom>
+          <a:noFill/>
+          <a:ln w="9525">
+            <a:solidFill>
+              <a:srgbClr val="D0D0CE"/>
+            </a:solidFill>
+            <a:prstDash val="solid"/>
+          </a:ln>
+        </p:spPr>
+      </p:sp>
+      <p:sp>
+        <p:nvSpPr>
+          <p:cNvPr id="9" name="Text 6"/>
+          <p:cNvSpPr txBox="1"/>
+          <p:nvPr/>
+        </p:nvSpPr>
+        <p:spPr>
+          <a:xfrm>
+            <a:off x="502006" y="5276088"/>
+            <a:ext cx="11188598" cy="886968"/>
+          </a:xfrm>
+          <a:prstGeom prst="rect">
+            <a:avLst/>
+          </a:prstGeom>
+          <a:noFill/>
+          <a:ln/>
+        </p:spPr>
+        <p:txBody>
+          <a:bodyPr wrap="square" lIns="0" tIns="0" rIns="0" bIns="0" rtlCol="0" anchor="t"/>
+          <a:lstStyle/>
+          <a:p>
+            <a:pPr algn="l" indent="0" marL="0">
+              <a:lnSpc>
+                <a:spcPct val="118000"/>
+              </a:lnSpc>
+              <a:buNone/>
+            </a:pPr>
+            <a:r>
+              <a:rPr lang="en-US" sz="850" b="1" dirty="0">
+                <a:solidFill>
+                  <a:srgbClr val="53565A"/>
+                </a:solidFill>
+                <a:latin typeface="Calibri" pitchFamily="34" charset="0"/>
+                <a:ea typeface="Calibri" pitchFamily="34" charset="-122"/>
+                <a:cs typeface="Calibri" pitchFamily="34" charset="-120"/>
+              </a:rPr>
+              <a:t>Ranked top 3 — shown as % of respondents who placed the option anywhere in their top 3 (not mutually exclusive; bars don't sum to 100%).  </a:t>
+            </a:r>
+            <a:pPr algn="l" indent="0" marL="0">
+              <a:lnSpc>
+                <a:spcPct val="118000"/>
+              </a:lnSpc>
+              <a:buNone/>
+            </a:pPr>
+            <a:r>
+              <a:rPr lang="en-US" sz="850" b="1" dirty="0">
+                <a:solidFill>
+                  <a:srgbClr val="53565A"/>
+                </a:solidFill>
+                <a:latin typeface="Calibri" pitchFamily="34" charset="0"/>
+                <a:ea typeface="Calibri" pitchFamily="34" charset="-122"/>
+                <a:cs typeface="Calibri" pitchFamily="34" charset="-120"/>
+              </a:rPr>
+              <a:t>Response options as fielded: </a:t>
+            </a:r>
+            <a:pPr algn="l" indent="0" marL="0">
+              <a:lnSpc>
+                <a:spcPct val="118000"/>
+              </a:lnSpc>
+              <a:buNone/>
+            </a:pPr>
+            <a:r>
+              <a:rPr lang="en-US" sz="850" i="1" dirty="0">
+                <a:solidFill>
+                  <a:srgbClr val="53565A"/>
+                </a:solidFill>
+                <a:latin typeface="Calibri" pitchFamily="34" charset="0"/>
+                <a:ea typeface="Calibri" pitchFamily="34" charset="-122"/>
+                <a:cs typeface="Calibri" pitchFamily="34" charset="-120"/>
+              </a:rPr>
+              <a:t>“Payment innovation and adoption (e.g., real-time payments, stable coins, agentic payments)”</a:t>
+            </a:r>
+            <a:pPr algn="l" indent="0" marL="0">
+              <a:lnSpc>
+                <a:spcPct val="118000"/>
+              </a:lnSpc>
+              <a:buNone/>
+            </a:pPr>
+            <a:r>
+              <a:rPr lang="en-US" sz="850" dirty="0">
+                <a:solidFill>
+                  <a:srgbClr val="D0D0CE"/>
+                </a:solidFill>
+                <a:latin typeface="Calibri" pitchFamily="34" charset="0"/>
+                <a:ea typeface="Calibri" pitchFamily="34" charset="-122"/>
+                <a:cs typeface="Calibri" pitchFamily="34" charset="-120"/>
+              </a:rPr>
+              <a:t>  ·  </a:t>
+            </a:r>
+            <a:pPr algn="l" indent="0" marL="0">
+              <a:lnSpc>
+                <a:spcPct val="118000"/>
+              </a:lnSpc>
+              <a:buNone/>
+            </a:pPr>
+            <a:r>
+              <a:rPr lang="en-US" sz="850" i="1" dirty="0">
+                <a:solidFill>
+                  <a:srgbClr val="53565A"/>
+                </a:solidFill>
+                <a:latin typeface="Calibri" pitchFamily="34" charset="0"/>
+                <a:ea typeface="Calibri" pitchFamily="34" charset="-122"/>
+                <a:cs typeface="Calibri" pitchFamily="34" charset="-120"/>
+              </a:rPr>
+              <a:t>“Liability and reimbursement changes”</a:t>
+            </a:r>
+            <a:pPr algn="l" indent="0" marL="0">
+              <a:lnSpc>
+                <a:spcPct val="118000"/>
+              </a:lnSpc>
+              <a:buNone/>
+            </a:pPr>
+            <a:r>
+              <a:rPr lang="en-US" sz="850" dirty="0">
+                <a:solidFill>
+                  <a:srgbClr val="D0D0CE"/>
+                </a:solidFill>
+                <a:latin typeface="Calibri" pitchFamily="34" charset="0"/>
+                <a:ea typeface="Calibri" pitchFamily="34" charset="-122"/>
+                <a:cs typeface="Calibri" pitchFamily="34" charset="-120"/>
+              </a:rPr>
+              <a:t>  ·  </a:t>
+            </a:r>
+            <a:pPr algn="l" indent="0" marL="0">
+              <a:lnSpc>
+                <a:spcPct val="118000"/>
+              </a:lnSpc>
+              <a:buNone/>
+            </a:pPr>
+            <a:r>
+              <a:rPr lang="en-US" sz="850" i="1" dirty="0">
+                <a:solidFill>
+                  <a:srgbClr val="53565A"/>
+                </a:solidFill>
+                <a:latin typeface="Calibri" pitchFamily="34" charset="0"/>
+                <a:ea typeface="Calibri" pitchFamily="34" charset="-122"/>
+                <a:cs typeface="Calibri" pitchFamily="34" charset="-120"/>
+              </a:rPr>
+              <a:t>“Open Banking / Consumer-driven banking initiatives”</a:t>
+            </a:r>
+            <a:pPr algn="l" indent="0" marL="0">
+              <a:lnSpc>
+                <a:spcPct val="118000"/>
+              </a:lnSpc>
+              <a:buNone/>
+            </a:pPr>
+            <a:r>
+              <a:rPr lang="en-US" sz="850" dirty="0">
+                <a:solidFill>
+                  <a:srgbClr val="D0D0CE"/>
+                </a:solidFill>
+                <a:latin typeface="Calibri" pitchFamily="34" charset="0"/>
+                <a:ea typeface="Calibri" pitchFamily="34" charset="-122"/>
+                <a:cs typeface="Calibri" pitchFamily="34" charset="-120"/>
+              </a:rPr>
+              <a:t>  ·  </a:t>
+            </a:r>
+            <a:pPr algn="l" indent="0" marL="0">
+              <a:lnSpc>
+                <a:spcPct val="118000"/>
+              </a:lnSpc>
+              <a:buNone/>
+            </a:pPr>
+            <a:r>
+              <a:rPr lang="en-US" sz="850" i="1" dirty="0">
+                <a:solidFill>
+                  <a:srgbClr val="53565A"/>
+                </a:solidFill>
+                <a:latin typeface="Calibri" pitchFamily="34" charset="0"/>
+                <a:ea typeface="Calibri" pitchFamily="34" charset="-122"/>
+                <a:cs typeface="Calibri" pitchFamily="34" charset="-120"/>
+              </a:rPr>
+              <a:t>“AML related modernization initiatives”</a:t>
+            </a:r>
+            <a:pPr algn="l" indent="0" marL="0">
+              <a:lnSpc>
+                <a:spcPct val="118000"/>
+              </a:lnSpc>
+              <a:buNone/>
+            </a:pPr>
+            <a:r>
+              <a:rPr lang="en-US" sz="850" dirty="0">
+                <a:solidFill>
+                  <a:srgbClr val="D0D0CE"/>
+                </a:solidFill>
+                <a:latin typeface="Calibri" pitchFamily="34" charset="0"/>
+                <a:ea typeface="Calibri" pitchFamily="34" charset="-122"/>
+                <a:cs typeface="Calibri" pitchFamily="34" charset="-120"/>
+              </a:rPr>
+              <a:t>  ·  </a:t>
+            </a:r>
+            <a:pPr algn="l" indent="0" marL="0">
+              <a:lnSpc>
+                <a:spcPct val="118000"/>
+              </a:lnSpc>
+              <a:buNone/>
+            </a:pPr>
+            <a:r>
+              <a:rPr lang="en-US" sz="850" i="1" dirty="0">
+                <a:solidFill>
+                  <a:srgbClr val="53565A"/>
+                </a:solidFill>
+                <a:latin typeface="Calibri" pitchFamily="34" charset="0"/>
+                <a:ea typeface="Calibri" pitchFamily="34" charset="-122"/>
+                <a:cs typeface="Calibri" pitchFamily="34" charset="-120"/>
+              </a:rPr>
+              <a:t>“Privacy, data-sharing requirements, and AI governance requirements”</a:t>
+            </a:r>
+            <a:pPr algn="l" indent="0" marL="0">
+              <a:lnSpc>
+                <a:spcPct val="118000"/>
+              </a:lnSpc>
+              <a:buNone/>
+            </a:pPr>
+            <a:r>
+              <a:rPr lang="en-US" sz="850" dirty="0">
+                <a:solidFill>
+                  <a:srgbClr val="D0D0CE"/>
+                </a:solidFill>
+                <a:latin typeface="Calibri" pitchFamily="34" charset="0"/>
+                <a:ea typeface="Calibri" pitchFamily="34" charset="-122"/>
+                <a:cs typeface="Calibri" pitchFamily="34" charset="-120"/>
+              </a:rPr>
+              <a:t>  ·  </a:t>
+            </a:r>
+            <a:pPr algn="l" indent="0" marL="0">
+              <a:lnSpc>
+                <a:spcPct val="118000"/>
+              </a:lnSpc>
+              <a:buNone/>
+            </a:pPr>
+            <a:r>
+              <a:rPr lang="en-US" sz="850" i="1" dirty="0">
+                <a:solidFill>
+                  <a:srgbClr val="53565A"/>
+                </a:solidFill>
+                <a:latin typeface="Calibri" pitchFamily="34" charset="0"/>
+                <a:ea typeface="Calibri" pitchFamily="34" charset="-122"/>
+                <a:cs typeface="Calibri" pitchFamily="34" charset="-120"/>
+              </a:rPr>
+              <a:t>“Customer identity, authentication, and digital trust expectations”</a:t>
+            </a:r>
+            <a:endParaRPr lang="en-US" sz="850" dirty="0"/>
+          </a:p>
+        </p:txBody>
+      </p:sp>
+    </p:spTree>
+  </p:cSld>
+  <p:clrMapOvr>
+    <a:masterClrMapping/>
+  </p:clrMapOvr>
+</p:sld>
+</file>
+
+<file path=ppt/slides/slide35.xml><?xml version="1.0" encoding="utf-8"?>
+<p:sld xmlns:a="http://schemas.openxmlformats.org/drawingml/2006/main" xmlns:r="http://schemas.openxmlformats.org/officeDocument/2006/relationships" xmlns:p="http://schemas.openxmlformats.org/presentationml/2006/main">
+  <p:cSld name="Slide 35">
+    <p:bg>
+      <p:bgPr>
+        <a:solidFill>
+          <a:srgbClr val="86BC25"/>
+        </a:solidFill>
+      </p:bgPr>
+    </p:bg>
+    <p:spTree>
+      <p:nvGrpSpPr>
+        <p:cNvPr id="1" name=""/>
+        <p:cNvGrpSpPr/>
+        <p:nvPr/>
+      </p:nvGrpSpPr>
+      <p:grpSpPr>
+        <a:xfrm>
+          <a:off x="0" y="0"/>
+          <a:ext cx="0" cy="0"/>
+          <a:chOff x="0" y="0"/>
+          <a:chExt cx="0" cy="0"/>
+        </a:xfrm>
+      </p:grpSpPr>
+      <p:sp>
+        <p:nvSpPr>
+          <p:cNvPr id="2" name="Text 0"/>
+          <p:cNvSpPr txBox="1"/>
+          <p:nvPr/>
+        </p:nvSpPr>
+        <p:spPr>
+          <a:xfrm>
+            <a:off x="502920" y="1699870"/>
+            <a:ext cx="10415016" cy="1591970"/>
+          </a:xfrm>
+          <a:prstGeom prst="rect">
+            <a:avLst/>
+          </a:prstGeom>
+          <a:noFill/>
+          <a:ln/>
+        </p:spPr>
+        <p:txBody>
+          <a:bodyPr wrap="square" lIns="0" tIns="0" rIns="0" bIns="0" rtlCol="0" anchor="b"/>
+          <a:lstStyle/>
+          <a:p>
+            <a:pPr algn="l" indent="0" marL="0">
+              <a:buNone/>
+            </a:pPr>
+            <a:r>
+              <a:rPr lang="en-US" sz="3600" b="1" dirty="0">
+                <a:solidFill>
+                  <a:srgbClr val="FFFFFF"/>
+                </a:solidFill>
+                <a:latin typeface="Calibri" pitchFamily="34" charset="0"/>
+                <a:ea typeface="Calibri" pitchFamily="34" charset="-122"/>
+                <a:cs typeface="Calibri" pitchFamily="34" charset="-120"/>
+              </a:rPr>
+              <a:t>6. Looking Ahead Three Years</a:t>
+            </a:r>
+            <a:endParaRPr lang="en-US" sz="3600" dirty="0"/>
+          </a:p>
+        </p:txBody>
+      </p:sp>
+      <p:sp>
+        <p:nvSpPr>
+          <p:cNvPr id="3" name="Text 1"/>
+          <p:cNvSpPr txBox="1"/>
+          <p:nvPr/>
+        </p:nvSpPr>
+        <p:spPr>
+          <a:xfrm>
+            <a:off x="11346790" y="6537960"/>
+            <a:ext cx="343814" cy="182880"/>
+          </a:xfrm>
+          <a:prstGeom prst="rect">
+            <a:avLst/>
+          </a:prstGeom>
+          <a:noFill/>
+          <a:ln/>
+        </p:spPr>
+        <p:txBody>
+          <a:bodyPr wrap="square" rtlCol="0" anchor="ctr"/>
+          <a:lstStyle/>
+          <a:p>
+            <a:pPr algn="r" indent="0" marL="0">
+              <a:buNone/>
+            </a:pPr>
+            <a:r>
+              <a:rPr lang="en-US" sz="900" dirty="0">
+                <a:solidFill>
+                  <a:srgbClr val="FFFFFF"/>
+                </a:solidFill>
+                <a:latin typeface="Calibri" pitchFamily="34" charset="0"/>
+                <a:ea typeface="Calibri" pitchFamily="34" charset="-122"/>
+                <a:cs typeface="Calibri" pitchFamily="34" charset="-120"/>
+              </a:rPr>
+              <a:t>34</a:t>
+            </a:r>
+            <a:endParaRPr lang="en-US" sz="900" dirty="0"/>
+          </a:p>
+        </p:txBody>
+      </p:sp>
+    </p:spTree>
+  </p:cSld>
+  <p:clrMapOvr>
+    <a:masterClrMapping/>
+  </p:clrMapOvr>
+</p:sld>
+</file>
+
+<file path=ppt/slides/slide36.xml><?xml version="1.0" encoding="utf-8"?>
+<p:sld xmlns:a="http://schemas.openxmlformats.org/drawingml/2006/main" xmlns:r="http://schemas.openxmlformats.org/officeDocument/2006/relationships" xmlns:p="http://schemas.openxmlformats.org/presentationml/2006/main">
+  <p:cSld name="Slide 36">
+    <p:bg>
+      <p:bgPr>
+        <a:solidFill>
+          <a:srgbClr val="FFFFFF"/>
+        </a:solidFill>
+      </p:bgPr>
+    </p:bg>
+    <p:spTree>
+      <p:nvGrpSpPr>
+        <p:cNvPr id="1" name=""/>
+        <p:cNvGrpSpPr/>
+        <p:nvPr/>
+      </p:nvGrpSpPr>
+      <p:grpSpPr>
+        <a:xfrm>
+          <a:off x="0" y="0"/>
+          <a:ext cx="0" cy="0"/>
+          <a:chOff x="0" y="0"/>
+          <a:chExt cx="0" cy="0"/>
+        </a:xfrm>
+      </p:grpSpPr>
+      <p:sp>
+        <p:nvSpPr>
+          <p:cNvPr id="2" name="Text 0"/>
+          <p:cNvSpPr txBox="1"/>
+          <p:nvPr/>
+        </p:nvSpPr>
+        <p:spPr>
+          <a:xfrm>
+            <a:off x="502006" y="256032"/>
+            <a:ext cx="11188598" cy="310896"/>
+          </a:xfrm>
+          <a:prstGeom prst="rect">
+            <a:avLst/>
+          </a:prstGeom>
+          <a:noFill/>
+          <a:ln/>
+        </p:spPr>
+        <p:txBody>
+          <a:bodyPr wrap="square" lIns="0" tIns="0" rIns="0" bIns="0" rtlCol="0" anchor="t"/>
+          <a:lstStyle/>
+          <a:p>
+            <a:pPr algn="l" indent="0" marL="0">
+              <a:buNone/>
+            </a:pPr>
+            <a:r>
+              <a:rPr lang="en-US" sz="1900" b="1" dirty="0">
+                <a:solidFill>
+                  <a:srgbClr val="000000"/>
+                </a:solidFill>
+                <a:latin typeface="Calibri" pitchFamily="34" charset="0"/>
+                <a:ea typeface="Calibri" pitchFamily="34" charset="-122"/>
+                <a:cs typeface="Calibri" pitchFamily="34" charset="-120"/>
+              </a:rPr>
+              <a:t>What Leaders Say, Unprompted</a:t>
+            </a:r>
+            <a:endParaRPr lang="en-US" sz="1900" dirty="0"/>
+          </a:p>
+        </p:txBody>
+      </p:sp>
+      <p:sp>
+        <p:nvSpPr>
+          <p:cNvPr id="3" name="Text 1"/>
+          <p:cNvSpPr txBox="1"/>
+          <p:nvPr/>
+        </p:nvSpPr>
+        <p:spPr>
+          <a:xfrm>
+            <a:off x="502006" y="585216"/>
+            <a:ext cx="11188598" cy="713232"/>
+          </a:xfrm>
+          <a:prstGeom prst="rect">
+            <a:avLst/>
+          </a:prstGeom>
+          <a:noFill/>
+          <a:ln/>
+        </p:spPr>
+        <p:txBody>
+          <a:bodyPr wrap="square" lIns="0" tIns="0" rIns="0" bIns="0" rtlCol="0" anchor="t"/>
+          <a:lstStyle/>
+          <a:p>
+            <a:pPr algn="l" indent="0" marL="0">
+              <a:lnSpc>
+                <a:spcPct val="105000"/>
+              </a:lnSpc>
+              <a:buNone/>
+            </a:pPr>
+            <a:r>
+              <a:rPr lang="en-US" sz="1350" b="1" dirty="0">
+                <a:solidFill>
+                  <a:srgbClr val="046A38"/>
+                </a:solidFill>
+                <a:latin typeface="Calibri" pitchFamily="34" charset="0"/>
+                <a:ea typeface="Calibri" pitchFamily="34" charset="-122"/>
+                <a:cs typeface="Calibri" pitchFamily="34" charset="-120"/>
+              </a:rPr>
+              <a:t>Left to answer in their own words, leaders converge on the same trend.</a:t>
+            </a:r>
+            <a:endParaRPr lang="en-US" sz="1350" dirty="0"/>
+          </a:p>
+        </p:txBody>
+      </p:sp>
+      <p:sp>
+        <p:nvSpPr>
+          <p:cNvPr id="4" name="Shape 2"/>
+          <p:cNvSpPr/>
+          <p:nvPr/>
+        </p:nvSpPr>
+        <p:spPr>
+          <a:xfrm>
+            <a:off x="502006" y="1335024"/>
+            <a:ext cx="0" cy="512064"/>
+          </a:xfrm>
+          <a:prstGeom prst="line">
+            <a:avLst/>
+          </a:prstGeom>
+          <a:noFill/>
+          <a:ln w="25400">
+            <a:solidFill>
+              <a:srgbClr val="D0D0CE"/>
+            </a:solidFill>
+            <a:prstDash val="solid"/>
+          </a:ln>
+        </p:spPr>
+      </p:sp>
+      <p:sp>
+        <p:nvSpPr>
+          <p:cNvPr id="5" name="Text 3"/>
+          <p:cNvSpPr txBox="1"/>
+          <p:nvPr/>
+        </p:nvSpPr>
+        <p:spPr>
+          <a:xfrm>
+            <a:off x="648310" y="1335024"/>
+            <a:ext cx="11042294" cy="512064"/>
+          </a:xfrm>
+          <a:prstGeom prst="rect">
+            <a:avLst/>
+          </a:prstGeom>
+          <a:noFill/>
+          <a:ln/>
+        </p:spPr>
+        <p:txBody>
+          <a:bodyPr wrap="square" lIns="0" tIns="0" rIns="0" bIns="0" rtlCol="0" anchor="t"/>
+          <a:lstStyle/>
+          <a:p>
+            <a:pPr algn="l" indent="0" marL="0">
+              <a:lnSpc>
+                <a:spcPct val="106000"/>
+              </a:lnSpc>
+              <a:buNone/>
+            </a:pPr>
+            <a:r>
+              <a:rPr lang="en-US" sz="900" b="1" dirty="0">
+                <a:solidFill>
+                  <a:srgbClr val="046A38"/>
+                </a:solidFill>
+                <a:latin typeface="IBM Plex Mono" pitchFamily="34" charset="0"/>
+                <a:ea typeface="IBM Plex Mono" pitchFamily="34" charset="-122"/>
+                <a:cs typeface="IBM Plex Mono" pitchFamily="34" charset="-120"/>
+              </a:rPr>
+              <a:t>Q12  </a:t>
+            </a:r>
+            <a:pPr algn="l" indent="0" marL="0">
+              <a:lnSpc>
+                <a:spcPct val="106000"/>
+              </a:lnSpc>
+              <a:buNone/>
+            </a:pPr>
+            <a:r>
+              <a:rPr lang="en-US" sz="1000" i="1" dirty="0">
+                <a:solidFill>
+                  <a:srgbClr val="575757"/>
+                </a:solidFill>
+                <a:latin typeface="Calibri" pitchFamily="34" charset="0"/>
+                <a:ea typeface="Calibri" pitchFamily="34" charset="-122"/>
+                <a:cs typeface="Calibri" pitchFamily="34" charset="-120"/>
+              </a:rPr>
+              <a:t>“Looking ahead three years, what development do you believe will have the greatest impact on fraud risk management, and why? (open-ended)”</a:t>
+            </a:r>
+            <a:endParaRPr lang="en-US" sz="1000" dirty="0"/>
+          </a:p>
+        </p:txBody>
+      </p:sp>
+      <p:sp>
+        <p:nvSpPr>
+          <p:cNvPr id="6" name="Text 4"/>
+          <p:cNvSpPr txBox="1"/>
+          <p:nvPr/>
+        </p:nvSpPr>
+        <p:spPr>
+          <a:xfrm>
+            <a:off x="11346790" y="6537960"/>
+            <a:ext cx="343814" cy="182880"/>
+          </a:xfrm>
+          <a:prstGeom prst="rect">
+            <a:avLst/>
+          </a:prstGeom>
+          <a:noFill/>
+          <a:ln/>
+        </p:spPr>
+        <p:txBody>
+          <a:bodyPr wrap="square" rtlCol="0" anchor="ctr"/>
+          <a:lstStyle/>
+          <a:p>
+            <a:pPr algn="r" indent="0" marL="0">
+              <a:buNone/>
+            </a:pPr>
+            <a:r>
+              <a:rPr lang="en-US" sz="900" dirty="0">
+                <a:solidFill>
+                  <a:srgbClr val="53565A"/>
+                </a:solidFill>
+                <a:latin typeface="Calibri" pitchFamily="34" charset="0"/>
+                <a:ea typeface="Calibri" pitchFamily="34" charset="-122"/>
+                <a:cs typeface="Calibri" pitchFamily="34" charset="-120"/>
+              </a:rPr>
+              <a:t>35</a:t>
             </a:r>
             <a:endParaRPr lang="en-US" sz="900" dirty="0"/>
           </a:p>
@@ -25298,9 +31012,9 @@
 </p:sld>
 </file>
 
-<file path=ppt/slides/slide33.xml><?xml version="1.0" encoding="utf-8"?>
+<file path=ppt/slides/slide37.xml><?xml version="1.0" encoding="utf-8"?>
 <p:sld xmlns:a="http://schemas.openxmlformats.org/drawingml/2006/main" xmlns:r="http://schemas.openxmlformats.org/officeDocument/2006/relationships" xmlns:p="http://schemas.openxmlformats.org/presentationml/2006/main">
-  <p:cSld name="Slide 33">
+  <p:cSld name="Slide 37">
     <p:bg>
       <p:bgPr>
         <a:solidFill>

--- a/Fraud in 2026 - Full Results.pptx
+++ b/Fraud in 2026 - Full Results.pptx
@@ -42,9 +42,12 @@
     <p:sldId id="290" r:id="rId36"/>
     <p:sldId id="291" r:id="rId37"/>
     <p:sldId id="292" r:id="rId38"/>
+    <p:sldId id="293" r:id="rId39"/>
+    <p:sldId id="294" r:id="rId40"/>
+    <p:sldId id="295" r:id="rId41"/>
   </p:sldIdLst>
   <p:notesMasterIdLst>
-    <p:notesMasterId r:id="rId39"/>
+    <p:notesMasterId r:id="rId42"/>
   </p:notesMasterIdLst>
   <p:sldSz cx="12192000" cy="6858000"/>
   <p:notesSz cx="6858000" cy="12192000"/>
@@ -12027,6 +12030,1233 @@
       <c:layout/>
       <c:barChart>
         <c:barDir val="bar"/>
+        <c:grouping val="stacked"/>
+        <c:varyColors val="0"/>
+        <c:ser>
+          <c:idx val="0"/>
+          <c:order val="0"/>
+          <c:tx>
+            <c:strRef>
+              <c:f>Sheet1!$B$1</c:f>
+              <c:strCache>
+                <c:ptCount val="1"/>
+                <c:pt idx="0">
+                  <c:v>United States (n=44)</c:v>
+                </c:pt>
+              </c:strCache>
+            </c:strRef>
+          </c:tx>
+          <c:spPr>
+            <a:solidFill>
+              <a:srgbClr val="86BC25"/>
+            </a:solidFill>
+            <a:effectLst/>
+          </c:spPr>
+          <c:invertIfNegative val="0"/>
+          <c:dLbls>
+            <c:numFmt formatCode="0&quot;%&quot;;-0&quot;%&quot;;;@" sourceLinked="0"/>
+            <c:txPr>
+              <a:bodyPr/>
+              <a:lstStyle/>
+              <a:p>
+                <a:pPr>
+                  <a:defRPr b="0" i="0" strike="noStrike" sz="650" u="none">
+                    <a:solidFill>
+                      <a:srgbClr val="FFFFFF"/>
+                    </a:solidFill>
+                    <a:latin typeface="Arial"/>
+                  </a:defRPr>
+                </a:pPr>
+              </a:p>
+            </c:txPr>
+            <c:dLblPos val="ctr"/>
+            <c:showLegendKey val="0"/>
+            <c:showVal val="1"/>
+            <c:showCatName val="0"/>
+            <c:showSerName val="0"/>
+            <c:showPercent val="0"/>
+            <c:showBubbleSize val="0"/>
+            <c:showLeaderLines val="0"/>
+          </c:dLbls>
+          <c:cat>
+            <c:multiLvlStrRef>
+              <c:f>Sheet1!$A$2:$A$4</c:f>
+              <c:multiLvlStrCache>
+                <c:ptCount val="3"/>
+                <c:lvl>
+                  <c:pt idx="0">
+                    <c:v>Investing to remediate existing compliance gaps (48%)</c:v>
+                  </c:pt>
+                  <c:pt idx="1">
+                    <c:v>Investing to meet upcoming / draft regulations (39%)</c:v>
+                  </c:pt>
+                  <c:pt idx="2">
+                    <c:v>Regulation not a primary driver (13%)</c:v>
+                  </c:pt>
+                </c:lvl>
+              </c:multiLvlStrCache>
+            </c:multiLvlStrRef>
+          </c:cat>
+          <c:val>
+            <c:numRef>
+              <c:f>Sheet1!$B$2:$B$4</c:f>
+              <c:numCache>
+                <c:formatCode>General</c:formatCode>
+                <c:ptCount val="3"/>
+                <c:pt idx="0">
+                  <c:v>18</c:v>
+                </c:pt>
+                <c:pt idx="1">
+                  <c:v>19</c:v>
+                </c:pt>
+                <c:pt idx="2">
+                  <c:v>7</c:v>
+                </c:pt>
+              </c:numCache>
+            </c:numRef>
+          </c:val>
+        </c:ser>
+        <c:ser>
+          <c:idx val="1"/>
+          <c:order val="1"/>
+          <c:tx>
+            <c:strRef>
+              <c:f>Sheet1!$C$1</c:f>
+              <c:strCache>
+                <c:ptCount val="1"/>
+                <c:pt idx="0">
+                  <c:v>Canada (n=30)</c:v>
+                </c:pt>
+              </c:strCache>
+            </c:strRef>
+          </c:tx>
+          <c:spPr>
+            <a:solidFill>
+              <a:srgbClr val="43B02A"/>
+            </a:solidFill>
+            <a:effectLst/>
+          </c:spPr>
+          <c:invertIfNegative val="0"/>
+          <c:dLbls>
+            <c:numFmt formatCode="0&quot;%&quot;;-0&quot;%&quot;;;@" sourceLinked="0"/>
+            <c:txPr>
+              <a:bodyPr/>
+              <a:lstStyle/>
+              <a:p>
+                <a:pPr>
+                  <a:defRPr b="0" i="0" strike="noStrike" sz="650" u="none">
+                    <a:solidFill>
+                      <a:srgbClr val="FFFFFF"/>
+                    </a:solidFill>
+                    <a:latin typeface="Arial"/>
+                  </a:defRPr>
+                </a:pPr>
+              </a:p>
+            </c:txPr>
+            <c:dLblPos val="ctr"/>
+            <c:showLegendKey val="0"/>
+            <c:showVal val="1"/>
+            <c:showCatName val="0"/>
+            <c:showSerName val="0"/>
+            <c:showPercent val="0"/>
+            <c:showBubbleSize val="0"/>
+            <c:showLeaderLines val="0"/>
+          </c:dLbls>
+          <c:cat>
+            <c:multiLvlStrRef>
+              <c:f>Sheet1!$A$2:$A$4</c:f>
+              <c:multiLvlStrCache>
+                <c:ptCount val="3"/>
+                <c:lvl>
+                  <c:pt idx="0">
+                    <c:v>Investing to remediate existing compliance gaps (48%)</c:v>
+                  </c:pt>
+                  <c:pt idx="1">
+                    <c:v>Investing to meet upcoming / draft regulations (39%)</c:v>
+                  </c:pt>
+                  <c:pt idx="2">
+                    <c:v>Regulation not a primary driver (13%)</c:v>
+                  </c:pt>
+                </c:lvl>
+              </c:multiLvlStrCache>
+            </c:multiLvlStrRef>
+          </c:cat>
+          <c:val>
+            <c:numRef>
+              <c:f>Sheet1!$C$2:$C$4</c:f>
+              <c:numCache>
+                <c:formatCode>General</c:formatCode>
+                <c:ptCount val="3"/>
+                <c:pt idx="0">
+                  <c:v>19</c:v>
+                </c:pt>
+                <c:pt idx="1">
+                  <c:v>9</c:v>
+                </c:pt>
+                <c:pt idx="2">
+                  <c:v>2</c:v>
+                </c:pt>
+              </c:numCache>
+            </c:numRef>
+          </c:val>
+        </c:ser>
+        <c:ser>
+          <c:idx val="2"/>
+          <c:order val="2"/>
+          <c:tx>
+            <c:strRef>
+              <c:f>Sheet1!$D$1</c:f>
+              <c:strCache>
+                <c:ptCount val="1"/>
+                <c:pt idx="0">
+                  <c:v>Europe — EU+UK (n=14)</c:v>
+                </c:pt>
+              </c:strCache>
+            </c:strRef>
+          </c:tx>
+          <c:spPr>
+            <a:solidFill>
+              <a:srgbClr val="046A38"/>
+            </a:solidFill>
+            <a:effectLst/>
+          </c:spPr>
+          <c:invertIfNegative val="0"/>
+          <c:dLbls>
+            <c:numFmt formatCode="0&quot;%&quot;;-0&quot;%&quot;;;@" sourceLinked="0"/>
+            <c:txPr>
+              <a:bodyPr/>
+              <a:lstStyle/>
+              <a:p>
+                <a:pPr>
+                  <a:defRPr b="0" i="0" strike="noStrike" sz="650" u="none">
+                    <a:solidFill>
+                      <a:srgbClr val="FFFFFF"/>
+                    </a:solidFill>
+                    <a:latin typeface="Arial"/>
+                  </a:defRPr>
+                </a:pPr>
+              </a:p>
+            </c:txPr>
+            <c:dLblPos val="ctr"/>
+            <c:showLegendKey val="0"/>
+            <c:showVal val="1"/>
+            <c:showCatName val="0"/>
+            <c:showSerName val="0"/>
+            <c:showPercent val="0"/>
+            <c:showBubbleSize val="0"/>
+            <c:showLeaderLines val="0"/>
+          </c:dLbls>
+          <c:cat>
+            <c:multiLvlStrRef>
+              <c:f>Sheet1!$A$2:$A$4</c:f>
+              <c:multiLvlStrCache>
+                <c:ptCount val="3"/>
+                <c:lvl>
+                  <c:pt idx="0">
+                    <c:v>Investing to remediate existing compliance gaps (48%)</c:v>
+                  </c:pt>
+                  <c:pt idx="1">
+                    <c:v>Investing to meet upcoming / draft regulations (39%)</c:v>
+                  </c:pt>
+                  <c:pt idx="2">
+                    <c:v>Regulation not a primary driver (13%)</c:v>
+                  </c:pt>
+                </c:lvl>
+              </c:multiLvlStrCache>
+            </c:multiLvlStrRef>
+          </c:cat>
+          <c:val>
+            <c:numRef>
+              <c:f>Sheet1!$D$2:$D$4</c:f>
+              <c:numCache>
+                <c:formatCode>General</c:formatCode>
+                <c:ptCount val="3"/>
+                <c:pt idx="0">
+                  <c:v>5</c:v>
+                </c:pt>
+                <c:pt idx="1">
+                  <c:v>7</c:v>
+                </c:pt>
+                <c:pt idx="2">
+                  <c:v>2</c:v>
+                </c:pt>
+              </c:numCache>
+            </c:numRef>
+          </c:val>
+        </c:ser>
+        <c:ser>
+          <c:idx val="3"/>
+          <c:order val="3"/>
+          <c:tx>
+            <c:strRef>
+              <c:f>Sheet1!$E$1</c:f>
+              <c:strCache>
+                <c:ptCount val="1"/>
+                <c:pt idx="0">
+                  <c:v>Australia (n=8)</c:v>
+                </c:pt>
+              </c:strCache>
+            </c:strRef>
+          </c:tx>
+          <c:spPr>
+            <a:solidFill>
+              <a:srgbClr val="0D8390"/>
+            </a:solidFill>
+            <a:effectLst/>
+          </c:spPr>
+          <c:invertIfNegative val="0"/>
+          <c:dLbls>
+            <c:numFmt formatCode="0&quot;%&quot;;-0&quot;%&quot;;;@" sourceLinked="0"/>
+            <c:txPr>
+              <a:bodyPr/>
+              <a:lstStyle/>
+              <a:p>
+                <a:pPr>
+                  <a:defRPr b="0" i="0" strike="noStrike" sz="650" u="none">
+                    <a:solidFill>
+                      <a:srgbClr val="FFFFFF"/>
+                    </a:solidFill>
+                    <a:latin typeface="Arial"/>
+                  </a:defRPr>
+                </a:pPr>
+              </a:p>
+            </c:txPr>
+            <c:dLblPos val="ctr"/>
+            <c:showLegendKey val="0"/>
+            <c:showVal val="1"/>
+            <c:showCatName val="0"/>
+            <c:showSerName val="0"/>
+            <c:showPercent val="0"/>
+            <c:showBubbleSize val="0"/>
+            <c:showLeaderLines val="0"/>
+          </c:dLbls>
+          <c:cat>
+            <c:multiLvlStrRef>
+              <c:f>Sheet1!$A$2:$A$4</c:f>
+              <c:multiLvlStrCache>
+                <c:ptCount val="3"/>
+                <c:lvl>
+                  <c:pt idx="0">
+                    <c:v>Investing to remediate existing compliance gaps (48%)</c:v>
+                  </c:pt>
+                  <c:pt idx="1">
+                    <c:v>Investing to meet upcoming / draft regulations (39%)</c:v>
+                  </c:pt>
+                  <c:pt idx="2">
+                    <c:v>Regulation not a primary driver (13%)</c:v>
+                  </c:pt>
+                </c:lvl>
+              </c:multiLvlStrCache>
+            </c:multiLvlStrRef>
+          </c:cat>
+          <c:val>
+            <c:numRef>
+              <c:f>Sheet1!$E$2:$E$4</c:f>
+              <c:numCache>
+                <c:formatCode>General</c:formatCode>
+                <c:ptCount val="3"/>
+                <c:pt idx="0">
+                  <c:v>5</c:v>
+                </c:pt>
+                <c:pt idx="1">
+                  <c:v>2</c:v>
+                </c:pt>
+                <c:pt idx="2">
+                  <c:v>1</c:v>
+                </c:pt>
+              </c:numCache>
+            </c:numRef>
+          </c:val>
+        </c:ser>
+        <c:ser>
+          <c:idx val="4"/>
+          <c:order val="4"/>
+          <c:tx>
+            <c:strRef>
+              <c:f>Sheet1!$F$1</c:f>
+              <c:strCache>
+                <c:ptCount val="1"/>
+                <c:pt idx="0">
+                  <c:v>Singapore (n=4)</c:v>
+                </c:pt>
+              </c:strCache>
+            </c:strRef>
+          </c:tx>
+          <c:spPr>
+            <a:solidFill>
+              <a:srgbClr val="53565A"/>
+            </a:solidFill>
+            <a:effectLst/>
+          </c:spPr>
+          <c:invertIfNegative val="0"/>
+          <c:dLbls>
+            <c:numFmt formatCode="0&quot;%&quot;;-0&quot;%&quot;;;@" sourceLinked="0"/>
+            <c:txPr>
+              <a:bodyPr/>
+              <a:lstStyle/>
+              <a:p>
+                <a:pPr>
+                  <a:defRPr b="0" i="0" strike="noStrike" sz="650" u="none">
+                    <a:solidFill>
+                      <a:srgbClr val="FFFFFF"/>
+                    </a:solidFill>
+                    <a:latin typeface="Arial"/>
+                  </a:defRPr>
+                </a:pPr>
+              </a:p>
+            </c:txPr>
+            <c:dLblPos val="ctr"/>
+            <c:showLegendKey val="0"/>
+            <c:showVal val="1"/>
+            <c:showCatName val="0"/>
+            <c:showSerName val="0"/>
+            <c:showPercent val="0"/>
+            <c:showBubbleSize val="0"/>
+            <c:showLeaderLines val="0"/>
+          </c:dLbls>
+          <c:cat>
+            <c:multiLvlStrRef>
+              <c:f>Sheet1!$A$2:$A$4</c:f>
+              <c:multiLvlStrCache>
+                <c:ptCount val="3"/>
+                <c:lvl>
+                  <c:pt idx="0">
+                    <c:v>Investing to remediate existing compliance gaps (48%)</c:v>
+                  </c:pt>
+                  <c:pt idx="1">
+                    <c:v>Investing to meet upcoming / draft regulations (39%)</c:v>
+                  </c:pt>
+                  <c:pt idx="2">
+                    <c:v>Regulation not a primary driver (13%)</c:v>
+                  </c:pt>
+                </c:lvl>
+              </c:multiLvlStrCache>
+            </c:multiLvlStrRef>
+          </c:cat>
+          <c:val>
+            <c:numRef>
+              <c:f>Sheet1!$F$2:$F$4</c:f>
+              <c:numCache>
+                <c:formatCode>General</c:formatCode>
+                <c:ptCount val="3"/>
+                <c:pt idx="0">
+                  <c:v>1</c:v>
+                </c:pt>
+                <c:pt idx="1">
+                  <c:v>2</c:v>
+                </c:pt>
+                <c:pt idx="2">
+                  <c:v>1</c:v>
+                </c:pt>
+              </c:numCache>
+            </c:numRef>
+          </c:val>
+        </c:ser>
+        <c:dLbls>
+          <c:numFmt formatCode="0&quot;%&quot;;-0&quot;%&quot;;;@" sourceLinked="0"/>
+          <c:txPr>
+            <a:bodyPr/>
+            <a:lstStyle/>
+            <a:p>
+              <a:pPr>
+                <a:defRPr b="0" i="0" strike="noStrike" sz="650" u="none">
+                  <a:solidFill>
+                    <a:srgbClr val="FFFFFF"/>
+                  </a:solidFill>
+                  <a:latin typeface="Arial"/>
+                </a:defRPr>
+              </a:pPr>
+            </a:p>
+          </c:txPr>
+          <c:dLblPos val="ctr"/>
+          <c:showLegendKey val="0"/>
+          <c:showVal val="1"/>
+          <c:showCatName val="0"/>
+          <c:showSerName val="0"/>
+          <c:showPercent val="0"/>
+          <c:showBubbleSize val="0"/>
+          <c:showLeaderLines val="0"/>
+        </c:dLbls>
+        <c:gapWidth val="40"/>
+        <c:overlap val="100"/>
+        <c:axId val="2094734554"/>
+        <c:axId val="2094734552"/>
+        <c:axId val="2094734556"/>
+      </c:barChart>
+      <c:catAx>
+        <c:axId val="2094734554"/>
+        <c:scaling>
+          <c:orientation val="minMax"/>
+        </c:scaling>
+        <c:delete val="0"/>
+        <c:axPos val="l"/>
+        <c:numFmt formatCode="General" sourceLinked="1"/>
+        <c:majorTickMark val="out"/>
+        <c:minorTickMark val="none"/>
+        <c:tickLblPos val="nextTo"/>
+        <c:spPr>
+          <a:ln w="12700" cap="flat">
+            <a:noFill/>
+            <a:prstDash val="solid"/>
+            <a:round/>
+          </a:ln>
+        </c:spPr>
+        <c:txPr>
+          <a:bodyPr/>
+          <a:lstStyle/>
+          <a:p>
+            <a:pPr>
+              <a:defRPr sz="900" b="0" i="0" u="none" strike="noStrike">
+                <a:solidFill>
+                  <a:srgbClr val="53565A"/>
+                </a:solidFill>
+                <a:latin typeface="Arial"/>
+              </a:defRPr>
+            </a:pPr>
+            <a:endParaRPr lang="en-US"/>
+          </a:p>
+        </c:txPr>
+        <c:crossAx val="2094734552"/>
+        <c:crosses val="autoZero"/>
+        <c:auto val="1"/>
+        <c:lblAlgn val="ctr"/>
+        <c:noMultiLvlLbl val="1"/>
+      </c:catAx>
+      <c:valAx>
+        <c:axId val="2094734552"/>
+        <c:scaling>
+          <c:orientation val="minMax"/>
+        </c:scaling>
+        <c:delete val="1"/>
+        <c:axPos val="b"/>
+        <c:numFmt formatCode="General" sourceLinked="0"/>
+        <c:majorTickMark val="out"/>
+        <c:minorTickMark val="none"/>
+        <c:tickLblPos val="low"/>
+        <c:spPr>
+          <a:ln w="12700" cap="flat">
+            <a:noFill/>
+            <a:prstDash val="solid"/>
+            <a:round/>
+          </a:ln>
+        </c:spPr>
+        <c:txPr>
+          <a:bodyPr/>
+          <a:lstStyle/>
+          <a:p>
+            <a:pPr>
+              <a:defRPr sz="1200" b="0" i="0" u="none" strike="noStrike">
+                <a:solidFill>
+                  <a:srgbClr val="000000"/>
+                </a:solidFill>
+                <a:latin typeface="Arial"/>
+              </a:defRPr>
+            </a:pPr>
+            <a:endParaRPr lang="en-US"/>
+          </a:p>
+        </c:txPr>
+        <c:crossAx val="2094734554"/>
+        <c:crosses val="autoZero"/>
+        <c:crossBetween val="between"/>
+      </c:valAx>
+      <c:spPr>
+        <a:solidFill>
+          <a:srgbClr val="FFFFFF"/>
+        </a:solidFill>
+        <a:ln>
+          <a:noFill/>
+        </a:ln>
+        <a:effectLst/>
+      </c:spPr>
+    </c:plotArea>
+    <c:legend>
+      <c:legendPos val="b"/>
+      <c:overlay val="0"/>
+      <c:txPr>
+        <a:bodyPr/>
+        <a:lstStyle/>
+        <a:p>
+          <a:pPr>
+            <a:defRPr sz="800">      </a:defRPr>
+          </a:pPr>
+          <a:endParaRPr lang="en-US"/>
+        </a:p>
+      </c:txPr>
+    </c:legend>
+    <c:plotVisOnly val="1"/>
+    <c:dispBlanksAs val="span"/>
+  </c:chart>
+  <c:spPr>
+    <a:noFill/>
+    <a:ln>
+      <a:noFill/>
+    </a:ln>
+    <a:effectLst/>
+  </c:spPr>
+  <c:externalData r:id="rId1">
+    <c:autoUpdate val="0"/>
+  </c:externalData>
+</c:chartSpace>
+</file>
+
+<file path=ppt/charts/chart33.xml><?xml version="1.0" encoding="utf-8"?>
+<c:chartSpace xmlns:c="http://schemas.openxmlformats.org/drawingml/2006/chart" xmlns:a="http://schemas.openxmlformats.org/drawingml/2006/main" xmlns:r="http://schemas.openxmlformats.org/officeDocument/2006/relationships">
+  <c:date1904 val="0"/>
+  <c:roundedCorners val="1"/>
+  <c:chart>
+    <c:autoTitleDeleted val="1"/>
+    <c:plotArea>
+      <c:layout/>
+      <c:barChart>
+        <c:barDir val="bar"/>
+        <c:grouping val="clustered"/>
+        <c:varyColors val="0"/>
+        <c:ser>
+          <c:idx val="0"/>
+          <c:order val="0"/>
+          <c:tx>
+            <c:strRef>
+              <c:f>Sheet1!$B$1</c:f>
+              <c:strCache>
+                <c:ptCount val="1"/>
+                <c:pt idx="0">
+                  <c:v>Top 50 Global Insurance Carrier (n=15)</c:v>
+                </c:pt>
+              </c:strCache>
+            </c:strRef>
+          </c:tx>
+          <c:spPr>
+            <a:solidFill>
+              <a:srgbClr val="86BC25"/>
+            </a:solidFill>
+            <a:effectLst/>
+          </c:spPr>
+          <c:invertIfNegative val="0"/>
+          <c:dLbls>
+            <c:numFmt formatCode="0&quot;%&quot;" sourceLinked="0"/>
+            <c:txPr>
+              <a:bodyPr/>
+              <a:lstStyle/>
+              <a:p>
+                <a:pPr>
+                  <a:defRPr b="0" i="0" strike="noStrike" sz="1000" u="none">
+                    <a:solidFill>
+                      <a:srgbClr val="000000"/>
+                    </a:solidFill>
+                    <a:latin typeface="Arial"/>
+                  </a:defRPr>
+                </a:pPr>
+              </a:p>
+            </c:txPr>
+            <c:showLegendKey val="0"/>
+            <c:showVal val="1"/>
+            <c:showCatName val="0"/>
+            <c:showSerName val="0"/>
+            <c:showPercent val="0"/>
+            <c:showBubbleSize val="0"/>
+            <c:showLeaderLines val="0"/>
+          </c:dLbls>
+          <c:cat>
+            <c:multiLvlStrRef>
+              <c:f>Sheet1!$A$2:$A$4</c:f>
+              <c:multiLvlStrCache>
+                <c:ptCount val="3"/>
+                <c:lvl>
+                  <c:pt idx="0">
+                    <c:v>Investing to remediate existing compliance gaps</c:v>
+                  </c:pt>
+                  <c:pt idx="1">
+                    <c:v>Investing to meet upcoming / draft regulations</c:v>
+                  </c:pt>
+                  <c:pt idx="2">
+                    <c:v>Regulation not a primary driver</c:v>
+                  </c:pt>
+                </c:lvl>
+              </c:multiLvlStrCache>
+            </c:multiLvlStrRef>
+          </c:cat>
+          <c:val>
+            <c:numRef>
+              <c:f>Sheet1!$B$2:$B$4</c:f>
+              <c:numCache>
+                <c:formatCode>General</c:formatCode>
+                <c:ptCount val="3"/>
+                <c:pt idx="0">
+                  <c:v>33</c:v>
+                </c:pt>
+                <c:pt idx="1">
+                  <c:v>47</c:v>
+                </c:pt>
+                <c:pt idx="2">
+                  <c:v>20</c:v>
+                </c:pt>
+              </c:numCache>
+            </c:numRef>
+          </c:val>
+        </c:ser>
+        <c:ser>
+          <c:idx val="1"/>
+          <c:order val="1"/>
+          <c:tx>
+            <c:strRef>
+              <c:f>Sheet1!$C$1</c:f>
+              <c:strCache>
+                <c:ptCount val="1"/>
+                <c:pt idx="0">
+                  <c:v>Large Insurance Carrier (n=10)</c:v>
+                </c:pt>
+              </c:strCache>
+            </c:strRef>
+          </c:tx>
+          <c:spPr>
+            <a:solidFill>
+              <a:srgbClr val="046A38"/>
+            </a:solidFill>
+            <a:effectLst/>
+          </c:spPr>
+          <c:invertIfNegative val="0"/>
+          <c:dLbls>
+            <c:numFmt formatCode="0&quot;%&quot;" sourceLinked="0"/>
+            <c:txPr>
+              <a:bodyPr/>
+              <a:lstStyle/>
+              <a:p>
+                <a:pPr>
+                  <a:defRPr b="0" i="0" strike="noStrike" sz="1000" u="none">
+                    <a:solidFill>
+                      <a:srgbClr val="000000"/>
+                    </a:solidFill>
+                    <a:latin typeface="Arial"/>
+                  </a:defRPr>
+                </a:pPr>
+              </a:p>
+            </c:txPr>
+            <c:showLegendKey val="0"/>
+            <c:showVal val="1"/>
+            <c:showCatName val="0"/>
+            <c:showSerName val="0"/>
+            <c:showPercent val="0"/>
+            <c:showBubbleSize val="0"/>
+            <c:showLeaderLines val="0"/>
+          </c:dLbls>
+          <c:cat>
+            <c:multiLvlStrRef>
+              <c:f>Sheet1!$A$2:$A$4</c:f>
+              <c:multiLvlStrCache>
+                <c:ptCount val="3"/>
+                <c:lvl>
+                  <c:pt idx="0">
+                    <c:v>Investing to remediate existing compliance gaps</c:v>
+                  </c:pt>
+                  <c:pt idx="1">
+                    <c:v>Investing to meet upcoming / draft regulations</c:v>
+                  </c:pt>
+                  <c:pt idx="2">
+                    <c:v>Regulation not a primary driver</c:v>
+                  </c:pt>
+                </c:lvl>
+              </c:multiLvlStrCache>
+            </c:multiLvlStrRef>
+          </c:cat>
+          <c:val>
+            <c:numRef>
+              <c:f>Sheet1!$C$2:$C$4</c:f>
+              <c:numCache>
+                <c:formatCode>General</c:formatCode>
+                <c:ptCount val="3"/>
+                <c:pt idx="0">
+                  <c:v>70</c:v>
+                </c:pt>
+                <c:pt idx="1">
+                  <c:v>30</c:v>
+                </c:pt>
+                <c:pt idx="2">
+                  <c:v>0</c:v>
+                </c:pt>
+              </c:numCache>
+            </c:numRef>
+          </c:val>
+        </c:ser>
+        <c:dLbls>
+          <c:numFmt formatCode="0&quot;%&quot;" sourceLinked="0"/>
+          <c:txPr>
+            <a:bodyPr/>
+            <a:lstStyle/>
+            <a:p>
+              <a:pPr>
+                <a:defRPr b="0" i="0" strike="noStrike" sz="1000" u="none">
+                  <a:solidFill>
+                    <a:srgbClr val="000000"/>
+                  </a:solidFill>
+                  <a:latin typeface="Arial"/>
+                </a:defRPr>
+              </a:pPr>
+            </a:p>
+          </c:txPr>
+          <c:showLegendKey val="0"/>
+          <c:showVal val="1"/>
+          <c:showCatName val="0"/>
+          <c:showSerName val="0"/>
+          <c:showPercent val="0"/>
+          <c:showBubbleSize val="0"/>
+          <c:showLeaderLines val="0"/>
+        </c:dLbls>
+        <c:gapWidth val="40"/>
+        <c:overlap val="0"/>
+        <c:axId val="2094734554"/>
+        <c:axId val="2094734552"/>
+        <c:axId val="2094734556"/>
+      </c:barChart>
+      <c:catAx>
+        <c:axId val="2094734554"/>
+        <c:scaling>
+          <c:orientation val="minMax"/>
+        </c:scaling>
+        <c:delete val="0"/>
+        <c:axPos val="l"/>
+        <c:numFmt formatCode="General" sourceLinked="1"/>
+        <c:majorTickMark val="out"/>
+        <c:minorTickMark val="none"/>
+        <c:tickLblPos val="nextTo"/>
+        <c:spPr>
+          <a:ln w="12700" cap="flat">
+            <a:noFill/>
+            <a:prstDash val="solid"/>
+            <a:round/>
+          </a:ln>
+        </c:spPr>
+        <c:txPr>
+          <a:bodyPr/>
+          <a:lstStyle/>
+          <a:p>
+            <a:pPr>
+              <a:defRPr sz="1000" b="0" i="0" u="none" strike="noStrike">
+                <a:solidFill>
+                  <a:srgbClr val="53565A"/>
+                </a:solidFill>
+                <a:latin typeface="Arial"/>
+              </a:defRPr>
+            </a:pPr>
+            <a:endParaRPr lang="en-US"/>
+          </a:p>
+        </c:txPr>
+        <c:crossAx val="2094734552"/>
+        <c:crosses val="autoZero"/>
+        <c:auto val="1"/>
+        <c:lblAlgn val="ctr"/>
+        <c:noMultiLvlLbl val="1"/>
+      </c:catAx>
+      <c:valAx>
+        <c:axId val="2094734552"/>
+        <c:scaling>
+          <c:orientation val="minMax"/>
+        </c:scaling>
+        <c:delete val="1"/>
+        <c:axPos val="b"/>
+        <c:numFmt formatCode="General" sourceLinked="0"/>
+        <c:majorTickMark val="out"/>
+        <c:minorTickMark val="none"/>
+        <c:tickLblPos val="low"/>
+        <c:spPr>
+          <a:ln w="12700" cap="flat">
+            <a:noFill/>
+            <a:prstDash val="solid"/>
+            <a:round/>
+          </a:ln>
+        </c:spPr>
+        <c:txPr>
+          <a:bodyPr/>
+          <a:lstStyle/>
+          <a:p>
+            <a:pPr>
+              <a:defRPr sz="1200" b="0" i="0" u="none" strike="noStrike">
+                <a:solidFill>
+                  <a:srgbClr val="000000"/>
+                </a:solidFill>
+                <a:latin typeface="Arial"/>
+              </a:defRPr>
+            </a:pPr>
+            <a:endParaRPr lang="en-US"/>
+          </a:p>
+        </c:txPr>
+        <c:crossAx val="2094734554"/>
+        <c:crosses val="autoZero"/>
+        <c:crossBetween val="between"/>
+      </c:valAx>
+      <c:spPr>
+        <a:solidFill>
+          <a:srgbClr val="FFFFFF"/>
+        </a:solidFill>
+        <a:ln>
+          <a:noFill/>
+        </a:ln>
+        <a:effectLst/>
+      </c:spPr>
+    </c:plotArea>
+    <c:legend>
+      <c:legendPos val="b"/>
+      <c:overlay val="0"/>
+      <c:txPr>
+        <a:bodyPr/>
+        <a:lstStyle/>
+        <a:p>
+          <a:pPr>
+            <a:defRPr sz="950">      </a:defRPr>
+          </a:pPr>
+          <a:endParaRPr lang="en-US"/>
+        </a:p>
+      </c:txPr>
+    </c:legend>
+    <c:plotVisOnly val="1"/>
+    <c:dispBlanksAs val="span"/>
+  </c:chart>
+  <c:spPr>
+    <a:noFill/>
+    <a:ln>
+      <a:noFill/>
+    </a:ln>
+    <a:effectLst/>
+  </c:spPr>
+  <c:externalData r:id="rId1">
+    <c:autoUpdate val="0"/>
+  </c:externalData>
+</c:chartSpace>
+</file>
+
+<file path=ppt/charts/chart34.xml><?xml version="1.0" encoding="utf-8"?>
+<c:chartSpace xmlns:c="http://schemas.openxmlformats.org/drawingml/2006/chart" xmlns:a="http://schemas.openxmlformats.org/drawingml/2006/main" xmlns:r="http://schemas.openxmlformats.org/officeDocument/2006/relationships">
+  <c:date1904 val="0"/>
+  <c:roundedCorners val="1"/>
+  <c:chart>
+    <c:autoTitleDeleted val="1"/>
+    <c:plotArea>
+      <c:layout/>
+      <c:barChart>
+        <c:barDir val="bar"/>
+        <c:grouping val="clustered"/>
+        <c:varyColors val="0"/>
+        <c:ser>
+          <c:idx val="0"/>
+          <c:order val="0"/>
+          <c:tx>
+            <c:strRef>
+              <c:f>Sheet1!$B$1</c:f>
+              <c:strCache>
+                <c:ptCount val="1"/>
+                <c:pt idx="0">
+                  <c:v>Top 100 Financial Institution (n=40)</c:v>
+                </c:pt>
+              </c:strCache>
+            </c:strRef>
+          </c:tx>
+          <c:spPr>
+            <a:solidFill>
+              <a:srgbClr val="86BC25"/>
+            </a:solidFill>
+            <a:effectLst/>
+          </c:spPr>
+          <c:invertIfNegative val="0"/>
+          <c:dLbls>
+            <c:numFmt formatCode="0&quot;%&quot;" sourceLinked="0"/>
+            <c:txPr>
+              <a:bodyPr/>
+              <a:lstStyle/>
+              <a:p>
+                <a:pPr>
+                  <a:defRPr b="0" i="0" strike="noStrike" sz="1000" u="none">
+                    <a:solidFill>
+                      <a:srgbClr val="000000"/>
+                    </a:solidFill>
+                    <a:latin typeface="Arial"/>
+                  </a:defRPr>
+                </a:pPr>
+              </a:p>
+            </c:txPr>
+            <c:showLegendKey val="0"/>
+            <c:showVal val="1"/>
+            <c:showCatName val="0"/>
+            <c:showSerName val="0"/>
+            <c:showPercent val="0"/>
+            <c:showBubbleSize val="0"/>
+            <c:showLeaderLines val="0"/>
+          </c:dLbls>
+          <c:cat>
+            <c:multiLvlStrRef>
+              <c:f>Sheet1!$A$2:$A$4</c:f>
+              <c:multiLvlStrCache>
+                <c:ptCount val="3"/>
+                <c:lvl>
+                  <c:pt idx="0">
+                    <c:v>Investing to remediate existing compliance gaps</c:v>
+                  </c:pt>
+                  <c:pt idx="1">
+                    <c:v>Investing to meet upcoming / draft regulations</c:v>
+                  </c:pt>
+                  <c:pt idx="2">
+                    <c:v>Regulation not a primary driver</c:v>
+                  </c:pt>
+                </c:lvl>
+              </c:multiLvlStrCache>
+            </c:multiLvlStrRef>
+          </c:cat>
+          <c:val>
+            <c:numRef>
+              <c:f>Sheet1!$B$2:$B$4</c:f>
+              <c:numCache>
+                <c:formatCode>General</c:formatCode>
+                <c:ptCount val="3"/>
+                <c:pt idx="0">
+                  <c:v>42</c:v>
+                </c:pt>
+                <c:pt idx="1">
+                  <c:v>48</c:v>
+                </c:pt>
+                <c:pt idx="2">
+                  <c:v>10</c:v>
+                </c:pt>
+              </c:numCache>
+            </c:numRef>
+          </c:val>
+        </c:ser>
+        <c:ser>
+          <c:idx val="1"/>
+          <c:order val="1"/>
+          <c:tx>
+            <c:strRef>
+              <c:f>Sheet1!$C$1</c:f>
+              <c:strCache>
+                <c:ptCount val="1"/>
+                <c:pt idx="0">
+                  <c:v>Large Financial Institution (n=35)</c:v>
+                </c:pt>
+              </c:strCache>
+            </c:strRef>
+          </c:tx>
+          <c:spPr>
+            <a:solidFill>
+              <a:srgbClr val="046A38"/>
+            </a:solidFill>
+            <a:effectLst/>
+          </c:spPr>
+          <c:invertIfNegative val="0"/>
+          <c:dLbls>
+            <c:numFmt formatCode="0&quot;%&quot;" sourceLinked="0"/>
+            <c:txPr>
+              <a:bodyPr/>
+              <a:lstStyle/>
+              <a:p>
+                <a:pPr>
+                  <a:defRPr b="0" i="0" strike="noStrike" sz="1000" u="none">
+                    <a:solidFill>
+                      <a:srgbClr val="000000"/>
+                    </a:solidFill>
+                    <a:latin typeface="Arial"/>
+                  </a:defRPr>
+                </a:pPr>
+              </a:p>
+            </c:txPr>
+            <c:showLegendKey val="0"/>
+            <c:showVal val="1"/>
+            <c:showCatName val="0"/>
+            <c:showSerName val="0"/>
+            <c:showPercent val="0"/>
+            <c:showBubbleSize val="0"/>
+            <c:showLeaderLines val="0"/>
+          </c:dLbls>
+          <c:cat>
+            <c:multiLvlStrRef>
+              <c:f>Sheet1!$A$2:$A$4</c:f>
+              <c:multiLvlStrCache>
+                <c:ptCount val="3"/>
+                <c:lvl>
+                  <c:pt idx="0">
+                    <c:v>Investing to remediate existing compliance gaps</c:v>
+                  </c:pt>
+                  <c:pt idx="1">
+                    <c:v>Investing to meet upcoming / draft regulations</c:v>
+                  </c:pt>
+                  <c:pt idx="2">
+                    <c:v>Regulation not a primary driver</c:v>
+                  </c:pt>
+                </c:lvl>
+              </c:multiLvlStrCache>
+            </c:multiLvlStrRef>
+          </c:cat>
+          <c:val>
+            <c:numRef>
+              <c:f>Sheet1!$C$2:$C$4</c:f>
+              <c:numCache>
+                <c:formatCode>General</c:formatCode>
+                <c:ptCount val="3"/>
+                <c:pt idx="0">
+                  <c:v>54</c:v>
+                </c:pt>
+                <c:pt idx="1">
+                  <c:v>29</c:v>
+                </c:pt>
+                <c:pt idx="2">
+                  <c:v>17</c:v>
+                </c:pt>
+              </c:numCache>
+            </c:numRef>
+          </c:val>
+        </c:ser>
+        <c:dLbls>
+          <c:numFmt formatCode="0&quot;%&quot;" sourceLinked="0"/>
+          <c:txPr>
+            <a:bodyPr/>
+            <a:lstStyle/>
+            <a:p>
+              <a:pPr>
+                <a:defRPr b="0" i="0" strike="noStrike" sz="1000" u="none">
+                  <a:solidFill>
+                    <a:srgbClr val="000000"/>
+                  </a:solidFill>
+                  <a:latin typeface="Arial"/>
+                </a:defRPr>
+              </a:pPr>
+            </a:p>
+          </c:txPr>
+          <c:showLegendKey val="0"/>
+          <c:showVal val="1"/>
+          <c:showCatName val="0"/>
+          <c:showSerName val="0"/>
+          <c:showPercent val="0"/>
+          <c:showBubbleSize val="0"/>
+          <c:showLeaderLines val="0"/>
+        </c:dLbls>
+        <c:gapWidth val="40"/>
+        <c:overlap val="0"/>
+        <c:axId val="2094734554"/>
+        <c:axId val="2094734552"/>
+        <c:axId val="2094734556"/>
+      </c:barChart>
+      <c:catAx>
+        <c:axId val="2094734554"/>
+        <c:scaling>
+          <c:orientation val="minMax"/>
+        </c:scaling>
+        <c:delete val="0"/>
+        <c:axPos val="l"/>
+        <c:numFmt formatCode="General" sourceLinked="1"/>
+        <c:majorTickMark val="out"/>
+        <c:minorTickMark val="none"/>
+        <c:tickLblPos val="nextTo"/>
+        <c:spPr>
+          <a:ln w="12700" cap="flat">
+            <a:noFill/>
+            <a:prstDash val="solid"/>
+            <a:round/>
+          </a:ln>
+        </c:spPr>
+        <c:txPr>
+          <a:bodyPr/>
+          <a:lstStyle/>
+          <a:p>
+            <a:pPr>
+              <a:defRPr sz="1000" b="0" i="0" u="none" strike="noStrike">
+                <a:solidFill>
+                  <a:srgbClr val="53565A"/>
+                </a:solidFill>
+                <a:latin typeface="Arial"/>
+              </a:defRPr>
+            </a:pPr>
+            <a:endParaRPr lang="en-US"/>
+          </a:p>
+        </c:txPr>
+        <c:crossAx val="2094734552"/>
+        <c:crosses val="autoZero"/>
+        <c:auto val="1"/>
+        <c:lblAlgn val="ctr"/>
+        <c:noMultiLvlLbl val="1"/>
+      </c:catAx>
+      <c:valAx>
+        <c:axId val="2094734552"/>
+        <c:scaling>
+          <c:orientation val="minMax"/>
+        </c:scaling>
+        <c:delete val="1"/>
+        <c:axPos val="b"/>
+        <c:numFmt formatCode="General" sourceLinked="0"/>
+        <c:majorTickMark val="out"/>
+        <c:minorTickMark val="none"/>
+        <c:tickLblPos val="low"/>
+        <c:spPr>
+          <a:ln w="12700" cap="flat">
+            <a:noFill/>
+            <a:prstDash val="solid"/>
+            <a:round/>
+          </a:ln>
+        </c:spPr>
+        <c:txPr>
+          <a:bodyPr/>
+          <a:lstStyle/>
+          <a:p>
+            <a:pPr>
+              <a:defRPr sz="1200" b="0" i="0" u="none" strike="noStrike">
+                <a:solidFill>
+                  <a:srgbClr val="000000"/>
+                </a:solidFill>
+                <a:latin typeface="Arial"/>
+              </a:defRPr>
+            </a:pPr>
+            <a:endParaRPr lang="en-US"/>
+          </a:p>
+        </c:txPr>
+        <c:crossAx val="2094734554"/>
+        <c:crosses val="autoZero"/>
+        <c:crossBetween val="between"/>
+      </c:valAx>
+      <c:spPr>
+        <a:solidFill>
+          <a:srgbClr val="FFFFFF"/>
+        </a:solidFill>
+        <a:ln>
+          <a:noFill/>
+        </a:ln>
+        <a:effectLst/>
+      </c:spPr>
+    </c:plotArea>
+    <c:legend>
+      <c:legendPos val="b"/>
+      <c:overlay val="0"/>
+      <c:txPr>
+        <a:bodyPr/>
+        <a:lstStyle/>
+        <a:p>
+          <a:pPr>
+            <a:defRPr sz="950">      </a:defRPr>
+          </a:pPr>
+          <a:endParaRPr lang="en-US"/>
+        </a:p>
+      </c:txPr>
+    </c:legend>
+    <c:plotVisOnly val="1"/>
+    <c:dispBlanksAs val="span"/>
+  </c:chart>
+  <c:spPr>
+    <a:noFill/>
+    <a:ln>
+      <a:noFill/>
+    </a:ln>
+    <a:effectLst/>
+  </c:spPr>
+  <c:externalData r:id="rId1">
+    <c:autoUpdate val="0"/>
+  </c:externalData>
+</c:chartSpace>
+</file>
+
+<file path=ppt/charts/chart35.xml><?xml version="1.0" encoding="utf-8"?>
+<c:chartSpace xmlns:c="http://schemas.openxmlformats.org/drawingml/2006/chart" xmlns:a="http://schemas.openxmlformats.org/drawingml/2006/main" xmlns:r="http://schemas.openxmlformats.org/officeDocument/2006/relationships">
+  <c:date1904 val="0"/>
+  <c:roundedCorners val="1"/>
+  <c:chart>
+    <c:autoTitleDeleted val="1"/>
+    <c:plotArea>
+      <c:layout/>
+      <c:barChart>
+        <c:barDir val="bar"/>
         <c:grouping val="clustered"/>
         <c:varyColors val="0"/>
         <c:ser>
@@ -17372,6 +18602,182 @@
 </p:notes>
 </file>
 
+<file path=ppt/notesSlides/notesSlide38.xml><?xml version="1.0" encoding="utf-8"?>
+<p:notes xmlns:a="http://schemas.openxmlformats.org/drawingml/2006/main" xmlns:r="http://schemas.openxmlformats.org/officeDocument/2006/relationships" xmlns:p="http://schemas.openxmlformats.org/presentationml/2006/main">
+  <p:cSld>
+    <p:spTree>
+      <p:nvGrpSpPr>
+        <p:cNvPr id="1" name=""/>
+        <p:cNvGrpSpPr/>
+        <p:nvPr/>
+      </p:nvGrpSpPr>
+      <p:grpSpPr>
+        <a:xfrm>
+          <a:off x="0" y="0"/>
+          <a:ext cx="0" cy="0"/>
+          <a:chOff x="0" y="0"/>
+          <a:chExt cx="0" cy="0"/>
+        </a:xfrm>
+      </p:grpSpPr>
+      <p:sp>
+        <p:nvSpPr>
+          <p:cNvPr id="2" name="Slide Image Placeholder 1"/>
+          <p:cNvSpPr>
+            <a:spLocks noGrp="1" noRot="1" noChangeAspect="1"/>
+          </p:cNvSpPr>
+          <p:nvPr>
+            <p:ph type="sldImg"/>
+          </p:nvPr>
+        </p:nvSpPr>
+        <p:spPr/>
+      </p:sp>
+      <p:sp>
+        <p:nvSpPr>
+          <p:cNvPr id="3" name="Notes Placeholder 2"/>
+          <p:cNvSpPr>
+            <a:spLocks noGrp="1"/>
+          </p:cNvSpPr>
+          <p:nvPr>
+            <p:ph type="body" idx="1"/>
+          </p:nvPr>
+        </p:nvSpPr>
+        <p:spPr/>
+        <p:txBody>
+          <a:bodyPr/>
+          <a:lstStyle/>
+          <a:p>
+            <a:r>
+              <a:rPr lang="en-US" dirty="0"/>
+              <a:t/>
+            </a:r>
+            <a:endParaRPr lang="en-US" dirty="0"/>
+          </a:p>
+        </p:txBody>
+      </p:sp>
+      <p:sp>
+        <p:nvSpPr>
+          <p:cNvPr id="4" name="Slide Number Placeholder 3"/>
+          <p:cNvSpPr>
+            <a:spLocks noGrp="1"/>
+          </p:cNvSpPr>
+          <p:nvPr>
+            <p:ph type="sldNum" sz="quarter" idx="10"/>
+          </p:nvPr>
+        </p:nvSpPr>
+        <p:spPr/>
+        <p:txBody>
+          <a:bodyPr/>
+          <a:lstStyle/>
+          <a:p>
+            <a:fld id="{F7021451-1387-4CA6-816F-3879F97B5CBC}" type="slidenum">
+              <a:rPr lang="en-US"/>
+              <a:t>38</a:t>
+            </a:fld>
+            <a:endParaRPr lang="en-US"/>
+          </a:p>
+        </p:txBody>
+      </p:sp>
+    </p:spTree>
+    <p:extLst>
+      <p:ext uri="{BB962C8B-B14F-4D97-AF65-F5344CB8AC3E}">
+        <p14:creationId xmlns:p14="http://schemas.microsoft.com/office/powerpoint/2010/main" val="1024086991"/>
+      </p:ext>
+    </p:extLst>
+  </p:cSld>
+  <p:clrMapOvr>
+    <a:masterClrMapping/>
+  </p:clrMapOvr>
+</p:notes>
+</file>
+
+<file path=ppt/notesSlides/notesSlide39.xml><?xml version="1.0" encoding="utf-8"?>
+<p:notes xmlns:a="http://schemas.openxmlformats.org/drawingml/2006/main" xmlns:r="http://schemas.openxmlformats.org/officeDocument/2006/relationships" xmlns:p="http://schemas.openxmlformats.org/presentationml/2006/main">
+  <p:cSld>
+    <p:spTree>
+      <p:nvGrpSpPr>
+        <p:cNvPr id="1" name=""/>
+        <p:cNvGrpSpPr/>
+        <p:nvPr/>
+      </p:nvGrpSpPr>
+      <p:grpSpPr>
+        <a:xfrm>
+          <a:off x="0" y="0"/>
+          <a:ext cx="0" cy="0"/>
+          <a:chOff x="0" y="0"/>
+          <a:chExt cx="0" cy="0"/>
+        </a:xfrm>
+      </p:grpSpPr>
+      <p:sp>
+        <p:nvSpPr>
+          <p:cNvPr id="2" name="Slide Image Placeholder 1"/>
+          <p:cNvSpPr>
+            <a:spLocks noGrp="1" noRot="1" noChangeAspect="1"/>
+          </p:cNvSpPr>
+          <p:nvPr>
+            <p:ph type="sldImg"/>
+          </p:nvPr>
+        </p:nvSpPr>
+        <p:spPr/>
+      </p:sp>
+      <p:sp>
+        <p:nvSpPr>
+          <p:cNvPr id="3" name="Notes Placeholder 2"/>
+          <p:cNvSpPr>
+            <a:spLocks noGrp="1"/>
+          </p:cNvSpPr>
+          <p:nvPr>
+            <p:ph type="body" idx="1"/>
+          </p:nvPr>
+        </p:nvSpPr>
+        <p:spPr/>
+        <p:txBody>
+          <a:bodyPr/>
+          <a:lstStyle/>
+          <a:p>
+            <a:r>
+              <a:rPr lang="en-US" dirty="0"/>
+              <a:t/>
+            </a:r>
+            <a:endParaRPr lang="en-US" dirty="0"/>
+          </a:p>
+        </p:txBody>
+      </p:sp>
+      <p:sp>
+        <p:nvSpPr>
+          <p:cNvPr id="4" name="Slide Number Placeholder 3"/>
+          <p:cNvSpPr>
+            <a:spLocks noGrp="1"/>
+          </p:cNvSpPr>
+          <p:nvPr>
+            <p:ph type="sldNum" sz="quarter" idx="10"/>
+          </p:nvPr>
+        </p:nvSpPr>
+        <p:spPr/>
+        <p:txBody>
+          <a:bodyPr/>
+          <a:lstStyle/>
+          <a:p>
+            <a:fld id="{F7021451-1387-4CA6-816F-3879F97B5CBC}" type="slidenum">
+              <a:rPr lang="en-US"/>
+              <a:t>39</a:t>
+            </a:fld>
+            <a:endParaRPr lang="en-US"/>
+          </a:p>
+        </p:txBody>
+      </p:sp>
+    </p:spTree>
+    <p:extLst>
+      <p:ext uri="{BB962C8B-B14F-4D97-AF65-F5344CB8AC3E}">
+        <p14:creationId xmlns:p14="http://schemas.microsoft.com/office/powerpoint/2010/main" val="1024086991"/>
+      </p:ext>
+    </p:extLst>
+  </p:cSld>
+  <p:clrMapOvr>
+    <a:masterClrMapping/>
+  </p:clrMapOvr>
+</p:notes>
+</file>
+
 <file path=ppt/notesSlides/notesSlide4.xml><?xml version="1.0" encoding="utf-8"?>
 <p:notes xmlns:a="http://schemas.openxmlformats.org/drawingml/2006/main" xmlns:r="http://schemas.openxmlformats.org/officeDocument/2006/relationships" xmlns:p="http://schemas.openxmlformats.org/presentationml/2006/main">
   <p:cSld>
@@ -17442,6 +18848,94 @@
             <a:fld id="{F7021451-1387-4CA6-816F-3879F97B5CBC}" type="slidenum">
               <a:rPr lang="en-US"/>
               <a:t>4</a:t>
+            </a:fld>
+            <a:endParaRPr lang="en-US"/>
+          </a:p>
+        </p:txBody>
+      </p:sp>
+    </p:spTree>
+    <p:extLst>
+      <p:ext uri="{BB962C8B-B14F-4D97-AF65-F5344CB8AC3E}">
+        <p14:creationId xmlns:p14="http://schemas.microsoft.com/office/powerpoint/2010/main" val="1024086991"/>
+      </p:ext>
+    </p:extLst>
+  </p:cSld>
+  <p:clrMapOvr>
+    <a:masterClrMapping/>
+  </p:clrMapOvr>
+</p:notes>
+</file>
+
+<file path=ppt/notesSlides/notesSlide40.xml><?xml version="1.0" encoding="utf-8"?>
+<p:notes xmlns:a="http://schemas.openxmlformats.org/drawingml/2006/main" xmlns:r="http://schemas.openxmlformats.org/officeDocument/2006/relationships" xmlns:p="http://schemas.openxmlformats.org/presentationml/2006/main">
+  <p:cSld>
+    <p:spTree>
+      <p:nvGrpSpPr>
+        <p:cNvPr id="1" name=""/>
+        <p:cNvGrpSpPr/>
+        <p:nvPr/>
+      </p:nvGrpSpPr>
+      <p:grpSpPr>
+        <a:xfrm>
+          <a:off x="0" y="0"/>
+          <a:ext cx="0" cy="0"/>
+          <a:chOff x="0" y="0"/>
+          <a:chExt cx="0" cy="0"/>
+        </a:xfrm>
+      </p:grpSpPr>
+      <p:sp>
+        <p:nvSpPr>
+          <p:cNvPr id="2" name="Slide Image Placeholder 1"/>
+          <p:cNvSpPr>
+            <a:spLocks noGrp="1" noRot="1" noChangeAspect="1"/>
+          </p:cNvSpPr>
+          <p:nvPr>
+            <p:ph type="sldImg"/>
+          </p:nvPr>
+        </p:nvSpPr>
+        <p:spPr/>
+      </p:sp>
+      <p:sp>
+        <p:nvSpPr>
+          <p:cNvPr id="3" name="Notes Placeholder 2"/>
+          <p:cNvSpPr>
+            <a:spLocks noGrp="1"/>
+          </p:cNvSpPr>
+          <p:nvPr>
+            <p:ph type="body" idx="1"/>
+          </p:nvPr>
+        </p:nvSpPr>
+        <p:spPr/>
+        <p:txBody>
+          <a:bodyPr/>
+          <a:lstStyle/>
+          <a:p>
+            <a:r>
+              <a:rPr lang="en-US" dirty="0"/>
+              <a:t/>
+            </a:r>
+            <a:endParaRPr lang="en-US" dirty="0"/>
+          </a:p>
+        </p:txBody>
+      </p:sp>
+      <p:sp>
+        <p:nvSpPr>
+          <p:cNvPr id="4" name="Slide Number Placeholder 3"/>
+          <p:cNvSpPr>
+            <a:spLocks noGrp="1"/>
+          </p:cNvSpPr>
+          <p:nvPr>
+            <p:ph type="sldNum" sz="quarter" idx="10"/>
+          </p:nvPr>
+        </p:nvSpPr>
+        <p:spPr/>
+        <p:txBody>
+          <a:bodyPr/>
+          <a:lstStyle/>
+          <a:p>
+            <a:fld id="{F7021451-1387-4CA6-816F-3879F97B5CBC}" type="slidenum">
+              <a:rPr lang="en-US"/>
+              <a:t>40</a:t>
             </a:fld>
             <a:endParaRPr lang="en-US"/>
           </a:p>
@@ -29671,7 +31165,7 @@
                 <a:ea typeface="Calibri" pitchFamily="34" charset="-122"/>
                 <a:cs typeface="Calibri" pitchFamily="34" charset="-120"/>
               </a:rPr>
-              <a:t>Upcoming Regulatory / Market Change With Greatest Expected Impact</a:t>
+              <a:t>Fraud Investment Relative to Regulatory Requirements — By Region</a:t>
             </a:r>
             <a:endParaRPr lang="en-US" sz="1900" dirty="0"/>
           </a:p>
@@ -29713,7 +31207,7 @@
                 <a:ea typeface="Calibri" pitchFamily="34" charset="-122"/>
                 <a:cs typeface="Calibri" pitchFamily="34" charset="-120"/>
               </a:rPr>
-              <a:t>Identity and authentication tops a close three-way race for the next big disruption.</a:t>
+              <a:t>The remediation-first pattern holds broadly across markets, though Canada leans even more toward fixing existing gaps.</a:t>
             </a:r>
             <a:endParaRPr lang="en-US" sz="1350" dirty="0"/>
           </a:p>
@@ -29778,7 +31272,7 @@
                 <a:ea typeface="IBM Plex Mono" pitchFamily="34" charset="-122"/>
                 <a:cs typeface="IBM Plex Mono" pitchFamily="34" charset="-120"/>
               </a:rPr>
-              <a:t>Q11  </a:t>
+              <a:t>Q10  </a:t>
             </a:r>
             <a:pPr algn="l" indent="0" marL="0">
               <a:lnSpc>
@@ -29795,7 +31289,7 @@
                 <a:ea typeface="Calibri" pitchFamily="34" charset="-122"/>
                 <a:cs typeface="Calibri" pitchFamily="34" charset="-120"/>
               </a:rPr>
-              <a:t>“Which upcoming regulatory or market changes is expected to have the greatest impact on your fraud program?”</a:t>
+              <a:t>“Which statement best reflects how your organization is allocating fraud-related investment in response to regulatory and compliance requirements? (by region, all respondents)”</a:t>
             </a:r>
             <a:endParaRPr lang="en-US" sz="1000" dirty="0"/>
           </a:p>
@@ -29915,7 +31409,7 @@
                 <a:ea typeface="Calibri" pitchFamily="34" charset="-122"/>
                 <a:cs typeface="Calibri" pitchFamily="34" charset="-120"/>
               </a:rPr>
-              <a:t>Ranked top 3 — shown as % of respondents who placed the option anywhere in their top 3 (not mutually exclusive; bars don't sum to 100%).  </a:t>
+              <a:t>Single select — % shown is each region's share of the full 100-respondent sample, so segments sum to the overall figure in each category label. Australia (n=8) and Singapore (n=4) are thin samples, shown directionally.  </a:t>
             </a:r>
             <a:pPr algn="l" indent="0" marL="0">
               <a:lnSpc>
@@ -29949,7 +31443,7 @@
                 <a:ea typeface="Calibri" pitchFamily="34" charset="-122"/>
                 <a:cs typeface="Calibri" pitchFamily="34" charset="-120"/>
               </a:rPr>
-              <a:t>“Payment innovation and adoption (e.g., real-time payments, stable coins, agentic payments)”</a:t>
+              <a:t>“Primarily investing to meet upcoming and draft regulatory requirements”</a:t>
             </a:r>
             <a:pPr algn="l" indent="0" marL="0">
               <a:lnSpc>
@@ -29983,7 +31477,7 @@
                 <a:ea typeface="Calibri" pitchFamily="34" charset="-122"/>
                 <a:cs typeface="Calibri" pitchFamily="34" charset="-120"/>
               </a:rPr>
-              <a:t>“Liability and reimbursement changes”</a:t>
+              <a:t>“Primarily investing to remediate existing compliance and control gaps”</a:t>
             </a:r>
             <a:pPr algn="l" indent="0" marL="0">
               <a:lnSpc>
@@ -30017,109 +31511,7 @@
                 <a:ea typeface="Calibri" pitchFamily="34" charset="-122"/>
                 <a:cs typeface="Calibri" pitchFamily="34" charset="-120"/>
               </a:rPr>
-              <a:t>“Open Banking / Consumer-driven banking initiatives”</a:t>
-            </a:r>
-            <a:pPr algn="l" indent="0" marL="0">
-              <a:lnSpc>
-                <a:spcPct val="118000"/>
-              </a:lnSpc>
-              <a:buNone/>
-            </a:pPr>
-            <a:r>
-              <a:rPr lang="en-US" sz="850" dirty="0">
-                <a:solidFill>
-                  <a:srgbClr val="D0D0CE"/>
-                </a:solidFill>
-                <a:latin typeface="Calibri" pitchFamily="34" charset="0"/>
-                <a:ea typeface="Calibri" pitchFamily="34" charset="-122"/>
-                <a:cs typeface="Calibri" pitchFamily="34" charset="-120"/>
-              </a:rPr>
-              <a:t>  ·  </a:t>
-            </a:r>
-            <a:pPr algn="l" indent="0" marL="0">
-              <a:lnSpc>
-                <a:spcPct val="118000"/>
-              </a:lnSpc>
-              <a:buNone/>
-            </a:pPr>
-            <a:r>
-              <a:rPr lang="en-US" sz="850" i="1" dirty="0">
-                <a:solidFill>
-                  <a:srgbClr val="53565A"/>
-                </a:solidFill>
-                <a:latin typeface="Calibri" pitchFamily="34" charset="0"/>
-                <a:ea typeface="Calibri" pitchFamily="34" charset="-122"/>
-                <a:cs typeface="Calibri" pitchFamily="34" charset="-120"/>
-              </a:rPr>
-              <a:t>“AML related modernization initiatives”</a:t>
-            </a:r>
-            <a:pPr algn="l" indent="0" marL="0">
-              <a:lnSpc>
-                <a:spcPct val="118000"/>
-              </a:lnSpc>
-              <a:buNone/>
-            </a:pPr>
-            <a:r>
-              <a:rPr lang="en-US" sz="850" dirty="0">
-                <a:solidFill>
-                  <a:srgbClr val="D0D0CE"/>
-                </a:solidFill>
-                <a:latin typeface="Calibri" pitchFamily="34" charset="0"/>
-                <a:ea typeface="Calibri" pitchFamily="34" charset="-122"/>
-                <a:cs typeface="Calibri" pitchFamily="34" charset="-120"/>
-              </a:rPr>
-              <a:t>  ·  </a:t>
-            </a:r>
-            <a:pPr algn="l" indent="0" marL="0">
-              <a:lnSpc>
-                <a:spcPct val="118000"/>
-              </a:lnSpc>
-              <a:buNone/>
-            </a:pPr>
-            <a:r>
-              <a:rPr lang="en-US" sz="850" i="1" dirty="0">
-                <a:solidFill>
-                  <a:srgbClr val="53565A"/>
-                </a:solidFill>
-                <a:latin typeface="Calibri" pitchFamily="34" charset="0"/>
-                <a:ea typeface="Calibri" pitchFamily="34" charset="-122"/>
-                <a:cs typeface="Calibri" pitchFamily="34" charset="-120"/>
-              </a:rPr>
-              <a:t>“Privacy, data-sharing requirements, and AI governance requirements”</a:t>
-            </a:r>
-            <a:pPr algn="l" indent="0" marL="0">
-              <a:lnSpc>
-                <a:spcPct val="118000"/>
-              </a:lnSpc>
-              <a:buNone/>
-            </a:pPr>
-            <a:r>
-              <a:rPr lang="en-US" sz="850" dirty="0">
-                <a:solidFill>
-                  <a:srgbClr val="D0D0CE"/>
-                </a:solidFill>
-                <a:latin typeface="Calibri" pitchFamily="34" charset="0"/>
-                <a:ea typeface="Calibri" pitchFamily="34" charset="-122"/>
-                <a:cs typeface="Calibri" pitchFamily="34" charset="-120"/>
-              </a:rPr>
-              <a:t>  ·  </a:t>
-            </a:r>
-            <a:pPr algn="l" indent="0" marL="0">
-              <a:lnSpc>
-                <a:spcPct val="118000"/>
-              </a:lnSpc>
-              <a:buNone/>
-            </a:pPr>
-            <a:r>
-              <a:rPr lang="en-US" sz="850" i="1" dirty="0">
-                <a:solidFill>
-                  <a:srgbClr val="53565A"/>
-                </a:solidFill>
-                <a:latin typeface="Calibri" pitchFamily="34" charset="0"/>
-                <a:ea typeface="Calibri" pitchFamily="34" charset="-122"/>
-                <a:cs typeface="Calibri" pitchFamily="34" charset="-120"/>
-              </a:rPr>
-              <a:t>“Customer identity, authentication, and digital trust expectations”</a:t>
+              <a:t>“Regulatory requirements are not a primary driver of fraud-related investment”</a:t>
             </a:r>
             <a:endParaRPr lang="en-US" sz="850" dirty="0"/>
           </a:p>
@@ -30139,7 +31531,7 @@
     <p:bg>
       <p:bgPr>
         <a:solidFill>
-          <a:srgbClr val="86BC25"/>
+          <a:srgbClr val="FFFFFF"/>
         </a:solidFill>
       </p:bgPr>
     </p:bg>
@@ -30165,8 +31557,8 @@
         </p:nvSpPr>
         <p:spPr>
           <a:xfrm>
-            <a:off x="502920" y="1699870"/>
-            <a:ext cx="10415016" cy="1591970"/>
+            <a:off x="502006" y="256032"/>
+            <a:ext cx="11188598" cy="310896"/>
           </a:xfrm>
           <a:prstGeom prst="rect">
             <a:avLst/>
@@ -30175,30 +31567,154 @@
           <a:ln/>
         </p:spPr>
         <p:txBody>
-          <a:bodyPr wrap="square" lIns="0" tIns="0" rIns="0" bIns="0" rtlCol="0" anchor="b"/>
+          <a:bodyPr wrap="square" lIns="0" tIns="0" rIns="0" bIns="0" rtlCol="0" anchor="t"/>
           <a:lstStyle/>
           <a:p>
             <a:pPr algn="l" indent="0" marL="0">
               <a:buNone/>
             </a:pPr>
             <a:r>
-              <a:rPr lang="en-US" sz="3600" b="1" dirty="0">
-                <a:solidFill>
-                  <a:srgbClr val="FFFFFF"/>
-                </a:solidFill>
-                <a:latin typeface="Calibri" pitchFamily="34" charset="0"/>
-                <a:ea typeface="Calibri" pitchFamily="34" charset="-122"/>
-                <a:cs typeface="Calibri" pitchFamily="34" charset="-120"/>
-              </a:rPr>
-              <a:t>6. Looking Ahead Three Years</a:t>
-            </a:r>
-            <a:endParaRPr lang="en-US" sz="3600" dirty="0"/>
+              <a:rPr lang="en-US" sz="1900" b="1" dirty="0">
+                <a:solidFill>
+                  <a:srgbClr val="000000"/>
+                </a:solidFill>
+                <a:latin typeface="Calibri" pitchFamily="34" charset="0"/>
+                <a:ea typeface="Calibri" pitchFamily="34" charset="-122"/>
+                <a:cs typeface="Calibri" pitchFamily="34" charset="-120"/>
+              </a:rPr>
+              <a:t>Regulatory Investment Focus — Insurance, by Institution Tier</a:t>
+            </a:r>
+            <a:endParaRPr lang="en-US" sz="1900" dirty="0"/>
           </a:p>
         </p:txBody>
       </p:sp>
       <p:sp>
         <p:nvSpPr>
           <p:cNvPr id="3" name="Text 1"/>
+          <p:cNvSpPr txBox="1"/>
+          <p:nvPr/>
+        </p:nvSpPr>
+        <p:spPr>
+          <a:xfrm>
+            <a:off x="502006" y="585216"/>
+            <a:ext cx="11188598" cy="713232"/>
+          </a:xfrm>
+          <a:prstGeom prst="rect">
+            <a:avLst/>
+          </a:prstGeom>
+          <a:noFill/>
+          <a:ln/>
+        </p:spPr>
+        <p:txBody>
+          <a:bodyPr wrap="square" lIns="0" tIns="0" rIns="0" bIns="0" rtlCol="0" anchor="t"/>
+          <a:lstStyle/>
+          <a:p>
+            <a:pPr algn="l" indent="0" marL="0">
+              <a:lnSpc>
+                <a:spcPct val="105000"/>
+              </a:lnSpc>
+              <a:buNone/>
+            </a:pPr>
+            <a:r>
+              <a:rPr lang="en-US" sz="1350" b="1" dirty="0">
+                <a:solidFill>
+                  <a:srgbClr val="046A38"/>
+                </a:solidFill>
+                <a:latin typeface="Calibri" pitchFamily="34" charset="0"/>
+                <a:ea typeface="Calibri" pitchFamily="34" charset="-122"/>
+                <a:cs typeface="Calibri" pitchFamily="34" charset="-120"/>
+              </a:rPr>
+              <a:t>Large Insurance Carriers lean hardest into remediation; Top 50 carriers split more evenly toward getting ahead of upcoming rules.</a:t>
+            </a:r>
+            <a:endParaRPr lang="en-US" sz="1350" dirty="0"/>
+          </a:p>
+        </p:txBody>
+      </p:sp>
+      <p:sp>
+        <p:nvSpPr>
+          <p:cNvPr id="4" name="Shape 2"/>
+          <p:cNvSpPr/>
+          <p:nvPr/>
+        </p:nvSpPr>
+        <p:spPr>
+          <a:xfrm>
+            <a:off x="502006" y="1335024"/>
+            <a:ext cx="0" cy="512064"/>
+          </a:xfrm>
+          <a:prstGeom prst="line">
+            <a:avLst/>
+          </a:prstGeom>
+          <a:noFill/>
+          <a:ln w="25400">
+            <a:solidFill>
+              <a:srgbClr val="D0D0CE"/>
+            </a:solidFill>
+            <a:prstDash val="solid"/>
+          </a:ln>
+        </p:spPr>
+      </p:sp>
+      <p:sp>
+        <p:nvSpPr>
+          <p:cNvPr id="5" name="Text 3"/>
+          <p:cNvSpPr txBox="1"/>
+          <p:nvPr/>
+        </p:nvSpPr>
+        <p:spPr>
+          <a:xfrm>
+            <a:off x="648310" y="1335024"/>
+            <a:ext cx="11042294" cy="512064"/>
+          </a:xfrm>
+          <a:prstGeom prst="rect">
+            <a:avLst/>
+          </a:prstGeom>
+          <a:noFill/>
+          <a:ln/>
+        </p:spPr>
+        <p:txBody>
+          <a:bodyPr wrap="square" lIns="0" tIns="0" rIns="0" bIns="0" rtlCol="0" anchor="t"/>
+          <a:lstStyle/>
+          <a:p>
+            <a:pPr algn="l" indent="0" marL="0">
+              <a:lnSpc>
+                <a:spcPct val="106000"/>
+              </a:lnSpc>
+              <a:buNone/>
+            </a:pPr>
+            <a:r>
+              <a:rPr lang="en-US" sz="900" b="1" dirty="0">
+                <a:solidFill>
+                  <a:srgbClr val="046A38"/>
+                </a:solidFill>
+                <a:latin typeface="IBM Plex Mono" pitchFamily="34" charset="0"/>
+                <a:ea typeface="IBM Plex Mono" pitchFamily="34" charset="-122"/>
+                <a:cs typeface="IBM Plex Mono" pitchFamily="34" charset="-120"/>
+              </a:rPr>
+              <a:t>Q10 / S9  </a:t>
+            </a:r>
+            <a:pPr algn="l" indent="0" marL="0">
+              <a:lnSpc>
+                <a:spcPct val="106000"/>
+              </a:lnSpc>
+              <a:buNone/>
+            </a:pPr>
+            <a:r>
+              <a:rPr lang="en-US" sz="1000" i="1" dirty="0">
+                <a:solidFill>
+                  <a:srgbClr val="575757"/>
+                </a:solidFill>
+                <a:latin typeface="Calibri" pitchFamily="34" charset="0"/>
+                <a:ea typeface="Calibri" pitchFamily="34" charset="-122"/>
+                <a:cs typeface="Calibri" pitchFamily="34" charset="-120"/>
+              </a:rPr>
+              <a:t>“Which statement best reflects how your organization is allocating fraud-related investment in response to regulatory and compliance requirements? (Insurance only, by institution tier)”</a:t>
+            </a:r>
+            <a:endParaRPr lang="en-US" sz="1000" dirty="0"/>
+          </a:p>
+        </p:txBody>
+      </p:sp>
+      <p:sp>
+        <p:nvSpPr>
+          <p:cNvPr id="6" name="Text 4"/>
           <p:cNvSpPr txBox="1"/>
           <p:nvPr/>
         </p:nvSpPr>
@@ -30223,7 +31739,7 @@
             <a:r>
               <a:rPr lang="en-US" sz="900" dirty="0">
                 <a:solidFill>
-                  <a:srgbClr val="FFFFFF"/>
+                  <a:srgbClr val="53565A"/>
                 </a:solidFill>
                 <a:latin typeface="Calibri" pitchFamily="34" charset="0"/>
                 <a:ea typeface="Calibri" pitchFamily="34" charset="-122"/>
@@ -30232,6 +31748,189 @@
               <a:t>34</a:t>
             </a:r>
             <a:endParaRPr lang="en-US" sz="900" dirty="0"/>
+          </a:p>
+        </p:txBody>
+      </p:sp>
+      <p:graphicFrame>
+        <p:nvGraphicFramePr>
+          <p:cNvPr id="7" name="Chart 0" descr=""/>
+          <p:cNvGraphicFramePr/>
+          <p:nvPr/>
+        </p:nvGraphicFramePr>
+        <p:xfrm>
+          <a:off x="502006" y="2011680"/>
+          <a:ext cx="11188598" cy="3063240"/>
+        </p:xfrm>
+        <a:graphic xmlns:a="http://schemas.openxmlformats.org/drawingml/2006/main">
+          <a:graphicData uri="http://schemas.openxmlformats.org/drawingml/2006/chart">
+            <c:chart xmlns:c="http://schemas.openxmlformats.org/drawingml/2006/chart" r:id="rId1"/>
+          </a:graphicData>
+        </a:graphic>
+      </p:graphicFrame>
+      <p:sp>
+        <p:nvSpPr>
+          <p:cNvPr id="8" name="Shape 5"/>
+          <p:cNvSpPr/>
+          <p:nvPr/>
+        </p:nvSpPr>
+        <p:spPr>
+          <a:xfrm>
+            <a:off x="502006" y="5202936"/>
+            <a:ext cx="11188598" cy="0"/>
+          </a:xfrm>
+          <a:prstGeom prst="line">
+            <a:avLst/>
+          </a:prstGeom>
+          <a:noFill/>
+          <a:ln w="9525">
+            <a:solidFill>
+              <a:srgbClr val="D0D0CE"/>
+            </a:solidFill>
+            <a:prstDash val="solid"/>
+          </a:ln>
+        </p:spPr>
+      </p:sp>
+      <p:sp>
+        <p:nvSpPr>
+          <p:cNvPr id="9" name="Text 6"/>
+          <p:cNvSpPr txBox="1"/>
+          <p:nvPr/>
+        </p:nvSpPr>
+        <p:spPr>
+          <a:xfrm>
+            <a:off x="502006" y="5276088"/>
+            <a:ext cx="11188598" cy="886968"/>
+          </a:xfrm>
+          <a:prstGeom prst="rect">
+            <a:avLst/>
+          </a:prstGeom>
+          <a:noFill/>
+          <a:ln/>
+        </p:spPr>
+        <p:txBody>
+          <a:bodyPr wrap="square" lIns="0" tIns="0" rIns="0" bIns="0" rtlCol="0" anchor="t"/>
+          <a:lstStyle/>
+          <a:p>
+            <a:pPr algn="l" indent="0" marL="0">
+              <a:lnSpc>
+                <a:spcPct val="118000"/>
+              </a:lnSpc>
+              <a:buNone/>
+            </a:pPr>
+            <a:r>
+              <a:rPr lang="en-US" sz="850" b="1" dirty="0">
+                <a:solidFill>
+                  <a:srgbClr val="53565A"/>
+                </a:solidFill>
+                <a:latin typeface="Calibri" pitchFamily="34" charset="0"/>
+                <a:ea typeface="Calibri" pitchFamily="34" charset="-122"/>
+                <a:cs typeface="Calibri" pitchFamily="34" charset="-120"/>
+              </a:rPr>
+              <a:t>Single select. Institution tier based on S9; 1 respondent who did not directly answer was classified as Large Insurance Carrier from their employer description elsewhere in the survey (Large is n=10 = 9 direct + 1 reclassified).  </a:t>
+            </a:r>
+            <a:pPr algn="l" indent="0" marL="0">
+              <a:lnSpc>
+                <a:spcPct val="118000"/>
+              </a:lnSpc>
+              <a:buNone/>
+            </a:pPr>
+            <a:r>
+              <a:rPr lang="en-US" sz="850" b="1" dirty="0">
+                <a:solidFill>
+                  <a:srgbClr val="53565A"/>
+                </a:solidFill>
+                <a:latin typeface="Calibri" pitchFamily="34" charset="0"/>
+                <a:ea typeface="Calibri" pitchFamily="34" charset="-122"/>
+                <a:cs typeface="Calibri" pitchFamily="34" charset="-120"/>
+              </a:rPr>
+              <a:t>Response options as fielded: </a:t>
+            </a:r>
+            <a:pPr algn="l" indent="0" marL="0">
+              <a:lnSpc>
+                <a:spcPct val="118000"/>
+              </a:lnSpc>
+              <a:buNone/>
+            </a:pPr>
+            <a:r>
+              <a:rPr lang="en-US" sz="850" i="1" dirty="0">
+                <a:solidFill>
+                  <a:srgbClr val="53565A"/>
+                </a:solidFill>
+                <a:latin typeface="Calibri" pitchFamily="34" charset="0"/>
+                <a:ea typeface="Calibri" pitchFamily="34" charset="-122"/>
+                <a:cs typeface="Calibri" pitchFamily="34" charset="-120"/>
+              </a:rPr>
+              <a:t>“Primarily investing to meet upcoming and draft regulatory requirements”</a:t>
+            </a:r>
+            <a:pPr algn="l" indent="0" marL="0">
+              <a:lnSpc>
+                <a:spcPct val="118000"/>
+              </a:lnSpc>
+              <a:buNone/>
+            </a:pPr>
+            <a:r>
+              <a:rPr lang="en-US" sz="850" dirty="0">
+                <a:solidFill>
+                  <a:srgbClr val="D0D0CE"/>
+                </a:solidFill>
+                <a:latin typeface="Calibri" pitchFamily="34" charset="0"/>
+                <a:ea typeface="Calibri" pitchFamily="34" charset="-122"/>
+                <a:cs typeface="Calibri" pitchFamily="34" charset="-120"/>
+              </a:rPr>
+              <a:t>  ·  </a:t>
+            </a:r>
+            <a:pPr algn="l" indent="0" marL="0">
+              <a:lnSpc>
+                <a:spcPct val="118000"/>
+              </a:lnSpc>
+              <a:buNone/>
+            </a:pPr>
+            <a:r>
+              <a:rPr lang="en-US" sz="850" i="1" dirty="0">
+                <a:solidFill>
+                  <a:srgbClr val="53565A"/>
+                </a:solidFill>
+                <a:latin typeface="Calibri" pitchFamily="34" charset="0"/>
+                <a:ea typeface="Calibri" pitchFamily="34" charset="-122"/>
+                <a:cs typeface="Calibri" pitchFamily="34" charset="-120"/>
+              </a:rPr>
+              <a:t>“Primarily investing to remediate existing compliance and control gaps”</a:t>
+            </a:r>
+            <a:pPr algn="l" indent="0" marL="0">
+              <a:lnSpc>
+                <a:spcPct val="118000"/>
+              </a:lnSpc>
+              <a:buNone/>
+            </a:pPr>
+            <a:r>
+              <a:rPr lang="en-US" sz="850" dirty="0">
+                <a:solidFill>
+                  <a:srgbClr val="D0D0CE"/>
+                </a:solidFill>
+                <a:latin typeface="Calibri" pitchFamily="34" charset="0"/>
+                <a:ea typeface="Calibri" pitchFamily="34" charset="-122"/>
+                <a:cs typeface="Calibri" pitchFamily="34" charset="-120"/>
+              </a:rPr>
+              <a:t>  ·  </a:t>
+            </a:r>
+            <a:pPr algn="l" indent="0" marL="0">
+              <a:lnSpc>
+                <a:spcPct val="118000"/>
+              </a:lnSpc>
+              <a:buNone/>
+            </a:pPr>
+            <a:r>
+              <a:rPr lang="en-US" sz="850" i="1" dirty="0">
+                <a:solidFill>
+                  <a:srgbClr val="53565A"/>
+                </a:solidFill>
+                <a:latin typeface="Calibri" pitchFamily="34" charset="0"/>
+                <a:ea typeface="Calibri" pitchFamily="34" charset="-122"/>
+                <a:cs typeface="Calibri" pitchFamily="34" charset="-120"/>
+              </a:rPr>
+              <a:t>“Regulatory requirements are not a primary driver of fraud-related investment”</a:t>
+            </a:r>
+            <a:endParaRPr lang="en-US" sz="850" dirty="0"/>
           </a:p>
         </p:txBody>
       </p:sp>
@@ -30300,7 +31999,7 @@
                 <a:ea typeface="Calibri" pitchFamily="34" charset="-122"/>
                 <a:cs typeface="Calibri" pitchFamily="34" charset="-120"/>
               </a:rPr>
-              <a:t>What Leaders Say, Unprompted</a:t>
+              <a:t>Regulatory Investment Focus — Banking, by Institution Tier</a:t>
             </a:r>
             <a:endParaRPr lang="en-US" sz="1900" dirty="0"/>
           </a:p>
@@ -30342,7 +32041,7 @@
                 <a:ea typeface="Calibri" pitchFamily="34" charset="-122"/>
                 <a:cs typeface="Calibri" pitchFamily="34" charset="-120"/>
               </a:rPr>
-              <a:t>Left to answer in their own words, leaders converge on the same trend.</a:t>
+              <a:t>Large Financial Institutions skew further toward remediation than Top 100 banks, who are closer to an even split.</a:t>
             </a:r>
             <a:endParaRPr lang="en-US" sz="1350" dirty="0"/>
           </a:p>
@@ -30407,7 +32106,7 @@
                 <a:ea typeface="IBM Plex Mono" pitchFamily="34" charset="-122"/>
                 <a:cs typeface="IBM Plex Mono" pitchFamily="34" charset="-120"/>
               </a:rPr>
-              <a:t>Q12  </a:t>
+              <a:t>Q10 / newS8  </a:t>
             </a:r>
             <a:pPr algn="l" indent="0" marL="0">
               <a:lnSpc>
@@ -30424,7 +32123,7 @@
                 <a:ea typeface="Calibri" pitchFamily="34" charset="-122"/>
                 <a:cs typeface="Calibri" pitchFamily="34" charset="-120"/>
               </a:rPr>
-              <a:t>“Looking ahead three years, what development do you believe will have the greatest impact on fraud risk management, and why? (open-ended)”</a:t>
+              <a:t>“Which statement best reflects how your organization is allocating fraud-related investment in response to regulatory and compliance requirements? (Banking only, by institution tier)”</a:t>
             </a:r>
             <a:endParaRPr lang="en-US" sz="1000" dirty="0"/>
           </a:p>
@@ -30464,6 +32163,1052 @@
                 <a:cs typeface="Calibri" pitchFamily="34" charset="-120"/>
               </a:rPr>
               <a:t>35</a:t>
+            </a:r>
+            <a:endParaRPr lang="en-US" sz="900" dirty="0"/>
+          </a:p>
+        </p:txBody>
+      </p:sp>
+      <p:graphicFrame>
+        <p:nvGraphicFramePr>
+          <p:cNvPr id="7" name="Chart 0" descr=""/>
+          <p:cNvGraphicFramePr/>
+          <p:nvPr/>
+        </p:nvGraphicFramePr>
+        <p:xfrm>
+          <a:off x="502006" y="2011680"/>
+          <a:ext cx="11188598" cy="3063240"/>
+        </p:xfrm>
+        <a:graphic xmlns:a="http://schemas.openxmlformats.org/drawingml/2006/main">
+          <a:graphicData uri="http://schemas.openxmlformats.org/drawingml/2006/chart">
+            <c:chart xmlns:c="http://schemas.openxmlformats.org/drawingml/2006/chart" r:id="rId1"/>
+          </a:graphicData>
+        </a:graphic>
+      </p:graphicFrame>
+      <p:sp>
+        <p:nvSpPr>
+          <p:cNvPr id="8" name="Shape 5"/>
+          <p:cNvSpPr/>
+          <p:nvPr/>
+        </p:nvSpPr>
+        <p:spPr>
+          <a:xfrm>
+            <a:off x="502006" y="5202936"/>
+            <a:ext cx="11188598" cy="0"/>
+          </a:xfrm>
+          <a:prstGeom prst="line">
+            <a:avLst/>
+          </a:prstGeom>
+          <a:noFill/>
+          <a:ln w="9525">
+            <a:solidFill>
+              <a:srgbClr val="D0D0CE"/>
+            </a:solidFill>
+            <a:prstDash val="solid"/>
+          </a:ln>
+        </p:spPr>
+      </p:sp>
+      <p:sp>
+        <p:nvSpPr>
+          <p:cNvPr id="9" name="Text 6"/>
+          <p:cNvSpPr txBox="1"/>
+          <p:nvPr/>
+        </p:nvSpPr>
+        <p:spPr>
+          <a:xfrm>
+            <a:off x="502006" y="5276088"/>
+            <a:ext cx="11188598" cy="886968"/>
+          </a:xfrm>
+          <a:prstGeom prst="rect">
+            <a:avLst/>
+          </a:prstGeom>
+          <a:noFill/>
+          <a:ln/>
+        </p:spPr>
+        <p:txBody>
+          <a:bodyPr wrap="square" lIns="0" tIns="0" rIns="0" bIns="0" rtlCol="0" anchor="t"/>
+          <a:lstStyle/>
+          <a:p>
+            <a:pPr algn="l" indent="0" marL="0">
+              <a:lnSpc>
+                <a:spcPct val="118000"/>
+              </a:lnSpc>
+              <a:buNone/>
+            </a:pPr>
+            <a:r>
+              <a:rPr lang="en-US" sz="850" b="1" dirty="0">
+                <a:solidFill>
+                  <a:srgbClr val="53565A"/>
+                </a:solidFill>
+                <a:latin typeface="Calibri" pitchFamily="34" charset="0"/>
+                <a:ea typeface="Calibri" pitchFamily="34" charset="-122"/>
+                <a:cs typeface="Calibri" pitchFamily="34" charset="-120"/>
+              </a:rPr>
+              <a:t>Single select. Institution tier based on newS8; 5 respondents who did not directly answer were classified as Top 100 from their employer description elsewhere in the survey (Top 100 is n=40 = 35 direct + 5 reclassified).  </a:t>
+            </a:r>
+            <a:pPr algn="l" indent="0" marL="0">
+              <a:lnSpc>
+                <a:spcPct val="118000"/>
+              </a:lnSpc>
+              <a:buNone/>
+            </a:pPr>
+            <a:r>
+              <a:rPr lang="en-US" sz="850" b="1" dirty="0">
+                <a:solidFill>
+                  <a:srgbClr val="53565A"/>
+                </a:solidFill>
+                <a:latin typeface="Calibri" pitchFamily="34" charset="0"/>
+                <a:ea typeface="Calibri" pitchFamily="34" charset="-122"/>
+                <a:cs typeface="Calibri" pitchFamily="34" charset="-120"/>
+              </a:rPr>
+              <a:t>Response options as fielded: </a:t>
+            </a:r>
+            <a:pPr algn="l" indent="0" marL="0">
+              <a:lnSpc>
+                <a:spcPct val="118000"/>
+              </a:lnSpc>
+              <a:buNone/>
+            </a:pPr>
+            <a:r>
+              <a:rPr lang="en-US" sz="850" i="1" dirty="0">
+                <a:solidFill>
+                  <a:srgbClr val="53565A"/>
+                </a:solidFill>
+                <a:latin typeface="Calibri" pitchFamily="34" charset="0"/>
+                <a:ea typeface="Calibri" pitchFamily="34" charset="-122"/>
+                <a:cs typeface="Calibri" pitchFamily="34" charset="-120"/>
+              </a:rPr>
+              <a:t>“Primarily investing to meet upcoming and draft regulatory requirements”</a:t>
+            </a:r>
+            <a:pPr algn="l" indent="0" marL="0">
+              <a:lnSpc>
+                <a:spcPct val="118000"/>
+              </a:lnSpc>
+              <a:buNone/>
+            </a:pPr>
+            <a:r>
+              <a:rPr lang="en-US" sz="850" dirty="0">
+                <a:solidFill>
+                  <a:srgbClr val="D0D0CE"/>
+                </a:solidFill>
+                <a:latin typeface="Calibri" pitchFamily="34" charset="0"/>
+                <a:ea typeface="Calibri" pitchFamily="34" charset="-122"/>
+                <a:cs typeface="Calibri" pitchFamily="34" charset="-120"/>
+              </a:rPr>
+              <a:t>  ·  </a:t>
+            </a:r>
+            <a:pPr algn="l" indent="0" marL="0">
+              <a:lnSpc>
+                <a:spcPct val="118000"/>
+              </a:lnSpc>
+              <a:buNone/>
+            </a:pPr>
+            <a:r>
+              <a:rPr lang="en-US" sz="850" i="1" dirty="0">
+                <a:solidFill>
+                  <a:srgbClr val="53565A"/>
+                </a:solidFill>
+                <a:latin typeface="Calibri" pitchFamily="34" charset="0"/>
+                <a:ea typeface="Calibri" pitchFamily="34" charset="-122"/>
+                <a:cs typeface="Calibri" pitchFamily="34" charset="-120"/>
+              </a:rPr>
+              <a:t>“Primarily investing to remediate existing compliance and control gaps”</a:t>
+            </a:r>
+            <a:pPr algn="l" indent="0" marL="0">
+              <a:lnSpc>
+                <a:spcPct val="118000"/>
+              </a:lnSpc>
+              <a:buNone/>
+            </a:pPr>
+            <a:r>
+              <a:rPr lang="en-US" sz="850" dirty="0">
+                <a:solidFill>
+                  <a:srgbClr val="D0D0CE"/>
+                </a:solidFill>
+                <a:latin typeface="Calibri" pitchFamily="34" charset="0"/>
+                <a:ea typeface="Calibri" pitchFamily="34" charset="-122"/>
+                <a:cs typeface="Calibri" pitchFamily="34" charset="-120"/>
+              </a:rPr>
+              <a:t>  ·  </a:t>
+            </a:r>
+            <a:pPr algn="l" indent="0" marL="0">
+              <a:lnSpc>
+                <a:spcPct val="118000"/>
+              </a:lnSpc>
+              <a:buNone/>
+            </a:pPr>
+            <a:r>
+              <a:rPr lang="en-US" sz="850" i="1" dirty="0">
+                <a:solidFill>
+                  <a:srgbClr val="53565A"/>
+                </a:solidFill>
+                <a:latin typeface="Calibri" pitchFamily="34" charset="0"/>
+                <a:ea typeface="Calibri" pitchFamily="34" charset="-122"/>
+                <a:cs typeface="Calibri" pitchFamily="34" charset="-120"/>
+              </a:rPr>
+              <a:t>“Regulatory requirements are not a primary driver of fraud-related investment”</a:t>
+            </a:r>
+            <a:endParaRPr lang="en-US" sz="850" dirty="0"/>
+          </a:p>
+        </p:txBody>
+      </p:sp>
+    </p:spTree>
+  </p:cSld>
+  <p:clrMapOvr>
+    <a:masterClrMapping/>
+  </p:clrMapOvr>
+</p:sld>
+</file>
+
+<file path=ppt/slides/slide37.xml><?xml version="1.0" encoding="utf-8"?>
+<p:sld xmlns:a="http://schemas.openxmlformats.org/drawingml/2006/main" xmlns:r="http://schemas.openxmlformats.org/officeDocument/2006/relationships" xmlns:p="http://schemas.openxmlformats.org/presentationml/2006/main">
+  <p:cSld name="Slide 37">
+    <p:bg>
+      <p:bgPr>
+        <a:solidFill>
+          <a:srgbClr val="FFFFFF"/>
+        </a:solidFill>
+      </p:bgPr>
+    </p:bg>
+    <p:spTree>
+      <p:nvGrpSpPr>
+        <p:cNvPr id="1" name=""/>
+        <p:cNvGrpSpPr/>
+        <p:nvPr/>
+      </p:nvGrpSpPr>
+      <p:grpSpPr>
+        <a:xfrm>
+          <a:off x="0" y="0"/>
+          <a:ext cx="0" cy="0"/>
+          <a:chOff x="0" y="0"/>
+          <a:chExt cx="0" cy="0"/>
+        </a:xfrm>
+      </p:grpSpPr>
+      <p:sp>
+        <p:nvSpPr>
+          <p:cNvPr id="2" name="Text 0"/>
+          <p:cNvSpPr txBox="1"/>
+          <p:nvPr/>
+        </p:nvSpPr>
+        <p:spPr>
+          <a:xfrm>
+            <a:off x="502006" y="256032"/>
+            <a:ext cx="11188598" cy="310896"/>
+          </a:xfrm>
+          <a:prstGeom prst="rect">
+            <a:avLst/>
+          </a:prstGeom>
+          <a:noFill/>
+          <a:ln/>
+        </p:spPr>
+        <p:txBody>
+          <a:bodyPr wrap="square" lIns="0" tIns="0" rIns="0" bIns="0" rtlCol="0" anchor="t"/>
+          <a:lstStyle/>
+          <a:p>
+            <a:pPr algn="l" indent="0" marL="0">
+              <a:buNone/>
+            </a:pPr>
+            <a:r>
+              <a:rPr lang="en-US" sz="1900" b="1" dirty="0">
+                <a:solidFill>
+                  <a:srgbClr val="000000"/>
+                </a:solidFill>
+                <a:latin typeface="Calibri" pitchFamily="34" charset="0"/>
+                <a:ea typeface="Calibri" pitchFamily="34" charset="-122"/>
+                <a:cs typeface="Calibri" pitchFamily="34" charset="-120"/>
+              </a:rPr>
+              <a:t>Upcoming Regulatory / Market Change With Greatest Expected Impact</a:t>
+            </a:r>
+            <a:endParaRPr lang="en-US" sz="1900" dirty="0"/>
+          </a:p>
+        </p:txBody>
+      </p:sp>
+      <p:sp>
+        <p:nvSpPr>
+          <p:cNvPr id="3" name="Text 1"/>
+          <p:cNvSpPr txBox="1"/>
+          <p:nvPr/>
+        </p:nvSpPr>
+        <p:spPr>
+          <a:xfrm>
+            <a:off x="502006" y="585216"/>
+            <a:ext cx="11188598" cy="713232"/>
+          </a:xfrm>
+          <a:prstGeom prst="rect">
+            <a:avLst/>
+          </a:prstGeom>
+          <a:noFill/>
+          <a:ln/>
+        </p:spPr>
+        <p:txBody>
+          <a:bodyPr wrap="square" lIns="0" tIns="0" rIns="0" bIns="0" rtlCol="0" anchor="t"/>
+          <a:lstStyle/>
+          <a:p>
+            <a:pPr algn="l" indent="0" marL="0">
+              <a:lnSpc>
+                <a:spcPct val="105000"/>
+              </a:lnSpc>
+              <a:buNone/>
+            </a:pPr>
+            <a:r>
+              <a:rPr lang="en-US" sz="1350" b="1" dirty="0">
+                <a:solidFill>
+                  <a:srgbClr val="046A38"/>
+                </a:solidFill>
+                <a:latin typeface="Calibri" pitchFamily="34" charset="0"/>
+                <a:ea typeface="Calibri" pitchFamily="34" charset="-122"/>
+                <a:cs typeface="Calibri" pitchFamily="34" charset="-120"/>
+              </a:rPr>
+              <a:t>Identity and authentication tops a close three-way race for the next big disruption.</a:t>
+            </a:r>
+            <a:endParaRPr lang="en-US" sz="1350" dirty="0"/>
+          </a:p>
+        </p:txBody>
+      </p:sp>
+      <p:sp>
+        <p:nvSpPr>
+          <p:cNvPr id="4" name="Shape 2"/>
+          <p:cNvSpPr/>
+          <p:nvPr/>
+        </p:nvSpPr>
+        <p:spPr>
+          <a:xfrm>
+            <a:off x="502006" y="1335024"/>
+            <a:ext cx="0" cy="512064"/>
+          </a:xfrm>
+          <a:prstGeom prst="line">
+            <a:avLst/>
+          </a:prstGeom>
+          <a:noFill/>
+          <a:ln w="25400">
+            <a:solidFill>
+              <a:srgbClr val="D0D0CE"/>
+            </a:solidFill>
+            <a:prstDash val="solid"/>
+          </a:ln>
+        </p:spPr>
+      </p:sp>
+      <p:sp>
+        <p:nvSpPr>
+          <p:cNvPr id="5" name="Text 3"/>
+          <p:cNvSpPr txBox="1"/>
+          <p:nvPr/>
+        </p:nvSpPr>
+        <p:spPr>
+          <a:xfrm>
+            <a:off x="648310" y="1335024"/>
+            <a:ext cx="11042294" cy="512064"/>
+          </a:xfrm>
+          <a:prstGeom prst="rect">
+            <a:avLst/>
+          </a:prstGeom>
+          <a:noFill/>
+          <a:ln/>
+        </p:spPr>
+        <p:txBody>
+          <a:bodyPr wrap="square" lIns="0" tIns="0" rIns="0" bIns="0" rtlCol="0" anchor="t"/>
+          <a:lstStyle/>
+          <a:p>
+            <a:pPr algn="l" indent="0" marL="0">
+              <a:lnSpc>
+                <a:spcPct val="106000"/>
+              </a:lnSpc>
+              <a:buNone/>
+            </a:pPr>
+            <a:r>
+              <a:rPr lang="en-US" sz="900" b="1" dirty="0">
+                <a:solidFill>
+                  <a:srgbClr val="046A38"/>
+                </a:solidFill>
+                <a:latin typeface="IBM Plex Mono" pitchFamily="34" charset="0"/>
+                <a:ea typeface="IBM Plex Mono" pitchFamily="34" charset="-122"/>
+                <a:cs typeface="IBM Plex Mono" pitchFamily="34" charset="-120"/>
+              </a:rPr>
+              <a:t>Q11  </a:t>
+            </a:r>
+            <a:pPr algn="l" indent="0" marL="0">
+              <a:lnSpc>
+                <a:spcPct val="106000"/>
+              </a:lnSpc>
+              <a:buNone/>
+            </a:pPr>
+            <a:r>
+              <a:rPr lang="en-US" sz="1000" i="1" dirty="0">
+                <a:solidFill>
+                  <a:srgbClr val="575757"/>
+                </a:solidFill>
+                <a:latin typeface="Calibri" pitchFamily="34" charset="0"/>
+                <a:ea typeface="Calibri" pitchFamily="34" charset="-122"/>
+                <a:cs typeface="Calibri" pitchFamily="34" charset="-120"/>
+              </a:rPr>
+              <a:t>“Which upcoming regulatory or market changes is expected to have the greatest impact on your fraud program?”</a:t>
+            </a:r>
+            <a:endParaRPr lang="en-US" sz="1000" dirty="0"/>
+          </a:p>
+        </p:txBody>
+      </p:sp>
+      <p:sp>
+        <p:nvSpPr>
+          <p:cNvPr id="6" name="Text 4"/>
+          <p:cNvSpPr txBox="1"/>
+          <p:nvPr/>
+        </p:nvSpPr>
+        <p:spPr>
+          <a:xfrm>
+            <a:off x="11346790" y="6537960"/>
+            <a:ext cx="343814" cy="182880"/>
+          </a:xfrm>
+          <a:prstGeom prst="rect">
+            <a:avLst/>
+          </a:prstGeom>
+          <a:noFill/>
+          <a:ln/>
+        </p:spPr>
+        <p:txBody>
+          <a:bodyPr wrap="square" rtlCol="0" anchor="ctr"/>
+          <a:lstStyle/>
+          <a:p>
+            <a:pPr algn="r" indent="0" marL="0">
+              <a:buNone/>
+            </a:pPr>
+            <a:r>
+              <a:rPr lang="en-US" sz="900" dirty="0">
+                <a:solidFill>
+                  <a:srgbClr val="53565A"/>
+                </a:solidFill>
+                <a:latin typeface="Calibri" pitchFamily="34" charset="0"/>
+                <a:ea typeface="Calibri" pitchFamily="34" charset="-122"/>
+                <a:cs typeface="Calibri" pitchFamily="34" charset="-120"/>
+              </a:rPr>
+              <a:t>36</a:t>
+            </a:r>
+            <a:endParaRPr lang="en-US" sz="900" dirty="0"/>
+          </a:p>
+        </p:txBody>
+      </p:sp>
+      <p:graphicFrame>
+        <p:nvGraphicFramePr>
+          <p:cNvPr id="7" name="Chart 0" descr=""/>
+          <p:cNvGraphicFramePr/>
+          <p:nvPr/>
+        </p:nvGraphicFramePr>
+        <p:xfrm>
+          <a:off x="502006" y="2011680"/>
+          <a:ext cx="11188598" cy="3063240"/>
+        </p:xfrm>
+        <a:graphic xmlns:a="http://schemas.openxmlformats.org/drawingml/2006/main">
+          <a:graphicData uri="http://schemas.openxmlformats.org/drawingml/2006/chart">
+            <c:chart xmlns:c="http://schemas.openxmlformats.org/drawingml/2006/chart" r:id="rId1"/>
+          </a:graphicData>
+        </a:graphic>
+      </p:graphicFrame>
+      <p:sp>
+        <p:nvSpPr>
+          <p:cNvPr id="8" name="Shape 5"/>
+          <p:cNvSpPr/>
+          <p:nvPr/>
+        </p:nvSpPr>
+        <p:spPr>
+          <a:xfrm>
+            <a:off x="502006" y="5202936"/>
+            <a:ext cx="11188598" cy="0"/>
+          </a:xfrm>
+          <a:prstGeom prst="line">
+            <a:avLst/>
+          </a:prstGeom>
+          <a:noFill/>
+          <a:ln w="9525">
+            <a:solidFill>
+              <a:srgbClr val="D0D0CE"/>
+            </a:solidFill>
+            <a:prstDash val="solid"/>
+          </a:ln>
+        </p:spPr>
+      </p:sp>
+      <p:sp>
+        <p:nvSpPr>
+          <p:cNvPr id="9" name="Text 6"/>
+          <p:cNvSpPr txBox="1"/>
+          <p:nvPr/>
+        </p:nvSpPr>
+        <p:spPr>
+          <a:xfrm>
+            <a:off x="502006" y="5276088"/>
+            <a:ext cx="11188598" cy="886968"/>
+          </a:xfrm>
+          <a:prstGeom prst="rect">
+            <a:avLst/>
+          </a:prstGeom>
+          <a:noFill/>
+          <a:ln/>
+        </p:spPr>
+        <p:txBody>
+          <a:bodyPr wrap="square" lIns="0" tIns="0" rIns="0" bIns="0" rtlCol="0" anchor="t"/>
+          <a:lstStyle/>
+          <a:p>
+            <a:pPr algn="l" indent="0" marL="0">
+              <a:lnSpc>
+                <a:spcPct val="118000"/>
+              </a:lnSpc>
+              <a:buNone/>
+            </a:pPr>
+            <a:r>
+              <a:rPr lang="en-US" sz="850" b="1" dirty="0">
+                <a:solidFill>
+                  <a:srgbClr val="53565A"/>
+                </a:solidFill>
+                <a:latin typeface="Calibri" pitchFamily="34" charset="0"/>
+                <a:ea typeface="Calibri" pitchFamily="34" charset="-122"/>
+                <a:cs typeface="Calibri" pitchFamily="34" charset="-120"/>
+              </a:rPr>
+              <a:t>Ranked top 3 — shown as % of respondents who placed the option anywhere in their top 3 (not mutually exclusive; bars don't sum to 100%).  </a:t>
+            </a:r>
+            <a:pPr algn="l" indent="0" marL="0">
+              <a:lnSpc>
+                <a:spcPct val="118000"/>
+              </a:lnSpc>
+              <a:buNone/>
+            </a:pPr>
+            <a:r>
+              <a:rPr lang="en-US" sz="850" b="1" dirty="0">
+                <a:solidFill>
+                  <a:srgbClr val="53565A"/>
+                </a:solidFill>
+                <a:latin typeface="Calibri" pitchFamily="34" charset="0"/>
+                <a:ea typeface="Calibri" pitchFamily="34" charset="-122"/>
+                <a:cs typeface="Calibri" pitchFamily="34" charset="-120"/>
+              </a:rPr>
+              <a:t>Response options as fielded: </a:t>
+            </a:r>
+            <a:pPr algn="l" indent="0" marL="0">
+              <a:lnSpc>
+                <a:spcPct val="118000"/>
+              </a:lnSpc>
+              <a:buNone/>
+            </a:pPr>
+            <a:r>
+              <a:rPr lang="en-US" sz="850" i="1" dirty="0">
+                <a:solidFill>
+                  <a:srgbClr val="53565A"/>
+                </a:solidFill>
+                <a:latin typeface="Calibri" pitchFamily="34" charset="0"/>
+                <a:ea typeface="Calibri" pitchFamily="34" charset="-122"/>
+                <a:cs typeface="Calibri" pitchFamily="34" charset="-120"/>
+              </a:rPr>
+              <a:t>“Payment innovation and adoption (e.g., real-time payments, stable coins, agentic payments)”</a:t>
+            </a:r>
+            <a:pPr algn="l" indent="0" marL="0">
+              <a:lnSpc>
+                <a:spcPct val="118000"/>
+              </a:lnSpc>
+              <a:buNone/>
+            </a:pPr>
+            <a:r>
+              <a:rPr lang="en-US" sz="850" dirty="0">
+                <a:solidFill>
+                  <a:srgbClr val="D0D0CE"/>
+                </a:solidFill>
+                <a:latin typeface="Calibri" pitchFamily="34" charset="0"/>
+                <a:ea typeface="Calibri" pitchFamily="34" charset="-122"/>
+                <a:cs typeface="Calibri" pitchFamily="34" charset="-120"/>
+              </a:rPr>
+              <a:t>  ·  </a:t>
+            </a:r>
+            <a:pPr algn="l" indent="0" marL="0">
+              <a:lnSpc>
+                <a:spcPct val="118000"/>
+              </a:lnSpc>
+              <a:buNone/>
+            </a:pPr>
+            <a:r>
+              <a:rPr lang="en-US" sz="850" i="1" dirty="0">
+                <a:solidFill>
+                  <a:srgbClr val="53565A"/>
+                </a:solidFill>
+                <a:latin typeface="Calibri" pitchFamily="34" charset="0"/>
+                <a:ea typeface="Calibri" pitchFamily="34" charset="-122"/>
+                <a:cs typeface="Calibri" pitchFamily="34" charset="-120"/>
+              </a:rPr>
+              <a:t>“Liability and reimbursement changes”</a:t>
+            </a:r>
+            <a:pPr algn="l" indent="0" marL="0">
+              <a:lnSpc>
+                <a:spcPct val="118000"/>
+              </a:lnSpc>
+              <a:buNone/>
+            </a:pPr>
+            <a:r>
+              <a:rPr lang="en-US" sz="850" dirty="0">
+                <a:solidFill>
+                  <a:srgbClr val="D0D0CE"/>
+                </a:solidFill>
+                <a:latin typeface="Calibri" pitchFamily="34" charset="0"/>
+                <a:ea typeface="Calibri" pitchFamily="34" charset="-122"/>
+                <a:cs typeface="Calibri" pitchFamily="34" charset="-120"/>
+              </a:rPr>
+              <a:t>  ·  </a:t>
+            </a:r>
+            <a:pPr algn="l" indent="0" marL="0">
+              <a:lnSpc>
+                <a:spcPct val="118000"/>
+              </a:lnSpc>
+              <a:buNone/>
+            </a:pPr>
+            <a:r>
+              <a:rPr lang="en-US" sz="850" i="1" dirty="0">
+                <a:solidFill>
+                  <a:srgbClr val="53565A"/>
+                </a:solidFill>
+                <a:latin typeface="Calibri" pitchFamily="34" charset="0"/>
+                <a:ea typeface="Calibri" pitchFamily="34" charset="-122"/>
+                <a:cs typeface="Calibri" pitchFamily="34" charset="-120"/>
+              </a:rPr>
+              <a:t>“Open Banking / Consumer-driven banking initiatives”</a:t>
+            </a:r>
+            <a:pPr algn="l" indent="0" marL="0">
+              <a:lnSpc>
+                <a:spcPct val="118000"/>
+              </a:lnSpc>
+              <a:buNone/>
+            </a:pPr>
+            <a:r>
+              <a:rPr lang="en-US" sz="850" dirty="0">
+                <a:solidFill>
+                  <a:srgbClr val="D0D0CE"/>
+                </a:solidFill>
+                <a:latin typeface="Calibri" pitchFamily="34" charset="0"/>
+                <a:ea typeface="Calibri" pitchFamily="34" charset="-122"/>
+                <a:cs typeface="Calibri" pitchFamily="34" charset="-120"/>
+              </a:rPr>
+              <a:t>  ·  </a:t>
+            </a:r>
+            <a:pPr algn="l" indent="0" marL="0">
+              <a:lnSpc>
+                <a:spcPct val="118000"/>
+              </a:lnSpc>
+              <a:buNone/>
+            </a:pPr>
+            <a:r>
+              <a:rPr lang="en-US" sz="850" i="1" dirty="0">
+                <a:solidFill>
+                  <a:srgbClr val="53565A"/>
+                </a:solidFill>
+                <a:latin typeface="Calibri" pitchFamily="34" charset="0"/>
+                <a:ea typeface="Calibri" pitchFamily="34" charset="-122"/>
+                <a:cs typeface="Calibri" pitchFamily="34" charset="-120"/>
+              </a:rPr>
+              <a:t>“AML related modernization initiatives”</a:t>
+            </a:r>
+            <a:pPr algn="l" indent="0" marL="0">
+              <a:lnSpc>
+                <a:spcPct val="118000"/>
+              </a:lnSpc>
+              <a:buNone/>
+            </a:pPr>
+            <a:r>
+              <a:rPr lang="en-US" sz="850" dirty="0">
+                <a:solidFill>
+                  <a:srgbClr val="D0D0CE"/>
+                </a:solidFill>
+                <a:latin typeface="Calibri" pitchFamily="34" charset="0"/>
+                <a:ea typeface="Calibri" pitchFamily="34" charset="-122"/>
+                <a:cs typeface="Calibri" pitchFamily="34" charset="-120"/>
+              </a:rPr>
+              <a:t>  ·  </a:t>
+            </a:r>
+            <a:pPr algn="l" indent="0" marL="0">
+              <a:lnSpc>
+                <a:spcPct val="118000"/>
+              </a:lnSpc>
+              <a:buNone/>
+            </a:pPr>
+            <a:r>
+              <a:rPr lang="en-US" sz="850" i="1" dirty="0">
+                <a:solidFill>
+                  <a:srgbClr val="53565A"/>
+                </a:solidFill>
+                <a:latin typeface="Calibri" pitchFamily="34" charset="0"/>
+                <a:ea typeface="Calibri" pitchFamily="34" charset="-122"/>
+                <a:cs typeface="Calibri" pitchFamily="34" charset="-120"/>
+              </a:rPr>
+              <a:t>“Privacy, data-sharing requirements, and AI governance requirements”</a:t>
+            </a:r>
+            <a:pPr algn="l" indent="0" marL="0">
+              <a:lnSpc>
+                <a:spcPct val="118000"/>
+              </a:lnSpc>
+              <a:buNone/>
+            </a:pPr>
+            <a:r>
+              <a:rPr lang="en-US" sz="850" dirty="0">
+                <a:solidFill>
+                  <a:srgbClr val="D0D0CE"/>
+                </a:solidFill>
+                <a:latin typeface="Calibri" pitchFamily="34" charset="0"/>
+                <a:ea typeface="Calibri" pitchFamily="34" charset="-122"/>
+                <a:cs typeface="Calibri" pitchFamily="34" charset="-120"/>
+              </a:rPr>
+              <a:t>  ·  </a:t>
+            </a:r>
+            <a:pPr algn="l" indent="0" marL="0">
+              <a:lnSpc>
+                <a:spcPct val="118000"/>
+              </a:lnSpc>
+              <a:buNone/>
+            </a:pPr>
+            <a:r>
+              <a:rPr lang="en-US" sz="850" i="1" dirty="0">
+                <a:solidFill>
+                  <a:srgbClr val="53565A"/>
+                </a:solidFill>
+                <a:latin typeface="Calibri" pitchFamily="34" charset="0"/>
+                <a:ea typeface="Calibri" pitchFamily="34" charset="-122"/>
+                <a:cs typeface="Calibri" pitchFamily="34" charset="-120"/>
+              </a:rPr>
+              <a:t>“Customer identity, authentication, and digital trust expectations”</a:t>
+            </a:r>
+            <a:endParaRPr lang="en-US" sz="850" dirty="0"/>
+          </a:p>
+        </p:txBody>
+      </p:sp>
+    </p:spTree>
+  </p:cSld>
+  <p:clrMapOvr>
+    <a:masterClrMapping/>
+  </p:clrMapOvr>
+</p:sld>
+</file>
+
+<file path=ppt/slides/slide38.xml><?xml version="1.0" encoding="utf-8"?>
+<p:sld xmlns:a="http://schemas.openxmlformats.org/drawingml/2006/main" xmlns:r="http://schemas.openxmlformats.org/officeDocument/2006/relationships" xmlns:p="http://schemas.openxmlformats.org/presentationml/2006/main">
+  <p:cSld name="Slide 38">
+    <p:bg>
+      <p:bgPr>
+        <a:solidFill>
+          <a:srgbClr val="86BC25"/>
+        </a:solidFill>
+      </p:bgPr>
+    </p:bg>
+    <p:spTree>
+      <p:nvGrpSpPr>
+        <p:cNvPr id="1" name=""/>
+        <p:cNvGrpSpPr/>
+        <p:nvPr/>
+      </p:nvGrpSpPr>
+      <p:grpSpPr>
+        <a:xfrm>
+          <a:off x="0" y="0"/>
+          <a:ext cx="0" cy="0"/>
+          <a:chOff x="0" y="0"/>
+          <a:chExt cx="0" cy="0"/>
+        </a:xfrm>
+      </p:grpSpPr>
+      <p:sp>
+        <p:nvSpPr>
+          <p:cNvPr id="2" name="Text 0"/>
+          <p:cNvSpPr txBox="1"/>
+          <p:nvPr/>
+        </p:nvSpPr>
+        <p:spPr>
+          <a:xfrm>
+            <a:off x="502920" y="1699870"/>
+            <a:ext cx="10415016" cy="1591970"/>
+          </a:xfrm>
+          <a:prstGeom prst="rect">
+            <a:avLst/>
+          </a:prstGeom>
+          <a:noFill/>
+          <a:ln/>
+        </p:spPr>
+        <p:txBody>
+          <a:bodyPr wrap="square" lIns="0" tIns="0" rIns="0" bIns="0" rtlCol="0" anchor="b"/>
+          <a:lstStyle/>
+          <a:p>
+            <a:pPr algn="l" indent="0" marL="0">
+              <a:buNone/>
+            </a:pPr>
+            <a:r>
+              <a:rPr lang="en-US" sz="3600" b="1" dirty="0">
+                <a:solidFill>
+                  <a:srgbClr val="FFFFFF"/>
+                </a:solidFill>
+                <a:latin typeface="Calibri" pitchFamily="34" charset="0"/>
+                <a:ea typeface="Calibri" pitchFamily="34" charset="-122"/>
+                <a:cs typeface="Calibri" pitchFamily="34" charset="-120"/>
+              </a:rPr>
+              <a:t>6. Looking Ahead Three Years</a:t>
+            </a:r>
+            <a:endParaRPr lang="en-US" sz="3600" dirty="0"/>
+          </a:p>
+        </p:txBody>
+      </p:sp>
+      <p:sp>
+        <p:nvSpPr>
+          <p:cNvPr id="3" name="Text 1"/>
+          <p:cNvSpPr txBox="1"/>
+          <p:nvPr/>
+        </p:nvSpPr>
+        <p:spPr>
+          <a:xfrm>
+            <a:off x="11346790" y="6537960"/>
+            <a:ext cx="343814" cy="182880"/>
+          </a:xfrm>
+          <a:prstGeom prst="rect">
+            <a:avLst/>
+          </a:prstGeom>
+          <a:noFill/>
+          <a:ln/>
+        </p:spPr>
+        <p:txBody>
+          <a:bodyPr wrap="square" rtlCol="0" anchor="ctr"/>
+          <a:lstStyle/>
+          <a:p>
+            <a:pPr algn="r" indent="0" marL="0">
+              <a:buNone/>
+            </a:pPr>
+            <a:r>
+              <a:rPr lang="en-US" sz="900" dirty="0">
+                <a:solidFill>
+                  <a:srgbClr val="FFFFFF"/>
+                </a:solidFill>
+                <a:latin typeface="Calibri" pitchFamily="34" charset="0"/>
+                <a:ea typeface="Calibri" pitchFamily="34" charset="-122"/>
+                <a:cs typeface="Calibri" pitchFamily="34" charset="-120"/>
+              </a:rPr>
+              <a:t>37</a:t>
+            </a:r>
+            <a:endParaRPr lang="en-US" sz="900" dirty="0"/>
+          </a:p>
+        </p:txBody>
+      </p:sp>
+    </p:spTree>
+  </p:cSld>
+  <p:clrMapOvr>
+    <a:masterClrMapping/>
+  </p:clrMapOvr>
+</p:sld>
+</file>
+
+<file path=ppt/slides/slide39.xml><?xml version="1.0" encoding="utf-8"?>
+<p:sld xmlns:a="http://schemas.openxmlformats.org/drawingml/2006/main" xmlns:r="http://schemas.openxmlformats.org/officeDocument/2006/relationships" xmlns:p="http://schemas.openxmlformats.org/presentationml/2006/main">
+  <p:cSld name="Slide 39">
+    <p:bg>
+      <p:bgPr>
+        <a:solidFill>
+          <a:srgbClr val="FFFFFF"/>
+        </a:solidFill>
+      </p:bgPr>
+    </p:bg>
+    <p:spTree>
+      <p:nvGrpSpPr>
+        <p:cNvPr id="1" name=""/>
+        <p:cNvGrpSpPr/>
+        <p:nvPr/>
+      </p:nvGrpSpPr>
+      <p:grpSpPr>
+        <a:xfrm>
+          <a:off x="0" y="0"/>
+          <a:ext cx="0" cy="0"/>
+          <a:chOff x="0" y="0"/>
+          <a:chExt cx="0" cy="0"/>
+        </a:xfrm>
+      </p:grpSpPr>
+      <p:sp>
+        <p:nvSpPr>
+          <p:cNvPr id="2" name="Text 0"/>
+          <p:cNvSpPr txBox="1"/>
+          <p:nvPr/>
+        </p:nvSpPr>
+        <p:spPr>
+          <a:xfrm>
+            <a:off x="502006" y="256032"/>
+            <a:ext cx="11188598" cy="310896"/>
+          </a:xfrm>
+          <a:prstGeom prst="rect">
+            <a:avLst/>
+          </a:prstGeom>
+          <a:noFill/>
+          <a:ln/>
+        </p:spPr>
+        <p:txBody>
+          <a:bodyPr wrap="square" lIns="0" tIns="0" rIns="0" bIns="0" rtlCol="0" anchor="t"/>
+          <a:lstStyle/>
+          <a:p>
+            <a:pPr algn="l" indent="0" marL="0">
+              <a:buNone/>
+            </a:pPr>
+            <a:r>
+              <a:rPr lang="en-US" sz="1900" b="1" dirty="0">
+                <a:solidFill>
+                  <a:srgbClr val="000000"/>
+                </a:solidFill>
+                <a:latin typeface="Calibri" pitchFamily="34" charset="0"/>
+                <a:ea typeface="Calibri" pitchFamily="34" charset="-122"/>
+                <a:cs typeface="Calibri" pitchFamily="34" charset="-120"/>
+              </a:rPr>
+              <a:t>What Leaders Say, Unprompted</a:t>
+            </a:r>
+            <a:endParaRPr lang="en-US" sz="1900" dirty="0"/>
+          </a:p>
+        </p:txBody>
+      </p:sp>
+      <p:sp>
+        <p:nvSpPr>
+          <p:cNvPr id="3" name="Text 1"/>
+          <p:cNvSpPr txBox="1"/>
+          <p:nvPr/>
+        </p:nvSpPr>
+        <p:spPr>
+          <a:xfrm>
+            <a:off x="502006" y="585216"/>
+            <a:ext cx="11188598" cy="713232"/>
+          </a:xfrm>
+          <a:prstGeom prst="rect">
+            <a:avLst/>
+          </a:prstGeom>
+          <a:noFill/>
+          <a:ln/>
+        </p:spPr>
+        <p:txBody>
+          <a:bodyPr wrap="square" lIns="0" tIns="0" rIns="0" bIns="0" rtlCol="0" anchor="t"/>
+          <a:lstStyle/>
+          <a:p>
+            <a:pPr algn="l" indent="0" marL="0">
+              <a:lnSpc>
+                <a:spcPct val="105000"/>
+              </a:lnSpc>
+              <a:buNone/>
+            </a:pPr>
+            <a:r>
+              <a:rPr lang="en-US" sz="1350" b="1" dirty="0">
+                <a:solidFill>
+                  <a:srgbClr val="046A38"/>
+                </a:solidFill>
+                <a:latin typeface="Calibri" pitchFamily="34" charset="0"/>
+                <a:ea typeface="Calibri" pitchFamily="34" charset="-122"/>
+                <a:cs typeface="Calibri" pitchFamily="34" charset="-120"/>
+              </a:rPr>
+              <a:t>Left to answer in their own words, leaders converge on the same trend.</a:t>
+            </a:r>
+            <a:endParaRPr lang="en-US" sz="1350" dirty="0"/>
+          </a:p>
+        </p:txBody>
+      </p:sp>
+      <p:sp>
+        <p:nvSpPr>
+          <p:cNvPr id="4" name="Shape 2"/>
+          <p:cNvSpPr/>
+          <p:nvPr/>
+        </p:nvSpPr>
+        <p:spPr>
+          <a:xfrm>
+            <a:off x="502006" y="1335024"/>
+            <a:ext cx="0" cy="512064"/>
+          </a:xfrm>
+          <a:prstGeom prst="line">
+            <a:avLst/>
+          </a:prstGeom>
+          <a:noFill/>
+          <a:ln w="25400">
+            <a:solidFill>
+              <a:srgbClr val="D0D0CE"/>
+            </a:solidFill>
+            <a:prstDash val="solid"/>
+          </a:ln>
+        </p:spPr>
+      </p:sp>
+      <p:sp>
+        <p:nvSpPr>
+          <p:cNvPr id="5" name="Text 3"/>
+          <p:cNvSpPr txBox="1"/>
+          <p:nvPr/>
+        </p:nvSpPr>
+        <p:spPr>
+          <a:xfrm>
+            <a:off x="648310" y="1335024"/>
+            <a:ext cx="11042294" cy="512064"/>
+          </a:xfrm>
+          <a:prstGeom prst="rect">
+            <a:avLst/>
+          </a:prstGeom>
+          <a:noFill/>
+          <a:ln/>
+        </p:spPr>
+        <p:txBody>
+          <a:bodyPr wrap="square" lIns="0" tIns="0" rIns="0" bIns="0" rtlCol="0" anchor="t"/>
+          <a:lstStyle/>
+          <a:p>
+            <a:pPr algn="l" indent="0" marL="0">
+              <a:lnSpc>
+                <a:spcPct val="106000"/>
+              </a:lnSpc>
+              <a:buNone/>
+            </a:pPr>
+            <a:r>
+              <a:rPr lang="en-US" sz="900" b="1" dirty="0">
+                <a:solidFill>
+                  <a:srgbClr val="046A38"/>
+                </a:solidFill>
+                <a:latin typeface="IBM Plex Mono" pitchFamily="34" charset="0"/>
+                <a:ea typeface="IBM Plex Mono" pitchFamily="34" charset="-122"/>
+                <a:cs typeface="IBM Plex Mono" pitchFamily="34" charset="-120"/>
+              </a:rPr>
+              <a:t>Q12  </a:t>
+            </a:r>
+            <a:pPr algn="l" indent="0" marL="0">
+              <a:lnSpc>
+                <a:spcPct val="106000"/>
+              </a:lnSpc>
+              <a:buNone/>
+            </a:pPr>
+            <a:r>
+              <a:rPr lang="en-US" sz="1000" i="1" dirty="0">
+                <a:solidFill>
+                  <a:srgbClr val="575757"/>
+                </a:solidFill>
+                <a:latin typeface="Calibri" pitchFamily="34" charset="0"/>
+                <a:ea typeface="Calibri" pitchFamily="34" charset="-122"/>
+                <a:cs typeface="Calibri" pitchFamily="34" charset="-120"/>
+              </a:rPr>
+              <a:t>“Looking ahead three years, what development do you believe will have the greatest impact on fraud risk management, and why? (open-ended)”</a:t>
+            </a:r>
+            <a:endParaRPr lang="en-US" sz="1000" dirty="0"/>
+          </a:p>
+        </p:txBody>
+      </p:sp>
+      <p:sp>
+        <p:nvSpPr>
+          <p:cNvPr id="6" name="Text 4"/>
+          <p:cNvSpPr txBox="1"/>
+          <p:nvPr/>
+        </p:nvSpPr>
+        <p:spPr>
+          <a:xfrm>
+            <a:off x="11346790" y="6537960"/>
+            <a:ext cx="343814" cy="182880"/>
+          </a:xfrm>
+          <a:prstGeom prst="rect">
+            <a:avLst/>
+          </a:prstGeom>
+          <a:noFill/>
+          <a:ln/>
+        </p:spPr>
+        <p:txBody>
+          <a:bodyPr wrap="square" rtlCol="0" anchor="ctr"/>
+          <a:lstStyle/>
+          <a:p>
+            <a:pPr algn="r" indent="0" marL="0">
+              <a:buNone/>
+            </a:pPr>
+            <a:r>
+              <a:rPr lang="en-US" sz="900" dirty="0">
+                <a:solidFill>
+                  <a:srgbClr val="53565A"/>
+                </a:solidFill>
+                <a:latin typeface="Calibri" pitchFamily="34" charset="0"/>
+                <a:ea typeface="Calibri" pitchFamily="34" charset="-122"/>
+                <a:cs typeface="Calibri" pitchFamily="34" charset="-120"/>
+              </a:rPr>
+              <a:t>38</a:t>
             </a:r>
             <a:endParaRPr lang="en-US" sz="900" dirty="0"/>
           </a:p>
@@ -31001,305 +33746,6 @@
               <a:t>VP · Banking</a:t>
             </a:r>
             <a:endParaRPr lang="en-US" sz="900" dirty="0"/>
-          </a:p>
-        </p:txBody>
-      </p:sp>
-    </p:spTree>
-  </p:cSld>
-  <p:clrMapOvr>
-    <a:masterClrMapping/>
-  </p:clrMapOvr>
-</p:sld>
-</file>
-
-<file path=ppt/slides/slide37.xml><?xml version="1.0" encoding="utf-8"?>
-<p:sld xmlns:a="http://schemas.openxmlformats.org/drawingml/2006/main" xmlns:r="http://schemas.openxmlformats.org/officeDocument/2006/relationships" xmlns:p="http://schemas.openxmlformats.org/presentationml/2006/main">
-  <p:cSld name="Slide 37">
-    <p:bg>
-      <p:bgPr>
-        <a:solidFill>
-          <a:srgbClr val="050607"/>
-        </a:solidFill>
-      </p:bgPr>
-    </p:bg>
-    <p:spTree>
-      <p:nvGrpSpPr>
-        <p:cNvPr id="1" name=""/>
-        <p:cNvGrpSpPr/>
-        <p:nvPr/>
-      </p:nvGrpSpPr>
-      <p:grpSpPr>
-        <a:xfrm>
-          <a:off x="0" y="0"/>
-          <a:ext cx="0" cy="0"/>
-          <a:chOff x="0" y="0"/>
-          <a:chExt cx="0" cy="0"/>
-        </a:xfrm>
-      </p:grpSpPr>
-      <p:sp>
-        <p:nvSpPr>
-          <p:cNvPr id="2" name="Text 0"/>
-          <p:cNvSpPr txBox="1"/>
-          <p:nvPr/>
-        </p:nvSpPr>
-        <p:spPr>
-          <a:xfrm>
-            <a:off x="502006" y="457200"/>
-            <a:ext cx="1417320" cy="274320"/>
-          </a:xfrm>
-          <a:prstGeom prst="rect">
-            <a:avLst/>
-          </a:prstGeom>
-          <a:noFill/>
-          <a:ln/>
-        </p:spPr>
-        <p:txBody>
-          <a:bodyPr wrap="square" lIns="0" tIns="0" rIns="0" bIns="0" rtlCol="0" anchor="ctr"/>
-          <a:lstStyle/>
-          <a:p>
-            <a:pPr algn="l" indent="0" marL="0">
-              <a:buNone/>
-            </a:pPr>
-            <a:r>
-              <a:rPr lang="en-US" sz="1600" b="1" dirty="0">
-                <a:solidFill>
-                  <a:srgbClr val="FFFFFF"/>
-                </a:solidFill>
-                <a:latin typeface="Calibri" pitchFamily="34" charset="0"/>
-                <a:ea typeface="Calibri" pitchFamily="34" charset="-122"/>
-                <a:cs typeface="Calibri" pitchFamily="34" charset="-120"/>
-              </a:rPr>
-              <a:t>Deloitte</a:t>
-            </a:r>
-            <a:endParaRPr lang="en-US" sz="1600" dirty="0"/>
-          </a:p>
-        </p:txBody>
-      </p:sp>
-      <p:sp>
-        <p:nvSpPr>
-          <p:cNvPr id="3" name="Shape 1"/>
-          <p:cNvSpPr/>
-          <p:nvPr/>
-        </p:nvSpPr>
-        <p:spPr>
-          <a:xfrm>
-            <a:off x="1800454" y="598932"/>
-            <a:ext cx="82296" cy="82296"/>
-          </a:xfrm>
-          <a:prstGeom prst="ellipse">
-            <a:avLst/>
-          </a:prstGeom>
-          <a:solidFill>
-            <a:srgbClr val="86BC25"/>
-          </a:solidFill>
-          <a:ln/>
-        </p:spPr>
-      </p:sp>
-      <p:sp>
-        <p:nvSpPr>
-          <p:cNvPr id="4" name="Text 2"/>
-          <p:cNvSpPr txBox="1"/>
-          <p:nvPr/>
-        </p:nvSpPr>
-        <p:spPr>
-          <a:xfrm>
-            <a:off x="502006" y="4215384"/>
-            <a:ext cx="8531352" cy="2167128"/>
-          </a:xfrm>
-          <a:prstGeom prst="rect">
-            <a:avLst/>
-          </a:prstGeom>
-          <a:noFill/>
-          <a:ln/>
-        </p:spPr>
-        <p:txBody>
-          <a:bodyPr wrap="square" lIns="0" tIns="0" rIns="0" bIns="0" rtlCol="0" anchor="t"/>
-          <a:lstStyle/>
-          <a:p>
-            <a:pPr algn="l" indent="0" marL="0">
-              <a:lnSpc>
-                <a:spcPct val="120000"/>
-              </a:lnSpc>
-              <a:buNone/>
-            </a:pPr>
-            <a:r>
-              <a:rPr lang="en-US" sz="2800" b="1" dirty="0">
-                <a:solidFill>
-                  <a:srgbClr val="FFFFFF"/>
-                </a:solidFill>
-                <a:latin typeface="Calibri" pitchFamily="34" charset="0"/>
-                <a:ea typeface="Calibri" pitchFamily="34" charset="-122"/>
-                <a:cs typeface="Calibri" pitchFamily="34" charset="-120"/>
-              </a:rPr>
-              <a:t>Thank you
-</a:t>
-            </a:r>
-            <a:endParaRPr lang="en-US" sz="2800" dirty="0"/>
-          </a:p>
-          <a:p>
-            <a:pPr algn="l" indent="0" marL="0">
-              <a:lnSpc>
-                <a:spcPct val="120000"/>
-              </a:lnSpc>
-              <a:buNone/>
-            </a:pPr>
-            <a:r>
-              <a:rPr lang="en-US" sz="1600" b="1" dirty="0">
-                <a:solidFill>
-                  <a:srgbClr val="86BC25"/>
-                </a:solidFill>
-                <a:latin typeface="Calibri" pitchFamily="34" charset="0"/>
-                <a:ea typeface="Calibri" pitchFamily="34" charset="-122"/>
-                <a:cs typeface="Calibri" pitchFamily="34" charset="-120"/>
-              </a:rPr>
-              <a:t>[Presenter Name]
-</a:t>
-            </a:r>
-            <a:endParaRPr lang="en-US" sz="2800" dirty="0"/>
-          </a:p>
-          <a:p>
-            <a:pPr algn="l" indent="0" marL="0">
-              <a:lnSpc>
-                <a:spcPct val="120000"/>
-              </a:lnSpc>
-              <a:buNone/>
-            </a:pPr>
-            <a:r>
-              <a:rPr lang="en-US" sz="1300" dirty="0">
-                <a:solidFill>
-                  <a:srgbClr val="FFFFFF"/>
-                </a:solidFill>
-                <a:latin typeface="Calibri" pitchFamily="34" charset="0"/>
-                <a:ea typeface="Calibri" pitchFamily="34" charset="-122"/>
-                <a:cs typeface="Calibri" pitchFamily="34" charset="-120"/>
-              </a:rPr>
-              <a:t>[Title | Practice]
-</a:t>
-            </a:r>
-            <a:endParaRPr lang="en-US" sz="2800" dirty="0"/>
-          </a:p>
-          <a:p>
-            <a:pPr algn="l" indent="0" marL="0">
-              <a:lnSpc>
-                <a:spcPct val="120000"/>
-              </a:lnSpc>
-              <a:buNone/>
-            </a:pPr>
-            <a:r>
-              <a:rPr lang="en-US" sz="1300" dirty="0">
-                <a:solidFill>
-                  <a:srgbClr val="D0D0CE"/>
-                </a:solidFill>
-                <a:latin typeface="Calibri" pitchFamily="34" charset="0"/>
-                <a:ea typeface="Calibri" pitchFamily="34" charset="-122"/>
-                <a:cs typeface="Calibri" pitchFamily="34" charset="-120"/>
-              </a:rPr>
-              <a:t>[email@deloitte.com]</a:t>
-            </a:r>
-            <a:endParaRPr lang="en-US" sz="2800" dirty="0"/>
-          </a:p>
-        </p:txBody>
-      </p:sp>
-      <p:sp>
-        <p:nvSpPr>
-          <p:cNvPr id="5" name="Shape 3"/>
-          <p:cNvSpPr/>
-          <p:nvPr/>
-        </p:nvSpPr>
-        <p:spPr>
-          <a:xfrm>
-            <a:off x="9372600" y="4215384"/>
-            <a:ext cx="2322576" cy="1728216"/>
-          </a:xfrm>
-          <a:prstGeom prst="rect">
-            <a:avLst/>
-          </a:prstGeom>
-          <a:solidFill>
-            <a:srgbClr val="0B1C14"/>
-          </a:solidFill>
-          <a:ln w="9525">
-            <a:solidFill>
-              <a:srgbClr val="86BC25"/>
-            </a:solidFill>
-            <a:prstDash val="solid"/>
-          </a:ln>
-        </p:spPr>
-      </p:sp>
-      <p:sp>
-        <p:nvSpPr>
-          <p:cNvPr id="6" name="Text 4"/>
-          <p:cNvSpPr txBox="1"/>
-          <p:nvPr/>
-        </p:nvSpPr>
-        <p:spPr>
-          <a:xfrm>
-            <a:off x="9372600" y="4892040"/>
-            <a:ext cx="2322576" cy="365760"/>
-          </a:xfrm>
-          <a:prstGeom prst="rect">
-            <a:avLst/>
-          </a:prstGeom>
-          <a:noFill/>
-          <a:ln/>
-        </p:spPr>
-        <p:txBody>
-          <a:bodyPr wrap="square" rtlCol="0" anchor="ctr"/>
-          <a:lstStyle/>
-          <a:p>
-            <a:pPr algn="ctr" indent="0" marL="0">
-              <a:buNone/>
-            </a:pPr>
-            <a:r>
-              <a:rPr lang="en-US" sz="1600" b="1" dirty="0">
-                <a:solidFill>
-                  <a:srgbClr val="86BC25"/>
-                </a:solidFill>
-                <a:latin typeface="Calibri" pitchFamily="34" charset="0"/>
-                <a:ea typeface="Calibri" pitchFamily="34" charset="-122"/>
-                <a:cs typeface="Calibri" pitchFamily="34" charset="-120"/>
-              </a:rPr>
-              <a:t>D.FEND</a:t>
-            </a:r>
-            <a:endParaRPr lang="en-US" sz="1600" dirty="0"/>
-          </a:p>
-        </p:txBody>
-      </p:sp>
-      <p:sp>
-        <p:nvSpPr>
-          <p:cNvPr id="7" name="Text 5"/>
-          <p:cNvSpPr txBox="1"/>
-          <p:nvPr/>
-        </p:nvSpPr>
-        <p:spPr>
-          <a:xfrm>
-            <a:off x="9370771" y="6016752"/>
-            <a:ext cx="2322576" cy="365760"/>
-          </a:xfrm>
-          <a:prstGeom prst="rect">
-            <a:avLst/>
-          </a:prstGeom>
-          <a:noFill/>
-          <a:ln/>
-        </p:spPr>
-        <p:txBody>
-          <a:bodyPr wrap="square" rtlCol="0" anchor="ctr"/>
-          <a:lstStyle/>
-          <a:p>
-            <a:pPr algn="ctr" indent="0" marL="0">
-              <a:buNone/>
-            </a:pPr>
-            <a:r>
-              <a:rPr lang="en-US" sz="1000" i="1" dirty="0">
-                <a:solidFill>
-                  <a:srgbClr val="D0D0CE"/>
-                </a:solidFill>
-                <a:latin typeface="Calibri" pitchFamily="34" charset="0"/>
-                <a:ea typeface="Calibri" pitchFamily="34" charset="-122"/>
-                <a:cs typeface="Calibri" pitchFamily="34" charset="-120"/>
-              </a:rPr>
-              <a:t>Fin Crime Forum</a:t>
-            </a:r>
-            <a:endParaRPr lang="en-US" sz="1000" dirty="0"/>
           </a:p>
         </p:txBody>
       </p:sp>
@@ -31452,6 +33898,305 @@
               <a:t>3</a:t>
             </a:r>
             <a:endParaRPr lang="en-US" sz="900" dirty="0"/>
+          </a:p>
+        </p:txBody>
+      </p:sp>
+    </p:spTree>
+  </p:cSld>
+  <p:clrMapOvr>
+    <a:masterClrMapping/>
+  </p:clrMapOvr>
+</p:sld>
+</file>
+
+<file path=ppt/slides/slide40.xml><?xml version="1.0" encoding="utf-8"?>
+<p:sld xmlns:a="http://schemas.openxmlformats.org/drawingml/2006/main" xmlns:r="http://schemas.openxmlformats.org/officeDocument/2006/relationships" xmlns:p="http://schemas.openxmlformats.org/presentationml/2006/main">
+  <p:cSld name="Slide 40">
+    <p:bg>
+      <p:bgPr>
+        <a:solidFill>
+          <a:srgbClr val="050607"/>
+        </a:solidFill>
+      </p:bgPr>
+    </p:bg>
+    <p:spTree>
+      <p:nvGrpSpPr>
+        <p:cNvPr id="1" name=""/>
+        <p:cNvGrpSpPr/>
+        <p:nvPr/>
+      </p:nvGrpSpPr>
+      <p:grpSpPr>
+        <a:xfrm>
+          <a:off x="0" y="0"/>
+          <a:ext cx="0" cy="0"/>
+          <a:chOff x="0" y="0"/>
+          <a:chExt cx="0" cy="0"/>
+        </a:xfrm>
+      </p:grpSpPr>
+      <p:sp>
+        <p:nvSpPr>
+          <p:cNvPr id="2" name="Text 0"/>
+          <p:cNvSpPr txBox="1"/>
+          <p:nvPr/>
+        </p:nvSpPr>
+        <p:spPr>
+          <a:xfrm>
+            <a:off x="502006" y="457200"/>
+            <a:ext cx="1417320" cy="274320"/>
+          </a:xfrm>
+          <a:prstGeom prst="rect">
+            <a:avLst/>
+          </a:prstGeom>
+          <a:noFill/>
+          <a:ln/>
+        </p:spPr>
+        <p:txBody>
+          <a:bodyPr wrap="square" lIns="0" tIns="0" rIns="0" bIns="0" rtlCol="0" anchor="ctr"/>
+          <a:lstStyle/>
+          <a:p>
+            <a:pPr algn="l" indent="0" marL="0">
+              <a:buNone/>
+            </a:pPr>
+            <a:r>
+              <a:rPr lang="en-US" sz="1600" b="1" dirty="0">
+                <a:solidFill>
+                  <a:srgbClr val="FFFFFF"/>
+                </a:solidFill>
+                <a:latin typeface="Calibri" pitchFamily="34" charset="0"/>
+                <a:ea typeface="Calibri" pitchFamily="34" charset="-122"/>
+                <a:cs typeface="Calibri" pitchFamily="34" charset="-120"/>
+              </a:rPr>
+              <a:t>Deloitte</a:t>
+            </a:r>
+            <a:endParaRPr lang="en-US" sz="1600" dirty="0"/>
+          </a:p>
+        </p:txBody>
+      </p:sp>
+      <p:sp>
+        <p:nvSpPr>
+          <p:cNvPr id="3" name="Shape 1"/>
+          <p:cNvSpPr/>
+          <p:nvPr/>
+        </p:nvSpPr>
+        <p:spPr>
+          <a:xfrm>
+            <a:off x="1800454" y="598932"/>
+            <a:ext cx="82296" cy="82296"/>
+          </a:xfrm>
+          <a:prstGeom prst="ellipse">
+            <a:avLst/>
+          </a:prstGeom>
+          <a:solidFill>
+            <a:srgbClr val="86BC25"/>
+          </a:solidFill>
+          <a:ln/>
+        </p:spPr>
+      </p:sp>
+      <p:sp>
+        <p:nvSpPr>
+          <p:cNvPr id="4" name="Text 2"/>
+          <p:cNvSpPr txBox="1"/>
+          <p:nvPr/>
+        </p:nvSpPr>
+        <p:spPr>
+          <a:xfrm>
+            <a:off x="502006" y="4215384"/>
+            <a:ext cx="8531352" cy="2167128"/>
+          </a:xfrm>
+          <a:prstGeom prst="rect">
+            <a:avLst/>
+          </a:prstGeom>
+          <a:noFill/>
+          <a:ln/>
+        </p:spPr>
+        <p:txBody>
+          <a:bodyPr wrap="square" lIns="0" tIns="0" rIns="0" bIns="0" rtlCol="0" anchor="t"/>
+          <a:lstStyle/>
+          <a:p>
+            <a:pPr algn="l" indent="0" marL="0">
+              <a:lnSpc>
+                <a:spcPct val="120000"/>
+              </a:lnSpc>
+              <a:buNone/>
+            </a:pPr>
+            <a:r>
+              <a:rPr lang="en-US" sz="2800" b="1" dirty="0">
+                <a:solidFill>
+                  <a:srgbClr val="FFFFFF"/>
+                </a:solidFill>
+                <a:latin typeface="Calibri" pitchFamily="34" charset="0"/>
+                <a:ea typeface="Calibri" pitchFamily="34" charset="-122"/>
+                <a:cs typeface="Calibri" pitchFamily="34" charset="-120"/>
+              </a:rPr>
+              <a:t>Thank you
+</a:t>
+            </a:r>
+            <a:endParaRPr lang="en-US" sz="2800" dirty="0"/>
+          </a:p>
+          <a:p>
+            <a:pPr algn="l" indent="0" marL="0">
+              <a:lnSpc>
+                <a:spcPct val="120000"/>
+              </a:lnSpc>
+              <a:buNone/>
+            </a:pPr>
+            <a:r>
+              <a:rPr lang="en-US" sz="1600" b="1" dirty="0">
+                <a:solidFill>
+                  <a:srgbClr val="86BC25"/>
+                </a:solidFill>
+                <a:latin typeface="Calibri" pitchFamily="34" charset="0"/>
+                <a:ea typeface="Calibri" pitchFamily="34" charset="-122"/>
+                <a:cs typeface="Calibri" pitchFamily="34" charset="-120"/>
+              </a:rPr>
+              <a:t>[Presenter Name]
+</a:t>
+            </a:r>
+            <a:endParaRPr lang="en-US" sz="2800" dirty="0"/>
+          </a:p>
+          <a:p>
+            <a:pPr algn="l" indent="0" marL="0">
+              <a:lnSpc>
+                <a:spcPct val="120000"/>
+              </a:lnSpc>
+              <a:buNone/>
+            </a:pPr>
+            <a:r>
+              <a:rPr lang="en-US" sz="1300" dirty="0">
+                <a:solidFill>
+                  <a:srgbClr val="FFFFFF"/>
+                </a:solidFill>
+                <a:latin typeface="Calibri" pitchFamily="34" charset="0"/>
+                <a:ea typeface="Calibri" pitchFamily="34" charset="-122"/>
+                <a:cs typeface="Calibri" pitchFamily="34" charset="-120"/>
+              </a:rPr>
+              <a:t>[Title | Practice]
+</a:t>
+            </a:r>
+            <a:endParaRPr lang="en-US" sz="2800" dirty="0"/>
+          </a:p>
+          <a:p>
+            <a:pPr algn="l" indent="0" marL="0">
+              <a:lnSpc>
+                <a:spcPct val="120000"/>
+              </a:lnSpc>
+              <a:buNone/>
+            </a:pPr>
+            <a:r>
+              <a:rPr lang="en-US" sz="1300" dirty="0">
+                <a:solidFill>
+                  <a:srgbClr val="D0D0CE"/>
+                </a:solidFill>
+                <a:latin typeface="Calibri" pitchFamily="34" charset="0"/>
+                <a:ea typeface="Calibri" pitchFamily="34" charset="-122"/>
+                <a:cs typeface="Calibri" pitchFamily="34" charset="-120"/>
+              </a:rPr>
+              <a:t>[email@deloitte.com]</a:t>
+            </a:r>
+            <a:endParaRPr lang="en-US" sz="2800" dirty="0"/>
+          </a:p>
+        </p:txBody>
+      </p:sp>
+      <p:sp>
+        <p:nvSpPr>
+          <p:cNvPr id="5" name="Shape 3"/>
+          <p:cNvSpPr/>
+          <p:nvPr/>
+        </p:nvSpPr>
+        <p:spPr>
+          <a:xfrm>
+            <a:off x="9372600" y="4215384"/>
+            <a:ext cx="2322576" cy="1728216"/>
+          </a:xfrm>
+          <a:prstGeom prst="rect">
+            <a:avLst/>
+          </a:prstGeom>
+          <a:solidFill>
+            <a:srgbClr val="0B1C14"/>
+          </a:solidFill>
+          <a:ln w="9525">
+            <a:solidFill>
+              <a:srgbClr val="86BC25"/>
+            </a:solidFill>
+            <a:prstDash val="solid"/>
+          </a:ln>
+        </p:spPr>
+      </p:sp>
+      <p:sp>
+        <p:nvSpPr>
+          <p:cNvPr id="6" name="Text 4"/>
+          <p:cNvSpPr txBox="1"/>
+          <p:nvPr/>
+        </p:nvSpPr>
+        <p:spPr>
+          <a:xfrm>
+            <a:off x="9372600" y="4892040"/>
+            <a:ext cx="2322576" cy="365760"/>
+          </a:xfrm>
+          <a:prstGeom prst="rect">
+            <a:avLst/>
+          </a:prstGeom>
+          <a:noFill/>
+          <a:ln/>
+        </p:spPr>
+        <p:txBody>
+          <a:bodyPr wrap="square" rtlCol="0" anchor="ctr"/>
+          <a:lstStyle/>
+          <a:p>
+            <a:pPr algn="ctr" indent="0" marL="0">
+              <a:buNone/>
+            </a:pPr>
+            <a:r>
+              <a:rPr lang="en-US" sz="1600" b="1" dirty="0">
+                <a:solidFill>
+                  <a:srgbClr val="86BC25"/>
+                </a:solidFill>
+                <a:latin typeface="Calibri" pitchFamily="34" charset="0"/>
+                <a:ea typeface="Calibri" pitchFamily="34" charset="-122"/>
+                <a:cs typeface="Calibri" pitchFamily="34" charset="-120"/>
+              </a:rPr>
+              <a:t>D.FEND</a:t>
+            </a:r>
+            <a:endParaRPr lang="en-US" sz="1600" dirty="0"/>
+          </a:p>
+        </p:txBody>
+      </p:sp>
+      <p:sp>
+        <p:nvSpPr>
+          <p:cNvPr id="7" name="Text 5"/>
+          <p:cNvSpPr txBox="1"/>
+          <p:nvPr/>
+        </p:nvSpPr>
+        <p:spPr>
+          <a:xfrm>
+            <a:off x="9370771" y="6016752"/>
+            <a:ext cx="2322576" cy="365760"/>
+          </a:xfrm>
+          <a:prstGeom prst="rect">
+            <a:avLst/>
+          </a:prstGeom>
+          <a:noFill/>
+          <a:ln/>
+        </p:spPr>
+        <p:txBody>
+          <a:bodyPr wrap="square" rtlCol="0" anchor="ctr"/>
+          <a:lstStyle/>
+          <a:p>
+            <a:pPr algn="ctr" indent="0" marL="0">
+              <a:buNone/>
+            </a:pPr>
+            <a:r>
+              <a:rPr lang="en-US" sz="1000" i="1" dirty="0">
+                <a:solidFill>
+                  <a:srgbClr val="D0D0CE"/>
+                </a:solidFill>
+                <a:latin typeface="Calibri" pitchFamily="34" charset="0"/>
+                <a:ea typeface="Calibri" pitchFamily="34" charset="-122"/>
+                <a:cs typeface="Calibri" pitchFamily="34" charset="-120"/>
+              </a:rPr>
+              <a:t>Fin Crime Forum</a:t>
+            </a:r>
+            <a:endParaRPr lang="en-US" sz="1000" dirty="0"/>
           </a:p>
         </p:txBody>
       </p:sp>

--- a/Fraud in 2026 - Full Results.pptx
+++ b/Fraud in 2026 - Full Results.pptx
@@ -45,9 +45,10 @@
     <p:sldId id="293" r:id="rId39"/>
     <p:sldId id="294" r:id="rId40"/>
     <p:sldId id="295" r:id="rId41"/>
+    <p:sldId id="296" r:id="rId42"/>
   </p:sldIdLst>
   <p:notesMasterIdLst>
-    <p:notesMasterId r:id="rId42"/>
+    <p:notesMasterId r:id="rId43"/>
   </p:notesMasterIdLst>
   <p:sldSz cx="12192000" cy="6858000"/>
   <p:notesSz cx="6858000" cy="12192000"/>
@@ -13492,6 +13493,675 @@
 </c:chartSpace>
 </file>
 
+<file path=ppt/charts/chart36.xml><?xml version="1.0" encoding="utf-8"?>
+<c:chartSpace xmlns:c="http://schemas.openxmlformats.org/drawingml/2006/chart" xmlns:a="http://schemas.openxmlformats.org/drawingml/2006/main" xmlns:r="http://schemas.openxmlformats.org/officeDocument/2006/relationships">
+  <c:date1904 val="0"/>
+  <c:roundedCorners val="1"/>
+  <c:chart>
+    <c:autoTitleDeleted val="1"/>
+    <c:plotArea>
+      <c:layout/>
+      <c:barChart>
+        <c:barDir val="bar"/>
+        <c:grouping val="stacked"/>
+        <c:varyColors val="0"/>
+        <c:ser>
+          <c:idx val="0"/>
+          <c:order val="0"/>
+          <c:tx>
+            <c:strRef>
+              <c:f>Sheet1!$B$1</c:f>
+              <c:strCache>
+                <c:ptCount val="1"/>
+                <c:pt idx="0">
+                  <c:v>United States (n=44)</c:v>
+                </c:pt>
+              </c:strCache>
+            </c:strRef>
+          </c:tx>
+          <c:spPr>
+            <a:solidFill>
+              <a:srgbClr val="86BC25"/>
+            </a:solidFill>
+            <a:effectLst/>
+          </c:spPr>
+          <c:invertIfNegative val="0"/>
+          <c:dLbls>
+            <c:numFmt formatCode="0&quot;%&quot;;-0&quot;%&quot;;;@" sourceLinked="0"/>
+            <c:txPr>
+              <a:bodyPr/>
+              <a:lstStyle/>
+              <a:p>
+                <a:pPr>
+                  <a:defRPr b="0" i="0" strike="noStrike" sz="650" u="none">
+                    <a:solidFill>
+                      <a:srgbClr val="FFFFFF"/>
+                    </a:solidFill>
+                    <a:latin typeface="Arial"/>
+                  </a:defRPr>
+                </a:pPr>
+              </a:p>
+            </c:txPr>
+            <c:dLblPos val="ctr"/>
+            <c:showLegendKey val="0"/>
+            <c:showVal val="1"/>
+            <c:showCatName val="0"/>
+            <c:showSerName val="0"/>
+            <c:showPercent val="0"/>
+            <c:showBubbleSize val="0"/>
+            <c:showLeaderLines val="0"/>
+          </c:dLbls>
+          <c:cat>
+            <c:multiLvlStrRef>
+              <c:f>Sheet1!$A$2:$A$7</c:f>
+              <c:multiLvlStrCache>
+                <c:ptCount val="6"/>
+                <c:lvl>
+                  <c:pt idx="0">
+                    <c:v>Customer identity, authentication &amp; digital trust (71%)</c:v>
+                  </c:pt>
+                  <c:pt idx="1">
+                    <c:v>Privacy, data-sharing &amp; AI governance requirements (66%)</c:v>
+                  </c:pt>
+                  <c:pt idx="2">
+                    <c:v>Payment innovation (RTP, stablecoins, agentic payments) (65%)</c:v>
+                  </c:pt>
+                  <c:pt idx="3">
+                    <c:v>Liability &amp; reimbursement changes (36%)</c:v>
+                  </c:pt>
+                  <c:pt idx="4">
+                    <c:v>AML modernization initiatives (33%)</c:v>
+                  </c:pt>
+                  <c:pt idx="5">
+                    <c:v>Open Banking / consumer-driven initiatives (29%)</c:v>
+                  </c:pt>
+                </c:lvl>
+              </c:multiLvlStrCache>
+            </c:multiLvlStrRef>
+          </c:cat>
+          <c:val>
+            <c:numRef>
+              <c:f>Sheet1!$B$2:$B$7</c:f>
+              <c:numCache>
+                <c:formatCode>General</c:formatCode>
+                <c:ptCount val="6"/>
+                <c:pt idx="0">
+                  <c:v>33</c:v>
+                </c:pt>
+                <c:pt idx="1">
+                  <c:v>32</c:v>
+                </c:pt>
+                <c:pt idx="2">
+                  <c:v>25</c:v>
+                </c:pt>
+                <c:pt idx="3">
+                  <c:v>18</c:v>
+                </c:pt>
+                <c:pt idx="4">
+                  <c:v>16</c:v>
+                </c:pt>
+                <c:pt idx="5">
+                  <c:v>8</c:v>
+                </c:pt>
+              </c:numCache>
+            </c:numRef>
+          </c:val>
+        </c:ser>
+        <c:ser>
+          <c:idx val="1"/>
+          <c:order val="1"/>
+          <c:tx>
+            <c:strRef>
+              <c:f>Sheet1!$C$1</c:f>
+              <c:strCache>
+                <c:ptCount val="1"/>
+                <c:pt idx="0">
+                  <c:v>Canada (n=30)</c:v>
+                </c:pt>
+              </c:strCache>
+            </c:strRef>
+          </c:tx>
+          <c:spPr>
+            <a:solidFill>
+              <a:srgbClr val="43B02A"/>
+            </a:solidFill>
+            <a:effectLst/>
+          </c:spPr>
+          <c:invertIfNegative val="0"/>
+          <c:dLbls>
+            <c:numFmt formatCode="0&quot;%&quot;;-0&quot;%&quot;;;@" sourceLinked="0"/>
+            <c:txPr>
+              <a:bodyPr/>
+              <a:lstStyle/>
+              <a:p>
+                <a:pPr>
+                  <a:defRPr b="0" i="0" strike="noStrike" sz="650" u="none">
+                    <a:solidFill>
+                      <a:srgbClr val="FFFFFF"/>
+                    </a:solidFill>
+                    <a:latin typeface="Arial"/>
+                  </a:defRPr>
+                </a:pPr>
+              </a:p>
+            </c:txPr>
+            <c:dLblPos val="ctr"/>
+            <c:showLegendKey val="0"/>
+            <c:showVal val="1"/>
+            <c:showCatName val="0"/>
+            <c:showSerName val="0"/>
+            <c:showPercent val="0"/>
+            <c:showBubbleSize val="0"/>
+            <c:showLeaderLines val="0"/>
+          </c:dLbls>
+          <c:cat>
+            <c:multiLvlStrRef>
+              <c:f>Sheet1!$A$2:$A$7</c:f>
+              <c:multiLvlStrCache>
+                <c:ptCount val="6"/>
+                <c:lvl>
+                  <c:pt idx="0">
+                    <c:v>Customer identity, authentication &amp; digital trust (71%)</c:v>
+                  </c:pt>
+                  <c:pt idx="1">
+                    <c:v>Privacy, data-sharing &amp; AI governance requirements (66%)</c:v>
+                  </c:pt>
+                  <c:pt idx="2">
+                    <c:v>Payment innovation (RTP, stablecoins, agentic payments) (65%)</c:v>
+                  </c:pt>
+                  <c:pt idx="3">
+                    <c:v>Liability &amp; reimbursement changes (36%)</c:v>
+                  </c:pt>
+                  <c:pt idx="4">
+                    <c:v>AML modernization initiatives (33%)</c:v>
+                  </c:pt>
+                  <c:pt idx="5">
+                    <c:v>Open Banking / consumer-driven initiatives (29%)</c:v>
+                  </c:pt>
+                </c:lvl>
+              </c:multiLvlStrCache>
+            </c:multiLvlStrRef>
+          </c:cat>
+          <c:val>
+            <c:numRef>
+              <c:f>Sheet1!$C$2:$C$7</c:f>
+              <c:numCache>
+                <c:formatCode>General</c:formatCode>
+                <c:ptCount val="6"/>
+                <c:pt idx="0">
+                  <c:v>21</c:v>
+                </c:pt>
+                <c:pt idx="1">
+                  <c:v>19</c:v>
+                </c:pt>
+                <c:pt idx="2">
+                  <c:v>22</c:v>
+                </c:pt>
+                <c:pt idx="3">
+                  <c:v>6</c:v>
+                </c:pt>
+                <c:pt idx="4">
+                  <c:v>8</c:v>
+                </c:pt>
+                <c:pt idx="5">
+                  <c:v>14</c:v>
+                </c:pt>
+              </c:numCache>
+            </c:numRef>
+          </c:val>
+        </c:ser>
+        <c:ser>
+          <c:idx val="2"/>
+          <c:order val="2"/>
+          <c:tx>
+            <c:strRef>
+              <c:f>Sheet1!$D$1</c:f>
+              <c:strCache>
+                <c:ptCount val="1"/>
+                <c:pt idx="0">
+                  <c:v>Europe — EU+UK (n=14)</c:v>
+                </c:pt>
+              </c:strCache>
+            </c:strRef>
+          </c:tx>
+          <c:spPr>
+            <a:solidFill>
+              <a:srgbClr val="046A38"/>
+            </a:solidFill>
+            <a:effectLst/>
+          </c:spPr>
+          <c:invertIfNegative val="0"/>
+          <c:dLbls>
+            <c:numFmt formatCode="0&quot;%&quot;;-0&quot;%&quot;;;@" sourceLinked="0"/>
+            <c:txPr>
+              <a:bodyPr/>
+              <a:lstStyle/>
+              <a:p>
+                <a:pPr>
+                  <a:defRPr b="0" i="0" strike="noStrike" sz="650" u="none">
+                    <a:solidFill>
+                      <a:srgbClr val="FFFFFF"/>
+                    </a:solidFill>
+                    <a:latin typeface="Arial"/>
+                  </a:defRPr>
+                </a:pPr>
+              </a:p>
+            </c:txPr>
+            <c:dLblPos val="ctr"/>
+            <c:showLegendKey val="0"/>
+            <c:showVal val="1"/>
+            <c:showCatName val="0"/>
+            <c:showSerName val="0"/>
+            <c:showPercent val="0"/>
+            <c:showBubbleSize val="0"/>
+            <c:showLeaderLines val="0"/>
+          </c:dLbls>
+          <c:cat>
+            <c:multiLvlStrRef>
+              <c:f>Sheet1!$A$2:$A$7</c:f>
+              <c:multiLvlStrCache>
+                <c:ptCount val="6"/>
+                <c:lvl>
+                  <c:pt idx="0">
+                    <c:v>Customer identity, authentication &amp; digital trust (71%)</c:v>
+                  </c:pt>
+                  <c:pt idx="1">
+                    <c:v>Privacy, data-sharing &amp; AI governance requirements (66%)</c:v>
+                  </c:pt>
+                  <c:pt idx="2">
+                    <c:v>Payment innovation (RTP, stablecoins, agentic payments) (65%)</c:v>
+                  </c:pt>
+                  <c:pt idx="3">
+                    <c:v>Liability &amp; reimbursement changes (36%)</c:v>
+                  </c:pt>
+                  <c:pt idx="4">
+                    <c:v>AML modernization initiatives (33%)</c:v>
+                  </c:pt>
+                  <c:pt idx="5">
+                    <c:v>Open Banking / consumer-driven initiatives (29%)</c:v>
+                  </c:pt>
+                </c:lvl>
+              </c:multiLvlStrCache>
+            </c:multiLvlStrRef>
+          </c:cat>
+          <c:val>
+            <c:numRef>
+              <c:f>Sheet1!$D$2:$D$7</c:f>
+              <c:numCache>
+                <c:formatCode>General</c:formatCode>
+                <c:ptCount val="6"/>
+                <c:pt idx="0">
+                  <c:v>8</c:v>
+                </c:pt>
+                <c:pt idx="1">
+                  <c:v>9</c:v>
+                </c:pt>
+                <c:pt idx="2">
+                  <c:v>9</c:v>
+                </c:pt>
+                <c:pt idx="3">
+                  <c:v>7</c:v>
+                </c:pt>
+                <c:pt idx="4">
+                  <c:v>5</c:v>
+                </c:pt>
+                <c:pt idx="5">
+                  <c:v>4</c:v>
+                </c:pt>
+              </c:numCache>
+            </c:numRef>
+          </c:val>
+        </c:ser>
+        <c:ser>
+          <c:idx val="3"/>
+          <c:order val="3"/>
+          <c:tx>
+            <c:strRef>
+              <c:f>Sheet1!$E$1</c:f>
+              <c:strCache>
+                <c:ptCount val="1"/>
+                <c:pt idx="0">
+                  <c:v>Australia (n=8)</c:v>
+                </c:pt>
+              </c:strCache>
+            </c:strRef>
+          </c:tx>
+          <c:spPr>
+            <a:solidFill>
+              <a:srgbClr val="0D8390"/>
+            </a:solidFill>
+            <a:effectLst/>
+          </c:spPr>
+          <c:invertIfNegative val="0"/>
+          <c:dLbls>
+            <c:numFmt formatCode="0&quot;%&quot;;-0&quot;%&quot;;;@" sourceLinked="0"/>
+            <c:txPr>
+              <a:bodyPr/>
+              <a:lstStyle/>
+              <a:p>
+                <a:pPr>
+                  <a:defRPr b="0" i="0" strike="noStrike" sz="650" u="none">
+                    <a:solidFill>
+                      <a:srgbClr val="FFFFFF"/>
+                    </a:solidFill>
+                    <a:latin typeface="Arial"/>
+                  </a:defRPr>
+                </a:pPr>
+              </a:p>
+            </c:txPr>
+            <c:dLblPos val="ctr"/>
+            <c:showLegendKey val="0"/>
+            <c:showVal val="1"/>
+            <c:showCatName val="0"/>
+            <c:showSerName val="0"/>
+            <c:showPercent val="0"/>
+            <c:showBubbleSize val="0"/>
+            <c:showLeaderLines val="0"/>
+          </c:dLbls>
+          <c:cat>
+            <c:multiLvlStrRef>
+              <c:f>Sheet1!$A$2:$A$7</c:f>
+              <c:multiLvlStrCache>
+                <c:ptCount val="6"/>
+                <c:lvl>
+                  <c:pt idx="0">
+                    <c:v>Customer identity, authentication &amp; digital trust (71%)</c:v>
+                  </c:pt>
+                  <c:pt idx="1">
+                    <c:v>Privacy, data-sharing &amp; AI governance requirements (66%)</c:v>
+                  </c:pt>
+                  <c:pt idx="2">
+                    <c:v>Payment innovation (RTP, stablecoins, agentic payments) (65%)</c:v>
+                  </c:pt>
+                  <c:pt idx="3">
+                    <c:v>Liability &amp; reimbursement changes (36%)</c:v>
+                  </c:pt>
+                  <c:pt idx="4">
+                    <c:v>AML modernization initiatives (33%)</c:v>
+                  </c:pt>
+                  <c:pt idx="5">
+                    <c:v>Open Banking / consumer-driven initiatives (29%)</c:v>
+                  </c:pt>
+                </c:lvl>
+              </c:multiLvlStrCache>
+            </c:multiLvlStrRef>
+          </c:cat>
+          <c:val>
+            <c:numRef>
+              <c:f>Sheet1!$E$2:$E$7</c:f>
+              <c:numCache>
+                <c:formatCode>General</c:formatCode>
+                <c:ptCount val="6"/>
+                <c:pt idx="0">
+                  <c:v>6</c:v>
+                </c:pt>
+                <c:pt idx="1">
+                  <c:v>4</c:v>
+                </c:pt>
+                <c:pt idx="2">
+                  <c:v>5</c:v>
+                </c:pt>
+                <c:pt idx="3">
+                  <c:v>3</c:v>
+                </c:pt>
+                <c:pt idx="4">
+                  <c:v>3</c:v>
+                </c:pt>
+                <c:pt idx="5">
+                  <c:v>3</c:v>
+                </c:pt>
+              </c:numCache>
+            </c:numRef>
+          </c:val>
+        </c:ser>
+        <c:ser>
+          <c:idx val="4"/>
+          <c:order val="4"/>
+          <c:tx>
+            <c:strRef>
+              <c:f>Sheet1!$F$1</c:f>
+              <c:strCache>
+                <c:ptCount val="1"/>
+                <c:pt idx="0">
+                  <c:v>Singapore (n=4)</c:v>
+                </c:pt>
+              </c:strCache>
+            </c:strRef>
+          </c:tx>
+          <c:spPr>
+            <a:solidFill>
+              <a:srgbClr val="53565A"/>
+            </a:solidFill>
+            <a:effectLst/>
+          </c:spPr>
+          <c:invertIfNegative val="0"/>
+          <c:dLbls>
+            <c:numFmt formatCode="0&quot;%&quot;;-0&quot;%&quot;;;@" sourceLinked="0"/>
+            <c:txPr>
+              <a:bodyPr/>
+              <a:lstStyle/>
+              <a:p>
+                <a:pPr>
+                  <a:defRPr b="0" i="0" strike="noStrike" sz="650" u="none">
+                    <a:solidFill>
+                      <a:srgbClr val="FFFFFF"/>
+                    </a:solidFill>
+                    <a:latin typeface="Arial"/>
+                  </a:defRPr>
+                </a:pPr>
+              </a:p>
+            </c:txPr>
+            <c:dLblPos val="ctr"/>
+            <c:showLegendKey val="0"/>
+            <c:showVal val="1"/>
+            <c:showCatName val="0"/>
+            <c:showSerName val="0"/>
+            <c:showPercent val="0"/>
+            <c:showBubbleSize val="0"/>
+            <c:showLeaderLines val="0"/>
+          </c:dLbls>
+          <c:cat>
+            <c:multiLvlStrRef>
+              <c:f>Sheet1!$A$2:$A$7</c:f>
+              <c:multiLvlStrCache>
+                <c:ptCount val="6"/>
+                <c:lvl>
+                  <c:pt idx="0">
+                    <c:v>Customer identity, authentication &amp; digital trust (71%)</c:v>
+                  </c:pt>
+                  <c:pt idx="1">
+                    <c:v>Privacy, data-sharing &amp; AI governance requirements (66%)</c:v>
+                  </c:pt>
+                  <c:pt idx="2">
+                    <c:v>Payment innovation (RTP, stablecoins, agentic payments) (65%)</c:v>
+                  </c:pt>
+                  <c:pt idx="3">
+                    <c:v>Liability &amp; reimbursement changes (36%)</c:v>
+                  </c:pt>
+                  <c:pt idx="4">
+                    <c:v>AML modernization initiatives (33%)</c:v>
+                  </c:pt>
+                  <c:pt idx="5">
+                    <c:v>Open Banking / consumer-driven initiatives (29%)</c:v>
+                  </c:pt>
+                </c:lvl>
+              </c:multiLvlStrCache>
+            </c:multiLvlStrRef>
+          </c:cat>
+          <c:val>
+            <c:numRef>
+              <c:f>Sheet1!$F$2:$F$7</c:f>
+              <c:numCache>
+                <c:formatCode>General</c:formatCode>
+                <c:ptCount val="6"/>
+                <c:pt idx="0">
+                  <c:v>3</c:v>
+                </c:pt>
+                <c:pt idx="1">
+                  <c:v>2</c:v>
+                </c:pt>
+                <c:pt idx="2">
+                  <c:v>4</c:v>
+                </c:pt>
+                <c:pt idx="3">
+                  <c:v>2</c:v>
+                </c:pt>
+                <c:pt idx="4">
+                  <c:v>1</c:v>
+                </c:pt>
+                <c:pt idx="5">
+                  <c:v>0</c:v>
+                </c:pt>
+              </c:numCache>
+            </c:numRef>
+          </c:val>
+        </c:ser>
+        <c:dLbls>
+          <c:numFmt formatCode="0&quot;%&quot;;-0&quot;%&quot;;;@" sourceLinked="0"/>
+          <c:txPr>
+            <a:bodyPr/>
+            <a:lstStyle/>
+            <a:p>
+              <a:pPr>
+                <a:defRPr b="0" i="0" strike="noStrike" sz="650" u="none">
+                  <a:solidFill>
+                    <a:srgbClr val="FFFFFF"/>
+                  </a:solidFill>
+                  <a:latin typeface="Arial"/>
+                </a:defRPr>
+              </a:pPr>
+            </a:p>
+          </c:txPr>
+          <c:dLblPos val="ctr"/>
+          <c:showLegendKey val="0"/>
+          <c:showVal val="1"/>
+          <c:showCatName val="0"/>
+          <c:showSerName val="0"/>
+          <c:showPercent val="0"/>
+          <c:showBubbleSize val="0"/>
+          <c:showLeaderLines val="0"/>
+        </c:dLbls>
+        <c:gapWidth val="40"/>
+        <c:overlap val="100"/>
+        <c:axId val="2094734554"/>
+        <c:axId val="2094734552"/>
+        <c:axId val="2094734556"/>
+      </c:barChart>
+      <c:catAx>
+        <c:axId val="2094734554"/>
+        <c:scaling>
+          <c:orientation val="minMax"/>
+        </c:scaling>
+        <c:delete val="0"/>
+        <c:axPos val="l"/>
+        <c:numFmt formatCode="General" sourceLinked="1"/>
+        <c:majorTickMark val="out"/>
+        <c:minorTickMark val="none"/>
+        <c:tickLblPos val="nextTo"/>
+        <c:spPr>
+          <a:ln w="12700" cap="flat">
+            <a:noFill/>
+            <a:prstDash val="solid"/>
+            <a:round/>
+          </a:ln>
+        </c:spPr>
+        <c:txPr>
+          <a:bodyPr/>
+          <a:lstStyle/>
+          <a:p>
+            <a:pPr>
+              <a:defRPr sz="800" b="0" i="0" u="none" strike="noStrike">
+                <a:solidFill>
+                  <a:srgbClr val="53565A"/>
+                </a:solidFill>
+                <a:latin typeface="Arial"/>
+              </a:defRPr>
+            </a:pPr>
+            <a:endParaRPr lang="en-US"/>
+          </a:p>
+        </c:txPr>
+        <c:crossAx val="2094734552"/>
+        <c:crosses val="autoZero"/>
+        <c:auto val="1"/>
+        <c:lblAlgn val="ctr"/>
+        <c:noMultiLvlLbl val="1"/>
+      </c:catAx>
+      <c:valAx>
+        <c:axId val="2094734552"/>
+        <c:scaling>
+          <c:orientation val="minMax"/>
+        </c:scaling>
+        <c:delete val="1"/>
+        <c:axPos val="b"/>
+        <c:numFmt formatCode="General" sourceLinked="0"/>
+        <c:majorTickMark val="out"/>
+        <c:minorTickMark val="none"/>
+        <c:tickLblPos val="low"/>
+        <c:spPr>
+          <a:ln w="12700" cap="flat">
+            <a:noFill/>
+            <a:prstDash val="solid"/>
+            <a:round/>
+          </a:ln>
+        </c:spPr>
+        <c:txPr>
+          <a:bodyPr/>
+          <a:lstStyle/>
+          <a:p>
+            <a:pPr>
+              <a:defRPr sz="1200" b="0" i="0" u="none" strike="noStrike">
+                <a:solidFill>
+                  <a:srgbClr val="000000"/>
+                </a:solidFill>
+                <a:latin typeface="Arial"/>
+              </a:defRPr>
+            </a:pPr>
+            <a:endParaRPr lang="en-US"/>
+          </a:p>
+        </c:txPr>
+        <c:crossAx val="2094734554"/>
+        <c:crosses val="autoZero"/>
+        <c:crossBetween val="between"/>
+      </c:valAx>
+      <c:spPr>
+        <a:solidFill>
+          <a:srgbClr val="FFFFFF"/>
+        </a:solidFill>
+        <a:ln>
+          <a:noFill/>
+        </a:ln>
+        <a:effectLst/>
+      </c:spPr>
+    </c:plotArea>
+    <c:legend>
+      <c:legendPos val="b"/>
+      <c:overlay val="0"/>
+      <c:txPr>
+        <a:bodyPr/>
+        <a:lstStyle/>
+        <a:p>
+          <a:pPr>
+            <a:defRPr sz="800">      </a:defRPr>
+          </a:pPr>
+          <a:endParaRPr lang="en-US"/>
+        </a:p>
+      </c:txPr>
+    </c:legend>
+    <c:plotVisOnly val="1"/>
+    <c:dispBlanksAs val="span"/>
+  </c:chart>
+  <c:spPr>
+    <a:noFill/>
+    <a:ln>
+      <a:noFill/>
+    </a:ln>
+    <a:effectLst/>
+  </c:spPr>
+  <c:externalData r:id="rId1">
+    <c:autoUpdate val="0"/>
+  </c:externalData>
+</c:chartSpace>
+</file>
+
 <file path=ppt/charts/chart4.xml><?xml version="1.0" encoding="utf-8"?>
 <c:chartSpace xmlns:c="http://schemas.openxmlformats.org/drawingml/2006/chart" xmlns:a="http://schemas.openxmlformats.org/drawingml/2006/main" xmlns:r="http://schemas.openxmlformats.org/officeDocument/2006/relationships">
   <c:date1904 val="0"/>
@@ -18936,6 +19606,94 @@
             <a:fld id="{F7021451-1387-4CA6-816F-3879F97B5CBC}" type="slidenum">
               <a:rPr lang="en-US"/>
               <a:t>40</a:t>
+            </a:fld>
+            <a:endParaRPr lang="en-US"/>
+          </a:p>
+        </p:txBody>
+      </p:sp>
+    </p:spTree>
+    <p:extLst>
+      <p:ext uri="{BB962C8B-B14F-4D97-AF65-F5344CB8AC3E}">
+        <p14:creationId xmlns:p14="http://schemas.microsoft.com/office/powerpoint/2010/main" val="1024086991"/>
+      </p:ext>
+    </p:extLst>
+  </p:cSld>
+  <p:clrMapOvr>
+    <a:masterClrMapping/>
+  </p:clrMapOvr>
+</p:notes>
+</file>
+
+<file path=ppt/notesSlides/notesSlide41.xml><?xml version="1.0" encoding="utf-8"?>
+<p:notes xmlns:a="http://schemas.openxmlformats.org/drawingml/2006/main" xmlns:r="http://schemas.openxmlformats.org/officeDocument/2006/relationships" xmlns:p="http://schemas.openxmlformats.org/presentationml/2006/main">
+  <p:cSld>
+    <p:spTree>
+      <p:nvGrpSpPr>
+        <p:cNvPr id="1" name=""/>
+        <p:cNvGrpSpPr/>
+        <p:nvPr/>
+      </p:nvGrpSpPr>
+      <p:grpSpPr>
+        <a:xfrm>
+          <a:off x="0" y="0"/>
+          <a:ext cx="0" cy="0"/>
+          <a:chOff x="0" y="0"/>
+          <a:chExt cx="0" cy="0"/>
+        </a:xfrm>
+      </p:grpSpPr>
+      <p:sp>
+        <p:nvSpPr>
+          <p:cNvPr id="2" name="Slide Image Placeholder 1"/>
+          <p:cNvSpPr>
+            <a:spLocks noGrp="1" noRot="1" noChangeAspect="1"/>
+          </p:cNvSpPr>
+          <p:nvPr>
+            <p:ph type="sldImg"/>
+          </p:nvPr>
+        </p:nvSpPr>
+        <p:spPr/>
+      </p:sp>
+      <p:sp>
+        <p:nvSpPr>
+          <p:cNvPr id="3" name="Notes Placeholder 2"/>
+          <p:cNvSpPr>
+            <a:spLocks noGrp="1"/>
+          </p:cNvSpPr>
+          <p:nvPr>
+            <p:ph type="body" idx="1"/>
+          </p:nvPr>
+        </p:nvSpPr>
+        <p:spPr/>
+        <p:txBody>
+          <a:bodyPr/>
+          <a:lstStyle/>
+          <a:p>
+            <a:r>
+              <a:rPr lang="en-US" dirty="0"/>
+              <a:t/>
+            </a:r>
+            <a:endParaRPr lang="en-US" dirty="0"/>
+          </a:p>
+        </p:txBody>
+      </p:sp>
+      <p:sp>
+        <p:nvSpPr>
+          <p:cNvPr id="4" name="Slide Number Placeholder 3"/>
+          <p:cNvSpPr>
+            <a:spLocks noGrp="1"/>
+          </p:cNvSpPr>
+          <p:nvPr>
+            <p:ph type="sldNum" sz="quarter" idx="10"/>
+          </p:nvPr>
+        </p:nvSpPr>
+        <p:spPr/>
+        <p:txBody>
+          <a:bodyPr/>
+          <a:lstStyle/>
+          <a:p>
+            <a:fld id="{F7021451-1387-4CA6-816F-3879F97B5CBC}" type="slidenum">
+              <a:rPr lang="en-US"/>
+              <a:t>41</a:t>
             </a:fld>
             <a:endParaRPr lang="en-US"/>
           </a:p>
@@ -32884,6 +33642,525 @@
     <p:bg>
       <p:bgPr>
         <a:solidFill>
+          <a:srgbClr val="FFFFFF"/>
+        </a:solidFill>
+      </p:bgPr>
+    </p:bg>
+    <p:spTree>
+      <p:nvGrpSpPr>
+        <p:cNvPr id="1" name=""/>
+        <p:cNvGrpSpPr/>
+        <p:nvPr/>
+      </p:nvGrpSpPr>
+      <p:grpSpPr>
+        <a:xfrm>
+          <a:off x="0" y="0"/>
+          <a:ext cx="0" cy="0"/>
+          <a:chOff x="0" y="0"/>
+          <a:chExt cx="0" cy="0"/>
+        </a:xfrm>
+      </p:grpSpPr>
+      <p:sp>
+        <p:nvSpPr>
+          <p:cNvPr id="2" name="Text 0"/>
+          <p:cNvSpPr txBox="1"/>
+          <p:nvPr/>
+        </p:nvSpPr>
+        <p:spPr>
+          <a:xfrm>
+            <a:off x="502006" y="256032"/>
+            <a:ext cx="11188598" cy="310896"/>
+          </a:xfrm>
+          <a:prstGeom prst="rect">
+            <a:avLst/>
+          </a:prstGeom>
+          <a:noFill/>
+          <a:ln/>
+        </p:spPr>
+        <p:txBody>
+          <a:bodyPr wrap="square" lIns="0" tIns="0" rIns="0" bIns="0" rtlCol="0" anchor="t"/>
+          <a:lstStyle/>
+          <a:p>
+            <a:pPr algn="l" indent="0" marL="0">
+              <a:buNone/>
+            </a:pPr>
+            <a:r>
+              <a:rPr lang="en-US" sz="1900" b="1" dirty="0">
+                <a:solidFill>
+                  <a:srgbClr val="000000"/>
+                </a:solidFill>
+                <a:latin typeface="Calibri" pitchFamily="34" charset="0"/>
+                <a:ea typeface="Calibri" pitchFamily="34" charset="-122"/>
+                <a:cs typeface="Calibri" pitchFamily="34" charset="-120"/>
+              </a:rPr>
+              <a:t>Upcoming Regulatory / Market Change — By Region</a:t>
+            </a:r>
+            <a:endParaRPr lang="en-US" sz="1900" dirty="0"/>
+          </a:p>
+        </p:txBody>
+      </p:sp>
+      <p:sp>
+        <p:nvSpPr>
+          <p:cNvPr id="3" name="Text 1"/>
+          <p:cNvSpPr txBox="1"/>
+          <p:nvPr/>
+        </p:nvSpPr>
+        <p:spPr>
+          <a:xfrm>
+            <a:off x="502006" y="585216"/>
+            <a:ext cx="11188598" cy="713232"/>
+          </a:xfrm>
+          <a:prstGeom prst="rect">
+            <a:avLst/>
+          </a:prstGeom>
+          <a:noFill/>
+          <a:ln/>
+        </p:spPr>
+        <p:txBody>
+          <a:bodyPr wrap="square" lIns="0" tIns="0" rIns="0" bIns="0" rtlCol="0" anchor="t"/>
+          <a:lstStyle/>
+          <a:p>
+            <a:pPr algn="l" indent="0" marL="0">
+              <a:lnSpc>
+                <a:spcPct val="105000"/>
+              </a:lnSpc>
+              <a:buNone/>
+            </a:pPr>
+            <a:r>
+              <a:rPr lang="en-US" sz="1350" b="1" dirty="0">
+                <a:solidFill>
+                  <a:srgbClr val="046A38"/>
+                </a:solidFill>
+                <a:latin typeface="Calibri" pitchFamily="34" charset="0"/>
+                <a:ea typeface="Calibri" pitchFamily="34" charset="-122"/>
+                <a:cs typeface="Calibri" pitchFamily="34" charset="-120"/>
+              </a:rPr>
+              <a:t>Identity and privacy concerns dominate across every market; Canada stands out for prioritizing Open Banking well above its peers.</a:t>
+            </a:r>
+            <a:endParaRPr lang="en-US" sz="1350" dirty="0"/>
+          </a:p>
+        </p:txBody>
+      </p:sp>
+      <p:sp>
+        <p:nvSpPr>
+          <p:cNvPr id="4" name="Shape 2"/>
+          <p:cNvSpPr/>
+          <p:nvPr/>
+        </p:nvSpPr>
+        <p:spPr>
+          <a:xfrm>
+            <a:off x="502006" y="1335024"/>
+            <a:ext cx="0" cy="512064"/>
+          </a:xfrm>
+          <a:prstGeom prst="line">
+            <a:avLst/>
+          </a:prstGeom>
+          <a:noFill/>
+          <a:ln w="25400">
+            <a:solidFill>
+              <a:srgbClr val="D0D0CE"/>
+            </a:solidFill>
+            <a:prstDash val="solid"/>
+          </a:ln>
+        </p:spPr>
+      </p:sp>
+      <p:sp>
+        <p:nvSpPr>
+          <p:cNvPr id="5" name="Text 3"/>
+          <p:cNvSpPr txBox="1"/>
+          <p:nvPr/>
+        </p:nvSpPr>
+        <p:spPr>
+          <a:xfrm>
+            <a:off x="648310" y="1335024"/>
+            <a:ext cx="11042294" cy="512064"/>
+          </a:xfrm>
+          <a:prstGeom prst="rect">
+            <a:avLst/>
+          </a:prstGeom>
+          <a:noFill/>
+          <a:ln/>
+        </p:spPr>
+        <p:txBody>
+          <a:bodyPr wrap="square" lIns="0" tIns="0" rIns="0" bIns="0" rtlCol="0" anchor="t"/>
+          <a:lstStyle/>
+          <a:p>
+            <a:pPr algn="l" indent="0" marL="0">
+              <a:lnSpc>
+                <a:spcPct val="106000"/>
+              </a:lnSpc>
+              <a:buNone/>
+            </a:pPr>
+            <a:r>
+              <a:rPr lang="en-US" sz="900" b="1" dirty="0">
+                <a:solidFill>
+                  <a:srgbClr val="046A38"/>
+                </a:solidFill>
+                <a:latin typeface="IBM Plex Mono" pitchFamily="34" charset="0"/>
+                <a:ea typeface="IBM Plex Mono" pitchFamily="34" charset="-122"/>
+                <a:cs typeface="IBM Plex Mono" pitchFamily="34" charset="-120"/>
+              </a:rPr>
+              <a:t>Q11  </a:t>
+            </a:r>
+            <a:pPr algn="l" indent="0" marL="0">
+              <a:lnSpc>
+                <a:spcPct val="106000"/>
+              </a:lnSpc>
+              <a:buNone/>
+            </a:pPr>
+            <a:r>
+              <a:rPr lang="en-US" sz="1000" i="1" dirty="0">
+                <a:solidFill>
+                  <a:srgbClr val="575757"/>
+                </a:solidFill>
+                <a:latin typeface="Calibri" pitchFamily="34" charset="0"/>
+                <a:ea typeface="Calibri" pitchFamily="34" charset="-122"/>
+                <a:cs typeface="Calibri" pitchFamily="34" charset="-120"/>
+              </a:rPr>
+              <a:t>“Which upcoming regulatory or market changes is expected to have the greatest impact on your fraud program? (by region, all respondents)”</a:t>
+            </a:r>
+            <a:endParaRPr lang="en-US" sz="1000" dirty="0"/>
+          </a:p>
+        </p:txBody>
+      </p:sp>
+      <p:sp>
+        <p:nvSpPr>
+          <p:cNvPr id="6" name="Text 4"/>
+          <p:cNvSpPr txBox="1"/>
+          <p:nvPr/>
+        </p:nvSpPr>
+        <p:spPr>
+          <a:xfrm>
+            <a:off x="11346790" y="6537960"/>
+            <a:ext cx="343814" cy="182880"/>
+          </a:xfrm>
+          <a:prstGeom prst="rect">
+            <a:avLst/>
+          </a:prstGeom>
+          <a:noFill/>
+          <a:ln/>
+        </p:spPr>
+        <p:txBody>
+          <a:bodyPr wrap="square" rtlCol="0" anchor="ctr"/>
+          <a:lstStyle/>
+          <a:p>
+            <a:pPr algn="r" indent="0" marL="0">
+              <a:buNone/>
+            </a:pPr>
+            <a:r>
+              <a:rPr lang="en-US" sz="900" dirty="0">
+                <a:solidFill>
+                  <a:srgbClr val="53565A"/>
+                </a:solidFill>
+                <a:latin typeface="Calibri" pitchFamily="34" charset="0"/>
+                <a:ea typeface="Calibri" pitchFamily="34" charset="-122"/>
+                <a:cs typeface="Calibri" pitchFamily="34" charset="-120"/>
+              </a:rPr>
+              <a:t>37</a:t>
+            </a:r>
+            <a:endParaRPr lang="en-US" sz="900" dirty="0"/>
+          </a:p>
+        </p:txBody>
+      </p:sp>
+      <p:graphicFrame>
+        <p:nvGraphicFramePr>
+          <p:cNvPr id="7" name="Chart 0" descr=""/>
+          <p:cNvGraphicFramePr/>
+          <p:nvPr/>
+        </p:nvGraphicFramePr>
+        <p:xfrm>
+          <a:off x="502006" y="2011680"/>
+          <a:ext cx="11188598" cy="3063240"/>
+        </p:xfrm>
+        <a:graphic xmlns:a="http://schemas.openxmlformats.org/drawingml/2006/main">
+          <a:graphicData uri="http://schemas.openxmlformats.org/drawingml/2006/chart">
+            <c:chart xmlns:c="http://schemas.openxmlformats.org/drawingml/2006/chart" r:id="rId1"/>
+          </a:graphicData>
+        </a:graphic>
+      </p:graphicFrame>
+      <p:sp>
+        <p:nvSpPr>
+          <p:cNvPr id="8" name="Shape 5"/>
+          <p:cNvSpPr/>
+          <p:nvPr/>
+        </p:nvSpPr>
+        <p:spPr>
+          <a:xfrm>
+            <a:off x="502006" y="5202936"/>
+            <a:ext cx="11188598" cy="0"/>
+          </a:xfrm>
+          <a:prstGeom prst="line">
+            <a:avLst/>
+          </a:prstGeom>
+          <a:noFill/>
+          <a:ln w="9525">
+            <a:solidFill>
+              <a:srgbClr val="D0D0CE"/>
+            </a:solidFill>
+            <a:prstDash val="solid"/>
+          </a:ln>
+        </p:spPr>
+      </p:sp>
+      <p:sp>
+        <p:nvSpPr>
+          <p:cNvPr id="9" name="Text 6"/>
+          <p:cNvSpPr txBox="1"/>
+          <p:nvPr/>
+        </p:nvSpPr>
+        <p:spPr>
+          <a:xfrm>
+            <a:off x="502006" y="5276088"/>
+            <a:ext cx="11188598" cy="886968"/>
+          </a:xfrm>
+          <a:prstGeom prst="rect">
+            <a:avLst/>
+          </a:prstGeom>
+          <a:noFill/>
+          <a:ln/>
+        </p:spPr>
+        <p:txBody>
+          <a:bodyPr wrap="square" lIns="0" tIns="0" rIns="0" bIns="0" rtlCol="0" anchor="t"/>
+          <a:lstStyle/>
+          <a:p>
+            <a:pPr algn="l" indent="0" marL="0">
+              <a:lnSpc>
+                <a:spcPct val="118000"/>
+              </a:lnSpc>
+              <a:buNone/>
+            </a:pPr>
+            <a:r>
+              <a:rPr lang="en-US" sz="850" b="1" dirty="0">
+                <a:solidFill>
+                  <a:srgbClr val="53565A"/>
+                </a:solidFill>
+                <a:latin typeface="Calibri" pitchFamily="34" charset="0"/>
+                <a:ea typeface="Calibri" pitchFamily="34" charset="-122"/>
+                <a:cs typeface="Calibri" pitchFamily="34" charset="-120"/>
+              </a:rPr>
+              <a:t>Ranked top 3 — % shown is each region's share of the full 100-respondent sample who placed the option anywhere in their top 3, so segments sum to the overall figure in each category label (bars don't sum to 100%). Australia (n=8) and Singapore (n=4) are thin samples, shown directionally.  </a:t>
+            </a:r>
+            <a:pPr algn="l" indent="0" marL="0">
+              <a:lnSpc>
+                <a:spcPct val="118000"/>
+              </a:lnSpc>
+              <a:buNone/>
+            </a:pPr>
+            <a:r>
+              <a:rPr lang="en-US" sz="850" b="1" dirty="0">
+                <a:solidFill>
+                  <a:srgbClr val="53565A"/>
+                </a:solidFill>
+                <a:latin typeface="Calibri" pitchFamily="34" charset="0"/>
+                <a:ea typeface="Calibri" pitchFamily="34" charset="-122"/>
+                <a:cs typeface="Calibri" pitchFamily="34" charset="-120"/>
+              </a:rPr>
+              <a:t>Response options as fielded: </a:t>
+            </a:r>
+            <a:pPr algn="l" indent="0" marL="0">
+              <a:lnSpc>
+                <a:spcPct val="118000"/>
+              </a:lnSpc>
+              <a:buNone/>
+            </a:pPr>
+            <a:r>
+              <a:rPr lang="en-US" sz="850" i="1" dirty="0">
+                <a:solidFill>
+                  <a:srgbClr val="53565A"/>
+                </a:solidFill>
+                <a:latin typeface="Calibri" pitchFamily="34" charset="0"/>
+                <a:ea typeface="Calibri" pitchFamily="34" charset="-122"/>
+                <a:cs typeface="Calibri" pitchFamily="34" charset="-120"/>
+              </a:rPr>
+              <a:t>“Payment innovation and adoption (e.g., real-time payments, stable coins, agentic payments)”</a:t>
+            </a:r>
+            <a:pPr algn="l" indent="0" marL="0">
+              <a:lnSpc>
+                <a:spcPct val="118000"/>
+              </a:lnSpc>
+              <a:buNone/>
+            </a:pPr>
+            <a:r>
+              <a:rPr lang="en-US" sz="850" dirty="0">
+                <a:solidFill>
+                  <a:srgbClr val="D0D0CE"/>
+                </a:solidFill>
+                <a:latin typeface="Calibri" pitchFamily="34" charset="0"/>
+                <a:ea typeface="Calibri" pitchFamily="34" charset="-122"/>
+                <a:cs typeface="Calibri" pitchFamily="34" charset="-120"/>
+              </a:rPr>
+              <a:t>  ·  </a:t>
+            </a:r>
+            <a:pPr algn="l" indent="0" marL="0">
+              <a:lnSpc>
+                <a:spcPct val="118000"/>
+              </a:lnSpc>
+              <a:buNone/>
+            </a:pPr>
+            <a:r>
+              <a:rPr lang="en-US" sz="850" i="1" dirty="0">
+                <a:solidFill>
+                  <a:srgbClr val="53565A"/>
+                </a:solidFill>
+                <a:latin typeface="Calibri" pitchFamily="34" charset="0"/>
+                <a:ea typeface="Calibri" pitchFamily="34" charset="-122"/>
+                <a:cs typeface="Calibri" pitchFamily="34" charset="-120"/>
+              </a:rPr>
+              <a:t>“Liability and reimbursement changes”</a:t>
+            </a:r>
+            <a:pPr algn="l" indent="0" marL="0">
+              <a:lnSpc>
+                <a:spcPct val="118000"/>
+              </a:lnSpc>
+              <a:buNone/>
+            </a:pPr>
+            <a:r>
+              <a:rPr lang="en-US" sz="850" dirty="0">
+                <a:solidFill>
+                  <a:srgbClr val="D0D0CE"/>
+                </a:solidFill>
+                <a:latin typeface="Calibri" pitchFamily="34" charset="0"/>
+                <a:ea typeface="Calibri" pitchFamily="34" charset="-122"/>
+                <a:cs typeface="Calibri" pitchFamily="34" charset="-120"/>
+              </a:rPr>
+              <a:t>  ·  </a:t>
+            </a:r>
+            <a:pPr algn="l" indent="0" marL="0">
+              <a:lnSpc>
+                <a:spcPct val="118000"/>
+              </a:lnSpc>
+              <a:buNone/>
+            </a:pPr>
+            <a:r>
+              <a:rPr lang="en-US" sz="850" i="1" dirty="0">
+                <a:solidFill>
+                  <a:srgbClr val="53565A"/>
+                </a:solidFill>
+                <a:latin typeface="Calibri" pitchFamily="34" charset="0"/>
+                <a:ea typeface="Calibri" pitchFamily="34" charset="-122"/>
+                <a:cs typeface="Calibri" pitchFamily="34" charset="-120"/>
+              </a:rPr>
+              <a:t>“Open Banking / Consumer-driven banking initiatives”</a:t>
+            </a:r>
+            <a:pPr algn="l" indent="0" marL="0">
+              <a:lnSpc>
+                <a:spcPct val="118000"/>
+              </a:lnSpc>
+              <a:buNone/>
+            </a:pPr>
+            <a:r>
+              <a:rPr lang="en-US" sz="850" dirty="0">
+                <a:solidFill>
+                  <a:srgbClr val="D0D0CE"/>
+                </a:solidFill>
+                <a:latin typeface="Calibri" pitchFamily="34" charset="0"/>
+                <a:ea typeface="Calibri" pitchFamily="34" charset="-122"/>
+                <a:cs typeface="Calibri" pitchFamily="34" charset="-120"/>
+              </a:rPr>
+              <a:t>  ·  </a:t>
+            </a:r>
+            <a:pPr algn="l" indent="0" marL="0">
+              <a:lnSpc>
+                <a:spcPct val="118000"/>
+              </a:lnSpc>
+              <a:buNone/>
+            </a:pPr>
+            <a:r>
+              <a:rPr lang="en-US" sz="850" i="1" dirty="0">
+                <a:solidFill>
+                  <a:srgbClr val="53565A"/>
+                </a:solidFill>
+                <a:latin typeface="Calibri" pitchFamily="34" charset="0"/>
+                <a:ea typeface="Calibri" pitchFamily="34" charset="-122"/>
+                <a:cs typeface="Calibri" pitchFamily="34" charset="-120"/>
+              </a:rPr>
+              <a:t>“AML related modernization initiatives”</a:t>
+            </a:r>
+            <a:pPr algn="l" indent="0" marL="0">
+              <a:lnSpc>
+                <a:spcPct val="118000"/>
+              </a:lnSpc>
+              <a:buNone/>
+            </a:pPr>
+            <a:r>
+              <a:rPr lang="en-US" sz="850" dirty="0">
+                <a:solidFill>
+                  <a:srgbClr val="D0D0CE"/>
+                </a:solidFill>
+                <a:latin typeface="Calibri" pitchFamily="34" charset="0"/>
+                <a:ea typeface="Calibri" pitchFamily="34" charset="-122"/>
+                <a:cs typeface="Calibri" pitchFamily="34" charset="-120"/>
+              </a:rPr>
+              <a:t>  ·  </a:t>
+            </a:r>
+            <a:pPr algn="l" indent="0" marL="0">
+              <a:lnSpc>
+                <a:spcPct val="118000"/>
+              </a:lnSpc>
+              <a:buNone/>
+            </a:pPr>
+            <a:r>
+              <a:rPr lang="en-US" sz="850" i="1" dirty="0">
+                <a:solidFill>
+                  <a:srgbClr val="53565A"/>
+                </a:solidFill>
+                <a:latin typeface="Calibri" pitchFamily="34" charset="0"/>
+                <a:ea typeface="Calibri" pitchFamily="34" charset="-122"/>
+                <a:cs typeface="Calibri" pitchFamily="34" charset="-120"/>
+              </a:rPr>
+              <a:t>“Privacy, data-sharing requirements, and AI governance requirements”</a:t>
+            </a:r>
+            <a:pPr algn="l" indent="0" marL="0">
+              <a:lnSpc>
+                <a:spcPct val="118000"/>
+              </a:lnSpc>
+              <a:buNone/>
+            </a:pPr>
+            <a:r>
+              <a:rPr lang="en-US" sz="850" dirty="0">
+                <a:solidFill>
+                  <a:srgbClr val="D0D0CE"/>
+                </a:solidFill>
+                <a:latin typeface="Calibri" pitchFamily="34" charset="0"/>
+                <a:ea typeface="Calibri" pitchFamily="34" charset="-122"/>
+                <a:cs typeface="Calibri" pitchFamily="34" charset="-120"/>
+              </a:rPr>
+              <a:t>  ·  </a:t>
+            </a:r>
+            <a:pPr algn="l" indent="0" marL="0">
+              <a:lnSpc>
+                <a:spcPct val="118000"/>
+              </a:lnSpc>
+              <a:buNone/>
+            </a:pPr>
+            <a:r>
+              <a:rPr lang="en-US" sz="850" i="1" dirty="0">
+                <a:solidFill>
+                  <a:srgbClr val="53565A"/>
+                </a:solidFill>
+                <a:latin typeface="Calibri" pitchFamily="34" charset="0"/>
+                <a:ea typeface="Calibri" pitchFamily="34" charset="-122"/>
+                <a:cs typeface="Calibri" pitchFamily="34" charset="-120"/>
+              </a:rPr>
+              <a:t>“Customer identity, authentication, and digital trust expectations”</a:t>
+            </a:r>
+            <a:endParaRPr lang="en-US" sz="850" dirty="0"/>
+          </a:p>
+        </p:txBody>
+      </p:sp>
+    </p:spTree>
+  </p:cSld>
+  <p:clrMapOvr>
+    <a:masterClrMapping/>
+  </p:clrMapOvr>
+</p:sld>
+</file>
+
+<file path=ppt/slides/slide39.xml><?xml version="1.0" encoding="utf-8"?>
+<p:sld xmlns:a="http://schemas.openxmlformats.org/drawingml/2006/main" xmlns:r="http://schemas.openxmlformats.org/officeDocument/2006/relationships" xmlns:p="http://schemas.openxmlformats.org/presentationml/2006/main">
+  <p:cSld name="Slide 39">
+    <p:bg>
+      <p:bgPr>
+        <a:solidFill>
           <a:srgbClr val="86BC25"/>
         </a:solidFill>
       </p:bgPr>
@@ -32974,776 +34251,7 @@
                 <a:ea typeface="Calibri" pitchFamily="34" charset="-122"/>
                 <a:cs typeface="Calibri" pitchFamily="34" charset="-120"/>
               </a:rPr>
-              <a:t>37</a:t>
-            </a:r>
-            <a:endParaRPr lang="en-US" sz="900" dirty="0"/>
-          </a:p>
-        </p:txBody>
-      </p:sp>
-    </p:spTree>
-  </p:cSld>
-  <p:clrMapOvr>
-    <a:masterClrMapping/>
-  </p:clrMapOvr>
-</p:sld>
-</file>
-
-<file path=ppt/slides/slide39.xml><?xml version="1.0" encoding="utf-8"?>
-<p:sld xmlns:a="http://schemas.openxmlformats.org/drawingml/2006/main" xmlns:r="http://schemas.openxmlformats.org/officeDocument/2006/relationships" xmlns:p="http://schemas.openxmlformats.org/presentationml/2006/main">
-  <p:cSld name="Slide 39">
-    <p:bg>
-      <p:bgPr>
-        <a:solidFill>
-          <a:srgbClr val="FFFFFF"/>
-        </a:solidFill>
-      </p:bgPr>
-    </p:bg>
-    <p:spTree>
-      <p:nvGrpSpPr>
-        <p:cNvPr id="1" name=""/>
-        <p:cNvGrpSpPr/>
-        <p:nvPr/>
-      </p:nvGrpSpPr>
-      <p:grpSpPr>
-        <a:xfrm>
-          <a:off x="0" y="0"/>
-          <a:ext cx="0" cy="0"/>
-          <a:chOff x="0" y="0"/>
-          <a:chExt cx="0" cy="0"/>
-        </a:xfrm>
-      </p:grpSpPr>
-      <p:sp>
-        <p:nvSpPr>
-          <p:cNvPr id="2" name="Text 0"/>
-          <p:cNvSpPr txBox="1"/>
-          <p:nvPr/>
-        </p:nvSpPr>
-        <p:spPr>
-          <a:xfrm>
-            <a:off x="502006" y="256032"/>
-            <a:ext cx="11188598" cy="310896"/>
-          </a:xfrm>
-          <a:prstGeom prst="rect">
-            <a:avLst/>
-          </a:prstGeom>
-          <a:noFill/>
-          <a:ln/>
-        </p:spPr>
-        <p:txBody>
-          <a:bodyPr wrap="square" lIns="0" tIns="0" rIns="0" bIns="0" rtlCol="0" anchor="t"/>
-          <a:lstStyle/>
-          <a:p>
-            <a:pPr algn="l" indent="0" marL="0">
-              <a:buNone/>
-            </a:pPr>
-            <a:r>
-              <a:rPr lang="en-US" sz="1900" b="1" dirty="0">
-                <a:solidFill>
-                  <a:srgbClr val="000000"/>
-                </a:solidFill>
-                <a:latin typeface="Calibri" pitchFamily="34" charset="0"/>
-                <a:ea typeface="Calibri" pitchFamily="34" charset="-122"/>
-                <a:cs typeface="Calibri" pitchFamily="34" charset="-120"/>
-              </a:rPr>
-              <a:t>What Leaders Say, Unprompted</a:t>
-            </a:r>
-            <a:endParaRPr lang="en-US" sz="1900" dirty="0"/>
-          </a:p>
-        </p:txBody>
-      </p:sp>
-      <p:sp>
-        <p:nvSpPr>
-          <p:cNvPr id="3" name="Text 1"/>
-          <p:cNvSpPr txBox="1"/>
-          <p:nvPr/>
-        </p:nvSpPr>
-        <p:spPr>
-          <a:xfrm>
-            <a:off x="502006" y="585216"/>
-            <a:ext cx="11188598" cy="713232"/>
-          </a:xfrm>
-          <a:prstGeom prst="rect">
-            <a:avLst/>
-          </a:prstGeom>
-          <a:noFill/>
-          <a:ln/>
-        </p:spPr>
-        <p:txBody>
-          <a:bodyPr wrap="square" lIns="0" tIns="0" rIns="0" bIns="0" rtlCol="0" anchor="t"/>
-          <a:lstStyle/>
-          <a:p>
-            <a:pPr algn="l" indent="0" marL="0">
-              <a:lnSpc>
-                <a:spcPct val="105000"/>
-              </a:lnSpc>
-              <a:buNone/>
-            </a:pPr>
-            <a:r>
-              <a:rPr lang="en-US" sz="1350" b="1" dirty="0">
-                <a:solidFill>
-                  <a:srgbClr val="046A38"/>
-                </a:solidFill>
-                <a:latin typeface="Calibri" pitchFamily="34" charset="0"/>
-                <a:ea typeface="Calibri" pitchFamily="34" charset="-122"/>
-                <a:cs typeface="Calibri" pitchFamily="34" charset="-120"/>
-              </a:rPr>
-              <a:t>Left to answer in their own words, leaders converge on the same trend.</a:t>
-            </a:r>
-            <a:endParaRPr lang="en-US" sz="1350" dirty="0"/>
-          </a:p>
-        </p:txBody>
-      </p:sp>
-      <p:sp>
-        <p:nvSpPr>
-          <p:cNvPr id="4" name="Shape 2"/>
-          <p:cNvSpPr/>
-          <p:nvPr/>
-        </p:nvSpPr>
-        <p:spPr>
-          <a:xfrm>
-            <a:off x="502006" y="1335024"/>
-            <a:ext cx="0" cy="512064"/>
-          </a:xfrm>
-          <a:prstGeom prst="line">
-            <a:avLst/>
-          </a:prstGeom>
-          <a:noFill/>
-          <a:ln w="25400">
-            <a:solidFill>
-              <a:srgbClr val="D0D0CE"/>
-            </a:solidFill>
-            <a:prstDash val="solid"/>
-          </a:ln>
-        </p:spPr>
-      </p:sp>
-      <p:sp>
-        <p:nvSpPr>
-          <p:cNvPr id="5" name="Text 3"/>
-          <p:cNvSpPr txBox="1"/>
-          <p:nvPr/>
-        </p:nvSpPr>
-        <p:spPr>
-          <a:xfrm>
-            <a:off x="648310" y="1335024"/>
-            <a:ext cx="11042294" cy="512064"/>
-          </a:xfrm>
-          <a:prstGeom prst="rect">
-            <a:avLst/>
-          </a:prstGeom>
-          <a:noFill/>
-          <a:ln/>
-        </p:spPr>
-        <p:txBody>
-          <a:bodyPr wrap="square" lIns="0" tIns="0" rIns="0" bIns="0" rtlCol="0" anchor="t"/>
-          <a:lstStyle/>
-          <a:p>
-            <a:pPr algn="l" indent="0" marL="0">
-              <a:lnSpc>
-                <a:spcPct val="106000"/>
-              </a:lnSpc>
-              <a:buNone/>
-            </a:pPr>
-            <a:r>
-              <a:rPr lang="en-US" sz="900" b="1" dirty="0">
-                <a:solidFill>
-                  <a:srgbClr val="046A38"/>
-                </a:solidFill>
-                <a:latin typeface="IBM Plex Mono" pitchFamily="34" charset="0"/>
-                <a:ea typeface="IBM Plex Mono" pitchFamily="34" charset="-122"/>
-                <a:cs typeface="IBM Plex Mono" pitchFamily="34" charset="-120"/>
-              </a:rPr>
-              <a:t>Q12  </a:t>
-            </a:r>
-            <a:pPr algn="l" indent="0" marL="0">
-              <a:lnSpc>
-                <a:spcPct val="106000"/>
-              </a:lnSpc>
-              <a:buNone/>
-            </a:pPr>
-            <a:r>
-              <a:rPr lang="en-US" sz="1000" i="1" dirty="0">
-                <a:solidFill>
-                  <a:srgbClr val="575757"/>
-                </a:solidFill>
-                <a:latin typeface="Calibri" pitchFamily="34" charset="0"/>
-                <a:ea typeface="Calibri" pitchFamily="34" charset="-122"/>
-                <a:cs typeface="Calibri" pitchFamily="34" charset="-120"/>
-              </a:rPr>
-              <a:t>“Looking ahead three years, what development do you believe will have the greatest impact on fraud risk management, and why? (open-ended)”</a:t>
-            </a:r>
-            <a:endParaRPr lang="en-US" sz="1000" dirty="0"/>
-          </a:p>
-        </p:txBody>
-      </p:sp>
-      <p:sp>
-        <p:nvSpPr>
-          <p:cNvPr id="6" name="Text 4"/>
-          <p:cNvSpPr txBox="1"/>
-          <p:nvPr/>
-        </p:nvSpPr>
-        <p:spPr>
-          <a:xfrm>
-            <a:off x="11346790" y="6537960"/>
-            <a:ext cx="343814" cy="182880"/>
-          </a:xfrm>
-          <a:prstGeom prst="rect">
-            <a:avLst/>
-          </a:prstGeom>
-          <a:noFill/>
-          <a:ln/>
-        </p:spPr>
-        <p:txBody>
-          <a:bodyPr wrap="square" rtlCol="0" anchor="ctr"/>
-          <a:lstStyle/>
-          <a:p>
-            <a:pPr algn="r" indent="0" marL="0">
-              <a:buNone/>
-            </a:pPr>
-            <a:r>
-              <a:rPr lang="en-US" sz="900" dirty="0">
-                <a:solidFill>
-                  <a:srgbClr val="53565A"/>
-                </a:solidFill>
-                <a:latin typeface="Calibri" pitchFamily="34" charset="0"/>
-                <a:ea typeface="Calibri" pitchFamily="34" charset="-122"/>
-                <a:cs typeface="Calibri" pitchFamily="34" charset="-120"/>
-              </a:rPr>
               <a:t>38</a:t>
-            </a:r>
-            <a:endParaRPr lang="en-US" sz="900" dirty="0"/>
-          </a:p>
-        </p:txBody>
-      </p:sp>
-      <p:sp>
-        <p:nvSpPr>
-          <p:cNvPr id="7" name="Shape 5"/>
-          <p:cNvSpPr/>
-          <p:nvPr/>
-        </p:nvSpPr>
-        <p:spPr>
-          <a:xfrm>
-            <a:off x="502006" y="2011680"/>
-            <a:ext cx="11188598" cy="914400"/>
-          </a:xfrm>
-          <a:prstGeom prst="roundRect">
-            <a:avLst>
-              <a:gd name="adj" fmla="val 6000"/>
-            </a:avLst>
-          </a:prstGeom>
-          <a:solidFill>
-            <a:srgbClr val="F2F2F2"/>
-          </a:solidFill>
-          <a:ln/>
-        </p:spPr>
-      </p:sp>
-      <p:sp>
-        <p:nvSpPr>
-          <p:cNvPr id="8" name="Text 6"/>
-          <p:cNvSpPr txBox="1"/>
-          <p:nvPr/>
-        </p:nvSpPr>
-        <p:spPr>
-          <a:xfrm>
-            <a:off x="776326" y="2011680"/>
-            <a:ext cx="2011680" cy="914400"/>
-          </a:xfrm>
-          <a:prstGeom prst="rect">
-            <a:avLst/>
-          </a:prstGeom>
-          <a:noFill/>
-          <a:ln/>
-        </p:spPr>
-        <p:txBody>
-          <a:bodyPr wrap="square" rtlCol="0" anchor="ctr"/>
-          <a:lstStyle/>
-          <a:p>
-            <a:pPr indent="0" marL="0">
-              <a:buNone/>
-            </a:pPr>
-            <a:r>
-              <a:rPr lang="en-US" sz="3000" b="1" dirty="0">
-                <a:solidFill>
-                  <a:srgbClr val="046A38"/>
-                </a:solidFill>
-                <a:latin typeface="Calibri" pitchFamily="34" charset="0"/>
-                <a:ea typeface="Calibri" pitchFamily="34" charset="-122"/>
-                <a:cs typeface="Calibri" pitchFamily="34" charset="-120"/>
-              </a:rPr>
-              <a:t>100/100</a:t>
-            </a:r>
-            <a:endParaRPr lang="en-US" sz="3000" dirty="0"/>
-          </a:p>
-        </p:txBody>
-      </p:sp>
-      <p:sp>
-        <p:nvSpPr>
-          <p:cNvPr id="9" name="Text 7"/>
-          <p:cNvSpPr txBox="1"/>
-          <p:nvPr/>
-        </p:nvSpPr>
-        <p:spPr>
-          <a:xfrm>
-            <a:off x="2970886" y="2057400"/>
-            <a:ext cx="8445398" cy="822960"/>
-          </a:xfrm>
-          <a:prstGeom prst="rect">
-            <a:avLst/>
-          </a:prstGeom>
-          <a:noFill/>
-          <a:ln/>
-        </p:spPr>
-        <p:txBody>
-          <a:bodyPr wrap="square" rtlCol="0" anchor="ctr"/>
-          <a:lstStyle/>
-          <a:p>
-            <a:pPr indent="0" marL="0">
-              <a:lnSpc>
-                <a:spcPct val="110000"/>
-              </a:lnSpc>
-              <a:buNone/>
-            </a:pPr>
-            <a:r>
-              <a:rPr lang="en-US" sz="1150" dirty="0">
-                <a:solidFill>
-                  <a:srgbClr val="53565A"/>
-                </a:solidFill>
-                <a:latin typeface="Calibri" pitchFamily="34" charset="0"/>
-                <a:ea typeface="Calibri" pitchFamily="34" charset="-122"/>
-                <a:cs typeface="Calibri" pitchFamily="34" charset="-120"/>
-              </a:rPr>
-              <a:t>respondents answered in their own words — a full response rate on an open text field. The dominant unprompted theme: the convergence of GenAI, synthetic identity, and real-time payments — the same thread running through every closed-ended question above.</a:t>
-            </a:r>
-            <a:endParaRPr lang="en-US" sz="1150" dirty="0"/>
-          </a:p>
-        </p:txBody>
-      </p:sp>
-      <p:sp>
-        <p:nvSpPr>
-          <p:cNvPr id="10" name="Shape 8"/>
-          <p:cNvSpPr/>
-          <p:nvPr/>
-        </p:nvSpPr>
-        <p:spPr>
-          <a:xfrm>
-            <a:off x="502006" y="3154680"/>
-            <a:ext cx="5457139" cy="1600200"/>
-          </a:xfrm>
-          <a:prstGeom prst="roundRect">
-            <a:avLst>
-              <a:gd name="adj" fmla="val 2857"/>
-            </a:avLst>
-          </a:prstGeom>
-          <a:solidFill>
-            <a:srgbClr val="FFFFFF"/>
-          </a:solidFill>
-          <a:ln w="9525">
-            <a:solidFill>
-              <a:srgbClr val="D0D0CE"/>
-            </a:solidFill>
-            <a:prstDash val="solid"/>
-          </a:ln>
-        </p:spPr>
-      </p:sp>
-      <p:sp>
-        <p:nvSpPr>
-          <p:cNvPr id="11" name="Text 9"/>
-          <p:cNvSpPr txBox="1"/>
-          <p:nvPr/>
-        </p:nvSpPr>
-        <p:spPr>
-          <a:xfrm>
-            <a:off x="684886" y="3282696"/>
-            <a:ext cx="5091379" cy="1143000"/>
-          </a:xfrm>
-          <a:prstGeom prst="rect">
-            <a:avLst/>
-          </a:prstGeom>
-          <a:noFill/>
-          <a:ln/>
-        </p:spPr>
-        <p:txBody>
-          <a:bodyPr wrap="square" rtlCol="0" anchor="t"/>
-          <a:lstStyle/>
-          <a:p>
-            <a:pPr indent="0" marL="0">
-              <a:lnSpc>
-                <a:spcPct val="112000"/>
-              </a:lnSpc>
-              <a:buNone/>
-            </a:pPr>
-            <a:r>
-              <a:rPr lang="en-US" sz="1000" i="1" dirty="0">
-                <a:solidFill>
-                  <a:srgbClr val="000000"/>
-                </a:solidFill>
-                <a:latin typeface="Calibri" pitchFamily="34" charset="0"/>
-                <a:ea typeface="Calibri" pitchFamily="34" charset="-122"/>
-                <a:cs typeface="Calibri" pitchFamily="34" charset="-120"/>
-              </a:rPr>
-              <a:t>“The convergence of genAI, synthetic identities and real time digital identity verification. This will matter significantly because fraudsters will become AI-native, identity becomes the new battleground, fraud prevention will replace fraud detection, and the winners will use AI against AI.”</a:t>
-            </a:r>
-            <a:endParaRPr lang="en-US" sz="1000" dirty="0"/>
-          </a:p>
-        </p:txBody>
-      </p:sp>
-      <p:sp>
-        <p:nvSpPr>
-          <p:cNvPr id="12" name="Text 10"/>
-          <p:cNvSpPr txBox="1"/>
-          <p:nvPr/>
-        </p:nvSpPr>
-        <p:spPr>
-          <a:xfrm>
-            <a:off x="684886" y="4443984"/>
-            <a:ext cx="5091379" cy="256032"/>
-          </a:xfrm>
-          <a:prstGeom prst="rect">
-            <a:avLst/>
-          </a:prstGeom>
-          <a:noFill/>
-          <a:ln/>
-        </p:spPr>
-        <p:txBody>
-          <a:bodyPr wrap="square" rtlCol="0" anchor="ctr"/>
-          <a:lstStyle/>
-          <a:p>
-            <a:pPr indent="0" marL="0">
-              <a:buNone/>
-            </a:pPr>
-            <a:r>
-              <a:rPr lang="en-US" sz="900" dirty="0">
-                <a:solidFill>
-                  <a:srgbClr val="53565A"/>
-                </a:solidFill>
-                <a:latin typeface="IBM Plex Mono" pitchFamily="34" charset="0"/>
-                <a:ea typeface="IBM Plex Mono" pitchFamily="34" charset="-122"/>
-                <a:cs typeface="IBM Plex Mono" pitchFamily="34" charset="-120"/>
-              </a:rPr>
-              <a:t>Director · Insurance</a:t>
-            </a:r>
-            <a:endParaRPr lang="en-US" sz="900" dirty="0"/>
-          </a:p>
-        </p:txBody>
-      </p:sp>
-      <p:sp>
-        <p:nvSpPr>
-          <p:cNvPr id="13" name="Shape 11"/>
-          <p:cNvSpPr/>
-          <p:nvPr/>
-        </p:nvSpPr>
-        <p:spPr>
-          <a:xfrm>
-            <a:off x="6233465" y="3154680"/>
-            <a:ext cx="5457139" cy="1600200"/>
-          </a:xfrm>
-          <a:prstGeom prst="roundRect">
-            <a:avLst>
-              <a:gd name="adj" fmla="val 2857"/>
-            </a:avLst>
-          </a:prstGeom>
-          <a:solidFill>
-            <a:srgbClr val="FFFFFF"/>
-          </a:solidFill>
-          <a:ln w="9525">
-            <a:solidFill>
-              <a:srgbClr val="D0D0CE"/>
-            </a:solidFill>
-            <a:prstDash val="solid"/>
-          </a:ln>
-        </p:spPr>
-      </p:sp>
-      <p:sp>
-        <p:nvSpPr>
-          <p:cNvPr id="14" name="Text 12"/>
-          <p:cNvSpPr txBox="1"/>
-          <p:nvPr/>
-        </p:nvSpPr>
-        <p:spPr>
-          <a:xfrm>
-            <a:off x="6416345" y="3282696"/>
-            <a:ext cx="5091379" cy="1143000"/>
-          </a:xfrm>
-          <a:prstGeom prst="rect">
-            <a:avLst/>
-          </a:prstGeom>
-          <a:noFill/>
-          <a:ln/>
-        </p:spPr>
-        <p:txBody>
-          <a:bodyPr wrap="square" rtlCol="0" anchor="t"/>
-          <a:lstStyle/>
-          <a:p>
-            <a:pPr indent="0" marL="0">
-              <a:lnSpc>
-                <a:spcPct val="112000"/>
-              </a:lnSpc>
-              <a:buNone/>
-            </a:pPr>
-            <a:r>
-              <a:rPr lang="en-US" sz="1000" i="1" dirty="0">
-                <a:solidFill>
-                  <a:srgbClr val="000000"/>
-                </a:solidFill>
-                <a:latin typeface="Calibri" pitchFamily="34" charset="0"/>
-                <a:ea typeface="Calibri" pitchFamily="34" charset="-122"/>
-                <a:cs typeface="Calibri" pitchFamily="34" charset="-120"/>
-              </a:rPr>
-              <a:t>“The biggest development will be the convergence of GenAI, synthetic identity, and real-time payments. Fraud will become faster, more personalized, and harder to distinguish from legitimate customer behaviour.”</a:t>
-            </a:r>
-            <a:endParaRPr lang="en-US" sz="1000" dirty="0"/>
-          </a:p>
-        </p:txBody>
-      </p:sp>
-      <p:sp>
-        <p:nvSpPr>
-          <p:cNvPr id="15" name="Text 13"/>
-          <p:cNvSpPr txBox="1"/>
-          <p:nvPr/>
-        </p:nvSpPr>
-        <p:spPr>
-          <a:xfrm>
-            <a:off x="6416345" y="4443984"/>
-            <a:ext cx="5091379" cy="256032"/>
-          </a:xfrm>
-          <a:prstGeom prst="rect">
-            <a:avLst/>
-          </a:prstGeom>
-          <a:noFill/>
-          <a:ln/>
-        </p:spPr>
-        <p:txBody>
-          <a:bodyPr wrap="square" rtlCol="0" anchor="ctr"/>
-          <a:lstStyle/>
-          <a:p>
-            <a:pPr indent="0" marL="0">
-              <a:buNone/>
-            </a:pPr>
-            <a:r>
-              <a:rPr lang="en-US" sz="900" dirty="0">
-                <a:solidFill>
-                  <a:srgbClr val="53565A"/>
-                </a:solidFill>
-                <a:latin typeface="IBM Plex Mono" pitchFamily="34" charset="0"/>
-                <a:ea typeface="IBM Plex Mono" pitchFamily="34" charset="-122"/>
-                <a:cs typeface="IBM Plex Mono" pitchFamily="34" charset="-120"/>
-              </a:rPr>
-              <a:t>C-level · Banking</a:t>
-            </a:r>
-            <a:endParaRPr lang="en-US" sz="900" dirty="0"/>
-          </a:p>
-        </p:txBody>
-      </p:sp>
-      <p:sp>
-        <p:nvSpPr>
-          <p:cNvPr id="16" name="Shape 14"/>
-          <p:cNvSpPr/>
-          <p:nvPr/>
-        </p:nvSpPr>
-        <p:spPr>
-          <a:xfrm>
-            <a:off x="502006" y="4937760"/>
-            <a:ext cx="5457139" cy="1600200"/>
-          </a:xfrm>
-          <a:prstGeom prst="roundRect">
-            <a:avLst>
-              <a:gd name="adj" fmla="val 2857"/>
-            </a:avLst>
-          </a:prstGeom>
-          <a:solidFill>
-            <a:srgbClr val="FFFFFF"/>
-          </a:solidFill>
-          <a:ln w="9525">
-            <a:solidFill>
-              <a:srgbClr val="D0D0CE"/>
-            </a:solidFill>
-            <a:prstDash val="solid"/>
-          </a:ln>
-        </p:spPr>
-      </p:sp>
-      <p:sp>
-        <p:nvSpPr>
-          <p:cNvPr id="17" name="Text 15"/>
-          <p:cNvSpPr txBox="1"/>
-          <p:nvPr/>
-        </p:nvSpPr>
-        <p:spPr>
-          <a:xfrm>
-            <a:off x="684886" y="5065776"/>
-            <a:ext cx="5091379" cy="1143000"/>
-          </a:xfrm>
-          <a:prstGeom prst="rect">
-            <a:avLst/>
-          </a:prstGeom>
-          <a:noFill/>
-          <a:ln/>
-        </p:spPr>
-        <p:txBody>
-          <a:bodyPr wrap="square" rtlCol="0" anchor="t"/>
-          <a:lstStyle/>
-          <a:p>
-            <a:pPr indent="0" marL="0">
-              <a:lnSpc>
-                <a:spcPct val="112000"/>
-              </a:lnSpc>
-              <a:buNone/>
-            </a:pPr>
-            <a:r>
-              <a:rPr lang="en-US" sz="1000" i="1" dirty="0">
-                <a:solidFill>
-                  <a:srgbClr val="000000"/>
-                </a:solidFill>
-                <a:latin typeface="Calibri" pitchFamily="34" charset="0"/>
-                <a:ea typeface="Calibri" pitchFamily="34" charset="-122"/>
-                <a:cs typeface="Calibri" pitchFamily="34" charset="-120"/>
-              </a:rPr>
-              <a:t>“Companies are moving away from regular passwords towards decentralized digital credentials and biometric passkeys, as this would minimize phishing and account hacking.”</a:t>
-            </a:r>
-            <a:endParaRPr lang="en-US" sz="1000" dirty="0"/>
-          </a:p>
-        </p:txBody>
-      </p:sp>
-      <p:sp>
-        <p:nvSpPr>
-          <p:cNvPr id="18" name="Text 16"/>
-          <p:cNvSpPr txBox="1"/>
-          <p:nvPr/>
-        </p:nvSpPr>
-        <p:spPr>
-          <a:xfrm>
-            <a:off x="684886" y="6227064"/>
-            <a:ext cx="5091379" cy="256032"/>
-          </a:xfrm>
-          <a:prstGeom prst="rect">
-            <a:avLst/>
-          </a:prstGeom>
-          <a:noFill/>
-          <a:ln/>
-        </p:spPr>
-        <p:txBody>
-          <a:bodyPr wrap="square" rtlCol="0" anchor="ctr"/>
-          <a:lstStyle/>
-          <a:p>
-            <a:pPr indent="0" marL="0">
-              <a:buNone/>
-            </a:pPr>
-            <a:r>
-              <a:rPr lang="en-US" sz="900" dirty="0">
-                <a:solidFill>
-                  <a:srgbClr val="53565A"/>
-                </a:solidFill>
-                <a:latin typeface="IBM Plex Mono" pitchFamily="34" charset="0"/>
-                <a:ea typeface="IBM Plex Mono" pitchFamily="34" charset="-122"/>
-                <a:cs typeface="IBM Plex Mono" pitchFamily="34" charset="-120"/>
-              </a:rPr>
-              <a:t>Senior Manager · Banking</a:t>
-            </a:r>
-            <a:endParaRPr lang="en-US" sz="900" dirty="0"/>
-          </a:p>
-        </p:txBody>
-      </p:sp>
-      <p:sp>
-        <p:nvSpPr>
-          <p:cNvPr id="19" name="Shape 17"/>
-          <p:cNvSpPr/>
-          <p:nvPr/>
-        </p:nvSpPr>
-        <p:spPr>
-          <a:xfrm>
-            <a:off x="6233465" y="4937760"/>
-            <a:ext cx="5457139" cy="1600200"/>
-          </a:xfrm>
-          <a:prstGeom prst="roundRect">
-            <a:avLst>
-              <a:gd name="adj" fmla="val 2857"/>
-            </a:avLst>
-          </a:prstGeom>
-          <a:solidFill>
-            <a:srgbClr val="FFFFFF"/>
-          </a:solidFill>
-          <a:ln w="9525">
-            <a:solidFill>
-              <a:srgbClr val="D0D0CE"/>
-            </a:solidFill>
-            <a:prstDash val="solid"/>
-          </a:ln>
-        </p:spPr>
-      </p:sp>
-      <p:sp>
-        <p:nvSpPr>
-          <p:cNvPr id="20" name="Text 18"/>
-          <p:cNvSpPr txBox="1"/>
-          <p:nvPr/>
-        </p:nvSpPr>
-        <p:spPr>
-          <a:xfrm>
-            <a:off x="6416345" y="5065776"/>
-            <a:ext cx="5091379" cy="1143000"/>
-          </a:xfrm>
-          <a:prstGeom prst="rect">
-            <a:avLst/>
-          </a:prstGeom>
-          <a:noFill/>
-          <a:ln/>
-        </p:spPr>
-        <p:txBody>
-          <a:bodyPr wrap="square" rtlCol="0" anchor="t"/>
-          <a:lstStyle/>
-          <a:p>
-            <a:pPr indent="0" marL="0">
-              <a:lnSpc>
-                <a:spcPct val="112000"/>
-              </a:lnSpc>
-              <a:buNone/>
-            </a:pPr>
-            <a:r>
-              <a:rPr lang="en-US" sz="1000" i="1" dirty="0">
-                <a:solidFill>
-                  <a:srgbClr val="000000"/>
-                </a:solidFill>
-                <a:latin typeface="Calibri" pitchFamily="34" charset="0"/>
-                <a:ea typeface="Calibri" pitchFamily="34" charset="-122"/>
-                <a:cs typeface="Calibri" pitchFamily="34" charset="-120"/>
-              </a:rPr>
-              <a:t>“AI will shift fraud management from reactive investigation toward more predictive prevention, which should help us identify risks before losses occur.”</a:t>
-            </a:r>
-            <a:endParaRPr lang="en-US" sz="1000" dirty="0"/>
-          </a:p>
-        </p:txBody>
-      </p:sp>
-      <p:sp>
-        <p:nvSpPr>
-          <p:cNvPr id="21" name="Text 19"/>
-          <p:cNvSpPr txBox="1"/>
-          <p:nvPr/>
-        </p:nvSpPr>
-        <p:spPr>
-          <a:xfrm>
-            <a:off x="6416345" y="6227064"/>
-            <a:ext cx="5091379" cy="256032"/>
-          </a:xfrm>
-          <a:prstGeom prst="rect">
-            <a:avLst/>
-          </a:prstGeom>
-          <a:noFill/>
-          <a:ln/>
-        </p:spPr>
-        <p:txBody>
-          <a:bodyPr wrap="square" rtlCol="0" anchor="ctr"/>
-          <a:lstStyle/>
-          <a:p>
-            <a:pPr indent="0" marL="0">
-              <a:buNone/>
-            </a:pPr>
-            <a:r>
-              <a:rPr lang="en-US" sz="900" dirty="0">
-                <a:solidFill>
-                  <a:srgbClr val="53565A"/>
-                </a:solidFill>
-                <a:latin typeface="IBM Plex Mono" pitchFamily="34" charset="0"/>
-                <a:ea typeface="IBM Plex Mono" pitchFamily="34" charset="-122"/>
-                <a:cs typeface="IBM Plex Mono" pitchFamily="34" charset="-120"/>
-              </a:rPr>
-              <a:t>VP · Banking</a:t>
             </a:r>
             <a:endParaRPr lang="en-US" sz="900" dirty="0"/>
           </a:p>
@@ -33912,6 +34420,775 @@
 <file path=ppt/slides/slide40.xml><?xml version="1.0" encoding="utf-8"?>
 <p:sld xmlns:a="http://schemas.openxmlformats.org/drawingml/2006/main" xmlns:r="http://schemas.openxmlformats.org/officeDocument/2006/relationships" xmlns:p="http://schemas.openxmlformats.org/presentationml/2006/main">
   <p:cSld name="Slide 40">
+    <p:bg>
+      <p:bgPr>
+        <a:solidFill>
+          <a:srgbClr val="FFFFFF"/>
+        </a:solidFill>
+      </p:bgPr>
+    </p:bg>
+    <p:spTree>
+      <p:nvGrpSpPr>
+        <p:cNvPr id="1" name=""/>
+        <p:cNvGrpSpPr/>
+        <p:nvPr/>
+      </p:nvGrpSpPr>
+      <p:grpSpPr>
+        <a:xfrm>
+          <a:off x="0" y="0"/>
+          <a:ext cx="0" cy="0"/>
+          <a:chOff x="0" y="0"/>
+          <a:chExt cx="0" cy="0"/>
+        </a:xfrm>
+      </p:grpSpPr>
+      <p:sp>
+        <p:nvSpPr>
+          <p:cNvPr id="2" name="Text 0"/>
+          <p:cNvSpPr txBox="1"/>
+          <p:nvPr/>
+        </p:nvSpPr>
+        <p:spPr>
+          <a:xfrm>
+            <a:off x="502006" y="256032"/>
+            <a:ext cx="11188598" cy="310896"/>
+          </a:xfrm>
+          <a:prstGeom prst="rect">
+            <a:avLst/>
+          </a:prstGeom>
+          <a:noFill/>
+          <a:ln/>
+        </p:spPr>
+        <p:txBody>
+          <a:bodyPr wrap="square" lIns="0" tIns="0" rIns="0" bIns="0" rtlCol="0" anchor="t"/>
+          <a:lstStyle/>
+          <a:p>
+            <a:pPr algn="l" indent="0" marL="0">
+              <a:buNone/>
+            </a:pPr>
+            <a:r>
+              <a:rPr lang="en-US" sz="1900" b="1" dirty="0">
+                <a:solidFill>
+                  <a:srgbClr val="000000"/>
+                </a:solidFill>
+                <a:latin typeface="Calibri" pitchFamily="34" charset="0"/>
+                <a:ea typeface="Calibri" pitchFamily="34" charset="-122"/>
+                <a:cs typeface="Calibri" pitchFamily="34" charset="-120"/>
+              </a:rPr>
+              <a:t>What Leaders Say, Unprompted</a:t>
+            </a:r>
+            <a:endParaRPr lang="en-US" sz="1900" dirty="0"/>
+          </a:p>
+        </p:txBody>
+      </p:sp>
+      <p:sp>
+        <p:nvSpPr>
+          <p:cNvPr id="3" name="Text 1"/>
+          <p:cNvSpPr txBox="1"/>
+          <p:nvPr/>
+        </p:nvSpPr>
+        <p:spPr>
+          <a:xfrm>
+            <a:off x="502006" y="585216"/>
+            <a:ext cx="11188598" cy="713232"/>
+          </a:xfrm>
+          <a:prstGeom prst="rect">
+            <a:avLst/>
+          </a:prstGeom>
+          <a:noFill/>
+          <a:ln/>
+        </p:spPr>
+        <p:txBody>
+          <a:bodyPr wrap="square" lIns="0" tIns="0" rIns="0" bIns="0" rtlCol="0" anchor="t"/>
+          <a:lstStyle/>
+          <a:p>
+            <a:pPr algn="l" indent="0" marL="0">
+              <a:lnSpc>
+                <a:spcPct val="105000"/>
+              </a:lnSpc>
+              <a:buNone/>
+            </a:pPr>
+            <a:r>
+              <a:rPr lang="en-US" sz="1350" b="1" dirty="0">
+                <a:solidFill>
+                  <a:srgbClr val="046A38"/>
+                </a:solidFill>
+                <a:latin typeface="Calibri" pitchFamily="34" charset="0"/>
+                <a:ea typeface="Calibri" pitchFamily="34" charset="-122"/>
+                <a:cs typeface="Calibri" pitchFamily="34" charset="-120"/>
+              </a:rPr>
+              <a:t>Left to answer in their own words, leaders converge on the same trend.</a:t>
+            </a:r>
+            <a:endParaRPr lang="en-US" sz="1350" dirty="0"/>
+          </a:p>
+        </p:txBody>
+      </p:sp>
+      <p:sp>
+        <p:nvSpPr>
+          <p:cNvPr id="4" name="Shape 2"/>
+          <p:cNvSpPr/>
+          <p:nvPr/>
+        </p:nvSpPr>
+        <p:spPr>
+          <a:xfrm>
+            <a:off x="502006" y="1335024"/>
+            <a:ext cx="0" cy="512064"/>
+          </a:xfrm>
+          <a:prstGeom prst="line">
+            <a:avLst/>
+          </a:prstGeom>
+          <a:noFill/>
+          <a:ln w="25400">
+            <a:solidFill>
+              <a:srgbClr val="D0D0CE"/>
+            </a:solidFill>
+            <a:prstDash val="solid"/>
+          </a:ln>
+        </p:spPr>
+      </p:sp>
+      <p:sp>
+        <p:nvSpPr>
+          <p:cNvPr id="5" name="Text 3"/>
+          <p:cNvSpPr txBox="1"/>
+          <p:nvPr/>
+        </p:nvSpPr>
+        <p:spPr>
+          <a:xfrm>
+            <a:off x="648310" y="1335024"/>
+            <a:ext cx="11042294" cy="512064"/>
+          </a:xfrm>
+          <a:prstGeom prst="rect">
+            <a:avLst/>
+          </a:prstGeom>
+          <a:noFill/>
+          <a:ln/>
+        </p:spPr>
+        <p:txBody>
+          <a:bodyPr wrap="square" lIns="0" tIns="0" rIns="0" bIns="0" rtlCol="0" anchor="t"/>
+          <a:lstStyle/>
+          <a:p>
+            <a:pPr algn="l" indent="0" marL="0">
+              <a:lnSpc>
+                <a:spcPct val="106000"/>
+              </a:lnSpc>
+              <a:buNone/>
+            </a:pPr>
+            <a:r>
+              <a:rPr lang="en-US" sz="900" b="1" dirty="0">
+                <a:solidFill>
+                  <a:srgbClr val="046A38"/>
+                </a:solidFill>
+                <a:latin typeface="IBM Plex Mono" pitchFamily="34" charset="0"/>
+                <a:ea typeface="IBM Plex Mono" pitchFamily="34" charset="-122"/>
+                <a:cs typeface="IBM Plex Mono" pitchFamily="34" charset="-120"/>
+              </a:rPr>
+              <a:t>Q12  </a:t>
+            </a:r>
+            <a:pPr algn="l" indent="0" marL="0">
+              <a:lnSpc>
+                <a:spcPct val="106000"/>
+              </a:lnSpc>
+              <a:buNone/>
+            </a:pPr>
+            <a:r>
+              <a:rPr lang="en-US" sz="1000" i="1" dirty="0">
+                <a:solidFill>
+                  <a:srgbClr val="575757"/>
+                </a:solidFill>
+                <a:latin typeface="Calibri" pitchFamily="34" charset="0"/>
+                <a:ea typeface="Calibri" pitchFamily="34" charset="-122"/>
+                <a:cs typeface="Calibri" pitchFamily="34" charset="-120"/>
+              </a:rPr>
+              <a:t>“Looking ahead three years, what development do you believe will have the greatest impact on fraud risk management, and why? (open-ended)”</a:t>
+            </a:r>
+            <a:endParaRPr lang="en-US" sz="1000" dirty="0"/>
+          </a:p>
+        </p:txBody>
+      </p:sp>
+      <p:sp>
+        <p:nvSpPr>
+          <p:cNvPr id="6" name="Text 4"/>
+          <p:cNvSpPr txBox="1"/>
+          <p:nvPr/>
+        </p:nvSpPr>
+        <p:spPr>
+          <a:xfrm>
+            <a:off x="11346790" y="6537960"/>
+            <a:ext cx="343814" cy="182880"/>
+          </a:xfrm>
+          <a:prstGeom prst="rect">
+            <a:avLst/>
+          </a:prstGeom>
+          <a:noFill/>
+          <a:ln/>
+        </p:spPr>
+        <p:txBody>
+          <a:bodyPr wrap="square" rtlCol="0" anchor="ctr"/>
+          <a:lstStyle/>
+          <a:p>
+            <a:pPr algn="r" indent="0" marL="0">
+              <a:buNone/>
+            </a:pPr>
+            <a:r>
+              <a:rPr lang="en-US" sz="900" dirty="0">
+                <a:solidFill>
+                  <a:srgbClr val="53565A"/>
+                </a:solidFill>
+                <a:latin typeface="Calibri" pitchFamily="34" charset="0"/>
+                <a:ea typeface="Calibri" pitchFamily="34" charset="-122"/>
+                <a:cs typeface="Calibri" pitchFamily="34" charset="-120"/>
+              </a:rPr>
+              <a:t>39</a:t>
+            </a:r>
+            <a:endParaRPr lang="en-US" sz="900" dirty="0"/>
+          </a:p>
+        </p:txBody>
+      </p:sp>
+      <p:sp>
+        <p:nvSpPr>
+          <p:cNvPr id="7" name="Shape 5"/>
+          <p:cNvSpPr/>
+          <p:nvPr/>
+        </p:nvSpPr>
+        <p:spPr>
+          <a:xfrm>
+            <a:off x="502006" y="2011680"/>
+            <a:ext cx="11188598" cy="914400"/>
+          </a:xfrm>
+          <a:prstGeom prst="roundRect">
+            <a:avLst>
+              <a:gd name="adj" fmla="val 6000"/>
+            </a:avLst>
+          </a:prstGeom>
+          <a:solidFill>
+            <a:srgbClr val="F2F2F2"/>
+          </a:solidFill>
+          <a:ln/>
+        </p:spPr>
+      </p:sp>
+      <p:sp>
+        <p:nvSpPr>
+          <p:cNvPr id="8" name="Text 6"/>
+          <p:cNvSpPr txBox="1"/>
+          <p:nvPr/>
+        </p:nvSpPr>
+        <p:spPr>
+          <a:xfrm>
+            <a:off x="776326" y="2011680"/>
+            <a:ext cx="2011680" cy="914400"/>
+          </a:xfrm>
+          <a:prstGeom prst="rect">
+            <a:avLst/>
+          </a:prstGeom>
+          <a:noFill/>
+          <a:ln/>
+        </p:spPr>
+        <p:txBody>
+          <a:bodyPr wrap="square" rtlCol="0" anchor="ctr"/>
+          <a:lstStyle/>
+          <a:p>
+            <a:pPr indent="0" marL="0">
+              <a:buNone/>
+            </a:pPr>
+            <a:r>
+              <a:rPr lang="en-US" sz="3000" b="1" dirty="0">
+                <a:solidFill>
+                  <a:srgbClr val="046A38"/>
+                </a:solidFill>
+                <a:latin typeface="Calibri" pitchFamily="34" charset="0"/>
+                <a:ea typeface="Calibri" pitchFamily="34" charset="-122"/>
+                <a:cs typeface="Calibri" pitchFamily="34" charset="-120"/>
+              </a:rPr>
+              <a:t>100/100</a:t>
+            </a:r>
+            <a:endParaRPr lang="en-US" sz="3000" dirty="0"/>
+          </a:p>
+        </p:txBody>
+      </p:sp>
+      <p:sp>
+        <p:nvSpPr>
+          <p:cNvPr id="9" name="Text 7"/>
+          <p:cNvSpPr txBox="1"/>
+          <p:nvPr/>
+        </p:nvSpPr>
+        <p:spPr>
+          <a:xfrm>
+            <a:off x="2970886" y="2057400"/>
+            <a:ext cx="8445398" cy="822960"/>
+          </a:xfrm>
+          <a:prstGeom prst="rect">
+            <a:avLst/>
+          </a:prstGeom>
+          <a:noFill/>
+          <a:ln/>
+        </p:spPr>
+        <p:txBody>
+          <a:bodyPr wrap="square" rtlCol="0" anchor="ctr"/>
+          <a:lstStyle/>
+          <a:p>
+            <a:pPr indent="0" marL="0">
+              <a:lnSpc>
+                <a:spcPct val="110000"/>
+              </a:lnSpc>
+              <a:buNone/>
+            </a:pPr>
+            <a:r>
+              <a:rPr lang="en-US" sz="1150" dirty="0">
+                <a:solidFill>
+                  <a:srgbClr val="53565A"/>
+                </a:solidFill>
+                <a:latin typeface="Calibri" pitchFamily="34" charset="0"/>
+                <a:ea typeface="Calibri" pitchFamily="34" charset="-122"/>
+                <a:cs typeface="Calibri" pitchFamily="34" charset="-120"/>
+              </a:rPr>
+              <a:t>respondents answered in their own words — a full response rate on an open text field. The dominant unprompted theme: the convergence of GenAI, synthetic identity, and real-time payments — the same thread running through every closed-ended question above.</a:t>
+            </a:r>
+            <a:endParaRPr lang="en-US" sz="1150" dirty="0"/>
+          </a:p>
+        </p:txBody>
+      </p:sp>
+      <p:sp>
+        <p:nvSpPr>
+          <p:cNvPr id="10" name="Shape 8"/>
+          <p:cNvSpPr/>
+          <p:nvPr/>
+        </p:nvSpPr>
+        <p:spPr>
+          <a:xfrm>
+            <a:off x="502006" y="3154680"/>
+            <a:ext cx="5457139" cy="1600200"/>
+          </a:xfrm>
+          <a:prstGeom prst="roundRect">
+            <a:avLst>
+              <a:gd name="adj" fmla="val 2857"/>
+            </a:avLst>
+          </a:prstGeom>
+          <a:solidFill>
+            <a:srgbClr val="FFFFFF"/>
+          </a:solidFill>
+          <a:ln w="9525">
+            <a:solidFill>
+              <a:srgbClr val="D0D0CE"/>
+            </a:solidFill>
+            <a:prstDash val="solid"/>
+          </a:ln>
+        </p:spPr>
+      </p:sp>
+      <p:sp>
+        <p:nvSpPr>
+          <p:cNvPr id="11" name="Text 9"/>
+          <p:cNvSpPr txBox="1"/>
+          <p:nvPr/>
+        </p:nvSpPr>
+        <p:spPr>
+          <a:xfrm>
+            <a:off x="684886" y="3282696"/>
+            <a:ext cx="5091379" cy="1143000"/>
+          </a:xfrm>
+          <a:prstGeom prst="rect">
+            <a:avLst/>
+          </a:prstGeom>
+          <a:noFill/>
+          <a:ln/>
+        </p:spPr>
+        <p:txBody>
+          <a:bodyPr wrap="square" rtlCol="0" anchor="t"/>
+          <a:lstStyle/>
+          <a:p>
+            <a:pPr indent="0" marL="0">
+              <a:lnSpc>
+                <a:spcPct val="112000"/>
+              </a:lnSpc>
+              <a:buNone/>
+            </a:pPr>
+            <a:r>
+              <a:rPr lang="en-US" sz="1000" i="1" dirty="0">
+                <a:solidFill>
+                  <a:srgbClr val="000000"/>
+                </a:solidFill>
+                <a:latin typeface="Calibri" pitchFamily="34" charset="0"/>
+                <a:ea typeface="Calibri" pitchFamily="34" charset="-122"/>
+                <a:cs typeface="Calibri" pitchFamily="34" charset="-120"/>
+              </a:rPr>
+              <a:t>“The convergence of genAI, synthetic identities and real time digital identity verification. This will matter significantly because fraudsters will become AI-native, identity becomes the new battleground, fraud prevention will replace fraud detection, and the winners will use AI against AI.”</a:t>
+            </a:r>
+            <a:endParaRPr lang="en-US" sz="1000" dirty="0"/>
+          </a:p>
+        </p:txBody>
+      </p:sp>
+      <p:sp>
+        <p:nvSpPr>
+          <p:cNvPr id="12" name="Text 10"/>
+          <p:cNvSpPr txBox="1"/>
+          <p:nvPr/>
+        </p:nvSpPr>
+        <p:spPr>
+          <a:xfrm>
+            <a:off x="684886" y="4443984"/>
+            <a:ext cx="5091379" cy="256032"/>
+          </a:xfrm>
+          <a:prstGeom prst="rect">
+            <a:avLst/>
+          </a:prstGeom>
+          <a:noFill/>
+          <a:ln/>
+        </p:spPr>
+        <p:txBody>
+          <a:bodyPr wrap="square" rtlCol="0" anchor="ctr"/>
+          <a:lstStyle/>
+          <a:p>
+            <a:pPr indent="0" marL="0">
+              <a:buNone/>
+            </a:pPr>
+            <a:r>
+              <a:rPr lang="en-US" sz="900" dirty="0">
+                <a:solidFill>
+                  <a:srgbClr val="53565A"/>
+                </a:solidFill>
+                <a:latin typeface="IBM Plex Mono" pitchFamily="34" charset="0"/>
+                <a:ea typeface="IBM Plex Mono" pitchFamily="34" charset="-122"/>
+                <a:cs typeface="IBM Plex Mono" pitchFamily="34" charset="-120"/>
+              </a:rPr>
+              <a:t>Director · Insurance</a:t>
+            </a:r>
+            <a:endParaRPr lang="en-US" sz="900" dirty="0"/>
+          </a:p>
+        </p:txBody>
+      </p:sp>
+      <p:sp>
+        <p:nvSpPr>
+          <p:cNvPr id="13" name="Shape 11"/>
+          <p:cNvSpPr/>
+          <p:nvPr/>
+        </p:nvSpPr>
+        <p:spPr>
+          <a:xfrm>
+            <a:off x="6233465" y="3154680"/>
+            <a:ext cx="5457139" cy="1600200"/>
+          </a:xfrm>
+          <a:prstGeom prst="roundRect">
+            <a:avLst>
+              <a:gd name="adj" fmla="val 2857"/>
+            </a:avLst>
+          </a:prstGeom>
+          <a:solidFill>
+            <a:srgbClr val="FFFFFF"/>
+          </a:solidFill>
+          <a:ln w="9525">
+            <a:solidFill>
+              <a:srgbClr val="D0D0CE"/>
+            </a:solidFill>
+            <a:prstDash val="solid"/>
+          </a:ln>
+        </p:spPr>
+      </p:sp>
+      <p:sp>
+        <p:nvSpPr>
+          <p:cNvPr id="14" name="Text 12"/>
+          <p:cNvSpPr txBox="1"/>
+          <p:nvPr/>
+        </p:nvSpPr>
+        <p:spPr>
+          <a:xfrm>
+            <a:off x="6416345" y="3282696"/>
+            <a:ext cx="5091379" cy="1143000"/>
+          </a:xfrm>
+          <a:prstGeom prst="rect">
+            <a:avLst/>
+          </a:prstGeom>
+          <a:noFill/>
+          <a:ln/>
+        </p:spPr>
+        <p:txBody>
+          <a:bodyPr wrap="square" rtlCol="0" anchor="t"/>
+          <a:lstStyle/>
+          <a:p>
+            <a:pPr indent="0" marL="0">
+              <a:lnSpc>
+                <a:spcPct val="112000"/>
+              </a:lnSpc>
+              <a:buNone/>
+            </a:pPr>
+            <a:r>
+              <a:rPr lang="en-US" sz="1000" i="1" dirty="0">
+                <a:solidFill>
+                  <a:srgbClr val="000000"/>
+                </a:solidFill>
+                <a:latin typeface="Calibri" pitchFamily="34" charset="0"/>
+                <a:ea typeface="Calibri" pitchFamily="34" charset="-122"/>
+                <a:cs typeface="Calibri" pitchFamily="34" charset="-120"/>
+              </a:rPr>
+              <a:t>“The biggest development will be the convergence of GenAI, synthetic identity, and real-time payments. Fraud will become faster, more personalized, and harder to distinguish from legitimate customer behaviour.”</a:t>
+            </a:r>
+            <a:endParaRPr lang="en-US" sz="1000" dirty="0"/>
+          </a:p>
+        </p:txBody>
+      </p:sp>
+      <p:sp>
+        <p:nvSpPr>
+          <p:cNvPr id="15" name="Text 13"/>
+          <p:cNvSpPr txBox="1"/>
+          <p:nvPr/>
+        </p:nvSpPr>
+        <p:spPr>
+          <a:xfrm>
+            <a:off x="6416345" y="4443984"/>
+            <a:ext cx="5091379" cy="256032"/>
+          </a:xfrm>
+          <a:prstGeom prst="rect">
+            <a:avLst/>
+          </a:prstGeom>
+          <a:noFill/>
+          <a:ln/>
+        </p:spPr>
+        <p:txBody>
+          <a:bodyPr wrap="square" rtlCol="0" anchor="ctr"/>
+          <a:lstStyle/>
+          <a:p>
+            <a:pPr indent="0" marL="0">
+              <a:buNone/>
+            </a:pPr>
+            <a:r>
+              <a:rPr lang="en-US" sz="900" dirty="0">
+                <a:solidFill>
+                  <a:srgbClr val="53565A"/>
+                </a:solidFill>
+                <a:latin typeface="IBM Plex Mono" pitchFamily="34" charset="0"/>
+                <a:ea typeface="IBM Plex Mono" pitchFamily="34" charset="-122"/>
+                <a:cs typeface="IBM Plex Mono" pitchFamily="34" charset="-120"/>
+              </a:rPr>
+              <a:t>C-level · Banking</a:t>
+            </a:r>
+            <a:endParaRPr lang="en-US" sz="900" dirty="0"/>
+          </a:p>
+        </p:txBody>
+      </p:sp>
+      <p:sp>
+        <p:nvSpPr>
+          <p:cNvPr id="16" name="Shape 14"/>
+          <p:cNvSpPr/>
+          <p:nvPr/>
+        </p:nvSpPr>
+        <p:spPr>
+          <a:xfrm>
+            <a:off x="502006" y="4937760"/>
+            <a:ext cx="5457139" cy="1600200"/>
+          </a:xfrm>
+          <a:prstGeom prst="roundRect">
+            <a:avLst>
+              <a:gd name="adj" fmla="val 2857"/>
+            </a:avLst>
+          </a:prstGeom>
+          <a:solidFill>
+            <a:srgbClr val="FFFFFF"/>
+          </a:solidFill>
+          <a:ln w="9525">
+            <a:solidFill>
+              <a:srgbClr val="D0D0CE"/>
+            </a:solidFill>
+            <a:prstDash val="solid"/>
+          </a:ln>
+        </p:spPr>
+      </p:sp>
+      <p:sp>
+        <p:nvSpPr>
+          <p:cNvPr id="17" name="Text 15"/>
+          <p:cNvSpPr txBox="1"/>
+          <p:nvPr/>
+        </p:nvSpPr>
+        <p:spPr>
+          <a:xfrm>
+            <a:off x="684886" y="5065776"/>
+            <a:ext cx="5091379" cy="1143000"/>
+          </a:xfrm>
+          <a:prstGeom prst="rect">
+            <a:avLst/>
+          </a:prstGeom>
+          <a:noFill/>
+          <a:ln/>
+        </p:spPr>
+        <p:txBody>
+          <a:bodyPr wrap="square" rtlCol="0" anchor="t"/>
+          <a:lstStyle/>
+          <a:p>
+            <a:pPr indent="0" marL="0">
+              <a:lnSpc>
+                <a:spcPct val="112000"/>
+              </a:lnSpc>
+              <a:buNone/>
+            </a:pPr>
+            <a:r>
+              <a:rPr lang="en-US" sz="1000" i="1" dirty="0">
+                <a:solidFill>
+                  <a:srgbClr val="000000"/>
+                </a:solidFill>
+                <a:latin typeface="Calibri" pitchFamily="34" charset="0"/>
+                <a:ea typeface="Calibri" pitchFamily="34" charset="-122"/>
+                <a:cs typeface="Calibri" pitchFamily="34" charset="-120"/>
+              </a:rPr>
+              <a:t>“Companies are moving away from regular passwords towards decentralized digital credentials and biometric passkeys, as this would minimize phishing and account hacking.”</a:t>
+            </a:r>
+            <a:endParaRPr lang="en-US" sz="1000" dirty="0"/>
+          </a:p>
+        </p:txBody>
+      </p:sp>
+      <p:sp>
+        <p:nvSpPr>
+          <p:cNvPr id="18" name="Text 16"/>
+          <p:cNvSpPr txBox="1"/>
+          <p:nvPr/>
+        </p:nvSpPr>
+        <p:spPr>
+          <a:xfrm>
+            <a:off x="684886" y="6227064"/>
+            <a:ext cx="5091379" cy="256032"/>
+          </a:xfrm>
+          <a:prstGeom prst="rect">
+            <a:avLst/>
+          </a:prstGeom>
+          <a:noFill/>
+          <a:ln/>
+        </p:spPr>
+        <p:txBody>
+          <a:bodyPr wrap="square" rtlCol="0" anchor="ctr"/>
+          <a:lstStyle/>
+          <a:p>
+            <a:pPr indent="0" marL="0">
+              <a:buNone/>
+            </a:pPr>
+            <a:r>
+              <a:rPr lang="en-US" sz="900" dirty="0">
+                <a:solidFill>
+                  <a:srgbClr val="53565A"/>
+                </a:solidFill>
+                <a:latin typeface="IBM Plex Mono" pitchFamily="34" charset="0"/>
+                <a:ea typeface="IBM Plex Mono" pitchFamily="34" charset="-122"/>
+                <a:cs typeface="IBM Plex Mono" pitchFamily="34" charset="-120"/>
+              </a:rPr>
+              <a:t>Senior Manager · Banking</a:t>
+            </a:r>
+            <a:endParaRPr lang="en-US" sz="900" dirty="0"/>
+          </a:p>
+        </p:txBody>
+      </p:sp>
+      <p:sp>
+        <p:nvSpPr>
+          <p:cNvPr id="19" name="Shape 17"/>
+          <p:cNvSpPr/>
+          <p:nvPr/>
+        </p:nvSpPr>
+        <p:spPr>
+          <a:xfrm>
+            <a:off x="6233465" y="4937760"/>
+            <a:ext cx="5457139" cy="1600200"/>
+          </a:xfrm>
+          <a:prstGeom prst="roundRect">
+            <a:avLst>
+              <a:gd name="adj" fmla="val 2857"/>
+            </a:avLst>
+          </a:prstGeom>
+          <a:solidFill>
+            <a:srgbClr val="FFFFFF"/>
+          </a:solidFill>
+          <a:ln w="9525">
+            <a:solidFill>
+              <a:srgbClr val="D0D0CE"/>
+            </a:solidFill>
+            <a:prstDash val="solid"/>
+          </a:ln>
+        </p:spPr>
+      </p:sp>
+      <p:sp>
+        <p:nvSpPr>
+          <p:cNvPr id="20" name="Text 18"/>
+          <p:cNvSpPr txBox="1"/>
+          <p:nvPr/>
+        </p:nvSpPr>
+        <p:spPr>
+          <a:xfrm>
+            <a:off x="6416345" y="5065776"/>
+            <a:ext cx="5091379" cy="1143000"/>
+          </a:xfrm>
+          <a:prstGeom prst="rect">
+            <a:avLst/>
+          </a:prstGeom>
+          <a:noFill/>
+          <a:ln/>
+        </p:spPr>
+        <p:txBody>
+          <a:bodyPr wrap="square" rtlCol="0" anchor="t"/>
+          <a:lstStyle/>
+          <a:p>
+            <a:pPr indent="0" marL="0">
+              <a:lnSpc>
+                <a:spcPct val="112000"/>
+              </a:lnSpc>
+              <a:buNone/>
+            </a:pPr>
+            <a:r>
+              <a:rPr lang="en-US" sz="1000" i="1" dirty="0">
+                <a:solidFill>
+                  <a:srgbClr val="000000"/>
+                </a:solidFill>
+                <a:latin typeface="Calibri" pitchFamily="34" charset="0"/>
+                <a:ea typeface="Calibri" pitchFamily="34" charset="-122"/>
+                <a:cs typeface="Calibri" pitchFamily="34" charset="-120"/>
+              </a:rPr>
+              <a:t>“AI will shift fraud management from reactive investigation toward more predictive prevention, which should help us identify risks before losses occur.”</a:t>
+            </a:r>
+            <a:endParaRPr lang="en-US" sz="1000" dirty="0"/>
+          </a:p>
+        </p:txBody>
+      </p:sp>
+      <p:sp>
+        <p:nvSpPr>
+          <p:cNvPr id="21" name="Text 19"/>
+          <p:cNvSpPr txBox="1"/>
+          <p:nvPr/>
+        </p:nvSpPr>
+        <p:spPr>
+          <a:xfrm>
+            <a:off x="6416345" y="6227064"/>
+            <a:ext cx="5091379" cy="256032"/>
+          </a:xfrm>
+          <a:prstGeom prst="rect">
+            <a:avLst/>
+          </a:prstGeom>
+          <a:noFill/>
+          <a:ln/>
+        </p:spPr>
+        <p:txBody>
+          <a:bodyPr wrap="square" rtlCol="0" anchor="ctr"/>
+          <a:lstStyle/>
+          <a:p>
+            <a:pPr indent="0" marL="0">
+              <a:buNone/>
+            </a:pPr>
+            <a:r>
+              <a:rPr lang="en-US" sz="900" dirty="0">
+                <a:solidFill>
+                  <a:srgbClr val="53565A"/>
+                </a:solidFill>
+                <a:latin typeface="IBM Plex Mono" pitchFamily="34" charset="0"/>
+                <a:ea typeface="IBM Plex Mono" pitchFamily="34" charset="-122"/>
+                <a:cs typeface="IBM Plex Mono" pitchFamily="34" charset="-120"/>
+              </a:rPr>
+              <a:t>VP · Banking</a:t>
+            </a:r>
+            <a:endParaRPr lang="en-US" sz="900" dirty="0"/>
+          </a:p>
+        </p:txBody>
+      </p:sp>
+    </p:spTree>
+  </p:cSld>
+  <p:clrMapOvr>
+    <a:masterClrMapping/>
+  </p:clrMapOvr>
+</p:sld>
+</file>
+
+<file path=ppt/slides/slide41.xml><?xml version="1.0" encoding="utf-8"?>
+<p:sld xmlns:a="http://schemas.openxmlformats.org/drawingml/2006/main" xmlns:r="http://schemas.openxmlformats.org/officeDocument/2006/relationships" xmlns:p="http://schemas.openxmlformats.org/presentationml/2006/main">
+  <p:cSld name="Slide 41">
     <p:bg>
       <p:bgPr>
         <a:solidFill>

--- a/Fraud in 2026 - Full Results.pptx
+++ b/Fraud in 2026 - Full Results.pptx
@@ -4427,7 +4427,7 @@
               <c:strCache>
                 <c:ptCount val="1"/>
                 <c:pt idx="0">
-                  <c:v>Top tier (Top 100 Banking / Top 50 Insurance)</c:v>
+                  <c:v>Top tier (Top 100 Banking n=40 / Top 50 Insurance n=15)</c:v>
                 </c:pt>
               </c:strCache>
             </c:strRef>
@@ -4553,7 +4553,7 @@
               <c:strCache>
                 <c:ptCount val="1"/>
                 <c:pt idx="0">
-                  <c:v>Large institution (outside Top 100 / Top 50)</c:v>
+                  <c:v>Large institution (Banking n=35 / Insurance n=10)</c:v>
                 </c:pt>
               </c:strCache>
             </c:strRef>
@@ -21823,7 +21823,7 @@
         <p:spPr>
           <a:xfrm>
             <a:off x="502006" y="5276088"/>
-            <a:ext cx="11188598" cy="713232"/>
+            <a:ext cx="11188598" cy="804672"/>
           </a:xfrm>
           <a:prstGeom prst="rect">
             <a:avLst/>
@@ -21867,7 +21867,7 @@
                 <a:ea typeface="Calibri" pitchFamily="34" charset="-122"/>
                 <a:cs typeface="Calibri" pitchFamily="34" charset="-120"/>
               </a:rPr>
-              <a:t>The % in each category label is the full sector-level figure; stacked region segments are rounded to the nearest whole percent and may sum to within ±1pt of that total. Banking/Australia (n=7) and Banking/Singapore (n=4) are thin samples shown directionally. Insurance/Europe (n=2, both United Kingdom) and Insurance/Australia (n=1) are extremely thin — each segment reflects just 1–2 respondents — and are shown for completeness, not as statistically reliable estimates. Insurance had zero Singapore respondents, so no segment appears there.</a:t>
+              <a:t>The % in each category label is the full sector-level figure; stacked region segments are rounded to the nearest whole percent and may sum to within ±1pt of that total. Region sample sizes — Banking: US n=34, Canada n=18, Europe n=12, Australia n=7, Singapore n=4. Insurance: US n=10, Canada n=12, Europe n=2 (both United Kingdom), Australia n=1, Singapore n=0. Banking/Australia, Banking/Singapore, and all Insurance cells outside US/Canada are thin samples and should be read directionally, not precisely.</a:t>
             </a:r>
             <a:endParaRPr lang="en-US" sz="850" dirty="0"/>
           </a:p>
@@ -21881,7 +21881,7 @@
         </p:nvSpPr>
         <p:spPr>
           <a:xfrm>
-            <a:off x="502006" y="6007608"/>
+            <a:off x="502006" y="6099048"/>
             <a:ext cx="11188598" cy="320040"/>
           </a:xfrm>
           <a:prstGeom prst="rect">
@@ -24783,7 +24783,7 @@
         <p:spPr>
           <a:xfrm>
             <a:off x="502006" y="5276088"/>
-            <a:ext cx="11188598" cy="566928"/>
+            <a:ext cx="11188598" cy="676656"/>
           </a:xfrm>
           <a:prstGeom prst="rect">
             <a:avLst/>
@@ -24827,7 +24827,7 @@
                 <a:ea typeface="Calibri" pitchFamily="34" charset="-122"/>
                 <a:cs typeface="Calibri" pitchFamily="34" charset="-120"/>
               </a:rPr>
-              <a:t>The % in each category label is the full sector-level figure; stacked region segments are rounded to the nearest whole percent and may sum to within ±1pt of that total. Banking/Australia (n=7) and Banking/Singapore (n=4) are thin samples shown directionally. Insurance/Europe (n=2, both United Kingdom) and Insurance/Australia (n=1) are extremely thin — each segment reflects just 1 respondent — and are shown for completeness, not as statistically reliable estimates. Insurance had zero Singapore respondents, so no segment appears there.</a:t>
+              <a:t>The % in each category label is the full sector-level figure; stacked region segments are rounded to the nearest whole percent and may sum to within ±1pt of that total. Region sample sizes — Banking: US n=34, Canada n=18, Europe n=12, Australia n=7, Singapore n=4. Insurance: US n=10, Canada n=12, Europe n=2 (both United Kingdom), Australia n=1, Singapore n=0. Banking/Australia, Banking/Singapore, and all Insurance cells outside US/Canada are thin samples and should be read directionally, not precisely.</a:t>
             </a:r>
             <a:endParaRPr lang="en-US" sz="850" dirty="0"/>
           </a:p>
@@ -24841,8 +24841,8 @@
         </p:nvSpPr>
         <p:spPr>
           <a:xfrm>
-            <a:off x="502006" y="5861304"/>
-            <a:ext cx="11188598" cy="365760"/>
+            <a:off x="502006" y="5971032"/>
+            <a:ext cx="11188598" cy="438912"/>
           </a:xfrm>
           <a:prstGeom prst="rect">
             <a:avLst/>
@@ -26637,7 +26637,7 @@
                 <a:ea typeface="IBM Plex Mono" pitchFamily="34" charset="-122"/>
                 <a:cs typeface="IBM Plex Mono" pitchFamily="34" charset="-120"/>
               </a:rPr>
-              <a:t>Q1 / newS8 / S9  </a:t>
+              <a:t>Q1  </a:t>
             </a:r>
             <a:pPr algn="l" indent="0" marL="0">
               <a:lnSpc>
@@ -27028,7 +27028,7 @@
                 <a:ea typeface="IBM Plex Mono" pitchFamily="34" charset="-122"/>
                 <a:cs typeface="IBM Plex Mono" pitchFamily="34" charset="-120"/>
               </a:rPr>
-              <a:t>Q1 / newS8  </a:t>
+              <a:t>Q1  </a:t>
             </a:r>
             <a:pPr algn="l" indent="0" marL="0">
               <a:lnSpc>
@@ -27138,7 +27138,7 @@
         <p:spPr>
           <a:xfrm>
             <a:off x="502006" y="5276088"/>
-            <a:ext cx="11188598" cy="566928"/>
+            <a:ext cx="11188598" cy="777240"/>
           </a:xfrm>
           <a:prstGeom prst="rect">
             <a:avLst/>
@@ -27182,7 +27182,7 @@
                 <a:ea typeface="Calibri" pitchFamily="34" charset="-122"/>
                 <a:cs typeface="Calibri" pitchFamily="34" charset="-120"/>
               </a:rPr>
-              <a:t>The % in each category label is the full tier-level figure (Top 100 n=40, Large n=35); region segments are rounded to the nearest whole percent. Australia (n=4 Top 100 / n=3 Large) and Singapore (n=2 / n=2) are thin samples shown directionally. Top 100 includes 5 respondents reclassified from their employer description elsewhere in the survey (see previous slide).</a:t>
+              <a:t>The % in each category label is the full tier-level figure (Top 100 n=40, Large n=35); region segments are rounded to the nearest whole percent. Region sample sizes — Top 100: US n=14, Canada n=13, Europe n=7, Australia n=4, Singapore n=2. Large: US n=20, Canada n=5, Europe n=5, Australia n=3, Singapore n=2. Australia and Singapore are thin samples shown directionally. Top 100 includes 5 respondents reclassified from their employer description elsewhere in the survey (see previous slide).</a:t>
             </a:r>
             <a:endParaRPr lang="en-US" sz="850" dirty="0"/>
           </a:p>
@@ -27196,7 +27196,7 @@
         </p:nvSpPr>
         <p:spPr>
           <a:xfrm>
-            <a:off x="502006" y="5861304"/>
+            <a:off x="502006" y="6071616"/>
             <a:ext cx="11188598" cy="365760"/>
           </a:xfrm>
           <a:prstGeom prst="rect">
@@ -27419,7 +27419,7 @@
                 <a:ea typeface="IBM Plex Mono" pitchFamily="34" charset="-122"/>
                 <a:cs typeface="IBM Plex Mono" pitchFamily="34" charset="-120"/>
               </a:rPr>
-              <a:t>Q1 / S9  </a:t>
+              <a:t>Q1  </a:t>
             </a:r>
             <a:pPr algn="l" indent="0" marL="0">
               <a:lnSpc>
@@ -27529,7 +27529,7 @@
         <p:spPr>
           <a:xfrm>
             <a:off x="502006" y="5276088"/>
-            <a:ext cx="11188598" cy="685800"/>
+            <a:ext cx="11188598" cy="777240"/>
           </a:xfrm>
           <a:prstGeom prst="rect">
             <a:avLst/>
@@ -27543,7 +27543,7 @@
           <a:p>
             <a:pPr algn="l" indent="0" marL="0">
               <a:lnSpc>
-                <a:spcPct val="112000"/>
+                <a:spcPct val="108000"/>
               </a:lnSpc>
               <a:buNone/>
             </a:pPr>
@@ -27560,7 +27560,7 @@
             </a:r>
             <a:pPr algn="l" indent="0" marL="0">
               <a:lnSpc>
-                <a:spcPct val="112000"/>
+                <a:spcPct val="108000"/>
               </a:lnSpc>
               <a:buNone/>
             </a:pPr>
@@ -27573,7 +27573,7 @@
                 <a:ea typeface="Calibri" pitchFamily="34" charset="-122"/>
                 <a:cs typeface="Calibri" pitchFamily="34" charset="-120"/>
               </a:rPr>
-              <a:t>The % in each category label is the full tier-level figure; region segments are rounded to the nearest whole percent. Insurance/Europe (n=1, United Kingdom) and Insurance/Australia (n=1) are extremely thin — each segment reflects a single respondent — and are shown for completeness, not as statistically reliable estimates. Insurance had zero Singapore respondents in either tier, so no segment appears there. Large includes 1 respondent (Canada) reclassified from their employer description elsewhere in the survey (see the sector x tier slide).</a:t>
+              <a:t>The % in each category label is the full tier-level figure; region segments are rounded to the nearest whole percent. Region sample sizes — Top 50: US n=7, Canada n=6, Europe n=1, Australia n=1. Large: US n=3, Canada n=6, Europe n=1 (no Australia; neither tier has Singapore respondents). Europe and Australia cells are extremely thin — each is a single UK/Australian respondent — shown for completeness, not statistical reliability. Large includes 1 respondent (Canada) reclassified from their employer description elsewhere in the survey (see the sector x tier slide).</a:t>
             </a:r>
             <a:endParaRPr lang="en-US" sz="850" dirty="0"/>
           </a:p>
@@ -27587,7 +27587,7 @@
         </p:nvSpPr>
         <p:spPr>
           <a:xfrm>
-            <a:off x="502006" y="6080760"/>
+            <a:off x="502006" y="6071616"/>
             <a:ext cx="11188598" cy="347472"/>
           </a:xfrm>
           <a:prstGeom prst="rect">
@@ -28329,7 +28329,7 @@
                 <a:ea typeface="IBM Plex Mono" pitchFamily="34" charset="-122"/>
                 <a:cs typeface="IBM Plex Mono" pitchFamily="34" charset="-120"/>
               </a:rPr>
-              <a:t>Q8 / Q9 / S9  </a:t>
+              <a:t>Q8 / Q9  </a:t>
             </a:r>
             <a:pPr algn="l" indent="0" marL="0">
               <a:lnSpc>
@@ -28772,7 +28772,7 @@
                 <a:ea typeface="IBM Plex Mono" pitchFamily="34" charset="-122"/>
                 <a:cs typeface="IBM Plex Mono" pitchFamily="34" charset="-120"/>
               </a:rPr>
-              <a:t>Q8 / S9  </a:t>
+              <a:t>Q8  </a:t>
             </a:r>
             <a:pPr algn="l" indent="0" marL="0">
               <a:lnSpc>
@@ -28882,7 +28882,7 @@
         <p:spPr>
           <a:xfrm>
             <a:off x="502006" y="5276088"/>
-            <a:ext cx="11188598" cy="548640"/>
+            <a:ext cx="11188598" cy="777240"/>
           </a:xfrm>
           <a:prstGeom prst="rect">
             <a:avLst/>
@@ -28896,7 +28896,7 @@
           <a:p>
             <a:pPr algn="l" indent="0" marL="0">
               <a:lnSpc>
-                <a:spcPct val="115000"/>
+                <a:spcPct val="110000"/>
               </a:lnSpc>
               <a:buNone/>
             </a:pPr>
@@ -28913,7 +28913,7 @@
             </a:r>
             <a:pPr algn="l" indent="0" marL="0">
               <a:lnSpc>
-                <a:spcPct val="115000"/>
+                <a:spcPct val="110000"/>
               </a:lnSpc>
               <a:buNone/>
             </a:pPr>
@@ -28926,7 +28926,7 @@
                 <a:ea typeface="Calibri" pitchFamily="34" charset="-122"/>
                 <a:cs typeface="Calibri" pitchFamily="34" charset="-120"/>
               </a:rPr>
-              <a:t>The % in each category label is the full tier-level figure; region segments are rounded to the nearest whole percent and may not sum exactly due to rounding. Every regional cell here is thin (n=1–7) and should be read directionally. Insurance had zero Singapore respondents in either tier, so no segment appears there.</a:t>
+              <a:t>The % in each category label is the full tier-level figure; region segments are rounded to the nearest whole percent and may not sum exactly due to rounding. Region sample sizes — Top 50: US n=7, Canada n=6, Europe n=1, Australia n=1. Large: US n=3, Canada n=6, Europe n=1 (no Australia; neither tier has Singapore respondents). Every regional cell here is thin (n=1–7) and should be read directionally.</a:t>
             </a:r>
             <a:endParaRPr lang="en-US" sz="850" dirty="0"/>
           </a:p>
@@ -28940,7 +28940,7 @@
         </p:nvSpPr>
         <p:spPr>
           <a:xfrm>
-            <a:off x="502006" y="5861304"/>
+            <a:off x="502006" y="6071616"/>
             <a:ext cx="11188598" cy="420624"/>
           </a:xfrm>
           <a:prstGeom prst="rect">
@@ -29163,7 +29163,7 @@
                 <a:ea typeface="IBM Plex Mono" pitchFamily="34" charset="-122"/>
                 <a:cs typeface="IBM Plex Mono" pitchFamily="34" charset="-120"/>
               </a:rPr>
-              <a:t>Q9 / S9  </a:t>
+              <a:t>Q9  </a:t>
             </a:r>
             <a:pPr algn="l" indent="0" marL="0">
               <a:lnSpc>
@@ -29273,7 +29273,7 @@
         <p:spPr>
           <a:xfrm>
             <a:off x="502006" y="5276088"/>
-            <a:ext cx="11188598" cy="548640"/>
+            <a:ext cx="11188598" cy="777240"/>
           </a:xfrm>
           <a:prstGeom prst="rect">
             <a:avLst/>
@@ -29287,7 +29287,7 @@
           <a:p>
             <a:pPr algn="l" indent="0" marL="0">
               <a:lnSpc>
-                <a:spcPct val="115000"/>
+                <a:spcPct val="110000"/>
               </a:lnSpc>
               <a:buNone/>
             </a:pPr>
@@ -29304,7 +29304,7 @@
             </a:r>
             <a:pPr algn="l" indent="0" marL="0">
               <a:lnSpc>
-                <a:spcPct val="115000"/>
+                <a:spcPct val="110000"/>
               </a:lnSpc>
               <a:buNone/>
             </a:pPr>
@@ -29317,7 +29317,7 @@
                 <a:ea typeface="Calibri" pitchFamily="34" charset="-122"/>
                 <a:cs typeface="Calibri" pitchFamily="34" charset="-120"/>
               </a:rPr>
-              <a:t>The % in each category label is the full tier-level figure; region segments are rounded to the nearest whole percent and may not sum exactly due to rounding. Every regional cell here is thin (n=1–7) and should be read directionally. Insurance had zero Singapore respondents in either tier, so no segment appears there.</a:t>
+              <a:t>The % in each category label is the full tier-level figure; region segments are rounded to the nearest whole percent and may not sum exactly due to rounding. Region sample sizes — Top 50: US n=7, Canada n=6, Europe n=1, Australia n=1. Large: US n=3, Canada n=6, Europe n=1 (no Australia; neither tier has Singapore respondents). Every regional cell here is thin (n=1–7) and should be read directionally.</a:t>
             </a:r>
             <a:endParaRPr lang="en-US" sz="850" dirty="0"/>
           </a:p>
@@ -29331,7 +29331,7 @@
         </p:nvSpPr>
         <p:spPr>
           <a:xfrm>
-            <a:off x="502006" y="5861304"/>
+            <a:off x="502006" y="6071616"/>
             <a:ext cx="11188598" cy="420624"/>
           </a:xfrm>
           <a:prstGeom prst="rect">
@@ -29554,7 +29554,7 @@
                 <a:ea typeface="IBM Plex Mono" pitchFamily="34" charset="-122"/>
                 <a:cs typeface="IBM Plex Mono" pitchFamily="34" charset="-120"/>
               </a:rPr>
-              <a:t>Q8 / Q9 / newS8  </a:t>
+              <a:t>Q8 / Q9  </a:t>
             </a:r>
             <a:pPr algn="l" indent="0" marL="0">
               <a:lnSpc>
@@ -30679,7 +30679,7 @@
                 <a:ea typeface="IBM Plex Mono" pitchFamily="34" charset="-122"/>
                 <a:cs typeface="IBM Plex Mono" pitchFamily="34" charset="-120"/>
               </a:rPr>
-              <a:t>Q8 / newS8  </a:t>
+              <a:t>Q8  </a:t>
             </a:r>
             <a:pPr algn="l" indent="0" marL="0">
               <a:lnSpc>
@@ -30789,7 +30789,7 @@
         <p:spPr>
           <a:xfrm>
             <a:off x="502006" y="5276088"/>
-            <a:ext cx="11188598" cy="548640"/>
+            <a:ext cx="11188598" cy="777240"/>
           </a:xfrm>
           <a:prstGeom prst="rect">
             <a:avLst/>
@@ -30803,7 +30803,7 @@
           <a:p>
             <a:pPr algn="l" indent="0" marL="0">
               <a:lnSpc>
-                <a:spcPct val="115000"/>
+                <a:spcPct val="110000"/>
               </a:lnSpc>
               <a:buNone/>
             </a:pPr>
@@ -30820,7 +30820,7 @@
             </a:r>
             <a:pPr algn="l" indent="0" marL="0">
               <a:lnSpc>
-                <a:spcPct val="115000"/>
+                <a:spcPct val="110000"/>
               </a:lnSpc>
               <a:buNone/>
             </a:pPr>
@@ -30833,7 +30833,7 @@
                 <a:ea typeface="Calibri" pitchFamily="34" charset="-122"/>
                 <a:cs typeface="Calibri" pitchFamily="34" charset="-120"/>
               </a:rPr>
-              <a:t>The % in each category label is the full tier-level figure; region segments are rounded to the nearest whole percent and may not sum exactly due to rounding. Australia (n=4 Top 100 / n=3 Large) and Singapore (n=2 / n=2) are thin samples shown directionally.</a:t>
+              <a:t>The % in each category label is the full tier-level figure; region segments are rounded to the nearest whole percent and may not sum exactly due to rounding. Region sample sizes — Top 100: US n=14, Canada n=13, Europe n=7, Australia n=4, Singapore n=2. Large: US n=20, Canada n=5, Europe n=5, Australia n=3, Singapore n=2. Australia and Singapore are thin samples shown directionally.</a:t>
             </a:r>
             <a:endParaRPr lang="en-US" sz="850" dirty="0"/>
           </a:p>
@@ -30847,7 +30847,7 @@
         </p:nvSpPr>
         <p:spPr>
           <a:xfrm>
-            <a:off x="502006" y="5861304"/>
+            <a:off x="502006" y="6071616"/>
             <a:ext cx="11188598" cy="420624"/>
           </a:xfrm>
           <a:prstGeom prst="rect">
@@ -31070,7 +31070,7 @@
                 <a:ea typeface="IBM Plex Mono" pitchFamily="34" charset="-122"/>
                 <a:cs typeface="IBM Plex Mono" pitchFamily="34" charset="-120"/>
               </a:rPr>
-              <a:t>Q9 / newS8  </a:t>
+              <a:t>Q9  </a:t>
             </a:r>
             <a:pPr algn="l" indent="0" marL="0">
               <a:lnSpc>
@@ -31180,7 +31180,7 @@
         <p:spPr>
           <a:xfrm>
             <a:off x="502006" y="5276088"/>
-            <a:ext cx="11188598" cy="548640"/>
+            <a:ext cx="11188598" cy="777240"/>
           </a:xfrm>
           <a:prstGeom prst="rect">
             <a:avLst/>
@@ -31194,7 +31194,7 @@
           <a:p>
             <a:pPr algn="l" indent="0" marL="0">
               <a:lnSpc>
-                <a:spcPct val="115000"/>
+                <a:spcPct val="110000"/>
               </a:lnSpc>
               <a:buNone/>
             </a:pPr>
@@ -31211,7 +31211,7 @@
             </a:r>
             <a:pPr algn="l" indent="0" marL="0">
               <a:lnSpc>
-                <a:spcPct val="115000"/>
+                <a:spcPct val="110000"/>
               </a:lnSpc>
               <a:buNone/>
             </a:pPr>
@@ -31224,7 +31224,7 @@
                 <a:ea typeface="Calibri" pitchFamily="34" charset="-122"/>
                 <a:cs typeface="Calibri" pitchFamily="34" charset="-120"/>
               </a:rPr>
-              <a:t>The % in each category label is the full tier-level figure; region segments are rounded to the nearest whole percent and may not sum exactly due to rounding. Australia (n=4 Top 100 / n=3 Large) and Singapore (n=2 / n=2) are thin samples shown directionally.</a:t>
+              <a:t>The % in each category label is the full tier-level figure; region segments are rounded to the nearest whole percent and may not sum exactly due to rounding. Region sample sizes — Top 100: US n=14, Canada n=13, Europe n=7, Australia n=4, Singapore n=2. Large: US n=20, Canada n=5, Europe n=5, Australia n=3, Singapore n=2. Australia and Singapore are thin samples shown directionally.</a:t>
             </a:r>
             <a:endParaRPr lang="en-US" sz="850" dirty="0"/>
           </a:p>
@@ -31238,7 +31238,7 @@
         </p:nvSpPr>
         <p:spPr>
           <a:xfrm>
-            <a:off x="502006" y="5861304"/>
+            <a:off x="502006" y="6071616"/>
             <a:ext cx="11188598" cy="420624"/>
           </a:xfrm>
           <a:prstGeom prst="rect">
@@ -32447,7 +32447,7 @@
                 <a:ea typeface="IBM Plex Mono" pitchFamily="34" charset="-122"/>
                 <a:cs typeface="IBM Plex Mono" pitchFamily="34" charset="-120"/>
               </a:rPr>
-              <a:t>Q10 / S9  </a:t>
+              <a:t>Q10  </a:t>
             </a:r>
             <a:pPr algn="l" indent="0" marL="0">
               <a:lnSpc>
@@ -32864,7 +32864,7 @@
                 <a:ea typeface="IBM Plex Mono" pitchFamily="34" charset="-122"/>
                 <a:cs typeface="IBM Plex Mono" pitchFamily="34" charset="-120"/>
               </a:rPr>
-              <a:t>Q10 / newS8  </a:t>
+              <a:t>Q10  </a:t>
             </a:r>
             <a:pPr algn="l" indent="0" marL="0">
               <a:lnSpc>
@@ -37588,7 +37588,7 @@
         <p:spPr>
           <a:xfrm>
             <a:off x="502006" y="5276088"/>
-            <a:ext cx="11188598" cy="566928"/>
+            <a:ext cx="11188598" cy="676656"/>
           </a:xfrm>
           <a:prstGeom prst="rect">
             <a:avLst/>
@@ -37602,7 +37602,7 @@
           <a:p>
             <a:pPr algn="l" indent="0" marL="0">
               <a:lnSpc>
-                <a:spcPct val="118000"/>
+                <a:spcPct val="115000"/>
               </a:lnSpc>
               <a:buNone/>
             </a:pPr>
@@ -37619,7 +37619,7 @@
             </a:r>
             <a:pPr algn="l" indent="0" marL="0">
               <a:lnSpc>
-                <a:spcPct val="118000"/>
+                <a:spcPct val="115000"/>
               </a:lnSpc>
               <a:buNone/>
             </a:pPr>
@@ -37632,7 +37632,7 @@
                 <a:ea typeface="Calibri" pitchFamily="34" charset="-122"/>
                 <a:cs typeface="Calibri" pitchFamily="34" charset="-120"/>
               </a:rPr>
-              <a:t>The % in each category label is the full sector-level figure; stacked region segments are rounded to the nearest whole percent and may sum to within ±1pt of that total. Banking/Australia (n=7) and Banking/Singapore (n=4) are thin samples shown directionally. Insurance/Europe (n=2, both United Kingdom) and Insurance/Australia (n=1) are extremely thin — each segment reflects just 1–2 respondents — and are shown for completeness, not as statistically reliable estimates. Insurance had zero Singapore respondents, so no segment appears there.</a:t>
+              <a:t>The % in each category label is the full sector-level figure; stacked region segments are rounded to the nearest whole percent and may sum to within ±1pt of that total. Region sample sizes — Banking: US n=34, Canada n=18, Europe n=12, Australia n=7, Singapore n=4. Insurance: US n=10, Canada n=12, Europe n=2 (both United Kingdom), Australia n=1, Singapore n=0. Banking/Australia, Banking/Singapore, and all Insurance cells outside US/Canada are thin samples and should be read directionally, not precisely.</a:t>
             </a:r>
             <a:endParaRPr lang="en-US" sz="850" dirty="0"/>
           </a:p>
@@ -37646,7 +37646,7 @@
         </p:nvSpPr>
         <p:spPr>
           <a:xfrm>
-            <a:off x="502006" y="5897880"/>
+            <a:off x="502006" y="5989320"/>
             <a:ext cx="11188598" cy="320040"/>
           </a:xfrm>
           <a:prstGeom prst="rect">

--- a/Fraud in 2026 - Full Results.pptx
+++ b/Fraud in 2026 - Full Results.pptx
@@ -50,9 +50,10 @@
     <p:sldId id="298" r:id="rId44"/>
     <p:sldId id="299" r:id="rId45"/>
     <p:sldId id="300" r:id="rId46"/>
+    <p:sldId id="301" r:id="rId47"/>
   </p:sldIdLst>
   <p:notesMasterIdLst>
-    <p:notesMasterId r:id="rId47"/>
+    <p:notesMasterId r:id="rId48"/>
   </p:notesMasterIdLst>
   <p:sldSz cx="12192000" cy="6858000"/>
   <p:notesSz cx="6858000" cy="12192000"/>
@@ -3414,7 +3415,7 @@
               <c:strCache>
                 <c:ptCount val="1"/>
                 <c:pt idx="0">
-                  <c:v>Government Action With the Greatest Impact on Info Sharing</c:v>
+                  <c:v>Biggest Barriers to Effective Information Sharing — U.S. Banking Only</c:v>
                 </c:pt>
               </c:strCache>
             </c:strRef>
@@ -3457,22 +3458,22 @@
                 <c:ptCount val="6"/>
                 <c:lvl>
                   <c:pt idx="0">
-                    <c:v>Centralized fraud info-sharing platform / utility</c:v>
+                    <c:v>Limited data standardization &amp; poor quality</c:v>
                   </c:pt>
                   <c:pt idx="1">
-                    <c:v>Clearer legal &amp; regulatory frameworks</c:v>
+                    <c:v>Legal, privacy or regulatory constraints</c:v>
                   </c:pt>
                   <c:pt idx="2">
-                    <c:v>Common data standards &amp; definitions</c:v>
+                    <c:v>Lack of external industry participation</c:v>
                   </c:pt>
                   <c:pt idx="3">
-                    <c:v>Greater public-private collaboration</c:v>
+                    <c:v>Insufficient budget or resources</c:v>
                   </c:pt>
                   <c:pt idx="4">
-                    <c:v>Prioritized industry use cases</c:v>
+                    <c:v>Unclear internal ownership / governance</c:v>
                   </c:pt>
                   <c:pt idx="5">
-                    <c:v>Funding or incentives</c:v>
+                    <c:v>Difficulty demonstrating ROI</c:v>
                   </c:pt>
                 </c:lvl>
               </c:multiLvlStrCache>
@@ -3485,22 +3486,22 @@
                 <c:formatCode>General</c:formatCode>
                 <c:ptCount val="6"/>
                 <c:pt idx="0">
+                  <c:v>74</c:v>
+                </c:pt>
+                <c:pt idx="1">
+                  <c:v>74</c:v>
+                </c:pt>
+                <c:pt idx="2">
+                  <c:v>74</c:v>
+                </c:pt>
+                <c:pt idx="3">
                   <c:v>35</c:v>
                 </c:pt>
-                <c:pt idx="1">
+                <c:pt idx="4">
                   <c:v>26</c:v>
                 </c:pt>
-                <c:pt idx="2">
-                  <c:v>14</c:v>
-                </c:pt>
-                <c:pt idx="3">
-                  <c:v>13</c:v>
-                </c:pt>
-                <c:pt idx="4">
-                  <c:v>9</c:v>
-                </c:pt>
                 <c:pt idx="5">
-                  <c:v>3</c:v>
+                  <c:v>18</c:v>
                 </c:pt>
               </c:numCache>
             </c:numRef>
@@ -3639,6 +3640,251 @@
 </file>
 
 <file path=ppt/charts/chart18.xml><?xml version="1.0" encoding="utf-8"?>
+<c:chartSpace xmlns:c="http://schemas.openxmlformats.org/drawingml/2006/chart" xmlns:a="http://schemas.openxmlformats.org/drawingml/2006/main" xmlns:r="http://schemas.openxmlformats.org/officeDocument/2006/relationships">
+  <c:date1904 val="0"/>
+  <c:roundedCorners val="1"/>
+  <c:chart>
+    <c:autoTitleDeleted val="1"/>
+    <c:plotArea>
+      <c:layout/>
+      <c:barChart>
+        <c:barDir val="bar"/>
+        <c:grouping val="clustered"/>
+        <c:varyColors val="0"/>
+        <c:ser>
+          <c:idx val="0"/>
+          <c:order val="0"/>
+          <c:tx>
+            <c:strRef>
+              <c:f>Sheet1!$B$1</c:f>
+              <c:strCache>
+                <c:ptCount val="1"/>
+                <c:pt idx="0">
+                  <c:v>Government Action With the Greatest Impact on Info Sharing</c:v>
+                </c:pt>
+              </c:strCache>
+            </c:strRef>
+          </c:tx>
+          <c:spPr>
+            <a:solidFill>
+              <a:srgbClr val="86BC25"/>
+            </a:solidFill>
+            <a:effectLst/>
+          </c:spPr>
+          <c:invertIfNegative val="0"/>
+          <c:dLbls>
+            <c:numFmt formatCode="0&quot;%&quot;" sourceLinked="0"/>
+            <c:txPr>
+              <a:bodyPr/>
+              <a:lstStyle/>
+              <a:p>
+                <a:pPr>
+                  <a:defRPr b="0" i="0" strike="noStrike" sz="1000" u="none">
+                    <a:solidFill>
+                      <a:srgbClr val="000000"/>
+                    </a:solidFill>
+                    <a:latin typeface="Arial"/>
+                  </a:defRPr>
+                </a:pPr>
+              </a:p>
+            </c:txPr>
+            <c:showLegendKey val="0"/>
+            <c:showVal val="1"/>
+            <c:showCatName val="0"/>
+            <c:showSerName val="0"/>
+            <c:showPercent val="0"/>
+            <c:showBubbleSize val="0"/>
+            <c:showLeaderLines val="0"/>
+          </c:dLbls>
+          <c:cat>
+            <c:multiLvlStrRef>
+              <c:f>Sheet1!$A$2:$A$7</c:f>
+              <c:multiLvlStrCache>
+                <c:ptCount val="6"/>
+                <c:lvl>
+                  <c:pt idx="0">
+                    <c:v>Centralized fraud info-sharing platform / utility</c:v>
+                  </c:pt>
+                  <c:pt idx="1">
+                    <c:v>Clearer legal &amp; regulatory frameworks</c:v>
+                  </c:pt>
+                  <c:pt idx="2">
+                    <c:v>Common data standards &amp; definitions</c:v>
+                  </c:pt>
+                  <c:pt idx="3">
+                    <c:v>Greater public-private collaboration</c:v>
+                  </c:pt>
+                  <c:pt idx="4">
+                    <c:v>Prioritized industry use cases</c:v>
+                  </c:pt>
+                  <c:pt idx="5">
+                    <c:v>Funding or incentives</c:v>
+                  </c:pt>
+                </c:lvl>
+              </c:multiLvlStrCache>
+            </c:multiLvlStrRef>
+          </c:cat>
+          <c:val>
+            <c:numRef>
+              <c:f>Sheet1!$B$2:$B$7</c:f>
+              <c:numCache>
+                <c:formatCode>General</c:formatCode>
+                <c:ptCount val="6"/>
+                <c:pt idx="0">
+                  <c:v>35</c:v>
+                </c:pt>
+                <c:pt idx="1">
+                  <c:v>26</c:v>
+                </c:pt>
+                <c:pt idx="2">
+                  <c:v>14</c:v>
+                </c:pt>
+                <c:pt idx="3">
+                  <c:v>13</c:v>
+                </c:pt>
+                <c:pt idx="4">
+                  <c:v>9</c:v>
+                </c:pt>
+                <c:pt idx="5">
+                  <c:v>3</c:v>
+                </c:pt>
+              </c:numCache>
+            </c:numRef>
+          </c:val>
+        </c:ser>
+        <c:dLbls>
+          <c:numFmt formatCode="0&quot;%&quot;" sourceLinked="0"/>
+          <c:txPr>
+            <a:bodyPr/>
+            <a:lstStyle/>
+            <a:p>
+              <a:pPr>
+                <a:defRPr b="0" i="0" strike="noStrike" sz="1000" u="none">
+                  <a:solidFill>
+                    <a:srgbClr val="000000"/>
+                  </a:solidFill>
+                  <a:latin typeface="Arial"/>
+                </a:defRPr>
+              </a:pPr>
+            </a:p>
+          </c:txPr>
+          <c:showLegendKey val="0"/>
+          <c:showVal val="1"/>
+          <c:showCatName val="0"/>
+          <c:showSerName val="0"/>
+          <c:showPercent val="0"/>
+          <c:showBubbleSize val="0"/>
+          <c:showLeaderLines val="0"/>
+        </c:dLbls>
+        <c:gapWidth val="40"/>
+        <c:overlap val="0"/>
+        <c:axId val="2094734554"/>
+        <c:axId val="2094734552"/>
+        <c:axId val="2094734556"/>
+      </c:barChart>
+      <c:catAx>
+        <c:axId val="2094734554"/>
+        <c:scaling>
+          <c:orientation val="minMax"/>
+        </c:scaling>
+        <c:delete val="0"/>
+        <c:axPos val="l"/>
+        <c:numFmt formatCode="General" sourceLinked="1"/>
+        <c:majorTickMark val="out"/>
+        <c:minorTickMark val="none"/>
+        <c:tickLblPos val="nextTo"/>
+        <c:spPr>
+          <a:ln w="12700" cap="flat">
+            <a:noFill/>
+            <a:prstDash val="solid"/>
+            <a:round/>
+          </a:ln>
+        </c:spPr>
+        <c:txPr>
+          <a:bodyPr/>
+          <a:lstStyle/>
+          <a:p>
+            <a:pPr>
+              <a:defRPr sz="1000" b="0" i="0" u="none" strike="noStrike">
+                <a:solidFill>
+                  <a:srgbClr val="53565A"/>
+                </a:solidFill>
+                <a:latin typeface="Arial"/>
+              </a:defRPr>
+            </a:pPr>
+            <a:endParaRPr lang="en-US"/>
+          </a:p>
+        </c:txPr>
+        <c:crossAx val="2094734552"/>
+        <c:crosses val="autoZero"/>
+        <c:auto val="1"/>
+        <c:lblAlgn val="ctr"/>
+        <c:noMultiLvlLbl val="1"/>
+      </c:catAx>
+      <c:valAx>
+        <c:axId val="2094734552"/>
+        <c:scaling>
+          <c:orientation val="minMax"/>
+        </c:scaling>
+        <c:delete val="1"/>
+        <c:axPos val="b"/>
+        <c:numFmt formatCode="General" sourceLinked="0"/>
+        <c:majorTickMark val="out"/>
+        <c:minorTickMark val="none"/>
+        <c:tickLblPos val="low"/>
+        <c:spPr>
+          <a:ln w="12700" cap="flat">
+            <a:noFill/>
+            <a:prstDash val="solid"/>
+            <a:round/>
+          </a:ln>
+        </c:spPr>
+        <c:txPr>
+          <a:bodyPr/>
+          <a:lstStyle/>
+          <a:p>
+            <a:pPr>
+              <a:defRPr sz="1200" b="0" i="0" u="none" strike="noStrike">
+                <a:solidFill>
+                  <a:srgbClr val="000000"/>
+                </a:solidFill>
+                <a:latin typeface="Arial"/>
+              </a:defRPr>
+            </a:pPr>
+            <a:endParaRPr lang="en-US"/>
+          </a:p>
+        </c:txPr>
+        <c:crossAx val="2094734554"/>
+        <c:crosses val="autoZero"/>
+        <c:crossBetween val="between"/>
+      </c:valAx>
+      <c:spPr>
+        <a:solidFill>
+          <a:srgbClr val="FFFFFF"/>
+        </a:solidFill>
+        <a:ln>
+          <a:noFill/>
+        </a:ln>
+        <a:effectLst/>
+      </c:spPr>
+    </c:plotArea>
+    <c:plotVisOnly val="1"/>
+    <c:dispBlanksAs val="span"/>
+  </c:chart>
+  <c:spPr>
+    <a:noFill/>
+    <a:ln>
+      <a:noFill/>
+    </a:ln>
+    <a:effectLst/>
+  </c:spPr>
+  <c:externalData r:id="rId1">
+    <c:autoUpdate val="0"/>
+  </c:externalData>
+</c:chartSpace>
+</file>
+
+<file path=ppt/charts/chart19.xml><?xml version="1.0" encoding="utf-8"?>
 <c:chartSpace xmlns:c="http://schemas.openxmlformats.org/drawingml/2006/chart" xmlns:a="http://schemas.openxmlformats.org/drawingml/2006/main" xmlns:r="http://schemas.openxmlformats.org/officeDocument/2006/relationships">
   <c:date1904 val="0"/>
   <c:roundedCorners val="1"/>
@@ -4291,251 +4537,6 @@
         </a:p>
       </c:txPr>
     </c:legend>
-    <c:plotVisOnly val="1"/>
-    <c:dispBlanksAs val="span"/>
-  </c:chart>
-  <c:spPr>
-    <a:noFill/>
-    <a:ln>
-      <a:noFill/>
-    </a:ln>
-    <a:effectLst/>
-  </c:spPr>
-  <c:externalData r:id="rId1">
-    <c:autoUpdate val="0"/>
-  </c:externalData>
-</c:chartSpace>
-</file>
-
-<file path=ppt/charts/chart19.xml><?xml version="1.0" encoding="utf-8"?>
-<c:chartSpace xmlns:c="http://schemas.openxmlformats.org/drawingml/2006/chart" xmlns:a="http://schemas.openxmlformats.org/drawingml/2006/main" xmlns:r="http://schemas.openxmlformats.org/officeDocument/2006/relationships">
-  <c:date1904 val="0"/>
-  <c:roundedCorners val="1"/>
-  <c:chart>
-    <c:autoTitleDeleted val="1"/>
-    <c:plotArea>
-      <c:layout/>
-      <c:barChart>
-        <c:barDir val="bar"/>
-        <c:grouping val="clustered"/>
-        <c:varyColors val="0"/>
-        <c:ser>
-          <c:idx val="0"/>
-          <c:order val="0"/>
-          <c:tx>
-            <c:strRef>
-              <c:f>Sheet1!$B$1</c:f>
-              <c:strCache>
-                <c:ptCount val="1"/>
-                <c:pt idx="0">
-                  <c:v>Banking</c:v>
-                </c:pt>
-              </c:strCache>
-            </c:strRef>
-          </c:tx>
-          <c:spPr>
-            <a:solidFill>
-              <a:srgbClr val="86BC25"/>
-            </a:solidFill>
-            <a:effectLst/>
-          </c:spPr>
-          <c:invertIfNegative val="0"/>
-          <c:dLbls>
-            <c:numFmt formatCode="0&quot;%&quot;" sourceLinked="0"/>
-            <c:txPr>
-              <a:bodyPr/>
-              <a:lstStyle/>
-              <a:p>
-                <a:pPr>
-                  <a:defRPr b="0" i="0" strike="noStrike" sz="1000" u="none">
-                    <a:solidFill>
-                      <a:srgbClr val="000000"/>
-                    </a:solidFill>
-                    <a:latin typeface="Arial"/>
-                  </a:defRPr>
-                </a:pPr>
-              </a:p>
-            </c:txPr>
-            <c:showLegendKey val="0"/>
-            <c:showVal val="1"/>
-            <c:showCatName val="0"/>
-            <c:showSerName val="0"/>
-            <c:showPercent val="0"/>
-            <c:showBubbleSize val="0"/>
-            <c:showLeaderLines val="0"/>
-          </c:dLbls>
-          <c:cat>
-            <c:multiLvlStrRef>
-              <c:f>Sheet1!$A$2:$A$7</c:f>
-              <c:multiLvlStrCache>
-                <c:ptCount val="6"/>
-                <c:lvl>
-                  <c:pt idx="0">
-                    <c:v>Fintech partners</c:v>
-                  </c:pt>
-                  <c:pt idx="1">
-                    <c:v>Business &amp; commercial clients</c:v>
-                  </c:pt>
-                  <c:pt idx="2">
-                    <c:v>Dealers &amp; indirect lending partners</c:v>
-                  </c:pt>
-                  <c:pt idx="3">
-                    <c:v>Mortgage brokers</c:v>
-                  </c:pt>
-                  <c:pt idx="4">
-                    <c:v>Merchants</c:v>
-                  </c:pt>
-                  <c:pt idx="5">
-                    <c:v>Appraisers</c:v>
-                  </c:pt>
-                </c:lvl>
-              </c:multiLvlStrCache>
-            </c:multiLvlStrRef>
-          </c:cat>
-          <c:val>
-            <c:numRef>
-              <c:f>Sheet1!$B$2:$B$7</c:f>
-              <c:numCache>
-                <c:formatCode>General</c:formatCode>
-                <c:ptCount val="6"/>
-                <c:pt idx="0">
-                  <c:v>28</c:v>
-                </c:pt>
-                <c:pt idx="1">
-                  <c:v>24</c:v>
-                </c:pt>
-                <c:pt idx="2">
-                  <c:v>20</c:v>
-                </c:pt>
-                <c:pt idx="3">
-                  <c:v>16</c:v>
-                </c:pt>
-                <c:pt idx="4">
-                  <c:v>7</c:v>
-                </c:pt>
-                <c:pt idx="5">
-                  <c:v>4</c:v>
-                </c:pt>
-              </c:numCache>
-            </c:numRef>
-          </c:val>
-        </c:ser>
-        <c:dLbls>
-          <c:numFmt formatCode="0&quot;%&quot;" sourceLinked="0"/>
-          <c:txPr>
-            <a:bodyPr/>
-            <a:lstStyle/>
-            <a:p>
-              <a:pPr>
-                <a:defRPr b="0" i="0" strike="noStrike" sz="1000" u="none">
-                  <a:solidFill>
-                    <a:srgbClr val="000000"/>
-                  </a:solidFill>
-                  <a:latin typeface="Arial"/>
-                </a:defRPr>
-              </a:pPr>
-            </a:p>
-          </c:txPr>
-          <c:showLegendKey val="0"/>
-          <c:showVal val="1"/>
-          <c:showCatName val="0"/>
-          <c:showSerName val="0"/>
-          <c:showPercent val="0"/>
-          <c:showBubbleSize val="0"/>
-          <c:showLeaderLines val="0"/>
-        </c:dLbls>
-        <c:gapWidth val="40"/>
-        <c:overlap val="0"/>
-        <c:axId val="2094734554"/>
-        <c:axId val="2094734552"/>
-        <c:axId val="2094734556"/>
-      </c:barChart>
-      <c:catAx>
-        <c:axId val="2094734554"/>
-        <c:scaling>
-          <c:orientation val="minMax"/>
-        </c:scaling>
-        <c:delete val="0"/>
-        <c:axPos val="l"/>
-        <c:numFmt formatCode="General" sourceLinked="1"/>
-        <c:majorTickMark val="out"/>
-        <c:minorTickMark val="none"/>
-        <c:tickLblPos val="nextTo"/>
-        <c:spPr>
-          <a:ln w="12700" cap="flat">
-            <a:noFill/>
-            <a:prstDash val="solid"/>
-            <a:round/>
-          </a:ln>
-        </c:spPr>
-        <c:txPr>
-          <a:bodyPr/>
-          <a:lstStyle/>
-          <a:p>
-            <a:pPr>
-              <a:defRPr sz="1000" b="0" i="0" u="none" strike="noStrike">
-                <a:solidFill>
-                  <a:srgbClr val="53565A"/>
-                </a:solidFill>
-                <a:latin typeface="Arial"/>
-              </a:defRPr>
-            </a:pPr>
-            <a:endParaRPr lang="en-US"/>
-          </a:p>
-        </c:txPr>
-        <c:crossAx val="2094734552"/>
-        <c:crosses val="autoZero"/>
-        <c:auto val="1"/>
-        <c:lblAlgn val="ctr"/>
-        <c:noMultiLvlLbl val="1"/>
-      </c:catAx>
-      <c:valAx>
-        <c:axId val="2094734552"/>
-        <c:scaling>
-          <c:orientation val="minMax"/>
-        </c:scaling>
-        <c:delete val="1"/>
-        <c:axPos val="b"/>
-        <c:numFmt formatCode="General" sourceLinked="0"/>
-        <c:majorTickMark val="out"/>
-        <c:minorTickMark val="none"/>
-        <c:tickLblPos val="low"/>
-        <c:spPr>
-          <a:ln w="12700" cap="flat">
-            <a:noFill/>
-            <a:prstDash val="solid"/>
-            <a:round/>
-          </a:ln>
-        </c:spPr>
-        <c:txPr>
-          <a:bodyPr/>
-          <a:lstStyle/>
-          <a:p>
-            <a:pPr>
-              <a:defRPr sz="1200" b="0" i="0" u="none" strike="noStrike">
-                <a:solidFill>
-                  <a:srgbClr val="000000"/>
-                </a:solidFill>
-                <a:latin typeface="Arial"/>
-              </a:defRPr>
-            </a:pPr>
-            <a:endParaRPr lang="en-US"/>
-          </a:p>
-        </c:txPr>
-        <c:crossAx val="2094734554"/>
-        <c:crosses val="autoZero"/>
-        <c:crossBetween val="between"/>
-      </c:valAx>
-      <c:spPr>
-        <a:solidFill>
-          <a:srgbClr val="FFFFFF"/>
-        </a:solidFill>
-        <a:ln>
-          <a:noFill/>
-        </a:ln>
-        <a:effectLst/>
-      </c:spPr>
-    </c:plotArea>
     <c:plotVisOnly val="1"/>
     <c:dispBlanksAs val="span"/>
   </c:chart>
@@ -4933,14 +4934,14 @@
               <c:strCache>
                 <c:ptCount val="1"/>
                 <c:pt idx="0">
-                  <c:v>Insurance</c:v>
+                  <c:v>Banking</c:v>
                 </c:pt>
               </c:strCache>
             </c:strRef>
           </c:tx>
           <c:spPr>
             <a:solidFill>
-              <a:srgbClr val="046A38"/>
+              <a:srgbClr val="86BC25"/>
             </a:solidFill>
             <a:effectLst/>
           </c:spPr>
@@ -4976,22 +4977,22 @@
                 <c:ptCount val="6"/>
                 <c:lvl>
                   <c:pt idx="0">
-                    <c:v>Health care providers</c:v>
+                    <c:v>Fintech partners</c:v>
                   </c:pt>
                   <c:pt idx="1">
-                    <c:v>Automotive service providers</c:v>
+                    <c:v>Business &amp; commercial clients</c:v>
                   </c:pt>
                   <c:pt idx="2">
-                    <c:v>Brokers &amp; distribution partners</c:v>
+                    <c:v>Dealers &amp; indirect lending partners</c:v>
                   </c:pt>
                   <c:pt idx="3">
-                    <c:v>Third-party administrators (TPAs)</c:v>
+                    <c:v>Mortgage brokers</c:v>
                   </c:pt>
                   <c:pt idx="4">
-                    <c:v>Property claims service providers</c:v>
+                    <c:v>Merchants</c:v>
                   </c:pt>
                   <c:pt idx="5">
-                    <c:v>Legal representatives &amp; paralegals</c:v>
+                    <c:v>Appraisers</c:v>
                   </c:pt>
                 </c:lvl>
               </c:multiLvlStrCache>
@@ -5004,19 +5005,19 @@
                 <c:formatCode>General</c:formatCode>
                 <c:ptCount val="6"/>
                 <c:pt idx="0">
-                  <c:v>40</c:v>
+                  <c:v>28</c:v>
                 </c:pt>
                 <c:pt idx="1">
+                  <c:v>24</c:v>
+                </c:pt>
+                <c:pt idx="2">
+                  <c:v>20</c:v>
+                </c:pt>
+                <c:pt idx="3">
                   <c:v>16</c:v>
                 </c:pt>
-                <c:pt idx="2">
-                  <c:v>16</c:v>
-                </c:pt>
-                <c:pt idx="3">
-                  <c:v>12</c:v>
-                </c:pt>
                 <c:pt idx="4">
-                  <c:v>12</c:v>
+                  <c:v>7</c:v>
                 </c:pt>
                 <c:pt idx="5">
                   <c:v>4</c:v>
@@ -5178,14 +5179,14 @@
               <c:strCache>
                 <c:ptCount val="1"/>
                 <c:pt idx="0">
-                  <c:v>Strategy Expected to Most Reduce Third-Party Risk</c:v>
+                  <c:v>Insurance</c:v>
                 </c:pt>
               </c:strCache>
             </c:strRef>
           </c:tx>
           <c:spPr>
             <a:solidFill>
-              <a:srgbClr val="86BC25"/>
+              <a:srgbClr val="046A38"/>
             </a:solidFill>
             <a:effectLst/>
           </c:spPr>
@@ -5216,21 +5217,27 @@
           </c:dLbls>
           <c:cat>
             <c:multiLvlStrRef>
-              <c:f>Sheet1!$A$2:$A$5</c:f>
+              <c:f>Sheet1!$A$2:$A$7</c:f>
               <c:multiLvlStrCache>
-                <c:ptCount val="4"/>
+                <c:ptCount val="6"/>
                 <c:lvl>
                   <c:pt idx="0">
-                    <c:v>Increase info sharing &amp; intelligence</c:v>
+                    <c:v>Health care providers</c:v>
                   </c:pt>
                   <c:pt idx="1">
-                    <c:v>Enhance ongoing monitoring &amp; detection</c:v>
+                    <c:v>Automotive service providers</c:v>
                   </c:pt>
                   <c:pt idx="2">
-                    <c:v>Strengthen onboarding verification &amp; due diligence</c:v>
+                    <c:v>Brokers &amp; distribution partners</c:v>
                   </c:pt>
                   <c:pt idx="3">
-                    <c:v>Strengthen 3rd-party oversight &amp; accountability</c:v>
+                    <c:v>Third-party administrators (TPAs)</c:v>
+                  </c:pt>
+                  <c:pt idx="4">
+                    <c:v>Property claims service providers</c:v>
+                  </c:pt>
+                  <c:pt idx="5">
+                    <c:v>Legal representatives &amp; paralegals</c:v>
                   </c:pt>
                 </c:lvl>
               </c:multiLvlStrCache>
@@ -5238,21 +5245,27 @@
           </c:cat>
           <c:val>
             <c:numRef>
-              <c:f>Sheet1!$B$2:$B$5</c:f>
+              <c:f>Sheet1!$B$2:$B$7</c:f>
               <c:numCache>
                 <c:formatCode>General</c:formatCode>
-                <c:ptCount val="4"/>
+                <c:ptCount val="6"/>
                 <c:pt idx="0">
-                  <c:v>30</c:v>
+                  <c:v>40</c:v>
                 </c:pt>
                 <c:pt idx="1">
-                  <c:v>27</c:v>
+                  <c:v>16</c:v>
                 </c:pt>
                 <c:pt idx="2">
-                  <c:v>23</c:v>
+                  <c:v>16</c:v>
                 </c:pt>
                 <c:pt idx="3">
-                  <c:v>19</c:v>
+                  <c:v>12</c:v>
+                </c:pt>
+                <c:pt idx="4">
+                  <c:v>12</c:v>
+                </c:pt>
+                <c:pt idx="5">
+                  <c:v>4</c:v>
                 </c:pt>
               </c:numCache>
             </c:numRef>
@@ -5411,6 +5424,239 @@
               <c:strCache>
                 <c:ptCount val="1"/>
                 <c:pt idx="0">
+                  <c:v>Strategy Expected to Most Reduce Third-Party Risk</c:v>
+                </c:pt>
+              </c:strCache>
+            </c:strRef>
+          </c:tx>
+          <c:spPr>
+            <a:solidFill>
+              <a:srgbClr val="86BC25"/>
+            </a:solidFill>
+            <a:effectLst/>
+          </c:spPr>
+          <c:invertIfNegative val="0"/>
+          <c:dLbls>
+            <c:numFmt formatCode="0&quot;%&quot;" sourceLinked="0"/>
+            <c:txPr>
+              <a:bodyPr/>
+              <a:lstStyle/>
+              <a:p>
+                <a:pPr>
+                  <a:defRPr b="0" i="0" strike="noStrike" sz="1000" u="none">
+                    <a:solidFill>
+                      <a:srgbClr val="000000"/>
+                    </a:solidFill>
+                    <a:latin typeface="Arial"/>
+                  </a:defRPr>
+                </a:pPr>
+              </a:p>
+            </c:txPr>
+            <c:showLegendKey val="0"/>
+            <c:showVal val="1"/>
+            <c:showCatName val="0"/>
+            <c:showSerName val="0"/>
+            <c:showPercent val="0"/>
+            <c:showBubbleSize val="0"/>
+            <c:showLeaderLines val="0"/>
+          </c:dLbls>
+          <c:cat>
+            <c:multiLvlStrRef>
+              <c:f>Sheet1!$A$2:$A$5</c:f>
+              <c:multiLvlStrCache>
+                <c:ptCount val="4"/>
+                <c:lvl>
+                  <c:pt idx="0">
+                    <c:v>Increase info sharing &amp; intelligence</c:v>
+                  </c:pt>
+                  <c:pt idx="1">
+                    <c:v>Enhance ongoing monitoring &amp; detection</c:v>
+                  </c:pt>
+                  <c:pt idx="2">
+                    <c:v>Strengthen onboarding verification &amp; due diligence</c:v>
+                  </c:pt>
+                  <c:pt idx="3">
+                    <c:v>Strengthen 3rd-party oversight &amp; accountability</c:v>
+                  </c:pt>
+                </c:lvl>
+              </c:multiLvlStrCache>
+            </c:multiLvlStrRef>
+          </c:cat>
+          <c:val>
+            <c:numRef>
+              <c:f>Sheet1!$B$2:$B$5</c:f>
+              <c:numCache>
+                <c:formatCode>General</c:formatCode>
+                <c:ptCount val="4"/>
+                <c:pt idx="0">
+                  <c:v>30</c:v>
+                </c:pt>
+                <c:pt idx="1">
+                  <c:v>27</c:v>
+                </c:pt>
+                <c:pt idx="2">
+                  <c:v>23</c:v>
+                </c:pt>
+                <c:pt idx="3">
+                  <c:v>19</c:v>
+                </c:pt>
+              </c:numCache>
+            </c:numRef>
+          </c:val>
+        </c:ser>
+        <c:dLbls>
+          <c:numFmt formatCode="0&quot;%&quot;" sourceLinked="0"/>
+          <c:txPr>
+            <a:bodyPr/>
+            <a:lstStyle/>
+            <a:p>
+              <a:pPr>
+                <a:defRPr b="0" i="0" strike="noStrike" sz="1000" u="none">
+                  <a:solidFill>
+                    <a:srgbClr val="000000"/>
+                  </a:solidFill>
+                  <a:latin typeface="Arial"/>
+                </a:defRPr>
+              </a:pPr>
+            </a:p>
+          </c:txPr>
+          <c:showLegendKey val="0"/>
+          <c:showVal val="1"/>
+          <c:showCatName val="0"/>
+          <c:showSerName val="0"/>
+          <c:showPercent val="0"/>
+          <c:showBubbleSize val="0"/>
+          <c:showLeaderLines val="0"/>
+        </c:dLbls>
+        <c:gapWidth val="40"/>
+        <c:overlap val="0"/>
+        <c:axId val="2094734554"/>
+        <c:axId val="2094734552"/>
+        <c:axId val="2094734556"/>
+      </c:barChart>
+      <c:catAx>
+        <c:axId val="2094734554"/>
+        <c:scaling>
+          <c:orientation val="minMax"/>
+        </c:scaling>
+        <c:delete val="0"/>
+        <c:axPos val="l"/>
+        <c:numFmt formatCode="General" sourceLinked="1"/>
+        <c:majorTickMark val="out"/>
+        <c:minorTickMark val="none"/>
+        <c:tickLblPos val="nextTo"/>
+        <c:spPr>
+          <a:ln w="12700" cap="flat">
+            <a:noFill/>
+            <a:prstDash val="solid"/>
+            <a:round/>
+          </a:ln>
+        </c:spPr>
+        <c:txPr>
+          <a:bodyPr/>
+          <a:lstStyle/>
+          <a:p>
+            <a:pPr>
+              <a:defRPr sz="1000" b="0" i="0" u="none" strike="noStrike">
+                <a:solidFill>
+                  <a:srgbClr val="53565A"/>
+                </a:solidFill>
+                <a:latin typeface="Arial"/>
+              </a:defRPr>
+            </a:pPr>
+            <a:endParaRPr lang="en-US"/>
+          </a:p>
+        </c:txPr>
+        <c:crossAx val="2094734552"/>
+        <c:crosses val="autoZero"/>
+        <c:auto val="1"/>
+        <c:lblAlgn val="ctr"/>
+        <c:noMultiLvlLbl val="1"/>
+      </c:catAx>
+      <c:valAx>
+        <c:axId val="2094734552"/>
+        <c:scaling>
+          <c:orientation val="minMax"/>
+        </c:scaling>
+        <c:delete val="1"/>
+        <c:axPos val="b"/>
+        <c:numFmt formatCode="General" sourceLinked="0"/>
+        <c:majorTickMark val="out"/>
+        <c:minorTickMark val="none"/>
+        <c:tickLblPos val="low"/>
+        <c:spPr>
+          <a:ln w="12700" cap="flat">
+            <a:noFill/>
+            <a:prstDash val="solid"/>
+            <a:round/>
+          </a:ln>
+        </c:spPr>
+        <c:txPr>
+          <a:bodyPr/>
+          <a:lstStyle/>
+          <a:p>
+            <a:pPr>
+              <a:defRPr sz="1200" b="0" i="0" u="none" strike="noStrike">
+                <a:solidFill>
+                  <a:srgbClr val="000000"/>
+                </a:solidFill>
+                <a:latin typeface="Arial"/>
+              </a:defRPr>
+            </a:pPr>
+            <a:endParaRPr lang="en-US"/>
+          </a:p>
+        </c:txPr>
+        <c:crossAx val="2094734554"/>
+        <c:crosses val="autoZero"/>
+        <c:crossBetween val="between"/>
+      </c:valAx>
+      <c:spPr>
+        <a:solidFill>
+          <a:srgbClr val="FFFFFF"/>
+        </a:solidFill>
+        <a:ln>
+          <a:noFill/>
+        </a:ln>
+        <a:effectLst/>
+      </c:spPr>
+    </c:plotArea>
+    <c:plotVisOnly val="1"/>
+    <c:dispBlanksAs val="span"/>
+  </c:chart>
+  <c:spPr>
+    <a:noFill/>
+    <a:ln>
+      <a:noFill/>
+    </a:ln>
+    <a:effectLst/>
+  </c:spPr>
+  <c:externalData r:id="rId1">
+    <c:autoUpdate val="0"/>
+  </c:externalData>
+</c:chartSpace>
+</file>
+
+<file path=ppt/charts/chart23.xml><?xml version="1.0" encoding="utf-8"?>
+<c:chartSpace xmlns:c="http://schemas.openxmlformats.org/drawingml/2006/chart" xmlns:a="http://schemas.openxmlformats.org/drawingml/2006/main" xmlns:r="http://schemas.openxmlformats.org/officeDocument/2006/relationships">
+  <c:date1904 val="0"/>
+  <c:roundedCorners val="1"/>
+  <c:chart>
+    <c:autoTitleDeleted val="1"/>
+    <c:plotArea>
+      <c:layout/>
+      <c:barChart>
+        <c:barDir val="bar"/>
+        <c:grouping val="clustered"/>
+        <c:varyColors val="0"/>
+        <c:ser>
+          <c:idx val="0"/>
+          <c:order val="0"/>
+          <c:tx>
+            <c:strRef>
+              <c:f>Sheet1!$B$1</c:f>
+              <c:strCache>
+                <c:ptCount val="1"/>
+                <c:pt idx="0">
                   <c:v>Banking (n=75)</c:v>
                 </c:pt>
               </c:strCache>
@@ -5726,7 +5972,7 @@
 </c:chartSpace>
 </file>
 
-<file path=ppt/charts/chart23.xml><?xml version="1.0" encoding="utf-8"?>
+<file path=ppt/charts/chart24.xml><?xml version="1.0" encoding="utf-8"?>
 <c:chartSpace xmlns:c="http://schemas.openxmlformats.org/drawingml/2006/chart" xmlns:a="http://schemas.openxmlformats.org/drawingml/2006/main" xmlns:r="http://schemas.openxmlformats.org/officeDocument/2006/relationships">
   <c:date1904 val="0"/>
   <c:roundedCorners val="1"/>
@@ -6455,7 +6701,7 @@
 </c:chartSpace>
 </file>
 
-<file path=ppt/charts/chart24.xml><?xml version="1.0" encoding="utf-8"?>
+<file path=ppt/charts/chart25.xml><?xml version="1.0" encoding="utf-8"?>
 <c:chartSpace xmlns:c="http://schemas.openxmlformats.org/drawingml/2006/chart" xmlns:a="http://schemas.openxmlformats.org/drawingml/2006/main" xmlns:r="http://schemas.openxmlformats.org/officeDocument/2006/relationships">
   <c:date1904 val="0"/>
   <c:roundedCorners val="1"/>
@@ -6803,7 +7049,7 @@
 </c:chartSpace>
 </file>
 
-<file path=ppt/charts/chart25.xml><?xml version="1.0" encoding="utf-8"?>
+<file path=ppt/charts/chart26.xml><?xml version="1.0" encoding="utf-8"?>
 <c:chartSpace xmlns:c="http://schemas.openxmlformats.org/drawingml/2006/chart" xmlns:a="http://schemas.openxmlformats.org/drawingml/2006/main" xmlns:r="http://schemas.openxmlformats.org/officeDocument/2006/relationships">
   <c:date1904 val="0"/>
   <c:roundedCorners val="1"/>
@@ -7214,7 +7460,7 @@
 </c:chartSpace>
 </file>
 
-<file path=ppt/charts/chart26.xml><?xml version="1.0" encoding="utf-8"?>
+<file path=ppt/charts/chart27.xml><?xml version="1.0" encoding="utf-8"?>
 <c:chartSpace xmlns:c="http://schemas.openxmlformats.org/drawingml/2006/chart" xmlns:a="http://schemas.openxmlformats.org/drawingml/2006/main" xmlns:r="http://schemas.openxmlformats.org/officeDocument/2006/relationships">
   <c:date1904 val="0"/>
   <c:roundedCorners val="1"/>
@@ -8003,7 +8249,7 @@
 </c:chartSpace>
 </file>
 
-<file path=ppt/charts/chart27.xml><?xml version="1.0" encoding="utf-8"?>
+<file path=ppt/charts/chart28.xml><?xml version="1.0" encoding="utf-8"?>
 <c:chartSpace xmlns:c="http://schemas.openxmlformats.org/drawingml/2006/chart" xmlns:a="http://schemas.openxmlformats.org/drawingml/2006/main" xmlns:r="http://schemas.openxmlformats.org/officeDocument/2006/relationships">
   <c:date1904 val="0"/>
   <c:roundedCorners val="1"/>
@@ -8666,7 +8912,7 @@
 </c:chartSpace>
 </file>
 
-<file path=ppt/charts/chart28.xml><?xml version="1.0" encoding="utf-8"?>
+<file path=ppt/charts/chart29.xml><?xml version="1.0" encoding="utf-8"?>
 <c:chartSpace xmlns:c="http://schemas.openxmlformats.org/drawingml/2006/chart" xmlns:a="http://schemas.openxmlformats.org/drawingml/2006/main" xmlns:r="http://schemas.openxmlformats.org/officeDocument/2006/relationships">
   <c:date1904 val="0"/>
   <c:roundedCorners val="1"/>
@@ -9026,366 +9272,6 @@
 </c:chartSpace>
 </file>
 
-<file path=ppt/charts/chart29.xml><?xml version="1.0" encoding="utf-8"?>
-<c:chartSpace xmlns:c="http://schemas.openxmlformats.org/drawingml/2006/chart" xmlns:a="http://schemas.openxmlformats.org/drawingml/2006/main" xmlns:r="http://schemas.openxmlformats.org/officeDocument/2006/relationships">
-  <c:date1904 val="0"/>
-  <c:roundedCorners val="1"/>
-  <c:chart>
-    <c:autoTitleDeleted val="1"/>
-    <c:plotArea>
-      <c:layout/>
-      <c:barChart>
-        <c:barDir val="bar"/>
-        <c:grouping val="clustered"/>
-        <c:varyColors val="0"/>
-        <c:ser>
-          <c:idx val="0"/>
-          <c:order val="0"/>
-          <c:tx>
-            <c:strRef>
-              <c:f>Sheet1!$B$1</c:f>
-              <c:strCache>
-                <c:ptCount val="1"/>
-                <c:pt idx="0">
-                  <c:v>Today</c:v>
-                </c:pt>
-              </c:strCache>
-            </c:strRef>
-          </c:tx>
-          <c:spPr>
-            <a:solidFill>
-              <a:srgbClr val="86BC25"/>
-            </a:solidFill>
-            <a:effectLst/>
-          </c:spPr>
-          <c:invertIfNegative val="0"/>
-          <c:dLbls>
-            <c:numFmt formatCode="0&quot;%&quot;" sourceLinked="0"/>
-            <c:txPr>
-              <a:bodyPr/>
-              <a:lstStyle/>
-              <a:p>
-                <a:pPr>
-                  <a:defRPr b="0" i="0" strike="noStrike" sz="800" u="none">
-                    <a:solidFill>
-                      <a:srgbClr val="000000"/>
-                    </a:solidFill>
-                    <a:latin typeface="Arial"/>
-                  </a:defRPr>
-                </a:pPr>
-              </a:p>
-            </c:txPr>
-            <c:showLegendKey val="0"/>
-            <c:showVal val="1"/>
-            <c:showCatName val="0"/>
-            <c:showSerName val="0"/>
-            <c:showPercent val="0"/>
-            <c:showBubbleSize val="0"/>
-            <c:showLeaderLines val="0"/>
-          </c:dLbls>
-          <c:cat>
-            <c:multiLvlStrRef>
-              <c:f>Sheet1!$A$2:$A$7</c:f>
-              <c:multiLvlStrCache>
-                <c:ptCount val="6"/>
-                <c:lvl>
-                  <c:pt idx="0">
-                    <c:v>AI-enabled tools</c:v>
-                  </c:pt>
-                  <c:pt idx="1">
-                    <c:v>Automating workflows</c:v>
-                  </c:pt>
-                  <c:pt idx="2">
-                    <c:v>Redesigning processes</c:v>
-                  </c:pt>
-                  <c:pt idx="3">
-                    <c:v>Outsourcing</c:v>
-                  </c:pt>
-                  <c:pt idx="4">
-                    <c:v>Hiring / workforce</c:v>
-                  </c:pt>
-                  <c:pt idx="5">
-                    <c:v>Combination</c:v>
-                  </c:pt>
-                </c:lvl>
-              </c:multiLvlStrCache>
-            </c:multiLvlStrRef>
-          </c:cat>
-          <c:val>
-            <c:numRef>
-              <c:f>Sheet1!$B$2:$B$7</c:f>
-              <c:numCache>
-                <c:formatCode>General</c:formatCode>
-                <c:ptCount val="6"/>
-                <c:pt idx="0">
-                  <c:v>47</c:v>
-                </c:pt>
-                <c:pt idx="1">
-                  <c:v>33</c:v>
-                </c:pt>
-                <c:pt idx="2">
-                  <c:v>7</c:v>
-                </c:pt>
-                <c:pt idx="3">
-                  <c:v>7</c:v>
-                </c:pt>
-                <c:pt idx="4">
-                  <c:v>7</c:v>
-                </c:pt>
-                <c:pt idx="5">
-                  <c:v>0</c:v>
-                </c:pt>
-              </c:numCache>
-            </c:numRef>
-          </c:val>
-        </c:ser>
-        <c:ser>
-          <c:idx val="1"/>
-          <c:order val="1"/>
-          <c:tx>
-            <c:strRef>
-              <c:f>Sheet1!$C$1</c:f>
-              <c:strCache>
-                <c:ptCount val="1"/>
-                <c:pt idx="0">
-                  <c:v>3-Year Focus</c:v>
-                </c:pt>
-              </c:strCache>
-            </c:strRef>
-          </c:tx>
-          <c:spPr>
-            <a:solidFill>
-              <a:srgbClr val="046A38"/>
-            </a:solidFill>
-            <a:effectLst/>
-          </c:spPr>
-          <c:invertIfNegative val="0"/>
-          <c:dLbls>
-            <c:numFmt formatCode="0&quot;%&quot;" sourceLinked="0"/>
-            <c:txPr>
-              <a:bodyPr/>
-              <a:lstStyle/>
-              <a:p>
-                <a:pPr>
-                  <a:defRPr b="0" i="0" strike="noStrike" sz="800" u="none">
-                    <a:solidFill>
-                      <a:srgbClr val="000000"/>
-                    </a:solidFill>
-                    <a:latin typeface="Arial"/>
-                  </a:defRPr>
-                </a:pPr>
-              </a:p>
-            </c:txPr>
-            <c:showLegendKey val="0"/>
-            <c:showVal val="1"/>
-            <c:showCatName val="0"/>
-            <c:showSerName val="0"/>
-            <c:showPercent val="0"/>
-            <c:showBubbleSize val="0"/>
-            <c:showLeaderLines val="0"/>
-          </c:dLbls>
-          <c:cat>
-            <c:multiLvlStrRef>
-              <c:f>Sheet1!$A$2:$A$7</c:f>
-              <c:multiLvlStrCache>
-                <c:ptCount val="6"/>
-                <c:lvl>
-                  <c:pt idx="0">
-                    <c:v>AI-enabled tools</c:v>
-                  </c:pt>
-                  <c:pt idx="1">
-                    <c:v>Automating workflows</c:v>
-                  </c:pt>
-                  <c:pt idx="2">
-                    <c:v>Redesigning processes</c:v>
-                  </c:pt>
-                  <c:pt idx="3">
-                    <c:v>Outsourcing</c:v>
-                  </c:pt>
-                  <c:pt idx="4">
-                    <c:v>Hiring / workforce</c:v>
-                  </c:pt>
-                  <c:pt idx="5">
-                    <c:v>Combination</c:v>
-                  </c:pt>
-                </c:lvl>
-              </c:multiLvlStrCache>
-            </c:multiLvlStrRef>
-          </c:cat>
-          <c:val>
-            <c:numRef>
-              <c:f>Sheet1!$C$2:$C$7</c:f>
-              <c:numCache>
-                <c:formatCode>General</c:formatCode>
-                <c:ptCount val="6"/>
-                <c:pt idx="0">
-                  <c:v>40</c:v>
-                </c:pt>
-                <c:pt idx="1">
-                  <c:v>27</c:v>
-                </c:pt>
-                <c:pt idx="2">
-                  <c:v>27</c:v>
-                </c:pt>
-                <c:pt idx="3">
-                  <c:v>7</c:v>
-                </c:pt>
-                <c:pt idx="4">
-                  <c:v>0</c:v>
-                </c:pt>
-                <c:pt idx="5">
-                  <c:v>0</c:v>
-                </c:pt>
-              </c:numCache>
-            </c:numRef>
-          </c:val>
-        </c:ser>
-        <c:dLbls>
-          <c:numFmt formatCode="0&quot;%&quot;" sourceLinked="0"/>
-          <c:txPr>
-            <a:bodyPr/>
-            <a:lstStyle/>
-            <a:p>
-              <a:pPr>
-                <a:defRPr b="0" i="0" strike="noStrike" sz="800" u="none">
-                  <a:solidFill>
-                    <a:srgbClr val="000000"/>
-                  </a:solidFill>
-                  <a:latin typeface="Arial"/>
-                </a:defRPr>
-              </a:pPr>
-            </a:p>
-          </c:txPr>
-          <c:showLegendKey val="0"/>
-          <c:showVal val="1"/>
-          <c:showCatName val="0"/>
-          <c:showSerName val="0"/>
-          <c:showPercent val="0"/>
-          <c:showBubbleSize val="0"/>
-          <c:showLeaderLines val="0"/>
-        </c:dLbls>
-        <c:gapWidth val="40"/>
-        <c:overlap val="0"/>
-        <c:axId val="2094734554"/>
-        <c:axId val="2094734552"/>
-        <c:axId val="2094734556"/>
-      </c:barChart>
-      <c:catAx>
-        <c:axId val="2094734554"/>
-        <c:scaling>
-          <c:orientation val="minMax"/>
-        </c:scaling>
-        <c:delete val="0"/>
-        <c:axPos val="l"/>
-        <c:numFmt formatCode="General" sourceLinked="1"/>
-        <c:majorTickMark val="out"/>
-        <c:minorTickMark val="none"/>
-        <c:tickLblPos val="nextTo"/>
-        <c:spPr>
-          <a:ln w="12700" cap="flat">
-            <a:noFill/>
-            <a:prstDash val="solid"/>
-            <a:round/>
-          </a:ln>
-        </c:spPr>
-        <c:txPr>
-          <a:bodyPr/>
-          <a:lstStyle/>
-          <a:p>
-            <a:pPr>
-              <a:defRPr sz="1000" b="0" i="0" u="none" strike="noStrike">
-                <a:solidFill>
-                  <a:srgbClr val="53565A"/>
-                </a:solidFill>
-                <a:latin typeface="Arial"/>
-              </a:defRPr>
-            </a:pPr>
-            <a:endParaRPr lang="en-US"/>
-          </a:p>
-        </c:txPr>
-        <c:crossAx val="2094734552"/>
-        <c:crosses val="autoZero"/>
-        <c:auto val="1"/>
-        <c:lblAlgn val="ctr"/>
-        <c:noMultiLvlLbl val="1"/>
-      </c:catAx>
-      <c:valAx>
-        <c:axId val="2094734552"/>
-        <c:scaling>
-          <c:orientation val="minMax"/>
-        </c:scaling>
-        <c:delete val="1"/>
-        <c:axPos val="b"/>
-        <c:numFmt formatCode="General" sourceLinked="0"/>
-        <c:majorTickMark val="out"/>
-        <c:minorTickMark val="none"/>
-        <c:tickLblPos val="low"/>
-        <c:spPr>
-          <a:ln w="12700" cap="flat">
-            <a:noFill/>
-            <a:prstDash val="solid"/>
-            <a:round/>
-          </a:ln>
-        </c:spPr>
-        <c:txPr>
-          <a:bodyPr/>
-          <a:lstStyle/>
-          <a:p>
-            <a:pPr>
-              <a:defRPr sz="1200" b="0" i="0" u="none" strike="noStrike">
-                <a:solidFill>
-                  <a:srgbClr val="000000"/>
-                </a:solidFill>
-                <a:latin typeface="Arial"/>
-              </a:defRPr>
-            </a:pPr>
-            <a:endParaRPr lang="en-US"/>
-          </a:p>
-        </c:txPr>
-        <c:crossAx val="2094734554"/>
-        <c:crosses val="autoZero"/>
-        <c:crossBetween val="between"/>
-      </c:valAx>
-      <c:spPr>
-        <a:solidFill>
-          <a:srgbClr val="FFFFFF"/>
-        </a:solidFill>
-        <a:ln>
-          <a:noFill/>
-        </a:ln>
-        <a:effectLst/>
-      </c:spPr>
-    </c:plotArea>
-    <c:legend>
-      <c:legendPos val="b"/>
-      <c:overlay val="0"/>
-      <c:txPr>
-        <a:bodyPr/>
-        <a:lstStyle/>
-        <a:p>
-          <a:pPr>
-            <a:defRPr sz="900">      </a:defRPr>
-          </a:pPr>
-          <a:endParaRPr lang="en-US"/>
-        </a:p>
-      </c:txPr>
-    </c:legend>
-    <c:plotVisOnly val="1"/>
-    <c:dispBlanksAs val="span"/>
-  </c:chart>
-  <c:spPr>
-    <a:noFill/>
-    <a:ln>
-      <a:noFill/>
-    </a:ln>
-    <a:effectLst/>
-  </c:spPr>
-  <c:externalData r:id="rId1">
-    <c:autoUpdate val="0"/>
-  </c:externalData>
-</c:chartSpace>
-</file>
-
 <file path=ppt/charts/chart3.xml><?xml version="1.0" encoding="utf-8"?>
 <c:chartSpace xmlns:c="http://schemas.openxmlformats.org/drawingml/2006/chart" xmlns:a="http://schemas.openxmlformats.org/drawingml/2006/main" xmlns:r="http://schemas.openxmlformats.org/officeDocument/2006/relationships">
   <c:date1904 val="0"/>
@@ -9699,19 +9585,19 @@
                 <c:formatCode>General</c:formatCode>
                 <c:ptCount val="6"/>
                 <c:pt idx="0">
-                  <c:v>10</c:v>
+                  <c:v>47</c:v>
                 </c:pt>
                 <c:pt idx="1">
-                  <c:v>20</c:v>
+                  <c:v>33</c:v>
                 </c:pt>
                 <c:pt idx="2">
-                  <c:v>20</c:v>
+                  <c:v>7</c:v>
                 </c:pt>
                 <c:pt idx="3">
-                  <c:v>30</c:v>
+                  <c:v>7</c:v>
                 </c:pt>
                 <c:pt idx="4">
-                  <c:v>20</c:v>
+                  <c:v>7</c:v>
                 </c:pt>
                 <c:pt idx="5">
                   <c:v>0</c:v>
@@ -9803,16 +9689,16 @@
                   <c:v>40</c:v>
                 </c:pt>
                 <c:pt idx="1">
-                  <c:v>30</c:v>
+                  <c:v>27</c:v>
                 </c:pt>
                 <c:pt idx="2">
-                  <c:v>20</c:v>
+                  <c:v>27</c:v>
                 </c:pt>
                 <c:pt idx="3">
+                  <c:v>7</c:v>
+                </c:pt>
+                <c:pt idx="4">
                   <c:v>0</c:v>
-                </c:pt>
-                <c:pt idx="4">
-                  <c:v>10</c:v>
                 </c:pt>
                 <c:pt idx="5">
                   <c:v>0</c:v>
@@ -9977,6 +9863,366 @@
       <c:layout/>
       <c:barChart>
         <c:barDir val="bar"/>
+        <c:grouping val="clustered"/>
+        <c:varyColors val="0"/>
+        <c:ser>
+          <c:idx val="0"/>
+          <c:order val="0"/>
+          <c:tx>
+            <c:strRef>
+              <c:f>Sheet1!$B$1</c:f>
+              <c:strCache>
+                <c:ptCount val="1"/>
+                <c:pt idx="0">
+                  <c:v>Today</c:v>
+                </c:pt>
+              </c:strCache>
+            </c:strRef>
+          </c:tx>
+          <c:spPr>
+            <a:solidFill>
+              <a:srgbClr val="86BC25"/>
+            </a:solidFill>
+            <a:effectLst/>
+          </c:spPr>
+          <c:invertIfNegative val="0"/>
+          <c:dLbls>
+            <c:numFmt formatCode="0&quot;%&quot;" sourceLinked="0"/>
+            <c:txPr>
+              <a:bodyPr/>
+              <a:lstStyle/>
+              <a:p>
+                <a:pPr>
+                  <a:defRPr b="0" i="0" strike="noStrike" sz="800" u="none">
+                    <a:solidFill>
+                      <a:srgbClr val="000000"/>
+                    </a:solidFill>
+                    <a:latin typeface="Arial"/>
+                  </a:defRPr>
+                </a:pPr>
+              </a:p>
+            </c:txPr>
+            <c:showLegendKey val="0"/>
+            <c:showVal val="1"/>
+            <c:showCatName val="0"/>
+            <c:showSerName val="0"/>
+            <c:showPercent val="0"/>
+            <c:showBubbleSize val="0"/>
+            <c:showLeaderLines val="0"/>
+          </c:dLbls>
+          <c:cat>
+            <c:multiLvlStrRef>
+              <c:f>Sheet1!$A$2:$A$7</c:f>
+              <c:multiLvlStrCache>
+                <c:ptCount val="6"/>
+                <c:lvl>
+                  <c:pt idx="0">
+                    <c:v>AI-enabled tools</c:v>
+                  </c:pt>
+                  <c:pt idx="1">
+                    <c:v>Automating workflows</c:v>
+                  </c:pt>
+                  <c:pt idx="2">
+                    <c:v>Redesigning processes</c:v>
+                  </c:pt>
+                  <c:pt idx="3">
+                    <c:v>Outsourcing</c:v>
+                  </c:pt>
+                  <c:pt idx="4">
+                    <c:v>Hiring / workforce</c:v>
+                  </c:pt>
+                  <c:pt idx="5">
+                    <c:v>Combination</c:v>
+                  </c:pt>
+                </c:lvl>
+              </c:multiLvlStrCache>
+            </c:multiLvlStrRef>
+          </c:cat>
+          <c:val>
+            <c:numRef>
+              <c:f>Sheet1!$B$2:$B$7</c:f>
+              <c:numCache>
+                <c:formatCode>General</c:formatCode>
+                <c:ptCount val="6"/>
+                <c:pt idx="0">
+                  <c:v>10</c:v>
+                </c:pt>
+                <c:pt idx="1">
+                  <c:v>20</c:v>
+                </c:pt>
+                <c:pt idx="2">
+                  <c:v>20</c:v>
+                </c:pt>
+                <c:pt idx="3">
+                  <c:v>30</c:v>
+                </c:pt>
+                <c:pt idx="4">
+                  <c:v>20</c:v>
+                </c:pt>
+                <c:pt idx="5">
+                  <c:v>0</c:v>
+                </c:pt>
+              </c:numCache>
+            </c:numRef>
+          </c:val>
+        </c:ser>
+        <c:ser>
+          <c:idx val="1"/>
+          <c:order val="1"/>
+          <c:tx>
+            <c:strRef>
+              <c:f>Sheet1!$C$1</c:f>
+              <c:strCache>
+                <c:ptCount val="1"/>
+                <c:pt idx="0">
+                  <c:v>3-Year Focus</c:v>
+                </c:pt>
+              </c:strCache>
+            </c:strRef>
+          </c:tx>
+          <c:spPr>
+            <a:solidFill>
+              <a:srgbClr val="046A38"/>
+            </a:solidFill>
+            <a:effectLst/>
+          </c:spPr>
+          <c:invertIfNegative val="0"/>
+          <c:dLbls>
+            <c:numFmt formatCode="0&quot;%&quot;" sourceLinked="0"/>
+            <c:txPr>
+              <a:bodyPr/>
+              <a:lstStyle/>
+              <a:p>
+                <a:pPr>
+                  <a:defRPr b="0" i="0" strike="noStrike" sz="800" u="none">
+                    <a:solidFill>
+                      <a:srgbClr val="000000"/>
+                    </a:solidFill>
+                    <a:latin typeface="Arial"/>
+                  </a:defRPr>
+                </a:pPr>
+              </a:p>
+            </c:txPr>
+            <c:showLegendKey val="0"/>
+            <c:showVal val="1"/>
+            <c:showCatName val="0"/>
+            <c:showSerName val="0"/>
+            <c:showPercent val="0"/>
+            <c:showBubbleSize val="0"/>
+            <c:showLeaderLines val="0"/>
+          </c:dLbls>
+          <c:cat>
+            <c:multiLvlStrRef>
+              <c:f>Sheet1!$A$2:$A$7</c:f>
+              <c:multiLvlStrCache>
+                <c:ptCount val="6"/>
+                <c:lvl>
+                  <c:pt idx="0">
+                    <c:v>AI-enabled tools</c:v>
+                  </c:pt>
+                  <c:pt idx="1">
+                    <c:v>Automating workflows</c:v>
+                  </c:pt>
+                  <c:pt idx="2">
+                    <c:v>Redesigning processes</c:v>
+                  </c:pt>
+                  <c:pt idx="3">
+                    <c:v>Outsourcing</c:v>
+                  </c:pt>
+                  <c:pt idx="4">
+                    <c:v>Hiring / workforce</c:v>
+                  </c:pt>
+                  <c:pt idx="5">
+                    <c:v>Combination</c:v>
+                  </c:pt>
+                </c:lvl>
+              </c:multiLvlStrCache>
+            </c:multiLvlStrRef>
+          </c:cat>
+          <c:val>
+            <c:numRef>
+              <c:f>Sheet1!$C$2:$C$7</c:f>
+              <c:numCache>
+                <c:formatCode>General</c:formatCode>
+                <c:ptCount val="6"/>
+                <c:pt idx="0">
+                  <c:v>40</c:v>
+                </c:pt>
+                <c:pt idx="1">
+                  <c:v>30</c:v>
+                </c:pt>
+                <c:pt idx="2">
+                  <c:v>20</c:v>
+                </c:pt>
+                <c:pt idx="3">
+                  <c:v>0</c:v>
+                </c:pt>
+                <c:pt idx="4">
+                  <c:v>10</c:v>
+                </c:pt>
+                <c:pt idx="5">
+                  <c:v>0</c:v>
+                </c:pt>
+              </c:numCache>
+            </c:numRef>
+          </c:val>
+        </c:ser>
+        <c:dLbls>
+          <c:numFmt formatCode="0&quot;%&quot;" sourceLinked="0"/>
+          <c:txPr>
+            <a:bodyPr/>
+            <a:lstStyle/>
+            <a:p>
+              <a:pPr>
+                <a:defRPr b="0" i="0" strike="noStrike" sz="800" u="none">
+                  <a:solidFill>
+                    <a:srgbClr val="000000"/>
+                  </a:solidFill>
+                  <a:latin typeface="Arial"/>
+                </a:defRPr>
+              </a:pPr>
+            </a:p>
+          </c:txPr>
+          <c:showLegendKey val="0"/>
+          <c:showVal val="1"/>
+          <c:showCatName val="0"/>
+          <c:showSerName val="0"/>
+          <c:showPercent val="0"/>
+          <c:showBubbleSize val="0"/>
+          <c:showLeaderLines val="0"/>
+        </c:dLbls>
+        <c:gapWidth val="40"/>
+        <c:overlap val="0"/>
+        <c:axId val="2094734554"/>
+        <c:axId val="2094734552"/>
+        <c:axId val="2094734556"/>
+      </c:barChart>
+      <c:catAx>
+        <c:axId val="2094734554"/>
+        <c:scaling>
+          <c:orientation val="minMax"/>
+        </c:scaling>
+        <c:delete val="0"/>
+        <c:axPos val="l"/>
+        <c:numFmt formatCode="General" sourceLinked="1"/>
+        <c:majorTickMark val="out"/>
+        <c:minorTickMark val="none"/>
+        <c:tickLblPos val="nextTo"/>
+        <c:spPr>
+          <a:ln w="12700" cap="flat">
+            <a:noFill/>
+            <a:prstDash val="solid"/>
+            <a:round/>
+          </a:ln>
+        </c:spPr>
+        <c:txPr>
+          <a:bodyPr/>
+          <a:lstStyle/>
+          <a:p>
+            <a:pPr>
+              <a:defRPr sz="1000" b="0" i="0" u="none" strike="noStrike">
+                <a:solidFill>
+                  <a:srgbClr val="53565A"/>
+                </a:solidFill>
+                <a:latin typeface="Arial"/>
+              </a:defRPr>
+            </a:pPr>
+            <a:endParaRPr lang="en-US"/>
+          </a:p>
+        </c:txPr>
+        <c:crossAx val="2094734552"/>
+        <c:crosses val="autoZero"/>
+        <c:auto val="1"/>
+        <c:lblAlgn val="ctr"/>
+        <c:noMultiLvlLbl val="1"/>
+      </c:catAx>
+      <c:valAx>
+        <c:axId val="2094734552"/>
+        <c:scaling>
+          <c:orientation val="minMax"/>
+        </c:scaling>
+        <c:delete val="1"/>
+        <c:axPos val="b"/>
+        <c:numFmt formatCode="General" sourceLinked="0"/>
+        <c:majorTickMark val="out"/>
+        <c:minorTickMark val="none"/>
+        <c:tickLblPos val="low"/>
+        <c:spPr>
+          <a:ln w="12700" cap="flat">
+            <a:noFill/>
+            <a:prstDash val="solid"/>
+            <a:round/>
+          </a:ln>
+        </c:spPr>
+        <c:txPr>
+          <a:bodyPr/>
+          <a:lstStyle/>
+          <a:p>
+            <a:pPr>
+              <a:defRPr sz="1200" b="0" i="0" u="none" strike="noStrike">
+                <a:solidFill>
+                  <a:srgbClr val="000000"/>
+                </a:solidFill>
+                <a:latin typeface="Arial"/>
+              </a:defRPr>
+            </a:pPr>
+            <a:endParaRPr lang="en-US"/>
+          </a:p>
+        </c:txPr>
+        <c:crossAx val="2094734554"/>
+        <c:crosses val="autoZero"/>
+        <c:crossBetween val="between"/>
+      </c:valAx>
+      <c:spPr>
+        <a:solidFill>
+          <a:srgbClr val="FFFFFF"/>
+        </a:solidFill>
+        <a:ln>
+          <a:noFill/>
+        </a:ln>
+        <a:effectLst/>
+      </c:spPr>
+    </c:plotArea>
+    <c:legend>
+      <c:legendPos val="b"/>
+      <c:overlay val="0"/>
+      <c:txPr>
+        <a:bodyPr/>
+        <a:lstStyle/>
+        <a:p>
+          <a:pPr>
+            <a:defRPr sz="900">      </a:defRPr>
+          </a:pPr>
+          <a:endParaRPr lang="en-US"/>
+        </a:p>
+      </c:txPr>
+    </c:legend>
+    <c:plotVisOnly val="1"/>
+    <c:dispBlanksAs val="span"/>
+  </c:chart>
+  <c:spPr>
+    <a:noFill/>
+    <a:ln>
+      <a:noFill/>
+    </a:ln>
+    <a:effectLst/>
+  </c:spPr>
+  <c:externalData r:id="rId1">
+    <c:autoUpdate val="0"/>
+  </c:externalData>
+</c:chartSpace>
+</file>
+
+<file path=ppt/charts/chart32.xml><?xml version="1.0" encoding="utf-8"?>
+<c:chartSpace xmlns:c="http://schemas.openxmlformats.org/drawingml/2006/chart" xmlns:a="http://schemas.openxmlformats.org/drawingml/2006/main" xmlns:r="http://schemas.openxmlformats.org/officeDocument/2006/relationships">
+  <c:date1904 val="0"/>
+  <c:roundedCorners val="1"/>
+  <c:chart>
+    <c:autoTitleDeleted val="1"/>
+    <c:plotArea>
+      <c:layout/>
+      <c:barChart>
+        <c:barDir val="bar"/>
         <c:grouping val="stacked"/>
         <c:varyColors val="0"/>
         <c:ser>
@@ -10678,7 +10924,7 @@
 </c:chartSpace>
 </file>
 
-<file path=ppt/charts/chart32.xml><?xml version="1.0" encoding="utf-8"?>
+<file path=ppt/charts/chart33.xml><?xml version="1.0" encoding="utf-8"?>
 <c:chartSpace xmlns:c="http://schemas.openxmlformats.org/drawingml/2006/chart" xmlns:a="http://schemas.openxmlformats.org/drawingml/2006/main" xmlns:r="http://schemas.openxmlformats.org/officeDocument/2006/relationships">
   <c:date1904 val="0"/>
   <c:roundedCorners val="1"/>
@@ -11389,7 +11635,7 @@
 </c:chartSpace>
 </file>
 
-<file path=ppt/charts/chart33.xml><?xml version="1.0" encoding="utf-8"?>
+<file path=ppt/charts/chart34.xml><?xml version="1.0" encoding="utf-8"?>
 <c:chartSpace xmlns:c="http://schemas.openxmlformats.org/drawingml/2006/chart" xmlns:a="http://schemas.openxmlformats.org/drawingml/2006/main" xmlns:r="http://schemas.openxmlformats.org/officeDocument/2006/relationships">
   <c:date1904 val="0"/>
   <c:roundedCorners val="1"/>
@@ -11598,366 +11844,6 @@
                 </c:pt>
                 <c:pt idx="5">
                   <c:v>2</c:v>
-                </c:pt>
-              </c:numCache>
-            </c:numRef>
-          </c:val>
-        </c:ser>
-        <c:dLbls>
-          <c:numFmt formatCode="0&quot;%&quot;" sourceLinked="0"/>
-          <c:txPr>
-            <a:bodyPr/>
-            <a:lstStyle/>
-            <a:p>
-              <a:pPr>
-                <a:defRPr b="0" i="0" strike="noStrike" sz="800" u="none">
-                  <a:solidFill>
-                    <a:srgbClr val="000000"/>
-                  </a:solidFill>
-                  <a:latin typeface="Arial"/>
-                </a:defRPr>
-              </a:pPr>
-            </a:p>
-          </c:txPr>
-          <c:showLegendKey val="0"/>
-          <c:showVal val="1"/>
-          <c:showCatName val="0"/>
-          <c:showSerName val="0"/>
-          <c:showPercent val="0"/>
-          <c:showBubbleSize val="0"/>
-          <c:showLeaderLines val="0"/>
-        </c:dLbls>
-        <c:gapWidth val="40"/>
-        <c:overlap val="0"/>
-        <c:axId val="2094734554"/>
-        <c:axId val="2094734552"/>
-        <c:axId val="2094734556"/>
-      </c:barChart>
-      <c:catAx>
-        <c:axId val="2094734554"/>
-        <c:scaling>
-          <c:orientation val="minMax"/>
-        </c:scaling>
-        <c:delete val="0"/>
-        <c:axPos val="l"/>
-        <c:numFmt formatCode="General" sourceLinked="1"/>
-        <c:majorTickMark val="out"/>
-        <c:minorTickMark val="none"/>
-        <c:tickLblPos val="nextTo"/>
-        <c:spPr>
-          <a:ln w="12700" cap="flat">
-            <a:noFill/>
-            <a:prstDash val="solid"/>
-            <a:round/>
-          </a:ln>
-        </c:spPr>
-        <c:txPr>
-          <a:bodyPr/>
-          <a:lstStyle/>
-          <a:p>
-            <a:pPr>
-              <a:defRPr sz="1000" b="0" i="0" u="none" strike="noStrike">
-                <a:solidFill>
-                  <a:srgbClr val="53565A"/>
-                </a:solidFill>
-                <a:latin typeface="Arial"/>
-              </a:defRPr>
-            </a:pPr>
-            <a:endParaRPr lang="en-US"/>
-          </a:p>
-        </c:txPr>
-        <c:crossAx val="2094734552"/>
-        <c:crosses val="autoZero"/>
-        <c:auto val="1"/>
-        <c:lblAlgn val="ctr"/>
-        <c:noMultiLvlLbl val="1"/>
-      </c:catAx>
-      <c:valAx>
-        <c:axId val="2094734552"/>
-        <c:scaling>
-          <c:orientation val="minMax"/>
-        </c:scaling>
-        <c:delete val="1"/>
-        <c:axPos val="b"/>
-        <c:numFmt formatCode="General" sourceLinked="0"/>
-        <c:majorTickMark val="out"/>
-        <c:minorTickMark val="none"/>
-        <c:tickLblPos val="low"/>
-        <c:spPr>
-          <a:ln w="12700" cap="flat">
-            <a:noFill/>
-            <a:prstDash val="solid"/>
-            <a:round/>
-          </a:ln>
-        </c:spPr>
-        <c:txPr>
-          <a:bodyPr/>
-          <a:lstStyle/>
-          <a:p>
-            <a:pPr>
-              <a:defRPr sz="1200" b="0" i="0" u="none" strike="noStrike">
-                <a:solidFill>
-                  <a:srgbClr val="000000"/>
-                </a:solidFill>
-                <a:latin typeface="Arial"/>
-              </a:defRPr>
-            </a:pPr>
-            <a:endParaRPr lang="en-US"/>
-          </a:p>
-        </c:txPr>
-        <c:crossAx val="2094734554"/>
-        <c:crosses val="autoZero"/>
-        <c:crossBetween val="between"/>
-      </c:valAx>
-      <c:spPr>
-        <a:solidFill>
-          <a:srgbClr val="FFFFFF"/>
-        </a:solidFill>
-        <a:ln>
-          <a:noFill/>
-        </a:ln>
-        <a:effectLst/>
-      </c:spPr>
-    </c:plotArea>
-    <c:legend>
-      <c:legendPos val="b"/>
-      <c:overlay val="0"/>
-      <c:txPr>
-        <a:bodyPr/>
-        <a:lstStyle/>
-        <a:p>
-          <a:pPr>
-            <a:defRPr sz="900">      </a:defRPr>
-          </a:pPr>
-          <a:endParaRPr lang="en-US"/>
-        </a:p>
-      </c:txPr>
-    </c:legend>
-    <c:plotVisOnly val="1"/>
-    <c:dispBlanksAs val="span"/>
-  </c:chart>
-  <c:spPr>
-    <a:noFill/>
-    <a:ln>
-      <a:noFill/>
-    </a:ln>
-    <a:effectLst/>
-  </c:spPr>
-  <c:externalData r:id="rId1">
-    <c:autoUpdate val="0"/>
-  </c:externalData>
-</c:chartSpace>
-</file>
-
-<file path=ppt/charts/chart34.xml><?xml version="1.0" encoding="utf-8"?>
-<c:chartSpace xmlns:c="http://schemas.openxmlformats.org/drawingml/2006/chart" xmlns:a="http://schemas.openxmlformats.org/drawingml/2006/main" xmlns:r="http://schemas.openxmlformats.org/officeDocument/2006/relationships">
-  <c:date1904 val="0"/>
-  <c:roundedCorners val="1"/>
-  <c:chart>
-    <c:autoTitleDeleted val="1"/>
-    <c:plotArea>
-      <c:layout/>
-      <c:barChart>
-        <c:barDir val="bar"/>
-        <c:grouping val="clustered"/>
-        <c:varyColors val="0"/>
-        <c:ser>
-          <c:idx val="0"/>
-          <c:order val="0"/>
-          <c:tx>
-            <c:strRef>
-              <c:f>Sheet1!$B$1</c:f>
-              <c:strCache>
-                <c:ptCount val="1"/>
-                <c:pt idx="0">
-                  <c:v>Today</c:v>
-                </c:pt>
-              </c:strCache>
-            </c:strRef>
-          </c:tx>
-          <c:spPr>
-            <a:solidFill>
-              <a:srgbClr val="86BC25"/>
-            </a:solidFill>
-            <a:effectLst/>
-          </c:spPr>
-          <c:invertIfNegative val="0"/>
-          <c:dLbls>
-            <c:numFmt formatCode="0&quot;%&quot;" sourceLinked="0"/>
-            <c:txPr>
-              <a:bodyPr/>
-              <a:lstStyle/>
-              <a:p>
-                <a:pPr>
-                  <a:defRPr b="0" i="0" strike="noStrike" sz="800" u="none">
-                    <a:solidFill>
-                      <a:srgbClr val="000000"/>
-                    </a:solidFill>
-                    <a:latin typeface="Arial"/>
-                  </a:defRPr>
-                </a:pPr>
-              </a:p>
-            </c:txPr>
-            <c:showLegendKey val="0"/>
-            <c:showVal val="1"/>
-            <c:showCatName val="0"/>
-            <c:showSerName val="0"/>
-            <c:showPercent val="0"/>
-            <c:showBubbleSize val="0"/>
-            <c:showLeaderLines val="0"/>
-          </c:dLbls>
-          <c:cat>
-            <c:multiLvlStrRef>
-              <c:f>Sheet1!$A$2:$A$7</c:f>
-              <c:multiLvlStrCache>
-                <c:ptCount val="6"/>
-                <c:lvl>
-                  <c:pt idx="0">
-                    <c:v>AI-enabled tools</c:v>
-                  </c:pt>
-                  <c:pt idx="1">
-                    <c:v>Automating workflows</c:v>
-                  </c:pt>
-                  <c:pt idx="2">
-                    <c:v>Redesigning processes</c:v>
-                  </c:pt>
-                  <c:pt idx="3">
-                    <c:v>Outsourcing</c:v>
-                  </c:pt>
-                  <c:pt idx="4">
-                    <c:v>Hiring / workforce</c:v>
-                  </c:pt>
-                  <c:pt idx="5">
-                    <c:v>Combination</c:v>
-                  </c:pt>
-                </c:lvl>
-              </c:multiLvlStrCache>
-            </c:multiLvlStrRef>
-          </c:cat>
-          <c:val>
-            <c:numRef>
-              <c:f>Sheet1!$B$2:$B$7</c:f>
-              <c:numCache>
-                <c:formatCode>General</c:formatCode>
-                <c:ptCount val="6"/>
-                <c:pt idx="0">
-                  <c:v>34</c:v>
-                </c:pt>
-                <c:pt idx="1">
-                  <c:v>26</c:v>
-                </c:pt>
-                <c:pt idx="2">
-                  <c:v>11</c:v>
-                </c:pt>
-                <c:pt idx="3">
-                  <c:v>11</c:v>
-                </c:pt>
-                <c:pt idx="4">
-                  <c:v>14</c:v>
-                </c:pt>
-                <c:pt idx="5">
-                  <c:v>3</c:v>
-                </c:pt>
-              </c:numCache>
-            </c:numRef>
-          </c:val>
-        </c:ser>
-        <c:ser>
-          <c:idx val="1"/>
-          <c:order val="1"/>
-          <c:tx>
-            <c:strRef>
-              <c:f>Sheet1!$C$1</c:f>
-              <c:strCache>
-                <c:ptCount val="1"/>
-                <c:pt idx="0">
-                  <c:v>3-Year Focus</c:v>
-                </c:pt>
-              </c:strCache>
-            </c:strRef>
-          </c:tx>
-          <c:spPr>
-            <a:solidFill>
-              <a:srgbClr val="046A38"/>
-            </a:solidFill>
-            <a:effectLst/>
-          </c:spPr>
-          <c:invertIfNegative val="0"/>
-          <c:dLbls>
-            <c:numFmt formatCode="0&quot;%&quot;" sourceLinked="0"/>
-            <c:txPr>
-              <a:bodyPr/>
-              <a:lstStyle/>
-              <a:p>
-                <a:pPr>
-                  <a:defRPr b="0" i="0" strike="noStrike" sz="800" u="none">
-                    <a:solidFill>
-                      <a:srgbClr val="000000"/>
-                    </a:solidFill>
-                    <a:latin typeface="Arial"/>
-                  </a:defRPr>
-                </a:pPr>
-              </a:p>
-            </c:txPr>
-            <c:showLegendKey val="0"/>
-            <c:showVal val="1"/>
-            <c:showCatName val="0"/>
-            <c:showSerName val="0"/>
-            <c:showPercent val="0"/>
-            <c:showBubbleSize val="0"/>
-            <c:showLeaderLines val="0"/>
-          </c:dLbls>
-          <c:cat>
-            <c:multiLvlStrRef>
-              <c:f>Sheet1!$A$2:$A$7</c:f>
-              <c:multiLvlStrCache>
-                <c:ptCount val="6"/>
-                <c:lvl>
-                  <c:pt idx="0">
-                    <c:v>AI-enabled tools</c:v>
-                  </c:pt>
-                  <c:pt idx="1">
-                    <c:v>Automating workflows</c:v>
-                  </c:pt>
-                  <c:pt idx="2">
-                    <c:v>Redesigning processes</c:v>
-                  </c:pt>
-                  <c:pt idx="3">
-                    <c:v>Outsourcing</c:v>
-                  </c:pt>
-                  <c:pt idx="4">
-                    <c:v>Hiring / workforce</c:v>
-                  </c:pt>
-                  <c:pt idx="5">
-                    <c:v>Combination</c:v>
-                  </c:pt>
-                </c:lvl>
-              </c:multiLvlStrCache>
-            </c:multiLvlStrRef>
-          </c:cat>
-          <c:val>
-            <c:numRef>
-              <c:f>Sheet1!$C$2:$C$7</c:f>
-              <c:numCache>
-                <c:formatCode>General</c:formatCode>
-                <c:ptCount val="6"/>
-                <c:pt idx="0">
-                  <c:v>43</c:v>
-                </c:pt>
-                <c:pt idx="1">
-                  <c:v>20</c:v>
-                </c:pt>
-                <c:pt idx="2">
-                  <c:v>17</c:v>
-                </c:pt>
-                <c:pt idx="3">
-                  <c:v>9</c:v>
-                </c:pt>
-                <c:pt idx="4">
-                  <c:v>9</c:v>
-                </c:pt>
-                <c:pt idx="5">
-                  <c:v>3</c:v>
                 </c:pt>
               </c:numCache>
             </c:numRef>
@@ -12119,6 +12005,366 @@
       <c:layout/>
       <c:barChart>
         <c:barDir val="bar"/>
+        <c:grouping val="clustered"/>
+        <c:varyColors val="0"/>
+        <c:ser>
+          <c:idx val="0"/>
+          <c:order val="0"/>
+          <c:tx>
+            <c:strRef>
+              <c:f>Sheet1!$B$1</c:f>
+              <c:strCache>
+                <c:ptCount val="1"/>
+                <c:pt idx="0">
+                  <c:v>Today</c:v>
+                </c:pt>
+              </c:strCache>
+            </c:strRef>
+          </c:tx>
+          <c:spPr>
+            <a:solidFill>
+              <a:srgbClr val="86BC25"/>
+            </a:solidFill>
+            <a:effectLst/>
+          </c:spPr>
+          <c:invertIfNegative val="0"/>
+          <c:dLbls>
+            <c:numFmt formatCode="0&quot;%&quot;" sourceLinked="0"/>
+            <c:txPr>
+              <a:bodyPr/>
+              <a:lstStyle/>
+              <a:p>
+                <a:pPr>
+                  <a:defRPr b="0" i="0" strike="noStrike" sz="800" u="none">
+                    <a:solidFill>
+                      <a:srgbClr val="000000"/>
+                    </a:solidFill>
+                    <a:latin typeface="Arial"/>
+                  </a:defRPr>
+                </a:pPr>
+              </a:p>
+            </c:txPr>
+            <c:showLegendKey val="0"/>
+            <c:showVal val="1"/>
+            <c:showCatName val="0"/>
+            <c:showSerName val="0"/>
+            <c:showPercent val="0"/>
+            <c:showBubbleSize val="0"/>
+            <c:showLeaderLines val="0"/>
+          </c:dLbls>
+          <c:cat>
+            <c:multiLvlStrRef>
+              <c:f>Sheet1!$A$2:$A$7</c:f>
+              <c:multiLvlStrCache>
+                <c:ptCount val="6"/>
+                <c:lvl>
+                  <c:pt idx="0">
+                    <c:v>AI-enabled tools</c:v>
+                  </c:pt>
+                  <c:pt idx="1">
+                    <c:v>Automating workflows</c:v>
+                  </c:pt>
+                  <c:pt idx="2">
+                    <c:v>Redesigning processes</c:v>
+                  </c:pt>
+                  <c:pt idx="3">
+                    <c:v>Outsourcing</c:v>
+                  </c:pt>
+                  <c:pt idx="4">
+                    <c:v>Hiring / workforce</c:v>
+                  </c:pt>
+                  <c:pt idx="5">
+                    <c:v>Combination</c:v>
+                  </c:pt>
+                </c:lvl>
+              </c:multiLvlStrCache>
+            </c:multiLvlStrRef>
+          </c:cat>
+          <c:val>
+            <c:numRef>
+              <c:f>Sheet1!$B$2:$B$7</c:f>
+              <c:numCache>
+                <c:formatCode>General</c:formatCode>
+                <c:ptCount val="6"/>
+                <c:pt idx="0">
+                  <c:v>34</c:v>
+                </c:pt>
+                <c:pt idx="1">
+                  <c:v>26</c:v>
+                </c:pt>
+                <c:pt idx="2">
+                  <c:v>11</c:v>
+                </c:pt>
+                <c:pt idx="3">
+                  <c:v>11</c:v>
+                </c:pt>
+                <c:pt idx="4">
+                  <c:v>14</c:v>
+                </c:pt>
+                <c:pt idx="5">
+                  <c:v>3</c:v>
+                </c:pt>
+              </c:numCache>
+            </c:numRef>
+          </c:val>
+        </c:ser>
+        <c:ser>
+          <c:idx val="1"/>
+          <c:order val="1"/>
+          <c:tx>
+            <c:strRef>
+              <c:f>Sheet1!$C$1</c:f>
+              <c:strCache>
+                <c:ptCount val="1"/>
+                <c:pt idx="0">
+                  <c:v>3-Year Focus</c:v>
+                </c:pt>
+              </c:strCache>
+            </c:strRef>
+          </c:tx>
+          <c:spPr>
+            <a:solidFill>
+              <a:srgbClr val="046A38"/>
+            </a:solidFill>
+            <a:effectLst/>
+          </c:spPr>
+          <c:invertIfNegative val="0"/>
+          <c:dLbls>
+            <c:numFmt formatCode="0&quot;%&quot;" sourceLinked="0"/>
+            <c:txPr>
+              <a:bodyPr/>
+              <a:lstStyle/>
+              <a:p>
+                <a:pPr>
+                  <a:defRPr b="0" i="0" strike="noStrike" sz="800" u="none">
+                    <a:solidFill>
+                      <a:srgbClr val="000000"/>
+                    </a:solidFill>
+                    <a:latin typeface="Arial"/>
+                  </a:defRPr>
+                </a:pPr>
+              </a:p>
+            </c:txPr>
+            <c:showLegendKey val="0"/>
+            <c:showVal val="1"/>
+            <c:showCatName val="0"/>
+            <c:showSerName val="0"/>
+            <c:showPercent val="0"/>
+            <c:showBubbleSize val="0"/>
+            <c:showLeaderLines val="0"/>
+          </c:dLbls>
+          <c:cat>
+            <c:multiLvlStrRef>
+              <c:f>Sheet1!$A$2:$A$7</c:f>
+              <c:multiLvlStrCache>
+                <c:ptCount val="6"/>
+                <c:lvl>
+                  <c:pt idx="0">
+                    <c:v>AI-enabled tools</c:v>
+                  </c:pt>
+                  <c:pt idx="1">
+                    <c:v>Automating workflows</c:v>
+                  </c:pt>
+                  <c:pt idx="2">
+                    <c:v>Redesigning processes</c:v>
+                  </c:pt>
+                  <c:pt idx="3">
+                    <c:v>Outsourcing</c:v>
+                  </c:pt>
+                  <c:pt idx="4">
+                    <c:v>Hiring / workforce</c:v>
+                  </c:pt>
+                  <c:pt idx="5">
+                    <c:v>Combination</c:v>
+                  </c:pt>
+                </c:lvl>
+              </c:multiLvlStrCache>
+            </c:multiLvlStrRef>
+          </c:cat>
+          <c:val>
+            <c:numRef>
+              <c:f>Sheet1!$C$2:$C$7</c:f>
+              <c:numCache>
+                <c:formatCode>General</c:formatCode>
+                <c:ptCount val="6"/>
+                <c:pt idx="0">
+                  <c:v>43</c:v>
+                </c:pt>
+                <c:pt idx="1">
+                  <c:v>20</c:v>
+                </c:pt>
+                <c:pt idx="2">
+                  <c:v>17</c:v>
+                </c:pt>
+                <c:pt idx="3">
+                  <c:v>9</c:v>
+                </c:pt>
+                <c:pt idx="4">
+                  <c:v>9</c:v>
+                </c:pt>
+                <c:pt idx="5">
+                  <c:v>3</c:v>
+                </c:pt>
+              </c:numCache>
+            </c:numRef>
+          </c:val>
+        </c:ser>
+        <c:dLbls>
+          <c:numFmt formatCode="0&quot;%&quot;" sourceLinked="0"/>
+          <c:txPr>
+            <a:bodyPr/>
+            <a:lstStyle/>
+            <a:p>
+              <a:pPr>
+                <a:defRPr b="0" i="0" strike="noStrike" sz="800" u="none">
+                  <a:solidFill>
+                    <a:srgbClr val="000000"/>
+                  </a:solidFill>
+                  <a:latin typeface="Arial"/>
+                </a:defRPr>
+              </a:pPr>
+            </a:p>
+          </c:txPr>
+          <c:showLegendKey val="0"/>
+          <c:showVal val="1"/>
+          <c:showCatName val="0"/>
+          <c:showSerName val="0"/>
+          <c:showPercent val="0"/>
+          <c:showBubbleSize val="0"/>
+          <c:showLeaderLines val="0"/>
+        </c:dLbls>
+        <c:gapWidth val="40"/>
+        <c:overlap val="0"/>
+        <c:axId val="2094734554"/>
+        <c:axId val="2094734552"/>
+        <c:axId val="2094734556"/>
+      </c:barChart>
+      <c:catAx>
+        <c:axId val="2094734554"/>
+        <c:scaling>
+          <c:orientation val="minMax"/>
+        </c:scaling>
+        <c:delete val="0"/>
+        <c:axPos val="l"/>
+        <c:numFmt formatCode="General" sourceLinked="1"/>
+        <c:majorTickMark val="out"/>
+        <c:minorTickMark val="none"/>
+        <c:tickLblPos val="nextTo"/>
+        <c:spPr>
+          <a:ln w="12700" cap="flat">
+            <a:noFill/>
+            <a:prstDash val="solid"/>
+            <a:round/>
+          </a:ln>
+        </c:spPr>
+        <c:txPr>
+          <a:bodyPr/>
+          <a:lstStyle/>
+          <a:p>
+            <a:pPr>
+              <a:defRPr sz="1000" b="0" i="0" u="none" strike="noStrike">
+                <a:solidFill>
+                  <a:srgbClr val="53565A"/>
+                </a:solidFill>
+                <a:latin typeface="Arial"/>
+              </a:defRPr>
+            </a:pPr>
+            <a:endParaRPr lang="en-US"/>
+          </a:p>
+        </c:txPr>
+        <c:crossAx val="2094734552"/>
+        <c:crosses val="autoZero"/>
+        <c:auto val="1"/>
+        <c:lblAlgn val="ctr"/>
+        <c:noMultiLvlLbl val="1"/>
+      </c:catAx>
+      <c:valAx>
+        <c:axId val="2094734552"/>
+        <c:scaling>
+          <c:orientation val="minMax"/>
+        </c:scaling>
+        <c:delete val="1"/>
+        <c:axPos val="b"/>
+        <c:numFmt formatCode="General" sourceLinked="0"/>
+        <c:majorTickMark val="out"/>
+        <c:minorTickMark val="none"/>
+        <c:tickLblPos val="low"/>
+        <c:spPr>
+          <a:ln w="12700" cap="flat">
+            <a:noFill/>
+            <a:prstDash val="solid"/>
+            <a:round/>
+          </a:ln>
+        </c:spPr>
+        <c:txPr>
+          <a:bodyPr/>
+          <a:lstStyle/>
+          <a:p>
+            <a:pPr>
+              <a:defRPr sz="1200" b="0" i="0" u="none" strike="noStrike">
+                <a:solidFill>
+                  <a:srgbClr val="000000"/>
+                </a:solidFill>
+                <a:latin typeface="Arial"/>
+              </a:defRPr>
+            </a:pPr>
+            <a:endParaRPr lang="en-US"/>
+          </a:p>
+        </c:txPr>
+        <c:crossAx val="2094734554"/>
+        <c:crosses val="autoZero"/>
+        <c:crossBetween val="between"/>
+      </c:valAx>
+      <c:spPr>
+        <a:solidFill>
+          <a:srgbClr val="FFFFFF"/>
+        </a:solidFill>
+        <a:ln>
+          <a:noFill/>
+        </a:ln>
+        <a:effectLst/>
+      </c:spPr>
+    </c:plotArea>
+    <c:legend>
+      <c:legendPos val="b"/>
+      <c:overlay val="0"/>
+      <c:txPr>
+        <a:bodyPr/>
+        <a:lstStyle/>
+        <a:p>
+          <a:pPr>
+            <a:defRPr sz="900">      </a:defRPr>
+          </a:pPr>
+          <a:endParaRPr lang="en-US"/>
+        </a:p>
+      </c:txPr>
+    </c:legend>
+    <c:plotVisOnly val="1"/>
+    <c:dispBlanksAs val="span"/>
+  </c:chart>
+  <c:spPr>
+    <a:noFill/>
+    <a:ln>
+      <a:noFill/>
+    </a:ln>
+    <a:effectLst/>
+  </c:spPr>
+  <c:externalData r:id="rId1">
+    <c:autoUpdate val="0"/>
+  </c:externalData>
+</c:chartSpace>
+</file>
+
+<file path=ppt/charts/chart36.xml><?xml version="1.0" encoding="utf-8"?>
+<c:chartSpace xmlns:c="http://schemas.openxmlformats.org/drawingml/2006/chart" xmlns:a="http://schemas.openxmlformats.org/drawingml/2006/main" xmlns:r="http://schemas.openxmlformats.org/officeDocument/2006/relationships">
+  <c:date1904 val="0"/>
+  <c:roundedCorners val="1"/>
+  <c:chart>
+    <c:autoTitleDeleted val="1"/>
+    <c:plotArea>
+      <c:layout/>
+      <c:barChart>
+        <c:barDir val="bar"/>
         <c:grouping val="stacked"/>
         <c:varyColors val="0"/>
         <c:ser>
@@ -12958,7 +13204,7 @@
 </c:chartSpace>
 </file>
 
-<file path=ppt/charts/chart36.xml><?xml version="1.0" encoding="utf-8"?>
+<file path=ppt/charts/chart37.xml><?xml version="1.0" encoding="utf-8"?>
 <c:chartSpace xmlns:c="http://schemas.openxmlformats.org/drawingml/2006/chart" xmlns:a="http://schemas.openxmlformats.org/drawingml/2006/main" xmlns:r="http://schemas.openxmlformats.org/officeDocument/2006/relationships">
   <c:date1904 val="0"/>
   <c:roundedCorners val="1"/>
@@ -13807,7 +14053,7 @@
 </c:chartSpace>
 </file>
 
-<file path=ppt/charts/chart37.xml><?xml version="1.0" encoding="utf-8"?>
+<file path=ppt/charts/chart38.xml><?xml version="1.0" encoding="utf-8"?>
 <c:chartSpace xmlns:c="http://schemas.openxmlformats.org/drawingml/2006/chart" xmlns:a="http://schemas.openxmlformats.org/drawingml/2006/main" xmlns:r="http://schemas.openxmlformats.org/officeDocument/2006/relationships">
   <c:date1904 val="0"/>
   <c:roundedCorners val="1"/>
@@ -14034,7 +14280,7 @@
 </c:chartSpace>
 </file>
 
-<file path=ppt/charts/chart38.xml><?xml version="1.0" encoding="utf-8"?>
+<file path=ppt/charts/chart39.xml><?xml version="1.0" encoding="utf-8"?>
 <c:chartSpace xmlns:c="http://schemas.openxmlformats.org/drawingml/2006/chart" xmlns:a="http://schemas.openxmlformats.org/drawingml/2006/main" xmlns:r="http://schemas.openxmlformats.org/officeDocument/2006/relationships">
   <c:date1904 val="0"/>
   <c:roundedCorners val="1"/>
@@ -14613,7 +14859,7 @@
 </c:chartSpace>
 </file>
 
-<file path=ppt/charts/chart39.xml><?xml version="1.0" encoding="utf-8"?>
+<file path=ppt/charts/chart4.xml><?xml version="1.0" encoding="utf-8"?>
 <c:chartSpace xmlns:c="http://schemas.openxmlformats.org/drawingml/2006/chart" xmlns:a="http://schemas.openxmlformats.org/drawingml/2006/main" xmlns:r="http://schemas.openxmlformats.org/officeDocument/2006/relationships">
   <c:date1904 val="0"/>
   <c:roundedCorners val="1"/>
@@ -14634,7 +14880,7 @@
               <c:strCache>
                 <c:ptCount val="1"/>
                 <c:pt idx="0">
-                  <c:v>Top 50 Global Insurance Carrier (n=15)</c:v>
+                  <c:v>Banking</c:v>
                 </c:pt>
               </c:strCache>
             </c:strRef>
@@ -14672,18 +14918,24 @@
           </c:dLbls>
           <c:cat>
             <c:multiLvlStrRef>
-              <c:f>Sheet1!$A$2:$A$4</c:f>
+              <c:f>Sheet1!$A$2:$A$6</c:f>
               <c:multiLvlStrCache>
-                <c:ptCount val="3"/>
+                <c:ptCount val="5"/>
                 <c:lvl>
                   <c:pt idx="0">
-                    <c:v>Investing to remediate existing compliance gaps</c:v>
+                    <c:v>United States (n=34)</c:v>
                   </c:pt>
                   <c:pt idx="1">
-                    <c:v>Investing to meet upcoming / draft regulations</c:v>
+                    <c:v>Canada (n=18)</c:v>
                   </c:pt>
                   <c:pt idx="2">
-                    <c:v>Regulation not a primary driver</c:v>
+                    <c:v>Europe — EU + UK (n=12)</c:v>
+                  </c:pt>
+                  <c:pt idx="3">
+                    <c:v>Australia (n=7)</c:v>
+                  </c:pt>
+                  <c:pt idx="4">
+                    <c:v>Singapore (n=4)</c:v>
                   </c:pt>
                 </c:lvl>
               </c:multiLvlStrCache>
@@ -14691,101 +14943,24 @@
           </c:cat>
           <c:val>
             <c:numRef>
-              <c:f>Sheet1!$B$2:$B$4</c:f>
+              <c:f>Sheet1!$B$2:$B$6</c:f>
               <c:numCache>
                 <c:formatCode>General</c:formatCode>
-                <c:ptCount val="3"/>
+                <c:ptCount val="5"/>
                 <c:pt idx="0">
-                  <c:v>33</c:v>
+                  <c:v>45</c:v>
                 </c:pt>
                 <c:pt idx="1">
-                  <c:v>47</c:v>
+                  <c:v>24</c:v>
                 </c:pt>
                 <c:pt idx="2">
-                  <c:v>20</c:v>
-                </c:pt>
-              </c:numCache>
-            </c:numRef>
-          </c:val>
-        </c:ser>
-        <c:ser>
-          <c:idx val="1"/>
-          <c:order val="1"/>
-          <c:tx>
-            <c:strRef>
-              <c:f>Sheet1!$C$1</c:f>
-              <c:strCache>
-                <c:ptCount val="1"/>
-                <c:pt idx="0">
-                  <c:v>Large Insurance Carrier (n=10)</c:v>
-                </c:pt>
-              </c:strCache>
-            </c:strRef>
-          </c:tx>
-          <c:spPr>
-            <a:solidFill>
-              <a:srgbClr val="046A38"/>
-            </a:solidFill>
-            <a:effectLst/>
-          </c:spPr>
-          <c:invertIfNegative val="0"/>
-          <c:dLbls>
-            <c:numFmt formatCode="0&quot;%&quot;" sourceLinked="0"/>
-            <c:txPr>
-              <a:bodyPr/>
-              <a:lstStyle/>
-              <a:p>
-                <a:pPr>
-                  <a:defRPr b="0" i="0" strike="noStrike" sz="1000" u="none">
-                    <a:solidFill>
-                      <a:srgbClr val="000000"/>
-                    </a:solidFill>
-                    <a:latin typeface="Arial"/>
-                  </a:defRPr>
-                </a:pPr>
-              </a:p>
-            </c:txPr>
-            <c:showLegendKey val="0"/>
-            <c:showVal val="1"/>
-            <c:showCatName val="0"/>
-            <c:showSerName val="0"/>
-            <c:showPercent val="0"/>
-            <c:showBubbleSize val="0"/>
-            <c:showLeaderLines val="0"/>
-          </c:dLbls>
-          <c:cat>
-            <c:multiLvlStrRef>
-              <c:f>Sheet1!$A$2:$A$4</c:f>
-              <c:multiLvlStrCache>
-                <c:ptCount val="3"/>
-                <c:lvl>
-                  <c:pt idx="0">
-                    <c:v>Investing to remediate existing compliance gaps</c:v>
-                  </c:pt>
-                  <c:pt idx="1">
-                    <c:v>Investing to meet upcoming / draft regulations</c:v>
-                  </c:pt>
-                  <c:pt idx="2">
-                    <c:v>Regulation not a primary driver</c:v>
-                  </c:pt>
-                </c:lvl>
-              </c:multiLvlStrCache>
-            </c:multiLvlStrRef>
-          </c:cat>
-          <c:val>
-            <c:numRef>
-              <c:f>Sheet1!$C$2:$C$4</c:f>
-              <c:numCache>
-                <c:formatCode>General</c:formatCode>
-                <c:ptCount val="3"/>
-                <c:pt idx="0">
-                  <c:v>70</c:v>
-                </c:pt>
-                <c:pt idx="1">
-                  <c:v>30</c:v>
-                </c:pt>
-                <c:pt idx="2">
-                  <c:v>0</c:v>
+                  <c:v>16</c:v>
+                </c:pt>
+                <c:pt idx="3">
+                  <c:v>9</c:v>
+                </c:pt>
+                <c:pt idx="4">
+                  <c:v>5</c:v>
                 </c:pt>
               </c:numCache>
             </c:numRef>
@@ -14907,259 +15082,6 @@
         <a:effectLst/>
       </c:spPr>
     </c:plotArea>
-    <c:legend>
-      <c:legendPos val="b"/>
-      <c:overlay val="0"/>
-      <c:txPr>
-        <a:bodyPr/>
-        <a:lstStyle/>
-        <a:p>
-          <a:pPr>
-            <a:defRPr sz="950">      </a:defRPr>
-          </a:pPr>
-          <a:endParaRPr lang="en-US"/>
-        </a:p>
-      </c:txPr>
-    </c:legend>
-    <c:plotVisOnly val="1"/>
-    <c:dispBlanksAs val="span"/>
-  </c:chart>
-  <c:spPr>
-    <a:noFill/>
-    <a:ln>
-      <a:noFill/>
-    </a:ln>
-    <a:effectLst/>
-  </c:spPr>
-  <c:externalData r:id="rId1">
-    <c:autoUpdate val="0"/>
-  </c:externalData>
-</c:chartSpace>
-</file>
-
-<file path=ppt/charts/chart4.xml><?xml version="1.0" encoding="utf-8"?>
-<c:chartSpace xmlns:c="http://schemas.openxmlformats.org/drawingml/2006/chart" xmlns:a="http://schemas.openxmlformats.org/drawingml/2006/main" xmlns:r="http://schemas.openxmlformats.org/officeDocument/2006/relationships">
-  <c:date1904 val="0"/>
-  <c:roundedCorners val="1"/>
-  <c:chart>
-    <c:autoTitleDeleted val="1"/>
-    <c:plotArea>
-      <c:layout/>
-      <c:barChart>
-        <c:barDir val="bar"/>
-        <c:grouping val="clustered"/>
-        <c:varyColors val="0"/>
-        <c:ser>
-          <c:idx val="0"/>
-          <c:order val="0"/>
-          <c:tx>
-            <c:strRef>
-              <c:f>Sheet1!$B$1</c:f>
-              <c:strCache>
-                <c:ptCount val="1"/>
-                <c:pt idx="0">
-                  <c:v>Banking</c:v>
-                </c:pt>
-              </c:strCache>
-            </c:strRef>
-          </c:tx>
-          <c:spPr>
-            <a:solidFill>
-              <a:srgbClr val="86BC25"/>
-            </a:solidFill>
-            <a:effectLst/>
-          </c:spPr>
-          <c:invertIfNegative val="0"/>
-          <c:dLbls>
-            <c:numFmt formatCode="0&quot;%&quot;" sourceLinked="0"/>
-            <c:txPr>
-              <a:bodyPr/>
-              <a:lstStyle/>
-              <a:p>
-                <a:pPr>
-                  <a:defRPr b="0" i="0" strike="noStrike" sz="1000" u="none">
-                    <a:solidFill>
-                      <a:srgbClr val="000000"/>
-                    </a:solidFill>
-                    <a:latin typeface="Arial"/>
-                  </a:defRPr>
-                </a:pPr>
-              </a:p>
-            </c:txPr>
-            <c:showLegendKey val="0"/>
-            <c:showVal val="1"/>
-            <c:showCatName val="0"/>
-            <c:showSerName val="0"/>
-            <c:showPercent val="0"/>
-            <c:showBubbleSize val="0"/>
-            <c:showLeaderLines val="0"/>
-          </c:dLbls>
-          <c:cat>
-            <c:multiLvlStrRef>
-              <c:f>Sheet1!$A$2:$A$6</c:f>
-              <c:multiLvlStrCache>
-                <c:ptCount val="5"/>
-                <c:lvl>
-                  <c:pt idx="0">
-                    <c:v>United States (n=34)</c:v>
-                  </c:pt>
-                  <c:pt idx="1">
-                    <c:v>Canada (n=18)</c:v>
-                  </c:pt>
-                  <c:pt idx="2">
-                    <c:v>Europe — EU + UK (n=12)</c:v>
-                  </c:pt>
-                  <c:pt idx="3">
-                    <c:v>Australia (n=7)</c:v>
-                  </c:pt>
-                  <c:pt idx="4">
-                    <c:v>Singapore (n=4)</c:v>
-                  </c:pt>
-                </c:lvl>
-              </c:multiLvlStrCache>
-            </c:multiLvlStrRef>
-          </c:cat>
-          <c:val>
-            <c:numRef>
-              <c:f>Sheet1!$B$2:$B$6</c:f>
-              <c:numCache>
-                <c:formatCode>General</c:formatCode>
-                <c:ptCount val="5"/>
-                <c:pt idx="0">
-                  <c:v>45</c:v>
-                </c:pt>
-                <c:pt idx="1">
-                  <c:v>24</c:v>
-                </c:pt>
-                <c:pt idx="2">
-                  <c:v>16</c:v>
-                </c:pt>
-                <c:pt idx="3">
-                  <c:v>9</c:v>
-                </c:pt>
-                <c:pt idx="4">
-                  <c:v>5</c:v>
-                </c:pt>
-              </c:numCache>
-            </c:numRef>
-          </c:val>
-        </c:ser>
-        <c:dLbls>
-          <c:numFmt formatCode="0&quot;%&quot;" sourceLinked="0"/>
-          <c:txPr>
-            <a:bodyPr/>
-            <a:lstStyle/>
-            <a:p>
-              <a:pPr>
-                <a:defRPr b="0" i="0" strike="noStrike" sz="1000" u="none">
-                  <a:solidFill>
-                    <a:srgbClr val="000000"/>
-                  </a:solidFill>
-                  <a:latin typeface="Arial"/>
-                </a:defRPr>
-              </a:pPr>
-            </a:p>
-          </c:txPr>
-          <c:showLegendKey val="0"/>
-          <c:showVal val="1"/>
-          <c:showCatName val="0"/>
-          <c:showSerName val="0"/>
-          <c:showPercent val="0"/>
-          <c:showBubbleSize val="0"/>
-          <c:showLeaderLines val="0"/>
-        </c:dLbls>
-        <c:gapWidth val="40"/>
-        <c:overlap val="0"/>
-        <c:axId val="2094734554"/>
-        <c:axId val="2094734552"/>
-        <c:axId val="2094734556"/>
-      </c:barChart>
-      <c:catAx>
-        <c:axId val="2094734554"/>
-        <c:scaling>
-          <c:orientation val="minMax"/>
-        </c:scaling>
-        <c:delete val="0"/>
-        <c:axPos val="l"/>
-        <c:numFmt formatCode="General" sourceLinked="1"/>
-        <c:majorTickMark val="out"/>
-        <c:minorTickMark val="none"/>
-        <c:tickLblPos val="nextTo"/>
-        <c:spPr>
-          <a:ln w="12700" cap="flat">
-            <a:noFill/>
-            <a:prstDash val="solid"/>
-            <a:round/>
-          </a:ln>
-        </c:spPr>
-        <c:txPr>
-          <a:bodyPr/>
-          <a:lstStyle/>
-          <a:p>
-            <a:pPr>
-              <a:defRPr sz="1000" b="0" i="0" u="none" strike="noStrike">
-                <a:solidFill>
-                  <a:srgbClr val="53565A"/>
-                </a:solidFill>
-                <a:latin typeface="Arial"/>
-              </a:defRPr>
-            </a:pPr>
-            <a:endParaRPr lang="en-US"/>
-          </a:p>
-        </c:txPr>
-        <c:crossAx val="2094734552"/>
-        <c:crosses val="autoZero"/>
-        <c:auto val="1"/>
-        <c:lblAlgn val="ctr"/>
-        <c:noMultiLvlLbl val="1"/>
-      </c:catAx>
-      <c:valAx>
-        <c:axId val="2094734552"/>
-        <c:scaling>
-          <c:orientation val="minMax"/>
-        </c:scaling>
-        <c:delete val="1"/>
-        <c:axPos val="b"/>
-        <c:numFmt formatCode="General" sourceLinked="0"/>
-        <c:majorTickMark val="out"/>
-        <c:minorTickMark val="none"/>
-        <c:tickLblPos val="low"/>
-        <c:spPr>
-          <a:ln w="12700" cap="flat">
-            <a:noFill/>
-            <a:prstDash val="solid"/>
-            <a:round/>
-          </a:ln>
-        </c:spPr>
-        <c:txPr>
-          <a:bodyPr/>
-          <a:lstStyle/>
-          <a:p>
-            <a:pPr>
-              <a:defRPr sz="1200" b="0" i="0" u="none" strike="noStrike">
-                <a:solidFill>
-                  <a:srgbClr val="000000"/>
-                </a:solidFill>
-                <a:latin typeface="Arial"/>
-              </a:defRPr>
-            </a:pPr>
-            <a:endParaRPr lang="en-US"/>
-          </a:p>
-        </c:txPr>
-        <c:crossAx val="2094734554"/>
-        <c:crosses val="autoZero"/>
-        <c:crossBetween val="between"/>
-      </c:valAx>
-      <c:spPr>
-        <a:solidFill>
-          <a:srgbClr val="FFFFFF"/>
-        </a:solidFill>
-        <a:ln>
-          <a:noFill/>
-        </a:ln>
-        <a:effectLst/>
-      </c:spPr>
-    </c:plotArea>
     <c:plotVisOnly val="1"/>
     <c:dispBlanksAs val="span"/>
   </c:chart>
@@ -15197,7 +15119,7 @@
               <c:strCache>
                 <c:ptCount val="1"/>
                 <c:pt idx="0">
-                  <c:v>Top 100 Financial Institution (n=40)</c:v>
+                  <c:v>Top 50 Global Insurance Carrier (n=15)</c:v>
                 </c:pt>
               </c:strCache>
             </c:strRef>
@@ -15259,13 +15181,13 @@
                 <c:formatCode>General</c:formatCode>
                 <c:ptCount val="3"/>
                 <c:pt idx="0">
-                  <c:v>42</c:v>
+                  <c:v>33</c:v>
                 </c:pt>
                 <c:pt idx="1">
-                  <c:v>48</c:v>
+                  <c:v>47</c:v>
                 </c:pt>
                 <c:pt idx="2">
-                  <c:v>10</c:v>
+                  <c:v>20</c:v>
                 </c:pt>
               </c:numCache>
             </c:numRef>
@@ -15280,7 +15202,7 @@
               <c:strCache>
                 <c:ptCount val="1"/>
                 <c:pt idx="0">
-                  <c:v>Large Financial Institution (n=35)</c:v>
+                  <c:v>Large Insurance Carrier (n=10)</c:v>
                 </c:pt>
               </c:strCache>
             </c:strRef>
@@ -15342,13 +15264,13 @@
                 <c:formatCode>General</c:formatCode>
                 <c:ptCount val="3"/>
                 <c:pt idx="0">
-                  <c:v>54</c:v>
+                  <c:v>70</c:v>
                 </c:pt>
                 <c:pt idx="1">
-                  <c:v>29</c:v>
+                  <c:v>30</c:v>
                 </c:pt>
                 <c:pt idx="2">
-                  <c:v>17</c:v>
+                  <c:v>0</c:v>
                 </c:pt>
               </c:numCache>
             </c:numRef>
@@ -15521,7 +15443,7 @@
               <c:strCache>
                 <c:ptCount val="1"/>
                 <c:pt idx="0">
-                  <c:v>Upcoming Regulatory / Market Change With Greatest Expected Impact</c:v>
+                  <c:v>Top 100 Financial Institution (n=40)</c:v>
                 </c:pt>
               </c:strCache>
             </c:strRef>
@@ -15559,27 +15481,18 @@
           </c:dLbls>
           <c:cat>
             <c:multiLvlStrRef>
-              <c:f>Sheet1!$A$2:$A$7</c:f>
+              <c:f>Sheet1!$A$2:$A$4</c:f>
               <c:multiLvlStrCache>
-                <c:ptCount val="6"/>
+                <c:ptCount val="3"/>
                 <c:lvl>
                   <c:pt idx="0">
-                    <c:v>Customer identity, authentication &amp; digital trust</c:v>
+                    <c:v>Investing to remediate existing compliance gaps</c:v>
                   </c:pt>
                   <c:pt idx="1">
-                    <c:v>Privacy, data-sharing &amp; AI governance requirements</c:v>
+                    <c:v>Investing to meet upcoming / draft regulations</c:v>
                   </c:pt>
                   <c:pt idx="2">
-                    <c:v>Payment innovation (RTP, stablecoins, agentic payments)</c:v>
-                  </c:pt>
-                  <c:pt idx="3">
-                    <c:v>Liability &amp; reimbursement changes</c:v>
-                  </c:pt>
-                  <c:pt idx="4">
-                    <c:v>AML modernization initiatives</c:v>
-                  </c:pt>
-                  <c:pt idx="5">
-                    <c:v>Open Banking / consumer-driven initiatives</c:v>
+                    <c:v>Regulation not a primary driver</c:v>
                   </c:pt>
                 </c:lvl>
               </c:multiLvlStrCache>
@@ -15587,27 +15500,101 @@
           </c:cat>
           <c:val>
             <c:numRef>
-              <c:f>Sheet1!$B$2:$B$7</c:f>
+              <c:f>Sheet1!$B$2:$B$4</c:f>
               <c:numCache>
                 <c:formatCode>General</c:formatCode>
-                <c:ptCount val="6"/>
+                <c:ptCount val="3"/>
                 <c:pt idx="0">
-                  <c:v>71</c:v>
+                  <c:v>42</c:v>
                 </c:pt>
                 <c:pt idx="1">
-                  <c:v>66</c:v>
+                  <c:v>48</c:v>
                 </c:pt>
                 <c:pt idx="2">
-                  <c:v>65</c:v>
-                </c:pt>
-                <c:pt idx="3">
-                  <c:v>36</c:v>
-                </c:pt>
-                <c:pt idx="4">
-                  <c:v>33</c:v>
-                </c:pt>
-                <c:pt idx="5">
+                  <c:v>10</c:v>
+                </c:pt>
+              </c:numCache>
+            </c:numRef>
+          </c:val>
+        </c:ser>
+        <c:ser>
+          <c:idx val="1"/>
+          <c:order val="1"/>
+          <c:tx>
+            <c:strRef>
+              <c:f>Sheet1!$C$1</c:f>
+              <c:strCache>
+                <c:ptCount val="1"/>
+                <c:pt idx="0">
+                  <c:v>Large Financial Institution (n=35)</c:v>
+                </c:pt>
+              </c:strCache>
+            </c:strRef>
+          </c:tx>
+          <c:spPr>
+            <a:solidFill>
+              <a:srgbClr val="046A38"/>
+            </a:solidFill>
+            <a:effectLst/>
+          </c:spPr>
+          <c:invertIfNegative val="0"/>
+          <c:dLbls>
+            <c:numFmt formatCode="0&quot;%&quot;" sourceLinked="0"/>
+            <c:txPr>
+              <a:bodyPr/>
+              <a:lstStyle/>
+              <a:p>
+                <a:pPr>
+                  <a:defRPr b="0" i="0" strike="noStrike" sz="1000" u="none">
+                    <a:solidFill>
+                      <a:srgbClr val="000000"/>
+                    </a:solidFill>
+                    <a:latin typeface="Arial"/>
+                  </a:defRPr>
+                </a:pPr>
+              </a:p>
+            </c:txPr>
+            <c:showLegendKey val="0"/>
+            <c:showVal val="1"/>
+            <c:showCatName val="0"/>
+            <c:showSerName val="0"/>
+            <c:showPercent val="0"/>
+            <c:showBubbleSize val="0"/>
+            <c:showLeaderLines val="0"/>
+          </c:dLbls>
+          <c:cat>
+            <c:multiLvlStrRef>
+              <c:f>Sheet1!$A$2:$A$4</c:f>
+              <c:multiLvlStrCache>
+                <c:ptCount val="3"/>
+                <c:lvl>
+                  <c:pt idx="0">
+                    <c:v>Investing to remediate existing compliance gaps</c:v>
+                  </c:pt>
+                  <c:pt idx="1">
+                    <c:v>Investing to meet upcoming / draft regulations</c:v>
+                  </c:pt>
+                  <c:pt idx="2">
+                    <c:v>Regulation not a primary driver</c:v>
+                  </c:pt>
+                </c:lvl>
+              </c:multiLvlStrCache>
+            </c:multiLvlStrRef>
+          </c:cat>
+          <c:val>
+            <c:numRef>
+              <c:f>Sheet1!$C$2:$C$4</c:f>
+              <c:numCache>
+                <c:formatCode>General</c:formatCode>
+                <c:ptCount val="3"/>
+                <c:pt idx="0">
+                  <c:v>54</c:v>
+                </c:pt>
+                <c:pt idx="1">
                   <c:v>29</c:v>
+                </c:pt>
+                <c:pt idx="2">
+                  <c:v>17</c:v>
                 </c:pt>
               </c:numCache>
             </c:numRef>
@@ -15729,6 +15716,20 @@
         <a:effectLst/>
       </c:spPr>
     </c:plotArea>
+    <c:legend>
+      <c:legendPos val="b"/>
+      <c:overlay val="0"/>
+      <c:txPr>
+        <a:bodyPr/>
+        <a:lstStyle/>
+        <a:p>
+          <a:pPr>
+            <a:defRPr sz="950">      </a:defRPr>
+          </a:pPr>
+          <a:endParaRPr lang="en-US"/>
+        </a:p>
+      </c:txPr>
+    </c:legend>
     <c:plotVisOnly val="1"/>
     <c:dispBlanksAs val="span"/>
   </c:chart>
@@ -15746,6 +15747,251 @@
 </file>
 
 <file path=ppt/charts/chart42.xml><?xml version="1.0" encoding="utf-8"?>
+<c:chartSpace xmlns:c="http://schemas.openxmlformats.org/drawingml/2006/chart" xmlns:a="http://schemas.openxmlformats.org/drawingml/2006/main" xmlns:r="http://schemas.openxmlformats.org/officeDocument/2006/relationships">
+  <c:date1904 val="0"/>
+  <c:roundedCorners val="1"/>
+  <c:chart>
+    <c:autoTitleDeleted val="1"/>
+    <c:plotArea>
+      <c:layout/>
+      <c:barChart>
+        <c:barDir val="bar"/>
+        <c:grouping val="clustered"/>
+        <c:varyColors val="0"/>
+        <c:ser>
+          <c:idx val="0"/>
+          <c:order val="0"/>
+          <c:tx>
+            <c:strRef>
+              <c:f>Sheet1!$B$1</c:f>
+              <c:strCache>
+                <c:ptCount val="1"/>
+                <c:pt idx="0">
+                  <c:v>Upcoming Regulatory / Market Change With Greatest Expected Impact</c:v>
+                </c:pt>
+              </c:strCache>
+            </c:strRef>
+          </c:tx>
+          <c:spPr>
+            <a:solidFill>
+              <a:srgbClr val="86BC25"/>
+            </a:solidFill>
+            <a:effectLst/>
+          </c:spPr>
+          <c:invertIfNegative val="0"/>
+          <c:dLbls>
+            <c:numFmt formatCode="0&quot;%&quot;" sourceLinked="0"/>
+            <c:txPr>
+              <a:bodyPr/>
+              <a:lstStyle/>
+              <a:p>
+                <a:pPr>
+                  <a:defRPr b="0" i="0" strike="noStrike" sz="1000" u="none">
+                    <a:solidFill>
+                      <a:srgbClr val="000000"/>
+                    </a:solidFill>
+                    <a:latin typeface="Arial"/>
+                  </a:defRPr>
+                </a:pPr>
+              </a:p>
+            </c:txPr>
+            <c:showLegendKey val="0"/>
+            <c:showVal val="1"/>
+            <c:showCatName val="0"/>
+            <c:showSerName val="0"/>
+            <c:showPercent val="0"/>
+            <c:showBubbleSize val="0"/>
+            <c:showLeaderLines val="0"/>
+          </c:dLbls>
+          <c:cat>
+            <c:multiLvlStrRef>
+              <c:f>Sheet1!$A$2:$A$7</c:f>
+              <c:multiLvlStrCache>
+                <c:ptCount val="6"/>
+                <c:lvl>
+                  <c:pt idx="0">
+                    <c:v>Customer identity, authentication &amp; digital trust</c:v>
+                  </c:pt>
+                  <c:pt idx="1">
+                    <c:v>Privacy, data-sharing &amp; AI governance requirements</c:v>
+                  </c:pt>
+                  <c:pt idx="2">
+                    <c:v>Payment innovation (RTP, stablecoins, agentic payments)</c:v>
+                  </c:pt>
+                  <c:pt idx="3">
+                    <c:v>Liability &amp; reimbursement changes</c:v>
+                  </c:pt>
+                  <c:pt idx="4">
+                    <c:v>AML modernization initiatives</c:v>
+                  </c:pt>
+                  <c:pt idx="5">
+                    <c:v>Open Banking / consumer-driven initiatives</c:v>
+                  </c:pt>
+                </c:lvl>
+              </c:multiLvlStrCache>
+            </c:multiLvlStrRef>
+          </c:cat>
+          <c:val>
+            <c:numRef>
+              <c:f>Sheet1!$B$2:$B$7</c:f>
+              <c:numCache>
+                <c:formatCode>General</c:formatCode>
+                <c:ptCount val="6"/>
+                <c:pt idx="0">
+                  <c:v>71</c:v>
+                </c:pt>
+                <c:pt idx="1">
+                  <c:v>66</c:v>
+                </c:pt>
+                <c:pt idx="2">
+                  <c:v>65</c:v>
+                </c:pt>
+                <c:pt idx="3">
+                  <c:v>36</c:v>
+                </c:pt>
+                <c:pt idx="4">
+                  <c:v>33</c:v>
+                </c:pt>
+                <c:pt idx="5">
+                  <c:v>29</c:v>
+                </c:pt>
+              </c:numCache>
+            </c:numRef>
+          </c:val>
+        </c:ser>
+        <c:dLbls>
+          <c:numFmt formatCode="0&quot;%&quot;" sourceLinked="0"/>
+          <c:txPr>
+            <a:bodyPr/>
+            <a:lstStyle/>
+            <a:p>
+              <a:pPr>
+                <a:defRPr b="0" i="0" strike="noStrike" sz="1000" u="none">
+                  <a:solidFill>
+                    <a:srgbClr val="000000"/>
+                  </a:solidFill>
+                  <a:latin typeface="Arial"/>
+                </a:defRPr>
+              </a:pPr>
+            </a:p>
+          </c:txPr>
+          <c:showLegendKey val="0"/>
+          <c:showVal val="1"/>
+          <c:showCatName val="0"/>
+          <c:showSerName val="0"/>
+          <c:showPercent val="0"/>
+          <c:showBubbleSize val="0"/>
+          <c:showLeaderLines val="0"/>
+        </c:dLbls>
+        <c:gapWidth val="40"/>
+        <c:overlap val="0"/>
+        <c:axId val="2094734554"/>
+        <c:axId val="2094734552"/>
+        <c:axId val="2094734556"/>
+      </c:barChart>
+      <c:catAx>
+        <c:axId val="2094734554"/>
+        <c:scaling>
+          <c:orientation val="minMax"/>
+        </c:scaling>
+        <c:delete val="0"/>
+        <c:axPos val="l"/>
+        <c:numFmt formatCode="General" sourceLinked="1"/>
+        <c:majorTickMark val="out"/>
+        <c:minorTickMark val="none"/>
+        <c:tickLblPos val="nextTo"/>
+        <c:spPr>
+          <a:ln w="12700" cap="flat">
+            <a:noFill/>
+            <a:prstDash val="solid"/>
+            <a:round/>
+          </a:ln>
+        </c:spPr>
+        <c:txPr>
+          <a:bodyPr/>
+          <a:lstStyle/>
+          <a:p>
+            <a:pPr>
+              <a:defRPr sz="1000" b="0" i="0" u="none" strike="noStrike">
+                <a:solidFill>
+                  <a:srgbClr val="53565A"/>
+                </a:solidFill>
+                <a:latin typeface="Arial"/>
+              </a:defRPr>
+            </a:pPr>
+            <a:endParaRPr lang="en-US"/>
+          </a:p>
+        </c:txPr>
+        <c:crossAx val="2094734552"/>
+        <c:crosses val="autoZero"/>
+        <c:auto val="1"/>
+        <c:lblAlgn val="ctr"/>
+        <c:noMultiLvlLbl val="1"/>
+      </c:catAx>
+      <c:valAx>
+        <c:axId val="2094734552"/>
+        <c:scaling>
+          <c:orientation val="minMax"/>
+        </c:scaling>
+        <c:delete val="1"/>
+        <c:axPos val="b"/>
+        <c:numFmt formatCode="General" sourceLinked="0"/>
+        <c:majorTickMark val="out"/>
+        <c:minorTickMark val="none"/>
+        <c:tickLblPos val="low"/>
+        <c:spPr>
+          <a:ln w="12700" cap="flat">
+            <a:noFill/>
+            <a:prstDash val="solid"/>
+            <a:round/>
+          </a:ln>
+        </c:spPr>
+        <c:txPr>
+          <a:bodyPr/>
+          <a:lstStyle/>
+          <a:p>
+            <a:pPr>
+              <a:defRPr sz="1200" b="0" i="0" u="none" strike="noStrike">
+                <a:solidFill>
+                  <a:srgbClr val="000000"/>
+                </a:solidFill>
+                <a:latin typeface="Arial"/>
+              </a:defRPr>
+            </a:pPr>
+            <a:endParaRPr lang="en-US"/>
+          </a:p>
+        </c:txPr>
+        <c:crossAx val="2094734554"/>
+        <c:crosses val="autoZero"/>
+        <c:crossBetween val="between"/>
+      </c:valAx>
+      <c:spPr>
+        <a:solidFill>
+          <a:srgbClr val="FFFFFF"/>
+        </a:solidFill>
+        <a:ln>
+          <a:noFill/>
+        </a:ln>
+        <a:effectLst/>
+      </c:spPr>
+    </c:plotArea>
+    <c:plotVisOnly val="1"/>
+    <c:dispBlanksAs val="span"/>
+  </c:chart>
+  <c:spPr>
+    <a:noFill/>
+    <a:ln>
+      <a:noFill/>
+    </a:ln>
+    <a:effectLst/>
+  </c:spPr>
+  <c:externalData r:id="rId1">
+    <c:autoUpdate val="0"/>
+  </c:externalData>
+</c:chartSpace>
+</file>
+
+<file path=ppt/charts/chart43.xml><?xml version="1.0" encoding="utf-8"?>
 <c:chartSpace xmlns:c="http://schemas.openxmlformats.org/drawingml/2006/chart" xmlns:a="http://schemas.openxmlformats.org/drawingml/2006/main" xmlns:r="http://schemas.openxmlformats.org/officeDocument/2006/relationships">
   <c:date1904 val="0"/>
   <c:roundedCorners val="1"/>
@@ -21984,6 +22230,94 @@
             <a:fld id="{F7021451-1387-4CA6-816F-3879F97B5CBC}" type="slidenum">
               <a:rPr lang="en-US"/>
               <a:t>45</a:t>
+            </a:fld>
+            <a:endParaRPr lang="en-US"/>
+          </a:p>
+        </p:txBody>
+      </p:sp>
+    </p:spTree>
+    <p:extLst>
+      <p:ext uri="{BB962C8B-B14F-4D97-AF65-F5344CB8AC3E}">
+        <p14:creationId xmlns:p14="http://schemas.microsoft.com/office/powerpoint/2010/main" val="1024086991"/>
+      </p:ext>
+    </p:extLst>
+  </p:cSld>
+  <p:clrMapOvr>
+    <a:masterClrMapping/>
+  </p:clrMapOvr>
+</p:notes>
+</file>
+
+<file path=ppt/notesSlides/notesSlide46.xml><?xml version="1.0" encoding="utf-8"?>
+<p:notes xmlns:a="http://schemas.openxmlformats.org/drawingml/2006/main" xmlns:r="http://schemas.openxmlformats.org/officeDocument/2006/relationships" xmlns:p="http://schemas.openxmlformats.org/presentationml/2006/main">
+  <p:cSld>
+    <p:spTree>
+      <p:nvGrpSpPr>
+        <p:cNvPr id="1" name=""/>
+        <p:cNvGrpSpPr/>
+        <p:nvPr/>
+      </p:nvGrpSpPr>
+      <p:grpSpPr>
+        <a:xfrm>
+          <a:off x="0" y="0"/>
+          <a:ext cx="0" cy="0"/>
+          <a:chOff x="0" y="0"/>
+          <a:chExt cx="0" cy="0"/>
+        </a:xfrm>
+      </p:grpSpPr>
+      <p:sp>
+        <p:nvSpPr>
+          <p:cNvPr id="2" name="Slide Image Placeholder 1"/>
+          <p:cNvSpPr>
+            <a:spLocks noGrp="1" noRot="1" noChangeAspect="1"/>
+          </p:cNvSpPr>
+          <p:nvPr>
+            <p:ph type="sldImg"/>
+          </p:nvPr>
+        </p:nvSpPr>
+        <p:spPr/>
+      </p:sp>
+      <p:sp>
+        <p:nvSpPr>
+          <p:cNvPr id="3" name="Notes Placeholder 2"/>
+          <p:cNvSpPr>
+            <a:spLocks noGrp="1"/>
+          </p:cNvSpPr>
+          <p:nvPr>
+            <p:ph type="body" idx="1"/>
+          </p:nvPr>
+        </p:nvSpPr>
+        <p:spPr/>
+        <p:txBody>
+          <a:bodyPr/>
+          <a:lstStyle/>
+          <a:p>
+            <a:r>
+              <a:rPr lang="en-US" dirty="0"/>
+              <a:t/>
+            </a:r>
+            <a:endParaRPr lang="en-US" dirty="0"/>
+          </a:p>
+        </p:txBody>
+      </p:sp>
+      <p:sp>
+        <p:nvSpPr>
+          <p:cNvPr id="4" name="Slide Number Placeholder 3"/>
+          <p:cNvSpPr>
+            <a:spLocks noGrp="1"/>
+          </p:cNvSpPr>
+          <p:nvPr>
+            <p:ph type="sldNum" sz="quarter" idx="10"/>
+          </p:nvPr>
+        </p:nvSpPr>
+        <p:spPr/>
+        <p:txBody>
+          <a:bodyPr/>
+          <a:lstStyle/>
+          <a:p>
+            <a:fld id="{F7021451-1387-4CA6-816F-3879F97B5CBC}" type="slidenum">
+              <a:rPr lang="en-US"/>
+              <a:t>46</a:t>
             </a:fld>
             <a:endParaRPr lang="en-US"/>
           </a:p>
@@ -25988,7 +26322,7 @@
                 <a:ea typeface="Calibri" pitchFamily="34" charset="-122"/>
                 <a:cs typeface="Calibri" pitchFamily="34" charset="-120"/>
               </a:rPr>
-              <a:t>Government Action With the Greatest Impact on Info Sharing</a:t>
+              <a:t>Biggest Barriers to Effective Information Sharing — U.S. Banking Only</a:t>
             </a:r>
             <a:endParaRPr lang="en-US" sz="1900" dirty="0"/>
           </a:p>
@@ -26030,7 +26364,7 @@
                 <a:ea typeface="Calibri" pitchFamily="34" charset="-122"/>
                 <a:cs typeface="Calibri" pitchFamily="34" charset="-120"/>
               </a:rPr>
-              <a:t>Leaders want government to build shared infrastructure, not just pass new laws.</a:t>
+              <a:t>Among U.S. banks specifically, three barriers are tied for the top spot — data quality, legal constraints, and lack of external participation all cited by roughly three-quarters of respondents.</a:t>
             </a:r>
             <a:endParaRPr lang="en-US" sz="1350" dirty="0"/>
           </a:p>
@@ -26095,7 +26429,7 @@
                 <a:ea typeface="IBM Plex Mono" pitchFamily="34" charset="-122"/>
                 <a:cs typeface="IBM Plex Mono" pitchFamily="34" charset="-120"/>
               </a:rPr>
-              <a:t>Q4  </a:t>
+              <a:t>Q5  </a:t>
             </a:r>
             <a:pPr algn="l" indent="0" marL="0">
               <a:lnSpc>
@@ -26112,7 +26446,7 @@
                 <a:ea typeface="Calibri" pitchFamily="34" charset="-122"/>
                 <a:cs typeface="Calibri" pitchFamily="34" charset="-120"/>
               </a:rPr>
-              <a:t>“What government action would have or has had the greatest impact on enabling more effective fraud information sharing?”</a:t>
+              <a:t>“What are the biggest barriers to enable effective fraud information sharing? (Banking respondents based in the United States only)”</a:t>
             </a:r>
             <a:endParaRPr lang="en-US" sz="1000" dirty="0"/>
           </a:p>
@@ -26232,7 +26566,7 @@
                 <a:ea typeface="Calibri" pitchFamily="34" charset="-122"/>
                 <a:cs typeface="Calibri" pitchFamily="34" charset="-120"/>
               </a:rPr>
-              <a:t>Single select.  </a:t>
+              <a:t>Ranked top 3 — shown as % of respondents who placed the option anywhere in their top 3 (not mutually exclusive; bars don't sum to 100%). n=34 (United States Banking respondents only, out of Banking's full n=75).  </a:t>
             </a:r>
             <a:pPr algn="l" indent="0" marL="0">
               <a:lnSpc>
@@ -26266,7 +26600,7 @@
                 <a:ea typeface="Calibri" pitchFamily="34" charset="-122"/>
                 <a:cs typeface="Calibri" pitchFamily="34" charset="-120"/>
               </a:rPr>
-              <a:t>“Establish clearer legal and regulatory frameworks for information sharing”</a:t>
+              <a:t>“Legal, privacy, or regulatory constraints”</a:t>
             </a:r>
             <a:pPr algn="l" indent="0" marL="0">
               <a:lnSpc>
@@ -26300,7 +26634,7 @@
                 <a:ea typeface="Calibri" pitchFamily="34" charset="-122"/>
                 <a:cs typeface="Calibri" pitchFamily="34" charset="-120"/>
               </a:rPr>
-              <a:t>“Develop common data standards and definitions”</a:t>
+              <a:t>“Limited data standardization, poor quality, and different definitions”</a:t>
             </a:r>
             <a:pPr algn="l" indent="0" marL="0">
               <a:lnSpc>
@@ -26334,7 +26668,7 @@
                 <a:ea typeface="Calibri" pitchFamily="34" charset="-122"/>
                 <a:cs typeface="Calibri" pitchFamily="34" charset="-120"/>
               </a:rPr>
-              <a:t>“Create a centralized fraud information-sharing platform or utility”</a:t>
+              <a:t>“Insufficient budget or resource investment”</a:t>
             </a:r>
             <a:pPr algn="l" indent="0" marL="0">
               <a:lnSpc>
@@ -26368,7 +26702,7 @@
                 <a:ea typeface="Calibri" pitchFamily="34" charset="-122"/>
                 <a:cs typeface="Calibri" pitchFamily="34" charset="-120"/>
               </a:rPr>
-              <a:t>“Facilitate greater public-private collaboration and coordination”</a:t>
+              <a:t>“Lack of external industry participation or collaboration”</a:t>
             </a:r>
             <a:pPr algn="l" indent="0" marL="0">
               <a:lnSpc>
@@ -26402,7 +26736,7 @@
                 <a:ea typeface="Calibri" pitchFamily="34" charset="-122"/>
                 <a:cs typeface="Calibri" pitchFamily="34" charset="-120"/>
               </a:rPr>
-              <a:t>“Provide funding or incentives to support participation”</a:t>
+              <a:t>“Unclear internal ownership or governance”</a:t>
             </a:r>
             <a:pPr algn="l" indent="0" marL="0">
               <a:lnSpc>
@@ -26436,7 +26770,7 @@
                 <a:ea typeface="Calibri" pitchFamily="34" charset="-122"/>
                 <a:cs typeface="Calibri" pitchFamily="34" charset="-120"/>
               </a:rPr>
-              <a:t>“Identify and prioritize industry use cases for fraud information sharing”</a:t>
+              <a:t>“Difficulty demonstrating ROI or business value”</a:t>
             </a:r>
             <a:endParaRPr lang="en-US" sz="850" dirty="0"/>
           </a:p>
@@ -26507,7 +26841,7 @@
                 <a:ea typeface="Calibri" pitchFamily="34" charset="-122"/>
                 <a:cs typeface="Calibri" pitchFamily="34" charset="-120"/>
               </a:rPr>
-              <a:t>Top Government Action for Info Sharing — By Region</a:t>
+              <a:t>Government Action With the Greatest Impact on Info Sharing</a:t>
             </a:r>
             <a:endParaRPr lang="en-US" sz="1900" dirty="0"/>
           </a:p>
@@ -26549,7 +26883,7 @@
                 <a:ea typeface="Calibri" pitchFamily="34" charset="-122"/>
                 <a:cs typeface="Calibri" pitchFamily="34" charset="-120"/>
               </a:rPr>
-              <a:t>A centralized platform or utility remains a leading choice in almost every market, though priorities shift somewhat by region.</a:t>
+              <a:t>Leaders want government to build shared infrastructure, not just pass new laws.</a:t>
             </a:r>
             <a:endParaRPr lang="en-US" sz="1350" dirty="0"/>
           </a:p>
@@ -26631,7 +26965,7 @@
                 <a:ea typeface="Calibri" pitchFamily="34" charset="-122"/>
                 <a:cs typeface="Calibri" pitchFamily="34" charset="-120"/>
               </a:rPr>
-              <a:t>“What government action would have or has had the greatest impact on enabling more effective fraud information sharing? (by region, all respondents)”</a:t>
+              <a:t>“What government action would have or has had the greatest impact on enabling more effective fraud information sharing?”</a:t>
             </a:r>
             <a:endParaRPr lang="en-US" sz="1000" dirty="0"/>
           </a:p>
@@ -26751,7 +27085,7 @@
                 <a:ea typeface="Calibri" pitchFamily="34" charset="-122"/>
                 <a:cs typeface="Calibri" pitchFamily="34" charset="-120"/>
               </a:rPr>
-              <a:t>Single select — % shown is each region's share of the full 100-respondent sample, so segments sum to the overall figure in each category label. Australia (n=8) and Singapore (n=4) are thin samples, shown directionally.  </a:t>
+              <a:t>Single select.  </a:t>
             </a:r>
             <a:pPr algn="l" indent="0" marL="0">
               <a:lnSpc>
@@ -26975,7 +27309,7 @@
     <p:bg>
       <p:bgPr>
         <a:solidFill>
-          <a:srgbClr val="86BC25"/>
+          <a:srgbClr val="FFFFFF"/>
         </a:solidFill>
       </p:bgPr>
     </p:bg>
@@ -27001,47 +27335,8 @@
         </p:nvSpPr>
         <p:spPr>
           <a:xfrm>
-            <a:off x="502920" y="1699870"/>
-            <a:ext cx="10415016" cy="1591970"/>
-          </a:xfrm>
-          <a:prstGeom prst="rect">
-            <a:avLst/>
-          </a:prstGeom>
-          <a:noFill/>
-          <a:ln/>
-        </p:spPr>
-        <p:txBody>
-          <a:bodyPr wrap="square" lIns="0" tIns="0" rIns="0" bIns="0" rtlCol="0" anchor="b"/>
-          <a:lstStyle/>
-          <a:p>
-            <a:pPr algn="l" indent="0" marL="0">
-              <a:buNone/>
-            </a:pPr>
-            <a:r>
-              <a:rPr lang="en-US" sz="3600" b="1" dirty="0">
-                <a:solidFill>
-                  <a:srgbClr val="FFFFFF"/>
-                </a:solidFill>
-                <a:latin typeface="Calibri" pitchFamily="34" charset="0"/>
-                <a:ea typeface="Calibri" pitchFamily="34" charset="-122"/>
-                <a:cs typeface="Calibri" pitchFamily="34" charset="-120"/>
-              </a:rPr>
-              <a:t>3. Third-Party Fraud Risk</a:t>
-            </a:r>
-            <a:endParaRPr lang="en-US" sz="3600" dirty="0"/>
-          </a:p>
-        </p:txBody>
-      </p:sp>
-      <p:sp>
-        <p:nvSpPr>
-          <p:cNvPr id="3" name="Text 1"/>
-          <p:cNvSpPr txBox="1"/>
-          <p:nvPr/>
-        </p:nvSpPr>
-        <p:spPr>
-          <a:xfrm>
-            <a:off x="502920" y="3423514"/>
-            <a:ext cx="10415016" cy="1563624"/>
+            <a:off x="502006" y="256032"/>
+            <a:ext cx="11188598" cy="310896"/>
           </a:xfrm>
           <a:prstGeom prst="rect">
             <a:avLst/>
@@ -27054,29 +27349,150 @@
           <a:lstStyle/>
           <a:p>
             <a:pPr algn="l" indent="0" marL="0">
+              <a:buNone/>
+            </a:pPr>
+            <a:r>
+              <a:rPr lang="en-US" sz="1900" b="1" dirty="0">
+                <a:solidFill>
+                  <a:srgbClr val="000000"/>
+                </a:solidFill>
+                <a:latin typeface="Calibri" pitchFamily="34" charset="0"/>
+                <a:ea typeface="Calibri" pitchFamily="34" charset="-122"/>
+                <a:cs typeface="Calibri" pitchFamily="34" charset="-120"/>
+              </a:rPr>
+              <a:t>Top Government Action for Info Sharing — By Region</a:t>
+            </a:r>
+            <a:endParaRPr lang="en-US" sz="1900" dirty="0"/>
+          </a:p>
+        </p:txBody>
+      </p:sp>
+      <p:sp>
+        <p:nvSpPr>
+          <p:cNvPr id="3" name="Text 1"/>
+          <p:cNvSpPr txBox="1"/>
+          <p:nvPr/>
+        </p:nvSpPr>
+        <p:spPr>
+          <a:xfrm>
+            <a:off x="502006" y="585216"/>
+            <a:ext cx="11188598" cy="713232"/>
+          </a:xfrm>
+          <a:prstGeom prst="rect">
+            <a:avLst/>
+          </a:prstGeom>
+          <a:noFill/>
+          <a:ln/>
+        </p:spPr>
+        <p:txBody>
+          <a:bodyPr wrap="square" lIns="0" tIns="0" rIns="0" bIns="0" rtlCol="0" anchor="t"/>
+          <a:lstStyle/>
+          <a:p>
+            <a:pPr algn="l" indent="0" marL="0">
               <a:lnSpc>
-                <a:spcPct val="110000"/>
+                <a:spcPct val="105000"/>
               </a:lnSpc>
               <a:buNone/>
             </a:pPr>
             <a:r>
-              <a:rPr lang="en-US" sz="1600" dirty="0">
-                <a:solidFill>
-                  <a:srgbClr val="FFFFFF"/>
-                </a:solidFill>
-                <a:latin typeface="Calibri" pitchFamily="34" charset="0"/>
-                <a:ea typeface="Calibri" pitchFamily="34" charset="-122"/>
-                <a:cs typeface="Calibri" pitchFamily="34" charset="-120"/>
-              </a:rPr>
-              <a:t>Which external parties present the greatest exposure — and it splits sharply by sector.</a:t>
-            </a:r>
-            <a:endParaRPr lang="en-US" sz="1600" dirty="0"/>
+              <a:rPr lang="en-US" sz="1350" b="1" dirty="0">
+                <a:solidFill>
+                  <a:srgbClr val="046A38"/>
+                </a:solidFill>
+                <a:latin typeface="Calibri" pitchFamily="34" charset="0"/>
+                <a:ea typeface="Calibri" pitchFamily="34" charset="-122"/>
+                <a:cs typeface="Calibri" pitchFamily="34" charset="-120"/>
+              </a:rPr>
+              <a:t>A centralized platform or utility remains a leading choice in almost every market, though priorities shift somewhat by region.</a:t>
+            </a:r>
+            <a:endParaRPr lang="en-US" sz="1350" dirty="0"/>
           </a:p>
         </p:txBody>
       </p:sp>
       <p:sp>
         <p:nvSpPr>
-          <p:cNvPr id="4" name="Text 2"/>
+          <p:cNvPr id="4" name="Shape 2"/>
+          <p:cNvSpPr/>
+          <p:nvPr/>
+        </p:nvSpPr>
+        <p:spPr>
+          <a:xfrm>
+            <a:off x="502006" y="1335024"/>
+            <a:ext cx="0" cy="512064"/>
+          </a:xfrm>
+          <a:prstGeom prst="line">
+            <a:avLst/>
+          </a:prstGeom>
+          <a:noFill/>
+          <a:ln w="25400">
+            <a:solidFill>
+              <a:srgbClr val="D0D0CE"/>
+            </a:solidFill>
+            <a:prstDash val="solid"/>
+          </a:ln>
+        </p:spPr>
+      </p:sp>
+      <p:sp>
+        <p:nvSpPr>
+          <p:cNvPr id="5" name="Text 3"/>
+          <p:cNvSpPr txBox="1"/>
+          <p:nvPr/>
+        </p:nvSpPr>
+        <p:spPr>
+          <a:xfrm>
+            <a:off x="648310" y="1335024"/>
+            <a:ext cx="11042294" cy="512064"/>
+          </a:xfrm>
+          <a:prstGeom prst="rect">
+            <a:avLst/>
+          </a:prstGeom>
+          <a:noFill/>
+          <a:ln/>
+        </p:spPr>
+        <p:txBody>
+          <a:bodyPr wrap="square" lIns="0" tIns="0" rIns="0" bIns="0" rtlCol="0" anchor="t"/>
+          <a:lstStyle/>
+          <a:p>
+            <a:pPr algn="l" indent="0" marL="0">
+              <a:lnSpc>
+                <a:spcPct val="106000"/>
+              </a:lnSpc>
+              <a:buNone/>
+            </a:pPr>
+            <a:r>
+              <a:rPr lang="en-US" sz="900" b="1" dirty="0">
+                <a:solidFill>
+                  <a:srgbClr val="046A38"/>
+                </a:solidFill>
+                <a:latin typeface="IBM Plex Mono" pitchFamily="34" charset="0"/>
+                <a:ea typeface="IBM Plex Mono" pitchFamily="34" charset="-122"/>
+                <a:cs typeface="IBM Plex Mono" pitchFamily="34" charset="-120"/>
+              </a:rPr>
+              <a:t>Q4  </a:t>
+            </a:r>
+            <a:pPr algn="l" indent="0" marL="0">
+              <a:lnSpc>
+                <a:spcPct val="106000"/>
+              </a:lnSpc>
+              <a:buNone/>
+            </a:pPr>
+            <a:r>
+              <a:rPr lang="en-US" sz="1000" i="1" dirty="0">
+                <a:solidFill>
+                  <a:srgbClr val="575757"/>
+                </a:solidFill>
+                <a:latin typeface="Calibri" pitchFamily="34" charset="0"/>
+                <a:ea typeface="Calibri" pitchFamily="34" charset="-122"/>
+                <a:cs typeface="Calibri" pitchFamily="34" charset="-120"/>
+              </a:rPr>
+              <a:t>“What government action would have or has had the greatest impact on enabling more effective fraud information sharing? (by region, all respondents)”</a:t>
+            </a:r>
+            <a:endParaRPr lang="en-US" sz="1000" dirty="0"/>
+          </a:p>
+        </p:txBody>
+      </p:sp>
+      <p:sp>
+        <p:nvSpPr>
+          <p:cNvPr id="6" name="Text 4"/>
           <p:cNvSpPr txBox="1"/>
           <p:nvPr/>
         </p:nvSpPr>
@@ -27101,7 +27517,7 @@
             <a:r>
               <a:rPr lang="en-US" sz="900" dirty="0">
                 <a:solidFill>
-                  <a:srgbClr val="FFFFFF"/>
+                  <a:srgbClr val="53565A"/>
                 </a:solidFill>
                 <a:latin typeface="Calibri" pitchFamily="34" charset="0"/>
                 <a:ea typeface="Calibri" pitchFamily="34" charset="-122"/>
@@ -27110,6 +27526,291 @@
               <a:t>18</a:t>
             </a:r>
             <a:endParaRPr lang="en-US" sz="900" dirty="0"/>
+          </a:p>
+        </p:txBody>
+      </p:sp>
+      <p:graphicFrame>
+        <p:nvGraphicFramePr>
+          <p:cNvPr id="7" name="Chart 0" descr=""/>
+          <p:cNvGraphicFramePr/>
+          <p:nvPr/>
+        </p:nvGraphicFramePr>
+        <p:xfrm>
+          <a:off x="502006" y="2011680"/>
+          <a:ext cx="11188598" cy="3063240"/>
+        </p:xfrm>
+        <a:graphic xmlns:a="http://schemas.openxmlformats.org/drawingml/2006/main">
+          <a:graphicData uri="http://schemas.openxmlformats.org/drawingml/2006/chart">
+            <c:chart xmlns:c="http://schemas.openxmlformats.org/drawingml/2006/chart" r:id="rId1"/>
+          </a:graphicData>
+        </a:graphic>
+      </p:graphicFrame>
+      <p:sp>
+        <p:nvSpPr>
+          <p:cNvPr id="8" name="Shape 5"/>
+          <p:cNvSpPr/>
+          <p:nvPr/>
+        </p:nvSpPr>
+        <p:spPr>
+          <a:xfrm>
+            <a:off x="502006" y="5202936"/>
+            <a:ext cx="11188598" cy="0"/>
+          </a:xfrm>
+          <a:prstGeom prst="line">
+            <a:avLst/>
+          </a:prstGeom>
+          <a:noFill/>
+          <a:ln w="9525">
+            <a:solidFill>
+              <a:srgbClr val="D0D0CE"/>
+            </a:solidFill>
+            <a:prstDash val="solid"/>
+          </a:ln>
+        </p:spPr>
+      </p:sp>
+      <p:sp>
+        <p:nvSpPr>
+          <p:cNvPr id="9" name="Text 6"/>
+          <p:cNvSpPr txBox="1"/>
+          <p:nvPr/>
+        </p:nvSpPr>
+        <p:spPr>
+          <a:xfrm>
+            <a:off x="502006" y="5276088"/>
+            <a:ext cx="11188598" cy="886968"/>
+          </a:xfrm>
+          <a:prstGeom prst="rect">
+            <a:avLst/>
+          </a:prstGeom>
+          <a:noFill/>
+          <a:ln/>
+        </p:spPr>
+        <p:txBody>
+          <a:bodyPr wrap="square" lIns="0" tIns="0" rIns="0" bIns="0" rtlCol="0" anchor="t"/>
+          <a:lstStyle/>
+          <a:p>
+            <a:pPr algn="l" indent="0" marL="0">
+              <a:lnSpc>
+                <a:spcPct val="118000"/>
+              </a:lnSpc>
+              <a:buNone/>
+            </a:pPr>
+            <a:r>
+              <a:rPr lang="en-US" sz="850" b="1" dirty="0">
+                <a:solidFill>
+                  <a:srgbClr val="53565A"/>
+                </a:solidFill>
+                <a:latin typeface="Calibri" pitchFamily="34" charset="0"/>
+                <a:ea typeface="Calibri" pitchFamily="34" charset="-122"/>
+                <a:cs typeface="Calibri" pitchFamily="34" charset="-120"/>
+              </a:rPr>
+              <a:t>Single select — % shown is each region's share of the full 100-respondent sample, so segments sum to the overall figure in each category label. Australia (n=8) and Singapore (n=4) are thin samples, shown directionally.  </a:t>
+            </a:r>
+            <a:pPr algn="l" indent="0" marL="0">
+              <a:lnSpc>
+                <a:spcPct val="118000"/>
+              </a:lnSpc>
+              <a:buNone/>
+            </a:pPr>
+            <a:r>
+              <a:rPr lang="en-US" sz="850" b="1" dirty="0">
+                <a:solidFill>
+                  <a:srgbClr val="53565A"/>
+                </a:solidFill>
+                <a:latin typeface="Calibri" pitchFamily="34" charset="0"/>
+                <a:ea typeface="Calibri" pitchFamily="34" charset="-122"/>
+                <a:cs typeface="Calibri" pitchFamily="34" charset="-120"/>
+              </a:rPr>
+              <a:t>Response options as fielded: </a:t>
+            </a:r>
+            <a:pPr algn="l" indent="0" marL="0">
+              <a:lnSpc>
+                <a:spcPct val="118000"/>
+              </a:lnSpc>
+              <a:buNone/>
+            </a:pPr>
+            <a:r>
+              <a:rPr lang="en-US" sz="850" i="1" dirty="0">
+                <a:solidFill>
+                  <a:srgbClr val="53565A"/>
+                </a:solidFill>
+                <a:latin typeface="Calibri" pitchFamily="34" charset="0"/>
+                <a:ea typeface="Calibri" pitchFamily="34" charset="-122"/>
+                <a:cs typeface="Calibri" pitchFamily="34" charset="-120"/>
+              </a:rPr>
+              <a:t>“Establish clearer legal and regulatory frameworks for information sharing”</a:t>
+            </a:r>
+            <a:pPr algn="l" indent="0" marL="0">
+              <a:lnSpc>
+                <a:spcPct val="118000"/>
+              </a:lnSpc>
+              <a:buNone/>
+            </a:pPr>
+            <a:r>
+              <a:rPr lang="en-US" sz="850" dirty="0">
+                <a:solidFill>
+                  <a:srgbClr val="D0D0CE"/>
+                </a:solidFill>
+                <a:latin typeface="Calibri" pitchFamily="34" charset="0"/>
+                <a:ea typeface="Calibri" pitchFamily="34" charset="-122"/>
+                <a:cs typeface="Calibri" pitchFamily="34" charset="-120"/>
+              </a:rPr>
+              <a:t>  ·  </a:t>
+            </a:r>
+            <a:pPr algn="l" indent="0" marL="0">
+              <a:lnSpc>
+                <a:spcPct val="118000"/>
+              </a:lnSpc>
+              <a:buNone/>
+            </a:pPr>
+            <a:r>
+              <a:rPr lang="en-US" sz="850" i="1" dirty="0">
+                <a:solidFill>
+                  <a:srgbClr val="53565A"/>
+                </a:solidFill>
+                <a:latin typeface="Calibri" pitchFamily="34" charset="0"/>
+                <a:ea typeface="Calibri" pitchFamily="34" charset="-122"/>
+                <a:cs typeface="Calibri" pitchFamily="34" charset="-120"/>
+              </a:rPr>
+              <a:t>“Develop common data standards and definitions”</a:t>
+            </a:r>
+            <a:pPr algn="l" indent="0" marL="0">
+              <a:lnSpc>
+                <a:spcPct val="118000"/>
+              </a:lnSpc>
+              <a:buNone/>
+            </a:pPr>
+            <a:r>
+              <a:rPr lang="en-US" sz="850" dirty="0">
+                <a:solidFill>
+                  <a:srgbClr val="D0D0CE"/>
+                </a:solidFill>
+                <a:latin typeface="Calibri" pitchFamily="34" charset="0"/>
+                <a:ea typeface="Calibri" pitchFamily="34" charset="-122"/>
+                <a:cs typeface="Calibri" pitchFamily="34" charset="-120"/>
+              </a:rPr>
+              <a:t>  ·  </a:t>
+            </a:r>
+            <a:pPr algn="l" indent="0" marL="0">
+              <a:lnSpc>
+                <a:spcPct val="118000"/>
+              </a:lnSpc>
+              <a:buNone/>
+            </a:pPr>
+            <a:r>
+              <a:rPr lang="en-US" sz="850" i="1" dirty="0">
+                <a:solidFill>
+                  <a:srgbClr val="53565A"/>
+                </a:solidFill>
+                <a:latin typeface="Calibri" pitchFamily="34" charset="0"/>
+                <a:ea typeface="Calibri" pitchFamily="34" charset="-122"/>
+                <a:cs typeface="Calibri" pitchFamily="34" charset="-120"/>
+              </a:rPr>
+              <a:t>“Create a centralized fraud information-sharing platform or utility”</a:t>
+            </a:r>
+            <a:pPr algn="l" indent="0" marL="0">
+              <a:lnSpc>
+                <a:spcPct val="118000"/>
+              </a:lnSpc>
+              <a:buNone/>
+            </a:pPr>
+            <a:r>
+              <a:rPr lang="en-US" sz="850" dirty="0">
+                <a:solidFill>
+                  <a:srgbClr val="D0D0CE"/>
+                </a:solidFill>
+                <a:latin typeface="Calibri" pitchFamily="34" charset="0"/>
+                <a:ea typeface="Calibri" pitchFamily="34" charset="-122"/>
+                <a:cs typeface="Calibri" pitchFamily="34" charset="-120"/>
+              </a:rPr>
+              <a:t>  ·  </a:t>
+            </a:r>
+            <a:pPr algn="l" indent="0" marL="0">
+              <a:lnSpc>
+                <a:spcPct val="118000"/>
+              </a:lnSpc>
+              <a:buNone/>
+            </a:pPr>
+            <a:r>
+              <a:rPr lang="en-US" sz="850" i="1" dirty="0">
+                <a:solidFill>
+                  <a:srgbClr val="53565A"/>
+                </a:solidFill>
+                <a:latin typeface="Calibri" pitchFamily="34" charset="0"/>
+                <a:ea typeface="Calibri" pitchFamily="34" charset="-122"/>
+                <a:cs typeface="Calibri" pitchFamily="34" charset="-120"/>
+              </a:rPr>
+              <a:t>“Facilitate greater public-private collaboration and coordination”</a:t>
+            </a:r>
+            <a:pPr algn="l" indent="0" marL="0">
+              <a:lnSpc>
+                <a:spcPct val="118000"/>
+              </a:lnSpc>
+              <a:buNone/>
+            </a:pPr>
+            <a:r>
+              <a:rPr lang="en-US" sz="850" dirty="0">
+                <a:solidFill>
+                  <a:srgbClr val="D0D0CE"/>
+                </a:solidFill>
+                <a:latin typeface="Calibri" pitchFamily="34" charset="0"/>
+                <a:ea typeface="Calibri" pitchFamily="34" charset="-122"/>
+                <a:cs typeface="Calibri" pitchFamily="34" charset="-120"/>
+              </a:rPr>
+              <a:t>  ·  </a:t>
+            </a:r>
+            <a:pPr algn="l" indent="0" marL="0">
+              <a:lnSpc>
+                <a:spcPct val="118000"/>
+              </a:lnSpc>
+              <a:buNone/>
+            </a:pPr>
+            <a:r>
+              <a:rPr lang="en-US" sz="850" i="1" dirty="0">
+                <a:solidFill>
+                  <a:srgbClr val="53565A"/>
+                </a:solidFill>
+                <a:latin typeface="Calibri" pitchFamily="34" charset="0"/>
+                <a:ea typeface="Calibri" pitchFamily="34" charset="-122"/>
+                <a:cs typeface="Calibri" pitchFamily="34" charset="-120"/>
+              </a:rPr>
+              <a:t>“Provide funding or incentives to support participation”</a:t>
+            </a:r>
+            <a:pPr algn="l" indent="0" marL="0">
+              <a:lnSpc>
+                <a:spcPct val="118000"/>
+              </a:lnSpc>
+              <a:buNone/>
+            </a:pPr>
+            <a:r>
+              <a:rPr lang="en-US" sz="850" dirty="0">
+                <a:solidFill>
+                  <a:srgbClr val="D0D0CE"/>
+                </a:solidFill>
+                <a:latin typeface="Calibri" pitchFamily="34" charset="0"/>
+                <a:ea typeface="Calibri" pitchFamily="34" charset="-122"/>
+                <a:cs typeface="Calibri" pitchFamily="34" charset="-120"/>
+              </a:rPr>
+              <a:t>  ·  </a:t>
+            </a:r>
+            <a:pPr algn="l" indent="0" marL="0">
+              <a:lnSpc>
+                <a:spcPct val="118000"/>
+              </a:lnSpc>
+              <a:buNone/>
+            </a:pPr>
+            <a:r>
+              <a:rPr lang="en-US" sz="850" i="1" dirty="0">
+                <a:solidFill>
+                  <a:srgbClr val="53565A"/>
+                </a:solidFill>
+                <a:latin typeface="Calibri" pitchFamily="34" charset="0"/>
+                <a:ea typeface="Calibri" pitchFamily="34" charset="-122"/>
+                <a:cs typeface="Calibri" pitchFamily="34" charset="-120"/>
+              </a:rPr>
+              <a:t>“Identify and prioritize industry use cases for fraud information sharing”</a:t>
+            </a:r>
+            <a:endParaRPr lang="en-US" sz="850" dirty="0"/>
           </a:p>
         </p:txBody>
       </p:sp>
@@ -28063,7 +28764,7 @@
     <p:bg>
       <p:bgPr>
         <a:solidFill>
-          <a:srgbClr val="FFFFFF"/>
+          <a:srgbClr val="86BC25"/>
         </a:solidFill>
       </p:bgPr>
     </p:bg>
@@ -28089,8 +28790,47 @@
         </p:nvSpPr>
         <p:spPr>
           <a:xfrm>
-            <a:off x="502006" y="256032"/>
-            <a:ext cx="11188598" cy="310896"/>
+            <a:off x="502920" y="1699870"/>
+            <a:ext cx="10415016" cy="1591970"/>
+          </a:xfrm>
+          <a:prstGeom prst="rect">
+            <a:avLst/>
+          </a:prstGeom>
+          <a:noFill/>
+          <a:ln/>
+        </p:spPr>
+        <p:txBody>
+          <a:bodyPr wrap="square" lIns="0" tIns="0" rIns="0" bIns="0" rtlCol="0" anchor="b"/>
+          <a:lstStyle/>
+          <a:p>
+            <a:pPr algn="l" indent="0" marL="0">
+              <a:buNone/>
+            </a:pPr>
+            <a:r>
+              <a:rPr lang="en-US" sz="3600" b="1" dirty="0">
+                <a:solidFill>
+                  <a:srgbClr val="FFFFFF"/>
+                </a:solidFill>
+                <a:latin typeface="Calibri" pitchFamily="34" charset="0"/>
+                <a:ea typeface="Calibri" pitchFamily="34" charset="-122"/>
+                <a:cs typeface="Calibri" pitchFamily="34" charset="-120"/>
+              </a:rPr>
+              <a:t>3. Third-Party Fraud Risk</a:t>
+            </a:r>
+            <a:endParaRPr lang="en-US" sz="3600" dirty="0"/>
+          </a:p>
+        </p:txBody>
+      </p:sp>
+      <p:sp>
+        <p:nvSpPr>
+          <p:cNvPr id="3" name="Text 1"/>
+          <p:cNvSpPr txBox="1"/>
+          <p:nvPr/>
+        </p:nvSpPr>
+        <p:spPr>
+          <a:xfrm>
+            <a:off x="502920" y="3423514"/>
+            <a:ext cx="10415016" cy="1563624"/>
           </a:xfrm>
           <a:prstGeom prst="rect">
             <a:avLst/>
@@ -28103,150 +28843,29 @@
           <a:lstStyle/>
           <a:p>
             <a:pPr algn="l" indent="0" marL="0">
-              <a:buNone/>
-            </a:pPr>
-            <a:r>
-              <a:rPr lang="en-US" sz="1900" b="1" dirty="0">
-                <a:solidFill>
-                  <a:srgbClr val="000000"/>
-                </a:solidFill>
-                <a:latin typeface="Calibri" pitchFamily="34" charset="0"/>
-                <a:ea typeface="Calibri" pitchFamily="34" charset="-122"/>
-                <a:cs typeface="Calibri" pitchFamily="34" charset="-120"/>
-              </a:rPr>
-              <a:t>Greatest Third-Party Fraud Risk Exposure, by Sector</a:t>
-            </a:r>
-            <a:endParaRPr lang="en-US" sz="1900" dirty="0"/>
+              <a:lnSpc>
+                <a:spcPct val="110000"/>
+              </a:lnSpc>
+              <a:buNone/>
+            </a:pPr>
+            <a:r>
+              <a:rPr lang="en-US" sz="1600" dirty="0">
+                <a:solidFill>
+                  <a:srgbClr val="FFFFFF"/>
+                </a:solidFill>
+                <a:latin typeface="Calibri" pitchFamily="34" charset="0"/>
+                <a:ea typeface="Calibri" pitchFamily="34" charset="-122"/>
+                <a:cs typeface="Calibri" pitchFamily="34" charset="-120"/>
+              </a:rPr>
+              <a:t>Which external parties present the greatest exposure — and it splits sharply by sector.</a:t>
+            </a:r>
+            <a:endParaRPr lang="en-US" sz="1600" dirty="0"/>
           </a:p>
         </p:txBody>
       </p:sp>
       <p:sp>
         <p:nvSpPr>
-          <p:cNvPr id="3" name="Text 1"/>
-          <p:cNvSpPr txBox="1"/>
-          <p:nvPr/>
-        </p:nvSpPr>
-        <p:spPr>
-          <a:xfrm>
-            <a:off x="502006" y="585216"/>
-            <a:ext cx="11188598" cy="713232"/>
-          </a:xfrm>
-          <a:prstGeom prst="rect">
-            <a:avLst/>
-          </a:prstGeom>
-          <a:noFill/>
-          <a:ln/>
-        </p:spPr>
-        <p:txBody>
-          <a:bodyPr wrap="square" lIns="0" tIns="0" rIns="0" bIns="0" rtlCol="0" anchor="t"/>
-          <a:lstStyle/>
-          <a:p>
-            <a:pPr algn="l" indent="0" marL="0">
-              <a:lnSpc>
-                <a:spcPct val="105000"/>
-              </a:lnSpc>
-              <a:buNone/>
-            </a:pPr>
-            <a:r>
-              <a:rPr lang="en-US" sz="1350" b="1" dirty="0">
-                <a:solidFill>
-                  <a:srgbClr val="046A38"/>
-                </a:solidFill>
-                <a:latin typeface="Calibri" pitchFamily="34" charset="0"/>
-                <a:ea typeface="Calibri" pitchFamily="34" charset="-122"/>
-                <a:cs typeface="Calibri" pitchFamily="34" charset="-120"/>
-              </a:rPr>
-              <a:t>Banks and insurers face very different third-party risks — one fix won't work for both.</a:t>
-            </a:r>
-            <a:endParaRPr lang="en-US" sz="1350" dirty="0"/>
-          </a:p>
-        </p:txBody>
-      </p:sp>
-      <p:sp>
-        <p:nvSpPr>
-          <p:cNvPr id="4" name="Shape 2"/>
-          <p:cNvSpPr/>
-          <p:nvPr/>
-        </p:nvSpPr>
-        <p:spPr>
-          <a:xfrm>
-            <a:off x="502006" y="1335024"/>
-            <a:ext cx="0" cy="512064"/>
-          </a:xfrm>
-          <a:prstGeom prst="line">
-            <a:avLst/>
-          </a:prstGeom>
-          <a:noFill/>
-          <a:ln w="25400">
-            <a:solidFill>
-              <a:srgbClr val="D0D0CE"/>
-            </a:solidFill>
-            <a:prstDash val="solid"/>
-          </a:ln>
-        </p:spPr>
-      </p:sp>
-      <p:sp>
-        <p:nvSpPr>
-          <p:cNvPr id="5" name="Text 3"/>
-          <p:cNvSpPr txBox="1"/>
-          <p:nvPr/>
-        </p:nvSpPr>
-        <p:spPr>
-          <a:xfrm>
-            <a:off x="648310" y="1335024"/>
-            <a:ext cx="11042294" cy="512064"/>
-          </a:xfrm>
-          <a:prstGeom prst="rect">
-            <a:avLst/>
-          </a:prstGeom>
-          <a:noFill/>
-          <a:ln/>
-        </p:spPr>
-        <p:txBody>
-          <a:bodyPr wrap="square" lIns="0" tIns="0" rIns="0" bIns="0" rtlCol="0" anchor="t"/>
-          <a:lstStyle/>
-          <a:p>
-            <a:pPr algn="l" indent="0" marL="0">
-              <a:lnSpc>
-                <a:spcPct val="106000"/>
-              </a:lnSpc>
-              <a:buNone/>
-            </a:pPr>
-            <a:r>
-              <a:rPr lang="en-US" sz="900" b="1" dirty="0">
-                <a:solidFill>
-                  <a:srgbClr val="046A38"/>
-                </a:solidFill>
-                <a:latin typeface="IBM Plex Mono" pitchFamily="34" charset="0"/>
-                <a:ea typeface="IBM Plex Mono" pitchFamily="34" charset="-122"/>
-                <a:cs typeface="IBM Plex Mono" pitchFamily="34" charset="-120"/>
-              </a:rPr>
-              <a:t>Q6a / Q6b  </a:t>
-            </a:r>
-            <a:pPr algn="l" indent="0" marL="0">
-              <a:lnSpc>
-                <a:spcPct val="106000"/>
-              </a:lnSpc>
-              <a:buNone/>
-            </a:pPr>
-            <a:r>
-              <a:rPr lang="en-US" sz="1000" i="1" dirty="0">
-                <a:solidFill>
-                  <a:srgbClr val="575757"/>
-                </a:solidFill>
-                <a:latin typeface="Calibri" pitchFamily="34" charset="0"/>
-                <a:ea typeface="Calibri" pitchFamily="34" charset="-122"/>
-                <a:cs typeface="Calibri" pitchFamily="34" charset="-120"/>
-              </a:rPr>
-              <a:t>“Which external party currently presents the greatest fraud risk exposure to your organization? (asked separately of Banking and Insurance respondents)”</a:t>
-            </a:r>
-            <a:endParaRPr lang="en-US" sz="1000" dirty="0"/>
-          </a:p>
-        </p:txBody>
-      </p:sp>
-      <p:sp>
-        <p:nvSpPr>
-          <p:cNvPr id="6" name="Text 4"/>
+          <p:cNvPr id="4" name="Text 2"/>
           <p:cNvSpPr txBox="1"/>
           <p:nvPr/>
         </p:nvSpPr>
@@ -28271,7 +28890,7 @@
             <a:r>
               <a:rPr lang="en-US" sz="900" dirty="0">
                 <a:solidFill>
-                  <a:srgbClr val="53565A"/>
+                  <a:srgbClr val="FFFFFF"/>
                 </a:solidFill>
                 <a:latin typeface="Calibri" pitchFamily="34" charset="0"/>
                 <a:ea typeface="Calibri" pitchFamily="34" charset="-122"/>
@@ -28280,249 +28899,6 @@
               <a:t>19</a:t>
             </a:r>
             <a:endParaRPr lang="en-US" sz="900" dirty="0"/>
-          </a:p>
-        </p:txBody>
-      </p:sp>
-      <p:sp>
-        <p:nvSpPr>
-          <p:cNvPr id="7" name="Text 5"/>
-          <p:cNvSpPr txBox="1"/>
-          <p:nvPr/>
-        </p:nvSpPr>
-        <p:spPr>
-          <a:xfrm>
-            <a:off x="502006" y="1965960"/>
-            <a:ext cx="5486400" cy="256032"/>
-          </a:xfrm>
-          <a:prstGeom prst="rect">
-            <a:avLst/>
-          </a:prstGeom>
-          <a:noFill/>
-          <a:ln/>
-        </p:spPr>
-        <p:txBody>
-          <a:bodyPr wrap="square" rtlCol="0" anchor="ctr"/>
-          <a:lstStyle/>
-          <a:p>
-            <a:pPr indent="0" marL="0">
-              <a:buNone/>
-            </a:pPr>
-            <a:r>
-              <a:rPr lang="en-US" sz="1150" b="1" dirty="0">
-                <a:solidFill>
-                  <a:srgbClr val="000000"/>
-                </a:solidFill>
-                <a:latin typeface="Calibri" pitchFamily="34" charset="0"/>
-                <a:ea typeface="Calibri" pitchFamily="34" charset="-122"/>
-                <a:cs typeface="Calibri" pitchFamily="34" charset="-120"/>
-              </a:rPr>
-              <a:t>Banking (n=75)</a:t>
-            </a:r>
-            <a:endParaRPr lang="en-US" sz="1150" dirty="0"/>
-          </a:p>
-        </p:txBody>
-      </p:sp>
-      <p:graphicFrame>
-        <p:nvGraphicFramePr>
-          <p:cNvPr id="8" name="Chart 0" descr=""/>
-          <p:cNvGraphicFramePr/>
-          <p:nvPr/>
-        </p:nvGraphicFramePr>
-        <p:xfrm>
-          <a:off x="502006" y="2267712"/>
-          <a:ext cx="5486400" cy="2743200"/>
-        </p:xfrm>
-        <a:graphic xmlns:a="http://schemas.openxmlformats.org/drawingml/2006/main">
-          <a:graphicData uri="http://schemas.openxmlformats.org/drawingml/2006/chart">
-            <c:chart xmlns:c="http://schemas.openxmlformats.org/drawingml/2006/chart" r:id="rId1"/>
-          </a:graphicData>
-        </a:graphic>
-      </p:graphicFrame>
-      <p:sp>
-        <p:nvSpPr>
-          <p:cNvPr id="9" name="Text 6"/>
-          <p:cNvSpPr txBox="1"/>
-          <p:nvPr/>
-        </p:nvSpPr>
-        <p:spPr>
-          <a:xfrm>
-            <a:off x="6172200" y="1965960"/>
-            <a:ext cx="5486400" cy="256032"/>
-          </a:xfrm>
-          <a:prstGeom prst="rect">
-            <a:avLst/>
-          </a:prstGeom>
-          <a:noFill/>
-          <a:ln/>
-        </p:spPr>
-        <p:txBody>
-          <a:bodyPr wrap="square" rtlCol="0" anchor="ctr"/>
-          <a:lstStyle/>
-          <a:p>
-            <a:pPr indent="0" marL="0">
-              <a:buNone/>
-            </a:pPr>
-            <a:r>
-              <a:rPr lang="en-US" sz="1150" b="1" dirty="0">
-                <a:solidFill>
-                  <a:srgbClr val="000000"/>
-                </a:solidFill>
-                <a:latin typeface="Calibri" pitchFamily="34" charset="0"/>
-                <a:ea typeface="Calibri" pitchFamily="34" charset="-122"/>
-                <a:cs typeface="Calibri" pitchFamily="34" charset="-120"/>
-              </a:rPr>
-              <a:t>Insurance (n=25)</a:t>
-            </a:r>
-            <a:endParaRPr lang="en-US" sz="1150" dirty="0"/>
-          </a:p>
-        </p:txBody>
-      </p:sp>
-      <p:graphicFrame>
-        <p:nvGraphicFramePr>
-          <p:cNvPr id="10" name="Chart 1" descr=""/>
-          <p:cNvGraphicFramePr/>
-          <p:nvPr/>
-        </p:nvGraphicFramePr>
-        <p:xfrm>
-          <a:off x="6172200" y="2267712"/>
-          <a:ext cx="5486400" cy="2743200"/>
-        </p:xfrm>
-        <a:graphic xmlns:a="http://schemas.openxmlformats.org/drawingml/2006/main">
-          <a:graphicData uri="http://schemas.openxmlformats.org/drawingml/2006/chart">
-            <c:chart xmlns:c="http://schemas.openxmlformats.org/drawingml/2006/chart" r:id="rId2"/>
-          </a:graphicData>
-        </a:graphic>
-      </p:graphicFrame>
-      <p:sp>
-        <p:nvSpPr>
-          <p:cNvPr id="11" name="Shape 7"/>
-          <p:cNvSpPr/>
-          <p:nvPr/>
-        </p:nvSpPr>
-        <p:spPr>
-          <a:xfrm>
-            <a:off x="502006" y="5120640"/>
-            <a:ext cx="11188598" cy="0"/>
-          </a:xfrm>
-          <a:prstGeom prst="line">
-            <a:avLst/>
-          </a:prstGeom>
-          <a:noFill/>
-          <a:ln w="9525">
-            <a:solidFill>
-              <a:srgbClr val="D0D0CE"/>
-            </a:solidFill>
-            <a:prstDash val="solid"/>
-          </a:ln>
-        </p:spPr>
-      </p:sp>
-      <p:sp>
-        <p:nvSpPr>
-          <p:cNvPr id="12" name="Text 8"/>
-          <p:cNvSpPr txBox="1"/>
-          <p:nvPr/>
-        </p:nvSpPr>
-        <p:spPr>
-          <a:xfrm>
-            <a:off x="502006" y="5193792"/>
-            <a:ext cx="11188598" cy="914400"/>
-          </a:xfrm>
-          <a:prstGeom prst="rect">
-            <a:avLst/>
-          </a:prstGeom>
-          <a:noFill/>
-          <a:ln/>
-        </p:spPr>
-        <p:txBody>
-          <a:bodyPr wrap="square" lIns="0" tIns="0" rIns="0" bIns="0" rtlCol="0" anchor="t"/>
-          <a:lstStyle/>
-          <a:p>
-            <a:pPr algn="l" indent="0" marL="0">
-              <a:lnSpc>
-                <a:spcPct val="118000"/>
-              </a:lnSpc>
-              <a:buNone/>
-            </a:pPr>
-            <a:r>
-              <a:rPr lang="en-US" sz="850" b="1" dirty="0">
-                <a:solidFill>
-                  <a:srgbClr val="53565A"/>
-                </a:solidFill>
-                <a:latin typeface="Calibri" pitchFamily="34" charset="0"/>
-                <a:ea typeface="Calibri" pitchFamily="34" charset="-122"/>
-                <a:cs typeface="Calibri" pitchFamily="34" charset="-120"/>
-              </a:rPr>
-              <a:t>Response options as fielded — </a:t>
-            </a:r>
-            <a:pPr algn="l" indent="0" marL="0">
-              <a:lnSpc>
-                <a:spcPct val="118000"/>
-              </a:lnSpc>
-              <a:buNone/>
-            </a:pPr>
-            <a:r>
-              <a:rPr lang="en-US" sz="850" b="1" dirty="0">
-                <a:solidFill>
-                  <a:srgbClr val="046A38"/>
-                </a:solidFill>
-                <a:latin typeface="Calibri" pitchFamily="34" charset="0"/>
-                <a:ea typeface="Calibri" pitchFamily="34" charset="-122"/>
-                <a:cs typeface="Calibri" pitchFamily="34" charset="-120"/>
-              </a:rPr>
-              <a:t>Q6a Banking: </a:t>
-            </a:r>
-            <a:pPr algn="l" indent="0" marL="0">
-              <a:lnSpc>
-                <a:spcPct val="118000"/>
-              </a:lnSpc>
-              <a:buNone/>
-            </a:pPr>
-            <a:r>
-              <a:rPr lang="en-US" sz="850" i="1" dirty="0">
-                <a:solidFill>
-                  <a:srgbClr val="53565A"/>
-                </a:solidFill>
-                <a:latin typeface="Calibri" pitchFamily="34" charset="0"/>
-                <a:ea typeface="Calibri" pitchFamily="34" charset="-122"/>
-                <a:cs typeface="Calibri" pitchFamily="34" charset="-120"/>
-              </a:rPr>
-              <a:t>Mortgage brokers · Merchants · Fintech Partners · Dealers &amp; Indirect Lending Partners · Business &amp; Commercial Clients · Appraisers</a:t>
-            </a:r>
-            <a:pPr algn="l" indent="0" marL="0">
-              <a:lnSpc>
-                <a:spcPct val="118000"/>
-              </a:lnSpc>
-              <a:buNone/>
-            </a:pPr>
-            <a:r>
-              <a:rPr lang="en-US" sz="850" b="1" dirty="0">
-                <a:solidFill>
-                  <a:srgbClr val="046A38"/>
-                </a:solidFill>
-                <a:latin typeface="Calibri" pitchFamily="34" charset="0"/>
-                <a:ea typeface="Calibri" pitchFamily="34" charset="-122"/>
-                <a:cs typeface="Calibri" pitchFamily="34" charset="-120"/>
-              </a:rPr>
-              <a:t>  ·  Q6b Insurance: </a:t>
-            </a:r>
-            <a:pPr algn="l" indent="0" marL="0">
-              <a:lnSpc>
-                <a:spcPct val="118000"/>
-              </a:lnSpc>
-              <a:buNone/>
-            </a:pPr>
-            <a:r>
-              <a:rPr lang="en-US" sz="850" i="1" dirty="0">
-                <a:solidFill>
-                  <a:srgbClr val="53565A"/>
-                </a:solidFill>
-                <a:latin typeface="Calibri" pitchFamily="34" charset="0"/>
-                <a:ea typeface="Calibri" pitchFamily="34" charset="-122"/>
-                <a:cs typeface="Calibri" pitchFamily="34" charset="-120"/>
-              </a:rPr>
-              <a:t>Brokers and distribution partners · Health care providers · Automotive service providers · Legal representatives and paralegals · Third-party administrators (TPAs) · Property claims service providers</a:t>
-            </a:r>
-            <a:endParaRPr lang="en-US" sz="850" dirty="0"/>
           </a:p>
         </p:txBody>
       </p:sp>
@@ -28591,7 +28967,7 @@
                 <a:ea typeface="Calibri" pitchFamily="34" charset="-122"/>
                 <a:cs typeface="Calibri" pitchFamily="34" charset="-120"/>
               </a:rPr>
-              <a:t>Strategy Expected to Most Reduce Third-Party Risk</a:t>
+              <a:t>Greatest Third-Party Fraud Risk Exposure, by Sector</a:t>
             </a:r>
             <a:endParaRPr lang="en-US" sz="1900" dirty="0"/>
           </a:p>
@@ -28633,7 +29009,7 @@
                 <a:ea typeface="Calibri" pitchFamily="34" charset="-122"/>
                 <a:cs typeface="Calibri" pitchFamily="34" charset="-120"/>
               </a:rPr>
-              <a:t>Leaders would rather get smarter about spotting risk than tighten the front door.</a:t>
+              <a:t>Banks and insurers face very different third-party risks — one fix won't work for both.</a:t>
             </a:r>
             <a:endParaRPr lang="en-US" sz="1350" dirty="0"/>
           </a:p>
@@ -28698,7 +29074,7 @@
                 <a:ea typeface="IBM Plex Mono" pitchFamily="34" charset="-122"/>
                 <a:cs typeface="IBM Plex Mono" pitchFamily="34" charset="-120"/>
               </a:rPr>
-              <a:t>Q7  </a:t>
+              <a:t>Q6a / Q6b  </a:t>
             </a:r>
             <a:pPr algn="l" indent="0" marL="0">
               <a:lnSpc>
@@ -28715,7 +29091,7 @@
                 <a:ea typeface="Calibri" pitchFamily="34" charset="-122"/>
                 <a:cs typeface="Calibri" pitchFamily="34" charset="-120"/>
               </a:rPr>
-              <a:t>“Which strategy is expected to have the greatest impact on reducing third-party fraud risk over the next three years?”</a:t>
+              <a:t>“Which external party currently presents the greatest fraud risk exposure to your organization? (asked separately of Banking and Insurance respondents)”</a:t>
             </a:r>
             <a:endParaRPr lang="en-US" sz="1000" dirty="0"/>
           </a:p>
@@ -28760,15 +29136,54 @@
           </a:p>
         </p:txBody>
       </p:sp>
+      <p:sp>
+        <p:nvSpPr>
+          <p:cNvPr id="7" name="Text 5"/>
+          <p:cNvSpPr txBox="1"/>
+          <p:nvPr/>
+        </p:nvSpPr>
+        <p:spPr>
+          <a:xfrm>
+            <a:off x="502006" y="1965960"/>
+            <a:ext cx="5486400" cy="256032"/>
+          </a:xfrm>
+          <a:prstGeom prst="rect">
+            <a:avLst/>
+          </a:prstGeom>
+          <a:noFill/>
+          <a:ln/>
+        </p:spPr>
+        <p:txBody>
+          <a:bodyPr wrap="square" rtlCol="0" anchor="ctr"/>
+          <a:lstStyle/>
+          <a:p>
+            <a:pPr indent="0" marL="0">
+              <a:buNone/>
+            </a:pPr>
+            <a:r>
+              <a:rPr lang="en-US" sz="1150" b="1" dirty="0">
+                <a:solidFill>
+                  <a:srgbClr val="000000"/>
+                </a:solidFill>
+                <a:latin typeface="Calibri" pitchFamily="34" charset="0"/>
+                <a:ea typeface="Calibri" pitchFamily="34" charset="-122"/>
+                <a:cs typeface="Calibri" pitchFamily="34" charset="-120"/>
+              </a:rPr>
+              <a:t>Banking (n=75)</a:t>
+            </a:r>
+            <a:endParaRPr lang="en-US" sz="1150" dirty="0"/>
+          </a:p>
+        </p:txBody>
+      </p:sp>
       <p:graphicFrame>
         <p:nvGraphicFramePr>
-          <p:cNvPr id="7" name="Chart 0" descr=""/>
+          <p:cNvPr id="8" name="Chart 0" descr=""/>
           <p:cNvGraphicFramePr/>
           <p:nvPr/>
         </p:nvGraphicFramePr>
         <p:xfrm>
-          <a:off x="502006" y="2011680"/>
-          <a:ext cx="11188598" cy="3063240"/>
+          <a:off x="502006" y="2267712"/>
+          <a:ext cx="5486400" cy="2743200"/>
         </p:xfrm>
         <a:graphic xmlns:a="http://schemas.openxmlformats.org/drawingml/2006/main">
           <a:graphicData uri="http://schemas.openxmlformats.org/drawingml/2006/chart">
@@ -28778,13 +29193,68 @@
       </p:graphicFrame>
       <p:sp>
         <p:nvSpPr>
-          <p:cNvPr id="8" name="Shape 5"/>
+          <p:cNvPr id="9" name="Text 6"/>
+          <p:cNvSpPr txBox="1"/>
+          <p:nvPr/>
+        </p:nvSpPr>
+        <p:spPr>
+          <a:xfrm>
+            <a:off x="6172200" y="1965960"/>
+            <a:ext cx="5486400" cy="256032"/>
+          </a:xfrm>
+          <a:prstGeom prst="rect">
+            <a:avLst/>
+          </a:prstGeom>
+          <a:noFill/>
+          <a:ln/>
+        </p:spPr>
+        <p:txBody>
+          <a:bodyPr wrap="square" rtlCol="0" anchor="ctr"/>
+          <a:lstStyle/>
+          <a:p>
+            <a:pPr indent="0" marL="0">
+              <a:buNone/>
+            </a:pPr>
+            <a:r>
+              <a:rPr lang="en-US" sz="1150" b="1" dirty="0">
+                <a:solidFill>
+                  <a:srgbClr val="000000"/>
+                </a:solidFill>
+                <a:latin typeface="Calibri" pitchFamily="34" charset="0"/>
+                <a:ea typeface="Calibri" pitchFamily="34" charset="-122"/>
+                <a:cs typeface="Calibri" pitchFamily="34" charset="-120"/>
+              </a:rPr>
+              <a:t>Insurance (n=25)</a:t>
+            </a:r>
+            <a:endParaRPr lang="en-US" sz="1150" dirty="0"/>
+          </a:p>
+        </p:txBody>
+      </p:sp>
+      <p:graphicFrame>
+        <p:nvGraphicFramePr>
+          <p:cNvPr id="10" name="Chart 1" descr=""/>
+          <p:cNvGraphicFramePr/>
+          <p:nvPr/>
+        </p:nvGraphicFramePr>
+        <p:xfrm>
+          <a:off x="6172200" y="2267712"/>
+          <a:ext cx="5486400" cy="2743200"/>
+        </p:xfrm>
+        <a:graphic xmlns:a="http://schemas.openxmlformats.org/drawingml/2006/main">
+          <a:graphicData uri="http://schemas.openxmlformats.org/drawingml/2006/chart">
+            <c:chart xmlns:c="http://schemas.openxmlformats.org/drawingml/2006/chart" r:id="rId2"/>
+          </a:graphicData>
+        </a:graphic>
+      </p:graphicFrame>
+      <p:sp>
+        <p:nvSpPr>
+          <p:cNvPr id="11" name="Shape 7"/>
           <p:cNvSpPr/>
           <p:nvPr/>
         </p:nvSpPr>
         <p:spPr>
           <a:xfrm>
-            <a:off x="502006" y="5202936"/>
+            <a:off x="502006" y="5120640"/>
             <a:ext cx="11188598" cy="0"/>
           </a:xfrm>
           <a:prstGeom prst="line">
@@ -28801,14 +29271,14 @@
       </p:sp>
       <p:sp>
         <p:nvSpPr>
-          <p:cNvPr id="9" name="Text 6"/>
+          <p:cNvPr id="12" name="Text 8"/>
           <p:cNvSpPr txBox="1"/>
           <p:nvPr/>
         </p:nvSpPr>
         <p:spPr>
           <a:xfrm>
-            <a:off x="502006" y="5276088"/>
-            <a:ext cx="11188598" cy="886968"/>
+            <a:off x="502006" y="5193792"/>
+            <a:ext cx="11188598" cy="914400"/>
           </a:xfrm>
           <a:prstGeom prst="rect">
             <a:avLst/>
@@ -28835,7 +29305,7 @@
                 <a:ea typeface="Calibri" pitchFamily="34" charset="-122"/>
                 <a:cs typeface="Calibri" pitchFamily="34" charset="-120"/>
               </a:rPr>
-              <a:t>Single select.  </a:t>
+              <a:t>Response options as fielded — </a:t>
             </a:r>
             <a:pPr algn="l" indent="0" marL="0">
               <a:lnSpc>
@@ -28846,13 +29316,13 @@
             <a:r>
               <a:rPr lang="en-US" sz="850" b="1" dirty="0">
                 <a:solidFill>
-                  <a:srgbClr val="53565A"/>
-                </a:solidFill>
-                <a:latin typeface="Calibri" pitchFamily="34" charset="0"/>
-                <a:ea typeface="Calibri" pitchFamily="34" charset="-122"/>
-                <a:cs typeface="Calibri" pitchFamily="34" charset="-120"/>
-              </a:rPr>
-              <a:t>Response options as fielded: </a:t>
+                  <a:srgbClr val="046A38"/>
+                </a:solidFill>
+                <a:latin typeface="Calibri" pitchFamily="34" charset="0"/>
+                <a:ea typeface="Calibri" pitchFamily="34" charset="-122"/>
+                <a:cs typeface="Calibri" pitchFamily="34" charset="-120"/>
+              </a:rPr>
+              <a:t>Q6a Banking: </a:t>
             </a:r>
             <a:pPr algn="l" indent="0" marL="0">
               <a:lnSpc>
@@ -28869,7 +29339,7 @@
                 <a:ea typeface="Calibri" pitchFamily="34" charset="-122"/>
                 <a:cs typeface="Calibri" pitchFamily="34" charset="-120"/>
               </a:rPr>
-              <a:t>“Strengthen onboarding verification and due diligence controls”</a:t>
+              <a:t>Mortgage brokers · Merchants · Fintech Partners · Dealers &amp; Indirect Lending Partners · Business &amp; Commercial Clients · Appraisers</a:t>
             </a:r>
             <a:pPr algn="l" indent="0" marL="0">
               <a:lnSpc>
@@ -28878,15 +29348,15 @@
               <a:buNone/>
             </a:pPr>
             <a:r>
-              <a:rPr lang="en-US" sz="850" dirty="0">
-                <a:solidFill>
-                  <a:srgbClr val="D0D0CE"/>
-                </a:solidFill>
-                <a:latin typeface="Calibri" pitchFamily="34" charset="0"/>
-                <a:ea typeface="Calibri" pitchFamily="34" charset="-122"/>
-                <a:cs typeface="Calibri" pitchFamily="34" charset="-120"/>
-              </a:rPr>
-              <a:t>  ·  </a:t>
+              <a:rPr lang="en-US" sz="850" b="1" dirty="0">
+                <a:solidFill>
+                  <a:srgbClr val="046A38"/>
+                </a:solidFill>
+                <a:latin typeface="Calibri" pitchFamily="34" charset="0"/>
+                <a:ea typeface="Calibri" pitchFamily="34" charset="-122"/>
+                <a:cs typeface="Calibri" pitchFamily="34" charset="-120"/>
+              </a:rPr>
+              <a:t>  ·  Q6b Insurance: </a:t>
             </a:r>
             <a:pPr algn="l" indent="0" marL="0">
               <a:lnSpc>
@@ -28903,75 +29373,7 @@
                 <a:ea typeface="Calibri" pitchFamily="34" charset="-122"/>
                 <a:cs typeface="Calibri" pitchFamily="34" charset="-120"/>
               </a:rPr>
-              <a:t>“Enhance ongoing monitoring and detection (e.g., surveillance, analytics, anomaly detection)”</a:t>
-            </a:r>
-            <a:pPr algn="l" indent="0" marL="0">
-              <a:lnSpc>
-                <a:spcPct val="118000"/>
-              </a:lnSpc>
-              <a:buNone/>
-            </a:pPr>
-            <a:r>
-              <a:rPr lang="en-US" sz="850" dirty="0">
-                <a:solidFill>
-                  <a:srgbClr val="D0D0CE"/>
-                </a:solidFill>
-                <a:latin typeface="Calibri" pitchFamily="34" charset="0"/>
-                <a:ea typeface="Calibri" pitchFamily="34" charset="-122"/>
-                <a:cs typeface="Calibri" pitchFamily="34" charset="-120"/>
-              </a:rPr>
-              <a:t>  ·  </a:t>
-            </a:r>
-            <a:pPr algn="l" indent="0" marL="0">
-              <a:lnSpc>
-                <a:spcPct val="118000"/>
-              </a:lnSpc>
-              <a:buNone/>
-            </a:pPr>
-            <a:r>
-              <a:rPr lang="en-US" sz="850" i="1" dirty="0">
-                <a:solidFill>
-                  <a:srgbClr val="53565A"/>
-                </a:solidFill>
-                <a:latin typeface="Calibri" pitchFamily="34" charset="0"/>
-                <a:ea typeface="Calibri" pitchFamily="34" charset="-122"/>
-                <a:cs typeface="Calibri" pitchFamily="34" charset="-120"/>
-              </a:rPr>
-              <a:t>“Increase information sharing and intelligence across onboarding and ongoing monitoring”</a:t>
-            </a:r>
-            <a:pPr algn="l" indent="0" marL="0">
-              <a:lnSpc>
-                <a:spcPct val="118000"/>
-              </a:lnSpc>
-              <a:buNone/>
-            </a:pPr>
-            <a:r>
-              <a:rPr lang="en-US" sz="850" dirty="0">
-                <a:solidFill>
-                  <a:srgbClr val="D0D0CE"/>
-                </a:solidFill>
-                <a:latin typeface="Calibri" pitchFamily="34" charset="0"/>
-                <a:ea typeface="Calibri" pitchFamily="34" charset="-122"/>
-                <a:cs typeface="Calibri" pitchFamily="34" charset="-120"/>
-              </a:rPr>
-              <a:t>  ·  </a:t>
-            </a:r>
-            <a:pPr algn="l" indent="0" marL="0">
-              <a:lnSpc>
-                <a:spcPct val="118000"/>
-              </a:lnSpc>
-              <a:buNone/>
-            </a:pPr>
-            <a:r>
-              <a:rPr lang="en-US" sz="850" i="1" dirty="0">
-                <a:solidFill>
-                  <a:srgbClr val="53565A"/>
-                </a:solidFill>
-                <a:latin typeface="Calibri" pitchFamily="34" charset="0"/>
-                <a:ea typeface="Calibri" pitchFamily="34" charset="-122"/>
-                <a:cs typeface="Calibri" pitchFamily="34" charset="-120"/>
-              </a:rPr>
-              <a:t>“Strengthen third-party oversight and accountability (e.g., annual review, standards, performance monitoring)”</a:t>
+              <a:t>Brokers and distribution partners · Health care providers · Automotive service providers · Legal representatives and paralegals · Third-party administrators (TPAs) · Property claims service providers</a:t>
             </a:r>
             <a:endParaRPr lang="en-US" sz="850" dirty="0"/>
           </a:p>
@@ -29042,7 +29444,7 @@
                 <a:ea typeface="Calibri" pitchFamily="34" charset="-122"/>
                 <a:cs typeface="Calibri" pitchFamily="34" charset="-120"/>
               </a:rPr>
-              <a:t>Strategy to Reduce Third-Party Risk — By Sector</a:t>
+              <a:t>Strategy Expected to Most Reduce Third-Party Risk</a:t>
             </a:r>
             <a:endParaRPr lang="en-US" sz="1900" dirty="0"/>
           </a:p>
@@ -29084,7 +29486,7 @@
                 <a:ea typeface="Calibri" pitchFamily="34" charset="-122"/>
                 <a:cs typeface="Calibri" pitchFamily="34" charset="-120"/>
               </a:rPr>
-              <a:t>Banking leans toward intelligence-sharing; Insurance is split evenly between monitoring and oversight.</a:t>
+              <a:t>Leaders would rather get smarter about spotting risk than tighten the front door.</a:t>
             </a:r>
             <a:endParaRPr lang="en-US" sz="1350" dirty="0"/>
           </a:p>
@@ -29166,7 +29568,7 @@
                 <a:ea typeface="Calibri" pitchFamily="34" charset="-122"/>
                 <a:cs typeface="Calibri" pitchFamily="34" charset="-120"/>
               </a:rPr>
-              <a:t>“Which strategy is expected to have the greatest impact on reducing third-party fraud risk over the next three years? (Banking vs. Insurance)”</a:t>
+              <a:t>“Which strategy is expected to have the greatest impact on reducing third-party fraud risk over the next three years?”</a:t>
             </a:r>
             <a:endParaRPr lang="en-US" sz="1000" dirty="0"/>
           </a:p>
@@ -29493,7 +29895,7 @@
                 <a:ea typeface="Calibri" pitchFamily="34" charset="-122"/>
                 <a:cs typeface="Calibri" pitchFamily="34" charset="-120"/>
               </a:rPr>
-              <a:t>Strategy to Reduce Third-Party Risk — By Sector and Region</a:t>
+              <a:t>Strategy to Reduce Third-Party Risk — By Sector</a:t>
             </a:r>
             <a:endParaRPr lang="en-US" sz="1900" dirty="0"/>
           </a:p>
@@ -29535,7 +29937,7 @@
                 <a:ea typeface="Calibri" pitchFamily="34" charset="-122"/>
                 <a:cs typeface="Calibri" pitchFamily="34" charset="-120"/>
               </a:rPr>
-              <a:t>Within each sector, the preferred strategy shifts somewhat by region — though several regional cells are thin and should be read directionally, not precisely.</a:t>
+              <a:t>Banking leans toward intelligence-sharing; Insurance is split evenly between monitoring and oversight.</a:t>
             </a:r>
             <a:endParaRPr lang="en-US" sz="1350" dirty="0"/>
           </a:p>
@@ -29617,7 +30019,7 @@
                 <a:ea typeface="Calibri" pitchFamily="34" charset="-122"/>
                 <a:cs typeface="Calibri" pitchFamily="34" charset="-120"/>
               </a:rPr>
-              <a:t>“Which strategy is expected to have the greatest impact on reducing third-party fraud risk over the next three years? (Banking vs. Insurance, further broken down by region)”</a:t>
+              <a:t>“Which strategy is expected to have the greatest impact on reducing third-party fraud risk over the next three years? (Banking vs. Insurance)”</a:t>
             </a:r>
             <a:endParaRPr lang="en-US" sz="1000" dirty="0"/>
           </a:p>
@@ -29710,6 +30112,457 @@
         <p:spPr>
           <a:xfrm>
             <a:off x="502006" y="5276088"/>
+            <a:ext cx="11188598" cy="886968"/>
+          </a:xfrm>
+          <a:prstGeom prst="rect">
+            <a:avLst/>
+          </a:prstGeom>
+          <a:noFill/>
+          <a:ln/>
+        </p:spPr>
+        <p:txBody>
+          <a:bodyPr wrap="square" lIns="0" tIns="0" rIns="0" bIns="0" rtlCol="0" anchor="t"/>
+          <a:lstStyle/>
+          <a:p>
+            <a:pPr algn="l" indent="0" marL="0">
+              <a:lnSpc>
+                <a:spcPct val="118000"/>
+              </a:lnSpc>
+              <a:buNone/>
+            </a:pPr>
+            <a:r>
+              <a:rPr lang="en-US" sz="850" b="1" dirty="0">
+                <a:solidFill>
+                  <a:srgbClr val="53565A"/>
+                </a:solidFill>
+                <a:latin typeface="Calibri" pitchFamily="34" charset="0"/>
+                <a:ea typeface="Calibri" pitchFamily="34" charset="-122"/>
+                <a:cs typeface="Calibri" pitchFamily="34" charset="-120"/>
+              </a:rPr>
+              <a:t>Single select.  </a:t>
+            </a:r>
+            <a:pPr algn="l" indent="0" marL="0">
+              <a:lnSpc>
+                <a:spcPct val="118000"/>
+              </a:lnSpc>
+              <a:buNone/>
+            </a:pPr>
+            <a:r>
+              <a:rPr lang="en-US" sz="850" b="1" dirty="0">
+                <a:solidFill>
+                  <a:srgbClr val="53565A"/>
+                </a:solidFill>
+                <a:latin typeface="Calibri" pitchFamily="34" charset="0"/>
+                <a:ea typeface="Calibri" pitchFamily="34" charset="-122"/>
+                <a:cs typeface="Calibri" pitchFamily="34" charset="-120"/>
+              </a:rPr>
+              <a:t>Response options as fielded: </a:t>
+            </a:r>
+            <a:pPr algn="l" indent="0" marL="0">
+              <a:lnSpc>
+                <a:spcPct val="118000"/>
+              </a:lnSpc>
+              <a:buNone/>
+            </a:pPr>
+            <a:r>
+              <a:rPr lang="en-US" sz="850" i="1" dirty="0">
+                <a:solidFill>
+                  <a:srgbClr val="53565A"/>
+                </a:solidFill>
+                <a:latin typeface="Calibri" pitchFamily="34" charset="0"/>
+                <a:ea typeface="Calibri" pitchFamily="34" charset="-122"/>
+                <a:cs typeface="Calibri" pitchFamily="34" charset="-120"/>
+              </a:rPr>
+              <a:t>“Strengthen onboarding verification and due diligence controls”</a:t>
+            </a:r>
+            <a:pPr algn="l" indent="0" marL="0">
+              <a:lnSpc>
+                <a:spcPct val="118000"/>
+              </a:lnSpc>
+              <a:buNone/>
+            </a:pPr>
+            <a:r>
+              <a:rPr lang="en-US" sz="850" dirty="0">
+                <a:solidFill>
+                  <a:srgbClr val="D0D0CE"/>
+                </a:solidFill>
+                <a:latin typeface="Calibri" pitchFamily="34" charset="0"/>
+                <a:ea typeface="Calibri" pitchFamily="34" charset="-122"/>
+                <a:cs typeface="Calibri" pitchFamily="34" charset="-120"/>
+              </a:rPr>
+              <a:t>  ·  </a:t>
+            </a:r>
+            <a:pPr algn="l" indent="0" marL="0">
+              <a:lnSpc>
+                <a:spcPct val="118000"/>
+              </a:lnSpc>
+              <a:buNone/>
+            </a:pPr>
+            <a:r>
+              <a:rPr lang="en-US" sz="850" i="1" dirty="0">
+                <a:solidFill>
+                  <a:srgbClr val="53565A"/>
+                </a:solidFill>
+                <a:latin typeface="Calibri" pitchFamily="34" charset="0"/>
+                <a:ea typeface="Calibri" pitchFamily="34" charset="-122"/>
+                <a:cs typeface="Calibri" pitchFamily="34" charset="-120"/>
+              </a:rPr>
+              <a:t>“Enhance ongoing monitoring and detection (e.g., surveillance, analytics, anomaly detection)”</a:t>
+            </a:r>
+            <a:pPr algn="l" indent="0" marL="0">
+              <a:lnSpc>
+                <a:spcPct val="118000"/>
+              </a:lnSpc>
+              <a:buNone/>
+            </a:pPr>
+            <a:r>
+              <a:rPr lang="en-US" sz="850" dirty="0">
+                <a:solidFill>
+                  <a:srgbClr val="D0D0CE"/>
+                </a:solidFill>
+                <a:latin typeface="Calibri" pitchFamily="34" charset="0"/>
+                <a:ea typeface="Calibri" pitchFamily="34" charset="-122"/>
+                <a:cs typeface="Calibri" pitchFamily="34" charset="-120"/>
+              </a:rPr>
+              <a:t>  ·  </a:t>
+            </a:r>
+            <a:pPr algn="l" indent="0" marL="0">
+              <a:lnSpc>
+                <a:spcPct val="118000"/>
+              </a:lnSpc>
+              <a:buNone/>
+            </a:pPr>
+            <a:r>
+              <a:rPr lang="en-US" sz="850" i="1" dirty="0">
+                <a:solidFill>
+                  <a:srgbClr val="53565A"/>
+                </a:solidFill>
+                <a:latin typeface="Calibri" pitchFamily="34" charset="0"/>
+                <a:ea typeface="Calibri" pitchFamily="34" charset="-122"/>
+                <a:cs typeface="Calibri" pitchFamily="34" charset="-120"/>
+              </a:rPr>
+              <a:t>“Increase information sharing and intelligence across onboarding and ongoing monitoring”</a:t>
+            </a:r>
+            <a:pPr algn="l" indent="0" marL="0">
+              <a:lnSpc>
+                <a:spcPct val="118000"/>
+              </a:lnSpc>
+              <a:buNone/>
+            </a:pPr>
+            <a:r>
+              <a:rPr lang="en-US" sz="850" dirty="0">
+                <a:solidFill>
+                  <a:srgbClr val="D0D0CE"/>
+                </a:solidFill>
+                <a:latin typeface="Calibri" pitchFamily="34" charset="0"/>
+                <a:ea typeface="Calibri" pitchFamily="34" charset="-122"/>
+                <a:cs typeface="Calibri" pitchFamily="34" charset="-120"/>
+              </a:rPr>
+              <a:t>  ·  </a:t>
+            </a:r>
+            <a:pPr algn="l" indent="0" marL="0">
+              <a:lnSpc>
+                <a:spcPct val="118000"/>
+              </a:lnSpc>
+              <a:buNone/>
+            </a:pPr>
+            <a:r>
+              <a:rPr lang="en-US" sz="850" i="1" dirty="0">
+                <a:solidFill>
+                  <a:srgbClr val="53565A"/>
+                </a:solidFill>
+                <a:latin typeface="Calibri" pitchFamily="34" charset="0"/>
+                <a:ea typeface="Calibri" pitchFamily="34" charset="-122"/>
+                <a:cs typeface="Calibri" pitchFamily="34" charset="-120"/>
+              </a:rPr>
+              <a:t>“Strengthen third-party oversight and accountability (e.g., annual review, standards, performance monitoring)”</a:t>
+            </a:r>
+            <a:endParaRPr lang="en-US" sz="850" dirty="0"/>
+          </a:p>
+        </p:txBody>
+      </p:sp>
+    </p:spTree>
+  </p:cSld>
+  <p:clrMapOvr>
+    <a:masterClrMapping/>
+  </p:clrMapOvr>
+</p:sld>
+</file>
+
+<file path=ppt/slides/slide24.xml><?xml version="1.0" encoding="utf-8"?>
+<p:sld xmlns:a="http://schemas.openxmlformats.org/drawingml/2006/main" xmlns:r="http://schemas.openxmlformats.org/officeDocument/2006/relationships" xmlns:p="http://schemas.openxmlformats.org/presentationml/2006/main">
+  <p:cSld name="Slide 24">
+    <p:bg>
+      <p:bgPr>
+        <a:solidFill>
+          <a:srgbClr val="FFFFFF"/>
+        </a:solidFill>
+      </p:bgPr>
+    </p:bg>
+    <p:spTree>
+      <p:nvGrpSpPr>
+        <p:cNvPr id="1" name=""/>
+        <p:cNvGrpSpPr/>
+        <p:nvPr/>
+      </p:nvGrpSpPr>
+      <p:grpSpPr>
+        <a:xfrm>
+          <a:off x="0" y="0"/>
+          <a:ext cx="0" cy="0"/>
+          <a:chOff x="0" y="0"/>
+          <a:chExt cx="0" cy="0"/>
+        </a:xfrm>
+      </p:grpSpPr>
+      <p:sp>
+        <p:nvSpPr>
+          <p:cNvPr id="2" name="Text 0"/>
+          <p:cNvSpPr txBox="1"/>
+          <p:nvPr/>
+        </p:nvSpPr>
+        <p:spPr>
+          <a:xfrm>
+            <a:off x="502006" y="256032"/>
+            <a:ext cx="11188598" cy="310896"/>
+          </a:xfrm>
+          <a:prstGeom prst="rect">
+            <a:avLst/>
+          </a:prstGeom>
+          <a:noFill/>
+          <a:ln/>
+        </p:spPr>
+        <p:txBody>
+          <a:bodyPr wrap="square" lIns="0" tIns="0" rIns="0" bIns="0" rtlCol="0" anchor="t"/>
+          <a:lstStyle/>
+          <a:p>
+            <a:pPr algn="l" indent="0" marL="0">
+              <a:buNone/>
+            </a:pPr>
+            <a:r>
+              <a:rPr lang="en-US" sz="1900" b="1" dirty="0">
+                <a:solidFill>
+                  <a:srgbClr val="000000"/>
+                </a:solidFill>
+                <a:latin typeface="Calibri" pitchFamily="34" charset="0"/>
+                <a:ea typeface="Calibri" pitchFamily="34" charset="-122"/>
+                <a:cs typeface="Calibri" pitchFamily="34" charset="-120"/>
+              </a:rPr>
+              <a:t>Strategy to Reduce Third-Party Risk — By Sector and Region</a:t>
+            </a:r>
+            <a:endParaRPr lang="en-US" sz="1900" dirty="0"/>
+          </a:p>
+        </p:txBody>
+      </p:sp>
+      <p:sp>
+        <p:nvSpPr>
+          <p:cNvPr id="3" name="Text 1"/>
+          <p:cNvSpPr txBox="1"/>
+          <p:nvPr/>
+        </p:nvSpPr>
+        <p:spPr>
+          <a:xfrm>
+            <a:off x="502006" y="585216"/>
+            <a:ext cx="11188598" cy="713232"/>
+          </a:xfrm>
+          <a:prstGeom prst="rect">
+            <a:avLst/>
+          </a:prstGeom>
+          <a:noFill/>
+          <a:ln/>
+        </p:spPr>
+        <p:txBody>
+          <a:bodyPr wrap="square" lIns="0" tIns="0" rIns="0" bIns="0" rtlCol="0" anchor="t"/>
+          <a:lstStyle/>
+          <a:p>
+            <a:pPr algn="l" indent="0" marL="0">
+              <a:lnSpc>
+                <a:spcPct val="105000"/>
+              </a:lnSpc>
+              <a:buNone/>
+            </a:pPr>
+            <a:r>
+              <a:rPr lang="en-US" sz="1350" b="1" dirty="0">
+                <a:solidFill>
+                  <a:srgbClr val="046A38"/>
+                </a:solidFill>
+                <a:latin typeface="Calibri" pitchFamily="34" charset="0"/>
+                <a:ea typeface="Calibri" pitchFamily="34" charset="-122"/>
+                <a:cs typeface="Calibri" pitchFamily="34" charset="-120"/>
+              </a:rPr>
+              <a:t>Within each sector, the preferred strategy shifts somewhat by region — though several regional cells are thin and should be read directionally, not precisely.</a:t>
+            </a:r>
+            <a:endParaRPr lang="en-US" sz="1350" dirty="0"/>
+          </a:p>
+        </p:txBody>
+      </p:sp>
+      <p:sp>
+        <p:nvSpPr>
+          <p:cNvPr id="4" name="Shape 2"/>
+          <p:cNvSpPr/>
+          <p:nvPr/>
+        </p:nvSpPr>
+        <p:spPr>
+          <a:xfrm>
+            <a:off x="502006" y="1335024"/>
+            <a:ext cx="0" cy="512064"/>
+          </a:xfrm>
+          <a:prstGeom prst="line">
+            <a:avLst/>
+          </a:prstGeom>
+          <a:noFill/>
+          <a:ln w="25400">
+            <a:solidFill>
+              <a:srgbClr val="D0D0CE"/>
+            </a:solidFill>
+            <a:prstDash val="solid"/>
+          </a:ln>
+        </p:spPr>
+      </p:sp>
+      <p:sp>
+        <p:nvSpPr>
+          <p:cNvPr id="5" name="Text 3"/>
+          <p:cNvSpPr txBox="1"/>
+          <p:nvPr/>
+        </p:nvSpPr>
+        <p:spPr>
+          <a:xfrm>
+            <a:off x="648310" y="1335024"/>
+            <a:ext cx="11042294" cy="512064"/>
+          </a:xfrm>
+          <a:prstGeom prst="rect">
+            <a:avLst/>
+          </a:prstGeom>
+          <a:noFill/>
+          <a:ln/>
+        </p:spPr>
+        <p:txBody>
+          <a:bodyPr wrap="square" lIns="0" tIns="0" rIns="0" bIns="0" rtlCol="0" anchor="t"/>
+          <a:lstStyle/>
+          <a:p>
+            <a:pPr algn="l" indent="0" marL="0">
+              <a:lnSpc>
+                <a:spcPct val="106000"/>
+              </a:lnSpc>
+              <a:buNone/>
+            </a:pPr>
+            <a:r>
+              <a:rPr lang="en-US" sz="900" b="1" dirty="0">
+                <a:solidFill>
+                  <a:srgbClr val="046A38"/>
+                </a:solidFill>
+                <a:latin typeface="IBM Plex Mono" pitchFamily="34" charset="0"/>
+                <a:ea typeface="IBM Plex Mono" pitchFamily="34" charset="-122"/>
+                <a:cs typeface="IBM Plex Mono" pitchFamily="34" charset="-120"/>
+              </a:rPr>
+              <a:t>Q7  </a:t>
+            </a:r>
+            <a:pPr algn="l" indent="0" marL="0">
+              <a:lnSpc>
+                <a:spcPct val="106000"/>
+              </a:lnSpc>
+              <a:buNone/>
+            </a:pPr>
+            <a:r>
+              <a:rPr lang="en-US" sz="1000" i="1" dirty="0">
+                <a:solidFill>
+                  <a:srgbClr val="575757"/>
+                </a:solidFill>
+                <a:latin typeface="Calibri" pitchFamily="34" charset="0"/>
+                <a:ea typeface="Calibri" pitchFamily="34" charset="-122"/>
+                <a:cs typeface="Calibri" pitchFamily="34" charset="-120"/>
+              </a:rPr>
+              <a:t>“Which strategy is expected to have the greatest impact on reducing third-party fraud risk over the next three years? (Banking vs. Insurance, further broken down by region)”</a:t>
+            </a:r>
+            <a:endParaRPr lang="en-US" sz="1000" dirty="0"/>
+          </a:p>
+        </p:txBody>
+      </p:sp>
+      <p:sp>
+        <p:nvSpPr>
+          <p:cNvPr id="6" name="Text 4"/>
+          <p:cNvSpPr txBox="1"/>
+          <p:nvPr/>
+        </p:nvSpPr>
+        <p:spPr>
+          <a:xfrm>
+            <a:off x="11346790" y="6537960"/>
+            <a:ext cx="343814" cy="182880"/>
+          </a:xfrm>
+          <a:prstGeom prst="rect">
+            <a:avLst/>
+          </a:prstGeom>
+          <a:noFill/>
+          <a:ln/>
+        </p:spPr>
+        <p:txBody>
+          <a:bodyPr wrap="square" rtlCol="0" anchor="ctr"/>
+          <a:lstStyle/>
+          <a:p>
+            <a:pPr algn="r" indent="0" marL="0">
+              <a:buNone/>
+            </a:pPr>
+            <a:r>
+              <a:rPr lang="en-US" sz="900" dirty="0">
+                <a:solidFill>
+                  <a:srgbClr val="53565A"/>
+                </a:solidFill>
+                <a:latin typeface="Calibri" pitchFamily="34" charset="0"/>
+                <a:ea typeface="Calibri" pitchFamily="34" charset="-122"/>
+                <a:cs typeface="Calibri" pitchFamily="34" charset="-120"/>
+              </a:rPr>
+              <a:t>23</a:t>
+            </a:r>
+            <a:endParaRPr lang="en-US" sz="900" dirty="0"/>
+          </a:p>
+        </p:txBody>
+      </p:sp>
+      <p:graphicFrame>
+        <p:nvGraphicFramePr>
+          <p:cNvPr id="7" name="Chart 0" descr=""/>
+          <p:cNvGraphicFramePr/>
+          <p:nvPr/>
+        </p:nvGraphicFramePr>
+        <p:xfrm>
+          <a:off x="502006" y="2011680"/>
+          <a:ext cx="11188598" cy="3063240"/>
+        </p:xfrm>
+        <a:graphic xmlns:a="http://schemas.openxmlformats.org/drawingml/2006/main">
+          <a:graphicData uri="http://schemas.openxmlformats.org/drawingml/2006/chart">
+            <c:chart xmlns:c="http://schemas.openxmlformats.org/drawingml/2006/chart" r:id="rId1"/>
+          </a:graphicData>
+        </a:graphic>
+      </p:graphicFrame>
+      <p:sp>
+        <p:nvSpPr>
+          <p:cNvPr id="8" name="Shape 5"/>
+          <p:cNvSpPr/>
+          <p:nvPr/>
+        </p:nvSpPr>
+        <p:spPr>
+          <a:xfrm>
+            <a:off x="502006" y="5202936"/>
+            <a:ext cx="11188598" cy="0"/>
+          </a:xfrm>
+          <a:prstGeom prst="line">
+            <a:avLst/>
+          </a:prstGeom>
+          <a:noFill/>
+          <a:ln w="9525">
+            <a:solidFill>
+              <a:srgbClr val="D0D0CE"/>
+            </a:solidFill>
+            <a:prstDash val="solid"/>
+          </a:ln>
+        </p:spPr>
+      </p:sp>
+      <p:sp>
+        <p:nvSpPr>
+          <p:cNvPr id="9" name="Text 6"/>
+          <p:cNvSpPr txBox="1"/>
+          <p:nvPr/>
+        </p:nvSpPr>
+        <p:spPr>
+          <a:xfrm>
+            <a:off x="502006" y="5276088"/>
             <a:ext cx="11188598" cy="676656"/>
           </a:xfrm>
           <a:prstGeom prst="rect">
@@ -29827,9 +30680,9 @@
 </p:sld>
 </file>
 
-<file path=ppt/slides/slide24.xml><?xml version="1.0" encoding="utf-8"?>
+<file path=ppt/slides/slide25.xml><?xml version="1.0" encoding="utf-8"?>
 <p:sld xmlns:a="http://schemas.openxmlformats.org/drawingml/2006/main" xmlns:r="http://schemas.openxmlformats.org/officeDocument/2006/relationships" xmlns:p="http://schemas.openxmlformats.org/presentationml/2006/main">
-  <p:cSld name="Slide 24">
+  <p:cSld name="Slide 25">
     <p:bg>
       <p:bgPr>
         <a:solidFill>
@@ -29965,494 +30818,9 @@
                 <a:ea typeface="Calibri" pitchFamily="34" charset="-122"/>
                 <a:cs typeface="Calibri" pitchFamily="34" charset="-120"/>
               </a:rPr>
-              <a:t>23</a:t>
+              <a:t>24</a:t>
             </a:r>
             <a:endParaRPr lang="en-US" sz="900" dirty="0"/>
-          </a:p>
-        </p:txBody>
-      </p:sp>
-    </p:spTree>
-  </p:cSld>
-  <p:clrMapOvr>
-    <a:masterClrMapping/>
-  </p:clrMapOvr>
-</p:sld>
-</file>
-
-<file path=ppt/slides/slide25.xml><?xml version="1.0" encoding="utf-8"?>
-<p:sld xmlns:a="http://schemas.openxmlformats.org/drawingml/2006/main" xmlns:r="http://schemas.openxmlformats.org/officeDocument/2006/relationships" xmlns:p="http://schemas.openxmlformats.org/presentationml/2006/main">
-  <p:cSld name="Slide 25">
-    <p:bg>
-      <p:bgPr>
-        <a:solidFill>
-          <a:srgbClr val="FFFFFF"/>
-        </a:solidFill>
-      </p:bgPr>
-    </p:bg>
-    <p:spTree>
-      <p:nvGrpSpPr>
-        <p:cNvPr id="1" name=""/>
-        <p:cNvGrpSpPr/>
-        <p:nvPr/>
-      </p:nvGrpSpPr>
-      <p:grpSpPr>
-        <a:xfrm>
-          <a:off x="0" y="0"/>
-          <a:ext cx="0" cy="0"/>
-          <a:chOff x="0" y="0"/>
-          <a:chExt cx="0" cy="0"/>
-        </a:xfrm>
-      </p:grpSpPr>
-      <p:sp>
-        <p:nvSpPr>
-          <p:cNvPr id="2" name="Text 0"/>
-          <p:cNvSpPr txBox="1"/>
-          <p:nvPr/>
-        </p:nvSpPr>
-        <p:spPr>
-          <a:xfrm>
-            <a:off x="502006" y="256032"/>
-            <a:ext cx="11188598" cy="310896"/>
-          </a:xfrm>
-          <a:prstGeom prst="rect">
-            <a:avLst/>
-          </a:prstGeom>
-          <a:noFill/>
-          <a:ln/>
-        </p:spPr>
-        <p:txBody>
-          <a:bodyPr wrap="square" lIns="0" tIns="0" rIns="0" bIns="0" rtlCol="0" anchor="t"/>
-          <a:lstStyle/>
-          <a:p>
-            <a:pPr algn="l" indent="0" marL="0">
-              <a:buNone/>
-            </a:pPr>
-            <a:r>
-              <a:rPr lang="en-US" sz="1900" b="1" dirty="0">
-                <a:solidFill>
-                  <a:srgbClr val="000000"/>
-                </a:solidFill>
-                <a:latin typeface="Calibri" pitchFamily="34" charset="0"/>
-                <a:ea typeface="Calibri" pitchFamily="34" charset="-122"/>
-                <a:cs typeface="Calibri" pitchFamily="34" charset="-120"/>
-              </a:rPr>
-              <a:t>Self-Reported Fraud Program Maturity — By Sector</a:t>
-            </a:r>
-            <a:endParaRPr lang="en-US" sz="1900" dirty="0"/>
-          </a:p>
-        </p:txBody>
-      </p:sp>
-      <p:sp>
-        <p:nvSpPr>
-          <p:cNvPr id="3" name="Text 1"/>
-          <p:cNvSpPr txBox="1"/>
-          <p:nvPr/>
-        </p:nvSpPr>
-        <p:spPr>
-          <a:xfrm>
-            <a:off x="502006" y="585216"/>
-            <a:ext cx="11188598" cy="713232"/>
-          </a:xfrm>
-          <a:prstGeom prst="rect">
-            <a:avLst/>
-          </a:prstGeom>
-          <a:noFill/>
-          <a:ln/>
-        </p:spPr>
-        <p:txBody>
-          <a:bodyPr wrap="square" lIns="0" tIns="0" rIns="0" bIns="0" rtlCol="0" anchor="t"/>
-          <a:lstStyle/>
-          <a:p>
-            <a:pPr algn="l" indent="0" marL="0">
-              <a:lnSpc>
-                <a:spcPct val="105000"/>
-              </a:lnSpc>
-              <a:buNone/>
-            </a:pPr>
-            <a:r>
-              <a:rPr lang="en-US" sz="1350" b="1" dirty="0">
-                <a:solidFill>
-                  <a:srgbClr val="046A38"/>
-                </a:solidFill>
-                <a:latin typeface="Calibri" pitchFamily="34" charset="0"/>
-                <a:ea typeface="Calibri" pitchFamily="34" charset="-122"/>
-                <a:cs typeface="Calibri" pitchFamily="34" charset="-120"/>
-              </a:rPr>
-              <a:t>82% self-rate “Integrated” or “Advanced” overall — but Banking clusters at Integrated while Insurance skews further, to Advanced.</a:t>
-            </a:r>
-            <a:endParaRPr lang="en-US" sz="1350" dirty="0"/>
-          </a:p>
-        </p:txBody>
-      </p:sp>
-      <p:sp>
-        <p:nvSpPr>
-          <p:cNvPr id="4" name="Shape 2"/>
-          <p:cNvSpPr/>
-          <p:nvPr/>
-        </p:nvSpPr>
-        <p:spPr>
-          <a:xfrm>
-            <a:off x="502006" y="1335024"/>
-            <a:ext cx="0" cy="512064"/>
-          </a:xfrm>
-          <a:prstGeom prst="line">
-            <a:avLst/>
-          </a:prstGeom>
-          <a:noFill/>
-          <a:ln w="25400">
-            <a:solidFill>
-              <a:srgbClr val="D0D0CE"/>
-            </a:solidFill>
-            <a:prstDash val="solid"/>
-          </a:ln>
-        </p:spPr>
-      </p:sp>
-      <p:sp>
-        <p:nvSpPr>
-          <p:cNvPr id="5" name="Text 3"/>
-          <p:cNvSpPr txBox="1"/>
-          <p:nvPr/>
-        </p:nvSpPr>
-        <p:spPr>
-          <a:xfrm>
-            <a:off x="648310" y="1335024"/>
-            <a:ext cx="11042294" cy="512064"/>
-          </a:xfrm>
-          <a:prstGeom prst="rect">
-            <a:avLst/>
-          </a:prstGeom>
-          <a:noFill/>
-          <a:ln/>
-        </p:spPr>
-        <p:txBody>
-          <a:bodyPr wrap="square" lIns="0" tIns="0" rIns="0" bIns="0" rtlCol="0" anchor="t"/>
-          <a:lstStyle/>
-          <a:p>
-            <a:pPr algn="l" indent="0" marL="0">
-              <a:lnSpc>
-                <a:spcPct val="106000"/>
-              </a:lnSpc>
-              <a:buNone/>
-            </a:pPr>
-            <a:r>
-              <a:rPr lang="en-US" sz="900" b="1" dirty="0">
-                <a:solidFill>
-                  <a:srgbClr val="046A38"/>
-                </a:solidFill>
-                <a:latin typeface="IBM Plex Mono" pitchFamily="34" charset="0"/>
-                <a:ea typeface="IBM Plex Mono" pitchFamily="34" charset="-122"/>
-                <a:cs typeface="IBM Plex Mono" pitchFamily="34" charset="-120"/>
-              </a:rPr>
-              <a:t>Q1  </a:t>
-            </a:r>
-            <a:pPr algn="l" indent="0" marL="0">
-              <a:lnSpc>
-                <a:spcPct val="106000"/>
-              </a:lnSpc>
-              <a:buNone/>
-            </a:pPr>
-            <a:r>
-              <a:rPr lang="en-US" sz="1000" i="1" dirty="0">
-                <a:solidFill>
-                  <a:srgbClr val="575757"/>
-                </a:solidFill>
-                <a:latin typeface="Calibri" pitchFamily="34" charset="0"/>
-                <a:ea typeface="Calibri" pitchFamily="34" charset="-122"/>
-                <a:cs typeface="Calibri" pitchFamily="34" charset="-120"/>
-              </a:rPr>
-              <a:t>“Which statement best describes the current maturity of your organization's fraud program? (Banking vs. Insurance)”</a:t>
-            </a:r>
-            <a:endParaRPr lang="en-US" sz="1000" dirty="0"/>
-          </a:p>
-        </p:txBody>
-      </p:sp>
-      <p:sp>
-        <p:nvSpPr>
-          <p:cNvPr id="6" name="Text 4"/>
-          <p:cNvSpPr txBox="1"/>
-          <p:nvPr/>
-        </p:nvSpPr>
-        <p:spPr>
-          <a:xfrm>
-            <a:off x="11346790" y="6537960"/>
-            <a:ext cx="343814" cy="182880"/>
-          </a:xfrm>
-          <a:prstGeom prst="rect">
-            <a:avLst/>
-          </a:prstGeom>
-          <a:noFill/>
-          <a:ln/>
-        </p:spPr>
-        <p:txBody>
-          <a:bodyPr wrap="square" rtlCol="0" anchor="ctr"/>
-          <a:lstStyle/>
-          <a:p>
-            <a:pPr algn="r" indent="0" marL="0">
-              <a:buNone/>
-            </a:pPr>
-            <a:r>
-              <a:rPr lang="en-US" sz="900" dirty="0">
-                <a:solidFill>
-                  <a:srgbClr val="53565A"/>
-                </a:solidFill>
-                <a:latin typeface="Calibri" pitchFamily="34" charset="0"/>
-                <a:ea typeface="Calibri" pitchFamily="34" charset="-122"/>
-                <a:cs typeface="Calibri" pitchFamily="34" charset="-120"/>
-              </a:rPr>
-              <a:t>24</a:t>
-            </a:r>
-            <a:endParaRPr lang="en-US" sz="900" dirty="0"/>
-          </a:p>
-        </p:txBody>
-      </p:sp>
-      <p:graphicFrame>
-        <p:nvGraphicFramePr>
-          <p:cNvPr id="7" name="Chart 0" descr=""/>
-          <p:cNvGraphicFramePr/>
-          <p:nvPr/>
-        </p:nvGraphicFramePr>
-        <p:xfrm>
-          <a:off x="502006" y="2011680"/>
-          <a:ext cx="11188598" cy="3063240"/>
-        </p:xfrm>
-        <a:graphic xmlns:a="http://schemas.openxmlformats.org/drawingml/2006/main">
-          <a:graphicData uri="http://schemas.openxmlformats.org/drawingml/2006/chart">
-            <c:chart xmlns:c="http://schemas.openxmlformats.org/drawingml/2006/chart" r:id="rId1"/>
-          </a:graphicData>
-        </a:graphic>
-      </p:graphicFrame>
-      <p:sp>
-        <p:nvSpPr>
-          <p:cNvPr id="8" name="Shape 5"/>
-          <p:cNvSpPr/>
-          <p:nvPr/>
-        </p:nvSpPr>
-        <p:spPr>
-          <a:xfrm>
-            <a:off x="502006" y="5202936"/>
-            <a:ext cx="11188598" cy="0"/>
-          </a:xfrm>
-          <a:prstGeom prst="line">
-            <a:avLst/>
-          </a:prstGeom>
-          <a:noFill/>
-          <a:ln w="9525">
-            <a:solidFill>
-              <a:srgbClr val="D0D0CE"/>
-            </a:solidFill>
-            <a:prstDash val="solid"/>
-          </a:ln>
-        </p:spPr>
-      </p:sp>
-      <p:sp>
-        <p:nvSpPr>
-          <p:cNvPr id="9" name="Text 6"/>
-          <p:cNvSpPr txBox="1"/>
-          <p:nvPr/>
-        </p:nvSpPr>
-        <p:spPr>
-          <a:xfrm>
-            <a:off x="502006" y="5276088"/>
-            <a:ext cx="11188598" cy="886968"/>
-          </a:xfrm>
-          <a:prstGeom prst="rect">
-            <a:avLst/>
-          </a:prstGeom>
-          <a:noFill/>
-          <a:ln/>
-        </p:spPr>
-        <p:txBody>
-          <a:bodyPr wrap="square" lIns="0" tIns="0" rIns="0" bIns="0" rtlCol="0" anchor="t"/>
-          <a:lstStyle/>
-          <a:p>
-            <a:pPr algn="l" indent="0" marL="0">
-              <a:lnSpc>
-                <a:spcPct val="118000"/>
-              </a:lnSpc>
-              <a:buNone/>
-            </a:pPr>
-            <a:r>
-              <a:rPr lang="en-US" sz="850" b="1" dirty="0">
-                <a:solidFill>
-                  <a:srgbClr val="53565A"/>
-                </a:solidFill>
-                <a:latin typeface="Calibri" pitchFamily="34" charset="0"/>
-                <a:ea typeface="Calibri" pitchFamily="34" charset="-122"/>
-                <a:cs typeface="Calibri" pitchFamily="34" charset="-120"/>
-              </a:rPr>
-              <a:t>Single select · low → high maturity.  </a:t>
-            </a:r>
-            <a:pPr algn="l" indent="0" marL="0">
-              <a:lnSpc>
-                <a:spcPct val="118000"/>
-              </a:lnSpc>
-              <a:buNone/>
-            </a:pPr>
-            <a:r>
-              <a:rPr lang="en-US" sz="850" b="1" dirty="0">
-                <a:solidFill>
-                  <a:srgbClr val="53565A"/>
-                </a:solidFill>
-                <a:latin typeface="Calibri" pitchFamily="34" charset="0"/>
-                <a:ea typeface="Calibri" pitchFamily="34" charset="-122"/>
-                <a:cs typeface="Calibri" pitchFamily="34" charset="-120"/>
-              </a:rPr>
-              <a:t>Response options as fielded: </a:t>
-            </a:r>
-            <a:pPr algn="l" indent="0" marL="0">
-              <a:lnSpc>
-                <a:spcPct val="118000"/>
-              </a:lnSpc>
-              <a:buNone/>
-            </a:pPr>
-            <a:r>
-              <a:rPr lang="en-US" sz="850" i="1" dirty="0">
-                <a:solidFill>
-                  <a:srgbClr val="53565A"/>
-                </a:solidFill>
-                <a:latin typeface="Calibri" pitchFamily="34" charset="0"/>
-                <a:ea typeface="Calibri" pitchFamily="34" charset="-122"/>
-                <a:cs typeface="Calibri" pitchFamily="34" charset="-120"/>
-              </a:rPr>
-              <a:t>“Reactive: Primarily incident-driven”</a:t>
-            </a:r>
-            <a:pPr algn="l" indent="0" marL="0">
-              <a:lnSpc>
-                <a:spcPct val="118000"/>
-              </a:lnSpc>
-              <a:buNone/>
-            </a:pPr>
-            <a:r>
-              <a:rPr lang="en-US" sz="850" dirty="0">
-                <a:solidFill>
-                  <a:srgbClr val="D0D0CE"/>
-                </a:solidFill>
-                <a:latin typeface="Calibri" pitchFamily="34" charset="0"/>
-                <a:ea typeface="Calibri" pitchFamily="34" charset="-122"/>
-                <a:cs typeface="Calibri" pitchFamily="34" charset="-120"/>
-              </a:rPr>
-              <a:t>  ·  </a:t>
-            </a:r>
-            <a:pPr algn="l" indent="0" marL="0">
-              <a:lnSpc>
-                <a:spcPct val="118000"/>
-              </a:lnSpc>
-              <a:buNone/>
-            </a:pPr>
-            <a:r>
-              <a:rPr lang="en-US" sz="850" i="1" dirty="0">
-                <a:solidFill>
-                  <a:srgbClr val="53565A"/>
-                </a:solidFill>
-                <a:latin typeface="Calibri" pitchFamily="34" charset="0"/>
-                <a:ea typeface="Calibri" pitchFamily="34" charset="-122"/>
-                <a:cs typeface="Calibri" pitchFamily="34" charset="-120"/>
-              </a:rPr>
-              <a:t>“Foundational: Controls established within individual business units”</a:t>
-            </a:r>
-            <a:pPr algn="l" indent="0" marL="0">
-              <a:lnSpc>
-                <a:spcPct val="118000"/>
-              </a:lnSpc>
-              <a:buNone/>
-            </a:pPr>
-            <a:r>
-              <a:rPr lang="en-US" sz="850" dirty="0">
-                <a:solidFill>
-                  <a:srgbClr val="D0D0CE"/>
-                </a:solidFill>
-                <a:latin typeface="Calibri" pitchFamily="34" charset="0"/>
-                <a:ea typeface="Calibri" pitchFamily="34" charset="-122"/>
-                <a:cs typeface="Calibri" pitchFamily="34" charset="-120"/>
-              </a:rPr>
-              <a:t>  ·  </a:t>
-            </a:r>
-            <a:pPr algn="l" indent="0" marL="0">
-              <a:lnSpc>
-                <a:spcPct val="118000"/>
-              </a:lnSpc>
-              <a:buNone/>
-            </a:pPr>
-            <a:r>
-              <a:rPr lang="en-US" sz="850" i="1" dirty="0">
-                <a:solidFill>
-                  <a:srgbClr val="53565A"/>
-                </a:solidFill>
-                <a:latin typeface="Calibri" pitchFamily="34" charset="0"/>
-                <a:ea typeface="Calibri" pitchFamily="34" charset="-122"/>
-                <a:cs typeface="Calibri" pitchFamily="34" charset="-120"/>
-              </a:rPr>
-              <a:t>“Managed: Enterprise standards and governance are in place”</a:t>
-            </a:r>
-            <a:pPr algn="l" indent="0" marL="0">
-              <a:lnSpc>
-                <a:spcPct val="118000"/>
-              </a:lnSpc>
-              <a:buNone/>
-            </a:pPr>
-            <a:r>
-              <a:rPr lang="en-US" sz="850" dirty="0">
-                <a:solidFill>
-                  <a:srgbClr val="D0D0CE"/>
-                </a:solidFill>
-                <a:latin typeface="Calibri" pitchFamily="34" charset="0"/>
-                <a:ea typeface="Calibri" pitchFamily="34" charset="-122"/>
-                <a:cs typeface="Calibri" pitchFamily="34" charset="-120"/>
-              </a:rPr>
-              <a:t>  ·  </a:t>
-            </a:r>
-            <a:pPr algn="l" indent="0" marL="0">
-              <a:lnSpc>
-                <a:spcPct val="118000"/>
-              </a:lnSpc>
-              <a:buNone/>
-            </a:pPr>
-            <a:r>
-              <a:rPr lang="en-US" sz="850" i="1" dirty="0">
-                <a:solidFill>
-                  <a:srgbClr val="53565A"/>
-                </a:solidFill>
-                <a:latin typeface="Calibri" pitchFamily="34" charset="0"/>
-                <a:ea typeface="Calibri" pitchFamily="34" charset="-122"/>
-                <a:cs typeface="Calibri" pitchFamily="34" charset="-120"/>
-              </a:rPr>
-              <a:t>“Integrated: Data, analytics, and operations are integrated across major fraud types”</a:t>
-            </a:r>
-            <a:pPr algn="l" indent="0" marL="0">
-              <a:lnSpc>
-                <a:spcPct val="118000"/>
-              </a:lnSpc>
-              <a:buNone/>
-            </a:pPr>
-            <a:r>
-              <a:rPr lang="en-US" sz="850" dirty="0">
-                <a:solidFill>
-                  <a:srgbClr val="D0D0CE"/>
-                </a:solidFill>
-                <a:latin typeface="Calibri" pitchFamily="34" charset="0"/>
-                <a:ea typeface="Calibri" pitchFamily="34" charset="-122"/>
-                <a:cs typeface="Calibri" pitchFamily="34" charset="-120"/>
-              </a:rPr>
-              <a:t>  ·  </a:t>
-            </a:r>
-            <a:pPr algn="l" indent="0" marL="0">
-              <a:lnSpc>
-                <a:spcPct val="118000"/>
-              </a:lnSpc>
-              <a:buNone/>
-            </a:pPr>
-            <a:r>
-              <a:rPr lang="en-US" sz="850" i="1" dirty="0">
-                <a:solidFill>
-                  <a:srgbClr val="53565A"/>
-                </a:solidFill>
-                <a:latin typeface="Calibri" pitchFamily="34" charset="0"/>
-                <a:ea typeface="Calibri" pitchFamily="34" charset="-122"/>
-                <a:cs typeface="Calibri" pitchFamily="34" charset="-120"/>
-              </a:rPr>
-              <a:t>“Advanced: Predictive intelligence and ecosystem collaboration are embedded”</a:t>
-            </a:r>
-            <a:endParaRPr lang="en-US" sz="850" dirty="0"/>
           </a:p>
         </p:txBody>
       </p:sp>
@@ -30521,7 +30889,7 @@
                 <a:ea typeface="Calibri" pitchFamily="34" charset="-122"/>
                 <a:cs typeface="Calibri" pitchFamily="34" charset="-120"/>
               </a:rPr>
-              <a:t>Fraud Program Maturity — By Sector and Institution Tier</a:t>
+              <a:t>Self-Reported Fraud Program Maturity — By Sector</a:t>
             </a:r>
             <a:endParaRPr lang="en-US" sz="1900" dirty="0"/>
           </a:p>
@@ -30563,7 +30931,7 @@
                 <a:ea typeface="Calibri" pitchFamily="34" charset="-122"/>
                 <a:cs typeface="Calibri" pitchFamily="34" charset="-120"/>
               </a:rPr>
-              <a:t>Within each sector, maturity skews somewhat by institution tier — top-tier institutions lean more Advanced, particularly in Insurance.</a:t>
+              <a:t>82% self-rate “Integrated” or “Advanced” overall — but Banking clusters at Integrated while Insurance skews further, to Advanced.</a:t>
             </a:r>
             <a:endParaRPr lang="en-US" sz="1350" dirty="0"/>
           </a:p>
@@ -30645,7 +31013,7 @@
                 <a:ea typeface="Calibri" pitchFamily="34" charset="-122"/>
                 <a:cs typeface="Calibri" pitchFamily="34" charset="-120"/>
               </a:rPr>
-              <a:t>“Which statement best describes the current maturity of your organization's fraud program? (Banking vs. Insurance, further broken down by institution tier)”</a:t>
+              <a:t>“Which statement best describes the current maturity of your organization's fraud program? (Banking vs. Insurance)”</a:t>
             </a:r>
             <a:endParaRPr lang="en-US" sz="1000" dirty="0"/>
           </a:p>
@@ -30738,7 +31106,7 @@
         <p:spPr>
           <a:xfrm>
             <a:off x="502006" y="5276088"/>
-            <a:ext cx="11188598" cy="685800"/>
+            <a:ext cx="11188598" cy="886968"/>
           </a:xfrm>
           <a:prstGeom prst="rect">
             <a:avLst/>
@@ -30752,7 +31120,7 @@
           <a:p>
             <a:pPr algn="l" indent="0" marL="0">
               <a:lnSpc>
-                <a:spcPct val="115000"/>
+                <a:spcPct val="118000"/>
               </a:lnSpc>
               <a:buNone/>
             </a:pPr>
@@ -30765,16 +31133,16 @@
                 <a:ea typeface="Calibri" pitchFamily="34" charset="-122"/>
                 <a:cs typeface="Calibri" pitchFamily="34" charset="-120"/>
               </a:rPr>
-              <a:t>Single select · low → high maturity. </a:t>
+              <a:t>Single select · low → high maturity.  </a:t>
             </a:r>
             <a:pPr algn="l" indent="0" marL="0">
               <a:lnSpc>
-                <a:spcPct val="115000"/>
+                <a:spcPct val="118000"/>
               </a:lnSpc>
               <a:buNone/>
             </a:pPr>
             <a:r>
-              <a:rPr lang="en-US" sz="850" dirty="0">
+              <a:rPr lang="en-US" sz="850" b="1" dirty="0">
                 <a:solidFill>
                   <a:srgbClr val="53565A"/>
                 </a:solidFill>
@@ -30782,41 +31150,16 @@
                 <a:ea typeface="Calibri" pitchFamily="34" charset="-122"/>
                 <a:cs typeface="Calibri" pitchFamily="34" charset="-120"/>
               </a:rPr>
-              <a:t>The % in each category label is the full sector-level figure; tier segments are rounded to the nearest whole percent. Institution tier is based on newS8 (Banking) / S9 (Insurance); 5 Banking and 1 Insurance respondent who did not directly answer that question were classified from their employer description elsewhere in the survey (Top 100 and Large Insurance Carrier, respectively) — Banking Top 100 is n=40 (35 direct + 5 reclassified) and Insurance Large is n=10 (9 direct + 1 reclassified).</a:t>
-            </a:r>
-            <a:endParaRPr lang="en-US" sz="850" dirty="0"/>
-          </a:p>
-        </p:txBody>
-      </p:sp>
-      <p:sp>
-        <p:nvSpPr>
-          <p:cNvPr id="10" name="Text 7"/>
-          <p:cNvSpPr txBox="1"/>
-          <p:nvPr/>
-        </p:nvSpPr>
-        <p:spPr>
-          <a:xfrm>
-            <a:off x="502006" y="5980176"/>
-            <a:ext cx="11188598" cy="365760"/>
-          </a:xfrm>
-          <a:prstGeom prst="rect">
-            <a:avLst/>
-          </a:prstGeom>
-          <a:noFill/>
-          <a:ln/>
-        </p:spPr>
-        <p:txBody>
-          <a:bodyPr wrap="square" lIns="0" tIns="0" rIns="0" bIns="0" rtlCol="0" anchor="t"/>
-          <a:lstStyle/>
-          <a:p>
+              <a:t>Response options as fielded: </a:t>
+            </a:r>
             <a:pPr algn="l" indent="0" marL="0">
               <a:lnSpc>
-                <a:spcPct val="110000"/>
+                <a:spcPct val="118000"/>
               </a:lnSpc>
               <a:buNone/>
             </a:pPr>
             <a:r>
-              <a:rPr lang="en-US" sz="850" b="1" dirty="0">
+              <a:rPr lang="en-US" sz="850" i="1" dirty="0">
                 <a:solidFill>
                   <a:srgbClr val="53565A"/>
                 </a:solidFill>
@@ -30824,16 +31167,33 @@
                 <a:ea typeface="Calibri" pitchFamily="34" charset="-122"/>
                 <a:cs typeface="Calibri" pitchFamily="34" charset="-120"/>
               </a:rPr>
-              <a:t>Response options as fielded: </a:t>
+              <a:t>“Reactive: Primarily incident-driven”</a:t>
             </a:r>
             <a:pPr algn="l" indent="0" marL="0">
               <a:lnSpc>
-                <a:spcPct val="110000"/>
+                <a:spcPct val="118000"/>
               </a:lnSpc>
               <a:buNone/>
             </a:pPr>
             <a:r>
-              <a:rPr lang="en-US" sz="800" i="1" dirty="0">
+              <a:rPr lang="en-US" sz="850" dirty="0">
+                <a:solidFill>
+                  <a:srgbClr val="D0D0CE"/>
+                </a:solidFill>
+                <a:latin typeface="Calibri" pitchFamily="34" charset="0"/>
+                <a:ea typeface="Calibri" pitchFamily="34" charset="-122"/>
+                <a:cs typeface="Calibri" pitchFamily="34" charset="-120"/>
+              </a:rPr>
+              <a:t>  ·  </a:t>
+            </a:r>
+            <a:pPr algn="l" indent="0" marL="0">
+              <a:lnSpc>
+                <a:spcPct val="118000"/>
+              </a:lnSpc>
+              <a:buNone/>
+            </a:pPr>
+            <a:r>
+              <a:rPr lang="en-US" sz="850" i="1" dirty="0">
                 <a:solidFill>
                   <a:srgbClr val="53565A"/>
                 </a:solidFill>
@@ -30841,7 +31201,109 @@
                 <a:ea typeface="Calibri" pitchFamily="34" charset="-122"/>
                 <a:cs typeface="Calibri" pitchFamily="34" charset="-120"/>
               </a:rPr>
-              <a:t>“Reactive: Primarily incident-driven” · “Foundational: Controls established within individual business units” · “Managed: Enterprise standards and governance are in place” · “Integrated: Data, analytics, and operations are integrated across major fraud types” · “Advanced: Predictive intelligence and ecosystem collaboration are embedded”</a:t>
+              <a:t>“Foundational: Controls established within individual business units”</a:t>
+            </a:r>
+            <a:pPr algn="l" indent="0" marL="0">
+              <a:lnSpc>
+                <a:spcPct val="118000"/>
+              </a:lnSpc>
+              <a:buNone/>
+            </a:pPr>
+            <a:r>
+              <a:rPr lang="en-US" sz="850" dirty="0">
+                <a:solidFill>
+                  <a:srgbClr val="D0D0CE"/>
+                </a:solidFill>
+                <a:latin typeface="Calibri" pitchFamily="34" charset="0"/>
+                <a:ea typeface="Calibri" pitchFamily="34" charset="-122"/>
+                <a:cs typeface="Calibri" pitchFamily="34" charset="-120"/>
+              </a:rPr>
+              <a:t>  ·  </a:t>
+            </a:r>
+            <a:pPr algn="l" indent="0" marL="0">
+              <a:lnSpc>
+                <a:spcPct val="118000"/>
+              </a:lnSpc>
+              <a:buNone/>
+            </a:pPr>
+            <a:r>
+              <a:rPr lang="en-US" sz="850" i="1" dirty="0">
+                <a:solidFill>
+                  <a:srgbClr val="53565A"/>
+                </a:solidFill>
+                <a:latin typeface="Calibri" pitchFamily="34" charset="0"/>
+                <a:ea typeface="Calibri" pitchFamily="34" charset="-122"/>
+                <a:cs typeface="Calibri" pitchFamily="34" charset="-120"/>
+              </a:rPr>
+              <a:t>“Managed: Enterprise standards and governance are in place”</a:t>
+            </a:r>
+            <a:pPr algn="l" indent="0" marL="0">
+              <a:lnSpc>
+                <a:spcPct val="118000"/>
+              </a:lnSpc>
+              <a:buNone/>
+            </a:pPr>
+            <a:r>
+              <a:rPr lang="en-US" sz="850" dirty="0">
+                <a:solidFill>
+                  <a:srgbClr val="D0D0CE"/>
+                </a:solidFill>
+                <a:latin typeface="Calibri" pitchFamily="34" charset="0"/>
+                <a:ea typeface="Calibri" pitchFamily="34" charset="-122"/>
+                <a:cs typeface="Calibri" pitchFamily="34" charset="-120"/>
+              </a:rPr>
+              <a:t>  ·  </a:t>
+            </a:r>
+            <a:pPr algn="l" indent="0" marL="0">
+              <a:lnSpc>
+                <a:spcPct val="118000"/>
+              </a:lnSpc>
+              <a:buNone/>
+            </a:pPr>
+            <a:r>
+              <a:rPr lang="en-US" sz="850" i="1" dirty="0">
+                <a:solidFill>
+                  <a:srgbClr val="53565A"/>
+                </a:solidFill>
+                <a:latin typeface="Calibri" pitchFamily="34" charset="0"/>
+                <a:ea typeface="Calibri" pitchFamily="34" charset="-122"/>
+                <a:cs typeface="Calibri" pitchFamily="34" charset="-120"/>
+              </a:rPr>
+              <a:t>“Integrated: Data, analytics, and operations are integrated across major fraud types”</a:t>
+            </a:r>
+            <a:pPr algn="l" indent="0" marL="0">
+              <a:lnSpc>
+                <a:spcPct val="118000"/>
+              </a:lnSpc>
+              <a:buNone/>
+            </a:pPr>
+            <a:r>
+              <a:rPr lang="en-US" sz="850" dirty="0">
+                <a:solidFill>
+                  <a:srgbClr val="D0D0CE"/>
+                </a:solidFill>
+                <a:latin typeface="Calibri" pitchFamily="34" charset="0"/>
+                <a:ea typeface="Calibri" pitchFamily="34" charset="-122"/>
+                <a:cs typeface="Calibri" pitchFamily="34" charset="-120"/>
+              </a:rPr>
+              <a:t>  ·  </a:t>
+            </a:r>
+            <a:pPr algn="l" indent="0" marL="0">
+              <a:lnSpc>
+                <a:spcPct val="118000"/>
+              </a:lnSpc>
+              <a:buNone/>
+            </a:pPr>
+            <a:r>
+              <a:rPr lang="en-US" sz="850" i="1" dirty="0">
+                <a:solidFill>
+                  <a:srgbClr val="53565A"/>
+                </a:solidFill>
+                <a:latin typeface="Calibri" pitchFamily="34" charset="0"/>
+                <a:ea typeface="Calibri" pitchFamily="34" charset="-122"/>
+                <a:cs typeface="Calibri" pitchFamily="34" charset="-120"/>
+              </a:rPr>
+              <a:t>“Advanced: Predictive intelligence and ecosystem collaboration are embedded”</a:t>
             </a:r>
             <a:endParaRPr lang="en-US" sz="850" dirty="0"/>
           </a:p>
@@ -30912,7 +31374,7 @@
                 <a:ea typeface="Calibri" pitchFamily="34" charset="-122"/>
                 <a:cs typeface="Calibri" pitchFamily="34" charset="-120"/>
               </a:rPr>
-              <a:t>Fraud Program Maturity — Banking, by Institution Tier and Region</a:t>
+              <a:t>Fraud Program Maturity — By Sector and Institution Tier</a:t>
             </a:r>
             <a:endParaRPr lang="en-US" sz="1900" dirty="0"/>
           </a:p>
@@ -30954,7 +31416,7 @@
                 <a:ea typeface="Calibri" pitchFamily="34" charset="-122"/>
                 <a:cs typeface="Calibri" pitchFamily="34" charset="-120"/>
               </a:rPr>
-              <a:t>Top 100 institutions lean more Advanced across most regions; Large institutions cluster more heavily at Integrated.</a:t>
+              <a:t>Within each sector, maturity skews somewhat by institution tier — top-tier institutions lean more Advanced, particularly in Insurance.</a:t>
             </a:r>
             <a:endParaRPr lang="en-US" sz="1350" dirty="0"/>
           </a:p>
@@ -31036,7 +31498,7 @@
                 <a:ea typeface="Calibri" pitchFamily="34" charset="-122"/>
                 <a:cs typeface="Calibri" pitchFamily="34" charset="-120"/>
               </a:rPr>
-              <a:t>“Which statement best describes the current maturity of your organization's fraud program? (Banking only, Top 100 vs. Large institution, further broken down by region)”</a:t>
+              <a:t>“Which statement best describes the current maturity of your organization's fraud program? (Banking vs. Insurance, further broken down by institution tier)”</a:t>
             </a:r>
             <a:endParaRPr lang="en-US" sz="1000" dirty="0"/>
           </a:p>
@@ -31129,7 +31591,7 @@
         <p:spPr>
           <a:xfrm>
             <a:off x="502006" y="5276088"/>
-            <a:ext cx="11188598" cy="777240"/>
+            <a:ext cx="11188598" cy="685800"/>
           </a:xfrm>
           <a:prstGeom prst="rect">
             <a:avLst/>
@@ -31173,7 +31635,7 @@
                 <a:ea typeface="Calibri" pitchFamily="34" charset="-122"/>
                 <a:cs typeface="Calibri" pitchFamily="34" charset="-120"/>
               </a:rPr>
-              <a:t>The % in each category label is the full tier-level figure (Top 100 n=40, Large n=35); region segments are rounded to the nearest whole percent. Region sample sizes — Top 100: US n=14, Canada n=13, Europe n=7, Australia n=4, Singapore n=2. Large: US n=20, Canada n=5, Europe n=5, Australia n=3, Singapore n=2. Australia and Singapore are thin samples shown directionally. Top 100 includes 5 respondents reclassified from their employer description elsewhere in the survey (see previous slide).</a:t>
+              <a:t>The % in each category label is the full sector-level figure; tier segments are rounded to the nearest whole percent. Institution tier is based on newS8 (Banking) / S9 (Insurance); 5 Banking and 1 Insurance respondent who did not directly answer that question were classified from their employer description elsewhere in the survey (Top 100 and Large Insurance Carrier, respectively) — Banking Top 100 is n=40 (35 direct + 5 reclassified) and Insurance Large is n=10 (9 direct + 1 reclassified).</a:t>
             </a:r>
             <a:endParaRPr lang="en-US" sz="850" dirty="0"/>
           </a:p>
@@ -31187,7 +31649,7 @@
         </p:nvSpPr>
         <p:spPr>
           <a:xfrm>
-            <a:off x="502006" y="6071616"/>
+            <a:off x="502006" y="5980176"/>
             <a:ext cx="11188598" cy="365760"/>
           </a:xfrm>
           <a:prstGeom prst="rect">
@@ -31303,7 +31765,7 @@
                 <a:ea typeface="Calibri" pitchFamily="34" charset="-122"/>
                 <a:cs typeface="Calibri" pitchFamily="34" charset="-120"/>
               </a:rPr>
-              <a:t>Fraud Program Maturity — Insurance, by Institution Tier and Region</a:t>
+              <a:t>Fraud Program Maturity — Banking, by Institution Tier and Region</a:t>
             </a:r>
             <a:endParaRPr lang="en-US" sz="1900" dirty="0"/>
           </a:p>
@@ -31345,7 +31807,7 @@
                 <a:ea typeface="Calibri" pitchFamily="34" charset="-122"/>
                 <a:cs typeface="Calibri" pitchFamily="34" charset="-120"/>
               </a:rPr>
-              <a:t>Within Insurance, Large carriers show a wider spread across maturity levels than Top 50 carriers — though the regional cut here is thin.</a:t>
+              <a:t>Top 100 institutions lean more Advanced across most regions; Large institutions cluster more heavily at Integrated.</a:t>
             </a:r>
             <a:endParaRPr lang="en-US" sz="1350" dirty="0"/>
           </a:p>
@@ -31427,7 +31889,7 @@
                 <a:ea typeface="Calibri" pitchFamily="34" charset="-122"/>
                 <a:cs typeface="Calibri" pitchFamily="34" charset="-120"/>
               </a:rPr>
-              <a:t>“Which statement best describes the current maturity of your organization's fraud program? (Insurance only, Top 50 vs. Large carrier, further broken down by region)”</a:t>
+              <a:t>“Which statement best describes the current maturity of your organization's fraud program? (Banking only, Top 100 vs. Large institution, further broken down by region)”</a:t>
             </a:r>
             <a:endParaRPr lang="en-US" sz="1000" dirty="0"/>
           </a:p>
@@ -31534,7 +31996,7 @@
           <a:p>
             <a:pPr algn="l" indent="0" marL="0">
               <a:lnSpc>
-                <a:spcPct val="108000"/>
+                <a:spcPct val="115000"/>
               </a:lnSpc>
               <a:buNone/>
             </a:pPr>
@@ -31551,7 +32013,7 @@
             </a:r>
             <a:pPr algn="l" indent="0" marL="0">
               <a:lnSpc>
-                <a:spcPct val="108000"/>
+                <a:spcPct val="115000"/>
               </a:lnSpc>
               <a:buNone/>
             </a:pPr>
@@ -31564,7 +32026,7 @@
                 <a:ea typeface="Calibri" pitchFamily="34" charset="-122"/>
                 <a:cs typeface="Calibri" pitchFamily="34" charset="-120"/>
               </a:rPr>
-              <a:t>The % in each category label is the full tier-level figure; region segments are rounded to the nearest whole percent. Region sample sizes — Top 50: US n=7, Canada n=6, Europe n=1, Australia n=1. Large: US n=3, Canada n=6, Europe n=1 (no Australia; neither tier has Singapore respondents). Europe and Australia cells are extremely thin — each is a single UK/Australian respondent — shown for completeness, not statistical reliability. Large includes 1 respondent (Canada) reclassified from their employer description elsewhere in the survey (see the sector x tier slide).</a:t>
+              <a:t>The % in each category label is the full tier-level figure (Top 100 n=40, Large n=35); region segments are rounded to the nearest whole percent. Region sample sizes — Top 100: US n=14, Canada n=13, Europe n=7, Australia n=4, Singapore n=2. Large: US n=20, Canada n=5, Europe n=5, Australia n=3, Singapore n=2. Australia and Singapore are thin samples shown directionally. Top 100 includes 5 respondents reclassified from their employer description elsewhere in the survey (see previous slide).</a:t>
             </a:r>
             <a:endParaRPr lang="en-US" sz="850" dirty="0"/>
           </a:p>
@@ -31579,7 +32041,7 @@
         <p:spPr>
           <a:xfrm>
             <a:off x="502006" y="6071616"/>
-            <a:ext cx="11188598" cy="347472"/>
+            <a:ext cx="11188598" cy="365760"/>
           </a:xfrm>
           <a:prstGeom prst="rect">
             <a:avLst/>
@@ -31694,7 +32156,7 @@
                 <a:ea typeface="Calibri" pitchFamily="34" charset="-122"/>
                 <a:cs typeface="Calibri" pitchFamily="34" charset="-120"/>
               </a:rPr>
-              <a:t>Scaling Approach — Today vs. 3-Year Focus</a:t>
+              <a:t>Fraud Program Maturity — Insurance, by Institution Tier and Region</a:t>
             </a:r>
             <a:endParaRPr lang="en-US" sz="1900" dirty="0"/>
           </a:p>
@@ -31736,7 +32198,7 @@
                 <a:ea typeface="Calibri" pitchFamily="34" charset="-122"/>
                 <a:cs typeface="Calibri" pitchFamily="34" charset="-120"/>
               </a:rPr>
-              <a:t>AI is already the top way fraud teams scale, and its lead is only growing.</a:t>
+              <a:t>Within Insurance, Large carriers show a wider spread across maturity levels than Top 50 carriers — though the regional cut here is thin.</a:t>
             </a:r>
             <a:endParaRPr lang="en-US" sz="1350" dirty="0"/>
           </a:p>
@@ -31801,7 +32263,7 @@
                 <a:ea typeface="IBM Plex Mono" pitchFamily="34" charset="-122"/>
                 <a:cs typeface="IBM Plex Mono" pitchFamily="34" charset="-120"/>
               </a:rPr>
-              <a:t>Q8 / Q9  </a:t>
+              <a:t>Q1  </a:t>
             </a:r>
             <a:pPr algn="l" indent="0" marL="0">
               <a:lnSpc>
@@ -31818,7 +32280,7 @@
                 <a:ea typeface="Calibri" pitchFamily="34" charset="-122"/>
                 <a:cs typeface="Calibri" pitchFamily="34" charset="-120"/>
               </a:rPr>
-              <a:t>“Which statement best describes your current approach to scaling fraud/investigations operations as fraud volume and complexity increases? / Which area do you expect will receive the greatest focus for operations transformation over the next three years?”</a:t>
+              <a:t>“Which statement best describes the current maturity of your organization's fraud program? (Insurance only, Top 50 vs. Large carrier, further broken down by region)”</a:t>
             </a:r>
             <a:endParaRPr lang="en-US" sz="1000" dirty="0"/>
           </a:p>
@@ -31911,7 +32373,7 @@
         <p:spPr>
           <a:xfrm>
             <a:off x="502006" y="5276088"/>
-            <a:ext cx="11188598" cy="886968"/>
+            <a:ext cx="11188598" cy="777240"/>
           </a:xfrm>
           <a:prstGeom prst="rect">
             <a:avLst/>
@@ -31925,7 +32387,7 @@
           <a:p>
             <a:pPr algn="l" indent="0" marL="0">
               <a:lnSpc>
-                <a:spcPct val="118000"/>
+                <a:spcPct val="108000"/>
               </a:lnSpc>
               <a:buNone/>
             </a:pPr>
@@ -31938,16 +32400,16 @@
                 <a:ea typeface="Calibri" pitchFamily="34" charset="-122"/>
                 <a:cs typeface="Calibri" pitchFamily="34" charset="-120"/>
               </a:rPr>
-              <a:t>Single select, asked twice.  </a:t>
+              <a:t>Single select · low → high maturity. </a:t>
             </a:r>
             <a:pPr algn="l" indent="0" marL="0">
               <a:lnSpc>
-                <a:spcPct val="118000"/>
+                <a:spcPct val="108000"/>
               </a:lnSpc>
               <a:buNone/>
             </a:pPr>
             <a:r>
-              <a:rPr lang="en-US" sz="850" b="1" dirty="0">
+              <a:rPr lang="en-US" sz="850" dirty="0">
                 <a:solidFill>
                   <a:srgbClr val="53565A"/>
                 </a:solidFill>
@@ -31955,16 +32417,41 @@
                 <a:ea typeface="Calibri" pitchFamily="34" charset="-122"/>
                 <a:cs typeface="Calibri" pitchFamily="34" charset="-120"/>
               </a:rPr>
-              <a:t>Response options as fielded: </a:t>
-            </a:r>
+              <a:t>The % in each category label is the full tier-level figure; region segments are rounded to the nearest whole percent. Region sample sizes — Top 50: US n=7, Canada n=6, Europe n=1, Australia n=1. Large: US n=3, Canada n=6, Europe n=1 (no Australia; neither tier has Singapore respondents). Europe and Australia cells are extremely thin — each is a single UK/Australian respondent — shown for completeness, not statistical reliability. Large includes 1 respondent (Canada) reclassified from their employer description elsewhere in the survey (see the sector x tier slide).</a:t>
+            </a:r>
+            <a:endParaRPr lang="en-US" sz="850" dirty="0"/>
+          </a:p>
+        </p:txBody>
+      </p:sp>
+      <p:sp>
+        <p:nvSpPr>
+          <p:cNvPr id="10" name="Text 7"/>
+          <p:cNvSpPr txBox="1"/>
+          <p:nvPr/>
+        </p:nvSpPr>
+        <p:spPr>
+          <a:xfrm>
+            <a:off x="502006" y="6071616"/>
+            <a:ext cx="11188598" cy="347472"/>
+          </a:xfrm>
+          <a:prstGeom prst="rect">
+            <a:avLst/>
+          </a:prstGeom>
+          <a:noFill/>
+          <a:ln/>
+        </p:spPr>
+        <p:txBody>
+          <a:bodyPr wrap="square" lIns="0" tIns="0" rIns="0" bIns="0" rtlCol="0" anchor="t"/>
+          <a:lstStyle/>
+          <a:p>
             <a:pPr algn="l" indent="0" marL="0">
               <a:lnSpc>
-                <a:spcPct val="118000"/>
+                <a:spcPct val="110000"/>
               </a:lnSpc>
               <a:buNone/>
             </a:pPr>
             <a:r>
-              <a:rPr lang="en-US" sz="850" i="1" dirty="0">
+              <a:rPr lang="en-US" sz="850" b="1" dirty="0">
                 <a:solidFill>
                   <a:srgbClr val="53565A"/>
                 </a:solidFill>
@@ -31972,33 +32459,16 @@
                 <a:ea typeface="Calibri" pitchFamily="34" charset="-122"/>
                 <a:cs typeface="Calibri" pitchFamily="34" charset="-120"/>
               </a:rPr>
-              <a:t>“Adding capacity through hiring full-time employees and workforce expansion”</a:t>
+              <a:t>Response options as fielded: </a:t>
             </a:r>
             <a:pPr algn="l" indent="0" marL="0">
               <a:lnSpc>
-                <a:spcPct val="118000"/>
+                <a:spcPct val="110000"/>
               </a:lnSpc>
               <a:buNone/>
             </a:pPr>
             <a:r>
-              <a:rPr lang="en-US" sz="850" dirty="0">
-                <a:solidFill>
-                  <a:srgbClr val="D0D0CE"/>
-                </a:solidFill>
-                <a:latin typeface="Calibri" pitchFamily="34" charset="0"/>
-                <a:ea typeface="Calibri" pitchFamily="34" charset="-122"/>
-                <a:cs typeface="Calibri" pitchFamily="34" charset="-120"/>
-              </a:rPr>
-              <a:t>  ·  </a:t>
-            </a:r>
-            <a:pPr algn="l" indent="0" marL="0">
-              <a:lnSpc>
-                <a:spcPct val="118000"/>
-              </a:lnSpc>
-              <a:buNone/>
-            </a:pPr>
-            <a:r>
-              <a:rPr lang="en-US" sz="850" i="1" dirty="0">
+              <a:rPr lang="en-US" sz="800" i="1" dirty="0">
                 <a:solidFill>
                   <a:srgbClr val="53565A"/>
                 </a:solidFill>
@@ -32006,143 +32476,7 @@
                 <a:ea typeface="Calibri" pitchFamily="34" charset="-122"/>
                 <a:cs typeface="Calibri" pitchFamily="34" charset="-120"/>
               </a:rPr>
-              <a:t>“Adding capacity through outsourcing arrangements (e.g., contractors)”</a:t>
-            </a:r>
-            <a:pPr algn="l" indent="0" marL="0">
-              <a:lnSpc>
-                <a:spcPct val="118000"/>
-              </a:lnSpc>
-              <a:buNone/>
-            </a:pPr>
-            <a:r>
-              <a:rPr lang="en-US" sz="850" dirty="0">
-                <a:solidFill>
-                  <a:srgbClr val="D0D0CE"/>
-                </a:solidFill>
-                <a:latin typeface="Calibri" pitchFamily="34" charset="0"/>
-                <a:ea typeface="Calibri" pitchFamily="34" charset="-122"/>
-                <a:cs typeface="Calibri" pitchFamily="34" charset="-120"/>
-              </a:rPr>
-              <a:t>  ·  </a:t>
-            </a:r>
-            <a:pPr algn="l" indent="0" marL="0">
-              <a:lnSpc>
-                <a:spcPct val="118000"/>
-              </a:lnSpc>
-              <a:buNone/>
-            </a:pPr>
-            <a:r>
-              <a:rPr lang="en-US" sz="850" i="1" dirty="0">
-                <a:solidFill>
-                  <a:srgbClr val="53565A"/>
-                </a:solidFill>
-                <a:latin typeface="Calibri" pitchFamily="34" charset="0"/>
-                <a:ea typeface="Calibri" pitchFamily="34" charset="-122"/>
-                <a:cs typeface="Calibri" pitchFamily="34" charset="-120"/>
-              </a:rPr>
-              <a:t>“Automating workflows and minimizing manual activities”</a:t>
-            </a:r>
-            <a:pPr algn="l" indent="0" marL="0">
-              <a:lnSpc>
-                <a:spcPct val="118000"/>
-              </a:lnSpc>
-              <a:buNone/>
-            </a:pPr>
-            <a:r>
-              <a:rPr lang="en-US" sz="850" dirty="0">
-                <a:solidFill>
-                  <a:srgbClr val="D0D0CE"/>
-                </a:solidFill>
-                <a:latin typeface="Calibri" pitchFamily="34" charset="0"/>
-                <a:ea typeface="Calibri" pitchFamily="34" charset="-122"/>
-                <a:cs typeface="Calibri" pitchFamily="34" charset="-120"/>
-              </a:rPr>
-              <a:t>  ·  </a:t>
-            </a:r>
-            <a:pPr algn="l" indent="0" marL="0">
-              <a:lnSpc>
-                <a:spcPct val="118000"/>
-              </a:lnSpc>
-              <a:buNone/>
-            </a:pPr>
-            <a:r>
-              <a:rPr lang="en-US" sz="850" i="1" dirty="0">
-                <a:solidFill>
-                  <a:srgbClr val="53565A"/>
-                </a:solidFill>
-                <a:latin typeface="Calibri" pitchFamily="34" charset="0"/>
-                <a:ea typeface="Calibri" pitchFamily="34" charset="-122"/>
-                <a:cs typeface="Calibri" pitchFamily="34" charset="-120"/>
-              </a:rPr>
-              <a:t>“Augmenting existing capacity with AI-enabled tools”</a:t>
-            </a:r>
-            <a:pPr algn="l" indent="0" marL="0">
-              <a:lnSpc>
-                <a:spcPct val="118000"/>
-              </a:lnSpc>
-              <a:buNone/>
-            </a:pPr>
-            <a:r>
-              <a:rPr lang="en-US" sz="850" dirty="0">
-                <a:solidFill>
-                  <a:srgbClr val="D0D0CE"/>
-                </a:solidFill>
-                <a:latin typeface="Calibri" pitchFamily="34" charset="0"/>
-                <a:ea typeface="Calibri" pitchFamily="34" charset="-122"/>
-                <a:cs typeface="Calibri" pitchFamily="34" charset="-120"/>
-              </a:rPr>
-              <a:t>  ·  </a:t>
-            </a:r>
-            <a:pPr algn="l" indent="0" marL="0">
-              <a:lnSpc>
-                <a:spcPct val="118000"/>
-              </a:lnSpc>
-              <a:buNone/>
-            </a:pPr>
-            <a:r>
-              <a:rPr lang="en-US" sz="850" i="1" dirty="0">
-                <a:solidFill>
-                  <a:srgbClr val="53565A"/>
-                </a:solidFill>
-                <a:latin typeface="Calibri" pitchFamily="34" charset="0"/>
-                <a:ea typeface="Calibri" pitchFamily="34" charset="-122"/>
-                <a:cs typeface="Calibri" pitchFamily="34" charset="-120"/>
-              </a:rPr>
-              <a:t>“Redesigning operation processes and playbooks across the lifecycle”</a:t>
-            </a:r>
-            <a:pPr algn="l" indent="0" marL="0">
-              <a:lnSpc>
-                <a:spcPct val="118000"/>
-              </a:lnSpc>
-              <a:buNone/>
-            </a:pPr>
-            <a:r>
-              <a:rPr lang="en-US" sz="850" dirty="0">
-                <a:solidFill>
-                  <a:srgbClr val="D0D0CE"/>
-                </a:solidFill>
-                <a:latin typeface="Calibri" pitchFamily="34" charset="0"/>
-                <a:ea typeface="Calibri" pitchFamily="34" charset="-122"/>
-                <a:cs typeface="Calibri" pitchFamily="34" charset="-120"/>
-              </a:rPr>
-              <a:t>  ·  </a:t>
-            </a:r>
-            <a:pPr algn="l" indent="0" marL="0">
-              <a:lnSpc>
-                <a:spcPct val="118000"/>
-              </a:lnSpc>
-              <a:buNone/>
-            </a:pPr>
-            <a:r>
-              <a:rPr lang="en-US" sz="850" i="1" dirty="0">
-                <a:solidFill>
-                  <a:srgbClr val="53565A"/>
-                </a:solidFill>
-                <a:latin typeface="Calibri" pitchFamily="34" charset="0"/>
-                <a:ea typeface="Calibri" pitchFamily="34" charset="-122"/>
-                <a:cs typeface="Calibri" pitchFamily="34" charset="-120"/>
-              </a:rPr>
-              <a:t>“Pursuing a combination of the above approaches”</a:t>
+              <a:t>“Reactive: Primarily incident-driven” · “Foundational: Controls established within individual business units” · “Managed: Enterprise standards and governance are in place” · “Integrated: Data, analytics, and operations are integrated across major fraud types” · “Advanced: Predictive intelligence and ecosystem collaboration are embedded”</a:t>
             </a:r>
             <a:endParaRPr lang="en-US" sz="850" dirty="0"/>
           </a:p>
@@ -32895,7 +33229,7 @@
                 <a:ea typeface="Calibri" pitchFamily="34" charset="-122"/>
                 <a:cs typeface="Calibri" pitchFamily="34" charset="-120"/>
               </a:rPr>
-              <a:t>Scaling Approach — Insurance, by Institution Tier</a:t>
+              <a:t>Scaling Approach — Today vs. 3-Year Focus</a:t>
             </a:r>
             <a:endParaRPr lang="en-US" sz="1900" dirty="0"/>
           </a:p>
@@ -32937,7 +33271,7 @@
                 <a:ea typeface="Calibri" pitchFamily="34" charset="-122"/>
                 <a:cs typeface="Calibri" pitchFamily="34" charset="-120"/>
               </a:rPr>
-              <a:t>Top 50 carriers are already leaning hardest on AI; Large carriers still split their effort more evenly, notably toward outsourcing today.</a:t>
+              <a:t>AI is already the top way fraud teams scale, and its lead is only growing.</a:t>
             </a:r>
             <a:endParaRPr lang="en-US" sz="1350" dirty="0"/>
           </a:p>
@@ -33019,7 +33353,7 @@
                 <a:ea typeface="Calibri" pitchFamily="34" charset="-122"/>
                 <a:cs typeface="Calibri" pitchFamily="34" charset="-120"/>
               </a:rPr>
-              <a:t>“Which statement best describes your current approach to scaling fraud/investigations operations? / Which area do you expect will receive the greatest focus over the next three years? (Today vs. 3-Year Focus)”</a:t>
+              <a:t>“Which statement best describes your current approach to scaling fraud/investigations operations as fraud volume and complexity increases? / Which area do you expect will receive the greatest focus for operations transformation over the next three years?”</a:t>
             </a:r>
             <a:endParaRPr lang="en-US" sz="1000" dirty="0"/>
           </a:p>
@@ -33064,54 +33398,15 @@
           </a:p>
         </p:txBody>
       </p:sp>
-      <p:sp>
-        <p:nvSpPr>
-          <p:cNvPr id="7" name="Text 5"/>
-          <p:cNvSpPr txBox="1"/>
-          <p:nvPr/>
-        </p:nvSpPr>
-        <p:spPr>
-          <a:xfrm>
-            <a:off x="502006" y="1965960"/>
-            <a:ext cx="5486400" cy="237744"/>
-          </a:xfrm>
-          <a:prstGeom prst="rect">
-            <a:avLst/>
-          </a:prstGeom>
-          <a:noFill/>
-          <a:ln/>
-        </p:spPr>
-        <p:txBody>
-          <a:bodyPr wrap="square" rtlCol="0" anchor="ctr"/>
-          <a:lstStyle/>
-          <a:p>
-            <a:pPr indent="0" marL="0">
-              <a:buNone/>
-            </a:pPr>
-            <a:r>
-              <a:rPr lang="en-US" sz="1150" b="1" dirty="0">
-                <a:solidFill>
-                  <a:srgbClr val="000000"/>
-                </a:solidFill>
-                <a:latin typeface="Calibri" pitchFamily="34" charset="0"/>
-                <a:ea typeface="Calibri" pitchFamily="34" charset="-122"/>
-                <a:cs typeface="Calibri" pitchFamily="34" charset="-120"/>
-              </a:rPr>
-              <a:t>Top 50 Insurance Carrier (n=15)</a:t>
-            </a:r>
-            <a:endParaRPr lang="en-US" sz="1150" dirty="0"/>
-          </a:p>
-        </p:txBody>
-      </p:sp>
       <p:graphicFrame>
         <p:nvGraphicFramePr>
-          <p:cNvPr id="8" name="Chart 0" descr=""/>
+          <p:cNvPr id="7" name="Chart 0" descr=""/>
           <p:cNvGraphicFramePr/>
           <p:nvPr/>
         </p:nvGraphicFramePr>
         <p:xfrm>
-          <a:off x="502006" y="2240280"/>
-          <a:ext cx="5486400" cy="2834640"/>
+          <a:off x="502006" y="2011680"/>
+          <a:ext cx="11188598" cy="3063240"/>
         </p:xfrm>
         <a:graphic xmlns:a="http://schemas.openxmlformats.org/drawingml/2006/main">
           <a:graphicData uri="http://schemas.openxmlformats.org/drawingml/2006/chart">
@@ -33121,62 +33416,7 @@
       </p:graphicFrame>
       <p:sp>
         <p:nvSpPr>
-          <p:cNvPr id="9" name="Text 6"/>
-          <p:cNvSpPr txBox="1"/>
-          <p:nvPr/>
-        </p:nvSpPr>
-        <p:spPr>
-          <a:xfrm>
-            <a:off x="6172200" y="1965960"/>
-            <a:ext cx="5486400" cy="237744"/>
-          </a:xfrm>
-          <a:prstGeom prst="rect">
-            <a:avLst/>
-          </a:prstGeom>
-          <a:noFill/>
-          <a:ln/>
-        </p:spPr>
-        <p:txBody>
-          <a:bodyPr wrap="square" rtlCol="0" anchor="ctr"/>
-          <a:lstStyle/>
-          <a:p>
-            <a:pPr indent="0" marL="0">
-              <a:buNone/>
-            </a:pPr>
-            <a:r>
-              <a:rPr lang="en-US" sz="1150" b="1" dirty="0">
-                <a:solidFill>
-                  <a:srgbClr val="000000"/>
-                </a:solidFill>
-                <a:latin typeface="Calibri" pitchFamily="34" charset="0"/>
-                <a:ea typeface="Calibri" pitchFamily="34" charset="-122"/>
-                <a:cs typeface="Calibri" pitchFamily="34" charset="-120"/>
-              </a:rPr>
-              <a:t>Large Insurance Carrier (n=10)</a:t>
-            </a:r>
-            <a:endParaRPr lang="en-US" sz="1150" dirty="0"/>
-          </a:p>
-        </p:txBody>
-      </p:sp>
-      <p:graphicFrame>
-        <p:nvGraphicFramePr>
-          <p:cNvPr id="10" name="Chart 1" descr=""/>
-          <p:cNvGraphicFramePr/>
-          <p:nvPr/>
-        </p:nvGraphicFramePr>
-        <p:xfrm>
-          <a:off x="6172200" y="2240280"/>
-          <a:ext cx="5486400" cy="2834640"/>
-        </p:xfrm>
-        <a:graphic xmlns:a="http://schemas.openxmlformats.org/drawingml/2006/main">
-          <a:graphicData uri="http://schemas.openxmlformats.org/drawingml/2006/chart">
-            <c:chart xmlns:c="http://schemas.openxmlformats.org/drawingml/2006/chart" r:id="rId2"/>
-          </a:graphicData>
-        </a:graphic>
-      </p:graphicFrame>
-      <p:sp>
-        <p:nvSpPr>
-          <p:cNvPr id="11" name="Shape 7"/>
+          <p:cNvPr id="8" name="Shape 5"/>
           <p:cNvSpPr/>
           <p:nvPr/>
         </p:nvSpPr>
@@ -33199,14 +33439,14 @@
       </p:sp>
       <p:sp>
         <p:nvSpPr>
-          <p:cNvPr id="12" name="Text 8"/>
+          <p:cNvPr id="9" name="Text 6"/>
           <p:cNvSpPr txBox="1"/>
           <p:nvPr/>
         </p:nvSpPr>
         <p:spPr>
           <a:xfrm>
             <a:off x="502006" y="5276088"/>
-            <a:ext cx="11188598" cy="777240"/>
+            <a:ext cx="11188598" cy="886968"/>
           </a:xfrm>
           <a:prstGeom prst="rect">
             <a:avLst/>
@@ -33220,7 +33460,7 @@
           <a:p>
             <a:pPr algn="l" indent="0" marL="0">
               <a:lnSpc>
-                <a:spcPct val="115000"/>
+                <a:spcPct val="118000"/>
               </a:lnSpc>
               <a:buNone/>
             </a:pPr>
@@ -33233,16 +33473,16 @@
                 <a:ea typeface="Calibri" pitchFamily="34" charset="-122"/>
                 <a:cs typeface="Calibri" pitchFamily="34" charset="-120"/>
               </a:rPr>
-              <a:t>Single select, asked twice. </a:t>
+              <a:t>Single select, asked twice.  </a:t>
             </a:r>
             <a:pPr algn="l" indent="0" marL="0">
               <a:lnSpc>
-                <a:spcPct val="115000"/>
+                <a:spcPct val="118000"/>
               </a:lnSpc>
               <a:buNone/>
             </a:pPr>
             <a:r>
-              <a:rPr lang="en-US" sz="850" dirty="0">
+              <a:rPr lang="en-US" sz="850" b="1" dirty="0">
                 <a:solidFill>
                   <a:srgbClr val="53565A"/>
                 </a:solidFill>
@@ -33250,11 +33490,11 @@
                 <a:ea typeface="Calibri" pitchFamily="34" charset="-122"/>
                 <a:cs typeface="Calibri" pitchFamily="34" charset="-120"/>
               </a:rPr>
-              <a:t>Institution tier is based on S9, including 1 respondent reclassified from their employer description elsewhere in the survey (see the Q1 sector x tier slide for detail). Response options as fielded: </a:t>
+              <a:t>Response options as fielded: </a:t>
             </a:r>
             <a:pPr algn="l" indent="0" marL="0">
               <a:lnSpc>
-                <a:spcPct val="115000"/>
+                <a:spcPct val="118000"/>
               </a:lnSpc>
               <a:buNone/>
             </a:pPr>
@@ -33267,7 +33507,177 @@
                 <a:ea typeface="Calibri" pitchFamily="34" charset="-122"/>
                 <a:cs typeface="Calibri" pitchFamily="34" charset="-120"/>
               </a:rPr>
-              <a:t>“Adding capacity through hiring full-time employees and workforce expansion”  ·  “Adding capacity through outsourcing arrangements (e.g., contractors)”  ·  “Automating workflows and minimizing manual activities”  ·  “Augmenting existing capacity with AI-enabled tools”  ·  “Redesigning operation processes and playbooks across the lifecycle”  ·  “Pursuing a combination of the above approaches”</a:t>
+              <a:t>“Adding capacity through hiring full-time employees and workforce expansion”</a:t>
+            </a:r>
+            <a:pPr algn="l" indent="0" marL="0">
+              <a:lnSpc>
+                <a:spcPct val="118000"/>
+              </a:lnSpc>
+              <a:buNone/>
+            </a:pPr>
+            <a:r>
+              <a:rPr lang="en-US" sz="850" dirty="0">
+                <a:solidFill>
+                  <a:srgbClr val="D0D0CE"/>
+                </a:solidFill>
+                <a:latin typeface="Calibri" pitchFamily="34" charset="0"/>
+                <a:ea typeface="Calibri" pitchFamily="34" charset="-122"/>
+                <a:cs typeface="Calibri" pitchFamily="34" charset="-120"/>
+              </a:rPr>
+              <a:t>  ·  </a:t>
+            </a:r>
+            <a:pPr algn="l" indent="0" marL="0">
+              <a:lnSpc>
+                <a:spcPct val="118000"/>
+              </a:lnSpc>
+              <a:buNone/>
+            </a:pPr>
+            <a:r>
+              <a:rPr lang="en-US" sz="850" i="1" dirty="0">
+                <a:solidFill>
+                  <a:srgbClr val="53565A"/>
+                </a:solidFill>
+                <a:latin typeface="Calibri" pitchFamily="34" charset="0"/>
+                <a:ea typeface="Calibri" pitchFamily="34" charset="-122"/>
+                <a:cs typeface="Calibri" pitchFamily="34" charset="-120"/>
+              </a:rPr>
+              <a:t>“Adding capacity through outsourcing arrangements (e.g., contractors)”</a:t>
+            </a:r>
+            <a:pPr algn="l" indent="0" marL="0">
+              <a:lnSpc>
+                <a:spcPct val="118000"/>
+              </a:lnSpc>
+              <a:buNone/>
+            </a:pPr>
+            <a:r>
+              <a:rPr lang="en-US" sz="850" dirty="0">
+                <a:solidFill>
+                  <a:srgbClr val="D0D0CE"/>
+                </a:solidFill>
+                <a:latin typeface="Calibri" pitchFamily="34" charset="0"/>
+                <a:ea typeface="Calibri" pitchFamily="34" charset="-122"/>
+                <a:cs typeface="Calibri" pitchFamily="34" charset="-120"/>
+              </a:rPr>
+              <a:t>  ·  </a:t>
+            </a:r>
+            <a:pPr algn="l" indent="0" marL="0">
+              <a:lnSpc>
+                <a:spcPct val="118000"/>
+              </a:lnSpc>
+              <a:buNone/>
+            </a:pPr>
+            <a:r>
+              <a:rPr lang="en-US" sz="850" i="1" dirty="0">
+                <a:solidFill>
+                  <a:srgbClr val="53565A"/>
+                </a:solidFill>
+                <a:latin typeface="Calibri" pitchFamily="34" charset="0"/>
+                <a:ea typeface="Calibri" pitchFamily="34" charset="-122"/>
+                <a:cs typeface="Calibri" pitchFamily="34" charset="-120"/>
+              </a:rPr>
+              <a:t>“Automating workflows and minimizing manual activities”</a:t>
+            </a:r>
+            <a:pPr algn="l" indent="0" marL="0">
+              <a:lnSpc>
+                <a:spcPct val="118000"/>
+              </a:lnSpc>
+              <a:buNone/>
+            </a:pPr>
+            <a:r>
+              <a:rPr lang="en-US" sz="850" dirty="0">
+                <a:solidFill>
+                  <a:srgbClr val="D0D0CE"/>
+                </a:solidFill>
+                <a:latin typeface="Calibri" pitchFamily="34" charset="0"/>
+                <a:ea typeface="Calibri" pitchFamily="34" charset="-122"/>
+                <a:cs typeface="Calibri" pitchFamily="34" charset="-120"/>
+              </a:rPr>
+              <a:t>  ·  </a:t>
+            </a:r>
+            <a:pPr algn="l" indent="0" marL="0">
+              <a:lnSpc>
+                <a:spcPct val="118000"/>
+              </a:lnSpc>
+              <a:buNone/>
+            </a:pPr>
+            <a:r>
+              <a:rPr lang="en-US" sz="850" i="1" dirty="0">
+                <a:solidFill>
+                  <a:srgbClr val="53565A"/>
+                </a:solidFill>
+                <a:latin typeface="Calibri" pitchFamily="34" charset="0"/>
+                <a:ea typeface="Calibri" pitchFamily="34" charset="-122"/>
+                <a:cs typeface="Calibri" pitchFamily="34" charset="-120"/>
+              </a:rPr>
+              <a:t>“Augmenting existing capacity with AI-enabled tools”</a:t>
+            </a:r>
+            <a:pPr algn="l" indent="0" marL="0">
+              <a:lnSpc>
+                <a:spcPct val="118000"/>
+              </a:lnSpc>
+              <a:buNone/>
+            </a:pPr>
+            <a:r>
+              <a:rPr lang="en-US" sz="850" dirty="0">
+                <a:solidFill>
+                  <a:srgbClr val="D0D0CE"/>
+                </a:solidFill>
+                <a:latin typeface="Calibri" pitchFamily="34" charset="0"/>
+                <a:ea typeface="Calibri" pitchFamily="34" charset="-122"/>
+                <a:cs typeface="Calibri" pitchFamily="34" charset="-120"/>
+              </a:rPr>
+              <a:t>  ·  </a:t>
+            </a:r>
+            <a:pPr algn="l" indent="0" marL="0">
+              <a:lnSpc>
+                <a:spcPct val="118000"/>
+              </a:lnSpc>
+              <a:buNone/>
+            </a:pPr>
+            <a:r>
+              <a:rPr lang="en-US" sz="850" i="1" dirty="0">
+                <a:solidFill>
+                  <a:srgbClr val="53565A"/>
+                </a:solidFill>
+                <a:latin typeface="Calibri" pitchFamily="34" charset="0"/>
+                <a:ea typeface="Calibri" pitchFamily="34" charset="-122"/>
+                <a:cs typeface="Calibri" pitchFamily="34" charset="-120"/>
+              </a:rPr>
+              <a:t>“Redesigning operation processes and playbooks across the lifecycle”</a:t>
+            </a:r>
+            <a:pPr algn="l" indent="0" marL="0">
+              <a:lnSpc>
+                <a:spcPct val="118000"/>
+              </a:lnSpc>
+              <a:buNone/>
+            </a:pPr>
+            <a:r>
+              <a:rPr lang="en-US" sz="850" dirty="0">
+                <a:solidFill>
+                  <a:srgbClr val="D0D0CE"/>
+                </a:solidFill>
+                <a:latin typeface="Calibri" pitchFamily="34" charset="0"/>
+                <a:ea typeface="Calibri" pitchFamily="34" charset="-122"/>
+                <a:cs typeface="Calibri" pitchFamily="34" charset="-120"/>
+              </a:rPr>
+              <a:t>  ·  </a:t>
+            </a:r>
+            <a:pPr algn="l" indent="0" marL="0">
+              <a:lnSpc>
+                <a:spcPct val="118000"/>
+              </a:lnSpc>
+              <a:buNone/>
+            </a:pPr>
+            <a:r>
+              <a:rPr lang="en-US" sz="850" i="1" dirty="0">
+                <a:solidFill>
+                  <a:srgbClr val="53565A"/>
+                </a:solidFill>
+                <a:latin typeface="Calibri" pitchFamily="34" charset="0"/>
+                <a:ea typeface="Calibri" pitchFamily="34" charset="-122"/>
+                <a:cs typeface="Calibri" pitchFamily="34" charset="-120"/>
+              </a:rPr>
+              <a:t>“Pursuing a combination of the above approaches”</a:t>
             </a:r>
             <a:endParaRPr lang="en-US" sz="850" dirty="0"/>
           </a:p>
@@ -33338,7 +33748,7 @@
                 <a:ea typeface="Calibri" pitchFamily="34" charset="-122"/>
                 <a:cs typeface="Calibri" pitchFamily="34" charset="-120"/>
               </a:rPr>
-              <a:t>Current Scaling Approach — Insurance, by Institution Tier and Region</a:t>
+              <a:t>Scaling Approach — Insurance, by Institution Tier</a:t>
             </a:r>
             <a:endParaRPr lang="en-US" sz="1900" dirty="0"/>
           </a:p>
@@ -33380,7 +33790,7 @@
                 <a:ea typeface="Calibri" pitchFamily="34" charset="-122"/>
                 <a:cs typeface="Calibri" pitchFamily="34" charset="-120"/>
               </a:rPr>
-              <a:t>Within Insurance, the regional pattern is thin but directionally consistent with the tier-level split.</a:t>
+              <a:t>Top 50 carriers are already leaning hardest on AI; Large carriers still split their effort more evenly, notably toward outsourcing today.</a:t>
             </a:r>
             <a:endParaRPr lang="en-US" sz="1350" dirty="0"/>
           </a:p>
@@ -33445,7 +33855,7 @@
                 <a:ea typeface="IBM Plex Mono" pitchFamily="34" charset="-122"/>
                 <a:cs typeface="IBM Plex Mono" pitchFamily="34" charset="-120"/>
               </a:rPr>
-              <a:t>Q8  </a:t>
+              <a:t>Q8 / Q9  </a:t>
             </a:r>
             <a:pPr algn="l" indent="0" marL="0">
               <a:lnSpc>
@@ -33462,7 +33872,7 @@
                 <a:ea typeface="Calibri" pitchFamily="34" charset="-122"/>
                 <a:cs typeface="Calibri" pitchFamily="34" charset="-120"/>
               </a:rPr>
-              <a:t>“Which statement best describes your current approach to scaling fraud/investigations operations as fraud volume and complexity increases? (Insurance only, Top 50 vs. Large carrier, further broken down by region)”</a:t>
+              <a:t>“Which statement best describes your current approach to scaling fraud/investigations operations? / Which area do you expect will receive the greatest focus over the next three years? (Today vs. 3-Year Focus)”</a:t>
             </a:r>
             <a:endParaRPr lang="en-US" sz="1000" dirty="0"/>
           </a:p>
@@ -33507,15 +33917,54 @@
           </a:p>
         </p:txBody>
       </p:sp>
+      <p:sp>
+        <p:nvSpPr>
+          <p:cNvPr id="7" name="Text 5"/>
+          <p:cNvSpPr txBox="1"/>
+          <p:nvPr/>
+        </p:nvSpPr>
+        <p:spPr>
+          <a:xfrm>
+            <a:off x="502006" y="1965960"/>
+            <a:ext cx="5486400" cy="237744"/>
+          </a:xfrm>
+          <a:prstGeom prst="rect">
+            <a:avLst/>
+          </a:prstGeom>
+          <a:noFill/>
+          <a:ln/>
+        </p:spPr>
+        <p:txBody>
+          <a:bodyPr wrap="square" rtlCol="0" anchor="ctr"/>
+          <a:lstStyle/>
+          <a:p>
+            <a:pPr indent="0" marL="0">
+              <a:buNone/>
+            </a:pPr>
+            <a:r>
+              <a:rPr lang="en-US" sz="1150" b="1" dirty="0">
+                <a:solidFill>
+                  <a:srgbClr val="000000"/>
+                </a:solidFill>
+                <a:latin typeface="Calibri" pitchFamily="34" charset="0"/>
+                <a:ea typeface="Calibri" pitchFamily="34" charset="-122"/>
+                <a:cs typeface="Calibri" pitchFamily="34" charset="-120"/>
+              </a:rPr>
+              <a:t>Top 50 Insurance Carrier (n=15)</a:t>
+            </a:r>
+            <a:endParaRPr lang="en-US" sz="1150" dirty="0"/>
+          </a:p>
+        </p:txBody>
+      </p:sp>
       <p:graphicFrame>
         <p:nvGraphicFramePr>
-          <p:cNvPr id="7" name="Chart 0" descr=""/>
+          <p:cNvPr id="8" name="Chart 0" descr=""/>
           <p:cNvGraphicFramePr/>
           <p:nvPr/>
         </p:nvGraphicFramePr>
         <p:xfrm>
-          <a:off x="502006" y="2011680"/>
-          <a:ext cx="11188598" cy="3063240"/>
+          <a:off x="502006" y="2240280"/>
+          <a:ext cx="5486400" cy="2834640"/>
         </p:xfrm>
         <a:graphic xmlns:a="http://schemas.openxmlformats.org/drawingml/2006/main">
           <a:graphicData uri="http://schemas.openxmlformats.org/drawingml/2006/chart">
@@ -33525,7 +33974,62 @@
       </p:graphicFrame>
       <p:sp>
         <p:nvSpPr>
-          <p:cNvPr id="8" name="Shape 5"/>
+          <p:cNvPr id="9" name="Text 6"/>
+          <p:cNvSpPr txBox="1"/>
+          <p:nvPr/>
+        </p:nvSpPr>
+        <p:spPr>
+          <a:xfrm>
+            <a:off x="6172200" y="1965960"/>
+            <a:ext cx="5486400" cy="237744"/>
+          </a:xfrm>
+          <a:prstGeom prst="rect">
+            <a:avLst/>
+          </a:prstGeom>
+          <a:noFill/>
+          <a:ln/>
+        </p:spPr>
+        <p:txBody>
+          <a:bodyPr wrap="square" rtlCol="0" anchor="ctr"/>
+          <a:lstStyle/>
+          <a:p>
+            <a:pPr indent="0" marL="0">
+              <a:buNone/>
+            </a:pPr>
+            <a:r>
+              <a:rPr lang="en-US" sz="1150" b="1" dirty="0">
+                <a:solidFill>
+                  <a:srgbClr val="000000"/>
+                </a:solidFill>
+                <a:latin typeface="Calibri" pitchFamily="34" charset="0"/>
+                <a:ea typeface="Calibri" pitchFamily="34" charset="-122"/>
+                <a:cs typeface="Calibri" pitchFamily="34" charset="-120"/>
+              </a:rPr>
+              <a:t>Large Insurance Carrier (n=10)</a:t>
+            </a:r>
+            <a:endParaRPr lang="en-US" sz="1150" dirty="0"/>
+          </a:p>
+        </p:txBody>
+      </p:sp>
+      <p:graphicFrame>
+        <p:nvGraphicFramePr>
+          <p:cNvPr id="10" name="Chart 1" descr=""/>
+          <p:cNvGraphicFramePr/>
+          <p:nvPr/>
+        </p:nvGraphicFramePr>
+        <p:xfrm>
+          <a:off x="6172200" y="2240280"/>
+          <a:ext cx="5486400" cy="2834640"/>
+        </p:xfrm>
+        <a:graphic xmlns:a="http://schemas.openxmlformats.org/drawingml/2006/main">
+          <a:graphicData uri="http://schemas.openxmlformats.org/drawingml/2006/chart">
+            <c:chart xmlns:c="http://schemas.openxmlformats.org/drawingml/2006/chart" r:id="rId2"/>
+          </a:graphicData>
+        </a:graphic>
+      </p:graphicFrame>
+      <p:sp>
+        <p:nvSpPr>
+          <p:cNvPr id="11" name="Shape 7"/>
           <p:cNvSpPr/>
           <p:nvPr/>
         </p:nvSpPr>
@@ -33548,7 +34052,7 @@
       </p:sp>
       <p:sp>
         <p:nvSpPr>
-          <p:cNvPr id="9" name="Text 6"/>
+          <p:cNvPr id="12" name="Text 8"/>
           <p:cNvSpPr txBox="1"/>
           <p:nvPr/>
         </p:nvSpPr>
@@ -33569,7 +34073,7 @@
           <a:p>
             <a:pPr algn="l" indent="0" marL="0">
               <a:lnSpc>
-                <a:spcPct val="110000"/>
+                <a:spcPct val="115000"/>
               </a:lnSpc>
               <a:buNone/>
             </a:pPr>
@@ -33582,11 +34086,11 @@
                 <a:ea typeface="Calibri" pitchFamily="34" charset="-122"/>
                 <a:cs typeface="Calibri" pitchFamily="34" charset="-120"/>
               </a:rPr>
-              <a:t>Single select. </a:t>
+              <a:t>Single select, asked twice. </a:t>
             </a:r>
             <a:pPr algn="l" indent="0" marL="0">
               <a:lnSpc>
-                <a:spcPct val="110000"/>
+                <a:spcPct val="115000"/>
               </a:lnSpc>
               <a:buNone/>
             </a:pPr>
@@ -33599,58 +34103,16 @@
                 <a:ea typeface="Calibri" pitchFamily="34" charset="-122"/>
                 <a:cs typeface="Calibri" pitchFamily="34" charset="-120"/>
               </a:rPr>
-              <a:t>The % in each category label is the full tier-level figure; region segments are rounded to the nearest whole percent and may not sum exactly due to rounding. Region sample sizes — Top 50: US n=7, Canada n=6, Europe n=1, Australia n=1. Large: US n=3, Canada n=6, Europe n=1 (no Australia; neither tier has Singapore respondents). Every regional cell here is thin (n=1–7) and should be read directionally.</a:t>
-            </a:r>
-            <a:endParaRPr lang="en-US" sz="850" dirty="0"/>
-          </a:p>
-        </p:txBody>
-      </p:sp>
-      <p:sp>
-        <p:nvSpPr>
-          <p:cNvPr id="10" name="Text 7"/>
-          <p:cNvSpPr txBox="1"/>
-          <p:nvPr/>
-        </p:nvSpPr>
-        <p:spPr>
-          <a:xfrm>
-            <a:off x="502006" y="6071616"/>
-            <a:ext cx="11188598" cy="420624"/>
-          </a:xfrm>
-          <a:prstGeom prst="rect">
-            <a:avLst/>
-          </a:prstGeom>
-          <a:noFill/>
-          <a:ln/>
-        </p:spPr>
-        <p:txBody>
-          <a:bodyPr wrap="square" lIns="0" tIns="0" rIns="0" bIns="0" rtlCol="0" anchor="t"/>
-          <a:lstStyle/>
-          <a:p>
+              <a:t>Institution tier is based on S9, including 1 respondent reclassified from their employer description elsewhere in the survey (see the Q1 sector x tier slide for detail). Response options as fielded: </a:t>
+            </a:r>
             <a:pPr algn="l" indent="0" marL="0">
               <a:lnSpc>
-                <a:spcPct val="110000"/>
+                <a:spcPct val="115000"/>
               </a:lnSpc>
               <a:buNone/>
             </a:pPr>
             <a:r>
-              <a:rPr lang="en-US" sz="850" b="1" dirty="0">
-                <a:solidFill>
-                  <a:srgbClr val="53565A"/>
-                </a:solidFill>
-                <a:latin typeface="Calibri" pitchFamily="34" charset="0"/>
-                <a:ea typeface="Calibri" pitchFamily="34" charset="-122"/>
-                <a:cs typeface="Calibri" pitchFamily="34" charset="-120"/>
-              </a:rPr>
-              <a:t>Response options as fielded: </a:t>
-            </a:r>
-            <a:pPr algn="l" indent="0" marL="0">
-              <a:lnSpc>
-                <a:spcPct val="110000"/>
-              </a:lnSpc>
-              <a:buNone/>
-            </a:pPr>
-            <a:r>
-              <a:rPr lang="en-US" sz="800" i="1" dirty="0">
+              <a:rPr lang="en-US" sz="850" i="1" dirty="0">
                 <a:solidFill>
                   <a:srgbClr val="53565A"/>
                 </a:solidFill>
@@ -33729,7 +34191,7 @@
                 <a:ea typeface="Calibri" pitchFamily="34" charset="-122"/>
                 <a:cs typeface="Calibri" pitchFamily="34" charset="-120"/>
               </a:rPr>
-              <a:t>3-Year Scaling Focus — Insurance, by Institution Tier and Region</a:t>
+              <a:t>Current Scaling Approach — Insurance, by Institution Tier and Region</a:t>
             </a:r>
             <a:endParaRPr lang="en-US" sz="1900" dirty="0"/>
           </a:p>
@@ -33771,7 +34233,7 @@
                 <a:ea typeface="Calibri" pitchFamily="34" charset="-122"/>
                 <a:cs typeface="Calibri" pitchFamily="34" charset="-120"/>
               </a:rPr>
-              <a:t>Looking ahead, Insurance's regional pattern shifts further toward AI and process redesign in both tiers.</a:t>
+              <a:t>Within Insurance, the regional pattern is thin but directionally consistent with the tier-level split.</a:t>
             </a:r>
             <a:endParaRPr lang="en-US" sz="1350" dirty="0"/>
           </a:p>
@@ -33836,7 +34298,7 @@
                 <a:ea typeface="IBM Plex Mono" pitchFamily="34" charset="-122"/>
                 <a:cs typeface="IBM Plex Mono" pitchFamily="34" charset="-120"/>
               </a:rPr>
-              <a:t>Q9  </a:t>
+              <a:t>Q8  </a:t>
             </a:r>
             <a:pPr algn="l" indent="0" marL="0">
               <a:lnSpc>
@@ -33853,7 +34315,7 @@
                 <a:ea typeface="Calibri" pitchFamily="34" charset="-122"/>
                 <a:cs typeface="Calibri" pitchFamily="34" charset="-120"/>
               </a:rPr>
-              <a:t>“Which area do you expect will receive the greatest focus for fraud/investigations operations transformation over the next three years? (Insurance only, Top 50 vs. Large carrier, further broken down by region)”</a:t>
+              <a:t>“Which statement best describes your current approach to scaling fraud/investigations operations as fraud volume and complexity increases? (Insurance only, Top 50 vs. Large carrier, further broken down by region)”</a:t>
             </a:r>
             <a:endParaRPr lang="en-US" sz="1000" dirty="0"/>
           </a:p>
@@ -34120,7 +34582,7 @@
                 <a:ea typeface="Calibri" pitchFamily="34" charset="-122"/>
                 <a:cs typeface="Calibri" pitchFamily="34" charset="-120"/>
               </a:rPr>
-              <a:t>Scaling Approach — Banking, by Institution Tier</a:t>
+              <a:t>3-Year Scaling Focus — Insurance, by Institution Tier and Region</a:t>
             </a:r>
             <a:endParaRPr lang="en-US" sz="1900" dirty="0"/>
           </a:p>
@@ -34162,7 +34624,7 @@
                 <a:ea typeface="Calibri" pitchFamily="34" charset="-122"/>
                 <a:cs typeface="Calibri" pitchFamily="34" charset="-120"/>
               </a:rPr>
-              <a:t>Top 100 institutions already lean hardest on AI and automation; Large institutions rely more on hiring and outsourcing, today and in three years.</a:t>
+              <a:t>Looking ahead, Insurance's regional pattern shifts further toward AI and process redesign in both tiers.</a:t>
             </a:r>
             <a:endParaRPr lang="en-US" sz="1350" dirty="0"/>
           </a:p>
@@ -34227,7 +34689,7 @@
                 <a:ea typeface="IBM Plex Mono" pitchFamily="34" charset="-122"/>
                 <a:cs typeface="IBM Plex Mono" pitchFamily="34" charset="-120"/>
               </a:rPr>
-              <a:t>Q8 / Q9  </a:t>
+              <a:t>Q9  </a:t>
             </a:r>
             <a:pPr algn="l" indent="0" marL="0">
               <a:lnSpc>
@@ -34244,7 +34706,7 @@
                 <a:ea typeface="Calibri" pitchFamily="34" charset="-122"/>
                 <a:cs typeface="Calibri" pitchFamily="34" charset="-120"/>
               </a:rPr>
-              <a:t>“Which statement best describes your current approach to scaling fraud/investigations operations? / Which area do you expect will receive the greatest focus over the next three years? (Today vs. 3-Year Focus)”</a:t>
+              <a:t>“Which area do you expect will receive the greatest focus for fraud/investigations operations transformation over the next three years? (Insurance only, Top 50 vs. Large carrier, further broken down by region)”</a:t>
             </a:r>
             <a:endParaRPr lang="en-US" sz="1000" dirty="0"/>
           </a:p>
@@ -34289,54 +34751,15 @@
           </a:p>
         </p:txBody>
       </p:sp>
-      <p:sp>
-        <p:nvSpPr>
-          <p:cNvPr id="7" name="Text 5"/>
-          <p:cNvSpPr txBox="1"/>
-          <p:nvPr/>
-        </p:nvSpPr>
-        <p:spPr>
-          <a:xfrm>
-            <a:off x="502006" y="1965960"/>
-            <a:ext cx="5486400" cy="237744"/>
-          </a:xfrm>
-          <a:prstGeom prst="rect">
-            <a:avLst/>
-          </a:prstGeom>
-          <a:noFill/>
-          <a:ln/>
-        </p:spPr>
-        <p:txBody>
-          <a:bodyPr wrap="square" rtlCol="0" anchor="ctr"/>
-          <a:lstStyle/>
-          <a:p>
-            <a:pPr indent="0" marL="0">
-              <a:buNone/>
-            </a:pPr>
-            <a:r>
-              <a:rPr lang="en-US" sz="1150" b="1" dirty="0">
-                <a:solidFill>
-                  <a:srgbClr val="000000"/>
-                </a:solidFill>
-                <a:latin typeface="Calibri" pitchFamily="34" charset="0"/>
-                <a:ea typeface="Calibri" pitchFamily="34" charset="-122"/>
-                <a:cs typeface="Calibri" pitchFamily="34" charset="-120"/>
-              </a:rPr>
-              <a:t>Top 100 Financial Institution (n=40)</a:t>
-            </a:r>
-            <a:endParaRPr lang="en-US" sz="1150" dirty="0"/>
-          </a:p>
-        </p:txBody>
-      </p:sp>
       <p:graphicFrame>
         <p:nvGraphicFramePr>
-          <p:cNvPr id="8" name="Chart 0" descr=""/>
+          <p:cNvPr id="7" name="Chart 0" descr=""/>
           <p:cNvGraphicFramePr/>
           <p:nvPr/>
         </p:nvGraphicFramePr>
         <p:xfrm>
-          <a:off x="502006" y="2240280"/>
-          <a:ext cx="5486400" cy="2834640"/>
+          <a:off x="502006" y="2011680"/>
+          <a:ext cx="11188598" cy="3063240"/>
         </p:xfrm>
         <a:graphic xmlns:a="http://schemas.openxmlformats.org/drawingml/2006/main">
           <a:graphicData uri="http://schemas.openxmlformats.org/drawingml/2006/chart">
@@ -34346,62 +34769,7 @@
       </p:graphicFrame>
       <p:sp>
         <p:nvSpPr>
-          <p:cNvPr id="9" name="Text 6"/>
-          <p:cNvSpPr txBox="1"/>
-          <p:nvPr/>
-        </p:nvSpPr>
-        <p:spPr>
-          <a:xfrm>
-            <a:off x="6172200" y="1965960"/>
-            <a:ext cx="5486400" cy="237744"/>
-          </a:xfrm>
-          <a:prstGeom prst="rect">
-            <a:avLst/>
-          </a:prstGeom>
-          <a:noFill/>
-          <a:ln/>
-        </p:spPr>
-        <p:txBody>
-          <a:bodyPr wrap="square" rtlCol="0" anchor="ctr"/>
-          <a:lstStyle/>
-          <a:p>
-            <a:pPr indent="0" marL="0">
-              <a:buNone/>
-            </a:pPr>
-            <a:r>
-              <a:rPr lang="en-US" sz="1150" b="1" dirty="0">
-                <a:solidFill>
-                  <a:srgbClr val="000000"/>
-                </a:solidFill>
-                <a:latin typeface="Calibri" pitchFamily="34" charset="0"/>
-                <a:ea typeface="Calibri" pitchFamily="34" charset="-122"/>
-                <a:cs typeface="Calibri" pitchFamily="34" charset="-120"/>
-              </a:rPr>
-              <a:t>Large Financial Institution (n=35)</a:t>
-            </a:r>
-            <a:endParaRPr lang="en-US" sz="1150" dirty="0"/>
-          </a:p>
-        </p:txBody>
-      </p:sp>
-      <p:graphicFrame>
-        <p:nvGraphicFramePr>
-          <p:cNvPr id="10" name="Chart 1" descr=""/>
-          <p:cNvGraphicFramePr/>
-          <p:nvPr/>
-        </p:nvGraphicFramePr>
-        <p:xfrm>
-          <a:off x="6172200" y="2240280"/>
-          <a:ext cx="5486400" cy="2834640"/>
-        </p:xfrm>
-        <a:graphic xmlns:a="http://schemas.openxmlformats.org/drawingml/2006/main">
-          <a:graphicData uri="http://schemas.openxmlformats.org/drawingml/2006/chart">
-            <c:chart xmlns:c="http://schemas.openxmlformats.org/drawingml/2006/chart" r:id="rId2"/>
-          </a:graphicData>
-        </a:graphic>
-      </p:graphicFrame>
-      <p:sp>
-        <p:nvSpPr>
-          <p:cNvPr id="11" name="Shape 7"/>
+          <p:cNvPr id="8" name="Shape 5"/>
           <p:cNvSpPr/>
           <p:nvPr/>
         </p:nvSpPr>
@@ -34424,7 +34792,7 @@
       </p:sp>
       <p:sp>
         <p:nvSpPr>
-          <p:cNvPr id="12" name="Text 8"/>
+          <p:cNvPr id="9" name="Text 6"/>
           <p:cNvSpPr txBox="1"/>
           <p:nvPr/>
         </p:nvSpPr>
@@ -34445,7 +34813,7 @@
           <a:p>
             <a:pPr algn="l" indent="0" marL="0">
               <a:lnSpc>
-                <a:spcPct val="115000"/>
+                <a:spcPct val="110000"/>
               </a:lnSpc>
               <a:buNone/>
             </a:pPr>
@@ -34458,11 +34826,11 @@
                 <a:ea typeface="Calibri" pitchFamily="34" charset="-122"/>
                 <a:cs typeface="Calibri" pitchFamily="34" charset="-120"/>
               </a:rPr>
-              <a:t>Single select, asked twice. </a:t>
+              <a:t>Single select. </a:t>
             </a:r>
             <a:pPr algn="l" indent="0" marL="0">
               <a:lnSpc>
-                <a:spcPct val="115000"/>
+                <a:spcPct val="110000"/>
               </a:lnSpc>
               <a:buNone/>
             </a:pPr>
@@ -34475,16 +34843,58 @@
                 <a:ea typeface="Calibri" pitchFamily="34" charset="-122"/>
                 <a:cs typeface="Calibri" pitchFamily="34" charset="-120"/>
               </a:rPr>
-              <a:t>Institution tier is based on newS8, including 5 respondents reclassified from their employer description elsewhere in the survey (see the Q1 sector x tier slide for detail). Response options as fielded: </a:t>
-            </a:r>
+              <a:t>The % in each category label is the full tier-level figure; region segments are rounded to the nearest whole percent and may not sum exactly due to rounding. Region sample sizes — Top 50: US n=7, Canada n=6, Europe n=1, Australia n=1. Large: US n=3, Canada n=6, Europe n=1 (no Australia; neither tier has Singapore respondents). Every regional cell here is thin (n=1–7) and should be read directionally.</a:t>
+            </a:r>
+            <a:endParaRPr lang="en-US" sz="850" dirty="0"/>
+          </a:p>
+        </p:txBody>
+      </p:sp>
+      <p:sp>
+        <p:nvSpPr>
+          <p:cNvPr id="10" name="Text 7"/>
+          <p:cNvSpPr txBox="1"/>
+          <p:nvPr/>
+        </p:nvSpPr>
+        <p:spPr>
+          <a:xfrm>
+            <a:off x="502006" y="6071616"/>
+            <a:ext cx="11188598" cy="420624"/>
+          </a:xfrm>
+          <a:prstGeom prst="rect">
+            <a:avLst/>
+          </a:prstGeom>
+          <a:noFill/>
+          <a:ln/>
+        </p:spPr>
+        <p:txBody>
+          <a:bodyPr wrap="square" lIns="0" tIns="0" rIns="0" bIns="0" rtlCol="0" anchor="t"/>
+          <a:lstStyle/>
+          <a:p>
             <a:pPr algn="l" indent="0" marL="0">
               <a:lnSpc>
-                <a:spcPct val="115000"/>
+                <a:spcPct val="110000"/>
               </a:lnSpc>
               <a:buNone/>
             </a:pPr>
             <a:r>
-              <a:rPr lang="en-US" sz="850" i="1" dirty="0">
+              <a:rPr lang="en-US" sz="850" b="1" dirty="0">
+                <a:solidFill>
+                  <a:srgbClr val="53565A"/>
+                </a:solidFill>
+                <a:latin typeface="Calibri" pitchFamily="34" charset="0"/>
+                <a:ea typeface="Calibri" pitchFamily="34" charset="-122"/>
+                <a:cs typeface="Calibri" pitchFamily="34" charset="-120"/>
+              </a:rPr>
+              <a:t>Response options as fielded: </a:t>
+            </a:r>
+            <a:pPr algn="l" indent="0" marL="0">
+              <a:lnSpc>
+                <a:spcPct val="110000"/>
+              </a:lnSpc>
+              <a:buNone/>
+            </a:pPr>
+            <a:r>
+              <a:rPr lang="en-US" sz="800" i="1" dirty="0">
                 <a:solidFill>
                   <a:srgbClr val="53565A"/>
                 </a:solidFill>
@@ -34563,7 +34973,7 @@
                 <a:ea typeface="Calibri" pitchFamily="34" charset="-122"/>
                 <a:cs typeface="Calibri" pitchFamily="34" charset="-120"/>
               </a:rPr>
-              <a:t>Current Scaling Approach — Banking, by Institution Tier and Region</a:t>
+              <a:t>Scaling Approach — Banking, by Institution Tier</a:t>
             </a:r>
             <a:endParaRPr lang="en-US" sz="1900" dirty="0"/>
           </a:p>
@@ -34605,7 +35015,7 @@
                 <a:ea typeface="Calibri" pitchFamily="34" charset="-122"/>
                 <a:cs typeface="Calibri" pitchFamily="34" charset="-120"/>
               </a:rPr>
-              <a:t>Top 100 institutions in the U.S. lean hardest on AI today; Large institutions show a more even regional spread.</a:t>
+              <a:t>Top 100 institutions already lean hardest on AI and automation; Large institutions rely more on hiring and outsourcing, today and in three years.</a:t>
             </a:r>
             <a:endParaRPr lang="en-US" sz="1350" dirty="0"/>
           </a:p>
@@ -34670,7 +35080,7 @@
                 <a:ea typeface="IBM Plex Mono" pitchFamily="34" charset="-122"/>
                 <a:cs typeface="IBM Plex Mono" pitchFamily="34" charset="-120"/>
               </a:rPr>
-              <a:t>Q8  </a:t>
+              <a:t>Q8 / Q9  </a:t>
             </a:r>
             <a:pPr algn="l" indent="0" marL="0">
               <a:lnSpc>
@@ -34687,7 +35097,7 @@
                 <a:ea typeface="Calibri" pitchFamily="34" charset="-122"/>
                 <a:cs typeface="Calibri" pitchFamily="34" charset="-120"/>
               </a:rPr>
-              <a:t>“Which statement best describes your current approach to scaling fraud/investigations operations as fraud volume and complexity increases? (Banking only, Top 100 vs. Large institution, further broken down by region)”</a:t>
+              <a:t>“Which statement best describes your current approach to scaling fraud/investigations operations? / Which area do you expect will receive the greatest focus over the next three years? (Today vs. 3-Year Focus)”</a:t>
             </a:r>
             <a:endParaRPr lang="en-US" sz="1000" dirty="0"/>
           </a:p>
@@ -34732,15 +35142,54 @@
           </a:p>
         </p:txBody>
       </p:sp>
+      <p:sp>
+        <p:nvSpPr>
+          <p:cNvPr id="7" name="Text 5"/>
+          <p:cNvSpPr txBox="1"/>
+          <p:nvPr/>
+        </p:nvSpPr>
+        <p:spPr>
+          <a:xfrm>
+            <a:off x="502006" y="1965960"/>
+            <a:ext cx="5486400" cy="237744"/>
+          </a:xfrm>
+          <a:prstGeom prst="rect">
+            <a:avLst/>
+          </a:prstGeom>
+          <a:noFill/>
+          <a:ln/>
+        </p:spPr>
+        <p:txBody>
+          <a:bodyPr wrap="square" rtlCol="0" anchor="ctr"/>
+          <a:lstStyle/>
+          <a:p>
+            <a:pPr indent="0" marL="0">
+              <a:buNone/>
+            </a:pPr>
+            <a:r>
+              <a:rPr lang="en-US" sz="1150" b="1" dirty="0">
+                <a:solidFill>
+                  <a:srgbClr val="000000"/>
+                </a:solidFill>
+                <a:latin typeface="Calibri" pitchFamily="34" charset="0"/>
+                <a:ea typeface="Calibri" pitchFamily="34" charset="-122"/>
+                <a:cs typeface="Calibri" pitchFamily="34" charset="-120"/>
+              </a:rPr>
+              <a:t>Top 100 Financial Institution (n=40)</a:t>
+            </a:r>
+            <a:endParaRPr lang="en-US" sz="1150" dirty="0"/>
+          </a:p>
+        </p:txBody>
+      </p:sp>
       <p:graphicFrame>
         <p:nvGraphicFramePr>
-          <p:cNvPr id="7" name="Chart 0" descr=""/>
+          <p:cNvPr id="8" name="Chart 0" descr=""/>
           <p:cNvGraphicFramePr/>
           <p:nvPr/>
         </p:nvGraphicFramePr>
         <p:xfrm>
-          <a:off x="502006" y="2011680"/>
-          <a:ext cx="11188598" cy="3063240"/>
+          <a:off x="502006" y="2240280"/>
+          <a:ext cx="5486400" cy="2834640"/>
         </p:xfrm>
         <a:graphic xmlns:a="http://schemas.openxmlformats.org/drawingml/2006/main">
           <a:graphicData uri="http://schemas.openxmlformats.org/drawingml/2006/chart">
@@ -34750,7 +35199,62 @@
       </p:graphicFrame>
       <p:sp>
         <p:nvSpPr>
-          <p:cNvPr id="8" name="Shape 5"/>
+          <p:cNvPr id="9" name="Text 6"/>
+          <p:cNvSpPr txBox="1"/>
+          <p:nvPr/>
+        </p:nvSpPr>
+        <p:spPr>
+          <a:xfrm>
+            <a:off x="6172200" y="1965960"/>
+            <a:ext cx="5486400" cy="237744"/>
+          </a:xfrm>
+          <a:prstGeom prst="rect">
+            <a:avLst/>
+          </a:prstGeom>
+          <a:noFill/>
+          <a:ln/>
+        </p:spPr>
+        <p:txBody>
+          <a:bodyPr wrap="square" rtlCol="0" anchor="ctr"/>
+          <a:lstStyle/>
+          <a:p>
+            <a:pPr indent="0" marL="0">
+              <a:buNone/>
+            </a:pPr>
+            <a:r>
+              <a:rPr lang="en-US" sz="1150" b="1" dirty="0">
+                <a:solidFill>
+                  <a:srgbClr val="000000"/>
+                </a:solidFill>
+                <a:latin typeface="Calibri" pitchFamily="34" charset="0"/>
+                <a:ea typeface="Calibri" pitchFamily="34" charset="-122"/>
+                <a:cs typeface="Calibri" pitchFamily="34" charset="-120"/>
+              </a:rPr>
+              <a:t>Large Financial Institution (n=35)</a:t>
+            </a:r>
+            <a:endParaRPr lang="en-US" sz="1150" dirty="0"/>
+          </a:p>
+        </p:txBody>
+      </p:sp>
+      <p:graphicFrame>
+        <p:nvGraphicFramePr>
+          <p:cNvPr id="10" name="Chart 1" descr=""/>
+          <p:cNvGraphicFramePr/>
+          <p:nvPr/>
+        </p:nvGraphicFramePr>
+        <p:xfrm>
+          <a:off x="6172200" y="2240280"/>
+          <a:ext cx="5486400" cy="2834640"/>
+        </p:xfrm>
+        <a:graphic xmlns:a="http://schemas.openxmlformats.org/drawingml/2006/main">
+          <a:graphicData uri="http://schemas.openxmlformats.org/drawingml/2006/chart">
+            <c:chart xmlns:c="http://schemas.openxmlformats.org/drawingml/2006/chart" r:id="rId2"/>
+          </a:graphicData>
+        </a:graphic>
+      </p:graphicFrame>
+      <p:sp>
+        <p:nvSpPr>
+          <p:cNvPr id="11" name="Shape 7"/>
           <p:cNvSpPr/>
           <p:nvPr/>
         </p:nvSpPr>
@@ -34773,7 +35277,7 @@
       </p:sp>
       <p:sp>
         <p:nvSpPr>
-          <p:cNvPr id="9" name="Text 6"/>
+          <p:cNvPr id="12" name="Text 8"/>
           <p:cNvSpPr txBox="1"/>
           <p:nvPr/>
         </p:nvSpPr>
@@ -34794,7 +35298,7 @@
           <a:p>
             <a:pPr algn="l" indent="0" marL="0">
               <a:lnSpc>
-                <a:spcPct val="110000"/>
+                <a:spcPct val="115000"/>
               </a:lnSpc>
               <a:buNone/>
             </a:pPr>
@@ -34807,11 +35311,11 @@
                 <a:ea typeface="Calibri" pitchFamily="34" charset="-122"/>
                 <a:cs typeface="Calibri" pitchFamily="34" charset="-120"/>
               </a:rPr>
-              <a:t>Single select. </a:t>
+              <a:t>Single select, asked twice. </a:t>
             </a:r>
             <a:pPr algn="l" indent="0" marL="0">
               <a:lnSpc>
-                <a:spcPct val="110000"/>
+                <a:spcPct val="115000"/>
               </a:lnSpc>
               <a:buNone/>
             </a:pPr>
@@ -34824,58 +35328,16 @@
                 <a:ea typeface="Calibri" pitchFamily="34" charset="-122"/>
                 <a:cs typeface="Calibri" pitchFamily="34" charset="-120"/>
               </a:rPr>
-              <a:t>The % in each category label is the full tier-level figure; region segments are rounded to the nearest whole percent and may not sum exactly due to rounding. Region sample sizes — Top 100: US n=14, Canada n=13, Europe n=7, Australia n=4, Singapore n=2. Large: US n=20, Canada n=5, Europe n=5, Australia n=3, Singapore n=2. Australia and Singapore are thin samples shown directionally.</a:t>
-            </a:r>
-            <a:endParaRPr lang="en-US" sz="850" dirty="0"/>
-          </a:p>
-        </p:txBody>
-      </p:sp>
-      <p:sp>
-        <p:nvSpPr>
-          <p:cNvPr id="10" name="Text 7"/>
-          <p:cNvSpPr txBox="1"/>
-          <p:nvPr/>
-        </p:nvSpPr>
-        <p:spPr>
-          <a:xfrm>
-            <a:off x="502006" y="6071616"/>
-            <a:ext cx="11188598" cy="420624"/>
-          </a:xfrm>
-          <a:prstGeom prst="rect">
-            <a:avLst/>
-          </a:prstGeom>
-          <a:noFill/>
-          <a:ln/>
-        </p:spPr>
-        <p:txBody>
-          <a:bodyPr wrap="square" lIns="0" tIns="0" rIns="0" bIns="0" rtlCol="0" anchor="t"/>
-          <a:lstStyle/>
-          <a:p>
+              <a:t>Institution tier is based on newS8, including 5 respondents reclassified from their employer description elsewhere in the survey (see the Q1 sector x tier slide for detail). Response options as fielded: </a:t>
+            </a:r>
             <a:pPr algn="l" indent="0" marL="0">
               <a:lnSpc>
-                <a:spcPct val="110000"/>
+                <a:spcPct val="115000"/>
               </a:lnSpc>
               <a:buNone/>
             </a:pPr>
             <a:r>
-              <a:rPr lang="en-US" sz="850" b="1" dirty="0">
-                <a:solidFill>
-                  <a:srgbClr val="53565A"/>
-                </a:solidFill>
-                <a:latin typeface="Calibri" pitchFamily="34" charset="0"/>
-                <a:ea typeface="Calibri" pitchFamily="34" charset="-122"/>
-                <a:cs typeface="Calibri" pitchFamily="34" charset="-120"/>
-              </a:rPr>
-              <a:t>Response options as fielded: </a:t>
-            </a:r>
-            <a:pPr algn="l" indent="0" marL="0">
-              <a:lnSpc>
-                <a:spcPct val="110000"/>
-              </a:lnSpc>
-              <a:buNone/>
-            </a:pPr>
-            <a:r>
-              <a:rPr lang="en-US" sz="800" i="1" dirty="0">
+              <a:rPr lang="en-US" sz="850" i="1" dirty="0">
                 <a:solidFill>
                   <a:srgbClr val="53565A"/>
                 </a:solidFill>
@@ -34954,7 +35416,7 @@
                 <a:ea typeface="Calibri" pitchFamily="34" charset="-122"/>
                 <a:cs typeface="Calibri" pitchFamily="34" charset="-120"/>
               </a:rPr>
-              <a:t>3-Year Scaling Focus — Banking, by Institution Tier and Region</a:t>
+              <a:t>Current Scaling Approach — Banking, by Institution Tier and Region</a:t>
             </a:r>
             <a:endParaRPr lang="en-US" sz="1900" dirty="0"/>
           </a:p>
@@ -34996,7 +35458,7 @@
                 <a:ea typeface="Calibri" pitchFamily="34" charset="-122"/>
                 <a:cs typeface="Calibri" pitchFamily="34" charset="-120"/>
               </a:rPr>
-              <a:t>AI's three-year lead holds across nearly every region and tier in Banking.</a:t>
+              <a:t>Top 100 institutions in the U.S. lean hardest on AI today; Large institutions show a more even regional spread.</a:t>
             </a:r>
             <a:endParaRPr lang="en-US" sz="1350" dirty="0"/>
           </a:p>
@@ -35061,7 +35523,7 @@
                 <a:ea typeface="IBM Plex Mono" pitchFamily="34" charset="-122"/>
                 <a:cs typeface="IBM Plex Mono" pitchFamily="34" charset="-120"/>
               </a:rPr>
-              <a:t>Q9  </a:t>
+              <a:t>Q8  </a:t>
             </a:r>
             <a:pPr algn="l" indent="0" marL="0">
               <a:lnSpc>
@@ -35078,7 +35540,7 @@
                 <a:ea typeface="Calibri" pitchFamily="34" charset="-122"/>
                 <a:cs typeface="Calibri" pitchFamily="34" charset="-120"/>
               </a:rPr>
-              <a:t>“Which area do you expect will receive the greatest focus for fraud/investigations operations transformation over the next three years? (Banking only, Top 100 vs. Large institution, further broken down by region)”</a:t>
+              <a:t>“Which statement best describes your current approach to scaling fraud/investigations operations as fraud volume and complexity increases? (Banking only, Top 100 vs. Large institution, further broken down by region)”</a:t>
             </a:r>
             <a:endParaRPr lang="en-US" sz="1000" dirty="0"/>
           </a:p>
@@ -35291,6 +35753,397 @@
 <file path=ppt/slides/slide36.xml><?xml version="1.0" encoding="utf-8"?>
 <p:sld xmlns:a="http://schemas.openxmlformats.org/drawingml/2006/main" xmlns:r="http://schemas.openxmlformats.org/officeDocument/2006/relationships" xmlns:p="http://schemas.openxmlformats.org/presentationml/2006/main">
   <p:cSld name="Slide 36">
+    <p:bg>
+      <p:bgPr>
+        <a:solidFill>
+          <a:srgbClr val="FFFFFF"/>
+        </a:solidFill>
+      </p:bgPr>
+    </p:bg>
+    <p:spTree>
+      <p:nvGrpSpPr>
+        <p:cNvPr id="1" name=""/>
+        <p:cNvGrpSpPr/>
+        <p:nvPr/>
+      </p:nvGrpSpPr>
+      <p:grpSpPr>
+        <a:xfrm>
+          <a:off x="0" y="0"/>
+          <a:ext cx="0" cy="0"/>
+          <a:chOff x="0" y="0"/>
+          <a:chExt cx="0" cy="0"/>
+        </a:xfrm>
+      </p:grpSpPr>
+      <p:sp>
+        <p:nvSpPr>
+          <p:cNvPr id="2" name="Text 0"/>
+          <p:cNvSpPr txBox="1"/>
+          <p:nvPr/>
+        </p:nvSpPr>
+        <p:spPr>
+          <a:xfrm>
+            <a:off x="502006" y="256032"/>
+            <a:ext cx="11188598" cy="310896"/>
+          </a:xfrm>
+          <a:prstGeom prst="rect">
+            <a:avLst/>
+          </a:prstGeom>
+          <a:noFill/>
+          <a:ln/>
+        </p:spPr>
+        <p:txBody>
+          <a:bodyPr wrap="square" lIns="0" tIns="0" rIns="0" bIns="0" rtlCol="0" anchor="t"/>
+          <a:lstStyle/>
+          <a:p>
+            <a:pPr algn="l" indent="0" marL="0">
+              <a:buNone/>
+            </a:pPr>
+            <a:r>
+              <a:rPr lang="en-US" sz="1900" b="1" dirty="0">
+                <a:solidFill>
+                  <a:srgbClr val="000000"/>
+                </a:solidFill>
+                <a:latin typeface="Calibri" pitchFamily="34" charset="0"/>
+                <a:ea typeface="Calibri" pitchFamily="34" charset="-122"/>
+                <a:cs typeface="Calibri" pitchFamily="34" charset="-120"/>
+              </a:rPr>
+              <a:t>3-Year Scaling Focus — Banking, by Institution Tier and Region</a:t>
+            </a:r>
+            <a:endParaRPr lang="en-US" sz="1900" dirty="0"/>
+          </a:p>
+        </p:txBody>
+      </p:sp>
+      <p:sp>
+        <p:nvSpPr>
+          <p:cNvPr id="3" name="Text 1"/>
+          <p:cNvSpPr txBox="1"/>
+          <p:nvPr/>
+        </p:nvSpPr>
+        <p:spPr>
+          <a:xfrm>
+            <a:off x="502006" y="585216"/>
+            <a:ext cx="11188598" cy="713232"/>
+          </a:xfrm>
+          <a:prstGeom prst="rect">
+            <a:avLst/>
+          </a:prstGeom>
+          <a:noFill/>
+          <a:ln/>
+        </p:spPr>
+        <p:txBody>
+          <a:bodyPr wrap="square" lIns="0" tIns="0" rIns="0" bIns="0" rtlCol="0" anchor="t"/>
+          <a:lstStyle/>
+          <a:p>
+            <a:pPr algn="l" indent="0" marL="0">
+              <a:lnSpc>
+                <a:spcPct val="105000"/>
+              </a:lnSpc>
+              <a:buNone/>
+            </a:pPr>
+            <a:r>
+              <a:rPr lang="en-US" sz="1350" b="1" dirty="0">
+                <a:solidFill>
+                  <a:srgbClr val="046A38"/>
+                </a:solidFill>
+                <a:latin typeface="Calibri" pitchFamily="34" charset="0"/>
+                <a:ea typeface="Calibri" pitchFamily="34" charset="-122"/>
+                <a:cs typeface="Calibri" pitchFamily="34" charset="-120"/>
+              </a:rPr>
+              <a:t>AI's three-year lead holds across nearly every region and tier in Banking.</a:t>
+            </a:r>
+            <a:endParaRPr lang="en-US" sz="1350" dirty="0"/>
+          </a:p>
+        </p:txBody>
+      </p:sp>
+      <p:sp>
+        <p:nvSpPr>
+          <p:cNvPr id="4" name="Shape 2"/>
+          <p:cNvSpPr/>
+          <p:nvPr/>
+        </p:nvSpPr>
+        <p:spPr>
+          <a:xfrm>
+            <a:off x="502006" y="1335024"/>
+            <a:ext cx="0" cy="512064"/>
+          </a:xfrm>
+          <a:prstGeom prst="line">
+            <a:avLst/>
+          </a:prstGeom>
+          <a:noFill/>
+          <a:ln w="25400">
+            <a:solidFill>
+              <a:srgbClr val="D0D0CE"/>
+            </a:solidFill>
+            <a:prstDash val="solid"/>
+          </a:ln>
+        </p:spPr>
+      </p:sp>
+      <p:sp>
+        <p:nvSpPr>
+          <p:cNvPr id="5" name="Text 3"/>
+          <p:cNvSpPr txBox="1"/>
+          <p:nvPr/>
+        </p:nvSpPr>
+        <p:spPr>
+          <a:xfrm>
+            <a:off x="648310" y="1335024"/>
+            <a:ext cx="11042294" cy="512064"/>
+          </a:xfrm>
+          <a:prstGeom prst="rect">
+            <a:avLst/>
+          </a:prstGeom>
+          <a:noFill/>
+          <a:ln/>
+        </p:spPr>
+        <p:txBody>
+          <a:bodyPr wrap="square" lIns="0" tIns="0" rIns="0" bIns="0" rtlCol="0" anchor="t"/>
+          <a:lstStyle/>
+          <a:p>
+            <a:pPr algn="l" indent="0" marL="0">
+              <a:lnSpc>
+                <a:spcPct val="106000"/>
+              </a:lnSpc>
+              <a:buNone/>
+            </a:pPr>
+            <a:r>
+              <a:rPr lang="en-US" sz="900" b="1" dirty="0">
+                <a:solidFill>
+                  <a:srgbClr val="046A38"/>
+                </a:solidFill>
+                <a:latin typeface="IBM Plex Mono" pitchFamily="34" charset="0"/>
+                <a:ea typeface="IBM Plex Mono" pitchFamily="34" charset="-122"/>
+                <a:cs typeface="IBM Plex Mono" pitchFamily="34" charset="-120"/>
+              </a:rPr>
+              <a:t>Q9  </a:t>
+            </a:r>
+            <a:pPr algn="l" indent="0" marL="0">
+              <a:lnSpc>
+                <a:spcPct val="106000"/>
+              </a:lnSpc>
+              <a:buNone/>
+            </a:pPr>
+            <a:r>
+              <a:rPr lang="en-US" sz="1000" i="1" dirty="0">
+                <a:solidFill>
+                  <a:srgbClr val="575757"/>
+                </a:solidFill>
+                <a:latin typeface="Calibri" pitchFamily="34" charset="0"/>
+                <a:ea typeface="Calibri" pitchFamily="34" charset="-122"/>
+                <a:cs typeface="Calibri" pitchFamily="34" charset="-120"/>
+              </a:rPr>
+              <a:t>“Which area do you expect will receive the greatest focus for fraud/investigations operations transformation over the next three years? (Banking only, Top 100 vs. Large institution, further broken down by region)”</a:t>
+            </a:r>
+            <a:endParaRPr lang="en-US" sz="1000" dirty="0"/>
+          </a:p>
+        </p:txBody>
+      </p:sp>
+      <p:sp>
+        <p:nvSpPr>
+          <p:cNvPr id="6" name="Text 4"/>
+          <p:cNvSpPr txBox="1"/>
+          <p:nvPr/>
+        </p:nvSpPr>
+        <p:spPr>
+          <a:xfrm>
+            <a:off x="11346790" y="6537960"/>
+            <a:ext cx="343814" cy="182880"/>
+          </a:xfrm>
+          <a:prstGeom prst="rect">
+            <a:avLst/>
+          </a:prstGeom>
+          <a:noFill/>
+          <a:ln/>
+        </p:spPr>
+        <p:txBody>
+          <a:bodyPr wrap="square" rtlCol="0" anchor="ctr"/>
+          <a:lstStyle/>
+          <a:p>
+            <a:pPr algn="r" indent="0" marL="0">
+              <a:buNone/>
+            </a:pPr>
+            <a:r>
+              <a:rPr lang="en-US" sz="900" dirty="0">
+                <a:solidFill>
+                  <a:srgbClr val="53565A"/>
+                </a:solidFill>
+                <a:latin typeface="Calibri" pitchFamily="34" charset="0"/>
+                <a:ea typeface="Calibri" pitchFamily="34" charset="-122"/>
+                <a:cs typeface="Calibri" pitchFamily="34" charset="-120"/>
+              </a:rPr>
+              <a:t>35</a:t>
+            </a:r>
+            <a:endParaRPr lang="en-US" sz="900" dirty="0"/>
+          </a:p>
+        </p:txBody>
+      </p:sp>
+      <p:graphicFrame>
+        <p:nvGraphicFramePr>
+          <p:cNvPr id="7" name="Chart 0" descr=""/>
+          <p:cNvGraphicFramePr/>
+          <p:nvPr/>
+        </p:nvGraphicFramePr>
+        <p:xfrm>
+          <a:off x="502006" y="2011680"/>
+          <a:ext cx="11188598" cy="3063240"/>
+        </p:xfrm>
+        <a:graphic xmlns:a="http://schemas.openxmlformats.org/drawingml/2006/main">
+          <a:graphicData uri="http://schemas.openxmlformats.org/drawingml/2006/chart">
+            <c:chart xmlns:c="http://schemas.openxmlformats.org/drawingml/2006/chart" r:id="rId1"/>
+          </a:graphicData>
+        </a:graphic>
+      </p:graphicFrame>
+      <p:sp>
+        <p:nvSpPr>
+          <p:cNvPr id="8" name="Shape 5"/>
+          <p:cNvSpPr/>
+          <p:nvPr/>
+        </p:nvSpPr>
+        <p:spPr>
+          <a:xfrm>
+            <a:off x="502006" y="5202936"/>
+            <a:ext cx="11188598" cy="0"/>
+          </a:xfrm>
+          <a:prstGeom prst="line">
+            <a:avLst/>
+          </a:prstGeom>
+          <a:noFill/>
+          <a:ln w="9525">
+            <a:solidFill>
+              <a:srgbClr val="D0D0CE"/>
+            </a:solidFill>
+            <a:prstDash val="solid"/>
+          </a:ln>
+        </p:spPr>
+      </p:sp>
+      <p:sp>
+        <p:nvSpPr>
+          <p:cNvPr id="9" name="Text 6"/>
+          <p:cNvSpPr txBox="1"/>
+          <p:nvPr/>
+        </p:nvSpPr>
+        <p:spPr>
+          <a:xfrm>
+            <a:off x="502006" y="5276088"/>
+            <a:ext cx="11188598" cy="777240"/>
+          </a:xfrm>
+          <a:prstGeom prst="rect">
+            <a:avLst/>
+          </a:prstGeom>
+          <a:noFill/>
+          <a:ln/>
+        </p:spPr>
+        <p:txBody>
+          <a:bodyPr wrap="square" lIns="0" tIns="0" rIns="0" bIns="0" rtlCol="0" anchor="t"/>
+          <a:lstStyle/>
+          <a:p>
+            <a:pPr algn="l" indent="0" marL="0">
+              <a:lnSpc>
+                <a:spcPct val="110000"/>
+              </a:lnSpc>
+              <a:buNone/>
+            </a:pPr>
+            <a:r>
+              <a:rPr lang="en-US" sz="850" b="1" dirty="0">
+                <a:solidFill>
+                  <a:srgbClr val="53565A"/>
+                </a:solidFill>
+                <a:latin typeface="Calibri" pitchFamily="34" charset="0"/>
+                <a:ea typeface="Calibri" pitchFamily="34" charset="-122"/>
+                <a:cs typeface="Calibri" pitchFamily="34" charset="-120"/>
+              </a:rPr>
+              <a:t>Single select. </a:t>
+            </a:r>
+            <a:pPr algn="l" indent="0" marL="0">
+              <a:lnSpc>
+                <a:spcPct val="110000"/>
+              </a:lnSpc>
+              <a:buNone/>
+            </a:pPr>
+            <a:r>
+              <a:rPr lang="en-US" sz="850" dirty="0">
+                <a:solidFill>
+                  <a:srgbClr val="53565A"/>
+                </a:solidFill>
+                <a:latin typeface="Calibri" pitchFamily="34" charset="0"/>
+                <a:ea typeface="Calibri" pitchFamily="34" charset="-122"/>
+                <a:cs typeface="Calibri" pitchFamily="34" charset="-120"/>
+              </a:rPr>
+              <a:t>The % in each category label is the full tier-level figure; region segments are rounded to the nearest whole percent and may not sum exactly due to rounding. Region sample sizes — Top 100: US n=14, Canada n=13, Europe n=7, Australia n=4, Singapore n=2. Large: US n=20, Canada n=5, Europe n=5, Australia n=3, Singapore n=2. Australia and Singapore are thin samples shown directionally.</a:t>
+            </a:r>
+            <a:endParaRPr lang="en-US" sz="850" dirty="0"/>
+          </a:p>
+        </p:txBody>
+      </p:sp>
+      <p:sp>
+        <p:nvSpPr>
+          <p:cNvPr id="10" name="Text 7"/>
+          <p:cNvSpPr txBox="1"/>
+          <p:nvPr/>
+        </p:nvSpPr>
+        <p:spPr>
+          <a:xfrm>
+            <a:off x="502006" y="6071616"/>
+            <a:ext cx="11188598" cy="420624"/>
+          </a:xfrm>
+          <a:prstGeom prst="rect">
+            <a:avLst/>
+          </a:prstGeom>
+          <a:noFill/>
+          <a:ln/>
+        </p:spPr>
+        <p:txBody>
+          <a:bodyPr wrap="square" lIns="0" tIns="0" rIns="0" bIns="0" rtlCol="0" anchor="t"/>
+          <a:lstStyle/>
+          <a:p>
+            <a:pPr algn="l" indent="0" marL="0">
+              <a:lnSpc>
+                <a:spcPct val="110000"/>
+              </a:lnSpc>
+              <a:buNone/>
+            </a:pPr>
+            <a:r>
+              <a:rPr lang="en-US" sz="850" b="1" dirty="0">
+                <a:solidFill>
+                  <a:srgbClr val="53565A"/>
+                </a:solidFill>
+                <a:latin typeface="Calibri" pitchFamily="34" charset="0"/>
+                <a:ea typeface="Calibri" pitchFamily="34" charset="-122"/>
+                <a:cs typeface="Calibri" pitchFamily="34" charset="-120"/>
+              </a:rPr>
+              <a:t>Response options as fielded: </a:t>
+            </a:r>
+            <a:pPr algn="l" indent="0" marL="0">
+              <a:lnSpc>
+                <a:spcPct val="110000"/>
+              </a:lnSpc>
+              <a:buNone/>
+            </a:pPr>
+            <a:r>
+              <a:rPr lang="en-US" sz="800" i="1" dirty="0">
+                <a:solidFill>
+                  <a:srgbClr val="53565A"/>
+                </a:solidFill>
+                <a:latin typeface="Calibri" pitchFamily="34" charset="0"/>
+                <a:ea typeface="Calibri" pitchFamily="34" charset="-122"/>
+                <a:cs typeface="Calibri" pitchFamily="34" charset="-120"/>
+              </a:rPr>
+              <a:t>“Adding capacity through hiring full-time employees and workforce expansion”  ·  “Adding capacity through outsourcing arrangements (e.g., contractors)”  ·  “Automating workflows and minimizing manual activities”  ·  “Augmenting existing capacity with AI-enabled tools”  ·  “Redesigning operation processes and playbooks across the lifecycle”  ·  “Pursuing a combination of the above approaches”</a:t>
+            </a:r>
+            <a:endParaRPr lang="en-US" sz="850" dirty="0"/>
+          </a:p>
+        </p:txBody>
+      </p:sp>
+    </p:spTree>
+  </p:cSld>
+  <p:clrMapOvr>
+    <a:masterClrMapping/>
+  </p:clrMapOvr>
+</p:sld>
+</file>
+
+<file path=ppt/slides/slide37.xml><?xml version="1.0" encoding="utf-8"?>
+<p:sld xmlns:a="http://schemas.openxmlformats.org/drawingml/2006/main" xmlns:r="http://schemas.openxmlformats.org/officeDocument/2006/relationships" xmlns:p="http://schemas.openxmlformats.org/presentationml/2006/main">
+  <p:cSld name="Slide 37">
     <p:bg>
       <p:bgPr>
         <a:solidFill>
@@ -35426,426 +36279,9 @@
                 <a:ea typeface="Calibri" pitchFamily="34" charset="-122"/>
                 <a:cs typeface="Calibri" pitchFamily="34" charset="-120"/>
               </a:rPr>
-              <a:t>35</a:t>
+              <a:t>36</a:t>
             </a:r>
             <a:endParaRPr lang="en-US" sz="900" dirty="0"/>
-          </a:p>
-        </p:txBody>
-      </p:sp>
-    </p:spTree>
-  </p:cSld>
-  <p:clrMapOvr>
-    <a:masterClrMapping/>
-  </p:clrMapOvr>
-</p:sld>
-</file>
-
-<file path=ppt/slides/slide37.xml><?xml version="1.0" encoding="utf-8"?>
-<p:sld xmlns:a="http://schemas.openxmlformats.org/drawingml/2006/main" xmlns:r="http://schemas.openxmlformats.org/officeDocument/2006/relationships" xmlns:p="http://schemas.openxmlformats.org/presentationml/2006/main">
-  <p:cSld name="Slide 37">
-    <p:bg>
-      <p:bgPr>
-        <a:solidFill>
-          <a:srgbClr val="FFFFFF"/>
-        </a:solidFill>
-      </p:bgPr>
-    </p:bg>
-    <p:spTree>
-      <p:nvGrpSpPr>
-        <p:cNvPr id="1" name=""/>
-        <p:cNvGrpSpPr/>
-        <p:nvPr/>
-      </p:nvGrpSpPr>
-      <p:grpSpPr>
-        <a:xfrm>
-          <a:off x="0" y="0"/>
-          <a:ext cx="0" cy="0"/>
-          <a:chOff x="0" y="0"/>
-          <a:chExt cx="0" cy="0"/>
-        </a:xfrm>
-      </p:grpSpPr>
-      <p:sp>
-        <p:nvSpPr>
-          <p:cNvPr id="2" name="Text 0"/>
-          <p:cNvSpPr txBox="1"/>
-          <p:nvPr/>
-        </p:nvSpPr>
-        <p:spPr>
-          <a:xfrm>
-            <a:off x="502006" y="256032"/>
-            <a:ext cx="11188598" cy="310896"/>
-          </a:xfrm>
-          <a:prstGeom prst="rect">
-            <a:avLst/>
-          </a:prstGeom>
-          <a:noFill/>
-          <a:ln/>
-        </p:spPr>
-        <p:txBody>
-          <a:bodyPr wrap="square" lIns="0" tIns="0" rIns="0" bIns="0" rtlCol="0" anchor="t"/>
-          <a:lstStyle/>
-          <a:p>
-            <a:pPr algn="l" indent="0" marL="0">
-              <a:buNone/>
-            </a:pPr>
-            <a:r>
-              <a:rPr lang="en-US" sz="1900" b="1" dirty="0">
-                <a:solidFill>
-                  <a:srgbClr val="000000"/>
-                </a:solidFill>
-                <a:latin typeface="Calibri" pitchFamily="34" charset="0"/>
-                <a:ea typeface="Calibri" pitchFamily="34" charset="-122"/>
-                <a:cs typeface="Calibri" pitchFamily="34" charset="-120"/>
-              </a:rPr>
-              <a:t>Fraud Investment Relative to Regulatory Requirements</a:t>
-            </a:r>
-            <a:endParaRPr lang="en-US" sz="1900" dirty="0"/>
-          </a:p>
-        </p:txBody>
-      </p:sp>
-      <p:sp>
-        <p:nvSpPr>
-          <p:cNvPr id="3" name="Text 1"/>
-          <p:cNvSpPr txBox="1"/>
-          <p:nvPr/>
-        </p:nvSpPr>
-        <p:spPr>
-          <a:xfrm>
-            <a:off x="502006" y="585216"/>
-            <a:ext cx="11188598" cy="713232"/>
-          </a:xfrm>
-          <a:prstGeom prst="rect">
-            <a:avLst/>
-          </a:prstGeom>
-          <a:noFill/>
-          <a:ln/>
-        </p:spPr>
-        <p:txBody>
-          <a:bodyPr wrap="square" lIns="0" tIns="0" rIns="0" bIns="0" rtlCol="0" anchor="t"/>
-          <a:lstStyle/>
-          <a:p>
-            <a:pPr algn="l" indent="0" marL="0">
-              <a:lnSpc>
-                <a:spcPct val="105000"/>
-              </a:lnSpc>
-              <a:buNone/>
-            </a:pPr>
-            <a:r>
-              <a:rPr lang="en-US" sz="1350" b="1" dirty="0">
-                <a:solidFill>
-                  <a:srgbClr val="046A38"/>
-                </a:solidFill>
-                <a:latin typeface="Calibri" pitchFamily="34" charset="0"/>
-                <a:ea typeface="Calibri" pitchFamily="34" charset="-122"/>
-                <a:cs typeface="Calibri" pitchFamily="34" charset="-120"/>
-              </a:rPr>
-              <a:t>Most fraud spending today is about fixing past problems, not getting ahead of new ones.</a:t>
-            </a:r>
-            <a:endParaRPr lang="en-US" sz="1350" dirty="0"/>
-          </a:p>
-        </p:txBody>
-      </p:sp>
-      <p:sp>
-        <p:nvSpPr>
-          <p:cNvPr id="4" name="Shape 2"/>
-          <p:cNvSpPr/>
-          <p:nvPr/>
-        </p:nvSpPr>
-        <p:spPr>
-          <a:xfrm>
-            <a:off x="502006" y="1335024"/>
-            <a:ext cx="0" cy="512064"/>
-          </a:xfrm>
-          <a:prstGeom prst="line">
-            <a:avLst/>
-          </a:prstGeom>
-          <a:noFill/>
-          <a:ln w="25400">
-            <a:solidFill>
-              <a:srgbClr val="D0D0CE"/>
-            </a:solidFill>
-            <a:prstDash val="solid"/>
-          </a:ln>
-        </p:spPr>
-      </p:sp>
-      <p:sp>
-        <p:nvSpPr>
-          <p:cNvPr id="5" name="Text 3"/>
-          <p:cNvSpPr txBox="1"/>
-          <p:nvPr/>
-        </p:nvSpPr>
-        <p:spPr>
-          <a:xfrm>
-            <a:off x="648310" y="1335024"/>
-            <a:ext cx="11042294" cy="512064"/>
-          </a:xfrm>
-          <a:prstGeom prst="rect">
-            <a:avLst/>
-          </a:prstGeom>
-          <a:noFill/>
-          <a:ln/>
-        </p:spPr>
-        <p:txBody>
-          <a:bodyPr wrap="square" lIns="0" tIns="0" rIns="0" bIns="0" rtlCol="0" anchor="t"/>
-          <a:lstStyle/>
-          <a:p>
-            <a:pPr algn="l" indent="0" marL="0">
-              <a:lnSpc>
-                <a:spcPct val="106000"/>
-              </a:lnSpc>
-              <a:buNone/>
-            </a:pPr>
-            <a:r>
-              <a:rPr lang="en-US" sz="900" b="1" dirty="0">
-                <a:solidFill>
-                  <a:srgbClr val="046A38"/>
-                </a:solidFill>
-                <a:latin typeface="IBM Plex Mono" pitchFamily="34" charset="0"/>
-                <a:ea typeface="IBM Plex Mono" pitchFamily="34" charset="-122"/>
-                <a:cs typeface="IBM Plex Mono" pitchFamily="34" charset="-120"/>
-              </a:rPr>
-              <a:t>Q10  </a:t>
-            </a:r>
-            <a:pPr algn="l" indent="0" marL="0">
-              <a:lnSpc>
-                <a:spcPct val="106000"/>
-              </a:lnSpc>
-              <a:buNone/>
-            </a:pPr>
-            <a:r>
-              <a:rPr lang="en-US" sz="1000" i="1" dirty="0">
-                <a:solidFill>
-                  <a:srgbClr val="575757"/>
-                </a:solidFill>
-                <a:latin typeface="Calibri" pitchFamily="34" charset="0"/>
-                <a:ea typeface="Calibri" pitchFamily="34" charset="-122"/>
-                <a:cs typeface="Calibri" pitchFamily="34" charset="-120"/>
-              </a:rPr>
-              <a:t>“Which statement best reflects how your organization is allocating fraud-related investment in response to regulatory and compliance requirements?”</a:t>
-            </a:r>
-            <a:endParaRPr lang="en-US" sz="1000" dirty="0"/>
-          </a:p>
-        </p:txBody>
-      </p:sp>
-      <p:sp>
-        <p:nvSpPr>
-          <p:cNvPr id="6" name="Text 4"/>
-          <p:cNvSpPr txBox="1"/>
-          <p:nvPr/>
-        </p:nvSpPr>
-        <p:spPr>
-          <a:xfrm>
-            <a:off x="11346790" y="6537960"/>
-            <a:ext cx="343814" cy="182880"/>
-          </a:xfrm>
-          <a:prstGeom prst="rect">
-            <a:avLst/>
-          </a:prstGeom>
-          <a:noFill/>
-          <a:ln/>
-        </p:spPr>
-        <p:txBody>
-          <a:bodyPr wrap="square" rtlCol="0" anchor="ctr"/>
-          <a:lstStyle/>
-          <a:p>
-            <a:pPr algn="r" indent="0" marL="0">
-              <a:buNone/>
-            </a:pPr>
-            <a:r>
-              <a:rPr lang="en-US" sz="900" dirty="0">
-                <a:solidFill>
-                  <a:srgbClr val="53565A"/>
-                </a:solidFill>
-                <a:latin typeface="Calibri" pitchFamily="34" charset="0"/>
-                <a:ea typeface="Calibri" pitchFamily="34" charset="-122"/>
-                <a:cs typeface="Calibri" pitchFamily="34" charset="-120"/>
-              </a:rPr>
-              <a:t>36</a:t>
-            </a:r>
-            <a:endParaRPr lang="en-US" sz="900" dirty="0"/>
-          </a:p>
-        </p:txBody>
-      </p:sp>
-      <p:graphicFrame>
-        <p:nvGraphicFramePr>
-          <p:cNvPr id="7" name="Chart 0" descr=""/>
-          <p:cNvGraphicFramePr/>
-          <p:nvPr/>
-        </p:nvGraphicFramePr>
-        <p:xfrm>
-          <a:off x="502006" y="2011680"/>
-          <a:ext cx="11188598" cy="3063240"/>
-        </p:xfrm>
-        <a:graphic xmlns:a="http://schemas.openxmlformats.org/drawingml/2006/main">
-          <a:graphicData uri="http://schemas.openxmlformats.org/drawingml/2006/chart">
-            <c:chart xmlns:c="http://schemas.openxmlformats.org/drawingml/2006/chart" r:id="rId1"/>
-          </a:graphicData>
-        </a:graphic>
-      </p:graphicFrame>
-      <p:sp>
-        <p:nvSpPr>
-          <p:cNvPr id="8" name="Shape 5"/>
-          <p:cNvSpPr/>
-          <p:nvPr/>
-        </p:nvSpPr>
-        <p:spPr>
-          <a:xfrm>
-            <a:off x="502006" y="5202936"/>
-            <a:ext cx="11188598" cy="0"/>
-          </a:xfrm>
-          <a:prstGeom prst="line">
-            <a:avLst/>
-          </a:prstGeom>
-          <a:noFill/>
-          <a:ln w="9525">
-            <a:solidFill>
-              <a:srgbClr val="D0D0CE"/>
-            </a:solidFill>
-            <a:prstDash val="solid"/>
-          </a:ln>
-        </p:spPr>
-      </p:sp>
-      <p:sp>
-        <p:nvSpPr>
-          <p:cNvPr id="9" name="Text 6"/>
-          <p:cNvSpPr txBox="1"/>
-          <p:nvPr/>
-        </p:nvSpPr>
-        <p:spPr>
-          <a:xfrm>
-            <a:off x="502006" y="5276088"/>
-            <a:ext cx="11188598" cy="886968"/>
-          </a:xfrm>
-          <a:prstGeom prst="rect">
-            <a:avLst/>
-          </a:prstGeom>
-          <a:noFill/>
-          <a:ln/>
-        </p:spPr>
-        <p:txBody>
-          <a:bodyPr wrap="square" lIns="0" tIns="0" rIns="0" bIns="0" rtlCol="0" anchor="t"/>
-          <a:lstStyle/>
-          <a:p>
-            <a:pPr algn="l" indent="0" marL="0">
-              <a:lnSpc>
-                <a:spcPct val="118000"/>
-              </a:lnSpc>
-              <a:buNone/>
-            </a:pPr>
-            <a:r>
-              <a:rPr lang="en-US" sz="850" b="1" dirty="0">
-                <a:solidFill>
-                  <a:srgbClr val="53565A"/>
-                </a:solidFill>
-                <a:latin typeface="Calibri" pitchFamily="34" charset="0"/>
-                <a:ea typeface="Calibri" pitchFamily="34" charset="-122"/>
-                <a:cs typeface="Calibri" pitchFamily="34" charset="-120"/>
-              </a:rPr>
-              <a:t>Single select.  </a:t>
-            </a:r>
-            <a:pPr algn="l" indent="0" marL="0">
-              <a:lnSpc>
-                <a:spcPct val="118000"/>
-              </a:lnSpc>
-              <a:buNone/>
-            </a:pPr>
-            <a:r>
-              <a:rPr lang="en-US" sz="850" b="1" dirty="0">
-                <a:solidFill>
-                  <a:srgbClr val="53565A"/>
-                </a:solidFill>
-                <a:latin typeface="Calibri" pitchFamily="34" charset="0"/>
-                <a:ea typeface="Calibri" pitchFamily="34" charset="-122"/>
-                <a:cs typeface="Calibri" pitchFamily="34" charset="-120"/>
-              </a:rPr>
-              <a:t>Response options as fielded: </a:t>
-            </a:r>
-            <a:pPr algn="l" indent="0" marL="0">
-              <a:lnSpc>
-                <a:spcPct val="118000"/>
-              </a:lnSpc>
-              <a:buNone/>
-            </a:pPr>
-            <a:r>
-              <a:rPr lang="en-US" sz="850" i="1" dirty="0">
-                <a:solidFill>
-                  <a:srgbClr val="53565A"/>
-                </a:solidFill>
-                <a:latin typeface="Calibri" pitchFamily="34" charset="0"/>
-                <a:ea typeface="Calibri" pitchFamily="34" charset="-122"/>
-                <a:cs typeface="Calibri" pitchFamily="34" charset="-120"/>
-              </a:rPr>
-              <a:t>“Primarily investing to meet upcoming and draft regulatory requirements”</a:t>
-            </a:r>
-            <a:pPr algn="l" indent="0" marL="0">
-              <a:lnSpc>
-                <a:spcPct val="118000"/>
-              </a:lnSpc>
-              <a:buNone/>
-            </a:pPr>
-            <a:r>
-              <a:rPr lang="en-US" sz="850" dirty="0">
-                <a:solidFill>
-                  <a:srgbClr val="D0D0CE"/>
-                </a:solidFill>
-                <a:latin typeface="Calibri" pitchFamily="34" charset="0"/>
-                <a:ea typeface="Calibri" pitchFamily="34" charset="-122"/>
-                <a:cs typeface="Calibri" pitchFamily="34" charset="-120"/>
-              </a:rPr>
-              <a:t>  ·  </a:t>
-            </a:r>
-            <a:pPr algn="l" indent="0" marL="0">
-              <a:lnSpc>
-                <a:spcPct val="118000"/>
-              </a:lnSpc>
-              <a:buNone/>
-            </a:pPr>
-            <a:r>
-              <a:rPr lang="en-US" sz="850" i="1" dirty="0">
-                <a:solidFill>
-                  <a:srgbClr val="53565A"/>
-                </a:solidFill>
-                <a:latin typeface="Calibri" pitchFamily="34" charset="0"/>
-                <a:ea typeface="Calibri" pitchFamily="34" charset="-122"/>
-                <a:cs typeface="Calibri" pitchFamily="34" charset="-120"/>
-              </a:rPr>
-              <a:t>“Primarily investing to remediate existing compliance and control gaps”</a:t>
-            </a:r>
-            <a:pPr algn="l" indent="0" marL="0">
-              <a:lnSpc>
-                <a:spcPct val="118000"/>
-              </a:lnSpc>
-              <a:buNone/>
-            </a:pPr>
-            <a:r>
-              <a:rPr lang="en-US" sz="850" dirty="0">
-                <a:solidFill>
-                  <a:srgbClr val="D0D0CE"/>
-                </a:solidFill>
-                <a:latin typeface="Calibri" pitchFamily="34" charset="0"/>
-                <a:ea typeface="Calibri" pitchFamily="34" charset="-122"/>
-                <a:cs typeface="Calibri" pitchFamily="34" charset="-120"/>
-              </a:rPr>
-              <a:t>  ·  </a:t>
-            </a:r>
-            <a:pPr algn="l" indent="0" marL="0">
-              <a:lnSpc>
-                <a:spcPct val="118000"/>
-              </a:lnSpc>
-              <a:buNone/>
-            </a:pPr>
-            <a:r>
-              <a:rPr lang="en-US" sz="850" i="1" dirty="0">
-                <a:solidFill>
-                  <a:srgbClr val="53565A"/>
-                </a:solidFill>
-                <a:latin typeface="Calibri" pitchFamily="34" charset="0"/>
-                <a:ea typeface="Calibri" pitchFamily="34" charset="-122"/>
-                <a:cs typeface="Calibri" pitchFamily="34" charset="-120"/>
-              </a:rPr>
-              <a:t>“Regulatory requirements are not a primary driver of fraud-related investment”</a:t>
-            </a:r>
-            <a:endParaRPr lang="en-US" sz="850" dirty="0"/>
           </a:p>
         </p:txBody>
       </p:sp>
@@ -35914,7 +36350,7 @@
                 <a:ea typeface="Calibri" pitchFamily="34" charset="-122"/>
                 <a:cs typeface="Calibri" pitchFamily="34" charset="-120"/>
               </a:rPr>
-              <a:t>Fraud Investment Relative to Regulatory Requirements — By Region</a:t>
+              <a:t>Fraud Investment Relative to Regulatory Requirements</a:t>
             </a:r>
             <a:endParaRPr lang="en-US" sz="1900" dirty="0"/>
           </a:p>
@@ -35956,7 +36392,7 @@
                 <a:ea typeface="Calibri" pitchFamily="34" charset="-122"/>
                 <a:cs typeface="Calibri" pitchFamily="34" charset="-120"/>
               </a:rPr>
-              <a:t>The remediation-first pattern holds broadly across markets, though Canada leans even more toward fixing existing gaps.</a:t>
+              <a:t>Most fraud spending today is about fixing past problems, not getting ahead of new ones.</a:t>
             </a:r>
             <a:endParaRPr lang="en-US" sz="1350" dirty="0"/>
           </a:p>
@@ -36038,7 +36474,7 @@
                 <a:ea typeface="Calibri" pitchFamily="34" charset="-122"/>
                 <a:cs typeface="Calibri" pitchFamily="34" charset="-120"/>
               </a:rPr>
-              <a:t>“Which statement best reflects how your organization is allocating fraud-related investment in response to regulatory and compliance requirements? (by region, all respondents)”</a:t>
+              <a:t>“Which statement best reflects how your organization is allocating fraud-related investment in response to regulatory and compliance requirements?”</a:t>
             </a:r>
             <a:endParaRPr lang="en-US" sz="1000" dirty="0"/>
           </a:p>
@@ -36158,7 +36594,7 @@
                 <a:ea typeface="Calibri" pitchFamily="34" charset="-122"/>
                 <a:cs typeface="Calibri" pitchFamily="34" charset="-120"/>
               </a:rPr>
-              <a:t>Single select — % shown is each region's share of the full 100-respondent sample, so segments sum to the overall figure in each category label. Australia (n=8) and Singapore (n=4) are thin samples, shown directionally.  </a:t>
+              <a:t>Single select.  </a:t>
             </a:r>
             <a:pPr algn="l" indent="0" marL="0">
               <a:lnSpc>
@@ -36331,7 +36767,7 @@
                 <a:ea typeface="Calibri" pitchFamily="34" charset="-122"/>
                 <a:cs typeface="Calibri" pitchFamily="34" charset="-120"/>
               </a:rPr>
-              <a:t>Regulatory Investment Focus — Insurance, by Institution Tier</a:t>
+              <a:t>Fraud Investment Relative to Regulatory Requirements — By Region</a:t>
             </a:r>
             <a:endParaRPr lang="en-US" sz="1900" dirty="0"/>
           </a:p>
@@ -36373,7 +36809,7 @@
                 <a:ea typeface="Calibri" pitchFamily="34" charset="-122"/>
                 <a:cs typeface="Calibri" pitchFamily="34" charset="-120"/>
               </a:rPr>
-              <a:t>Large Insurance Carriers lean hardest into remediation; Top 50 carriers split more evenly toward getting ahead of upcoming rules.</a:t>
+              <a:t>The remediation-first pattern holds broadly across markets, though Canada leans even more toward fixing existing gaps.</a:t>
             </a:r>
             <a:endParaRPr lang="en-US" sz="1350" dirty="0"/>
           </a:p>
@@ -36455,7 +36891,7 @@
                 <a:ea typeface="Calibri" pitchFamily="34" charset="-122"/>
                 <a:cs typeface="Calibri" pitchFamily="34" charset="-120"/>
               </a:rPr>
-              <a:t>“Which statement best reflects how your organization is allocating fraud-related investment in response to regulatory and compliance requirements? (Insurance only, by institution tier)”</a:t>
+              <a:t>“Which statement best reflects how your organization is allocating fraud-related investment in response to regulatory and compliance requirements? (by region, all respondents)”</a:t>
             </a:r>
             <a:endParaRPr lang="en-US" sz="1000" dirty="0"/>
           </a:p>
@@ -36575,7 +37011,7 @@
                 <a:ea typeface="Calibri" pitchFamily="34" charset="-122"/>
                 <a:cs typeface="Calibri" pitchFamily="34" charset="-120"/>
               </a:rPr>
-              <a:t>Single select. Institution tier based on S9; 1 respondent who did not directly answer was classified as Large Insurance Carrier from their employer description elsewhere in the survey (Large is n=10 = 9 direct + 1 reclassified).  </a:t>
+              <a:t>Single select — % shown is each region's share of the full 100-respondent sample, so segments sum to the overall figure in each category label. Australia (n=8) and Singapore (n=4) are thin samples, shown directionally.  </a:t>
             </a:r>
             <a:pPr algn="l" indent="0" marL="0">
               <a:lnSpc>
@@ -37092,7 +37528,7 @@
                 <a:ea typeface="Calibri" pitchFamily="34" charset="-122"/>
                 <a:cs typeface="Calibri" pitchFamily="34" charset="-120"/>
               </a:rPr>
-              <a:t>Regulatory Investment Focus — Banking, by Institution Tier</a:t>
+              <a:t>Regulatory Investment Focus — Insurance, by Institution Tier</a:t>
             </a:r>
             <a:endParaRPr lang="en-US" sz="1900" dirty="0"/>
           </a:p>
@@ -37134,7 +37570,7 @@
                 <a:ea typeface="Calibri" pitchFamily="34" charset="-122"/>
                 <a:cs typeface="Calibri" pitchFamily="34" charset="-120"/>
               </a:rPr>
-              <a:t>Large Financial Institutions skew further toward remediation than Top 100 banks, who are closer to an even split.</a:t>
+              <a:t>Large Insurance Carriers lean hardest into remediation; Top 50 carriers split more evenly toward getting ahead of upcoming rules.</a:t>
             </a:r>
             <a:endParaRPr lang="en-US" sz="1350" dirty="0"/>
           </a:p>
@@ -37216,7 +37652,7 @@
                 <a:ea typeface="Calibri" pitchFamily="34" charset="-122"/>
                 <a:cs typeface="Calibri" pitchFamily="34" charset="-120"/>
               </a:rPr>
-              <a:t>“Which statement best reflects how your organization is allocating fraud-related investment in response to regulatory and compliance requirements? (Banking only, by institution tier)”</a:t>
+              <a:t>“Which statement best reflects how your organization is allocating fraud-related investment in response to regulatory and compliance requirements? (Insurance only, by institution tier)”</a:t>
             </a:r>
             <a:endParaRPr lang="en-US" sz="1000" dirty="0"/>
           </a:p>
@@ -37336,7 +37772,7 @@
                 <a:ea typeface="Calibri" pitchFamily="34" charset="-122"/>
                 <a:cs typeface="Calibri" pitchFamily="34" charset="-120"/>
               </a:rPr>
-              <a:t>Single select. Institution tier based on newS8; 5 respondents who did not directly answer were classified as Top 100 from their employer description elsewhere in the survey (Top 100 is n=40 = 35 direct + 5 reclassified).  </a:t>
+              <a:t>Single select. Institution tier based on S9; 1 respondent who did not directly answer was classified as Large Insurance Carrier from their employer description elsewhere in the survey (Large is n=10 = 9 direct + 1 reclassified).  </a:t>
             </a:r>
             <a:pPr algn="l" indent="0" marL="0">
               <a:lnSpc>
@@ -37509,7 +37945,7 @@
                 <a:ea typeface="Calibri" pitchFamily="34" charset="-122"/>
                 <a:cs typeface="Calibri" pitchFamily="34" charset="-120"/>
               </a:rPr>
-              <a:t>Upcoming Regulatory / Market Change With Greatest Expected Impact</a:t>
+              <a:t>Regulatory Investment Focus — Banking, by Institution Tier</a:t>
             </a:r>
             <a:endParaRPr lang="en-US" sz="1900" dirty="0"/>
           </a:p>
@@ -37551,7 +37987,7 @@
                 <a:ea typeface="Calibri" pitchFamily="34" charset="-122"/>
                 <a:cs typeface="Calibri" pitchFamily="34" charset="-120"/>
               </a:rPr>
-              <a:t>Identity and authentication tops a close three-way race for the next big disruption.</a:t>
+              <a:t>Large Financial Institutions skew further toward remediation than Top 100 banks, who are closer to an even split.</a:t>
             </a:r>
             <a:endParaRPr lang="en-US" sz="1350" dirty="0"/>
           </a:p>
@@ -37616,7 +38052,7 @@
                 <a:ea typeface="IBM Plex Mono" pitchFamily="34" charset="-122"/>
                 <a:cs typeface="IBM Plex Mono" pitchFamily="34" charset="-120"/>
               </a:rPr>
-              <a:t>Q11  </a:t>
+              <a:t>Q10  </a:t>
             </a:r>
             <a:pPr algn="l" indent="0" marL="0">
               <a:lnSpc>
@@ -37633,7 +38069,7 @@
                 <a:ea typeface="Calibri" pitchFamily="34" charset="-122"/>
                 <a:cs typeface="Calibri" pitchFamily="34" charset="-120"/>
               </a:rPr>
-              <a:t>“Which upcoming regulatory or market changes is expected to have the greatest impact on your fraud program?”</a:t>
+              <a:t>“Which statement best reflects how your organization is allocating fraud-related investment in response to regulatory and compliance requirements? (Banking only, by institution tier)”</a:t>
             </a:r>
             <a:endParaRPr lang="en-US" sz="1000" dirty="0"/>
           </a:p>
@@ -37753,7 +38189,7 @@
                 <a:ea typeface="Calibri" pitchFamily="34" charset="-122"/>
                 <a:cs typeface="Calibri" pitchFamily="34" charset="-120"/>
               </a:rPr>
-              <a:t>Ranked top 3 — shown as % of respondents who placed the option anywhere in their top 3 (not mutually exclusive; bars don't sum to 100%).  </a:t>
+              <a:t>Single select. Institution tier based on newS8; 5 respondents who did not directly answer were classified as Top 100 from their employer description elsewhere in the survey (Top 100 is n=40 = 35 direct + 5 reclassified).  </a:t>
             </a:r>
             <a:pPr algn="l" indent="0" marL="0">
               <a:lnSpc>
@@ -37787,7 +38223,7 @@
                 <a:ea typeface="Calibri" pitchFamily="34" charset="-122"/>
                 <a:cs typeface="Calibri" pitchFamily="34" charset="-120"/>
               </a:rPr>
-              <a:t>“Payment innovation and adoption (e.g., real-time payments, stable coins, agentic payments)”</a:t>
+              <a:t>“Primarily investing to meet upcoming and draft regulatory requirements”</a:t>
             </a:r>
             <a:pPr algn="l" indent="0" marL="0">
               <a:lnSpc>
@@ -37821,7 +38257,7 @@
                 <a:ea typeface="Calibri" pitchFamily="34" charset="-122"/>
                 <a:cs typeface="Calibri" pitchFamily="34" charset="-120"/>
               </a:rPr>
-              <a:t>“Liability and reimbursement changes”</a:t>
+              <a:t>“Primarily investing to remediate existing compliance and control gaps”</a:t>
             </a:r>
             <a:pPr algn="l" indent="0" marL="0">
               <a:lnSpc>
@@ -37855,109 +38291,7 @@
                 <a:ea typeface="Calibri" pitchFamily="34" charset="-122"/>
                 <a:cs typeface="Calibri" pitchFamily="34" charset="-120"/>
               </a:rPr>
-              <a:t>“Open Banking / Consumer-driven banking initiatives”</a:t>
-            </a:r>
-            <a:pPr algn="l" indent="0" marL="0">
-              <a:lnSpc>
-                <a:spcPct val="118000"/>
-              </a:lnSpc>
-              <a:buNone/>
-            </a:pPr>
-            <a:r>
-              <a:rPr lang="en-US" sz="850" dirty="0">
-                <a:solidFill>
-                  <a:srgbClr val="D0D0CE"/>
-                </a:solidFill>
-                <a:latin typeface="Calibri" pitchFamily="34" charset="0"/>
-                <a:ea typeface="Calibri" pitchFamily="34" charset="-122"/>
-                <a:cs typeface="Calibri" pitchFamily="34" charset="-120"/>
-              </a:rPr>
-              <a:t>  ·  </a:t>
-            </a:r>
-            <a:pPr algn="l" indent="0" marL="0">
-              <a:lnSpc>
-                <a:spcPct val="118000"/>
-              </a:lnSpc>
-              <a:buNone/>
-            </a:pPr>
-            <a:r>
-              <a:rPr lang="en-US" sz="850" i="1" dirty="0">
-                <a:solidFill>
-                  <a:srgbClr val="53565A"/>
-                </a:solidFill>
-                <a:latin typeface="Calibri" pitchFamily="34" charset="0"/>
-                <a:ea typeface="Calibri" pitchFamily="34" charset="-122"/>
-                <a:cs typeface="Calibri" pitchFamily="34" charset="-120"/>
-              </a:rPr>
-              <a:t>“AML related modernization initiatives”</a:t>
-            </a:r>
-            <a:pPr algn="l" indent="0" marL="0">
-              <a:lnSpc>
-                <a:spcPct val="118000"/>
-              </a:lnSpc>
-              <a:buNone/>
-            </a:pPr>
-            <a:r>
-              <a:rPr lang="en-US" sz="850" dirty="0">
-                <a:solidFill>
-                  <a:srgbClr val="D0D0CE"/>
-                </a:solidFill>
-                <a:latin typeface="Calibri" pitchFamily="34" charset="0"/>
-                <a:ea typeface="Calibri" pitchFamily="34" charset="-122"/>
-                <a:cs typeface="Calibri" pitchFamily="34" charset="-120"/>
-              </a:rPr>
-              <a:t>  ·  </a:t>
-            </a:r>
-            <a:pPr algn="l" indent="0" marL="0">
-              <a:lnSpc>
-                <a:spcPct val="118000"/>
-              </a:lnSpc>
-              <a:buNone/>
-            </a:pPr>
-            <a:r>
-              <a:rPr lang="en-US" sz="850" i="1" dirty="0">
-                <a:solidFill>
-                  <a:srgbClr val="53565A"/>
-                </a:solidFill>
-                <a:latin typeface="Calibri" pitchFamily="34" charset="0"/>
-                <a:ea typeface="Calibri" pitchFamily="34" charset="-122"/>
-                <a:cs typeface="Calibri" pitchFamily="34" charset="-120"/>
-              </a:rPr>
-              <a:t>“Privacy, data-sharing requirements, and AI governance requirements”</a:t>
-            </a:r>
-            <a:pPr algn="l" indent="0" marL="0">
-              <a:lnSpc>
-                <a:spcPct val="118000"/>
-              </a:lnSpc>
-              <a:buNone/>
-            </a:pPr>
-            <a:r>
-              <a:rPr lang="en-US" sz="850" dirty="0">
-                <a:solidFill>
-                  <a:srgbClr val="D0D0CE"/>
-                </a:solidFill>
-                <a:latin typeface="Calibri" pitchFamily="34" charset="0"/>
-                <a:ea typeface="Calibri" pitchFamily="34" charset="-122"/>
-                <a:cs typeface="Calibri" pitchFamily="34" charset="-120"/>
-              </a:rPr>
-              <a:t>  ·  </a:t>
-            </a:r>
-            <a:pPr algn="l" indent="0" marL="0">
-              <a:lnSpc>
-                <a:spcPct val="118000"/>
-              </a:lnSpc>
-              <a:buNone/>
-            </a:pPr>
-            <a:r>
-              <a:rPr lang="en-US" sz="850" i="1" dirty="0">
-                <a:solidFill>
-                  <a:srgbClr val="53565A"/>
-                </a:solidFill>
-                <a:latin typeface="Calibri" pitchFamily="34" charset="0"/>
-                <a:ea typeface="Calibri" pitchFamily="34" charset="-122"/>
-                <a:cs typeface="Calibri" pitchFamily="34" charset="-120"/>
-              </a:rPr>
-              <a:t>“Customer identity, authentication, and digital trust expectations”</a:t>
+              <a:t>“Regulatory requirements are not a primary driver of fraud-related investment”</a:t>
             </a:r>
             <a:endParaRPr lang="en-US" sz="850" dirty="0"/>
           </a:p>
@@ -38028,7 +38362,7 @@
                 <a:ea typeface="Calibri" pitchFamily="34" charset="-122"/>
                 <a:cs typeface="Calibri" pitchFamily="34" charset="-120"/>
               </a:rPr>
-              <a:t>Upcoming Regulatory / Market Change — By Region</a:t>
+              <a:t>Upcoming Regulatory / Market Change With Greatest Expected Impact</a:t>
             </a:r>
             <a:endParaRPr lang="en-US" sz="1900" dirty="0"/>
           </a:p>
@@ -38070,7 +38404,7 @@
                 <a:ea typeface="Calibri" pitchFamily="34" charset="-122"/>
                 <a:cs typeface="Calibri" pitchFamily="34" charset="-120"/>
               </a:rPr>
-              <a:t>Identity and privacy concerns dominate across every market; Canada stands out for prioritizing Open Banking well above its peers.</a:t>
+              <a:t>Identity and authentication tops a close three-way race for the next big disruption.</a:t>
             </a:r>
             <a:endParaRPr lang="en-US" sz="1350" dirty="0"/>
           </a:p>
@@ -38152,7 +38486,7 @@
                 <a:ea typeface="Calibri" pitchFamily="34" charset="-122"/>
                 <a:cs typeface="Calibri" pitchFamily="34" charset="-120"/>
               </a:rPr>
-              <a:t>“Which upcoming regulatory or market changes is expected to have the greatest impact on your fraud program? (by region, all respondents)”</a:t>
+              <a:t>“Which upcoming regulatory or market changes is expected to have the greatest impact on your fraud program?”</a:t>
             </a:r>
             <a:endParaRPr lang="en-US" sz="1000" dirty="0"/>
           </a:p>
@@ -38272,7 +38606,7 @@
                 <a:ea typeface="Calibri" pitchFamily="34" charset="-122"/>
                 <a:cs typeface="Calibri" pitchFamily="34" charset="-120"/>
               </a:rPr>
-              <a:t>Ranked top 3 — % shown is each region's share of the full 100-respondent sample who placed the option anywhere in their top 3, so segments sum to the overall figure in each category label (bars don't sum to 100%). Australia (n=8) and Singapore (n=4) are thin samples, shown directionally.  </a:t>
+              <a:t>Ranked top 3 — shown as % of respondents who placed the option anywhere in their top 3 (not mutually exclusive; bars don't sum to 100%).  </a:t>
             </a:r>
             <a:pPr algn="l" indent="0" marL="0">
               <a:lnSpc>
@@ -38493,6 +38827,525 @@
 <file path=ppt/slides/slide43.xml><?xml version="1.0" encoding="utf-8"?>
 <p:sld xmlns:a="http://schemas.openxmlformats.org/drawingml/2006/main" xmlns:r="http://schemas.openxmlformats.org/officeDocument/2006/relationships" xmlns:p="http://schemas.openxmlformats.org/presentationml/2006/main">
   <p:cSld name="Slide 43">
+    <p:bg>
+      <p:bgPr>
+        <a:solidFill>
+          <a:srgbClr val="FFFFFF"/>
+        </a:solidFill>
+      </p:bgPr>
+    </p:bg>
+    <p:spTree>
+      <p:nvGrpSpPr>
+        <p:cNvPr id="1" name=""/>
+        <p:cNvGrpSpPr/>
+        <p:nvPr/>
+      </p:nvGrpSpPr>
+      <p:grpSpPr>
+        <a:xfrm>
+          <a:off x="0" y="0"/>
+          <a:ext cx="0" cy="0"/>
+          <a:chOff x="0" y="0"/>
+          <a:chExt cx="0" cy="0"/>
+        </a:xfrm>
+      </p:grpSpPr>
+      <p:sp>
+        <p:nvSpPr>
+          <p:cNvPr id="2" name="Text 0"/>
+          <p:cNvSpPr txBox="1"/>
+          <p:nvPr/>
+        </p:nvSpPr>
+        <p:spPr>
+          <a:xfrm>
+            <a:off x="502006" y="256032"/>
+            <a:ext cx="11188598" cy="310896"/>
+          </a:xfrm>
+          <a:prstGeom prst="rect">
+            <a:avLst/>
+          </a:prstGeom>
+          <a:noFill/>
+          <a:ln/>
+        </p:spPr>
+        <p:txBody>
+          <a:bodyPr wrap="square" lIns="0" tIns="0" rIns="0" bIns="0" rtlCol="0" anchor="t"/>
+          <a:lstStyle/>
+          <a:p>
+            <a:pPr algn="l" indent="0" marL="0">
+              <a:buNone/>
+            </a:pPr>
+            <a:r>
+              <a:rPr lang="en-US" sz="1900" b="1" dirty="0">
+                <a:solidFill>
+                  <a:srgbClr val="000000"/>
+                </a:solidFill>
+                <a:latin typeface="Calibri" pitchFamily="34" charset="0"/>
+                <a:ea typeface="Calibri" pitchFamily="34" charset="-122"/>
+                <a:cs typeface="Calibri" pitchFamily="34" charset="-120"/>
+              </a:rPr>
+              <a:t>Upcoming Regulatory / Market Change — By Region</a:t>
+            </a:r>
+            <a:endParaRPr lang="en-US" sz="1900" dirty="0"/>
+          </a:p>
+        </p:txBody>
+      </p:sp>
+      <p:sp>
+        <p:nvSpPr>
+          <p:cNvPr id="3" name="Text 1"/>
+          <p:cNvSpPr txBox="1"/>
+          <p:nvPr/>
+        </p:nvSpPr>
+        <p:spPr>
+          <a:xfrm>
+            <a:off x="502006" y="585216"/>
+            <a:ext cx="11188598" cy="713232"/>
+          </a:xfrm>
+          <a:prstGeom prst="rect">
+            <a:avLst/>
+          </a:prstGeom>
+          <a:noFill/>
+          <a:ln/>
+        </p:spPr>
+        <p:txBody>
+          <a:bodyPr wrap="square" lIns="0" tIns="0" rIns="0" bIns="0" rtlCol="0" anchor="t"/>
+          <a:lstStyle/>
+          <a:p>
+            <a:pPr algn="l" indent="0" marL="0">
+              <a:lnSpc>
+                <a:spcPct val="105000"/>
+              </a:lnSpc>
+              <a:buNone/>
+            </a:pPr>
+            <a:r>
+              <a:rPr lang="en-US" sz="1350" b="1" dirty="0">
+                <a:solidFill>
+                  <a:srgbClr val="046A38"/>
+                </a:solidFill>
+                <a:latin typeface="Calibri" pitchFamily="34" charset="0"/>
+                <a:ea typeface="Calibri" pitchFamily="34" charset="-122"/>
+                <a:cs typeface="Calibri" pitchFamily="34" charset="-120"/>
+              </a:rPr>
+              <a:t>Identity and privacy concerns dominate across every market; Canada stands out for prioritizing Open Banking well above its peers.</a:t>
+            </a:r>
+            <a:endParaRPr lang="en-US" sz="1350" dirty="0"/>
+          </a:p>
+        </p:txBody>
+      </p:sp>
+      <p:sp>
+        <p:nvSpPr>
+          <p:cNvPr id="4" name="Shape 2"/>
+          <p:cNvSpPr/>
+          <p:nvPr/>
+        </p:nvSpPr>
+        <p:spPr>
+          <a:xfrm>
+            <a:off x="502006" y="1335024"/>
+            <a:ext cx="0" cy="512064"/>
+          </a:xfrm>
+          <a:prstGeom prst="line">
+            <a:avLst/>
+          </a:prstGeom>
+          <a:noFill/>
+          <a:ln w="25400">
+            <a:solidFill>
+              <a:srgbClr val="D0D0CE"/>
+            </a:solidFill>
+            <a:prstDash val="solid"/>
+          </a:ln>
+        </p:spPr>
+      </p:sp>
+      <p:sp>
+        <p:nvSpPr>
+          <p:cNvPr id="5" name="Text 3"/>
+          <p:cNvSpPr txBox="1"/>
+          <p:nvPr/>
+        </p:nvSpPr>
+        <p:spPr>
+          <a:xfrm>
+            <a:off x="648310" y="1335024"/>
+            <a:ext cx="11042294" cy="512064"/>
+          </a:xfrm>
+          <a:prstGeom prst="rect">
+            <a:avLst/>
+          </a:prstGeom>
+          <a:noFill/>
+          <a:ln/>
+        </p:spPr>
+        <p:txBody>
+          <a:bodyPr wrap="square" lIns="0" tIns="0" rIns="0" bIns="0" rtlCol="0" anchor="t"/>
+          <a:lstStyle/>
+          <a:p>
+            <a:pPr algn="l" indent="0" marL="0">
+              <a:lnSpc>
+                <a:spcPct val="106000"/>
+              </a:lnSpc>
+              <a:buNone/>
+            </a:pPr>
+            <a:r>
+              <a:rPr lang="en-US" sz="900" b="1" dirty="0">
+                <a:solidFill>
+                  <a:srgbClr val="046A38"/>
+                </a:solidFill>
+                <a:latin typeface="IBM Plex Mono" pitchFamily="34" charset="0"/>
+                <a:ea typeface="IBM Plex Mono" pitchFamily="34" charset="-122"/>
+                <a:cs typeface="IBM Plex Mono" pitchFamily="34" charset="-120"/>
+              </a:rPr>
+              <a:t>Q11  </a:t>
+            </a:r>
+            <a:pPr algn="l" indent="0" marL="0">
+              <a:lnSpc>
+                <a:spcPct val="106000"/>
+              </a:lnSpc>
+              <a:buNone/>
+            </a:pPr>
+            <a:r>
+              <a:rPr lang="en-US" sz="1000" i="1" dirty="0">
+                <a:solidFill>
+                  <a:srgbClr val="575757"/>
+                </a:solidFill>
+                <a:latin typeface="Calibri" pitchFamily="34" charset="0"/>
+                <a:ea typeface="Calibri" pitchFamily="34" charset="-122"/>
+                <a:cs typeface="Calibri" pitchFamily="34" charset="-120"/>
+              </a:rPr>
+              <a:t>“Which upcoming regulatory or market changes is expected to have the greatest impact on your fraud program? (by region, all respondents)”</a:t>
+            </a:r>
+            <a:endParaRPr lang="en-US" sz="1000" dirty="0"/>
+          </a:p>
+        </p:txBody>
+      </p:sp>
+      <p:sp>
+        <p:nvSpPr>
+          <p:cNvPr id="6" name="Text 4"/>
+          <p:cNvSpPr txBox="1"/>
+          <p:nvPr/>
+        </p:nvSpPr>
+        <p:spPr>
+          <a:xfrm>
+            <a:off x="11346790" y="6537960"/>
+            <a:ext cx="343814" cy="182880"/>
+          </a:xfrm>
+          <a:prstGeom prst="rect">
+            <a:avLst/>
+          </a:prstGeom>
+          <a:noFill/>
+          <a:ln/>
+        </p:spPr>
+        <p:txBody>
+          <a:bodyPr wrap="square" rtlCol="0" anchor="ctr"/>
+          <a:lstStyle/>
+          <a:p>
+            <a:pPr algn="r" indent="0" marL="0">
+              <a:buNone/>
+            </a:pPr>
+            <a:r>
+              <a:rPr lang="en-US" sz="900" dirty="0">
+                <a:solidFill>
+                  <a:srgbClr val="53565A"/>
+                </a:solidFill>
+                <a:latin typeface="Calibri" pitchFamily="34" charset="0"/>
+                <a:ea typeface="Calibri" pitchFamily="34" charset="-122"/>
+                <a:cs typeface="Calibri" pitchFamily="34" charset="-120"/>
+              </a:rPr>
+              <a:t>42</a:t>
+            </a:r>
+            <a:endParaRPr lang="en-US" sz="900" dirty="0"/>
+          </a:p>
+        </p:txBody>
+      </p:sp>
+      <p:graphicFrame>
+        <p:nvGraphicFramePr>
+          <p:cNvPr id="7" name="Chart 0" descr=""/>
+          <p:cNvGraphicFramePr/>
+          <p:nvPr/>
+        </p:nvGraphicFramePr>
+        <p:xfrm>
+          <a:off x="502006" y="2011680"/>
+          <a:ext cx="11188598" cy="3063240"/>
+        </p:xfrm>
+        <a:graphic xmlns:a="http://schemas.openxmlformats.org/drawingml/2006/main">
+          <a:graphicData uri="http://schemas.openxmlformats.org/drawingml/2006/chart">
+            <c:chart xmlns:c="http://schemas.openxmlformats.org/drawingml/2006/chart" r:id="rId1"/>
+          </a:graphicData>
+        </a:graphic>
+      </p:graphicFrame>
+      <p:sp>
+        <p:nvSpPr>
+          <p:cNvPr id="8" name="Shape 5"/>
+          <p:cNvSpPr/>
+          <p:nvPr/>
+        </p:nvSpPr>
+        <p:spPr>
+          <a:xfrm>
+            <a:off x="502006" y="5202936"/>
+            <a:ext cx="11188598" cy="0"/>
+          </a:xfrm>
+          <a:prstGeom prst="line">
+            <a:avLst/>
+          </a:prstGeom>
+          <a:noFill/>
+          <a:ln w="9525">
+            <a:solidFill>
+              <a:srgbClr val="D0D0CE"/>
+            </a:solidFill>
+            <a:prstDash val="solid"/>
+          </a:ln>
+        </p:spPr>
+      </p:sp>
+      <p:sp>
+        <p:nvSpPr>
+          <p:cNvPr id="9" name="Text 6"/>
+          <p:cNvSpPr txBox="1"/>
+          <p:nvPr/>
+        </p:nvSpPr>
+        <p:spPr>
+          <a:xfrm>
+            <a:off x="502006" y="5276088"/>
+            <a:ext cx="11188598" cy="886968"/>
+          </a:xfrm>
+          <a:prstGeom prst="rect">
+            <a:avLst/>
+          </a:prstGeom>
+          <a:noFill/>
+          <a:ln/>
+        </p:spPr>
+        <p:txBody>
+          <a:bodyPr wrap="square" lIns="0" tIns="0" rIns="0" bIns="0" rtlCol="0" anchor="t"/>
+          <a:lstStyle/>
+          <a:p>
+            <a:pPr algn="l" indent="0" marL="0">
+              <a:lnSpc>
+                <a:spcPct val="118000"/>
+              </a:lnSpc>
+              <a:buNone/>
+            </a:pPr>
+            <a:r>
+              <a:rPr lang="en-US" sz="850" b="1" dirty="0">
+                <a:solidFill>
+                  <a:srgbClr val="53565A"/>
+                </a:solidFill>
+                <a:latin typeface="Calibri" pitchFamily="34" charset="0"/>
+                <a:ea typeface="Calibri" pitchFamily="34" charset="-122"/>
+                <a:cs typeface="Calibri" pitchFamily="34" charset="-120"/>
+              </a:rPr>
+              <a:t>Ranked top 3 — % shown is each region's share of the full 100-respondent sample who placed the option anywhere in their top 3, so segments sum to the overall figure in each category label (bars don't sum to 100%). Australia (n=8) and Singapore (n=4) are thin samples, shown directionally.  </a:t>
+            </a:r>
+            <a:pPr algn="l" indent="0" marL="0">
+              <a:lnSpc>
+                <a:spcPct val="118000"/>
+              </a:lnSpc>
+              <a:buNone/>
+            </a:pPr>
+            <a:r>
+              <a:rPr lang="en-US" sz="850" b="1" dirty="0">
+                <a:solidFill>
+                  <a:srgbClr val="53565A"/>
+                </a:solidFill>
+                <a:latin typeface="Calibri" pitchFamily="34" charset="0"/>
+                <a:ea typeface="Calibri" pitchFamily="34" charset="-122"/>
+                <a:cs typeface="Calibri" pitchFamily="34" charset="-120"/>
+              </a:rPr>
+              <a:t>Response options as fielded: </a:t>
+            </a:r>
+            <a:pPr algn="l" indent="0" marL="0">
+              <a:lnSpc>
+                <a:spcPct val="118000"/>
+              </a:lnSpc>
+              <a:buNone/>
+            </a:pPr>
+            <a:r>
+              <a:rPr lang="en-US" sz="850" i="1" dirty="0">
+                <a:solidFill>
+                  <a:srgbClr val="53565A"/>
+                </a:solidFill>
+                <a:latin typeface="Calibri" pitchFamily="34" charset="0"/>
+                <a:ea typeface="Calibri" pitchFamily="34" charset="-122"/>
+                <a:cs typeface="Calibri" pitchFamily="34" charset="-120"/>
+              </a:rPr>
+              <a:t>“Payment innovation and adoption (e.g., real-time payments, stable coins, agentic payments)”</a:t>
+            </a:r>
+            <a:pPr algn="l" indent="0" marL="0">
+              <a:lnSpc>
+                <a:spcPct val="118000"/>
+              </a:lnSpc>
+              <a:buNone/>
+            </a:pPr>
+            <a:r>
+              <a:rPr lang="en-US" sz="850" dirty="0">
+                <a:solidFill>
+                  <a:srgbClr val="D0D0CE"/>
+                </a:solidFill>
+                <a:latin typeface="Calibri" pitchFamily="34" charset="0"/>
+                <a:ea typeface="Calibri" pitchFamily="34" charset="-122"/>
+                <a:cs typeface="Calibri" pitchFamily="34" charset="-120"/>
+              </a:rPr>
+              <a:t>  ·  </a:t>
+            </a:r>
+            <a:pPr algn="l" indent="0" marL="0">
+              <a:lnSpc>
+                <a:spcPct val="118000"/>
+              </a:lnSpc>
+              <a:buNone/>
+            </a:pPr>
+            <a:r>
+              <a:rPr lang="en-US" sz="850" i="1" dirty="0">
+                <a:solidFill>
+                  <a:srgbClr val="53565A"/>
+                </a:solidFill>
+                <a:latin typeface="Calibri" pitchFamily="34" charset="0"/>
+                <a:ea typeface="Calibri" pitchFamily="34" charset="-122"/>
+                <a:cs typeface="Calibri" pitchFamily="34" charset="-120"/>
+              </a:rPr>
+              <a:t>“Liability and reimbursement changes”</a:t>
+            </a:r>
+            <a:pPr algn="l" indent="0" marL="0">
+              <a:lnSpc>
+                <a:spcPct val="118000"/>
+              </a:lnSpc>
+              <a:buNone/>
+            </a:pPr>
+            <a:r>
+              <a:rPr lang="en-US" sz="850" dirty="0">
+                <a:solidFill>
+                  <a:srgbClr val="D0D0CE"/>
+                </a:solidFill>
+                <a:latin typeface="Calibri" pitchFamily="34" charset="0"/>
+                <a:ea typeface="Calibri" pitchFamily="34" charset="-122"/>
+                <a:cs typeface="Calibri" pitchFamily="34" charset="-120"/>
+              </a:rPr>
+              <a:t>  ·  </a:t>
+            </a:r>
+            <a:pPr algn="l" indent="0" marL="0">
+              <a:lnSpc>
+                <a:spcPct val="118000"/>
+              </a:lnSpc>
+              <a:buNone/>
+            </a:pPr>
+            <a:r>
+              <a:rPr lang="en-US" sz="850" i="1" dirty="0">
+                <a:solidFill>
+                  <a:srgbClr val="53565A"/>
+                </a:solidFill>
+                <a:latin typeface="Calibri" pitchFamily="34" charset="0"/>
+                <a:ea typeface="Calibri" pitchFamily="34" charset="-122"/>
+                <a:cs typeface="Calibri" pitchFamily="34" charset="-120"/>
+              </a:rPr>
+              <a:t>“Open Banking / Consumer-driven banking initiatives”</a:t>
+            </a:r>
+            <a:pPr algn="l" indent="0" marL="0">
+              <a:lnSpc>
+                <a:spcPct val="118000"/>
+              </a:lnSpc>
+              <a:buNone/>
+            </a:pPr>
+            <a:r>
+              <a:rPr lang="en-US" sz="850" dirty="0">
+                <a:solidFill>
+                  <a:srgbClr val="D0D0CE"/>
+                </a:solidFill>
+                <a:latin typeface="Calibri" pitchFamily="34" charset="0"/>
+                <a:ea typeface="Calibri" pitchFamily="34" charset="-122"/>
+                <a:cs typeface="Calibri" pitchFamily="34" charset="-120"/>
+              </a:rPr>
+              <a:t>  ·  </a:t>
+            </a:r>
+            <a:pPr algn="l" indent="0" marL="0">
+              <a:lnSpc>
+                <a:spcPct val="118000"/>
+              </a:lnSpc>
+              <a:buNone/>
+            </a:pPr>
+            <a:r>
+              <a:rPr lang="en-US" sz="850" i="1" dirty="0">
+                <a:solidFill>
+                  <a:srgbClr val="53565A"/>
+                </a:solidFill>
+                <a:latin typeface="Calibri" pitchFamily="34" charset="0"/>
+                <a:ea typeface="Calibri" pitchFamily="34" charset="-122"/>
+                <a:cs typeface="Calibri" pitchFamily="34" charset="-120"/>
+              </a:rPr>
+              <a:t>“AML related modernization initiatives”</a:t>
+            </a:r>
+            <a:pPr algn="l" indent="0" marL="0">
+              <a:lnSpc>
+                <a:spcPct val="118000"/>
+              </a:lnSpc>
+              <a:buNone/>
+            </a:pPr>
+            <a:r>
+              <a:rPr lang="en-US" sz="850" dirty="0">
+                <a:solidFill>
+                  <a:srgbClr val="D0D0CE"/>
+                </a:solidFill>
+                <a:latin typeface="Calibri" pitchFamily="34" charset="0"/>
+                <a:ea typeface="Calibri" pitchFamily="34" charset="-122"/>
+                <a:cs typeface="Calibri" pitchFamily="34" charset="-120"/>
+              </a:rPr>
+              <a:t>  ·  </a:t>
+            </a:r>
+            <a:pPr algn="l" indent="0" marL="0">
+              <a:lnSpc>
+                <a:spcPct val="118000"/>
+              </a:lnSpc>
+              <a:buNone/>
+            </a:pPr>
+            <a:r>
+              <a:rPr lang="en-US" sz="850" i="1" dirty="0">
+                <a:solidFill>
+                  <a:srgbClr val="53565A"/>
+                </a:solidFill>
+                <a:latin typeface="Calibri" pitchFamily="34" charset="0"/>
+                <a:ea typeface="Calibri" pitchFamily="34" charset="-122"/>
+                <a:cs typeface="Calibri" pitchFamily="34" charset="-120"/>
+              </a:rPr>
+              <a:t>“Privacy, data-sharing requirements, and AI governance requirements”</a:t>
+            </a:r>
+            <a:pPr algn="l" indent="0" marL="0">
+              <a:lnSpc>
+                <a:spcPct val="118000"/>
+              </a:lnSpc>
+              <a:buNone/>
+            </a:pPr>
+            <a:r>
+              <a:rPr lang="en-US" sz="850" dirty="0">
+                <a:solidFill>
+                  <a:srgbClr val="D0D0CE"/>
+                </a:solidFill>
+                <a:latin typeface="Calibri" pitchFamily="34" charset="0"/>
+                <a:ea typeface="Calibri" pitchFamily="34" charset="-122"/>
+                <a:cs typeface="Calibri" pitchFamily="34" charset="-120"/>
+              </a:rPr>
+              <a:t>  ·  </a:t>
+            </a:r>
+            <a:pPr algn="l" indent="0" marL="0">
+              <a:lnSpc>
+                <a:spcPct val="118000"/>
+              </a:lnSpc>
+              <a:buNone/>
+            </a:pPr>
+            <a:r>
+              <a:rPr lang="en-US" sz="850" i="1" dirty="0">
+                <a:solidFill>
+                  <a:srgbClr val="53565A"/>
+                </a:solidFill>
+                <a:latin typeface="Calibri" pitchFamily="34" charset="0"/>
+                <a:ea typeface="Calibri" pitchFamily="34" charset="-122"/>
+                <a:cs typeface="Calibri" pitchFamily="34" charset="-120"/>
+              </a:rPr>
+              <a:t>“Customer identity, authentication, and digital trust expectations”</a:t>
+            </a:r>
+            <a:endParaRPr lang="en-US" sz="850" dirty="0"/>
+          </a:p>
+        </p:txBody>
+      </p:sp>
+    </p:spTree>
+  </p:cSld>
+  <p:clrMapOvr>
+    <a:masterClrMapping/>
+  </p:clrMapOvr>
+</p:sld>
+</file>
+
+<file path=ppt/slides/slide44.xml><?xml version="1.0" encoding="utf-8"?>
+<p:sld xmlns:a="http://schemas.openxmlformats.org/drawingml/2006/main" xmlns:r="http://schemas.openxmlformats.org/officeDocument/2006/relationships" xmlns:p="http://schemas.openxmlformats.org/presentationml/2006/main">
+  <p:cSld name="Slide 44">
     <p:bg>
       <p:bgPr>
         <a:solidFill>
@@ -38586,7 +39439,7 @@
                 <a:ea typeface="Calibri" pitchFamily="34" charset="-122"/>
                 <a:cs typeface="Calibri" pitchFamily="34" charset="-120"/>
               </a:rPr>
-              <a:t>42</a:t>
+              <a:t>43</a:t>
             </a:r>
             <a:endParaRPr lang="en-US" sz="900" dirty="0"/>
           </a:p>
@@ -38600,9 +39453,9 @@
 </p:sld>
 </file>
 
-<file path=ppt/slides/slide44.xml><?xml version="1.0" encoding="utf-8"?>
+<file path=ppt/slides/slide45.xml><?xml version="1.0" encoding="utf-8"?>
 <p:sld xmlns:a="http://schemas.openxmlformats.org/drawingml/2006/main" xmlns:r="http://schemas.openxmlformats.org/officeDocument/2006/relationships" xmlns:p="http://schemas.openxmlformats.org/presentationml/2006/main">
-  <p:cSld name="Slide 44">
+  <p:cSld name="Slide 45">
     <p:bg>
       <p:bgPr>
         <a:solidFill>
@@ -38820,7 +39673,7 @@
                 <a:ea typeface="Calibri" pitchFamily="34" charset="-122"/>
                 <a:cs typeface="Calibri" pitchFamily="34" charset="-120"/>
               </a:rPr>
-              <a:t>43</a:t>
+              <a:t>44</a:t>
             </a:r>
             <a:endParaRPr lang="en-US" sz="900" dirty="0"/>
           </a:p>
@@ -39369,9 +40222,9 @@
 </p:sld>
 </file>
 
-<file path=ppt/slides/slide45.xml><?xml version="1.0" encoding="utf-8"?>
+<file path=ppt/slides/slide46.xml><?xml version="1.0" encoding="utf-8"?>
 <p:sld xmlns:a="http://schemas.openxmlformats.org/drawingml/2006/main" xmlns:r="http://schemas.openxmlformats.org/officeDocument/2006/relationships" xmlns:p="http://schemas.openxmlformats.org/presentationml/2006/main">
-  <p:cSld name="Slide 45">
+  <p:cSld name="Slide 46">
     <p:bg>
       <p:bgPr>
         <a:solidFill>

--- a/Fraud in 2026 - Full Results.pptx
+++ b/Fraud in 2026 - Full Results.pptx
@@ -5364,8 +5364,8 @@
     <c:plotArea>
       <c:layout/>
       <c:barChart>
-        <c:barDir val="bar"/>
-        <c:grouping val="stacked"/>
+        <c:barDir val="col"/>
+        <c:grouping val="clustered"/>
         <c:varyColors val="0"/>
         <c:ser>
           <c:idx val="0"/>
@@ -5376,7 +5376,7 @@
               <c:strCache>
                 <c:ptCount val="1"/>
                 <c:pt idx="0">
-                  <c:v>United States (n=44)</c:v>
+                  <c:v>United States</c:v>
                 </c:pt>
               </c:strCache>
             </c:strRef>
@@ -5389,22 +5389,21 @@
           </c:spPr>
           <c:invertIfNegative val="0"/>
           <c:dLbls>
-            <c:numFmt formatCode="0&quot;%&quot;;-0&quot;%&quot;;;@" sourceLinked="0"/>
+            <c:numFmt formatCode="0&quot;%&quot;" sourceLinked="0"/>
             <c:txPr>
               <a:bodyPr/>
               <a:lstStyle/>
               <a:p>
                 <a:pPr>
-                  <a:defRPr b="0" i="0" strike="noStrike" sz="650" u="none">
+                  <a:defRPr b="0" i="0" strike="noStrike" sz="700" u="none">
                     <a:solidFill>
-                      <a:srgbClr val="FFFFFF"/>
+                      <a:srgbClr val="000000"/>
                     </a:solidFill>
                     <a:latin typeface="Arial"/>
                   </a:defRPr>
                 </a:pPr>
               </a:p>
             </c:txPr>
-            <c:dLblPos val="ctr"/>
             <c:showLegendKey val="0"/>
             <c:showVal val="1"/>
             <c:showCatName val="0"/>
@@ -5420,22 +5419,22 @@
                 <c:ptCount val="6"/>
                 <c:lvl>
                   <c:pt idx="0">
-                    <c:v>Centralized fraud info-sharing platform / utility (35%)</c:v>
+                    <c:v>Platform/utility</c:v>
                   </c:pt>
                   <c:pt idx="1">
-                    <c:v>Clearer legal &amp; regulatory frameworks (26%)</c:v>
+                    <c:v>Legal/regulatory</c:v>
                   </c:pt>
                   <c:pt idx="2">
-                    <c:v>Common data standards &amp; definitions (14%)</c:v>
+                    <c:v>Data standards</c:v>
                   </c:pt>
                   <c:pt idx="3">
-                    <c:v>Greater public-private collaboration (13%)</c:v>
+                    <c:v>Public-private collab.</c:v>
                   </c:pt>
                   <c:pt idx="4">
-                    <c:v>Prioritized industry use cases (9%)</c:v>
+                    <c:v>Use cases</c:v>
                   </c:pt>
                   <c:pt idx="5">
-                    <c:v>Funding or incentives (3%)</c:v>
+                    <c:v>Funding</c:v>
                   </c:pt>
                 </c:lvl>
               </c:multiLvlStrCache>
@@ -5448,452 +5447,43 @@
                 <c:formatCode>General</c:formatCode>
                 <c:ptCount val="6"/>
                 <c:pt idx="0">
+                  <c:v>36</c:v>
+                </c:pt>
+                <c:pt idx="1">
                   <c:v>16</c:v>
                 </c:pt>
-                <c:pt idx="1">
-                  <c:v>7</c:v>
-                </c:pt>
                 <c:pt idx="2">
-                  <c:v>8</c:v>
+                  <c:v>18</c:v>
                 </c:pt>
                 <c:pt idx="3">
-                  <c:v>9</c:v>
+                  <c:v>20</c:v>
                 </c:pt>
                 <c:pt idx="4">
-                  <c:v>2</c:v>
+                  <c:v>5</c:v>
                 </c:pt>
                 <c:pt idx="5">
-                  <c:v>2</c:v>
-                </c:pt>
-              </c:numCache>
-            </c:numRef>
-          </c:val>
-        </c:ser>
-        <c:ser>
-          <c:idx val="1"/>
-          <c:order val="1"/>
-          <c:tx>
-            <c:strRef>
-              <c:f>Sheet1!$C$1</c:f>
-              <c:strCache>
-                <c:ptCount val="1"/>
-                <c:pt idx="0">
-                  <c:v>Canada (n=30)</c:v>
-                </c:pt>
-              </c:strCache>
-            </c:strRef>
-          </c:tx>
-          <c:spPr>
-            <a:solidFill>
-              <a:srgbClr val="43B02A"/>
-            </a:solidFill>
-            <a:effectLst/>
-          </c:spPr>
-          <c:invertIfNegative val="0"/>
-          <c:dLbls>
-            <c:numFmt formatCode="0&quot;%&quot;;-0&quot;%&quot;;;@" sourceLinked="0"/>
-            <c:txPr>
-              <a:bodyPr/>
-              <a:lstStyle/>
-              <a:p>
-                <a:pPr>
-                  <a:defRPr b="0" i="0" strike="noStrike" sz="650" u="none">
-                    <a:solidFill>
-                      <a:srgbClr val="FFFFFF"/>
-                    </a:solidFill>
-                    <a:latin typeface="Arial"/>
-                  </a:defRPr>
-                </a:pPr>
-              </a:p>
-            </c:txPr>
-            <c:dLblPos val="ctr"/>
-            <c:showLegendKey val="0"/>
-            <c:showVal val="1"/>
-            <c:showCatName val="0"/>
-            <c:showSerName val="0"/>
-            <c:showPercent val="0"/>
-            <c:showBubbleSize val="0"/>
-            <c:showLeaderLines val="0"/>
-          </c:dLbls>
-          <c:cat>
-            <c:multiLvlStrRef>
-              <c:f>Sheet1!$A$2:$A$7</c:f>
-              <c:multiLvlStrCache>
-                <c:ptCount val="6"/>
-                <c:lvl>
-                  <c:pt idx="0">
-                    <c:v>Centralized fraud info-sharing platform / utility (35%)</c:v>
-                  </c:pt>
-                  <c:pt idx="1">
-                    <c:v>Clearer legal &amp; regulatory frameworks (26%)</c:v>
-                  </c:pt>
-                  <c:pt idx="2">
-                    <c:v>Common data standards &amp; definitions (14%)</c:v>
-                  </c:pt>
-                  <c:pt idx="3">
-                    <c:v>Greater public-private collaboration (13%)</c:v>
-                  </c:pt>
-                  <c:pt idx="4">
-                    <c:v>Prioritized industry use cases (9%)</c:v>
-                  </c:pt>
-                  <c:pt idx="5">
-                    <c:v>Funding or incentives (3%)</c:v>
-                  </c:pt>
-                </c:lvl>
-              </c:multiLvlStrCache>
-            </c:multiLvlStrRef>
-          </c:cat>
-          <c:val>
-            <c:numRef>
-              <c:f>Sheet1!$C$2:$C$7</c:f>
-              <c:numCache>
-                <c:formatCode>General</c:formatCode>
-                <c:ptCount val="6"/>
-                <c:pt idx="0">
-                  <c:v>10</c:v>
-                </c:pt>
-                <c:pt idx="1">
-                  <c:v>12</c:v>
-                </c:pt>
-                <c:pt idx="2">
-                  <c:v>2</c:v>
-                </c:pt>
-                <c:pt idx="3">
-                  <c:v>2</c:v>
-                </c:pt>
-                <c:pt idx="4">
-                  <c:v>4</c:v>
-                </c:pt>
-                <c:pt idx="5">
-                  <c:v>0</c:v>
-                </c:pt>
-              </c:numCache>
-            </c:numRef>
-          </c:val>
-        </c:ser>
-        <c:ser>
-          <c:idx val="2"/>
-          <c:order val="2"/>
-          <c:tx>
-            <c:strRef>
-              <c:f>Sheet1!$D$1</c:f>
-              <c:strCache>
-                <c:ptCount val="1"/>
-                <c:pt idx="0">
-                  <c:v>Europe — EU+UK (n=14)</c:v>
-                </c:pt>
-              </c:strCache>
-            </c:strRef>
-          </c:tx>
-          <c:spPr>
-            <a:solidFill>
-              <a:srgbClr val="046A38"/>
-            </a:solidFill>
-            <a:effectLst/>
-          </c:spPr>
-          <c:invertIfNegative val="0"/>
-          <c:dLbls>
-            <c:numFmt formatCode="0&quot;%&quot;;-0&quot;%&quot;;;@" sourceLinked="0"/>
-            <c:txPr>
-              <a:bodyPr/>
-              <a:lstStyle/>
-              <a:p>
-                <a:pPr>
-                  <a:defRPr b="0" i="0" strike="noStrike" sz="650" u="none">
-                    <a:solidFill>
-                      <a:srgbClr val="FFFFFF"/>
-                    </a:solidFill>
-                    <a:latin typeface="Arial"/>
-                  </a:defRPr>
-                </a:pPr>
-              </a:p>
-            </c:txPr>
-            <c:dLblPos val="ctr"/>
-            <c:showLegendKey val="0"/>
-            <c:showVal val="1"/>
-            <c:showCatName val="0"/>
-            <c:showSerName val="0"/>
-            <c:showPercent val="0"/>
-            <c:showBubbleSize val="0"/>
-            <c:showLeaderLines val="0"/>
-          </c:dLbls>
-          <c:cat>
-            <c:multiLvlStrRef>
-              <c:f>Sheet1!$A$2:$A$7</c:f>
-              <c:multiLvlStrCache>
-                <c:ptCount val="6"/>
-                <c:lvl>
-                  <c:pt idx="0">
-                    <c:v>Centralized fraud info-sharing platform / utility (35%)</c:v>
-                  </c:pt>
-                  <c:pt idx="1">
-                    <c:v>Clearer legal &amp; regulatory frameworks (26%)</c:v>
-                  </c:pt>
-                  <c:pt idx="2">
-                    <c:v>Common data standards &amp; definitions (14%)</c:v>
-                  </c:pt>
-                  <c:pt idx="3">
-                    <c:v>Greater public-private collaboration (13%)</c:v>
-                  </c:pt>
-                  <c:pt idx="4">
-                    <c:v>Prioritized industry use cases (9%)</c:v>
-                  </c:pt>
-                  <c:pt idx="5">
-                    <c:v>Funding or incentives (3%)</c:v>
-                  </c:pt>
-                </c:lvl>
-              </c:multiLvlStrCache>
-            </c:multiLvlStrRef>
-          </c:cat>
-          <c:val>
-            <c:numRef>
-              <c:f>Sheet1!$D$2:$D$7</c:f>
-              <c:numCache>
-                <c:formatCode>General</c:formatCode>
-                <c:ptCount val="6"/>
-                <c:pt idx="0">
                   <c:v>5</c:v>
-                </c:pt>
-                <c:pt idx="1">
-                  <c:v>4</c:v>
-                </c:pt>
-                <c:pt idx="2">
-                  <c:v>2</c:v>
-                </c:pt>
-                <c:pt idx="3">
-                  <c:v>1</c:v>
-                </c:pt>
-                <c:pt idx="4">
-                  <c:v>1</c:v>
-                </c:pt>
-                <c:pt idx="5">
-                  <c:v>1</c:v>
-                </c:pt>
-              </c:numCache>
-            </c:numRef>
-          </c:val>
-        </c:ser>
-        <c:ser>
-          <c:idx val="3"/>
-          <c:order val="3"/>
-          <c:tx>
-            <c:strRef>
-              <c:f>Sheet1!$E$1</c:f>
-              <c:strCache>
-                <c:ptCount val="1"/>
-                <c:pt idx="0">
-                  <c:v>Australia (n=8)</c:v>
-                </c:pt>
-              </c:strCache>
-            </c:strRef>
-          </c:tx>
-          <c:spPr>
-            <a:solidFill>
-              <a:srgbClr val="0D8390"/>
-            </a:solidFill>
-            <a:effectLst/>
-          </c:spPr>
-          <c:invertIfNegative val="0"/>
-          <c:dLbls>
-            <c:numFmt formatCode="0&quot;%&quot;;-0&quot;%&quot;;;@" sourceLinked="0"/>
-            <c:txPr>
-              <a:bodyPr/>
-              <a:lstStyle/>
-              <a:p>
-                <a:pPr>
-                  <a:defRPr b="0" i="0" strike="noStrike" sz="650" u="none">
-                    <a:solidFill>
-                      <a:srgbClr val="FFFFFF"/>
-                    </a:solidFill>
-                    <a:latin typeface="Arial"/>
-                  </a:defRPr>
-                </a:pPr>
-              </a:p>
-            </c:txPr>
-            <c:dLblPos val="ctr"/>
-            <c:showLegendKey val="0"/>
-            <c:showVal val="1"/>
-            <c:showCatName val="0"/>
-            <c:showSerName val="0"/>
-            <c:showPercent val="0"/>
-            <c:showBubbleSize val="0"/>
-            <c:showLeaderLines val="0"/>
-          </c:dLbls>
-          <c:cat>
-            <c:multiLvlStrRef>
-              <c:f>Sheet1!$A$2:$A$7</c:f>
-              <c:multiLvlStrCache>
-                <c:ptCount val="6"/>
-                <c:lvl>
-                  <c:pt idx="0">
-                    <c:v>Centralized fraud info-sharing platform / utility (35%)</c:v>
-                  </c:pt>
-                  <c:pt idx="1">
-                    <c:v>Clearer legal &amp; regulatory frameworks (26%)</c:v>
-                  </c:pt>
-                  <c:pt idx="2">
-                    <c:v>Common data standards &amp; definitions (14%)</c:v>
-                  </c:pt>
-                  <c:pt idx="3">
-                    <c:v>Greater public-private collaboration (13%)</c:v>
-                  </c:pt>
-                  <c:pt idx="4">
-                    <c:v>Prioritized industry use cases (9%)</c:v>
-                  </c:pt>
-                  <c:pt idx="5">
-                    <c:v>Funding or incentives (3%)</c:v>
-                  </c:pt>
-                </c:lvl>
-              </c:multiLvlStrCache>
-            </c:multiLvlStrRef>
-          </c:cat>
-          <c:val>
-            <c:numRef>
-              <c:f>Sheet1!$E$2:$E$7</c:f>
-              <c:numCache>
-                <c:formatCode>General</c:formatCode>
-                <c:ptCount val="6"/>
-                <c:pt idx="0">
-                  <c:v>2</c:v>
-                </c:pt>
-                <c:pt idx="1">
-                  <c:v>3</c:v>
-                </c:pt>
-                <c:pt idx="2">
-                  <c:v>0</c:v>
-                </c:pt>
-                <c:pt idx="3">
-                  <c:v>1</c:v>
-                </c:pt>
-                <c:pt idx="4">
-                  <c:v>2</c:v>
-                </c:pt>
-                <c:pt idx="5">
-                  <c:v>0</c:v>
-                </c:pt>
-              </c:numCache>
-            </c:numRef>
-          </c:val>
-        </c:ser>
-        <c:ser>
-          <c:idx val="4"/>
-          <c:order val="4"/>
-          <c:tx>
-            <c:strRef>
-              <c:f>Sheet1!$F$1</c:f>
-              <c:strCache>
-                <c:ptCount val="1"/>
-                <c:pt idx="0">
-                  <c:v>Singapore (n=4)</c:v>
-                </c:pt>
-              </c:strCache>
-            </c:strRef>
-          </c:tx>
-          <c:spPr>
-            <a:solidFill>
-              <a:srgbClr val="53565A"/>
-            </a:solidFill>
-            <a:effectLst/>
-          </c:spPr>
-          <c:invertIfNegative val="0"/>
-          <c:dLbls>
-            <c:numFmt formatCode="0&quot;%&quot;;-0&quot;%&quot;;;@" sourceLinked="0"/>
-            <c:txPr>
-              <a:bodyPr/>
-              <a:lstStyle/>
-              <a:p>
-                <a:pPr>
-                  <a:defRPr b="0" i="0" strike="noStrike" sz="650" u="none">
-                    <a:solidFill>
-                      <a:srgbClr val="FFFFFF"/>
-                    </a:solidFill>
-                    <a:latin typeface="Arial"/>
-                  </a:defRPr>
-                </a:pPr>
-              </a:p>
-            </c:txPr>
-            <c:dLblPos val="ctr"/>
-            <c:showLegendKey val="0"/>
-            <c:showVal val="1"/>
-            <c:showCatName val="0"/>
-            <c:showSerName val="0"/>
-            <c:showPercent val="0"/>
-            <c:showBubbleSize val="0"/>
-            <c:showLeaderLines val="0"/>
-          </c:dLbls>
-          <c:cat>
-            <c:multiLvlStrRef>
-              <c:f>Sheet1!$A$2:$A$7</c:f>
-              <c:multiLvlStrCache>
-                <c:ptCount val="6"/>
-                <c:lvl>
-                  <c:pt idx="0">
-                    <c:v>Centralized fraud info-sharing platform / utility (35%)</c:v>
-                  </c:pt>
-                  <c:pt idx="1">
-                    <c:v>Clearer legal &amp; regulatory frameworks (26%)</c:v>
-                  </c:pt>
-                  <c:pt idx="2">
-                    <c:v>Common data standards &amp; definitions (14%)</c:v>
-                  </c:pt>
-                  <c:pt idx="3">
-                    <c:v>Greater public-private collaboration (13%)</c:v>
-                  </c:pt>
-                  <c:pt idx="4">
-                    <c:v>Prioritized industry use cases (9%)</c:v>
-                  </c:pt>
-                  <c:pt idx="5">
-                    <c:v>Funding or incentives (3%)</c:v>
-                  </c:pt>
-                </c:lvl>
-              </c:multiLvlStrCache>
-            </c:multiLvlStrRef>
-          </c:cat>
-          <c:val>
-            <c:numRef>
-              <c:f>Sheet1!$F$2:$F$7</c:f>
-              <c:numCache>
-                <c:formatCode>General</c:formatCode>
-                <c:ptCount val="6"/>
-                <c:pt idx="0">
-                  <c:v>2</c:v>
-                </c:pt>
-                <c:pt idx="1">
-                  <c:v>0</c:v>
-                </c:pt>
-                <c:pt idx="2">
-                  <c:v>2</c:v>
-                </c:pt>
-                <c:pt idx="3">
-                  <c:v>0</c:v>
-                </c:pt>
-                <c:pt idx="4">
-                  <c:v>0</c:v>
-                </c:pt>
-                <c:pt idx="5">
-                  <c:v>0</c:v>
                 </c:pt>
               </c:numCache>
             </c:numRef>
           </c:val>
         </c:ser>
         <c:dLbls>
-          <c:numFmt formatCode="0&quot;%&quot;;-0&quot;%&quot;;;@" sourceLinked="0"/>
+          <c:numFmt formatCode="0&quot;%&quot;" sourceLinked="0"/>
           <c:txPr>
             <a:bodyPr/>
             <a:lstStyle/>
             <a:p>
               <a:pPr>
-                <a:defRPr b="0" i="0" strike="noStrike" sz="650" u="none">
+                <a:defRPr b="0" i="0" strike="noStrike" sz="700" u="none">
                   <a:solidFill>
-                    <a:srgbClr val="FFFFFF"/>
+                    <a:srgbClr val="000000"/>
                   </a:solidFill>
                   <a:latin typeface="Arial"/>
                 </a:defRPr>
               </a:pPr>
             </a:p>
           </c:txPr>
-          <c:dLblPos val="ctr"/>
           <c:showLegendKey val="0"/>
           <c:showVal val="1"/>
           <c:showCatName val="0"/>
@@ -5903,7 +5493,7 @@
           <c:showLeaderLines val="0"/>
         </c:dLbls>
         <c:gapWidth val="40"/>
-        <c:overlap val="100"/>
+        <c:overlap val="0"/>
         <c:axId val="2094734554"/>
         <c:axId val="2094734552"/>
         <c:axId val="2094734556"/>
@@ -5914,11 +5504,11 @@
           <c:orientation val="minMax"/>
         </c:scaling>
         <c:delete val="0"/>
-        <c:axPos val="l"/>
+        <c:axPos val="b"/>
         <c:numFmt formatCode="General" sourceLinked="1"/>
         <c:majorTickMark val="out"/>
         <c:minorTickMark val="none"/>
-        <c:tickLblPos val="nextTo"/>
+        <c:tickLblPos val="low"/>
         <c:spPr>
           <a:ln w="12700" cap="flat">
             <a:noFill/>
@@ -5927,11 +5517,11 @@
           </a:ln>
         </c:spPr>
         <c:txPr>
-          <a:bodyPr/>
+          <a:bodyPr rot="-1800000"/>
           <a:lstStyle/>
           <a:p>
             <a:pPr>
-              <a:defRPr sz="900" b="0" i="0" u="none" strike="noStrike">
+              <a:defRPr sz="650" b="0" i="0" u="none" strike="noStrike">
                 <a:solidFill>
                   <a:srgbClr val="53565A"/>
                 </a:solidFill>
@@ -5953,11 +5543,11 @@
           <c:orientation val="minMax"/>
         </c:scaling>
         <c:delete val="1"/>
-        <c:axPos val="b"/>
+        <c:axPos val="l"/>
         <c:numFmt formatCode="General" sourceLinked="0"/>
         <c:majorTickMark val="out"/>
         <c:minorTickMark val="none"/>
-        <c:tickLblPos val="low"/>
+        <c:tickLblPos val="nextTo"/>
         <c:spPr>
           <a:ln w="12700" cap="flat">
             <a:noFill/>
@@ -5994,20 +5584,6 @@
         <a:effectLst/>
       </c:spPr>
     </c:plotArea>
-    <c:legend>
-      <c:legendPos val="b"/>
-      <c:overlay val="0"/>
-      <c:txPr>
-        <a:bodyPr/>
-        <a:lstStyle/>
-        <a:p>
-          <a:pPr>
-            <a:defRPr sz="800">      </a:defRPr>
-          </a:pPr>
-          <a:endParaRPr lang="en-US"/>
-        </a:p>
-      </c:txPr>
-    </c:legend>
     <c:plotVisOnly val="1"/>
     <c:dispBlanksAs val="span"/>
   </c:chart>
@@ -6025,6 +5601,741 @@
 </file>
 
 <file path=ppt/charts/chart27.xml><?xml version="1.0" encoding="utf-8"?>
+<c:chartSpace xmlns:c="http://schemas.openxmlformats.org/drawingml/2006/chart" xmlns:a="http://schemas.openxmlformats.org/drawingml/2006/main" xmlns:r="http://schemas.openxmlformats.org/officeDocument/2006/relationships">
+  <c:date1904 val="0"/>
+  <c:roundedCorners val="1"/>
+  <c:chart>
+    <c:autoTitleDeleted val="1"/>
+    <c:plotArea>
+      <c:layout/>
+      <c:barChart>
+        <c:barDir val="col"/>
+        <c:grouping val="clustered"/>
+        <c:varyColors val="0"/>
+        <c:ser>
+          <c:idx val="0"/>
+          <c:order val="0"/>
+          <c:tx>
+            <c:strRef>
+              <c:f>Sheet1!$B$1</c:f>
+              <c:strCache>
+                <c:ptCount val="1"/>
+                <c:pt idx="0">
+                  <c:v>Canada</c:v>
+                </c:pt>
+              </c:strCache>
+            </c:strRef>
+          </c:tx>
+          <c:spPr>
+            <a:solidFill>
+              <a:srgbClr val="86BC25"/>
+            </a:solidFill>
+            <a:effectLst/>
+          </c:spPr>
+          <c:invertIfNegative val="0"/>
+          <c:dLbls>
+            <c:numFmt formatCode="0&quot;%&quot;" sourceLinked="0"/>
+            <c:txPr>
+              <a:bodyPr/>
+              <a:lstStyle/>
+              <a:p>
+                <a:pPr>
+                  <a:defRPr b="0" i="0" strike="noStrike" sz="700" u="none">
+                    <a:solidFill>
+                      <a:srgbClr val="000000"/>
+                    </a:solidFill>
+                    <a:latin typeface="Arial"/>
+                  </a:defRPr>
+                </a:pPr>
+              </a:p>
+            </c:txPr>
+            <c:showLegendKey val="0"/>
+            <c:showVal val="1"/>
+            <c:showCatName val="0"/>
+            <c:showSerName val="0"/>
+            <c:showPercent val="0"/>
+            <c:showBubbleSize val="0"/>
+            <c:showLeaderLines val="0"/>
+          </c:dLbls>
+          <c:cat>
+            <c:multiLvlStrRef>
+              <c:f>Sheet1!$A$2:$A$7</c:f>
+              <c:multiLvlStrCache>
+                <c:ptCount val="6"/>
+                <c:lvl>
+                  <c:pt idx="0">
+                    <c:v>Platform/utility</c:v>
+                  </c:pt>
+                  <c:pt idx="1">
+                    <c:v>Legal/regulatory</c:v>
+                  </c:pt>
+                  <c:pt idx="2">
+                    <c:v>Data standards</c:v>
+                  </c:pt>
+                  <c:pt idx="3">
+                    <c:v>Public-private collab.</c:v>
+                  </c:pt>
+                  <c:pt idx="4">
+                    <c:v>Use cases</c:v>
+                  </c:pt>
+                  <c:pt idx="5">
+                    <c:v>Funding</c:v>
+                  </c:pt>
+                </c:lvl>
+              </c:multiLvlStrCache>
+            </c:multiLvlStrRef>
+          </c:cat>
+          <c:val>
+            <c:numRef>
+              <c:f>Sheet1!$B$2:$B$7</c:f>
+              <c:numCache>
+                <c:formatCode>General</c:formatCode>
+                <c:ptCount val="6"/>
+                <c:pt idx="0">
+                  <c:v>33</c:v>
+                </c:pt>
+                <c:pt idx="1">
+                  <c:v>40</c:v>
+                </c:pt>
+                <c:pt idx="2">
+                  <c:v>7</c:v>
+                </c:pt>
+                <c:pt idx="3">
+                  <c:v>7</c:v>
+                </c:pt>
+                <c:pt idx="4">
+                  <c:v>13</c:v>
+                </c:pt>
+                <c:pt idx="5">
+                  <c:v>0</c:v>
+                </c:pt>
+              </c:numCache>
+            </c:numRef>
+          </c:val>
+        </c:ser>
+        <c:dLbls>
+          <c:numFmt formatCode="0&quot;%&quot;" sourceLinked="0"/>
+          <c:txPr>
+            <a:bodyPr/>
+            <a:lstStyle/>
+            <a:p>
+              <a:pPr>
+                <a:defRPr b="0" i="0" strike="noStrike" sz="700" u="none">
+                  <a:solidFill>
+                    <a:srgbClr val="000000"/>
+                  </a:solidFill>
+                  <a:latin typeface="Arial"/>
+                </a:defRPr>
+              </a:pPr>
+            </a:p>
+          </c:txPr>
+          <c:showLegendKey val="0"/>
+          <c:showVal val="1"/>
+          <c:showCatName val="0"/>
+          <c:showSerName val="0"/>
+          <c:showPercent val="0"/>
+          <c:showBubbleSize val="0"/>
+          <c:showLeaderLines val="0"/>
+        </c:dLbls>
+        <c:gapWidth val="40"/>
+        <c:overlap val="0"/>
+        <c:axId val="2094734554"/>
+        <c:axId val="2094734552"/>
+        <c:axId val="2094734556"/>
+      </c:barChart>
+      <c:catAx>
+        <c:axId val="2094734554"/>
+        <c:scaling>
+          <c:orientation val="minMax"/>
+        </c:scaling>
+        <c:delete val="0"/>
+        <c:axPos val="b"/>
+        <c:numFmt formatCode="General" sourceLinked="1"/>
+        <c:majorTickMark val="out"/>
+        <c:minorTickMark val="none"/>
+        <c:tickLblPos val="low"/>
+        <c:spPr>
+          <a:ln w="12700" cap="flat">
+            <a:noFill/>
+            <a:prstDash val="solid"/>
+            <a:round/>
+          </a:ln>
+        </c:spPr>
+        <c:txPr>
+          <a:bodyPr rot="-1800000"/>
+          <a:lstStyle/>
+          <a:p>
+            <a:pPr>
+              <a:defRPr sz="650" b="0" i="0" u="none" strike="noStrike">
+                <a:solidFill>
+                  <a:srgbClr val="53565A"/>
+                </a:solidFill>
+                <a:latin typeface="Arial"/>
+              </a:defRPr>
+            </a:pPr>
+            <a:endParaRPr lang="en-US"/>
+          </a:p>
+        </c:txPr>
+        <c:crossAx val="2094734552"/>
+        <c:crosses val="autoZero"/>
+        <c:auto val="1"/>
+        <c:lblAlgn val="ctr"/>
+        <c:noMultiLvlLbl val="1"/>
+      </c:catAx>
+      <c:valAx>
+        <c:axId val="2094734552"/>
+        <c:scaling>
+          <c:orientation val="minMax"/>
+        </c:scaling>
+        <c:delete val="1"/>
+        <c:axPos val="l"/>
+        <c:numFmt formatCode="General" sourceLinked="0"/>
+        <c:majorTickMark val="out"/>
+        <c:minorTickMark val="none"/>
+        <c:tickLblPos val="nextTo"/>
+        <c:spPr>
+          <a:ln w="12700" cap="flat">
+            <a:noFill/>
+            <a:prstDash val="solid"/>
+            <a:round/>
+          </a:ln>
+        </c:spPr>
+        <c:txPr>
+          <a:bodyPr/>
+          <a:lstStyle/>
+          <a:p>
+            <a:pPr>
+              <a:defRPr sz="1200" b="0" i="0" u="none" strike="noStrike">
+                <a:solidFill>
+                  <a:srgbClr val="000000"/>
+                </a:solidFill>
+                <a:latin typeface="Arial"/>
+              </a:defRPr>
+            </a:pPr>
+            <a:endParaRPr lang="en-US"/>
+          </a:p>
+        </c:txPr>
+        <c:crossAx val="2094734554"/>
+        <c:crosses val="autoZero"/>
+        <c:crossBetween val="between"/>
+      </c:valAx>
+      <c:spPr>
+        <a:solidFill>
+          <a:srgbClr val="FFFFFF"/>
+        </a:solidFill>
+        <a:ln>
+          <a:noFill/>
+        </a:ln>
+        <a:effectLst/>
+      </c:spPr>
+    </c:plotArea>
+    <c:plotVisOnly val="1"/>
+    <c:dispBlanksAs val="span"/>
+  </c:chart>
+  <c:spPr>
+    <a:noFill/>
+    <a:ln>
+      <a:noFill/>
+    </a:ln>
+    <a:effectLst/>
+  </c:spPr>
+  <c:externalData r:id="rId1">
+    <c:autoUpdate val="0"/>
+  </c:externalData>
+</c:chartSpace>
+</file>
+
+<file path=ppt/charts/chart28.xml><?xml version="1.0" encoding="utf-8"?>
+<c:chartSpace xmlns:c="http://schemas.openxmlformats.org/drawingml/2006/chart" xmlns:a="http://schemas.openxmlformats.org/drawingml/2006/main" xmlns:r="http://schemas.openxmlformats.org/officeDocument/2006/relationships">
+  <c:date1904 val="0"/>
+  <c:roundedCorners val="1"/>
+  <c:chart>
+    <c:autoTitleDeleted val="1"/>
+    <c:plotArea>
+      <c:layout/>
+      <c:barChart>
+        <c:barDir val="col"/>
+        <c:grouping val="clustered"/>
+        <c:varyColors val="0"/>
+        <c:ser>
+          <c:idx val="0"/>
+          <c:order val="0"/>
+          <c:tx>
+            <c:strRef>
+              <c:f>Sheet1!$B$1</c:f>
+              <c:strCache>
+                <c:ptCount val="1"/>
+                <c:pt idx="0">
+                  <c:v>Europe (EU + UK)</c:v>
+                </c:pt>
+              </c:strCache>
+            </c:strRef>
+          </c:tx>
+          <c:spPr>
+            <a:solidFill>
+              <a:srgbClr val="86BC25"/>
+            </a:solidFill>
+            <a:effectLst/>
+          </c:spPr>
+          <c:invertIfNegative val="0"/>
+          <c:dLbls>
+            <c:numFmt formatCode="0&quot;%&quot;" sourceLinked="0"/>
+            <c:txPr>
+              <a:bodyPr/>
+              <a:lstStyle/>
+              <a:p>
+                <a:pPr>
+                  <a:defRPr b="0" i="0" strike="noStrike" sz="700" u="none">
+                    <a:solidFill>
+                      <a:srgbClr val="000000"/>
+                    </a:solidFill>
+                    <a:latin typeface="Arial"/>
+                  </a:defRPr>
+                </a:pPr>
+              </a:p>
+            </c:txPr>
+            <c:showLegendKey val="0"/>
+            <c:showVal val="1"/>
+            <c:showCatName val="0"/>
+            <c:showSerName val="0"/>
+            <c:showPercent val="0"/>
+            <c:showBubbleSize val="0"/>
+            <c:showLeaderLines val="0"/>
+          </c:dLbls>
+          <c:cat>
+            <c:multiLvlStrRef>
+              <c:f>Sheet1!$A$2:$A$7</c:f>
+              <c:multiLvlStrCache>
+                <c:ptCount val="6"/>
+                <c:lvl>
+                  <c:pt idx="0">
+                    <c:v>Platform/utility</c:v>
+                  </c:pt>
+                  <c:pt idx="1">
+                    <c:v>Legal/regulatory</c:v>
+                  </c:pt>
+                  <c:pt idx="2">
+                    <c:v>Data standards</c:v>
+                  </c:pt>
+                  <c:pt idx="3">
+                    <c:v>Public-private collab.</c:v>
+                  </c:pt>
+                  <c:pt idx="4">
+                    <c:v>Use cases</c:v>
+                  </c:pt>
+                  <c:pt idx="5">
+                    <c:v>Funding</c:v>
+                  </c:pt>
+                </c:lvl>
+              </c:multiLvlStrCache>
+            </c:multiLvlStrRef>
+          </c:cat>
+          <c:val>
+            <c:numRef>
+              <c:f>Sheet1!$B$2:$B$7</c:f>
+              <c:numCache>
+                <c:formatCode>General</c:formatCode>
+                <c:ptCount val="6"/>
+                <c:pt idx="0">
+                  <c:v>36</c:v>
+                </c:pt>
+                <c:pt idx="1">
+                  <c:v>29</c:v>
+                </c:pt>
+                <c:pt idx="2">
+                  <c:v>14</c:v>
+                </c:pt>
+                <c:pt idx="3">
+                  <c:v>7</c:v>
+                </c:pt>
+                <c:pt idx="4">
+                  <c:v>7</c:v>
+                </c:pt>
+                <c:pt idx="5">
+                  <c:v>7</c:v>
+                </c:pt>
+              </c:numCache>
+            </c:numRef>
+          </c:val>
+        </c:ser>
+        <c:dLbls>
+          <c:numFmt formatCode="0&quot;%&quot;" sourceLinked="0"/>
+          <c:txPr>
+            <a:bodyPr/>
+            <a:lstStyle/>
+            <a:p>
+              <a:pPr>
+                <a:defRPr b="0" i="0" strike="noStrike" sz="700" u="none">
+                  <a:solidFill>
+                    <a:srgbClr val="000000"/>
+                  </a:solidFill>
+                  <a:latin typeface="Arial"/>
+                </a:defRPr>
+              </a:pPr>
+            </a:p>
+          </c:txPr>
+          <c:showLegendKey val="0"/>
+          <c:showVal val="1"/>
+          <c:showCatName val="0"/>
+          <c:showSerName val="0"/>
+          <c:showPercent val="0"/>
+          <c:showBubbleSize val="0"/>
+          <c:showLeaderLines val="0"/>
+        </c:dLbls>
+        <c:gapWidth val="40"/>
+        <c:overlap val="0"/>
+        <c:axId val="2094734554"/>
+        <c:axId val="2094734552"/>
+        <c:axId val="2094734556"/>
+      </c:barChart>
+      <c:catAx>
+        <c:axId val="2094734554"/>
+        <c:scaling>
+          <c:orientation val="minMax"/>
+        </c:scaling>
+        <c:delete val="0"/>
+        <c:axPos val="b"/>
+        <c:numFmt formatCode="General" sourceLinked="1"/>
+        <c:majorTickMark val="out"/>
+        <c:minorTickMark val="none"/>
+        <c:tickLblPos val="low"/>
+        <c:spPr>
+          <a:ln w="12700" cap="flat">
+            <a:noFill/>
+            <a:prstDash val="solid"/>
+            <a:round/>
+          </a:ln>
+        </c:spPr>
+        <c:txPr>
+          <a:bodyPr rot="-1800000"/>
+          <a:lstStyle/>
+          <a:p>
+            <a:pPr>
+              <a:defRPr sz="650" b="0" i="0" u="none" strike="noStrike">
+                <a:solidFill>
+                  <a:srgbClr val="53565A"/>
+                </a:solidFill>
+                <a:latin typeface="Arial"/>
+              </a:defRPr>
+            </a:pPr>
+            <a:endParaRPr lang="en-US"/>
+          </a:p>
+        </c:txPr>
+        <c:crossAx val="2094734552"/>
+        <c:crosses val="autoZero"/>
+        <c:auto val="1"/>
+        <c:lblAlgn val="ctr"/>
+        <c:noMultiLvlLbl val="1"/>
+      </c:catAx>
+      <c:valAx>
+        <c:axId val="2094734552"/>
+        <c:scaling>
+          <c:orientation val="minMax"/>
+        </c:scaling>
+        <c:delete val="1"/>
+        <c:axPos val="l"/>
+        <c:numFmt formatCode="General" sourceLinked="0"/>
+        <c:majorTickMark val="out"/>
+        <c:minorTickMark val="none"/>
+        <c:tickLblPos val="nextTo"/>
+        <c:spPr>
+          <a:ln w="12700" cap="flat">
+            <a:noFill/>
+            <a:prstDash val="solid"/>
+            <a:round/>
+          </a:ln>
+        </c:spPr>
+        <c:txPr>
+          <a:bodyPr/>
+          <a:lstStyle/>
+          <a:p>
+            <a:pPr>
+              <a:defRPr sz="1200" b="0" i="0" u="none" strike="noStrike">
+                <a:solidFill>
+                  <a:srgbClr val="000000"/>
+                </a:solidFill>
+                <a:latin typeface="Arial"/>
+              </a:defRPr>
+            </a:pPr>
+            <a:endParaRPr lang="en-US"/>
+          </a:p>
+        </c:txPr>
+        <c:crossAx val="2094734554"/>
+        <c:crosses val="autoZero"/>
+        <c:crossBetween val="between"/>
+      </c:valAx>
+      <c:spPr>
+        <a:solidFill>
+          <a:srgbClr val="FFFFFF"/>
+        </a:solidFill>
+        <a:ln>
+          <a:noFill/>
+        </a:ln>
+        <a:effectLst/>
+      </c:spPr>
+    </c:plotArea>
+    <c:plotVisOnly val="1"/>
+    <c:dispBlanksAs val="span"/>
+  </c:chart>
+  <c:spPr>
+    <a:noFill/>
+    <a:ln>
+      <a:noFill/>
+    </a:ln>
+    <a:effectLst/>
+  </c:spPr>
+  <c:externalData r:id="rId1">
+    <c:autoUpdate val="0"/>
+  </c:externalData>
+</c:chartSpace>
+</file>
+
+<file path=ppt/charts/chart29.xml><?xml version="1.0" encoding="utf-8"?>
+<c:chartSpace xmlns:c="http://schemas.openxmlformats.org/drawingml/2006/chart" xmlns:a="http://schemas.openxmlformats.org/drawingml/2006/main" xmlns:r="http://schemas.openxmlformats.org/officeDocument/2006/relationships">
+  <c:date1904 val="0"/>
+  <c:roundedCorners val="1"/>
+  <c:chart>
+    <c:autoTitleDeleted val="1"/>
+    <c:plotArea>
+      <c:layout/>
+      <c:barChart>
+        <c:barDir val="col"/>
+        <c:grouping val="clustered"/>
+        <c:varyColors val="0"/>
+        <c:ser>
+          <c:idx val="0"/>
+          <c:order val="0"/>
+          <c:tx>
+            <c:strRef>
+              <c:f>Sheet1!$B$1</c:f>
+              <c:strCache>
+                <c:ptCount val="1"/>
+                <c:pt idx="0">
+                  <c:v>Australia</c:v>
+                </c:pt>
+              </c:strCache>
+            </c:strRef>
+          </c:tx>
+          <c:spPr>
+            <a:solidFill>
+              <a:srgbClr val="86BC25"/>
+            </a:solidFill>
+            <a:effectLst/>
+          </c:spPr>
+          <c:invertIfNegative val="0"/>
+          <c:dLbls>
+            <c:numFmt formatCode="0&quot;%&quot;" sourceLinked="0"/>
+            <c:txPr>
+              <a:bodyPr/>
+              <a:lstStyle/>
+              <a:p>
+                <a:pPr>
+                  <a:defRPr b="0" i="0" strike="noStrike" sz="700" u="none">
+                    <a:solidFill>
+                      <a:srgbClr val="000000"/>
+                    </a:solidFill>
+                    <a:latin typeface="Arial"/>
+                  </a:defRPr>
+                </a:pPr>
+              </a:p>
+            </c:txPr>
+            <c:showLegendKey val="0"/>
+            <c:showVal val="1"/>
+            <c:showCatName val="0"/>
+            <c:showSerName val="0"/>
+            <c:showPercent val="0"/>
+            <c:showBubbleSize val="0"/>
+            <c:showLeaderLines val="0"/>
+          </c:dLbls>
+          <c:cat>
+            <c:multiLvlStrRef>
+              <c:f>Sheet1!$A$2:$A$7</c:f>
+              <c:multiLvlStrCache>
+                <c:ptCount val="6"/>
+                <c:lvl>
+                  <c:pt idx="0">
+                    <c:v>Platform/utility</c:v>
+                  </c:pt>
+                  <c:pt idx="1">
+                    <c:v>Legal/regulatory</c:v>
+                  </c:pt>
+                  <c:pt idx="2">
+                    <c:v>Data standards</c:v>
+                  </c:pt>
+                  <c:pt idx="3">
+                    <c:v>Public-private collab.</c:v>
+                  </c:pt>
+                  <c:pt idx="4">
+                    <c:v>Use cases</c:v>
+                  </c:pt>
+                  <c:pt idx="5">
+                    <c:v>Funding</c:v>
+                  </c:pt>
+                </c:lvl>
+              </c:multiLvlStrCache>
+            </c:multiLvlStrRef>
+          </c:cat>
+          <c:val>
+            <c:numRef>
+              <c:f>Sheet1!$B$2:$B$7</c:f>
+              <c:numCache>
+                <c:formatCode>General</c:formatCode>
+                <c:ptCount val="6"/>
+                <c:pt idx="0">
+                  <c:v>25</c:v>
+                </c:pt>
+                <c:pt idx="1">
+                  <c:v>38</c:v>
+                </c:pt>
+                <c:pt idx="2">
+                  <c:v>0</c:v>
+                </c:pt>
+                <c:pt idx="3">
+                  <c:v>12</c:v>
+                </c:pt>
+                <c:pt idx="4">
+                  <c:v>25</c:v>
+                </c:pt>
+                <c:pt idx="5">
+                  <c:v>0</c:v>
+                </c:pt>
+              </c:numCache>
+            </c:numRef>
+          </c:val>
+        </c:ser>
+        <c:dLbls>
+          <c:numFmt formatCode="0&quot;%&quot;" sourceLinked="0"/>
+          <c:txPr>
+            <a:bodyPr/>
+            <a:lstStyle/>
+            <a:p>
+              <a:pPr>
+                <a:defRPr b="0" i="0" strike="noStrike" sz="700" u="none">
+                  <a:solidFill>
+                    <a:srgbClr val="000000"/>
+                  </a:solidFill>
+                  <a:latin typeface="Arial"/>
+                </a:defRPr>
+              </a:pPr>
+            </a:p>
+          </c:txPr>
+          <c:showLegendKey val="0"/>
+          <c:showVal val="1"/>
+          <c:showCatName val="0"/>
+          <c:showSerName val="0"/>
+          <c:showPercent val="0"/>
+          <c:showBubbleSize val="0"/>
+          <c:showLeaderLines val="0"/>
+        </c:dLbls>
+        <c:gapWidth val="40"/>
+        <c:overlap val="0"/>
+        <c:axId val="2094734554"/>
+        <c:axId val="2094734552"/>
+        <c:axId val="2094734556"/>
+      </c:barChart>
+      <c:catAx>
+        <c:axId val="2094734554"/>
+        <c:scaling>
+          <c:orientation val="minMax"/>
+        </c:scaling>
+        <c:delete val="0"/>
+        <c:axPos val="b"/>
+        <c:numFmt formatCode="General" sourceLinked="1"/>
+        <c:majorTickMark val="out"/>
+        <c:minorTickMark val="none"/>
+        <c:tickLblPos val="low"/>
+        <c:spPr>
+          <a:ln w="12700" cap="flat">
+            <a:noFill/>
+            <a:prstDash val="solid"/>
+            <a:round/>
+          </a:ln>
+        </c:spPr>
+        <c:txPr>
+          <a:bodyPr rot="-1800000"/>
+          <a:lstStyle/>
+          <a:p>
+            <a:pPr>
+              <a:defRPr sz="650" b="0" i="0" u="none" strike="noStrike">
+                <a:solidFill>
+                  <a:srgbClr val="53565A"/>
+                </a:solidFill>
+                <a:latin typeface="Arial"/>
+              </a:defRPr>
+            </a:pPr>
+            <a:endParaRPr lang="en-US"/>
+          </a:p>
+        </c:txPr>
+        <c:crossAx val="2094734552"/>
+        <c:crosses val="autoZero"/>
+        <c:auto val="1"/>
+        <c:lblAlgn val="ctr"/>
+        <c:noMultiLvlLbl val="1"/>
+      </c:catAx>
+      <c:valAx>
+        <c:axId val="2094734552"/>
+        <c:scaling>
+          <c:orientation val="minMax"/>
+        </c:scaling>
+        <c:delete val="1"/>
+        <c:axPos val="l"/>
+        <c:numFmt formatCode="General" sourceLinked="0"/>
+        <c:majorTickMark val="out"/>
+        <c:minorTickMark val="none"/>
+        <c:tickLblPos val="nextTo"/>
+        <c:spPr>
+          <a:ln w="12700" cap="flat">
+            <a:noFill/>
+            <a:prstDash val="solid"/>
+            <a:round/>
+          </a:ln>
+        </c:spPr>
+        <c:txPr>
+          <a:bodyPr/>
+          <a:lstStyle/>
+          <a:p>
+            <a:pPr>
+              <a:defRPr sz="1200" b="0" i="0" u="none" strike="noStrike">
+                <a:solidFill>
+                  <a:srgbClr val="000000"/>
+                </a:solidFill>
+                <a:latin typeface="Arial"/>
+              </a:defRPr>
+            </a:pPr>
+            <a:endParaRPr lang="en-US"/>
+          </a:p>
+        </c:txPr>
+        <c:crossAx val="2094734554"/>
+        <c:crosses val="autoZero"/>
+        <c:crossBetween val="between"/>
+      </c:valAx>
+      <c:spPr>
+        <a:solidFill>
+          <a:srgbClr val="FFFFFF"/>
+        </a:solidFill>
+        <a:ln>
+          <a:noFill/>
+        </a:ln>
+        <a:effectLst/>
+      </c:spPr>
+    </c:plotArea>
+    <c:plotVisOnly val="1"/>
+    <c:dispBlanksAs val="span"/>
+  </c:chart>
+  <c:spPr>
+    <a:noFill/>
+    <a:ln>
+      <a:noFill/>
+    </a:ln>
+    <a:effectLst/>
+  </c:spPr>
+  <c:externalData r:id="rId1">
+    <c:autoUpdate val="0"/>
+  </c:externalData>
+</c:chartSpace>
+</file>
+
+<file path=ppt/charts/chart3.xml><?xml version="1.0" encoding="utf-8"?>
 <c:chartSpace xmlns:c="http://schemas.openxmlformats.org/drawingml/2006/chart" xmlns:a="http://schemas.openxmlformats.org/drawingml/2006/main" xmlns:r="http://schemas.openxmlformats.org/officeDocument/2006/relationships">
   <c:date1904 val="0"/>
   <c:roundedCorners val="1"/>
@@ -6083,27 +6394,15 @@
           </c:dLbls>
           <c:cat>
             <c:multiLvlStrRef>
-              <c:f>Sheet1!$A$2:$A$7</c:f>
+              <c:f>Sheet1!$A$2:$A$3</c:f>
               <c:multiLvlStrCache>
-                <c:ptCount val="6"/>
+                <c:ptCount val="2"/>
                 <c:lvl>
                   <c:pt idx="0">
-                    <c:v>Fintech partners</c:v>
+                    <c:v>Top 100 Financial Institution (n=40)</c:v>
                   </c:pt>
                   <c:pt idx="1">
-                    <c:v>Business &amp; commercial clients</c:v>
-                  </c:pt>
-                  <c:pt idx="2">
-                    <c:v>Dealers &amp; indirect lending partners</c:v>
-                  </c:pt>
-                  <c:pt idx="3">
-                    <c:v>Mortgage brokers</c:v>
-                  </c:pt>
-                  <c:pt idx="4">
-                    <c:v>Merchants</c:v>
-                  </c:pt>
-                  <c:pt idx="5">
-                    <c:v>Appraisers</c:v>
+                    <c:v>Large Financial Institution — outside Top 100; &gt;20,000 FTE (n=35)</c:v>
                   </c:pt>
                 </c:lvl>
               </c:multiLvlStrCache>
@@ -6111,27 +6410,15 @@
           </c:cat>
           <c:val>
             <c:numRef>
-              <c:f>Sheet1!$B$2:$B$7</c:f>
+              <c:f>Sheet1!$B$2:$B$3</c:f>
               <c:numCache>
                 <c:formatCode>General</c:formatCode>
-                <c:ptCount val="6"/>
+                <c:ptCount val="2"/>
                 <c:pt idx="0">
-                  <c:v>28</c:v>
+                  <c:v>53</c:v>
                 </c:pt>
                 <c:pt idx="1">
-                  <c:v>24</c:v>
-                </c:pt>
-                <c:pt idx="2">
-                  <c:v>20</c:v>
-                </c:pt>
-                <c:pt idx="3">
-                  <c:v>16</c:v>
-                </c:pt>
-                <c:pt idx="4">
-                  <c:v>7</c:v>
-                </c:pt>
-                <c:pt idx="5">
-                  <c:v>4</c:v>
+                  <c:v>47</c:v>
                 </c:pt>
               </c:numCache>
             </c:numRef>
@@ -6269,7 +6556,252 @@
 </c:chartSpace>
 </file>
 
-<file path=ppt/charts/chart28.xml><?xml version="1.0" encoding="utf-8"?>
+<file path=ppt/charts/chart30.xml><?xml version="1.0" encoding="utf-8"?>
+<c:chartSpace xmlns:c="http://schemas.openxmlformats.org/drawingml/2006/chart" xmlns:a="http://schemas.openxmlformats.org/drawingml/2006/main" xmlns:r="http://schemas.openxmlformats.org/officeDocument/2006/relationships">
+  <c:date1904 val="0"/>
+  <c:roundedCorners val="1"/>
+  <c:chart>
+    <c:autoTitleDeleted val="1"/>
+    <c:plotArea>
+      <c:layout/>
+      <c:barChart>
+        <c:barDir val="col"/>
+        <c:grouping val="clustered"/>
+        <c:varyColors val="0"/>
+        <c:ser>
+          <c:idx val="0"/>
+          <c:order val="0"/>
+          <c:tx>
+            <c:strRef>
+              <c:f>Sheet1!$B$1</c:f>
+              <c:strCache>
+                <c:ptCount val="1"/>
+                <c:pt idx="0">
+                  <c:v>Singapore</c:v>
+                </c:pt>
+              </c:strCache>
+            </c:strRef>
+          </c:tx>
+          <c:spPr>
+            <a:solidFill>
+              <a:srgbClr val="86BC25"/>
+            </a:solidFill>
+            <a:effectLst/>
+          </c:spPr>
+          <c:invertIfNegative val="0"/>
+          <c:dLbls>
+            <c:numFmt formatCode="0&quot;%&quot;" sourceLinked="0"/>
+            <c:txPr>
+              <a:bodyPr/>
+              <a:lstStyle/>
+              <a:p>
+                <a:pPr>
+                  <a:defRPr b="0" i="0" strike="noStrike" sz="700" u="none">
+                    <a:solidFill>
+                      <a:srgbClr val="000000"/>
+                    </a:solidFill>
+                    <a:latin typeface="Arial"/>
+                  </a:defRPr>
+                </a:pPr>
+              </a:p>
+            </c:txPr>
+            <c:showLegendKey val="0"/>
+            <c:showVal val="1"/>
+            <c:showCatName val="0"/>
+            <c:showSerName val="0"/>
+            <c:showPercent val="0"/>
+            <c:showBubbleSize val="0"/>
+            <c:showLeaderLines val="0"/>
+          </c:dLbls>
+          <c:cat>
+            <c:multiLvlStrRef>
+              <c:f>Sheet1!$A$2:$A$7</c:f>
+              <c:multiLvlStrCache>
+                <c:ptCount val="6"/>
+                <c:lvl>
+                  <c:pt idx="0">
+                    <c:v>Platform/utility</c:v>
+                  </c:pt>
+                  <c:pt idx="1">
+                    <c:v>Legal/regulatory</c:v>
+                  </c:pt>
+                  <c:pt idx="2">
+                    <c:v>Data standards</c:v>
+                  </c:pt>
+                  <c:pt idx="3">
+                    <c:v>Public-private collab.</c:v>
+                  </c:pt>
+                  <c:pt idx="4">
+                    <c:v>Use cases</c:v>
+                  </c:pt>
+                  <c:pt idx="5">
+                    <c:v>Funding</c:v>
+                  </c:pt>
+                </c:lvl>
+              </c:multiLvlStrCache>
+            </c:multiLvlStrRef>
+          </c:cat>
+          <c:val>
+            <c:numRef>
+              <c:f>Sheet1!$B$2:$B$7</c:f>
+              <c:numCache>
+                <c:formatCode>General</c:formatCode>
+                <c:ptCount val="6"/>
+                <c:pt idx="0">
+                  <c:v>50</c:v>
+                </c:pt>
+                <c:pt idx="1">
+                  <c:v>0</c:v>
+                </c:pt>
+                <c:pt idx="2">
+                  <c:v>50</c:v>
+                </c:pt>
+                <c:pt idx="3">
+                  <c:v>0</c:v>
+                </c:pt>
+                <c:pt idx="4">
+                  <c:v>0</c:v>
+                </c:pt>
+                <c:pt idx="5">
+                  <c:v>0</c:v>
+                </c:pt>
+              </c:numCache>
+            </c:numRef>
+          </c:val>
+        </c:ser>
+        <c:dLbls>
+          <c:numFmt formatCode="0&quot;%&quot;" sourceLinked="0"/>
+          <c:txPr>
+            <a:bodyPr/>
+            <a:lstStyle/>
+            <a:p>
+              <a:pPr>
+                <a:defRPr b="0" i="0" strike="noStrike" sz="700" u="none">
+                  <a:solidFill>
+                    <a:srgbClr val="000000"/>
+                  </a:solidFill>
+                  <a:latin typeface="Arial"/>
+                </a:defRPr>
+              </a:pPr>
+            </a:p>
+          </c:txPr>
+          <c:showLegendKey val="0"/>
+          <c:showVal val="1"/>
+          <c:showCatName val="0"/>
+          <c:showSerName val="0"/>
+          <c:showPercent val="0"/>
+          <c:showBubbleSize val="0"/>
+          <c:showLeaderLines val="0"/>
+        </c:dLbls>
+        <c:gapWidth val="40"/>
+        <c:overlap val="0"/>
+        <c:axId val="2094734554"/>
+        <c:axId val="2094734552"/>
+        <c:axId val="2094734556"/>
+      </c:barChart>
+      <c:catAx>
+        <c:axId val="2094734554"/>
+        <c:scaling>
+          <c:orientation val="minMax"/>
+        </c:scaling>
+        <c:delete val="0"/>
+        <c:axPos val="b"/>
+        <c:numFmt formatCode="General" sourceLinked="1"/>
+        <c:majorTickMark val="out"/>
+        <c:minorTickMark val="none"/>
+        <c:tickLblPos val="low"/>
+        <c:spPr>
+          <a:ln w="12700" cap="flat">
+            <a:noFill/>
+            <a:prstDash val="solid"/>
+            <a:round/>
+          </a:ln>
+        </c:spPr>
+        <c:txPr>
+          <a:bodyPr rot="-1800000"/>
+          <a:lstStyle/>
+          <a:p>
+            <a:pPr>
+              <a:defRPr sz="650" b="0" i="0" u="none" strike="noStrike">
+                <a:solidFill>
+                  <a:srgbClr val="53565A"/>
+                </a:solidFill>
+                <a:latin typeface="Arial"/>
+              </a:defRPr>
+            </a:pPr>
+            <a:endParaRPr lang="en-US"/>
+          </a:p>
+        </c:txPr>
+        <c:crossAx val="2094734552"/>
+        <c:crosses val="autoZero"/>
+        <c:auto val="1"/>
+        <c:lblAlgn val="ctr"/>
+        <c:noMultiLvlLbl val="1"/>
+      </c:catAx>
+      <c:valAx>
+        <c:axId val="2094734552"/>
+        <c:scaling>
+          <c:orientation val="minMax"/>
+        </c:scaling>
+        <c:delete val="1"/>
+        <c:axPos val="l"/>
+        <c:numFmt formatCode="General" sourceLinked="0"/>
+        <c:majorTickMark val="out"/>
+        <c:minorTickMark val="none"/>
+        <c:tickLblPos val="nextTo"/>
+        <c:spPr>
+          <a:ln w="12700" cap="flat">
+            <a:noFill/>
+            <a:prstDash val="solid"/>
+            <a:round/>
+          </a:ln>
+        </c:spPr>
+        <c:txPr>
+          <a:bodyPr/>
+          <a:lstStyle/>
+          <a:p>
+            <a:pPr>
+              <a:defRPr sz="1200" b="0" i="0" u="none" strike="noStrike">
+                <a:solidFill>
+                  <a:srgbClr val="000000"/>
+                </a:solidFill>
+                <a:latin typeface="Arial"/>
+              </a:defRPr>
+            </a:pPr>
+            <a:endParaRPr lang="en-US"/>
+          </a:p>
+        </c:txPr>
+        <c:crossAx val="2094734554"/>
+        <c:crosses val="autoZero"/>
+        <c:crossBetween val="between"/>
+      </c:valAx>
+      <c:spPr>
+        <a:solidFill>
+          <a:srgbClr val="FFFFFF"/>
+        </a:solidFill>
+        <a:ln>
+          <a:noFill/>
+        </a:ln>
+        <a:effectLst/>
+      </c:spPr>
+    </c:plotArea>
+    <c:plotVisOnly val="1"/>
+    <c:dispBlanksAs val="span"/>
+  </c:chart>
+  <c:spPr>
+    <a:noFill/>
+    <a:ln>
+      <a:noFill/>
+    </a:ln>
+    <a:effectLst/>
+  </c:spPr>
+  <c:externalData r:id="rId1">
+    <c:autoUpdate val="0"/>
+  </c:externalData>
+</c:chartSpace>
+</file>
+
+<file path=ppt/charts/chart31.xml><?xml version="1.0" encoding="utf-8"?>
 <c:chartSpace xmlns:c="http://schemas.openxmlformats.org/drawingml/2006/chart" xmlns:a="http://schemas.openxmlformats.org/drawingml/2006/main" xmlns:r="http://schemas.openxmlformats.org/officeDocument/2006/relationships">
   <c:date1904 val="0"/>
   <c:roundedCorners val="1"/>
@@ -6290,14 +6822,14 @@
               <c:strCache>
                 <c:ptCount val="1"/>
                 <c:pt idx="0">
-                  <c:v>Insurance</c:v>
+                  <c:v>Banking</c:v>
                 </c:pt>
               </c:strCache>
             </c:strRef>
           </c:tx>
           <c:spPr>
             <a:solidFill>
-              <a:srgbClr val="046A38"/>
+              <a:srgbClr val="86BC25"/>
             </a:solidFill>
             <a:effectLst/>
           </c:spPr>
@@ -6333,22 +6865,22 @@
                 <c:ptCount val="6"/>
                 <c:lvl>
                   <c:pt idx="0">
-                    <c:v>Health care providers</c:v>
+                    <c:v>Fintech partners</c:v>
                   </c:pt>
                   <c:pt idx="1">
-                    <c:v>Automotive service providers</c:v>
+                    <c:v>Business &amp; commercial clients</c:v>
                   </c:pt>
                   <c:pt idx="2">
-                    <c:v>Brokers &amp; distribution partners</c:v>
+                    <c:v>Dealers &amp; indirect lending partners</c:v>
                   </c:pt>
                   <c:pt idx="3">
-                    <c:v>Third-party administrators (TPAs)</c:v>
+                    <c:v>Mortgage brokers</c:v>
                   </c:pt>
                   <c:pt idx="4">
-                    <c:v>Property claims service providers</c:v>
+                    <c:v>Merchants</c:v>
                   </c:pt>
                   <c:pt idx="5">
-                    <c:v>Legal representatives &amp; paralegals</c:v>
+                    <c:v>Appraisers</c:v>
                   </c:pt>
                 </c:lvl>
               </c:multiLvlStrCache>
@@ -6361,19 +6893,19 @@
                 <c:formatCode>General</c:formatCode>
                 <c:ptCount val="6"/>
                 <c:pt idx="0">
-                  <c:v>40</c:v>
+                  <c:v>28</c:v>
                 </c:pt>
                 <c:pt idx="1">
+                  <c:v>24</c:v>
+                </c:pt>
+                <c:pt idx="2">
+                  <c:v>20</c:v>
+                </c:pt>
+                <c:pt idx="3">
                   <c:v>16</c:v>
                 </c:pt>
-                <c:pt idx="2">
-                  <c:v>16</c:v>
-                </c:pt>
-                <c:pt idx="3">
-                  <c:v>12</c:v>
-                </c:pt>
                 <c:pt idx="4">
-                  <c:v>12</c:v>
+                  <c:v>7</c:v>
                 </c:pt>
                 <c:pt idx="5">
                   <c:v>4</c:v>
@@ -6514,7 +7046,7 @@
 </c:chartSpace>
 </file>
 
-<file path=ppt/charts/chart29.xml><?xml version="1.0" encoding="utf-8"?>
+<file path=ppt/charts/chart32.xml><?xml version="1.0" encoding="utf-8"?>
 <c:chartSpace xmlns:c="http://schemas.openxmlformats.org/drawingml/2006/chart" xmlns:a="http://schemas.openxmlformats.org/drawingml/2006/main" xmlns:r="http://schemas.openxmlformats.org/officeDocument/2006/relationships">
   <c:date1904 val="0"/>
   <c:roundedCorners val="1"/>
@@ -6535,14 +7067,14 @@
               <c:strCache>
                 <c:ptCount val="1"/>
                 <c:pt idx="0">
-                  <c:v>Strategy Expected to Most Reduce Third-Party Risk</c:v>
+                  <c:v>Insurance</c:v>
                 </c:pt>
               </c:strCache>
             </c:strRef>
           </c:tx>
           <c:spPr>
             <a:solidFill>
-              <a:srgbClr val="86BC25"/>
+              <a:srgbClr val="046A38"/>
             </a:solidFill>
             <a:effectLst/>
           </c:spPr>
@@ -6573,21 +7105,27 @@
           </c:dLbls>
           <c:cat>
             <c:multiLvlStrRef>
-              <c:f>Sheet1!$A$2:$A$5</c:f>
+              <c:f>Sheet1!$A$2:$A$7</c:f>
               <c:multiLvlStrCache>
-                <c:ptCount val="4"/>
+                <c:ptCount val="6"/>
                 <c:lvl>
                   <c:pt idx="0">
-                    <c:v>Increase info sharing &amp; intelligence</c:v>
+                    <c:v>Health care providers</c:v>
                   </c:pt>
                   <c:pt idx="1">
-                    <c:v>Enhance ongoing monitoring &amp; detection</c:v>
+                    <c:v>Automotive service providers</c:v>
                   </c:pt>
                   <c:pt idx="2">
-                    <c:v>Strengthen onboarding verification &amp; due diligence</c:v>
+                    <c:v>Brokers &amp; distribution partners</c:v>
                   </c:pt>
                   <c:pt idx="3">
-                    <c:v>Strengthen 3rd-party oversight &amp; accountability</c:v>
+                    <c:v>Third-party administrators (TPAs)</c:v>
+                  </c:pt>
+                  <c:pt idx="4">
+                    <c:v>Property claims service providers</c:v>
+                  </c:pt>
+                  <c:pt idx="5">
+                    <c:v>Legal representatives &amp; paralegals</c:v>
                   </c:pt>
                 </c:lvl>
               </c:multiLvlStrCache>
@@ -6595,21 +7133,27 @@
           </c:cat>
           <c:val>
             <c:numRef>
-              <c:f>Sheet1!$B$2:$B$5</c:f>
+              <c:f>Sheet1!$B$2:$B$7</c:f>
               <c:numCache>
                 <c:formatCode>General</c:formatCode>
-                <c:ptCount val="4"/>
+                <c:ptCount val="6"/>
                 <c:pt idx="0">
-                  <c:v>30</c:v>
+                  <c:v>40</c:v>
                 </c:pt>
                 <c:pt idx="1">
-                  <c:v>27</c:v>
+                  <c:v>16</c:v>
                 </c:pt>
                 <c:pt idx="2">
-                  <c:v>23</c:v>
+                  <c:v>16</c:v>
                 </c:pt>
                 <c:pt idx="3">
-                  <c:v>19</c:v>
+                  <c:v>12</c:v>
+                </c:pt>
+                <c:pt idx="4">
+                  <c:v>12</c:v>
+                </c:pt>
+                <c:pt idx="5">
+                  <c:v>4</c:v>
                 </c:pt>
               </c:numCache>
             </c:numRef>
@@ -6747,7 +7291,7 @@
 </c:chartSpace>
 </file>
 
-<file path=ppt/charts/chart3.xml><?xml version="1.0" encoding="utf-8"?>
+<file path=ppt/charts/chart33.xml><?xml version="1.0" encoding="utf-8"?>
 <c:chartSpace xmlns:c="http://schemas.openxmlformats.org/drawingml/2006/chart" xmlns:a="http://schemas.openxmlformats.org/drawingml/2006/main" xmlns:r="http://schemas.openxmlformats.org/officeDocument/2006/relationships">
   <c:date1904 val="0"/>
   <c:roundedCorners val="1"/>
@@ -6768,7 +7312,7 @@
               <c:strCache>
                 <c:ptCount val="1"/>
                 <c:pt idx="0">
-                  <c:v>Banking</c:v>
+                  <c:v>Strategy Expected to Most Reduce Third-Party Risk</c:v>
                 </c:pt>
               </c:strCache>
             </c:strRef>
@@ -6806,15 +7350,21 @@
           </c:dLbls>
           <c:cat>
             <c:multiLvlStrRef>
-              <c:f>Sheet1!$A$2:$A$3</c:f>
+              <c:f>Sheet1!$A$2:$A$5</c:f>
               <c:multiLvlStrCache>
-                <c:ptCount val="2"/>
+                <c:ptCount val="4"/>
                 <c:lvl>
                   <c:pt idx="0">
-                    <c:v>Top 100 Financial Institution (n=40)</c:v>
+                    <c:v>Increase info sharing &amp; intelligence</c:v>
                   </c:pt>
                   <c:pt idx="1">
-                    <c:v>Large Financial Institution — outside Top 100; &gt;20,000 FTE (n=35)</c:v>
+                    <c:v>Enhance ongoing monitoring &amp; detection</c:v>
+                  </c:pt>
+                  <c:pt idx="2">
+                    <c:v>Strengthen onboarding verification &amp; due diligence</c:v>
+                  </c:pt>
+                  <c:pt idx="3">
+                    <c:v>Strengthen 3rd-party oversight &amp; accountability</c:v>
                   </c:pt>
                 </c:lvl>
               </c:multiLvlStrCache>
@@ -6822,15 +7372,21 @@
           </c:cat>
           <c:val>
             <c:numRef>
-              <c:f>Sheet1!$B$2:$B$3</c:f>
+              <c:f>Sheet1!$B$2:$B$5</c:f>
               <c:numCache>
                 <c:formatCode>General</c:formatCode>
-                <c:ptCount val="2"/>
+                <c:ptCount val="4"/>
                 <c:pt idx="0">
-                  <c:v>53</c:v>
+                  <c:v>30</c:v>
                 </c:pt>
                 <c:pt idx="1">
-                  <c:v>47</c:v>
+                  <c:v>27</c:v>
+                </c:pt>
+                <c:pt idx="2">
+                  <c:v>23</c:v>
+                </c:pt>
+                <c:pt idx="3">
+                  <c:v>19</c:v>
                 </c:pt>
               </c:numCache>
             </c:numRef>
@@ -6968,7 +7524,7 @@
 </c:chartSpace>
 </file>
 
-<file path=ppt/charts/chart30.xml><?xml version="1.0" encoding="utf-8"?>
+<file path=ppt/charts/chart34.xml><?xml version="1.0" encoding="utf-8"?>
 <c:chartSpace xmlns:c="http://schemas.openxmlformats.org/drawingml/2006/chart" xmlns:a="http://schemas.openxmlformats.org/drawingml/2006/main" xmlns:r="http://schemas.openxmlformats.org/officeDocument/2006/relationships">
   <c:date1904 val="0"/>
   <c:roundedCorners val="1"/>
@@ -7304,7 +7860,7 @@
 </c:chartSpace>
 </file>
 
-<file path=ppt/charts/chart31.xml><?xml version="1.0" encoding="utf-8"?>
+<file path=ppt/charts/chart35.xml><?xml version="1.0" encoding="utf-8"?>
 <c:chartSpace xmlns:c="http://schemas.openxmlformats.org/drawingml/2006/chart" xmlns:a="http://schemas.openxmlformats.org/drawingml/2006/main" xmlns:r="http://schemas.openxmlformats.org/officeDocument/2006/relationships">
   <c:date1904 val="0"/>
   <c:roundedCorners val="1"/>
@@ -8033,7 +8589,7 @@
 </c:chartSpace>
 </file>
 
-<file path=ppt/charts/chart32.xml><?xml version="1.0" encoding="utf-8"?>
+<file path=ppt/charts/chart36.xml><?xml version="1.0" encoding="utf-8"?>
 <c:chartSpace xmlns:c="http://schemas.openxmlformats.org/drawingml/2006/chart" xmlns:a="http://schemas.openxmlformats.org/drawingml/2006/main" xmlns:r="http://schemas.openxmlformats.org/officeDocument/2006/relationships">
   <c:date1904 val="0"/>
   <c:roundedCorners val="1"/>
@@ -8381,7 +8937,7 @@
 </c:chartSpace>
 </file>
 
-<file path=ppt/charts/chart33.xml><?xml version="1.0" encoding="utf-8"?>
+<file path=ppt/charts/chart37.xml><?xml version="1.0" encoding="utf-8"?>
 <c:chartSpace xmlns:c="http://schemas.openxmlformats.org/drawingml/2006/chart" xmlns:a="http://schemas.openxmlformats.org/drawingml/2006/main" xmlns:r="http://schemas.openxmlformats.org/officeDocument/2006/relationships">
   <c:date1904 val="0"/>
   <c:roundedCorners val="1"/>
@@ -8792,7 +9348,7 @@
 </c:chartSpace>
 </file>
 
-<file path=ppt/charts/chart34.xml><?xml version="1.0" encoding="utf-8"?>
+<file path=ppt/charts/chart38.xml><?xml version="1.0" encoding="utf-8"?>
 <c:chartSpace xmlns:c="http://schemas.openxmlformats.org/drawingml/2006/chart" xmlns:a="http://schemas.openxmlformats.org/drawingml/2006/main" xmlns:r="http://schemas.openxmlformats.org/officeDocument/2006/relationships">
   <c:date1904 val="0"/>
   <c:roundedCorners val="1"/>
@@ -9581,7 +10137,7 @@
 </c:chartSpace>
 </file>
 
-<file path=ppt/charts/chart35.xml><?xml version="1.0" encoding="utf-8"?>
+<file path=ppt/charts/chart39.xml><?xml version="1.0" encoding="utf-8"?>
 <c:chartSpace xmlns:c="http://schemas.openxmlformats.org/drawingml/2006/chart" xmlns:a="http://schemas.openxmlformats.org/drawingml/2006/main" xmlns:r="http://schemas.openxmlformats.org/officeDocument/2006/relationships">
   <c:date1904 val="0"/>
   <c:roundedCorners val="1"/>
@@ -10244,7 +10800,7 @@
 </c:chartSpace>
 </file>
 
-<file path=ppt/charts/chart36.xml><?xml version="1.0" encoding="utf-8"?>
+<file path=ppt/charts/chart4.xml><?xml version="1.0" encoding="utf-8"?>
 <c:chartSpace xmlns:c="http://schemas.openxmlformats.org/drawingml/2006/chart" xmlns:a="http://schemas.openxmlformats.org/drawingml/2006/main" xmlns:r="http://schemas.openxmlformats.org/officeDocument/2006/relationships">
   <c:date1904 val="0"/>
   <c:roundedCorners val="1"/>
@@ -10265,7 +10821,7 @@
               <c:strCache>
                 <c:ptCount val="1"/>
                 <c:pt idx="0">
-                  <c:v>Current approach</c:v>
+                  <c:v>Banking</c:v>
                 </c:pt>
               </c:strCache>
             </c:strRef>
@@ -10303,27 +10859,24 @@
           </c:dLbls>
           <c:cat>
             <c:multiLvlStrRef>
-              <c:f>Sheet1!$A$2:$A$7</c:f>
+              <c:f>Sheet1!$A$2:$A$6</c:f>
               <c:multiLvlStrCache>
-                <c:ptCount val="6"/>
+                <c:ptCount val="5"/>
                 <c:lvl>
                   <c:pt idx="0">
-                    <c:v>AI-enabled tools augmentation</c:v>
+                    <c:v>United States (n=34)</c:v>
                   </c:pt>
                   <c:pt idx="1">
-                    <c:v>Automating workflows</c:v>
+                    <c:v>Canada (n=18)</c:v>
                   </c:pt>
                   <c:pt idx="2">
-                    <c:v>Redesigning processes &amp; playbooks</c:v>
+                    <c:v>Europe — EU + UK (n=12)</c:v>
                   </c:pt>
                   <c:pt idx="3">
-                    <c:v>Outsourcing</c:v>
+                    <c:v>Australia (n=7)</c:v>
                   </c:pt>
                   <c:pt idx="4">
-                    <c:v>Hiring / workforce expansion</c:v>
-                  </c:pt>
-                  <c:pt idx="5">
-                    <c:v>Combination of approaches</c:v>
+                    <c:v>Singapore (n=4)</c:v>
                   </c:pt>
                 </c:lvl>
               </c:multiLvlStrCache>
@@ -10331,128 +10884,24 @@
           </c:cat>
           <c:val>
             <c:numRef>
-              <c:f>Sheet1!$B$2:$B$7</c:f>
+              <c:f>Sheet1!$B$2:$B$6</c:f>
               <c:numCache>
                 <c:formatCode>General</c:formatCode>
-                <c:ptCount val="6"/>
+                <c:ptCount val="5"/>
                 <c:pt idx="0">
-                  <c:v>34</c:v>
+                  <c:v>45</c:v>
                 </c:pt>
                 <c:pt idx="1">
-                  <c:v>29</c:v>
+                  <c:v>24</c:v>
                 </c:pt>
                 <c:pt idx="2">
-                  <c:v>10</c:v>
+                  <c:v>16</c:v>
                 </c:pt>
                 <c:pt idx="3">
-                  <c:v>10</c:v>
-                </c:pt>
-                <c:pt idx="4">
-                  <c:v>10</c:v>
-                </c:pt>
-                <c:pt idx="5">
-                  <c:v>7</c:v>
-                </c:pt>
-              </c:numCache>
-            </c:numRef>
-          </c:val>
-        </c:ser>
-        <c:ser>
-          <c:idx val="1"/>
-          <c:order val="1"/>
-          <c:tx>
-            <c:strRef>
-              <c:f>Sheet1!$C$1</c:f>
-              <c:strCache>
-                <c:ptCount val="1"/>
-                <c:pt idx="0">
-                  <c:v>3-year focus</c:v>
-                </c:pt>
-              </c:strCache>
-            </c:strRef>
-          </c:tx>
-          <c:spPr>
-            <a:solidFill>
-              <a:srgbClr val="046A38"/>
-            </a:solidFill>
-            <a:effectLst/>
-          </c:spPr>
-          <c:invertIfNegative val="0"/>
-          <c:dLbls>
-            <c:numFmt formatCode="0&quot;%&quot;" sourceLinked="0"/>
-            <c:txPr>
-              <a:bodyPr/>
-              <a:lstStyle/>
-              <a:p>
-                <a:pPr>
-                  <a:defRPr b="0" i="0" strike="noStrike" sz="1000" u="none">
-                    <a:solidFill>
-                      <a:srgbClr val="000000"/>
-                    </a:solidFill>
-                    <a:latin typeface="Arial"/>
-                  </a:defRPr>
-                </a:pPr>
-              </a:p>
-            </c:txPr>
-            <c:showLegendKey val="0"/>
-            <c:showVal val="1"/>
-            <c:showCatName val="0"/>
-            <c:showSerName val="0"/>
-            <c:showPercent val="0"/>
-            <c:showBubbleSize val="0"/>
-            <c:showLeaderLines val="0"/>
-          </c:dLbls>
-          <c:cat>
-            <c:multiLvlStrRef>
-              <c:f>Sheet1!$A$2:$A$7</c:f>
-              <c:multiLvlStrCache>
-                <c:ptCount val="6"/>
-                <c:lvl>
-                  <c:pt idx="0">
-                    <c:v>AI-enabled tools augmentation</c:v>
-                  </c:pt>
-                  <c:pt idx="1">
-                    <c:v>Automating workflows</c:v>
-                  </c:pt>
-                  <c:pt idx="2">
-                    <c:v>Redesigning processes &amp; playbooks</c:v>
-                  </c:pt>
-                  <c:pt idx="3">
-                    <c:v>Outsourcing</c:v>
-                  </c:pt>
-                  <c:pt idx="4">
-                    <c:v>Hiring / workforce expansion</c:v>
-                  </c:pt>
-                  <c:pt idx="5">
-                    <c:v>Combination of approaches</c:v>
-                  </c:pt>
-                </c:lvl>
-              </c:multiLvlStrCache>
-            </c:multiLvlStrRef>
-          </c:cat>
-          <c:val>
-            <c:numRef>
-              <c:f>Sheet1!$C$2:$C$7</c:f>
-              <c:numCache>
-                <c:formatCode>General</c:formatCode>
-                <c:ptCount val="6"/>
-                <c:pt idx="0">
-                  <c:v>41</c:v>
-                </c:pt>
-                <c:pt idx="1">
-                  <c:v>27</c:v>
-                </c:pt>
-                <c:pt idx="2">
-                  <c:v>18</c:v>
-                </c:pt>
-                <c:pt idx="3">
-                  <c:v>7</c:v>
+                  <c:v>9</c:v>
                 </c:pt>
                 <c:pt idx="4">
                   <c:v>5</c:v>
-                </c:pt>
-                <c:pt idx="5">
-                  <c:v>2</c:v>
                 </c:pt>
               </c:numCache>
             </c:numRef>
@@ -10574,20 +11023,6 @@
         <a:effectLst/>
       </c:spPr>
     </c:plotArea>
-    <c:legend>
-      <c:legendPos val="b"/>
-      <c:overlay val="0"/>
-      <c:txPr>
-        <a:bodyPr/>
-        <a:lstStyle/>
-        <a:p>
-          <a:pPr>
-            <a:defRPr sz="1000">      </a:defRPr>
-          </a:pPr>
-          <a:endParaRPr lang="en-US"/>
-        </a:p>
-      </c:txPr>
-    </c:legend>
     <c:plotVisOnly val="1"/>
     <c:dispBlanksAs val="span"/>
   </c:chart>
@@ -10604,7 +11039,7 @@
 </c:chartSpace>
 </file>
 
-<file path=ppt/charts/chart37.xml><?xml version="1.0" encoding="utf-8"?>
+<file path=ppt/charts/chart40.xml><?xml version="1.0" encoding="utf-8"?>
 <c:chartSpace xmlns:c="http://schemas.openxmlformats.org/drawingml/2006/chart" xmlns:a="http://schemas.openxmlformats.org/drawingml/2006/main" xmlns:r="http://schemas.openxmlformats.org/officeDocument/2006/relationships">
   <c:date1904 val="0"/>
   <c:roundedCorners val="1"/>
@@ -10625,1438 +11060,7 @@
               <c:strCache>
                 <c:ptCount val="1"/>
                 <c:pt idx="0">
-                  <c:v>Today</c:v>
-                </c:pt>
-              </c:strCache>
-            </c:strRef>
-          </c:tx>
-          <c:spPr>
-            <a:solidFill>
-              <a:srgbClr val="86BC25"/>
-            </a:solidFill>
-            <a:effectLst/>
-          </c:spPr>
-          <c:invertIfNegative val="0"/>
-          <c:dLbls>
-            <c:numFmt formatCode="0&quot;%&quot;" sourceLinked="0"/>
-            <c:txPr>
-              <a:bodyPr/>
-              <a:lstStyle/>
-              <a:p>
-                <a:pPr>
-                  <a:defRPr b="0" i="0" strike="noStrike" sz="800" u="none">
-                    <a:solidFill>
-                      <a:srgbClr val="000000"/>
-                    </a:solidFill>
-                    <a:latin typeface="Arial"/>
-                  </a:defRPr>
-                </a:pPr>
-              </a:p>
-            </c:txPr>
-            <c:showLegendKey val="0"/>
-            <c:showVal val="1"/>
-            <c:showCatName val="0"/>
-            <c:showSerName val="0"/>
-            <c:showPercent val="0"/>
-            <c:showBubbleSize val="0"/>
-            <c:showLeaderLines val="0"/>
-          </c:dLbls>
-          <c:cat>
-            <c:multiLvlStrRef>
-              <c:f>Sheet1!$A$2:$A$7</c:f>
-              <c:multiLvlStrCache>
-                <c:ptCount val="6"/>
-                <c:lvl>
-                  <c:pt idx="0">
-                    <c:v>AI-enabled tools</c:v>
-                  </c:pt>
-                  <c:pt idx="1">
-                    <c:v>Automating workflows</c:v>
-                  </c:pt>
-                  <c:pt idx="2">
-                    <c:v>Redesigning processes</c:v>
-                  </c:pt>
-                  <c:pt idx="3">
-                    <c:v>Outsourcing</c:v>
-                  </c:pt>
-                  <c:pt idx="4">
-                    <c:v>Hiring / workforce</c:v>
-                  </c:pt>
-                  <c:pt idx="5">
-                    <c:v>Combination</c:v>
-                  </c:pt>
-                </c:lvl>
-              </c:multiLvlStrCache>
-            </c:multiLvlStrRef>
-          </c:cat>
-          <c:val>
-            <c:numRef>
-              <c:f>Sheet1!$B$2:$B$7</c:f>
-              <c:numCache>
-                <c:formatCode>General</c:formatCode>
-                <c:ptCount val="6"/>
-                <c:pt idx="0">
-                  <c:v>47</c:v>
-                </c:pt>
-                <c:pt idx="1">
-                  <c:v>33</c:v>
-                </c:pt>
-                <c:pt idx="2">
-                  <c:v>7</c:v>
-                </c:pt>
-                <c:pt idx="3">
-                  <c:v>7</c:v>
-                </c:pt>
-                <c:pt idx="4">
-                  <c:v>7</c:v>
-                </c:pt>
-                <c:pt idx="5">
-                  <c:v>0</c:v>
-                </c:pt>
-              </c:numCache>
-            </c:numRef>
-          </c:val>
-        </c:ser>
-        <c:ser>
-          <c:idx val="1"/>
-          <c:order val="1"/>
-          <c:tx>
-            <c:strRef>
-              <c:f>Sheet1!$C$1</c:f>
-              <c:strCache>
-                <c:ptCount val="1"/>
-                <c:pt idx="0">
-                  <c:v>3-Year Focus</c:v>
-                </c:pt>
-              </c:strCache>
-            </c:strRef>
-          </c:tx>
-          <c:spPr>
-            <a:solidFill>
-              <a:srgbClr val="046A38"/>
-            </a:solidFill>
-            <a:effectLst/>
-          </c:spPr>
-          <c:invertIfNegative val="0"/>
-          <c:dLbls>
-            <c:numFmt formatCode="0&quot;%&quot;" sourceLinked="0"/>
-            <c:txPr>
-              <a:bodyPr/>
-              <a:lstStyle/>
-              <a:p>
-                <a:pPr>
-                  <a:defRPr b="0" i="0" strike="noStrike" sz="800" u="none">
-                    <a:solidFill>
-                      <a:srgbClr val="000000"/>
-                    </a:solidFill>
-                    <a:latin typeface="Arial"/>
-                  </a:defRPr>
-                </a:pPr>
-              </a:p>
-            </c:txPr>
-            <c:showLegendKey val="0"/>
-            <c:showVal val="1"/>
-            <c:showCatName val="0"/>
-            <c:showSerName val="0"/>
-            <c:showPercent val="0"/>
-            <c:showBubbleSize val="0"/>
-            <c:showLeaderLines val="0"/>
-          </c:dLbls>
-          <c:cat>
-            <c:multiLvlStrRef>
-              <c:f>Sheet1!$A$2:$A$7</c:f>
-              <c:multiLvlStrCache>
-                <c:ptCount val="6"/>
-                <c:lvl>
-                  <c:pt idx="0">
-                    <c:v>AI-enabled tools</c:v>
-                  </c:pt>
-                  <c:pt idx="1">
-                    <c:v>Automating workflows</c:v>
-                  </c:pt>
-                  <c:pt idx="2">
-                    <c:v>Redesigning processes</c:v>
-                  </c:pt>
-                  <c:pt idx="3">
-                    <c:v>Outsourcing</c:v>
-                  </c:pt>
-                  <c:pt idx="4">
-                    <c:v>Hiring / workforce</c:v>
-                  </c:pt>
-                  <c:pt idx="5">
-                    <c:v>Combination</c:v>
-                  </c:pt>
-                </c:lvl>
-              </c:multiLvlStrCache>
-            </c:multiLvlStrRef>
-          </c:cat>
-          <c:val>
-            <c:numRef>
-              <c:f>Sheet1!$C$2:$C$7</c:f>
-              <c:numCache>
-                <c:formatCode>General</c:formatCode>
-                <c:ptCount val="6"/>
-                <c:pt idx="0">
-                  <c:v>40</c:v>
-                </c:pt>
-                <c:pt idx="1">
-                  <c:v>27</c:v>
-                </c:pt>
-                <c:pt idx="2">
-                  <c:v>27</c:v>
-                </c:pt>
-                <c:pt idx="3">
-                  <c:v>7</c:v>
-                </c:pt>
-                <c:pt idx="4">
-                  <c:v>0</c:v>
-                </c:pt>
-                <c:pt idx="5">
-                  <c:v>0</c:v>
-                </c:pt>
-              </c:numCache>
-            </c:numRef>
-          </c:val>
-        </c:ser>
-        <c:dLbls>
-          <c:numFmt formatCode="0&quot;%&quot;" sourceLinked="0"/>
-          <c:txPr>
-            <a:bodyPr/>
-            <a:lstStyle/>
-            <a:p>
-              <a:pPr>
-                <a:defRPr b="0" i="0" strike="noStrike" sz="800" u="none">
-                  <a:solidFill>
-                    <a:srgbClr val="000000"/>
-                  </a:solidFill>
-                  <a:latin typeface="Arial"/>
-                </a:defRPr>
-              </a:pPr>
-            </a:p>
-          </c:txPr>
-          <c:showLegendKey val="0"/>
-          <c:showVal val="1"/>
-          <c:showCatName val="0"/>
-          <c:showSerName val="0"/>
-          <c:showPercent val="0"/>
-          <c:showBubbleSize val="0"/>
-          <c:showLeaderLines val="0"/>
-        </c:dLbls>
-        <c:gapWidth val="40"/>
-        <c:overlap val="0"/>
-        <c:axId val="2094734554"/>
-        <c:axId val="2094734552"/>
-        <c:axId val="2094734556"/>
-      </c:barChart>
-      <c:catAx>
-        <c:axId val="2094734554"/>
-        <c:scaling>
-          <c:orientation val="minMax"/>
-        </c:scaling>
-        <c:delete val="0"/>
-        <c:axPos val="l"/>
-        <c:numFmt formatCode="General" sourceLinked="1"/>
-        <c:majorTickMark val="out"/>
-        <c:minorTickMark val="none"/>
-        <c:tickLblPos val="nextTo"/>
-        <c:spPr>
-          <a:ln w="12700" cap="flat">
-            <a:noFill/>
-            <a:prstDash val="solid"/>
-            <a:round/>
-          </a:ln>
-        </c:spPr>
-        <c:txPr>
-          <a:bodyPr/>
-          <a:lstStyle/>
-          <a:p>
-            <a:pPr>
-              <a:defRPr sz="1000" b="0" i="0" u="none" strike="noStrike">
-                <a:solidFill>
-                  <a:srgbClr val="53565A"/>
-                </a:solidFill>
-                <a:latin typeface="Arial"/>
-              </a:defRPr>
-            </a:pPr>
-            <a:endParaRPr lang="en-US"/>
-          </a:p>
-        </c:txPr>
-        <c:crossAx val="2094734552"/>
-        <c:crosses val="autoZero"/>
-        <c:auto val="1"/>
-        <c:lblAlgn val="ctr"/>
-        <c:noMultiLvlLbl val="1"/>
-      </c:catAx>
-      <c:valAx>
-        <c:axId val="2094734552"/>
-        <c:scaling>
-          <c:orientation val="minMax"/>
-        </c:scaling>
-        <c:delete val="1"/>
-        <c:axPos val="b"/>
-        <c:numFmt formatCode="General" sourceLinked="0"/>
-        <c:majorTickMark val="out"/>
-        <c:minorTickMark val="none"/>
-        <c:tickLblPos val="low"/>
-        <c:spPr>
-          <a:ln w="12700" cap="flat">
-            <a:noFill/>
-            <a:prstDash val="solid"/>
-            <a:round/>
-          </a:ln>
-        </c:spPr>
-        <c:txPr>
-          <a:bodyPr/>
-          <a:lstStyle/>
-          <a:p>
-            <a:pPr>
-              <a:defRPr sz="1200" b="0" i="0" u="none" strike="noStrike">
-                <a:solidFill>
-                  <a:srgbClr val="000000"/>
-                </a:solidFill>
-                <a:latin typeface="Arial"/>
-              </a:defRPr>
-            </a:pPr>
-            <a:endParaRPr lang="en-US"/>
-          </a:p>
-        </c:txPr>
-        <c:crossAx val="2094734554"/>
-        <c:crosses val="autoZero"/>
-        <c:crossBetween val="between"/>
-      </c:valAx>
-      <c:spPr>
-        <a:solidFill>
-          <a:srgbClr val="FFFFFF"/>
-        </a:solidFill>
-        <a:ln>
-          <a:noFill/>
-        </a:ln>
-        <a:effectLst/>
-      </c:spPr>
-    </c:plotArea>
-    <c:legend>
-      <c:legendPos val="b"/>
-      <c:overlay val="0"/>
-      <c:txPr>
-        <a:bodyPr/>
-        <a:lstStyle/>
-        <a:p>
-          <a:pPr>
-            <a:defRPr sz="900">      </a:defRPr>
-          </a:pPr>
-          <a:endParaRPr lang="en-US"/>
-        </a:p>
-      </c:txPr>
-    </c:legend>
-    <c:plotVisOnly val="1"/>
-    <c:dispBlanksAs val="span"/>
-  </c:chart>
-  <c:spPr>
-    <a:noFill/>
-    <a:ln>
-      <a:noFill/>
-    </a:ln>
-    <a:effectLst/>
-  </c:spPr>
-  <c:externalData r:id="rId1">
-    <c:autoUpdate val="0"/>
-  </c:externalData>
-</c:chartSpace>
-</file>
-
-<file path=ppt/charts/chart38.xml><?xml version="1.0" encoding="utf-8"?>
-<c:chartSpace xmlns:c="http://schemas.openxmlformats.org/drawingml/2006/chart" xmlns:a="http://schemas.openxmlformats.org/drawingml/2006/main" xmlns:r="http://schemas.openxmlformats.org/officeDocument/2006/relationships">
-  <c:date1904 val="0"/>
-  <c:roundedCorners val="1"/>
-  <c:chart>
-    <c:autoTitleDeleted val="1"/>
-    <c:plotArea>
-      <c:layout/>
-      <c:barChart>
-        <c:barDir val="bar"/>
-        <c:grouping val="clustered"/>
-        <c:varyColors val="0"/>
-        <c:ser>
-          <c:idx val="0"/>
-          <c:order val="0"/>
-          <c:tx>
-            <c:strRef>
-              <c:f>Sheet1!$B$1</c:f>
-              <c:strCache>
-                <c:ptCount val="1"/>
-                <c:pt idx="0">
-                  <c:v>Today</c:v>
-                </c:pt>
-              </c:strCache>
-            </c:strRef>
-          </c:tx>
-          <c:spPr>
-            <a:solidFill>
-              <a:srgbClr val="86BC25"/>
-            </a:solidFill>
-            <a:effectLst/>
-          </c:spPr>
-          <c:invertIfNegative val="0"/>
-          <c:dLbls>
-            <c:numFmt formatCode="0&quot;%&quot;" sourceLinked="0"/>
-            <c:txPr>
-              <a:bodyPr/>
-              <a:lstStyle/>
-              <a:p>
-                <a:pPr>
-                  <a:defRPr b="0" i="0" strike="noStrike" sz="800" u="none">
-                    <a:solidFill>
-                      <a:srgbClr val="000000"/>
-                    </a:solidFill>
-                    <a:latin typeface="Arial"/>
-                  </a:defRPr>
-                </a:pPr>
-              </a:p>
-            </c:txPr>
-            <c:showLegendKey val="0"/>
-            <c:showVal val="1"/>
-            <c:showCatName val="0"/>
-            <c:showSerName val="0"/>
-            <c:showPercent val="0"/>
-            <c:showBubbleSize val="0"/>
-            <c:showLeaderLines val="0"/>
-          </c:dLbls>
-          <c:cat>
-            <c:multiLvlStrRef>
-              <c:f>Sheet1!$A$2:$A$7</c:f>
-              <c:multiLvlStrCache>
-                <c:ptCount val="6"/>
-                <c:lvl>
-                  <c:pt idx="0">
-                    <c:v>AI-enabled tools</c:v>
-                  </c:pt>
-                  <c:pt idx="1">
-                    <c:v>Automating workflows</c:v>
-                  </c:pt>
-                  <c:pt idx="2">
-                    <c:v>Redesigning processes</c:v>
-                  </c:pt>
-                  <c:pt idx="3">
-                    <c:v>Outsourcing</c:v>
-                  </c:pt>
-                  <c:pt idx="4">
-                    <c:v>Hiring / workforce</c:v>
-                  </c:pt>
-                  <c:pt idx="5">
-                    <c:v>Combination</c:v>
-                  </c:pt>
-                </c:lvl>
-              </c:multiLvlStrCache>
-            </c:multiLvlStrRef>
-          </c:cat>
-          <c:val>
-            <c:numRef>
-              <c:f>Sheet1!$B$2:$B$7</c:f>
-              <c:numCache>
-                <c:formatCode>General</c:formatCode>
-                <c:ptCount val="6"/>
-                <c:pt idx="0">
-                  <c:v>10</c:v>
-                </c:pt>
-                <c:pt idx="1">
-                  <c:v>20</c:v>
-                </c:pt>
-                <c:pt idx="2">
-                  <c:v>20</c:v>
-                </c:pt>
-                <c:pt idx="3">
-                  <c:v>30</c:v>
-                </c:pt>
-                <c:pt idx="4">
-                  <c:v>20</c:v>
-                </c:pt>
-                <c:pt idx="5">
-                  <c:v>0</c:v>
-                </c:pt>
-              </c:numCache>
-            </c:numRef>
-          </c:val>
-        </c:ser>
-        <c:ser>
-          <c:idx val="1"/>
-          <c:order val="1"/>
-          <c:tx>
-            <c:strRef>
-              <c:f>Sheet1!$C$1</c:f>
-              <c:strCache>
-                <c:ptCount val="1"/>
-                <c:pt idx="0">
-                  <c:v>3-Year Focus</c:v>
-                </c:pt>
-              </c:strCache>
-            </c:strRef>
-          </c:tx>
-          <c:spPr>
-            <a:solidFill>
-              <a:srgbClr val="046A38"/>
-            </a:solidFill>
-            <a:effectLst/>
-          </c:spPr>
-          <c:invertIfNegative val="0"/>
-          <c:dLbls>
-            <c:numFmt formatCode="0&quot;%&quot;" sourceLinked="0"/>
-            <c:txPr>
-              <a:bodyPr/>
-              <a:lstStyle/>
-              <a:p>
-                <a:pPr>
-                  <a:defRPr b="0" i="0" strike="noStrike" sz="800" u="none">
-                    <a:solidFill>
-                      <a:srgbClr val="000000"/>
-                    </a:solidFill>
-                    <a:latin typeface="Arial"/>
-                  </a:defRPr>
-                </a:pPr>
-              </a:p>
-            </c:txPr>
-            <c:showLegendKey val="0"/>
-            <c:showVal val="1"/>
-            <c:showCatName val="0"/>
-            <c:showSerName val="0"/>
-            <c:showPercent val="0"/>
-            <c:showBubbleSize val="0"/>
-            <c:showLeaderLines val="0"/>
-          </c:dLbls>
-          <c:cat>
-            <c:multiLvlStrRef>
-              <c:f>Sheet1!$A$2:$A$7</c:f>
-              <c:multiLvlStrCache>
-                <c:ptCount val="6"/>
-                <c:lvl>
-                  <c:pt idx="0">
-                    <c:v>AI-enabled tools</c:v>
-                  </c:pt>
-                  <c:pt idx="1">
-                    <c:v>Automating workflows</c:v>
-                  </c:pt>
-                  <c:pt idx="2">
-                    <c:v>Redesigning processes</c:v>
-                  </c:pt>
-                  <c:pt idx="3">
-                    <c:v>Outsourcing</c:v>
-                  </c:pt>
-                  <c:pt idx="4">
-                    <c:v>Hiring / workforce</c:v>
-                  </c:pt>
-                  <c:pt idx="5">
-                    <c:v>Combination</c:v>
-                  </c:pt>
-                </c:lvl>
-              </c:multiLvlStrCache>
-            </c:multiLvlStrRef>
-          </c:cat>
-          <c:val>
-            <c:numRef>
-              <c:f>Sheet1!$C$2:$C$7</c:f>
-              <c:numCache>
-                <c:formatCode>General</c:formatCode>
-                <c:ptCount val="6"/>
-                <c:pt idx="0">
-                  <c:v>40</c:v>
-                </c:pt>
-                <c:pt idx="1">
-                  <c:v>30</c:v>
-                </c:pt>
-                <c:pt idx="2">
-                  <c:v>20</c:v>
-                </c:pt>
-                <c:pt idx="3">
-                  <c:v>0</c:v>
-                </c:pt>
-                <c:pt idx="4">
-                  <c:v>10</c:v>
-                </c:pt>
-                <c:pt idx="5">
-                  <c:v>0</c:v>
-                </c:pt>
-              </c:numCache>
-            </c:numRef>
-          </c:val>
-        </c:ser>
-        <c:dLbls>
-          <c:numFmt formatCode="0&quot;%&quot;" sourceLinked="0"/>
-          <c:txPr>
-            <a:bodyPr/>
-            <a:lstStyle/>
-            <a:p>
-              <a:pPr>
-                <a:defRPr b="0" i="0" strike="noStrike" sz="800" u="none">
-                  <a:solidFill>
-                    <a:srgbClr val="000000"/>
-                  </a:solidFill>
-                  <a:latin typeface="Arial"/>
-                </a:defRPr>
-              </a:pPr>
-            </a:p>
-          </c:txPr>
-          <c:showLegendKey val="0"/>
-          <c:showVal val="1"/>
-          <c:showCatName val="0"/>
-          <c:showSerName val="0"/>
-          <c:showPercent val="0"/>
-          <c:showBubbleSize val="0"/>
-          <c:showLeaderLines val="0"/>
-        </c:dLbls>
-        <c:gapWidth val="40"/>
-        <c:overlap val="0"/>
-        <c:axId val="2094734554"/>
-        <c:axId val="2094734552"/>
-        <c:axId val="2094734556"/>
-      </c:barChart>
-      <c:catAx>
-        <c:axId val="2094734554"/>
-        <c:scaling>
-          <c:orientation val="minMax"/>
-        </c:scaling>
-        <c:delete val="0"/>
-        <c:axPos val="l"/>
-        <c:numFmt formatCode="General" sourceLinked="1"/>
-        <c:majorTickMark val="out"/>
-        <c:minorTickMark val="none"/>
-        <c:tickLblPos val="nextTo"/>
-        <c:spPr>
-          <a:ln w="12700" cap="flat">
-            <a:noFill/>
-            <a:prstDash val="solid"/>
-            <a:round/>
-          </a:ln>
-        </c:spPr>
-        <c:txPr>
-          <a:bodyPr/>
-          <a:lstStyle/>
-          <a:p>
-            <a:pPr>
-              <a:defRPr sz="1000" b="0" i="0" u="none" strike="noStrike">
-                <a:solidFill>
-                  <a:srgbClr val="53565A"/>
-                </a:solidFill>
-                <a:latin typeface="Arial"/>
-              </a:defRPr>
-            </a:pPr>
-            <a:endParaRPr lang="en-US"/>
-          </a:p>
-        </c:txPr>
-        <c:crossAx val="2094734552"/>
-        <c:crosses val="autoZero"/>
-        <c:auto val="1"/>
-        <c:lblAlgn val="ctr"/>
-        <c:noMultiLvlLbl val="1"/>
-      </c:catAx>
-      <c:valAx>
-        <c:axId val="2094734552"/>
-        <c:scaling>
-          <c:orientation val="minMax"/>
-        </c:scaling>
-        <c:delete val="1"/>
-        <c:axPos val="b"/>
-        <c:numFmt formatCode="General" sourceLinked="0"/>
-        <c:majorTickMark val="out"/>
-        <c:minorTickMark val="none"/>
-        <c:tickLblPos val="low"/>
-        <c:spPr>
-          <a:ln w="12700" cap="flat">
-            <a:noFill/>
-            <a:prstDash val="solid"/>
-            <a:round/>
-          </a:ln>
-        </c:spPr>
-        <c:txPr>
-          <a:bodyPr/>
-          <a:lstStyle/>
-          <a:p>
-            <a:pPr>
-              <a:defRPr sz="1200" b="0" i="0" u="none" strike="noStrike">
-                <a:solidFill>
-                  <a:srgbClr val="000000"/>
-                </a:solidFill>
-                <a:latin typeface="Arial"/>
-              </a:defRPr>
-            </a:pPr>
-            <a:endParaRPr lang="en-US"/>
-          </a:p>
-        </c:txPr>
-        <c:crossAx val="2094734554"/>
-        <c:crosses val="autoZero"/>
-        <c:crossBetween val="between"/>
-      </c:valAx>
-      <c:spPr>
-        <a:solidFill>
-          <a:srgbClr val="FFFFFF"/>
-        </a:solidFill>
-        <a:ln>
-          <a:noFill/>
-        </a:ln>
-        <a:effectLst/>
-      </c:spPr>
-    </c:plotArea>
-    <c:legend>
-      <c:legendPos val="b"/>
-      <c:overlay val="0"/>
-      <c:txPr>
-        <a:bodyPr/>
-        <a:lstStyle/>
-        <a:p>
-          <a:pPr>
-            <a:defRPr sz="900">      </a:defRPr>
-          </a:pPr>
-          <a:endParaRPr lang="en-US"/>
-        </a:p>
-      </c:txPr>
-    </c:legend>
-    <c:plotVisOnly val="1"/>
-    <c:dispBlanksAs val="span"/>
-  </c:chart>
-  <c:spPr>
-    <a:noFill/>
-    <a:ln>
-      <a:noFill/>
-    </a:ln>
-    <a:effectLst/>
-  </c:spPr>
-  <c:externalData r:id="rId1">
-    <c:autoUpdate val="0"/>
-  </c:externalData>
-</c:chartSpace>
-</file>
-
-<file path=ppt/charts/chart39.xml><?xml version="1.0" encoding="utf-8"?>
-<c:chartSpace xmlns:c="http://schemas.openxmlformats.org/drawingml/2006/chart" xmlns:a="http://schemas.openxmlformats.org/drawingml/2006/main" xmlns:r="http://schemas.openxmlformats.org/officeDocument/2006/relationships">
-  <c:date1904 val="0"/>
-  <c:roundedCorners val="1"/>
-  <c:chart>
-    <c:autoTitleDeleted val="1"/>
-    <c:plotArea>
-      <c:layout/>
-      <c:barChart>
-        <c:barDir val="bar"/>
-        <c:grouping val="stacked"/>
-        <c:varyColors val="0"/>
-        <c:ser>
-          <c:idx val="0"/>
-          <c:order val="0"/>
-          <c:tx>
-            <c:strRef>
-              <c:f>Sheet1!$B$1</c:f>
-              <c:strCache>
-                <c:ptCount val="1"/>
-                <c:pt idx="0">
-                  <c:v>United States</c:v>
-                </c:pt>
-              </c:strCache>
-            </c:strRef>
-          </c:tx>
-          <c:spPr>
-            <a:solidFill>
-              <a:srgbClr val="86BC25"/>
-            </a:solidFill>
-            <a:effectLst/>
-          </c:spPr>
-          <c:invertIfNegative val="0"/>
-          <c:dLbls>
-            <c:numFmt formatCode="0&quot;%&quot;;-0&quot;%&quot;;;@" sourceLinked="0"/>
-            <c:txPr>
-              <a:bodyPr/>
-              <a:lstStyle/>
-              <a:p>
-                <a:pPr>
-                  <a:defRPr b="0" i="0" strike="noStrike" sz="650" u="none">
-                    <a:solidFill>
-                      <a:srgbClr val="FFFFFF"/>
-                    </a:solidFill>
-                    <a:latin typeface="Arial"/>
-                  </a:defRPr>
-                </a:pPr>
-              </a:p>
-            </c:txPr>
-            <c:dLblPos val="ctr"/>
-            <c:showLegendKey val="0"/>
-            <c:showVal val="1"/>
-            <c:showCatName val="0"/>
-            <c:showSerName val="0"/>
-            <c:showPercent val="0"/>
-            <c:showBubbleSize val="0"/>
-            <c:showLeaderLines val="0"/>
-          </c:dLbls>
-          <c:cat>
-            <c:multiLvlStrRef>
-              <c:f>Sheet1!$A$2:$A$13</c:f>
-              <c:multiLvlStrCache>
-                <c:ptCount val="12"/>
-                <c:lvl>
-                  <c:pt idx="0">
-                    <c:v>AI-enabled tools — Top 50 (47%)</c:v>
-                  </c:pt>
-                  <c:pt idx="1">
-                    <c:v>AI-enabled tools — Large (10%)</c:v>
-                  </c:pt>
-                  <c:pt idx="2">
-                    <c:v>Automating workflows — Top 50 (33%)</c:v>
-                  </c:pt>
-                  <c:pt idx="3">
-                    <c:v>Automating workflows — Large (20%)</c:v>
-                  </c:pt>
-                  <c:pt idx="4">
-                    <c:v>Redesigning processes — Top 50 (7%)</c:v>
-                  </c:pt>
-                  <c:pt idx="5">
-                    <c:v>Redesigning processes — Large (20%)</c:v>
-                  </c:pt>
-                  <c:pt idx="6">
-                    <c:v>Outsourcing — Top 50 (7%)</c:v>
-                  </c:pt>
-                  <c:pt idx="7">
-                    <c:v>Outsourcing — Large (30%)</c:v>
-                  </c:pt>
-                  <c:pt idx="8">
-                    <c:v>Hiring / workforce — Top 50 (7%)</c:v>
-                  </c:pt>
-                  <c:pt idx="9">
-                    <c:v>Hiring / workforce — Large (20%)</c:v>
-                  </c:pt>
-                  <c:pt idx="10">
-                    <c:v>Combination — Top 50 (0%)</c:v>
-                  </c:pt>
-                  <c:pt idx="11">
-                    <c:v>Combination — Large (0%)</c:v>
-                  </c:pt>
-                </c:lvl>
-              </c:multiLvlStrCache>
-            </c:multiLvlStrRef>
-          </c:cat>
-          <c:val>
-            <c:numRef>
-              <c:f>Sheet1!$B$2:$B$13</c:f>
-              <c:numCache>
-                <c:formatCode>General</c:formatCode>
-                <c:ptCount val="12"/>
-                <c:pt idx="0">
-                  <c:v>20</c:v>
-                </c:pt>
-                <c:pt idx="1">
-                  <c:v>0</c:v>
-                </c:pt>
-                <c:pt idx="2">
-                  <c:v>27</c:v>
-                </c:pt>
-                <c:pt idx="3">
-                  <c:v>0</c:v>
-                </c:pt>
-                <c:pt idx="4">
-                  <c:v>0</c:v>
-                </c:pt>
-                <c:pt idx="5">
-                  <c:v>20</c:v>
-                </c:pt>
-                <c:pt idx="6">
-                  <c:v>0</c:v>
-                </c:pt>
-                <c:pt idx="7">
-                  <c:v>0</c:v>
-                </c:pt>
-                <c:pt idx="8">
-                  <c:v>0</c:v>
-                </c:pt>
-                <c:pt idx="9">
-                  <c:v>10</c:v>
-                </c:pt>
-                <c:pt idx="10">
-                  <c:v>0</c:v>
-                </c:pt>
-                <c:pt idx="11">
-                  <c:v>0</c:v>
-                </c:pt>
-              </c:numCache>
-            </c:numRef>
-          </c:val>
-        </c:ser>
-        <c:ser>
-          <c:idx val="1"/>
-          <c:order val="1"/>
-          <c:tx>
-            <c:strRef>
-              <c:f>Sheet1!$C$1</c:f>
-              <c:strCache>
-                <c:ptCount val="1"/>
-                <c:pt idx="0">
-                  <c:v>Canada</c:v>
-                </c:pt>
-              </c:strCache>
-            </c:strRef>
-          </c:tx>
-          <c:spPr>
-            <a:solidFill>
-              <a:srgbClr val="43B02A"/>
-            </a:solidFill>
-            <a:effectLst/>
-          </c:spPr>
-          <c:invertIfNegative val="0"/>
-          <c:dLbls>
-            <c:numFmt formatCode="0&quot;%&quot;;-0&quot;%&quot;;;@" sourceLinked="0"/>
-            <c:txPr>
-              <a:bodyPr/>
-              <a:lstStyle/>
-              <a:p>
-                <a:pPr>
-                  <a:defRPr b="0" i="0" strike="noStrike" sz="650" u="none">
-                    <a:solidFill>
-                      <a:srgbClr val="FFFFFF"/>
-                    </a:solidFill>
-                    <a:latin typeface="Arial"/>
-                  </a:defRPr>
-                </a:pPr>
-              </a:p>
-            </c:txPr>
-            <c:dLblPos val="ctr"/>
-            <c:showLegendKey val="0"/>
-            <c:showVal val="1"/>
-            <c:showCatName val="0"/>
-            <c:showSerName val="0"/>
-            <c:showPercent val="0"/>
-            <c:showBubbleSize val="0"/>
-            <c:showLeaderLines val="0"/>
-          </c:dLbls>
-          <c:cat>
-            <c:multiLvlStrRef>
-              <c:f>Sheet1!$A$2:$A$13</c:f>
-              <c:multiLvlStrCache>
-                <c:ptCount val="12"/>
-                <c:lvl>
-                  <c:pt idx="0">
-                    <c:v>AI-enabled tools — Top 50 (47%)</c:v>
-                  </c:pt>
-                  <c:pt idx="1">
-                    <c:v>AI-enabled tools — Large (10%)</c:v>
-                  </c:pt>
-                  <c:pt idx="2">
-                    <c:v>Automating workflows — Top 50 (33%)</c:v>
-                  </c:pt>
-                  <c:pt idx="3">
-                    <c:v>Automating workflows — Large (20%)</c:v>
-                  </c:pt>
-                  <c:pt idx="4">
-                    <c:v>Redesigning processes — Top 50 (7%)</c:v>
-                  </c:pt>
-                  <c:pt idx="5">
-                    <c:v>Redesigning processes — Large (20%)</c:v>
-                  </c:pt>
-                  <c:pt idx="6">
-                    <c:v>Outsourcing — Top 50 (7%)</c:v>
-                  </c:pt>
-                  <c:pt idx="7">
-                    <c:v>Outsourcing — Large (30%)</c:v>
-                  </c:pt>
-                  <c:pt idx="8">
-                    <c:v>Hiring / workforce — Top 50 (7%)</c:v>
-                  </c:pt>
-                  <c:pt idx="9">
-                    <c:v>Hiring / workforce — Large (20%)</c:v>
-                  </c:pt>
-                  <c:pt idx="10">
-                    <c:v>Combination — Top 50 (0%)</c:v>
-                  </c:pt>
-                  <c:pt idx="11">
-                    <c:v>Combination — Large (0%)</c:v>
-                  </c:pt>
-                </c:lvl>
-              </c:multiLvlStrCache>
-            </c:multiLvlStrRef>
-          </c:cat>
-          <c:val>
-            <c:numRef>
-              <c:f>Sheet1!$C$2:$C$13</c:f>
-              <c:numCache>
-                <c:formatCode>General</c:formatCode>
-                <c:ptCount val="12"/>
-                <c:pt idx="0">
-                  <c:v>20</c:v>
-                </c:pt>
-                <c:pt idx="1">
-                  <c:v>10</c:v>
-                </c:pt>
-                <c:pt idx="2">
-                  <c:v>7</c:v>
-                </c:pt>
-                <c:pt idx="3">
-                  <c:v>20</c:v>
-                </c:pt>
-                <c:pt idx="4">
-                  <c:v>7</c:v>
-                </c:pt>
-                <c:pt idx="5">
-                  <c:v>0</c:v>
-                </c:pt>
-                <c:pt idx="6">
-                  <c:v>7</c:v>
-                </c:pt>
-                <c:pt idx="7">
-                  <c:v>20</c:v>
-                </c:pt>
-                <c:pt idx="8">
-                  <c:v>0</c:v>
-                </c:pt>
-                <c:pt idx="9">
-                  <c:v>10</c:v>
-                </c:pt>
-                <c:pt idx="10">
-                  <c:v>0</c:v>
-                </c:pt>
-                <c:pt idx="11">
-                  <c:v>0</c:v>
-                </c:pt>
-              </c:numCache>
-            </c:numRef>
-          </c:val>
-        </c:ser>
-        <c:ser>
-          <c:idx val="2"/>
-          <c:order val="2"/>
-          <c:tx>
-            <c:strRef>
-              <c:f>Sheet1!$D$1</c:f>
-              <c:strCache>
-                <c:ptCount val="1"/>
-                <c:pt idx="0">
-                  <c:v>Europe (EU + UK)</c:v>
-                </c:pt>
-              </c:strCache>
-            </c:strRef>
-          </c:tx>
-          <c:spPr>
-            <a:solidFill>
-              <a:srgbClr val="046A38"/>
-            </a:solidFill>
-            <a:effectLst/>
-          </c:spPr>
-          <c:invertIfNegative val="0"/>
-          <c:dLbls>
-            <c:numFmt formatCode="0&quot;%&quot;;-0&quot;%&quot;;;@" sourceLinked="0"/>
-            <c:txPr>
-              <a:bodyPr/>
-              <a:lstStyle/>
-              <a:p>
-                <a:pPr>
-                  <a:defRPr b="0" i="0" strike="noStrike" sz="650" u="none">
-                    <a:solidFill>
-                      <a:srgbClr val="FFFFFF"/>
-                    </a:solidFill>
-                    <a:latin typeface="Arial"/>
-                  </a:defRPr>
-                </a:pPr>
-              </a:p>
-            </c:txPr>
-            <c:dLblPos val="ctr"/>
-            <c:showLegendKey val="0"/>
-            <c:showVal val="1"/>
-            <c:showCatName val="0"/>
-            <c:showSerName val="0"/>
-            <c:showPercent val="0"/>
-            <c:showBubbleSize val="0"/>
-            <c:showLeaderLines val="0"/>
-          </c:dLbls>
-          <c:cat>
-            <c:multiLvlStrRef>
-              <c:f>Sheet1!$A$2:$A$13</c:f>
-              <c:multiLvlStrCache>
-                <c:ptCount val="12"/>
-                <c:lvl>
-                  <c:pt idx="0">
-                    <c:v>AI-enabled tools — Top 50 (47%)</c:v>
-                  </c:pt>
-                  <c:pt idx="1">
-                    <c:v>AI-enabled tools — Large (10%)</c:v>
-                  </c:pt>
-                  <c:pt idx="2">
-                    <c:v>Automating workflows — Top 50 (33%)</c:v>
-                  </c:pt>
-                  <c:pt idx="3">
-                    <c:v>Automating workflows — Large (20%)</c:v>
-                  </c:pt>
-                  <c:pt idx="4">
-                    <c:v>Redesigning processes — Top 50 (7%)</c:v>
-                  </c:pt>
-                  <c:pt idx="5">
-                    <c:v>Redesigning processes — Large (20%)</c:v>
-                  </c:pt>
-                  <c:pt idx="6">
-                    <c:v>Outsourcing — Top 50 (7%)</c:v>
-                  </c:pt>
-                  <c:pt idx="7">
-                    <c:v>Outsourcing — Large (30%)</c:v>
-                  </c:pt>
-                  <c:pt idx="8">
-                    <c:v>Hiring / workforce — Top 50 (7%)</c:v>
-                  </c:pt>
-                  <c:pt idx="9">
-                    <c:v>Hiring / workforce — Large (20%)</c:v>
-                  </c:pt>
-                  <c:pt idx="10">
-                    <c:v>Combination — Top 50 (0%)</c:v>
-                  </c:pt>
-                  <c:pt idx="11">
-                    <c:v>Combination — Large (0%)</c:v>
-                  </c:pt>
-                </c:lvl>
-              </c:multiLvlStrCache>
-            </c:multiLvlStrRef>
-          </c:cat>
-          <c:val>
-            <c:numRef>
-              <c:f>Sheet1!$D$2:$D$13</c:f>
-              <c:numCache>
-                <c:formatCode>General</c:formatCode>
-                <c:ptCount val="12"/>
-                <c:pt idx="0">
-                  <c:v>7</c:v>
-                </c:pt>
-                <c:pt idx="1">
-                  <c:v>0</c:v>
-                </c:pt>
-                <c:pt idx="2">
-                  <c:v>0</c:v>
-                </c:pt>
-                <c:pt idx="3">
-                  <c:v>0</c:v>
-                </c:pt>
-                <c:pt idx="4">
-                  <c:v>0</c:v>
-                </c:pt>
-                <c:pt idx="5">
-                  <c:v>0</c:v>
-                </c:pt>
-                <c:pt idx="6">
-                  <c:v>0</c:v>
-                </c:pt>
-                <c:pt idx="7">
-                  <c:v>10</c:v>
-                </c:pt>
-                <c:pt idx="8">
-                  <c:v>0</c:v>
-                </c:pt>
-                <c:pt idx="9">
-                  <c:v>0</c:v>
-                </c:pt>
-                <c:pt idx="10">
-                  <c:v>0</c:v>
-                </c:pt>
-                <c:pt idx="11">
-                  <c:v>0</c:v>
-                </c:pt>
-              </c:numCache>
-            </c:numRef>
-          </c:val>
-        </c:ser>
-        <c:ser>
-          <c:idx val="3"/>
-          <c:order val="3"/>
-          <c:tx>
-            <c:strRef>
-              <c:f>Sheet1!$E$1</c:f>
-              <c:strCache>
-                <c:ptCount val="1"/>
-                <c:pt idx="0">
-                  <c:v>Australia</c:v>
-                </c:pt>
-              </c:strCache>
-            </c:strRef>
-          </c:tx>
-          <c:spPr>
-            <a:solidFill>
-              <a:srgbClr val="0D8390"/>
-            </a:solidFill>
-            <a:effectLst/>
-          </c:spPr>
-          <c:invertIfNegative val="0"/>
-          <c:dLbls>
-            <c:numFmt formatCode="0&quot;%&quot;;-0&quot;%&quot;;;@" sourceLinked="0"/>
-            <c:txPr>
-              <a:bodyPr/>
-              <a:lstStyle/>
-              <a:p>
-                <a:pPr>
-                  <a:defRPr b="0" i="0" strike="noStrike" sz="650" u="none">
-                    <a:solidFill>
-                      <a:srgbClr val="FFFFFF"/>
-                    </a:solidFill>
-                    <a:latin typeface="Arial"/>
-                  </a:defRPr>
-                </a:pPr>
-              </a:p>
-            </c:txPr>
-            <c:dLblPos val="ctr"/>
-            <c:showLegendKey val="0"/>
-            <c:showVal val="1"/>
-            <c:showCatName val="0"/>
-            <c:showSerName val="0"/>
-            <c:showPercent val="0"/>
-            <c:showBubbleSize val="0"/>
-            <c:showLeaderLines val="0"/>
-          </c:dLbls>
-          <c:cat>
-            <c:multiLvlStrRef>
-              <c:f>Sheet1!$A$2:$A$13</c:f>
-              <c:multiLvlStrCache>
-                <c:ptCount val="12"/>
-                <c:lvl>
-                  <c:pt idx="0">
-                    <c:v>AI-enabled tools — Top 50 (47%)</c:v>
-                  </c:pt>
-                  <c:pt idx="1">
-                    <c:v>AI-enabled tools — Large (10%)</c:v>
-                  </c:pt>
-                  <c:pt idx="2">
-                    <c:v>Automating workflows — Top 50 (33%)</c:v>
-                  </c:pt>
-                  <c:pt idx="3">
-                    <c:v>Automating workflows — Large (20%)</c:v>
-                  </c:pt>
-                  <c:pt idx="4">
-                    <c:v>Redesigning processes — Top 50 (7%)</c:v>
-                  </c:pt>
-                  <c:pt idx="5">
-                    <c:v>Redesigning processes — Large (20%)</c:v>
-                  </c:pt>
-                  <c:pt idx="6">
-                    <c:v>Outsourcing — Top 50 (7%)</c:v>
-                  </c:pt>
-                  <c:pt idx="7">
-                    <c:v>Outsourcing — Large (30%)</c:v>
-                  </c:pt>
-                  <c:pt idx="8">
-                    <c:v>Hiring / workforce — Top 50 (7%)</c:v>
-                  </c:pt>
-                  <c:pt idx="9">
-                    <c:v>Hiring / workforce — Large (20%)</c:v>
-                  </c:pt>
-                  <c:pt idx="10">
-                    <c:v>Combination — Top 50 (0%)</c:v>
-                  </c:pt>
-                  <c:pt idx="11">
-                    <c:v>Combination — Large (0%)</c:v>
-                  </c:pt>
-                </c:lvl>
-              </c:multiLvlStrCache>
-            </c:multiLvlStrRef>
-          </c:cat>
-          <c:val>
-            <c:numRef>
-              <c:f>Sheet1!$E$2:$E$13</c:f>
-              <c:numCache>
-                <c:formatCode>General</c:formatCode>
-                <c:ptCount val="12"/>
-                <c:pt idx="0">
-                  <c:v>0</c:v>
-                </c:pt>
-                <c:pt idx="1">
-                  <c:v>0</c:v>
-                </c:pt>
-                <c:pt idx="2">
-                  <c:v>0</c:v>
-                </c:pt>
-                <c:pt idx="3">
-                  <c:v>0</c:v>
-                </c:pt>
-                <c:pt idx="4">
-                  <c:v>0</c:v>
-                </c:pt>
-                <c:pt idx="5">
-                  <c:v>0</c:v>
-                </c:pt>
-                <c:pt idx="6">
-                  <c:v>0</c:v>
-                </c:pt>
-                <c:pt idx="7">
-                  <c:v>0</c:v>
-                </c:pt>
-                <c:pt idx="8">
-                  <c:v>7</c:v>
-                </c:pt>
-                <c:pt idx="9">
-                  <c:v>0</c:v>
-                </c:pt>
-                <c:pt idx="10">
-                  <c:v>0</c:v>
-                </c:pt>
-                <c:pt idx="11">
-                  <c:v>0</c:v>
-                </c:pt>
-              </c:numCache>
-            </c:numRef>
-          </c:val>
-        </c:ser>
-        <c:dLbls>
-          <c:numFmt formatCode="0&quot;%&quot;;-0&quot;%&quot;;;@" sourceLinked="0"/>
-          <c:txPr>
-            <a:bodyPr/>
-            <a:lstStyle/>
-            <a:p>
-              <a:pPr>
-                <a:defRPr b="0" i="0" strike="noStrike" sz="650" u="none">
-                  <a:solidFill>
-                    <a:srgbClr val="FFFFFF"/>
-                  </a:solidFill>
-                  <a:latin typeface="Arial"/>
-                </a:defRPr>
-              </a:pPr>
-            </a:p>
-          </c:txPr>
-          <c:dLblPos val="ctr"/>
-          <c:showLegendKey val="0"/>
-          <c:showVal val="1"/>
-          <c:showCatName val="0"/>
-          <c:showSerName val="0"/>
-          <c:showPercent val="0"/>
-          <c:showBubbleSize val="0"/>
-          <c:showLeaderLines val="0"/>
-        </c:dLbls>
-        <c:gapWidth val="40"/>
-        <c:overlap val="100"/>
-        <c:axId val="2094734554"/>
-        <c:axId val="2094734552"/>
-        <c:axId val="2094734556"/>
-      </c:barChart>
-      